--- a/reports/발표자료.pptx
+++ b/reports/발표자료.pptx
@@ -18,6 +18,8 @@
     <p:sldId id="266" r:id="rId17"/>
     <p:sldId id="267" r:id="rId18"/>
     <p:sldId id="268" r:id="rId19"/>
+    <p:sldId id="269" r:id="rId20"/>
+    <p:sldId id="270" r:id="rId21"/>
   </p:sldIdLst>
   <p:sldSz cx="12191695" cy="6858000" type="screen4x3"/>
   <p:notesSz cx="6858000" cy="9144000"/>
@@ -3226,7 +3228,7 @@
                 </a:solidFill>
                 <a:latin typeface="Malgun Gothic"/>
               </a:rPr>
-              <a:t>8. 가설 검정 종합</a:t>
+              <a:t>7. 가설 H4 — 양적 팽창의 함정 ★</a:t>
             </a:r>
           </a:p>
         </p:txBody>
@@ -3274,16 +3276,40 @@
           </a:p>
         </p:txBody>
       </p:sp>
-      <p:sp>
-        <p:nvSpPr>
-          <p:cNvPr id="4" name="TextBox 3"/>
+      <p:pic>
+        <p:nvPicPr>
+          <p:cNvPr id="4" name="Picture 3" descr="fig8_lawyer_trend.png"/>
+          <p:cNvPicPr>
+            <a:picLocks noChangeAspect="1"/>
+          </p:cNvPicPr>
+          <p:nvPr/>
+        </p:nvPicPr>
+        <p:blipFill>
+          <a:blip r:embed="rId2"/>
+          <a:stretch>
+            <a:fillRect/>
+          </a:stretch>
+        </p:blipFill>
+        <p:spPr>
+          <a:xfrm>
+            <a:off x="457200" y="1554480"/>
+            <a:ext cx="7701678" cy="4480560"/>
+          </a:xfrm>
+          <a:prstGeom prst="rect">
+            <a:avLst/>
+          </a:prstGeom>
+        </p:spPr>
+      </p:pic>
+      <p:sp>
+        <p:nvSpPr>
+          <p:cNvPr id="5" name="TextBox 4"/>
           <p:cNvSpPr txBox="1"/>
           <p:nvPr/>
         </p:nvSpPr>
         <p:spPr>
           <a:xfrm>
-            <a:off x="640080" y="1554480"/>
-            <a:ext cx="10972800" cy="4937760"/>
+            <a:off x="7680960" y="1737360"/>
+            <a:ext cx="4297680" cy="4937760"/>
           </a:xfrm>
           <a:prstGeom prst="rect">
             <a:avLst/>
@@ -3298,81 +3324,97 @@
           <a:p>
             <a:pPr>
               <a:spcAft>
-                <a:spcPts val="1000"/>
-              </a:spcAft>
-            </a:pPr>
-            <a:r>
-              <a:rPr sz="2000">
-                <a:solidFill>
-                  <a:srgbClr val="222222"/>
-                </a:solidFill>
-                <a:latin typeface="Malgun Gothic"/>
-              </a:rPr>
-              <a:t>• H2 ✅ 강하게 지지 — corr(A1,A2) = −0.84~−0.88 (p&lt;0.01)</a:t>
+                <a:spcPts val="900"/>
+              </a:spcAft>
+            </a:pPr>
+            <a:r>
+              <a:rPr sz="1800">
+                <a:solidFill>
+                  <a:srgbClr val="222222"/>
+                </a:solidFill>
+                <a:latin typeface="Malgun Gothic"/>
+              </a:rPr>
+              <a:t>• 변호사 3.4배↑</a:t>
+            </a:r>
+          </a:p>
+          <a:p>
+            <a:pPr lvl="1">
+              <a:spcAft>
+                <a:spcPts val="900"/>
+              </a:spcAft>
+            </a:pPr>
+            <a:r>
+              <a:rPr sz="1500">
+                <a:solidFill>
+                  <a:srgbClr val="222222"/>
+                </a:solidFill>
+                <a:latin typeface="Malgun Gothic"/>
+              </a:rPr>
+              <a:t>– 9,612 → 32,273명 (2009→2026)</a:t>
             </a:r>
           </a:p>
           <a:p>
             <a:pPr>
               <a:spcAft>
-                <a:spcPts val="1000"/>
-              </a:spcAft>
-            </a:pPr>
-            <a:r>
-              <a:rPr sz="2000">
-                <a:solidFill>
-                  <a:srgbClr val="222222"/>
-                </a:solidFill>
-                <a:latin typeface="Malgun Gothic"/>
-              </a:rPr>
-              <a:t>• H4 ✅ 지지 — 변호사 3.4배↑에도 서울 집중 심화 + 법률구조 격차 확대</a:t>
+                <a:spcPts val="900"/>
+              </a:spcAft>
+            </a:pPr>
+            <a:r>
+              <a:rPr sz="1800">
+                <a:solidFill>
+                  <a:srgbClr val="222222"/>
+                </a:solidFill>
+                <a:latin typeface="Malgun Gothic"/>
+              </a:rPr>
+              <a:t>• 그런데 서울 비중 71%→76%↑</a:t>
+            </a:r>
+          </a:p>
+          <a:p>
+            <a:pPr lvl="1">
+              <a:spcAft>
+                <a:spcPts val="900"/>
+              </a:spcAft>
+            </a:pPr>
+            <a:r>
+              <a:rPr sz="1500">
+                <a:solidFill>
+                  <a:srgbClr val="222222"/>
+                </a:solidFill>
+                <a:latin typeface="Malgun Gothic"/>
+              </a:rPr>
+              <a:t>– 비수도권 全 권역 비중 하락</a:t>
             </a:r>
           </a:p>
           <a:p>
             <a:pPr>
               <a:spcAft>
-                <a:spcPts val="1000"/>
-              </a:spcAft>
-            </a:pPr>
-            <a:r>
-              <a:rPr sz="2000">
-                <a:solidFill>
-                  <a:srgbClr val="222222"/>
-                </a:solidFill>
-                <a:latin typeface="Malgun Gothic"/>
-              </a:rPr>
-              <a:t>• H1 △ 방향만 일치 — 수도권 1인당 인구 4,039 &lt; 비수도권 5,250 (p=0.19)</a:t>
+                <a:spcPts val="900"/>
+              </a:spcAft>
+            </a:pPr>
+            <a:r>
+              <a:rPr sz="1800">
+                <a:solidFill>
+                  <a:srgbClr val="222222"/>
+                </a:solidFill>
+                <a:latin typeface="Malgun Gothic"/>
+              </a:rPr>
+              <a:t>• HHI 0.53→0.60 (집중 심화)</a:t>
             </a:r>
           </a:p>
           <a:p>
             <a:pPr>
               <a:spcAft>
-                <a:spcPts val="1000"/>
-              </a:spcAft>
-            </a:pPr>
-            <a:r>
-              <a:rPr sz="2000">
-                <a:solidFill>
-                  <a:srgbClr val="222222"/>
-                </a:solidFill>
-                <a:latin typeface="Malgun Gothic"/>
-              </a:rPr>
-              <a:t>• H3 △ 약함 — GRDP와 접근성 상관 비유의</a:t>
-            </a:r>
-          </a:p>
-          <a:p>
-            <a:pPr lvl="1">
-              <a:spcAft>
-                <a:spcPts val="1000"/>
-              </a:spcAft>
-            </a:pPr>
-            <a:r>
-              <a:rPr sz="1700">
-                <a:solidFill>
-                  <a:srgbClr val="222222"/>
-                </a:solidFill>
-                <a:latin typeface="Malgun Gothic"/>
-              </a:rPr>
-              <a:t>– 표본 작음(권역 10~13개) → 검정력 한계 명시</a:t>
+                <a:spcPts val="900"/>
+              </a:spcAft>
+            </a:pPr>
+            <a:r>
+              <a:rPr sz="1800">
+                <a:solidFill>
+                  <a:srgbClr val="222222"/>
+                </a:solidFill>
+                <a:latin typeface="Malgun Gothic"/>
+              </a:rPr>
+              <a:t>• → 늘어난 변호사는 서울로</a:t>
             </a:r>
           </a:p>
         </p:txBody>
@@ -3424,7 +3466,7 @@
                 </a:solidFill>
                 <a:latin typeface="Malgun Gothic"/>
               </a:rPr>
-              <a:t>9. 결론 · 정책 시사점</a:t>
+              <a:t>8. 심화 — 서울을 빼고 보면</a:t>
             </a:r>
           </a:p>
         </p:txBody>
@@ -3472,16 +3514,40 @@
           </a:p>
         </p:txBody>
       </p:sp>
-      <p:sp>
-        <p:nvSpPr>
-          <p:cNvPr id="4" name="TextBox 3"/>
+      <p:pic>
+        <p:nvPicPr>
+          <p:cNvPr id="4" name="Picture 3" descr="fig7_map_region13_exseoul.png"/>
+          <p:cNvPicPr>
+            <a:picLocks noChangeAspect="1"/>
+          </p:cNvPicPr>
+          <p:nvPr/>
+        </p:nvPicPr>
+        <p:blipFill>
+          <a:blip r:embed="rId2"/>
+          <a:stretch>
+            <a:fillRect/>
+          </a:stretch>
+        </p:blipFill>
+        <p:spPr>
+          <a:xfrm>
+            <a:off x="365760" y="1463040"/>
+            <a:ext cx="5967722" cy="4937760"/>
+          </a:xfrm>
+          <a:prstGeom prst="rect">
+            <a:avLst/>
+          </a:prstGeom>
+        </p:spPr>
+      </p:pic>
+      <p:sp>
+        <p:nvSpPr>
+          <p:cNvPr id="5" name="TextBox 4"/>
           <p:cNvSpPr txBox="1"/>
           <p:nvPr/>
         </p:nvSpPr>
         <p:spPr>
           <a:xfrm>
-            <a:off x="640080" y="1554480"/>
-            <a:ext cx="10972800" cy="4937760"/>
+            <a:off x="7040880" y="1828800"/>
+            <a:ext cx="4846320" cy="4937760"/>
           </a:xfrm>
           <a:prstGeom prst="rect">
             <a:avLst/>
@@ -3496,7 +3562,7 @@
           <a:p>
             <a:pPr>
               <a:spcAft>
-                <a:spcPts val="1000"/>
+                <a:spcPts val="900"/>
               </a:spcAft>
             </a:pPr>
             <a:r>
@@ -3506,13 +3572,13 @@
                 </a:solidFill>
                 <a:latin typeface="Malgun Gothic"/>
               </a:rPr>
-              <a:t>• 변호사 자원의 서울 일극 집중이 격차의 핵심 동인</a:t>
+              <a:t>• 부산·울산·제주 상위 부상</a:t>
             </a:r>
           </a:p>
           <a:p>
             <a:pPr>
               <a:spcAft>
-                <a:spcPts val="1000"/>
+                <a:spcPts val="900"/>
               </a:spcAft>
             </a:pPr>
             <a:r>
@@ -3522,13 +3588,29 @@
                 </a:solidFill>
                 <a:latin typeface="Malgun Gothic"/>
               </a:rPr>
-              <a:t>• 인구 대비·사건부담이 접근성을 좌우 (인천=수도권인데 하위)</a:t>
+              <a:t>• 경기·인천은 중하위</a:t>
+            </a:r>
+          </a:p>
+          <a:p>
+            <a:pPr lvl="1">
+              <a:spcAft>
+                <a:spcPts val="900"/>
+              </a:spcAft>
+            </a:pPr>
+            <a:r>
+              <a:rPr sz="1700">
+                <a:solidFill>
+                  <a:srgbClr val="222222"/>
+                </a:solidFill>
+                <a:latin typeface="Malgun Gothic"/>
+              </a:rPr>
+              <a:t>– 인구 커서 희석 / 사건부담↑</a:t>
             </a:r>
           </a:p>
           <a:p>
             <a:pPr>
               <a:spcAft>
-                <a:spcPts val="1000"/>
+                <a:spcPts val="900"/>
               </a:spcAft>
             </a:pPr>
             <a:r>
@@ -3538,13 +3620,29 @@
                 </a:solidFill>
                 <a:latin typeface="Malgun Gothic"/>
               </a:rPr>
-              <a:t>• 양적 팽창만으로는 격차 해소 안 됨</a:t>
+              <a:t>• 핵심: '수도권 우위'는</a:t>
+            </a:r>
+          </a:p>
+          <a:p>
+            <a:pPr lvl="1">
+              <a:spcAft>
+                <a:spcPts val="900"/>
+              </a:spcAft>
+            </a:pPr>
+            <a:r>
+              <a:rPr sz="1700">
+                <a:solidFill>
+                  <a:srgbClr val="222222"/>
+                </a:solidFill>
+                <a:latin typeface="Malgun Gothic"/>
+              </a:rPr>
+              <a:t>– 사실상 서울 단독 현상</a:t>
             </a:r>
           </a:p>
           <a:p>
             <a:pPr>
               <a:spcAft>
-                <a:spcPts val="1000"/>
+                <a:spcPts val="900"/>
               </a:spcAft>
             </a:pPr>
             <a:r>
@@ -3554,39 +3652,7 @@
                 </a:solidFill>
                 <a:latin typeface="Malgun Gothic"/>
               </a:rPr>
-              <a:t>• 정책 제언</a:t>
-            </a:r>
-          </a:p>
-          <a:p>
-            <a:pPr lvl="1">
-              <a:spcAft>
-                <a:spcPts val="1000"/>
-              </a:spcAft>
-            </a:pPr>
-            <a:r>
-              <a:rPr sz="1700">
-                <a:solidFill>
-                  <a:srgbClr val="222222"/>
-                </a:solidFill>
-                <a:latin typeface="Malgun Gothic"/>
-              </a:rPr>
-              <a:t>– 지방 변호사 유치 인센티브 / 공단 자원 비수도권 우선 배치</a:t>
-            </a:r>
-          </a:p>
-          <a:p>
-            <a:pPr lvl="1">
-              <a:spcAft>
-                <a:spcPts val="1000"/>
-              </a:spcAft>
-            </a:pPr>
-            <a:r>
-              <a:rPr sz="1700">
-                <a:solidFill>
-                  <a:srgbClr val="222222"/>
-                </a:solidFill>
-                <a:latin typeface="Malgun Gothic"/>
-              </a:rPr>
-              <a:t>– 사건부담 높은 권역 인력 보강 / 로스쿨 정원·배치 연계</a:t>
+              <a:t>• 지방 내부 격차도 뚜렷</a:t>
             </a:r>
           </a:p>
         </p:txBody>
@@ -3638,7 +3704,7 @@
                 </a:solidFill>
                 <a:latin typeface="Malgun Gothic"/>
               </a:rPr>
-              <a:t>10. 한계와 향후 과제</a:t>
+              <a:t>9. 가설 검정 종합</a:t>
             </a:r>
           </a:p>
         </p:txBody>
@@ -3710,7 +3776,7 @@
           <a:p>
             <a:pPr>
               <a:spcAft>
-                <a:spcPts val="1000"/>
+                <a:spcPts val="900"/>
               </a:spcAft>
             </a:pPr>
             <a:r>
@@ -3720,13 +3786,13 @@
                 </a:solidFill>
                 <a:latin typeface="Malgun Gothic"/>
               </a:rPr>
-              <a:t>• 변호사 2시점(2009·현재) — 연속 시계열은 변호사백서 PDF 보강 필요</a:t>
+              <a:t>• H2 ✅ 강하게 지지 — corr(A1,A2) = −0.84~−0.88 (p&lt;0.01)</a:t>
             </a:r>
           </a:p>
           <a:p>
             <a:pPr>
               <a:spcAft>
-                <a:spcPts val="1000"/>
+                <a:spcPts val="900"/>
               </a:spcAft>
             </a:pPr>
             <a:r>
@@ -3736,13 +3802,13 @@
                 </a:solidFill>
                 <a:latin typeface="Malgun Gothic"/>
               </a:rPr>
-              <a:t>• 표본이 작아 통계적 검정력 제한</a:t>
+              <a:t>• H4 ✅ 지지 — 변호사 3.4배↑에도 서울 집중 심화 + 법률구조 격차 확대</a:t>
             </a:r>
           </a:p>
           <a:p>
             <a:pPr>
               <a:spcAft>
-                <a:spcPts val="1000"/>
+                <a:spcPts val="900"/>
               </a:spcAft>
             </a:pPr>
             <a:r>
@@ -3752,13 +3818,13 @@
                 </a:solidFill>
                 <a:latin typeface="Malgun Gothic"/>
               </a:rPr>
-              <a:t>• A3 공단 10도단위 → region13에선 인구비 근사배분</a:t>
+              <a:t>• H1 △ 방향만 일치 — 수도권 1인당 인구 4,039 &lt; 비수도권 5,250 (p=0.19)</a:t>
             </a:r>
           </a:p>
           <a:p>
             <a:pPr>
               <a:spcAft>
-                <a:spcPts val="1000"/>
+                <a:spcPts val="900"/>
               </a:spcAft>
             </a:pPr>
             <a:r>
@@ -3768,7 +3834,23 @@
                 </a:solidFill>
                 <a:latin typeface="Malgun Gothic"/>
               </a:rPr>
-              <a:t>• 향후: 코로플레스 대시보드 고도화, 시계열 LLAI</a:t>
+              <a:t>• H3 △ 약함 — GRDP와 접근성 상관 비유의</a:t>
+            </a:r>
+          </a:p>
+          <a:p>
+            <a:pPr lvl="1">
+              <a:spcAft>
+                <a:spcPts val="900"/>
+              </a:spcAft>
+            </a:pPr>
+            <a:r>
+              <a:rPr sz="1700">
+                <a:solidFill>
+                  <a:srgbClr val="222222"/>
+                </a:solidFill>
+                <a:latin typeface="Malgun Gothic"/>
+              </a:rPr>
+              <a:t>– 표본 작음(권역 10~13개) → 검정력 한계 명시</a:t>
             </a:r>
           </a:p>
         </p:txBody>
@@ -3799,6 +3881,402 @@
         </p:nvSpPr>
         <p:spPr>
           <a:xfrm>
+            <a:off x="502920" y="320040"/>
+            <a:ext cx="11155680" cy="914400"/>
+          </a:xfrm>
+          <a:prstGeom prst="rect">
+            <a:avLst/>
+          </a:prstGeom>
+          <a:noFill/>
+        </p:spPr>
+        <p:txBody>
+          <a:bodyPr wrap="square">
+            <a:spAutoFit/>
+          </a:bodyPr>
+          <a:lstStyle/>
+          <a:p>
+            <a:r>
+              <a:rPr sz="3000" b="1">
+                <a:solidFill>
+                  <a:srgbClr val="1F3A5F"/>
+                </a:solidFill>
+                <a:latin typeface="Malgun Gothic"/>
+              </a:rPr>
+              <a:t>10. 결론 · 정책 시사점</a:t>
+            </a:r>
+          </a:p>
+        </p:txBody>
+      </p:sp>
+      <p:sp>
+        <p:nvSpPr>
+          <p:cNvPr id="3" name="Rectangle 2"/>
+          <p:cNvSpPr/>
+          <p:nvPr/>
+        </p:nvSpPr>
+        <p:spPr>
+          <a:xfrm>
+            <a:off x="548640" y="1234440"/>
+            <a:ext cx="11064240" cy="38100"/>
+          </a:xfrm>
+          <a:prstGeom prst="rect">
+            <a:avLst/>
+          </a:prstGeom>
+          <a:solidFill>
+            <a:srgbClr val="C44E52"/>
+          </a:solidFill>
+          <a:ln>
+            <a:noFill/>
+          </a:ln>
+        </p:spPr>
+        <p:style>
+          <a:lnRef idx="1">
+            <a:schemeClr val="accent1"/>
+          </a:lnRef>
+          <a:fillRef idx="3">
+            <a:schemeClr val="accent1"/>
+          </a:fillRef>
+          <a:effectRef idx="2">
+            <a:schemeClr val="accent1"/>
+          </a:effectRef>
+          <a:fontRef idx="minor">
+            <a:schemeClr val="lt1"/>
+          </a:fontRef>
+        </p:style>
+        <p:txBody>
+          <a:bodyPr rtlCol="0" anchor="ctr"/>
+          <a:lstStyle/>
+          <a:p>
+            <a:pPr algn="ctr"/>
+          </a:p>
+        </p:txBody>
+      </p:sp>
+      <p:sp>
+        <p:nvSpPr>
+          <p:cNvPr id="4" name="TextBox 3"/>
+          <p:cNvSpPr txBox="1"/>
+          <p:nvPr/>
+        </p:nvSpPr>
+        <p:spPr>
+          <a:xfrm>
+            <a:off x="640080" y="1554480"/>
+            <a:ext cx="10972800" cy="4937760"/>
+          </a:xfrm>
+          <a:prstGeom prst="rect">
+            <a:avLst/>
+          </a:prstGeom>
+          <a:noFill/>
+        </p:spPr>
+        <p:txBody>
+          <a:bodyPr wrap="square">
+            <a:spAutoFit/>
+          </a:bodyPr>
+          <a:lstStyle/>
+          <a:p>
+            <a:pPr>
+              <a:spcAft>
+                <a:spcPts val="900"/>
+              </a:spcAft>
+            </a:pPr>
+            <a:r>
+              <a:rPr sz="2000">
+                <a:solidFill>
+                  <a:srgbClr val="222222"/>
+                </a:solidFill>
+                <a:latin typeface="Malgun Gothic"/>
+              </a:rPr>
+              <a:t>• 변호사 자원의 서울 일극 집중이 격차의 핵심 동인</a:t>
+            </a:r>
+          </a:p>
+          <a:p>
+            <a:pPr>
+              <a:spcAft>
+                <a:spcPts val="900"/>
+              </a:spcAft>
+            </a:pPr>
+            <a:r>
+              <a:rPr sz="2000">
+                <a:solidFill>
+                  <a:srgbClr val="222222"/>
+                </a:solidFill>
+                <a:latin typeface="Malgun Gothic"/>
+              </a:rPr>
+              <a:t>• 인구 대비·사건부담이 접근성을 좌우 (인천=수도권인데 하위)</a:t>
+            </a:r>
+          </a:p>
+          <a:p>
+            <a:pPr>
+              <a:spcAft>
+                <a:spcPts val="900"/>
+              </a:spcAft>
+            </a:pPr>
+            <a:r>
+              <a:rPr sz="2000">
+                <a:solidFill>
+                  <a:srgbClr val="222222"/>
+                </a:solidFill>
+                <a:latin typeface="Malgun Gothic"/>
+              </a:rPr>
+              <a:t>• 양적 팽창만으로는 격차 해소 안 됨</a:t>
+            </a:r>
+          </a:p>
+          <a:p>
+            <a:pPr>
+              <a:spcAft>
+                <a:spcPts val="900"/>
+              </a:spcAft>
+            </a:pPr>
+            <a:r>
+              <a:rPr sz="2000">
+                <a:solidFill>
+                  <a:srgbClr val="222222"/>
+                </a:solidFill>
+                <a:latin typeface="Malgun Gothic"/>
+              </a:rPr>
+              <a:t>• 정책 제언</a:t>
+            </a:r>
+          </a:p>
+          <a:p>
+            <a:pPr lvl="1">
+              <a:spcAft>
+                <a:spcPts val="900"/>
+              </a:spcAft>
+            </a:pPr>
+            <a:r>
+              <a:rPr sz="1700">
+                <a:solidFill>
+                  <a:srgbClr val="222222"/>
+                </a:solidFill>
+                <a:latin typeface="Malgun Gothic"/>
+              </a:rPr>
+              <a:t>– 지방 변호사 유치 인센티브 / 공단 자원 비수도권 우선 배치</a:t>
+            </a:r>
+          </a:p>
+          <a:p>
+            <a:pPr lvl="1">
+              <a:spcAft>
+                <a:spcPts val="900"/>
+              </a:spcAft>
+            </a:pPr>
+            <a:r>
+              <a:rPr sz="1700">
+                <a:solidFill>
+                  <a:srgbClr val="222222"/>
+                </a:solidFill>
+                <a:latin typeface="Malgun Gothic"/>
+              </a:rPr>
+              <a:t>– 사건부담 높은 권역 인력 보강 / 로스쿨 정원·배치 연계</a:t>
+            </a:r>
+          </a:p>
+        </p:txBody>
+      </p:sp>
+    </p:spTree>
+  </p:cSld>
+  <p:clrMapOvr>
+    <a:masterClrMapping/>
+  </p:clrMapOvr>
+</p:sld>
+</file>
+
+<file path=ppt/slides/slide14.xml><?xml version="1.0" encoding="utf-8"?>
+<p:sld xmlns:a="http://schemas.openxmlformats.org/drawingml/2006/main" xmlns:p="http://schemas.openxmlformats.org/presentationml/2006/main" xmlns:r="http://schemas.openxmlformats.org/officeDocument/2006/relationships">
+  <p:cSld>
+    <p:spTree>
+      <p:nvGrpSpPr>
+        <p:cNvPr id="1" name=""/>
+        <p:cNvGrpSpPr/>
+        <p:nvPr/>
+      </p:nvGrpSpPr>
+      <p:grpSpPr/>
+      <p:sp>
+        <p:nvSpPr>
+          <p:cNvPr id="2" name="TextBox 1"/>
+          <p:cNvSpPr txBox="1"/>
+          <p:nvPr/>
+        </p:nvSpPr>
+        <p:spPr>
+          <a:xfrm>
+            <a:off x="502920" y="320040"/>
+            <a:ext cx="11155680" cy="914400"/>
+          </a:xfrm>
+          <a:prstGeom prst="rect">
+            <a:avLst/>
+          </a:prstGeom>
+          <a:noFill/>
+        </p:spPr>
+        <p:txBody>
+          <a:bodyPr wrap="square">
+            <a:spAutoFit/>
+          </a:bodyPr>
+          <a:lstStyle/>
+          <a:p>
+            <a:r>
+              <a:rPr sz="3000" b="1">
+                <a:solidFill>
+                  <a:srgbClr val="1F3A5F"/>
+                </a:solidFill>
+                <a:latin typeface="Malgun Gothic"/>
+              </a:rPr>
+              <a:t>11. 한계와 향후 과제</a:t>
+            </a:r>
+          </a:p>
+        </p:txBody>
+      </p:sp>
+      <p:sp>
+        <p:nvSpPr>
+          <p:cNvPr id="3" name="Rectangle 2"/>
+          <p:cNvSpPr/>
+          <p:nvPr/>
+        </p:nvSpPr>
+        <p:spPr>
+          <a:xfrm>
+            <a:off x="548640" y="1234440"/>
+            <a:ext cx="11064240" cy="38100"/>
+          </a:xfrm>
+          <a:prstGeom prst="rect">
+            <a:avLst/>
+          </a:prstGeom>
+          <a:solidFill>
+            <a:srgbClr val="C44E52"/>
+          </a:solidFill>
+          <a:ln>
+            <a:noFill/>
+          </a:ln>
+        </p:spPr>
+        <p:style>
+          <a:lnRef idx="1">
+            <a:schemeClr val="accent1"/>
+          </a:lnRef>
+          <a:fillRef idx="3">
+            <a:schemeClr val="accent1"/>
+          </a:fillRef>
+          <a:effectRef idx="2">
+            <a:schemeClr val="accent1"/>
+          </a:effectRef>
+          <a:fontRef idx="minor">
+            <a:schemeClr val="lt1"/>
+          </a:fontRef>
+        </p:style>
+        <p:txBody>
+          <a:bodyPr rtlCol="0" anchor="ctr"/>
+          <a:lstStyle/>
+          <a:p>
+            <a:pPr algn="ctr"/>
+          </a:p>
+        </p:txBody>
+      </p:sp>
+      <p:sp>
+        <p:nvSpPr>
+          <p:cNvPr id="4" name="TextBox 3"/>
+          <p:cNvSpPr txBox="1"/>
+          <p:nvPr/>
+        </p:nvSpPr>
+        <p:spPr>
+          <a:xfrm>
+            <a:off x="640080" y="1554480"/>
+            <a:ext cx="10972800" cy="4937760"/>
+          </a:xfrm>
+          <a:prstGeom prst="rect">
+            <a:avLst/>
+          </a:prstGeom>
+          <a:noFill/>
+        </p:spPr>
+        <p:txBody>
+          <a:bodyPr wrap="square">
+            <a:spAutoFit/>
+          </a:bodyPr>
+          <a:lstStyle/>
+          <a:p>
+            <a:pPr>
+              <a:spcAft>
+                <a:spcPts val="900"/>
+              </a:spcAft>
+            </a:pPr>
+            <a:r>
+              <a:rPr sz="2000">
+                <a:solidFill>
+                  <a:srgbClr val="222222"/>
+                </a:solidFill>
+                <a:latin typeface="Malgun Gothic"/>
+              </a:rPr>
+              <a:t>• 변호사 2시점(2009·현재) — 연속 시계열은 변호사백서 PDF 보강 필요</a:t>
+            </a:r>
+          </a:p>
+          <a:p>
+            <a:pPr>
+              <a:spcAft>
+                <a:spcPts val="900"/>
+              </a:spcAft>
+            </a:pPr>
+            <a:r>
+              <a:rPr sz="2000">
+                <a:solidFill>
+                  <a:srgbClr val="222222"/>
+                </a:solidFill>
+                <a:latin typeface="Malgun Gothic"/>
+              </a:rPr>
+              <a:t>• 표본이 작아 통계적 검정력 제한</a:t>
+            </a:r>
+          </a:p>
+          <a:p>
+            <a:pPr>
+              <a:spcAft>
+                <a:spcPts val="900"/>
+              </a:spcAft>
+            </a:pPr>
+            <a:r>
+              <a:rPr sz="2000">
+                <a:solidFill>
+                  <a:srgbClr val="222222"/>
+                </a:solidFill>
+                <a:latin typeface="Malgun Gothic"/>
+              </a:rPr>
+              <a:t>• A3 공단 10도단위 → region13에선 인구비 근사배분</a:t>
+            </a:r>
+          </a:p>
+          <a:p>
+            <a:pPr>
+              <a:spcAft>
+                <a:spcPts val="900"/>
+              </a:spcAft>
+            </a:pPr>
+            <a:r>
+              <a:rPr sz="2000">
+                <a:solidFill>
+                  <a:srgbClr val="222222"/>
+                </a:solidFill>
+                <a:latin typeface="Malgun Gothic"/>
+              </a:rPr>
+              <a:t>• 향후: 코로플레스 대시보드 고도화, 시계열 LLAI</a:t>
+            </a:r>
+          </a:p>
+        </p:txBody>
+      </p:sp>
+    </p:spTree>
+  </p:cSld>
+  <p:clrMapOvr>
+    <a:masterClrMapping/>
+  </p:clrMapOvr>
+</p:sld>
+</file>
+
+<file path=ppt/slides/slide15.xml><?xml version="1.0" encoding="utf-8"?>
+<p:sld xmlns:a="http://schemas.openxmlformats.org/drawingml/2006/main" xmlns:p="http://schemas.openxmlformats.org/presentationml/2006/main" xmlns:r="http://schemas.openxmlformats.org/officeDocument/2006/relationships">
+  <p:cSld>
+    <p:spTree>
+      <p:nvGrpSpPr>
+        <p:cNvPr id="1" name=""/>
+        <p:cNvGrpSpPr/>
+        <p:nvPr/>
+      </p:nvGrpSpPr>
+      <p:grpSpPr/>
+      <p:sp>
+        <p:nvSpPr>
+          <p:cNvPr id="2" name="TextBox 1"/>
+          <p:cNvSpPr txBox="1"/>
+          <p:nvPr/>
+        </p:nvSpPr>
+        <p:spPr>
+          <a:xfrm>
             <a:off x="731520" y="2377440"/>
             <a:ext cx="10698480" cy="1828800"/>
           </a:xfrm>
@@ -3883,7 +4361,7 @@
                 </a:solidFill>
                 <a:latin typeface="Malgun Gothic"/>
               </a:rPr>
-              <a:t>1. 왜 이 문제인가</a:t>
+              <a:t>연구 범위 · 선행연구 차용 여부</a:t>
             </a:r>
           </a:p>
         </p:txBody>
@@ -3955,65 +4433,145 @@
           <a:p>
             <a:pPr>
               <a:spcAft>
-                <a:spcPts val="1000"/>
-              </a:spcAft>
-            </a:pPr>
-            <a:r>
-              <a:rPr sz="2000">
-                <a:solidFill>
-                  <a:srgbClr val="222222"/>
-                </a:solidFill>
-                <a:latin typeface="Malgun Gothic"/>
-              </a:rPr>
-              <a:t>• 로스쿨 도입(2009) 이후 변호사 4만 명 시대 — 그런데 자원은 어디에 있나?</a:t>
+                <a:spcPts val="900"/>
+              </a:spcAft>
+            </a:pPr>
+            <a:r>
+              <a:rPr sz="1900">
+                <a:solidFill>
+                  <a:srgbClr val="222222"/>
+                </a:solidFill>
+                <a:latin typeface="Malgun Gothic"/>
+              </a:rPr>
+              <a:t>• 본 분석은 26-1 빅데이터컴퓨팅 기말 프로젝트로 직접 수행</a:t>
+            </a:r>
+          </a:p>
+          <a:p>
+            <a:pPr>
+              <a:spcAft>
+                <a:spcPts val="900"/>
+              </a:spcAft>
+            </a:pPr>
+            <a:r>
+              <a:rPr sz="1900">
+                <a:solidFill>
+                  <a:srgbClr val="222222"/>
+                </a:solidFill>
+                <a:latin typeface="Malgun Gothic"/>
+              </a:rPr>
+              <a:t>• 선행연구(타인) 차용: 없음</a:t>
             </a:r>
           </a:p>
           <a:p>
             <a:pPr lvl="1">
               <a:spcAft>
-                <a:spcPts val="1000"/>
-              </a:spcAft>
-            </a:pPr>
-            <a:r>
-              <a:rPr sz="1700">
-                <a:solidFill>
-                  <a:srgbClr val="222222"/>
-                </a:solidFill>
-                <a:latin typeface="Malgun Gothic"/>
-              </a:rPr>
-              <a:t>– 서울·수도권 집중 vs 지방 부족, 취약계층 사각지대 우려</a:t>
+                <a:spcPts val="900"/>
+              </a:spcAft>
+            </a:pPr>
+            <a:r>
+              <a:rPr sz="1600">
+                <a:solidFill>
+                  <a:srgbClr val="222222"/>
+                </a:solidFill>
+                <a:latin typeface="Malgun Gothic"/>
+              </a:rPr>
+              <a:t>– LLAI 지수 설계·수집·정제·분석·시각화 코드 전부 자체 개발</a:t>
             </a:r>
           </a:p>
           <a:p>
             <a:pPr>
               <a:spcAft>
-                <a:spcPts val="1000"/>
-              </a:spcAft>
-            </a:pPr>
-            <a:r>
-              <a:rPr sz="2000">
-                <a:solidFill>
-                  <a:srgbClr val="222222"/>
-                </a:solidFill>
-                <a:latin typeface="Malgun Gothic"/>
-              </a:rPr>
-              <a:t>• 법률 서비스 접근성의 지역 불균형 = 사법 정의와 직결된 사회 문제</a:t>
+                <a:spcPts val="900"/>
+              </a:spcAft>
+            </a:pPr>
+            <a:r>
+              <a:rPr sz="1900">
+                <a:solidFill>
+                  <a:srgbClr val="222222"/>
+                </a:solidFill>
+                <a:latin typeface="Malgun Gothic"/>
+              </a:rPr>
+              <a:t>• 본인 이전 연구 차용: 없음</a:t>
+            </a:r>
+          </a:p>
+          <a:p>
+            <a:pPr lvl="1">
+              <a:spcAft>
+                <a:spcPts val="900"/>
+              </a:spcAft>
+            </a:pPr>
+            <a:r>
+              <a:rPr sz="1600">
+                <a:solidFill>
+                  <a:srgbClr val="222222"/>
+                </a:solidFill>
+                <a:latin typeface="Malgun Gothic"/>
+              </a:rPr>
+              <a:t>– 분석 주제·방법론 골격은 본 과목 제안서에서 직접 설계 → 기말에 구현</a:t>
             </a:r>
           </a:p>
           <a:p>
             <a:pPr>
               <a:spcAft>
-                <a:spcPts val="1000"/>
-              </a:spcAft>
-            </a:pPr>
-            <a:r>
-              <a:rPr sz="2000">
-                <a:solidFill>
-                  <a:srgbClr val="222222"/>
-                </a:solidFill>
-                <a:latin typeface="Malgun Gothic"/>
-              </a:rPr>
-              <a:t>• 연구 질문: 어느 지역이, 얼마나 법적 보호에서 소외되는가?</a:t>
+                <a:spcPts val="900"/>
+              </a:spcAft>
+            </a:pPr>
+            <a:r>
+              <a:rPr sz="1900">
+                <a:solidFill>
+                  <a:srgbClr val="222222"/>
+                </a:solidFill>
+                <a:latin typeface="Malgun Gothic"/>
+              </a:rPr>
+              <a:t>• 외부에서 가져온 것은 '공개 raw data'와 '경계 파일'뿐 (모두 출처 명시)</a:t>
+            </a:r>
+          </a:p>
+          <a:p>
+            <a:pPr lvl="1">
+              <a:spcAft>
+                <a:spcPts val="900"/>
+              </a:spcAft>
+            </a:pPr>
+            <a:r>
+              <a:rPr sz="1600">
+                <a:solidFill>
+                  <a:srgbClr val="222222"/>
+                </a:solidFill>
+                <a:latin typeface="Malgun Gothic"/>
+              </a:rPr>
+              <a:t>– KOSIS·사법연감·법률구조공단·대한변협 공공데이터</a:t>
+            </a:r>
+          </a:p>
+          <a:p>
+            <a:pPr lvl="1">
+              <a:spcAft>
+                <a:spcPts val="900"/>
+              </a:spcAft>
+            </a:pPr>
+            <a:r>
+              <a:rPr sz="1600">
+                <a:solidFill>
+                  <a:srgbClr val="222222"/>
+                </a:solidFill>
+                <a:latin typeface="Malgun Gothic"/>
+              </a:rPr>
+              <a:t>– 시도경계 GeoJSON(southkorea-maps), 2009 변호사 분포(법률저널 2010 인용)</a:t>
+            </a:r>
+          </a:p>
+          <a:p>
+            <a:pPr>
+              <a:spcAft>
+                <a:spcPts val="900"/>
+              </a:spcAft>
+            </a:pPr>
+            <a:r>
+              <a:rPr sz="1900">
+                <a:solidFill>
+                  <a:srgbClr val="222222"/>
+                </a:solidFill>
+                <a:latin typeface="Malgun Gothic"/>
+              </a:rPr>
+              <a:t>• → 데이터는 차용, 수집·정제·지수개발·분석·해석은 100% 본 프로젝트 수행</a:t>
             </a:r>
           </a:p>
         </p:txBody>
@@ -4065,7 +4623,7 @@
                 </a:solidFill>
                 <a:latin typeface="Malgun Gothic"/>
               </a:rPr>
-              <a:t>2. 접근 방법 — 종합 법률 접근성 지수(LLAI)</a:t>
+              <a:t>1. 왜 이 문제인가</a:t>
             </a:r>
           </a:p>
         </p:txBody>
@@ -4137,7 +4695,7 @@
           <a:p>
             <a:pPr>
               <a:spcAft>
-                <a:spcPts val="1000"/>
+                <a:spcPts val="900"/>
               </a:spcAft>
             </a:pPr>
             <a:r>
@@ -4147,13 +4705,13 @@
                 </a:solidFill>
                 <a:latin typeface="Malgun Gothic"/>
               </a:rPr>
-              <a:t>• 3개 차원을 하나의 지수로 통합 (0~100)</a:t>
+              <a:t>• 로스쿨 도입(2009) 이후 변호사 4만 명 시대 — 그런데 자원은 어디에 있나?</a:t>
             </a:r>
           </a:p>
           <a:p>
             <a:pPr lvl="1">
               <a:spcAft>
-                <a:spcPts val="1000"/>
+                <a:spcPts val="900"/>
               </a:spcAft>
             </a:pPr>
             <a:r>
@@ -4163,45 +4721,13 @@
                 </a:solidFill>
                 <a:latin typeface="Malgun Gothic"/>
               </a:rPr>
-              <a:t>– A1 변호사 접근성 — 인구 10만 명당 변호사 수 (↑ 좋음)</a:t>
-            </a:r>
-          </a:p>
-          <a:p>
-            <a:pPr lvl="1">
-              <a:spcAft>
-                <a:spcPts val="1000"/>
-              </a:spcAft>
-            </a:pPr>
-            <a:r>
-              <a:rPr sz="1700">
-                <a:solidFill>
-                  <a:srgbClr val="222222"/>
-                </a:solidFill>
-                <a:latin typeface="Malgun Gothic"/>
-              </a:rPr>
-              <a:t>– A2 사건 부담 — 변호사 1인당 법원 본안사건 수 (↓ 좋음)</a:t>
-            </a:r>
-          </a:p>
-          <a:p>
-            <a:pPr lvl="1">
-              <a:spcAft>
-                <a:spcPts val="1000"/>
-              </a:spcAft>
-            </a:pPr>
-            <a:r>
-              <a:rPr sz="1700">
-                <a:solidFill>
-                  <a:srgbClr val="222222"/>
-                </a:solidFill>
-                <a:latin typeface="Malgun Gothic"/>
-              </a:rPr>
-              <a:t>– A3 취약계층 접근성 — 법률구조 건수 / 저소득층 (↑ 좋음)</a:t>
+              <a:t>– 서울·수도권 집중 vs 지방 부족, 취약계층 사각지대 우려</a:t>
             </a:r>
           </a:p>
           <a:p>
             <a:pPr>
               <a:spcAft>
-                <a:spcPts val="1000"/>
+                <a:spcPts val="900"/>
               </a:spcAft>
             </a:pPr>
             <a:r>
@@ -4211,23 +4737,23 @@
                 </a:solidFill>
                 <a:latin typeface="Malgun Gothic"/>
               </a:rPr>
-              <a:t>• LLAI = w₁·A1n + w₂·(1−A2n) + w₃·A3n</a:t>
-            </a:r>
-          </a:p>
-          <a:p>
-            <a:pPr lvl="1">
-              <a:spcAft>
-                <a:spcPts val="1000"/>
-              </a:spcAft>
-            </a:pPr>
-            <a:r>
-              <a:rPr sz="1700">
-                <a:solidFill>
-                  <a:srgbClr val="222222"/>
-                </a:solidFill>
-                <a:latin typeface="Malgun Gothic"/>
-              </a:rPr>
-              <a:t>– 가중치 3종(균등·엔트로피·PCA) 병기로 강건성 확인</a:t>
+              <a:t>• 법률 서비스 접근성의 지역 불균형 = 사법 정의와 직결된 사회 문제</a:t>
+            </a:r>
+          </a:p>
+          <a:p>
+            <a:pPr>
+              <a:spcAft>
+                <a:spcPts val="900"/>
+              </a:spcAft>
+            </a:pPr>
+            <a:r>
+              <a:rPr sz="2000">
+                <a:solidFill>
+                  <a:srgbClr val="222222"/>
+                </a:solidFill>
+                <a:latin typeface="Malgun Gothic"/>
+              </a:rPr>
+              <a:t>• 연구 질문: 어느 지역이, 얼마나 법적 보호에서 소외되는가?</a:t>
             </a:r>
           </a:p>
         </p:txBody>
@@ -4279,7 +4805,7 @@
                 </a:solidFill>
                 <a:latin typeface="Malgun Gothic"/>
               </a:rPr>
-              <a:t>3. 데이터 5종과 두 가지 난관</a:t>
+              <a:t>2. 접근 방법 — 종합 법률 접근성 지수(LLAI)</a:t>
             </a:r>
           </a:p>
         </p:txBody>
@@ -4351,7 +4877,7 @@
           <a:p>
             <a:pPr>
               <a:spcAft>
-                <a:spcPts val="1000"/>
+                <a:spcPts val="900"/>
               </a:spcAft>
             </a:pPr>
             <a:r>
@@ -4361,13 +4887,61 @@
                 </a:solidFill>
                 <a:latin typeface="Malgun Gothic"/>
               </a:rPr>
-              <a:t>• 출처: 변협(스크랩)·사법연감·법률구조공단·KOSIS·시도경계</a:t>
+              <a:t>• 3개 차원을 하나의 지수로 통합 (0~100)</a:t>
+            </a:r>
+          </a:p>
+          <a:p>
+            <a:pPr lvl="1">
+              <a:spcAft>
+                <a:spcPts val="900"/>
+              </a:spcAft>
+            </a:pPr>
+            <a:r>
+              <a:rPr sz="1700">
+                <a:solidFill>
+                  <a:srgbClr val="222222"/>
+                </a:solidFill>
+                <a:latin typeface="Malgun Gothic"/>
+              </a:rPr>
+              <a:t>– A1 변호사 접근성 — 인구 10만 명당 변호사 수 (↑ 좋음)</a:t>
+            </a:r>
+          </a:p>
+          <a:p>
+            <a:pPr lvl="1">
+              <a:spcAft>
+                <a:spcPts val="900"/>
+              </a:spcAft>
+            </a:pPr>
+            <a:r>
+              <a:rPr sz="1700">
+                <a:solidFill>
+                  <a:srgbClr val="222222"/>
+                </a:solidFill>
+                <a:latin typeface="Malgun Gothic"/>
+              </a:rPr>
+              <a:t>– A2 사건 부담 — 변호사 1인당 법원 본안사건 수 (↓ 좋음)</a:t>
+            </a:r>
+          </a:p>
+          <a:p>
+            <a:pPr lvl="1">
+              <a:spcAft>
+                <a:spcPts val="900"/>
+              </a:spcAft>
+            </a:pPr>
+            <a:r>
+              <a:rPr sz="1700">
+                <a:solidFill>
+                  <a:srgbClr val="222222"/>
+                </a:solidFill>
+                <a:latin typeface="Malgun Gothic"/>
+              </a:rPr>
+              <a:t>– A3 취약계층 접근성 — 법률구조 건수 / 저소득층 (↑ 좋음)</a:t>
             </a:r>
           </a:p>
           <a:p>
             <a:pPr>
               <a:spcAft>
-                <a:spcPts val="1000"/>
+                <a:spcPts val="900"/>
               </a:spcAft>
             </a:pPr>
             <a:r>
@@ -4377,29 +4951,13 @@
                 </a:solidFill>
                 <a:latin typeface="Malgun Gothic"/>
               </a:rPr>
-              <a:t>• 난관 1 — 출처별 지역 단위 불일치 → region13 / region10 두 단위 병행</a:t>
-            </a:r>
-          </a:p>
-          <a:p>
-            <a:pPr>
-              <a:spcAft>
-                <a:spcPts val="1000"/>
-              </a:spcAft>
-            </a:pPr>
-            <a:r>
-              <a:rPr sz="2000">
-                <a:solidFill>
-                  <a:srgbClr val="222222"/>
-                </a:solidFill>
-                <a:latin typeface="Malgun Gothic"/>
-              </a:rPr>
-              <a:t>• 난관 2 — 공단 PDF·변협 다운로드 불가 → KOSIS 우회 + 웹 스크래핑</a:t>
+              <a:t>• LLAI = w₁·A1n + w₂·(1−A2n) + w₃·A3n</a:t>
             </a:r>
           </a:p>
           <a:p>
             <a:pPr lvl="1">
               <a:spcAft>
-                <a:spcPts val="1000"/>
+                <a:spcPts val="900"/>
               </a:spcAft>
             </a:pPr>
             <a:r>
@@ -4409,23 +4967,7 @@
                 </a:solidFill>
                 <a:latin typeface="Malgun Gothic"/>
               </a:rPr>
-              <a:t>– 신뢰성 검증: 법원관내 인구 합 = KOSIS 인구와 정확히 일치</a:t>
-            </a:r>
-          </a:p>
-          <a:p>
-            <a:pPr lvl="1">
-              <a:spcAft>
-                <a:spcPts val="1000"/>
-              </a:spcAft>
-            </a:pPr>
-            <a:r>
-              <a:rPr sz="1700">
-                <a:solidFill>
-                  <a:srgbClr val="222222"/>
-                </a:solidFill>
-                <a:latin typeface="Malgun Gothic"/>
-              </a:rPr>
-              <a:t>– 본안사건 합 1,106,526 = 사법연감 전국 본안과 일치</a:t>
+              <a:t>– 가중치 3종(균등·엔트로피·PCA) 병기로 강건성 확인</a:t>
             </a:r>
           </a:p>
         </p:txBody>
@@ -4477,7 +5019,7 @@
                 </a:solidFill>
                 <a:latin typeface="Malgun Gothic"/>
               </a:rPr>
-              <a:t>4. 결과 ① — LLAI 순위 (region13, 2024)</a:t>
+              <a:t>3. 데이터 5종과 두 가지 난관</a:t>
             </a:r>
           </a:p>
         </p:txBody>
@@ -4525,40 +5067,16 @@
           </a:p>
         </p:txBody>
       </p:sp>
-      <p:pic>
-        <p:nvPicPr>
-          <p:cNvPr id="4" name="Picture 3" descr="fig1_llai_ranking_region13.png"/>
-          <p:cNvPicPr>
-            <a:picLocks noChangeAspect="1"/>
-          </p:cNvPicPr>
-          <p:nvPr/>
-        </p:nvPicPr>
-        <p:blipFill>
-          <a:blip r:embed="rId2"/>
-          <a:stretch>
-            <a:fillRect/>
-          </a:stretch>
-        </p:blipFill>
-        <p:spPr>
-          <a:xfrm>
-            <a:off x="365760" y="1554480"/>
-            <a:ext cx="7376387" cy="4572000"/>
-          </a:xfrm>
-          <a:prstGeom prst="rect">
-            <a:avLst/>
-          </a:prstGeom>
-        </p:spPr>
-      </p:pic>
-      <p:sp>
-        <p:nvSpPr>
-          <p:cNvPr id="5" name="TextBox 4"/>
+      <p:sp>
+        <p:nvSpPr>
+          <p:cNvPr id="4" name="TextBox 3"/>
           <p:cNvSpPr txBox="1"/>
           <p:nvPr/>
         </p:nvSpPr>
         <p:spPr>
           <a:xfrm>
-            <a:off x="6949440" y="1828800"/>
-            <a:ext cx="4937760" cy="4937760"/>
+            <a:off x="640080" y="1554480"/>
+            <a:ext cx="10972800" cy="4937760"/>
           </a:xfrm>
           <a:prstGeom prst="rect">
             <a:avLst/>
@@ -4573,7 +5091,7 @@
           <a:p>
             <a:pPr>
               <a:spcAft>
-                <a:spcPts val="1000"/>
+                <a:spcPts val="900"/>
               </a:spcAft>
             </a:pPr>
             <a:r>
@@ -4583,13 +5101,45 @@
                 </a:solidFill>
                 <a:latin typeface="Malgun Gothic"/>
               </a:rPr>
-              <a:t>• 서울 91</a:t>
+              <a:t>• 출처: 변협(스크랩)·사법연감·법률구조공단·KOSIS·시도경계</a:t>
+            </a:r>
+          </a:p>
+          <a:p>
+            <a:pPr>
+              <a:spcAft>
+                <a:spcPts val="900"/>
+              </a:spcAft>
+            </a:pPr>
+            <a:r>
+              <a:rPr sz="2000">
+                <a:solidFill>
+                  <a:srgbClr val="222222"/>
+                </a:solidFill>
+                <a:latin typeface="Malgun Gothic"/>
+              </a:rPr>
+              <a:t>• 난관 1 — 출처별 지역 단위 불일치 → region13 / region10 두 단위 병행</a:t>
+            </a:r>
+          </a:p>
+          <a:p>
+            <a:pPr>
+              <a:spcAft>
+                <a:spcPts val="900"/>
+              </a:spcAft>
+            </a:pPr>
+            <a:r>
+              <a:rPr sz="2000">
+                <a:solidFill>
+                  <a:srgbClr val="222222"/>
+                </a:solidFill>
+                <a:latin typeface="Malgun Gothic"/>
+              </a:rPr>
+              <a:t>• 난관 2 — 공단 PDF·변협 다운로드 불가 → KOSIS 우회 + 웹 스크래핑</a:t>
             </a:r>
           </a:p>
           <a:p>
             <a:pPr lvl="1">
               <a:spcAft>
-                <a:spcPts val="1000"/>
+                <a:spcPts val="900"/>
               </a:spcAft>
             </a:pPr>
             <a:r>
@@ -4599,29 +5149,13 @@
                 </a:solidFill>
                 <a:latin typeface="Malgun Gothic"/>
               </a:rPr>
-              <a:t>– ≫ 압도적</a:t>
-            </a:r>
-          </a:p>
-          <a:p>
-            <a:pPr>
-              <a:spcAft>
-                <a:spcPts val="1000"/>
-              </a:spcAft>
-            </a:pPr>
-            <a:r>
-              <a:rPr sz="2000">
-                <a:solidFill>
-                  <a:srgbClr val="222222"/>
-                </a:solidFill>
-                <a:latin typeface="Malgun Gothic"/>
-              </a:rPr>
-              <a:t>• 울산·제주 2·3위</a:t>
+              <a:t>– 신뢰성 검증: 법원관내 인구 합 = KOSIS 인구와 정확히 일치</a:t>
             </a:r>
           </a:p>
           <a:p>
             <a:pPr lvl="1">
               <a:spcAft>
-                <a:spcPts val="1000"/>
+                <a:spcPts val="900"/>
               </a:spcAft>
             </a:pPr>
             <a:r>
@@ -4631,39 +5165,7 @@
                 </a:solidFill>
                 <a:latin typeface="Malgun Gothic"/>
               </a:rPr>
-              <a:t>– 인구 적어 1인당 양호</a:t>
-            </a:r>
-          </a:p>
-          <a:p>
-            <a:pPr>
-              <a:spcAft>
-                <a:spcPts val="1000"/>
-              </a:spcAft>
-            </a:pPr>
-            <a:r>
-              <a:rPr sz="2000">
-                <a:solidFill>
-                  <a:srgbClr val="222222"/>
-                </a:solidFill>
-                <a:latin typeface="Malgun Gothic"/>
-              </a:rPr>
-              <a:t>• 인천은 하위권</a:t>
-            </a:r>
-          </a:p>
-          <a:p>
-            <a:pPr lvl="1">
-              <a:spcAft>
-                <a:spcPts val="1000"/>
-              </a:spcAft>
-            </a:pPr>
-            <a:r>
-              <a:rPr sz="1700">
-                <a:solidFill>
-                  <a:srgbClr val="222222"/>
-                </a:solidFill>
-                <a:latin typeface="Malgun Gothic"/>
-              </a:rPr>
-              <a:t>– 사건부담 높음</a:t>
+              <a:t>– 본안사건 합 1,106,526 = 사법연감 전국 본안과 일치</a:t>
             </a:r>
           </a:p>
         </p:txBody>
@@ -4715,7 +5217,7 @@
                 </a:solidFill>
                 <a:latin typeface="Malgun Gothic"/>
               </a:rPr>
-              <a:t>4. 결과 ② — 코로플레스 지도</a:t>
+              <a:t>4. 데이터 수집 · raw data 정제 방법</a:t>
             </a:r>
           </a:p>
         </p:txBody>
@@ -4763,40 +5265,16 @@
           </a:p>
         </p:txBody>
       </p:sp>
-      <p:pic>
-        <p:nvPicPr>
-          <p:cNvPr id="4" name="Picture 3" descr="fig7_map_region13.png"/>
-          <p:cNvPicPr>
-            <a:picLocks noChangeAspect="1"/>
-          </p:cNvPicPr>
-          <p:nvPr/>
-        </p:nvPicPr>
-        <p:blipFill>
-          <a:blip r:embed="rId2"/>
-          <a:stretch>
-            <a:fillRect/>
-          </a:stretch>
-        </p:blipFill>
-        <p:spPr>
-          <a:xfrm>
-            <a:off x="3383280" y="1371600"/>
-            <a:ext cx="6078236" cy="5029200"/>
-          </a:xfrm>
-          <a:prstGeom prst="rect">
-            <a:avLst/>
-          </a:prstGeom>
-        </p:spPr>
-      </p:pic>
-      <p:sp>
-        <p:nvSpPr>
-          <p:cNvPr id="5" name="TextBox 4"/>
+      <p:sp>
+        <p:nvSpPr>
+          <p:cNvPr id="4" name="TextBox 3"/>
           <p:cNvSpPr txBox="1"/>
           <p:nvPr/>
         </p:nvSpPr>
         <p:spPr>
           <a:xfrm>
-            <a:off x="548640" y="6309360"/>
-            <a:ext cx="11064240" cy="457200"/>
+            <a:off x="640080" y="1554480"/>
+            <a:ext cx="10972800" cy="4937760"/>
           </a:xfrm>
           <a:prstGeom prst="rect">
             <a:avLst/>
@@ -4804,20 +5282,152 @@
           <a:noFill/>
         </p:spPr>
         <p:txBody>
-          <a:bodyPr wrap="none">
+          <a:bodyPr wrap="square">
             <a:spAutoFit/>
           </a:bodyPr>
           <a:lstStyle/>
           <a:p>
-            <a:pPr algn="ctr"/>
-            <a:r>
-              <a:rPr sz="1300" i="1">
-                <a:solidFill>
-                  <a:srgbClr val="555555"/>
-                </a:solidFill>
-                <a:latin typeface="Malgun Gothic"/>
-              </a:rPr>
-              <a:t>서울만 파란색(고접근성), 전국이 붉은색 — 서울 일극 집중</a:t>
+            <a:pPr>
+              <a:spcAft>
+                <a:spcPts val="900"/>
+              </a:spcAft>
+            </a:pPr>
+            <a:r>
+              <a:rPr sz="1800">
+                <a:solidFill>
+                  <a:srgbClr val="222222"/>
+                </a:solidFill>
+                <a:latin typeface="Malgun Gothic"/>
+              </a:rPr>
+              <a:t>• [수집] 출처별 방식이 달라 4가지로 수집</a:t>
+            </a:r>
+          </a:p>
+          <a:p>
+            <a:pPr lvl="1">
+              <a:spcAft>
+                <a:spcPts val="900"/>
+              </a:spcAft>
+            </a:pPr>
+            <a:r>
+              <a:rPr sz="1500">
+                <a:solidFill>
+                  <a:srgbClr val="222222"/>
+                </a:solidFill>
+                <a:latin typeface="Malgun Gothic"/>
+              </a:rPr>
+              <a:t>– 변협 회원현황: 웹 스크래핑(urllib + HTML 표 파싱) — 다운로드 미지원</a:t>
+            </a:r>
+          </a:p>
+          <a:p>
+            <a:pPr lvl="1">
+              <a:spcAft>
+                <a:spcPts val="900"/>
+              </a:spcAft>
+            </a:pPr>
+            <a:r>
+              <a:rPr sz="1500">
+                <a:solidFill>
+                  <a:srgbClr val="222222"/>
+                </a:solidFill>
+                <a:latin typeface="Malgun Gothic"/>
+              </a:rPr>
+              <a:t>– KOSIS(인구·GRDP·수급자)·공단(법률구조)·사법연감: 엑셀/CSV 다운로드</a:t>
+            </a:r>
+          </a:p>
+          <a:p>
+            <a:pPr>
+              <a:spcAft>
+                <a:spcPts val="900"/>
+              </a:spcAft>
+            </a:pPr>
+            <a:r>
+              <a:rPr sz="1800">
+                <a:solidFill>
+                  <a:srgbClr val="222222"/>
+                </a:solidFill>
+                <a:latin typeface="Malgun Gothic"/>
+              </a:rPr>
+              <a:t>• [정제] raw → tidy(정형) 파이프라인 (src/prepare)</a:t>
+            </a:r>
+          </a:p>
+          <a:p>
+            <a:pPr lvl="1">
+              <a:spcAft>
+                <a:spcPts val="900"/>
+              </a:spcAft>
+            </a:pPr>
+            <a:r>
+              <a:rPr sz="1500">
+                <a:solidFill>
+                  <a:srgbClr val="222222"/>
+                </a:solidFill>
+                <a:latin typeface="Malgun Gothic"/>
+              </a:rPr>
+              <a:t>– 인코딩 자동판별(cp949/utf-8), 가로형→세로형 변환·다중헤더 파싱</a:t>
+            </a:r>
+          </a:p>
+          <a:p>
+            <a:pPr lvl="1">
+              <a:spcAft>
+                <a:spcPts val="900"/>
+              </a:spcAft>
+            </a:pPr>
+            <a:r>
+              <a:rPr sz="1500">
+                <a:solidFill>
+                  <a:srgbClr val="222222"/>
+                </a:solidFill>
+                <a:latin typeface="Malgun Gothic"/>
+              </a:rPr>
+              <a:t>– 시도명 표준화: 옛/신 명칭 통일(강원도↔강원특별자치도 등)</a:t>
+            </a:r>
+          </a:p>
+          <a:p>
+            <a:pPr lvl="1">
+              <a:spcAft>
+                <a:spcPts val="900"/>
+              </a:spcAft>
+            </a:pPr>
+            <a:r>
+              <a:rPr sz="1500">
+                <a:solidFill>
+                  <a:srgbClr val="222222"/>
+                </a:solidFill>
+                <a:latin typeface="Malgun Gothic"/>
+              </a:rPr>
+              <a:t>– 지역 단위 매핑: 14지방회·법원관내·도단위 → 13권역/10도단위</a:t>
+            </a:r>
+          </a:p>
+          <a:p>
+            <a:pPr lvl="1">
+              <a:spcAft>
+                <a:spcPts val="900"/>
+              </a:spcAft>
+            </a:pPr>
+            <a:r>
+              <a:rPr sz="1500">
+                <a:solidFill>
+                  <a:srgbClr val="222222"/>
+                </a:solidFill>
+                <a:latin typeface="Malgun Gothic"/>
+              </a:rPr>
+              <a:t>– 공단 반기→연 합산, 사법연감 '본안사건' 추출(비송 제외)</a:t>
+            </a:r>
+          </a:p>
+          <a:p>
+            <a:pPr lvl="1">
+              <a:spcAft>
+                <a:spcPts val="900"/>
+              </a:spcAft>
+            </a:pPr>
+            <a:r>
+              <a:rPr sz="1500">
+                <a:solidFill>
+                  <a:srgbClr val="222222"/>
+                </a:solidFill>
+                <a:latin typeface="Malgun Gothic"/>
+              </a:rPr>
+              <a:t>– 결측·이상치 처리 → 권역×연도 패널 구조화 → 합계 교차검증</a:t>
             </a:r>
           </a:p>
         </p:txBody>
@@ -4869,7 +5479,7 @@
                 </a:solidFill>
                 <a:latin typeface="Malgun Gothic"/>
               </a:rPr>
-              <a:t>5. 가설 H2 — 변호사 ↔ 사건 부담</a:t>
+              <a:t>5. 결과 ① — LLAI 순위 (region13, 2024)</a:t>
             </a:r>
           </a:p>
         </p:txBody>
@@ -4919,7 +5529,7 @@
       </p:sp>
       <p:pic>
         <p:nvPicPr>
-          <p:cNvPr id="4" name="Picture 3" descr="fig2_scatter_a1_a2_region13.png"/>
+          <p:cNvPr id="4" name="Picture 3" descr="fig1_llai_ranking_region13.png"/>
           <p:cNvPicPr>
             <a:picLocks noChangeAspect="1"/>
           </p:cNvPicPr>
@@ -4933,8 +5543,8 @@
         </p:blipFill>
         <p:spPr>
           <a:xfrm>
-            <a:off x="457200" y="1554480"/>
-            <a:ext cx="5811212" cy="4572000"/>
+            <a:off x="365760" y="1554480"/>
+            <a:ext cx="7376387" cy="4572000"/>
           </a:xfrm>
           <a:prstGeom prst="rect">
             <a:avLst/>
@@ -4949,8 +5559,8 @@
         </p:nvSpPr>
         <p:spPr>
           <a:xfrm>
-            <a:off x="7040880" y="1828800"/>
-            <a:ext cx="4846320" cy="4937760"/>
+            <a:off x="6949440" y="1828800"/>
+            <a:ext cx="4937760" cy="4937760"/>
           </a:xfrm>
           <a:prstGeom prst="rect">
             <a:avLst/>
@@ -4965,7 +5575,7 @@
           <a:p>
             <a:pPr>
               <a:spcAft>
-                <a:spcPts val="1000"/>
+                <a:spcPts val="900"/>
               </a:spcAft>
             </a:pPr>
             <a:r>
@@ -4975,13 +5585,13 @@
                 </a:solidFill>
                 <a:latin typeface="Malgun Gothic"/>
               </a:rPr>
-              <a:t>• 강한 음의 상관</a:t>
+              <a:t>• 서울 91</a:t>
             </a:r>
           </a:p>
           <a:p>
             <a:pPr lvl="1">
               <a:spcAft>
-                <a:spcPts val="1000"/>
+                <a:spcPts val="900"/>
               </a:spcAft>
             </a:pPr>
             <a:r>
@@ -4991,13 +5601,13 @@
                 </a:solidFill>
                 <a:latin typeface="Malgun Gothic"/>
               </a:rPr>
-              <a:t>– r = −0.84 ~ −0.88 (p&lt;0.01)</a:t>
+              <a:t>– ≫ 압도적</a:t>
             </a:r>
           </a:p>
           <a:p>
             <a:pPr>
               <a:spcAft>
-                <a:spcPts val="1000"/>
+                <a:spcPts val="900"/>
               </a:spcAft>
             </a:pPr>
             <a:r>
@@ -5007,13 +5617,13 @@
                 </a:solidFill>
                 <a:latin typeface="Malgun Gothic"/>
               </a:rPr>
-              <a:t>• 변호사 부족 → 1인당 부담 폭증</a:t>
+              <a:t>• 울산·제주 2·3위</a:t>
             </a:r>
           </a:p>
           <a:p>
             <a:pPr lvl="1">
               <a:spcAft>
-                <a:spcPts val="1000"/>
+                <a:spcPts val="900"/>
               </a:spcAft>
             </a:pPr>
             <a:r>
@@ -5023,13 +5633,13 @@
                 </a:solidFill>
                 <a:latin typeface="Malgun Gothic"/>
               </a:rPr>
-              <a:t>– 비수도권 서비스 질 저하 우려</a:t>
+              <a:t>– 인구 적어 1인당 양호</a:t>
             </a:r>
           </a:p>
           <a:p>
             <a:pPr>
               <a:spcAft>
-                <a:spcPts val="1000"/>
+                <a:spcPts val="900"/>
               </a:spcAft>
             </a:pPr>
             <a:r>
@@ -5039,7 +5649,23 @@
                 </a:solidFill>
                 <a:latin typeface="Malgun Gothic"/>
               </a:rPr>
-              <a:t>• 서울은 우하단 극단적 이상치</a:t>
+              <a:t>• 인천은 하위권</a:t>
+            </a:r>
+          </a:p>
+          <a:p>
+            <a:pPr lvl="1">
+              <a:spcAft>
+                <a:spcPts val="900"/>
+              </a:spcAft>
+            </a:pPr>
+            <a:r>
+              <a:rPr sz="1700">
+                <a:solidFill>
+                  <a:srgbClr val="222222"/>
+                </a:solidFill>
+                <a:latin typeface="Malgun Gothic"/>
+              </a:rPr>
+              <a:t>– 사건부담 높음</a:t>
             </a:r>
           </a:p>
         </p:txBody>
@@ -5091,7 +5717,7 @@
                 </a:solidFill>
                 <a:latin typeface="Malgun Gothic"/>
               </a:rPr>
-              <a:t>6. 가설 H4 — 양적 팽창의 함정 ★</a:t>
+              <a:t>5. 결과 ② — 코로플레스 지도</a:t>
             </a:r>
           </a:p>
         </p:txBody>
@@ -5141,7 +5767,7 @@
       </p:sp>
       <p:pic>
         <p:nvPicPr>
-          <p:cNvPr id="4" name="Picture 3" descr="fig8_lawyer_trend.png"/>
+          <p:cNvPr id="4" name="Picture 3" descr="fig7_map_region13.png"/>
           <p:cNvPicPr>
             <a:picLocks noChangeAspect="1"/>
           </p:cNvPicPr>
@@ -5155,8 +5781,8 @@
         </p:blipFill>
         <p:spPr>
           <a:xfrm>
-            <a:off x="457200" y="1554480"/>
-            <a:ext cx="7701678" cy="4480560"/>
+            <a:off x="3383280" y="1371600"/>
+            <a:ext cx="6078236" cy="5029200"/>
           </a:xfrm>
           <a:prstGeom prst="rect">
             <a:avLst/>
@@ -5171,8 +5797,8 @@
         </p:nvSpPr>
         <p:spPr>
           <a:xfrm>
-            <a:off x="7680960" y="1737360"/>
-            <a:ext cx="4297680" cy="4937760"/>
+            <a:off x="548640" y="6309360"/>
+            <a:ext cx="11064240" cy="457200"/>
           </a:xfrm>
           <a:prstGeom prst="rect">
             <a:avLst/>
@@ -5180,104 +5806,20 @@
           <a:noFill/>
         </p:spPr>
         <p:txBody>
-          <a:bodyPr wrap="square">
+          <a:bodyPr wrap="none">
             <a:spAutoFit/>
           </a:bodyPr>
           <a:lstStyle/>
           <a:p>
-            <a:pPr>
-              <a:spcAft>
-                <a:spcPts val="1000"/>
-              </a:spcAft>
-            </a:pPr>
-            <a:r>
-              <a:rPr sz="1800">
-                <a:solidFill>
-                  <a:srgbClr val="222222"/>
-                </a:solidFill>
-                <a:latin typeface="Malgun Gothic"/>
-              </a:rPr>
-              <a:t>• 변호사 3.4배↑</a:t>
-            </a:r>
-          </a:p>
-          <a:p>
-            <a:pPr lvl="1">
-              <a:spcAft>
-                <a:spcPts val="1000"/>
-              </a:spcAft>
-            </a:pPr>
-            <a:r>
-              <a:rPr sz="1500">
-                <a:solidFill>
-                  <a:srgbClr val="222222"/>
-                </a:solidFill>
-                <a:latin typeface="Malgun Gothic"/>
-              </a:rPr>
-              <a:t>– 9,612 → 32,273명 (2009→2026)</a:t>
-            </a:r>
-          </a:p>
-          <a:p>
-            <a:pPr>
-              <a:spcAft>
-                <a:spcPts val="1000"/>
-              </a:spcAft>
-            </a:pPr>
-            <a:r>
-              <a:rPr sz="1800">
-                <a:solidFill>
-                  <a:srgbClr val="222222"/>
-                </a:solidFill>
-                <a:latin typeface="Malgun Gothic"/>
-              </a:rPr>
-              <a:t>• 그런데 서울 비중 71%→76%↑</a:t>
-            </a:r>
-          </a:p>
-          <a:p>
-            <a:pPr lvl="1">
-              <a:spcAft>
-                <a:spcPts val="1000"/>
-              </a:spcAft>
-            </a:pPr>
-            <a:r>
-              <a:rPr sz="1500">
-                <a:solidFill>
-                  <a:srgbClr val="222222"/>
-                </a:solidFill>
-                <a:latin typeface="Malgun Gothic"/>
-              </a:rPr>
-              <a:t>– 비수도권 全 권역 비중 하락</a:t>
-            </a:r>
-          </a:p>
-          <a:p>
-            <a:pPr>
-              <a:spcAft>
-                <a:spcPts val="1000"/>
-              </a:spcAft>
-            </a:pPr>
-            <a:r>
-              <a:rPr sz="1800">
-                <a:solidFill>
-                  <a:srgbClr val="222222"/>
-                </a:solidFill>
-                <a:latin typeface="Malgun Gothic"/>
-              </a:rPr>
-              <a:t>• HHI 0.53→0.60 (집중 심화)</a:t>
-            </a:r>
-          </a:p>
-          <a:p>
-            <a:pPr>
-              <a:spcAft>
-                <a:spcPts val="1000"/>
-              </a:spcAft>
-            </a:pPr>
-            <a:r>
-              <a:rPr sz="1800">
-                <a:solidFill>
-                  <a:srgbClr val="222222"/>
-                </a:solidFill>
-                <a:latin typeface="Malgun Gothic"/>
-              </a:rPr>
-              <a:t>• → 늘어난 변호사는 서울로</a:t>
+            <a:pPr algn="ctr"/>
+            <a:r>
+              <a:rPr sz="1300" i="1">
+                <a:solidFill>
+                  <a:srgbClr val="555555"/>
+                </a:solidFill>
+                <a:latin typeface="Malgun Gothic"/>
+              </a:rPr>
+              <a:t>서울만 파란색(고접근성), 전국이 붉은색 — 서울 일극 집중</a:t>
             </a:r>
           </a:p>
         </p:txBody>
@@ -5329,7 +5871,7 @@
                 </a:solidFill>
                 <a:latin typeface="Malgun Gothic"/>
               </a:rPr>
-              <a:t>7. 심화 — 서울을 빼고 보면</a:t>
+              <a:t>6. 가설 H2 — 변호사 ↔ 사건 부담</a:t>
             </a:r>
           </a:p>
         </p:txBody>
@@ -5379,7 +5921,7 @@
       </p:sp>
       <p:pic>
         <p:nvPicPr>
-          <p:cNvPr id="4" name="Picture 3" descr="fig7_map_region13_exseoul.png"/>
+          <p:cNvPr id="4" name="Picture 3" descr="fig2_scatter_a1_a2_region13.png"/>
           <p:cNvPicPr>
             <a:picLocks noChangeAspect="1"/>
           </p:cNvPicPr>
@@ -5393,8 +5935,8 @@
         </p:blipFill>
         <p:spPr>
           <a:xfrm>
-            <a:off x="365760" y="1463040"/>
-            <a:ext cx="5967722" cy="4937760"/>
+            <a:off x="457200" y="1554480"/>
+            <a:ext cx="5811212" cy="4572000"/>
           </a:xfrm>
           <a:prstGeom prst="rect">
             <a:avLst/>
@@ -5425,7 +5967,7 @@
           <a:p>
             <a:pPr>
               <a:spcAft>
-                <a:spcPts val="1000"/>
+                <a:spcPts val="900"/>
               </a:spcAft>
             </a:pPr>
             <a:r>
@@ -5435,13 +5977,29 @@
                 </a:solidFill>
                 <a:latin typeface="Malgun Gothic"/>
               </a:rPr>
-              <a:t>• 부산·울산·제주 상위 부상</a:t>
+              <a:t>• 강한 음의 상관</a:t>
+            </a:r>
+          </a:p>
+          <a:p>
+            <a:pPr lvl="1">
+              <a:spcAft>
+                <a:spcPts val="900"/>
+              </a:spcAft>
+            </a:pPr>
+            <a:r>
+              <a:rPr sz="1700">
+                <a:solidFill>
+                  <a:srgbClr val="222222"/>
+                </a:solidFill>
+                <a:latin typeface="Malgun Gothic"/>
+              </a:rPr>
+              <a:t>– r = −0.84 ~ −0.88 (p&lt;0.01)</a:t>
             </a:r>
           </a:p>
           <a:p>
             <a:pPr>
               <a:spcAft>
-                <a:spcPts val="1000"/>
+                <a:spcPts val="900"/>
               </a:spcAft>
             </a:pPr>
             <a:r>
@@ -5451,13 +6009,13 @@
                 </a:solidFill>
                 <a:latin typeface="Malgun Gothic"/>
               </a:rPr>
-              <a:t>• 경기·인천은 중하위</a:t>
+              <a:t>• 변호사 부족 → 1인당 부담 폭증</a:t>
             </a:r>
           </a:p>
           <a:p>
             <a:pPr lvl="1">
               <a:spcAft>
-                <a:spcPts val="1000"/>
+                <a:spcPts val="900"/>
               </a:spcAft>
             </a:pPr>
             <a:r>
@@ -5467,13 +6025,13 @@
                 </a:solidFill>
                 <a:latin typeface="Malgun Gothic"/>
               </a:rPr>
-              <a:t>– 인구 커서 희석 / 사건부담↑</a:t>
+              <a:t>– 비수도권 서비스 질 저하 우려</a:t>
             </a:r>
           </a:p>
           <a:p>
             <a:pPr>
               <a:spcAft>
-                <a:spcPts val="1000"/>
+                <a:spcPts val="900"/>
               </a:spcAft>
             </a:pPr>
             <a:r>
@@ -5483,39 +6041,7 @@
                 </a:solidFill>
                 <a:latin typeface="Malgun Gothic"/>
               </a:rPr>
-              <a:t>• 핵심: '수도권 우위'는</a:t>
-            </a:r>
-          </a:p>
-          <a:p>
-            <a:pPr lvl="1">
-              <a:spcAft>
-                <a:spcPts val="1000"/>
-              </a:spcAft>
-            </a:pPr>
-            <a:r>
-              <a:rPr sz="1700">
-                <a:solidFill>
-                  <a:srgbClr val="222222"/>
-                </a:solidFill>
-                <a:latin typeface="Malgun Gothic"/>
-              </a:rPr>
-              <a:t>– 사실상 서울 단독 현상</a:t>
-            </a:r>
-          </a:p>
-          <a:p>
-            <a:pPr>
-              <a:spcAft>
-                <a:spcPts val="1000"/>
-              </a:spcAft>
-            </a:pPr>
-            <a:r>
-              <a:rPr sz="2000">
-                <a:solidFill>
-                  <a:srgbClr val="222222"/>
-                </a:solidFill>
-                <a:latin typeface="Malgun Gothic"/>
-              </a:rPr>
-              <a:t>• 지방 내부 격차도 뚜렷</a:t>
+              <a:t>• 서울은 우하단 극단적 이상치</a:t>
             </a:r>
           </a:p>
         </p:txBody>

--- a/reports/발표자료.pptx
+++ b/reports/발표자료.pptx
@@ -20,6 +20,10 @@
     <p:sldId id="268" r:id="rId19"/>
     <p:sldId id="269" r:id="rId20"/>
     <p:sldId id="270" r:id="rId21"/>
+    <p:sldId id="271" r:id="rId22"/>
+    <p:sldId id="272" r:id="rId23"/>
+    <p:sldId id="273" r:id="rId24"/>
+    <p:sldId id="274" r:id="rId25"/>
   </p:sldIdLst>
   <p:sldSz cx="12191695" cy="6858000" type="screen4x3"/>
   <p:notesSz cx="6858000" cy="9144000"/>
@@ -3228,7 +3232,7 @@
                 </a:solidFill>
                 <a:latin typeface="Malgun Gothic"/>
               </a:rPr>
-              <a:t>7. 가설 H4 — 양적 팽창의 함정 ★</a:t>
+              <a:t>7. 결과 ① — LLAI 순위 (region13, 2024)</a:t>
             </a:r>
           </a:p>
         </p:txBody>
@@ -3278,7 +3282,7 @@
       </p:sp>
       <p:pic>
         <p:nvPicPr>
-          <p:cNvPr id="4" name="Picture 3" descr="fig8_lawyer_trend.png"/>
+          <p:cNvPr id="4" name="Picture 3" descr="fig1_llai_ranking_region13.png"/>
           <p:cNvPicPr>
             <a:picLocks noChangeAspect="1"/>
           </p:cNvPicPr>
@@ -3292,8 +3296,8 @@
         </p:blipFill>
         <p:spPr>
           <a:xfrm>
-            <a:off x="457200" y="1554480"/>
-            <a:ext cx="7701678" cy="4480560"/>
+            <a:off x="365760" y="1554480"/>
+            <a:ext cx="6933804" cy="4297680"/>
           </a:xfrm>
           <a:prstGeom prst="rect">
             <a:avLst/>
@@ -3308,8 +3312,8 @@
         </p:nvSpPr>
         <p:spPr>
           <a:xfrm>
-            <a:off x="7680960" y="1737360"/>
-            <a:ext cx="4297680" cy="4937760"/>
+            <a:off x="6949440" y="1828800"/>
+            <a:ext cx="4937760" cy="4937760"/>
           </a:xfrm>
           <a:prstGeom prst="rect">
             <a:avLst/>
@@ -3328,13 +3332,29 @@
               </a:spcAft>
             </a:pPr>
             <a:r>
-              <a:rPr sz="1800">
+              <a:rPr sz="2000">
                 <a:solidFill>
                   <a:srgbClr val="222222"/>
                 </a:solidFill>
                 <a:latin typeface="Malgun Gothic"/>
               </a:rPr>
-              <a:t>• 변호사 3.4배↑</a:t>
+              <a:t>• 서울 91 ≫ 압도</a:t>
+            </a:r>
+          </a:p>
+          <a:p>
+            <a:pPr>
+              <a:spcAft>
+                <a:spcPts val="900"/>
+              </a:spcAft>
+            </a:pPr>
+            <a:r>
+              <a:rPr sz="2000">
+                <a:solidFill>
+                  <a:srgbClr val="222222"/>
+                </a:solidFill>
+                <a:latin typeface="Malgun Gothic"/>
+              </a:rPr>
+              <a:t>• 울산·제주 2·3위</a:t>
             </a:r>
           </a:p>
           <a:p>
@@ -3344,13 +3364,13 @@
               </a:spcAft>
             </a:pPr>
             <a:r>
-              <a:rPr sz="1500">
+              <a:rPr sz="1700">
                 <a:solidFill>
                   <a:srgbClr val="222222"/>
                 </a:solidFill>
                 <a:latin typeface="Malgun Gothic"/>
               </a:rPr>
-              <a:t>– 9,612 → 32,273명 (2009→2026)</a:t>
+              <a:t>– (인구 적어 1인당 양호)</a:t>
             </a:r>
           </a:p>
           <a:p>
@@ -3360,13 +3380,13 @@
               </a:spcAft>
             </a:pPr>
             <a:r>
-              <a:rPr sz="1800">
+              <a:rPr sz="2000">
                 <a:solidFill>
                   <a:srgbClr val="222222"/>
                 </a:solidFill>
                 <a:latin typeface="Malgun Gothic"/>
               </a:rPr>
-              <a:t>• 그런데 서울 비중 71%→76%↑</a:t>
+              <a:t>• 인천은 하위권</a:t>
             </a:r>
           </a:p>
           <a:p>
@@ -3376,45 +3396,47 @@
               </a:spcAft>
             </a:pPr>
             <a:r>
-              <a:rPr sz="1500">
+              <a:rPr sz="1700">
                 <a:solidFill>
                   <a:srgbClr val="222222"/>
                 </a:solidFill>
                 <a:latin typeface="Malgun Gothic"/>
               </a:rPr>
-              <a:t>– 비수도권 全 권역 비중 하락</a:t>
-            </a:r>
-          </a:p>
-          <a:p>
-            <a:pPr>
-              <a:spcAft>
-                <a:spcPts val="900"/>
-              </a:spcAft>
-            </a:pPr>
-            <a:r>
-              <a:rPr sz="1800">
-                <a:solidFill>
-                  <a:srgbClr val="222222"/>
-                </a:solidFill>
-                <a:latin typeface="Malgun Gothic"/>
-              </a:rPr>
-              <a:t>• HHI 0.53→0.60 (집중 심화)</a:t>
-            </a:r>
-          </a:p>
-          <a:p>
-            <a:pPr>
-              <a:spcAft>
-                <a:spcPts val="900"/>
-              </a:spcAft>
-            </a:pPr>
-            <a:r>
-              <a:rPr sz="1800">
-                <a:solidFill>
-                  <a:srgbClr val="222222"/>
-                </a:solidFill>
-                <a:latin typeface="Malgun Gothic"/>
-              </a:rPr>
-              <a:t>• → 늘어난 변호사는 서울로</a:t>
+              <a:t>– (사건부담 높음)</a:t>
+            </a:r>
+          </a:p>
+        </p:txBody>
+      </p:sp>
+      <p:sp>
+        <p:nvSpPr>
+          <p:cNvPr id="6" name="TextBox 5"/>
+          <p:cNvSpPr txBox="1"/>
+          <p:nvPr/>
+        </p:nvSpPr>
+        <p:spPr>
+          <a:xfrm>
+            <a:off x="640080" y="5989320"/>
+            <a:ext cx="10881360" cy="640080"/>
+          </a:xfrm>
+          <a:prstGeom prst="rect">
+            <a:avLst/>
+          </a:prstGeom>
+          <a:noFill/>
+        </p:spPr>
+        <p:txBody>
+          <a:bodyPr wrap="square">
+            <a:spAutoFit/>
+          </a:bodyPr>
+          <a:lstStyle/>
+          <a:p>
+            <a:r>
+              <a:rPr sz="1400" i="1">
+                <a:solidFill>
+                  <a:srgbClr val="555555"/>
+                </a:solidFill>
+                <a:latin typeface="Malgun Gothic"/>
+              </a:rPr>
+              <a:t>📊 읽는 법 — 막대 길이=LLAI, 색=클러스터. 서울만 홀로 길고 파랑(별도 그룹).</a:t>
             </a:r>
           </a:p>
         </p:txBody>
@@ -3466,7 +3488,7 @@
                 </a:solidFill>
                 <a:latin typeface="Malgun Gothic"/>
               </a:rPr>
-              <a:t>8. 심화 — 서울을 빼고 보면</a:t>
+              <a:t>7. 결과 ② — 코로플레스 지도</a:t>
             </a:r>
           </a:p>
         </p:txBody>
@@ -3516,7 +3538,7 @@
       </p:sp>
       <p:pic>
         <p:nvPicPr>
-          <p:cNvPr id="4" name="Picture 3" descr="fig7_map_region13_exseoul.png"/>
+          <p:cNvPr id="4" name="Picture 3" descr="fig7_map_region13.png"/>
           <p:cNvPicPr>
             <a:picLocks noChangeAspect="1"/>
           </p:cNvPicPr>
@@ -3530,8 +3552,8 @@
         </p:blipFill>
         <p:spPr>
           <a:xfrm>
-            <a:off x="365760" y="1463040"/>
-            <a:ext cx="5967722" cy="4937760"/>
+            <a:off x="3657600" y="1371600"/>
+            <a:ext cx="5525669" cy="4572000"/>
           </a:xfrm>
           <a:prstGeom prst="rect">
             <a:avLst/>
@@ -3546,8 +3568,8 @@
         </p:nvSpPr>
         <p:spPr>
           <a:xfrm>
-            <a:off x="7040880" y="1828800"/>
-            <a:ext cx="4846320" cy="4937760"/>
+            <a:off x="640080" y="5989320"/>
+            <a:ext cx="10881360" cy="640080"/>
           </a:xfrm>
           <a:prstGeom prst="rect">
             <a:avLst/>
@@ -3560,99 +3582,14 @@
           </a:bodyPr>
           <a:lstStyle/>
           <a:p>
-            <a:pPr>
-              <a:spcAft>
-                <a:spcPts val="900"/>
-              </a:spcAft>
-            </a:pPr>
-            <a:r>
-              <a:rPr sz="2000">
-                <a:solidFill>
-                  <a:srgbClr val="222222"/>
-                </a:solidFill>
-                <a:latin typeface="Malgun Gothic"/>
-              </a:rPr>
-              <a:t>• 부산·울산·제주 상위 부상</a:t>
-            </a:r>
-          </a:p>
-          <a:p>
-            <a:pPr>
-              <a:spcAft>
-                <a:spcPts val="900"/>
-              </a:spcAft>
-            </a:pPr>
-            <a:r>
-              <a:rPr sz="2000">
-                <a:solidFill>
-                  <a:srgbClr val="222222"/>
-                </a:solidFill>
-                <a:latin typeface="Malgun Gothic"/>
-              </a:rPr>
-              <a:t>• 경기·인천은 중하위</a:t>
-            </a:r>
-          </a:p>
-          <a:p>
-            <a:pPr lvl="1">
-              <a:spcAft>
-                <a:spcPts val="900"/>
-              </a:spcAft>
-            </a:pPr>
-            <a:r>
-              <a:rPr sz="1700">
-                <a:solidFill>
-                  <a:srgbClr val="222222"/>
-                </a:solidFill>
-                <a:latin typeface="Malgun Gothic"/>
-              </a:rPr>
-              <a:t>– 인구 커서 희석 / 사건부담↑</a:t>
-            </a:r>
-          </a:p>
-          <a:p>
-            <a:pPr>
-              <a:spcAft>
-                <a:spcPts val="900"/>
-              </a:spcAft>
-            </a:pPr>
-            <a:r>
-              <a:rPr sz="2000">
-                <a:solidFill>
-                  <a:srgbClr val="222222"/>
-                </a:solidFill>
-                <a:latin typeface="Malgun Gothic"/>
-              </a:rPr>
-              <a:t>• 핵심: '수도권 우위'는</a:t>
-            </a:r>
-          </a:p>
-          <a:p>
-            <a:pPr lvl="1">
-              <a:spcAft>
-                <a:spcPts val="900"/>
-              </a:spcAft>
-            </a:pPr>
-            <a:r>
-              <a:rPr sz="1700">
-                <a:solidFill>
-                  <a:srgbClr val="222222"/>
-                </a:solidFill>
-                <a:latin typeface="Malgun Gothic"/>
-              </a:rPr>
-              <a:t>– 사실상 서울 단독 현상</a:t>
-            </a:r>
-          </a:p>
-          <a:p>
-            <a:pPr>
-              <a:spcAft>
-                <a:spcPts val="900"/>
-              </a:spcAft>
-            </a:pPr>
-            <a:r>
-              <a:rPr sz="2000">
-                <a:solidFill>
-                  <a:srgbClr val="222222"/>
-                </a:solidFill>
-                <a:latin typeface="Malgun Gothic"/>
-              </a:rPr>
-              <a:t>• 지방 내부 격차도 뚜렷</a:t>
+            <a:r>
+              <a:rPr sz="1400" i="1">
+                <a:solidFill>
+                  <a:srgbClr val="555555"/>
+                </a:solidFill>
+                <a:latin typeface="Malgun Gothic"/>
+              </a:rPr>
+              <a:t>📊 읽는 법 — 파랑=고접근성, 빨강=저접근성. 서울만 파랑, 전국이 붉음 → 서울 일극 집중.</a:t>
             </a:r>
           </a:p>
         </p:txBody>
@@ -3704,7 +3641,7 @@
                 </a:solidFill>
                 <a:latin typeface="Malgun Gothic"/>
               </a:rPr>
-              <a:t>9. 가설 검정 종합</a:t>
+              <a:t>8. 가설 H2 — 변호사 ↔ 사건 부담</a:t>
             </a:r>
           </a:p>
         </p:txBody>
@@ -3752,16 +3689,40 @@
           </a:p>
         </p:txBody>
       </p:sp>
-      <p:sp>
-        <p:nvSpPr>
-          <p:cNvPr id="4" name="TextBox 3"/>
+      <p:pic>
+        <p:nvPicPr>
+          <p:cNvPr id="4" name="Picture 3" descr="fig2_scatter_a1_a2_region13.png"/>
+          <p:cNvPicPr>
+            <a:picLocks noChangeAspect="1"/>
+          </p:cNvPicPr>
+          <p:nvPr/>
+        </p:nvPicPr>
+        <p:blipFill>
+          <a:blip r:embed="rId2"/>
+          <a:stretch>
+            <a:fillRect/>
+          </a:stretch>
+        </p:blipFill>
+        <p:spPr>
+          <a:xfrm>
+            <a:off x="457200" y="1554480"/>
+            <a:ext cx="5346315" cy="4206240"/>
+          </a:xfrm>
+          <a:prstGeom prst="rect">
+            <a:avLst/>
+          </a:prstGeom>
+        </p:spPr>
+      </p:pic>
+      <p:sp>
+        <p:nvSpPr>
+          <p:cNvPr id="5" name="TextBox 4"/>
           <p:cNvSpPr txBox="1"/>
           <p:nvPr/>
         </p:nvSpPr>
         <p:spPr>
           <a:xfrm>
-            <a:off x="640080" y="1554480"/>
-            <a:ext cx="10972800" cy="4937760"/>
+            <a:off x="7040880" y="1828800"/>
+            <a:ext cx="4846320" cy="4937760"/>
           </a:xfrm>
           <a:prstGeom prst="rect">
             <a:avLst/>
@@ -3786,7 +3747,23 @@
                 </a:solidFill>
                 <a:latin typeface="Malgun Gothic"/>
               </a:rPr>
-              <a:t>• H2 ✅ 강하게 지지 — corr(A1,A2) = −0.84~−0.88 (p&lt;0.01)</a:t>
+              <a:t>• 강한 음의 상관</a:t>
+            </a:r>
+          </a:p>
+          <a:p>
+            <a:pPr lvl="1">
+              <a:spcAft>
+                <a:spcPts val="900"/>
+              </a:spcAft>
+            </a:pPr>
+            <a:r>
+              <a:rPr sz="1700">
+                <a:solidFill>
+                  <a:srgbClr val="222222"/>
+                </a:solidFill>
+                <a:latin typeface="Malgun Gothic"/>
+              </a:rPr>
+              <a:t>– r = −0.84 ~ −0.88 (p&lt;0.01)</a:t>
             </a:r>
           </a:p>
           <a:p>
@@ -3802,7 +3779,7 @@
                 </a:solidFill>
                 <a:latin typeface="Malgun Gothic"/>
               </a:rPr>
-              <a:t>• H4 ✅ 지지 — 변호사 3.4배↑에도 서울 집중 심화 + 법률구조 격차 확대</a:t>
+              <a:t>• 변호사 부족 → 1인당 부담 폭증</a:t>
             </a:r>
           </a:p>
           <a:p>
@@ -3818,39 +3795,41 @@
                 </a:solidFill>
                 <a:latin typeface="Malgun Gothic"/>
               </a:rPr>
-              <a:t>• H1 △ 방향만 일치 — 수도권 1인당 인구 4,039 &lt; 비수도권 5,250 (p=0.19)</a:t>
-            </a:r>
-          </a:p>
-          <a:p>
-            <a:pPr>
-              <a:spcAft>
-                <a:spcPts val="900"/>
-              </a:spcAft>
-            </a:pPr>
-            <a:r>
-              <a:rPr sz="2000">
-                <a:solidFill>
-                  <a:srgbClr val="222222"/>
-                </a:solidFill>
-                <a:latin typeface="Malgun Gothic"/>
-              </a:rPr>
-              <a:t>• H3 △ 약함 — GRDP와 접근성 상관 비유의</a:t>
-            </a:r>
-          </a:p>
-          <a:p>
-            <a:pPr lvl="1">
-              <a:spcAft>
-                <a:spcPts val="900"/>
-              </a:spcAft>
-            </a:pPr>
-            <a:r>
-              <a:rPr sz="1700">
-                <a:solidFill>
-                  <a:srgbClr val="222222"/>
-                </a:solidFill>
-                <a:latin typeface="Malgun Gothic"/>
-              </a:rPr>
-              <a:t>– 표본 작음(권역 10~13개) → 검정력 한계 명시</a:t>
+              <a:t>• 서울은 우하단 극단 이상치</a:t>
+            </a:r>
+          </a:p>
+        </p:txBody>
+      </p:sp>
+      <p:sp>
+        <p:nvSpPr>
+          <p:cNvPr id="6" name="TextBox 5"/>
+          <p:cNvSpPr txBox="1"/>
+          <p:nvPr/>
+        </p:nvSpPr>
+        <p:spPr>
+          <a:xfrm>
+            <a:off x="640080" y="5989320"/>
+            <a:ext cx="10881360" cy="640080"/>
+          </a:xfrm>
+          <a:prstGeom prst="rect">
+            <a:avLst/>
+          </a:prstGeom>
+          <a:noFill/>
+        </p:spPr>
+        <p:txBody>
+          <a:bodyPr wrap="square">
+            <a:spAutoFit/>
+          </a:bodyPr>
+          <a:lstStyle/>
+          <a:p>
+            <a:r>
+              <a:rPr sz="1400" i="1">
+                <a:solidFill>
+                  <a:srgbClr val="555555"/>
+                </a:solidFill>
+                <a:latin typeface="Malgun Gothic"/>
+              </a:rPr>
+              <a:t>📊 읽는 법 — 오른쪽 아래로 갈수록 좋음. 서울은 맨 오른쪽 아래, 비수도권은 왼쪽 위에 뭉침.</a:t>
             </a:r>
           </a:p>
         </p:txBody>
@@ -3902,7 +3881,7 @@
                 </a:solidFill>
                 <a:latin typeface="Malgun Gothic"/>
               </a:rPr>
-              <a:t>10. 결론 · 정책 시사점</a:t>
+              <a:t>9. 가설 H4 — 양적 팽창의 함정 ★</a:t>
             </a:r>
           </a:p>
         </p:txBody>
@@ -3950,16 +3929,40 @@
           </a:p>
         </p:txBody>
       </p:sp>
-      <p:sp>
-        <p:nvSpPr>
-          <p:cNvPr id="4" name="TextBox 3"/>
+      <p:pic>
+        <p:nvPicPr>
+          <p:cNvPr id="4" name="Picture 3" descr="fig8_lawyer_trend.png"/>
+          <p:cNvPicPr>
+            <a:picLocks noChangeAspect="1"/>
+          </p:cNvPicPr>
+          <p:nvPr/>
+        </p:nvPicPr>
+        <p:blipFill>
+          <a:blip r:embed="rId2"/>
+          <a:stretch>
+            <a:fillRect/>
+          </a:stretch>
+        </p:blipFill>
+        <p:spPr>
+          <a:xfrm>
+            <a:off x="457200" y="1554480"/>
+            <a:ext cx="7072970" cy="4114800"/>
+          </a:xfrm>
+          <a:prstGeom prst="rect">
+            <a:avLst/>
+          </a:prstGeom>
+        </p:spPr>
+      </p:pic>
+      <p:sp>
+        <p:nvSpPr>
+          <p:cNvPr id="5" name="TextBox 4"/>
           <p:cNvSpPr txBox="1"/>
           <p:nvPr/>
         </p:nvSpPr>
         <p:spPr>
           <a:xfrm>
-            <a:off x="640080" y="1554480"/>
-            <a:ext cx="10972800" cy="4937760"/>
+            <a:off x="7680960" y="1737360"/>
+            <a:ext cx="4297680" cy="4937760"/>
           </a:xfrm>
           <a:prstGeom prst="rect">
             <a:avLst/>
@@ -3978,13 +3981,29 @@
               </a:spcAft>
             </a:pPr>
             <a:r>
-              <a:rPr sz="2000">
+              <a:rPr sz="1800">
                 <a:solidFill>
                   <a:srgbClr val="222222"/>
                 </a:solidFill>
                 <a:latin typeface="Malgun Gothic"/>
               </a:rPr>
-              <a:t>• 변호사 자원의 서울 일극 집중이 격차의 핵심 동인</a:t>
+              <a:t>• 변호사 3.4배↑</a:t>
+            </a:r>
+          </a:p>
+          <a:p>
+            <a:pPr lvl="1">
+              <a:spcAft>
+                <a:spcPts val="900"/>
+              </a:spcAft>
+            </a:pPr>
+            <a:r>
+              <a:rPr sz="1500">
+                <a:solidFill>
+                  <a:srgbClr val="222222"/>
+                </a:solidFill>
+                <a:latin typeface="Malgun Gothic"/>
+              </a:rPr>
+              <a:t>– 9,612 → 32,273명</a:t>
             </a:r>
           </a:p>
           <a:p>
@@ -3994,13 +4013,29 @@
               </a:spcAft>
             </a:pPr>
             <a:r>
-              <a:rPr sz="2000">
+              <a:rPr sz="1800">
                 <a:solidFill>
                   <a:srgbClr val="222222"/>
                 </a:solidFill>
                 <a:latin typeface="Malgun Gothic"/>
               </a:rPr>
-              <a:t>• 인구 대비·사건부담이 접근성을 좌우 (인천=수도권인데 하위)</a:t>
+              <a:t>• 서울 비중 71%→76%↑</a:t>
+            </a:r>
+          </a:p>
+          <a:p>
+            <a:pPr lvl="1">
+              <a:spcAft>
+                <a:spcPts val="900"/>
+              </a:spcAft>
+            </a:pPr>
+            <a:r>
+              <a:rPr sz="1500">
+                <a:solidFill>
+                  <a:srgbClr val="222222"/>
+                </a:solidFill>
+                <a:latin typeface="Malgun Gothic"/>
+              </a:rPr>
+              <a:t>– 비수도권 全 권역 하락</a:t>
             </a:r>
           </a:p>
           <a:p>
@@ -4010,61 +4045,47 @@
               </a:spcAft>
             </a:pPr>
             <a:r>
-              <a:rPr sz="2000">
+              <a:rPr sz="1800">
                 <a:solidFill>
                   <a:srgbClr val="222222"/>
                 </a:solidFill>
                 <a:latin typeface="Malgun Gothic"/>
               </a:rPr>
-              <a:t>• 양적 팽창만으로는 격차 해소 안 됨</a:t>
-            </a:r>
-          </a:p>
-          <a:p>
-            <a:pPr>
-              <a:spcAft>
-                <a:spcPts val="900"/>
-              </a:spcAft>
-            </a:pPr>
-            <a:r>
-              <a:rPr sz="2000">
-                <a:solidFill>
-                  <a:srgbClr val="222222"/>
-                </a:solidFill>
-                <a:latin typeface="Malgun Gothic"/>
-              </a:rPr>
-              <a:t>• 정책 제언</a:t>
-            </a:r>
-          </a:p>
-          <a:p>
-            <a:pPr lvl="1">
-              <a:spcAft>
-                <a:spcPts val="900"/>
-              </a:spcAft>
-            </a:pPr>
-            <a:r>
-              <a:rPr sz="1700">
-                <a:solidFill>
-                  <a:srgbClr val="222222"/>
-                </a:solidFill>
-                <a:latin typeface="Malgun Gothic"/>
-              </a:rPr>
-              <a:t>– 지방 변호사 유치 인센티브 / 공단 자원 비수도권 우선 배치</a:t>
-            </a:r>
-          </a:p>
-          <a:p>
-            <a:pPr lvl="1">
-              <a:spcAft>
-                <a:spcPts val="900"/>
-              </a:spcAft>
-            </a:pPr>
-            <a:r>
-              <a:rPr sz="1700">
-                <a:solidFill>
-                  <a:srgbClr val="222222"/>
-                </a:solidFill>
-                <a:latin typeface="Malgun Gothic"/>
-              </a:rPr>
-              <a:t>– 사건부담 높은 권역 인력 보강 / 로스쿨 정원·배치 연계</a:t>
+              <a:t>• HHI 0.53→0.60 심화</a:t>
+            </a:r>
+          </a:p>
+        </p:txBody>
+      </p:sp>
+      <p:sp>
+        <p:nvSpPr>
+          <p:cNvPr id="6" name="TextBox 5"/>
+          <p:cNvSpPr txBox="1"/>
+          <p:nvPr/>
+        </p:nvSpPr>
+        <p:spPr>
+          <a:xfrm>
+            <a:off x="640080" y="5989320"/>
+            <a:ext cx="10881360" cy="640080"/>
+          </a:xfrm>
+          <a:prstGeom prst="rect">
+            <a:avLst/>
+          </a:prstGeom>
+          <a:noFill/>
+        </p:spPr>
+        <p:txBody>
+          <a:bodyPr wrap="square">
+            <a:spAutoFit/>
+          </a:bodyPr>
+          <a:lstStyle/>
+          <a:p>
+            <a:r>
+              <a:rPr sz="1400" i="1">
+                <a:solidFill>
+                  <a:srgbClr val="555555"/>
+                </a:solidFill>
+                <a:latin typeface="Malgun Gothic"/>
+              </a:rPr>
+              <a:t>📊 읽는 법 — 권역별 점유율 2009(회색) vs 2026(빨강). 서울만 커지고 나머지는 줄거나 정체.</a:t>
             </a:r>
           </a:p>
         </p:txBody>
@@ -4116,7 +4137,7 @@
                 </a:solidFill>
                 <a:latin typeface="Malgun Gothic"/>
               </a:rPr>
-              <a:t>11. 한계와 향후 과제</a:t>
+              <a:t>10. 심화 — 서울을 빼고 보면</a:t>
             </a:r>
           </a:p>
         </p:txBody>
@@ -4164,16 +4185,40 @@
           </a:p>
         </p:txBody>
       </p:sp>
-      <p:sp>
-        <p:nvSpPr>
-          <p:cNvPr id="4" name="TextBox 3"/>
+      <p:pic>
+        <p:nvPicPr>
+          <p:cNvPr id="4" name="Picture 3" descr="fig7_map_region13_exseoul.png"/>
+          <p:cNvPicPr>
+            <a:picLocks noChangeAspect="1"/>
+          </p:cNvPicPr>
+          <p:nvPr/>
+        </p:nvPicPr>
+        <p:blipFill>
+          <a:blip r:embed="rId2"/>
+          <a:stretch>
+            <a:fillRect/>
+          </a:stretch>
+        </p:blipFill>
+        <p:spPr>
+          <a:xfrm>
+            <a:off x="365760" y="1463040"/>
+            <a:ext cx="5304642" cy="4389120"/>
+          </a:xfrm>
+          <a:prstGeom prst="rect">
+            <a:avLst/>
+          </a:prstGeom>
+        </p:spPr>
+      </p:pic>
+      <p:sp>
+        <p:nvSpPr>
+          <p:cNvPr id="5" name="TextBox 4"/>
           <p:cNvSpPr txBox="1"/>
           <p:nvPr/>
         </p:nvSpPr>
         <p:spPr>
           <a:xfrm>
-            <a:off x="640080" y="1554480"/>
-            <a:ext cx="10972800" cy="4937760"/>
+            <a:off x="7040880" y="1828800"/>
+            <a:ext cx="4846320" cy="4937760"/>
           </a:xfrm>
           <a:prstGeom prst="rect">
             <a:avLst/>
@@ -4198,7 +4243,7 @@
                 </a:solidFill>
                 <a:latin typeface="Malgun Gothic"/>
               </a:rPr>
-              <a:t>• 변호사 2시점(2009·현재) — 연속 시계열은 변호사백서 PDF 보강 필요</a:t>
+              <a:t>• 부산·울산·제주 상위 부상</a:t>
             </a:r>
           </a:p>
           <a:p>
@@ -4214,7 +4259,7 @@
                 </a:solidFill>
                 <a:latin typeface="Malgun Gothic"/>
               </a:rPr>
-              <a:t>• 표본이 작아 통계적 검정력 제한</a:t>
+              <a:t>• 경기·인천은 중하위</a:t>
             </a:r>
           </a:p>
           <a:p>
@@ -4230,23 +4275,57 @@
                 </a:solidFill>
                 <a:latin typeface="Malgun Gothic"/>
               </a:rPr>
-              <a:t>• A3 공단 10도단위 → region13에선 인구비 근사배분</a:t>
-            </a:r>
-          </a:p>
-          <a:p>
-            <a:pPr>
+              <a:t>• 핵심: '수도권 우위'는</a:t>
+            </a:r>
+          </a:p>
+          <a:p>
+            <a:pPr lvl="1">
               <a:spcAft>
                 <a:spcPts val="900"/>
               </a:spcAft>
             </a:pPr>
             <a:r>
-              <a:rPr sz="2000">
+              <a:rPr sz="1700">
                 <a:solidFill>
                   <a:srgbClr val="222222"/>
                 </a:solidFill>
                 <a:latin typeface="Malgun Gothic"/>
               </a:rPr>
-              <a:t>• 향후: 코로플레스 대시보드 고도화, 시계열 LLAI</a:t>
+              <a:t>– 사실상 서울 단독 현상</a:t>
+            </a:r>
+          </a:p>
+        </p:txBody>
+      </p:sp>
+      <p:sp>
+        <p:nvSpPr>
+          <p:cNvPr id="6" name="TextBox 5"/>
+          <p:cNvSpPr txBox="1"/>
+          <p:nvPr/>
+        </p:nvSpPr>
+        <p:spPr>
+          <a:xfrm>
+            <a:off x="640080" y="5989320"/>
+            <a:ext cx="10881360" cy="640080"/>
+          </a:xfrm>
+          <a:prstGeom prst="rect">
+            <a:avLst/>
+          </a:prstGeom>
+          <a:noFill/>
+        </p:spPr>
+        <p:txBody>
+          <a:bodyPr wrap="square">
+            <a:spAutoFit/>
+          </a:bodyPr>
+          <a:lstStyle/>
+          <a:p>
+            <a:r>
+              <a:rPr sz="1400" i="1">
+                <a:solidFill>
+                  <a:srgbClr val="555555"/>
+                </a:solidFill>
+                <a:latin typeface="Malgun Gothic"/>
+              </a:rPr>
+              <a:t>📊 읽는 법 — 서울 제외·재정규화(서울 회색). 색 범위 재조정 → 지방 내부 격차가 보임.</a:t>
             </a:r>
           </a:p>
         </p:txBody>
@@ -4277,6 +4356,1907 @@
         </p:nvSpPr>
         <p:spPr>
           <a:xfrm>
+            <a:off x="502920" y="320040"/>
+            <a:ext cx="11155680" cy="914400"/>
+          </a:xfrm>
+          <a:prstGeom prst="rect">
+            <a:avLst/>
+          </a:prstGeom>
+          <a:noFill/>
+        </p:spPr>
+        <p:txBody>
+          <a:bodyPr wrap="square">
+            <a:spAutoFit/>
+          </a:bodyPr>
+          <a:lstStyle/>
+          <a:p>
+            <a:r>
+              <a:rPr sz="3000" b="1">
+                <a:solidFill>
+                  <a:srgbClr val="1F3A5F"/>
+                </a:solidFill>
+                <a:latin typeface="Malgun Gothic"/>
+              </a:rPr>
+              <a:t>11. 가설 검정 종합</a:t>
+            </a:r>
+          </a:p>
+        </p:txBody>
+      </p:sp>
+      <p:sp>
+        <p:nvSpPr>
+          <p:cNvPr id="3" name="Rectangle 2"/>
+          <p:cNvSpPr/>
+          <p:nvPr/>
+        </p:nvSpPr>
+        <p:spPr>
+          <a:xfrm>
+            <a:off x="548640" y="1234440"/>
+            <a:ext cx="11064240" cy="38100"/>
+          </a:xfrm>
+          <a:prstGeom prst="rect">
+            <a:avLst/>
+          </a:prstGeom>
+          <a:solidFill>
+            <a:srgbClr val="C44E52"/>
+          </a:solidFill>
+          <a:ln>
+            <a:noFill/>
+          </a:ln>
+        </p:spPr>
+        <p:style>
+          <a:lnRef idx="1">
+            <a:schemeClr val="accent1"/>
+          </a:lnRef>
+          <a:fillRef idx="3">
+            <a:schemeClr val="accent1"/>
+          </a:fillRef>
+          <a:effectRef idx="2">
+            <a:schemeClr val="accent1"/>
+          </a:effectRef>
+          <a:fontRef idx="minor">
+            <a:schemeClr val="lt1"/>
+          </a:fontRef>
+        </p:style>
+        <p:txBody>
+          <a:bodyPr rtlCol="0" anchor="ctr"/>
+          <a:lstStyle/>
+          <a:p>
+            <a:pPr algn="ctr"/>
+          </a:p>
+        </p:txBody>
+      </p:sp>
+      <p:sp>
+        <p:nvSpPr>
+          <p:cNvPr id="4" name="TextBox 3"/>
+          <p:cNvSpPr txBox="1"/>
+          <p:nvPr/>
+        </p:nvSpPr>
+        <p:spPr>
+          <a:xfrm>
+            <a:off x="640080" y="1554480"/>
+            <a:ext cx="10972800" cy="4937760"/>
+          </a:xfrm>
+          <a:prstGeom prst="rect">
+            <a:avLst/>
+          </a:prstGeom>
+          <a:noFill/>
+        </p:spPr>
+        <p:txBody>
+          <a:bodyPr wrap="square">
+            <a:spAutoFit/>
+          </a:bodyPr>
+          <a:lstStyle/>
+          <a:p>
+            <a:pPr>
+              <a:spcAft>
+                <a:spcPts val="900"/>
+              </a:spcAft>
+            </a:pPr>
+            <a:r>
+              <a:rPr sz="2000">
+                <a:solidFill>
+                  <a:srgbClr val="222222"/>
+                </a:solidFill>
+                <a:latin typeface="Malgun Gothic"/>
+              </a:rPr>
+              <a:t>• H2 ✅ 강하게 지지 — corr(A1,A2) = −0.84~−0.88 (p&lt;0.01)</a:t>
+            </a:r>
+          </a:p>
+          <a:p>
+            <a:pPr>
+              <a:spcAft>
+                <a:spcPts val="900"/>
+              </a:spcAft>
+            </a:pPr>
+            <a:r>
+              <a:rPr sz="2000">
+                <a:solidFill>
+                  <a:srgbClr val="222222"/>
+                </a:solidFill>
+                <a:latin typeface="Malgun Gothic"/>
+              </a:rPr>
+              <a:t>• H4 ✅ 지지 — 변호사 3.4배↑에도 서울 집중 심화 + 법률구조 격차 확대</a:t>
+            </a:r>
+          </a:p>
+          <a:p>
+            <a:pPr>
+              <a:spcAft>
+                <a:spcPts val="900"/>
+              </a:spcAft>
+            </a:pPr>
+            <a:r>
+              <a:rPr sz="2000">
+                <a:solidFill>
+                  <a:srgbClr val="222222"/>
+                </a:solidFill>
+                <a:latin typeface="Malgun Gothic"/>
+              </a:rPr>
+              <a:t>• H1 △ 방향만 일치 — 수도권 1인당 인구 4,039 &lt; 비수도권 5,250 (p=0.19)</a:t>
+            </a:r>
+          </a:p>
+          <a:p>
+            <a:pPr>
+              <a:spcAft>
+                <a:spcPts val="900"/>
+              </a:spcAft>
+            </a:pPr>
+            <a:r>
+              <a:rPr sz="2000">
+                <a:solidFill>
+                  <a:srgbClr val="222222"/>
+                </a:solidFill>
+                <a:latin typeface="Malgun Gothic"/>
+              </a:rPr>
+              <a:t>• H3 △ 약함 — GRDP와 접근성 상관 비유의</a:t>
+            </a:r>
+          </a:p>
+          <a:p>
+            <a:pPr lvl="1">
+              <a:spcAft>
+                <a:spcPts val="900"/>
+              </a:spcAft>
+            </a:pPr>
+            <a:r>
+              <a:rPr sz="1700">
+                <a:solidFill>
+                  <a:srgbClr val="222222"/>
+                </a:solidFill>
+                <a:latin typeface="Malgun Gothic"/>
+              </a:rPr>
+              <a:t>– 표본 작음(권역 10~13개) → 검정력 한계 명시</a:t>
+            </a:r>
+          </a:p>
+        </p:txBody>
+      </p:sp>
+    </p:spTree>
+  </p:cSld>
+  <p:clrMapOvr>
+    <a:masterClrMapping/>
+  </p:clrMapOvr>
+</p:sld>
+</file>
+
+<file path=ppt/slides/slide16.xml><?xml version="1.0" encoding="utf-8"?>
+<p:sld xmlns:a="http://schemas.openxmlformats.org/drawingml/2006/main" xmlns:p="http://schemas.openxmlformats.org/presentationml/2006/main" xmlns:r="http://schemas.openxmlformats.org/officeDocument/2006/relationships">
+  <p:cSld>
+    <p:spTree>
+      <p:nvGrpSpPr>
+        <p:cNvPr id="1" name=""/>
+        <p:cNvGrpSpPr/>
+        <p:nvPr/>
+      </p:nvGrpSpPr>
+      <p:grpSpPr/>
+      <p:sp>
+        <p:nvSpPr>
+          <p:cNvPr id="2" name="TextBox 1"/>
+          <p:cNvSpPr txBox="1"/>
+          <p:nvPr/>
+        </p:nvSpPr>
+        <p:spPr>
+          <a:xfrm>
+            <a:off x="502920" y="320040"/>
+            <a:ext cx="11155680" cy="914400"/>
+          </a:xfrm>
+          <a:prstGeom prst="rect">
+            <a:avLst/>
+          </a:prstGeom>
+          <a:noFill/>
+        </p:spPr>
+        <p:txBody>
+          <a:bodyPr wrap="square">
+            <a:spAutoFit/>
+          </a:bodyPr>
+          <a:lstStyle/>
+          <a:p>
+            <a:r>
+              <a:rPr sz="3000" b="1">
+                <a:solidFill>
+                  <a:srgbClr val="1F3A5F"/>
+                </a:solidFill>
+                <a:latin typeface="Malgun Gothic"/>
+              </a:rPr>
+              <a:t>12. 결론 · 정책 시사점</a:t>
+            </a:r>
+          </a:p>
+        </p:txBody>
+      </p:sp>
+      <p:sp>
+        <p:nvSpPr>
+          <p:cNvPr id="3" name="Rectangle 2"/>
+          <p:cNvSpPr/>
+          <p:nvPr/>
+        </p:nvSpPr>
+        <p:spPr>
+          <a:xfrm>
+            <a:off x="548640" y="1234440"/>
+            <a:ext cx="11064240" cy="38100"/>
+          </a:xfrm>
+          <a:prstGeom prst="rect">
+            <a:avLst/>
+          </a:prstGeom>
+          <a:solidFill>
+            <a:srgbClr val="C44E52"/>
+          </a:solidFill>
+          <a:ln>
+            <a:noFill/>
+          </a:ln>
+        </p:spPr>
+        <p:style>
+          <a:lnRef idx="1">
+            <a:schemeClr val="accent1"/>
+          </a:lnRef>
+          <a:fillRef idx="3">
+            <a:schemeClr val="accent1"/>
+          </a:fillRef>
+          <a:effectRef idx="2">
+            <a:schemeClr val="accent1"/>
+          </a:effectRef>
+          <a:fontRef idx="minor">
+            <a:schemeClr val="lt1"/>
+          </a:fontRef>
+        </p:style>
+        <p:txBody>
+          <a:bodyPr rtlCol="0" anchor="ctr"/>
+          <a:lstStyle/>
+          <a:p>
+            <a:pPr algn="ctr"/>
+          </a:p>
+        </p:txBody>
+      </p:sp>
+      <p:sp>
+        <p:nvSpPr>
+          <p:cNvPr id="4" name="TextBox 3"/>
+          <p:cNvSpPr txBox="1"/>
+          <p:nvPr/>
+        </p:nvSpPr>
+        <p:spPr>
+          <a:xfrm>
+            <a:off x="640080" y="1554480"/>
+            <a:ext cx="10972800" cy="4937760"/>
+          </a:xfrm>
+          <a:prstGeom prst="rect">
+            <a:avLst/>
+          </a:prstGeom>
+          <a:noFill/>
+        </p:spPr>
+        <p:txBody>
+          <a:bodyPr wrap="square">
+            <a:spAutoFit/>
+          </a:bodyPr>
+          <a:lstStyle/>
+          <a:p>
+            <a:pPr>
+              <a:spcAft>
+                <a:spcPts val="900"/>
+              </a:spcAft>
+            </a:pPr>
+            <a:r>
+              <a:rPr sz="2000">
+                <a:solidFill>
+                  <a:srgbClr val="222222"/>
+                </a:solidFill>
+                <a:latin typeface="Malgun Gothic"/>
+              </a:rPr>
+              <a:t>• 변호사 자원의 서울 일극 집중이 격차의 핵심 동인</a:t>
+            </a:r>
+          </a:p>
+          <a:p>
+            <a:pPr>
+              <a:spcAft>
+                <a:spcPts val="900"/>
+              </a:spcAft>
+            </a:pPr>
+            <a:r>
+              <a:rPr sz="2000">
+                <a:solidFill>
+                  <a:srgbClr val="222222"/>
+                </a:solidFill>
+                <a:latin typeface="Malgun Gothic"/>
+              </a:rPr>
+              <a:t>• 인구 대비·사건부담이 접근성을 좌우 (인천=수도권인데 하위)</a:t>
+            </a:r>
+          </a:p>
+          <a:p>
+            <a:pPr>
+              <a:spcAft>
+                <a:spcPts val="900"/>
+              </a:spcAft>
+            </a:pPr>
+            <a:r>
+              <a:rPr sz="2000">
+                <a:solidFill>
+                  <a:srgbClr val="222222"/>
+                </a:solidFill>
+                <a:latin typeface="Malgun Gothic"/>
+              </a:rPr>
+              <a:t>• 양적 팽창만으로는 격차 해소 안 됨</a:t>
+            </a:r>
+          </a:p>
+          <a:p>
+            <a:pPr>
+              <a:spcAft>
+                <a:spcPts val="900"/>
+              </a:spcAft>
+            </a:pPr>
+            <a:r>
+              <a:rPr sz="2000">
+                <a:solidFill>
+                  <a:srgbClr val="222222"/>
+                </a:solidFill>
+                <a:latin typeface="Malgun Gothic"/>
+              </a:rPr>
+              <a:t>• 정책 제언</a:t>
+            </a:r>
+          </a:p>
+          <a:p>
+            <a:pPr lvl="1">
+              <a:spcAft>
+                <a:spcPts val="900"/>
+              </a:spcAft>
+            </a:pPr>
+            <a:r>
+              <a:rPr sz="1700">
+                <a:solidFill>
+                  <a:srgbClr val="222222"/>
+                </a:solidFill>
+                <a:latin typeface="Malgun Gothic"/>
+              </a:rPr>
+              <a:t>– 지방 변호사 유치 인센티브 / 공단 자원 비수도권 우선 배치</a:t>
+            </a:r>
+          </a:p>
+          <a:p>
+            <a:pPr lvl="1">
+              <a:spcAft>
+                <a:spcPts val="900"/>
+              </a:spcAft>
+            </a:pPr>
+            <a:r>
+              <a:rPr sz="1700">
+                <a:solidFill>
+                  <a:srgbClr val="222222"/>
+                </a:solidFill>
+                <a:latin typeface="Malgun Gothic"/>
+              </a:rPr>
+              <a:t>– 사건부담 높은 권역 인력 보강 / 로스쿨 정원·배치 연계</a:t>
+            </a:r>
+          </a:p>
+        </p:txBody>
+      </p:sp>
+    </p:spTree>
+  </p:cSld>
+  <p:clrMapOvr>
+    <a:masterClrMapping/>
+  </p:clrMapOvr>
+</p:sld>
+</file>
+
+<file path=ppt/slides/slide17.xml><?xml version="1.0" encoding="utf-8"?>
+<p:sld xmlns:a="http://schemas.openxmlformats.org/drawingml/2006/main" xmlns:p="http://schemas.openxmlformats.org/presentationml/2006/main" xmlns:r="http://schemas.openxmlformats.org/officeDocument/2006/relationships">
+  <p:cSld>
+    <p:spTree>
+      <p:nvGrpSpPr>
+        <p:cNvPr id="1" name=""/>
+        <p:cNvGrpSpPr/>
+        <p:nvPr/>
+      </p:nvGrpSpPr>
+      <p:grpSpPr/>
+      <p:sp>
+        <p:nvSpPr>
+          <p:cNvPr id="2" name="TextBox 1"/>
+          <p:cNvSpPr txBox="1"/>
+          <p:nvPr/>
+        </p:nvSpPr>
+        <p:spPr>
+          <a:xfrm>
+            <a:off x="502920" y="320040"/>
+            <a:ext cx="11155680" cy="914400"/>
+          </a:xfrm>
+          <a:prstGeom prst="rect">
+            <a:avLst/>
+          </a:prstGeom>
+          <a:noFill/>
+        </p:spPr>
+        <p:txBody>
+          <a:bodyPr wrap="square">
+            <a:spAutoFit/>
+          </a:bodyPr>
+          <a:lstStyle/>
+          <a:p>
+            <a:r>
+              <a:rPr sz="3000" b="1">
+                <a:solidFill>
+                  <a:srgbClr val="1F3A5F"/>
+                </a:solidFill>
+                <a:latin typeface="Malgun Gothic"/>
+              </a:rPr>
+              <a:t>13. 한계와 향후 과제</a:t>
+            </a:r>
+          </a:p>
+        </p:txBody>
+      </p:sp>
+      <p:sp>
+        <p:nvSpPr>
+          <p:cNvPr id="3" name="Rectangle 2"/>
+          <p:cNvSpPr/>
+          <p:nvPr/>
+        </p:nvSpPr>
+        <p:spPr>
+          <a:xfrm>
+            <a:off x="548640" y="1234440"/>
+            <a:ext cx="11064240" cy="38100"/>
+          </a:xfrm>
+          <a:prstGeom prst="rect">
+            <a:avLst/>
+          </a:prstGeom>
+          <a:solidFill>
+            <a:srgbClr val="C44E52"/>
+          </a:solidFill>
+          <a:ln>
+            <a:noFill/>
+          </a:ln>
+        </p:spPr>
+        <p:style>
+          <a:lnRef idx="1">
+            <a:schemeClr val="accent1"/>
+          </a:lnRef>
+          <a:fillRef idx="3">
+            <a:schemeClr val="accent1"/>
+          </a:fillRef>
+          <a:effectRef idx="2">
+            <a:schemeClr val="accent1"/>
+          </a:effectRef>
+          <a:fontRef idx="minor">
+            <a:schemeClr val="lt1"/>
+          </a:fontRef>
+        </p:style>
+        <p:txBody>
+          <a:bodyPr rtlCol="0" anchor="ctr"/>
+          <a:lstStyle/>
+          <a:p>
+            <a:pPr algn="ctr"/>
+          </a:p>
+        </p:txBody>
+      </p:sp>
+      <p:sp>
+        <p:nvSpPr>
+          <p:cNvPr id="4" name="TextBox 3"/>
+          <p:cNvSpPr txBox="1"/>
+          <p:nvPr/>
+        </p:nvSpPr>
+        <p:spPr>
+          <a:xfrm>
+            <a:off x="640080" y="1554480"/>
+            <a:ext cx="10972800" cy="4937760"/>
+          </a:xfrm>
+          <a:prstGeom prst="rect">
+            <a:avLst/>
+          </a:prstGeom>
+          <a:noFill/>
+        </p:spPr>
+        <p:txBody>
+          <a:bodyPr wrap="square">
+            <a:spAutoFit/>
+          </a:bodyPr>
+          <a:lstStyle/>
+          <a:p>
+            <a:pPr>
+              <a:spcAft>
+                <a:spcPts val="900"/>
+              </a:spcAft>
+            </a:pPr>
+            <a:r>
+              <a:rPr sz="2000">
+                <a:solidFill>
+                  <a:srgbClr val="222222"/>
+                </a:solidFill>
+                <a:latin typeface="Malgun Gothic"/>
+              </a:rPr>
+              <a:t>• 변호사 2시점(2009·현재) — 연속 시계열은 변호사백서 PDF 보강 필요</a:t>
+            </a:r>
+          </a:p>
+          <a:p>
+            <a:pPr>
+              <a:spcAft>
+                <a:spcPts val="900"/>
+              </a:spcAft>
+            </a:pPr>
+            <a:r>
+              <a:rPr sz="2000">
+                <a:solidFill>
+                  <a:srgbClr val="222222"/>
+                </a:solidFill>
+                <a:latin typeface="Malgun Gothic"/>
+              </a:rPr>
+              <a:t>• 표본이 작아 통계적 검정력 제한</a:t>
+            </a:r>
+          </a:p>
+          <a:p>
+            <a:pPr>
+              <a:spcAft>
+                <a:spcPts val="900"/>
+              </a:spcAft>
+            </a:pPr>
+            <a:r>
+              <a:rPr sz="2000">
+                <a:solidFill>
+                  <a:srgbClr val="222222"/>
+                </a:solidFill>
+                <a:latin typeface="Malgun Gothic"/>
+              </a:rPr>
+              <a:t>• A3 공단 10도단위 → region13에선 인구비 근사배분</a:t>
+            </a:r>
+          </a:p>
+          <a:p>
+            <a:pPr>
+              <a:spcAft>
+                <a:spcPts val="900"/>
+              </a:spcAft>
+            </a:pPr>
+            <a:r>
+              <a:rPr sz="2000">
+                <a:solidFill>
+                  <a:srgbClr val="222222"/>
+                </a:solidFill>
+                <a:latin typeface="Malgun Gothic"/>
+              </a:rPr>
+              <a:t>• 향후: 코로플레스 대시보드 고도화, 시계열 LLAI</a:t>
+            </a:r>
+          </a:p>
+        </p:txBody>
+      </p:sp>
+    </p:spTree>
+  </p:cSld>
+  <p:clrMapOvr>
+    <a:masterClrMapping/>
+  </p:clrMapOvr>
+</p:sld>
+</file>
+
+<file path=ppt/slides/slide18.xml><?xml version="1.0" encoding="utf-8"?>
+<p:sld xmlns:a="http://schemas.openxmlformats.org/drawingml/2006/main" xmlns:p="http://schemas.openxmlformats.org/presentationml/2006/main" xmlns:r="http://schemas.openxmlformats.org/officeDocument/2006/relationships">
+  <p:cSld>
+    <p:spTree>
+      <p:nvGrpSpPr>
+        <p:cNvPr id="1" name=""/>
+        <p:cNvGrpSpPr/>
+        <p:nvPr/>
+      </p:nvGrpSpPr>
+      <p:grpSpPr/>
+      <p:sp>
+        <p:nvSpPr>
+          <p:cNvPr id="2" name="TextBox 1"/>
+          <p:cNvSpPr txBox="1"/>
+          <p:nvPr/>
+        </p:nvSpPr>
+        <p:spPr>
+          <a:xfrm>
+            <a:off x="502920" y="320040"/>
+            <a:ext cx="11155680" cy="914400"/>
+          </a:xfrm>
+          <a:prstGeom prst="rect">
+            <a:avLst/>
+          </a:prstGeom>
+          <a:noFill/>
+        </p:spPr>
+        <p:txBody>
+          <a:bodyPr wrap="square">
+            <a:spAutoFit/>
+          </a:bodyPr>
+          <a:lstStyle/>
+          <a:p>
+            <a:r>
+              <a:rPr sz="3000" b="1">
+                <a:solidFill>
+                  <a:srgbClr val="1F3A5F"/>
+                </a:solidFill>
+                <a:latin typeface="Malgun Gothic"/>
+              </a:rPr>
+              <a:t>부록 — region13 전체 결과표 (2024)</a:t>
+            </a:r>
+          </a:p>
+        </p:txBody>
+      </p:sp>
+      <p:sp>
+        <p:nvSpPr>
+          <p:cNvPr id="3" name="Rectangle 2"/>
+          <p:cNvSpPr/>
+          <p:nvPr/>
+        </p:nvSpPr>
+        <p:spPr>
+          <a:xfrm>
+            <a:off x="548640" y="1234440"/>
+            <a:ext cx="11064240" cy="38100"/>
+          </a:xfrm>
+          <a:prstGeom prst="rect">
+            <a:avLst/>
+          </a:prstGeom>
+          <a:solidFill>
+            <a:srgbClr val="C44E52"/>
+          </a:solidFill>
+          <a:ln>
+            <a:noFill/>
+          </a:ln>
+        </p:spPr>
+        <p:style>
+          <a:lnRef idx="1">
+            <a:schemeClr val="accent1"/>
+          </a:lnRef>
+          <a:fillRef idx="3">
+            <a:schemeClr val="accent1"/>
+          </a:fillRef>
+          <a:effectRef idx="2">
+            <a:schemeClr val="accent1"/>
+          </a:effectRef>
+          <a:fontRef idx="minor">
+            <a:schemeClr val="lt1"/>
+          </a:fontRef>
+        </p:style>
+        <p:txBody>
+          <a:bodyPr rtlCol="0" anchor="ctr"/>
+          <a:lstStyle/>
+          <a:p>
+            <a:pPr algn="ctr"/>
+          </a:p>
+        </p:txBody>
+      </p:sp>
+      <p:graphicFrame>
+        <p:nvGraphicFramePr>
+          <p:cNvPr id="4" name="Table 3"/>
+          <p:cNvGraphicFramePr>
+            <a:graphicFrameLocks noGrp="1"/>
+          </p:cNvGraphicFramePr>
+          <p:nvPr/>
+        </p:nvGraphicFramePr>
+        <p:xfrm>
+          <a:off x="2560320" y="1554480"/>
+          <a:ext cx="7040880" cy="4846320"/>
+        </p:xfrm>
+        <a:graphic>
+          <a:graphicData uri="http://schemas.openxmlformats.org/drawingml/2006/table">
+            <a:tbl>
+              <a:tblPr firstRow="1" bandRow="1">
+                <a:tableStyleId>{5C22544A-7EE6-4342-B048-85BDC9FD1C3A}</a:tableStyleId>
+              </a:tblPr>
+              <a:tblGrid>
+                <a:gridCol w="1408176"/>
+                <a:gridCol w="1408176"/>
+                <a:gridCol w="1408176"/>
+                <a:gridCol w="1408176"/>
+                <a:gridCol w="1408176"/>
+              </a:tblGrid>
+              <a:tr h="346165">
+                <a:tc>
+                  <a:txBody>
+                    <a:bodyPr/>
+                    <a:lstStyle/>
+                    <a:p>
+                      <a:pPr algn="ctr"/>
+                      <a:r>
+                        <a:rPr sz="1200" b="1">
+                          <a:solidFill>
+                            <a:srgbClr val="FFFFFF"/>
+                          </a:solidFill>
+                          <a:latin typeface="Malgun Gothic"/>
+                        </a:rPr>
+                        <a:t>권역</a:t>
+                      </a:r>
+                    </a:p>
+                  </a:txBody>
+                  <a:tcPr anchor="ctr">
+                    <a:solidFill>
+                      <a:srgbClr val="1F3A5F"/>
+                    </a:solidFill>
+                  </a:tcPr>
+                </a:tc>
+                <a:tc>
+                  <a:txBody>
+                    <a:bodyPr/>
+                    <a:lstStyle/>
+                    <a:p>
+                      <a:pPr algn="ctr"/>
+                      <a:r>
+                        <a:rPr sz="1200" b="1">
+                          <a:solidFill>
+                            <a:srgbClr val="FFFFFF"/>
+                          </a:solidFill>
+                          <a:latin typeface="Malgun Gothic"/>
+                        </a:rPr>
+                        <a:t>A1</a:t>
+                      </a:r>
+                    </a:p>
+                  </a:txBody>
+                  <a:tcPr anchor="ctr">
+                    <a:solidFill>
+                      <a:srgbClr val="1F3A5F"/>
+                    </a:solidFill>
+                  </a:tcPr>
+                </a:tc>
+                <a:tc>
+                  <a:txBody>
+                    <a:bodyPr/>
+                    <a:lstStyle/>
+                    <a:p>
+                      <a:pPr algn="ctr"/>
+                      <a:r>
+                        <a:rPr sz="1200" b="1">
+                          <a:solidFill>
+                            <a:srgbClr val="FFFFFF"/>
+                          </a:solidFill>
+                          <a:latin typeface="Malgun Gothic"/>
+                        </a:rPr>
+                        <a:t>A2</a:t>
+                      </a:r>
+                    </a:p>
+                  </a:txBody>
+                  <a:tcPr anchor="ctr">
+                    <a:solidFill>
+                      <a:srgbClr val="1F3A5F"/>
+                    </a:solidFill>
+                  </a:tcPr>
+                </a:tc>
+                <a:tc>
+                  <a:txBody>
+                    <a:bodyPr/>
+                    <a:lstStyle/>
+                    <a:p>
+                      <a:pPr algn="ctr"/>
+                      <a:r>
+                        <a:rPr sz="1200" b="1">
+                          <a:solidFill>
+                            <a:srgbClr val="FFFFFF"/>
+                          </a:solidFill>
+                          <a:latin typeface="Malgun Gothic"/>
+                        </a:rPr>
+                        <a:t>A3</a:t>
+                      </a:r>
+                    </a:p>
+                  </a:txBody>
+                  <a:tcPr anchor="ctr">
+                    <a:solidFill>
+                      <a:srgbClr val="1F3A5F"/>
+                    </a:solidFill>
+                  </a:tcPr>
+                </a:tc>
+                <a:tc>
+                  <a:txBody>
+                    <a:bodyPr/>
+                    <a:lstStyle/>
+                    <a:p>
+                      <a:pPr algn="ctr"/>
+                      <a:r>
+                        <a:rPr sz="1200" b="1">
+                          <a:solidFill>
+                            <a:srgbClr val="FFFFFF"/>
+                          </a:solidFill>
+                          <a:latin typeface="Malgun Gothic"/>
+                        </a:rPr>
+                        <a:t>LLAI(엔트로피)</a:t>
+                      </a:r>
+                    </a:p>
+                  </a:txBody>
+                  <a:tcPr anchor="ctr">
+                    <a:solidFill>
+                      <a:srgbClr val="1F3A5F"/>
+                    </a:solidFill>
+                  </a:tcPr>
+                </a:tc>
+              </a:tr>
+              <a:tr h="346165">
+                <a:tc>
+                  <a:txBody>
+                    <a:bodyPr/>
+                    <a:lstStyle/>
+                    <a:p>
+                      <a:pPr algn="ctr"/>
+                      <a:r>
+                        <a:rPr sz="1200">
+                          <a:latin typeface="Malgun Gothic"/>
+                        </a:rPr>
+                        <a:t>서울</a:t>
+                      </a:r>
+                    </a:p>
+                  </a:txBody>
+                  <a:tcPr anchor="ctr"/>
+                </a:tc>
+                <a:tc>
+                  <a:txBody>
+                    <a:bodyPr/>
+                    <a:lstStyle/>
+                    <a:p>
+                      <a:pPr algn="ctr"/>
+                      <a:r>
+                        <a:rPr sz="1200">
+                          <a:latin typeface="Malgun Gothic"/>
+                        </a:rPr>
+                        <a:t>263.3</a:t>
+                      </a:r>
+                    </a:p>
+                  </a:txBody>
+                  <a:tcPr anchor="ctr"/>
+                </a:tc>
+                <a:tc>
+                  <a:txBody>
+                    <a:bodyPr/>
+                    <a:lstStyle/>
+                    <a:p>
+                      <a:pPr algn="ctr"/>
+                      <a:r>
+                        <a:rPr sz="1200">
+                          <a:latin typeface="Malgun Gothic"/>
+                        </a:rPr>
+                        <a:t>16.2</a:t>
+                      </a:r>
+                    </a:p>
+                  </a:txBody>
+                  <a:tcPr anchor="ctr"/>
+                </a:tc>
+                <a:tc>
+                  <a:txBody>
+                    <a:bodyPr/>
+                    <a:lstStyle/>
+                    <a:p>
+                      <a:pPr algn="ctr"/>
+                      <a:r>
+                        <a:rPr sz="1200">
+                          <a:latin typeface="Malgun Gothic"/>
+                        </a:rPr>
+                        <a:t>0.05</a:t>
+                      </a:r>
+                    </a:p>
+                  </a:txBody>
+                  <a:tcPr anchor="ctr"/>
+                </a:tc>
+                <a:tc>
+                  <a:txBody>
+                    <a:bodyPr/>
+                    <a:lstStyle/>
+                    <a:p>
+                      <a:pPr algn="ctr"/>
+                      <a:r>
+                        <a:rPr sz="1200">
+                          <a:latin typeface="Malgun Gothic"/>
+                        </a:rPr>
+                        <a:t>91.1</a:t>
+                      </a:r>
+                    </a:p>
+                  </a:txBody>
+                  <a:tcPr anchor="ctr"/>
+                </a:tc>
+              </a:tr>
+              <a:tr h="346165">
+                <a:tc>
+                  <a:txBody>
+                    <a:bodyPr/>
+                    <a:lstStyle/>
+                    <a:p>
+                      <a:pPr algn="ctr"/>
+                      <a:r>
+                        <a:rPr sz="1200">
+                          <a:latin typeface="Malgun Gothic"/>
+                        </a:rPr>
+                        <a:t>울산</a:t>
+                      </a:r>
+                    </a:p>
+                  </a:txBody>
+                  <a:tcPr anchor="ctr"/>
+                </a:tc>
+                <a:tc>
+                  <a:txBody>
+                    <a:bodyPr/>
+                    <a:lstStyle/>
+                    <a:p>
+                      <a:pPr algn="ctr"/>
+                      <a:r>
+                        <a:rPr sz="1200">
+                          <a:latin typeface="Malgun Gothic"/>
+                        </a:rPr>
+                        <a:t>23.0</a:t>
+                      </a:r>
+                    </a:p>
+                  </a:txBody>
+                  <a:tcPr anchor="ctr"/>
+                </a:tc>
+                <a:tc>
+                  <a:txBody>
+                    <a:bodyPr/>
+                    <a:lstStyle/>
+                    <a:p>
+                      <a:pPr algn="ctr"/>
+                      <a:r>
+                        <a:rPr sz="1200">
+                          <a:latin typeface="Malgun Gothic"/>
+                        </a:rPr>
+                        <a:t>89.2</a:t>
+                      </a:r>
+                    </a:p>
+                  </a:txBody>
+                  <a:tcPr anchor="ctr"/>
+                </a:tc>
+                <a:tc>
+                  <a:txBody>
+                    <a:bodyPr/>
+                    <a:lstStyle/>
+                    <a:p>
+                      <a:pPr algn="ctr"/>
+                      <a:r>
+                        <a:rPr sz="1200">
+                          <a:latin typeface="Malgun Gothic"/>
+                        </a:rPr>
+                        <a:t>0.07</a:t>
+                      </a:r>
+                    </a:p>
+                  </a:txBody>
+                  <a:tcPr anchor="ctr"/>
+                </a:tc>
+                <a:tc>
+                  <a:txBody>
+                    <a:bodyPr/>
+                    <a:lstStyle/>
+                    <a:p>
+                      <a:pPr algn="ctr"/>
+                      <a:r>
+                        <a:rPr sz="1200">
+                          <a:latin typeface="Malgun Gothic"/>
+                        </a:rPr>
+                        <a:t>24.2</a:t>
+                      </a:r>
+                    </a:p>
+                  </a:txBody>
+                  <a:tcPr anchor="ctr"/>
+                </a:tc>
+              </a:tr>
+              <a:tr h="346165">
+                <a:tc>
+                  <a:txBody>
+                    <a:bodyPr/>
+                    <a:lstStyle/>
+                    <a:p>
+                      <a:pPr algn="ctr"/>
+                      <a:r>
+                        <a:rPr sz="1200">
+                          <a:latin typeface="Malgun Gothic"/>
+                        </a:rPr>
+                        <a:t>제주</a:t>
+                      </a:r>
+                    </a:p>
+                  </a:txBody>
+                  <a:tcPr anchor="ctr"/>
+                </a:tc>
+                <a:tc>
+                  <a:txBody>
+                    <a:bodyPr/>
+                    <a:lstStyle/>
+                    <a:p>
+                      <a:pPr algn="ctr"/>
+                      <a:r>
+                        <a:rPr sz="1200">
+                          <a:latin typeface="Malgun Gothic"/>
+                        </a:rPr>
+                        <a:t>23.0</a:t>
+                      </a:r>
+                    </a:p>
+                  </a:txBody>
+                  <a:tcPr anchor="ctr"/>
+                </a:tc>
+                <a:tc>
+                  <a:txBody>
+                    <a:bodyPr/>
+                    <a:lstStyle/>
+                    <a:p>
+                      <a:pPr algn="ctr"/>
+                      <a:r>
+                        <a:rPr sz="1200">
+                          <a:latin typeface="Malgun Gothic"/>
+                        </a:rPr>
+                        <a:t>96.0</a:t>
+                      </a:r>
+                    </a:p>
+                  </a:txBody>
+                  <a:tcPr anchor="ctr"/>
+                </a:tc>
+                <a:tc>
+                  <a:txBody>
+                    <a:bodyPr/>
+                    <a:lstStyle/>
+                    <a:p>
+                      <a:pPr algn="ctr"/>
+                      <a:r>
+                        <a:rPr sz="1200">
+                          <a:latin typeface="Malgun Gothic"/>
+                        </a:rPr>
+                        <a:t>0.07</a:t>
+                      </a:r>
+                    </a:p>
+                  </a:txBody>
+                  <a:tcPr anchor="ctr"/>
+                </a:tc>
+                <a:tc>
+                  <a:txBody>
+                    <a:bodyPr/>
+                    <a:lstStyle/>
+                    <a:p>
+                      <a:pPr algn="ctr"/>
+                      <a:r>
+                        <a:rPr sz="1200">
+                          <a:latin typeface="Malgun Gothic"/>
+                        </a:rPr>
+                        <a:t>23.3</a:t>
+                      </a:r>
+                    </a:p>
+                  </a:txBody>
+                  <a:tcPr anchor="ctr"/>
+                </a:tc>
+              </a:tr>
+              <a:tr h="346165">
+                <a:tc>
+                  <a:txBody>
+                    <a:bodyPr/>
+                    <a:lstStyle/>
+                    <a:p>
+                      <a:pPr algn="ctr"/>
+                      <a:r>
+                        <a:rPr sz="1200">
+                          <a:latin typeface="Malgun Gothic"/>
+                        </a:rPr>
+                        <a:t>부산</a:t>
+                      </a:r>
+                    </a:p>
+                  </a:txBody>
+                  <a:tcPr anchor="ctr"/>
+                </a:tc>
+                <a:tc>
+                  <a:txBody>
+                    <a:bodyPr/>
+                    <a:lstStyle/>
+                    <a:p>
+                      <a:pPr algn="ctr"/>
+                      <a:r>
+                        <a:rPr sz="1200">
+                          <a:latin typeface="Malgun Gothic"/>
+                        </a:rPr>
+                        <a:t>37.0</a:t>
+                      </a:r>
+                    </a:p>
+                  </a:txBody>
+                  <a:tcPr anchor="ctr"/>
+                </a:tc>
+                <a:tc>
+                  <a:txBody>
+                    <a:bodyPr/>
+                    <a:lstStyle/>
+                    <a:p>
+                      <a:pPr algn="ctr"/>
+                      <a:r>
+                        <a:rPr sz="1200">
+                          <a:latin typeface="Malgun Gothic"/>
+                        </a:rPr>
+                        <a:t>53.5</a:t>
+                      </a:r>
+                    </a:p>
+                  </a:txBody>
+                  <a:tcPr anchor="ctr"/>
+                </a:tc>
+                <a:tc>
+                  <a:txBody>
+                    <a:bodyPr/>
+                    <a:lstStyle/>
+                    <a:p>
+                      <a:pPr algn="ctr"/>
+                      <a:r>
+                        <a:rPr sz="1200">
+                          <a:latin typeface="Malgun Gothic"/>
+                        </a:rPr>
+                        <a:t>0.04</a:t>
+                      </a:r>
+                    </a:p>
+                  </a:txBody>
+                  <a:tcPr anchor="ctr"/>
+                </a:tc>
+                <a:tc>
+                  <a:txBody>
+                    <a:bodyPr/>
+                    <a:lstStyle/>
+                    <a:p>
+                      <a:pPr algn="ctr"/>
+                      <a:r>
+                        <a:rPr sz="1200">
+                          <a:latin typeface="Malgun Gothic"/>
+                        </a:rPr>
+                        <a:t>19.1</a:t>
+                      </a:r>
+                    </a:p>
+                  </a:txBody>
+                  <a:tcPr anchor="ctr"/>
+                </a:tc>
+              </a:tr>
+              <a:tr h="346165">
+                <a:tc>
+                  <a:txBody>
+                    <a:bodyPr/>
+                    <a:lstStyle/>
+                    <a:p>
+                      <a:pPr algn="ctr"/>
+                      <a:r>
+                        <a:rPr sz="1200">
+                          <a:latin typeface="Malgun Gothic"/>
+                        </a:rPr>
+                        <a:t>경기</a:t>
+                      </a:r>
+                    </a:p>
+                  </a:txBody>
+                  <a:tcPr anchor="ctr"/>
+                </a:tc>
+                <a:tc>
+                  <a:txBody>
+                    <a:bodyPr/>
+                    <a:lstStyle/>
+                    <a:p>
+                      <a:pPr algn="ctr"/>
+                      <a:r>
+                        <a:rPr sz="1200">
+                          <a:latin typeface="Malgun Gothic"/>
+                        </a:rPr>
+                        <a:t>13.8</a:t>
+                      </a:r>
+                    </a:p>
+                  </a:txBody>
+                  <a:tcPr anchor="ctr"/>
+                </a:tc>
+                <a:tc>
+                  <a:txBody>
+                    <a:bodyPr/>
+                    <a:lstStyle/>
+                    <a:p>
+                      <a:pPr algn="ctr"/>
+                      <a:r>
+                        <a:rPr sz="1200">
+                          <a:latin typeface="Malgun Gothic"/>
+                        </a:rPr>
+                        <a:t>106.7</a:t>
+                      </a:r>
+                    </a:p>
+                  </a:txBody>
+                  <a:tcPr anchor="ctr"/>
+                </a:tc>
+                <a:tc>
+                  <a:txBody>
+                    <a:bodyPr/>
+                    <a:lstStyle/>
+                    <a:p>
+                      <a:pPr algn="ctr"/>
+                      <a:r>
+                        <a:rPr sz="1200">
+                          <a:latin typeface="Malgun Gothic"/>
+                        </a:rPr>
+                        <a:t>0.05</a:t>
+                      </a:r>
+                    </a:p>
+                  </a:txBody>
+                  <a:tcPr anchor="ctr"/>
+                </a:tc>
+                <a:tc>
+                  <a:txBody>
+                    <a:bodyPr/>
+                    <a:lstStyle/>
+                    <a:p>
+                      <a:pPr algn="ctr"/>
+                      <a:r>
+                        <a:rPr sz="1200">
+                          <a:latin typeface="Malgun Gothic"/>
+                        </a:rPr>
+                        <a:t>11.7</a:t>
+                      </a:r>
+                    </a:p>
+                  </a:txBody>
+                  <a:tcPr anchor="ctr"/>
+                </a:tc>
+              </a:tr>
+              <a:tr h="346165">
+                <a:tc>
+                  <a:txBody>
+                    <a:bodyPr/>
+                    <a:lstStyle/>
+                    <a:p>
+                      <a:pPr algn="ctr"/>
+                      <a:r>
+                        <a:rPr sz="1200">
+                          <a:latin typeface="Malgun Gothic"/>
+                        </a:rPr>
+                        <a:t>경남</a:t>
+                      </a:r>
+                    </a:p>
+                  </a:txBody>
+                  <a:tcPr anchor="ctr"/>
+                </a:tc>
+                <a:tc>
+                  <a:txBody>
+                    <a:bodyPr/>
+                    <a:lstStyle/>
+                    <a:p>
+                      <a:pPr algn="ctr"/>
+                      <a:r>
+                        <a:rPr sz="1200">
+                          <a:latin typeface="Malgun Gothic"/>
+                        </a:rPr>
+                        <a:t>13.0</a:t>
+                      </a:r>
+                    </a:p>
+                  </a:txBody>
+                  <a:tcPr anchor="ctr"/>
+                </a:tc>
+                <a:tc>
+                  <a:txBody>
+                    <a:bodyPr/>
+                    <a:lstStyle/>
+                    <a:p>
+                      <a:pPr algn="ctr"/>
+                      <a:r>
+                        <a:rPr sz="1200">
+                          <a:latin typeface="Malgun Gothic"/>
+                        </a:rPr>
+                        <a:t>103.3</a:t>
+                      </a:r>
+                    </a:p>
+                  </a:txBody>
+                  <a:tcPr anchor="ctr"/>
+                </a:tc>
+                <a:tc>
+                  <a:txBody>
+                    <a:bodyPr/>
+                    <a:lstStyle/>
+                    <a:p>
+                      <a:pPr algn="ctr"/>
+                      <a:r>
+                        <a:rPr sz="1200">
+                          <a:latin typeface="Malgun Gothic"/>
+                        </a:rPr>
+                        <a:t>0.05</a:t>
+                      </a:r>
+                    </a:p>
+                  </a:txBody>
+                  <a:tcPr anchor="ctr"/>
+                </a:tc>
+                <a:tc>
+                  <a:txBody>
+                    <a:bodyPr/>
+                    <a:lstStyle/>
+                    <a:p>
+                      <a:pPr algn="ctr"/>
+                      <a:r>
+                        <a:rPr sz="1200">
+                          <a:latin typeface="Malgun Gothic"/>
+                        </a:rPr>
+                        <a:t>11.5</a:t>
+                      </a:r>
+                    </a:p>
+                  </a:txBody>
+                  <a:tcPr anchor="ctr"/>
+                </a:tc>
+              </a:tr>
+              <a:tr h="346165">
+                <a:tc>
+                  <a:txBody>
+                    <a:bodyPr/>
+                    <a:lstStyle/>
+                    <a:p>
+                      <a:pPr algn="ctr"/>
+                      <a:r>
+                        <a:rPr sz="1200">
+                          <a:latin typeface="Malgun Gothic"/>
+                        </a:rPr>
+                        <a:t>광주권</a:t>
+                      </a:r>
+                    </a:p>
+                  </a:txBody>
+                  <a:tcPr anchor="ctr"/>
+                </a:tc>
+                <a:tc>
+                  <a:txBody>
+                    <a:bodyPr/>
+                    <a:lstStyle/>
+                    <a:p>
+                      <a:pPr algn="ctr"/>
+                      <a:r>
+                        <a:rPr sz="1200">
+                          <a:latin typeface="Malgun Gothic"/>
+                        </a:rPr>
+                        <a:t>19.7</a:t>
+                      </a:r>
+                    </a:p>
+                  </a:txBody>
+                  <a:tcPr anchor="ctr"/>
+                </a:tc>
+                <a:tc>
+                  <a:txBody>
+                    <a:bodyPr/>
+                    <a:lstStyle/>
+                    <a:p>
+                      <a:pPr algn="ctr"/>
+                      <a:r>
+                        <a:rPr sz="1200">
+                          <a:latin typeface="Malgun Gothic"/>
+                        </a:rPr>
+                        <a:t>94.5</a:t>
+                      </a:r>
+                    </a:p>
+                  </a:txBody>
+                  <a:tcPr anchor="ctr"/>
+                </a:tc>
+                <a:tc>
+                  <a:txBody>
+                    <a:bodyPr/>
+                    <a:lstStyle/>
+                    <a:p>
+                      <a:pPr algn="ctr"/>
+                      <a:r>
+                        <a:rPr sz="1200">
+                          <a:latin typeface="Malgun Gothic"/>
+                        </a:rPr>
+                        <a:t>0.04</a:t>
+                      </a:r>
+                    </a:p>
+                  </a:txBody>
+                  <a:tcPr anchor="ctr"/>
+                </a:tc>
+                <a:tc>
+                  <a:txBody>
+                    <a:bodyPr/>
+                    <a:lstStyle/>
+                    <a:p>
+                      <a:pPr algn="ctr"/>
+                      <a:r>
+                        <a:rPr sz="1200">
+                          <a:latin typeface="Malgun Gothic"/>
+                        </a:rPr>
+                        <a:t>10.3</a:t>
+                      </a:r>
+                    </a:p>
+                  </a:txBody>
+                  <a:tcPr anchor="ctr"/>
+                </a:tc>
+              </a:tr>
+              <a:tr h="346165">
+                <a:tc>
+                  <a:txBody>
+                    <a:bodyPr/>
+                    <a:lstStyle/>
+                    <a:p>
+                      <a:pPr algn="ctr"/>
+                      <a:r>
+                        <a:rPr sz="1200">
+                          <a:latin typeface="Malgun Gothic"/>
+                        </a:rPr>
+                        <a:t>대전권</a:t>
+                      </a:r>
+                    </a:p>
+                  </a:txBody>
+                  <a:tcPr anchor="ctr"/>
+                </a:tc>
+                <a:tc>
+                  <a:txBody>
+                    <a:bodyPr/>
+                    <a:lstStyle/>
+                    <a:p>
+                      <a:pPr algn="ctr"/>
+                      <a:r>
+                        <a:rPr sz="1200">
+                          <a:latin typeface="Malgun Gothic"/>
+                        </a:rPr>
+                        <a:t>20.5</a:t>
+                      </a:r>
+                    </a:p>
+                  </a:txBody>
+                  <a:tcPr anchor="ctr"/>
+                </a:tc>
+                <a:tc>
+                  <a:txBody>
+                    <a:bodyPr/>
+                    <a:lstStyle/>
+                    <a:p>
+                      <a:pPr algn="ctr"/>
+                      <a:r>
+                        <a:rPr sz="1200">
+                          <a:latin typeface="Malgun Gothic"/>
+                        </a:rPr>
+                        <a:t>82.4</a:t>
+                      </a:r>
+                    </a:p>
+                  </a:txBody>
+                  <a:tcPr anchor="ctr"/>
+                </a:tc>
+                <a:tc>
+                  <a:txBody>
+                    <a:bodyPr/>
+                    <a:lstStyle/>
+                    <a:p>
+                      <a:pPr algn="ctr"/>
+                      <a:r>
+                        <a:rPr sz="1200">
+                          <a:latin typeface="Malgun Gothic"/>
+                        </a:rPr>
+                        <a:t>0.04</a:t>
+                      </a:r>
+                    </a:p>
+                  </a:txBody>
+                  <a:tcPr anchor="ctr"/>
+                </a:tc>
+                <a:tc>
+                  <a:txBody>
+                    <a:bodyPr/>
+                    <a:lstStyle/>
+                    <a:p>
+                      <a:pPr algn="ctr"/>
+                      <a:r>
+                        <a:rPr sz="1200">
+                          <a:latin typeface="Malgun Gothic"/>
+                        </a:rPr>
+                        <a:t>9.7</a:t>
+                      </a:r>
+                    </a:p>
+                  </a:txBody>
+                  <a:tcPr anchor="ctr"/>
+                </a:tc>
+              </a:tr>
+              <a:tr h="346165">
+                <a:tc>
+                  <a:txBody>
+                    <a:bodyPr/>
+                    <a:lstStyle/>
+                    <a:p>
+                      <a:pPr algn="ctr"/>
+                      <a:r>
+                        <a:rPr sz="1200">
+                          <a:latin typeface="Malgun Gothic"/>
+                        </a:rPr>
+                        <a:t>대구권</a:t>
+                      </a:r>
+                    </a:p>
+                  </a:txBody>
+                  <a:tcPr anchor="ctr"/>
+                </a:tc>
+                <a:tc>
+                  <a:txBody>
+                    <a:bodyPr/>
+                    <a:lstStyle/>
+                    <a:p>
+                      <a:pPr algn="ctr"/>
+                      <a:r>
+                        <a:rPr sz="1200">
+                          <a:latin typeface="Malgun Gothic"/>
+                        </a:rPr>
+                        <a:t>17.3</a:t>
+                      </a:r>
+                    </a:p>
+                  </a:txBody>
+                  <a:tcPr anchor="ctr"/>
+                </a:tc>
+                <a:tc>
+                  <a:txBody>
+                    <a:bodyPr/>
+                    <a:lstStyle/>
+                    <a:p>
+                      <a:pPr algn="ctr"/>
+                      <a:r>
+                        <a:rPr sz="1200">
+                          <a:latin typeface="Malgun Gothic"/>
+                        </a:rPr>
+                        <a:t>92.4</a:t>
+                      </a:r>
+                    </a:p>
+                  </a:txBody>
+                  <a:tcPr anchor="ctr"/>
+                </a:tc>
+                <a:tc>
+                  <a:txBody>
+                    <a:bodyPr/>
+                    <a:lstStyle/>
+                    <a:p>
+                      <a:pPr algn="ctr"/>
+                      <a:r>
+                        <a:rPr sz="1200">
+                          <a:latin typeface="Malgun Gothic"/>
+                        </a:rPr>
+                        <a:t>0.04</a:t>
+                      </a:r>
+                    </a:p>
+                  </a:txBody>
+                  <a:tcPr anchor="ctr"/>
+                </a:tc>
+                <a:tc>
+                  <a:txBody>
+                    <a:bodyPr/>
+                    <a:lstStyle/>
+                    <a:p>
+                      <a:pPr algn="ctr"/>
+                      <a:r>
+                        <a:rPr sz="1200">
+                          <a:latin typeface="Malgun Gothic"/>
+                        </a:rPr>
+                        <a:t>9.2</a:t>
+                      </a:r>
+                    </a:p>
+                  </a:txBody>
+                  <a:tcPr anchor="ctr"/>
+                </a:tc>
+              </a:tr>
+              <a:tr h="346165">
+                <a:tc>
+                  <a:txBody>
+                    <a:bodyPr/>
+                    <a:lstStyle/>
+                    <a:p>
+                      <a:pPr algn="ctr"/>
+                      <a:r>
+                        <a:rPr sz="1200">
+                          <a:latin typeface="Malgun Gothic"/>
+                        </a:rPr>
+                        <a:t>전북</a:t>
+                      </a:r>
+                    </a:p>
+                  </a:txBody>
+                  <a:tcPr anchor="ctr"/>
+                </a:tc>
+                <a:tc>
+                  <a:txBody>
+                    <a:bodyPr/>
+                    <a:lstStyle/>
+                    <a:p>
+                      <a:pPr algn="ctr"/>
+                      <a:r>
+                        <a:rPr sz="1200">
+                          <a:latin typeface="Malgun Gothic"/>
+                        </a:rPr>
+                        <a:t>18.5</a:t>
+                      </a:r>
+                    </a:p>
+                  </a:txBody>
+                  <a:tcPr anchor="ctr"/>
+                </a:tc>
+                <a:tc>
+                  <a:txBody>
+                    <a:bodyPr/>
+                    <a:lstStyle/>
+                    <a:p>
+                      <a:pPr algn="ctr"/>
+                      <a:r>
+                        <a:rPr sz="1200">
+                          <a:latin typeface="Malgun Gothic"/>
+                        </a:rPr>
+                        <a:t>85.7</a:t>
+                      </a:r>
+                    </a:p>
+                  </a:txBody>
+                  <a:tcPr anchor="ctr"/>
+                </a:tc>
+                <a:tc>
+                  <a:txBody>
+                    <a:bodyPr/>
+                    <a:lstStyle/>
+                    <a:p>
+                      <a:pPr algn="ctr"/>
+                      <a:r>
+                        <a:rPr sz="1200">
+                          <a:latin typeface="Malgun Gothic"/>
+                        </a:rPr>
+                        <a:t>0.04</a:t>
+                      </a:r>
+                    </a:p>
+                  </a:txBody>
+                  <a:tcPr anchor="ctr"/>
+                </a:tc>
+                <a:tc>
+                  <a:txBody>
+                    <a:bodyPr/>
+                    <a:lstStyle/>
+                    <a:p>
+                      <a:pPr algn="ctr"/>
+                      <a:r>
+                        <a:rPr sz="1200">
+                          <a:latin typeface="Malgun Gothic"/>
+                        </a:rPr>
+                        <a:t>8.8</a:t>
+                      </a:r>
+                    </a:p>
+                  </a:txBody>
+                  <a:tcPr anchor="ctr"/>
+                </a:tc>
+              </a:tr>
+              <a:tr h="346165">
+                <a:tc>
+                  <a:txBody>
+                    <a:bodyPr/>
+                    <a:lstStyle/>
+                    <a:p>
+                      <a:pPr algn="ctr"/>
+                      <a:r>
+                        <a:rPr sz="1200">
+                          <a:latin typeface="Malgun Gothic"/>
+                        </a:rPr>
+                        <a:t>인천</a:t>
+                      </a:r>
+                    </a:p>
+                  </a:txBody>
+                  <a:tcPr anchor="ctr"/>
+                </a:tc>
+                <a:tc>
+                  <a:txBody>
+                    <a:bodyPr/>
+                    <a:lstStyle/>
+                    <a:p>
+                      <a:pPr algn="ctr"/>
+                      <a:r>
+                        <a:rPr sz="1200">
+                          <a:latin typeface="Malgun Gothic"/>
+                        </a:rPr>
+                        <a:t>24.8</a:t>
+                      </a:r>
+                    </a:p>
+                  </a:txBody>
+                  <a:tcPr anchor="ctr"/>
+                </a:tc>
+                <a:tc>
+                  <a:txBody>
+                    <a:bodyPr/>
+                    <a:lstStyle/>
+                    <a:p>
+                      <a:pPr algn="ctr"/>
+                      <a:r>
+                        <a:rPr sz="1200">
+                          <a:latin typeface="Malgun Gothic"/>
+                        </a:rPr>
+                        <a:t>108.7</a:t>
+                      </a:r>
+                    </a:p>
+                  </a:txBody>
+                  <a:tcPr anchor="ctr"/>
+                </a:tc>
+                <a:tc>
+                  <a:txBody>
+                    <a:bodyPr/>
+                    <a:lstStyle/>
+                    <a:p>
+                      <a:pPr algn="ctr"/>
+                      <a:r>
+                        <a:rPr sz="1200">
+                          <a:latin typeface="Malgun Gothic"/>
+                        </a:rPr>
+                        <a:t>0.03</a:t>
+                      </a:r>
+                    </a:p>
+                  </a:txBody>
+                  <a:tcPr anchor="ctr"/>
+                </a:tc>
+                <a:tc>
+                  <a:txBody>
+                    <a:bodyPr/>
+                    <a:lstStyle/>
+                    <a:p>
+                      <a:pPr algn="ctr"/>
+                      <a:r>
+                        <a:rPr sz="1200">
+                          <a:latin typeface="Malgun Gothic"/>
+                        </a:rPr>
+                        <a:t>5.0</a:t>
+                      </a:r>
+                    </a:p>
+                  </a:txBody>
+                  <a:tcPr anchor="ctr"/>
+                </a:tc>
+              </a:tr>
+              <a:tr h="346165">
+                <a:tc>
+                  <a:txBody>
+                    <a:bodyPr/>
+                    <a:lstStyle/>
+                    <a:p>
+                      <a:pPr algn="ctr"/>
+                      <a:r>
+                        <a:rPr sz="1200">
+                          <a:latin typeface="Malgun Gothic"/>
+                        </a:rPr>
+                        <a:t>충북</a:t>
+                      </a:r>
+                    </a:p>
+                  </a:txBody>
+                  <a:tcPr anchor="ctr"/>
+                </a:tc>
+                <a:tc>
+                  <a:txBody>
+                    <a:bodyPr/>
+                    <a:lstStyle/>
+                    <a:p>
+                      <a:pPr algn="ctr"/>
+                      <a:r>
+                        <a:rPr sz="1200">
+                          <a:latin typeface="Malgun Gothic"/>
+                        </a:rPr>
+                        <a:t>14.6</a:t>
+                      </a:r>
+                    </a:p>
+                  </a:txBody>
+                  <a:tcPr anchor="ctr"/>
+                </a:tc>
+                <a:tc>
+                  <a:txBody>
+                    <a:bodyPr/>
+                    <a:lstStyle/>
+                    <a:p>
+                      <a:pPr algn="ctr"/>
+                      <a:r>
+                        <a:rPr sz="1200">
+                          <a:latin typeface="Malgun Gothic"/>
+                        </a:rPr>
+                        <a:t>107.6</a:t>
+                      </a:r>
+                    </a:p>
+                  </a:txBody>
+                  <a:tcPr anchor="ctr"/>
+                </a:tc>
+                <a:tc>
+                  <a:txBody>
+                    <a:bodyPr/>
+                    <a:lstStyle/>
+                    <a:p>
+                      <a:pPr algn="ctr"/>
+                      <a:r>
+                        <a:rPr sz="1200">
+                          <a:latin typeface="Malgun Gothic"/>
+                        </a:rPr>
+                        <a:t>0.04</a:t>
+                      </a:r>
+                    </a:p>
+                  </a:txBody>
+                  <a:tcPr anchor="ctr"/>
+                </a:tc>
+                <a:tc>
+                  <a:txBody>
+                    <a:bodyPr/>
+                    <a:lstStyle/>
+                    <a:p>
+                      <a:pPr algn="ctr"/>
+                      <a:r>
+                        <a:rPr sz="1200">
+                          <a:latin typeface="Malgun Gothic"/>
+                        </a:rPr>
+                        <a:t>4.2</a:t>
+                      </a:r>
+                    </a:p>
+                  </a:txBody>
+                  <a:tcPr anchor="ctr"/>
+                </a:tc>
+              </a:tr>
+              <a:tr h="346175">
+                <a:tc>
+                  <a:txBody>
+                    <a:bodyPr/>
+                    <a:lstStyle/>
+                    <a:p>
+                      <a:pPr algn="ctr"/>
+                      <a:r>
+                        <a:rPr sz="1200">
+                          <a:latin typeface="Malgun Gothic"/>
+                        </a:rPr>
+                        <a:t>강원</a:t>
+                      </a:r>
+                    </a:p>
+                  </a:txBody>
+                  <a:tcPr anchor="ctr"/>
+                </a:tc>
+                <a:tc>
+                  <a:txBody>
+                    <a:bodyPr/>
+                    <a:lstStyle/>
+                    <a:p>
+                      <a:pPr algn="ctr"/>
+                      <a:r>
+                        <a:rPr sz="1200">
+                          <a:latin typeface="Malgun Gothic"/>
+                        </a:rPr>
+                        <a:t>12.7</a:t>
+                      </a:r>
+                    </a:p>
+                  </a:txBody>
+                  <a:tcPr anchor="ctr"/>
+                </a:tc>
+                <a:tc>
+                  <a:txBody>
+                    <a:bodyPr/>
+                    <a:lstStyle/>
+                    <a:p>
+                      <a:pPr algn="ctr"/>
+                      <a:r>
+                        <a:rPr sz="1200">
+                          <a:latin typeface="Malgun Gothic"/>
+                        </a:rPr>
+                        <a:t>121.0</a:t>
+                      </a:r>
+                    </a:p>
+                  </a:txBody>
+                  <a:tcPr anchor="ctr"/>
+                </a:tc>
+                <a:tc>
+                  <a:txBody>
+                    <a:bodyPr/>
+                    <a:lstStyle/>
+                    <a:p>
+                      <a:pPr algn="ctr"/>
+                      <a:r>
+                        <a:rPr sz="1200">
+                          <a:latin typeface="Malgun Gothic"/>
+                        </a:rPr>
+                        <a:t>0.04</a:t>
+                      </a:r>
+                    </a:p>
+                  </a:txBody>
+                  <a:tcPr anchor="ctr"/>
+                </a:tc>
+                <a:tc>
+                  <a:txBody>
+                    <a:bodyPr/>
+                    <a:lstStyle/>
+                    <a:p>
+                      <a:pPr algn="ctr"/>
+                      <a:r>
+                        <a:rPr sz="1200">
+                          <a:latin typeface="Malgun Gothic"/>
+                        </a:rPr>
+                        <a:t>1.6</a:t>
+                      </a:r>
+                    </a:p>
+                  </a:txBody>
+                  <a:tcPr anchor="ctr"/>
+                </a:tc>
+              </a:tr>
+            </a:tbl>
+          </a:graphicData>
+        </a:graphic>
+      </p:graphicFrame>
+    </p:spTree>
+  </p:cSld>
+  <p:clrMapOvr>
+    <a:masterClrMapping/>
+  </p:clrMapOvr>
+</p:sld>
+</file>
+
+<file path=ppt/slides/slide19.xml><?xml version="1.0" encoding="utf-8"?>
+<p:sld xmlns:a="http://schemas.openxmlformats.org/drawingml/2006/main" xmlns:p="http://schemas.openxmlformats.org/presentationml/2006/main" xmlns:r="http://schemas.openxmlformats.org/officeDocument/2006/relationships">
+  <p:cSld>
+    <p:spTree>
+      <p:nvGrpSpPr>
+        <p:cNvPr id="1" name=""/>
+        <p:cNvGrpSpPr/>
+        <p:nvPr/>
+      </p:nvGrpSpPr>
+      <p:grpSpPr/>
+      <p:sp>
+        <p:nvSpPr>
+          <p:cNvPr id="2" name="TextBox 1"/>
+          <p:cNvSpPr txBox="1"/>
+          <p:nvPr/>
+        </p:nvSpPr>
+        <p:spPr>
+          <a:xfrm>
             <a:off x="731520" y="2377440"/>
             <a:ext cx="10698480" cy="1828800"/>
           </a:xfrm>
@@ -4539,23 +6519,7 @@
                 </a:solidFill>
                 <a:latin typeface="Malgun Gothic"/>
               </a:rPr>
-              <a:t>– KOSIS·사법연감·법률구조공단·대한변협 공공데이터</a:t>
-            </a:r>
-          </a:p>
-          <a:p>
-            <a:pPr lvl="1">
-              <a:spcAft>
-                <a:spcPts val="900"/>
-              </a:spcAft>
-            </a:pPr>
-            <a:r>
-              <a:rPr sz="1600">
-                <a:solidFill>
-                  <a:srgbClr val="222222"/>
-                </a:solidFill>
-                <a:latin typeface="Malgun Gothic"/>
-              </a:rPr>
-              <a:t>– 시도경계 GeoJSON(southkorea-maps), 2009 변호사 분포(법률저널 2010 인용)</a:t>
+              <a:t>– KOSIS·사법연감·법률구조공단·대한변협 / GeoJSON / 2009 변호사분포(법률저널)</a:t>
             </a:r>
           </a:p>
           <a:p>
@@ -4623,7 +6587,7 @@
                 </a:solidFill>
                 <a:latin typeface="Malgun Gothic"/>
               </a:rPr>
-              <a:t>1. 왜 이 문제인가</a:t>
+              <a:t>핵심 요약 — 한 눈에 보기</a:t>
             </a:r>
           </a:p>
         </p:txBody>
@@ -4671,93 +6635,250 @@
           </a:p>
         </p:txBody>
       </p:sp>
-      <p:sp>
-        <p:nvSpPr>
-          <p:cNvPr id="4" name="TextBox 3"/>
-          <p:cNvSpPr txBox="1"/>
+      <p:graphicFrame>
+        <p:nvGraphicFramePr>
+          <p:cNvPr id="4" name="Table 3"/>
+          <p:cNvGraphicFramePr>
+            <a:graphicFrameLocks noGrp="1"/>
+          </p:cNvGraphicFramePr>
           <p:nvPr/>
-        </p:nvSpPr>
-        <p:spPr>
-          <a:xfrm>
-            <a:off x="640080" y="1554480"/>
-            <a:ext cx="10972800" cy="4937760"/>
-          </a:xfrm>
-          <a:prstGeom prst="rect">
-            <a:avLst/>
-          </a:prstGeom>
-          <a:noFill/>
-        </p:spPr>
-        <p:txBody>
-          <a:bodyPr wrap="square">
-            <a:spAutoFit/>
-          </a:bodyPr>
-          <a:lstStyle/>
-          <a:p>
-            <a:pPr>
-              <a:spcAft>
-                <a:spcPts val="900"/>
-              </a:spcAft>
-            </a:pPr>
-            <a:r>
-              <a:rPr sz="2000">
-                <a:solidFill>
-                  <a:srgbClr val="222222"/>
-                </a:solidFill>
-                <a:latin typeface="Malgun Gothic"/>
-              </a:rPr>
-              <a:t>• 로스쿨 도입(2009) 이후 변호사 4만 명 시대 — 그런데 자원은 어디에 있나?</a:t>
-            </a:r>
-          </a:p>
-          <a:p>
-            <a:pPr lvl="1">
-              <a:spcAft>
-                <a:spcPts val="900"/>
-              </a:spcAft>
-            </a:pPr>
-            <a:r>
-              <a:rPr sz="1700">
-                <a:solidFill>
-                  <a:srgbClr val="222222"/>
-                </a:solidFill>
-                <a:latin typeface="Malgun Gothic"/>
-              </a:rPr>
-              <a:t>– 서울·수도권 집중 vs 지방 부족, 취약계층 사각지대 우려</a:t>
-            </a:r>
-          </a:p>
-          <a:p>
-            <a:pPr>
-              <a:spcAft>
-                <a:spcPts val="900"/>
-              </a:spcAft>
-            </a:pPr>
-            <a:r>
-              <a:rPr sz="2000">
-                <a:solidFill>
-                  <a:srgbClr val="222222"/>
-                </a:solidFill>
-                <a:latin typeface="Malgun Gothic"/>
-              </a:rPr>
-              <a:t>• 법률 서비스 접근성의 지역 불균형 = 사법 정의와 직결된 사회 문제</a:t>
-            </a:r>
-          </a:p>
-          <a:p>
-            <a:pPr>
-              <a:spcAft>
-                <a:spcPts val="900"/>
-              </a:spcAft>
-            </a:pPr>
-            <a:r>
-              <a:rPr sz="2000">
-                <a:solidFill>
-                  <a:srgbClr val="222222"/>
-                </a:solidFill>
-                <a:latin typeface="Malgun Gothic"/>
-              </a:rPr>
-              <a:t>• 연구 질문: 어느 지역이, 얼마나 법적 보호에서 소외되는가?</a:t>
-            </a:r>
-          </a:p>
-        </p:txBody>
-      </p:sp>
+        </p:nvGraphicFramePr>
+        <p:xfrm>
+          <a:off x="640080" y="1645920"/>
+          <a:ext cx="10881360" cy="4206240"/>
+        </p:xfrm>
+        <a:graphic>
+          <a:graphicData uri="http://schemas.openxmlformats.org/drawingml/2006/table">
+            <a:tbl>
+              <a:tblPr firstRow="1" bandRow="1">
+                <a:tableStyleId>{5C22544A-7EE6-4342-B048-85BDC9FD1C3A}</a:tableStyleId>
+              </a:tblPr>
+              <a:tblGrid>
+                <a:gridCol w="5440680"/>
+                <a:gridCol w="5440680"/>
+              </a:tblGrid>
+              <a:tr h="701040">
+                <a:tc>
+                  <a:txBody>
+                    <a:bodyPr/>
+                    <a:lstStyle/>
+                    <a:p>
+                      <a:pPr algn="ctr"/>
+                      <a:r>
+                        <a:rPr sz="1500" b="1">
+                          <a:solidFill>
+                            <a:srgbClr val="FFFFFF"/>
+                          </a:solidFill>
+                          <a:latin typeface="Malgun Gothic"/>
+                        </a:rPr>
+                        <a:t>항목</a:t>
+                      </a:r>
+                    </a:p>
+                  </a:txBody>
+                  <a:tcPr anchor="ctr">
+                    <a:solidFill>
+                      <a:srgbClr val="1F3A5F"/>
+                    </a:solidFill>
+                  </a:tcPr>
+                </a:tc>
+                <a:tc>
+                  <a:txBody>
+                    <a:bodyPr/>
+                    <a:lstStyle/>
+                    <a:p>
+                      <a:pPr algn="ctr"/>
+                      <a:r>
+                        <a:rPr sz="1500" b="1">
+                          <a:solidFill>
+                            <a:srgbClr val="FFFFFF"/>
+                          </a:solidFill>
+                          <a:latin typeface="Malgun Gothic"/>
+                        </a:rPr>
+                        <a:t>내용</a:t>
+                      </a:r>
+                    </a:p>
+                  </a:txBody>
+                  <a:tcPr anchor="ctr">
+                    <a:solidFill>
+                      <a:srgbClr val="1F3A5F"/>
+                    </a:solidFill>
+                  </a:tcPr>
+                </a:tc>
+              </a:tr>
+              <a:tr h="701040">
+                <a:tc>
+                  <a:txBody>
+                    <a:bodyPr/>
+                    <a:lstStyle/>
+                    <a:p>
+                      <a:pPr algn="ctr"/>
+                      <a:r>
+                        <a:rPr sz="1500">
+                          <a:latin typeface="Malgun Gothic"/>
+                        </a:rPr>
+                        <a:t>문제</a:t>
+                      </a:r>
+                    </a:p>
+                  </a:txBody>
+                  <a:tcPr anchor="ctr"/>
+                </a:tc>
+                <a:tc>
+                  <a:txBody>
+                    <a:bodyPr/>
+                    <a:lstStyle/>
+                    <a:p>
+                      <a:pPr algn="ctr"/>
+                      <a:r>
+                        <a:rPr sz="1500">
+                          <a:latin typeface="Malgun Gothic"/>
+                        </a:rPr>
+                        <a:t>변호사·법원·법률구조 자원의 지역별 접근성 불균형 정량화</a:t>
+                      </a:r>
+                    </a:p>
+                  </a:txBody>
+                  <a:tcPr anchor="ctr"/>
+                </a:tc>
+              </a:tr>
+              <a:tr h="701040">
+                <a:tc>
+                  <a:txBody>
+                    <a:bodyPr/>
+                    <a:lstStyle/>
+                    <a:p>
+                      <a:pPr algn="ctr"/>
+                      <a:r>
+                        <a:rPr sz="1500">
+                          <a:latin typeface="Malgun Gothic"/>
+                        </a:rPr>
+                        <a:t>방법</a:t>
+                      </a:r>
+                    </a:p>
+                  </a:txBody>
+                  <a:tcPr anchor="ctr"/>
+                </a:tc>
+                <a:tc>
+                  <a:txBody>
+                    <a:bodyPr/>
+                    <a:lstStyle/>
+                    <a:p>
+                      <a:pPr algn="ctr"/>
+                      <a:r>
+                        <a:rPr sz="1500">
+                          <a:latin typeface="Malgun Gothic"/>
+                        </a:rPr>
+                        <a:t>3개 차원(A1 변호사·A2 사건부담·A3 취약계층) → 단일 지수 LLAI(0~100)</a:t>
+                      </a:r>
+                    </a:p>
+                  </a:txBody>
+                  <a:tcPr anchor="ctr"/>
+                </a:tc>
+              </a:tr>
+              <a:tr h="701040">
+                <a:tc>
+                  <a:txBody>
+                    <a:bodyPr/>
+                    <a:lstStyle/>
+                    <a:p>
+                      <a:pPr algn="ctr"/>
+                      <a:r>
+                        <a:rPr sz="1500">
+                          <a:latin typeface="Malgun Gothic"/>
+                        </a:rPr>
+                        <a:t>데이터</a:t>
+                      </a:r>
+                    </a:p>
+                  </a:txBody>
+                  <a:tcPr anchor="ctr"/>
+                </a:tc>
+                <a:tc>
+                  <a:txBody>
+                    <a:bodyPr/>
+                    <a:lstStyle/>
+                    <a:p>
+                      <a:pPr algn="ctr"/>
+                      <a:r>
+                        <a:rPr sz="1500">
+                          <a:latin typeface="Malgun Gothic"/>
+                        </a:rPr>
+                        <a:t>변협·사법연감·공단·KOSIS / 13권역·10도단위 / 기준 2024</a:t>
+                      </a:r>
+                    </a:p>
+                  </a:txBody>
+                  <a:tcPr anchor="ctr"/>
+                </a:tc>
+              </a:tr>
+              <a:tr h="701040">
+                <a:tc>
+                  <a:txBody>
+                    <a:bodyPr/>
+                    <a:lstStyle/>
+                    <a:p>
+                      <a:pPr algn="ctr"/>
+                      <a:r>
+                        <a:rPr sz="1500">
+                          <a:latin typeface="Malgun Gothic"/>
+                        </a:rPr>
+                        <a:t>핵심 발견</a:t>
+                      </a:r>
+                    </a:p>
+                  </a:txBody>
+                  <a:tcPr anchor="ctr"/>
+                </a:tc>
+                <a:tc>
+                  <a:txBody>
+                    <a:bodyPr/>
+                    <a:lstStyle/>
+                    <a:p>
+                      <a:pPr algn="ctr"/>
+                      <a:r>
+                        <a:rPr sz="1500">
+                          <a:latin typeface="Malgun Gothic"/>
+                        </a:rPr>
+                        <a:t>① 서울 일극(91 vs 2~24) ② 변호사↑→부담↓(r=−0.85) ③ 수도권우위=서울단독 ④ 변호사 3.4배↑에도 서울집중 71%→76%</a:t>
+                      </a:r>
+                    </a:p>
+                  </a:txBody>
+                  <a:tcPr anchor="ctr"/>
+                </a:tc>
+              </a:tr>
+              <a:tr h="701040">
+                <a:tc>
+                  <a:txBody>
+                    <a:bodyPr/>
+                    <a:lstStyle/>
+                    <a:p>
+                      <a:pPr algn="ctr"/>
+                      <a:r>
+                        <a:rPr sz="1500">
+                          <a:latin typeface="Malgun Gothic"/>
+                        </a:rPr>
+                        <a:t>결론</a:t>
+                      </a:r>
+                    </a:p>
+                  </a:txBody>
+                  <a:tcPr anchor="ctr"/>
+                </a:tc>
+                <a:tc>
+                  <a:txBody>
+                    <a:bodyPr/>
+                    <a:lstStyle/>
+                    <a:p>
+                      <a:pPr algn="ctr"/>
+                      <a:r>
+                        <a:rPr sz="1500">
+                          <a:latin typeface="Malgun Gothic"/>
+                        </a:rPr>
+                        <a:t>인구 대비·사건부담이 접근성 좌우 / 양적 팽창만으론 격차 해소 안 됨</a:t>
+                      </a:r>
+                    </a:p>
+                  </a:txBody>
+                  <a:tcPr anchor="ctr"/>
+                </a:tc>
+              </a:tr>
+            </a:tbl>
+          </a:graphicData>
+        </a:graphic>
+      </p:graphicFrame>
     </p:spTree>
   </p:cSld>
   <p:clrMapOvr>
@@ -4805,7 +6926,7 @@
                 </a:solidFill>
                 <a:latin typeface="Malgun Gothic"/>
               </a:rPr>
-              <a:t>2. 접근 방법 — 종합 법률 접근성 지수(LLAI)</a:t>
+              <a:t>1. 왜 이 문제인가</a:t>
             </a:r>
           </a:p>
         </p:txBody>
@@ -4887,7 +7008,7 @@
                 </a:solidFill>
                 <a:latin typeface="Malgun Gothic"/>
               </a:rPr>
-              <a:t>• 3개 차원을 하나의 지수로 통합 (0~100)</a:t>
+              <a:t>• 로스쿨 도입(2009) 이후 변호사 4만 명 시대 — 그런데 자원은 어디에 있나?</a:t>
             </a:r>
           </a:p>
           <a:p>
@@ -4903,39 +7024,7 @@
                 </a:solidFill>
                 <a:latin typeface="Malgun Gothic"/>
               </a:rPr>
-              <a:t>– A1 변호사 접근성 — 인구 10만 명당 변호사 수 (↑ 좋음)</a:t>
-            </a:r>
-          </a:p>
-          <a:p>
-            <a:pPr lvl="1">
-              <a:spcAft>
-                <a:spcPts val="900"/>
-              </a:spcAft>
-            </a:pPr>
-            <a:r>
-              <a:rPr sz="1700">
-                <a:solidFill>
-                  <a:srgbClr val="222222"/>
-                </a:solidFill>
-                <a:latin typeface="Malgun Gothic"/>
-              </a:rPr>
-              <a:t>– A2 사건 부담 — 변호사 1인당 법원 본안사건 수 (↓ 좋음)</a:t>
-            </a:r>
-          </a:p>
-          <a:p>
-            <a:pPr lvl="1">
-              <a:spcAft>
-                <a:spcPts val="900"/>
-              </a:spcAft>
-            </a:pPr>
-            <a:r>
-              <a:rPr sz="1700">
-                <a:solidFill>
-                  <a:srgbClr val="222222"/>
-                </a:solidFill>
-                <a:latin typeface="Malgun Gothic"/>
-              </a:rPr>
-              <a:t>– A3 취약계층 접근성 — 법률구조 건수 / 저소득층 (↑ 좋음)</a:t>
+              <a:t>– 서울·수도권 집중 vs 지방 부족, 취약계층 사각지대 우려</a:t>
             </a:r>
           </a:p>
           <a:p>
@@ -4951,23 +7040,23 @@
                 </a:solidFill>
                 <a:latin typeface="Malgun Gothic"/>
               </a:rPr>
-              <a:t>• LLAI = w₁·A1n + w₂·(1−A2n) + w₃·A3n</a:t>
-            </a:r>
-          </a:p>
-          <a:p>
-            <a:pPr lvl="1">
+              <a:t>• 법률 서비스 접근성의 지역 불균형 = 사법 정의와 직결된 사회 문제</a:t>
+            </a:r>
+          </a:p>
+          <a:p>
+            <a:pPr>
               <a:spcAft>
                 <a:spcPts val="900"/>
               </a:spcAft>
             </a:pPr>
             <a:r>
-              <a:rPr sz="1700">
+              <a:rPr sz="2000">
                 <a:solidFill>
                   <a:srgbClr val="222222"/>
                 </a:solidFill>
                 <a:latin typeface="Malgun Gothic"/>
               </a:rPr>
-              <a:t>– 가중치 3종(균등·엔트로피·PCA) 병기로 강건성 확인</a:t>
+              <a:t>• 연구 질문: 어느 지역이, 얼마나 법적 보호에서 소외되는가?</a:t>
             </a:r>
           </a:p>
         </p:txBody>
@@ -5019,7 +7108,7 @@
                 </a:solidFill>
                 <a:latin typeface="Malgun Gothic"/>
               </a:rPr>
-              <a:t>3. 데이터 5종과 두 가지 난관</a:t>
+              <a:t>2. 접근 방법 — 종합 법률 접근성 지수(LLAI)</a:t>
             </a:r>
           </a:p>
         </p:txBody>
@@ -5101,7 +7190,55 @@
                 </a:solidFill>
                 <a:latin typeface="Malgun Gothic"/>
               </a:rPr>
-              <a:t>• 출처: 변협(스크랩)·사법연감·법률구조공단·KOSIS·시도경계</a:t>
+              <a:t>• 3개 차원을 하나의 지수로 통합 (0~100)</a:t>
+            </a:r>
+          </a:p>
+          <a:p>
+            <a:pPr lvl="1">
+              <a:spcAft>
+                <a:spcPts val="900"/>
+              </a:spcAft>
+            </a:pPr>
+            <a:r>
+              <a:rPr sz="1700">
+                <a:solidFill>
+                  <a:srgbClr val="222222"/>
+                </a:solidFill>
+                <a:latin typeface="Malgun Gothic"/>
+              </a:rPr>
+              <a:t>– A1 변호사 접근성 — 인구 10만 명당 변호사 수 (↑ 좋음)</a:t>
+            </a:r>
+          </a:p>
+          <a:p>
+            <a:pPr lvl="1">
+              <a:spcAft>
+                <a:spcPts val="900"/>
+              </a:spcAft>
+            </a:pPr>
+            <a:r>
+              <a:rPr sz="1700">
+                <a:solidFill>
+                  <a:srgbClr val="222222"/>
+                </a:solidFill>
+                <a:latin typeface="Malgun Gothic"/>
+              </a:rPr>
+              <a:t>– A2 사건 부담 — 변호사 1인당 법원 본안사건 수 (↓ 좋음)</a:t>
+            </a:r>
+          </a:p>
+          <a:p>
+            <a:pPr lvl="1">
+              <a:spcAft>
+                <a:spcPts val="900"/>
+              </a:spcAft>
+            </a:pPr>
+            <a:r>
+              <a:rPr sz="1700">
+                <a:solidFill>
+                  <a:srgbClr val="222222"/>
+                </a:solidFill>
+                <a:latin typeface="Malgun Gothic"/>
+              </a:rPr>
+              <a:t>– A3 취약계층 접근성 — 법률구조 건수 / 저소득층 (↑ 좋음)</a:t>
             </a:r>
           </a:p>
           <a:p>
@@ -5117,23 +7254,7 @@
                 </a:solidFill>
                 <a:latin typeface="Malgun Gothic"/>
               </a:rPr>
-              <a:t>• 난관 1 — 출처별 지역 단위 불일치 → region13 / region10 두 단위 병행</a:t>
-            </a:r>
-          </a:p>
-          <a:p>
-            <a:pPr>
-              <a:spcAft>
-                <a:spcPts val="900"/>
-              </a:spcAft>
-            </a:pPr>
-            <a:r>
-              <a:rPr sz="2000">
-                <a:solidFill>
-                  <a:srgbClr val="222222"/>
-                </a:solidFill>
-                <a:latin typeface="Malgun Gothic"/>
-              </a:rPr>
-              <a:t>• 난관 2 — 공단 PDF·변협 다운로드 불가 → KOSIS 우회 + 웹 스크래핑</a:t>
+              <a:t>• LLAI = w₁·A1n + w₂·(1−A2n) + w₃·A3n</a:t>
             </a:r>
           </a:p>
           <a:p>
@@ -5149,23 +7270,7 @@
                 </a:solidFill>
                 <a:latin typeface="Malgun Gothic"/>
               </a:rPr>
-              <a:t>– 신뢰성 검증: 법원관내 인구 합 = KOSIS 인구와 정확히 일치</a:t>
-            </a:r>
-          </a:p>
-          <a:p>
-            <a:pPr lvl="1">
-              <a:spcAft>
-                <a:spcPts val="900"/>
-              </a:spcAft>
-            </a:pPr>
-            <a:r>
-              <a:rPr sz="1700">
-                <a:solidFill>
-                  <a:srgbClr val="222222"/>
-                </a:solidFill>
-                <a:latin typeface="Malgun Gothic"/>
-              </a:rPr>
-              <a:t>– 본안사건 합 1,106,526 = 사법연감 전국 본안과 일치</a:t>
+              <a:t>– 가중치 3종(균등·엔트로피·PCA) 병기로 강건성 확인</a:t>
             </a:r>
           </a:p>
         </p:txBody>
@@ -5217,7 +7322,7 @@
                 </a:solidFill>
                 <a:latin typeface="Malgun Gothic"/>
               </a:rPr>
-              <a:t>4. 데이터 수집 · raw data 정제 방법</a:t>
+              <a:t>3. 분석 파이프라인</a:t>
             </a:r>
           </a:p>
         </p:txBody>
@@ -5267,13 +7372,632 @@
       </p:sp>
       <p:sp>
         <p:nvSpPr>
-          <p:cNvPr id="4" name="TextBox 3"/>
+          <p:cNvPr id="4" name="Rounded Rectangle 3"/>
+          <p:cNvSpPr/>
+          <p:nvPr/>
+        </p:nvSpPr>
+        <p:spPr>
+          <a:xfrm>
+            <a:off x="640080" y="2468880"/>
+            <a:ext cx="1627632" cy="1371600"/>
+          </a:xfrm>
+          <a:prstGeom prst="roundRect">
+            <a:avLst/>
+          </a:prstGeom>
+          <a:solidFill>
+            <a:srgbClr val="1F3A5F"/>
+          </a:solidFill>
+          <a:ln>
+            <a:solidFill>
+              <a:srgbClr val="1F3A5F"/>
+            </a:solidFill>
+          </a:ln>
+        </p:spPr>
+        <p:style>
+          <a:lnRef idx="1">
+            <a:schemeClr val="accent1"/>
+          </a:lnRef>
+          <a:fillRef idx="3">
+            <a:schemeClr val="accent1"/>
+          </a:fillRef>
+          <a:effectRef idx="2">
+            <a:schemeClr val="accent1"/>
+          </a:effectRef>
+          <a:fontRef idx="minor">
+            <a:schemeClr val="lt1"/>
+          </a:fontRef>
+        </p:style>
+        <p:txBody>
+          <a:bodyPr rtlCol="0" anchor="ctr" wrap="square"/>
+          <a:lstStyle/>
+          <a:p>
+            <a:pPr algn="ctr"/>
+            <a:r>
+              <a:rPr sz="1200" b="1">
+                <a:solidFill>
+                  <a:srgbClr val="FFFFFF"/>
+                </a:solidFill>
+                <a:latin typeface="Malgun Gothic"/>
+              </a:rPr>
+              <a:t>원천 데이터</a:t>
+            </a:r>
+          </a:p>
+          <a:p>
+            <a:pPr algn="ctr"/>
+            <a:r>
+              <a:rPr sz="1200" b="1">
+                <a:solidFill>
+                  <a:srgbClr val="FFFFFF"/>
+                </a:solidFill>
+                <a:latin typeface="Malgun Gothic"/>
+              </a:rPr>
+              <a:t>변협·사법연감</a:t>
+            </a:r>
+          </a:p>
+          <a:p>
+            <a:pPr algn="ctr"/>
+            <a:r>
+              <a:rPr sz="1200" b="1">
+                <a:solidFill>
+                  <a:srgbClr val="FFFFFF"/>
+                </a:solidFill>
+                <a:latin typeface="Malgun Gothic"/>
+              </a:rPr>
+              <a:t>공단·KOSIS</a:t>
+            </a:r>
+          </a:p>
+        </p:txBody>
+      </p:sp>
+      <p:sp>
+        <p:nvSpPr>
+          <p:cNvPr id="5" name="TextBox 4"/>
           <p:cNvSpPr txBox="1"/>
           <p:nvPr/>
         </p:nvSpPr>
         <p:spPr>
           <a:xfrm>
-            <a:off x="640080" y="1554480"/>
+            <a:off x="2267712" y="2880360"/>
+            <a:ext cx="320040" cy="548640"/>
+          </a:xfrm>
+          <a:prstGeom prst="rect">
+            <a:avLst/>
+          </a:prstGeom>
+          <a:noFill/>
+        </p:spPr>
+        <p:txBody>
+          <a:bodyPr wrap="none">
+            <a:spAutoFit/>
+          </a:bodyPr>
+          <a:lstStyle/>
+          <a:p>
+            <a:pPr algn="ctr"/>
+            <a:r>
+              <a:rPr sz="1600">
+                <a:solidFill>
+                  <a:srgbClr val="C44E52"/>
+                </a:solidFill>
+                <a:latin typeface="Malgun Gothic"/>
+              </a:rPr>
+              <a:t>▶</a:t>
+            </a:r>
+          </a:p>
+        </p:txBody>
+      </p:sp>
+      <p:sp>
+        <p:nvSpPr>
+          <p:cNvPr id="6" name="Rounded Rectangle 5"/>
+          <p:cNvSpPr/>
+          <p:nvPr/>
+        </p:nvSpPr>
+        <p:spPr>
+          <a:xfrm>
+            <a:off x="2523744" y="2468880"/>
+            <a:ext cx="1627632" cy="1371600"/>
+          </a:xfrm>
+          <a:prstGeom prst="roundRect">
+            <a:avLst/>
+          </a:prstGeom>
+          <a:solidFill>
+            <a:srgbClr val="1F3A5F"/>
+          </a:solidFill>
+          <a:ln>
+            <a:solidFill>
+              <a:srgbClr val="1F3A5F"/>
+            </a:solidFill>
+          </a:ln>
+        </p:spPr>
+        <p:style>
+          <a:lnRef idx="1">
+            <a:schemeClr val="accent1"/>
+          </a:lnRef>
+          <a:fillRef idx="3">
+            <a:schemeClr val="accent1"/>
+          </a:fillRef>
+          <a:effectRef idx="2">
+            <a:schemeClr val="accent1"/>
+          </a:effectRef>
+          <a:fontRef idx="minor">
+            <a:schemeClr val="lt1"/>
+          </a:fontRef>
+        </p:style>
+        <p:txBody>
+          <a:bodyPr rtlCol="0" anchor="ctr" wrap="square"/>
+          <a:lstStyle/>
+          <a:p>
+            <a:pPr algn="ctr"/>
+            <a:r>
+              <a:rPr sz="1200" b="1">
+                <a:solidFill>
+                  <a:srgbClr val="FFFFFF"/>
+                </a:solidFill>
+                <a:latin typeface="Malgun Gothic"/>
+              </a:rPr>
+              <a:t>수집</a:t>
+            </a:r>
+          </a:p>
+          <a:p>
+            <a:pPr algn="ctr"/>
+            <a:r>
+              <a:rPr sz="1200" b="1">
+                <a:solidFill>
+                  <a:srgbClr val="FFFFFF"/>
+                </a:solidFill>
+                <a:latin typeface="Malgun Gothic"/>
+              </a:rPr>
+              <a:t>스크래핑</a:t>
+            </a:r>
+          </a:p>
+          <a:p>
+            <a:pPr algn="ctr"/>
+            <a:r>
+              <a:rPr sz="1200" b="1">
+                <a:solidFill>
+                  <a:srgbClr val="FFFFFF"/>
+                </a:solidFill>
+                <a:latin typeface="Malgun Gothic"/>
+              </a:rPr>
+              <a:t>다운로드</a:t>
+            </a:r>
+          </a:p>
+        </p:txBody>
+      </p:sp>
+      <p:sp>
+        <p:nvSpPr>
+          <p:cNvPr id="7" name="TextBox 6"/>
+          <p:cNvSpPr txBox="1"/>
+          <p:nvPr/>
+        </p:nvSpPr>
+        <p:spPr>
+          <a:xfrm>
+            <a:off x="4151376" y="2880360"/>
+            <a:ext cx="320040" cy="548640"/>
+          </a:xfrm>
+          <a:prstGeom prst="rect">
+            <a:avLst/>
+          </a:prstGeom>
+          <a:noFill/>
+        </p:spPr>
+        <p:txBody>
+          <a:bodyPr wrap="none">
+            <a:spAutoFit/>
+          </a:bodyPr>
+          <a:lstStyle/>
+          <a:p>
+            <a:pPr algn="ctr"/>
+            <a:r>
+              <a:rPr sz="1600">
+                <a:solidFill>
+                  <a:srgbClr val="C44E52"/>
+                </a:solidFill>
+                <a:latin typeface="Malgun Gothic"/>
+              </a:rPr>
+              <a:t>▶</a:t>
+            </a:r>
+          </a:p>
+        </p:txBody>
+      </p:sp>
+      <p:sp>
+        <p:nvSpPr>
+          <p:cNvPr id="8" name="Rounded Rectangle 7"/>
+          <p:cNvSpPr/>
+          <p:nvPr/>
+        </p:nvSpPr>
+        <p:spPr>
+          <a:xfrm>
+            <a:off x="4407408" y="2468880"/>
+            <a:ext cx="1627632" cy="1371600"/>
+          </a:xfrm>
+          <a:prstGeom prst="roundRect">
+            <a:avLst/>
+          </a:prstGeom>
+          <a:solidFill>
+            <a:srgbClr val="1F3A5F"/>
+          </a:solidFill>
+          <a:ln>
+            <a:solidFill>
+              <a:srgbClr val="1F3A5F"/>
+            </a:solidFill>
+          </a:ln>
+        </p:spPr>
+        <p:style>
+          <a:lnRef idx="1">
+            <a:schemeClr val="accent1"/>
+          </a:lnRef>
+          <a:fillRef idx="3">
+            <a:schemeClr val="accent1"/>
+          </a:fillRef>
+          <a:effectRef idx="2">
+            <a:schemeClr val="accent1"/>
+          </a:effectRef>
+          <a:fontRef idx="minor">
+            <a:schemeClr val="lt1"/>
+          </a:fontRef>
+        </p:style>
+        <p:txBody>
+          <a:bodyPr rtlCol="0" anchor="ctr" wrap="square"/>
+          <a:lstStyle/>
+          <a:p>
+            <a:pPr algn="ctr"/>
+            <a:r>
+              <a:rPr sz="1200" b="1">
+                <a:solidFill>
+                  <a:srgbClr val="FFFFFF"/>
+                </a:solidFill>
+                <a:latin typeface="Malgun Gothic"/>
+              </a:rPr>
+              <a:t>정제 tidy</a:t>
+            </a:r>
+          </a:p>
+          <a:p>
+            <a:pPr algn="ctr"/>
+            <a:r>
+              <a:rPr sz="1200" b="1">
+                <a:solidFill>
+                  <a:srgbClr val="FFFFFF"/>
+                </a:solidFill>
+                <a:latin typeface="Malgun Gothic"/>
+              </a:rPr>
+              <a:t>인코딩·가로→세로</a:t>
+            </a:r>
+          </a:p>
+          <a:p>
+            <a:pPr algn="ctr"/>
+            <a:r>
+              <a:rPr sz="1200" b="1">
+                <a:solidFill>
+                  <a:srgbClr val="FFFFFF"/>
+                </a:solidFill>
+                <a:latin typeface="Malgun Gothic"/>
+              </a:rPr>
+              <a:t>시도명 표준화</a:t>
+            </a:r>
+          </a:p>
+        </p:txBody>
+      </p:sp>
+      <p:sp>
+        <p:nvSpPr>
+          <p:cNvPr id="9" name="TextBox 8"/>
+          <p:cNvSpPr txBox="1"/>
+          <p:nvPr/>
+        </p:nvSpPr>
+        <p:spPr>
+          <a:xfrm>
+            <a:off x="6035040" y="2880360"/>
+            <a:ext cx="320040" cy="548640"/>
+          </a:xfrm>
+          <a:prstGeom prst="rect">
+            <a:avLst/>
+          </a:prstGeom>
+          <a:noFill/>
+        </p:spPr>
+        <p:txBody>
+          <a:bodyPr wrap="none">
+            <a:spAutoFit/>
+          </a:bodyPr>
+          <a:lstStyle/>
+          <a:p>
+            <a:pPr algn="ctr"/>
+            <a:r>
+              <a:rPr sz="1600">
+                <a:solidFill>
+                  <a:srgbClr val="C44E52"/>
+                </a:solidFill>
+                <a:latin typeface="Malgun Gothic"/>
+              </a:rPr>
+              <a:t>▶</a:t>
+            </a:r>
+          </a:p>
+        </p:txBody>
+      </p:sp>
+      <p:sp>
+        <p:nvSpPr>
+          <p:cNvPr id="10" name="Rounded Rectangle 9"/>
+          <p:cNvSpPr/>
+          <p:nvPr/>
+        </p:nvSpPr>
+        <p:spPr>
+          <a:xfrm>
+            <a:off x="6291072" y="2468880"/>
+            <a:ext cx="1627632" cy="1371600"/>
+          </a:xfrm>
+          <a:prstGeom prst="roundRect">
+            <a:avLst/>
+          </a:prstGeom>
+          <a:solidFill>
+            <a:srgbClr val="1F3A5F"/>
+          </a:solidFill>
+          <a:ln>
+            <a:solidFill>
+              <a:srgbClr val="1F3A5F"/>
+            </a:solidFill>
+          </a:ln>
+        </p:spPr>
+        <p:style>
+          <a:lnRef idx="1">
+            <a:schemeClr val="accent1"/>
+          </a:lnRef>
+          <a:fillRef idx="3">
+            <a:schemeClr val="accent1"/>
+          </a:fillRef>
+          <a:effectRef idx="2">
+            <a:schemeClr val="accent1"/>
+          </a:effectRef>
+          <a:fontRef idx="minor">
+            <a:schemeClr val="lt1"/>
+          </a:fontRef>
+        </p:style>
+        <p:txBody>
+          <a:bodyPr rtlCol="0" anchor="ctr" wrap="square"/>
+          <a:lstStyle/>
+          <a:p>
+            <a:pPr algn="ctr"/>
+            <a:r>
+              <a:rPr sz="1200" b="1">
+                <a:solidFill>
+                  <a:srgbClr val="FFFFFF"/>
+                </a:solidFill>
+                <a:latin typeface="Malgun Gothic"/>
+              </a:rPr>
+              <a:t>권역 매핑</a:t>
+            </a:r>
+          </a:p>
+          <a:p>
+            <a:pPr algn="ctr"/>
+            <a:r>
+              <a:rPr sz="1200" b="1">
+                <a:solidFill>
+                  <a:srgbClr val="FFFFFF"/>
+                </a:solidFill>
+                <a:latin typeface="Malgun Gothic"/>
+              </a:rPr>
+              <a:t>13권역</a:t>
+            </a:r>
+          </a:p>
+          <a:p>
+            <a:pPr algn="ctr"/>
+            <a:r>
+              <a:rPr sz="1200" b="1">
+                <a:solidFill>
+                  <a:srgbClr val="FFFFFF"/>
+                </a:solidFill>
+                <a:latin typeface="Malgun Gothic"/>
+              </a:rPr>
+              <a:t>10도단위</a:t>
+            </a:r>
+          </a:p>
+        </p:txBody>
+      </p:sp>
+      <p:sp>
+        <p:nvSpPr>
+          <p:cNvPr id="11" name="TextBox 10"/>
+          <p:cNvSpPr txBox="1"/>
+          <p:nvPr/>
+        </p:nvSpPr>
+        <p:spPr>
+          <a:xfrm>
+            <a:off x="7918704" y="2880360"/>
+            <a:ext cx="320040" cy="548640"/>
+          </a:xfrm>
+          <a:prstGeom prst="rect">
+            <a:avLst/>
+          </a:prstGeom>
+          <a:noFill/>
+        </p:spPr>
+        <p:txBody>
+          <a:bodyPr wrap="none">
+            <a:spAutoFit/>
+          </a:bodyPr>
+          <a:lstStyle/>
+          <a:p>
+            <a:pPr algn="ctr"/>
+            <a:r>
+              <a:rPr sz="1600">
+                <a:solidFill>
+                  <a:srgbClr val="C44E52"/>
+                </a:solidFill>
+                <a:latin typeface="Malgun Gothic"/>
+              </a:rPr>
+              <a:t>▶</a:t>
+            </a:r>
+          </a:p>
+        </p:txBody>
+      </p:sp>
+      <p:sp>
+        <p:nvSpPr>
+          <p:cNvPr id="12" name="Rounded Rectangle 11"/>
+          <p:cNvSpPr/>
+          <p:nvPr/>
+        </p:nvSpPr>
+        <p:spPr>
+          <a:xfrm>
+            <a:off x="8174736" y="2468880"/>
+            <a:ext cx="1627632" cy="1371600"/>
+          </a:xfrm>
+          <a:prstGeom prst="roundRect">
+            <a:avLst/>
+          </a:prstGeom>
+          <a:solidFill>
+            <a:srgbClr val="1F3A5F"/>
+          </a:solidFill>
+          <a:ln>
+            <a:solidFill>
+              <a:srgbClr val="1F3A5F"/>
+            </a:solidFill>
+          </a:ln>
+        </p:spPr>
+        <p:style>
+          <a:lnRef idx="1">
+            <a:schemeClr val="accent1"/>
+          </a:lnRef>
+          <a:fillRef idx="3">
+            <a:schemeClr val="accent1"/>
+          </a:fillRef>
+          <a:effectRef idx="2">
+            <a:schemeClr val="accent1"/>
+          </a:effectRef>
+          <a:fontRef idx="minor">
+            <a:schemeClr val="lt1"/>
+          </a:fontRef>
+        </p:style>
+        <p:txBody>
+          <a:bodyPr rtlCol="0" anchor="ctr" wrap="square"/>
+          <a:lstStyle/>
+          <a:p>
+            <a:pPr algn="ctr"/>
+            <a:r>
+              <a:rPr sz="1200" b="1">
+                <a:solidFill>
+                  <a:srgbClr val="FFFFFF"/>
+                </a:solidFill>
+                <a:latin typeface="Malgun Gothic"/>
+              </a:rPr>
+              <a:t>패널</a:t>
+            </a:r>
+          </a:p>
+          <a:p>
+            <a:pPr algn="ctr"/>
+            <a:r>
+              <a:rPr sz="1200" b="1">
+                <a:solidFill>
+                  <a:srgbClr val="FFFFFF"/>
+                </a:solidFill>
+                <a:latin typeface="Malgun Gothic"/>
+              </a:rPr>
+              <a:t>권역×연도</a:t>
+            </a:r>
+          </a:p>
+        </p:txBody>
+      </p:sp>
+      <p:sp>
+        <p:nvSpPr>
+          <p:cNvPr id="13" name="TextBox 12"/>
+          <p:cNvSpPr txBox="1"/>
+          <p:nvPr/>
+        </p:nvSpPr>
+        <p:spPr>
+          <a:xfrm>
+            <a:off x="9802368" y="2880360"/>
+            <a:ext cx="320040" cy="548640"/>
+          </a:xfrm>
+          <a:prstGeom prst="rect">
+            <a:avLst/>
+          </a:prstGeom>
+          <a:noFill/>
+        </p:spPr>
+        <p:txBody>
+          <a:bodyPr wrap="none">
+            <a:spAutoFit/>
+          </a:bodyPr>
+          <a:lstStyle/>
+          <a:p>
+            <a:pPr algn="ctr"/>
+            <a:r>
+              <a:rPr sz="1600">
+                <a:solidFill>
+                  <a:srgbClr val="C44E52"/>
+                </a:solidFill>
+                <a:latin typeface="Malgun Gothic"/>
+              </a:rPr>
+              <a:t>▶</a:t>
+            </a:r>
+          </a:p>
+        </p:txBody>
+      </p:sp>
+      <p:sp>
+        <p:nvSpPr>
+          <p:cNvPr id="14" name="Rounded Rectangle 13"/>
+          <p:cNvSpPr/>
+          <p:nvPr/>
+        </p:nvSpPr>
+        <p:spPr>
+          <a:xfrm>
+            <a:off x="10058400" y="2468880"/>
+            <a:ext cx="1627632" cy="1371600"/>
+          </a:xfrm>
+          <a:prstGeom prst="roundRect">
+            <a:avLst/>
+          </a:prstGeom>
+          <a:solidFill>
+            <a:srgbClr val="C44E52"/>
+          </a:solidFill>
+          <a:ln>
+            <a:solidFill>
+              <a:srgbClr val="1F3A5F"/>
+            </a:solidFill>
+          </a:ln>
+        </p:spPr>
+        <p:style>
+          <a:lnRef idx="1">
+            <a:schemeClr val="accent1"/>
+          </a:lnRef>
+          <a:fillRef idx="3">
+            <a:schemeClr val="accent1"/>
+          </a:fillRef>
+          <a:effectRef idx="2">
+            <a:schemeClr val="accent1"/>
+          </a:effectRef>
+          <a:fontRef idx="minor">
+            <a:schemeClr val="lt1"/>
+          </a:fontRef>
+        </p:style>
+        <p:txBody>
+          <a:bodyPr rtlCol="0" anchor="ctr" wrap="square"/>
+          <a:lstStyle/>
+          <a:p>
+            <a:pPr algn="ctr"/>
+            <a:r>
+              <a:rPr sz="1200" b="1">
+                <a:solidFill>
+                  <a:srgbClr val="FFFFFF"/>
+                </a:solidFill>
+                <a:latin typeface="Malgun Gothic"/>
+              </a:rPr>
+              <a:t>LLAI</a:t>
+            </a:r>
+          </a:p>
+          <a:p>
+            <a:pPr algn="ctr"/>
+            <a:r>
+              <a:rPr sz="1200" b="1">
+                <a:solidFill>
+                  <a:srgbClr val="FFFFFF"/>
+                </a:solidFill>
+                <a:latin typeface="Malgun Gothic"/>
+              </a:rPr>
+              <a:t>정규화·가중치</a:t>
+            </a:r>
+          </a:p>
+        </p:txBody>
+      </p:sp>
+      <p:sp>
+        <p:nvSpPr>
+          <p:cNvPr id="15" name="TextBox 14"/>
+          <p:cNvSpPr txBox="1"/>
+          <p:nvPr/>
+        </p:nvSpPr>
+        <p:spPr>
+          <a:xfrm>
+            <a:off x="640080" y="4297680"/>
             <a:ext cx="10972800" cy="4937760"/>
           </a:xfrm>
           <a:prstGeom prst="rect">
@@ -5299,39 +8023,7 @@
                 </a:solidFill>
                 <a:latin typeface="Malgun Gothic"/>
               </a:rPr>
-              <a:t>• [수집] 출처별 방식이 달라 4가지로 수집</a:t>
-            </a:r>
-          </a:p>
-          <a:p>
-            <a:pPr lvl="1">
-              <a:spcAft>
-                <a:spcPts val="900"/>
-              </a:spcAft>
-            </a:pPr>
-            <a:r>
-              <a:rPr sz="1500">
-                <a:solidFill>
-                  <a:srgbClr val="222222"/>
-                </a:solidFill>
-                <a:latin typeface="Malgun Gothic"/>
-              </a:rPr>
-              <a:t>– 변협 회원현황: 웹 스크래핑(urllib + HTML 표 파싱) — 다운로드 미지원</a:t>
-            </a:r>
-          </a:p>
-          <a:p>
-            <a:pPr lvl="1">
-              <a:spcAft>
-                <a:spcPts val="900"/>
-              </a:spcAft>
-            </a:pPr>
-            <a:r>
-              <a:rPr sz="1500">
-                <a:solidFill>
-                  <a:srgbClr val="222222"/>
-                </a:solidFill>
-                <a:latin typeface="Malgun Gothic"/>
-              </a:rPr>
-              <a:t>– KOSIS(인구·GRDP·수급자)·공단(법률구조)·사법연감: 엑셀/CSV 다운로드</a:t>
+              <a:t>• 각 단계는 src/ 모듈로 구현 — 재현 가능 (notebooks/01~04)</a:t>
             </a:r>
           </a:p>
           <a:p>
@@ -5347,87 +8039,7 @@
                 </a:solidFill>
                 <a:latin typeface="Malgun Gothic"/>
               </a:rPr>
-              <a:t>• [정제] raw → tidy(정형) 파이프라인 (src/prepare)</a:t>
-            </a:r>
-          </a:p>
-          <a:p>
-            <a:pPr lvl="1">
-              <a:spcAft>
-                <a:spcPts val="900"/>
-              </a:spcAft>
-            </a:pPr>
-            <a:r>
-              <a:rPr sz="1500">
-                <a:solidFill>
-                  <a:srgbClr val="222222"/>
-                </a:solidFill>
-                <a:latin typeface="Malgun Gothic"/>
-              </a:rPr>
-              <a:t>– 인코딩 자동판별(cp949/utf-8), 가로형→세로형 변환·다중헤더 파싱</a:t>
-            </a:r>
-          </a:p>
-          <a:p>
-            <a:pPr lvl="1">
-              <a:spcAft>
-                <a:spcPts val="900"/>
-              </a:spcAft>
-            </a:pPr>
-            <a:r>
-              <a:rPr sz="1500">
-                <a:solidFill>
-                  <a:srgbClr val="222222"/>
-                </a:solidFill>
-                <a:latin typeface="Malgun Gothic"/>
-              </a:rPr>
-              <a:t>– 시도명 표준화: 옛/신 명칭 통일(강원도↔강원특별자치도 등)</a:t>
-            </a:r>
-          </a:p>
-          <a:p>
-            <a:pPr lvl="1">
-              <a:spcAft>
-                <a:spcPts val="900"/>
-              </a:spcAft>
-            </a:pPr>
-            <a:r>
-              <a:rPr sz="1500">
-                <a:solidFill>
-                  <a:srgbClr val="222222"/>
-                </a:solidFill>
-                <a:latin typeface="Malgun Gothic"/>
-              </a:rPr>
-              <a:t>– 지역 단위 매핑: 14지방회·법원관내·도단위 → 13권역/10도단위</a:t>
-            </a:r>
-          </a:p>
-          <a:p>
-            <a:pPr lvl="1">
-              <a:spcAft>
-                <a:spcPts val="900"/>
-              </a:spcAft>
-            </a:pPr>
-            <a:r>
-              <a:rPr sz="1500">
-                <a:solidFill>
-                  <a:srgbClr val="222222"/>
-                </a:solidFill>
-                <a:latin typeface="Malgun Gothic"/>
-              </a:rPr>
-              <a:t>– 공단 반기→연 합산, 사법연감 '본안사건' 추출(비송 제외)</a:t>
-            </a:r>
-          </a:p>
-          <a:p>
-            <a:pPr lvl="1">
-              <a:spcAft>
-                <a:spcPts val="900"/>
-              </a:spcAft>
-            </a:pPr>
-            <a:r>
-              <a:rPr sz="1500">
-                <a:solidFill>
-                  <a:srgbClr val="222222"/>
-                </a:solidFill>
-                <a:latin typeface="Malgun Gothic"/>
-              </a:rPr>
-              <a:t>– 결측·이상치 처리 → 권역×연도 패널 구조화 → 합계 교차검증</a:t>
+              <a:t>• LLAI 산출 후 → 클러스터링 · 가설검정(H1~H4) · 코로플레스 지도</a:t>
             </a:r>
           </a:p>
         </p:txBody>
@@ -5479,7 +8091,7 @@
                 </a:solidFill>
                 <a:latin typeface="Malgun Gothic"/>
               </a:rPr>
-              <a:t>5. 결과 ① — LLAI 순위 (region13, 2024)</a:t>
+              <a:t>4. 데이터 5종과 두 가지 난관</a:t>
             </a:r>
           </a:p>
         </p:txBody>
@@ -5527,40 +8139,16 @@
           </a:p>
         </p:txBody>
       </p:sp>
-      <p:pic>
-        <p:nvPicPr>
-          <p:cNvPr id="4" name="Picture 3" descr="fig1_llai_ranking_region13.png"/>
-          <p:cNvPicPr>
-            <a:picLocks noChangeAspect="1"/>
-          </p:cNvPicPr>
-          <p:nvPr/>
-        </p:nvPicPr>
-        <p:blipFill>
-          <a:blip r:embed="rId2"/>
-          <a:stretch>
-            <a:fillRect/>
-          </a:stretch>
-        </p:blipFill>
-        <p:spPr>
-          <a:xfrm>
-            <a:off x="365760" y="1554480"/>
-            <a:ext cx="7376387" cy="4572000"/>
-          </a:xfrm>
-          <a:prstGeom prst="rect">
-            <a:avLst/>
-          </a:prstGeom>
-        </p:spPr>
-      </p:pic>
-      <p:sp>
-        <p:nvSpPr>
-          <p:cNvPr id="5" name="TextBox 4"/>
+      <p:sp>
+        <p:nvSpPr>
+          <p:cNvPr id="4" name="TextBox 3"/>
           <p:cNvSpPr txBox="1"/>
           <p:nvPr/>
         </p:nvSpPr>
         <p:spPr>
           <a:xfrm>
-            <a:off x="6949440" y="1828800"/>
-            <a:ext cx="4937760" cy="4937760"/>
+            <a:off x="640080" y="1554480"/>
+            <a:ext cx="10972800" cy="4937760"/>
           </a:xfrm>
           <a:prstGeom prst="rect">
             <a:avLst/>
@@ -5585,7 +8173,39 @@
                 </a:solidFill>
                 <a:latin typeface="Malgun Gothic"/>
               </a:rPr>
-              <a:t>• 서울 91</a:t>
+              <a:t>• 출처: 변협(스크랩)·사법연감·법률구조공단·KOSIS·시도경계</a:t>
+            </a:r>
+          </a:p>
+          <a:p>
+            <a:pPr>
+              <a:spcAft>
+                <a:spcPts val="900"/>
+              </a:spcAft>
+            </a:pPr>
+            <a:r>
+              <a:rPr sz="2000">
+                <a:solidFill>
+                  <a:srgbClr val="222222"/>
+                </a:solidFill>
+                <a:latin typeface="Malgun Gothic"/>
+              </a:rPr>
+              <a:t>• 난관 1 — 출처별 지역 단위 불일치 → region13 / region10 두 단위 병행</a:t>
+            </a:r>
+          </a:p>
+          <a:p>
+            <a:pPr>
+              <a:spcAft>
+                <a:spcPts val="900"/>
+              </a:spcAft>
+            </a:pPr>
+            <a:r>
+              <a:rPr sz="2000">
+                <a:solidFill>
+                  <a:srgbClr val="222222"/>
+                </a:solidFill>
+                <a:latin typeface="Malgun Gothic"/>
+              </a:rPr>
+              <a:t>• 난관 2 — 공단 PDF·변협 다운로드 불가 → KOSIS 우회 + 웹 스크래핑</a:t>
             </a:r>
           </a:p>
           <a:p>
@@ -5601,23 +8221,7 @@
                 </a:solidFill>
                 <a:latin typeface="Malgun Gothic"/>
               </a:rPr>
-              <a:t>– ≫ 압도적</a:t>
-            </a:r>
-          </a:p>
-          <a:p>
-            <a:pPr>
-              <a:spcAft>
-                <a:spcPts val="900"/>
-              </a:spcAft>
-            </a:pPr>
-            <a:r>
-              <a:rPr sz="2000">
-                <a:solidFill>
-                  <a:srgbClr val="222222"/>
-                </a:solidFill>
-                <a:latin typeface="Malgun Gothic"/>
-              </a:rPr>
-              <a:t>• 울산·제주 2·3위</a:t>
+              <a:t>– 신뢰성 검증: 법원관내 인구 합 = KOSIS 인구와 정확히 일치</a:t>
             </a:r>
           </a:p>
           <a:p>
@@ -5633,39 +8237,7 @@
                 </a:solidFill>
                 <a:latin typeface="Malgun Gothic"/>
               </a:rPr>
-              <a:t>– 인구 적어 1인당 양호</a:t>
-            </a:r>
-          </a:p>
-          <a:p>
-            <a:pPr>
-              <a:spcAft>
-                <a:spcPts val="900"/>
-              </a:spcAft>
-            </a:pPr>
-            <a:r>
-              <a:rPr sz="2000">
-                <a:solidFill>
-                  <a:srgbClr val="222222"/>
-                </a:solidFill>
-                <a:latin typeface="Malgun Gothic"/>
-              </a:rPr>
-              <a:t>• 인천은 하위권</a:t>
-            </a:r>
-          </a:p>
-          <a:p>
-            <a:pPr lvl="1">
-              <a:spcAft>
-                <a:spcPts val="900"/>
-              </a:spcAft>
-            </a:pPr>
-            <a:r>
-              <a:rPr sz="1700">
-                <a:solidFill>
-                  <a:srgbClr val="222222"/>
-                </a:solidFill>
-                <a:latin typeface="Malgun Gothic"/>
-              </a:rPr>
-              <a:t>– 사건부담 높음</a:t>
+              <a:t>– 본안사건 합 1,106,526 = 사법연감 전국 본안과 일치</a:t>
             </a:r>
           </a:p>
         </p:txBody>
@@ -5717,7 +8289,7 @@
                 </a:solidFill>
                 <a:latin typeface="Malgun Gothic"/>
               </a:rPr>
-              <a:t>5. 결과 ② — 코로플레스 지도</a:t>
+              <a:t>5. 데이터 수집 · raw data 정제 방법</a:t>
             </a:r>
           </a:p>
         </p:txBody>
@@ -5765,40 +8337,16 @@
           </a:p>
         </p:txBody>
       </p:sp>
-      <p:pic>
-        <p:nvPicPr>
-          <p:cNvPr id="4" name="Picture 3" descr="fig7_map_region13.png"/>
-          <p:cNvPicPr>
-            <a:picLocks noChangeAspect="1"/>
-          </p:cNvPicPr>
-          <p:nvPr/>
-        </p:nvPicPr>
-        <p:blipFill>
-          <a:blip r:embed="rId2"/>
-          <a:stretch>
-            <a:fillRect/>
-          </a:stretch>
-        </p:blipFill>
-        <p:spPr>
-          <a:xfrm>
-            <a:off x="3383280" y="1371600"/>
-            <a:ext cx="6078236" cy="5029200"/>
-          </a:xfrm>
-          <a:prstGeom prst="rect">
-            <a:avLst/>
-          </a:prstGeom>
-        </p:spPr>
-      </p:pic>
-      <p:sp>
-        <p:nvSpPr>
-          <p:cNvPr id="5" name="TextBox 4"/>
+      <p:sp>
+        <p:nvSpPr>
+          <p:cNvPr id="4" name="TextBox 3"/>
           <p:cNvSpPr txBox="1"/>
           <p:nvPr/>
         </p:nvSpPr>
         <p:spPr>
           <a:xfrm>
-            <a:off x="548640" y="6309360"/>
-            <a:ext cx="11064240" cy="457200"/>
+            <a:off x="640080" y="1554480"/>
+            <a:ext cx="10972800" cy="4937760"/>
           </a:xfrm>
           <a:prstGeom prst="rect">
             <a:avLst/>
@@ -5806,20 +8354,136 @@
           <a:noFill/>
         </p:spPr>
         <p:txBody>
-          <a:bodyPr wrap="none">
+          <a:bodyPr wrap="square">
             <a:spAutoFit/>
           </a:bodyPr>
           <a:lstStyle/>
           <a:p>
-            <a:pPr algn="ctr"/>
-            <a:r>
-              <a:rPr sz="1300" i="1">
-                <a:solidFill>
-                  <a:srgbClr val="555555"/>
-                </a:solidFill>
-                <a:latin typeface="Malgun Gothic"/>
-              </a:rPr>
-              <a:t>서울만 파란색(고접근성), 전국이 붉은색 — 서울 일극 집중</a:t>
+            <a:pPr>
+              <a:spcAft>
+                <a:spcPts val="900"/>
+              </a:spcAft>
+            </a:pPr>
+            <a:r>
+              <a:rPr sz="1800">
+                <a:solidFill>
+                  <a:srgbClr val="222222"/>
+                </a:solidFill>
+                <a:latin typeface="Malgun Gothic"/>
+              </a:rPr>
+              <a:t>• [수집] 출처별 방식이 달라 두 갈래</a:t>
+            </a:r>
+          </a:p>
+          <a:p>
+            <a:pPr lvl="1">
+              <a:spcAft>
+                <a:spcPts val="900"/>
+              </a:spcAft>
+            </a:pPr>
+            <a:r>
+              <a:rPr sz="1500">
+                <a:solidFill>
+                  <a:srgbClr val="222222"/>
+                </a:solidFill>
+                <a:latin typeface="Malgun Gothic"/>
+              </a:rPr>
+              <a:t>– 변협 회원현황: 웹 스크래핑(urllib + HTML 표 파싱) — 다운로드 미지원</a:t>
+            </a:r>
+          </a:p>
+          <a:p>
+            <a:pPr lvl="1">
+              <a:spcAft>
+                <a:spcPts val="900"/>
+              </a:spcAft>
+            </a:pPr>
+            <a:r>
+              <a:rPr sz="1500">
+                <a:solidFill>
+                  <a:srgbClr val="222222"/>
+                </a:solidFill>
+                <a:latin typeface="Malgun Gothic"/>
+              </a:rPr>
+              <a:t>– KOSIS·공단·사법연감: 엑셀/CSV 다운로드</a:t>
+            </a:r>
+          </a:p>
+          <a:p>
+            <a:pPr>
+              <a:spcAft>
+                <a:spcPts val="900"/>
+              </a:spcAft>
+            </a:pPr>
+            <a:r>
+              <a:rPr sz="1800">
+                <a:solidFill>
+                  <a:srgbClr val="222222"/>
+                </a:solidFill>
+                <a:latin typeface="Malgun Gothic"/>
+              </a:rPr>
+              <a:t>• [정제] raw → tidy 파이프라인 (src/prepare)</a:t>
+            </a:r>
+          </a:p>
+          <a:p>
+            <a:pPr lvl="1">
+              <a:spcAft>
+                <a:spcPts val="900"/>
+              </a:spcAft>
+            </a:pPr>
+            <a:r>
+              <a:rPr sz="1500">
+                <a:solidFill>
+                  <a:srgbClr val="222222"/>
+                </a:solidFill>
+                <a:latin typeface="Malgun Gothic"/>
+              </a:rPr>
+              <a:t>– 인코딩 자동판별, 가로형→세로형 변환·다중헤더 파싱</a:t>
+            </a:r>
+          </a:p>
+          <a:p>
+            <a:pPr lvl="1">
+              <a:spcAft>
+                <a:spcPts val="900"/>
+              </a:spcAft>
+            </a:pPr>
+            <a:r>
+              <a:rPr sz="1500">
+                <a:solidFill>
+                  <a:srgbClr val="222222"/>
+                </a:solidFill>
+                <a:latin typeface="Malgun Gothic"/>
+              </a:rPr>
+              <a:t>– 시도명 표준화(옛/신 명칭), 지역단위 매핑(14지방회·법원관내·도단위 → 권역)</a:t>
+            </a:r>
+          </a:p>
+          <a:p>
+            <a:pPr lvl="1">
+              <a:spcAft>
+                <a:spcPts val="900"/>
+              </a:spcAft>
+            </a:pPr>
+            <a:r>
+              <a:rPr sz="1500">
+                <a:solidFill>
+                  <a:srgbClr val="222222"/>
+                </a:solidFill>
+                <a:latin typeface="Malgun Gothic"/>
+              </a:rPr>
+              <a:t>– 공단 반기→연 합산, 사법연감 '본안사건' 추출(비송 제외)</a:t>
+            </a:r>
+          </a:p>
+          <a:p>
+            <a:pPr lvl="1">
+              <a:spcAft>
+                <a:spcPts val="900"/>
+              </a:spcAft>
+            </a:pPr>
+            <a:r>
+              <a:rPr sz="1500">
+                <a:solidFill>
+                  <a:srgbClr val="222222"/>
+                </a:solidFill>
+                <a:latin typeface="Malgun Gothic"/>
+              </a:rPr>
+              <a:t>– 결측·이상치 처리 → 권역×연도 패널 → 합계 교차검증</a:t>
             </a:r>
           </a:p>
         </p:txBody>
@@ -5871,7 +8535,7 @@
                 </a:solidFill>
                 <a:latin typeface="Malgun Gothic"/>
               </a:rPr>
-              <a:t>6. 가설 H2 — 변호사 ↔ 사건 부담</a:t>
+              <a:t>6. LLAI는 어떻게 계산되나 — 예시</a:t>
             </a:r>
           </a:p>
         </p:txBody>
@@ -5919,40 +8583,16 @@
           </a:p>
         </p:txBody>
       </p:sp>
-      <p:pic>
-        <p:nvPicPr>
-          <p:cNvPr id="4" name="Picture 3" descr="fig2_scatter_a1_a2_region13.png"/>
-          <p:cNvPicPr>
-            <a:picLocks noChangeAspect="1"/>
-          </p:cNvPicPr>
-          <p:nvPr/>
-        </p:nvPicPr>
-        <p:blipFill>
-          <a:blip r:embed="rId2"/>
-          <a:stretch>
-            <a:fillRect/>
-          </a:stretch>
-        </p:blipFill>
-        <p:spPr>
-          <a:xfrm>
-            <a:off x="457200" y="1554480"/>
-            <a:ext cx="5811212" cy="4572000"/>
-          </a:xfrm>
-          <a:prstGeom prst="rect">
-            <a:avLst/>
-          </a:prstGeom>
-        </p:spPr>
-      </p:pic>
-      <p:sp>
-        <p:nvSpPr>
-          <p:cNvPr id="5" name="TextBox 4"/>
+      <p:sp>
+        <p:nvSpPr>
+          <p:cNvPr id="4" name="TextBox 3"/>
           <p:cNvSpPr txBox="1"/>
           <p:nvPr/>
         </p:nvSpPr>
         <p:spPr>
           <a:xfrm>
-            <a:off x="7040880" y="1828800"/>
-            <a:ext cx="4846320" cy="4937760"/>
+            <a:off x="640080" y="1554480"/>
+            <a:ext cx="10972800" cy="4937760"/>
           </a:xfrm>
           <a:prstGeom prst="rect">
             <a:avLst/>
@@ -5971,29 +8611,13 @@
               </a:spcAft>
             </a:pPr>
             <a:r>
-              <a:rPr sz="2000">
+              <a:rPr sz="1900">
                 <a:solidFill>
                   <a:srgbClr val="222222"/>
                 </a:solidFill>
                 <a:latin typeface="Malgun Gothic"/>
               </a:rPr>
-              <a:t>• 강한 음의 상관</a:t>
-            </a:r>
-          </a:p>
-          <a:p>
-            <a:pPr lvl="1">
-              <a:spcAft>
-                <a:spcPts val="900"/>
-              </a:spcAft>
-            </a:pPr>
-            <a:r>
-              <a:rPr sz="1700">
-                <a:solidFill>
-                  <a:srgbClr val="222222"/>
-                </a:solidFill>
-                <a:latin typeface="Malgun Gothic"/>
-              </a:rPr>
-              <a:t>– r = −0.84 ~ −0.88 (p&lt;0.01)</a:t>
+              <a:t>• 각 지표를 전국 최소=0·최대=1로 정규화(A2는 1−값) 후 가중 평균 ×100</a:t>
             </a:r>
           </a:p>
           <a:p>
@@ -6003,31 +8627,348 @@
               </a:spcAft>
             </a:pPr>
             <a:r>
-              <a:rPr sz="2000">
+              <a:rPr sz="1900">
                 <a:solidFill>
                   <a:srgbClr val="222222"/>
                 </a:solidFill>
                 <a:latin typeface="Malgun Gothic"/>
               </a:rPr>
-              <a:t>• 변호사 부족 → 1인당 부담 폭증</a:t>
-            </a:r>
-          </a:p>
-          <a:p>
-            <a:pPr lvl="1">
-              <a:spcAft>
-                <a:spcPts val="900"/>
-              </a:spcAft>
-            </a:pPr>
-            <a:r>
-              <a:rPr sz="1700">
-                <a:solidFill>
-                  <a:srgbClr val="222222"/>
-                </a:solidFill>
-                <a:latin typeface="Malgun Gothic"/>
-              </a:rPr>
-              <a:t>– 비수도권 서비스 질 저하 우려</a:t>
-            </a:r>
-          </a:p>
+              <a:t>• LLAI = 0.69·A1n + 0.14·(1−A2n) + 0.17·A3n  (엔트로피 가중치)</a:t>
+            </a:r>
+          </a:p>
+        </p:txBody>
+      </p:sp>
+      <p:graphicFrame>
+        <p:nvGraphicFramePr>
+          <p:cNvPr id="5" name="Table 4"/>
+          <p:cNvGraphicFramePr>
+            <a:graphicFrameLocks noGrp="1"/>
+          </p:cNvGraphicFramePr>
+          <p:nvPr/>
+        </p:nvGraphicFramePr>
+        <p:xfrm>
+          <a:off x="1828800" y="3017520"/>
+          <a:ext cx="8229600" cy="1645920"/>
+        </p:xfrm>
+        <a:graphic>
+          <a:graphicData uri="http://schemas.openxmlformats.org/drawingml/2006/table">
+            <a:tbl>
+              <a:tblPr firstRow="1" bandRow="1">
+                <a:tableStyleId>{5C22544A-7EE6-4342-B048-85BDC9FD1C3A}</a:tableStyleId>
+              </a:tblPr>
+              <a:tblGrid>
+                <a:gridCol w="1645920"/>
+                <a:gridCol w="1645920"/>
+                <a:gridCol w="1645920"/>
+                <a:gridCol w="1645920"/>
+                <a:gridCol w="1645920"/>
+              </a:tblGrid>
+              <a:tr h="548640">
+                <a:tc>
+                  <a:txBody>
+                    <a:bodyPr/>
+                    <a:lstStyle/>
+                    <a:p>
+                      <a:pPr algn="ctr"/>
+                      <a:r>
+                        <a:rPr sz="1800" b="1">
+                          <a:solidFill>
+                            <a:srgbClr val="FFFFFF"/>
+                          </a:solidFill>
+                          <a:latin typeface="Malgun Gothic"/>
+                        </a:rPr>
+                        <a:t>권역</a:t>
+                      </a:r>
+                    </a:p>
+                  </a:txBody>
+                  <a:tcPr anchor="ctr">
+                    <a:solidFill>
+                      <a:srgbClr val="1F3A5F"/>
+                    </a:solidFill>
+                  </a:tcPr>
+                </a:tc>
+                <a:tc>
+                  <a:txBody>
+                    <a:bodyPr/>
+                    <a:lstStyle/>
+                    <a:p>
+                      <a:pPr algn="ctr"/>
+                      <a:r>
+                        <a:rPr sz="1800" b="1">
+                          <a:solidFill>
+                            <a:srgbClr val="FFFFFF"/>
+                          </a:solidFill>
+                          <a:latin typeface="Malgun Gothic"/>
+                        </a:rPr>
+                        <a:t>A1n</a:t>
+                      </a:r>
+                    </a:p>
+                  </a:txBody>
+                  <a:tcPr anchor="ctr">
+                    <a:solidFill>
+                      <a:srgbClr val="1F3A5F"/>
+                    </a:solidFill>
+                  </a:tcPr>
+                </a:tc>
+                <a:tc>
+                  <a:txBody>
+                    <a:bodyPr/>
+                    <a:lstStyle/>
+                    <a:p>
+                      <a:pPr algn="ctr"/>
+                      <a:r>
+                        <a:rPr sz="1800" b="1">
+                          <a:solidFill>
+                            <a:srgbClr val="FFFFFF"/>
+                          </a:solidFill>
+                          <a:latin typeface="Malgun Gothic"/>
+                        </a:rPr>
+                        <a:t>1−A2n</a:t>
+                      </a:r>
+                    </a:p>
+                  </a:txBody>
+                  <a:tcPr anchor="ctr">
+                    <a:solidFill>
+                      <a:srgbClr val="1F3A5F"/>
+                    </a:solidFill>
+                  </a:tcPr>
+                </a:tc>
+                <a:tc>
+                  <a:txBody>
+                    <a:bodyPr/>
+                    <a:lstStyle/>
+                    <a:p>
+                      <a:pPr algn="ctr"/>
+                      <a:r>
+                        <a:rPr sz="1800" b="1">
+                          <a:solidFill>
+                            <a:srgbClr val="FFFFFF"/>
+                          </a:solidFill>
+                          <a:latin typeface="Malgun Gothic"/>
+                        </a:rPr>
+                        <a:t>A3n</a:t>
+                      </a:r>
+                    </a:p>
+                  </a:txBody>
+                  <a:tcPr anchor="ctr">
+                    <a:solidFill>
+                      <a:srgbClr val="1F3A5F"/>
+                    </a:solidFill>
+                  </a:tcPr>
+                </a:tc>
+                <a:tc>
+                  <a:txBody>
+                    <a:bodyPr/>
+                    <a:lstStyle/>
+                    <a:p>
+                      <a:pPr algn="ctr"/>
+                      <a:r>
+                        <a:rPr sz="1800" b="1">
+                          <a:solidFill>
+                            <a:srgbClr val="FFFFFF"/>
+                          </a:solidFill>
+                          <a:latin typeface="Malgun Gothic"/>
+                        </a:rPr>
+                        <a:t>LLAI</a:t>
+                      </a:r>
+                    </a:p>
+                  </a:txBody>
+                  <a:tcPr anchor="ctr">
+                    <a:solidFill>
+                      <a:srgbClr val="1F3A5F"/>
+                    </a:solidFill>
+                  </a:tcPr>
+                </a:tc>
+              </a:tr>
+              <a:tr h="548640">
+                <a:tc>
+                  <a:txBody>
+                    <a:bodyPr/>
+                    <a:lstStyle/>
+                    <a:p>
+                      <a:pPr algn="ctr"/>
+                      <a:r>
+                        <a:rPr sz="1800">
+                          <a:latin typeface="Malgun Gothic"/>
+                        </a:rPr>
+                        <a:t>서울</a:t>
+                      </a:r>
+                    </a:p>
+                  </a:txBody>
+                  <a:tcPr anchor="ctr"/>
+                </a:tc>
+                <a:tc>
+                  <a:txBody>
+                    <a:bodyPr/>
+                    <a:lstStyle/>
+                    <a:p>
+                      <a:pPr algn="ctr"/>
+                      <a:r>
+                        <a:rPr sz="1800">
+                          <a:latin typeface="Malgun Gothic"/>
+                        </a:rPr>
+                        <a:t>1.00</a:t>
+                      </a:r>
+                    </a:p>
+                  </a:txBody>
+                  <a:tcPr anchor="ctr"/>
+                </a:tc>
+                <a:tc>
+                  <a:txBody>
+                    <a:bodyPr/>
+                    <a:lstStyle/>
+                    <a:p>
+                      <a:pPr algn="ctr"/>
+                      <a:r>
+                        <a:rPr sz="1800">
+                          <a:latin typeface="Malgun Gothic"/>
+                        </a:rPr>
+                        <a:t>1.00</a:t>
+                      </a:r>
+                    </a:p>
+                  </a:txBody>
+                  <a:tcPr anchor="ctr"/>
+                </a:tc>
+                <a:tc>
+                  <a:txBody>
+                    <a:bodyPr/>
+                    <a:lstStyle/>
+                    <a:p>
+                      <a:pPr algn="ctr"/>
+                      <a:r>
+                        <a:rPr sz="1800">
+                          <a:latin typeface="Malgun Gothic"/>
+                        </a:rPr>
+                        <a:t>0.48</a:t>
+                      </a:r>
+                    </a:p>
+                  </a:txBody>
+                  <a:tcPr anchor="ctr"/>
+                </a:tc>
+                <a:tc>
+                  <a:txBody>
+                    <a:bodyPr/>
+                    <a:lstStyle/>
+                    <a:p>
+                      <a:pPr algn="ctr"/>
+                      <a:r>
+                        <a:rPr sz="1800">
+                          <a:latin typeface="Malgun Gothic"/>
+                        </a:rPr>
+                        <a:t>91.1</a:t>
+                      </a:r>
+                    </a:p>
+                  </a:txBody>
+                  <a:tcPr anchor="ctr"/>
+                </a:tc>
+              </a:tr>
+              <a:tr h="548640">
+                <a:tc>
+                  <a:txBody>
+                    <a:bodyPr/>
+                    <a:lstStyle/>
+                    <a:p>
+                      <a:pPr algn="ctr"/>
+                      <a:r>
+                        <a:rPr sz="1800">
+                          <a:latin typeface="Malgun Gothic"/>
+                        </a:rPr>
+                        <a:t>강원</a:t>
+                      </a:r>
+                    </a:p>
+                  </a:txBody>
+                  <a:tcPr anchor="ctr"/>
+                </a:tc>
+                <a:tc>
+                  <a:txBody>
+                    <a:bodyPr/>
+                    <a:lstStyle/>
+                    <a:p>
+                      <a:pPr algn="ctr"/>
+                      <a:r>
+                        <a:rPr sz="1800">
+                          <a:latin typeface="Malgun Gothic"/>
+                        </a:rPr>
+                        <a:t>0.00</a:t>
+                      </a:r>
+                    </a:p>
+                  </a:txBody>
+                  <a:tcPr anchor="ctr"/>
+                </a:tc>
+                <a:tc>
+                  <a:txBody>
+                    <a:bodyPr/>
+                    <a:lstStyle/>
+                    <a:p>
+                      <a:pPr algn="ctr"/>
+                      <a:r>
+                        <a:rPr sz="1800">
+                          <a:latin typeface="Malgun Gothic"/>
+                        </a:rPr>
+                        <a:t>0.00</a:t>
+                      </a:r>
+                    </a:p>
+                  </a:txBody>
+                  <a:tcPr anchor="ctr"/>
+                </a:tc>
+                <a:tc>
+                  <a:txBody>
+                    <a:bodyPr/>
+                    <a:lstStyle/>
+                    <a:p>
+                      <a:pPr algn="ctr"/>
+                      <a:r>
+                        <a:rPr sz="1800">
+                          <a:latin typeface="Malgun Gothic"/>
+                        </a:rPr>
+                        <a:t>0.09</a:t>
+                      </a:r>
+                    </a:p>
+                  </a:txBody>
+                  <a:tcPr anchor="ctr"/>
+                </a:tc>
+                <a:tc>
+                  <a:txBody>
+                    <a:bodyPr/>
+                    <a:lstStyle/>
+                    <a:p>
+                      <a:pPr algn="ctr"/>
+                      <a:r>
+                        <a:rPr sz="1800">
+                          <a:latin typeface="Malgun Gothic"/>
+                        </a:rPr>
+                        <a:t>1.6</a:t>
+                      </a:r>
+                    </a:p>
+                  </a:txBody>
+                  <a:tcPr anchor="ctr"/>
+                </a:tc>
+              </a:tr>
+            </a:tbl>
+          </a:graphicData>
+        </a:graphic>
+      </p:graphicFrame>
+      <p:sp>
+        <p:nvSpPr>
+          <p:cNvPr id="6" name="TextBox 5"/>
+          <p:cNvSpPr txBox="1"/>
+          <p:nvPr/>
+        </p:nvSpPr>
+        <p:spPr>
+          <a:xfrm>
+            <a:off x="640080" y="4937760"/>
+            <a:ext cx="10972800" cy="4937760"/>
+          </a:xfrm>
+          <a:prstGeom prst="rect">
+            <a:avLst/>
+          </a:prstGeom>
+          <a:noFill/>
+        </p:spPr>
+        <p:txBody>
+          <a:bodyPr wrap="square">
+            <a:spAutoFit/>
+          </a:bodyPr>
+          <a:lstStyle/>
           <a:p>
             <a:pPr>
               <a:spcAft>
@@ -6035,13 +8976,29 @@
               </a:spcAft>
             </a:pPr>
             <a:r>
-              <a:rPr sz="2000">
+              <a:rPr sz="1800">
                 <a:solidFill>
                   <a:srgbClr val="222222"/>
                 </a:solidFill>
                 <a:latin typeface="Malgun Gothic"/>
               </a:rPr>
-              <a:t>• 서울은 우하단 극단적 이상치</a:t>
+              <a:t>• 서울: 변호사·사건부담 두 축 모두 전국 최상(1.0) → 거의 만점</a:t>
+            </a:r>
+          </a:p>
+          <a:p>
+            <a:pPr>
+              <a:spcAft>
+                <a:spcPts val="900"/>
+              </a:spcAft>
+            </a:pPr>
+            <a:r>
+              <a:rPr sz="1800">
+                <a:solidFill>
+                  <a:srgbClr val="222222"/>
+                </a:solidFill>
+                <a:latin typeface="Malgun Gothic"/>
+              </a:rPr>
+              <a:t>• 강원: 두 축 모두 전국 최하(0) → 바닥. LLAI는 '전국 상대 위치'를 의미</a:t>
             </a:r>
           </a:p>
         </p:txBody>

--- a/reports/발표자료.pptx
+++ b/reports/발표자료.pptx
@@ -23,6 +23,8 @@
     <p:sldId id="271" r:id="rId22"/>
     <p:sldId id="272" r:id="rId23"/>
     <p:sldId id="273" r:id="rId24"/>
+    <p:sldId id="275" r:id="rId26"/>
+    <p:sldId id="276" r:id="rId27"/>
     <p:sldId id="274" r:id="rId25"/>
   </p:sldIdLst>
   <p:sldSz cx="12191695" cy="6858000" type="screen4x3"/>
@@ -6540,6 +6542,845 @@
           </a:p>
         </p:txBody>
       </p:sp>
+    </p:spTree>
+  </p:cSld>
+  <p:clrMapOvr>
+    <a:masterClrMapping/>
+  </p:clrMapOvr>
+</p:sld>
+</file>
+
+<file path=ppt/slides/slide20.xml><?xml version="1.0" encoding="utf-8"?>
+<p:sld xmlns:a="http://schemas.openxmlformats.org/drawingml/2006/main" xmlns:p="http://schemas.openxmlformats.org/presentationml/2006/main" xmlns:r="http://schemas.openxmlformats.org/officeDocument/2006/relationships">
+  <p:cSld>
+    <p:spTree>
+      <p:nvGrpSpPr>
+        <p:cNvPr id="1" name=""/>
+        <p:cNvGrpSpPr/>
+        <p:nvPr/>
+      </p:nvGrpSpPr>
+      <p:grpSpPr/>
+      <p:sp>
+        <p:nvSpPr>
+          <p:cNvPr id="2" name="TextBox 1"/>
+          <p:cNvSpPr txBox="1"/>
+          <p:nvPr/>
+        </p:nvSpPr>
+        <p:spPr>
+          <a:xfrm>
+            <a:off x="502920" y="320040"/>
+            <a:ext cx="11155680" cy="914400"/>
+          </a:xfrm>
+          <a:prstGeom prst="rect">
+            <a:avLst/>
+          </a:prstGeom>
+          <a:noFill/>
+        </p:spPr>
+        <p:txBody>
+          <a:bodyPr wrap="square">
+            <a:spAutoFit/>
+          </a:bodyPr>
+          <a:lstStyle/>
+          <a:p>
+            <a:r>
+              <a:rPr sz="3000" b="1">
+                <a:solidFill>
+                  <a:srgbClr val="1F3A5F"/>
+                </a:solidFill>
+                <a:latin typeface="Malgun Gothic"/>
+              </a:rPr>
+              <a:t>부록 A — 방법론 선택의 근거</a:t>
+            </a:r>
+          </a:p>
+        </p:txBody>
+      </p:sp>
+      <p:sp>
+        <p:nvSpPr>
+          <p:cNvPr id="3" name="Rectangle 2"/>
+          <p:cNvSpPr/>
+          <p:nvPr/>
+        </p:nvSpPr>
+        <p:spPr>
+          <a:xfrm>
+            <a:off x="548640" y="1234440"/>
+            <a:ext cx="11064240" cy="38100"/>
+          </a:xfrm>
+          <a:prstGeom prst="rect">
+            <a:avLst/>
+          </a:prstGeom>
+          <a:solidFill>
+            <a:srgbClr val="C44E52"/>
+          </a:solidFill>
+          <a:ln>
+            <a:noFill/>
+          </a:ln>
+        </p:spPr>
+        <p:style>
+          <a:lnRef idx="1">
+            <a:schemeClr val="accent1"/>
+          </a:lnRef>
+          <a:fillRef idx="3">
+            <a:schemeClr val="accent1"/>
+          </a:fillRef>
+          <a:effectRef idx="2">
+            <a:schemeClr val="accent1"/>
+          </a:effectRef>
+          <a:fontRef idx="minor">
+            <a:schemeClr val="lt1"/>
+          </a:fontRef>
+        </p:style>
+        <p:txBody>
+          <a:bodyPr rtlCol="0" anchor="ctr"/>
+          <a:lstStyle/>
+          <a:p>
+            <a:pPr algn="ctr"/>
+          </a:p>
+        </p:txBody>
+      </p:sp>
+      <p:sp>
+        <p:nvSpPr>
+          <p:cNvPr id="4" name="TextBox 3"/>
+          <p:cNvSpPr txBox="1"/>
+          <p:nvPr/>
+        </p:nvSpPr>
+        <p:spPr>
+          <a:xfrm>
+            <a:off x="640080" y="1554480"/>
+            <a:ext cx="10972800" cy="4937760"/>
+          </a:xfrm>
+          <a:prstGeom prst="rect">
+            <a:avLst/>
+          </a:prstGeom>
+          <a:noFill/>
+        </p:spPr>
+        <p:txBody>
+          <a:bodyPr wrap="square">
+            <a:spAutoFit/>
+          </a:bodyPr>
+          <a:lstStyle/>
+          <a:p>
+            <a:pPr>
+              <a:spcAft>
+                <a:spcPts val="900"/>
+              </a:spcAft>
+            </a:pPr>
+            <a:r>
+              <a:rPr sz="1800">
+                <a:solidFill>
+                  <a:srgbClr val="222222"/>
+                </a:solidFill>
+                <a:latin typeface="Malgun Gothic"/>
+              </a:rPr>
+              <a:t>• 왜 17시도가 아닌 두 단위(13권역/10도단위)인가</a:t>
+            </a:r>
+          </a:p>
+          <a:p>
+            <a:pPr lvl="1">
+              <a:spcAft>
+                <a:spcPts val="900"/>
+              </a:spcAft>
+            </a:pPr>
+            <a:r>
+              <a:rPr sz="1500">
+                <a:solidFill>
+                  <a:srgbClr val="222222"/>
+                </a:solidFill>
+                <a:latin typeface="Malgun Gothic"/>
+              </a:rPr>
+              <a:t>– 변호사(변협 14지방회)·법률구조(공단 10도단위)가 광역시를 도에 묶어 제공 → 시도 분리 불가</a:t>
+            </a:r>
+          </a:p>
+          <a:p>
+            <a:pPr lvl="1">
+              <a:spcAft>
+                <a:spcPts val="900"/>
+              </a:spcAft>
+            </a:pPr>
+            <a:r>
+              <a:rPr sz="1500">
+                <a:solidFill>
+                  <a:srgbClr val="222222"/>
+                </a:solidFill>
+                <a:latin typeface="Malgun Gothic"/>
+              </a:rPr>
+              <a:t>– 두 단위 결론이 일치(서울 1위·강원 최하)하면 단위 선택에 무관함을 입증</a:t>
+            </a:r>
+          </a:p>
+          <a:p>
+            <a:pPr>
+              <a:spcAft>
+                <a:spcPts val="900"/>
+              </a:spcAft>
+            </a:pPr>
+            <a:r>
+              <a:rPr sz="1800">
+                <a:solidFill>
+                  <a:srgbClr val="222222"/>
+                </a:solidFill>
+                <a:latin typeface="Malgun Gothic"/>
+              </a:rPr>
+              <a:t>• 왜 '본안사건'인가 (A2)</a:t>
+            </a:r>
+          </a:p>
+          <a:p>
+            <a:pPr lvl="1">
+              <a:spcAft>
+                <a:spcPts val="900"/>
+              </a:spcAft>
+            </a:pPr>
+            <a:r>
+              <a:rPr sz="1500">
+                <a:solidFill>
+                  <a:srgbClr val="222222"/>
+                </a:solidFill>
+                <a:latin typeface="Malgun Gothic"/>
+              </a:rPr>
+              <a:t>– 전체 법원사건의 약 60%가 등기·공탁(비송) → 변호사 업무량 왜곡 → 실질 소송(본안)만 사용</a:t>
+            </a:r>
+          </a:p>
+          <a:p>
+            <a:pPr>
+              <a:spcAft>
+                <a:spcPts val="900"/>
+              </a:spcAft>
+            </a:pPr>
+            <a:r>
+              <a:rPr sz="1800">
+                <a:solidFill>
+                  <a:srgbClr val="222222"/>
+                </a:solidFill>
+                <a:latin typeface="Malgun Gothic"/>
+              </a:rPr>
+              <a:t>• 왜 가중치 3종(균등·엔트로피·PCA)인가</a:t>
+            </a:r>
+          </a:p>
+          <a:p>
+            <a:pPr lvl="1">
+              <a:spcAft>
+                <a:spcPts val="900"/>
+              </a:spcAft>
+            </a:pPr>
+            <a:r>
+              <a:rPr sz="1500">
+                <a:solidFill>
+                  <a:srgbClr val="222222"/>
+                </a:solidFill>
+                <a:latin typeface="Malgun Gothic"/>
+              </a:rPr>
+              <a:t>– 가중치 자의성 방지 — 어떤 방식이든 서울 1위·강원 최하(강건성) 확인</a:t>
+            </a:r>
+          </a:p>
+          <a:p>
+            <a:pPr>
+              <a:spcAft>
+                <a:spcPts val="900"/>
+              </a:spcAft>
+            </a:pPr>
+            <a:r>
+              <a:rPr sz="1800">
+                <a:solidFill>
+                  <a:srgbClr val="222222"/>
+                </a:solidFill>
+                <a:latin typeface="Malgun Gothic"/>
+              </a:rPr>
+              <a:t>• 왜 정규화·방향 보정인가</a:t>
+            </a:r>
+          </a:p>
+          <a:p>
+            <a:pPr lvl="1">
+              <a:spcAft>
+                <a:spcPts val="900"/>
+              </a:spcAft>
+            </a:pPr>
+            <a:r>
+              <a:rPr sz="1500">
+                <a:solidFill>
+                  <a:srgbClr val="222222"/>
+                </a:solidFill>
+                <a:latin typeface="Malgun Gothic"/>
+              </a:rPr>
+              <a:t>– 단위 상이(명·건·비율) → 0~1 통일, A2는 1−값으로 '클수록 좋음' 일치</a:t>
+            </a:r>
+          </a:p>
+        </p:txBody>
+      </p:sp>
+    </p:spTree>
+  </p:cSld>
+  <p:clrMapOvr>
+    <a:masterClrMapping/>
+  </p:clrMapOvr>
+</p:sld>
+</file>
+
+<file path=ppt/slides/slide21.xml><?xml version="1.0" encoding="utf-8"?>
+<p:sld xmlns:a="http://schemas.openxmlformats.org/drawingml/2006/main" xmlns:p="http://schemas.openxmlformats.org/presentationml/2006/main" xmlns:r="http://schemas.openxmlformats.org/officeDocument/2006/relationships">
+  <p:cSld>
+    <p:spTree>
+      <p:nvGrpSpPr>
+        <p:cNvPr id="1" name=""/>
+        <p:cNvGrpSpPr/>
+        <p:nvPr/>
+      </p:nvGrpSpPr>
+      <p:grpSpPr/>
+      <p:sp>
+        <p:nvSpPr>
+          <p:cNvPr id="2" name="TextBox 1"/>
+          <p:cNvSpPr txBox="1"/>
+          <p:nvPr/>
+        </p:nvSpPr>
+        <p:spPr>
+          <a:xfrm>
+            <a:off x="502920" y="320040"/>
+            <a:ext cx="11155680" cy="914400"/>
+          </a:xfrm>
+          <a:prstGeom prst="rect">
+            <a:avLst/>
+          </a:prstGeom>
+          <a:noFill/>
+        </p:spPr>
+        <p:txBody>
+          <a:bodyPr wrap="square">
+            <a:spAutoFit/>
+          </a:bodyPr>
+          <a:lstStyle/>
+          <a:p>
+            <a:r>
+              <a:rPr sz="3000" b="1">
+                <a:solidFill>
+                  <a:srgbClr val="1F3A5F"/>
+                </a:solidFill>
+                <a:latin typeface="Malgun Gothic"/>
+              </a:rPr>
+              <a:t>부록 B — 용어 정리</a:t>
+            </a:r>
+          </a:p>
+        </p:txBody>
+      </p:sp>
+      <p:sp>
+        <p:nvSpPr>
+          <p:cNvPr id="3" name="Rectangle 2"/>
+          <p:cNvSpPr/>
+          <p:nvPr/>
+        </p:nvSpPr>
+        <p:spPr>
+          <a:xfrm>
+            <a:off x="548640" y="1234440"/>
+            <a:ext cx="11064240" cy="38100"/>
+          </a:xfrm>
+          <a:prstGeom prst="rect">
+            <a:avLst/>
+          </a:prstGeom>
+          <a:solidFill>
+            <a:srgbClr val="C44E52"/>
+          </a:solidFill>
+          <a:ln>
+            <a:noFill/>
+          </a:ln>
+        </p:spPr>
+        <p:style>
+          <a:lnRef idx="1">
+            <a:schemeClr val="accent1"/>
+          </a:lnRef>
+          <a:fillRef idx="3">
+            <a:schemeClr val="accent1"/>
+          </a:fillRef>
+          <a:effectRef idx="2">
+            <a:schemeClr val="accent1"/>
+          </a:effectRef>
+          <a:fontRef idx="minor">
+            <a:schemeClr val="lt1"/>
+          </a:fontRef>
+        </p:style>
+        <p:txBody>
+          <a:bodyPr rtlCol="0" anchor="ctr"/>
+          <a:lstStyle/>
+          <a:p>
+            <a:pPr algn="ctr"/>
+          </a:p>
+        </p:txBody>
+      </p:sp>
+      <p:graphicFrame>
+        <p:nvGraphicFramePr>
+          <p:cNvPr id="4" name="Table 3"/>
+          <p:cNvGraphicFramePr>
+            <a:graphicFrameLocks noGrp="1"/>
+          </p:cNvGraphicFramePr>
+          <p:nvPr/>
+        </p:nvGraphicFramePr>
+        <p:xfrm>
+          <a:off x="548640" y="1508760"/>
+          <a:ext cx="11064240" cy="4937760"/>
+        </p:xfrm>
+        <a:graphic>
+          <a:graphicData uri="http://schemas.openxmlformats.org/drawingml/2006/table">
+            <a:tbl>
+              <a:tblPr firstRow="1" bandRow="1">
+                <a:tableStyleId>{5C22544A-7EE6-4342-B048-85BDC9FD1C3A}</a:tableStyleId>
+              </a:tblPr>
+              <a:tblGrid>
+                <a:gridCol w="5532120"/>
+                <a:gridCol w="5532120"/>
+              </a:tblGrid>
+              <a:tr h="379827">
+                <a:tc>
+                  <a:txBody>
+                    <a:bodyPr/>
+                    <a:lstStyle/>
+                    <a:p>
+                      <a:pPr algn="ctr"/>
+                      <a:r>
+                        <a:rPr sz="1100" b="1">
+                          <a:solidFill>
+                            <a:srgbClr val="FFFFFF"/>
+                          </a:solidFill>
+                          <a:latin typeface="Malgun Gothic"/>
+                        </a:rPr>
+                        <a:t>용어</a:t>
+                      </a:r>
+                    </a:p>
+                  </a:txBody>
+                  <a:tcPr anchor="ctr">
+                    <a:solidFill>
+                      <a:srgbClr val="1F3A5F"/>
+                    </a:solidFill>
+                  </a:tcPr>
+                </a:tc>
+                <a:tc>
+                  <a:txBody>
+                    <a:bodyPr/>
+                    <a:lstStyle/>
+                    <a:p>
+                      <a:pPr algn="l"/>
+                      <a:r>
+                        <a:rPr sz="1100" b="1">
+                          <a:solidFill>
+                            <a:srgbClr val="FFFFFF"/>
+                          </a:solidFill>
+                          <a:latin typeface="Malgun Gothic"/>
+                        </a:rPr>
+                        <a:t>뜻</a:t>
+                      </a:r>
+                    </a:p>
+                  </a:txBody>
+                  <a:tcPr anchor="ctr">
+                    <a:solidFill>
+                      <a:srgbClr val="1F3A5F"/>
+                    </a:solidFill>
+                  </a:tcPr>
+                </a:tc>
+              </a:tr>
+              <a:tr h="379827">
+                <a:tc>
+                  <a:txBody>
+                    <a:bodyPr/>
+                    <a:lstStyle/>
+                    <a:p>
+                      <a:pPr algn="ctr"/>
+                      <a:r>
+                        <a:rPr sz="1100">
+                          <a:latin typeface="Malgun Gothic"/>
+                        </a:rPr>
+                        <a:t>본안사건</a:t>
+                      </a:r>
+                    </a:p>
+                  </a:txBody>
+                  <a:tcPr anchor="ctr"/>
+                </a:tc>
+                <a:tc>
+                  <a:txBody>
+                    <a:bodyPr/>
+                    <a:lstStyle/>
+                    <a:p>
+                      <a:pPr algn="l"/>
+                      <a:r>
+                        <a:rPr sz="1100">
+                          <a:latin typeface="Malgun Gothic"/>
+                        </a:rPr>
+                        <a:t>권리·의무를 본격 판단하는 소송(민사본안·형사공판·가사). 변호사 업무량 핵심</a:t>
+                      </a:r>
+                    </a:p>
+                  </a:txBody>
+                  <a:tcPr anchor="ctr"/>
+                </a:tc>
+              </a:tr>
+              <a:tr h="379827">
+                <a:tc>
+                  <a:txBody>
+                    <a:bodyPr/>
+                    <a:lstStyle/>
+                    <a:p>
+                      <a:pPr algn="ctr"/>
+                      <a:r>
+                        <a:rPr sz="1100">
+                          <a:latin typeface="Malgun Gothic"/>
+                        </a:rPr>
+                        <a:t>비송사건</a:t>
+                      </a:r>
+                    </a:p>
+                  </a:txBody>
+                  <a:tcPr anchor="ctr"/>
+                </a:tc>
+                <a:tc>
+                  <a:txBody>
+                    <a:bodyPr/>
+                    <a:lstStyle/>
+                    <a:p>
+                      <a:pPr algn="l"/>
+                      <a:r>
+                        <a:rPr sz="1100">
+                          <a:latin typeface="Malgun Gothic"/>
+                        </a:rPr>
+                        <a:t>등기·공탁 등 분쟁 판단이 아닌 절차 사건 → A2에서 제외</a:t>
+                      </a:r>
+                    </a:p>
+                  </a:txBody>
+                  <a:tcPr anchor="ctr"/>
+                </a:tc>
+              </a:tr>
+              <a:tr h="379827">
+                <a:tc>
+                  <a:txBody>
+                    <a:bodyPr/>
+                    <a:lstStyle/>
+                    <a:p>
+                      <a:pPr algn="ctr"/>
+                      <a:r>
+                        <a:rPr sz="1100">
+                          <a:latin typeface="Malgun Gothic"/>
+                        </a:rPr>
+                        <a:t>개업변호사</a:t>
+                      </a:r>
+                    </a:p>
+                  </a:txBody>
+                  <a:tcPr anchor="ctr"/>
+                </a:tc>
+                <a:tc>
+                  <a:txBody>
+                    <a:bodyPr/>
+                    <a:lstStyle/>
+                    <a:p>
+                      <a:pPr algn="l"/>
+                      <a:r>
+                        <a:rPr sz="1100">
+                          <a:latin typeface="Malgun Gothic"/>
+                        </a:rPr>
+                        <a:t>실제 영업 중인 변호사(휴업·미개업 제외). A1 분자</a:t>
+                      </a:r>
+                    </a:p>
+                  </a:txBody>
+                  <a:tcPr anchor="ctr"/>
+                </a:tc>
+              </a:tr>
+              <a:tr h="379827">
+                <a:tc>
+                  <a:txBody>
+                    <a:bodyPr/>
+                    <a:lstStyle/>
+                    <a:p>
+                      <a:pPr algn="ctr"/>
+                      <a:r>
+                        <a:rPr sz="1100">
+                          <a:latin typeface="Malgun Gothic"/>
+                        </a:rPr>
+                        <a:t>법률구조</a:t>
+                      </a:r>
+                    </a:p>
+                  </a:txBody>
+                  <a:tcPr anchor="ctr"/>
+                </a:tc>
+                <a:tc>
+                  <a:txBody>
+                    <a:bodyPr/>
+                    <a:lstStyle/>
+                    <a:p>
+                      <a:pPr algn="l"/>
+                      <a:r>
+                        <a:rPr sz="1100">
+                          <a:latin typeface="Malgun Gothic"/>
+                        </a:rPr>
+                        <a:t>경제적 약자 대상 무료·저비용 법률 지원(법률구조공단). A3 분자</a:t>
+                      </a:r>
+                    </a:p>
+                  </a:txBody>
+                  <a:tcPr anchor="ctr"/>
+                </a:tc>
+              </a:tr>
+              <a:tr h="379827">
+                <a:tc>
+                  <a:txBody>
+                    <a:bodyPr/>
+                    <a:lstStyle/>
+                    <a:p>
+                      <a:pPr algn="ctr"/>
+                      <a:r>
+                        <a:rPr sz="1100">
+                          <a:latin typeface="Malgun Gothic"/>
+                        </a:rPr>
+                        <a:t>기초생활수급자</a:t>
+                      </a:r>
+                    </a:p>
+                  </a:txBody>
+                  <a:tcPr anchor="ctr"/>
+                </a:tc>
+                <a:tc>
+                  <a:txBody>
+                    <a:bodyPr/>
+                    <a:lstStyle/>
+                    <a:p>
+                      <a:pPr algn="l"/>
+                      <a:r>
+                        <a:rPr sz="1100">
+                          <a:latin typeface="Malgun Gothic"/>
+                        </a:rPr>
+                        <a:t>국민기초생활보장 수급자 = '저소득층' 대리지표(A3 분모)</a:t>
+                      </a:r>
+                    </a:p>
+                  </a:txBody>
+                  <a:tcPr anchor="ctr"/>
+                </a:tc>
+              </a:tr>
+              <a:tr h="379827">
+                <a:tc>
+                  <a:txBody>
+                    <a:bodyPr/>
+                    <a:lstStyle/>
+                    <a:p>
+                      <a:pPr algn="ctr"/>
+                      <a:r>
+                        <a:rPr sz="1100">
+                          <a:latin typeface="Malgun Gothic"/>
+                        </a:rPr>
+                        <a:t>1인당 GRDP</a:t>
+                      </a:r>
+                    </a:p>
+                  </a:txBody>
+                  <a:tcPr anchor="ctr"/>
+                </a:tc>
+                <a:tc>
+                  <a:txBody>
+                    <a:bodyPr/>
+                    <a:lstStyle/>
+                    <a:p>
+                      <a:pPr algn="l"/>
+                      <a:r>
+                        <a:rPr sz="1100">
+                          <a:latin typeface="Malgun Gothic"/>
+                        </a:rPr>
+                        <a:t>지역내총생산 ÷ 인구. 지역 소득수준(H3 변수)</a:t>
+                      </a:r>
+                    </a:p>
+                  </a:txBody>
+                  <a:tcPr anchor="ctr"/>
+                </a:tc>
+              </a:tr>
+              <a:tr h="379827">
+                <a:tc>
+                  <a:txBody>
+                    <a:bodyPr/>
+                    <a:lstStyle/>
+                    <a:p>
+                      <a:pPr algn="ctr"/>
+                      <a:r>
+                        <a:rPr sz="1100">
+                          <a:latin typeface="Malgun Gothic"/>
+                        </a:rPr>
+                        <a:t>Min-Max 정규화</a:t>
+                      </a:r>
+                    </a:p>
+                  </a:txBody>
+                  <a:tcPr anchor="ctr"/>
+                </a:tc>
+                <a:tc>
+                  <a:txBody>
+                    <a:bodyPr/>
+                    <a:lstStyle/>
+                    <a:p>
+                      <a:pPr algn="l"/>
+                      <a:r>
+                        <a:rPr sz="1100">
+                          <a:latin typeface="Malgun Gothic"/>
+                        </a:rPr>
+                        <a:t>값을 전국 최소0~최대1로 변환해 단위 다른 지표를 합산 가능하게</a:t>
+                      </a:r>
+                    </a:p>
+                  </a:txBody>
+                  <a:tcPr anchor="ctr"/>
+                </a:tc>
+              </a:tr>
+              <a:tr h="379827">
+                <a:tc>
+                  <a:txBody>
+                    <a:bodyPr/>
+                    <a:lstStyle/>
+                    <a:p>
+                      <a:pPr algn="ctr"/>
+                      <a:r>
+                        <a:rPr sz="1100">
+                          <a:latin typeface="Malgun Gothic"/>
+                        </a:rPr>
+                        <a:t>엔트로피 가중치</a:t>
+                      </a:r>
+                    </a:p>
+                  </a:txBody>
+                  <a:tcPr anchor="ctr"/>
+                </a:tc>
+                <a:tc>
+                  <a:txBody>
+                    <a:bodyPr/>
+                    <a:lstStyle/>
+                    <a:p>
+                      <a:pPr algn="l"/>
+                      <a:r>
+                        <a:rPr sz="1100">
+                          <a:latin typeface="Malgun Gothic"/>
+                        </a:rPr>
+                        <a:t>지역 간 차이(정보량)가 큰 지표에 큰 가중치를 주는 객관적 가중법</a:t>
+                      </a:r>
+                    </a:p>
+                  </a:txBody>
+                  <a:tcPr anchor="ctr"/>
+                </a:tc>
+              </a:tr>
+              <a:tr h="379827">
+                <a:tc>
+                  <a:txBody>
+                    <a:bodyPr/>
+                    <a:lstStyle/>
+                    <a:p>
+                      <a:pPr algn="ctr"/>
+                      <a:r>
+                        <a:rPr sz="1100">
+                          <a:latin typeface="Malgun Gothic"/>
+                        </a:rPr>
+                        <a:t>PCA</a:t>
+                      </a:r>
+                    </a:p>
+                  </a:txBody>
+                  <a:tcPr anchor="ctr"/>
+                </a:tc>
+                <a:tc>
+                  <a:txBody>
+                    <a:bodyPr/>
+                    <a:lstStyle/>
+                    <a:p>
+                      <a:pPr algn="l"/>
+                      <a:r>
+                        <a:rPr sz="1100">
+                          <a:latin typeface="Malgun Gothic"/>
+                        </a:rPr>
+                        <a:t>여러 지표의 공통 변동 축(주성분)을 찾아 가중치로 활용</a:t>
+                      </a:r>
+                    </a:p>
+                  </a:txBody>
+                  <a:tcPr anchor="ctr"/>
+                </a:tc>
+              </a:tr>
+              <a:tr h="379827">
+                <a:tc>
+                  <a:txBody>
+                    <a:bodyPr/>
+                    <a:lstStyle/>
+                    <a:p>
+                      <a:pPr algn="ctr"/>
+                      <a:r>
+                        <a:rPr sz="1100">
+                          <a:latin typeface="Malgun Gothic"/>
+                        </a:rPr>
+                        <a:t>HHI(허핀달지수)</a:t>
+                      </a:r>
+                    </a:p>
+                  </a:txBody>
+                  <a:tcPr anchor="ctr"/>
+                </a:tc>
+                <a:tc>
+                  <a:txBody>
+                    <a:bodyPr/>
+                    <a:lstStyle/>
+                    <a:p>
+                      <a:pPr algn="l"/>
+                      <a:r>
+                        <a:rPr sz="1100">
+                          <a:latin typeface="Malgun Gothic"/>
+                        </a:rPr>
+                        <a:t>점유율 제곱의 합(0~1). 클수록 특정 지역 집중 심화</a:t>
+                      </a:r>
+                    </a:p>
+                  </a:txBody>
+                  <a:tcPr anchor="ctr"/>
+                </a:tc>
+              </a:tr>
+              <a:tr h="379827">
+                <a:tc>
+                  <a:txBody>
+                    <a:bodyPr/>
+                    <a:lstStyle/>
+                    <a:p>
+                      <a:pPr algn="ctr"/>
+                      <a:r>
+                        <a:rPr sz="1100">
+                          <a:latin typeface="Malgun Gothic"/>
+                        </a:rPr>
+                        <a:t>변동계수(CV)</a:t>
+                      </a:r>
+                    </a:p>
+                  </a:txBody>
+                  <a:tcPr anchor="ctr"/>
+                </a:tc>
+                <a:tc>
+                  <a:txBody>
+                    <a:bodyPr/>
+                    <a:lstStyle/>
+                    <a:p>
+                      <a:pPr algn="l"/>
+                      <a:r>
+                        <a:rPr sz="1100">
+                          <a:latin typeface="Malgun Gothic"/>
+                        </a:rPr>
+                        <a:t>표준편차 ÷ 평균. 단위 무관한 상대적 격차 크기</a:t>
+                      </a:r>
+                    </a:p>
+                  </a:txBody>
+                  <a:tcPr anchor="ctr"/>
+                </a:tc>
+              </a:tr>
+              <a:tr h="379836">
+                <a:tc>
+                  <a:txBody>
+                    <a:bodyPr/>
+                    <a:lstStyle/>
+                    <a:p>
+                      <a:pPr algn="ctr"/>
+                      <a:r>
+                        <a:rPr sz="1100">
+                          <a:latin typeface="Malgun Gothic"/>
+                        </a:rPr>
+                        <a:t>K-means / Silhouette</a:t>
+                      </a:r>
+                    </a:p>
+                  </a:txBody>
+                  <a:tcPr anchor="ctr"/>
+                </a:tc>
+                <a:tc>
+                  <a:txBody>
+                    <a:bodyPr/>
+                    <a:lstStyle/>
+                    <a:p>
+                      <a:pPr algn="l"/>
+                      <a:r>
+                        <a:rPr sz="1100">
+                          <a:latin typeface="Malgun Gothic"/>
+                        </a:rPr>
+                        <a:t>거리 기반 군집화 / 군집 분리도(최적 K 결정)</a:t>
+                      </a:r>
+                    </a:p>
+                  </a:txBody>
+                  <a:tcPr anchor="ctr"/>
+                </a:tc>
+              </a:tr>
+            </a:tbl>
+          </a:graphicData>
+        </a:graphic>
+      </p:graphicFrame>
     </p:spTree>
   </p:cSld>
   <p:clrMapOvr>

--- a/reports/발표자료.pptx
+++ b/reports/발표자료.pptx
@@ -13,6 +13,7 @@
     <p:sldId id="261" r:id="rId12"/>
     <p:sldId id="262" r:id="rId13"/>
     <p:sldId id="263" r:id="rId14"/>
+    <p:sldId id="277" r:id="rId28"/>
     <p:sldId id="264" r:id="rId15"/>
     <p:sldId id="265" r:id="rId16"/>
     <p:sldId id="266" r:id="rId17"/>
@@ -3234,7 +3235,7 @@
                 </a:solidFill>
                 <a:latin typeface="Malgun Gothic"/>
               </a:rPr>
-              <a:t>7. 결과 ① — LLAI 순위 (region13, 2024)</a:t>
+              <a:t>6. LLAI는 어떻게 계산되나 — 예시</a:t>
             </a:r>
           </a:p>
         </p:txBody>
@@ -3282,40 +3283,16 @@
           </a:p>
         </p:txBody>
       </p:sp>
-      <p:pic>
-        <p:nvPicPr>
-          <p:cNvPr id="4" name="Picture 3" descr="fig1_llai_ranking_region13.png"/>
-          <p:cNvPicPr>
-            <a:picLocks noChangeAspect="1"/>
-          </p:cNvPicPr>
+      <p:sp>
+        <p:nvSpPr>
+          <p:cNvPr id="4" name="TextBox 3"/>
+          <p:cNvSpPr txBox="1"/>
           <p:nvPr/>
-        </p:nvPicPr>
-        <p:blipFill>
-          <a:blip r:embed="rId2"/>
-          <a:stretch>
-            <a:fillRect/>
-          </a:stretch>
-        </p:blipFill>
+        </p:nvSpPr>
         <p:spPr>
           <a:xfrm>
-            <a:off x="365760" y="1554480"/>
-            <a:ext cx="6933804" cy="4297680"/>
-          </a:xfrm>
-          <a:prstGeom prst="rect">
-            <a:avLst/>
-          </a:prstGeom>
-        </p:spPr>
-      </p:pic>
-      <p:sp>
-        <p:nvSpPr>
-          <p:cNvPr id="5" name="TextBox 4"/>
-          <p:cNvSpPr txBox="1"/>
-          <p:nvPr/>
-        </p:nvSpPr>
-        <p:spPr>
-          <a:xfrm>
-            <a:off x="6949440" y="1828800"/>
-            <a:ext cx="4937760" cy="4937760"/>
+            <a:off x="640080" y="1554480"/>
+            <a:ext cx="10972800" cy="4937760"/>
           </a:xfrm>
           <a:prstGeom prst="rect">
             <a:avLst/>
@@ -3334,13 +3311,13 @@
               </a:spcAft>
             </a:pPr>
             <a:r>
-              <a:rPr sz="2000">
+              <a:rPr sz="1900">
                 <a:solidFill>
                   <a:srgbClr val="222222"/>
                 </a:solidFill>
                 <a:latin typeface="Malgun Gothic"/>
               </a:rPr>
-              <a:t>• 서울 91 ≫ 압도</a:t>
+              <a:t>• 각 지표를 전국 최소=0·최대=1로 정규화(A2는 1−값) 후 가중 평균 ×100</a:t>
             </a:r>
           </a:p>
           <a:p>
@@ -3350,65 +3327,327 @@
               </a:spcAft>
             </a:pPr>
             <a:r>
-              <a:rPr sz="2000">
+              <a:rPr sz="1900">
                 <a:solidFill>
                   <a:srgbClr val="222222"/>
                 </a:solidFill>
                 <a:latin typeface="Malgun Gothic"/>
               </a:rPr>
-              <a:t>• 울산·제주 2·3위</a:t>
-            </a:r>
-          </a:p>
-          <a:p>
-            <a:pPr lvl="1">
-              <a:spcAft>
-                <a:spcPts val="900"/>
-              </a:spcAft>
-            </a:pPr>
-            <a:r>
-              <a:rPr sz="1700">
-                <a:solidFill>
-                  <a:srgbClr val="222222"/>
-                </a:solidFill>
-                <a:latin typeface="Malgun Gothic"/>
-              </a:rPr>
-              <a:t>– (인구 적어 1인당 양호)</a:t>
-            </a:r>
-          </a:p>
-          <a:p>
-            <a:pPr>
-              <a:spcAft>
-                <a:spcPts val="900"/>
-              </a:spcAft>
-            </a:pPr>
-            <a:r>
-              <a:rPr sz="2000">
-                <a:solidFill>
-                  <a:srgbClr val="222222"/>
-                </a:solidFill>
-                <a:latin typeface="Malgun Gothic"/>
-              </a:rPr>
-              <a:t>• 인천은 하위권</a:t>
-            </a:r>
-          </a:p>
-          <a:p>
-            <a:pPr lvl="1">
-              <a:spcAft>
-                <a:spcPts val="900"/>
-              </a:spcAft>
-            </a:pPr>
-            <a:r>
-              <a:rPr sz="1700">
-                <a:solidFill>
-                  <a:srgbClr val="222222"/>
-                </a:solidFill>
-                <a:latin typeface="Malgun Gothic"/>
-              </a:rPr>
-              <a:t>– (사건부담 높음)</a:t>
-            </a:r>
-          </a:p>
-        </p:txBody>
-      </p:sp>
+              <a:t>• LLAI = 0.69·A1n + 0.14·(1−A2n) + 0.17·A3n  (엔트로피 가중치)</a:t>
+            </a:r>
+          </a:p>
+        </p:txBody>
+      </p:sp>
+      <p:graphicFrame>
+        <p:nvGraphicFramePr>
+          <p:cNvPr id="5" name="Table 4"/>
+          <p:cNvGraphicFramePr>
+            <a:graphicFrameLocks noGrp="1"/>
+          </p:cNvGraphicFramePr>
+          <p:nvPr/>
+        </p:nvGraphicFramePr>
+        <p:xfrm>
+          <a:off x="1828800" y="3017520"/>
+          <a:ext cx="8229600" cy="1645920"/>
+        </p:xfrm>
+        <a:graphic>
+          <a:graphicData uri="http://schemas.openxmlformats.org/drawingml/2006/table">
+            <a:tbl>
+              <a:tblPr firstRow="1" bandRow="1">
+                <a:tableStyleId>{5C22544A-7EE6-4342-B048-85BDC9FD1C3A}</a:tableStyleId>
+              </a:tblPr>
+              <a:tblGrid>
+                <a:gridCol w="1645920"/>
+                <a:gridCol w="1645920"/>
+                <a:gridCol w="1645920"/>
+                <a:gridCol w="1645920"/>
+                <a:gridCol w="1645920"/>
+              </a:tblGrid>
+              <a:tr h="548640">
+                <a:tc>
+                  <a:txBody>
+                    <a:bodyPr/>
+                    <a:lstStyle/>
+                    <a:p>
+                      <a:pPr algn="ctr"/>
+                      <a:r>
+                        <a:rPr sz="1800" b="1">
+                          <a:solidFill>
+                            <a:srgbClr val="FFFFFF"/>
+                          </a:solidFill>
+                          <a:latin typeface="Malgun Gothic"/>
+                        </a:rPr>
+                        <a:t>권역</a:t>
+                      </a:r>
+                    </a:p>
+                  </a:txBody>
+                  <a:tcPr anchor="ctr">
+                    <a:solidFill>
+                      <a:srgbClr val="1F3A5F"/>
+                    </a:solidFill>
+                  </a:tcPr>
+                </a:tc>
+                <a:tc>
+                  <a:txBody>
+                    <a:bodyPr/>
+                    <a:lstStyle/>
+                    <a:p>
+                      <a:pPr algn="ctr"/>
+                      <a:r>
+                        <a:rPr sz="1800" b="1">
+                          <a:solidFill>
+                            <a:srgbClr val="FFFFFF"/>
+                          </a:solidFill>
+                          <a:latin typeface="Malgun Gothic"/>
+                        </a:rPr>
+                        <a:t>A1n</a:t>
+                      </a:r>
+                    </a:p>
+                  </a:txBody>
+                  <a:tcPr anchor="ctr">
+                    <a:solidFill>
+                      <a:srgbClr val="1F3A5F"/>
+                    </a:solidFill>
+                  </a:tcPr>
+                </a:tc>
+                <a:tc>
+                  <a:txBody>
+                    <a:bodyPr/>
+                    <a:lstStyle/>
+                    <a:p>
+                      <a:pPr algn="ctr"/>
+                      <a:r>
+                        <a:rPr sz="1800" b="1">
+                          <a:solidFill>
+                            <a:srgbClr val="FFFFFF"/>
+                          </a:solidFill>
+                          <a:latin typeface="Malgun Gothic"/>
+                        </a:rPr>
+                        <a:t>1−A2n</a:t>
+                      </a:r>
+                    </a:p>
+                  </a:txBody>
+                  <a:tcPr anchor="ctr">
+                    <a:solidFill>
+                      <a:srgbClr val="1F3A5F"/>
+                    </a:solidFill>
+                  </a:tcPr>
+                </a:tc>
+                <a:tc>
+                  <a:txBody>
+                    <a:bodyPr/>
+                    <a:lstStyle/>
+                    <a:p>
+                      <a:pPr algn="ctr"/>
+                      <a:r>
+                        <a:rPr sz="1800" b="1">
+                          <a:solidFill>
+                            <a:srgbClr val="FFFFFF"/>
+                          </a:solidFill>
+                          <a:latin typeface="Malgun Gothic"/>
+                        </a:rPr>
+                        <a:t>A3n</a:t>
+                      </a:r>
+                    </a:p>
+                  </a:txBody>
+                  <a:tcPr anchor="ctr">
+                    <a:solidFill>
+                      <a:srgbClr val="1F3A5F"/>
+                    </a:solidFill>
+                  </a:tcPr>
+                </a:tc>
+                <a:tc>
+                  <a:txBody>
+                    <a:bodyPr/>
+                    <a:lstStyle/>
+                    <a:p>
+                      <a:pPr algn="ctr"/>
+                      <a:r>
+                        <a:rPr sz="1800" b="1">
+                          <a:solidFill>
+                            <a:srgbClr val="FFFFFF"/>
+                          </a:solidFill>
+                          <a:latin typeface="Malgun Gothic"/>
+                        </a:rPr>
+                        <a:t>LLAI</a:t>
+                      </a:r>
+                    </a:p>
+                  </a:txBody>
+                  <a:tcPr anchor="ctr">
+                    <a:solidFill>
+                      <a:srgbClr val="1F3A5F"/>
+                    </a:solidFill>
+                  </a:tcPr>
+                </a:tc>
+              </a:tr>
+              <a:tr h="548640">
+                <a:tc>
+                  <a:txBody>
+                    <a:bodyPr/>
+                    <a:lstStyle/>
+                    <a:p>
+                      <a:pPr algn="ctr"/>
+                      <a:r>
+                        <a:rPr sz="1800">
+                          <a:latin typeface="Malgun Gothic"/>
+                        </a:rPr>
+                        <a:t>서울</a:t>
+                      </a:r>
+                    </a:p>
+                  </a:txBody>
+                  <a:tcPr anchor="ctr"/>
+                </a:tc>
+                <a:tc>
+                  <a:txBody>
+                    <a:bodyPr/>
+                    <a:lstStyle/>
+                    <a:p>
+                      <a:pPr algn="ctr"/>
+                      <a:r>
+                        <a:rPr sz="1800">
+                          <a:latin typeface="Malgun Gothic"/>
+                        </a:rPr>
+                        <a:t>1.00</a:t>
+                      </a:r>
+                    </a:p>
+                  </a:txBody>
+                  <a:tcPr anchor="ctr"/>
+                </a:tc>
+                <a:tc>
+                  <a:txBody>
+                    <a:bodyPr/>
+                    <a:lstStyle/>
+                    <a:p>
+                      <a:pPr algn="ctr"/>
+                      <a:r>
+                        <a:rPr sz="1800">
+                          <a:latin typeface="Malgun Gothic"/>
+                        </a:rPr>
+                        <a:t>1.00</a:t>
+                      </a:r>
+                    </a:p>
+                  </a:txBody>
+                  <a:tcPr anchor="ctr"/>
+                </a:tc>
+                <a:tc>
+                  <a:txBody>
+                    <a:bodyPr/>
+                    <a:lstStyle/>
+                    <a:p>
+                      <a:pPr algn="ctr"/>
+                      <a:r>
+                        <a:rPr sz="1800">
+                          <a:latin typeface="Malgun Gothic"/>
+                        </a:rPr>
+                        <a:t>0.48</a:t>
+                      </a:r>
+                    </a:p>
+                  </a:txBody>
+                  <a:tcPr anchor="ctr"/>
+                </a:tc>
+                <a:tc>
+                  <a:txBody>
+                    <a:bodyPr/>
+                    <a:lstStyle/>
+                    <a:p>
+                      <a:pPr algn="ctr"/>
+                      <a:r>
+                        <a:rPr sz="1800">
+                          <a:latin typeface="Malgun Gothic"/>
+                        </a:rPr>
+                        <a:t>91.1</a:t>
+                      </a:r>
+                    </a:p>
+                  </a:txBody>
+                  <a:tcPr anchor="ctr"/>
+                </a:tc>
+              </a:tr>
+              <a:tr h="548640">
+                <a:tc>
+                  <a:txBody>
+                    <a:bodyPr/>
+                    <a:lstStyle/>
+                    <a:p>
+                      <a:pPr algn="ctr"/>
+                      <a:r>
+                        <a:rPr sz="1800">
+                          <a:latin typeface="Malgun Gothic"/>
+                        </a:rPr>
+                        <a:t>강원</a:t>
+                      </a:r>
+                    </a:p>
+                  </a:txBody>
+                  <a:tcPr anchor="ctr"/>
+                </a:tc>
+                <a:tc>
+                  <a:txBody>
+                    <a:bodyPr/>
+                    <a:lstStyle/>
+                    <a:p>
+                      <a:pPr algn="ctr"/>
+                      <a:r>
+                        <a:rPr sz="1800">
+                          <a:latin typeface="Malgun Gothic"/>
+                        </a:rPr>
+                        <a:t>0.00</a:t>
+                      </a:r>
+                    </a:p>
+                  </a:txBody>
+                  <a:tcPr anchor="ctr"/>
+                </a:tc>
+                <a:tc>
+                  <a:txBody>
+                    <a:bodyPr/>
+                    <a:lstStyle/>
+                    <a:p>
+                      <a:pPr algn="ctr"/>
+                      <a:r>
+                        <a:rPr sz="1800">
+                          <a:latin typeface="Malgun Gothic"/>
+                        </a:rPr>
+                        <a:t>0.00</a:t>
+                      </a:r>
+                    </a:p>
+                  </a:txBody>
+                  <a:tcPr anchor="ctr"/>
+                </a:tc>
+                <a:tc>
+                  <a:txBody>
+                    <a:bodyPr/>
+                    <a:lstStyle/>
+                    <a:p>
+                      <a:pPr algn="ctr"/>
+                      <a:r>
+                        <a:rPr sz="1800">
+                          <a:latin typeface="Malgun Gothic"/>
+                        </a:rPr>
+                        <a:t>0.09</a:t>
+                      </a:r>
+                    </a:p>
+                  </a:txBody>
+                  <a:tcPr anchor="ctr"/>
+                </a:tc>
+                <a:tc>
+                  <a:txBody>
+                    <a:bodyPr/>
+                    <a:lstStyle/>
+                    <a:p>
+                      <a:pPr algn="ctr"/>
+                      <a:r>
+                        <a:rPr sz="1800">
+                          <a:latin typeface="Malgun Gothic"/>
+                        </a:rPr>
+                        <a:t>1.6</a:t>
+                      </a:r>
+                    </a:p>
+                  </a:txBody>
+                  <a:tcPr anchor="ctr"/>
+                </a:tc>
+              </a:tr>
+            </a:tbl>
+          </a:graphicData>
+        </a:graphic>
+      </p:graphicFrame>
       <p:sp>
         <p:nvSpPr>
           <p:cNvPr id="6" name="TextBox 5"/>
@@ -3417,8 +3656,8 @@
         </p:nvSpPr>
         <p:spPr>
           <a:xfrm>
-            <a:off x="640080" y="5989320"/>
-            <a:ext cx="10881360" cy="640080"/>
+            <a:off x="640080" y="4937760"/>
+            <a:ext cx="10972800" cy="4937760"/>
           </a:xfrm>
           <a:prstGeom prst="rect">
             <a:avLst/>
@@ -3431,14 +3670,35 @@
           </a:bodyPr>
           <a:lstStyle/>
           <a:p>
-            <a:r>
-              <a:rPr sz="1400" i="1">
-                <a:solidFill>
-                  <a:srgbClr val="555555"/>
-                </a:solidFill>
-                <a:latin typeface="Malgun Gothic"/>
-              </a:rPr>
-              <a:t>📊 읽는 법 — 막대 길이=LLAI, 색=클러스터. 서울만 홀로 길고 파랑(별도 그룹).</a:t>
+            <a:pPr>
+              <a:spcAft>
+                <a:spcPts val="900"/>
+              </a:spcAft>
+            </a:pPr>
+            <a:r>
+              <a:rPr sz="1800">
+                <a:solidFill>
+                  <a:srgbClr val="222222"/>
+                </a:solidFill>
+                <a:latin typeface="Malgun Gothic"/>
+              </a:rPr>
+              <a:t>• 서울: 변호사·사건부담 두 축 모두 전국 최상(1.0) → 거의 만점</a:t>
+            </a:r>
+          </a:p>
+          <a:p>
+            <a:pPr>
+              <a:spcAft>
+                <a:spcPts val="900"/>
+              </a:spcAft>
+            </a:pPr>
+            <a:r>
+              <a:rPr sz="1800">
+                <a:solidFill>
+                  <a:srgbClr val="222222"/>
+                </a:solidFill>
+                <a:latin typeface="Malgun Gothic"/>
+              </a:rPr>
+              <a:t>• 강원: 두 축 모두 전국 최하(0) → 바닥. LLAI는 '전국 상대 위치'를 의미</a:t>
             </a:r>
           </a:p>
         </p:txBody>
@@ -3490,7 +3750,7 @@
                 </a:solidFill>
                 <a:latin typeface="Malgun Gothic"/>
               </a:rPr>
-              <a:t>7. 결과 ② — 코로플레스 지도</a:t>
+              <a:t>7. 결과 ① — LLAI 순위 (region13, 2024)</a:t>
             </a:r>
           </a:p>
         </p:txBody>
@@ -3540,7 +3800,7 @@
       </p:sp>
       <p:pic>
         <p:nvPicPr>
-          <p:cNvPr id="4" name="Picture 3" descr="fig7_map_region13.png"/>
+          <p:cNvPr id="4" name="Picture 3" descr="fig1_llai_ranking_region13.png"/>
           <p:cNvPicPr>
             <a:picLocks noChangeAspect="1"/>
           </p:cNvPicPr>
@@ -3554,8 +3814,8 @@
         </p:blipFill>
         <p:spPr>
           <a:xfrm>
-            <a:off x="3657600" y="1371600"/>
-            <a:ext cx="5525669" cy="4572000"/>
+            <a:off x="365760" y="1554480"/>
+            <a:ext cx="6933804" cy="4297680"/>
           </a:xfrm>
           <a:prstGeom prst="rect">
             <a:avLst/>
@@ -3565,6 +3825,109 @@
       <p:sp>
         <p:nvSpPr>
           <p:cNvPr id="5" name="TextBox 4"/>
+          <p:cNvSpPr txBox="1"/>
+          <p:nvPr/>
+        </p:nvSpPr>
+        <p:spPr>
+          <a:xfrm>
+            <a:off x="6949440" y="1828800"/>
+            <a:ext cx="4937760" cy="4937760"/>
+          </a:xfrm>
+          <a:prstGeom prst="rect">
+            <a:avLst/>
+          </a:prstGeom>
+          <a:noFill/>
+        </p:spPr>
+        <p:txBody>
+          <a:bodyPr wrap="square">
+            <a:spAutoFit/>
+          </a:bodyPr>
+          <a:lstStyle/>
+          <a:p>
+            <a:pPr>
+              <a:spcAft>
+                <a:spcPts val="900"/>
+              </a:spcAft>
+            </a:pPr>
+            <a:r>
+              <a:rPr sz="2000">
+                <a:solidFill>
+                  <a:srgbClr val="222222"/>
+                </a:solidFill>
+                <a:latin typeface="Malgun Gothic"/>
+              </a:rPr>
+              <a:t>• 서울 91 ≫ 압도</a:t>
+            </a:r>
+          </a:p>
+          <a:p>
+            <a:pPr>
+              <a:spcAft>
+                <a:spcPts val="900"/>
+              </a:spcAft>
+            </a:pPr>
+            <a:r>
+              <a:rPr sz="2000">
+                <a:solidFill>
+                  <a:srgbClr val="222222"/>
+                </a:solidFill>
+                <a:latin typeface="Malgun Gothic"/>
+              </a:rPr>
+              <a:t>• 울산·제주 2·3위</a:t>
+            </a:r>
+          </a:p>
+          <a:p>
+            <a:pPr lvl="1">
+              <a:spcAft>
+                <a:spcPts val="900"/>
+              </a:spcAft>
+            </a:pPr>
+            <a:r>
+              <a:rPr sz="1700">
+                <a:solidFill>
+                  <a:srgbClr val="222222"/>
+                </a:solidFill>
+                <a:latin typeface="Malgun Gothic"/>
+              </a:rPr>
+              <a:t>– (인구 적어 1인당 양호)</a:t>
+            </a:r>
+          </a:p>
+          <a:p>
+            <a:pPr>
+              <a:spcAft>
+                <a:spcPts val="900"/>
+              </a:spcAft>
+            </a:pPr>
+            <a:r>
+              <a:rPr sz="2000">
+                <a:solidFill>
+                  <a:srgbClr val="222222"/>
+                </a:solidFill>
+                <a:latin typeface="Malgun Gothic"/>
+              </a:rPr>
+              <a:t>• 인천은 하위권</a:t>
+            </a:r>
+          </a:p>
+          <a:p>
+            <a:pPr lvl="1">
+              <a:spcAft>
+                <a:spcPts val="900"/>
+              </a:spcAft>
+            </a:pPr>
+            <a:r>
+              <a:rPr sz="1700">
+                <a:solidFill>
+                  <a:srgbClr val="222222"/>
+                </a:solidFill>
+                <a:latin typeface="Malgun Gothic"/>
+              </a:rPr>
+              <a:t>– (사건부담 높음)</a:t>
+            </a:r>
+          </a:p>
+        </p:txBody>
+      </p:sp>
+      <p:sp>
+        <p:nvSpPr>
+          <p:cNvPr id="6" name="TextBox 5"/>
           <p:cNvSpPr txBox="1"/>
           <p:nvPr/>
         </p:nvSpPr>
@@ -3591,7 +3954,7 @@
                 </a:solidFill>
                 <a:latin typeface="Malgun Gothic"/>
               </a:rPr>
-              <a:t>📊 읽는 법 — 파랑=고접근성, 빨강=저접근성. 서울만 파랑, 전국이 붉음 → 서울 일극 집중.</a:t>
+              <a:t>📊 읽는 법 — 막대 길이=LLAI, 색=클러스터. 서울만 홀로 길고 파랑(별도 그룹).</a:t>
             </a:r>
           </a:p>
         </p:txBody>
@@ -3643,7 +4006,7 @@
                 </a:solidFill>
                 <a:latin typeface="Malgun Gothic"/>
               </a:rPr>
-              <a:t>8. 가설 H2 — 변호사 ↔ 사건 부담</a:t>
+              <a:t>7. 결과 ② — 코로플레스 지도</a:t>
             </a:r>
           </a:p>
         </p:txBody>
@@ -3693,7 +4056,7 @@
       </p:sp>
       <p:pic>
         <p:nvPicPr>
-          <p:cNvPr id="4" name="Picture 3" descr="fig2_scatter_a1_a2_region13.png"/>
+          <p:cNvPr id="4" name="Picture 3" descr="fig7_map_region13.png"/>
           <p:cNvPicPr>
             <a:picLocks noChangeAspect="1"/>
           </p:cNvPicPr>
@@ -3707,8 +4070,8 @@
         </p:blipFill>
         <p:spPr>
           <a:xfrm>
-            <a:off x="457200" y="1554480"/>
-            <a:ext cx="5346315" cy="4206240"/>
+            <a:off x="3657600" y="1371600"/>
+            <a:ext cx="5525669" cy="4572000"/>
           </a:xfrm>
           <a:prstGeom prst="rect">
             <a:avLst/>
@@ -3718,93 +4081,6 @@
       <p:sp>
         <p:nvSpPr>
           <p:cNvPr id="5" name="TextBox 4"/>
-          <p:cNvSpPr txBox="1"/>
-          <p:nvPr/>
-        </p:nvSpPr>
-        <p:spPr>
-          <a:xfrm>
-            <a:off x="7040880" y="1828800"/>
-            <a:ext cx="4846320" cy="4937760"/>
-          </a:xfrm>
-          <a:prstGeom prst="rect">
-            <a:avLst/>
-          </a:prstGeom>
-          <a:noFill/>
-        </p:spPr>
-        <p:txBody>
-          <a:bodyPr wrap="square">
-            <a:spAutoFit/>
-          </a:bodyPr>
-          <a:lstStyle/>
-          <a:p>
-            <a:pPr>
-              <a:spcAft>
-                <a:spcPts val="900"/>
-              </a:spcAft>
-            </a:pPr>
-            <a:r>
-              <a:rPr sz="2000">
-                <a:solidFill>
-                  <a:srgbClr val="222222"/>
-                </a:solidFill>
-                <a:latin typeface="Malgun Gothic"/>
-              </a:rPr>
-              <a:t>• 강한 음의 상관</a:t>
-            </a:r>
-          </a:p>
-          <a:p>
-            <a:pPr lvl="1">
-              <a:spcAft>
-                <a:spcPts val="900"/>
-              </a:spcAft>
-            </a:pPr>
-            <a:r>
-              <a:rPr sz="1700">
-                <a:solidFill>
-                  <a:srgbClr val="222222"/>
-                </a:solidFill>
-                <a:latin typeface="Malgun Gothic"/>
-              </a:rPr>
-              <a:t>– r = −0.84 ~ −0.88 (p&lt;0.01)</a:t>
-            </a:r>
-          </a:p>
-          <a:p>
-            <a:pPr>
-              <a:spcAft>
-                <a:spcPts val="900"/>
-              </a:spcAft>
-            </a:pPr>
-            <a:r>
-              <a:rPr sz="2000">
-                <a:solidFill>
-                  <a:srgbClr val="222222"/>
-                </a:solidFill>
-                <a:latin typeface="Malgun Gothic"/>
-              </a:rPr>
-              <a:t>• 변호사 부족 → 1인당 부담 폭증</a:t>
-            </a:r>
-          </a:p>
-          <a:p>
-            <a:pPr>
-              <a:spcAft>
-                <a:spcPts val="900"/>
-              </a:spcAft>
-            </a:pPr>
-            <a:r>
-              <a:rPr sz="2000">
-                <a:solidFill>
-                  <a:srgbClr val="222222"/>
-                </a:solidFill>
-                <a:latin typeface="Malgun Gothic"/>
-              </a:rPr>
-              <a:t>• 서울은 우하단 극단 이상치</a:t>
-            </a:r>
-          </a:p>
-        </p:txBody>
-      </p:sp>
-      <p:sp>
-        <p:nvSpPr>
-          <p:cNvPr id="6" name="TextBox 5"/>
           <p:cNvSpPr txBox="1"/>
           <p:nvPr/>
         </p:nvSpPr>
@@ -3831,7 +4107,7 @@
                 </a:solidFill>
                 <a:latin typeface="Malgun Gothic"/>
               </a:rPr>
-              <a:t>📊 읽는 법 — 오른쪽 아래로 갈수록 좋음. 서울은 맨 오른쪽 아래, 비수도권은 왼쪽 위에 뭉침.</a:t>
+              <a:t>📊 읽는 법 — 파랑=고접근성, 빨강=저접근성. 서울만 파랑, 전국이 붉음 → 서울 일극 집중.</a:t>
             </a:r>
           </a:p>
         </p:txBody>
@@ -3883,7 +4159,7 @@
                 </a:solidFill>
                 <a:latin typeface="Malgun Gothic"/>
               </a:rPr>
-              <a:t>9. 가설 H4 — 양적 팽창의 함정 ★</a:t>
+              <a:t>8. 가설 H2 — 변호사 ↔ 사건 부담</a:t>
             </a:r>
           </a:p>
         </p:txBody>
@@ -3933,7 +4209,7 @@
       </p:sp>
       <p:pic>
         <p:nvPicPr>
-          <p:cNvPr id="4" name="Picture 3" descr="fig8_lawyer_trend.png"/>
+          <p:cNvPr id="4" name="Picture 3" descr="fig2_scatter_a1_a2_region13.png"/>
           <p:cNvPicPr>
             <a:picLocks noChangeAspect="1"/>
           </p:cNvPicPr>
@@ -3948,7 +4224,7 @@
         <p:spPr>
           <a:xfrm>
             <a:off x="457200" y="1554480"/>
-            <a:ext cx="7072970" cy="4114800"/>
+            <a:ext cx="5346315" cy="4206240"/>
           </a:xfrm>
           <a:prstGeom prst="rect">
             <a:avLst/>
@@ -3963,8 +4239,8 @@
         </p:nvSpPr>
         <p:spPr>
           <a:xfrm>
-            <a:off x="7680960" y="1737360"/>
-            <a:ext cx="4297680" cy="4937760"/>
+            <a:off x="7040880" y="1828800"/>
+            <a:ext cx="4846320" cy="4937760"/>
           </a:xfrm>
           <a:prstGeom prst="rect">
             <a:avLst/>
@@ -3983,13 +4259,13 @@
               </a:spcAft>
             </a:pPr>
             <a:r>
-              <a:rPr sz="1800">
+              <a:rPr sz="2000">
                 <a:solidFill>
                   <a:srgbClr val="222222"/>
                 </a:solidFill>
                 <a:latin typeface="Malgun Gothic"/>
               </a:rPr>
-              <a:t>• 변호사 3.4배↑</a:t>
+              <a:t>• 강한 음의 상관</a:t>
             </a:r>
           </a:p>
           <a:p>
@@ -3999,13 +4275,13 @@
               </a:spcAft>
             </a:pPr>
             <a:r>
-              <a:rPr sz="1500">
+              <a:rPr sz="1700">
                 <a:solidFill>
                   <a:srgbClr val="222222"/>
                 </a:solidFill>
                 <a:latin typeface="Malgun Gothic"/>
               </a:rPr>
-              <a:t>– 9,612 → 32,273명</a:t>
+              <a:t>– r = −0.84 ~ −0.88 (p&lt;0.01)</a:t>
             </a:r>
           </a:p>
           <a:p>
@@ -4015,29 +4291,13 @@
               </a:spcAft>
             </a:pPr>
             <a:r>
-              <a:rPr sz="1800">
+              <a:rPr sz="2000">
                 <a:solidFill>
                   <a:srgbClr val="222222"/>
                 </a:solidFill>
                 <a:latin typeface="Malgun Gothic"/>
               </a:rPr>
-              <a:t>• 서울 비중 71%→76%↑</a:t>
-            </a:r>
-          </a:p>
-          <a:p>
-            <a:pPr lvl="1">
-              <a:spcAft>
-                <a:spcPts val="900"/>
-              </a:spcAft>
-            </a:pPr>
-            <a:r>
-              <a:rPr sz="1500">
-                <a:solidFill>
-                  <a:srgbClr val="222222"/>
-                </a:solidFill>
-                <a:latin typeface="Malgun Gothic"/>
-              </a:rPr>
-              <a:t>– 비수도권 全 권역 하락</a:t>
+              <a:t>• 변호사 부족 → 1인당 부담 폭증</a:t>
             </a:r>
           </a:p>
           <a:p>
@@ -4047,13 +4307,13 @@
               </a:spcAft>
             </a:pPr>
             <a:r>
-              <a:rPr sz="1800">
+              <a:rPr sz="2000">
                 <a:solidFill>
                   <a:srgbClr val="222222"/>
                 </a:solidFill>
                 <a:latin typeface="Malgun Gothic"/>
               </a:rPr>
-              <a:t>• HHI 0.53→0.60 심화</a:t>
+              <a:t>• 서울은 우하단 극단 이상치</a:t>
             </a:r>
           </a:p>
         </p:txBody>
@@ -4087,7 +4347,7 @@
                 </a:solidFill>
                 <a:latin typeface="Malgun Gothic"/>
               </a:rPr>
-              <a:t>📊 읽는 법 — 권역별 점유율 2009(회색) vs 2026(빨강). 서울만 커지고 나머지는 줄거나 정체.</a:t>
+              <a:t>📊 읽는 법 — 오른쪽 아래로 갈수록 좋음. 서울은 맨 오른쪽 아래, 비수도권은 왼쪽 위에 뭉침.</a:t>
             </a:r>
           </a:p>
         </p:txBody>
@@ -4139,7 +4399,7 @@
                 </a:solidFill>
                 <a:latin typeface="Malgun Gothic"/>
               </a:rPr>
-              <a:t>10. 심화 — 서울을 빼고 보면</a:t>
+              <a:t>9. 가설 H4 — 양적 팽창의 함정 ★</a:t>
             </a:r>
           </a:p>
         </p:txBody>
@@ -4189,7 +4449,7 @@
       </p:sp>
       <p:pic>
         <p:nvPicPr>
-          <p:cNvPr id="4" name="Picture 3" descr="fig7_map_region13_exseoul.png"/>
+          <p:cNvPr id="4" name="Picture 3" descr="fig8_lawyer_trend.png"/>
           <p:cNvPicPr>
             <a:picLocks noChangeAspect="1"/>
           </p:cNvPicPr>
@@ -4203,8 +4463,8 @@
         </p:blipFill>
         <p:spPr>
           <a:xfrm>
-            <a:off x="365760" y="1463040"/>
-            <a:ext cx="5304642" cy="4389120"/>
+            <a:off x="457200" y="1554480"/>
+            <a:ext cx="7072970" cy="4114800"/>
           </a:xfrm>
           <a:prstGeom prst="rect">
             <a:avLst/>
@@ -4219,8 +4479,8 @@
         </p:nvSpPr>
         <p:spPr>
           <a:xfrm>
-            <a:off x="7040880" y="1828800"/>
-            <a:ext cx="4846320" cy="4937760"/>
+            <a:off x="7680960" y="1737360"/>
+            <a:ext cx="4297680" cy="4937760"/>
           </a:xfrm>
           <a:prstGeom prst="rect">
             <a:avLst/>
@@ -4239,13 +4499,29 @@
               </a:spcAft>
             </a:pPr>
             <a:r>
-              <a:rPr sz="2000">
+              <a:rPr sz="1800">
                 <a:solidFill>
                   <a:srgbClr val="222222"/>
                 </a:solidFill>
                 <a:latin typeface="Malgun Gothic"/>
               </a:rPr>
-              <a:t>• 부산·울산·제주 상위 부상</a:t>
+              <a:t>• 변호사 3.4배↑</a:t>
+            </a:r>
+          </a:p>
+          <a:p>
+            <a:pPr lvl="1">
+              <a:spcAft>
+                <a:spcPts val="900"/>
+              </a:spcAft>
+            </a:pPr>
+            <a:r>
+              <a:rPr sz="1500">
+                <a:solidFill>
+                  <a:srgbClr val="222222"/>
+                </a:solidFill>
+                <a:latin typeface="Malgun Gothic"/>
+              </a:rPr>
+              <a:t>– 9,612 → 32,273명</a:t>
             </a:r>
           </a:p>
           <a:p>
@@ -4255,13 +4531,29 @@
               </a:spcAft>
             </a:pPr>
             <a:r>
-              <a:rPr sz="2000">
+              <a:rPr sz="1800">
                 <a:solidFill>
                   <a:srgbClr val="222222"/>
                 </a:solidFill>
                 <a:latin typeface="Malgun Gothic"/>
               </a:rPr>
-              <a:t>• 경기·인천은 중하위</a:t>
+              <a:t>• 서울 비중 71%→76%↑</a:t>
+            </a:r>
+          </a:p>
+          <a:p>
+            <a:pPr lvl="1">
+              <a:spcAft>
+                <a:spcPts val="900"/>
+              </a:spcAft>
+            </a:pPr>
+            <a:r>
+              <a:rPr sz="1500">
+                <a:solidFill>
+                  <a:srgbClr val="222222"/>
+                </a:solidFill>
+                <a:latin typeface="Malgun Gothic"/>
+              </a:rPr>
+              <a:t>– 비수도권 全 권역 하락</a:t>
             </a:r>
           </a:p>
           <a:p>
@@ -4271,29 +4563,13 @@
               </a:spcAft>
             </a:pPr>
             <a:r>
-              <a:rPr sz="2000">
+              <a:rPr sz="1800">
                 <a:solidFill>
                   <a:srgbClr val="222222"/>
                 </a:solidFill>
                 <a:latin typeface="Malgun Gothic"/>
               </a:rPr>
-              <a:t>• 핵심: '수도권 우위'는</a:t>
-            </a:r>
-          </a:p>
-          <a:p>
-            <a:pPr lvl="1">
-              <a:spcAft>
-                <a:spcPts val="900"/>
-              </a:spcAft>
-            </a:pPr>
-            <a:r>
-              <a:rPr sz="1700">
-                <a:solidFill>
-                  <a:srgbClr val="222222"/>
-                </a:solidFill>
-                <a:latin typeface="Malgun Gothic"/>
-              </a:rPr>
-              <a:t>– 사실상 서울 단독 현상</a:t>
+              <a:t>• HHI 0.53→0.60 심화</a:t>
             </a:r>
           </a:p>
         </p:txBody>
@@ -4327,7 +4603,7 @@
                 </a:solidFill>
                 <a:latin typeface="Malgun Gothic"/>
               </a:rPr>
-              <a:t>📊 읽는 법 — 서울 제외·재정규화(서울 회색). 색 범위 재조정 → 지방 내부 격차가 보임.</a:t>
+              <a:t>📊 읽는 법 — 권역별 점유율 2009(회색) vs 2026(빨강). 서울만 커지고 나머지는 줄거나 정체.</a:t>
             </a:r>
           </a:p>
         </p:txBody>
@@ -4379,7 +4655,7 @@
                 </a:solidFill>
                 <a:latin typeface="Malgun Gothic"/>
               </a:rPr>
-              <a:t>11. 가설 검정 종합</a:t>
+              <a:t>10. 심화 — 서울을 빼고 보면</a:t>
             </a:r>
           </a:p>
         </p:txBody>
@@ -4427,16 +4703,40 @@
           </a:p>
         </p:txBody>
       </p:sp>
-      <p:sp>
-        <p:nvSpPr>
-          <p:cNvPr id="4" name="TextBox 3"/>
+      <p:pic>
+        <p:nvPicPr>
+          <p:cNvPr id="4" name="Picture 3" descr="fig7_map_region13_exseoul.png"/>
+          <p:cNvPicPr>
+            <a:picLocks noChangeAspect="1"/>
+          </p:cNvPicPr>
+          <p:nvPr/>
+        </p:nvPicPr>
+        <p:blipFill>
+          <a:blip r:embed="rId2"/>
+          <a:stretch>
+            <a:fillRect/>
+          </a:stretch>
+        </p:blipFill>
+        <p:spPr>
+          <a:xfrm>
+            <a:off x="365760" y="1463040"/>
+            <a:ext cx="5304642" cy="4389120"/>
+          </a:xfrm>
+          <a:prstGeom prst="rect">
+            <a:avLst/>
+          </a:prstGeom>
+        </p:spPr>
+      </p:pic>
+      <p:sp>
+        <p:nvSpPr>
+          <p:cNvPr id="5" name="TextBox 4"/>
           <p:cNvSpPr txBox="1"/>
           <p:nvPr/>
         </p:nvSpPr>
         <p:spPr>
           <a:xfrm>
-            <a:off x="640080" y="1554480"/>
-            <a:ext cx="10972800" cy="4937760"/>
+            <a:off x="7040880" y="1828800"/>
+            <a:ext cx="4846320" cy="4937760"/>
           </a:xfrm>
           <a:prstGeom prst="rect">
             <a:avLst/>
@@ -4461,7 +4761,7 @@
                 </a:solidFill>
                 <a:latin typeface="Malgun Gothic"/>
               </a:rPr>
-              <a:t>• H2 ✅ 강하게 지지 — corr(A1,A2) = −0.84~−0.88 (p&lt;0.01)</a:t>
+              <a:t>• 부산·울산·제주 상위 부상</a:t>
             </a:r>
           </a:p>
           <a:p>
@@ -4477,7 +4777,7 @@
                 </a:solidFill>
                 <a:latin typeface="Malgun Gothic"/>
               </a:rPr>
-              <a:t>• H4 ✅ 지지 — 변호사 3.4배↑에도 서울 집중 심화 + 법률구조 격차 확대</a:t>
+              <a:t>• 경기·인천은 중하위</a:t>
             </a:r>
           </a:p>
           <a:p>
@@ -4493,23 +4793,7 @@
                 </a:solidFill>
                 <a:latin typeface="Malgun Gothic"/>
               </a:rPr>
-              <a:t>• H1 △ 방향만 일치 — 수도권 1인당 인구 4,039 &lt; 비수도권 5,250 (p=0.19)</a:t>
-            </a:r>
-          </a:p>
-          <a:p>
-            <a:pPr>
-              <a:spcAft>
-                <a:spcPts val="900"/>
-              </a:spcAft>
-            </a:pPr>
-            <a:r>
-              <a:rPr sz="2000">
-                <a:solidFill>
-                  <a:srgbClr val="222222"/>
-                </a:solidFill>
-                <a:latin typeface="Malgun Gothic"/>
-              </a:rPr>
-              <a:t>• H3 △ 약함 — GRDP와 접근성 상관 비유의</a:t>
+              <a:t>• 핵심: '수도권 우위'는</a:t>
             </a:r>
           </a:p>
           <a:p>
@@ -4525,7 +4809,41 @@
                 </a:solidFill>
                 <a:latin typeface="Malgun Gothic"/>
               </a:rPr>
-              <a:t>– 표본 작음(권역 10~13개) → 검정력 한계 명시</a:t>
+              <a:t>– 사실상 서울 단독 현상</a:t>
+            </a:r>
+          </a:p>
+        </p:txBody>
+      </p:sp>
+      <p:sp>
+        <p:nvSpPr>
+          <p:cNvPr id="6" name="TextBox 5"/>
+          <p:cNvSpPr txBox="1"/>
+          <p:nvPr/>
+        </p:nvSpPr>
+        <p:spPr>
+          <a:xfrm>
+            <a:off x="640080" y="5989320"/>
+            <a:ext cx="10881360" cy="640080"/>
+          </a:xfrm>
+          <a:prstGeom prst="rect">
+            <a:avLst/>
+          </a:prstGeom>
+          <a:noFill/>
+        </p:spPr>
+        <p:txBody>
+          <a:bodyPr wrap="square">
+            <a:spAutoFit/>
+          </a:bodyPr>
+          <a:lstStyle/>
+          <a:p>
+            <a:r>
+              <a:rPr sz="1400" i="1">
+                <a:solidFill>
+                  <a:srgbClr val="555555"/>
+                </a:solidFill>
+                <a:latin typeface="Malgun Gothic"/>
+              </a:rPr>
+              <a:t>📊 읽는 법 — 서울 제외·재정규화(서울 회색). 색 범위 재조정 → 지방 내부 격차가 보임.</a:t>
             </a:r>
           </a:p>
         </p:txBody>
@@ -4577,7 +4895,7 @@
                 </a:solidFill>
                 <a:latin typeface="Malgun Gothic"/>
               </a:rPr>
-              <a:t>12. 결론 · 정책 시사점</a:t>
+              <a:t>11. 가설 검정 종합</a:t>
             </a:r>
           </a:p>
         </p:txBody>
@@ -4659,7 +4977,7 @@
                 </a:solidFill>
                 <a:latin typeface="Malgun Gothic"/>
               </a:rPr>
-              <a:t>• 변호사 자원의 서울 일극 집중이 격차의 핵심 동인</a:t>
+              <a:t>• H2 ✅ 강하게 지지 — corr(A1,A2) = −0.84~−0.88 (p&lt;0.01)</a:t>
             </a:r>
           </a:p>
           <a:p>
@@ -4675,7 +4993,7 @@
                 </a:solidFill>
                 <a:latin typeface="Malgun Gothic"/>
               </a:rPr>
-              <a:t>• 인구 대비·사건부담이 접근성을 좌우 (인천=수도권인데 하위)</a:t>
+              <a:t>• H4 ✅ 지지 — 변호사 3.4배↑에도 서울 집중 심화 + 법률구조 격차 확대</a:t>
             </a:r>
           </a:p>
           <a:p>
@@ -4691,7 +5009,7 @@
                 </a:solidFill>
                 <a:latin typeface="Malgun Gothic"/>
               </a:rPr>
-              <a:t>• 양적 팽창만으로는 격차 해소 안 됨</a:t>
+              <a:t>• H1 △ 방향만 일치 — 수도권 1인당 인구 4,039 &lt; 비수도권 5,250 (p=0.19)</a:t>
             </a:r>
           </a:p>
           <a:p>
@@ -4707,7 +5025,7 @@
                 </a:solidFill>
                 <a:latin typeface="Malgun Gothic"/>
               </a:rPr>
-              <a:t>• 정책 제언</a:t>
+              <a:t>• H3 △ 약함 — GRDP와 접근성 상관 비유의</a:t>
             </a:r>
           </a:p>
           <a:p>
@@ -4723,23 +5041,7 @@
                 </a:solidFill>
                 <a:latin typeface="Malgun Gothic"/>
               </a:rPr>
-              <a:t>– 지방 변호사 유치 인센티브 / 공단 자원 비수도권 우선 배치</a:t>
-            </a:r>
-          </a:p>
-          <a:p>
-            <a:pPr lvl="1">
-              <a:spcAft>
-                <a:spcPts val="900"/>
-              </a:spcAft>
-            </a:pPr>
-            <a:r>
-              <a:rPr sz="1700">
-                <a:solidFill>
-                  <a:srgbClr val="222222"/>
-                </a:solidFill>
-                <a:latin typeface="Malgun Gothic"/>
-              </a:rPr>
-              <a:t>– 사건부담 높은 권역 인력 보강 / 로스쿨 정원·배치 연계</a:t>
+              <a:t>– 표본 작음(권역 10~13개) → 검정력 한계 명시</a:t>
             </a:r>
           </a:p>
         </p:txBody>
@@ -4791,7 +5093,7 @@
                 </a:solidFill>
                 <a:latin typeface="Malgun Gothic"/>
               </a:rPr>
-              <a:t>13. 한계와 향후 과제</a:t>
+              <a:t>12. 결론 · 정책 시사점</a:t>
             </a:r>
           </a:p>
         </p:txBody>
@@ -4873,7 +5175,7 @@
                 </a:solidFill>
                 <a:latin typeface="Malgun Gothic"/>
               </a:rPr>
-              <a:t>• 변호사 2시점(2009·현재) — 연속 시계열은 변호사백서 PDF 보강 필요</a:t>
+              <a:t>• 변호사 자원의 서울 일극 집중이 격차의 핵심 동인</a:t>
             </a:r>
           </a:p>
           <a:p>
@@ -4889,7 +5191,7 @@
                 </a:solidFill>
                 <a:latin typeface="Malgun Gothic"/>
               </a:rPr>
-              <a:t>• 표본이 작아 통계적 검정력 제한</a:t>
+              <a:t>• 인구 대비·사건부담이 접근성을 좌우 (인천=수도권인데 하위)</a:t>
             </a:r>
           </a:p>
           <a:p>
@@ -4905,7 +5207,7 @@
                 </a:solidFill>
                 <a:latin typeface="Malgun Gothic"/>
               </a:rPr>
-              <a:t>• A3 공단 10도단위 → region13에선 인구비 근사배분</a:t>
+              <a:t>• 양적 팽창만으로는 격차 해소 안 됨</a:t>
             </a:r>
           </a:p>
           <a:p>
@@ -4921,7 +5223,39 @@
                 </a:solidFill>
                 <a:latin typeface="Malgun Gothic"/>
               </a:rPr>
-              <a:t>• 향후: 코로플레스 대시보드 고도화, 시계열 LLAI</a:t>
+              <a:t>• 정책 제언</a:t>
+            </a:r>
+          </a:p>
+          <a:p>
+            <a:pPr lvl="1">
+              <a:spcAft>
+                <a:spcPts val="900"/>
+              </a:spcAft>
+            </a:pPr>
+            <a:r>
+              <a:rPr sz="1700">
+                <a:solidFill>
+                  <a:srgbClr val="222222"/>
+                </a:solidFill>
+                <a:latin typeface="Malgun Gothic"/>
+              </a:rPr>
+              <a:t>– 지방 변호사 유치 인센티브 / 공단 자원 비수도권 우선 배치</a:t>
+            </a:r>
+          </a:p>
+          <a:p>
+            <a:pPr lvl="1">
+              <a:spcAft>
+                <a:spcPts val="900"/>
+              </a:spcAft>
+            </a:pPr>
+            <a:r>
+              <a:rPr sz="1700">
+                <a:solidFill>
+                  <a:srgbClr val="222222"/>
+                </a:solidFill>
+                <a:latin typeface="Malgun Gothic"/>
+              </a:rPr>
+              <a:t>– 사건부담 높은 권역 인력 보강 / 로스쿨 정원·배치 연계</a:t>
             </a:r>
           </a:p>
         </p:txBody>
@@ -4973,7 +5307,7 @@
                 </a:solidFill>
                 <a:latin typeface="Malgun Gothic"/>
               </a:rPr>
-              <a:t>부록 — region13 전체 결과표 (2024)</a:t>
+              <a:t>13. 한계와 향후 과제</a:t>
             </a:r>
           </a:p>
         </p:txBody>
@@ -5021,1218 +5355,93 @@
           </a:p>
         </p:txBody>
       </p:sp>
-      <p:graphicFrame>
-        <p:nvGraphicFramePr>
-          <p:cNvPr id="4" name="Table 3"/>
-          <p:cNvGraphicFramePr>
-            <a:graphicFrameLocks noGrp="1"/>
-          </p:cNvGraphicFramePr>
+      <p:sp>
+        <p:nvSpPr>
+          <p:cNvPr id="4" name="TextBox 3"/>
+          <p:cNvSpPr txBox="1"/>
           <p:nvPr/>
-        </p:nvGraphicFramePr>
-        <p:xfrm>
-          <a:off x="2560320" y="1554480"/>
-          <a:ext cx="7040880" cy="4846320"/>
-        </p:xfrm>
-        <a:graphic>
-          <a:graphicData uri="http://schemas.openxmlformats.org/drawingml/2006/table">
-            <a:tbl>
-              <a:tblPr firstRow="1" bandRow="1">
-                <a:tableStyleId>{5C22544A-7EE6-4342-B048-85BDC9FD1C3A}</a:tableStyleId>
-              </a:tblPr>
-              <a:tblGrid>
-                <a:gridCol w="1408176"/>
-                <a:gridCol w="1408176"/>
-                <a:gridCol w="1408176"/>
-                <a:gridCol w="1408176"/>
-                <a:gridCol w="1408176"/>
-              </a:tblGrid>
-              <a:tr h="346165">
-                <a:tc>
-                  <a:txBody>
-                    <a:bodyPr/>
-                    <a:lstStyle/>
-                    <a:p>
-                      <a:pPr algn="ctr"/>
-                      <a:r>
-                        <a:rPr sz="1200" b="1">
-                          <a:solidFill>
-                            <a:srgbClr val="FFFFFF"/>
-                          </a:solidFill>
-                          <a:latin typeface="Malgun Gothic"/>
-                        </a:rPr>
-                        <a:t>권역</a:t>
-                      </a:r>
-                    </a:p>
-                  </a:txBody>
-                  <a:tcPr anchor="ctr">
-                    <a:solidFill>
-                      <a:srgbClr val="1F3A5F"/>
-                    </a:solidFill>
-                  </a:tcPr>
-                </a:tc>
-                <a:tc>
-                  <a:txBody>
-                    <a:bodyPr/>
-                    <a:lstStyle/>
-                    <a:p>
-                      <a:pPr algn="ctr"/>
-                      <a:r>
-                        <a:rPr sz="1200" b="1">
-                          <a:solidFill>
-                            <a:srgbClr val="FFFFFF"/>
-                          </a:solidFill>
-                          <a:latin typeface="Malgun Gothic"/>
-                        </a:rPr>
-                        <a:t>A1</a:t>
-                      </a:r>
-                    </a:p>
-                  </a:txBody>
-                  <a:tcPr anchor="ctr">
-                    <a:solidFill>
-                      <a:srgbClr val="1F3A5F"/>
-                    </a:solidFill>
-                  </a:tcPr>
-                </a:tc>
-                <a:tc>
-                  <a:txBody>
-                    <a:bodyPr/>
-                    <a:lstStyle/>
-                    <a:p>
-                      <a:pPr algn="ctr"/>
-                      <a:r>
-                        <a:rPr sz="1200" b="1">
-                          <a:solidFill>
-                            <a:srgbClr val="FFFFFF"/>
-                          </a:solidFill>
-                          <a:latin typeface="Malgun Gothic"/>
-                        </a:rPr>
-                        <a:t>A2</a:t>
-                      </a:r>
-                    </a:p>
-                  </a:txBody>
-                  <a:tcPr anchor="ctr">
-                    <a:solidFill>
-                      <a:srgbClr val="1F3A5F"/>
-                    </a:solidFill>
-                  </a:tcPr>
-                </a:tc>
-                <a:tc>
-                  <a:txBody>
-                    <a:bodyPr/>
-                    <a:lstStyle/>
-                    <a:p>
-                      <a:pPr algn="ctr"/>
-                      <a:r>
-                        <a:rPr sz="1200" b="1">
-                          <a:solidFill>
-                            <a:srgbClr val="FFFFFF"/>
-                          </a:solidFill>
-                          <a:latin typeface="Malgun Gothic"/>
-                        </a:rPr>
-                        <a:t>A3</a:t>
-                      </a:r>
-                    </a:p>
-                  </a:txBody>
-                  <a:tcPr anchor="ctr">
-                    <a:solidFill>
-                      <a:srgbClr val="1F3A5F"/>
-                    </a:solidFill>
-                  </a:tcPr>
-                </a:tc>
-                <a:tc>
-                  <a:txBody>
-                    <a:bodyPr/>
-                    <a:lstStyle/>
-                    <a:p>
-                      <a:pPr algn="ctr"/>
-                      <a:r>
-                        <a:rPr sz="1200" b="1">
-                          <a:solidFill>
-                            <a:srgbClr val="FFFFFF"/>
-                          </a:solidFill>
-                          <a:latin typeface="Malgun Gothic"/>
-                        </a:rPr>
-                        <a:t>LLAI(엔트로피)</a:t>
-                      </a:r>
-                    </a:p>
-                  </a:txBody>
-                  <a:tcPr anchor="ctr">
-                    <a:solidFill>
-                      <a:srgbClr val="1F3A5F"/>
-                    </a:solidFill>
-                  </a:tcPr>
-                </a:tc>
-              </a:tr>
-              <a:tr h="346165">
-                <a:tc>
-                  <a:txBody>
-                    <a:bodyPr/>
-                    <a:lstStyle/>
-                    <a:p>
-                      <a:pPr algn="ctr"/>
-                      <a:r>
-                        <a:rPr sz="1200">
-                          <a:latin typeface="Malgun Gothic"/>
-                        </a:rPr>
-                        <a:t>서울</a:t>
-                      </a:r>
-                    </a:p>
-                  </a:txBody>
-                  <a:tcPr anchor="ctr"/>
-                </a:tc>
-                <a:tc>
-                  <a:txBody>
-                    <a:bodyPr/>
-                    <a:lstStyle/>
-                    <a:p>
-                      <a:pPr algn="ctr"/>
-                      <a:r>
-                        <a:rPr sz="1200">
-                          <a:latin typeface="Malgun Gothic"/>
-                        </a:rPr>
-                        <a:t>263.3</a:t>
-                      </a:r>
-                    </a:p>
-                  </a:txBody>
-                  <a:tcPr anchor="ctr"/>
-                </a:tc>
-                <a:tc>
-                  <a:txBody>
-                    <a:bodyPr/>
-                    <a:lstStyle/>
-                    <a:p>
-                      <a:pPr algn="ctr"/>
-                      <a:r>
-                        <a:rPr sz="1200">
-                          <a:latin typeface="Malgun Gothic"/>
-                        </a:rPr>
-                        <a:t>16.2</a:t>
-                      </a:r>
-                    </a:p>
-                  </a:txBody>
-                  <a:tcPr anchor="ctr"/>
-                </a:tc>
-                <a:tc>
-                  <a:txBody>
-                    <a:bodyPr/>
-                    <a:lstStyle/>
-                    <a:p>
-                      <a:pPr algn="ctr"/>
-                      <a:r>
-                        <a:rPr sz="1200">
-                          <a:latin typeface="Malgun Gothic"/>
-                        </a:rPr>
-                        <a:t>0.05</a:t>
-                      </a:r>
-                    </a:p>
-                  </a:txBody>
-                  <a:tcPr anchor="ctr"/>
-                </a:tc>
-                <a:tc>
-                  <a:txBody>
-                    <a:bodyPr/>
-                    <a:lstStyle/>
-                    <a:p>
-                      <a:pPr algn="ctr"/>
-                      <a:r>
-                        <a:rPr sz="1200">
-                          <a:latin typeface="Malgun Gothic"/>
-                        </a:rPr>
-                        <a:t>91.1</a:t>
-                      </a:r>
-                    </a:p>
-                  </a:txBody>
-                  <a:tcPr anchor="ctr"/>
-                </a:tc>
-              </a:tr>
-              <a:tr h="346165">
-                <a:tc>
-                  <a:txBody>
-                    <a:bodyPr/>
-                    <a:lstStyle/>
-                    <a:p>
-                      <a:pPr algn="ctr"/>
-                      <a:r>
-                        <a:rPr sz="1200">
-                          <a:latin typeface="Malgun Gothic"/>
-                        </a:rPr>
-                        <a:t>울산</a:t>
-                      </a:r>
-                    </a:p>
-                  </a:txBody>
-                  <a:tcPr anchor="ctr"/>
-                </a:tc>
-                <a:tc>
-                  <a:txBody>
-                    <a:bodyPr/>
-                    <a:lstStyle/>
-                    <a:p>
-                      <a:pPr algn="ctr"/>
-                      <a:r>
-                        <a:rPr sz="1200">
-                          <a:latin typeface="Malgun Gothic"/>
-                        </a:rPr>
-                        <a:t>23.0</a:t>
-                      </a:r>
-                    </a:p>
-                  </a:txBody>
-                  <a:tcPr anchor="ctr"/>
-                </a:tc>
-                <a:tc>
-                  <a:txBody>
-                    <a:bodyPr/>
-                    <a:lstStyle/>
-                    <a:p>
-                      <a:pPr algn="ctr"/>
-                      <a:r>
-                        <a:rPr sz="1200">
-                          <a:latin typeface="Malgun Gothic"/>
-                        </a:rPr>
-                        <a:t>89.2</a:t>
-                      </a:r>
-                    </a:p>
-                  </a:txBody>
-                  <a:tcPr anchor="ctr"/>
-                </a:tc>
-                <a:tc>
-                  <a:txBody>
-                    <a:bodyPr/>
-                    <a:lstStyle/>
-                    <a:p>
-                      <a:pPr algn="ctr"/>
-                      <a:r>
-                        <a:rPr sz="1200">
-                          <a:latin typeface="Malgun Gothic"/>
-                        </a:rPr>
-                        <a:t>0.07</a:t>
-                      </a:r>
-                    </a:p>
-                  </a:txBody>
-                  <a:tcPr anchor="ctr"/>
-                </a:tc>
-                <a:tc>
-                  <a:txBody>
-                    <a:bodyPr/>
-                    <a:lstStyle/>
-                    <a:p>
-                      <a:pPr algn="ctr"/>
-                      <a:r>
-                        <a:rPr sz="1200">
-                          <a:latin typeface="Malgun Gothic"/>
-                        </a:rPr>
-                        <a:t>24.2</a:t>
-                      </a:r>
-                    </a:p>
-                  </a:txBody>
-                  <a:tcPr anchor="ctr"/>
-                </a:tc>
-              </a:tr>
-              <a:tr h="346165">
-                <a:tc>
-                  <a:txBody>
-                    <a:bodyPr/>
-                    <a:lstStyle/>
-                    <a:p>
-                      <a:pPr algn="ctr"/>
-                      <a:r>
-                        <a:rPr sz="1200">
-                          <a:latin typeface="Malgun Gothic"/>
-                        </a:rPr>
-                        <a:t>제주</a:t>
-                      </a:r>
-                    </a:p>
-                  </a:txBody>
-                  <a:tcPr anchor="ctr"/>
-                </a:tc>
-                <a:tc>
-                  <a:txBody>
-                    <a:bodyPr/>
-                    <a:lstStyle/>
-                    <a:p>
-                      <a:pPr algn="ctr"/>
-                      <a:r>
-                        <a:rPr sz="1200">
-                          <a:latin typeface="Malgun Gothic"/>
-                        </a:rPr>
-                        <a:t>23.0</a:t>
-                      </a:r>
-                    </a:p>
-                  </a:txBody>
-                  <a:tcPr anchor="ctr"/>
-                </a:tc>
-                <a:tc>
-                  <a:txBody>
-                    <a:bodyPr/>
-                    <a:lstStyle/>
-                    <a:p>
-                      <a:pPr algn="ctr"/>
-                      <a:r>
-                        <a:rPr sz="1200">
-                          <a:latin typeface="Malgun Gothic"/>
-                        </a:rPr>
-                        <a:t>96.0</a:t>
-                      </a:r>
-                    </a:p>
-                  </a:txBody>
-                  <a:tcPr anchor="ctr"/>
-                </a:tc>
-                <a:tc>
-                  <a:txBody>
-                    <a:bodyPr/>
-                    <a:lstStyle/>
-                    <a:p>
-                      <a:pPr algn="ctr"/>
-                      <a:r>
-                        <a:rPr sz="1200">
-                          <a:latin typeface="Malgun Gothic"/>
-                        </a:rPr>
-                        <a:t>0.07</a:t>
-                      </a:r>
-                    </a:p>
-                  </a:txBody>
-                  <a:tcPr anchor="ctr"/>
-                </a:tc>
-                <a:tc>
-                  <a:txBody>
-                    <a:bodyPr/>
-                    <a:lstStyle/>
-                    <a:p>
-                      <a:pPr algn="ctr"/>
-                      <a:r>
-                        <a:rPr sz="1200">
-                          <a:latin typeface="Malgun Gothic"/>
-                        </a:rPr>
-                        <a:t>23.3</a:t>
-                      </a:r>
-                    </a:p>
-                  </a:txBody>
-                  <a:tcPr anchor="ctr"/>
-                </a:tc>
-              </a:tr>
-              <a:tr h="346165">
-                <a:tc>
-                  <a:txBody>
-                    <a:bodyPr/>
-                    <a:lstStyle/>
-                    <a:p>
-                      <a:pPr algn="ctr"/>
-                      <a:r>
-                        <a:rPr sz="1200">
-                          <a:latin typeface="Malgun Gothic"/>
-                        </a:rPr>
-                        <a:t>부산</a:t>
-                      </a:r>
-                    </a:p>
-                  </a:txBody>
-                  <a:tcPr anchor="ctr"/>
-                </a:tc>
-                <a:tc>
-                  <a:txBody>
-                    <a:bodyPr/>
-                    <a:lstStyle/>
-                    <a:p>
-                      <a:pPr algn="ctr"/>
-                      <a:r>
-                        <a:rPr sz="1200">
-                          <a:latin typeface="Malgun Gothic"/>
-                        </a:rPr>
-                        <a:t>37.0</a:t>
-                      </a:r>
-                    </a:p>
-                  </a:txBody>
-                  <a:tcPr anchor="ctr"/>
-                </a:tc>
-                <a:tc>
-                  <a:txBody>
-                    <a:bodyPr/>
-                    <a:lstStyle/>
-                    <a:p>
-                      <a:pPr algn="ctr"/>
-                      <a:r>
-                        <a:rPr sz="1200">
-                          <a:latin typeface="Malgun Gothic"/>
-                        </a:rPr>
-                        <a:t>53.5</a:t>
-                      </a:r>
-                    </a:p>
-                  </a:txBody>
-                  <a:tcPr anchor="ctr"/>
-                </a:tc>
-                <a:tc>
-                  <a:txBody>
-                    <a:bodyPr/>
-                    <a:lstStyle/>
-                    <a:p>
-                      <a:pPr algn="ctr"/>
-                      <a:r>
-                        <a:rPr sz="1200">
-                          <a:latin typeface="Malgun Gothic"/>
-                        </a:rPr>
-                        <a:t>0.04</a:t>
-                      </a:r>
-                    </a:p>
-                  </a:txBody>
-                  <a:tcPr anchor="ctr"/>
-                </a:tc>
-                <a:tc>
-                  <a:txBody>
-                    <a:bodyPr/>
-                    <a:lstStyle/>
-                    <a:p>
-                      <a:pPr algn="ctr"/>
-                      <a:r>
-                        <a:rPr sz="1200">
-                          <a:latin typeface="Malgun Gothic"/>
-                        </a:rPr>
-                        <a:t>19.1</a:t>
-                      </a:r>
-                    </a:p>
-                  </a:txBody>
-                  <a:tcPr anchor="ctr"/>
-                </a:tc>
-              </a:tr>
-              <a:tr h="346165">
-                <a:tc>
-                  <a:txBody>
-                    <a:bodyPr/>
-                    <a:lstStyle/>
-                    <a:p>
-                      <a:pPr algn="ctr"/>
-                      <a:r>
-                        <a:rPr sz="1200">
-                          <a:latin typeface="Malgun Gothic"/>
-                        </a:rPr>
-                        <a:t>경기</a:t>
-                      </a:r>
-                    </a:p>
-                  </a:txBody>
-                  <a:tcPr anchor="ctr"/>
-                </a:tc>
-                <a:tc>
-                  <a:txBody>
-                    <a:bodyPr/>
-                    <a:lstStyle/>
-                    <a:p>
-                      <a:pPr algn="ctr"/>
-                      <a:r>
-                        <a:rPr sz="1200">
-                          <a:latin typeface="Malgun Gothic"/>
-                        </a:rPr>
-                        <a:t>13.8</a:t>
-                      </a:r>
-                    </a:p>
-                  </a:txBody>
-                  <a:tcPr anchor="ctr"/>
-                </a:tc>
-                <a:tc>
-                  <a:txBody>
-                    <a:bodyPr/>
-                    <a:lstStyle/>
-                    <a:p>
-                      <a:pPr algn="ctr"/>
-                      <a:r>
-                        <a:rPr sz="1200">
-                          <a:latin typeface="Malgun Gothic"/>
-                        </a:rPr>
-                        <a:t>106.7</a:t>
-                      </a:r>
-                    </a:p>
-                  </a:txBody>
-                  <a:tcPr anchor="ctr"/>
-                </a:tc>
-                <a:tc>
-                  <a:txBody>
-                    <a:bodyPr/>
-                    <a:lstStyle/>
-                    <a:p>
-                      <a:pPr algn="ctr"/>
-                      <a:r>
-                        <a:rPr sz="1200">
-                          <a:latin typeface="Malgun Gothic"/>
-                        </a:rPr>
-                        <a:t>0.05</a:t>
-                      </a:r>
-                    </a:p>
-                  </a:txBody>
-                  <a:tcPr anchor="ctr"/>
-                </a:tc>
-                <a:tc>
-                  <a:txBody>
-                    <a:bodyPr/>
-                    <a:lstStyle/>
-                    <a:p>
-                      <a:pPr algn="ctr"/>
-                      <a:r>
-                        <a:rPr sz="1200">
-                          <a:latin typeface="Malgun Gothic"/>
-                        </a:rPr>
-                        <a:t>11.7</a:t>
-                      </a:r>
-                    </a:p>
-                  </a:txBody>
-                  <a:tcPr anchor="ctr"/>
-                </a:tc>
-              </a:tr>
-              <a:tr h="346165">
-                <a:tc>
-                  <a:txBody>
-                    <a:bodyPr/>
-                    <a:lstStyle/>
-                    <a:p>
-                      <a:pPr algn="ctr"/>
-                      <a:r>
-                        <a:rPr sz="1200">
-                          <a:latin typeface="Malgun Gothic"/>
-                        </a:rPr>
-                        <a:t>경남</a:t>
-                      </a:r>
-                    </a:p>
-                  </a:txBody>
-                  <a:tcPr anchor="ctr"/>
-                </a:tc>
-                <a:tc>
-                  <a:txBody>
-                    <a:bodyPr/>
-                    <a:lstStyle/>
-                    <a:p>
-                      <a:pPr algn="ctr"/>
-                      <a:r>
-                        <a:rPr sz="1200">
-                          <a:latin typeface="Malgun Gothic"/>
-                        </a:rPr>
-                        <a:t>13.0</a:t>
-                      </a:r>
-                    </a:p>
-                  </a:txBody>
-                  <a:tcPr anchor="ctr"/>
-                </a:tc>
-                <a:tc>
-                  <a:txBody>
-                    <a:bodyPr/>
-                    <a:lstStyle/>
-                    <a:p>
-                      <a:pPr algn="ctr"/>
-                      <a:r>
-                        <a:rPr sz="1200">
-                          <a:latin typeface="Malgun Gothic"/>
-                        </a:rPr>
-                        <a:t>103.3</a:t>
-                      </a:r>
-                    </a:p>
-                  </a:txBody>
-                  <a:tcPr anchor="ctr"/>
-                </a:tc>
-                <a:tc>
-                  <a:txBody>
-                    <a:bodyPr/>
-                    <a:lstStyle/>
-                    <a:p>
-                      <a:pPr algn="ctr"/>
-                      <a:r>
-                        <a:rPr sz="1200">
-                          <a:latin typeface="Malgun Gothic"/>
-                        </a:rPr>
-                        <a:t>0.05</a:t>
-                      </a:r>
-                    </a:p>
-                  </a:txBody>
-                  <a:tcPr anchor="ctr"/>
-                </a:tc>
-                <a:tc>
-                  <a:txBody>
-                    <a:bodyPr/>
-                    <a:lstStyle/>
-                    <a:p>
-                      <a:pPr algn="ctr"/>
-                      <a:r>
-                        <a:rPr sz="1200">
-                          <a:latin typeface="Malgun Gothic"/>
-                        </a:rPr>
-                        <a:t>11.5</a:t>
-                      </a:r>
-                    </a:p>
-                  </a:txBody>
-                  <a:tcPr anchor="ctr"/>
-                </a:tc>
-              </a:tr>
-              <a:tr h="346165">
-                <a:tc>
-                  <a:txBody>
-                    <a:bodyPr/>
-                    <a:lstStyle/>
-                    <a:p>
-                      <a:pPr algn="ctr"/>
-                      <a:r>
-                        <a:rPr sz="1200">
-                          <a:latin typeface="Malgun Gothic"/>
-                        </a:rPr>
-                        <a:t>광주권</a:t>
-                      </a:r>
-                    </a:p>
-                  </a:txBody>
-                  <a:tcPr anchor="ctr"/>
-                </a:tc>
-                <a:tc>
-                  <a:txBody>
-                    <a:bodyPr/>
-                    <a:lstStyle/>
-                    <a:p>
-                      <a:pPr algn="ctr"/>
-                      <a:r>
-                        <a:rPr sz="1200">
-                          <a:latin typeface="Malgun Gothic"/>
-                        </a:rPr>
-                        <a:t>19.7</a:t>
-                      </a:r>
-                    </a:p>
-                  </a:txBody>
-                  <a:tcPr anchor="ctr"/>
-                </a:tc>
-                <a:tc>
-                  <a:txBody>
-                    <a:bodyPr/>
-                    <a:lstStyle/>
-                    <a:p>
-                      <a:pPr algn="ctr"/>
-                      <a:r>
-                        <a:rPr sz="1200">
-                          <a:latin typeface="Malgun Gothic"/>
-                        </a:rPr>
-                        <a:t>94.5</a:t>
-                      </a:r>
-                    </a:p>
-                  </a:txBody>
-                  <a:tcPr anchor="ctr"/>
-                </a:tc>
-                <a:tc>
-                  <a:txBody>
-                    <a:bodyPr/>
-                    <a:lstStyle/>
-                    <a:p>
-                      <a:pPr algn="ctr"/>
-                      <a:r>
-                        <a:rPr sz="1200">
-                          <a:latin typeface="Malgun Gothic"/>
-                        </a:rPr>
-                        <a:t>0.04</a:t>
-                      </a:r>
-                    </a:p>
-                  </a:txBody>
-                  <a:tcPr anchor="ctr"/>
-                </a:tc>
-                <a:tc>
-                  <a:txBody>
-                    <a:bodyPr/>
-                    <a:lstStyle/>
-                    <a:p>
-                      <a:pPr algn="ctr"/>
-                      <a:r>
-                        <a:rPr sz="1200">
-                          <a:latin typeface="Malgun Gothic"/>
-                        </a:rPr>
-                        <a:t>10.3</a:t>
-                      </a:r>
-                    </a:p>
-                  </a:txBody>
-                  <a:tcPr anchor="ctr"/>
-                </a:tc>
-              </a:tr>
-              <a:tr h="346165">
-                <a:tc>
-                  <a:txBody>
-                    <a:bodyPr/>
-                    <a:lstStyle/>
-                    <a:p>
-                      <a:pPr algn="ctr"/>
-                      <a:r>
-                        <a:rPr sz="1200">
-                          <a:latin typeface="Malgun Gothic"/>
-                        </a:rPr>
-                        <a:t>대전권</a:t>
-                      </a:r>
-                    </a:p>
-                  </a:txBody>
-                  <a:tcPr anchor="ctr"/>
-                </a:tc>
-                <a:tc>
-                  <a:txBody>
-                    <a:bodyPr/>
-                    <a:lstStyle/>
-                    <a:p>
-                      <a:pPr algn="ctr"/>
-                      <a:r>
-                        <a:rPr sz="1200">
-                          <a:latin typeface="Malgun Gothic"/>
-                        </a:rPr>
-                        <a:t>20.5</a:t>
-                      </a:r>
-                    </a:p>
-                  </a:txBody>
-                  <a:tcPr anchor="ctr"/>
-                </a:tc>
-                <a:tc>
-                  <a:txBody>
-                    <a:bodyPr/>
-                    <a:lstStyle/>
-                    <a:p>
-                      <a:pPr algn="ctr"/>
-                      <a:r>
-                        <a:rPr sz="1200">
-                          <a:latin typeface="Malgun Gothic"/>
-                        </a:rPr>
-                        <a:t>82.4</a:t>
-                      </a:r>
-                    </a:p>
-                  </a:txBody>
-                  <a:tcPr anchor="ctr"/>
-                </a:tc>
-                <a:tc>
-                  <a:txBody>
-                    <a:bodyPr/>
-                    <a:lstStyle/>
-                    <a:p>
-                      <a:pPr algn="ctr"/>
-                      <a:r>
-                        <a:rPr sz="1200">
-                          <a:latin typeface="Malgun Gothic"/>
-                        </a:rPr>
-                        <a:t>0.04</a:t>
-                      </a:r>
-                    </a:p>
-                  </a:txBody>
-                  <a:tcPr anchor="ctr"/>
-                </a:tc>
-                <a:tc>
-                  <a:txBody>
-                    <a:bodyPr/>
-                    <a:lstStyle/>
-                    <a:p>
-                      <a:pPr algn="ctr"/>
-                      <a:r>
-                        <a:rPr sz="1200">
-                          <a:latin typeface="Malgun Gothic"/>
-                        </a:rPr>
-                        <a:t>9.7</a:t>
-                      </a:r>
-                    </a:p>
-                  </a:txBody>
-                  <a:tcPr anchor="ctr"/>
-                </a:tc>
-              </a:tr>
-              <a:tr h="346165">
-                <a:tc>
-                  <a:txBody>
-                    <a:bodyPr/>
-                    <a:lstStyle/>
-                    <a:p>
-                      <a:pPr algn="ctr"/>
-                      <a:r>
-                        <a:rPr sz="1200">
-                          <a:latin typeface="Malgun Gothic"/>
-                        </a:rPr>
-                        <a:t>대구권</a:t>
-                      </a:r>
-                    </a:p>
-                  </a:txBody>
-                  <a:tcPr anchor="ctr"/>
-                </a:tc>
-                <a:tc>
-                  <a:txBody>
-                    <a:bodyPr/>
-                    <a:lstStyle/>
-                    <a:p>
-                      <a:pPr algn="ctr"/>
-                      <a:r>
-                        <a:rPr sz="1200">
-                          <a:latin typeface="Malgun Gothic"/>
-                        </a:rPr>
-                        <a:t>17.3</a:t>
-                      </a:r>
-                    </a:p>
-                  </a:txBody>
-                  <a:tcPr anchor="ctr"/>
-                </a:tc>
-                <a:tc>
-                  <a:txBody>
-                    <a:bodyPr/>
-                    <a:lstStyle/>
-                    <a:p>
-                      <a:pPr algn="ctr"/>
-                      <a:r>
-                        <a:rPr sz="1200">
-                          <a:latin typeface="Malgun Gothic"/>
-                        </a:rPr>
-                        <a:t>92.4</a:t>
-                      </a:r>
-                    </a:p>
-                  </a:txBody>
-                  <a:tcPr anchor="ctr"/>
-                </a:tc>
-                <a:tc>
-                  <a:txBody>
-                    <a:bodyPr/>
-                    <a:lstStyle/>
-                    <a:p>
-                      <a:pPr algn="ctr"/>
-                      <a:r>
-                        <a:rPr sz="1200">
-                          <a:latin typeface="Malgun Gothic"/>
-                        </a:rPr>
-                        <a:t>0.04</a:t>
-                      </a:r>
-                    </a:p>
-                  </a:txBody>
-                  <a:tcPr anchor="ctr"/>
-                </a:tc>
-                <a:tc>
-                  <a:txBody>
-                    <a:bodyPr/>
-                    <a:lstStyle/>
-                    <a:p>
-                      <a:pPr algn="ctr"/>
-                      <a:r>
-                        <a:rPr sz="1200">
-                          <a:latin typeface="Malgun Gothic"/>
-                        </a:rPr>
-                        <a:t>9.2</a:t>
-                      </a:r>
-                    </a:p>
-                  </a:txBody>
-                  <a:tcPr anchor="ctr"/>
-                </a:tc>
-              </a:tr>
-              <a:tr h="346165">
-                <a:tc>
-                  <a:txBody>
-                    <a:bodyPr/>
-                    <a:lstStyle/>
-                    <a:p>
-                      <a:pPr algn="ctr"/>
-                      <a:r>
-                        <a:rPr sz="1200">
-                          <a:latin typeface="Malgun Gothic"/>
-                        </a:rPr>
-                        <a:t>전북</a:t>
-                      </a:r>
-                    </a:p>
-                  </a:txBody>
-                  <a:tcPr anchor="ctr"/>
-                </a:tc>
-                <a:tc>
-                  <a:txBody>
-                    <a:bodyPr/>
-                    <a:lstStyle/>
-                    <a:p>
-                      <a:pPr algn="ctr"/>
-                      <a:r>
-                        <a:rPr sz="1200">
-                          <a:latin typeface="Malgun Gothic"/>
-                        </a:rPr>
-                        <a:t>18.5</a:t>
-                      </a:r>
-                    </a:p>
-                  </a:txBody>
-                  <a:tcPr anchor="ctr"/>
-                </a:tc>
-                <a:tc>
-                  <a:txBody>
-                    <a:bodyPr/>
-                    <a:lstStyle/>
-                    <a:p>
-                      <a:pPr algn="ctr"/>
-                      <a:r>
-                        <a:rPr sz="1200">
-                          <a:latin typeface="Malgun Gothic"/>
-                        </a:rPr>
-                        <a:t>85.7</a:t>
-                      </a:r>
-                    </a:p>
-                  </a:txBody>
-                  <a:tcPr anchor="ctr"/>
-                </a:tc>
-                <a:tc>
-                  <a:txBody>
-                    <a:bodyPr/>
-                    <a:lstStyle/>
-                    <a:p>
-                      <a:pPr algn="ctr"/>
-                      <a:r>
-                        <a:rPr sz="1200">
-                          <a:latin typeface="Malgun Gothic"/>
-                        </a:rPr>
-                        <a:t>0.04</a:t>
-                      </a:r>
-                    </a:p>
-                  </a:txBody>
-                  <a:tcPr anchor="ctr"/>
-                </a:tc>
-                <a:tc>
-                  <a:txBody>
-                    <a:bodyPr/>
-                    <a:lstStyle/>
-                    <a:p>
-                      <a:pPr algn="ctr"/>
-                      <a:r>
-                        <a:rPr sz="1200">
-                          <a:latin typeface="Malgun Gothic"/>
-                        </a:rPr>
-                        <a:t>8.8</a:t>
-                      </a:r>
-                    </a:p>
-                  </a:txBody>
-                  <a:tcPr anchor="ctr"/>
-                </a:tc>
-              </a:tr>
-              <a:tr h="346165">
-                <a:tc>
-                  <a:txBody>
-                    <a:bodyPr/>
-                    <a:lstStyle/>
-                    <a:p>
-                      <a:pPr algn="ctr"/>
-                      <a:r>
-                        <a:rPr sz="1200">
-                          <a:latin typeface="Malgun Gothic"/>
-                        </a:rPr>
-                        <a:t>인천</a:t>
-                      </a:r>
-                    </a:p>
-                  </a:txBody>
-                  <a:tcPr anchor="ctr"/>
-                </a:tc>
-                <a:tc>
-                  <a:txBody>
-                    <a:bodyPr/>
-                    <a:lstStyle/>
-                    <a:p>
-                      <a:pPr algn="ctr"/>
-                      <a:r>
-                        <a:rPr sz="1200">
-                          <a:latin typeface="Malgun Gothic"/>
-                        </a:rPr>
-                        <a:t>24.8</a:t>
-                      </a:r>
-                    </a:p>
-                  </a:txBody>
-                  <a:tcPr anchor="ctr"/>
-                </a:tc>
-                <a:tc>
-                  <a:txBody>
-                    <a:bodyPr/>
-                    <a:lstStyle/>
-                    <a:p>
-                      <a:pPr algn="ctr"/>
-                      <a:r>
-                        <a:rPr sz="1200">
-                          <a:latin typeface="Malgun Gothic"/>
-                        </a:rPr>
-                        <a:t>108.7</a:t>
-                      </a:r>
-                    </a:p>
-                  </a:txBody>
-                  <a:tcPr anchor="ctr"/>
-                </a:tc>
-                <a:tc>
-                  <a:txBody>
-                    <a:bodyPr/>
-                    <a:lstStyle/>
-                    <a:p>
-                      <a:pPr algn="ctr"/>
-                      <a:r>
-                        <a:rPr sz="1200">
-                          <a:latin typeface="Malgun Gothic"/>
-                        </a:rPr>
-                        <a:t>0.03</a:t>
-                      </a:r>
-                    </a:p>
-                  </a:txBody>
-                  <a:tcPr anchor="ctr"/>
-                </a:tc>
-                <a:tc>
-                  <a:txBody>
-                    <a:bodyPr/>
-                    <a:lstStyle/>
-                    <a:p>
-                      <a:pPr algn="ctr"/>
-                      <a:r>
-                        <a:rPr sz="1200">
-                          <a:latin typeface="Malgun Gothic"/>
-                        </a:rPr>
-                        <a:t>5.0</a:t>
-                      </a:r>
-                    </a:p>
-                  </a:txBody>
-                  <a:tcPr anchor="ctr"/>
-                </a:tc>
-              </a:tr>
-              <a:tr h="346165">
-                <a:tc>
-                  <a:txBody>
-                    <a:bodyPr/>
-                    <a:lstStyle/>
-                    <a:p>
-                      <a:pPr algn="ctr"/>
-                      <a:r>
-                        <a:rPr sz="1200">
-                          <a:latin typeface="Malgun Gothic"/>
-                        </a:rPr>
-                        <a:t>충북</a:t>
-                      </a:r>
-                    </a:p>
-                  </a:txBody>
-                  <a:tcPr anchor="ctr"/>
-                </a:tc>
-                <a:tc>
-                  <a:txBody>
-                    <a:bodyPr/>
-                    <a:lstStyle/>
-                    <a:p>
-                      <a:pPr algn="ctr"/>
-                      <a:r>
-                        <a:rPr sz="1200">
-                          <a:latin typeface="Malgun Gothic"/>
-                        </a:rPr>
-                        <a:t>14.6</a:t>
-                      </a:r>
-                    </a:p>
-                  </a:txBody>
-                  <a:tcPr anchor="ctr"/>
-                </a:tc>
-                <a:tc>
-                  <a:txBody>
-                    <a:bodyPr/>
-                    <a:lstStyle/>
-                    <a:p>
-                      <a:pPr algn="ctr"/>
-                      <a:r>
-                        <a:rPr sz="1200">
-                          <a:latin typeface="Malgun Gothic"/>
-                        </a:rPr>
-                        <a:t>107.6</a:t>
-                      </a:r>
-                    </a:p>
-                  </a:txBody>
-                  <a:tcPr anchor="ctr"/>
-                </a:tc>
-                <a:tc>
-                  <a:txBody>
-                    <a:bodyPr/>
-                    <a:lstStyle/>
-                    <a:p>
-                      <a:pPr algn="ctr"/>
-                      <a:r>
-                        <a:rPr sz="1200">
-                          <a:latin typeface="Malgun Gothic"/>
-                        </a:rPr>
-                        <a:t>0.04</a:t>
-                      </a:r>
-                    </a:p>
-                  </a:txBody>
-                  <a:tcPr anchor="ctr"/>
-                </a:tc>
-                <a:tc>
-                  <a:txBody>
-                    <a:bodyPr/>
-                    <a:lstStyle/>
-                    <a:p>
-                      <a:pPr algn="ctr"/>
-                      <a:r>
-                        <a:rPr sz="1200">
-                          <a:latin typeface="Malgun Gothic"/>
-                        </a:rPr>
-                        <a:t>4.2</a:t>
-                      </a:r>
-                    </a:p>
-                  </a:txBody>
-                  <a:tcPr anchor="ctr"/>
-                </a:tc>
-              </a:tr>
-              <a:tr h="346175">
-                <a:tc>
-                  <a:txBody>
-                    <a:bodyPr/>
-                    <a:lstStyle/>
-                    <a:p>
-                      <a:pPr algn="ctr"/>
-                      <a:r>
-                        <a:rPr sz="1200">
-                          <a:latin typeface="Malgun Gothic"/>
-                        </a:rPr>
-                        <a:t>강원</a:t>
-                      </a:r>
-                    </a:p>
-                  </a:txBody>
-                  <a:tcPr anchor="ctr"/>
-                </a:tc>
-                <a:tc>
-                  <a:txBody>
-                    <a:bodyPr/>
-                    <a:lstStyle/>
-                    <a:p>
-                      <a:pPr algn="ctr"/>
-                      <a:r>
-                        <a:rPr sz="1200">
-                          <a:latin typeface="Malgun Gothic"/>
-                        </a:rPr>
-                        <a:t>12.7</a:t>
-                      </a:r>
-                    </a:p>
-                  </a:txBody>
-                  <a:tcPr anchor="ctr"/>
-                </a:tc>
-                <a:tc>
-                  <a:txBody>
-                    <a:bodyPr/>
-                    <a:lstStyle/>
-                    <a:p>
-                      <a:pPr algn="ctr"/>
-                      <a:r>
-                        <a:rPr sz="1200">
-                          <a:latin typeface="Malgun Gothic"/>
-                        </a:rPr>
-                        <a:t>121.0</a:t>
-                      </a:r>
-                    </a:p>
-                  </a:txBody>
-                  <a:tcPr anchor="ctr"/>
-                </a:tc>
-                <a:tc>
-                  <a:txBody>
-                    <a:bodyPr/>
-                    <a:lstStyle/>
-                    <a:p>
-                      <a:pPr algn="ctr"/>
-                      <a:r>
-                        <a:rPr sz="1200">
-                          <a:latin typeface="Malgun Gothic"/>
-                        </a:rPr>
-                        <a:t>0.04</a:t>
-                      </a:r>
-                    </a:p>
-                  </a:txBody>
-                  <a:tcPr anchor="ctr"/>
-                </a:tc>
-                <a:tc>
-                  <a:txBody>
-                    <a:bodyPr/>
-                    <a:lstStyle/>
-                    <a:p>
-                      <a:pPr algn="ctr"/>
-                      <a:r>
-                        <a:rPr sz="1200">
-                          <a:latin typeface="Malgun Gothic"/>
-                        </a:rPr>
-                        <a:t>1.6</a:t>
-                      </a:r>
-                    </a:p>
-                  </a:txBody>
-                  <a:tcPr anchor="ctr"/>
-                </a:tc>
-              </a:tr>
-            </a:tbl>
-          </a:graphicData>
-        </a:graphic>
-      </p:graphicFrame>
+        </p:nvSpPr>
+        <p:spPr>
+          <a:xfrm>
+            <a:off x="640080" y="1554480"/>
+            <a:ext cx="10972800" cy="4937760"/>
+          </a:xfrm>
+          <a:prstGeom prst="rect">
+            <a:avLst/>
+          </a:prstGeom>
+          <a:noFill/>
+        </p:spPr>
+        <p:txBody>
+          <a:bodyPr wrap="square">
+            <a:spAutoFit/>
+          </a:bodyPr>
+          <a:lstStyle/>
+          <a:p>
+            <a:pPr>
+              <a:spcAft>
+                <a:spcPts val="900"/>
+              </a:spcAft>
+            </a:pPr>
+            <a:r>
+              <a:rPr sz="2000">
+                <a:solidFill>
+                  <a:srgbClr val="222222"/>
+                </a:solidFill>
+                <a:latin typeface="Malgun Gothic"/>
+              </a:rPr>
+              <a:t>• 변호사 2시점(2009·현재) — 연속 시계열은 변호사백서 PDF 보강 필요</a:t>
+            </a:r>
+          </a:p>
+          <a:p>
+            <a:pPr>
+              <a:spcAft>
+                <a:spcPts val="900"/>
+              </a:spcAft>
+            </a:pPr>
+            <a:r>
+              <a:rPr sz="2000">
+                <a:solidFill>
+                  <a:srgbClr val="222222"/>
+                </a:solidFill>
+                <a:latin typeface="Malgun Gothic"/>
+              </a:rPr>
+              <a:t>• 표본이 작아 통계적 검정력 제한</a:t>
+            </a:r>
+          </a:p>
+          <a:p>
+            <a:pPr>
+              <a:spcAft>
+                <a:spcPts val="900"/>
+              </a:spcAft>
+            </a:pPr>
+            <a:r>
+              <a:rPr sz="2000">
+                <a:solidFill>
+                  <a:srgbClr val="222222"/>
+                </a:solidFill>
+                <a:latin typeface="Malgun Gothic"/>
+              </a:rPr>
+              <a:t>• A3 공단 10도단위 → region13에선 인구비 근사배분</a:t>
+            </a:r>
+          </a:p>
+          <a:p>
+            <a:pPr>
+              <a:spcAft>
+                <a:spcPts val="900"/>
+              </a:spcAft>
+            </a:pPr>
+            <a:r>
+              <a:rPr sz="2000">
+                <a:solidFill>
+                  <a:srgbClr val="222222"/>
+                </a:solidFill>
+                <a:latin typeface="Malgun Gothic"/>
+              </a:rPr>
+              <a:t>• 향후: 코로플레스 대시보드 고도화, 시계열 LLAI</a:t>
+            </a:r>
+          </a:p>
+        </p:txBody>
+      </p:sp>
     </p:spTree>
   </p:cSld>
   <p:clrMapOvr>
@@ -6259,69 +5468,6 @@
         </p:nvSpPr>
         <p:spPr>
           <a:xfrm>
-            <a:off x="731520" y="2377440"/>
-            <a:ext cx="10698480" cy="1828800"/>
-          </a:xfrm>
-          <a:prstGeom prst="rect">
-            <a:avLst/>
-          </a:prstGeom>
-          <a:noFill/>
-        </p:spPr>
-        <p:txBody>
-          <a:bodyPr wrap="square">
-            <a:spAutoFit/>
-          </a:bodyPr>
-          <a:lstStyle/>
-          <a:p>
-            <a:r>
-              <a:rPr sz="4000" b="1">
-                <a:solidFill>
-                  <a:srgbClr val="1F3A5F"/>
-                </a:solidFill>
-                <a:latin typeface="Malgun Gothic"/>
-              </a:rPr>
-              <a:t>감사합니다</a:t>
-            </a:r>
-          </a:p>
-          <a:p>
-            <a:r>
-              <a:rPr sz="2000">
-                <a:solidFill>
-                  <a:srgbClr val="C44E52"/>
-                </a:solidFill>
-                <a:latin typeface="Malgun Gothic"/>
-              </a:rPr>
-              <a:t>코드·노트북·인터랙티브 지도: github.com/Allenkeem/llai-project</a:t>
-            </a:r>
-          </a:p>
-        </p:txBody>
-      </p:sp>
-    </p:spTree>
-  </p:cSld>
-  <p:clrMapOvr>
-    <a:masterClrMapping/>
-  </p:clrMapOvr>
-</p:sld>
-</file>
-
-<file path=ppt/slides/slide2.xml><?xml version="1.0" encoding="utf-8"?>
-<p:sld xmlns:a="http://schemas.openxmlformats.org/drawingml/2006/main" xmlns:p="http://schemas.openxmlformats.org/presentationml/2006/main" xmlns:r="http://schemas.openxmlformats.org/officeDocument/2006/relationships">
-  <p:cSld>
-    <p:spTree>
-      <p:nvGrpSpPr>
-        <p:cNvPr id="1" name=""/>
-        <p:cNvGrpSpPr/>
-        <p:nvPr/>
-      </p:nvGrpSpPr>
-      <p:grpSpPr/>
-      <p:sp>
-        <p:nvSpPr>
-          <p:cNvPr id="2" name="TextBox 1"/>
-          <p:cNvSpPr txBox="1"/>
-          <p:nvPr/>
-        </p:nvSpPr>
-        <p:spPr>
-          <a:xfrm>
             <a:off x="502920" y="320040"/>
             <a:ext cx="11155680" cy="914400"/>
           </a:xfrm>
@@ -6343,7 +5489,7 @@
                 </a:solidFill>
                 <a:latin typeface="Malgun Gothic"/>
               </a:rPr>
-              <a:t>연구 범위 · 선행연구 차용 여부</a:t>
+              <a:t>부록 — region13 전체 결과표 (2024)</a:t>
             </a:r>
           </a:p>
         </p:txBody>
@@ -6391,157 +5537,1218 @@
           </a:p>
         </p:txBody>
       </p:sp>
-      <p:sp>
-        <p:nvSpPr>
-          <p:cNvPr id="4" name="TextBox 3"/>
-          <p:cNvSpPr txBox="1"/>
+      <p:graphicFrame>
+        <p:nvGraphicFramePr>
+          <p:cNvPr id="4" name="Table 3"/>
+          <p:cNvGraphicFramePr>
+            <a:graphicFrameLocks noGrp="1"/>
+          </p:cNvGraphicFramePr>
           <p:nvPr/>
-        </p:nvSpPr>
-        <p:spPr>
-          <a:xfrm>
-            <a:off x="640080" y="1554480"/>
-            <a:ext cx="10972800" cy="4937760"/>
-          </a:xfrm>
-          <a:prstGeom prst="rect">
-            <a:avLst/>
-          </a:prstGeom>
-          <a:noFill/>
-        </p:spPr>
-        <p:txBody>
-          <a:bodyPr wrap="square">
-            <a:spAutoFit/>
-          </a:bodyPr>
-          <a:lstStyle/>
-          <a:p>
-            <a:pPr>
-              <a:spcAft>
-                <a:spcPts val="900"/>
-              </a:spcAft>
-            </a:pPr>
-            <a:r>
-              <a:rPr sz="1900">
-                <a:solidFill>
-                  <a:srgbClr val="222222"/>
-                </a:solidFill>
-                <a:latin typeface="Malgun Gothic"/>
-              </a:rPr>
-              <a:t>• 본 분석은 26-1 빅데이터컴퓨팅 기말 프로젝트로 직접 수행</a:t>
-            </a:r>
-          </a:p>
-          <a:p>
-            <a:pPr>
-              <a:spcAft>
-                <a:spcPts val="900"/>
-              </a:spcAft>
-            </a:pPr>
-            <a:r>
-              <a:rPr sz="1900">
-                <a:solidFill>
-                  <a:srgbClr val="222222"/>
-                </a:solidFill>
-                <a:latin typeface="Malgun Gothic"/>
-              </a:rPr>
-              <a:t>• 선행연구(타인) 차용: 없음</a:t>
-            </a:r>
-          </a:p>
-          <a:p>
-            <a:pPr lvl="1">
-              <a:spcAft>
-                <a:spcPts val="900"/>
-              </a:spcAft>
-            </a:pPr>
-            <a:r>
-              <a:rPr sz="1600">
-                <a:solidFill>
-                  <a:srgbClr val="222222"/>
-                </a:solidFill>
-                <a:latin typeface="Malgun Gothic"/>
-              </a:rPr>
-              <a:t>– LLAI 지수 설계·수집·정제·분석·시각화 코드 전부 자체 개발</a:t>
-            </a:r>
-          </a:p>
-          <a:p>
-            <a:pPr>
-              <a:spcAft>
-                <a:spcPts val="900"/>
-              </a:spcAft>
-            </a:pPr>
-            <a:r>
-              <a:rPr sz="1900">
-                <a:solidFill>
-                  <a:srgbClr val="222222"/>
-                </a:solidFill>
-                <a:latin typeface="Malgun Gothic"/>
-              </a:rPr>
-              <a:t>• 본인 이전 연구 차용: 없음</a:t>
-            </a:r>
-          </a:p>
-          <a:p>
-            <a:pPr lvl="1">
-              <a:spcAft>
-                <a:spcPts val="900"/>
-              </a:spcAft>
-            </a:pPr>
-            <a:r>
-              <a:rPr sz="1600">
-                <a:solidFill>
-                  <a:srgbClr val="222222"/>
-                </a:solidFill>
-                <a:latin typeface="Malgun Gothic"/>
-              </a:rPr>
-              <a:t>– 분석 주제·방법론 골격은 본 과목 제안서에서 직접 설계 → 기말에 구현</a:t>
-            </a:r>
-          </a:p>
-          <a:p>
-            <a:pPr>
-              <a:spcAft>
-                <a:spcPts val="900"/>
-              </a:spcAft>
-            </a:pPr>
-            <a:r>
-              <a:rPr sz="1900">
-                <a:solidFill>
-                  <a:srgbClr val="222222"/>
-                </a:solidFill>
-                <a:latin typeface="Malgun Gothic"/>
-              </a:rPr>
-              <a:t>• 외부에서 가져온 것은 '공개 raw data'와 '경계 파일'뿐 (모두 출처 명시)</a:t>
-            </a:r>
-          </a:p>
-          <a:p>
-            <a:pPr lvl="1">
-              <a:spcAft>
-                <a:spcPts val="900"/>
-              </a:spcAft>
-            </a:pPr>
-            <a:r>
-              <a:rPr sz="1600">
-                <a:solidFill>
-                  <a:srgbClr val="222222"/>
-                </a:solidFill>
-                <a:latin typeface="Malgun Gothic"/>
-              </a:rPr>
-              <a:t>– KOSIS·사법연감·법률구조공단·대한변협 / GeoJSON / 2009 변호사분포(법률저널)</a:t>
-            </a:r>
-          </a:p>
-          <a:p>
-            <a:pPr>
-              <a:spcAft>
-                <a:spcPts val="900"/>
-              </a:spcAft>
-            </a:pPr>
-            <a:r>
-              <a:rPr sz="1900">
-                <a:solidFill>
-                  <a:srgbClr val="222222"/>
-                </a:solidFill>
-                <a:latin typeface="Malgun Gothic"/>
-              </a:rPr>
-              <a:t>• → 데이터는 차용, 수집·정제·지수개발·분석·해석은 100% 본 프로젝트 수행</a:t>
-            </a:r>
-          </a:p>
-        </p:txBody>
-      </p:sp>
+        </p:nvGraphicFramePr>
+        <p:xfrm>
+          <a:off x="2560320" y="1554480"/>
+          <a:ext cx="7040880" cy="4846320"/>
+        </p:xfrm>
+        <a:graphic>
+          <a:graphicData uri="http://schemas.openxmlformats.org/drawingml/2006/table">
+            <a:tbl>
+              <a:tblPr firstRow="1" bandRow="1">
+                <a:tableStyleId>{5C22544A-7EE6-4342-B048-85BDC9FD1C3A}</a:tableStyleId>
+              </a:tblPr>
+              <a:tblGrid>
+                <a:gridCol w="1408176"/>
+                <a:gridCol w="1408176"/>
+                <a:gridCol w="1408176"/>
+                <a:gridCol w="1408176"/>
+                <a:gridCol w="1408176"/>
+              </a:tblGrid>
+              <a:tr h="346165">
+                <a:tc>
+                  <a:txBody>
+                    <a:bodyPr/>
+                    <a:lstStyle/>
+                    <a:p>
+                      <a:pPr algn="ctr"/>
+                      <a:r>
+                        <a:rPr sz="1200" b="1">
+                          <a:solidFill>
+                            <a:srgbClr val="FFFFFF"/>
+                          </a:solidFill>
+                          <a:latin typeface="Malgun Gothic"/>
+                        </a:rPr>
+                        <a:t>권역</a:t>
+                      </a:r>
+                    </a:p>
+                  </a:txBody>
+                  <a:tcPr anchor="ctr">
+                    <a:solidFill>
+                      <a:srgbClr val="1F3A5F"/>
+                    </a:solidFill>
+                  </a:tcPr>
+                </a:tc>
+                <a:tc>
+                  <a:txBody>
+                    <a:bodyPr/>
+                    <a:lstStyle/>
+                    <a:p>
+                      <a:pPr algn="ctr"/>
+                      <a:r>
+                        <a:rPr sz="1200" b="1">
+                          <a:solidFill>
+                            <a:srgbClr val="FFFFFF"/>
+                          </a:solidFill>
+                          <a:latin typeface="Malgun Gothic"/>
+                        </a:rPr>
+                        <a:t>A1</a:t>
+                      </a:r>
+                    </a:p>
+                  </a:txBody>
+                  <a:tcPr anchor="ctr">
+                    <a:solidFill>
+                      <a:srgbClr val="1F3A5F"/>
+                    </a:solidFill>
+                  </a:tcPr>
+                </a:tc>
+                <a:tc>
+                  <a:txBody>
+                    <a:bodyPr/>
+                    <a:lstStyle/>
+                    <a:p>
+                      <a:pPr algn="ctr"/>
+                      <a:r>
+                        <a:rPr sz="1200" b="1">
+                          <a:solidFill>
+                            <a:srgbClr val="FFFFFF"/>
+                          </a:solidFill>
+                          <a:latin typeface="Malgun Gothic"/>
+                        </a:rPr>
+                        <a:t>A2</a:t>
+                      </a:r>
+                    </a:p>
+                  </a:txBody>
+                  <a:tcPr anchor="ctr">
+                    <a:solidFill>
+                      <a:srgbClr val="1F3A5F"/>
+                    </a:solidFill>
+                  </a:tcPr>
+                </a:tc>
+                <a:tc>
+                  <a:txBody>
+                    <a:bodyPr/>
+                    <a:lstStyle/>
+                    <a:p>
+                      <a:pPr algn="ctr"/>
+                      <a:r>
+                        <a:rPr sz="1200" b="1">
+                          <a:solidFill>
+                            <a:srgbClr val="FFFFFF"/>
+                          </a:solidFill>
+                          <a:latin typeface="Malgun Gothic"/>
+                        </a:rPr>
+                        <a:t>A3</a:t>
+                      </a:r>
+                    </a:p>
+                  </a:txBody>
+                  <a:tcPr anchor="ctr">
+                    <a:solidFill>
+                      <a:srgbClr val="1F3A5F"/>
+                    </a:solidFill>
+                  </a:tcPr>
+                </a:tc>
+                <a:tc>
+                  <a:txBody>
+                    <a:bodyPr/>
+                    <a:lstStyle/>
+                    <a:p>
+                      <a:pPr algn="ctr"/>
+                      <a:r>
+                        <a:rPr sz="1200" b="1">
+                          <a:solidFill>
+                            <a:srgbClr val="FFFFFF"/>
+                          </a:solidFill>
+                          <a:latin typeface="Malgun Gothic"/>
+                        </a:rPr>
+                        <a:t>LLAI(엔트로피)</a:t>
+                      </a:r>
+                    </a:p>
+                  </a:txBody>
+                  <a:tcPr anchor="ctr">
+                    <a:solidFill>
+                      <a:srgbClr val="1F3A5F"/>
+                    </a:solidFill>
+                  </a:tcPr>
+                </a:tc>
+              </a:tr>
+              <a:tr h="346165">
+                <a:tc>
+                  <a:txBody>
+                    <a:bodyPr/>
+                    <a:lstStyle/>
+                    <a:p>
+                      <a:pPr algn="ctr"/>
+                      <a:r>
+                        <a:rPr sz="1200">
+                          <a:latin typeface="Malgun Gothic"/>
+                        </a:rPr>
+                        <a:t>서울</a:t>
+                      </a:r>
+                    </a:p>
+                  </a:txBody>
+                  <a:tcPr anchor="ctr"/>
+                </a:tc>
+                <a:tc>
+                  <a:txBody>
+                    <a:bodyPr/>
+                    <a:lstStyle/>
+                    <a:p>
+                      <a:pPr algn="ctr"/>
+                      <a:r>
+                        <a:rPr sz="1200">
+                          <a:latin typeface="Malgun Gothic"/>
+                        </a:rPr>
+                        <a:t>263.3</a:t>
+                      </a:r>
+                    </a:p>
+                  </a:txBody>
+                  <a:tcPr anchor="ctr"/>
+                </a:tc>
+                <a:tc>
+                  <a:txBody>
+                    <a:bodyPr/>
+                    <a:lstStyle/>
+                    <a:p>
+                      <a:pPr algn="ctr"/>
+                      <a:r>
+                        <a:rPr sz="1200">
+                          <a:latin typeface="Malgun Gothic"/>
+                        </a:rPr>
+                        <a:t>16.2</a:t>
+                      </a:r>
+                    </a:p>
+                  </a:txBody>
+                  <a:tcPr anchor="ctr"/>
+                </a:tc>
+                <a:tc>
+                  <a:txBody>
+                    <a:bodyPr/>
+                    <a:lstStyle/>
+                    <a:p>
+                      <a:pPr algn="ctr"/>
+                      <a:r>
+                        <a:rPr sz="1200">
+                          <a:latin typeface="Malgun Gothic"/>
+                        </a:rPr>
+                        <a:t>0.05</a:t>
+                      </a:r>
+                    </a:p>
+                  </a:txBody>
+                  <a:tcPr anchor="ctr"/>
+                </a:tc>
+                <a:tc>
+                  <a:txBody>
+                    <a:bodyPr/>
+                    <a:lstStyle/>
+                    <a:p>
+                      <a:pPr algn="ctr"/>
+                      <a:r>
+                        <a:rPr sz="1200">
+                          <a:latin typeface="Malgun Gothic"/>
+                        </a:rPr>
+                        <a:t>91.1</a:t>
+                      </a:r>
+                    </a:p>
+                  </a:txBody>
+                  <a:tcPr anchor="ctr"/>
+                </a:tc>
+              </a:tr>
+              <a:tr h="346165">
+                <a:tc>
+                  <a:txBody>
+                    <a:bodyPr/>
+                    <a:lstStyle/>
+                    <a:p>
+                      <a:pPr algn="ctr"/>
+                      <a:r>
+                        <a:rPr sz="1200">
+                          <a:latin typeface="Malgun Gothic"/>
+                        </a:rPr>
+                        <a:t>울산</a:t>
+                      </a:r>
+                    </a:p>
+                  </a:txBody>
+                  <a:tcPr anchor="ctr"/>
+                </a:tc>
+                <a:tc>
+                  <a:txBody>
+                    <a:bodyPr/>
+                    <a:lstStyle/>
+                    <a:p>
+                      <a:pPr algn="ctr"/>
+                      <a:r>
+                        <a:rPr sz="1200">
+                          <a:latin typeface="Malgun Gothic"/>
+                        </a:rPr>
+                        <a:t>23.0</a:t>
+                      </a:r>
+                    </a:p>
+                  </a:txBody>
+                  <a:tcPr anchor="ctr"/>
+                </a:tc>
+                <a:tc>
+                  <a:txBody>
+                    <a:bodyPr/>
+                    <a:lstStyle/>
+                    <a:p>
+                      <a:pPr algn="ctr"/>
+                      <a:r>
+                        <a:rPr sz="1200">
+                          <a:latin typeface="Malgun Gothic"/>
+                        </a:rPr>
+                        <a:t>89.2</a:t>
+                      </a:r>
+                    </a:p>
+                  </a:txBody>
+                  <a:tcPr anchor="ctr"/>
+                </a:tc>
+                <a:tc>
+                  <a:txBody>
+                    <a:bodyPr/>
+                    <a:lstStyle/>
+                    <a:p>
+                      <a:pPr algn="ctr"/>
+                      <a:r>
+                        <a:rPr sz="1200">
+                          <a:latin typeface="Malgun Gothic"/>
+                        </a:rPr>
+                        <a:t>0.07</a:t>
+                      </a:r>
+                    </a:p>
+                  </a:txBody>
+                  <a:tcPr anchor="ctr"/>
+                </a:tc>
+                <a:tc>
+                  <a:txBody>
+                    <a:bodyPr/>
+                    <a:lstStyle/>
+                    <a:p>
+                      <a:pPr algn="ctr"/>
+                      <a:r>
+                        <a:rPr sz="1200">
+                          <a:latin typeface="Malgun Gothic"/>
+                        </a:rPr>
+                        <a:t>24.2</a:t>
+                      </a:r>
+                    </a:p>
+                  </a:txBody>
+                  <a:tcPr anchor="ctr"/>
+                </a:tc>
+              </a:tr>
+              <a:tr h="346165">
+                <a:tc>
+                  <a:txBody>
+                    <a:bodyPr/>
+                    <a:lstStyle/>
+                    <a:p>
+                      <a:pPr algn="ctr"/>
+                      <a:r>
+                        <a:rPr sz="1200">
+                          <a:latin typeface="Malgun Gothic"/>
+                        </a:rPr>
+                        <a:t>제주</a:t>
+                      </a:r>
+                    </a:p>
+                  </a:txBody>
+                  <a:tcPr anchor="ctr"/>
+                </a:tc>
+                <a:tc>
+                  <a:txBody>
+                    <a:bodyPr/>
+                    <a:lstStyle/>
+                    <a:p>
+                      <a:pPr algn="ctr"/>
+                      <a:r>
+                        <a:rPr sz="1200">
+                          <a:latin typeface="Malgun Gothic"/>
+                        </a:rPr>
+                        <a:t>23.0</a:t>
+                      </a:r>
+                    </a:p>
+                  </a:txBody>
+                  <a:tcPr anchor="ctr"/>
+                </a:tc>
+                <a:tc>
+                  <a:txBody>
+                    <a:bodyPr/>
+                    <a:lstStyle/>
+                    <a:p>
+                      <a:pPr algn="ctr"/>
+                      <a:r>
+                        <a:rPr sz="1200">
+                          <a:latin typeface="Malgun Gothic"/>
+                        </a:rPr>
+                        <a:t>96.0</a:t>
+                      </a:r>
+                    </a:p>
+                  </a:txBody>
+                  <a:tcPr anchor="ctr"/>
+                </a:tc>
+                <a:tc>
+                  <a:txBody>
+                    <a:bodyPr/>
+                    <a:lstStyle/>
+                    <a:p>
+                      <a:pPr algn="ctr"/>
+                      <a:r>
+                        <a:rPr sz="1200">
+                          <a:latin typeface="Malgun Gothic"/>
+                        </a:rPr>
+                        <a:t>0.07</a:t>
+                      </a:r>
+                    </a:p>
+                  </a:txBody>
+                  <a:tcPr anchor="ctr"/>
+                </a:tc>
+                <a:tc>
+                  <a:txBody>
+                    <a:bodyPr/>
+                    <a:lstStyle/>
+                    <a:p>
+                      <a:pPr algn="ctr"/>
+                      <a:r>
+                        <a:rPr sz="1200">
+                          <a:latin typeface="Malgun Gothic"/>
+                        </a:rPr>
+                        <a:t>23.3</a:t>
+                      </a:r>
+                    </a:p>
+                  </a:txBody>
+                  <a:tcPr anchor="ctr"/>
+                </a:tc>
+              </a:tr>
+              <a:tr h="346165">
+                <a:tc>
+                  <a:txBody>
+                    <a:bodyPr/>
+                    <a:lstStyle/>
+                    <a:p>
+                      <a:pPr algn="ctr"/>
+                      <a:r>
+                        <a:rPr sz="1200">
+                          <a:latin typeface="Malgun Gothic"/>
+                        </a:rPr>
+                        <a:t>부산</a:t>
+                      </a:r>
+                    </a:p>
+                  </a:txBody>
+                  <a:tcPr anchor="ctr"/>
+                </a:tc>
+                <a:tc>
+                  <a:txBody>
+                    <a:bodyPr/>
+                    <a:lstStyle/>
+                    <a:p>
+                      <a:pPr algn="ctr"/>
+                      <a:r>
+                        <a:rPr sz="1200">
+                          <a:latin typeface="Malgun Gothic"/>
+                        </a:rPr>
+                        <a:t>37.0</a:t>
+                      </a:r>
+                    </a:p>
+                  </a:txBody>
+                  <a:tcPr anchor="ctr"/>
+                </a:tc>
+                <a:tc>
+                  <a:txBody>
+                    <a:bodyPr/>
+                    <a:lstStyle/>
+                    <a:p>
+                      <a:pPr algn="ctr"/>
+                      <a:r>
+                        <a:rPr sz="1200">
+                          <a:latin typeface="Malgun Gothic"/>
+                        </a:rPr>
+                        <a:t>53.5</a:t>
+                      </a:r>
+                    </a:p>
+                  </a:txBody>
+                  <a:tcPr anchor="ctr"/>
+                </a:tc>
+                <a:tc>
+                  <a:txBody>
+                    <a:bodyPr/>
+                    <a:lstStyle/>
+                    <a:p>
+                      <a:pPr algn="ctr"/>
+                      <a:r>
+                        <a:rPr sz="1200">
+                          <a:latin typeface="Malgun Gothic"/>
+                        </a:rPr>
+                        <a:t>0.04</a:t>
+                      </a:r>
+                    </a:p>
+                  </a:txBody>
+                  <a:tcPr anchor="ctr"/>
+                </a:tc>
+                <a:tc>
+                  <a:txBody>
+                    <a:bodyPr/>
+                    <a:lstStyle/>
+                    <a:p>
+                      <a:pPr algn="ctr"/>
+                      <a:r>
+                        <a:rPr sz="1200">
+                          <a:latin typeface="Malgun Gothic"/>
+                        </a:rPr>
+                        <a:t>19.1</a:t>
+                      </a:r>
+                    </a:p>
+                  </a:txBody>
+                  <a:tcPr anchor="ctr"/>
+                </a:tc>
+              </a:tr>
+              <a:tr h="346165">
+                <a:tc>
+                  <a:txBody>
+                    <a:bodyPr/>
+                    <a:lstStyle/>
+                    <a:p>
+                      <a:pPr algn="ctr"/>
+                      <a:r>
+                        <a:rPr sz="1200">
+                          <a:latin typeface="Malgun Gothic"/>
+                        </a:rPr>
+                        <a:t>경기</a:t>
+                      </a:r>
+                    </a:p>
+                  </a:txBody>
+                  <a:tcPr anchor="ctr"/>
+                </a:tc>
+                <a:tc>
+                  <a:txBody>
+                    <a:bodyPr/>
+                    <a:lstStyle/>
+                    <a:p>
+                      <a:pPr algn="ctr"/>
+                      <a:r>
+                        <a:rPr sz="1200">
+                          <a:latin typeface="Malgun Gothic"/>
+                        </a:rPr>
+                        <a:t>13.8</a:t>
+                      </a:r>
+                    </a:p>
+                  </a:txBody>
+                  <a:tcPr anchor="ctr"/>
+                </a:tc>
+                <a:tc>
+                  <a:txBody>
+                    <a:bodyPr/>
+                    <a:lstStyle/>
+                    <a:p>
+                      <a:pPr algn="ctr"/>
+                      <a:r>
+                        <a:rPr sz="1200">
+                          <a:latin typeface="Malgun Gothic"/>
+                        </a:rPr>
+                        <a:t>106.7</a:t>
+                      </a:r>
+                    </a:p>
+                  </a:txBody>
+                  <a:tcPr anchor="ctr"/>
+                </a:tc>
+                <a:tc>
+                  <a:txBody>
+                    <a:bodyPr/>
+                    <a:lstStyle/>
+                    <a:p>
+                      <a:pPr algn="ctr"/>
+                      <a:r>
+                        <a:rPr sz="1200">
+                          <a:latin typeface="Malgun Gothic"/>
+                        </a:rPr>
+                        <a:t>0.05</a:t>
+                      </a:r>
+                    </a:p>
+                  </a:txBody>
+                  <a:tcPr anchor="ctr"/>
+                </a:tc>
+                <a:tc>
+                  <a:txBody>
+                    <a:bodyPr/>
+                    <a:lstStyle/>
+                    <a:p>
+                      <a:pPr algn="ctr"/>
+                      <a:r>
+                        <a:rPr sz="1200">
+                          <a:latin typeface="Malgun Gothic"/>
+                        </a:rPr>
+                        <a:t>11.7</a:t>
+                      </a:r>
+                    </a:p>
+                  </a:txBody>
+                  <a:tcPr anchor="ctr"/>
+                </a:tc>
+              </a:tr>
+              <a:tr h="346165">
+                <a:tc>
+                  <a:txBody>
+                    <a:bodyPr/>
+                    <a:lstStyle/>
+                    <a:p>
+                      <a:pPr algn="ctr"/>
+                      <a:r>
+                        <a:rPr sz="1200">
+                          <a:latin typeface="Malgun Gothic"/>
+                        </a:rPr>
+                        <a:t>경남</a:t>
+                      </a:r>
+                    </a:p>
+                  </a:txBody>
+                  <a:tcPr anchor="ctr"/>
+                </a:tc>
+                <a:tc>
+                  <a:txBody>
+                    <a:bodyPr/>
+                    <a:lstStyle/>
+                    <a:p>
+                      <a:pPr algn="ctr"/>
+                      <a:r>
+                        <a:rPr sz="1200">
+                          <a:latin typeface="Malgun Gothic"/>
+                        </a:rPr>
+                        <a:t>13.0</a:t>
+                      </a:r>
+                    </a:p>
+                  </a:txBody>
+                  <a:tcPr anchor="ctr"/>
+                </a:tc>
+                <a:tc>
+                  <a:txBody>
+                    <a:bodyPr/>
+                    <a:lstStyle/>
+                    <a:p>
+                      <a:pPr algn="ctr"/>
+                      <a:r>
+                        <a:rPr sz="1200">
+                          <a:latin typeface="Malgun Gothic"/>
+                        </a:rPr>
+                        <a:t>103.3</a:t>
+                      </a:r>
+                    </a:p>
+                  </a:txBody>
+                  <a:tcPr anchor="ctr"/>
+                </a:tc>
+                <a:tc>
+                  <a:txBody>
+                    <a:bodyPr/>
+                    <a:lstStyle/>
+                    <a:p>
+                      <a:pPr algn="ctr"/>
+                      <a:r>
+                        <a:rPr sz="1200">
+                          <a:latin typeface="Malgun Gothic"/>
+                        </a:rPr>
+                        <a:t>0.05</a:t>
+                      </a:r>
+                    </a:p>
+                  </a:txBody>
+                  <a:tcPr anchor="ctr"/>
+                </a:tc>
+                <a:tc>
+                  <a:txBody>
+                    <a:bodyPr/>
+                    <a:lstStyle/>
+                    <a:p>
+                      <a:pPr algn="ctr"/>
+                      <a:r>
+                        <a:rPr sz="1200">
+                          <a:latin typeface="Malgun Gothic"/>
+                        </a:rPr>
+                        <a:t>11.5</a:t>
+                      </a:r>
+                    </a:p>
+                  </a:txBody>
+                  <a:tcPr anchor="ctr"/>
+                </a:tc>
+              </a:tr>
+              <a:tr h="346165">
+                <a:tc>
+                  <a:txBody>
+                    <a:bodyPr/>
+                    <a:lstStyle/>
+                    <a:p>
+                      <a:pPr algn="ctr"/>
+                      <a:r>
+                        <a:rPr sz="1200">
+                          <a:latin typeface="Malgun Gothic"/>
+                        </a:rPr>
+                        <a:t>광주권</a:t>
+                      </a:r>
+                    </a:p>
+                  </a:txBody>
+                  <a:tcPr anchor="ctr"/>
+                </a:tc>
+                <a:tc>
+                  <a:txBody>
+                    <a:bodyPr/>
+                    <a:lstStyle/>
+                    <a:p>
+                      <a:pPr algn="ctr"/>
+                      <a:r>
+                        <a:rPr sz="1200">
+                          <a:latin typeface="Malgun Gothic"/>
+                        </a:rPr>
+                        <a:t>19.7</a:t>
+                      </a:r>
+                    </a:p>
+                  </a:txBody>
+                  <a:tcPr anchor="ctr"/>
+                </a:tc>
+                <a:tc>
+                  <a:txBody>
+                    <a:bodyPr/>
+                    <a:lstStyle/>
+                    <a:p>
+                      <a:pPr algn="ctr"/>
+                      <a:r>
+                        <a:rPr sz="1200">
+                          <a:latin typeface="Malgun Gothic"/>
+                        </a:rPr>
+                        <a:t>94.5</a:t>
+                      </a:r>
+                    </a:p>
+                  </a:txBody>
+                  <a:tcPr anchor="ctr"/>
+                </a:tc>
+                <a:tc>
+                  <a:txBody>
+                    <a:bodyPr/>
+                    <a:lstStyle/>
+                    <a:p>
+                      <a:pPr algn="ctr"/>
+                      <a:r>
+                        <a:rPr sz="1200">
+                          <a:latin typeface="Malgun Gothic"/>
+                        </a:rPr>
+                        <a:t>0.04</a:t>
+                      </a:r>
+                    </a:p>
+                  </a:txBody>
+                  <a:tcPr anchor="ctr"/>
+                </a:tc>
+                <a:tc>
+                  <a:txBody>
+                    <a:bodyPr/>
+                    <a:lstStyle/>
+                    <a:p>
+                      <a:pPr algn="ctr"/>
+                      <a:r>
+                        <a:rPr sz="1200">
+                          <a:latin typeface="Malgun Gothic"/>
+                        </a:rPr>
+                        <a:t>10.3</a:t>
+                      </a:r>
+                    </a:p>
+                  </a:txBody>
+                  <a:tcPr anchor="ctr"/>
+                </a:tc>
+              </a:tr>
+              <a:tr h="346165">
+                <a:tc>
+                  <a:txBody>
+                    <a:bodyPr/>
+                    <a:lstStyle/>
+                    <a:p>
+                      <a:pPr algn="ctr"/>
+                      <a:r>
+                        <a:rPr sz="1200">
+                          <a:latin typeface="Malgun Gothic"/>
+                        </a:rPr>
+                        <a:t>대전권</a:t>
+                      </a:r>
+                    </a:p>
+                  </a:txBody>
+                  <a:tcPr anchor="ctr"/>
+                </a:tc>
+                <a:tc>
+                  <a:txBody>
+                    <a:bodyPr/>
+                    <a:lstStyle/>
+                    <a:p>
+                      <a:pPr algn="ctr"/>
+                      <a:r>
+                        <a:rPr sz="1200">
+                          <a:latin typeface="Malgun Gothic"/>
+                        </a:rPr>
+                        <a:t>20.5</a:t>
+                      </a:r>
+                    </a:p>
+                  </a:txBody>
+                  <a:tcPr anchor="ctr"/>
+                </a:tc>
+                <a:tc>
+                  <a:txBody>
+                    <a:bodyPr/>
+                    <a:lstStyle/>
+                    <a:p>
+                      <a:pPr algn="ctr"/>
+                      <a:r>
+                        <a:rPr sz="1200">
+                          <a:latin typeface="Malgun Gothic"/>
+                        </a:rPr>
+                        <a:t>82.4</a:t>
+                      </a:r>
+                    </a:p>
+                  </a:txBody>
+                  <a:tcPr anchor="ctr"/>
+                </a:tc>
+                <a:tc>
+                  <a:txBody>
+                    <a:bodyPr/>
+                    <a:lstStyle/>
+                    <a:p>
+                      <a:pPr algn="ctr"/>
+                      <a:r>
+                        <a:rPr sz="1200">
+                          <a:latin typeface="Malgun Gothic"/>
+                        </a:rPr>
+                        <a:t>0.04</a:t>
+                      </a:r>
+                    </a:p>
+                  </a:txBody>
+                  <a:tcPr anchor="ctr"/>
+                </a:tc>
+                <a:tc>
+                  <a:txBody>
+                    <a:bodyPr/>
+                    <a:lstStyle/>
+                    <a:p>
+                      <a:pPr algn="ctr"/>
+                      <a:r>
+                        <a:rPr sz="1200">
+                          <a:latin typeface="Malgun Gothic"/>
+                        </a:rPr>
+                        <a:t>9.7</a:t>
+                      </a:r>
+                    </a:p>
+                  </a:txBody>
+                  <a:tcPr anchor="ctr"/>
+                </a:tc>
+              </a:tr>
+              <a:tr h="346165">
+                <a:tc>
+                  <a:txBody>
+                    <a:bodyPr/>
+                    <a:lstStyle/>
+                    <a:p>
+                      <a:pPr algn="ctr"/>
+                      <a:r>
+                        <a:rPr sz="1200">
+                          <a:latin typeface="Malgun Gothic"/>
+                        </a:rPr>
+                        <a:t>대구권</a:t>
+                      </a:r>
+                    </a:p>
+                  </a:txBody>
+                  <a:tcPr anchor="ctr"/>
+                </a:tc>
+                <a:tc>
+                  <a:txBody>
+                    <a:bodyPr/>
+                    <a:lstStyle/>
+                    <a:p>
+                      <a:pPr algn="ctr"/>
+                      <a:r>
+                        <a:rPr sz="1200">
+                          <a:latin typeface="Malgun Gothic"/>
+                        </a:rPr>
+                        <a:t>17.3</a:t>
+                      </a:r>
+                    </a:p>
+                  </a:txBody>
+                  <a:tcPr anchor="ctr"/>
+                </a:tc>
+                <a:tc>
+                  <a:txBody>
+                    <a:bodyPr/>
+                    <a:lstStyle/>
+                    <a:p>
+                      <a:pPr algn="ctr"/>
+                      <a:r>
+                        <a:rPr sz="1200">
+                          <a:latin typeface="Malgun Gothic"/>
+                        </a:rPr>
+                        <a:t>92.4</a:t>
+                      </a:r>
+                    </a:p>
+                  </a:txBody>
+                  <a:tcPr anchor="ctr"/>
+                </a:tc>
+                <a:tc>
+                  <a:txBody>
+                    <a:bodyPr/>
+                    <a:lstStyle/>
+                    <a:p>
+                      <a:pPr algn="ctr"/>
+                      <a:r>
+                        <a:rPr sz="1200">
+                          <a:latin typeface="Malgun Gothic"/>
+                        </a:rPr>
+                        <a:t>0.04</a:t>
+                      </a:r>
+                    </a:p>
+                  </a:txBody>
+                  <a:tcPr anchor="ctr"/>
+                </a:tc>
+                <a:tc>
+                  <a:txBody>
+                    <a:bodyPr/>
+                    <a:lstStyle/>
+                    <a:p>
+                      <a:pPr algn="ctr"/>
+                      <a:r>
+                        <a:rPr sz="1200">
+                          <a:latin typeface="Malgun Gothic"/>
+                        </a:rPr>
+                        <a:t>9.2</a:t>
+                      </a:r>
+                    </a:p>
+                  </a:txBody>
+                  <a:tcPr anchor="ctr"/>
+                </a:tc>
+              </a:tr>
+              <a:tr h="346165">
+                <a:tc>
+                  <a:txBody>
+                    <a:bodyPr/>
+                    <a:lstStyle/>
+                    <a:p>
+                      <a:pPr algn="ctr"/>
+                      <a:r>
+                        <a:rPr sz="1200">
+                          <a:latin typeface="Malgun Gothic"/>
+                        </a:rPr>
+                        <a:t>전북</a:t>
+                      </a:r>
+                    </a:p>
+                  </a:txBody>
+                  <a:tcPr anchor="ctr"/>
+                </a:tc>
+                <a:tc>
+                  <a:txBody>
+                    <a:bodyPr/>
+                    <a:lstStyle/>
+                    <a:p>
+                      <a:pPr algn="ctr"/>
+                      <a:r>
+                        <a:rPr sz="1200">
+                          <a:latin typeface="Malgun Gothic"/>
+                        </a:rPr>
+                        <a:t>18.5</a:t>
+                      </a:r>
+                    </a:p>
+                  </a:txBody>
+                  <a:tcPr anchor="ctr"/>
+                </a:tc>
+                <a:tc>
+                  <a:txBody>
+                    <a:bodyPr/>
+                    <a:lstStyle/>
+                    <a:p>
+                      <a:pPr algn="ctr"/>
+                      <a:r>
+                        <a:rPr sz="1200">
+                          <a:latin typeface="Malgun Gothic"/>
+                        </a:rPr>
+                        <a:t>85.7</a:t>
+                      </a:r>
+                    </a:p>
+                  </a:txBody>
+                  <a:tcPr anchor="ctr"/>
+                </a:tc>
+                <a:tc>
+                  <a:txBody>
+                    <a:bodyPr/>
+                    <a:lstStyle/>
+                    <a:p>
+                      <a:pPr algn="ctr"/>
+                      <a:r>
+                        <a:rPr sz="1200">
+                          <a:latin typeface="Malgun Gothic"/>
+                        </a:rPr>
+                        <a:t>0.04</a:t>
+                      </a:r>
+                    </a:p>
+                  </a:txBody>
+                  <a:tcPr anchor="ctr"/>
+                </a:tc>
+                <a:tc>
+                  <a:txBody>
+                    <a:bodyPr/>
+                    <a:lstStyle/>
+                    <a:p>
+                      <a:pPr algn="ctr"/>
+                      <a:r>
+                        <a:rPr sz="1200">
+                          <a:latin typeface="Malgun Gothic"/>
+                        </a:rPr>
+                        <a:t>8.8</a:t>
+                      </a:r>
+                    </a:p>
+                  </a:txBody>
+                  <a:tcPr anchor="ctr"/>
+                </a:tc>
+              </a:tr>
+              <a:tr h="346165">
+                <a:tc>
+                  <a:txBody>
+                    <a:bodyPr/>
+                    <a:lstStyle/>
+                    <a:p>
+                      <a:pPr algn="ctr"/>
+                      <a:r>
+                        <a:rPr sz="1200">
+                          <a:latin typeface="Malgun Gothic"/>
+                        </a:rPr>
+                        <a:t>인천</a:t>
+                      </a:r>
+                    </a:p>
+                  </a:txBody>
+                  <a:tcPr anchor="ctr"/>
+                </a:tc>
+                <a:tc>
+                  <a:txBody>
+                    <a:bodyPr/>
+                    <a:lstStyle/>
+                    <a:p>
+                      <a:pPr algn="ctr"/>
+                      <a:r>
+                        <a:rPr sz="1200">
+                          <a:latin typeface="Malgun Gothic"/>
+                        </a:rPr>
+                        <a:t>24.8</a:t>
+                      </a:r>
+                    </a:p>
+                  </a:txBody>
+                  <a:tcPr anchor="ctr"/>
+                </a:tc>
+                <a:tc>
+                  <a:txBody>
+                    <a:bodyPr/>
+                    <a:lstStyle/>
+                    <a:p>
+                      <a:pPr algn="ctr"/>
+                      <a:r>
+                        <a:rPr sz="1200">
+                          <a:latin typeface="Malgun Gothic"/>
+                        </a:rPr>
+                        <a:t>108.7</a:t>
+                      </a:r>
+                    </a:p>
+                  </a:txBody>
+                  <a:tcPr anchor="ctr"/>
+                </a:tc>
+                <a:tc>
+                  <a:txBody>
+                    <a:bodyPr/>
+                    <a:lstStyle/>
+                    <a:p>
+                      <a:pPr algn="ctr"/>
+                      <a:r>
+                        <a:rPr sz="1200">
+                          <a:latin typeface="Malgun Gothic"/>
+                        </a:rPr>
+                        <a:t>0.03</a:t>
+                      </a:r>
+                    </a:p>
+                  </a:txBody>
+                  <a:tcPr anchor="ctr"/>
+                </a:tc>
+                <a:tc>
+                  <a:txBody>
+                    <a:bodyPr/>
+                    <a:lstStyle/>
+                    <a:p>
+                      <a:pPr algn="ctr"/>
+                      <a:r>
+                        <a:rPr sz="1200">
+                          <a:latin typeface="Malgun Gothic"/>
+                        </a:rPr>
+                        <a:t>5.0</a:t>
+                      </a:r>
+                    </a:p>
+                  </a:txBody>
+                  <a:tcPr anchor="ctr"/>
+                </a:tc>
+              </a:tr>
+              <a:tr h="346165">
+                <a:tc>
+                  <a:txBody>
+                    <a:bodyPr/>
+                    <a:lstStyle/>
+                    <a:p>
+                      <a:pPr algn="ctr"/>
+                      <a:r>
+                        <a:rPr sz="1200">
+                          <a:latin typeface="Malgun Gothic"/>
+                        </a:rPr>
+                        <a:t>충북</a:t>
+                      </a:r>
+                    </a:p>
+                  </a:txBody>
+                  <a:tcPr anchor="ctr"/>
+                </a:tc>
+                <a:tc>
+                  <a:txBody>
+                    <a:bodyPr/>
+                    <a:lstStyle/>
+                    <a:p>
+                      <a:pPr algn="ctr"/>
+                      <a:r>
+                        <a:rPr sz="1200">
+                          <a:latin typeface="Malgun Gothic"/>
+                        </a:rPr>
+                        <a:t>14.6</a:t>
+                      </a:r>
+                    </a:p>
+                  </a:txBody>
+                  <a:tcPr anchor="ctr"/>
+                </a:tc>
+                <a:tc>
+                  <a:txBody>
+                    <a:bodyPr/>
+                    <a:lstStyle/>
+                    <a:p>
+                      <a:pPr algn="ctr"/>
+                      <a:r>
+                        <a:rPr sz="1200">
+                          <a:latin typeface="Malgun Gothic"/>
+                        </a:rPr>
+                        <a:t>107.6</a:t>
+                      </a:r>
+                    </a:p>
+                  </a:txBody>
+                  <a:tcPr anchor="ctr"/>
+                </a:tc>
+                <a:tc>
+                  <a:txBody>
+                    <a:bodyPr/>
+                    <a:lstStyle/>
+                    <a:p>
+                      <a:pPr algn="ctr"/>
+                      <a:r>
+                        <a:rPr sz="1200">
+                          <a:latin typeface="Malgun Gothic"/>
+                        </a:rPr>
+                        <a:t>0.04</a:t>
+                      </a:r>
+                    </a:p>
+                  </a:txBody>
+                  <a:tcPr anchor="ctr"/>
+                </a:tc>
+                <a:tc>
+                  <a:txBody>
+                    <a:bodyPr/>
+                    <a:lstStyle/>
+                    <a:p>
+                      <a:pPr algn="ctr"/>
+                      <a:r>
+                        <a:rPr sz="1200">
+                          <a:latin typeface="Malgun Gothic"/>
+                        </a:rPr>
+                        <a:t>4.2</a:t>
+                      </a:r>
+                    </a:p>
+                  </a:txBody>
+                  <a:tcPr anchor="ctr"/>
+                </a:tc>
+              </a:tr>
+              <a:tr h="346175">
+                <a:tc>
+                  <a:txBody>
+                    <a:bodyPr/>
+                    <a:lstStyle/>
+                    <a:p>
+                      <a:pPr algn="ctr"/>
+                      <a:r>
+                        <a:rPr sz="1200">
+                          <a:latin typeface="Malgun Gothic"/>
+                        </a:rPr>
+                        <a:t>강원</a:t>
+                      </a:r>
+                    </a:p>
+                  </a:txBody>
+                  <a:tcPr anchor="ctr"/>
+                </a:tc>
+                <a:tc>
+                  <a:txBody>
+                    <a:bodyPr/>
+                    <a:lstStyle/>
+                    <a:p>
+                      <a:pPr algn="ctr"/>
+                      <a:r>
+                        <a:rPr sz="1200">
+                          <a:latin typeface="Malgun Gothic"/>
+                        </a:rPr>
+                        <a:t>12.7</a:t>
+                      </a:r>
+                    </a:p>
+                  </a:txBody>
+                  <a:tcPr anchor="ctr"/>
+                </a:tc>
+                <a:tc>
+                  <a:txBody>
+                    <a:bodyPr/>
+                    <a:lstStyle/>
+                    <a:p>
+                      <a:pPr algn="ctr"/>
+                      <a:r>
+                        <a:rPr sz="1200">
+                          <a:latin typeface="Malgun Gothic"/>
+                        </a:rPr>
+                        <a:t>121.0</a:t>
+                      </a:r>
+                    </a:p>
+                  </a:txBody>
+                  <a:tcPr anchor="ctr"/>
+                </a:tc>
+                <a:tc>
+                  <a:txBody>
+                    <a:bodyPr/>
+                    <a:lstStyle/>
+                    <a:p>
+                      <a:pPr algn="ctr"/>
+                      <a:r>
+                        <a:rPr sz="1200">
+                          <a:latin typeface="Malgun Gothic"/>
+                        </a:rPr>
+                        <a:t>0.04</a:t>
+                      </a:r>
+                    </a:p>
+                  </a:txBody>
+                  <a:tcPr anchor="ctr"/>
+                </a:tc>
+                <a:tc>
+                  <a:txBody>
+                    <a:bodyPr/>
+                    <a:lstStyle/>
+                    <a:p>
+                      <a:pPr algn="ctr"/>
+                      <a:r>
+                        <a:rPr sz="1200">
+                          <a:latin typeface="Malgun Gothic"/>
+                        </a:rPr>
+                        <a:t>1.6</a:t>
+                      </a:r>
+                    </a:p>
+                  </a:txBody>
+                  <a:tcPr anchor="ctr"/>
+                </a:tc>
+              </a:tr>
+            </a:tbl>
+          </a:graphicData>
+        </a:graphic>
+      </p:graphicFrame>
     </p:spTree>
   </p:cSld>
   <p:clrMapOvr>
@@ -6550,7 +6757,7 @@
 </p:sld>
 </file>
 
-<file path=ppt/slides/slide20.xml><?xml version="1.0" encoding="utf-8"?>
+<file path=ppt/slides/slide2.xml><?xml version="1.0" encoding="utf-8"?>
 <p:sld xmlns:a="http://schemas.openxmlformats.org/drawingml/2006/main" xmlns:p="http://schemas.openxmlformats.org/presentationml/2006/main" xmlns:r="http://schemas.openxmlformats.org/officeDocument/2006/relationships">
   <p:cSld>
     <p:spTree>
@@ -6589,7 +6796,7 @@
                 </a:solidFill>
                 <a:latin typeface="Malgun Gothic"/>
               </a:rPr>
-              <a:t>부록 A — 방법론 선택의 근거</a:t>
+              <a:t>연구 범위 · 선행연구 차용 여부</a:t>
             </a:r>
           </a:p>
         </p:txBody>
@@ -6665,13 +6872,29 @@
               </a:spcAft>
             </a:pPr>
             <a:r>
-              <a:rPr sz="1800">
+              <a:rPr sz="1900">
                 <a:solidFill>
                   <a:srgbClr val="222222"/>
                 </a:solidFill>
                 <a:latin typeface="Malgun Gothic"/>
               </a:rPr>
-              <a:t>• 왜 17시도가 아닌 두 단위(13권역/10도단위)인가</a:t>
+              <a:t>• 본 분석은 26-1 빅데이터컴퓨팅 기말 프로젝트로 직접 수행</a:t>
+            </a:r>
+          </a:p>
+          <a:p>
+            <a:pPr>
+              <a:spcAft>
+                <a:spcPts val="900"/>
+              </a:spcAft>
+            </a:pPr>
+            <a:r>
+              <a:rPr sz="1900">
+                <a:solidFill>
+                  <a:srgbClr val="222222"/>
+                </a:solidFill>
+                <a:latin typeface="Malgun Gothic"/>
+              </a:rPr>
+              <a:t>• 선행연구(타인) 차용: 없음</a:t>
             </a:r>
           </a:p>
           <a:p>
@@ -6681,13 +6904,29 @@
               </a:spcAft>
             </a:pPr>
             <a:r>
-              <a:rPr sz="1500">
+              <a:rPr sz="1600">
                 <a:solidFill>
                   <a:srgbClr val="222222"/>
                 </a:solidFill>
                 <a:latin typeface="Malgun Gothic"/>
               </a:rPr>
-              <a:t>– 변호사(변협 14지방회)·법률구조(공단 10도단위)가 광역시를 도에 묶어 제공 → 시도 분리 불가</a:t>
+              <a:t>– LLAI 지수 설계·수집·정제·분석·시각화 코드 전부 자체 개발</a:t>
+            </a:r>
+          </a:p>
+          <a:p>
+            <a:pPr>
+              <a:spcAft>
+                <a:spcPts val="900"/>
+              </a:spcAft>
+            </a:pPr>
+            <a:r>
+              <a:rPr sz="1900">
+                <a:solidFill>
+                  <a:srgbClr val="222222"/>
+                </a:solidFill>
+                <a:latin typeface="Malgun Gothic"/>
+              </a:rPr>
+              <a:t>• 본인 이전 연구 차용: 없음</a:t>
             </a:r>
           </a:p>
           <a:p>
@@ -6697,13 +6936,13 @@
               </a:spcAft>
             </a:pPr>
             <a:r>
-              <a:rPr sz="1500">
+              <a:rPr sz="1600">
                 <a:solidFill>
                   <a:srgbClr val="222222"/>
                 </a:solidFill>
                 <a:latin typeface="Malgun Gothic"/>
               </a:rPr>
-              <a:t>– 두 단위 결론이 일치(서울 1위·강원 최하)하면 단위 선택에 무관함을 입증</a:t>
+              <a:t>– 분석 주제·방법론 골격은 본 과목 제안서에서 직접 설계 → 기말에 구현</a:t>
             </a:r>
           </a:p>
           <a:p>
@@ -6713,13 +6952,13 @@
               </a:spcAft>
             </a:pPr>
             <a:r>
-              <a:rPr sz="1800">
+              <a:rPr sz="1900">
                 <a:solidFill>
                   <a:srgbClr val="222222"/>
                 </a:solidFill>
                 <a:latin typeface="Malgun Gothic"/>
               </a:rPr>
-              <a:t>• 왜 '본안사건'인가 (A2)</a:t>
+              <a:t>• 외부에서 가져온 것은 '공개 raw data'와 '경계 파일'뿐 (모두 출처 명시)</a:t>
             </a:r>
           </a:p>
           <a:p>
@@ -6729,13 +6968,13 @@
               </a:spcAft>
             </a:pPr>
             <a:r>
-              <a:rPr sz="1500">
+              <a:rPr sz="1600">
                 <a:solidFill>
                   <a:srgbClr val="222222"/>
                 </a:solidFill>
                 <a:latin typeface="Malgun Gothic"/>
               </a:rPr>
-              <a:t>– 전체 법원사건의 약 60%가 등기·공탁(비송) → 변호사 업무량 왜곡 → 실질 소송(본안)만 사용</a:t>
+              <a:t>– KOSIS·사법연감·법률구조공단·대한변협 / GeoJSON / 2009 변호사분포(법률저널)</a:t>
             </a:r>
           </a:p>
           <a:p>
@@ -6745,61 +6984,13 @@
               </a:spcAft>
             </a:pPr>
             <a:r>
-              <a:rPr sz="1800">
+              <a:rPr sz="1900">
                 <a:solidFill>
                   <a:srgbClr val="222222"/>
                 </a:solidFill>
                 <a:latin typeface="Malgun Gothic"/>
               </a:rPr>
-              <a:t>• 왜 가중치 3종(균등·엔트로피·PCA)인가</a:t>
-            </a:r>
-          </a:p>
-          <a:p>
-            <a:pPr lvl="1">
-              <a:spcAft>
-                <a:spcPts val="900"/>
-              </a:spcAft>
-            </a:pPr>
-            <a:r>
-              <a:rPr sz="1500">
-                <a:solidFill>
-                  <a:srgbClr val="222222"/>
-                </a:solidFill>
-                <a:latin typeface="Malgun Gothic"/>
-              </a:rPr>
-              <a:t>– 가중치 자의성 방지 — 어떤 방식이든 서울 1위·강원 최하(강건성) 확인</a:t>
-            </a:r>
-          </a:p>
-          <a:p>
-            <a:pPr>
-              <a:spcAft>
-                <a:spcPts val="900"/>
-              </a:spcAft>
-            </a:pPr>
-            <a:r>
-              <a:rPr sz="1800">
-                <a:solidFill>
-                  <a:srgbClr val="222222"/>
-                </a:solidFill>
-                <a:latin typeface="Malgun Gothic"/>
-              </a:rPr>
-              <a:t>• 왜 정규화·방향 보정인가</a:t>
-            </a:r>
-          </a:p>
-          <a:p>
-            <a:pPr lvl="1">
-              <a:spcAft>
-                <a:spcPts val="900"/>
-              </a:spcAft>
-            </a:pPr>
-            <a:r>
-              <a:rPr sz="1500">
-                <a:solidFill>
-                  <a:srgbClr val="222222"/>
-                </a:solidFill>
-                <a:latin typeface="Malgun Gothic"/>
-              </a:rPr>
-              <a:t>– 단위 상이(명·건·비율) → 0~1 통일, A2는 1−값으로 '클수록 좋음' 일치</a:t>
+              <a:t>• → 데이터는 차용, 수집·정제·지수개발·분석·해석은 100% 본 프로젝트 수행</a:t>
             </a:r>
           </a:p>
         </p:txBody>
@@ -6812,7 +7003,7 @@
 </p:sld>
 </file>
 
-<file path=ppt/slides/slide21.xml><?xml version="1.0" encoding="utf-8"?>
+<file path=ppt/slides/slide20.xml><?xml version="1.0" encoding="utf-8"?>
 <p:sld xmlns:a="http://schemas.openxmlformats.org/drawingml/2006/main" xmlns:p="http://schemas.openxmlformats.org/presentationml/2006/main" xmlns:r="http://schemas.openxmlformats.org/officeDocument/2006/relationships">
   <p:cSld>
     <p:spTree>
@@ -6851,7 +7042,7 @@
                 </a:solidFill>
                 <a:latin typeface="Malgun Gothic"/>
               </a:rPr>
-              <a:t>부록 B — 용어 정리</a:t>
+              <a:t>부록 A — 방법론 선택의 근거</a:t>
             </a:r>
           </a:p>
         </p:txBody>
@@ -6899,488 +7090,173 @@
           </a:p>
         </p:txBody>
       </p:sp>
-      <p:graphicFrame>
-        <p:nvGraphicFramePr>
-          <p:cNvPr id="4" name="Table 3"/>
-          <p:cNvGraphicFramePr>
-            <a:graphicFrameLocks noGrp="1"/>
-          </p:cNvGraphicFramePr>
+      <p:sp>
+        <p:nvSpPr>
+          <p:cNvPr id="4" name="TextBox 3"/>
+          <p:cNvSpPr txBox="1"/>
           <p:nvPr/>
-        </p:nvGraphicFramePr>
-        <p:xfrm>
-          <a:off x="548640" y="1508760"/>
-          <a:ext cx="11064240" cy="4937760"/>
-        </p:xfrm>
-        <a:graphic>
-          <a:graphicData uri="http://schemas.openxmlformats.org/drawingml/2006/table">
-            <a:tbl>
-              <a:tblPr firstRow="1" bandRow="1">
-                <a:tableStyleId>{5C22544A-7EE6-4342-B048-85BDC9FD1C3A}</a:tableStyleId>
-              </a:tblPr>
-              <a:tblGrid>
-                <a:gridCol w="5532120"/>
-                <a:gridCol w="5532120"/>
-              </a:tblGrid>
-              <a:tr h="379827">
-                <a:tc>
-                  <a:txBody>
-                    <a:bodyPr/>
-                    <a:lstStyle/>
-                    <a:p>
-                      <a:pPr algn="ctr"/>
-                      <a:r>
-                        <a:rPr sz="1100" b="1">
-                          <a:solidFill>
-                            <a:srgbClr val="FFFFFF"/>
-                          </a:solidFill>
-                          <a:latin typeface="Malgun Gothic"/>
-                        </a:rPr>
-                        <a:t>용어</a:t>
-                      </a:r>
-                    </a:p>
-                  </a:txBody>
-                  <a:tcPr anchor="ctr">
-                    <a:solidFill>
-                      <a:srgbClr val="1F3A5F"/>
-                    </a:solidFill>
-                  </a:tcPr>
-                </a:tc>
-                <a:tc>
-                  <a:txBody>
-                    <a:bodyPr/>
-                    <a:lstStyle/>
-                    <a:p>
-                      <a:pPr algn="l"/>
-                      <a:r>
-                        <a:rPr sz="1100" b="1">
-                          <a:solidFill>
-                            <a:srgbClr val="FFFFFF"/>
-                          </a:solidFill>
-                          <a:latin typeface="Malgun Gothic"/>
-                        </a:rPr>
-                        <a:t>뜻</a:t>
-                      </a:r>
-                    </a:p>
-                  </a:txBody>
-                  <a:tcPr anchor="ctr">
-                    <a:solidFill>
-                      <a:srgbClr val="1F3A5F"/>
-                    </a:solidFill>
-                  </a:tcPr>
-                </a:tc>
-              </a:tr>
-              <a:tr h="379827">
-                <a:tc>
-                  <a:txBody>
-                    <a:bodyPr/>
-                    <a:lstStyle/>
-                    <a:p>
-                      <a:pPr algn="ctr"/>
-                      <a:r>
-                        <a:rPr sz="1100">
-                          <a:latin typeface="Malgun Gothic"/>
-                        </a:rPr>
-                        <a:t>본안사건</a:t>
-                      </a:r>
-                    </a:p>
-                  </a:txBody>
-                  <a:tcPr anchor="ctr"/>
-                </a:tc>
-                <a:tc>
-                  <a:txBody>
-                    <a:bodyPr/>
-                    <a:lstStyle/>
-                    <a:p>
-                      <a:pPr algn="l"/>
-                      <a:r>
-                        <a:rPr sz="1100">
-                          <a:latin typeface="Malgun Gothic"/>
-                        </a:rPr>
-                        <a:t>권리·의무를 본격 판단하는 소송(민사본안·형사공판·가사). 변호사 업무량 핵심</a:t>
-                      </a:r>
-                    </a:p>
-                  </a:txBody>
-                  <a:tcPr anchor="ctr"/>
-                </a:tc>
-              </a:tr>
-              <a:tr h="379827">
-                <a:tc>
-                  <a:txBody>
-                    <a:bodyPr/>
-                    <a:lstStyle/>
-                    <a:p>
-                      <a:pPr algn="ctr"/>
-                      <a:r>
-                        <a:rPr sz="1100">
-                          <a:latin typeface="Malgun Gothic"/>
-                        </a:rPr>
-                        <a:t>비송사건</a:t>
-                      </a:r>
-                    </a:p>
-                  </a:txBody>
-                  <a:tcPr anchor="ctr"/>
-                </a:tc>
-                <a:tc>
-                  <a:txBody>
-                    <a:bodyPr/>
-                    <a:lstStyle/>
-                    <a:p>
-                      <a:pPr algn="l"/>
-                      <a:r>
-                        <a:rPr sz="1100">
-                          <a:latin typeface="Malgun Gothic"/>
-                        </a:rPr>
-                        <a:t>등기·공탁 등 분쟁 판단이 아닌 절차 사건 → A2에서 제외</a:t>
-                      </a:r>
-                    </a:p>
-                  </a:txBody>
-                  <a:tcPr anchor="ctr"/>
-                </a:tc>
-              </a:tr>
-              <a:tr h="379827">
-                <a:tc>
-                  <a:txBody>
-                    <a:bodyPr/>
-                    <a:lstStyle/>
-                    <a:p>
-                      <a:pPr algn="ctr"/>
-                      <a:r>
-                        <a:rPr sz="1100">
-                          <a:latin typeface="Malgun Gothic"/>
-                        </a:rPr>
-                        <a:t>개업변호사</a:t>
-                      </a:r>
-                    </a:p>
-                  </a:txBody>
-                  <a:tcPr anchor="ctr"/>
-                </a:tc>
-                <a:tc>
-                  <a:txBody>
-                    <a:bodyPr/>
-                    <a:lstStyle/>
-                    <a:p>
-                      <a:pPr algn="l"/>
-                      <a:r>
-                        <a:rPr sz="1100">
-                          <a:latin typeface="Malgun Gothic"/>
-                        </a:rPr>
-                        <a:t>실제 영업 중인 변호사(휴업·미개업 제외). A1 분자</a:t>
-                      </a:r>
-                    </a:p>
-                  </a:txBody>
-                  <a:tcPr anchor="ctr"/>
-                </a:tc>
-              </a:tr>
-              <a:tr h="379827">
-                <a:tc>
-                  <a:txBody>
-                    <a:bodyPr/>
-                    <a:lstStyle/>
-                    <a:p>
-                      <a:pPr algn="ctr"/>
-                      <a:r>
-                        <a:rPr sz="1100">
-                          <a:latin typeface="Malgun Gothic"/>
-                        </a:rPr>
-                        <a:t>법률구조</a:t>
-                      </a:r>
-                    </a:p>
-                  </a:txBody>
-                  <a:tcPr anchor="ctr"/>
-                </a:tc>
-                <a:tc>
-                  <a:txBody>
-                    <a:bodyPr/>
-                    <a:lstStyle/>
-                    <a:p>
-                      <a:pPr algn="l"/>
-                      <a:r>
-                        <a:rPr sz="1100">
-                          <a:latin typeface="Malgun Gothic"/>
-                        </a:rPr>
-                        <a:t>경제적 약자 대상 무료·저비용 법률 지원(법률구조공단). A3 분자</a:t>
-                      </a:r>
-                    </a:p>
-                  </a:txBody>
-                  <a:tcPr anchor="ctr"/>
-                </a:tc>
-              </a:tr>
-              <a:tr h="379827">
-                <a:tc>
-                  <a:txBody>
-                    <a:bodyPr/>
-                    <a:lstStyle/>
-                    <a:p>
-                      <a:pPr algn="ctr"/>
-                      <a:r>
-                        <a:rPr sz="1100">
-                          <a:latin typeface="Malgun Gothic"/>
-                        </a:rPr>
-                        <a:t>기초생활수급자</a:t>
-                      </a:r>
-                    </a:p>
-                  </a:txBody>
-                  <a:tcPr anchor="ctr"/>
-                </a:tc>
-                <a:tc>
-                  <a:txBody>
-                    <a:bodyPr/>
-                    <a:lstStyle/>
-                    <a:p>
-                      <a:pPr algn="l"/>
-                      <a:r>
-                        <a:rPr sz="1100">
-                          <a:latin typeface="Malgun Gothic"/>
-                        </a:rPr>
-                        <a:t>국민기초생활보장 수급자 = '저소득층' 대리지표(A3 분모)</a:t>
-                      </a:r>
-                    </a:p>
-                  </a:txBody>
-                  <a:tcPr anchor="ctr"/>
-                </a:tc>
-              </a:tr>
-              <a:tr h="379827">
-                <a:tc>
-                  <a:txBody>
-                    <a:bodyPr/>
-                    <a:lstStyle/>
-                    <a:p>
-                      <a:pPr algn="ctr"/>
-                      <a:r>
-                        <a:rPr sz="1100">
-                          <a:latin typeface="Malgun Gothic"/>
-                        </a:rPr>
-                        <a:t>1인당 GRDP</a:t>
-                      </a:r>
-                    </a:p>
-                  </a:txBody>
-                  <a:tcPr anchor="ctr"/>
-                </a:tc>
-                <a:tc>
-                  <a:txBody>
-                    <a:bodyPr/>
-                    <a:lstStyle/>
-                    <a:p>
-                      <a:pPr algn="l"/>
-                      <a:r>
-                        <a:rPr sz="1100">
-                          <a:latin typeface="Malgun Gothic"/>
-                        </a:rPr>
-                        <a:t>지역내총생산 ÷ 인구. 지역 소득수준(H3 변수)</a:t>
-                      </a:r>
-                    </a:p>
-                  </a:txBody>
-                  <a:tcPr anchor="ctr"/>
-                </a:tc>
-              </a:tr>
-              <a:tr h="379827">
-                <a:tc>
-                  <a:txBody>
-                    <a:bodyPr/>
-                    <a:lstStyle/>
-                    <a:p>
-                      <a:pPr algn="ctr"/>
-                      <a:r>
-                        <a:rPr sz="1100">
-                          <a:latin typeface="Malgun Gothic"/>
-                        </a:rPr>
-                        <a:t>Min-Max 정규화</a:t>
-                      </a:r>
-                    </a:p>
-                  </a:txBody>
-                  <a:tcPr anchor="ctr"/>
-                </a:tc>
-                <a:tc>
-                  <a:txBody>
-                    <a:bodyPr/>
-                    <a:lstStyle/>
-                    <a:p>
-                      <a:pPr algn="l"/>
-                      <a:r>
-                        <a:rPr sz="1100">
-                          <a:latin typeface="Malgun Gothic"/>
-                        </a:rPr>
-                        <a:t>값을 전국 최소0~최대1로 변환해 단위 다른 지표를 합산 가능하게</a:t>
-                      </a:r>
-                    </a:p>
-                  </a:txBody>
-                  <a:tcPr anchor="ctr"/>
-                </a:tc>
-              </a:tr>
-              <a:tr h="379827">
-                <a:tc>
-                  <a:txBody>
-                    <a:bodyPr/>
-                    <a:lstStyle/>
-                    <a:p>
-                      <a:pPr algn="ctr"/>
-                      <a:r>
-                        <a:rPr sz="1100">
-                          <a:latin typeface="Malgun Gothic"/>
-                        </a:rPr>
-                        <a:t>엔트로피 가중치</a:t>
-                      </a:r>
-                    </a:p>
-                  </a:txBody>
-                  <a:tcPr anchor="ctr"/>
-                </a:tc>
-                <a:tc>
-                  <a:txBody>
-                    <a:bodyPr/>
-                    <a:lstStyle/>
-                    <a:p>
-                      <a:pPr algn="l"/>
-                      <a:r>
-                        <a:rPr sz="1100">
-                          <a:latin typeface="Malgun Gothic"/>
-                        </a:rPr>
-                        <a:t>지역 간 차이(정보량)가 큰 지표에 큰 가중치를 주는 객관적 가중법</a:t>
-                      </a:r>
-                    </a:p>
-                  </a:txBody>
-                  <a:tcPr anchor="ctr"/>
-                </a:tc>
-              </a:tr>
-              <a:tr h="379827">
-                <a:tc>
-                  <a:txBody>
-                    <a:bodyPr/>
-                    <a:lstStyle/>
-                    <a:p>
-                      <a:pPr algn="ctr"/>
-                      <a:r>
-                        <a:rPr sz="1100">
-                          <a:latin typeface="Malgun Gothic"/>
-                        </a:rPr>
-                        <a:t>PCA</a:t>
-                      </a:r>
-                    </a:p>
-                  </a:txBody>
-                  <a:tcPr anchor="ctr"/>
-                </a:tc>
-                <a:tc>
-                  <a:txBody>
-                    <a:bodyPr/>
-                    <a:lstStyle/>
-                    <a:p>
-                      <a:pPr algn="l"/>
-                      <a:r>
-                        <a:rPr sz="1100">
-                          <a:latin typeface="Malgun Gothic"/>
-                        </a:rPr>
-                        <a:t>여러 지표의 공통 변동 축(주성분)을 찾아 가중치로 활용</a:t>
-                      </a:r>
-                    </a:p>
-                  </a:txBody>
-                  <a:tcPr anchor="ctr"/>
-                </a:tc>
-              </a:tr>
-              <a:tr h="379827">
-                <a:tc>
-                  <a:txBody>
-                    <a:bodyPr/>
-                    <a:lstStyle/>
-                    <a:p>
-                      <a:pPr algn="ctr"/>
-                      <a:r>
-                        <a:rPr sz="1100">
-                          <a:latin typeface="Malgun Gothic"/>
-                        </a:rPr>
-                        <a:t>HHI(허핀달지수)</a:t>
-                      </a:r>
-                    </a:p>
-                  </a:txBody>
-                  <a:tcPr anchor="ctr"/>
-                </a:tc>
-                <a:tc>
-                  <a:txBody>
-                    <a:bodyPr/>
-                    <a:lstStyle/>
-                    <a:p>
-                      <a:pPr algn="l"/>
-                      <a:r>
-                        <a:rPr sz="1100">
-                          <a:latin typeface="Malgun Gothic"/>
-                        </a:rPr>
-                        <a:t>점유율 제곱의 합(0~1). 클수록 특정 지역 집중 심화</a:t>
-                      </a:r>
-                    </a:p>
-                  </a:txBody>
-                  <a:tcPr anchor="ctr"/>
-                </a:tc>
-              </a:tr>
-              <a:tr h="379827">
-                <a:tc>
-                  <a:txBody>
-                    <a:bodyPr/>
-                    <a:lstStyle/>
-                    <a:p>
-                      <a:pPr algn="ctr"/>
-                      <a:r>
-                        <a:rPr sz="1100">
-                          <a:latin typeface="Malgun Gothic"/>
-                        </a:rPr>
-                        <a:t>변동계수(CV)</a:t>
-                      </a:r>
-                    </a:p>
-                  </a:txBody>
-                  <a:tcPr anchor="ctr"/>
-                </a:tc>
-                <a:tc>
-                  <a:txBody>
-                    <a:bodyPr/>
-                    <a:lstStyle/>
-                    <a:p>
-                      <a:pPr algn="l"/>
-                      <a:r>
-                        <a:rPr sz="1100">
-                          <a:latin typeface="Malgun Gothic"/>
-                        </a:rPr>
-                        <a:t>표준편차 ÷ 평균. 단위 무관한 상대적 격차 크기</a:t>
-                      </a:r>
-                    </a:p>
-                  </a:txBody>
-                  <a:tcPr anchor="ctr"/>
-                </a:tc>
-              </a:tr>
-              <a:tr h="379836">
-                <a:tc>
-                  <a:txBody>
-                    <a:bodyPr/>
-                    <a:lstStyle/>
-                    <a:p>
-                      <a:pPr algn="ctr"/>
-                      <a:r>
-                        <a:rPr sz="1100">
-                          <a:latin typeface="Malgun Gothic"/>
-                        </a:rPr>
-                        <a:t>K-means / Silhouette</a:t>
-                      </a:r>
-                    </a:p>
-                  </a:txBody>
-                  <a:tcPr anchor="ctr"/>
-                </a:tc>
-                <a:tc>
-                  <a:txBody>
-                    <a:bodyPr/>
-                    <a:lstStyle/>
-                    <a:p>
-                      <a:pPr algn="l"/>
-                      <a:r>
-                        <a:rPr sz="1100">
-                          <a:latin typeface="Malgun Gothic"/>
-                        </a:rPr>
-                        <a:t>거리 기반 군집화 / 군집 분리도(최적 K 결정)</a:t>
-                      </a:r>
-                    </a:p>
-                  </a:txBody>
-                  <a:tcPr anchor="ctr"/>
-                </a:tc>
-              </a:tr>
-            </a:tbl>
-          </a:graphicData>
-        </a:graphic>
-      </p:graphicFrame>
+        </p:nvSpPr>
+        <p:spPr>
+          <a:xfrm>
+            <a:off x="640080" y="1554480"/>
+            <a:ext cx="10972800" cy="4937760"/>
+          </a:xfrm>
+          <a:prstGeom prst="rect">
+            <a:avLst/>
+          </a:prstGeom>
+          <a:noFill/>
+        </p:spPr>
+        <p:txBody>
+          <a:bodyPr wrap="square">
+            <a:spAutoFit/>
+          </a:bodyPr>
+          <a:lstStyle/>
+          <a:p>
+            <a:pPr>
+              <a:spcAft>
+                <a:spcPts val="900"/>
+              </a:spcAft>
+            </a:pPr>
+            <a:r>
+              <a:rPr sz="1800">
+                <a:solidFill>
+                  <a:srgbClr val="222222"/>
+                </a:solidFill>
+                <a:latin typeface="Malgun Gothic"/>
+              </a:rPr>
+              <a:t>• 왜 17시도가 아닌 두 단위(13권역/10도단위)인가</a:t>
+            </a:r>
+          </a:p>
+          <a:p>
+            <a:pPr lvl="1">
+              <a:spcAft>
+                <a:spcPts val="900"/>
+              </a:spcAft>
+            </a:pPr>
+            <a:r>
+              <a:rPr sz="1500">
+                <a:solidFill>
+                  <a:srgbClr val="222222"/>
+                </a:solidFill>
+                <a:latin typeface="Malgun Gothic"/>
+              </a:rPr>
+              <a:t>– 변호사(변협 14지방회)·법률구조(공단 10도단위)가 광역시를 도에 묶어 제공 → 시도 분리 불가</a:t>
+            </a:r>
+          </a:p>
+          <a:p>
+            <a:pPr lvl="1">
+              <a:spcAft>
+                <a:spcPts val="900"/>
+              </a:spcAft>
+            </a:pPr>
+            <a:r>
+              <a:rPr sz="1500">
+                <a:solidFill>
+                  <a:srgbClr val="222222"/>
+                </a:solidFill>
+                <a:latin typeface="Malgun Gothic"/>
+              </a:rPr>
+              <a:t>– 두 단위 결론이 일치(서울 1위·강원 최하)하면 단위 선택에 무관함을 입증</a:t>
+            </a:r>
+          </a:p>
+          <a:p>
+            <a:pPr>
+              <a:spcAft>
+                <a:spcPts val="900"/>
+              </a:spcAft>
+            </a:pPr>
+            <a:r>
+              <a:rPr sz="1800">
+                <a:solidFill>
+                  <a:srgbClr val="222222"/>
+                </a:solidFill>
+                <a:latin typeface="Malgun Gothic"/>
+              </a:rPr>
+              <a:t>• 왜 '본안사건'인가 (A2)</a:t>
+            </a:r>
+          </a:p>
+          <a:p>
+            <a:pPr lvl="1">
+              <a:spcAft>
+                <a:spcPts val="900"/>
+              </a:spcAft>
+            </a:pPr>
+            <a:r>
+              <a:rPr sz="1500">
+                <a:solidFill>
+                  <a:srgbClr val="222222"/>
+                </a:solidFill>
+                <a:latin typeface="Malgun Gothic"/>
+              </a:rPr>
+              <a:t>– 전체 법원사건의 약 60%가 등기·공탁(비송) → 변호사 업무량 왜곡 → 실질 소송(본안)만 사용</a:t>
+            </a:r>
+          </a:p>
+          <a:p>
+            <a:pPr>
+              <a:spcAft>
+                <a:spcPts val="900"/>
+              </a:spcAft>
+            </a:pPr>
+            <a:r>
+              <a:rPr sz="1800">
+                <a:solidFill>
+                  <a:srgbClr val="222222"/>
+                </a:solidFill>
+                <a:latin typeface="Malgun Gothic"/>
+              </a:rPr>
+              <a:t>• 왜 가중치 3종(균등·엔트로피·PCA)인가</a:t>
+            </a:r>
+          </a:p>
+          <a:p>
+            <a:pPr lvl="1">
+              <a:spcAft>
+                <a:spcPts val="900"/>
+              </a:spcAft>
+            </a:pPr>
+            <a:r>
+              <a:rPr sz="1500">
+                <a:solidFill>
+                  <a:srgbClr val="222222"/>
+                </a:solidFill>
+                <a:latin typeface="Malgun Gothic"/>
+              </a:rPr>
+              <a:t>– 가중치 자의성 방지 — 어떤 방식이든 서울 1위·강원 최하(강건성) 확인</a:t>
+            </a:r>
+          </a:p>
+          <a:p>
+            <a:pPr>
+              <a:spcAft>
+                <a:spcPts val="900"/>
+              </a:spcAft>
+            </a:pPr>
+            <a:r>
+              <a:rPr sz="1800">
+                <a:solidFill>
+                  <a:srgbClr val="222222"/>
+                </a:solidFill>
+                <a:latin typeface="Malgun Gothic"/>
+              </a:rPr>
+              <a:t>• 왜 정규화·방향 보정인가</a:t>
+            </a:r>
+          </a:p>
+          <a:p>
+            <a:pPr lvl="1">
+              <a:spcAft>
+                <a:spcPts val="900"/>
+              </a:spcAft>
+            </a:pPr>
+            <a:r>
+              <a:rPr sz="1500">
+                <a:solidFill>
+                  <a:srgbClr val="222222"/>
+                </a:solidFill>
+                <a:latin typeface="Malgun Gothic"/>
+              </a:rPr>
+              <a:t>– 단위 상이(명·건·비율) → 0~1 통일, A2는 1−값으로 '클수록 좋음' 일치</a:t>
+            </a:r>
+          </a:p>
+        </p:txBody>
+      </p:sp>
     </p:spTree>
   </p:cSld>
   <p:clrMapOvr>
@@ -7389,7 +7265,7 @@
 </p:sld>
 </file>
 
-<file path=ppt/slides/slide3.xml><?xml version="1.0" encoding="utf-8"?>
+<file path=ppt/slides/slide21.xml><?xml version="1.0" encoding="utf-8"?>
 <p:sld xmlns:a="http://schemas.openxmlformats.org/drawingml/2006/main" xmlns:p="http://schemas.openxmlformats.org/presentationml/2006/main" xmlns:r="http://schemas.openxmlformats.org/officeDocument/2006/relationships">
   <p:cSld>
     <p:spTree>
@@ -7428,7 +7304,7 @@
                 </a:solidFill>
                 <a:latin typeface="Malgun Gothic"/>
               </a:rPr>
-              <a:t>핵심 요약 — 한 눈에 보기</a:t>
+              <a:t>부록 B — 용어 정리</a:t>
             </a:r>
           </a:p>
         </p:txBody>
@@ -7485,8 +7361,8 @@
           <p:nvPr/>
         </p:nvGraphicFramePr>
         <p:xfrm>
-          <a:off x="640080" y="1645920"/>
-          <a:ext cx="10881360" cy="4206240"/>
+          <a:off x="548640" y="1508760"/>
+          <a:ext cx="11064240" cy="4937760"/>
         </p:xfrm>
         <a:graphic>
           <a:graphicData uri="http://schemas.openxmlformats.org/drawingml/2006/table">
@@ -7495,24 +7371,24 @@
                 <a:tableStyleId>{5C22544A-7EE6-4342-B048-85BDC9FD1C3A}</a:tableStyleId>
               </a:tblPr>
               <a:tblGrid>
-                <a:gridCol w="5440680"/>
-                <a:gridCol w="5440680"/>
+                <a:gridCol w="5532120"/>
+                <a:gridCol w="5532120"/>
               </a:tblGrid>
-              <a:tr h="701040">
-                <a:tc>
-                  <a:txBody>
-                    <a:bodyPr/>
-                    <a:lstStyle/>
-                    <a:p>
-                      <a:pPr algn="ctr"/>
-                      <a:r>
-                        <a:rPr sz="1500" b="1">
+              <a:tr h="379827">
+                <a:tc>
+                  <a:txBody>
+                    <a:bodyPr/>
+                    <a:lstStyle/>
+                    <a:p>
+                      <a:pPr algn="ctr"/>
+                      <a:r>
+                        <a:rPr sz="1100" b="1">
                           <a:solidFill>
                             <a:srgbClr val="FFFFFF"/>
                           </a:solidFill>
                           <a:latin typeface="Malgun Gothic"/>
                         </a:rPr>
-                        <a:t>항목</a:t>
+                        <a:t>용어</a:t>
                       </a:r>
                     </a:p>
                   </a:txBody>
@@ -7527,15 +7403,15 @@
                     <a:bodyPr/>
                     <a:lstStyle/>
                     <a:p>
-                      <a:pPr algn="ctr"/>
-                      <a:r>
-                        <a:rPr sz="1500" b="1">
+                      <a:pPr algn="l"/>
+                      <a:r>
+                        <a:rPr sz="1100" b="1">
                           <a:solidFill>
                             <a:srgbClr val="FFFFFF"/>
                           </a:solidFill>
                           <a:latin typeface="Malgun Gothic"/>
                         </a:rPr>
-                        <a:t>내용</a:t>
+                        <a:t>뜻</a:t>
                       </a:r>
                     </a:p>
                   </a:txBody>
@@ -7546,170 +7422,408 @@
                   </a:tcPr>
                 </a:tc>
               </a:tr>
-              <a:tr h="701040">
-                <a:tc>
-                  <a:txBody>
-                    <a:bodyPr/>
-                    <a:lstStyle/>
-                    <a:p>
-                      <a:pPr algn="ctr"/>
-                      <a:r>
-                        <a:rPr sz="1500">
-                          <a:latin typeface="Malgun Gothic"/>
-                        </a:rPr>
-                        <a:t>문제</a:t>
-                      </a:r>
-                    </a:p>
-                  </a:txBody>
-                  <a:tcPr anchor="ctr"/>
-                </a:tc>
-                <a:tc>
-                  <a:txBody>
-                    <a:bodyPr/>
-                    <a:lstStyle/>
-                    <a:p>
-                      <a:pPr algn="ctr"/>
-                      <a:r>
-                        <a:rPr sz="1500">
-                          <a:latin typeface="Malgun Gothic"/>
-                        </a:rPr>
-                        <a:t>변호사·법원·법률구조 자원의 지역별 접근성 불균형 정량화</a:t>
+              <a:tr h="379827">
+                <a:tc>
+                  <a:txBody>
+                    <a:bodyPr/>
+                    <a:lstStyle/>
+                    <a:p>
+                      <a:pPr algn="ctr"/>
+                      <a:r>
+                        <a:rPr sz="1100">
+                          <a:latin typeface="Malgun Gothic"/>
+                        </a:rPr>
+                        <a:t>본안사건</a:t>
+                      </a:r>
+                    </a:p>
+                  </a:txBody>
+                  <a:tcPr anchor="ctr"/>
+                </a:tc>
+                <a:tc>
+                  <a:txBody>
+                    <a:bodyPr/>
+                    <a:lstStyle/>
+                    <a:p>
+                      <a:pPr algn="l"/>
+                      <a:r>
+                        <a:rPr sz="1100">
+                          <a:latin typeface="Malgun Gothic"/>
+                        </a:rPr>
+                        <a:t>권리·의무를 본격 판단하는 소송(민사본안·형사공판·가사). 변호사 업무량 핵심</a:t>
                       </a:r>
                     </a:p>
                   </a:txBody>
                   <a:tcPr anchor="ctr"/>
                 </a:tc>
               </a:tr>
-              <a:tr h="701040">
-                <a:tc>
-                  <a:txBody>
-                    <a:bodyPr/>
-                    <a:lstStyle/>
-                    <a:p>
-                      <a:pPr algn="ctr"/>
-                      <a:r>
-                        <a:rPr sz="1500">
-                          <a:latin typeface="Malgun Gothic"/>
-                        </a:rPr>
-                        <a:t>방법</a:t>
-                      </a:r>
-                    </a:p>
-                  </a:txBody>
-                  <a:tcPr anchor="ctr"/>
-                </a:tc>
-                <a:tc>
-                  <a:txBody>
-                    <a:bodyPr/>
-                    <a:lstStyle/>
-                    <a:p>
-                      <a:pPr algn="ctr"/>
-                      <a:r>
-                        <a:rPr sz="1500">
-                          <a:latin typeface="Malgun Gothic"/>
-                        </a:rPr>
-                        <a:t>3개 차원(A1 변호사·A2 사건부담·A3 취약계층) → 단일 지수 LLAI(0~100)</a:t>
+              <a:tr h="379827">
+                <a:tc>
+                  <a:txBody>
+                    <a:bodyPr/>
+                    <a:lstStyle/>
+                    <a:p>
+                      <a:pPr algn="ctr"/>
+                      <a:r>
+                        <a:rPr sz="1100">
+                          <a:latin typeface="Malgun Gothic"/>
+                        </a:rPr>
+                        <a:t>비송사건</a:t>
+                      </a:r>
+                    </a:p>
+                  </a:txBody>
+                  <a:tcPr anchor="ctr"/>
+                </a:tc>
+                <a:tc>
+                  <a:txBody>
+                    <a:bodyPr/>
+                    <a:lstStyle/>
+                    <a:p>
+                      <a:pPr algn="l"/>
+                      <a:r>
+                        <a:rPr sz="1100">
+                          <a:latin typeface="Malgun Gothic"/>
+                        </a:rPr>
+                        <a:t>등기·공탁 등 분쟁 판단이 아닌 절차 사건 → A2에서 제외</a:t>
                       </a:r>
                     </a:p>
                   </a:txBody>
                   <a:tcPr anchor="ctr"/>
                 </a:tc>
               </a:tr>
-              <a:tr h="701040">
-                <a:tc>
-                  <a:txBody>
-                    <a:bodyPr/>
-                    <a:lstStyle/>
-                    <a:p>
-                      <a:pPr algn="ctr"/>
-                      <a:r>
-                        <a:rPr sz="1500">
-                          <a:latin typeface="Malgun Gothic"/>
-                        </a:rPr>
-                        <a:t>데이터</a:t>
-                      </a:r>
-                    </a:p>
-                  </a:txBody>
-                  <a:tcPr anchor="ctr"/>
-                </a:tc>
-                <a:tc>
-                  <a:txBody>
-                    <a:bodyPr/>
-                    <a:lstStyle/>
-                    <a:p>
-                      <a:pPr algn="ctr"/>
-                      <a:r>
-                        <a:rPr sz="1500">
-                          <a:latin typeface="Malgun Gothic"/>
-                        </a:rPr>
-                        <a:t>변협·사법연감·공단·KOSIS / 13권역·10도단위 / 기준 2024</a:t>
+              <a:tr h="379827">
+                <a:tc>
+                  <a:txBody>
+                    <a:bodyPr/>
+                    <a:lstStyle/>
+                    <a:p>
+                      <a:pPr algn="ctr"/>
+                      <a:r>
+                        <a:rPr sz="1100">
+                          <a:latin typeface="Malgun Gothic"/>
+                        </a:rPr>
+                        <a:t>개업변호사</a:t>
+                      </a:r>
+                    </a:p>
+                  </a:txBody>
+                  <a:tcPr anchor="ctr"/>
+                </a:tc>
+                <a:tc>
+                  <a:txBody>
+                    <a:bodyPr/>
+                    <a:lstStyle/>
+                    <a:p>
+                      <a:pPr algn="l"/>
+                      <a:r>
+                        <a:rPr sz="1100">
+                          <a:latin typeface="Malgun Gothic"/>
+                        </a:rPr>
+                        <a:t>실제 영업 중인 변호사(휴업·미개업 제외). A1 분자</a:t>
                       </a:r>
                     </a:p>
                   </a:txBody>
                   <a:tcPr anchor="ctr"/>
                 </a:tc>
               </a:tr>
-              <a:tr h="701040">
-                <a:tc>
-                  <a:txBody>
-                    <a:bodyPr/>
-                    <a:lstStyle/>
-                    <a:p>
-                      <a:pPr algn="ctr"/>
-                      <a:r>
-                        <a:rPr sz="1500">
-                          <a:latin typeface="Malgun Gothic"/>
-                        </a:rPr>
-                        <a:t>핵심 발견</a:t>
-                      </a:r>
-                    </a:p>
-                  </a:txBody>
-                  <a:tcPr anchor="ctr"/>
-                </a:tc>
-                <a:tc>
-                  <a:txBody>
-                    <a:bodyPr/>
-                    <a:lstStyle/>
-                    <a:p>
-                      <a:pPr algn="ctr"/>
-                      <a:r>
-                        <a:rPr sz="1500">
-                          <a:latin typeface="Malgun Gothic"/>
-                        </a:rPr>
-                        <a:t>① 서울 일극(91 vs 2~24) ② 변호사↑→부담↓(r=−0.85) ③ 수도권우위=서울단독 ④ 변호사 3.4배↑에도 서울집중 71%→76%</a:t>
+              <a:tr h="379827">
+                <a:tc>
+                  <a:txBody>
+                    <a:bodyPr/>
+                    <a:lstStyle/>
+                    <a:p>
+                      <a:pPr algn="ctr"/>
+                      <a:r>
+                        <a:rPr sz="1100">
+                          <a:latin typeface="Malgun Gothic"/>
+                        </a:rPr>
+                        <a:t>법률구조</a:t>
+                      </a:r>
+                    </a:p>
+                  </a:txBody>
+                  <a:tcPr anchor="ctr"/>
+                </a:tc>
+                <a:tc>
+                  <a:txBody>
+                    <a:bodyPr/>
+                    <a:lstStyle/>
+                    <a:p>
+                      <a:pPr algn="l"/>
+                      <a:r>
+                        <a:rPr sz="1100">
+                          <a:latin typeface="Malgun Gothic"/>
+                        </a:rPr>
+                        <a:t>경제적 약자 대상 무료·저비용 법률 지원(법률구조공단). A3 분자</a:t>
                       </a:r>
                     </a:p>
                   </a:txBody>
                   <a:tcPr anchor="ctr"/>
                 </a:tc>
               </a:tr>
-              <a:tr h="701040">
-                <a:tc>
-                  <a:txBody>
-                    <a:bodyPr/>
-                    <a:lstStyle/>
-                    <a:p>
-                      <a:pPr algn="ctr"/>
-                      <a:r>
-                        <a:rPr sz="1500">
-                          <a:latin typeface="Malgun Gothic"/>
-                        </a:rPr>
-                        <a:t>결론</a:t>
-                      </a:r>
-                    </a:p>
-                  </a:txBody>
-                  <a:tcPr anchor="ctr"/>
-                </a:tc>
-                <a:tc>
-                  <a:txBody>
-                    <a:bodyPr/>
-                    <a:lstStyle/>
-                    <a:p>
-                      <a:pPr algn="ctr"/>
-                      <a:r>
-                        <a:rPr sz="1500">
-                          <a:latin typeface="Malgun Gothic"/>
-                        </a:rPr>
-                        <a:t>인구 대비·사건부담이 접근성 좌우 / 양적 팽창만으론 격차 해소 안 됨</a:t>
+              <a:tr h="379827">
+                <a:tc>
+                  <a:txBody>
+                    <a:bodyPr/>
+                    <a:lstStyle/>
+                    <a:p>
+                      <a:pPr algn="ctr"/>
+                      <a:r>
+                        <a:rPr sz="1100">
+                          <a:latin typeface="Malgun Gothic"/>
+                        </a:rPr>
+                        <a:t>기초생활수급자</a:t>
+                      </a:r>
+                    </a:p>
+                  </a:txBody>
+                  <a:tcPr anchor="ctr"/>
+                </a:tc>
+                <a:tc>
+                  <a:txBody>
+                    <a:bodyPr/>
+                    <a:lstStyle/>
+                    <a:p>
+                      <a:pPr algn="l"/>
+                      <a:r>
+                        <a:rPr sz="1100">
+                          <a:latin typeface="Malgun Gothic"/>
+                        </a:rPr>
+                        <a:t>국민기초생활보장 수급자 = '저소득층' 대리지표(A3 분모)</a:t>
+                      </a:r>
+                    </a:p>
+                  </a:txBody>
+                  <a:tcPr anchor="ctr"/>
+                </a:tc>
+              </a:tr>
+              <a:tr h="379827">
+                <a:tc>
+                  <a:txBody>
+                    <a:bodyPr/>
+                    <a:lstStyle/>
+                    <a:p>
+                      <a:pPr algn="ctr"/>
+                      <a:r>
+                        <a:rPr sz="1100">
+                          <a:latin typeface="Malgun Gothic"/>
+                        </a:rPr>
+                        <a:t>1인당 GRDP</a:t>
+                      </a:r>
+                    </a:p>
+                  </a:txBody>
+                  <a:tcPr anchor="ctr"/>
+                </a:tc>
+                <a:tc>
+                  <a:txBody>
+                    <a:bodyPr/>
+                    <a:lstStyle/>
+                    <a:p>
+                      <a:pPr algn="l"/>
+                      <a:r>
+                        <a:rPr sz="1100">
+                          <a:latin typeface="Malgun Gothic"/>
+                        </a:rPr>
+                        <a:t>지역내총생산 ÷ 인구. 지역 소득수준(H3 변수)</a:t>
+                      </a:r>
+                    </a:p>
+                  </a:txBody>
+                  <a:tcPr anchor="ctr"/>
+                </a:tc>
+              </a:tr>
+              <a:tr h="379827">
+                <a:tc>
+                  <a:txBody>
+                    <a:bodyPr/>
+                    <a:lstStyle/>
+                    <a:p>
+                      <a:pPr algn="ctr"/>
+                      <a:r>
+                        <a:rPr sz="1100">
+                          <a:latin typeface="Malgun Gothic"/>
+                        </a:rPr>
+                        <a:t>Min-Max 정규화</a:t>
+                      </a:r>
+                    </a:p>
+                  </a:txBody>
+                  <a:tcPr anchor="ctr"/>
+                </a:tc>
+                <a:tc>
+                  <a:txBody>
+                    <a:bodyPr/>
+                    <a:lstStyle/>
+                    <a:p>
+                      <a:pPr algn="l"/>
+                      <a:r>
+                        <a:rPr sz="1100">
+                          <a:latin typeface="Malgun Gothic"/>
+                        </a:rPr>
+                        <a:t>값을 전국 최소0~최대1로 변환해 단위 다른 지표를 합산 가능하게</a:t>
+                      </a:r>
+                    </a:p>
+                  </a:txBody>
+                  <a:tcPr anchor="ctr"/>
+                </a:tc>
+              </a:tr>
+              <a:tr h="379827">
+                <a:tc>
+                  <a:txBody>
+                    <a:bodyPr/>
+                    <a:lstStyle/>
+                    <a:p>
+                      <a:pPr algn="ctr"/>
+                      <a:r>
+                        <a:rPr sz="1100">
+                          <a:latin typeface="Malgun Gothic"/>
+                        </a:rPr>
+                        <a:t>엔트로피 가중치</a:t>
+                      </a:r>
+                    </a:p>
+                  </a:txBody>
+                  <a:tcPr anchor="ctr"/>
+                </a:tc>
+                <a:tc>
+                  <a:txBody>
+                    <a:bodyPr/>
+                    <a:lstStyle/>
+                    <a:p>
+                      <a:pPr algn="l"/>
+                      <a:r>
+                        <a:rPr sz="1100">
+                          <a:latin typeface="Malgun Gothic"/>
+                        </a:rPr>
+                        <a:t>지역 간 차이(정보량)가 큰 지표에 큰 가중치를 주는 객관적 가중법</a:t>
+                      </a:r>
+                    </a:p>
+                  </a:txBody>
+                  <a:tcPr anchor="ctr"/>
+                </a:tc>
+              </a:tr>
+              <a:tr h="379827">
+                <a:tc>
+                  <a:txBody>
+                    <a:bodyPr/>
+                    <a:lstStyle/>
+                    <a:p>
+                      <a:pPr algn="ctr"/>
+                      <a:r>
+                        <a:rPr sz="1100">
+                          <a:latin typeface="Malgun Gothic"/>
+                        </a:rPr>
+                        <a:t>PCA</a:t>
+                      </a:r>
+                    </a:p>
+                  </a:txBody>
+                  <a:tcPr anchor="ctr"/>
+                </a:tc>
+                <a:tc>
+                  <a:txBody>
+                    <a:bodyPr/>
+                    <a:lstStyle/>
+                    <a:p>
+                      <a:pPr algn="l"/>
+                      <a:r>
+                        <a:rPr sz="1100">
+                          <a:latin typeface="Malgun Gothic"/>
+                        </a:rPr>
+                        <a:t>여러 지표의 공통 변동 축(주성분)을 찾아 가중치로 활용</a:t>
+                      </a:r>
+                    </a:p>
+                  </a:txBody>
+                  <a:tcPr anchor="ctr"/>
+                </a:tc>
+              </a:tr>
+              <a:tr h="379827">
+                <a:tc>
+                  <a:txBody>
+                    <a:bodyPr/>
+                    <a:lstStyle/>
+                    <a:p>
+                      <a:pPr algn="ctr"/>
+                      <a:r>
+                        <a:rPr sz="1100">
+                          <a:latin typeface="Malgun Gothic"/>
+                        </a:rPr>
+                        <a:t>HHI(허핀달지수)</a:t>
+                      </a:r>
+                    </a:p>
+                  </a:txBody>
+                  <a:tcPr anchor="ctr"/>
+                </a:tc>
+                <a:tc>
+                  <a:txBody>
+                    <a:bodyPr/>
+                    <a:lstStyle/>
+                    <a:p>
+                      <a:pPr algn="l"/>
+                      <a:r>
+                        <a:rPr sz="1100">
+                          <a:latin typeface="Malgun Gothic"/>
+                        </a:rPr>
+                        <a:t>점유율 제곱의 합(0~1). 클수록 특정 지역 집중 심화</a:t>
+                      </a:r>
+                    </a:p>
+                  </a:txBody>
+                  <a:tcPr anchor="ctr"/>
+                </a:tc>
+              </a:tr>
+              <a:tr h="379827">
+                <a:tc>
+                  <a:txBody>
+                    <a:bodyPr/>
+                    <a:lstStyle/>
+                    <a:p>
+                      <a:pPr algn="ctr"/>
+                      <a:r>
+                        <a:rPr sz="1100">
+                          <a:latin typeface="Malgun Gothic"/>
+                        </a:rPr>
+                        <a:t>변동계수(CV)</a:t>
+                      </a:r>
+                    </a:p>
+                  </a:txBody>
+                  <a:tcPr anchor="ctr"/>
+                </a:tc>
+                <a:tc>
+                  <a:txBody>
+                    <a:bodyPr/>
+                    <a:lstStyle/>
+                    <a:p>
+                      <a:pPr algn="l"/>
+                      <a:r>
+                        <a:rPr sz="1100">
+                          <a:latin typeface="Malgun Gothic"/>
+                        </a:rPr>
+                        <a:t>표준편차 ÷ 평균. 단위 무관한 상대적 격차 크기</a:t>
+                      </a:r>
+                    </a:p>
+                  </a:txBody>
+                  <a:tcPr anchor="ctr"/>
+                </a:tc>
+              </a:tr>
+              <a:tr h="379836">
+                <a:tc>
+                  <a:txBody>
+                    <a:bodyPr/>
+                    <a:lstStyle/>
+                    <a:p>
+                      <a:pPr algn="ctr"/>
+                      <a:r>
+                        <a:rPr sz="1100">
+                          <a:latin typeface="Malgun Gothic"/>
+                        </a:rPr>
+                        <a:t>K-means / Silhouette</a:t>
+                      </a:r>
+                    </a:p>
+                  </a:txBody>
+                  <a:tcPr anchor="ctr"/>
+                </a:tc>
+                <a:tc>
+                  <a:txBody>
+                    <a:bodyPr/>
+                    <a:lstStyle/>
+                    <a:p>
+                      <a:pPr algn="l"/>
+                      <a:r>
+                        <a:rPr sz="1100">
+                          <a:latin typeface="Malgun Gothic"/>
+                        </a:rPr>
+                        <a:t>거리 기반 군집화 / 군집 분리도(최적 K 결정)</a:t>
                       </a:r>
                     </a:p>
                   </a:txBody>
@@ -7720,6 +7834,769 @@
           </a:graphicData>
         </a:graphic>
       </p:graphicFrame>
+    </p:spTree>
+  </p:cSld>
+  <p:clrMapOvr>
+    <a:masterClrMapping/>
+  </p:clrMapOvr>
+</p:sld>
+</file>
+
+<file path=ppt/slides/slide22.xml><?xml version="1.0" encoding="utf-8"?>
+<p:sld xmlns:a="http://schemas.openxmlformats.org/drawingml/2006/main" xmlns:p="http://schemas.openxmlformats.org/presentationml/2006/main" xmlns:r="http://schemas.openxmlformats.org/officeDocument/2006/relationships">
+  <p:cSld>
+    <p:spTree>
+      <p:nvGrpSpPr>
+        <p:cNvPr id="1" name=""/>
+        <p:cNvGrpSpPr/>
+        <p:nvPr/>
+      </p:nvGrpSpPr>
+      <p:grpSpPr/>
+      <p:sp>
+        <p:nvSpPr>
+          <p:cNvPr id="2" name="TextBox 1"/>
+          <p:cNvSpPr txBox="1"/>
+          <p:nvPr/>
+        </p:nvSpPr>
+        <p:spPr>
+          <a:xfrm>
+            <a:off x="731520" y="2377440"/>
+            <a:ext cx="10698480" cy="1828800"/>
+          </a:xfrm>
+          <a:prstGeom prst="rect">
+            <a:avLst/>
+          </a:prstGeom>
+          <a:noFill/>
+        </p:spPr>
+        <p:txBody>
+          <a:bodyPr wrap="square">
+            <a:spAutoFit/>
+          </a:bodyPr>
+          <a:lstStyle/>
+          <a:p>
+            <a:r>
+              <a:rPr sz="4000" b="1">
+                <a:solidFill>
+                  <a:srgbClr val="1F3A5F"/>
+                </a:solidFill>
+                <a:latin typeface="Malgun Gothic"/>
+              </a:rPr>
+              <a:t>감사합니다</a:t>
+            </a:r>
+          </a:p>
+          <a:p>
+            <a:r>
+              <a:rPr sz="2000">
+                <a:solidFill>
+                  <a:srgbClr val="C44E52"/>
+                </a:solidFill>
+                <a:latin typeface="Malgun Gothic"/>
+              </a:rPr>
+              <a:t>코드·노트북·인터랙티브 지도: github.com/Allenkeem/llai-project</a:t>
+            </a:r>
+          </a:p>
+        </p:txBody>
+      </p:sp>
+    </p:spTree>
+  </p:cSld>
+  <p:clrMapOvr>
+    <a:masterClrMapping/>
+  </p:clrMapOvr>
+</p:sld>
+</file>
+
+<file path=ppt/slides/slide3.xml><?xml version="1.0" encoding="utf-8"?>
+<p:sld xmlns:a="http://schemas.openxmlformats.org/drawingml/2006/main" xmlns:p="http://schemas.openxmlformats.org/presentationml/2006/main" xmlns:r="http://schemas.openxmlformats.org/officeDocument/2006/relationships">
+  <p:cSld>
+    <p:spTree>
+      <p:nvGrpSpPr>
+        <p:cNvPr id="1" name=""/>
+        <p:cNvGrpSpPr/>
+        <p:nvPr/>
+      </p:nvGrpSpPr>
+      <p:grpSpPr/>
+      <p:sp>
+        <p:nvSpPr>
+          <p:cNvPr id="2" name="TextBox 1"/>
+          <p:cNvSpPr txBox="1"/>
+          <p:nvPr/>
+        </p:nvSpPr>
+        <p:spPr>
+          <a:xfrm>
+            <a:off x="502920" y="320040"/>
+            <a:ext cx="11155680" cy="914400"/>
+          </a:xfrm>
+          <a:prstGeom prst="rect">
+            <a:avLst/>
+          </a:prstGeom>
+          <a:noFill/>
+        </p:spPr>
+        <p:txBody>
+          <a:bodyPr wrap="square">
+            <a:spAutoFit/>
+          </a:bodyPr>
+          <a:lstStyle/>
+          <a:p>
+            <a:r>
+              <a:rPr sz="2800" b="1">
+                <a:solidFill>
+                  <a:srgbClr val="1F3A5F"/>
+                </a:solidFill>
+                <a:latin typeface="Malgun Gothic"/>
+              </a:rPr>
+              <a:t>데이터 규모와 성격 — 얼마나 '빅'데이터인가</a:t>
+            </a:r>
+          </a:p>
+        </p:txBody>
+      </p:sp>
+      <p:sp>
+        <p:nvSpPr>
+          <p:cNvPr id="3" name="Rectangle 2"/>
+          <p:cNvSpPr/>
+          <p:nvPr/>
+        </p:nvSpPr>
+        <p:spPr>
+          <a:xfrm>
+            <a:off x="548640" y="1188720"/>
+            <a:ext cx="11064240" cy="38100"/>
+          </a:xfrm>
+          <a:prstGeom prst="rect">
+            <a:avLst/>
+          </a:prstGeom>
+          <a:solidFill>
+            <a:srgbClr val="C44E52"/>
+          </a:solidFill>
+          <a:ln>
+            <a:noFill/>
+          </a:ln>
+        </p:spPr>
+        <p:style>
+          <a:lnRef idx="1">
+            <a:schemeClr val="accent1"/>
+          </a:lnRef>
+          <a:fillRef idx="3">
+            <a:schemeClr val="accent1"/>
+          </a:fillRef>
+          <a:effectRef idx="2">
+            <a:schemeClr val="accent1"/>
+          </a:effectRef>
+          <a:fontRef idx="minor">
+            <a:schemeClr val="lt1"/>
+          </a:fontRef>
+        </p:style>
+        <p:txBody>
+          <a:bodyPr rtlCol="0" anchor="ctr"/>
+          <a:lstStyle/>
+          <a:p>
+            <a:pPr algn="ctr"/>
+          </a:p>
+        </p:txBody>
+      </p:sp>
+      <p:graphicFrame>
+        <p:nvGraphicFramePr>
+          <p:cNvPr id="4" name="Table 3"/>
+          <p:cNvGraphicFramePr>
+            <a:graphicFrameLocks noGrp="1"/>
+          </p:cNvGraphicFramePr>
+          <p:nvPr/>
+        </p:nvGraphicFramePr>
+        <p:xfrm>
+          <a:off x="548640" y="1417320"/>
+          <a:ext cx="11064240" cy="2560320"/>
+        </p:xfrm>
+        <a:graphic>
+          <a:graphicData uri="http://schemas.openxmlformats.org/drawingml/2006/table">
+            <a:tbl>
+              <a:tblPr firstRow="1" bandRow="1">
+                <a:tableStyleId>{5C22544A-7EE6-4342-B048-85BDC9FD1C3A}</a:tableStyleId>
+              </a:tblPr>
+              <a:tblGrid>
+                <a:gridCol w="2766060"/>
+                <a:gridCol w="2766060"/>
+                <a:gridCol w="2766060"/>
+                <a:gridCol w="2766060"/>
+              </a:tblGrid>
+              <a:tr h="365760">
+                <a:tc>
+                  <a:txBody>
+                    <a:bodyPr/>
+                    <a:lstStyle/>
+                    <a:p>
+                      <a:pPr algn="l"/>
+                      <a:r>
+                        <a:rPr sz="1200" b="1">
+                          <a:solidFill>
+                            <a:srgbClr val="FFFFFF"/>
+                          </a:solidFill>
+                          <a:latin typeface="Malgun Gothic"/>
+                        </a:rPr>
+                        <a:t>출처</a:t>
+                      </a:r>
+                    </a:p>
+                  </a:txBody>
+                  <a:tcPr anchor="ctr">
+                    <a:solidFill>
+                      <a:srgbClr val="1F3A5F"/>
+                    </a:solidFill>
+                  </a:tcPr>
+                </a:tc>
+                <a:tc>
+                  <a:txBody>
+                    <a:bodyPr/>
+                    <a:lstStyle/>
+                    <a:p>
+                      <a:pPr algn="ctr"/>
+                      <a:r>
+                        <a:rPr sz="1200" b="1">
+                          <a:solidFill>
+                            <a:srgbClr val="FFFFFF"/>
+                          </a:solidFill>
+                          <a:latin typeface="Malgun Gothic"/>
+                        </a:rPr>
+                        <a:t>형식</a:t>
+                      </a:r>
+                    </a:p>
+                  </a:txBody>
+                  <a:tcPr anchor="ctr">
+                    <a:solidFill>
+                      <a:srgbClr val="1F3A5F"/>
+                    </a:solidFill>
+                  </a:tcPr>
+                </a:tc>
+                <a:tc>
+                  <a:txBody>
+                    <a:bodyPr/>
+                    <a:lstStyle/>
+                    <a:p>
+                      <a:pPr algn="ctr"/>
+                      <a:r>
+                        <a:rPr sz="1200" b="1">
+                          <a:solidFill>
+                            <a:srgbClr val="FFFFFF"/>
+                          </a:solidFill>
+                          <a:latin typeface="Malgun Gothic"/>
+                        </a:rPr>
+                        <a:t>규모</a:t>
+                      </a:r>
+                    </a:p>
+                  </a:txBody>
+                  <a:tcPr anchor="ctr">
+                    <a:solidFill>
+                      <a:srgbClr val="1F3A5F"/>
+                    </a:solidFill>
+                  </a:tcPr>
+                </a:tc>
+                <a:tc>
+                  <a:txBody>
+                    <a:bodyPr/>
+                    <a:lstStyle/>
+                    <a:p>
+                      <a:pPr algn="ctr"/>
+                      <a:r>
+                        <a:rPr sz="1200" b="1">
+                          <a:solidFill>
+                            <a:srgbClr val="FFFFFF"/>
+                          </a:solidFill>
+                          <a:latin typeface="Malgun Gothic"/>
+                        </a:rPr>
+                        <a:t>기간</a:t>
+                      </a:r>
+                    </a:p>
+                  </a:txBody>
+                  <a:tcPr anchor="ctr">
+                    <a:solidFill>
+                      <a:srgbClr val="1F3A5F"/>
+                    </a:solidFill>
+                  </a:tcPr>
+                </a:tc>
+              </a:tr>
+              <a:tr h="365760">
+                <a:tc>
+                  <a:txBody>
+                    <a:bodyPr/>
+                    <a:lstStyle/>
+                    <a:p>
+                      <a:pPr algn="l"/>
+                      <a:r>
+                        <a:rPr sz="1200">
+                          <a:latin typeface="Malgun Gothic"/>
+                        </a:rPr>
+                        <a:t>사법연감(법원)</a:t>
+                      </a:r>
+                    </a:p>
+                  </a:txBody>
+                  <a:tcPr anchor="ctr"/>
+                </a:tc>
+                <a:tc>
+                  <a:txBody>
+                    <a:bodyPr/>
+                    <a:lstStyle/>
+                    <a:p>
+                      <a:pPr algn="ctr"/>
+                      <a:r>
+                        <a:rPr sz="1200">
+                          <a:latin typeface="Malgun Gothic"/>
+                        </a:rPr>
+                        <a:t>엑셀 19파일·다중시트</a:t>
+                      </a:r>
+                    </a:p>
+                  </a:txBody>
+                  <a:tcPr anchor="ctr"/>
+                </a:tc>
+                <a:tc>
+                  <a:txBody>
+                    <a:bodyPr/>
+                    <a:lstStyle/>
+                    <a:p>
+                      <a:pPr algn="ctr"/>
+                      <a:r>
+                        <a:rPr sz="1200">
+                          <a:latin typeface="Malgun Gothic"/>
+                        </a:rPr>
+                        <a:t>약 140만 셀</a:t>
+                      </a:r>
+                    </a:p>
+                  </a:txBody>
+                  <a:tcPr anchor="ctr"/>
+                </a:tc>
+                <a:tc>
+                  <a:txBody>
+                    <a:bodyPr/>
+                    <a:lstStyle/>
+                    <a:p>
+                      <a:pPr algn="ctr"/>
+                      <a:r>
+                        <a:rPr sz="1200">
+                          <a:latin typeface="Malgun Gothic"/>
+                        </a:rPr>
+                        <a:t>2024</a:t>
+                      </a:r>
+                    </a:p>
+                  </a:txBody>
+                  <a:tcPr anchor="ctr"/>
+                </a:tc>
+              </a:tr>
+              <a:tr h="365760">
+                <a:tc>
+                  <a:txBody>
+                    <a:bodyPr/>
+                    <a:lstStyle/>
+                    <a:p>
+                      <a:pPr algn="l"/>
+                      <a:r>
+                        <a:rPr sz="1200">
+                          <a:latin typeface="Malgun Gothic"/>
+                        </a:rPr>
+                        <a:t>KOSIS 기초수급자</a:t>
+                      </a:r>
+                    </a:p>
+                  </a:txBody>
+                  <a:tcPr anchor="ctr"/>
+                </a:tc>
+                <a:tc>
+                  <a:txBody>
+                    <a:bodyPr/>
+                    <a:lstStyle/>
+                    <a:p>
+                      <a:pPr algn="ctr"/>
+                      <a:r>
+                        <a:rPr sz="1200">
+                          <a:latin typeface="Malgun Gothic"/>
+                        </a:rPr>
+                        <a:t>CSV</a:t>
+                      </a:r>
+                    </a:p>
+                  </a:txBody>
+                  <a:tcPr anchor="ctr"/>
+                </a:tc>
+                <a:tc>
+                  <a:txBody>
+                    <a:bodyPr/>
+                    <a:lstStyle/>
+                    <a:p>
+                      <a:pPr algn="ctr"/>
+                      <a:r>
+                        <a:rPr sz="1200">
+                          <a:latin typeface="Malgun Gothic"/>
+                        </a:rPr>
+                        <a:t>6,589행 × 22열</a:t>
+                      </a:r>
+                    </a:p>
+                  </a:txBody>
+                  <a:tcPr anchor="ctr"/>
+                </a:tc>
+                <a:tc>
+                  <a:txBody>
+                    <a:bodyPr/>
+                    <a:lstStyle/>
+                    <a:p>
+                      <a:pPr algn="ctr"/>
+                      <a:r>
+                        <a:rPr sz="1200">
+                          <a:latin typeface="Malgun Gothic"/>
+                        </a:rPr>
+                        <a:t>2009~24</a:t>
+                      </a:r>
+                    </a:p>
+                  </a:txBody>
+                  <a:tcPr anchor="ctr"/>
+                </a:tc>
+              </a:tr>
+              <a:tr h="365760">
+                <a:tc>
+                  <a:txBody>
+                    <a:bodyPr/>
+                    <a:lstStyle/>
+                    <a:p>
+                      <a:pPr algn="l"/>
+                      <a:r>
+                        <a:rPr sz="1200">
+                          <a:latin typeface="Malgun Gothic"/>
+                        </a:rPr>
+                        <a:t>KOSIS 인구·GRDP</a:t>
+                      </a:r>
+                    </a:p>
+                  </a:txBody>
+                  <a:tcPr anchor="ctr"/>
+                </a:tc>
+                <a:tc>
+                  <a:txBody>
+                    <a:bodyPr/>
+                    <a:lstStyle/>
+                    <a:p>
+                      <a:pPr algn="ctr"/>
+                      <a:r>
+                        <a:rPr sz="1200">
+                          <a:latin typeface="Malgun Gothic"/>
+                        </a:rPr>
+                        <a:t>CSV 가로형(다중헤더)</a:t>
+                      </a:r>
+                    </a:p>
+                  </a:txBody>
+                  <a:tcPr anchor="ctr"/>
+                </a:tc>
+                <a:tc>
+                  <a:txBody>
+                    <a:bodyPr/>
+                    <a:lstStyle/>
+                    <a:p>
+                      <a:pPr algn="ctr"/>
+                      <a:r>
+                        <a:rPr sz="1200">
+                          <a:latin typeface="Malgun Gothic"/>
+                        </a:rPr>
+                        <a:t>20행 × 55~61열</a:t>
+                      </a:r>
+                    </a:p>
+                  </a:txBody>
+                  <a:tcPr anchor="ctr"/>
+                </a:tc>
+                <a:tc>
+                  <a:txBody>
+                    <a:bodyPr/>
+                    <a:lstStyle/>
+                    <a:p>
+                      <a:pPr algn="ctr"/>
+                      <a:r>
+                        <a:rPr sz="1200">
+                          <a:latin typeface="Malgun Gothic"/>
+                        </a:rPr>
+                        <a:t>2008~25</a:t>
+                      </a:r>
+                    </a:p>
+                  </a:txBody>
+                  <a:tcPr anchor="ctr"/>
+                </a:tc>
+              </a:tr>
+              <a:tr h="365760">
+                <a:tc>
+                  <a:txBody>
+                    <a:bodyPr/>
+                    <a:lstStyle/>
+                    <a:p>
+                      <a:pPr algn="l"/>
+                      <a:r>
+                        <a:rPr sz="1200">
+                          <a:latin typeface="Malgun Gothic"/>
+                        </a:rPr>
+                        <a:t>공단 법률구조</a:t>
+                      </a:r>
+                    </a:p>
+                  </a:txBody>
+                  <a:tcPr anchor="ctr"/>
+                </a:tc>
+                <a:tc>
+                  <a:txBody>
+                    <a:bodyPr/>
+                    <a:lstStyle/>
+                    <a:p>
+                      <a:pPr algn="ctr"/>
+                      <a:r>
+                        <a:rPr sz="1200">
+                          <a:latin typeface="Malgun Gothic"/>
+                        </a:rPr>
+                        <a:t>엑셀(반기)</a:t>
+                      </a:r>
+                    </a:p>
+                  </a:txBody>
+                  <a:tcPr anchor="ctr"/>
+                </a:tc>
+                <a:tc>
+                  <a:txBody>
+                    <a:bodyPr/>
+                    <a:lstStyle/>
+                    <a:p>
+                      <a:pPr algn="ctr"/>
+                      <a:r>
+                        <a:rPr sz="1200">
+                          <a:latin typeface="Malgun Gothic"/>
+                        </a:rPr>
+                        <a:t>민사·형사 2파일</a:t>
+                      </a:r>
+                    </a:p>
+                  </a:txBody>
+                  <a:tcPr anchor="ctr"/>
+                </a:tc>
+                <a:tc>
+                  <a:txBody>
+                    <a:bodyPr/>
+                    <a:lstStyle/>
+                    <a:p>
+                      <a:pPr algn="ctr"/>
+                      <a:r>
+                        <a:rPr sz="1200">
+                          <a:latin typeface="Malgun Gothic"/>
+                        </a:rPr>
+                        <a:t>2012~25</a:t>
+                      </a:r>
+                    </a:p>
+                  </a:txBody>
+                  <a:tcPr anchor="ctr"/>
+                </a:tc>
+              </a:tr>
+              <a:tr h="365760">
+                <a:tc>
+                  <a:txBody>
+                    <a:bodyPr/>
+                    <a:lstStyle/>
+                    <a:p>
+                      <a:pPr algn="l"/>
+                      <a:r>
+                        <a:rPr sz="1200">
+                          <a:latin typeface="Malgun Gothic"/>
+                        </a:rPr>
+                        <a:t>변협 회원현황</a:t>
+                      </a:r>
+                    </a:p>
+                  </a:txBody>
+                  <a:tcPr anchor="ctr"/>
+                </a:tc>
+                <a:tc>
+                  <a:txBody>
+                    <a:bodyPr/>
+                    <a:lstStyle/>
+                    <a:p>
+                      <a:pPr algn="ctr"/>
+                      <a:r>
+                        <a:rPr sz="1200">
+                          <a:latin typeface="Malgun Gothic"/>
+                        </a:rPr>
+                        <a:t>웹 스크래핑(HTML)</a:t>
+                      </a:r>
+                    </a:p>
+                  </a:txBody>
+                  <a:tcPr anchor="ctr"/>
+                </a:tc>
+                <a:tc>
+                  <a:txBody>
+                    <a:bodyPr/>
+                    <a:lstStyle/>
+                    <a:p>
+                      <a:pPr algn="ctr"/>
+                      <a:r>
+                        <a:rPr sz="1200">
+                          <a:latin typeface="Malgun Gothic"/>
+                        </a:rPr>
+                        <a:t>14행(스냅샷)</a:t>
+                      </a:r>
+                    </a:p>
+                  </a:txBody>
+                  <a:tcPr anchor="ctr"/>
+                </a:tc>
+                <a:tc>
+                  <a:txBody>
+                    <a:bodyPr/>
+                    <a:lstStyle/>
+                    <a:p>
+                      <a:pPr algn="ctr"/>
+                      <a:r>
+                        <a:rPr sz="1200">
+                          <a:latin typeface="Malgun Gothic"/>
+                        </a:rPr>
+                        <a:t>현재</a:t>
+                      </a:r>
+                    </a:p>
+                  </a:txBody>
+                  <a:tcPr anchor="ctr"/>
+                </a:tc>
+              </a:tr>
+              <a:tr h="365760">
+                <a:tc>
+                  <a:txBody>
+                    <a:bodyPr/>
+                    <a:lstStyle/>
+                    <a:p>
+                      <a:pPr algn="l"/>
+                      <a:r>
+                        <a:rPr sz="1200">
+                          <a:latin typeface="Malgun Gothic"/>
+                        </a:rPr>
+                        <a:t>시도 경계</a:t>
+                      </a:r>
+                    </a:p>
+                  </a:txBody>
+                  <a:tcPr anchor="ctr"/>
+                </a:tc>
+                <a:tc>
+                  <a:txBody>
+                    <a:bodyPr/>
+                    <a:lstStyle/>
+                    <a:p>
+                      <a:pPr algn="ctr"/>
+                      <a:r>
+                        <a:rPr sz="1200">
+                          <a:latin typeface="Malgun Gothic"/>
+                        </a:rPr>
+                        <a:t>GeoJSON</a:t>
+                      </a:r>
+                    </a:p>
+                  </a:txBody>
+                  <a:tcPr anchor="ctr"/>
+                </a:tc>
+                <a:tc>
+                  <a:txBody>
+                    <a:bodyPr/>
+                    <a:lstStyle/>
+                    <a:p>
+                      <a:pPr algn="ctr"/>
+                      <a:r>
+                        <a:rPr sz="1200">
+                          <a:latin typeface="Malgun Gothic"/>
+                        </a:rPr>
+                        <a:t>17폴리곤 · 7.5MB</a:t>
+                      </a:r>
+                    </a:p>
+                  </a:txBody>
+                  <a:tcPr anchor="ctr"/>
+                </a:tc>
+                <a:tc>
+                  <a:txBody>
+                    <a:bodyPr/>
+                    <a:lstStyle/>
+                    <a:p>
+                      <a:pPr algn="ctr"/>
+                      <a:r>
+                        <a:rPr sz="1200">
+                          <a:latin typeface="Malgun Gothic"/>
+                        </a:rPr>
+                        <a:t>2018</a:t>
+                      </a:r>
+                    </a:p>
+                  </a:txBody>
+                  <a:tcPr anchor="ctr"/>
+                </a:tc>
+              </a:tr>
+            </a:tbl>
+          </a:graphicData>
+        </a:graphic>
+      </p:graphicFrame>
+      <p:sp>
+        <p:nvSpPr>
+          <p:cNvPr id="5" name="TextBox 4"/>
+          <p:cNvSpPr txBox="1"/>
+          <p:nvPr/>
+        </p:nvSpPr>
+        <p:spPr>
+          <a:xfrm>
+            <a:off x="640080" y="4160520"/>
+            <a:ext cx="10972800" cy="2377440"/>
+          </a:xfrm>
+          <a:prstGeom prst="rect">
+            <a:avLst/>
+          </a:prstGeom>
+          <a:noFill/>
+        </p:spPr>
+        <p:txBody>
+          <a:bodyPr wrap="square">
+            <a:spAutoFit/>
+          </a:bodyPr>
+          <a:lstStyle/>
+          <a:p>
+            <a:pPr>
+              <a:spcAft>
+                <a:spcPts val="700"/>
+              </a:spcAft>
+            </a:pPr>
+            <a:r>
+              <a:rPr sz="1700">
+                <a:solidFill>
+                  <a:srgbClr val="222222"/>
+                </a:solidFill>
+                <a:latin typeface="Malgun Gothic"/>
+              </a:rPr>
+              <a:t>• 원천 ~155만 셀 → 정제 → 분석패널 234·180행 → LLAI 횡단면 13행</a:t>
+            </a:r>
+          </a:p>
+          <a:p>
+            <a:pPr>
+              <a:spcAft>
+                <a:spcPts val="700"/>
+              </a:spcAft>
+            </a:pPr>
+            <a:r>
+              <a:rPr sz="1700">
+                <a:solidFill>
+                  <a:srgbClr val="222222"/>
+                </a:solidFill>
+                <a:latin typeface="Malgun Gothic"/>
+              </a:rPr>
+              <a:t>• Volume(양)은 중간 — 핵심은 Variety(5출처·4형식)·Veracity(이종 지역단위 정합)</a:t>
+            </a:r>
+          </a:p>
+          <a:p>
+            <a:pPr lvl="1">
+              <a:spcAft>
+                <a:spcPts val="700"/>
+              </a:spcAft>
+            </a:pPr>
+            <a:r>
+              <a:rPr sz="1500">
+                <a:solidFill>
+                  <a:srgbClr val="222222"/>
+                </a:solidFill>
+                <a:latin typeface="Malgun Gothic"/>
+              </a:rPr>
+              <a:t>– 작업 무게중심 = 수집·정제(ETL) 파이프라인</a:t>
+            </a:r>
+          </a:p>
+          <a:p>
+            <a:pPr>
+              <a:spcAft>
+                <a:spcPts val="700"/>
+              </a:spcAft>
+            </a:pPr>
+            <a:r>
+              <a:rPr sz="1700">
+                <a:solidFill>
+                  <a:srgbClr val="222222"/>
+                </a:solidFill>
+                <a:latin typeface="Malgun Gothic"/>
+              </a:rPr>
+              <a:t>• 방법론: 데이터엔지니어링(ETL) · 합성지표 · 가설검정 · 군집(K-means) · 공간시각화</a:t>
+            </a:r>
+          </a:p>
+        </p:txBody>
+      </p:sp>
     </p:spTree>
   </p:cSld>
   <p:clrMapOvr>
@@ -7767,7 +8644,7 @@
                 </a:solidFill>
                 <a:latin typeface="Malgun Gothic"/>
               </a:rPr>
-              <a:t>1. 왜 이 문제인가</a:t>
+              <a:t>핵심 요약 — 한 눈에 보기</a:t>
             </a:r>
           </a:p>
         </p:txBody>
@@ -7815,93 +8692,250 @@
           </a:p>
         </p:txBody>
       </p:sp>
-      <p:sp>
-        <p:nvSpPr>
-          <p:cNvPr id="4" name="TextBox 3"/>
-          <p:cNvSpPr txBox="1"/>
+      <p:graphicFrame>
+        <p:nvGraphicFramePr>
+          <p:cNvPr id="4" name="Table 3"/>
+          <p:cNvGraphicFramePr>
+            <a:graphicFrameLocks noGrp="1"/>
+          </p:cNvGraphicFramePr>
           <p:nvPr/>
-        </p:nvSpPr>
-        <p:spPr>
-          <a:xfrm>
-            <a:off x="640080" y="1554480"/>
-            <a:ext cx="10972800" cy="4937760"/>
-          </a:xfrm>
-          <a:prstGeom prst="rect">
-            <a:avLst/>
-          </a:prstGeom>
-          <a:noFill/>
-        </p:spPr>
-        <p:txBody>
-          <a:bodyPr wrap="square">
-            <a:spAutoFit/>
-          </a:bodyPr>
-          <a:lstStyle/>
-          <a:p>
-            <a:pPr>
-              <a:spcAft>
-                <a:spcPts val="900"/>
-              </a:spcAft>
-            </a:pPr>
-            <a:r>
-              <a:rPr sz="2000">
-                <a:solidFill>
-                  <a:srgbClr val="222222"/>
-                </a:solidFill>
-                <a:latin typeface="Malgun Gothic"/>
-              </a:rPr>
-              <a:t>• 로스쿨 도입(2009) 이후 변호사 4만 명 시대 — 그런데 자원은 어디에 있나?</a:t>
-            </a:r>
-          </a:p>
-          <a:p>
-            <a:pPr lvl="1">
-              <a:spcAft>
-                <a:spcPts val="900"/>
-              </a:spcAft>
-            </a:pPr>
-            <a:r>
-              <a:rPr sz="1700">
-                <a:solidFill>
-                  <a:srgbClr val="222222"/>
-                </a:solidFill>
-                <a:latin typeface="Malgun Gothic"/>
-              </a:rPr>
-              <a:t>– 서울·수도권 집중 vs 지방 부족, 취약계층 사각지대 우려</a:t>
-            </a:r>
-          </a:p>
-          <a:p>
-            <a:pPr>
-              <a:spcAft>
-                <a:spcPts val="900"/>
-              </a:spcAft>
-            </a:pPr>
-            <a:r>
-              <a:rPr sz="2000">
-                <a:solidFill>
-                  <a:srgbClr val="222222"/>
-                </a:solidFill>
-                <a:latin typeface="Malgun Gothic"/>
-              </a:rPr>
-              <a:t>• 법률 서비스 접근성의 지역 불균형 = 사법 정의와 직결된 사회 문제</a:t>
-            </a:r>
-          </a:p>
-          <a:p>
-            <a:pPr>
-              <a:spcAft>
-                <a:spcPts val="900"/>
-              </a:spcAft>
-            </a:pPr>
-            <a:r>
-              <a:rPr sz="2000">
-                <a:solidFill>
-                  <a:srgbClr val="222222"/>
-                </a:solidFill>
-                <a:latin typeface="Malgun Gothic"/>
-              </a:rPr>
-              <a:t>• 연구 질문: 어느 지역이, 얼마나 법적 보호에서 소외되는가?</a:t>
-            </a:r>
-          </a:p>
-        </p:txBody>
-      </p:sp>
+        </p:nvGraphicFramePr>
+        <p:xfrm>
+          <a:off x="640080" y="1645920"/>
+          <a:ext cx="10881360" cy="4206240"/>
+        </p:xfrm>
+        <a:graphic>
+          <a:graphicData uri="http://schemas.openxmlformats.org/drawingml/2006/table">
+            <a:tbl>
+              <a:tblPr firstRow="1" bandRow="1">
+                <a:tableStyleId>{5C22544A-7EE6-4342-B048-85BDC9FD1C3A}</a:tableStyleId>
+              </a:tblPr>
+              <a:tblGrid>
+                <a:gridCol w="5440680"/>
+                <a:gridCol w="5440680"/>
+              </a:tblGrid>
+              <a:tr h="701040">
+                <a:tc>
+                  <a:txBody>
+                    <a:bodyPr/>
+                    <a:lstStyle/>
+                    <a:p>
+                      <a:pPr algn="ctr"/>
+                      <a:r>
+                        <a:rPr sz="1500" b="1">
+                          <a:solidFill>
+                            <a:srgbClr val="FFFFFF"/>
+                          </a:solidFill>
+                          <a:latin typeface="Malgun Gothic"/>
+                        </a:rPr>
+                        <a:t>항목</a:t>
+                      </a:r>
+                    </a:p>
+                  </a:txBody>
+                  <a:tcPr anchor="ctr">
+                    <a:solidFill>
+                      <a:srgbClr val="1F3A5F"/>
+                    </a:solidFill>
+                  </a:tcPr>
+                </a:tc>
+                <a:tc>
+                  <a:txBody>
+                    <a:bodyPr/>
+                    <a:lstStyle/>
+                    <a:p>
+                      <a:pPr algn="ctr"/>
+                      <a:r>
+                        <a:rPr sz="1500" b="1">
+                          <a:solidFill>
+                            <a:srgbClr val="FFFFFF"/>
+                          </a:solidFill>
+                          <a:latin typeface="Malgun Gothic"/>
+                        </a:rPr>
+                        <a:t>내용</a:t>
+                      </a:r>
+                    </a:p>
+                  </a:txBody>
+                  <a:tcPr anchor="ctr">
+                    <a:solidFill>
+                      <a:srgbClr val="1F3A5F"/>
+                    </a:solidFill>
+                  </a:tcPr>
+                </a:tc>
+              </a:tr>
+              <a:tr h="701040">
+                <a:tc>
+                  <a:txBody>
+                    <a:bodyPr/>
+                    <a:lstStyle/>
+                    <a:p>
+                      <a:pPr algn="ctr"/>
+                      <a:r>
+                        <a:rPr sz="1500">
+                          <a:latin typeface="Malgun Gothic"/>
+                        </a:rPr>
+                        <a:t>문제</a:t>
+                      </a:r>
+                    </a:p>
+                  </a:txBody>
+                  <a:tcPr anchor="ctr"/>
+                </a:tc>
+                <a:tc>
+                  <a:txBody>
+                    <a:bodyPr/>
+                    <a:lstStyle/>
+                    <a:p>
+                      <a:pPr algn="ctr"/>
+                      <a:r>
+                        <a:rPr sz="1500">
+                          <a:latin typeface="Malgun Gothic"/>
+                        </a:rPr>
+                        <a:t>변호사·법원·법률구조 자원의 지역별 접근성 불균형 정량화</a:t>
+                      </a:r>
+                    </a:p>
+                  </a:txBody>
+                  <a:tcPr anchor="ctr"/>
+                </a:tc>
+              </a:tr>
+              <a:tr h="701040">
+                <a:tc>
+                  <a:txBody>
+                    <a:bodyPr/>
+                    <a:lstStyle/>
+                    <a:p>
+                      <a:pPr algn="ctr"/>
+                      <a:r>
+                        <a:rPr sz="1500">
+                          <a:latin typeface="Malgun Gothic"/>
+                        </a:rPr>
+                        <a:t>방법</a:t>
+                      </a:r>
+                    </a:p>
+                  </a:txBody>
+                  <a:tcPr anchor="ctr"/>
+                </a:tc>
+                <a:tc>
+                  <a:txBody>
+                    <a:bodyPr/>
+                    <a:lstStyle/>
+                    <a:p>
+                      <a:pPr algn="ctr"/>
+                      <a:r>
+                        <a:rPr sz="1500">
+                          <a:latin typeface="Malgun Gothic"/>
+                        </a:rPr>
+                        <a:t>3개 차원(A1 변호사·A2 사건부담·A3 취약계층) → 단일 지수 LLAI(0~100)</a:t>
+                      </a:r>
+                    </a:p>
+                  </a:txBody>
+                  <a:tcPr anchor="ctr"/>
+                </a:tc>
+              </a:tr>
+              <a:tr h="701040">
+                <a:tc>
+                  <a:txBody>
+                    <a:bodyPr/>
+                    <a:lstStyle/>
+                    <a:p>
+                      <a:pPr algn="ctr"/>
+                      <a:r>
+                        <a:rPr sz="1500">
+                          <a:latin typeface="Malgun Gothic"/>
+                        </a:rPr>
+                        <a:t>데이터</a:t>
+                      </a:r>
+                    </a:p>
+                  </a:txBody>
+                  <a:tcPr anchor="ctr"/>
+                </a:tc>
+                <a:tc>
+                  <a:txBody>
+                    <a:bodyPr/>
+                    <a:lstStyle/>
+                    <a:p>
+                      <a:pPr algn="ctr"/>
+                      <a:r>
+                        <a:rPr sz="1500">
+                          <a:latin typeface="Malgun Gothic"/>
+                        </a:rPr>
+                        <a:t>변협·사법연감·공단·KOSIS / 13권역·10도단위 / 기준 2024</a:t>
+                      </a:r>
+                    </a:p>
+                  </a:txBody>
+                  <a:tcPr anchor="ctr"/>
+                </a:tc>
+              </a:tr>
+              <a:tr h="701040">
+                <a:tc>
+                  <a:txBody>
+                    <a:bodyPr/>
+                    <a:lstStyle/>
+                    <a:p>
+                      <a:pPr algn="ctr"/>
+                      <a:r>
+                        <a:rPr sz="1500">
+                          <a:latin typeface="Malgun Gothic"/>
+                        </a:rPr>
+                        <a:t>핵심 발견</a:t>
+                      </a:r>
+                    </a:p>
+                  </a:txBody>
+                  <a:tcPr anchor="ctr"/>
+                </a:tc>
+                <a:tc>
+                  <a:txBody>
+                    <a:bodyPr/>
+                    <a:lstStyle/>
+                    <a:p>
+                      <a:pPr algn="ctr"/>
+                      <a:r>
+                        <a:rPr sz="1500">
+                          <a:latin typeface="Malgun Gothic"/>
+                        </a:rPr>
+                        <a:t>① 서울 일극(91 vs 2~24) ② 변호사↑→부담↓(r=−0.85) ③ 수도권우위=서울단독 ④ 변호사 3.4배↑에도 서울집중 71%→76%</a:t>
+                      </a:r>
+                    </a:p>
+                  </a:txBody>
+                  <a:tcPr anchor="ctr"/>
+                </a:tc>
+              </a:tr>
+              <a:tr h="701040">
+                <a:tc>
+                  <a:txBody>
+                    <a:bodyPr/>
+                    <a:lstStyle/>
+                    <a:p>
+                      <a:pPr algn="ctr"/>
+                      <a:r>
+                        <a:rPr sz="1500">
+                          <a:latin typeface="Malgun Gothic"/>
+                        </a:rPr>
+                        <a:t>결론</a:t>
+                      </a:r>
+                    </a:p>
+                  </a:txBody>
+                  <a:tcPr anchor="ctr"/>
+                </a:tc>
+                <a:tc>
+                  <a:txBody>
+                    <a:bodyPr/>
+                    <a:lstStyle/>
+                    <a:p>
+                      <a:pPr algn="ctr"/>
+                      <a:r>
+                        <a:rPr sz="1500">
+                          <a:latin typeface="Malgun Gothic"/>
+                        </a:rPr>
+                        <a:t>인구 대비·사건부담이 접근성 좌우 / 양적 팽창만으론 격차 해소 안 됨</a:t>
+                      </a:r>
+                    </a:p>
+                  </a:txBody>
+                  <a:tcPr anchor="ctr"/>
+                </a:tc>
+              </a:tr>
+            </a:tbl>
+          </a:graphicData>
+        </a:graphic>
+      </p:graphicFrame>
     </p:spTree>
   </p:cSld>
   <p:clrMapOvr>
@@ -7949,7 +8983,7 @@
                 </a:solidFill>
                 <a:latin typeface="Malgun Gothic"/>
               </a:rPr>
-              <a:t>2. 접근 방법 — 종합 법률 접근성 지수(LLAI)</a:t>
+              <a:t>1. 왜 이 문제인가</a:t>
             </a:r>
           </a:p>
         </p:txBody>
@@ -8031,7 +9065,7 @@
                 </a:solidFill>
                 <a:latin typeface="Malgun Gothic"/>
               </a:rPr>
-              <a:t>• 3개 차원을 하나의 지수로 통합 (0~100)</a:t>
+              <a:t>• 로스쿨 도입(2009) 이후 변호사 4만 명 시대 — 그런데 자원은 어디에 있나?</a:t>
             </a:r>
           </a:p>
           <a:p>
@@ -8047,39 +9081,7 @@
                 </a:solidFill>
                 <a:latin typeface="Malgun Gothic"/>
               </a:rPr>
-              <a:t>– A1 변호사 접근성 — 인구 10만 명당 변호사 수 (↑ 좋음)</a:t>
-            </a:r>
-          </a:p>
-          <a:p>
-            <a:pPr lvl="1">
-              <a:spcAft>
-                <a:spcPts val="900"/>
-              </a:spcAft>
-            </a:pPr>
-            <a:r>
-              <a:rPr sz="1700">
-                <a:solidFill>
-                  <a:srgbClr val="222222"/>
-                </a:solidFill>
-                <a:latin typeface="Malgun Gothic"/>
-              </a:rPr>
-              <a:t>– A2 사건 부담 — 변호사 1인당 법원 본안사건 수 (↓ 좋음)</a:t>
-            </a:r>
-          </a:p>
-          <a:p>
-            <a:pPr lvl="1">
-              <a:spcAft>
-                <a:spcPts val="900"/>
-              </a:spcAft>
-            </a:pPr>
-            <a:r>
-              <a:rPr sz="1700">
-                <a:solidFill>
-                  <a:srgbClr val="222222"/>
-                </a:solidFill>
-                <a:latin typeface="Malgun Gothic"/>
-              </a:rPr>
-              <a:t>– A3 취약계층 접근성 — 법률구조 건수 / 저소득층 (↑ 좋음)</a:t>
+              <a:t>– 서울·수도권 집중 vs 지방 부족, 취약계층 사각지대 우려</a:t>
             </a:r>
           </a:p>
           <a:p>
@@ -8095,23 +9097,23 @@
                 </a:solidFill>
                 <a:latin typeface="Malgun Gothic"/>
               </a:rPr>
-              <a:t>• LLAI = w₁·A1n + w₂·(1−A2n) + w₃·A3n</a:t>
-            </a:r>
-          </a:p>
-          <a:p>
-            <a:pPr lvl="1">
+              <a:t>• 법률 서비스 접근성의 지역 불균형 = 사법 정의와 직결된 사회 문제</a:t>
+            </a:r>
+          </a:p>
+          <a:p>
+            <a:pPr>
               <a:spcAft>
                 <a:spcPts val="900"/>
               </a:spcAft>
             </a:pPr>
             <a:r>
-              <a:rPr sz="1700">
+              <a:rPr sz="2000">
                 <a:solidFill>
                   <a:srgbClr val="222222"/>
                 </a:solidFill>
                 <a:latin typeface="Malgun Gothic"/>
               </a:rPr>
-              <a:t>– 가중치 3종(균등·엔트로피·PCA) 병기로 강건성 확인</a:t>
+              <a:t>• 연구 질문: 어느 지역이, 얼마나 법적 보호에서 소외되는가?</a:t>
             </a:r>
           </a:p>
         </p:txBody>
@@ -8125,6 +9127,220 @@
 </file>
 
 <file path=ppt/slides/slide6.xml><?xml version="1.0" encoding="utf-8"?>
+<p:sld xmlns:a="http://schemas.openxmlformats.org/drawingml/2006/main" xmlns:p="http://schemas.openxmlformats.org/presentationml/2006/main" xmlns:r="http://schemas.openxmlformats.org/officeDocument/2006/relationships">
+  <p:cSld>
+    <p:spTree>
+      <p:nvGrpSpPr>
+        <p:cNvPr id="1" name=""/>
+        <p:cNvGrpSpPr/>
+        <p:nvPr/>
+      </p:nvGrpSpPr>
+      <p:grpSpPr/>
+      <p:sp>
+        <p:nvSpPr>
+          <p:cNvPr id="2" name="TextBox 1"/>
+          <p:cNvSpPr txBox="1"/>
+          <p:nvPr/>
+        </p:nvSpPr>
+        <p:spPr>
+          <a:xfrm>
+            <a:off x="502920" y="320040"/>
+            <a:ext cx="11155680" cy="914400"/>
+          </a:xfrm>
+          <a:prstGeom prst="rect">
+            <a:avLst/>
+          </a:prstGeom>
+          <a:noFill/>
+        </p:spPr>
+        <p:txBody>
+          <a:bodyPr wrap="square">
+            <a:spAutoFit/>
+          </a:bodyPr>
+          <a:lstStyle/>
+          <a:p>
+            <a:r>
+              <a:rPr sz="3000" b="1">
+                <a:solidFill>
+                  <a:srgbClr val="1F3A5F"/>
+                </a:solidFill>
+                <a:latin typeface="Malgun Gothic"/>
+              </a:rPr>
+              <a:t>2. 접근 방법 — 종합 법률 접근성 지수(LLAI)</a:t>
+            </a:r>
+          </a:p>
+        </p:txBody>
+      </p:sp>
+      <p:sp>
+        <p:nvSpPr>
+          <p:cNvPr id="3" name="Rectangle 2"/>
+          <p:cNvSpPr/>
+          <p:nvPr/>
+        </p:nvSpPr>
+        <p:spPr>
+          <a:xfrm>
+            <a:off x="548640" y="1234440"/>
+            <a:ext cx="11064240" cy="38100"/>
+          </a:xfrm>
+          <a:prstGeom prst="rect">
+            <a:avLst/>
+          </a:prstGeom>
+          <a:solidFill>
+            <a:srgbClr val="C44E52"/>
+          </a:solidFill>
+          <a:ln>
+            <a:noFill/>
+          </a:ln>
+        </p:spPr>
+        <p:style>
+          <a:lnRef idx="1">
+            <a:schemeClr val="accent1"/>
+          </a:lnRef>
+          <a:fillRef idx="3">
+            <a:schemeClr val="accent1"/>
+          </a:fillRef>
+          <a:effectRef idx="2">
+            <a:schemeClr val="accent1"/>
+          </a:effectRef>
+          <a:fontRef idx="minor">
+            <a:schemeClr val="lt1"/>
+          </a:fontRef>
+        </p:style>
+        <p:txBody>
+          <a:bodyPr rtlCol="0" anchor="ctr"/>
+          <a:lstStyle/>
+          <a:p>
+            <a:pPr algn="ctr"/>
+          </a:p>
+        </p:txBody>
+      </p:sp>
+      <p:sp>
+        <p:nvSpPr>
+          <p:cNvPr id="4" name="TextBox 3"/>
+          <p:cNvSpPr txBox="1"/>
+          <p:nvPr/>
+        </p:nvSpPr>
+        <p:spPr>
+          <a:xfrm>
+            <a:off x="640080" y="1554480"/>
+            <a:ext cx="10972800" cy="4937760"/>
+          </a:xfrm>
+          <a:prstGeom prst="rect">
+            <a:avLst/>
+          </a:prstGeom>
+          <a:noFill/>
+        </p:spPr>
+        <p:txBody>
+          <a:bodyPr wrap="square">
+            <a:spAutoFit/>
+          </a:bodyPr>
+          <a:lstStyle/>
+          <a:p>
+            <a:pPr>
+              <a:spcAft>
+                <a:spcPts val="900"/>
+              </a:spcAft>
+            </a:pPr>
+            <a:r>
+              <a:rPr sz="2000">
+                <a:solidFill>
+                  <a:srgbClr val="222222"/>
+                </a:solidFill>
+                <a:latin typeface="Malgun Gothic"/>
+              </a:rPr>
+              <a:t>• 3개 차원을 하나의 지수로 통합 (0~100)</a:t>
+            </a:r>
+          </a:p>
+          <a:p>
+            <a:pPr lvl="1">
+              <a:spcAft>
+                <a:spcPts val="900"/>
+              </a:spcAft>
+            </a:pPr>
+            <a:r>
+              <a:rPr sz="1700">
+                <a:solidFill>
+                  <a:srgbClr val="222222"/>
+                </a:solidFill>
+                <a:latin typeface="Malgun Gothic"/>
+              </a:rPr>
+              <a:t>– A1 변호사 접근성 — 인구 10만 명당 변호사 수 (↑ 좋음)</a:t>
+            </a:r>
+          </a:p>
+          <a:p>
+            <a:pPr lvl="1">
+              <a:spcAft>
+                <a:spcPts val="900"/>
+              </a:spcAft>
+            </a:pPr>
+            <a:r>
+              <a:rPr sz="1700">
+                <a:solidFill>
+                  <a:srgbClr val="222222"/>
+                </a:solidFill>
+                <a:latin typeface="Malgun Gothic"/>
+              </a:rPr>
+              <a:t>– A2 사건 부담 — 변호사 1인당 법원 본안사건 수 (↓ 좋음)</a:t>
+            </a:r>
+          </a:p>
+          <a:p>
+            <a:pPr lvl="1">
+              <a:spcAft>
+                <a:spcPts val="900"/>
+              </a:spcAft>
+            </a:pPr>
+            <a:r>
+              <a:rPr sz="1700">
+                <a:solidFill>
+                  <a:srgbClr val="222222"/>
+                </a:solidFill>
+                <a:latin typeface="Malgun Gothic"/>
+              </a:rPr>
+              <a:t>– A3 취약계층 접근성 — 법률구조 건수 / 저소득층 (↑ 좋음)</a:t>
+            </a:r>
+          </a:p>
+          <a:p>
+            <a:pPr>
+              <a:spcAft>
+                <a:spcPts val="900"/>
+              </a:spcAft>
+            </a:pPr>
+            <a:r>
+              <a:rPr sz="2000">
+                <a:solidFill>
+                  <a:srgbClr val="222222"/>
+                </a:solidFill>
+                <a:latin typeface="Malgun Gothic"/>
+              </a:rPr>
+              <a:t>• LLAI = w₁·A1n + w₂·(1−A2n) + w₃·A3n</a:t>
+            </a:r>
+          </a:p>
+          <a:p>
+            <a:pPr lvl="1">
+              <a:spcAft>
+                <a:spcPts val="900"/>
+              </a:spcAft>
+            </a:pPr>
+            <a:r>
+              <a:rPr sz="1700">
+                <a:solidFill>
+                  <a:srgbClr val="222222"/>
+                </a:solidFill>
+                <a:latin typeface="Malgun Gothic"/>
+              </a:rPr>
+              <a:t>– 가중치 3종(균등·엔트로피·PCA) 병기로 강건성 확인</a:t>
+            </a:r>
+          </a:p>
+        </p:txBody>
+      </p:sp>
+    </p:spTree>
+  </p:cSld>
+  <p:clrMapOvr>
+    <a:masterClrMapping/>
+  </p:clrMapOvr>
+</p:sld>
+</file>
+
+<file path=ppt/slides/slide7.xml><?xml version="1.0" encoding="utf-8"?>
 <p:sld xmlns:a="http://schemas.openxmlformats.org/drawingml/2006/main" xmlns:p="http://schemas.openxmlformats.org/presentationml/2006/main" xmlns:r="http://schemas.openxmlformats.org/officeDocument/2006/relationships">
   <p:cSld>
     <p:spTree>
@@ -8893,7 +10109,7 @@
 </p:sld>
 </file>
 
-<file path=ppt/slides/slide7.xml><?xml version="1.0" encoding="utf-8"?>
+<file path=ppt/slides/slide8.xml><?xml version="1.0" encoding="utf-8"?>
 <p:sld xmlns:a="http://schemas.openxmlformats.org/drawingml/2006/main" xmlns:p="http://schemas.openxmlformats.org/presentationml/2006/main" xmlns:r="http://schemas.openxmlformats.org/officeDocument/2006/relationships">
   <p:cSld>
     <p:spTree>
@@ -9091,7 +10307,7 @@
 </p:sld>
 </file>
 
-<file path=ppt/slides/slide8.xml><?xml version="1.0" encoding="utf-8"?>
+<file path=ppt/slides/slide9.xml><?xml version="1.0" encoding="utf-8"?>
 <p:sld xmlns:a="http://schemas.openxmlformats.org/drawingml/2006/main" xmlns:p="http://schemas.openxmlformats.org/presentationml/2006/main" xmlns:r="http://schemas.openxmlformats.org/officeDocument/2006/relationships">
   <p:cSld>
     <p:spTree>
@@ -9325,521 +10541,6 @@
                 <a:latin typeface="Malgun Gothic"/>
               </a:rPr>
               <a:t>– 결측·이상치 처리 → 권역×연도 패널 → 합계 교차검증</a:t>
-            </a:r>
-          </a:p>
-        </p:txBody>
-      </p:sp>
-    </p:spTree>
-  </p:cSld>
-  <p:clrMapOvr>
-    <a:masterClrMapping/>
-  </p:clrMapOvr>
-</p:sld>
-</file>
-
-<file path=ppt/slides/slide9.xml><?xml version="1.0" encoding="utf-8"?>
-<p:sld xmlns:a="http://schemas.openxmlformats.org/drawingml/2006/main" xmlns:p="http://schemas.openxmlformats.org/presentationml/2006/main" xmlns:r="http://schemas.openxmlformats.org/officeDocument/2006/relationships">
-  <p:cSld>
-    <p:spTree>
-      <p:nvGrpSpPr>
-        <p:cNvPr id="1" name=""/>
-        <p:cNvGrpSpPr/>
-        <p:nvPr/>
-      </p:nvGrpSpPr>
-      <p:grpSpPr/>
-      <p:sp>
-        <p:nvSpPr>
-          <p:cNvPr id="2" name="TextBox 1"/>
-          <p:cNvSpPr txBox="1"/>
-          <p:nvPr/>
-        </p:nvSpPr>
-        <p:spPr>
-          <a:xfrm>
-            <a:off x="502920" y="320040"/>
-            <a:ext cx="11155680" cy="914400"/>
-          </a:xfrm>
-          <a:prstGeom prst="rect">
-            <a:avLst/>
-          </a:prstGeom>
-          <a:noFill/>
-        </p:spPr>
-        <p:txBody>
-          <a:bodyPr wrap="square">
-            <a:spAutoFit/>
-          </a:bodyPr>
-          <a:lstStyle/>
-          <a:p>
-            <a:r>
-              <a:rPr sz="3000" b="1">
-                <a:solidFill>
-                  <a:srgbClr val="1F3A5F"/>
-                </a:solidFill>
-                <a:latin typeface="Malgun Gothic"/>
-              </a:rPr>
-              <a:t>6. LLAI는 어떻게 계산되나 — 예시</a:t>
-            </a:r>
-          </a:p>
-        </p:txBody>
-      </p:sp>
-      <p:sp>
-        <p:nvSpPr>
-          <p:cNvPr id="3" name="Rectangle 2"/>
-          <p:cNvSpPr/>
-          <p:nvPr/>
-        </p:nvSpPr>
-        <p:spPr>
-          <a:xfrm>
-            <a:off x="548640" y="1234440"/>
-            <a:ext cx="11064240" cy="38100"/>
-          </a:xfrm>
-          <a:prstGeom prst="rect">
-            <a:avLst/>
-          </a:prstGeom>
-          <a:solidFill>
-            <a:srgbClr val="C44E52"/>
-          </a:solidFill>
-          <a:ln>
-            <a:noFill/>
-          </a:ln>
-        </p:spPr>
-        <p:style>
-          <a:lnRef idx="1">
-            <a:schemeClr val="accent1"/>
-          </a:lnRef>
-          <a:fillRef idx="3">
-            <a:schemeClr val="accent1"/>
-          </a:fillRef>
-          <a:effectRef idx="2">
-            <a:schemeClr val="accent1"/>
-          </a:effectRef>
-          <a:fontRef idx="minor">
-            <a:schemeClr val="lt1"/>
-          </a:fontRef>
-        </p:style>
-        <p:txBody>
-          <a:bodyPr rtlCol="0" anchor="ctr"/>
-          <a:lstStyle/>
-          <a:p>
-            <a:pPr algn="ctr"/>
-          </a:p>
-        </p:txBody>
-      </p:sp>
-      <p:sp>
-        <p:nvSpPr>
-          <p:cNvPr id="4" name="TextBox 3"/>
-          <p:cNvSpPr txBox="1"/>
-          <p:nvPr/>
-        </p:nvSpPr>
-        <p:spPr>
-          <a:xfrm>
-            <a:off x="640080" y="1554480"/>
-            <a:ext cx="10972800" cy="4937760"/>
-          </a:xfrm>
-          <a:prstGeom prst="rect">
-            <a:avLst/>
-          </a:prstGeom>
-          <a:noFill/>
-        </p:spPr>
-        <p:txBody>
-          <a:bodyPr wrap="square">
-            <a:spAutoFit/>
-          </a:bodyPr>
-          <a:lstStyle/>
-          <a:p>
-            <a:pPr>
-              <a:spcAft>
-                <a:spcPts val="900"/>
-              </a:spcAft>
-            </a:pPr>
-            <a:r>
-              <a:rPr sz="1900">
-                <a:solidFill>
-                  <a:srgbClr val="222222"/>
-                </a:solidFill>
-                <a:latin typeface="Malgun Gothic"/>
-              </a:rPr>
-              <a:t>• 각 지표를 전국 최소=0·최대=1로 정규화(A2는 1−값) 후 가중 평균 ×100</a:t>
-            </a:r>
-          </a:p>
-          <a:p>
-            <a:pPr>
-              <a:spcAft>
-                <a:spcPts val="900"/>
-              </a:spcAft>
-            </a:pPr>
-            <a:r>
-              <a:rPr sz="1900">
-                <a:solidFill>
-                  <a:srgbClr val="222222"/>
-                </a:solidFill>
-                <a:latin typeface="Malgun Gothic"/>
-              </a:rPr>
-              <a:t>• LLAI = 0.69·A1n + 0.14·(1−A2n) + 0.17·A3n  (엔트로피 가중치)</a:t>
-            </a:r>
-          </a:p>
-        </p:txBody>
-      </p:sp>
-      <p:graphicFrame>
-        <p:nvGraphicFramePr>
-          <p:cNvPr id="5" name="Table 4"/>
-          <p:cNvGraphicFramePr>
-            <a:graphicFrameLocks noGrp="1"/>
-          </p:cNvGraphicFramePr>
-          <p:nvPr/>
-        </p:nvGraphicFramePr>
-        <p:xfrm>
-          <a:off x="1828800" y="3017520"/>
-          <a:ext cx="8229600" cy="1645920"/>
-        </p:xfrm>
-        <a:graphic>
-          <a:graphicData uri="http://schemas.openxmlformats.org/drawingml/2006/table">
-            <a:tbl>
-              <a:tblPr firstRow="1" bandRow="1">
-                <a:tableStyleId>{5C22544A-7EE6-4342-B048-85BDC9FD1C3A}</a:tableStyleId>
-              </a:tblPr>
-              <a:tblGrid>
-                <a:gridCol w="1645920"/>
-                <a:gridCol w="1645920"/>
-                <a:gridCol w="1645920"/>
-                <a:gridCol w="1645920"/>
-                <a:gridCol w="1645920"/>
-              </a:tblGrid>
-              <a:tr h="548640">
-                <a:tc>
-                  <a:txBody>
-                    <a:bodyPr/>
-                    <a:lstStyle/>
-                    <a:p>
-                      <a:pPr algn="ctr"/>
-                      <a:r>
-                        <a:rPr sz="1800" b="1">
-                          <a:solidFill>
-                            <a:srgbClr val="FFFFFF"/>
-                          </a:solidFill>
-                          <a:latin typeface="Malgun Gothic"/>
-                        </a:rPr>
-                        <a:t>권역</a:t>
-                      </a:r>
-                    </a:p>
-                  </a:txBody>
-                  <a:tcPr anchor="ctr">
-                    <a:solidFill>
-                      <a:srgbClr val="1F3A5F"/>
-                    </a:solidFill>
-                  </a:tcPr>
-                </a:tc>
-                <a:tc>
-                  <a:txBody>
-                    <a:bodyPr/>
-                    <a:lstStyle/>
-                    <a:p>
-                      <a:pPr algn="ctr"/>
-                      <a:r>
-                        <a:rPr sz="1800" b="1">
-                          <a:solidFill>
-                            <a:srgbClr val="FFFFFF"/>
-                          </a:solidFill>
-                          <a:latin typeface="Malgun Gothic"/>
-                        </a:rPr>
-                        <a:t>A1n</a:t>
-                      </a:r>
-                    </a:p>
-                  </a:txBody>
-                  <a:tcPr anchor="ctr">
-                    <a:solidFill>
-                      <a:srgbClr val="1F3A5F"/>
-                    </a:solidFill>
-                  </a:tcPr>
-                </a:tc>
-                <a:tc>
-                  <a:txBody>
-                    <a:bodyPr/>
-                    <a:lstStyle/>
-                    <a:p>
-                      <a:pPr algn="ctr"/>
-                      <a:r>
-                        <a:rPr sz="1800" b="1">
-                          <a:solidFill>
-                            <a:srgbClr val="FFFFFF"/>
-                          </a:solidFill>
-                          <a:latin typeface="Malgun Gothic"/>
-                        </a:rPr>
-                        <a:t>1−A2n</a:t>
-                      </a:r>
-                    </a:p>
-                  </a:txBody>
-                  <a:tcPr anchor="ctr">
-                    <a:solidFill>
-                      <a:srgbClr val="1F3A5F"/>
-                    </a:solidFill>
-                  </a:tcPr>
-                </a:tc>
-                <a:tc>
-                  <a:txBody>
-                    <a:bodyPr/>
-                    <a:lstStyle/>
-                    <a:p>
-                      <a:pPr algn="ctr"/>
-                      <a:r>
-                        <a:rPr sz="1800" b="1">
-                          <a:solidFill>
-                            <a:srgbClr val="FFFFFF"/>
-                          </a:solidFill>
-                          <a:latin typeface="Malgun Gothic"/>
-                        </a:rPr>
-                        <a:t>A3n</a:t>
-                      </a:r>
-                    </a:p>
-                  </a:txBody>
-                  <a:tcPr anchor="ctr">
-                    <a:solidFill>
-                      <a:srgbClr val="1F3A5F"/>
-                    </a:solidFill>
-                  </a:tcPr>
-                </a:tc>
-                <a:tc>
-                  <a:txBody>
-                    <a:bodyPr/>
-                    <a:lstStyle/>
-                    <a:p>
-                      <a:pPr algn="ctr"/>
-                      <a:r>
-                        <a:rPr sz="1800" b="1">
-                          <a:solidFill>
-                            <a:srgbClr val="FFFFFF"/>
-                          </a:solidFill>
-                          <a:latin typeface="Malgun Gothic"/>
-                        </a:rPr>
-                        <a:t>LLAI</a:t>
-                      </a:r>
-                    </a:p>
-                  </a:txBody>
-                  <a:tcPr anchor="ctr">
-                    <a:solidFill>
-                      <a:srgbClr val="1F3A5F"/>
-                    </a:solidFill>
-                  </a:tcPr>
-                </a:tc>
-              </a:tr>
-              <a:tr h="548640">
-                <a:tc>
-                  <a:txBody>
-                    <a:bodyPr/>
-                    <a:lstStyle/>
-                    <a:p>
-                      <a:pPr algn="ctr"/>
-                      <a:r>
-                        <a:rPr sz="1800">
-                          <a:latin typeface="Malgun Gothic"/>
-                        </a:rPr>
-                        <a:t>서울</a:t>
-                      </a:r>
-                    </a:p>
-                  </a:txBody>
-                  <a:tcPr anchor="ctr"/>
-                </a:tc>
-                <a:tc>
-                  <a:txBody>
-                    <a:bodyPr/>
-                    <a:lstStyle/>
-                    <a:p>
-                      <a:pPr algn="ctr"/>
-                      <a:r>
-                        <a:rPr sz="1800">
-                          <a:latin typeface="Malgun Gothic"/>
-                        </a:rPr>
-                        <a:t>1.00</a:t>
-                      </a:r>
-                    </a:p>
-                  </a:txBody>
-                  <a:tcPr anchor="ctr"/>
-                </a:tc>
-                <a:tc>
-                  <a:txBody>
-                    <a:bodyPr/>
-                    <a:lstStyle/>
-                    <a:p>
-                      <a:pPr algn="ctr"/>
-                      <a:r>
-                        <a:rPr sz="1800">
-                          <a:latin typeface="Malgun Gothic"/>
-                        </a:rPr>
-                        <a:t>1.00</a:t>
-                      </a:r>
-                    </a:p>
-                  </a:txBody>
-                  <a:tcPr anchor="ctr"/>
-                </a:tc>
-                <a:tc>
-                  <a:txBody>
-                    <a:bodyPr/>
-                    <a:lstStyle/>
-                    <a:p>
-                      <a:pPr algn="ctr"/>
-                      <a:r>
-                        <a:rPr sz="1800">
-                          <a:latin typeface="Malgun Gothic"/>
-                        </a:rPr>
-                        <a:t>0.48</a:t>
-                      </a:r>
-                    </a:p>
-                  </a:txBody>
-                  <a:tcPr anchor="ctr"/>
-                </a:tc>
-                <a:tc>
-                  <a:txBody>
-                    <a:bodyPr/>
-                    <a:lstStyle/>
-                    <a:p>
-                      <a:pPr algn="ctr"/>
-                      <a:r>
-                        <a:rPr sz="1800">
-                          <a:latin typeface="Malgun Gothic"/>
-                        </a:rPr>
-                        <a:t>91.1</a:t>
-                      </a:r>
-                    </a:p>
-                  </a:txBody>
-                  <a:tcPr anchor="ctr"/>
-                </a:tc>
-              </a:tr>
-              <a:tr h="548640">
-                <a:tc>
-                  <a:txBody>
-                    <a:bodyPr/>
-                    <a:lstStyle/>
-                    <a:p>
-                      <a:pPr algn="ctr"/>
-                      <a:r>
-                        <a:rPr sz="1800">
-                          <a:latin typeface="Malgun Gothic"/>
-                        </a:rPr>
-                        <a:t>강원</a:t>
-                      </a:r>
-                    </a:p>
-                  </a:txBody>
-                  <a:tcPr anchor="ctr"/>
-                </a:tc>
-                <a:tc>
-                  <a:txBody>
-                    <a:bodyPr/>
-                    <a:lstStyle/>
-                    <a:p>
-                      <a:pPr algn="ctr"/>
-                      <a:r>
-                        <a:rPr sz="1800">
-                          <a:latin typeface="Malgun Gothic"/>
-                        </a:rPr>
-                        <a:t>0.00</a:t>
-                      </a:r>
-                    </a:p>
-                  </a:txBody>
-                  <a:tcPr anchor="ctr"/>
-                </a:tc>
-                <a:tc>
-                  <a:txBody>
-                    <a:bodyPr/>
-                    <a:lstStyle/>
-                    <a:p>
-                      <a:pPr algn="ctr"/>
-                      <a:r>
-                        <a:rPr sz="1800">
-                          <a:latin typeface="Malgun Gothic"/>
-                        </a:rPr>
-                        <a:t>0.00</a:t>
-                      </a:r>
-                    </a:p>
-                  </a:txBody>
-                  <a:tcPr anchor="ctr"/>
-                </a:tc>
-                <a:tc>
-                  <a:txBody>
-                    <a:bodyPr/>
-                    <a:lstStyle/>
-                    <a:p>
-                      <a:pPr algn="ctr"/>
-                      <a:r>
-                        <a:rPr sz="1800">
-                          <a:latin typeface="Malgun Gothic"/>
-                        </a:rPr>
-                        <a:t>0.09</a:t>
-                      </a:r>
-                    </a:p>
-                  </a:txBody>
-                  <a:tcPr anchor="ctr"/>
-                </a:tc>
-                <a:tc>
-                  <a:txBody>
-                    <a:bodyPr/>
-                    <a:lstStyle/>
-                    <a:p>
-                      <a:pPr algn="ctr"/>
-                      <a:r>
-                        <a:rPr sz="1800">
-                          <a:latin typeface="Malgun Gothic"/>
-                        </a:rPr>
-                        <a:t>1.6</a:t>
-                      </a:r>
-                    </a:p>
-                  </a:txBody>
-                  <a:tcPr anchor="ctr"/>
-                </a:tc>
-              </a:tr>
-            </a:tbl>
-          </a:graphicData>
-        </a:graphic>
-      </p:graphicFrame>
-      <p:sp>
-        <p:nvSpPr>
-          <p:cNvPr id="6" name="TextBox 5"/>
-          <p:cNvSpPr txBox="1"/>
-          <p:nvPr/>
-        </p:nvSpPr>
-        <p:spPr>
-          <a:xfrm>
-            <a:off x="640080" y="4937760"/>
-            <a:ext cx="10972800" cy="4937760"/>
-          </a:xfrm>
-          <a:prstGeom prst="rect">
-            <a:avLst/>
-          </a:prstGeom>
-          <a:noFill/>
-        </p:spPr>
-        <p:txBody>
-          <a:bodyPr wrap="square">
-            <a:spAutoFit/>
-          </a:bodyPr>
-          <a:lstStyle/>
-          <a:p>
-            <a:pPr>
-              <a:spcAft>
-                <a:spcPts val="900"/>
-              </a:spcAft>
-            </a:pPr>
-            <a:r>
-              <a:rPr sz="1800">
-                <a:solidFill>
-                  <a:srgbClr val="222222"/>
-                </a:solidFill>
-                <a:latin typeface="Malgun Gothic"/>
-              </a:rPr>
-              <a:t>• 서울: 변호사·사건부담 두 축 모두 전국 최상(1.0) → 거의 만점</a:t>
-            </a:r>
-          </a:p>
-          <a:p>
-            <a:pPr>
-              <a:spcAft>
-                <a:spcPts val="900"/>
-              </a:spcAft>
-            </a:pPr>
-            <a:r>
-              <a:rPr sz="1800">
-                <a:solidFill>
-                  <a:srgbClr val="222222"/>
-                </a:solidFill>
-                <a:latin typeface="Malgun Gothic"/>
-              </a:rPr>
-              <a:t>• 강원: 두 축 모두 전국 최하(0) → 바닥. LLAI는 '전국 상대 위치'를 의미</a:t>
             </a:r>
           </a:p>
         </p:txBody>

--- a/reports/발표자료.pptx
+++ b/reports/발표자료.pptx
@@ -15,6 +15,7 @@
     <p:sldId id="263" r:id="rId14"/>
     <p:sldId id="277" r:id="rId28"/>
     <p:sldId id="264" r:id="rId15"/>
+    <p:sldId id="278" r:id="rId29"/>
     <p:sldId id="265" r:id="rId16"/>
     <p:sldId id="266" r:id="rId17"/>
     <p:sldId id="267" r:id="rId18"/>
@@ -7905,7 +7906,7 @@
 </p:sld>
 </file>
 
-<file path=ppt/slides/slide3.xml><?xml version="1.0" encoding="utf-8"?>
+<file path=ppt/slides/slide23.xml><?xml version="1.0" encoding="utf-8"?>
 <p:sld xmlns:a="http://schemas.openxmlformats.org/drawingml/2006/main" xmlns:p="http://schemas.openxmlformats.org/presentationml/2006/main" xmlns:r="http://schemas.openxmlformats.org/officeDocument/2006/relationships">
   <p:cSld>
     <p:spTree>
@@ -7932,719 +7933,19 @@
           <a:noFill/>
         </p:spPr>
         <p:txBody>
-          <a:bodyPr wrap="square">
+          <a:bodyPr wrap="none">
             <a:spAutoFit/>
           </a:bodyPr>
           <a:lstStyle/>
           <a:p>
             <a:r>
-              <a:rPr sz="2800" b="1">
+              <a:rPr sz="3000" b="1">
                 <a:solidFill>
                   <a:srgbClr val="1F3A5F"/>
                 </a:solidFill>
                 <a:latin typeface="Malgun Gothic"/>
               </a:rPr>
-              <a:t>데이터 규모와 성격 — 얼마나 '빅'데이터인가</a:t>
-            </a:r>
-          </a:p>
-        </p:txBody>
-      </p:sp>
-      <p:sp>
-        <p:nvSpPr>
-          <p:cNvPr id="3" name="Rectangle 2"/>
-          <p:cNvSpPr/>
-          <p:nvPr/>
-        </p:nvSpPr>
-        <p:spPr>
-          <a:xfrm>
-            <a:off x="548640" y="1188720"/>
-            <a:ext cx="11064240" cy="38100"/>
-          </a:xfrm>
-          <a:prstGeom prst="rect">
-            <a:avLst/>
-          </a:prstGeom>
-          <a:solidFill>
-            <a:srgbClr val="C44E52"/>
-          </a:solidFill>
-          <a:ln>
-            <a:noFill/>
-          </a:ln>
-        </p:spPr>
-        <p:style>
-          <a:lnRef idx="1">
-            <a:schemeClr val="accent1"/>
-          </a:lnRef>
-          <a:fillRef idx="3">
-            <a:schemeClr val="accent1"/>
-          </a:fillRef>
-          <a:effectRef idx="2">
-            <a:schemeClr val="accent1"/>
-          </a:effectRef>
-          <a:fontRef idx="minor">
-            <a:schemeClr val="lt1"/>
-          </a:fontRef>
-        </p:style>
-        <p:txBody>
-          <a:bodyPr rtlCol="0" anchor="ctr"/>
-          <a:lstStyle/>
-          <a:p>
-            <a:pPr algn="ctr"/>
-          </a:p>
-        </p:txBody>
-      </p:sp>
-      <p:graphicFrame>
-        <p:nvGraphicFramePr>
-          <p:cNvPr id="4" name="Table 3"/>
-          <p:cNvGraphicFramePr>
-            <a:graphicFrameLocks noGrp="1"/>
-          </p:cNvGraphicFramePr>
-          <p:nvPr/>
-        </p:nvGraphicFramePr>
-        <p:xfrm>
-          <a:off x="548640" y="1417320"/>
-          <a:ext cx="11064240" cy="2560320"/>
-        </p:xfrm>
-        <a:graphic>
-          <a:graphicData uri="http://schemas.openxmlformats.org/drawingml/2006/table">
-            <a:tbl>
-              <a:tblPr firstRow="1" bandRow="1">
-                <a:tableStyleId>{5C22544A-7EE6-4342-B048-85BDC9FD1C3A}</a:tableStyleId>
-              </a:tblPr>
-              <a:tblGrid>
-                <a:gridCol w="2766060"/>
-                <a:gridCol w="2766060"/>
-                <a:gridCol w="2766060"/>
-                <a:gridCol w="2766060"/>
-              </a:tblGrid>
-              <a:tr h="365760">
-                <a:tc>
-                  <a:txBody>
-                    <a:bodyPr/>
-                    <a:lstStyle/>
-                    <a:p>
-                      <a:pPr algn="l"/>
-                      <a:r>
-                        <a:rPr sz="1200" b="1">
-                          <a:solidFill>
-                            <a:srgbClr val="FFFFFF"/>
-                          </a:solidFill>
-                          <a:latin typeface="Malgun Gothic"/>
-                        </a:rPr>
-                        <a:t>출처</a:t>
-                      </a:r>
-                    </a:p>
-                  </a:txBody>
-                  <a:tcPr anchor="ctr">
-                    <a:solidFill>
-                      <a:srgbClr val="1F3A5F"/>
-                    </a:solidFill>
-                  </a:tcPr>
-                </a:tc>
-                <a:tc>
-                  <a:txBody>
-                    <a:bodyPr/>
-                    <a:lstStyle/>
-                    <a:p>
-                      <a:pPr algn="ctr"/>
-                      <a:r>
-                        <a:rPr sz="1200" b="1">
-                          <a:solidFill>
-                            <a:srgbClr val="FFFFFF"/>
-                          </a:solidFill>
-                          <a:latin typeface="Malgun Gothic"/>
-                        </a:rPr>
-                        <a:t>형식</a:t>
-                      </a:r>
-                    </a:p>
-                  </a:txBody>
-                  <a:tcPr anchor="ctr">
-                    <a:solidFill>
-                      <a:srgbClr val="1F3A5F"/>
-                    </a:solidFill>
-                  </a:tcPr>
-                </a:tc>
-                <a:tc>
-                  <a:txBody>
-                    <a:bodyPr/>
-                    <a:lstStyle/>
-                    <a:p>
-                      <a:pPr algn="ctr"/>
-                      <a:r>
-                        <a:rPr sz="1200" b="1">
-                          <a:solidFill>
-                            <a:srgbClr val="FFFFFF"/>
-                          </a:solidFill>
-                          <a:latin typeface="Malgun Gothic"/>
-                        </a:rPr>
-                        <a:t>규모</a:t>
-                      </a:r>
-                    </a:p>
-                  </a:txBody>
-                  <a:tcPr anchor="ctr">
-                    <a:solidFill>
-                      <a:srgbClr val="1F3A5F"/>
-                    </a:solidFill>
-                  </a:tcPr>
-                </a:tc>
-                <a:tc>
-                  <a:txBody>
-                    <a:bodyPr/>
-                    <a:lstStyle/>
-                    <a:p>
-                      <a:pPr algn="ctr"/>
-                      <a:r>
-                        <a:rPr sz="1200" b="1">
-                          <a:solidFill>
-                            <a:srgbClr val="FFFFFF"/>
-                          </a:solidFill>
-                          <a:latin typeface="Malgun Gothic"/>
-                        </a:rPr>
-                        <a:t>기간</a:t>
-                      </a:r>
-                    </a:p>
-                  </a:txBody>
-                  <a:tcPr anchor="ctr">
-                    <a:solidFill>
-                      <a:srgbClr val="1F3A5F"/>
-                    </a:solidFill>
-                  </a:tcPr>
-                </a:tc>
-              </a:tr>
-              <a:tr h="365760">
-                <a:tc>
-                  <a:txBody>
-                    <a:bodyPr/>
-                    <a:lstStyle/>
-                    <a:p>
-                      <a:pPr algn="l"/>
-                      <a:r>
-                        <a:rPr sz="1200">
-                          <a:latin typeface="Malgun Gothic"/>
-                        </a:rPr>
-                        <a:t>사법연감(법원)</a:t>
-                      </a:r>
-                    </a:p>
-                  </a:txBody>
-                  <a:tcPr anchor="ctr"/>
-                </a:tc>
-                <a:tc>
-                  <a:txBody>
-                    <a:bodyPr/>
-                    <a:lstStyle/>
-                    <a:p>
-                      <a:pPr algn="ctr"/>
-                      <a:r>
-                        <a:rPr sz="1200">
-                          <a:latin typeface="Malgun Gothic"/>
-                        </a:rPr>
-                        <a:t>엑셀 19파일·다중시트</a:t>
-                      </a:r>
-                    </a:p>
-                  </a:txBody>
-                  <a:tcPr anchor="ctr"/>
-                </a:tc>
-                <a:tc>
-                  <a:txBody>
-                    <a:bodyPr/>
-                    <a:lstStyle/>
-                    <a:p>
-                      <a:pPr algn="ctr"/>
-                      <a:r>
-                        <a:rPr sz="1200">
-                          <a:latin typeface="Malgun Gothic"/>
-                        </a:rPr>
-                        <a:t>약 140만 셀</a:t>
-                      </a:r>
-                    </a:p>
-                  </a:txBody>
-                  <a:tcPr anchor="ctr"/>
-                </a:tc>
-                <a:tc>
-                  <a:txBody>
-                    <a:bodyPr/>
-                    <a:lstStyle/>
-                    <a:p>
-                      <a:pPr algn="ctr"/>
-                      <a:r>
-                        <a:rPr sz="1200">
-                          <a:latin typeface="Malgun Gothic"/>
-                        </a:rPr>
-                        <a:t>2024</a:t>
-                      </a:r>
-                    </a:p>
-                  </a:txBody>
-                  <a:tcPr anchor="ctr"/>
-                </a:tc>
-              </a:tr>
-              <a:tr h="365760">
-                <a:tc>
-                  <a:txBody>
-                    <a:bodyPr/>
-                    <a:lstStyle/>
-                    <a:p>
-                      <a:pPr algn="l"/>
-                      <a:r>
-                        <a:rPr sz="1200">
-                          <a:latin typeface="Malgun Gothic"/>
-                        </a:rPr>
-                        <a:t>KOSIS 기초수급자</a:t>
-                      </a:r>
-                    </a:p>
-                  </a:txBody>
-                  <a:tcPr anchor="ctr"/>
-                </a:tc>
-                <a:tc>
-                  <a:txBody>
-                    <a:bodyPr/>
-                    <a:lstStyle/>
-                    <a:p>
-                      <a:pPr algn="ctr"/>
-                      <a:r>
-                        <a:rPr sz="1200">
-                          <a:latin typeface="Malgun Gothic"/>
-                        </a:rPr>
-                        <a:t>CSV</a:t>
-                      </a:r>
-                    </a:p>
-                  </a:txBody>
-                  <a:tcPr anchor="ctr"/>
-                </a:tc>
-                <a:tc>
-                  <a:txBody>
-                    <a:bodyPr/>
-                    <a:lstStyle/>
-                    <a:p>
-                      <a:pPr algn="ctr"/>
-                      <a:r>
-                        <a:rPr sz="1200">
-                          <a:latin typeface="Malgun Gothic"/>
-                        </a:rPr>
-                        <a:t>6,589행 × 22열</a:t>
-                      </a:r>
-                    </a:p>
-                  </a:txBody>
-                  <a:tcPr anchor="ctr"/>
-                </a:tc>
-                <a:tc>
-                  <a:txBody>
-                    <a:bodyPr/>
-                    <a:lstStyle/>
-                    <a:p>
-                      <a:pPr algn="ctr"/>
-                      <a:r>
-                        <a:rPr sz="1200">
-                          <a:latin typeface="Malgun Gothic"/>
-                        </a:rPr>
-                        <a:t>2009~24</a:t>
-                      </a:r>
-                    </a:p>
-                  </a:txBody>
-                  <a:tcPr anchor="ctr"/>
-                </a:tc>
-              </a:tr>
-              <a:tr h="365760">
-                <a:tc>
-                  <a:txBody>
-                    <a:bodyPr/>
-                    <a:lstStyle/>
-                    <a:p>
-                      <a:pPr algn="l"/>
-                      <a:r>
-                        <a:rPr sz="1200">
-                          <a:latin typeface="Malgun Gothic"/>
-                        </a:rPr>
-                        <a:t>KOSIS 인구·GRDP</a:t>
-                      </a:r>
-                    </a:p>
-                  </a:txBody>
-                  <a:tcPr anchor="ctr"/>
-                </a:tc>
-                <a:tc>
-                  <a:txBody>
-                    <a:bodyPr/>
-                    <a:lstStyle/>
-                    <a:p>
-                      <a:pPr algn="ctr"/>
-                      <a:r>
-                        <a:rPr sz="1200">
-                          <a:latin typeface="Malgun Gothic"/>
-                        </a:rPr>
-                        <a:t>CSV 가로형(다중헤더)</a:t>
-                      </a:r>
-                    </a:p>
-                  </a:txBody>
-                  <a:tcPr anchor="ctr"/>
-                </a:tc>
-                <a:tc>
-                  <a:txBody>
-                    <a:bodyPr/>
-                    <a:lstStyle/>
-                    <a:p>
-                      <a:pPr algn="ctr"/>
-                      <a:r>
-                        <a:rPr sz="1200">
-                          <a:latin typeface="Malgun Gothic"/>
-                        </a:rPr>
-                        <a:t>20행 × 55~61열</a:t>
-                      </a:r>
-                    </a:p>
-                  </a:txBody>
-                  <a:tcPr anchor="ctr"/>
-                </a:tc>
-                <a:tc>
-                  <a:txBody>
-                    <a:bodyPr/>
-                    <a:lstStyle/>
-                    <a:p>
-                      <a:pPr algn="ctr"/>
-                      <a:r>
-                        <a:rPr sz="1200">
-                          <a:latin typeface="Malgun Gothic"/>
-                        </a:rPr>
-                        <a:t>2008~25</a:t>
-                      </a:r>
-                    </a:p>
-                  </a:txBody>
-                  <a:tcPr anchor="ctr"/>
-                </a:tc>
-              </a:tr>
-              <a:tr h="365760">
-                <a:tc>
-                  <a:txBody>
-                    <a:bodyPr/>
-                    <a:lstStyle/>
-                    <a:p>
-                      <a:pPr algn="l"/>
-                      <a:r>
-                        <a:rPr sz="1200">
-                          <a:latin typeface="Malgun Gothic"/>
-                        </a:rPr>
-                        <a:t>공단 법률구조</a:t>
-                      </a:r>
-                    </a:p>
-                  </a:txBody>
-                  <a:tcPr anchor="ctr"/>
-                </a:tc>
-                <a:tc>
-                  <a:txBody>
-                    <a:bodyPr/>
-                    <a:lstStyle/>
-                    <a:p>
-                      <a:pPr algn="ctr"/>
-                      <a:r>
-                        <a:rPr sz="1200">
-                          <a:latin typeface="Malgun Gothic"/>
-                        </a:rPr>
-                        <a:t>엑셀(반기)</a:t>
-                      </a:r>
-                    </a:p>
-                  </a:txBody>
-                  <a:tcPr anchor="ctr"/>
-                </a:tc>
-                <a:tc>
-                  <a:txBody>
-                    <a:bodyPr/>
-                    <a:lstStyle/>
-                    <a:p>
-                      <a:pPr algn="ctr"/>
-                      <a:r>
-                        <a:rPr sz="1200">
-                          <a:latin typeface="Malgun Gothic"/>
-                        </a:rPr>
-                        <a:t>민사·형사 2파일</a:t>
-                      </a:r>
-                    </a:p>
-                  </a:txBody>
-                  <a:tcPr anchor="ctr"/>
-                </a:tc>
-                <a:tc>
-                  <a:txBody>
-                    <a:bodyPr/>
-                    <a:lstStyle/>
-                    <a:p>
-                      <a:pPr algn="ctr"/>
-                      <a:r>
-                        <a:rPr sz="1200">
-                          <a:latin typeface="Malgun Gothic"/>
-                        </a:rPr>
-                        <a:t>2012~25</a:t>
-                      </a:r>
-                    </a:p>
-                  </a:txBody>
-                  <a:tcPr anchor="ctr"/>
-                </a:tc>
-              </a:tr>
-              <a:tr h="365760">
-                <a:tc>
-                  <a:txBody>
-                    <a:bodyPr/>
-                    <a:lstStyle/>
-                    <a:p>
-                      <a:pPr algn="l"/>
-                      <a:r>
-                        <a:rPr sz="1200">
-                          <a:latin typeface="Malgun Gothic"/>
-                        </a:rPr>
-                        <a:t>변협 회원현황</a:t>
-                      </a:r>
-                    </a:p>
-                  </a:txBody>
-                  <a:tcPr anchor="ctr"/>
-                </a:tc>
-                <a:tc>
-                  <a:txBody>
-                    <a:bodyPr/>
-                    <a:lstStyle/>
-                    <a:p>
-                      <a:pPr algn="ctr"/>
-                      <a:r>
-                        <a:rPr sz="1200">
-                          <a:latin typeface="Malgun Gothic"/>
-                        </a:rPr>
-                        <a:t>웹 스크래핑(HTML)</a:t>
-                      </a:r>
-                    </a:p>
-                  </a:txBody>
-                  <a:tcPr anchor="ctr"/>
-                </a:tc>
-                <a:tc>
-                  <a:txBody>
-                    <a:bodyPr/>
-                    <a:lstStyle/>
-                    <a:p>
-                      <a:pPr algn="ctr"/>
-                      <a:r>
-                        <a:rPr sz="1200">
-                          <a:latin typeface="Malgun Gothic"/>
-                        </a:rPr>
-                        <a:t>14행(스냅샷)</a:t>
-                      </a:r>
-                    </a:p>
-                  </a:txBody>
-                  <a:tcPr anchor="ctr"/>
-                </a:tc>
-                <a:tc>
-                  <a:txBody>
-                    <a:bodyPr/>
-                    <a:lstStyle/>
-                    <a:p>
-                      <a:pPr algn="ctr"/>
-                      <a:r>
-                        <a:rPr sz="1200">
-                          <a:latin typeface="Malgun Gothic"/>
-                        </a:rPr>
-                        <a:t>현재</a:t>
-                      </a:r>
-                    </a:p>
-                  </a:txBody>
-                  <a:tcPr anchor="ctr"/>
-                </a:tc>
-              </a:tr>
-              <a:tr h="365760">
-                <a:tc>
-                  <a:txBody>
-                    <a:bodyPr/>
-                    <a:lstStyle/>
-                    <a:p>
-                      <a:pPr algn="l"/>
-                      <a:r>
-                        <a:rPr sz="1200">
-                          <a:latin typeface="Malgun Gothic"/>
-                        </a:rPr>
-                        <a:t>시도 경계</a:t>
-                      </a:r>
-                    </a:p>
-                  </a:txBody>
-                  <a:tcPr anchor="ctr"/>
-                </a:tc>
-                <a:tc>
-                  <a:txBody>
-                    <a:bodyPr/>
-                    <a:lstStyle/>
-                    <a:p>
-                      <a:pPr algn="ctr"/>
-                      <a:r>
-                        <a:rPr sz="1200">
-                          <a:latin typeface="Malgun Gothic"/>
-                        </a:rPr>
-                        <a:t>GeoJSON</a:t>
-                      </a:r>
-                    </a:p>
-                  </a:txBody>
-                  <a:tcPr anchor="ctr"/>
-                </a:tc>
-                <a:tc>
-                  <a:txBody>
-                    <a:bodyPr/>
-                    <a:lstStyle/>
-                    <a:p>
-                      <a:pPr algn="ctr"/>
-                      <a:r>
-                        <a:rPr sz="1200">
-                          <a:latin typeface="Malgun Gothic"/>
-                        </a:rPr>
-                        <a:t>17폴리곤 · 7.5MB</a:t>
-                      </a:r>
-                    </a:p>
-                  </a:txBody>
-                  <a:tcPr anchor="ctr"/>
-                </a:tc>
-                <a:tc>
-                  <a:txBody>
-                    <a:bodyPr/>
-                    <a:lstStyle/>
-                    <a:p>
-                      <a:pPr algn="ctr"/>
-                      <a:r>
-                        <a:rPr sz="1200">
-                          <a:latin typeface="Malgun Gothic"/>
-                        </a:rPr>
-                        <a:t>2018</a:t>
-                      </a:r>
-                    </a:p>
-                  </a:txBody>
-                  <a:tcPr anchor="ctr"/>
-                </a:tc>
-              </a:tr>
-            </a:tbl>
-          </a:graphicData>
-        </a:graphic>
-      </p:graphicFrame>
-      <p:sp>
-        <p:nvSpPr>
-          <p:cNvPr id="5" name="TextBox 4"/>
-          <p:cNvSpPr txBox="1"/>
-          <p:nvPr/>
-        </p:nvSpPr>
-        <p:spPr>
-          <a:xfrm>
-            <a:off x="640080" y="4160520"/>
-            <a:ext cx="10972800" cy="2377440"/>
-          </a:xfrm>
-          <a:prstGeom prst="rect">
-            <a:avLst/>
-          </a:prstGeom>
-          <a:noFill/>
-        </p:spPr>
-        <p:txBody>
-          <a:bodyPr wrap="square">
-            <a:spAutoFit/>
-          </a:bodyPr>
-          <a:lstStyle/>
-          <a:p>
-            <a:pPr>
-              <a:spcAft>
-                <a:spcPts val="700"/>
-              </a:spcAft>
-            </a:pPr>
-            <a:r>
-              <a:rPr sz="1700">
-                <a:solidFill>
-                  <a:srgbClr val="222222"/>
-                </a:solidFill>
-                <a:latin typeface="Malgun Gothic"/>
-              </a:rPr>
-              <a:t>• 원천 ~155만 셀 → 정제 → 분석패널 234·180행 → LLAI 횡단면 13행</a:t>
-            </a:r>
-          </a:p>
-          <a:p>
-            <a:pPr>
-              <a:spcAft>
-                <a:spcPts val="700"/>
-              </a:spcAft>
-            </a:pPr>
-            <a:r>
-              <a:rPr sz="1700">
-                <a:solidFill>
-                  <a:srgbClr val="222222"/>
-                </a:solidFill>
-                <a:latin typeface="Malgun Gothic"/>
-              </a:rPr>
-              <a:t>• Volume(양)은 중간 — 핵심은 Variety(5출처·4형식)·Veracity(이종 지역단위 정합)</a:t>
-            </a:r>
-          </a:p>
-          <a:p>
-            <a:pPr lvl="1">
-              <a:spcAft>
-                <a:spcPts val="700"/>
-              </a:spcAft>
-            </a:pPr>
-            <a:r>
-              <a:rPr sz="1500">
-                <a:solidFill>
-                  <a:srgbClr val="222222"/>
-                </a:solidFill>
-                <a:latin typeface="Malgun Gothic"/>
-              </a:rPr>
-              <a:t>– 작업 무게중심 = 수집·정제(ETL) 파이프라인</a:t>
-            </a:r>
-          </a:p>
-          <a:p>
-            <a:pPr>
-              <a:spcAft>
-                <a:spcPts val="700"/>
-              </a:spcAft>
-            </a:pPr>
-            <a:r>
-              <a:rPr sz="1700">
-                <a:solidFill>
-                  <a:srgbClr val="222222"/>
-                </a:solidFill>
-                <a:latin typeface="Malgun Gothic"/>
-              </a:rPr>
-              <a:t>• 방법론: 데이터엔지니어링(ETL) · 합성지표 · 가설검정 · 군집(K-means) · 공간시각화</a:t>
-            </a:r>
-          </a:p>
-        </p:txBody>
-      </p:sp>
-    </p:spTree>
-  </p:cSld>
-  <p:clrMapOvr>
-    <a:masterClrMapping/>
-  </p:clrMapOvr>
-</p:sld>
-</file>
-
-<file path=ppt/slides/slide4.xml><?xml version="1.0" encoding="utf-8"?>
-<p:sld xmlns:a="http://schemas.openxmlformats.org/drawingml/2006/main" xmlns:p="http://schemas.openxmlformats.org/presentationml/2006/main" xmlns:r="http://schemas.openxmlformats.org/officeDocument/2006/relationships">
-  <p:cSld>
-    <p:spTree>
-      <p:nvGrpSpPr>
-        <p:cNvPr id="1" name=""/>
-        <p:cNvGrpSpPr/>
-        <p:nvPr/>
-      </p:nvGrpSpPr>
-      <p:grpSpPr/>
-      <p:sp>
-        <p:nvSpPr>
-          <p:cNvPr id="2" name="TextBox 1"/>
-          <p:cNvSpPr txBox="1"/>
-          <p:nvPr/>
-        </p:nvSpPr>
-        <p:spPr>
-          <a:xfrm>
-            <a:off x="502920" y="320040"/>
-            <a:ext cx="11155680" cy="914400"/>
-          </a:xfrm>
-          <a:prstGeom prst="rect">
-            <a:avLst/>
-          </a:prstGeom>
-          <a:noFill/>
-        </p:spPr>
-        <p:txBody>
-          <a:bodyPr wrap="square">
-            <a:spAutoFit/>
-          </a:bodyPr>
-          <a:lstStyle/>
-          <a:p>
-            <a:r>
-              <a:rPr sz="3000" b="1">
-                <a:solidFill>
-                  <a:srgbClr val="1F3A5F"/>
-                </a:solidFill>
-                <a:latin typeface="Malgun Gothic"/>
-              </a:rPr>
-              <a:t>핵심 요약 — 한 눈에 보기</a:t>
+              <a:t>분석 기법 한눈에</a:t>
             </a:r>
           </a:p>
         </p:txBody>
@@ -8701,8 +8002,8 @@
           <p:nvPr/>
         </p:nvGraphicFramePr>
         <p:xfrm>
-          <a:off x="640080" y="1645920"/>
-          <a:ext cx="10881360" cy="4206240"/>
+          <a:off x="640080" y="1463040"/>
+          <a:ext cx="10881360" cy="4754880"/>
         </p:xfrm>
         <a:graphic>
           <a:graphicData uri="http://schemas.openxmlformats.org/drawingml/2006/table">
@@ -8711,24 +8012,24 @@
                 <a:tableStyleId>{5C22544A-7EE6-4342-B048-85BDC9FD1C3A}</a:tableStyleId>
               </a:tblPr>
               <a:tblGrid>
-                <a:gridCol w="5440680"/>
-                <a:gridCol w="5440680"/>
+                <a:gridCol w="2743200"/>
+                <a:gridCol w="8138160"/>
               </a:tblGrid>
-              <a:tr h="701040">
-                <a:tc>
-                  <a:txBody>
-                    <a:bodyPr/>
-                    <a:lstStyle/>
-                    <a:p>
-                      <a:pPr algn="ctr"/>
-                      <a:r>
-                        <a:rPr sz="1500" b="1">
+              <a:tr h="528320">
+                <a:tc>
+                  <a:txBody>
+                    <a:bodyPr/>
+                    <a:lstStyle/>
+                    <a:p>
+                      <a:pPr algn="ctr"/>
+                      <a:r>
+                        <a:rPr sz="1300" b="1">
                           <a:solidFill>
                             <a:srgbClr val="FFFFFF"/>
                           </a:solidFill>
                           <a:latin typeface="Malgun Gothic"/>
                         </a:rPr>
-                        <a:t>항목</a:t>
+                        <a:t>기법</a:t>
                       </a:r>
                     </a:p>
                   </a:txBody>
@@ -8743,15 +8044,15 @@
                     <a:bodyPr/>
                     <a:lstStyle/>
                     <a:p>
-                      <a:pPr algn="ctr"/>
-                      <a:r>
-                        <a:rPr sz="1500" b="1">
+                      <a:pPr algn="l"/>
+                      <a:r>
+                        <a:rPr sz="1300" b="1">
                           <a:solidFill>
                             <a:srgbClr val="FFFFFF"/>
                           </a:solidFill>
                           <a:latin typeface="Malgun Gothic"/>
                         </a:rPr>
-                        <a:t>내용</a:t>
+                        <a:t>무엇을 / 어떻게</a:t>
                       </a:r>
                     </a:p>
                   </a:txBody>
@@ -8762,170 +8063,272 @@
                   </a:tcPr>
                 </a:tc>
               </a:tr>
-              <a:tr h="701040">
-                <a:tc>
-                  <a:txBody>
-                    <a:bodyPr/>
-                    <a:lstStyle/>
-                    <a:p>
-                      <a:pPr algn="ctr"/>
-                      <a:r>
-                        <a:rPr sz="1500">
-                          <a:latin typeface="Malgun Gothic"/>
-                        </a:rPr>
-                        <a:t>문제</a:t>
-                      </a:r>
-                    </a:p>
-                  </a:txBody>
-                  <a:tcPr anchor="ctr"/>
-                </a:tc>
-                <a:tc>
-                  <a:txBody>
-                    <a:bodyPr/>
-                    <a:lstStyle/>
-                    <a:p>
-                      <a:pPr algn="ctr"/>
-                      <a:r>
-                        <a:rPr sz="1500">
-                          <a:latin typeface="Malgun Gothic"/>
-                        </a:rPr>
-                        <a:t>변호사·법원·법률구조 자원의 지역별 접근성 불균형 정량화</a:t>
+              <a:tr h="528320">
+                <a:tc>
+                  <a:txBody>
+                    <a:bodyPr/>
+                    <a:lstStyle/>
+                    <a:p>
+                      <a:pPr algn="ctr"/>
+                      <a:r>
+                        <a:rPr sz="1300">
+                          <a:latin typeface="Malgun Gothic"/>
+                        </a:rPr>
+                        <a:t>Min-Max 정규화</a:t>
+                      </a:r>
+                    </a:p>
+                  </a:txBody>
+                  <a:tcPr anchor="ctr"/>
+                </a:tc>
+                <a:tc>
+                  <a:txBody>
+                    <a:bodyPr/>
+                    <a:lstStyle/>
+                    <a:p>
+                      <a:pPr algn="l"/>
+                      <a:r>
+                        <a:rPr sz="1300">
+                          <a:latin typeface="Malgun Gothic"/>
+                        </a:rPr>
+                        <a:t>지표를 0~1로 통일 (A2는 1−값으로 방향 보정)</a:t>
                       </a:r>
                     </a:p>
                   </a:txBody>
                   <a:tcPr anchor="ctr"/>
                 </a:tc>
               </a:tr>
-              <a:tr h="701040">
-                <a:tc>
-                  <a:txBody>
-                    <a:bodyPr/>
-                    <a:lstStyle/>
-                    <a:p>
-                      <a:pPr algn="ctr"/>
-                      <a:r>
-                        <a:rPr sz="1500">
-                          <a:latin typeface="Malgun Gothic"/>
-                        </a:rPr>
-                        <a:t>방법</a:t>
-                      </a:r>
-                    </a:p>
-                  </a:txBody>
-                  <a:tcPr anchor="ctr"/>
-                </a:tc>
-                <a:tc>
-                  <a:txBody>
-                    <a:bodyPr/>
-                    <a:lstStyle/>
-                    <a:p>
-                      <a:pPr algn="ctr"/>
-                      <a:r>
-                        <a:rPr sz="1500">
-                          <a:latin typeface="Malgun Gothic"/>
-                        </a:rPr>
-                        <a:t>3개 차원(A1 변호사·A2 사건부담·A3 취약계층) → 단일 지수 LLAI(0~100)</a:t>
+              <a:tr h="528320">
+                <a:tc>
+                  <a:txBody>
+                    <a:bodyPr/>
+                    <a:lstStyle/>
+                    <a:p>
+                      <a:pPr algn="ctr"/>
+                      <a:r>
+                        <a:rPr sz="1300">
+                          <a:latin typeface="Malgun Gothic"/>
+                        </a:rPr>
+                        <a:t>가중치 3종</a:t>
+                      </a:r>
+                    </a:p>
+                  </a:txBody>
+                  <a:tcPr anchor="ctr"/>
+                </a:tc>
+                <a:tc>
+                  <a:txBody>
+                    <a:bodyPr/>
+                    <a:lstStyle/>
+                    <a:p>
+                      <a:pPr algn="l"/>
+                      <a:r>
+                        <a:rPr sz="1300">
+                          <a:latin typeface="Malgun Gothic"/>
+                        </a:rPr>
+                        <a:t>균등 / 엔트로피(변별력 큰 지표↑) / PCA(공통 변동 축)</a:t>
                       </a:r>
                     </a:p>
                   </a:txBody>
                   <a:tcPr anchor="ctr"/>
                 </a:tc>
               </a:tr>
-              <a:tr h="701040">
-                <a:tc>
-                  <a:txBody>
-                    <a:bodyPr/>
-                    <a:lstStyle/>
-                    <a:p>
-                      <a:pPr algn="ctr"/>
-                      <a:r>
-                        <a:rPr sz="1500">
-                          <a:latin typeface="Malgun Gothic"/>
-                        </a:rPr>
-                        <a:t>데이터</a:t>
-                      </a:r>
-                    </a:p>
-                  </a:txBody>
-                  <a:tcPr anchor="ctr"/>
-                </a:tc>
-                <a:tc>
-                  <a:txBody>
-                    <a:bodyPr/>
-                    <a:lstStyle/>
-                    <a:p>
-                      <a:pPr algn="ctr"/>
-                      <a:r>
-                        <a:rPr sz="1500">
-                          <a:latin typeface="Malgun Gothic"/>
-                        </a:rPr>
-                        <a:t>변협·사법연감·공단·KOSIS / 13권역·10도단위 / 기준 2024</a:t>
+              <a:tr h="528320">
+                <a:tc>
+                  <a:txBody>
+                    <a:bodyPr/>
+                    <a:lstStyle/>
+                    <a:p>
+                      <a:pPr algn="ctr"/>
+                      <a:r>
+                        <a:rPr sz="1300">
+                          <a:latin typeface="Malgun Gothic"/>
+                        </a:rPr>
+                        <a:t>합성지표 LLAI</a:t>
+                      </a:r>
+                    </a:p>
+                  </a:txBody>
+                  <a:tcPr anchor="ctr"/>
+                </a:tc>
+                <a:tc>
+                  <a:txBody>
+                    <a:bodyPr/>
+                    <a:lstStyle/>
+                    <a:p>
+                      <a:pPr algn="l"/>
+                      <a:r>
+                        <a:rPr sz="1300">
+                          <a:latin typeface="Malgun Gothic"/>
+                        </a:rPr>
+                        <a:t>정규화 지표의 가중 평균 ×100 (0~100)</a:t>
                       </a:r>
                     </a:p>
                   </a:txBody>
                   <a:tcPr anchor="ctr"/>
                 </a:tc>
               </a:tr>
-              <a:tr h="701040">
-                <a:tc>
-                  <a:txBody>
-                    <a:bodyPr/>
-                    <a:lstStyle/>
-                    <a:p>
-                      <a:pPr algn="ctr"/>
-                      <a:r>
-                        <a:rPr sz="1500">
-                          <a:latin typeface="Malgun Gothic"/>
-                        </a:rPr>
-                        <a:t>핵심 발견</a:t>
-                      </a:r>
-                    </a:p>
-                  </a:txBody>
-                  <a:tcPr anchor="ctr"/>
-                </a:tc>
-                <a:tc>
-                  <a:txBody>
-                    <a:bodyPr/>
-                    <a:lstStyle/>
-                    <a:p>
-                      <a:pPr algn="ctr"/>
-                      <a:r>
-                        <a:rPr sz="1500">
-                          <a:latin typeface="Malgun Gothic"/>
-                        </a:rPr>
-                        <a:t>① 서울 일극(91 vs 2~24) ② 변호사↑→부담↓(r=−0.85) ③ 수도권우위=서울단독 ④ 변호사 3.4배↑에도 서울집중 71%→76%</a:t>
+              <a:tr h="528320">
+                <a:tc>
+                  <a:txBody>
+                    <a:bodyPr/>
+                    <a:lstStyle/>
+                    <a:p>
+                      <a:pPr algn="ctr"/>
+                      <a:r>
+                        <a:rPr sz="1300">
+                          <a:latin typeface="Malgun Gothic"/>
+                        </a:rPr>
+                        <a:t>상관분석</a:t>
+                      </a:r>
+                    </a:p>
+                  </a:txBody>
+                  <a:tcPr anchor="ctr"/>
+                </a:tc>
+                <a:tc>
+                  <a:txBody>
+                    <a:bodyPr/>
+                    <a:lstStyle/>
+                    <a:p>
+                      <a:pPr algn="l"/>
+                      <a:r>
+                        <a:rPr sz="1300">
+                          <a:latin typeface="Malgun Gothic"/>
+                        </a:rPr>
+                        <a:t>Pearson r · Spearman ρ — H2(A1↔A2), H3(GRDP)</a:t>
                       </a:r>
                     </a:p>
                   </a:txBody>
                   <a:tcPr anchor="ctr"/>
                 </a:tc>
               </a:tr>
-              <a:tr h="701040">
-                <a:tc>
-                  <a:txBody>
-                    <a:bodyPr/>
-                    <a:lstStyle/>
-                    <a:p>
-                      <a:pPr algn="ctr"/>
-                      <a:r>
-                        <a:rPr sz="1500">
-                          <a:latin typeface="Malgun Gothic"/>
-                        </a:rPr>
-                        <a:t>결론</a:t>
-                      </a:r>
-                    </a:p>
-                  </a:txBody>
-                  <a:tcPr anchor="ctr"/>
-                </a:tc>
-                <a:tc>
-                  <a:txBody>
-                    <a:bodyPr/>
-                    <a:lstStyle/>
-                    <a:p>
-                      <a:pPr algn="ctr"/>
-                      <a:r>
-                        <a:rPr sz="1500">
-                          <a:latin typeface="Malgun Gothic"/>
-                        </a:rPr>
-                        <a:t>인구 대비·사건부담이 접근성 좌우 / 양적 팽창만으론 격차 해소 안 됨</a:t>
+              <a:tr h="528320">
+                <a:tc>
+                  <a:txBody>
+                    <a:bodyPr/>
+                    <a:lstStyle/>
+                    <a:p>
+                      <a:pPr algn="ctr"/>
+                      <a:r>
+                        <a:rPr sz="1300">
+                          <a:latin typeface="Malgun Gothic"/>
+                        </a:rPr>
+                        <a:t>집단 비교</a:t>
+                      </a:r>
+                    </a:p>
+                  </a:txBody>
+                  <a:tcPr anchor="ctr"/>
+                </a:tc>
+                <a:tc>
+                  <a:txBody>
+                    <a:bodyPr/>
+                    <a:lstStyle/>
+                    <a:p>
+                      <a:pPr algn="l"/>
+                      <a:r>
+                        <a:rPr sz="1300">
+                          <a:latin typeface="Malgun Gothic"/>
+                        </a:rPr>
+                        <a:t>Mann-Whitney U(비모수) — 수도권 vs 비수도권, H1</a:t>
+                      </a:r>
+                    </a:p>
+                  </a:txBody>
+                  <a:tcPr anchor="ctr"/>
+                </a:tc>
+              </a:tr>
+              <a:tr h="528320">
+                <a:tc>
+                  <a:txBody>
+                    <a:bodyPr/>
+                    <a:lstStyle/>
+                    <a:p>
+                      <a:pPr algn="ctr"/>
+                      <a:r>
+                        <a:rPr sz="1300">
+                          <a:latin typeface="Malgun Gothic"/>
+                        </a:rPr>
+                        <a:t>군집분석</a:t>
+                      </a:r>
+                    </a:p>
+                  </a:txBody>
+                  <a:tcPr anchor="ctr"/>
+                </a:tc>
+                <a:tc>
+                  <a:txBody>
+                    <a:bodyPr/>
+                    <a:lstStyle/>
+                    <a:p>
+                      <a:pPr algn="l"/>
+                      <a:r>
+                        <a:rPr sz="1300">
+                          <a:latin typeface="Malgun Gothic"/>
+                        </a:rPr>
+                        <a:t>K-means + Elbow·Silhouette로 최적 K — 유형 그룹화</a:t>
+                      </a:r>
+                    </a:p>
+                  </a:txBody>
+                  <a:tcPr anchor="ctr"/>
+                </a:tc>
+              </a:tr>
+              <a:tr h="528320">
+                <a:tc>
+                  <a:txBody>
+                    <a:bodyPr/>
+                    <a:lstStyle/>
+                    <a:p>
+                      <a:pPr algn="ctr"/>
+                      <a:r>
+                        <a:rPr sz="1300">
+                          <a:latin typeface="Malgun Gothic"/>
+                        </a:rPr>
+                        <a:t>집중도</a:t>
+                      </a:r>
+                    </a:p>
+                  </a:txBody>
+                  <a:tcPr anchor="ctr"/>
+                </a:tc>
+                <a:tc>
+                  <a:txBody>
+                    <a:bodyPr/>
+                    <a:lstStyle/>
+                    <a:p>
+                      <a:pPr algn="l"/>
+                      <a:r>
+                        <a:rPr sz="1300">
+                          <a:latin typeface="Malgun Gothic"/>
+                        </a:rPr>
+                        <a:t>HHI · 변동계수 — 2009 vs 2026 격차 변화, H4</a:t>
+                      </a:r>
+                    </a:p>
+                  </a:txBody>
+                  <a:tcPr anchor="ctr"/>
+                </a:tc>
+              </a:tr>
+              <a:tr h="528320">
+                <a:tc>
+                  <a:txBody>
+                    <a:bodyPr/>
+                    <a:lstStyle/>
+                    <a:p>
+                      <a:pPr algn="ctr"/>
+                      <a:r>
+                        <a:rPr sz="1300">
+                          <a:latin typeface="Malgun Gothic"/>
+                        </a:rPr>
+                        <a:t>공간 시각화</a:t>
+                      </a:r>
+                    </a:p>
+                  </a:txBody>
+                  <a:tcPr anchor="ctr"/>
+                </a:tc>
+                <a:tc>
+                  <a:txBody>
+                    <a:bodyPr/>
+                    <a:lstStyle/>
+                    <a:p>
+                      <a:pPr algn="l"/>
+                      <a:r>
+                        <a:rPr sz="1300">
+                          <a:latin typeface="Malgun Gothic"/>
+                        </a:rPr>
+                        <a:t>geopandas dissolve + 코로플레스(folium·정적)</a:t>
                       </a:r>
                     </a:p>
                   </a:txBody>
@@ -8944,7 +8347,7 @@
 </p:sld>
 </file>
 
-<file path=ppt/slides/slide5.xml><?xml version="1.0" encoding="utf-8"?>
+<file path=ppt/slides/slide3.xml><?xml version="1.0" encoding="utf-8"?>
 <p:sld xmlns:a="http://schemas.openxmlformats.org/drawingml/2006/main" xmlns:p="http://schemas.openxmlformats.org/presentationml/2006/main" xmlns:r="http://schemas.openxmlformats.org/officeDocument/2006/relationships">
   <p:cSld>
     <p:spTree>
@@ -8983,7 +8386,7 @@
                 </a:solidFill>
                 <a:latin typeface="Malgun Gothic"/>
               </a:rPr>
-              <a:t>1. 왜 이 문제인가</a:t>
+              <a:t>핵심 요약 — 한 눈에 보기</a:t>
             </a:r>
           </a:p>
         </p:txBody>
@@ -9031,93 +8434,250 @@
           </a:p>
         </p:txBody>
       </p:sp>
-      <p:sp>
-        <p:nvSpPr>
-          <p:cNvPr id="4" name="TextBox 3"/>
-          <p:cNvSpPr txBox="1"/>
+      <p:graphicFrame>
+        <p:nvGraphicFramePr>
+          <p:cNvPr id="4" name="Table 3"/>
+          <p:cNvGraphicFramePr>
+            <a:graphicFrameLocks noGrp="1"/>
+          </p:cNvGraphicFramePr>
           <p:nvPr/>
-        </p:nvSpPr>
-        <p:spPr>
-          <a:xfrm>
-            <a:off x="640080" y="1554480"/>
-            <a:ext cx="10972800" cy="4937760"/>
-          </a:xfrm>
-          <a:prstGeom prst="rect">
-            <a:avLst/>
-          </a:prstGeom>
-          <a:noFill/>
-        </p:spPr>
-        <p:txBody>
-          <a:bodyPr wrap="square">
-            <a:spAutoFit/>
-          </a:bodyPr>
-          <a:lstStyle/>
-          <a:p>
-            <a:pPr>
-              <a:spcAft>
-                <a:spcPts val="900"/>
-              </a:spcAft>
-            </a:pPr>
-            <a:r>
-              <a:rPr sz="2000">
-                <a:solidFill>
-                  <a:srgbClr val="222222"/>
-                </a:solidFill>
-                <a:latin typeface="Malgun Gothic"/>
-              </a:rPr>
-              <a:t>• 로스쿨 도입(2009) 이후 변호사 4만 명 시대 — 그런데 자원은 어디에 있나?</a:t>
-            </a:r>
-          </a:p>
-          <a:p>
-            <a:pPr lvl="1">
-              <a:spcAft>
-                <a:spcPts val="900"/>
-              </a:spcAft>
-            </a:pPr>
-            <a:r>
-              <a:rPr sz="1700">
-                <a:solidFill>
-                  <a:srgbClr val="222222"/>
-                </a:solidFill>
-                <a:latin typeface="Malgun Gothic"/>
-              </a:rPr>
-              <a:t>– 서울·수도권 집중 vs 지방 부족, 취약계층 사각지대 우려</a:t>
-            </a:r>
-          </a:p>
-          <a:p>
-            <a:pPr>
-              <a:spcAft>
-                <a:spcPts val="900"/>
-              </a:spcAft>
-            </a:pPr>
-            <a:r>
-              <a:rPr sz="2000">
-                <a:solidFill>
-                  <a:srgbClr val="222222"/>
-                </a:solidFill>
-                <a:latin typeface="Malgun Gothic"/>
-              </a:rPr>
-              <a:t>• 법률 서비스 접근성의 지역 불균형 = 사법 정의와 직결된 사회 문제</a:t>
-            </a:r>
-          </a:p>
-          <a:p>
-            <a:pPr>
-              <a:spcAft>
-                <a:spcPts val="900"/>
-              </a:spcAft>
-            </a:pPr>
-            <a:r>
-              <a:rPr sz="2000">
-                <a:solidFill>
-                  <a:srgbClr val="222222"/>
-                </a:solidFill>
-                <a:latin typeface="Malgun Gothic"/>
-              </a:rPr>
-              <a:t>• 연구 질문: 어느 지역이, 얼마나 법적 보호에서 소외되는가?</a:t>
-            </a:r>
-          </a:p>
-        </p:txBody>
-      </p:sp>
+        </p:nvGraphicFramePr>
+        <p:xfrm>
+          <a:off x="640080" y="1645920"/>
+          <a:ext cx="10881360" cy="4206240"/>
+        </p:xfrm>
+        <a:graphic>
+          <a:graphicData uri="http://schemas.openxmlformats.org/drawingml/2006/table">
+            <a:tbl>
+              <a:tblPr firstRow="1" bandRow="1">
+                <a:tableStyleId>{5C22544A-7EE6-4342-B048-85BDC9FD1C3A}</a:tableStyleId>
+              </a:tblPr>
+              <a:tblGrid>
+                <a:gridCol w="5440680"/>
+                <a:gridCol w="5440680"/>
+              </a:tblGrid>
+              <a:tr h="701040">
+                <a:tc>
+                  <a:txBody>
+                    <a:bodyPr/>
+                    <a:lstStyle/>
+                    <a:p>
+                      <a:pPr algn="ctr"/>
+                      <a:r>
+                        <a:rPr sz="1500" b="1">
+                          <a:solidFill>
+                            <a:srgbClr val="FFFFFF"/>
+                          </a:solidFill>
+                          <a:latin typeface="Malgun Gothic"/>
+                        </a:rPr>
+                        <a:t>항목</a:t>
+                      </a:r>
+                    </a:p>
+                  </a:txBody>
+                  <a:tcPr anchor="ctr">
+                    <a:solidFill>
+                      <a:srgbClr val="1F3A5F"/>
+                    </a:solidFill>
+                  </a:tcPr>
+                </a:tc>
+                <a:tc>
+                  <a:txBody>
+                    <a:bodyPr/>
+                    <a:lstStyle/>
+                    <a:p>
+                      <a:pPr algn="ctr"/>
+                      <a:r>
+                        <a:rPr sz="1500" b="1">
+                          <a:solidFill>
+                            <a:srgbClr val="FFFFFF"/>
+                          </a:solidFill>
+                          <a:latin typeface="Malgun Gothic"/>
+                        </a:rPr>
+                        <a:t>내용</a:t>
+                      </a:r>
+                    </a:p>
+                  </a:txBody>
+                  <a:tcPr anchor="ctr">
+                    <a:solidFill>
+                      <a:srgbClr val="1F3A5F"/>
+                    </a:solidFill>
+                  </a:tcPr>
+                </a:tc>
+              </a:tr>
+              <a:tr h="701040">
+                <a:tc>
+                  <a:txBody>
+                    <a:bodyPr/>
+                    <a:lstStyle/>
+                    <a:p>
+                      <a:pPr algn="ctr"/>
+                      <a:r>
+                        <a:rPr sz="1500">
+                          <a:latin typeface="Malgun Gothic"/>
+                        </a:rPr>
+                        <a:t>문제</a:t>
+                      </a:r>
+                    </a:p>
+                  </a:txBody>
+                  <a:tcPr anchor="ctr"/>
+                </a:tc>
+                <a:tc>
+                  <a:txBody>
+                    <a:bodyPr/>
+                    <a:lstStyle/>
+                    <a:p>
+                      <a:pPr algn="ctr"/>
+                      <a:r>
+                        <a:rPr sz="1500">
+                          <a:latin typeface="Malgun Gothic"/>
+                        </a:rPr>
+                        <a:t>변호사·법원·법률구조 자원의 지역별 접근성 불균형 정량화</a:t>
+                      </a:r>
+                    </a:p>
+                  </a:txBody>
+                  <a:tcPr anchor="ctr"/>
+                </a:tc>
+              </a:tr>
+              <a:tr h="701040">
+                <a:tc>
+                  <a:txBody>
+                    <a:bodyPr/>
+                    <a:lstStyle/>
+                    <a:p>
+                      <a:pPr algn="ctr"/>
+                      <a:r>
+                        <a:rPr sz="1500">
+                          <a:latin typeface="Malgun Gothic"/>
+                        </a:rPr>
+                        <a:t>방법</a:t>
+                      </a:r>
+                    </a:p>
+                  </a:txBody>
+                  <a:tcPr anchor="ctr"/>
+                </a:tc>
+                <a:tc>
+                  <a:txBody>
+                    <a:bodyPr/>
+                    <a:lstStyle/>
+                    <a:p>
+                      <a:pPr algn="ctr"/>
+                      <a:r>
+                        <a:rPr sz="1500">
+                          <a:latin typeface="Malgun Gothic"/>
+                        </a:rPr>
+                        <a:t>3개 차원(A1 변호사·A2 사건부담·A3 취약계층) → 단일 지수 LLAI(0~100)</a:t>
+                      </a:r>
+                    </a:p>
+                  </a:txBody>
+                  <a:tcPr anchor="ctr"/>
+                </a:tc>
+              </a:tr>
+              <a:tr h="701040">
+                <a:tc>
+                  <a:txBody>
+                    <a:bodyPr/>
+                    <a:lstStyle/>
+                    <a:p>
+                      <a:pPr algn="ctr"/>
+                      <a:r>
+                        <a:rPr sz="1500">
+                          <a:latin typeface="Malgun Gothic"/>
+                        </a:rPr>
+                        <a:t>데이터</a:t>
+                      </a:r>
+                    </a:p>
+                  </a:txBody>
+                  <a:tcPr anchor="ctr"/>
+                </a:tc>
+                <a:tc>
+                  <a:txBody>
+                    <a:bodyPr/>
+                    <a:lstStyle/>
+                    <a:p>
+                      <a:pPr algn="ctr"/>
+                      <a:r>
+                        <a:rPr sz="1500">
+                          <a:latin typeface="Malgun Gothic"/>
+                        </a:rPr>
+                        <a:t>변협·사법연감·공단·KOSIS / 13권역·10도단위 / 기준 2024</a:t>
+                      </a:r>
+                    </a:p>
+                  </a:txBody>
+                  <a:tcPr anchor="ctr"/>
+                </a:tc>
+              </a:tr>
+              <a:tr h="701040">
+                <a:tc>
+                  <a:txBody>
+                    <a:bodyPr/>
+                    <a:lstStyle/>
+                    <a:p>
+                      <a:pPr algn="ctr"/>
+                      <a:r>
+                        <a:rPr sz="1500">
+                          <a:latin typeface="Malgun Gothic"/>
+                        </a:rPr>
+                        <a:t>핵심 발견</a:t>
+                      </a:r>
+                    </a:p>
+                  </a:txBody>
+                  <a:tcPr anchor="ctr"/>
+                </a:tc>
+                <a:tc>
+                  <a:txBody>
+                    <a:bodyPr/>
+                    <a:lstStyle/>
+                    <a:p>
+                      <a:pPr algn="ctr"/>
+                      <a:r>
+                        <a:rPr sz="1500">
+                          <a:latin typeface="Malgun Gothic"/>
+                        </a:rPr>
+                        <a:t>① 서울 일극(91 vs 2~24) ② 변호사↑→부담↓(r=−0.85) ③ 수도권우위=서울단독 ④ 변호사 3.4배↑에도 서울집중 71%→76%</a:t>
+                      </a:r>
+                    </a:p>
+                  </a:txBody>
+                  <a:tcPr anchor="ctr"/>
+                </a:tc>
+              </a:tr>
+              <a:tr h="701040">
+                <a:tc>
+                  <a:txBody>
+                    <a:bodyPr/>
+                    <a:lstStyle/>
+                    <a:p>
+                      <a:pPr algn="ctr"/>
+                      <a:r>
+                        <a:rPr sz="1500">
+                          <a:latin typeface="Malgun Gothic"/>
+                        </a:rPr>
+                        <a:t>결론</a:t>
+                      </a:r>
+                    </a:p>
+                  </a:txBody>
+                  <a:tcPr anchor="ctr"/>
+                </a:tc>
+                <a:tc>
+                  <a:txBody>
+                    <a:bodyPr/>
+                    <a:lstStyle/>
+                    <a:p>
+                      <a:pPr algn="ctr"/>
+                      <a:r>
+                        <a:rPr sz="1500">
+                          <a:latin typeface="Malgun Gothic"/>
+                        </a:rPr>
+                        <a:t>인구 대비·사건부담이 접근성 좌우 / 양적 팽창만으론 격차 해소 안 됨</a:t>
+                      </a:r>
+                    </a:p>
+                  </a:txBody>
+                  <a:tcPr anchor="ctr"/>
+                </a:tc>
+              </a:tr>
+            </a:tbl>
+          </a:graphicData>
+        </a:graphic>
+      </p:graphicFrame>
     </p:spTree>
   </p:cSld>
   <p:clrMapOvr>
@@ -9126,7 +8686,7 @@
 </p:sld>
 </file>
 
-<file path=ppt/slides/slide6.xml><?xml version="1.0" encoding="utf-8"?>
+<file path=ppt/slides/slide4.xml><?xml version="1.0" encoding="utf-8"?>
 <p:sld xmlns:a="http://schemas.openxmlformats.org/drawingml/2006/main" xmlns:p="http://schemas.openxmlformats.org/presentationml/2006/main" xmlns:r="http://schemas.openxmlformats.org/officeDocument/2006/relationships">
   <p:cSld>
     <p:spTree>
@@ -9165,7 +8725,7 @@
                 </a:solidFill>
                 <a:latin typeface="Malgun Gothic"/>
               </a:rPr>
-              <a:t>2. 접근 방법 — 종합 법률 접근성 지수(LLAI)</a:t>
+              <a:t>1. 왜 이 문제인가</a:t>
             </a:r>
           </a:p>
         </p:txBody>
@@ -9247,7 +8807,7 @@
                 </a:solidFill>
                 <a:latin typeface="Malgun Gothic"/>
               </a:rPr>
-              <a:t>• 3개 차원을 하나의 지수로 통합 (0~100)</a:t>
+              <a:t>• 로스쿨 도입(2009) 이후 변호사 4만 명 시대 — 그런데 자원은 어디에 있나?</a:t>
             </a:r>
           </a:p>
           <a:p>
@@ -9263,39 +8823,7 @@
                 </a:solidFill>
                 <a:latin typeface="Malgun Gothic"/>
               </a:rPr>
-              <a:t>– A1 변호사 접근성 — 인구 10만 명당 변호사 수 (↑ 좋음)</a:t>
-            </a:r>
-          </a:p>
-          <a:p>
-            <a:pPr lvl="1">
-              <a:spcAft>
-                <a:spcPts val="900"/>
-              </a:spcAft>
-            </a:pPr>
-            <a:r>
-              <a:rPr sz="1700">
-                <a:solidFill>
-                  <a:srgbClr val="222222"/>
-                </a:solidFill>
-                <a:latin typeface="Malgun Gothic"/>
-              </a:rPr>
-              <a:t>– A2 사건 부담 — 변호사 1인당 법원 본안사건 수 (↓ 좋음)</a:t>
-            </a:r>
-          </a:p>
-          <a:p>
-            <a:pPr lvl="1">
-              <a:spcAft>
-                <a:spcPts val="900"/>
-              </a:spcAft>
-            </a:pPr>
-            <a:r>
-              <a:rPr sz="1700">
-                <a:solidFill>
-                  <a:srgbClr val="222222"/>
-                </a:solidFill>
-                <a:latin typeface="Malgun Gothic"/>
-              </a:rPr>
-              <a:t>– A3 취약계층 접근성 — 법률구조 건수 / 저소득층 (↑ 좋음)</a:t>
+              <a:t>– 서울·수도권 집중 vs 지방 부족, 취약계층 사각지대 우려</a:t>
             </a:r>
           </a:p>
           <a:p>
@@ -9311,23 +8839,23 @@
                 </a:solidFill>
                 <a:latin typeface="Malgun Gothic"/>
               </a:rPr>
-              <a:t>• LLAI = w₁·A1n + w₂·(1−A2n) + w₃·A3n</a:t>
-            </a:r>
-          </a:p>
-          <a:p>
-            <a:pPr lvl="1">
+              <a:t>• 법률 서비스 접근성의 지역 불균형 = 사법 정의와 직결된 사회 문제</a:t>
+            </a:r>
+          </a:p>
+          <a:p>
+            <a:pPr>
               <a:spcAft>
                 <a:spcPts val="900"/>
               </a:spcAft>
             </a:pPr>
             <a:r>
-              <a:rPr sz="1700">
+              <a:rPr sz="2000">
                 <a:solidFill>
                   <a:srgbClr val="222222"/>
                 </a:solidFill>
                 <a:latin typeface="Malgun Gothic"/>
               </a:rPr>
-              <a:t>– 가중치 3종(균등·엔트로피·PCA) 병기로 강건성 확인</a:t>
+              <a:t>• 연구 질문: 어느 지역이, 얼마나 법적 보호에서 소외되는가?</a:t>
             </a:r>
           </a:p>
         </p:txBody>
@@ -9340,7 +8868,221 @@
 </p:sld>
 </file>
 
-<file path=ppt/slides/slide7.xml><?xml version="1.0" encoding="utf-8"?>
+<file path=ppt/slides/slide5.xml><?xml version="1.0" encoding="utf-8"?>
+<p:sld xmlns:a="http://schemas.openxmlformats.org/drawingml/2006/main" xmlns:p="http://schemas.openxmlformats.org/presentationml/2006/main" xmlns:r="http://schemas.openxmlformats.org/officeDocument/2006/relationships">
+  <p:cSld>
+    <p:spTree>
+      <p:nvGrpSpPr>
+        <p:cNvPr id="1" name=""/>
+        <p:cNvGrpSpPr/>
+        <p:nvPr/>
+      </p:nvGrpSpPr>
+      <p:grpSpPr/>
+      <p:sp>
+        <p:nvSpPr>
+          <p:cNvPr id="2" name="TextBox 1"/>
+          <p:cNvSpPr txBox="1"/>
+          <p:nvPr/>
+        </p:nvSpPr>
+        <p:spPr>
+          <a:xfrm>
+            <a:off x="502920" y="320040"/>
+            <a:ext cx="11155680" cy="914400"/>
+          </a:xfrm>
+          <a:prstGeom prst="rect">
+            <a:avLst/>
+          </a:prstGeom>
+          <a:noFill/>
+        </p:spPr>
+        <p:txBody>
+          <a:bodyPr wrap="square">
+            <a:spAutoFit/>
+          </a:bodyPr>
+          <a:lstStyle/>
+          <a:p>
+            <a:r>
+              <a:rPr sz="3000" b="1">
+                <a:solidFill>
+                  <a:srgbClr val="1F3A5F"/>
+                </a:solidFill>
+                <a:latin typeface="Malgun Gothic"/>
+              </a:rPr>
+              <a:t>2. 접근 방법 — 종합 법률 접근성 지수(LLAI)</a:t>
+            </a:r>
+          </a:p>
+        </p:txBody>
+      </p:sp>
+      <p:sp>
+        <p:nvSpPr>
+          <p:cNvPr id="3" name="Rectangle 2"/>
+          <p:cNvSpPr/>
+          <p:nvPr/>
+        </p:nvSpPr>
+        <p:spPr>
+          <a:xfrm>
+            <a:off x="548640" y="1234440"/>
+            <a:ext cx="11064240" cy="38100"/>
+          </a:xfrm>
+          <a:prstGeom prst="rect">
+            <a:avLst/>
+          </a:prstGeom>
+          <a:solidFill>
+            <a:srgbClr val="C44E52"/>
+          </a:solidFill>
+          <a:ln>
+            <a:noFill/>
+          </a:ln>
+        </p:spPr>
+        <p:style>
+          <a:lnRef idx="1">
+            <a:schemeClr val="accent1"/>
+          </a:lnRef>
+          <a:fillRef idx="3">
+            <a:schemeClr val="accent1"/>
+          </a:fillRef>
+          <a:effectRef idx="2">
+            <a:schemeClr val="accent1"/>
+          </a:effectRef>
+          <a:fontRef idx="minor">
+            <a:schemeClr val="lt1"/>
+          </a:fontRef>
+        </p:style>
+        <p:txBody>
+          <a:bodyPr rtlCol="0" anchor="ctr"/>
+          <a:lstStyle/>
+          <a:p>
+            <a:pPr algn="ctr"/>
+          </a:p>
+        </p:txBody>
+      </p:sp>
+      <p:sp>
+        <p:nvSpPr>
+          <p:cNvPr id="4" name="TextBox 3"/>
+          <p:cNvSpPr txBox="1"/>
+          <p:nvPr/>
+        </p:nvSpPr>
+        <p:spPr>
+          <a:xfrm>
+            <a:off x="640080" y="1554480"/>
+            <a:ext cx="10972800" cy="4937760"/>
+          </a:xfrm>
+          <a:prstGeom prst="rect">
+            <a:avLst/>
+          </a:prstGeom>
+          <a:noFill/>
+        </p:spPr>
+        <p:txBody>
+          <a:bodyPr wrap="square">
+            <a:spAutoFit/>
+          </a:bodyPr>
+          <a:lstStyle/>
+          <a:p>
+            <a:pPr>
+              <a:spcAft>
+                <a:spcPts val="900"/>
+              </a:spcAft>
+            </a:pPr>
+            <a:r>
+              <a:rPr sz="2000">
+                <a:solidFill>
+                  <a:srgbClr val="222222"/>
+                </a:solidFill>
+                <a:latin typeface="Malgun Gothic"/>
+              </a:rPr>
+              <a:t>• 3개 차원을 하나의 지수로 통합 (0~100)</a:t>
+            </a:r>
+          </a:p>
+          <a:p>
+            <a:pPr lvl="1">
+              <a:spcAft>
+                <a:spcPts val="900"/>
+              </a:spcAft>
+            </a:pPr>
+            <a:r>
+              <a:rPr sz="1700">
+                <a:solidFill>
+                  <a:srgbClr val="222222"/>
+                </a:solidFill>
+                <a:latin typeface="Malgun Gothic"/>
+              </a:rPr>
+              <a:t>– A1 변호사 접근성 — 인구 10만 명당 변호사 수 (↑ 좋음)</a:t>
+            </a:r>
+          </a:p>
+          <a:p>
+            <a:pPr lvl="1">
+              <a:spcAft>
+                <a:spcPts val="900"/>
+              </a:spcAft>
+            </a:pPr>
+            <a:r>
+              <a:rPr sz="1700">
+                <a:solidFill>
+                  <a:srgbClr val="222222"/>
+                </a:solidFill>
+                <a:latin typeface="Malgun Gothic"/>
+              </a:rPr>
+              <a:t>– A2 사건 부담 — 변호사 1인당 법원 본안사건 수 (↓ 좋음)</a:t>
+            </a:r>
+          </a:p>
+          <a:p>
+            <a:pPr lvl="1">
+              <a:spcAft>
+                <a:spcPts val="900"/>
+              </a:spcAft>
+            </a:pPr>
+            <a:r>
+              <a:rPr sz="1700">
+                <a:solidFill>
+                  <a:srgbClr val="222222"/>
+                </a:solidFill>
+                <a:latin typeface="Malgun Gothic"/>
+              </a:rPr>
+              <a:t>– A3 취약계층 접근성 — 법률구조 건수 / 저소득층 (↑ 좋음)</a:t>
+            </a:r>
+          </a:p>
+          <a:p>
+            <a:pPr>
+              <a:spcAft>
+                <a:spcPts val="900"/>
+              </a:spcAft>
+            </a:pPr>
+            <a:r>
+              <a:rPr sz="2000">
+                <a:solidFill>
+                  <a:srgbClr val="222222"/>
+                </a:solidFill>
+                <a:latin typeface="Malgun Gothic"/>
+              </a:rPr>
+              <a:t>• LLAI = w₁·A1n + w₂·(1−A2n) + w₃·A3n</a:t>
+            </a:r>
+          </a:p>
+          <a:p>
+            <a:pPr lvl="1">
+              <a:spcAft>
+                <a:spcPts val="900"/>
+              </a:spcAft>
+            </a:pPr>
+            <a:r>
+              <a:rPr sz="1700">
+                <a:solidFill>
+                  <a:srgbClr val="222222"/>
+                </a:solidFill>
+                <a:latin typeface="Malgun Gothic"/>
+              </a:rPr>
+              <a:t>– 가중치 3종(균등·엔트로피·PCA) 병기로 강건성 확인</a:t>
+            </a:r>
+          </a:p>
+        </p:txBody>
+      </p:sp>
+    </p:spTree>
+  </p:cSld>
+  <p:clrMapOvr>
+    <a:masterClrMapping/>
+  </p:clrMapOvr>
+</p:sld>
+</file>
+
+<file path=ppt/slides/slide6.xml><?xml version="1.0" encoding="utf-8"?>
 <p:sld xmlns:a="http://schemas.openxmlformats.org/drawingml/2006/main" xmlns:p="http://schemas.openxmlformats.org/presentationml/2006/main" xmlns:r="http://schemas.openxmlformats.org/officeDocument/2006/relationships">
   <p:cSld>
     <p:spTree>
@@ -10109,7 +9851,7 @@
 </p:sld>
 </file>
 
-<file path=ppt/slides/slide8.xml><?xml version="1.0" encoding="utf-8"?>
+<file path=ppt/slides/slide7.xml><?xml version="1.0" encoding="utf-8"?>
 <p:sld xmlns:a="http://schemas.openxmlformats.org/drawingml/2006/main" xmlns:p="http://schemas.openxmlformats.org/presentationml/2006/main" xmlns:r="http://schemas.openxmlformats.org/officeDocument/2006/relationships">
   <p:cSld>
     <p:spTree>
@@ -10307,7 +10049,7 @@
 </p:sld>
 </file>
 
-<file path=ppt/slides/slide9.xml><?xml version="1.0" encoding="utf-8"?>
+<file path=ppt/slides/slide8.xml><?xml version="1.0" encoding="utf-8"?>
 <p:sld xmlns:a="http://schemas.openxmlformats.org/drawingml/2006/main" xmlns:p="http://schemas.openxmlformats.org/presentationml/2006/main" xmlns:r="http://schemas.openxmlformats.org/officeDocument/2006/relationships">
   <p:cSld>
     <p:spTree>
@@ -10541,6 +10283,706 @@
                 <a:latin typeface="Malgun Gothic"/>
               </a:rPr>
               <a:t>– 결측·이상치 처리 → 권역×연도 패널 → 합계 교차검증</a:t>
+            </a:r>
+          </a:p>
+        </p:txBody>
+      </p:sp>
+    </p:spTree>
+  </p:cSld>
+  <p:clrMapOvr>
+    <a:masterClrMapping/>
+  </p:clrMapOvr>
+</p:sld>
+</file>
+
+<file path=ppt/slides/slide9.xml><?xml version="1.0" encoding="utf-8"?>
+<p:sld xmlns:a="http://schemas.openxmlformats.org/drawingml/2006/main" xmlns:p="http://schemas.openxmlformats.org/presentationml/2006/main" xmlns:r="http://schemas.openxmlformats.org/officeDocument/2006/relationships">
+  <p:cSld>
+    <p:spTree>
+      <p:nvGrpSpPr>
+        <p:cNvPr id="1" name=""/>
+        <p:cNvGrpSpPr/>
+        <p:nvPr/>
+      </p:nvGrpSpPr>
+      <p:grpSpPr/>
+      <p:sp>
+        <p:nvSpPr>
+          <p:cNvPr id="2" name="TextBox 1"/>
+          <p:cNvSpPr txBox="1"/>
+          <p:nvPr/>
+        </p:nvSpPr>
+        <p:spPr>
+          <a:xfrm>
+            <a:off x="502920" y="320040"/>
+            <a:ext cx="11155680" cy="914400"/>
+          </a:xfrm>
+          <a:prstGeom prst="rect">
+            <a:avLst/>
+          </a:prstGeom>
+          <a:noFill/>
+        </p:spPr>
+        <p:txBody>
+          <a:bodyPr wrap="square">
+            <a:spAutoFit/>
+          </a:bodyPr>
+          <a:lstStyle/>
+          <a:p>
+            <a:r>
+              <a:rPr sz="2800" b="1">
+                <a:solidFill>
+                  <a:srgbClr val="1F3A5F"/>
+                </a:solidFill>
+                <a:latin typeface="Malgun Gothic"/>
+              </a:rPr>
+              <a:t>데이터 규모와 성격 — 얼마나 '빅'데이터인가</a:t>
+            </a:r>
+          </a:p>
+        </p:txBody>
+      </p:sp>
+      <p:sp>
+        <p:nvSpPr>
+          <p:cNvPr id="3" name="Rectangle 2"/>
+          <p:cNvSpPr/>
+          <p:nvPr/>
+        </p:nvSpPr>
+        <p:spPr>
+          <a:xfrm>
+            <a:off x="548640" y="1188720"/>
+            <a:ext cx="11064240" cy="38100"/>
+          </a:xfrm>
+          <a:prstGeom prst="rect">
+            <a:avLst/>
+          </a:prstGeom>
+          <a:solidFill>
+            <a:srgbClr val="C44E52"/>
+          </a:solidFill>
+          <a:ln>
+            <a:noFill/>
+          </a:ln>
+        </p:spPr>
+        <p:style>
+          <a:lnRef idx="1">
+            <a:schemeClr val="accent1"/>
+          </a:lnRef>
+          <a:fillRef idx="3">
+            <a:schemeClr val="accent1"/>
+          </a:fillRef>
+          <a:effectRef idx="2">
+            <a:schemeClr val="accent1"/>
+          </a:effectRef>
+          <a:fontRef idx="minor">
+            <a:schemeClr val="lt1"/>
+          </a:fontRef>
+        </p:style>
+        <p:txBody>
+          <a:bodyPr rtlCol="0" anchor="ctr"/>
+          <a:lstStyle/>
+          <a:p>
+            <a:pPr algn="ctr"/>
+          </a:p>
+        </p:txBody>
+      </p:sp>
+      <p:graphicFrame>
+        <p:nvGraphicFramePr>
+          <p:cNvPr id="4" name="Table 3"/>
+          <p:cNvGraphicFramePr>
+            <a:graphicFrameLocks noGrp="1"/>
+          </p:cNvGraphicFramePr>
+          <p:nvPr/>
+        </p:nvGraphicFramePr>
+        <p:xfrm>
+          <a:off x="548640" y="1417320"/>
+          <a:ext cx="11064240" cy="2560320"/>
+        </p:xfrm>
+        <a:graphic>
+          <a:graphicData uri="http://schemas.openxmlformats.org/drawingml/2006/table">
+            <a:tbl>
+              <a:tblPr firstRow="1" bandRow="1">
+                <a:tableStyleId>{5C22544A-7EE6-4342-B048-85BDC9FD1C3A}</a:tableStyleId>
+              </a:tblPr>
+              <a:tblGrid>
+                <a:gridCol w="2766060"/>
+                <a:gridCol w="2766060"/>
+                <a:gridCol w="2766060"/>
+                <a:gridCol w="2766060"/>
+              </a:tblGrid>
+              <a:tr h="365760">
+                <a:tc>
+                  <a:txBody>
+                    <a:bodyPr/>
+                    <a:lstStyle/>
+                    <a:p>
+                      <a:pPr algn="l"/>
+                      <a:r>
+                        <a:rPr sz="1200" b="1">
+                          <a:solidFill>
+                            <a:srgbClr val="FFFFFF"/>
+                          </a:solidFill>
+                          <a:latin typeface="Malgun Gothic"/>
+                        </a:rPr>
+                        <a:t>출처</a:t>
+                      </a:r>
+                    </a:p>
+                  </a:txBody>
+                  <a:tcPr anchor="ctr">
+                    <a:solidFill>
+                      <a:srgbClr val="1F3A5F"/>
+                    </a:solidFill>
+                  </a:tcPr>
+                </a:tc>
+                <a:tc>
+                  <a:txBody>
+                    <a:bodyPr/>
+                    <a:lstStyle/>
+                    <a:p>
+                      <a:pPr algn="ctr"/>
+                      <a:r>
+                        <a:rPr sz="1200" b="1">
+                          <a:solidFill>
+                            <a:srgbClr val="FFFFFF"/>
+                          </a:solidFill>
+                          <a:latin typeface="Malgun Gothic"/>
+                        </a:rPr>
+                        <a:t>형식</a:t>
+                      </a:r>
+                    </a:p>
+                  </a:txBody>
+                  <a:tcPr anchor="ctr">
+                    <a:solidFill>
+                      <a:srgbClr val="1F3A5F"/>
+                    </a:solidFill>
+                  </a:tcPr>
+                </a:tc>
+                <a:tc>
+                  <a:txBody>
+                    <a:bodyPr/>
+                    <a:lstStyle/>
+                    <a:p>
+                      <a:pPr algn="ctr"/>
+                      <a:r>
+                        <a:rPr sz="1200" b="1">
+                          <a:solidFill>
+                            <a:srgbClr val="FFFFFF"/>
+                          </a:solidFill>
+                          <a:latin typeface="Malgun Gothic"/>
+                        </a:rPr>
+                        <a:t>규모</a:t>
+                      </a:r>
+                    </a:p>
+                  </a:txBody>
+                  <a:tcPr anchor="ctr">
+                    <a:solidFill>
+                      <a:srgbClr val="1F3A5F"/>
+                    </a:solidFill>
+                  </a:tcPr>
+                </a:tc>
+                <a:tc>
+                  <a:txBody>
+                    <a:bodyPr/>
+                    <a:lstStyle/>
+                    <a:p>
+                      <a:pPr algn="ctr"/>
+                      <a:r>
+                        <a:rPr sz="1200" b="1">
+                          <a:solidFill>
+                            <a:srgbClr val="FFFFFF"/>
+                          </a:solidFill>
+                          <a:latin typeface="Malgun Gothic"/>
+                        </a:rPr>
+                        <a:t>기간</a:t>
+                      </a:r>
+                    </a:p>
+                  </a:txBody>
+                  <a:tcPr anchor="ctr">
+                    <a:solidFill>
+                      <a:srgbClr val="1F3A5F"/>
+                    </a:solidFill>
+                  </a:tcPr>
+                </a:tc>
+              </a:tr>
+              <a:tr h="365760">
+                <a:tc>
+                  <a:txBody>
+                    <a:bodyPr/>
+                    <a:lstStyle/>
+                    <a:p>
+                      <a:pPr algn="l"/>
+                      <a:r>
+                        <a:rPr sz="1200">
+                          <a:latin typeface="Malgun Gothic"/>
+                        </a:rPr>
+                        <a:t>사법연감(법원)</a:t>
+                      </a:r>
+                    </a:p>
+                  </a:txBody>
+                  <a:tcPr anchor="ctr"/>
+                </a:tc>
+                <a:tc>
+                  <a:txBody>
+                    <a:bodyPr/>
+                    <a:lstStyle/>
+                    <a:p>
+                      <a:pPr algn="ctr"/>
+                      <a:r>
+                        <a:rPr sz="1200">
+                          <a:latin typeface="Malgun Gothic"/>
+                        </a:rPr>
+                        <a:t>엑셀 19파일·다중시트</a:t>
+                      </a:r>
+                    </a:p>
+                  </a:txBody>
+                  <a:tcPr anchor="ctr"/>
+                </a:tc>
+                <a:tc>
+                  <a:txBody>
+                    <a:bodyPr/>
+                    <a:lstStyle/>
+                    <a:p>
+                      <a:pPr algn="ctr"/>
+                      <a:r>
+                        <a:rPr sz="1200">
+                          <a:latin typeface="Malgun Gothic"/>
+                        </a:rPr>
+                        <a:t>약 140만 셀</a:t>
+                      </a:r>
+                    </a:p>
+                  </a:txBody>
+                  <a:tcPr anchor="ctr"/>
+                </a:tc>
+                <a:tc>
+                  <a:txBody>
+                    <a:bodyPr/>
+                    <a:lstStyle/>
+                    <a:p>
+                      <a:pPr algn="ctr"/>
+                      <a:r>
+                        <a:rPr sz="1200">
+                          <a:latin typeface="Malgun Gothic"/>
+                        </a:rPr>
+                        <a:t>2024</a:t>
+                      </a:r>
+                    </a:p>
+                  </a:txBody>
+                  <a:tcPr anchor="ctr"/>
+                </a:tc>
+              </a:tr>
+              <a:tr h="365760">
+                <a:tc>
+                  <a:txBody>
+                    <a:bodyPr/>
+                    <a:lstStyle/>
+                    <a:p>
+                      <a:pPr algn="l"/>
+                      <a:r>
+                        <a:rPr sz="1200">
+                          <a:latin typeface="Malgun Gothic"/>
+                        </a:rPr>
+                        <a:t>KOSIS 기초수급자</a:t>
+                      </a:r>
+                    </a:p>
+                  </a:txBody>
+                  <a:tcPr anchor="ctr"/>
+                </a:tc>
+                <a:tc>
+                  <a:txBody>
+                    <a:bodyPr/>
+                    <a:lstStyle/>
+                    <a:p>
+                      <a:pPr algn="ctr"/>
+                      <a:r>
+                        <a:rPr sz="1200">
+                          <a:latin typeface="Malgun Gothic"/>
+                        </a:rPr>
+                        <a:t>CSV</a:t>
+                      </a:r>
+                    </a:p>
+                  </a:txBody>
+                  <a:tcPr anchor="ctr"/>
+                </a:tc>
+                <a:tc>
+                  <a:txBody>
+                    <a:bodyPr/>
+                    <a:lstStyle/>
+                    <a:p>
+                      <a:pPr algn="ctr"/>
+                      <a:r>
+                        <a:rPr sz="1200">
+                          <a:latin typeface="Malgun Gothic"/>
+                        </a:rPr>
+                        <a:t>6,589행 × 22열</a:t>
+                      </a:r>
+                    </a:p>
+                  </a:txBody>
+                  <a:tcPr anchor="ctr"/>
+                </a:tc>
+                <a:tc>
+                  <a:txBody>
+                    <a:bodyPr/>
+                    <a:lstStyle/>
+                    <a:p>
+                      <a:pPr algn="ctr"/>
+                      <a:r>
+                        <a:rPr sz="1200">
+                          <a:latin typeface="Malgun Gothic"/>
+                        </a:rPr>
+                        <a:t>2009~24</a:t>
+                      </a:r>
+                    </a:p>
+                  </a:txBody>
+                  <a:tcPr anchor="ctr"/>
+                </a:tc>
+              </a:tr>
+              <a:tr h="365760">
+                <a:tc>
+                  <a:txBody>
+                    <a:bodyPr/>
+                    <a:lstStyle/>
+                    <a:p>
+                      <a:pPr algn="l"/>
+                      <a:r>
+                        <a:rPr sz="1200">
+                          <a:latin typeface="Malgun Gothic"/>
+                        </a:rPr>
+                        <a:t>KOSIS 인구·GRDP</a:t>
+                      </a:r>
+                    </a:p>
+                  </a:txBody>
+                  <a:tcPr anchor="ctr"/>
+                </a:tc>
+                <a:tc>
+                  <a:txBody>
+                    <a:bodyPr/>
+                    <a:lstStyle/>
+                    <a:p>
+                      <a:pPr algn="ctr"/>
+                      <a:r>
+                        <a:rPr sz="1200">
+                          <a:latin typeface="Malgun Gothic"/>
+                        </a:rPr>
+                        <a:t>CSV 가로형(다중헤더)</a:t>
+                      </a:r>
+                    </a:p>
+                  </a:txBody>
+                  <a:tcPr anchor="ctr"/>
+                </a:tc>
+                <a:tc>
+                  <a:txBody>
+                    <a:bodyPr/>
+                    <a:lstStyle/>
+                    <a:p>
+                      <a:pPr algn="ctr"/>
+                      <a:r>
+                        <a:rPr sz="1200">
+                          <a:latin typeface="Malgun Gothic"/>
+                        </a:rPr>
+                        <a:t>20행 × 55~61열</a:t>
+                      </a:r>
+                    </a:p>
+                  </a:txBody>
+                  <a:tcPr anchor="ctr"/>
+                </a:tc>
+                <a:tc>
+                  <a:txBody>
+                    <a:bodyPr/>
+                    <a:lstStyle/>
+                    <a:p>
+                      <a:pPr algn="ctr"/>
+                      <a:r>
+                        <a:rPr sz="1200">
+                          <a:latin typeface="Malgun Gothic"/>
+                        </a:rPr>
+                        <a:t>2008~25</a:t>
+                      </a:r>
+                    </a:p>
+                  </a:txBody>
+                  <a:tcPr anchor="ctr"/>
+                </a:tc>
+              </a:tr>
+              <a:tr h="365760">
+                <a:tc>
+                  <a:txBody>
+                    <a:bodyPr/>
+                    <a:lstStyle/>
+                    <a:p>
+                      <a:pPr algn="l"/>
+                      <a:r>
+                        <a:rPr sz="1200">
+                          <a:latin typeface="Malgun Gothic"/>
+                        </a:rPr>
+                        <a:t>공단 법률구조</a:t>
+                      </a:r>
+                    </a:p>
+                  </a:txBody>
+                  <a:tcPr anchor="ctr"/>
+                </a:tc>
+                <a:tc>
+                  <a:txBody>
+                    <a:bodyPr/>
+                    <a:lstStyle/>
+                    <a:p>
+                      <a:pPr algn="ctr"/>
+                      <a:r>
+                        <a:rPr sz="1200">
+                          <a:latin typeface="Malgun Gothic"/>
+                        </a:rPr>
+                        <a:t>엑셀(반기)</a:t>
+                      </a:r>
+                    </a:p>
+                  </a:txBody>
+                  <a:tcPr anchor="ctr"/>
+                </a:tc>
+                <a:tc>
+                  <a:txBody>
+                    <a:bodyPr/>
+                    <a:lstStyle/>
+                    <a:p>
+                      <a:pPr algn="ctr"/>
+                      <a:r>
+                        <a:rPr sz="1200">
+                          <a:latin typeface="Malgun Gothic"/>
+                        </a:rPr>
+                        <a:t>민사·형사 2파일</a:t>
+                      </a:r>
+                    </a:p>
+                  </a:txBody>
+                  <a:tcPr anchor="ctr"/>
+                </a:tc>
+                <a:tc>
+                  <a:txBody>
+                    <a:bodyPr/>
+                    <a:lstStyle/>
+                    <a:p>
+                      <a:pPr algn="ctr"/>
+                      <a:r>
+                        <a:rPr sz="1200">
+                          <a:latin typeface="Malgun Gothic"/>
+                        </a:rPr>
+                        <a:t>2012~25</a:t>
+                      </a:r>
+                    </a:p>
+                  </a:txBody>
+                  <a:tcPr anchor="ctr"/>
+                </a:tc>
+              </a:tr>
+              <a:tr h="365760">
+                <a:tc>
+                  <a:txBody>
+                    <a:bodyPr/>
+                    <a:lstStyle/>
+                    <a:p>
+                      <a:pPr algn="l"/>
+                      <a:r>
+                        <a:rPr sz="1200">
+                          <a:latin typeface="Malgun Gothic"/>
+                        </a:rPr>
+                        <a:t>변협 회원현황</a:t>
+                      </a:r>
+                    </a:p>
+                  </a:txBody>
+                  <a:tcPr anchor="ctr"/>
+                </a:tc>
+                <a:tc>
+                  <a:txBody>
+                    <a:bodyPr/>
+                    <a:lstStyle/>
+                    <a:p>
+                      <a:pPr algn="ctr"/>
+                      <a:r>
+                        <a:rPr sz="1200">
+                          <a:latin typeface="Malgun Gothic"/>
+                        </a:rPr>
+                        <a:t>웹 스크래핑(HTML)</a:t>
+                      </a:r>
+                    </a:p>
+                  </a:txBody>
+                  <a:tcPr anchor="ctr"/>
+                </a:tc>
+                <a:tc>
+                  <a:txBody>
+                    <a:bodyPr/>
+                    <a:lstStyle/>
+                    <a:p>
+                      <a:pPr algn="ctr"/>
+                      <a:r>
+                        <a:rPr sz="1200">
+                          <a:latin typeface="Malgun Gothic"/>
+                        </a:rPr>
+                        <a:t>14행(스냅샷)</a:t>
+                      </a:r>
+                    </a:p>
+                  </a:txBody>
+                  <a:tcPr anchor="ctr"/>
+                </a:tc>
+                <a:tc>
+                  <a:txBody>
+                    <a:bodyPr/>
+                    <a:lstStyle/>
+                    <a:p>
+                      <a:pPr algn="ctr"/>
+                      <a:r>
+                        <a:rPr sz="1200">
+                          <a:latin typeface="Malgun Gothic"/>
+                        </a:rPr>
+                        <a:t>현재</a:t>
+                      </a:r>
+                    </a:p>
+                  </a:txBody>
+                  <a:tcPr anchor="ctr"/>
+                </a:tc>
+              </a:tr>
+              <a:tr h="365760">
+                <a:tc>
+                  <a:txBody>
+                    <a:bodyPr/>
+                    <a:lstStyle/>
+                    <a:p>
+                      <a:pPr algn="l"/>
+                      <a:r>
+                        <a:rPr sz="1200">
+                          <a:latin typeface="Malgun Gothic"/>
+                        </a:rPr>
+                        <a:t>시도 경계</a:t>
+                      </a:r>
+                    </a:p>
+                  </a:txBody>
+                  <a:tcPr anchor="ctr"/>
+                </a:tc>
+                <a:tc>
+                  <a:txBody>
+                    <a:bodyPr/>
+                    <a:lstStyle/>
+                    <a:p>
+                      <a:pPr algn="ctr"/>
+                      <a:r>
+                        <a:rPr sz="1200">
+                          <a:latin typeface="Malgun Gothic"/>
+                        </a:rPr>
+                        <a:t>GeoJSON</a:t>
+                      </a:r>
+                    </a:p>
+                  </a:txBody>
+                  <a:tcPr anchor="ctr"/>
+                </a:tc>
+                <a:tc>
+                  <a:txBody>
+                    <a:bodyPr/>
+                    <a:lstStyle/>
+                    <a:p>
+                      <a:pPr algn="ctr"/>
+                      <a:r>
+                        <a:rPr sz="1200">
+                          <a:latin typeface="Malgun Gothic"/>
+                        </a:rPr>
+                        <a:t>17폴리곤 · 7.5MB</a:t>
+                      </a:r>
+                    </a:p>
+                  </a:txBody>
+                  <a:tcPr anchor="ctr"/>
+                </a:tc>
+                <a:tc>
+                  <a:txBody>
+                    <a:bodyPr/>
+                    <a:lstStyle/>
+                    <a:p>
+                      <a:pPr algn="ctr"/>
+                      <a:r>
+                        <a:rPr sz="1200">
+                          <a:latin typeface="Malgun Gothic"/>
+                        </a:rPr>
+                        <a:t>2018</a:t>
+                      </a:r>
+                    </a:p>
+                  </a:txBody>
+                  <a:tcPr anchor="ctr"/>
+                </a:tc>
+              </a:tr>
+            </a:tbl>
+          </a:graphicData>
+        </a:graphic>
+      </p:graphicFrame>
+      <p:sp>
+        <p:nvSpPr>
+          <p:cNvPr id="5" name="TextBox 4"/>
+          <p:cNvSpPr txBox="1"/>
+          <p:nvPr/>
+        </p:nvSpPr>
+        <p:spPr>
+          <a:xfrm>
+            <a:off x="640080" y="4160520"/>
+            <a:ext cx="10972800" cy="2377440"/>
+          </a:xfrm>
+          <a:prstGeom prst="rect">
+            <a:avLst/>
+          </a:prstGeom>
+          <a:noFill/>
+        </p:spPr>
+        <p:txBody>
+          <a:bodyPr wrap="square">
+            <a:spAutoFit/>
+          </a:bodyPr>
+          <a:lstStyle/>
+          <a:p>
+            <a:pPr>
+              <a:spcAft>
+                <a:spcPts val="700"/>
+              </a:spcAft>
+            </a:pPr>
+            <a:r>
+              <a:rPr sz="1700">
+                <a:solidFill>
+                  <a:srgbClr val="222222"/>
+                </a:solidFill>
+                <a:latin typeface="Malgun Gothic"/>
+              </a:rPr>
+              <a:t>• 원천 ~155만 셀 → 정제 → 분석패널 234·180행 → LLAI 횡단면 13행</a:t>
+            </a:r>
+          </a:p>
+          <a:p>
+            <a:pPr>
+              <a:spcAft>
+                <a:spcPts val="700"/>
+              </a:spcAft>
+            </a:pPr>
+            <a:r>
+              <a:rPr sz="1700">
+                <a:solidFill>
+                  <a:srgbClr val="222222"/>
+                </a:solidFill>
+                <a:latin typeface="Malgun Gothic"/>
+              </a:rPr>
+              <a:t>• Volume(양)은 중간 — 핵심은 Variety(5출처·4형식)·Veracity(이종 지역단위 정합)</a:t>
+            </a:r>
+          </a:p>
+          <a:p>
+            <a:pPr lvl="1">
+              <a:spcAft>
+                <a:spcPts val="700"/>
+              </a:spcAft>
+            </a:pPr>
+            <a:r>
+              <a:rPr sz="1500">
+                <a:solidFill>
+                  <a:srgbClr val="222222"/>
+                </a:solidFill>
+                <a:latin typeface="Malgun Gothic"/>
+              </a:rPr>
+              <a:t>– 작업 무게중심 = 수집·정제(ETL) 파이프라인</a:t>
+            </a:r>
+          </a:p>
+          <a:p>
+            <a:pPr>
+              <a:spcAft>
+                <a:spcPts val="700"/>
+              </a:spcAft>
+            </a:pPr>
+            <a:r>
+              <a:rPr sz="1700">
+                <a:solidFill>
+                  <a:srgbClr val="222222"/>
+                </a:solidFill>
+                <a:latin typeface="Malgun Gothic"/>
+              </a:rPr>
+              <a:t>• 방법론: 데이터엔지니어링(ETL) · 합성지표 · 가설검정 · 군집(K-means) · 공간시각화</a:t>
             </a:r>
           </a:p>
         </p:txBody>

--- a/reports/발표자료.pptx
+++ b/reports/발표자료.pptx
@@ -13,9 +13,7 @@
     <p:sldId id="261" r:id="rId12"/>
     <p:sldId id="262" r:id="rId13"/>
     <p:sldId id="263" r:id="rId14"/>
-    <p:sldId id="277" r:id="rId28"/>
     <p:sldId id="264" r:id="rId15"/>
-    <p:sldId id="278" r:id="rId29"/>
     <p:sldId id="265" r:id="rId16"/>
     <p:sldId id="266" r:id="rId17"/>
     <p:sldId id="267" r:id="rId18"/>
@@ -25,9 +23,11 @@
     <p:sldId id="271" r:id="rId22"/>
     <p:sldId id="272" r:id="rId23"/>
     <p:sldId id="273" r:id="rId24"/>
+    <p:sldId id="274" r:id="rId25"/>
     <p:sldId id="275" r:id="rId26"/>
     <p:sldId id="276" r:id="rId27"/>
-    <p:sldId id="274" r:id="rId25"/>
+    <p:sldId id="277" r:id="rId28"/>
+    <p:sldId id="278" r:id="rId29"/>
   </p:sldIdLst>
   <p:sldSz cx="12191695" cy="6858000" type="screen4x3"/>
   <p:notesSz cx="6858000" cy="9144000"/>
@@ -3230,7 +3230,7 @@
           <a:lstStyle/>
           <a:p>
             <a:r>
-              <a:rPr sz="3000" b="1">
+              <a:rPr sz="2800" b="1">
                 <a:solidFill>
                   <a:srgbClr val="1F3A5F"/>
                 </a:solidFill>
@@ -3249,7 +3249,7 @@
         </p:nvSpPr>
         <p:spPr>
           <a:xfrm>
-            <a:off x="548640" y="1234440"/>
+            <a:off x="548640" y="1188720"/>
             <a:ext cx="11064240" cy="38100"/>
           </a:xfrm>
           <a:prstGeom prst="rect">
@@ -3308,7 +3308,7 @@
           <a:p>
             <a:pPr>
               <a:spcAft>
-                <a:spcPts val="900"/>
+                <a:spcPts val="800"/>
               </a:spcAft>
             </a:pPr>
             <a:r>
@@ -3324,7 +3324,7 @@
           <a:p>
             <a:pPr>
               <a:spcAft>
-                <a:spcPts val="900"/>
+                <a:spcPts val="800"/>
               </a:spcAft>
             </a:pPr>
             <a:r>
@@ -3393,7 +3393,7 @@
                     <a:bodyPr/>
                     <a:lstStyle/>
                     <a:p>
-                      <a:pPr algn="ctr"/>
+                      <a:pPr algn="l"/>
                       <a:r>
                         <a:rPr sz="1800" b="1">
                           <a:solidFill>
@@ -3416,7 +3416,7 @@
                     <a:bodyPr/>
                     <a:lstStyle/>
                     <a:p>
-                      <a:pPr algn="ctr"/>
+                      <a:pPr algn="l"/>
                       <a:r>
                         <a:rPr sz="1800" b="1">
                           <a:solidFill>
@@ -3439,7 +3439,7 @@
                     <a:bodyPr/>
                     <a:lstStyle/>
                     <a:p>
-                      <a:pPr algn="ctr"/>
+                      <a:pPr algn="l"/>
                       <a:r>
                         <a:rPr sz="1800" b="1">
                           <a:solidFill>
@@ -3462,7 +3462,7 @@
                     <a:bodyPr/>
                     <a:lstStyle/>
                     <a:p>
-                      <a:pPr algn="ctr"/>
+                      <a:pPr algn="l"/>
                       <a:r>
                         <a:rPr sz="1800" b="1">
                           <a:solidFill>
@@ -3503,7 +3503,7 @@
                     <a:bodyPr/>
                     <a:lstStyle/>
                     <a:p>
-                      <a:pPr algn="ctr"/>
+                      <a:pPr algn="l"/>
                       <a:r>
                         <a:rPr sz="1800">
                           <a:latin typeface="Malgun Gothic"/>
@@ -3519,7 +3519,7 @@
                     <a:bodyPr/>
                     <a:lstStyle/>
                     <a:p>
-                      <a:pPr algn="ctr"/>
+                      <a:pPr algn="l"/>
                       <a:r>
                         <a:rPr sz="1800">
                           <a:latin typeface="Malgun Gothic"/>
@@ -3535,7 +3535,7 @@
                     <a:bodyPr/>
                     <a:lstStyle/>
                     <a:p>
-                      <a:pPr algn="ctr"/>
+                      <a:pPr algn="l"/>
                       <a:r>
                         <a:rPr sz="1800">
                           <a:latin typeface="Malgun Gothic"/>
@@ -3551,7 +3551,7 @@
                     <a:bodyPr/>
                     <a:lstStyle/>
                     <a:p>
-                      <a:pPr algn="ctr"/>
+                      <a:pPr algn="l"/>
                       <a:r>
                         <a:rPr sz="1800">
                           <a:latin typeface="Malgun Gothic"/>
@@ -3585,7 +3585,7 @@
                     <a:bodyPr/>
                     <a:lstStyle/>
                     <a:p>
-                      <a:pPr algn="ctr"/>
+                      <a:pPr algn="l"/>
                       <a:r>
                         <a:rPr sz="1800">
                           <a:latin typeface="Malgun Gothic"/>
@@ -3601,7 +3601,7 @@
                     <a:bodyPr/>
                     <a:lstStyle/>
                     <a:p>
-                      <a:pPr algn="ctr"/>
+                      <a:pPr algn="l"/>
                       <a:r>
                         <a:rPr sz="1800">
                           <a:latin typeface="Malgun Gothic"/>
@@ -3617,7 +3617,7 @@
                     <a:bodyPr/>
                     <a:lstStyle/>
                     <a:p>
-                      <a:pPr algn="ctr"/>
+                      <a:pPr algn="l"/>
                       <a:r>
                         <a:rPr sz="1800">
                           <a:latin typeface="Malgun Gothic"/>
@@ -3633,7 +3633,7 @@
                     <a:bodyPr/>
                     <a:lstStyle/>
                     <a:p>
-                      <a:pPr algn="ctr"/>
+                      <a:pPr algn="l"/>
                       <a:r>
                         <a:rPr sz="1800">
                           <a:latin typeface="Malgun Gothic"/>
@@ -3673,7 +3673,7 @@
           <a:p>
             <a:pPr>
               <a:spcAft>
-                <a:spcPts val="900"/>
+                <a:spcPts val="800"/>
               </a:spcAft>
             </a:pPr>
             <a:r>
@@ -3689,7 +3689,7 @@
           <a:p>
             <a:pPr>
               <a:spcAft>
-                <a:spcPts val="900"/>
+                <a:spcPts val="800"/>
               </a:spcAft>
             </a:pPr>
             <a:r>
@@ -3699,7 +3699,7 @@
                 </a:solidFill>
                 <a:latin typeface="Malgun Gothic"/>
               </a:rPr>
-              <a:t>• 강원: 두 축 모두 전국 최하(0) → 바닥. LLAI는 '전국 상대 위치'를 의미</a:t>
+              <a:t>• 강원: 두 축 모두 전국 최하(0) → 바닥. LLAI='전국 상대 위치'</a:t>
             </a:r>
           </a:p>
         </p:txBody>
@@ -3745,13 +3745,13 @@
           <a:lstStyle/>
           <a:p>
             <a:r>
-              <a:rPr sz="3000" b="1">
+              <a:rPr sz="2800" b="1">
                 <a:solidFill>
                   <a:srgbClr val="1F3A5F"/>
                 </a:solidFill>
                 <a:latin typeface="Malgun Gothic"/>
               </a:rPr>
-              <a:t>7. 결과 ① — LLAI 순위 (region13, 2024)</a:t>
+              <a:t>분석 기법 한눈에 (무엇·어떻게·왜)</a:t>
             </a:r>
           </a:p>
         </p:txBody>
@@ -3764,7 +3764,7 @@
         </p:nvSpPr>
         <p:spPr>
           <a:xfrm>
-            <a:off x="548640" y="1234440"/>
+            <a:off x="548640" y="1188720"/>
             <a:ext cx="11064240" cy="38100"/>
           </a:xfrm>
           <a:prstGeom prst="rect">
@@ -3799,167 +3799,504 @@
           </a:p>
         </p:txBody>
       </p:sp>
-      <p:pic>
-        <p:nvPicPr>
-          <p:cNvPr id="4" name="Picture 3" descr="fig1_llai_ranking_region13.png"/>
-          <p:cNvPicPr>
-            <a:picLocks noChangeAspect="1"/>
-          </p:cNvPicPr>
+      <p:graphicFrame>
+        <p:nvGraphicFramePr>
+          <p:cNvPr id="4" name="Table 3"/>
+          <p:cNvGraphicFramePr>
+            <a:graphicFrameLocks noGrp="1"/>
+          </p:cNvGraphicFramePr>
           <p:nvPr/>
-        </p:nvPicPr>
-        <p:blipFill>
-          <a:blip r:embed="rId2"/>
-          <a:stretch>
-            <a:fillRect/>
-          </a:stretch>
-        </p:blipFill>
-        <p:spPr>
-          <a:xfrm>
-            <a:off x="365760" y="1554480"/>
-            <a:ext cx="6933804" cy="4297680"/>
-          </a:xfrm>
-          <a:prstGeom prst="rect">
-            <a:avLst/>
-          </a:prstGeom>
-        </p:spPr>
-      </p:pic>
-      <p:sp>
-        <p:nvSpPr>
-          <p:cNvPr id="5" name="TextBox 4"/>
-          <p:cNvSpPr txBox="1"/>
-          <p:nvPr/>
-        </p:nvSpPr>
-        <p:spPr>
-          <a:xfrm>
-            <a:off x="6949440" y="1828800"/>
-            <a:ext cx="4937760" cy="4937760"/>
-          </a:xfrm>
-          <a:prstGeom prst="rect">
-            <a:avLst/>
-          </a:prstGeom>
-          <a:noFill/>
-        </p:spPr>
-        <p:txBody>
-          <a:bodyPr wrap="square">
-            <a:spAutoFit/>
-          </a:bodyPr>
-          <a:lstStyle/>
-          <a:p>
-            <a:pPr>
-              <a:spcAft>
-                <a:spcPts val="900"/>
-              </a:spcAft>
-            </a:pPr>
-            <a:r>
-              <a:rPr sz="2000">
-                <a:solidFill>
-                  <a:srgbClr val="222222"/>
-                </a:solidFill>
-                <a:latin typeface="Malgun Gothic"/>
-              </a:rPr>
-              <a:t>• 서울 91 ≫ 압도</a:t>
-            </a:r>
-          </a:p>
-          <a:p>
-            <a:pPr>
-              <a:spcAft>
-                <a:spcPts val="900"/>
-              </a:spcAft>
-            </a:pPr>
-            <a:r>
-              <a:rPr sz="2000">
-                <a:solidFill>
-                  <a:srgbClr val="222222"/>
-                </a:solidFill>
-                <a:latin typeface="Malgun Gothic"/>
-              </a:rPr>
-              <a:t>• 울산·제주 2·3위</a:t>
-            </a:r>
-          </a:p>
-          <a:p>
-            <a:pPr lvl="1">
-              <a:spcAft>
-                <a:spcPts val="900"/>
-              </a:spcAft>
-            </a:pPr>
-            <a:r>
-              <a:rPr sz="1700">
-                <a:solidFill>
-                  <a:srgbClr val="222222"/>
-                </a:solidFill>
-                <a:latin typeface="Malgun Gothic"/>
-              </a:rPr>
-              <a:t>– (인구 적어 1인당 양호)</a:t>
-            </a:r>
-          </a:p>
-          <a:p>
-            <a:pPr>
-              <a:spcAft>
-                <a:spcPts val="900"/>
-              </a:spcAft>
-            </a:pPr>
-            <a:r>
-              <a:rPr sz="2000">
-                <a:solidFill>
-                  <a:srgbClr val="222222"/>
-                </a:solidFill>
-                <a:latin typeface="Malgun Gothic"/>
-              </a:rPr>
-              <a:t>• 인천은 하위권</a:t>
-            </a:r>
-          </a:p>
-          <a:p>
-            <a:pPr lvl="1">
-              <a:spcAft>
-                <a:spcPts val="900"/>
-              </a:spcAft>
-            </a:pPr>
-            <a:r>
-              <a:rPr sz="1700">
-                <a:solidFill>
-                  <a:srgbClr val="222222"/>
-                </a:solidFill>
-                <a:latin typeface="Malgun Gothic"/>
-              </a:rPr>
-              <a:t>– (사건부담 높음)</a:t>
-            </a:r>
-          </a:p>
-        </p:txBody>
-      </p:sp>
-      <p:sp>
-        <p:nvSpPr>
-          <p:cNvPr id="6" name="TextBox 5"/>
-          <p:cNvSpPr txBox="1"/>
-          <p:nvPr/>
-        </p:nvSpPr>
-        <p:spPr>
-          <a:xfrm>
-            <a:off x="640080" y="5989320"/>
-            <a:ext cx="10881360" cy="640080"/>
-          </a:xfrm>
-          <a:prstGeom prst="rect">
-            <a:avLst/>
-          </a:prstGeom>
-          <a:noFill/>
-        </p:spPr>
-        <p:txBody>
-          <a:bodyPr wrap="square">
-            <a:spAutoFit/>
-          </a:bodyPr>
-          <a:lstStyle/>
-          <a:p>
-            <a:r>
-              <a:rPr sz="1400" i="1">
-                <a:solidFill>
-                  <a:srgbClr val="555555"/>
-                </a:solidFill>
-                <a:latin typeface="Malgun Gothic"/>
-              </a:rPr>
-              <a:t>📊 읽는 법 — 막대 길이=LLAI, 색=클러스터. 서울만 홀로 길고 파랑(별도 그룹).</a:t>
-            </a:r>
-          </a:p>
-        </p:txBody>
-      </p:sp>
+        </p:nvGraphicFramePr>
+        <p:xfrm>
+          <a:off x="457200" y="1417320"/>
+          <a:ext cx="11247120" cy="4846320"/>
+        </p:xfrm>
+        <a:graphic>
+          <a:graphicData uri="http://schemas.openxmlformats.org/drawingml/2006/table">
+            <a:tbl>
+              <a:tblPr firstRow="1" bandRow="1">
+                <a:tableStyleId>{5C22544A-7EE6-4342-B048-85BDC9FD1C3A}</a:tableStyleId>
+              </a:tblPr>
+              <a:tblGrid>
+                <a:gridCol w="2194560"/>
+                <a:gridCol w="4572000"/>
+                <a:gridCol w="4480560"/>
+              </a:tblGrid>
+              <a:tr h="538480">
+                <a:tc>
+                  <a:txBody>
+                    <a:bodyPr/>
+                    <a:lstStyle/>
+                    <a:p>
+                      <a:pPr algn="ctr"/>
+                      <a:r>
+                        <a:rPr sz="1200" b="1">
+                          <a:solidFill>
+                            <a:srgbClr val="FFFFFF"/>
+                          </a:solidFill>
+                          <a:latin typeface="Malgun Gothic"/>
+                        </a:rPr>
+                        <a:t>기법</a:t>
+                      </a:r>
+                    </a:p>
+                  </a:txBody>
+                  <a:tcPr anchor="ctr">
+                    <a:solidFill>
+                      <a:srgbClr val="1F3A5F"/>
+                    </a:solidFill>
+                  </a:tcPr>
+                </a:tc>
+                <a:tc>
+                  <a:txBody>
+                    <a:bodyPr/>
+                    <a:lstStyle/>
+                    <a:p>
+                      <a:pPr algn="l"/>
+                      <a:r>
+                        <a:rPr sz="1200" b="1">
+                          <a:solidFill>
+                            <a:srgbClr val="FFFFFF"/>
+                          </a:solidFill>
+                          <a:latin typeface="Malgun Gothic"/>
+                        </a:rPr>
+                        <a:t>무엇 · 어떻게</a:t>
+                      </a:r>
+                    </a:p>
+                  </a:txBody>
+                  <a:tcPr anchor="ctr">
+                    <a:solidFill>
+                      <a:srgbClr val="1F3A5F"/>
+                    </a:solidFill>
+                  </a:tcPr>
+                </a:tc>
+                <a:tc>
+                  <a:txBody>
+                    <a:bodyPr/>
+                    <a:lstStyle/>
+                    <a:p>
+                      <a:pPr algn="l"/>
+                      <a:r>
+                        <a:rPr sz="1200" b="1">
+                          <a:solidFill>
+                            <a:srgbClr val="FFFFFF"/>
+                          </a:solidFill>
+                          <a:latin typeface="Malgun Gothic"/>
+                        </a:rPr>
+                        <a:t>왜</a:t>
+                      </a:r>
+                    </a:p>
+                  </a:txBody>
+                  <a:tcPr anchor="ctr">
+                    <a:solidFill>
+                      <a:srgbClr val="1F3A5F"/>
+                    </a:solidFill>
+                  </a:tcPr>
+                </a:tc>
+              </a:tr>
+              <a:tr h="538480">
+                <a:tc>
+                  <a:txBody>
+                    <a:bodyPr/>
+                    <a:lstStyle/>
+                    <a:p>
+                      <a:pPr algn="ctr"/>
+                      <a:r>
+                        <a:rPr sz="1200">
+                          <a:latin typeface="Malgun Gothic"/>
+                        </a:rPr>
+                        <a:t>Min-Max 정규화</a:t>
+                      </a:r>
+                    </a:p>
+                  </a:txBody>
+                  <a:tcPr anchor="ctr"/>
+                </a:tc>
+                <a:tc>
+                  <a:txBody>
+                    <a:bodyPr/>
+                    <a:lstStyle/>
+                    <a:p>
+                      <a:pPr algn="l"/>
+                      <a:r>
+                        <a:rPr sz="1200">
+                          <a:latin typeface="Malgun Gothic"/>
+                        </a:rPr>
+                        <a:t>지표를 0~1로 통일(A2 방향보정)</a:t>
+                      </a:r>
+                    </a:p>
+                  </a:txBody>
+                  <a:tcPr anchor="ctr"/>
+                </a:tc>
+                <a:tc>
+                  <a:txBody>
+                    <a:bodyPr/>
+                    <a:lstStyle/>
+                    <a:p>
+                      <a:pPr algn="l"/>
+                      <a:r>
+                        <a:rPr sz="1200">
+                          <a:latin typeface="Malgun Gothic"/>
+                        </a:rPr>
+                        <a:t>단위 통일 · 0~100 직관 해석</a:t>
+                      </a:r>
+                    </a:p>
+                  </a:txBody>
+                  <a:tcPr anchor="ctr"/>
+                </a:tc>
+              </a:tr>
+              <a:tr h="538480">
+                <a:tc>
+                  <a:txBody>
+                    <a:bodyPr/>
+                    <a:lstStyle/>
+                    <a:p>
+                      <a:pPr algn="ctr"/>
+                      <a:r>
+                        <a:rPr sz="1200">
+                          <a:latin typeface="Malgun Gothic"/>
+                        </a:rPr>
+                        <a:t>가중치 3종</a:t>
+                      </a:r>
+                    </a:p>
+                  </a:txBody>
+                  <a:tcPr anchor="ctr"/>
+                </a:tc>
+                <a:tc>
+                  <a:txBody>
+                    <a:bodyPr/>
+                    <a:lstStyle/>
+                    <a:p>
+                      <a:pPr algn="l"/>
+                      <a:r>
+                        <a:rPr sz="1200">
+                          <a:latin typeface="Malgun Gothic"/>
+                        </a:rPr>
+                        <a:t>균등 / 엔트로피 / PCA</a:t>
+                      </a:r>
+                    </a:p>
+                  </a:txBody>
+                  <a:tcPr anchor="ctr"/>
+                </a:tc>
+                <a:tc>
+                  <a:txBody>
+                    <a:bodyPr/>
+                    <a:lstStyle/>
+                    <a:p>
+                      <a:pPr algn="l"/>
+                      <a:r>
+                        <a:rPr sz="1200">
+                          <a:latin typeface="Malgun Gothic"/>
+                        </a:rPr>
+                        <a:t>가중치 자의성 → 강건성 확인</a:t>
+                      </a:r>
+                    </a:p>
+                  </a:txBody>
+                  <a:tcPr anchor="ctr"/>
+                </a:tc>
+              </a:tr>
+              <a:tr h="538480">
+                <a:tc>
+                  <a:txBody>
+                    <a:bodyPr/>
+                    <a:lstStyle/>
+                    <a:p>
+                      <a:pPr algn="ctr"/>
+                      <a:r>
+                        <a:rPr sz="1200">
+                          <a:latin typeface="Malgun Gothic"/>
+                        </a:rPr>
+                        <a:t>합성 LLAI</a:t>
+                      </a:r>
+                    </a:p>
+                  </a:txBody>
+                  <a:tcPr anchor="ctr"/>
+                </a:tc>
+                <a:tc>
+                  <a:txBody>
+                    <a:bodyPr/>
+                    <a:lstStyle/>
+                    <a:p>
+                      <a:pPr algn="l"/>
+                      <a:r>
+                        <a:rPr sz="1200">
+                          <a:latin typeface="Malgun Gothic"/>
+                        </a:rPr>
+                        <a:t>정규화 지표 가중평균 ×100</a:t>
+                      </a:r>
+                    </a:p>
+                  </a:txBody>
+                  <a:tcPr anchor="ctr"/>
+                </a:tc>
+                <a:tc>
+                  <a:txBody>
+                    <a:bodyPr/>
+                    <a:lstStyle/>
+                    <a:p>
+                      <a:pPr algn="l"/>
+                      <a:r>
+                        <a:rPr sz="1200">
+                          <a:latin typeface="Malgun Gothic"/>
+                        </a:rPr>
+                        <a:t>단순·투명한 해석</a:t>
+                      </a:r>
+                    </a:p>
+                  </a:txBody>
+                  <a:tcPr anchor="ctr"/>
+                </a:tc>
+              </a:tr>
+              <a:tr h="538480">
+                <a:tc>
+                  <a:txBody>
+                    <a:bodyPr/>
+                    <a:lstStyle/>
+                    <a:p>
+                      <a:pPr algn="ctr"/>
+                      <a:r>
+                        <a:rPr sz="1200">
+                          <a:latin typeface="Malgun Gothic"/>
+                        </a:rPr>
+                        <a:t>상관분석</a:t>
+                      </a:r>
+                    </a:p>
+                  </a:txBody>
+                  <a:tcPr anchor="ctr"/>
+                </a:tc>
+                <a:tc>
+                  <a:txBody>
+                    <a:bodyPr/>
+                    <a:lstStyle/>
+                    <a:p>
+                      <a:pPr algn="l"/>
+                      <a:r>
+                        <a:rPr sz="1200">
+                          <a:latin typeface="Malgun Gothic"/>
+                        </a:rPr>
+                        <a:t>Pearson r · Spearman ρ</a:t>
+                      </a:r>
+                    </a:p>
+                  </a:txBody>
+                  <a:tcPr anchor="ctr"/>
+                </a:tc>
+                <a:tc>
+                  <a:txBody>
+                    <a:bodyPr/>
+                    <a:lstStyle/>
+                    <a:p>
+                      <a:pPr algn="l"/>
+                      <a:r>
+                        <a:rPr sz="1200">
+                          <a:latin typeface="Malgun Gothic"/>
+                        </a:rPr>
+                        <a:t>이상치(서울) 교차 확인</a:t>
+                      </a:r>
+                    </a:p>
+                  </a:txBody>
+                  <a:tcPr anchor="ctr"/>
+                </a:tc>
+              </a:tr>
+              <a:tr h="538480">
+                <a:tc>
+                  <a:txBody>
+                    <a:bodyPr/>
+                    <a:lstStyle/>
+                    <a:p>
+                      <a:pPr algn="ctr"/>
+                      <a:r>
+                        <a:rPr sz="1200">
+                          <a:latin typeface="Malgun Gothic"/>
+                        </a:rPr>
+                        <a:t>집단 비교</a:t>
+                      </a:r>
+                    </a:p>
+                  </a:txBody>
+                  <a:tcPr anchor="ctr"/>
+                </a:tc>
+                <a:tc>
+                  <a:txBody>
+                    <a:bodyPr/>
+                    <a:lstStyle/>
+                    <a:p>
+                      <a:pPr algn="l"/>
+                      <a:r>
+                        <a:rPr sz="1200">
+                          <a:latin typeface="Malgun Gothic"/>
+                        </a:rPr>
+                        <a:t>Mann-Whitney U</a:t>
+                      </a:r>
+                    </a:p>
+                  </a:txBody>
+                  <a:tcPr anchor="ctr"/>
+                </a:tc>
+                <a:tc>
+                  <a:txBody>
+                    <a:bodyPr/>
+                    <a:lstStyle/>
+                    <a:p>
+                      <a:pPr algn="l"/>
+                      <a:r>
+                        <a:rPr sz="1200">
+                          <a:latin typeface="Malgun Gothic"/>
+                        </a:rPr>
+                        <a:t>표본 작아 정규성 불가 → 비모수</a:t>
+                      </a:r>
+                    </a:p>
+                  </a:txBody>
+                  <a:tcPr anchor="ctr"/>
+                </a:tc>
+              </a:tr>
+              <a:tr h="538480">
+                <a:tc>
+                  <a:txBody>
+                    <a:bodyPr/>
+                    <a:lstStyle/>
+                    <a:p>
+                      <a:pPr algn="ctr"/>
+                      <a:r>
+                        <a:rPr sz="1200">
+                          <a:latin typeface="Malgun Gothic"/>
+                        </a:rPr>
+                        <a:t>군집분석</a:t>
+                      </a:r>
+                    </a:p>
+                  </a:txBody>
+                  <a:tcPr anchor="ctr"/>
+                </a:tc>
+                <a:tc>
+                  <a:txBody>
+                    <a:bodyPr/>
+                    <a:lstStyle/>
+                    <a:p>
+                      <a:pPr algn="l"/>
+                      <a:r>
+                        <a:rPr sz="1200">
+                          <a:latin typeface="Malgun Gothic"/>
+                        </a:rPr>
+                        <a:t>K-means + Elbow·Silhouette</a:t>
+                      </a:r>
+                    </a:p>
+                  </a:txBody>
+                  <a:tcPr anchor="ctr"/>
+                </a:tc>
+                <a:tc>
+                  <a:txBody>
+                    <a:bodyPr/>
+                    <a:lstStyle/>
+                    <a:p>
+                      <a:pPr algn="l"/>
+                      <a:r>
+                        <a:rPr sz="1200">
+                          <a:latin typeface="Malgun Gothic"/>
+                        </a:rPr>
+                        <a:t>저차원·해석 쉬움, K 객관 선정</a:t>
+                      </a:r>
+                    </a:p>
+                  </a:txBody>
+                  <a:tcPr anchor="ctr"/>
+                </a:tc>
+              </a:tr>
+              <a:tr h="538480">
+                <a:tc>
+                  <a:txBody>
+                    <a:bodyPr/>
+                    <a:lstStyle/>
+                    <a:p>
+                      <a:pPr algn="ctr"/>
+                      <a:r>
+                        <a:rPr sz="1200">
+                          <a:latin typeface="Malgun Gothic"/>
+                        </a:rPr>
+                        <a:t>집중도(H4)</a:t>
+                      </a:r>
+                    </a:p>
+                  </a:txBody>
+                  <a:tcPr anchor="ctr"/>
+                </a:tc>
+                <a:tc>
+                  <a:txBody>
+                    <a:bodyPr/>
+                    <a:lstStyle/>
+                    <a:p>
+                      <a:pPr algn="l"/>
+                      <a:r>
+                        <a:rPr sz="1200">
+                          <a:latin typeface="Malgun Gothic"/>
+                        </a:rPr>
+                        <a:t>HHI · 변동계수</a:t>
+                      </a:r>
+                    </a:p>
+                  </a:txBody>
+                  <a:tcPr anchor="ctr"/>
+                </a:tc>
+                <a:tc>
+                  <a:txBody>
+                    <a:bodyPr/>
+                    <a:lstStyle/>
+                    <a:p>
+                      <a:pPr algn="l"/>
+                      <a:r>
+                        <a:rPr sz="1200">
+                          <a:latin typeface="Malgun Gothic"/>
+                        </a:rPr>
+                        <a:t>집중·격차 변화 직접 측정</a:t>
+                      </a:r>
+                    </a:p>
+                  </a:txBody>
+                  <a:tcPr anchor="ctr"/>
+                </a:tc>
+              </a:tr>
+              <a:tr h="538480">
+                <a:tc>
+                  <a:txBody>
+                    <a:bodyPr/>
+                    <a:lstStyle/>
+                    <a:p>
+                      <a:pPr algn="ctr"/>
+                      <a:r>
+                        <a:rPr sz="1200">
+                          <a:latin typeface="Malgun Gothic"/>
+                        </a:rPr>
+                        <a:t>공간 시각화</a:t>
+                      </a:r>
+                    </a:p>
+                  </a:txBody>
+                  <a:tcPr anchor="ctr"/>
+                </a:tc>
+                <a:tc>
+                  <a:txBody>
+                    <a:bodyPr/>
+                    <a:lstStyle/>
+                    <a:p>
+                      <a:pPr algn="l"/>
+                      <a:r>
+                        <a:rPr sz="1200">
+                          <a:latin typeface="Malgun Gothic"/>
+                        </a:rPr>
+                        <a:t>dissolve + 코로플레스</a:t>
+                      </a:r>
+                    </a:p>
+                  </a:txBody>
+                  <a:tcPr anchor="ctr"/>
+                </a:tc>
+                <a:tc>
+                  <a:txBody>
+                    <a:bodyPr/>
+                    <a:lstStyle/>
+                    <a:p>
+                      <a:pPr algn="l"/>
+                      <a:r>
+                        <a:rPr sz="1200">
+                          <a:latin typeface="Malgun Gothic"/>
+                        </a:rPr>
+                        <a:t>권역 단위 정합 · 직관 전달</a:t>
+                      </a:r>
+                    </a:p>
+                  </a:txBody>
+                  <a:tcPr anchor="ctr"/>
+                </a:tc>
+              </a:tr>
+            </a:tbl>
+          </a:graphicData>
+        </a:graphic>
+      </p:graphicFrame>
     </p:spTree>
   </p:cSld>
   <p:clrMapOvr>
@@ -4001,13 +4338,13 @@
           <a:lstStyle/>
           <a:p>
             <a:r>
-              <a:rPr sz="3000" b="1">
+              <a:rPr sz="2800" b="1">
                 <a:solidFill>
                   <a:srgbClr val="1F3A5F"/>
                 </a:solidFill>
                 <a:latin typeface="Malgun Gothic"/>
               </a:rPr>
-              <a:t>7. 결과 ② — 코로플레스 지도</a:t>
+              <a:t>7. 결과 ① — LLAI 순위 (region13, 2024)</a:t>
             </a:r>
           </a:p>
         </p:txBody>
@@ -4020,7 +4357,7 @@
         </p:nvSpPr>
         <p:spPr>
           <a:xfrm>
-            <a:off x="548640" y="1234440"/>
+            <a:off x="548640" y="1188720"/>
             <a:ext cx="11064240" cy="38100"/>
           </a:xfrm>
           <a:prstGeom prst="rect">
@@ -4057,7 +4394,7 @@
       </p:sp>
       <p:pic>
         <p:nvPicPr>
-          <p:cNvPr id="4" name="Picture 3" descr="fig7_map_region13.png"/>
+          <p:cNvPr id="4" name="Picture 3" descr="fig1_llai_ranking_region13.png"/>
           <p:cNvPicPr>
             <a:picLocks noChangeAspect="1"/>
           </p:cNvPicPr>
@@ -4071,8 +4408,8 @@
         </p:blipFill>
         <p:spPr>
           <a:xfrm>
-            <a:off x="3657600" y="1371600"/>
-            <a:ext cx="5525669" cy="4572000"/>
+            <a:off x="365760" y="1554480"/>
+            <a:ext cx="6933804" cy="4297680"/>
           </a:xfrm>
           <a:prstGeom prst="rect">
             <a:avLst/>
@@ -4082,6 +4419,109 @@
       <p:sp>
         <p:nvSpPr>
           <p:cNvPr id="5" name="TextBox 4"/>
+          <p:cNvSpPr txBox="1"/>
+          <p:nvPr/>
+        </p:nvSpPr>
+        <p:spPr>
+          <a:xfrm>
+            <a:off x="6949440" y="1828800"/>
+            <a:ext cx="4937760" cy="4937760"/>
+          </a:xfrm>
+          <a:prstGeom prst="rect">
+            <a:avLst/>
+          </a:prstGeom>
+          <a:noFill/>
+        </p:spPr>
+        <p:txBody>
+          <a:bodyPr wrap="square">
+            <a:spAutoFit/>
+          </a:bodyPr>
+          <a:lstStyle/>
+          <a:p>
+            <a:pPr>
+              <a:spcAft>
+                <a:spcPts val="800"/>
+              </a:spcAft>
+            </a:pPr>
+            <a:r>
+              <a:rPr sz="2000">
+                <a:solidFill>
+                  <a:srgbClr val="222222"/>
+                </a:solidFill>
+                <a:latin typeface="Malgun Gothic"/>
+              </a:rPr>
+              <a:t>• 서울 91 ≫ 압도</a:t>
+            </a:r>
+          </a:p>
+          <a:p>
+            <a:pPr>
+              <a:spcAft>
+                <a:spcPts val="800"/>
+              </a:spcAft>
+            </a:pPr>
+            <a:r>
+              <a:rPr sz="2000">
+                <a:solidFill>
+                  <a:srgbClr val="222222"/>
+                </a:solidFill>
+                <a:latin typeface="Malgun Gothic"/>
+              </a:rPr>
+              <a:t>• 울산·제주 2·3위</a:t>
+            </a:r>
+          </a:p>
+          <a:p>
+            <a:pPr lvl="1">
+              <a:spcAft>
+                <a:spcPts val="800"/>
+              </a:spcAft>
+            </a:pPr>
+            <a:r>
+              <a:rPr sz="1700">
+                <a:solidFill>
+                  <a:srgbClr val="222222"/>
+                </a:solidFill>
+                <a:latin typeface="Malgun Gothic"/>
+              </a:rPr>
+              <a:t>– (인구 적어 1인당 양호)</a:t>
+            </a:r>
+          </a:p>
+          <a:p>
+            <a:pPr>
+              <a:spcAft>
+                <a:spcPts val="800"/>
+              </a:spcAft>
+            </a:pPr>
+            <a:r>
+              <a:rPr sz="2000">
+                <a:solidFill>
+                  <a:srgbClr val="222222"/>
+                </a:solidFill>
+                <a:latin typeface="Malgun Gothic"/>
+              </a:rPr>
+              <a:t>• 인천은 하위권</a:t>
+            </a:r>
+          </a:p>
+          <a:p>
+            <a:pPr lvl="1">
+              <a:spcAft>
+                <a:spcPts val="800"/>
+              </a:spcAft>
+            </a:pPr>
+            <a:r>
+              <a:rPr sz="1700">
+                <a:solidFill>
+                  <a:srgbClr val="222222"/>
+                </a:solidFill>
+                <a:latin typeface="Malgun Gothic"/>
+              </a:rPr>
+              <a:t>– (사건부담 높음)</a:t>
+            </a:r>
+          </a:p>
+        </p:txBody>
+      </p:sp>
+      <p:sp>
+        <p:nvSpPr>
+          <p:cNvPr id="6" name="TextBox 5"/>
           <p:cNvSpPr txBox="1"/>
           <p:nvPr/>
         </p:nvSpPr>
@@ -4108,7 +4548,7 @@
                 </a:solidFill>
                 <a:latin typeface="Malgun Gothic"/>
               </a:rPr>
-              <a:t>📊 읽는 법 — 파랑=고접근성, 빨강=저접근성. 서울만 파랑, 전국이 붉음 → 서울 일극 집중.</a:t>
+              <a:t>📊 읽는 법 — 막대 길이=LLAI, 색=클러스터. 서울만 홀로 길고 파랑(별도 그룹).</a:t>
             </a:r>
           </a:p>
         </p:txBody>
@@ -4154,13 +4594,13 @@
           <a:lstStyle/>
           <a:p>
             <a:r>
-              <a:rPr sz="3000" b="1">
+              <a:rPr sz="2800" b="1">
                 <a:solidFill>
                   <a:srgbClr val="1F3A5F"/>
                 </a:solidFill>
                 <a:latin typeface="Malgun Gothic"/>
               </a:rPr>
-              <a:t>8. 가설 H2 — 변호사 ↔ 사건 부담</a:t>
+              <a:t>7. 결과 ② — 코로플레스 지도</a:t>
             </a:r>
           </a:p>
         </p:txBody>
@@ -4173,7 +4613,7 @@
         </p:nvSpPr>
         <p:spPr>
           <a:xfrm>
-            <a:off x="548640" y="1234440"/>
+            <a:off x="548640" y="1188720"/>
             <a:ext cx="11064240" cy="38100"/>
           </a:xfrm>
           <a:prstGeom prst="rect">
@@ -4210,7 +4650,7 @@
       </p:sp>
       <p:pic>
         <p:nvPicPr>
-          <p:cNvPr id="4" name="Picture 3" descr="fig2_scatter_a1_a2_region13.png"/>
+          <p:cNvPr id="4" name="Picture 3" descr="fig7_map_region13.png"/>
           <p:cNvPicPr>
             <a:picLocks noChangeAspect="1"/>
           </p:cNvPicPr>
@@ -4224,8 +4664,8 @@
         </p:blipFill>
         <p:spPr>
           <a:xfrm>
-            <a:off x="457200" y="1554480"/>
-            <a:ext cx="5346315" cy="4206240"/>
+            <a:off x="3657600" y="1371600"/>
+            <a:ext cx="5525669" cy="4572000"/>
           </a:xfrm>
           <a:prstGeom prst="rect">
             <a:avLst/>
@@ -4235,93 +4675,6 @@
       <p:sp>
         <p:nvSpPr>
           <p:cNvPr id="5" name="TextBox 4"/>
-          <p:cNvSpPr txBox="1"/>
-          <p:nvPr/>
-        </p:nvSpPr>
-        <p:spPr>
-          <a:xfrm>
-            <a:off x="7040880" y="1828800"/>
-            <a:ext cx="4846320" cy="4937760"/>
-          </a:xfrm>
-          <a:prstGeom prst="rect">
-            <a:avLst/>
-          </a:prstGeom>
-          <a:noFill/>
-        </p:spPr>
-        <p:txBody>
-          <a:bodyPr wrap="square">
-            <a:spAutoFit/>
-          </a:bodyPr>
-          <a:lstStyle/>
-          <a:p>
-            <a:pPr>
-              <a:spcAft>
-                <a:spcPts val="900"/>
-              </a:spcAft>
-            </a:pPr>
-            <a:r>
-              <a:rPr sz="2000">
-                <a:solidFill>
-                  <a:srgbClr val="222222"/>
-                </a:solidFill>
-                <a:latin typeface="Malgun Gothic"/>
-              </a:rPr>
-              <a:t>• 강한 음의 상관</a:t>
-            </a:r>
-          </a:p>
-          <a:p>
-            <a:pPr lvl="1">
-              <a:spcAft>
-                <a:spcPts val="900"/>
-              </a:spcAft>
-            </a:pPr>
-            <a:r>
-              <a:rPr sz="1700">
-                <a:solidFill>
-                  <a:srgbClr val="222222"/>
-                </a:solidFill>
-                <a:latin typeface="Malgun Gothic"/>
-              </a:rPr>
-              <a:t>– r = −0.84 ~ −0.88 (p&lt;0.01)</a:t>
-            </a:r>
-          </a:p>
-          <a:p>
-            <a:pPr>
-              <a:spcAft>
-                <a:spcPts val="900"/>
-              </a:spcAft>
-            </a:pPr>
-            <a:r>
-              <a:rPr sz="2000">
-                <a:solidFill>
-                  <a:srgbClr val="222222"/>
-                </a:solidFill>
-                <a:latin typeface="Malgun Gothic"/>
-              </a:rPr>
-              <a:t>• 변호사 부족 → 1인당 부담 폭증</a:t>
-            </a:r>
-          </a:p>
-          <a:p>
-            <a:pPr>
-              <a:spcAft>
-                <a:spcPts val="900"/>
-              </a:spcAft>
-            </a:pPr>
-            <a:r>
-              <a:rPr sz="2000">
-                <a:solidFill>
-                  <a:srgbClr val="222222"/>
-                </a:solidFill>
-                <a:latin typeface="Malgun Gothic"/>
-              </a:rPr>
-              <a:t>• 서울은 우하단 극단 이상치</a:t>
-            </a:r>
-          </a:p>
-        </p:txBody>
-      </p:sp>
-      <p:sp>
-        <p:nvSpPr>
-          <p:cNvPr id="6" name="TextBox 5"/>
           <p:cNvSpPr txBox="1"/>
           <p:nvPr/>
         </p:nvSpPr>
@@ -4348,7 +4701,7 @@
                 </a:solidFill>
                 <a:latin typeface="Malgun Gothic"/>
               </a:rPr>
-              <a:t>📊 읽는 법 — 오른쪽 아래로 갈수록 좋음. 서울은 맨 오른쪽 아래, 비수도권은 왼쪽 위에 뭉침.</a:t>
+              <a:t>📊 읽는 법 — 파랑=고접근성, 빨강=저접근성. 서울만 파랑, 전국이 붉음 → 서울 일극 집중.</a:t>
             </a:r>
           </a:p>
         </p:txBody>
@@ -4394,13 +4747,13 @@
           <a:lstStyle/>
           <a:p>
             <a:r>
-              <a:rPr sz="3000" b="1">
+              <a:rPr sz="2800" b="1">
                 <a:solidFill>
                   <a:srgbClr val="1F3A5F"/>
                 </a:solidFill>
                 <a:latin typeface="Malgun Gothic"/>
               </a:rPr>
-              <a:t>9. 가설 H4 — 양적 팽창의 함정 ★</a:t>
+              <a:t>8. 가설 H2 — 변호사 ↔ 사건 부담</a:t>
             </a:r>
           </a:p>
         </p:txBody>
@@ -4413,7 +4766,7 @@
         </p:nvSpPr>
         <p:spPr>
           <a:xfrm>
-            <a:off x="548640" y="1234440"/>
+            <a:off x="548640" y="1188720"/>
             <a:ext cx="11064240" cy="38100"/>
           </a:xfrm>
           <a:prstGeom prst="rect">
@@ -4450,7 +4803,7 @@
       </p:sp>
       <p:pic>
         <p:nvPicPr>
-          <p:cNvPr id="4" name="Picture 3" descr="fig8_lawyer_trend.png"/>
+          <p:cNvPr id="4" name="Picture 3" descr="fig2_scatter_a1_a2_region13.png"/>
           <p:cNvPicPr>
             <a:picLocks noChangeAspect="1"/>
           </p:cNvPicPr>
@@ -4465,7 +4818,7 @@
         <p:spPr>
           <a:xfrm>
             <a:off x="457200" y="1554480"/>
-            <a:ext cx="7072970" cy="4114800"/>
+            <a:ext cx="5346315" cy="4206240"/>
           </a:xfrm>
           <a:prstGeom prst="rect">
             <a:avLst/>
@@ -4480,8 +4833,8 @@
         </p:nvSpPr>
         <p:spPr>
           <a:xfrm>
-            <a:off x="7680960" y="1737360"/>
-            <a:ext cx="4297680" cy="4937760"/>
+            <a:off x="7040880" y="1828800"/>
+            <a:ext cx="4846320" cy="4937760"/>
           </a:xfrm>
           <a:prstGeom prst="rect">
             <a:avLst/>
@@ -4496,81 +4849,65 @@
           <a:p>
             <a:pPr>
               <a:spcAft>
-                <a:spcPts val="900"/>
+                <a:spcPts val="800"/>
               </a:spcAft>
             </a:pPr>
             <a:r>
-              <a:rPr sz="1800">
+              <a:rPr sz="2000">
                 <a:solidFill>
                   <a:srgbClr val="222222"/>
                 </a:solidFill>
                 <a:latin typeface="Malgun Gothic"/>
               </a:rPr>
-              <a:t>• 변호사 3.4배↑</a:t>
+              <a:t>• 강한 음의 상관</a:t>
             </a:r>
           </a:p>
           <a:p>
             <a:pPr lvl="1">
               <a:spcAft>
-                <a:spcPts val="900"/>
+                <a:spcPts val="800"/>
               </a:spcAft>
             </a:pPr>
             <a:r>
-              <a:rPr sz="1500">
+              <a:rPr sz="1700">
                 <a:solidFill>
                   <a:srgbClr val="222222"/>
                 </a:solidFill>
                 <a:latin typeface="Malgun Gothic"/>
               </a:rPr>
-              <a:t>– 9,612 → 32,273명</a:t>
+              <a:t>– r = −0.84 ~ −0.88 (p&lt;0.01)</a:t>
             </a:r>
           </a:p>
           <a:p>
             <a:pPr>
               <a:spcAft>
-                <a:spcPts val="900"/>
+                <a:spcPts val="800"/>
               </a:spcAft>
             </a:pPr>
             <a:r>
-              <a:rPr sz="1800">
+              <a:rPr sz="2000">
                 <a:solidFill>
                   <a:srgbClr val="222222"/>
                 </a:solidFill>
                 <a:latin typeface="Malgun Gothic"/>
               </a:rPr>
-              <a:t>• 서울 비중 71%→76%↑</a:t>
-            </a:r>
-          </a:p>
-          <a:p>
-            <a:pPr lvl="1">
+              <a:t>• 변호사 부족 → 1인당 부담 폭증</a:t>
+            </a:r>
+          </a:p>
+          <a:p>
+            <a:pPr>
               <a:spcAft>
-                <a:spcPts val="900"/>
+                <a:spcPts val="800"/>
               </a:spcAft>
             </a:pPr>
             <a:r>
-              <a:rPr sz="1500">
+              <a:rPr sz="2000">
                 <a:solidFill>
                   <a:srgbClr val="222222"/>
                 </a:solidFill>
                 <a:latin typeface="Malgun Gothic"/>
               </a:rPr>
-              <a:t>– 비수도권 全 권역 하락</a:t>
-            </a:r>
-          </a:p>
-          <a:p>
-            <a:pPr>
-              <a:spcAft>
-                <a:spcPts val="900"/>
-              </a:spcAft>
-            </a:pPr>
-            <a:r>
-              <a:rPr sz="1800">
-                <a:solidFill>
-                  <a:srgbClr val="222222"/>
-                </a:solidFill>
-                <a:latin typeface="Malgun Gothic"/>
-              </a:rPr>
-              <a:t>• HHI 0.53→0.60 심화</a:t>
+              <a:t>• 서울은 우하단 극단 이상치</a:t>
             </a:r>
           </a:p>
         </p:txBody>
@@ -4604,7 +4941,7 @@
                 </a:solidFill>
                 <a:latin typeface="Malgun Gothic"/>
               </a:rPr>
-              <a:t>📊 읽는 법 — 권역별 점유율 2009(회색) vs 2026(빨강). 서울만 커지고 나머지는 줄거나 정체.</a:t>
+              <a:t>📊 읽는 법 — 오른쪽 아래로 갈수록 좋음. 서울은 맨 오른쪽 아래, 비수도권은 왼쪽 위에 뭉침.</a:t>
             </a:r>
           </a:p>
         </p:txBody>
@@ -4650,13 +4987,13 @@
           <a:lstStyle/>
           <a:p>
             <a:r>
-              <a:rPr sz="3000" b="1">
+              <a:rPr sz="2800" b="1">
                 <a:solidFill>
                   <a:srgbClr val="1F3A5F"/>
                 </a:solidFill>
                 <a:latin typeface="Malgun Gothic"/>
               </a:rPr>
-              <a:t>10. 심화 — 서울을 빼고 보면</a:t>
+              <a:t>9. 가설 H4 — 양적 팽창의 함정 ★</a:t>
             </a:r>
           </a:p>
         </p:txBody>
@@ -4669,7 +5006,7 @@
         </p:nvSpPr>
         <p:spPr>
           <a:xfrm>
-            <a:off x="548640" y="1234440"/>
+            <a:off x="548640" y="1188720"/>
             <a:ext cx="11064240" cy="38100"/>
           </a:xfrm>
           <a:prstGeom prst="rect">
@@ -4706,7 +5043,7 @@
       </p:sp>
       <p:pic>
         <p:nvPicPr>
-          <p:cNvPr id="4" name="Picture 3" descr="fig7_map_region13_exseoul.png"/>
+          <p:cNvPr id="4" name="Picture 3" descr="fig8_lawyer_trend.png"/>
           <p:cNvPicPr>
             <a:picLocks noChangeAspect="1"/>
           </p:cNvPicPr>
@@ -4720,8 +5057,8 @@
         </p:blipFill>
         <p:spPr>
           <a:xfrm>
-            <a:off x="365760" y="1463040"/>
-            <a:ext cx="5304642" cy="4389120"/>
+            <a:off x="457200" y="1554480"/>
+            <a:ext cx="7072970" cy="4114800"/>
           </a:xfrm>
           <a:prstGeom prst="rect">
             <a:avLst/>
@@ -4736,8 +5073,8 @@
         </p:nvSpPr>
         <p:spPr>
           <a:xfrm>
-            <a:off x="7040880" y="1828800"/>
-            <a:ext cx="4846320" cy="4937760"/>
+            <a:off x="7680960" y="1737360"/>
+            <a:ext cx="4297680" cy="4937760"/>
           </a:xfrm>
           <a:prstGeom prst="rect">
             <a:avLst/>
@@ -4752,65 +5089,81 @@
           <a:p>
             <a:pPr>
               <a:spcAft>
-                <a:spcPts val="900"/>
+                <a:spcPts val="800"/>
               </a:spcAft>
             </a:pPr>
             <a:r>
-              <a:rPr sz="2000">
+              <a:rPr sz="1800">
                 <a:solidFill>
                   <a:srgbClr val="222222"/>
                 </a:solidFill>
                 <a:latin typeface="Malgun Gothic"/>
               </a:rPr>
-              <a:t>• 부산·울산·제주 상위 부상</a:t>
+              <a:t>• 변호사 3.4배↑</a:t>
+            </a:r>
+          </a:p>
+          <a:p>
+            <a:pPr lvl="1">
+              <a:spcAft>
+                <a:spcPts val="800"/>
+              </a:spcAft>
+            </a:pPr>
+            <a:r>
+              <a:rPr sz="1500">
+                <a:solidFill>
+                  <a:srgbClr val="222222"/>
+                </a:solidFill>
+                <a:latin typeface="Malgun Gothic"/>
+              </a:rPr>
+              <a:t>– 9,612 → 32,273명</a:t>
             </a:r>
           </a:p>
           <a:p>
             <a:pPr>
               <a:spcAft>
-                <a:spcPts val="900"/>
+                <a:spcPts val="800"/>
               </a:spcAft>
             </a:pPr>
             <a:r>
-              <a:rPr sz="2000">
+              <a:rPr sz="1800">
                 <a:solidFill>
                   <a:srgbClr val="222222"/>
                 </a:solidFill>
                 <a:latin typeface="Malgun Gothic"/>
               </a:rPr>
-              <a:t>• 경기·인천은 중하위</a:t>
+              <a:t>• 서울 비중 71%→76%↑</a:t>
+            </a:r>
+          </a:p>
+          <a:p>
+            <a:pPr lvl="1">
+              <a:spcAft>
+                <a:spcPts val="800"/>
+              </a:spcAft>
+            </a:pPr>
+            <a:r>
+              <a:rPr sz="1500">
+                <a:solidFill>
+                  <a:srgbClr val="222222"/>
+                </a:solidFill>
+                <a:latin typeface="Malgun Gothic"/>
+              </a:rPr>
+              <a:t>– 비수도권 全 권역 하락</a:t>
             </a:r>
           </a:p>
           <a:p>
             <a:pPr>
               <a:spcAft>
-                <a:spcPts val="900"/>
+                <a:spcPts val="800"/>
               </a:spcAft>
             </a:pPr>
             <a:r>
-              <a:rPr sz="2000">
+              <a:rPr sz="1800">
                 <a:solidFill>
                   <a:srgbClr val="222222"/>
                 </a:solidFill>
                 <a:latin typeface="Malgun Gothic"/>
               </a:rPr>
-              <a:t>• 핵심: '수도권 우위'는</a:t>
-            </a:r>
-          </a:p>
-          <a:p>
-            <a:pPr lvl="1">
-              <a:spcAft>
-                <a:spcPts val="900"/>
-              </a:spcAft>
-            </a:pPr>
-            <a:r>
-              <a:rPr sz="1700">
-                <a:solidFill>
-                  <a:srgbClr val="222222"/>
-                </a:solidFill>
-                <a:latin typeface="Malgun Gothic"/>
-              </a:rPr>
-              <a:t>– 사실상 서울 단독 현상</a:t>
+              <a:t>• HHI 0.53→0.60 심화</a:t>
             </a:r>
           </a:p>
         </p:txBody>
@@ -4844,7 +5197,7 @@
                 </a:solidFill>
                 <a:latin typeface="Malgun Gothic"/>
               </a:rPr>
-              <a:t>📊 읽는 법 — 서울 제외·재정규화(서울 회색). 색 범위 재조정 → 지방 내부 격차가 보임.</a:t>
+              <a:t>📊 읽는 법 — 권역별 점유율 2009(회색) vs 2026(빨강). 서울만 커지고 나머지는 줄거나 정체.</a:t>
             </a:r>
           </a:p>
         </p:txBody>
@@ -4890,13 +5243,13 @@
           <a:lstStyle/>
           <a:p>
             <a:r>
-              <a:rPr sz="3000" b="1">
+              <a:rPr sz="2800" b="1">
                 <a:solidFill>
                   <a:srgbClr val="1F3A5F"/>
                 </a:solidFill>
                 <a:latin typeface="Malgun Gothic"/>
               </a:rPr>
-              <a:t>11. 가설 검정 종합</a:t>
+              <a:t>10. 심화 — 서울을 빼고 보면</a:t>
             </a:r>
           </a:p>
         </p:txBody>
@@ -4909,7 +5262,7 @@
         </p:nvSpPr>
         <p:spPr>
           <a:xfrm>
-            <a:off x="548640" y="1234440"/>
+            <a:off x="548640" y="1188720"/>
             <a:ext cx="11064240" cy="38100"/>
           </a:xfrm>
           <a:prstGeom prst="rect">
@@ -4944,16 +5297,40 @@
           </a:p>
         </p:txBody>
       </p:sp>
-      <p:sp>
-        <p:nvSpPr>
-          <p:cNvPr id="4" name="TextBox 3"/>
+      <p:pic>
+        <p:nvPicPr>
+          <p:cNvPr id="4" name="Picture 3" descr="fig7_map_region13_exseoul.png"/>
+          <p:cNvPicPr>
+            <a:picLocks noChangeAspect="1"/>
+          </p:cNvPicPr>
+          <p:nvPr/>
+        </p:nvPicPr>
+        <p:blipFill>
+          <a:blip r:embed="rId2"/>
+          <a:stretch>
+            <a:fillRect/>
+          </a:stretch>
+        </p:blipFill>
+        <p:spPr>
+          <a:xfrm>
+            <a:off x="365760" y="1463040"/>
+            <a:ext cx="5304642" cy="4389120"/>
+          </a:xfrm>
+          <a:prstGeom prst="rect">
+            <a:avLst/>
+          </a:prstGeom>
+        </p:spPr>
+      </p:pic>
+      <p:sp>
+        <p:nvSpPr>
+          <p:cNvPr id="5" name="TextBox 4"/>
           <p:cNvSpPr txBox="1"/>
           <p:nvPr/>
         </p:nvSpPr>
         <p:spPr>
           <a:xfrm>
-            <a:off x="640080" y="1554480"/>
-            <a:ext cx="10972800" cy="4937760"/>
+            <a:off x="7040880" y="1828800"/>
+            <a:ext cx="4846320" cy="4937760"/>
           </a:xfrm>
           <a:prstGeom prst="rect">
             <a:avLst/>
@@ -4968,7 +5345,7 @@
           <a:p>
             <a:pPr>
               <a:spcAft>
-                <a:spcPts val="900"/>
+                <a:spcPts val="800"/>
               </a:spcAft>
             </a:pPr>
             <a:r>
@@ -4978,13 +5355,13 @@
                 </a:solidFill>
                 <a:latin typeface="Malgun Gothic"/>
               </a:rPr>
-              <a:t>• H2 ✅ 강하게 지지 — corr(A1,A2) = −0.84~−0.88 (p&lt;0.01)</a:t>
+              <a:t>• 부산·울산·제주 상위 부상</a:t>
             </a:r>
           </a:p>
           <a:p>
             <a:pPr>
               <a:spcAft>
-                <a:spcPts val="900"/>
+                <a:spcPts val="800"/>
               </a:spcAft>
             </a:pPr>
             <a:r>
@@ -4994,13 +5371,13 @@
                 </a:solidFill>
                 <a:latin typeface="Malgun Gothic"/>
               </a:rPr>
-              <a:t>• H4 ✅ 지지 — 변호사 3.4배↑에도 서울 집중 심화 + 법률구조 격차 확대</a:t>
+              <a:t>• 경기·인천은 중하위</a:t>
             </a:r>
           </a:p>
           <a:p>
             <a:pPr>
               <a:spcAft>
-                <a:spcPts val="900"/>
+                <a:spcPts val="800"/>
               </a:spcAft>
             </a:pPr>
             <a:r>
@@ -5010,39 +5387,57 @@
                 </a:solidFill>
                 <a:latin typeface="Malgun Gothic"/>
               </a:rPr>
-              <a:t>• H1 △ 방향만 일치 — 수도권 1인당 인구 4,039 &lt; 비수도권 5,250 (p=0.19)</a:t>
-            </a:r>
-          </a:p>
-          <a:p>
-            <a:pPr>
+              <a:t>• 핵심: '수도권 우위'는</a:t>
+            </a:r>
+          </a:p>
+          <a:p>
+            <a:pPr lvl="1">
               <a:spcAft>
-                <a:spcPts val="900"/>
+                <a:spcPts val="800"/>
               </a:spcAft>
             </a:pPr>
             <a:r>
-              <a:rPr sz="2000">
+              <a:rPr sz="1700">
                 <a:solidFill>
                   <a:srgbClr val="222222"/>
                 </a:solidFill>
                 <a:latin typeface="Malgun Gothic"/>
               </a:rPr>
-              <a:t>• H3 △ 약함 — GRDP와 접근성 상관 비유의</a:t>
-            </a:r>
-          </a:p>
-          <a:p>
-            <a:pPr lvl="1">
-              <a:spcAft>
-                <a:spcPts val="900"/>
-              </a:spcAft>
-            </a:pPr>
-            <a:r>
-              <a:rPr sz="1700">
-                <a:solidFill>
-                  <a:srgbClr val="222222"/>
-                </a:solidFill>
-                <a:latin typeface="Malgun Gothic"/>
-              </a:rPr>
-              <a:t>– 표본 작음(권역 10~13개) → 검정력 한계 명시</a:t>
+              <a:t>– 사실상 서울 단독 현상</a:t>
+            </a:r>
+          </a:p>
+        </p:txBody>
+      </p:sp>
+      <p:sp>
+        <p:nvSpPr>
+          <p:cNvPr id="6" name="TextBox 5"/>
+          <p:cNvSpPr txBox="1"/>
+          <p:nvPr/>
+        </p:nvSpPr>
+        <p:spPr>
+          <a:xfrm>
+            <a:off x="640080" y="5989320"/>
+            <a:ext cx="10881360" cy="640080"/>
+          </a:xfrm>
+          <a:prstGeom prst="rect">
+            <a:avLst/>
+          </a:prstGeom>
+          <a:noFill/>
+        </p:spPr>
+        <p:txBody>
+          <a:bodyPr wrap="square">
+            <a:spAutoFit/>
+          </a:bodyPr>
+          <a:lstStyle/>
+          <a:p>
+            <a:r>
+              <a:rPr sz="1400" i="1">
+                <a:solidFill>
+                  <a:srgbClr val="555555"/>
+                </a:solidFill>
+                <a:latin typeface="Malgun Gothic"/>
+              </a:rPr>
+              <a:t>📊 읽는 법 — 서울 제외·재정규화(서울 회색). 색 범위 재조정 → 지방 내부 격차가 보임.</a:t>
             </a:r>
           </a:p>
         </p:txBody>
@@ -5088,13 +5483,13 @@
           <a:lstStyle/>
           <a:p>
             <a:r>
-              <a:rPr sz="3000" b="1">
+              <a:rPr sz="2800" b="1">
                 <a:solidFill>
                   <a:srgbClr val="1F3A5F"/>
                 </a:solidFill>
                 <a:latin typeface="Malgun Gothic"/>
               </a:rPr>
-              <a:t>12. 결론 · 정책 시사점</a:t>
+              <a:t>11. 가설 검정 종합</a:t>
             </a:r>
           </a:p>
         </p:txBody>
@@ -5107,7 +5502,7 @@
         </p:nvSpPr>
         <p:spPr>
           <a:xfrm>
-            <a:off x="548640" y="1234440"/>
+            <a:off x="548640" y="1188720"/>
             <a:ext cx="11064240" cy="38100"/>
           </a:xfrm>
           <a:prstGeom prst="rect">
@@ -5166,7 +5561,7 @@
           <a:p>
             <a:pPr>
               <a:spcAft>
-                <a:spcPts val="900"/>
+                <a:spcPts val="800"/>
               </a:spcAft>
             </a:pPr>
             <a:r>
@@ -5176,13 +5571,13 @@
                 </a:solidFill>
                 <a:latin typeface="Malgun Gothic"/>
               </a:rPr>
-              <a:t>• 변호사 자원의 서울 일극 집중이 격차의 핵심 동인</a:t>
+              <a:t>• H2 ✅ 강하게 지지 — corr(A1,A2) = −0.84~−0.88 (p&lt;0.01)</a:t>
             </a:r>
           </a:p>
           <a:p>
             <a:pPr>
               <a:spcAft>
-                <a:spcPts val="900"/>
+                <a:spcPts val="800"/>
               </a:spcAft>
             </a:pPr>
             <a:r>
@@ -5192,13 +5587,13 @@
                 </a:solidFill>
                 <a:latin typeface="Malgun Gothic"/>
               </a:rPr>
-              <a:t>• 인구 대비·사건부담이 접근성을 좌우 (인천=수도권인데 하위)</a:t>
+              <a:t>• H4 ✅ 지지 — 변호사 3.4배↑에도 서울 집중 심화 + 법률구조 격차 확대</a:t>
             </a:r>
           </a:p>
           <a:p>
             <a:pPr>
               <a:spcAft>
-                <a:spcPts val="900"/>
+                <a:spcPts val="800"/>
               </a:spcAft>
             </a:pPr>
             <a:r>
@@ -5208,13 +5603,13 @@
                 </a:solidFill>
                 <a:latin typeface="Malgun Gothic"/>
               </a:rPr>
-              <a:t>• 양적 팽창만으로는 격차 해소 안 됨</a:t>
+              <a:t>• H1 △ 방향만 일치 — 수도권 1인당 인구 4,039 &lt; 비수도권 5,250 (p=0.19)</a:t>
             </a:r>
           </a:p>
           <a:p>
             <a:pPr>
               <a:spcAft>
-                <a:spcPts val="900"/>
+                <a:spcPts val="800"/>
               </a:spcAft>
             </a:pPr>
             <a:r>
@@ -5224,13 +5619,13 @@
                 </a:solidFill>
                 <a:latin typeface="Malgun Gothic"/>
               </a:rPr>
-              <a:t>• 정책 제언</a:t>
+              <a:t>• H3 △ 약함 — GRDP와 접근성 상관 비유의</a:t>
             </a:r>
           </a:p>
           <a:p>
             <a:pPr lvl="1">
               <a:spcAft>
-                <a:spcPts val="900"/>
+                <a:spcPts val="800"/>
               </a:spcAft>
             </a:pPr>
             <a:r>
@@ -5240,23 +5635,7 @@
                 </a:solidFill>
                 <a:latin typeface="Malgun Gothic"/>
               </a:rPr>
-              <a:t>– 지방 변호사 유치 인센티브 / 공단 자원 비수도권 우선 배치</a:t>
-            </a:r>
-          </a:p>
-          <a:p>
-            <a:pPr lvl="1">
-              <a:spcAft>
-                <a:spcPts val="900"/>
-              </a:spcAft>
-            </a:pPr>
-            <a:r>
-              <a:rPr sz="1700">
-                <a:solidFill>
-                  <a:srgbClr val="222222"/>
-                </a:solidFill>
-                <a:latin typeface="Malgun Gothic"/>
-              </a:rPr>
-              <a:t>– 사건부담 높은 권역 인력 보강 / 로스쿨 정원·배치 연계</a:t>
+              <a:t>– 표본 작음(권역 10~13개) → 검정력 한계 명시</a:t>
             </a:r>
           </a:p>
         </p:txBody>
@@ -5302,13 +5681,13 @@
           <a:lstStyle/>
           <a:p>
             <a:r>
-              <a:rPr sz="3000" b="1">
+              <a:rPr sz="2800" b="1">
                 <a:solidFill>
                   <a:srgbClr val="1F3A5F"/>
                 </a:solidFill>
                 <a:latin typeface="Malgun Gothic"/>
               </a:rPr>
-              <a:t>13. 한계와 향후 과제</a:t>
+              <a:t>12. 결론 · 정책 시사점</a:t>
             </a:r>
           </a:p>
         </p:txBody>
@@ -5321,7 +5700,7 @@
         </p:nvSpPr>
         <p:spPr>
           <a:xfrm>
-            <a:off x="548640" y="1234440"/>
+            <a:off x="548640" y="1188720"/>
             <a:ext cx="11064240" cy="38100"/>
           </a:xfrm>
           <a:prstGeom prst="rect">
@@ -5380,7 +5759,7 @@
           <a:p>
             <a:pPr>
               <a:spcAft>
-                <a:spcPts val="900"/>
+                <a:spcPts val="800"/>
               </a:spcAft>
             </a:pPr>
             <a:r>
@@ -5390,13 +5769,13 @@
                 </a:solidFill>
                 <a:latin typeface="Malgun Gothic"/>
               </a:rPr>
-              <a:t>• 변호사 2시점(2009·현재) — 연속 시계열은 변호사백서 PDF 보강 필요</a:t>
+              <a:t>• 변호사 자원의 서울 일극 집중이 격차의 핵심 동인</a:t>
             </a:r>
           </a:p>
           <a:p>
             <a:pPr>
               <a:spcAft>
-                <a:spcPts val="900"/>
+                <a:spcPts val="800"/>
               </a:spcAft>
             </a:pPr>
             <a:r>
@@ -5406,13 +5785,13 @@
                 </a:solidFill>
                 <a:latin typeface="Malgun Gothic"/>
               </a:rPr>
-              <a:t>• 표본이 작아 통계적 검정력 제한</a:t>
+              <a:t>• 인구 대비·사건부담이 접근성을 좌우 (인천=수도권인데 하위)</a:t>
             </a:r>
           </a:p>
           <a:p>
             <a:pPr>
               <a:spcAft>
-                <a:spcPts val="900"/>
+                <a:spcPts val="800"/>
               </a:spcAft>
             </a:pPr>
             <a:r>
@@ -5422,13 +5801,13 @@
                 </a:solidFill>
                 <a:latin typeface="Malgun Gothic"/>
               </a:rPr>
-              <a:t>• A3 공단 10도단위 → region13에선 인구비 근사배분</a:t>
+              <a:t>• 양적 팽창만으로는 격차 해소 안 됨</a:t>
             </a:r>
           </a:p>
           <a:p>
             <a:pPr>
               <a:spcAft>
-                <a:spcPts val="900"/>
+                <a:spcPts val="800"/>
               </a:spcAft>
             </a:pPr>
             <a:r>
@@ -5438,7 +5817,39 @@
                 </a:solidFill>
                 <a:latin typeface="Malgun Gothic"/>
               </a:rPr>
-              <a:t>• 향후: 코로플레스 대시보드 고도화, 시계열 LLAI</a:t>
+              <a:t>• 정책 제언</a:t>
+            </a:r>
+          </a:p>
+          <a:p>
+            <a:pPr lvl="1">
+              <a:spcAft>
+                <a:spcPts val="800"/>
+              </a:spcAft>
+            </a:pPr>
+            <a:r>
+              <a:rPr sz="1700">
+                <a:solidFill>
+                  <a:srgbClr val="222222"/>
+                </a:solidFill>
+                <a:latin typeface="Malgun Gothic"/>
+              </a:rPr>
+              <a:t>– 지방 변호사 유치 인센티브 / 공단 자원 비수도권 우선 배치</a:t>
+            </a:r>
+          </a:p>
+          <a:p>
+            <a:pPr lvl="1">
+              <a:spcAft>
+                <a:spcPts val="800"/>
+              </a:spcAft>
+            </a:pPr>
+            <a:r>
+              <a:rPr sz="1700">
+                <a:solidFill>
+                  <a:srgbClr val="222222"/>
+                </a:solidFill>
+                <a:latin typeface="Malgun Gothic"/>
+              </a:rPr>
+              <a:t>– 사건부담 높은 권역 인력 보강 / 로스쿨 정원·배치 연계</a:t>
             </a:r>
           </a:p>
         </p:txBody>
@@ -5484,13 +5895,13 @@
           <a:lstStyle/>
           <a:p>
             <a:r>
-              <a:rPr sz="3000" b="1">
+              <a:rPr sz="2800" b="1">
                 <a:solidFill>
                   <a:srgbClr val="1F3A5F"/>
                 </a:solidFill>
                 <a:latin typeface="Malgun Gothic"/>
               </a:rPr>
-              <a:t>부록 — region13 전체 결과표 (2024)</a:t>
+              <a:t>13. 한계와 향후 과제</a:t>
             </a:r>
           </a:p>
         </p:txBody>
@@ -5503,7 +5914,7 @@
         </p:nvSpPr>
         <p:spPr>
           <a:xfrm>
-            <a:off x="548640" y="1234440"/>
+            <a:off x="548640" y="1188720"/>
             <a:ext cx="11064240" cy="38100"/>
           </a:xfrm>
           <a:prstGeom prst="rect">
@@ -5538,6 +5949,434 @@
           </a:p>
         </p:txBody>
       </p:sp>
+      <p:sp>
+        <p:nvSpPr>
+          <p:cNvPr id="4" name="TextBox 3"/>
+          <p:cNvSpPr txBox="1"/>
+          <p:nvPr/>
+        </p:nvSpPr>
+        <p:spPr>
+          <a:xfrm>
+            <a:off x="640080" y="1554480"/>
+            <a:ext cx="10972800" cy="4937760"/>
+          </a:xfrm>
+          <a:prstGeom prst="rect">
+            <a:avLst/>
+          </a:prstGeom>
+          <a:noFill/>
+        </p:spPr>
+        <p:txBody>
+          <a:bodyPr wrap="square">
+            <a:spAutoFit/>
+          </a:bodyPr>
+          <a:lstStyle/>
+          <a:p>
+            <a:pPr>
+              <a:spcAft>
+                <a:spcPts val="800"/>
+              </a:spcAft>
+            </a:pPr>
+            <a:r>
+              <a:rPr sz="2000">
+                <a:solidFill>
+                  <a:srgbClr val="222222"/>
+                </a:solidFill>
+                <a:latin typeface="Malgun Gothic"/>
+              </a:rPr>
+              <a:t>• 변호사 2시점(2009·현재) — 연속 시계열은 변호사백서 PDF 보강 필요</a:t>
+            </a:r>
+          </a:p>
+          <a:p>
+            <a:pPr>
+              <a:spcAft>
+                <a:spcPts val="800"/>
+              </a:spcAft>
+            </a:pPr>
+            <a:r>
+              <a:rPr sz="2000">
+                <a:solidFill>
+                  <a:srgbClr val="222222"/>
+                </a:solidFill>
+                <a:latin typeface="Malgun Gothic"/>
+              </a:rPr>
+              <a:t>• 표본이 작아 통계적 검정력 제한</a:t>
+            </a:r>
+          </a:p>
+          <a:p>
+            <a:pPr>
+              <a:spcAft>
+                <a:spcPts val="800"/>
+              </a:spcAft>
+            </a:pPr>
+            <a:r>
+              <a:rPr sz="2000">
+                <a:solidFill>
+                  <a:srgbClr val="222222"/>
+                </a:solidFill>
+                <a:latin typeface="Malgun Gothic"/>
+              </a:rPr>
+              <a:t>• A3 공단 10도단위 → region13에선 인구비 근사배분</a:t>
+            </a:r>
+          </a:p>
+          <a:p>
+            <a:pPr>
+              <a:spcAft>
+                <a:spcPts val="800"/>
+              </a:spcAft>
+            </a:pPr>
+            <a:r>
+              <a:rPr sz="2000">
+                <a:solidFill>
+                  <a:srgbClr val="222222"/>
+                </a:solidFill>
+                <a:latin typeface="Malgun Gothic"/>
+              </a:rPr>
+              <a:t>• 향후: 코로플레스 대시보드 고도화, 시계열 LLAI</a:t>
+            </a:r>
+          </a:p>
+        </p:txBody>
+      </p:sp>
+    </p:spTree>
+  </p:cSld>
+  <p:clrMapOvr>
+    <a:masterClrMapping/>
+  </p:clrMapOvr>
+</p:sld>
+</file>
+
+<file path=ppt/slides/slide2.xml><?xml version="1.0" encoding="utf-8"?>
+<p:sld xmlns:a="http://schemas.openxmlformats.org/drawingml/2006/main" xmlns:p="http://schemas.openxmlformats.org/presentationml/2006/main" xmlns:r="http://schemas.openxmlformats.org/officeDocument/2006/relationships">
+  <p:cSld>
+    <p:spTree>
+      <p:nvGrpSpPr>
+        <p:cNvPr id="1" name=""/>
+        <p:cNvGrpSpPr/>
+        <p:nvPr/>
+      </p:nvGrpSpPr>
+      <p:grpSpPr/>
+      <p:sp>
+        <p:nvSpPr>
+          <p:cNvPr id="2" name="TextBox 1"/>
+          <p:cNvSpPr txBox="1"/>
+          <p:nvPr/>
+        </p:nvSpPr>
+        <p:spPr>
+          <a:xfrm>
+            <a:off x="502920" y="320040"/>
+            <a:ext cx="11155680" cy="914400"/>
+          </a:xfrm>
+          <a:prstGeom prst="rect">
+            <a:avLst/>
+          </a:prstGeom>
+          <a:noFill/>
+        </p:spPr>
+        <p:txBody>
+          <a:bodyPr wrap="square">
+            <a:spAutoFit/>
+          </a:bodyPr>
+          <a:lstStyle/>
+          <a:p>
+            <a:r>
+              <a:rPr sz="2800" b="1">
+                <a:solidFill>
+                  <a:srgbClr val="1F3A5F"/>
+                </a:solidFill>
+                <a:latin typeface="Malgun Gothic"/>
+              </a:rPr>
+              <a:t>연구 범위 · 선행연구 차용 여부</a:t>
+            </a:r>
+          </a:p>
+        </p:txBody>
+      </p:sp>
+      <p:sp>
+        <p:nvSpPr>
+          <p:cNvPr id="3" name="Rectangle 2"/>
+          <p:cNvSpPr/>
+          <p:nvPr/>
+        </p:nvSpPr>
+        <p:spPr>
+          <a:xfrm>
+            <a:off x="548640" y="1188720"/>
+            <a:ext cx="11064240" cy="38100"/>
+          </a:xfrm>
+          <a:prstGeom prst="rect">
+            <a:avLst/>
+          </a:prstGeom>
+          <a:solidFill>
+            <a:srgbClr val="C44E52"/>
+          </a:solidFill>
+          <a:ln>
+            <a:noFill/>
+          </a:ln>
+        </p:spPr>
+        <p:style>
+          <a:lnRef idx="1">
+            <a:schemeClr val="accent1"/>
+          </a:lnRef>
+          <a:fillRef idx="3">
+            <a:schemeClr val="accent1"/>
+          </a:fillRef>
+          <a:effectRef idx="2">
+            <a:schemeClr val="accent1"/>
+          </a:effectRef>
+          <a:fontRef idx="minor">
+            <a:schemeClr val="lt1"/>
+          </a:fontRef>
+        </p:style>
+        <p:txBody>
+          <a:bodyPr rtlCol="0" anchor="ctr"/>
+          <a:lstStyle/>
+          <a:p>
+            <a:pPr algn="ctr"/>
+          </a:p>
+        </p:txBody>
+      </p:sp>
+      <p:sp>
+        <p:nvSpPr>
+          <p:cNvPr id="4" name="TextBox 3"/>
+          <p:cNvSpPr txBox="1"/>
+          <p:nvPr/>
+        </p:nvSpPr>
+        <p:spPr>
+          <a:xfrm>
+            <a:off x="640080" y="1554480"/>
+            <a:ext cx="10972800" cy="4937760"/>
+          </a:xfrm>
+          <a:prstGeom prst="rect">
+            <a:avLst/>
+          </a:prstGeom>
+          <a:noFill/>
+        </p:spPr>
+        <p:txBody>
+          <a:bodyPr wrap="square">
+            <a:spAutoFit/>
+          </a:bodyPr>
+          <a:lstStyle/>
+          <a:p>
+            <a:pPr>
+              <a:spcAft>
+                <a:spcPts val="800"/>
+              </a:spcAft>
+            </a:pPr>
+            <a:r>
+              <a:rPr sz="1900">
+                <a:solidFill>
+                  <a:srgbClr val="222222"/>
+                </a:solidFill>
+                <a:latin typeface="Malgun Gothic"/>
+              </a:rPr>
+              <a:t>• 본 분석은 26-1 빅데이터컴퓨팅 기말 프로젝트로 직접 수행</a:t>
+            </a:r>
+          </a:p>
+          <a:p>
+            <a:pPr>
+              <a:spcAft>
+                <a:spcPts val="800"/>
+              </a:spcAft>
+            </a:pPr>
+            <a:r>
+              <a:rPr sz="1900">
+                <a:solidFill>
+                  <a:srgbClr val="222222"/>
+                </a:solidFill>
+                <a:latin typeface="Malgun Gothic"/>
+              </a:rPr>
+              <a:t>• 선행연구(타인) 차용: 없음</a:t>
+            </a:r>
+          </a:p>
+          <a:p>
+            <a:pPr lvl="1">
+              <a:spcAft>
+                <a:spcPts val="800"/>
+              </a:spcAft>
+            </a:pPr>
+            <a:r>
+              <a:rPr sz="1600">
+                <a:solidFill>
+                  <a:srgbClr val="222222"/>
+                </a:solidFill>
+                <a:latin typeface="Malgun Gothic"/>
+              </a:rPr>
+              <a:t>– LLAI 설계·수집·정제·분석·시각화 코드 전부 자체 개발</a:t>
+            </a:r>
+          </a:p>
+          <a:p>
+            <a:pPr>
+              <a:spcAft>
+                <a:spcPts val="800"/>
+              </a:spcAft>
+            </a:pPr>
+            <a:r>
+              <a:rPr sz="1900">
+                <a:solidFill>
+                  <a:srgbClr val="222222"/>
+                </a:solidFill>
+                <a:latin typeface="Malgun Gothic"/>
+              </a:rPr>
+              <a:t>• 본인 이전 연구 차용: 없음</a:t>
+            </a:r>
+          </a:p>
+          <a:p>
+            <a:pPr lvl="1">
+              <a:spcAft>
+                <a:spcPts val="800"/>
+              </a:spcAft>
+            </a:pPr>
+            <a:r>
+              <a:rPr sz="1600">
+                <a:solidFill>
+                  <a:srgbClr val="222222"/>
+                </a:solidFill>
+                <a:latin typeface="Malgun Gothic"/>
+              </a:rPr>
+              <a:t>– 주제·방법론 골격은 본 과목 제안서에서 직접 설계 → 기말에 구현</a:t>
+            </a:r>
+          </a:p>
+          <a:p>
+            <a:pPr>
+              <a:spcAft>
+                <a:spcPts val="800"/>
+              </a:spcAft>
+            </a:pPr>
+            <a:r>
+              <a:rPr sz="1900">
+                <a:solidFill>
+                  <a:srgbClr val="222222"/>
+                </a:solidFill>
+                <a:latin typeface="Malgun Gothic"/>
+              </a:rPr>
+              <a:t>• 외부 차용은 '공개 raw data·경계 파일'뿐 (모두 출처 명시)</a:t>
+            </a:r>
+          </a:p>
+          <a:p>
+            <a:pPr lvl="1">
+              <a:spcAft>
+                <a:spcPts val="800"/>
+              </a:spcAft>
+            </a:pPr>
+            <a:r>
+              <a:rPr sz="1600">
+                <a:solidFill>
+                  <a:srgbClr val="222222"/>
+                </a:solidFill>
+                <a:latin typeface="Malgun Gothic"/>
+              </a:rPr>
+              <a:t>– KOSIS·사법연감·공단·변협 / GeoJSON / 2009 변호사분포(법률저널)</a:t>
+            </a:r>
+          </a:p>
+          <a:p>
+            <a:pPr>
+              <a:spcAft>
+                <a:spcPts val="800"/>
+              </a:spcAft>
+            </a:pPr>
+            <a:r>
+              <a:rPr sz="1900">
+                <a:solidFill>
+                  <a:srgbClr val="222222"/>
+                </a:solidFill>
+                <a:latin typeface="Malgun Gothic"/>
+              </a:rPr>
+              <a:t>• → 데이터는 차용, 수집·정제·지수개발·분석·해석은 100% 본 프로젝트</a:t>
+            </a:r>
+          </a:p>
+        </p:txBody>
+      </p:sp>
+    </p:spTree>
+  </p:cSld>
+  <p:clrMapOvr>
+    <a:masterClrMapping/>
+  </p:clrMapOvr>
+</p:sld>
+</file>
+
+<file path=ppt/slides/slide20.xml><?xml version="1.0" encoding="utf-8"?>
+<p:sld xmlns:a="http://schemas.openxmlformats.org/drawingml/2006/main" xmlns:p="http://schemas.openxmlformats.org/presentationml/2006/main" xmlns:r="http://schemas.openxmlformats.org/officeDocument/2006/relationships">
+  <p:cSld>
+    <p:spTree>
+      <p:nvGrpSpPr>
+        <p:cNvPr id="1" name=""/>
+        <p:cNvGrpSpPr/>
+        <p:nvPr/>
+      </p:nvGrpSpPr>
+      <p:grpSpPr/>
+      <p:sp>
+        <p:nvSpPr>
+          <p:cNvPr id="2" name="TextBox 1"/>
+          <p:cNvSpPr txBox="1"/>
+          <p:nvPr/>
+        </p:nvSpPr>
+        <p:spPr>
+          <a:xfrm>
+            <a:off x="502920" y="320040"/>
+            <a:ext cx="11155680" cy="914400"/>
+          </a:xfrm>
+          <a:prstGeom prst="rect">
+            <a:avLst/>
+          </a:prstGeom>
+          <a:noFill/>
+        </p:spPr>
+        <p:txBody>
+          <a:bodyPr wrap="square">
+            <a:spAutoFit/>
+          </a:bodyPr>
+          <a:lstStyle/>
+          <a:p>
+            <a:r>
+              <a:rPr sz="2800" b="1">
+                <a:solidFill>
+                  <a:srgbClr val="1F3A5F"/>
+                </a:solidFill>
+                <a:latin typeface="Malgun Gothic"/>
+              </a:rPr>
+              <a:t>부록 — region13 전체 결과표 (2024)</a:t>
+            </a:r>
+          </a:p>
+        </p:txBody>
+      </p:sp>
+      <p:sp>
+        <p:nvSpPr>
+          <p:cNvPr id="3" name="Rectangle 2"/>
+          <p:cNvSpPr/>
+          <p:nvPr/>
+        </p:nvSpPr>
+        <p:spPr>
+          <a:xfrm>
+            <a:off x="548640" y="1188720"/>
+            <a:ext cx="11064240" cy="38100"/>
+          </a:xfrm>
+          <a:prstGeom prst="rect">
+            <a:avLst/>
+          </a:prstGeom>
+          <a:solidFill>
+            <a:srgbClr val="C44E52"/>
+          </a:solidFill>
+          <a:ln>
+            <a:noFill/>
+          </a:ln>
+        </p:spPr>
+        <p:style>
+          <a:lnRef idx="1">
+            <a:schemeClr val="accent1"/>
+          </a:lnRef>
+          <a:fillRef idx="3">
+            <a:schemeClr val="accent1"/>
+          </a:fillRef>
+          <a:effectRef idx="2">
+            <a:schemeClr val="accent1"/>
+          </a:effectRef>
+          <a:fontRef idx="minor">
+            <a:schemeClr val="lt1"/>
+          </a:fontRef>
+        </p:style>
+        <p:txBody>
+          <a:bodyPr rtlCol="0" anchor="ctr"/>
+          <a:lstStyle/>
+          <a:p>
+            <a:pPr algn="ctr"/>
+          </a:p>
+        </p:txBody>
+      </p:sp>
       <p:graphicFrame>
         <p:nvGraphicFramePr>
           <p:cNvPr id="4" name="Table 3"/>
@@ -5592,7 +6431,7 @@
                     <a:bodyPr/>
                     <a:lstStyle/>
                     <a:p>
-                      <a:pPr algn="ctr"/>
+                      <a:pPr algn="l"/>
                       <a:r>
                         <a:rPr sz="1200" b="1">
                           <a:solidFill>
@@ -5615,7 +6454,7 @@
                     <a:bodyPr/>
                     <a:lstStyle/>
                     <a:p>
-                      <a:pPr algn="ctr"/>
+                      <a:pPr algn="l"/>
                       <a:r>
                         <a:rPr sz="1200" b="1">
                           <a:solidFill>
@@ -5638,7 +6477,7 @@
                     <a:bodyPr/>
                     <a:lstStyle/>
                     <a:p>
-                      <a:pPr algn="ctr"/>
+                      <a:pPr algn="l"/>
                       <a:r>
                         <a:rPr sz="1200" b="1">
                           <a:solidFill>
@@ -5661,7 +6500,7 @@
                     <a:bodyPr/>
                     <a:lstStyle/>
                     <a:p>
-                      <a:pPr algn="ctr"/>
+                      <a:pPr algn="l"/>
                       <a:r>
                         <a:rPr sz="1200" b="1">
                           <a:solidFill>
@@ -5702,7 +6541,7 @@
                     <a:bodyPr/>
                     <a:lstStyle/>
                     <a:p>
-                      <a:pPr algn="ctr"/>
+                      <a:pPr algn="l"/>
                       <a:r>
                         <a:rPr sz="1200">
                           <a:latin typeface="Malgun Gothic"/>
@@ -5718,7 +6557,7 @@
                     <a:bodyPr/>
                     <a:lstStyle/>
                     <a:p>
-                      <a:pPr algn="ctr"/>
+                      <a:pPr algn="l"/>
                       <a:r>
                         <a:rPr sz="1200">
                           <a:latin typeface="Malgun Gothic"/>
@@ -5734,7 +6573,7 @@
                     <a:bodyPr/>
                     <a:lstStyle/>
                     <a:p>
-                      <a:pPr algn="ctr"/>
+                      <a:pPr algn="l"/>
                       <a:r>
                         <a:rPr sz="1200">
                           <a:latin typeface="Malgun Gothic"/>
@@ -5750,7 +6589,7 @@
                     <a:bodyPr/>
                     <a:lstStyle/>
                     <a:p>
-                      <a:pPr algn="ctr"/>
+                      <a:pPr algn="l"/>
                       <a:r>
                         <a:rPr sz="1200">
                           <a:latin typeface="Malgun Gothic"/>
@@ -5784,7 +6623,7 @@
                     <a:bodyPr/>
                     <a:lstStyle/>
                     <a:p>
-                      <a:pPr algn="ctr"/>
+                      <a:pPr algn="l"/>
                       <a:r>
                         <a:rPr sz="1200">
                           <a:latin typeface="Malgun Gothic"/>
@@ -5800,7 +6639,7 @@
                     <a:bodyPr/>
                     <a:lstStyle/>
                     <a:p>
-                      <a:pPr algn="ctr"/>
+                      <a:pPr algn="l"/>
                       <a:r>
                         <a:rPr sz="1200">
                           <a:latin typeface="Malgun Gothic"/>
@@ -5816,7 +6655,7 @@
                     <a:bodyPr/>
                     <a:lstStyle/>
                     <a:p>
-                      <a:pPr algn="ctr"/>
+                      <a:pPr algn="l"/>
                       <a:r>
                         <a:rPr sz="1200">
                           <a:latin typeface="Malgun Gothic"/>
@@ -5832,7 +6671,7 @@
                     <a:bodyPr/>
                     <a:lstStyle/>
                     <a:p>
-                      <a:pPr algn="ctr"/>
+                      <a:pPr algn="l"/>
                       <a:r>
                         <a:rPr sz="1200">
                           <a:latin typeface="Malgun Gothic"/>
@@ -5866,7 +6705,7 @@
                     <a:bodyPr/>
                     <a:lstStyle/>
                     <a:p>
-                      <a:pPr algn="ctr"/>
+                      <a:pPr algn="l"/>
                       <a:r>
                         <a:rPr sz="1200">
                           <a:latin typeface="Malgun Gothic"/>
@@ -5882,7 +6721,7 @@
                     <a:bodyPr/>
                     <a:lstStyle/>
                     <a:p>
-                      <a:pPr algn="ctr"/>
+                      <a:pPr algn="l"/>
                       <a:r>
                         <a:rPr sz="1200">
                           <a:latin typeface="Malgun Gothic"/>
@@ -5898,7 +6737,7 @@
                     <a:bodyPr/>
                     <a:lstStyle/>
                     <a:p>
-                      <a:pPr algn="ctr"/>
+                      <a:pPr algn="l"/>
                       <a:r>
                         <a:rPr sz="1200">
                           <a:latin typeface="Malgun Gothic"/>
@@ -5914,7 +6753,7 @@
                     <a:bodyPr/>
                     <a:lstStyle/>
                     <a:p>
-                      <a:pPr algn="ctr"/>
+                      <a:pPr algn="l"/>
                       <a:r>
                         <a:rPr sz="1200">
                           <a:latin typeface="Malgun Gothic"/>
@@ -5948,7 +6787,7 @@
                     <a:bodyPr/>
                     <a:lstStyle/>
                     <a:p>
-                      <a:pPr algn="ctr"/>
+                      <a:pPr algn="l"/>
                       <a:r>
                         <a:rPr sz="1200">
                           <a:latin typeface="Malgun Gothic"/>
@@ -5964,7 +6803,7 @@
                     <a:bodyPr/>
                     <a:lstStyle/>
                     <a:p>
-                      <a:pPr algn="ctr"/>
+                      <a:pPr algn="l"/>
                       <a:r>
                         <a:rPr sz="1200">
                           <a:latin typeface="Malgun Gothic"/>
@@ -5980,7 +6819,7 @@
                     <a:bodyPr/>
                     <a:lstStyle/>
                     <a:p>
-                      <a:pPr algn="ctr"/>
+                      <a:pPr algn="l"/>
                       <a:r>
                         <a:rPr sz="1200">
                           <a:latin typeface="Malgun Gothic"/>
@@ -5996,7 +6835,7 @@
                     <a:bodyPr/>
                     <a:lstStyle/>
                     <a:p>
-                      <a:pPr algn="ctr"/>
+                      <a:pPr algn="l"/>
                       <a:r>
                         <a:rPr sz="1200">
                           <a:latin typeface="Malgun Gothic"/>
@@ -6030,7 +6869,7 @@
                     <a:bodyPr/>
                     <a:lstStyle/>
                     <a:p>
-                      <a:pPr algn="ctr"/>
+                      <a:pPr algn="l"/>
                       <a:r>
                         <a:rPr sz="1200">
                           <a:latin typeface="Malgun Gothic"/>
@@ -6046,7 +6885,7 @@
                     <a:bodyPr/>
                     <a:lstStyle/>
                     <a:p>
-                      <a:pPr algn="ctr"/>
+                      <a:pPr algn="l"/>
                       <a:r>
                         <a:rPr sz="1200">
                           <a:latin typeface="Malgun Gothic"/>
@@ -6062,7 +6901,7 @@
                     <a:bodyPr/>
                     <a:lstStyle/>
                     <a:p>
-                      <a:pPr algn="ctr"/>
+                      <a:pPr algn="l"/>
                       <a:r>
                         <a:rPr sz="1200">
                           <a:latin typeface="Malgun Gothic"/>
@@ -6078,7 +6917,7 @@
                     <a:bodyPr/>
                     <a:lstStyle/>
                     <a:p>
-                      <a:pPr algn="ctr"/>
+                      <a:pPr algn="l"/>
                       <a:r>
                         <a:rPr sz="1200">
                           <a:latin typeface="Malgun Gothic"/>
@@ -6112,7 +6951,7 @@
                     <a:bodyPr/>
                     <a:lstStyle/>
                     <a:p>
-                      <a:pPr algn="ctr"/>
+                      <a:pPr algn="l"/>
                       <a:r>
                         <a:rPr sz="1200">
                           <a:latin typeface="Malgun Gothic"/>
@@ -6128,7 +6967,7 @@
                     <a:bodyPr/>
                     <a:lstStyle/>
                     <a:p>
-                      <a:pPr algn="ctr"/>
+                      <a:pPr algn="l"/>
                       <a:r>
                         <a:rPr sz="1200">
                           <a:latin typeface="Malgun Gothic"/>
@@ -6144,7 +6983,7 @@
                     <a:bodyPr/>
                     <a:lstStyle/>
                     <a:p>
-                      <a:pPr algn="ctr"/>
+                      <a:pPr algn="l"/>
                       <a:r>
                         <a:rPr sz="1200">
                           <a:latin typeface="Malgun Gothic"/>
@@ -6160,7 +6999,7 @@
                     <a:bodyPr/>
                     <a:lstStyle/>
                     <a:p>
-                      <a:pPr algn="ctr"/>
+                      <a:pPr algn="l"/>
                       <a:r>
                         <a:rPr sz="1200">
                           <a:latin typeface="Malgun Gothic"/>
@@ -6194,7 +7033,7 @@
                     <a:bodyPr/>
                     <a:lstStyle/>
                     <a:p>
-                      <a:pPr algn="ctr"/>
+                      <a:pPr algn="l"/>
                       <a:r>
                         <a:rPr sz="1200">
                           <a:latin typeface="Malgun Gothic"/>
@@ -6210,7 +7049,7 @@
                     <a:bodyPr/>
                     <a:lstStyle/>
                     <a:p>
-                      <a:pPr algn="ctr"/>
+                      <a:pPr algn="l"/>
                       <a:r>
                         <a:rPr sz="1200">
                           <a:latin typeface="Malgun Gothic"/>
@@ -6226,7 +7065,7 @@
                     <a:bodyPr/>
                     <a:lstStyle/>
                     <a:p>
-                      <a:pPr algn="ctr"/>
+                      <a:pPr algn="l"/>
                       <a:r>
                         <a:rPr sz="1200">
                           <a:latin typeface="Malgun Gothic"/>
@@ -6242,7 +7081,7 @@
                     <a:bodyPr/>
                     <a:lstStyle/>
                     <a:p>
-                      <a:pPr algn="ctr"/>
+                      <a:pPr algn="l"/>
                       <a:r>
                         <a:rPr sz="1200">
                           <a:latin typeface="Malgun Gothic"/>
@@ -6276,7 +7115,7 @@
                     <a:bodyPr/>
                     <a:lstStyle/>
                     <a:p>
-                      <a:pPr algn="ctr"/>
+                      <a:pPr algn="l"/>
                       <a:r>
                         <a:rPr sz="1200">
                           <a:latin typeface="Malgun Gothic"/>
@@ -6292,7 +7131,7 @@
                     <a:bodyPr/>
                     <a:lstStyle/>
                     <a:p>
-                      <a:pPr algn="ctr"/>
+                      <a:pPr algn="l"/>
                       <a:r>
                         <a:rPr sz="1200">
                           <a:latin typeface="Malgun Gothic"/>
@@ -6308,7 +7147,7 @@
                     <a:bodyPr/>
                     <a:lstStyle/>
                     <a:p>
-                      <a:pPr algn="ctr"/>
+                      <a:pPr algn="l"/>
                       <a:r>
                         <a:rPr sz="1200">
                           <a:latin typeface="Malgun Gothic"/>
@@ -6324,7 +7163,7 @@
                     <a:bodyPr/>
                     <a:lstStyle/>
                     <a:p>
-                      <a:pPr algn="ctr"/>
+                      <a:pPr algn="l"/>
                       <a:r>
                         <a:rPr sz="1200">
                           <a:latin typeface="Malgun Gothic"/>
@@ -6358,7 +7197,7 @@
                     <a:bodyPr/>
                     <a:lstStyle/>
                     <a:p>
-                      <a:pPr algn="ctr"/>
+                      <a:pPr algn="l"/>
                       <a:r>
                         <a:rPr sz="1200">
                           <a:latin typeface="Malgun Gothic"/>
@@ -6374,7 +7213,7 @@
                     <a:bodyPr/>
                     <a:lstStyle/>
                     <a:p>
-                      <a:pPr algn="ctr"/>
+                      <a:pPr algn="l"/>
                       <a:r>
                         <a:rPr sz="1200">
                           <a:latin typeface="Malgun Gothic"/>
@@ -6390,7 +7229,7 @@
                     <a:bodyPr/>
                     <a:lstStyle/>
                     <a:p>
-                      <a:pPr algn="ctr"/>
+                      <a:pPr algn="l"/>
                       <a:r>
                         <a:rPr sz="1200">
                           <a:latin typeface="Malgun Gothic"/>
@@ -6406,7 +7245,7 @@
                     <a:bodyPr/>
                     <a:lstStyle/>
                     <a:p>
-                      <a:pPr algn="ctr"/>
+                      <a:pPr algn="l"/>
                       <a:r>
                         <a:rPr sz="1200">
                           <a:latin typeface="Malgun Gothic"/>
@@ -6440,7 +7279,7 @@
                     <a:bodyPr/>
                     <a:lstStyle/>
                     <a:p>
-                      <a:pPr algn="ctr"/>
+                      <a:pPr algn="l"/>
                       <a:r>
                         <a:rPr sz="1200">
                           <a:latin typeface="Malgun Gothic"/>
@@ -6456,7 +7295,7 @@
                     <a:bodyPr/>
                     <a:lstStyle/>
                     <a:p>
-                      <a:pPr algn="ctr"/>
+                      <a:pPr algn="l"/>
                       <a:r>
                         <a:rPr sz="1200">
                           <a:latin typeface="Malgun Gothic"/>
@@ -6472,7 +7311,7 @@
                     <a:bodyPr/>
                     <a:lstStyle/>
                     <a:p>
-                      <a:pPr algn="ctr"/>
+                      <a:pPr algn="l"/>
                       <a:r>
                         <a:rPr sz="1200">
                           <a:latin typeface="Malgun Gothic"/>
@@ -6488,7 +7327,7 @@
                     <a:bodyPr/>
                     <a:lstStyle/>
                     <a:p>
-                      <a:pPr algn="ctr"/>
+                      <a:pPr algn="l"/>
                       <a:r>
                         <a:rPr sz="1200">
                           <a:latin typeface="Malgun Gothic"/>
@@ -6522,7 +7361,7 @@
                     <a:bodyPr/>
                     <a:lstStyle/>
                     <a:p>
-                      <a:pPr algn="ctr"/>
+                      <a:pPr algn="l"/>
                       <a:r>
                         <a:rPr sz="1200">
                           <a:latin typeface="Malgun Gothic"/>
@@ -6538,7 +7377,7 @@
                     <a:bodyPr/>
                     <a:lstStyle/>
                     <a:p>
-                      <a:pPr algn="ctr"/>
+                      <a:pPr algn="l"/>
                       <a:r>
                         <a:rPr sz="1200">
                           <a:latin typeface="Malgun Gothic"/>
@@ -6554,7 +7393,7 @@
                     <a:bodyPr/>
                     <a:lstStyle/>
                     <a:p>
-                      <a:pPr algn="ctr"/>
+                      <a:pPr algn="l"/>
                       <a:r>
                         <a:rPr sz="1200">
                           <a:latin typeface="Malgun Gothic"/>
@@ -6570,7 +7409,7 @@
                     <a:bodyPr/>
                     <a:lstStyle/>
                     <a:p>
-                      <a:pPr algn="ctr"/>
+                      <a:pPr algn="l"/>
                       <a:r>
                         <a:rPr sz="1200">
                           <a:latin typeface="Malgun Gothic"/>
@@ -6604,7 +7443,7 @@
                     <a:bodyPr/>
                     <a:lstStyle/>
                     <a:p>
-                      <a:pPr algn="ctr"/>
+                      <a:pPr algn="l"/>
                       <a:r>
                         <a:rPr sz="1200">
                           <a:latin typeface="Malgun Gothic"/>
@@ -6620,7 +7459,7 @@
                     <a:bodyPr/>
                     <a:lstStyle/>
                     <a:p>
-                      <a:pPr algn="ctr"/>
+                      <a:pPr algn="l"/>
                       <a:r>
                         <a:rPr sz="1200">
                           <a:latin typeface="Malgun Gothic"/>
@@ -6636,7 +7475,7 @@
                     <a:bodyPr/>
                     <a:lstStyle/>
                     <a:p>
-                      <a:pPr algn="ctr"/>
+                      <a:pPr algn="l"/>
                       <a:r>
                         <a:rPr sz="1200">
                           <a:latin typeface="Malgun Gothic"/>
@@ -6652,7 +7491,7 @@
                     <a:bodyPr/>
                     <a:lstStyle/>
                     <a:p>
-                      <a:pPr algn="ctr"/>
+                      <a:pPr algn="l"/>
                       <a:r>
                         <a:rPr sz="1200">
                           <a:latin typeface="Malgun Gothic"/>
@@ -6686,7 +7525,7 @@
                     <a:bodyPr/>
                     <a:lstStyle/>
                     <a:p>
-                      <a:pPr algn="ctr"/>
+                      <a:pPr algn="l"/>
                       <a:r>
                         <a:rPr sz="1200">
                           <a:latin typeface="Malgun Gothic"/>
@@ -6702,7 +7541,7 @@
                     <a:bodyPr/>
                     <a:lstStyle/>
                     <a:p>
-                      <a:pPr algn="ctr"/>
+                      <a:pPr algn="l"/>
                       <a:r>
                         <a:rPr sz="1200">
                           <a:latin typeface="Malgun Gothic"/>
@@ -6718,7 +7557,7 @@
                     <a:bodyPr/>
                     <a:lstStyle/>
                     <a:p>
-                      <a:pPr algn="ctr"/>
+                      <a:pPr algn="l"/>
                       <a:r>
                         <a:rPr sz="1200">
                           <a:latin typeface="Malgun Gothic"/>
@@ -6734,7 +7573,7 @@
                     <a:bodyPr/>
                     <a:lstStyle/>
                     <a:p>
-                      <a:pPr algn="ctr"/>
+                      <a:pPr algn="l"/>
                       <a:r>
                         <a:rPr sz="1200">
                           <a:latin typeface="Malgun Gothic"/>
@@ -6758,7 +7597,7 @@
 </p:sld>
 </file>
 
-<file path=ppt/slides/slide2.xml><?xml version="1.0" encoding="utf-8"?>
+<file path=ppt/slides/slide21.xml><?xml version="1.0" encoding="utf-8"?>
 <p:sld xmlns:a="http://schemas.openxmlformats.org/drawingml/2006/main" xmlns:p="http://schemas.openxmlformats.org/presentationml/2006/main" xmlns:r="http://schemas.openxmlformats.org/officeDocument/2006/relationships">
   <p:cSld>
     <p:spTree>
@@ -6791,13 +7630,13 @@
           <a:lstStyle/>
           <a:p>
             <a:r>
-              <a:rPr sz="3000" b="1">
+              <a:rPr sz="2800" b="1">
                 <a:solidFill>
                   <a:srgbClr val="1F3A5F"/>
                 </a:solidFill>
                 <a:latin typeface="Malgun Gothic"/>
               </a:rPr>
-              <a:t>연구 범위 · 선행연구 차용 여부</a:t>
+              <a:t>부록 A — 방법론 선택의 근거</a:t>
             </a:r>
           </a:p>
         </p:txBody>
@@ -6810,7 +7649,7 @@
         </p:nvSpPr>
         <p:spPr>
           <a:xfrm>
-            <a:off x="548640" y="1234440"/>
+            <a:off x="548640" y="1188720"/>
             <a:ext cx="11064240" cy="38100"/>
           </a:xfrm>
           <a:prstGeom prst="rect">
@@ -6869,129 +7708,97 @@
           <a:p>
             <a:pPr>
               <a:spcAft>
-                <a:spcPts val="900"/>
+                <a:spcPts val="800"/>
               </a:spcAft>
             </a:pPr>
             <a:r>
-              <a:rPr sz="1900">
+              <a:rPr sz="1800">
                 <a:solidFill>
                   <a:srgbClr val="222222"/>
                 </a:solidFill>
                 <a:latin typeface="Malgun Gothic"/>
               </a:rPr>
-              <a:t>• 본 분석은 26-1 빅데이터컴퓨팅 기말 프로젝트로 직접 수행</a:t>
+              <a:t>• 왜 17시도가 아닌 두 단위(13권역/10도단위)인가</a:t>
+            </a:r>
+          </a:p>
+          <a:p>
+            <a:pPr lvl="1">
+              <a:spcAft>
+                <a:spcPts val="800"/>
+              </a:spcAft>
+            </a:pPr>
+            <a:r>
+              <a:rPr sz="1500">
+                <a:solidFill>
+                  <a:srgbClr val="222222"/>
+                </a:solidFill>
+                <a:latin typeface="Malgun Gothic"/>
+              </a:rPr>
+              <a:t>– 변호사·법률구조가 광역시를 도에 묶어 제공 → 시도 분리 불가</a:t>
+            </a:r>
+          </a:p>
+          <a:p>
+            <a:pPr lvl="1">
+              <a:spcAft>
+                <a:spcPts val="800"/>
+              </a:spcAft>
+            </a:pPr>
+            <a:r>
+              <a:rPr sz="1500">
+                <a:solidFill>
+                  <a:srgbClr val="222222"/>
+                </a:solidFill>
+                <a:latin typeface="Malgun Gothic"/>
+              </a:rPr>
+              <a:t>– 두 단위 결론 일치(서울 1위·강원 최하) → 단위 선택에 무관함 입증</a:t>
             </a:r>
           </a:p>
           <a:p>
             <a:pPr>
               <a:spcAft>
-                <a:spcPts val="900"/>
+                <a:spcPts val="800"/>
               </a:spcAft>
             </a:pPr>
             <a:r>
-              <a:rPr sz="1900">
+              <a:rPr sz="1800">
                 <a:solidFill>
                   <a:srgbClr val="222222"/>
                 </a:solidFill>
                 <a:latin typeface="Malgun Gothic"/>
               </a:rPr>
-              <a:t>• 선행연구(타인) 차용: 없음</a:t>
-            </a:r>
-          </a:p>
-          <a:p>
-            <a:pPr lvl="1">
+              <a:t>• 왜 '본안사건'인가 — 전체의 60%가 등기·공탁(비송) → 실질 소송만</a:t>
+            </a:r>
+          </a:p>
+          <a:p>
+            <a:pPr>
               <a:spcAft>
-                <a:spcPts val="900"/>
+                <a:spcPts val="800"/>
               </a:spcAft>
             </a:pPr>
             <a:r>
-              <a:rPr sz="1600">
+              <a:rPr sz="1800">
                 <a:solidFill>
                   <a:srgbClr val="222222"/>
                 </a:solidFill>
                 <a:latin typeface="Malgun Gothic"/>
               </a:rPr>
-              <a:t>– LLAI 지수 설계·수집·정제·분석·시각화 코드 전부 자체 개발</a:t>
+              <a:t>• 왜 가중치 3종 — 자의성 방지, 어떤 방식이든 서울 1위(강건성)</a:t>
             </a:r>
           </a:p>
           <a:p>
             <a:pPr>
               <a:spcAft>
-                <a:spcPts val="900"/>
+                <a:spcPts val="800"/>
               </a:spcAft>
             </a:pPr>
             <a:r>
-              <a:rPr sz="1900">
+              <a:rPr sz="1800">
                 <a:solidFill>
                   <a:srgbClr val="222222"/>
                 </a:solidFill>
                 <a:latin typeface="Malgun Gothic"/>
               </a:rPr>
-              <a:t>• 본인 이전 연구 차용: 없음</a:t>
-            </a:r>
-          </a:p>
-          <a:p>
-            <a:pPr lvl="1">
-              <a:spcAft>
-                <a:spcPts val="900"/>
-              </a:spcAft>
-            </a:pPr>
-            <a:r>
-              <a:rPr sz="1600">
-                <a:solidFill>
-                  <a:srgbClr val="222222"/>
-                </a:solidFill>
-                <a:latin typeface="Malgun Gothic"/>
-              </a:rPr>
-              <a:t>– 분석 주제·방법론 골격은 본 과목 제안서에서 직접 설계 → 기말에 구현</a:t>
-            </a:r>
-          </a:p>
-          <a:p>
-            <a:pPr>
-              <a:spcAft>
-                <a:spcPts val="900"/>
-              </a:spcAft>
-            </a:pPr>
-            <a:r>
-              <a:rPr sz="1900">
-                <a:solidFill>
-                  <a:srgbClr val="222222"/>
-                </a:solidFill>
-                <a:latin typeface="Malgun Gothic"/>
-              </a:rPr>
-              <a:t>• 외부에서 가져온 것은 '공개 raw data'와 '경계 파일'뿐 (모두 출처 명시)</a:t>
-            </a:r>
-          </a:p>
-          <a:p>
-            <a:pPr lvl="1">
-              <a:spcAft>
-                <a:spcPts val="900"/>
-              </a:spcAft>
-            </a:pPr>
-            <a:r>
-              <a:rPr sz="1600">
-                <a:solidFill>
-                  <a:srgbClr val="222222"/>
-                </a:solidFill>
-                <a:latin typeface="Malgun Gothic"/>
-              </a:rPr>
-              <a:t>– KOSIS·사법연감·법률구조공단·대한변협 / GeoJSON / 2009 변호사분포(법률저널)</a:t>
-            </a:r>
-          </a:p>
-          <a:p>
-            <a:pPr>
-              <a:spcAft>
-                <a:spcPts val="900"/>
-              </a:spcAft>
-            </a:pPr>
-            <a:r>
-              <a:rPr sz="1900">
-                <a:solidFill>
-                  <a:srgbClr val="222222"/>
-                </a:solidFill>
-                <a:latin typeface="Malgun Gothic"/>
-              </a:rPr>
-              <a:t>• → 데이터는 차용, 수집·정제·지수개발·분석·해석은 100% 본 프로젝트 수행</a:t>
+              <a:t>• 왜 정규화·방향보정 — 단위 통일(명·건·비율), '클수록 좋음' 일치</a:t>
             </a:r>
           </a:p>
         </p:txBody>
@@ -7004,7 +7811,7 @@
 </p:sld>
 </file>
 
-<file path=ppt/slides/slide20.xml><?xml version="1.0" encoding="utf-8"?>
+<file path=ppt/slides/slide22.xml><?xml version="1.0" encoding="utf-8"?>
 <p:sld xmlns:a="http://schemas.openxmlformats.org/drawingml/2006/main" xmlns:p="http://schemas.openxmlformats.org/presentationml/2006/main" xmlns:r="http://schemas.openxmlformats.org/officeDocument/2006/relationships">
   <p:cSld>
     <p:spTree>
@@ -7037,13 +7844,13 @@
           <a:lstStyle/>
           <a:p>
             <a:r>
-              <a:rPr sz="3000" b="1">
+              <a:rPr sz="2800" b="1">
                 <a:solidFill>
                   <a:srgbClr val="1F3A5F"/>
                 </a:solidFill>
                 <a:latin typeface="Malgun Gothic"/>
               </a:rPr>
-              <a:t>부록 A — 방법론 선택의 근거</a:t>
+              <a:t>부록 B — 용어 정리</a:t>
             </a:r>
           </a:p>
         </p:txBody>
@@ -7056,7 +7863,7 @@
         </p:nvSpPr>
         <p:spPr>
           <a:xfrm>
-            <a:off x="548640" y="1234440"/>
+            <a:off x="548640" y="1188720"/>
             <a:ext cx="11064240" cy="38100"/>
           </a:xfrm>
           <a:prstGeom prst="rect">
@@ -7091,173 +7898,420 @@
           </a:p>
         </p:txBody>
       </p:sp>
-      <p:sp>
-        <p:nvSpPr>
-          <p:cNvPr id="4" name="TextBox 3"/>
-          <p:cNvSpPr txBox="1"/>
+      <p:graphicFrame>
+        <p:nvGraphicFramePr>
+          <p:cNvPr id="4" name="Table 3"/>
+          <p:cNvGraphicFramePr>
+            <a:graphicFrameLocks noGrp="1"/>
+          </p:cNvGraphicFramePr>
           <p:nvPr/>
-        </p:nvSpPr>
-        <p:spPr>
-          <a:xfrm>
-            <a:off x="640080" y="1554480"/>
-            <a:ext cx="10972800" cy="4937760"/>
-          </a:xfrm>
-          <a:prstGeom prst="rect">
-            <a:avLst/>
-          </a:prstGeom>
-          <a:noFill/>
-        </p:spPr>
-        <p:txBody>
-          <a:bodyPr wrap="square">
-            <a:spAutoFit/>
-          </a:bodyPr>
-          <a:lstStyle/>
-          <a:p>
-            <a:pPr>
-              <a:spcAft>
-                <a:spcPts val="900"/>
-              </a:spcAft>
-            </a:pPr>
-            <a:r>
-              <a:rPr sz="1800">
-                <a:solidFill>
-                  <a:srgbClr val="222222"/>
-                </a:solidFill>
-                <a:latin typeface="Malgun Gothic"/>
-              </a:rPr>
-              <a:t>• 왜 17시도가 아닌 두 단위(13권역/10도단위)인가</a:t>
-            </a:r>
-          </a:p>
-          <a:p>
-            <a:pPr lvl="1">
-              <a:spcAft>
-                <a:spcPts val="900"/>
-              </a:spcAft>
-            </a:pPr>
-            <a:r>
-              <a:rPr sz="1500">
-                <a:solidFill>
-                  <a:srgbClr val="222222"/>
-                </a:solidFill>
-                <a:latin typeface="Malgun Gothic"/>
-              </a:rPr>
-              <a:t>– 변호사(변협 14지방회)·법률구조(공단 10도단위)가 광역시를 도에 묶어 제공 → 시도 분리 불가</a:t>
-            </a:r>
-          </a:p>
-          <a:p>
-            <a:pPr lvl="1">
-              <a:spcAft>
-                <a:spcPts val="900"/>
-              </a:spcAft>
-            </a:pPr>
-            <a:r>
-              <a:rPr sz="1500">
-                <a:solidFill>
-                  <a:srgbClr val="222222"/>
-                </a:solidFill>
-                <a:latin typeface="Malgun Gothic"/>
-              </a:rPr>
-              <a:t>– 두 단위 결론이 일치(서울 1위·강원 최하)하면 단위 선택에 무관함을 입증</a:t>
-            </a:r>
-          </a:p>
-          <a:p>
-            <a:pPr>
-              <a:spcAft>
-                <a:spcPts val="900"/>
-              </a:spcAft>
-            </a:pPr>
-            <a:r>
-              <a:rPr sz="1800">
-                <a:solidFill>
-                  <a:srgbClr val="222222"/>
-                </a:solidFill>
-                <a:latin typeface="Malgun Gothic"/>
-              </a:rPr>
-              <a:t>• 왜 '본안사건'인가 (A2)</a:t>
-            </a:r>
-          </a:p>
-          <a:p>
-            <a:pPr lvl="1">
-              <a:spcAft>
-                <a:spcPts val="900"/>
-              </a:spcAft>
-            </a:pPr>
-            <a:r>
-              <a:rPr sz="1500">
-                <a:solidFill>
-                  <a:srgbClr val="222222"/>
-                </a:solidFill>
-                <a:latin typeface="Malgun Gothic"/>
-              </a:rPr>
-              <a:t>– 전체 법원사건의 약 60%가 등기·공탁(비송) → 변호사 업무량 왜곡 → 실질 소송(본안)만 사용</a:t>
-            </a:r>
-          </a:p>
-          <a:p>
-            <a:pPr>
-              <a:spcAft>
-                <a:spcPts val="900"/>
-              </a:spcAft>
-            </a:pPr>
-            <a:r>
-              <a:rPr sz="1800">
-                <a:solidFill>
-                  <a:srgbClr val="222222"/>
-                </a:solidFill>
-                <a:latin typeface="Malgun Gothic"/>
-              </a:rPr>
-              <a:t>• 왜 가중치 3종(균등·엔트로피·PCA)인가</a:t>
-            </a:r>
-          </a:p>
-          <a:p>
-            <a:pPr lvl="1">
-              <a:spcAft>
-                <a:spcPts val="900"/>
-              </a:spcAft>
-            </a:pPr>
-            <a:r>
-              <a:rPr sz="1500">
-                <a:solidFill>
-                  <a:srgbClr val="222222"/>
-                </a:solidFill>
-                <a:latin typeface="Malgun Gothic"/>
-              </a:rPr>
-              <a:t>– 가중치 자의성 방지 — 어떤 방식이든 서울 1위·강원 최하(강건성) 확인</a:t>
-            </a:r>
-          </a:p>
-          <a:p>
-            <a:pPr>
-              <a:spcAft>
-                <a:spcPts val="900"/>
-              </a:spcAft>
-            </a:pPr>
-            <a:r>
-              <a:rPr sz="1800">
-                <a:solidFill>
-                  <a:srgbClr val="222222"/>
-                </a:solidFill>
-                <a:latin typeface="Malgun Gothic"/>
-              </a:rPr>
-              <a:t>• 왜 정규화·방향 보정인가</a:t>
-            </a:r>
-          </a:p>
-          <a:p>
-            <a:pPr lvl="1">
-              <a:spcAft>
-                <a:spcPts val="900"/>
-              </a:spcAft>
-            </a:pPr>
-            <a:r>
-              <a:rPr sz="1500">
-                <a:solidFill>
-                  <a:srgbClr val="222222"/>
-                </a:solidFill>
-                <a:latin typeface="Malgun Gothic"/>
-              </a:rPr>
-              <a:t>– 단위 상이(명·건·비율) → 0~1 통일, A2는 1−값으로 '클수록 좋음' 일치</a:t>
-            </a:r>
-          </a:p>
-        </p:txBody>
-      </p:sp>
+        </p:nvGraphicFramePr>
+        <p:xfrm>
+          <a:off x="548640" y="1463040"/>
+          <a:ext cx="11064240" cy="4937760"/>
+        </p:xfrm>
+        <a:graphic>
+          <a:graphicData uri="http://schemas.openxmlformats.org/drawingml/2006/table">
+            <a:tbl>
+              <a:tblPr firstRow="1" bandRow="1">
+                <a:tableStyleId>{5C22544A-7EE6-4342-B048-85BDC9FD1C3A}</a:tableStyleId>
+              </a:tblPr>
+              <a:tblGrid>
+                <a:gridCol w="2377440"/>
+                <a:gridCol w="8686800"/>
+              </a:tblGrid>
+              <a:tr h="448887">
+                <a:tc>
+                  <a:txBody>
+                    <a:bodyPr/>
+                    <a:lstStyle/>
+                    <a:p>
+                      <a:pPr algn="ctr"/>
+                      <a:r>
+                        <a:rPr sz="1100" b="1">
+                          <a:solidFill>
+                            <a:srgbClr val="FFFFFF"/>
+                          </a:solidFill>
+                          <a:latin typeface="Malgun Gothic"/>
+                        </a:rPr>
+                        <a:t>용어</a:t>
+                      </a:r>
+                    </a:p>
+                  </a:txBody>
+                  <a:tcPr anchor="ctr">
+                    <a:solidFill>
+                      <a:srgbClr val="1F3A5F"/>
+                    </a:solidFill>
+                  </a:tcPr>
+                </a:tc>
+                <a:tc>
+                  <a:txBody>
+                    <a:bodyPr/>
+                    <a:lstStyle/>
+                    <a:p>
+                      <a:pPr algn="ctr"/>
+                      <a:r>
+                        <a:rPr sz="1100" b="1">
+                          <a:solidFill>
+                            <a:srgbClr val="FFFFFF"/>
+                          </a:solidFill>
+                          <a:latin typeface="Malgun Gothic"/>
+                        </a:rPr>
+                        <a:t>뜻</a:t>
+                      </a:r>
+                    </a:p>
+                  </a:txBody>
+                  <a:tcPr anchor="ctr">
+                    <a:solidFill>
+                      <a:srgbClr val="1F3A5F"/>
+                    </a:solidFill>
+                  </a:tcPr>
+                </a:tc>
+              </a:tr>
+              <a:tr h="448887">
+                <a:tc>
+                  <a:txBody>
+                    <a:bodyPr/>
+                    <a:lstStyle/>
+                    <a:p>
+                      <a:pPr algn="ctr"/>
+                      <a:r>
+                        <a:rPr sz="1100">
+                          <a:latin typeface="Malgun Gothic"/>
+                        </a:rPr>
+                        <a:t>본안사건</a:t>
+                      </a:r>
+                    </a:p>
+                  </a:txBody>
+                  <a:tcPr anchor="ctr"/>
+                </a:tc>
+                <a:tc>
+                  <a:txBody>
+                    <a:bodyPr/>
+                    <a:lstStyle/>
+                    <a:p>
+                      <a:pPr algn="l"/>
+                      <a:r>
+                        <a:rPr sz="1100">
+                          <a:latin typeface="Malgun Gothic"/>
+                        </a:rPr>
+                        <a:t>권리·의무를 본격 판단하는 소송(민사본안·형사공판·가사). 변호사 업무량 핵심</a:t>
+                      </a:r>
+                    </a:p>
+                  </a:txBody>
+                  <a:tcPr anchor="ctr"/>
+                </a:tc>
+              </a:tr>
+              <a:tr h="448887">
+                <a:tc>
+                  <a:txBody>
+                    <a:bodyPr/>
+                    <a:lstStyle/>
+                    <a:p>
+                      <a:pPr algn="ctr"/>
+                      <a:r>
+                        <a:rPr sz="1100">
+                          <a:latin typeface="Malgun Gothic"/>
+                        </a:rPr>
+                        <a:t>비송사건</a:t>
+                      </a:r>
+                    </a:p>
+                  </a:txBody>
+                  <a:tcPr anchor="ctr"/>
+                </a:tc>
+                <a:tc>
+                  <a:txBody>
+                    <a:bodyPr/>
+                    <a:lstStyle/>
+                    <a:p>
+                      <a:pPr algn="l"/>
+                      <a:r>
+                        <a:rPr sz="1100">
+                          <a:latin typeface="Malgun Gothic"/>
+                        </a:rPr>
+                        <a:t>등기·공탁 등 분쟁 판단이 아닌 절차 사건 → A2에서 제외</a:t>
+                      </a:r>
+                    </a:p>
+                  </a:txBody>
+                  <a:tcPr anchor="ctr"/>
+                </a:tc>
+              </a:tr>
+              <a:tr h="448887">
+                <a:tc>
+                  <a:txBody>
+                    <a:bodyPr/>
+                    <a:lstStyle/>
+                    <a:p>
+                      <a:pPr algn="ctr"/>
+                      <a:r>
+                        <a:rPr sz="1100">
+                          <a:latin typeface="Malgun Gothic"/>
+                        </a:rPr>
+                        <a:t>개업변호사</a:t>
+                      </a:r>
+                    </a:p>
+                  </a:txBody>
+                  <a:tcPr anchor="ctr"/>
+                </a:tc>
+                <a:tc>
+                  <a:txBody>
+                    <a:bodyPr/>
+                    <a:lstStyle/>
+                    <a:p>
+                      <a:pPr algn="l"/>
+                      <a:r>
+                        <a:rPr sz="1100">
+                          <a:latin typeface="Malgun Gothic"/>
+                        </a:rPr>
+                        <a:t>실제 영업 중인 변호사(휴업·미개업 제외). A1 분자</a:t>
+                      </a:r>
+                    </a:p>
+                  </a:txBody>
+                  <a:tcPr anchor="ctr"/>
+                </a:tc>
+              </a:tr>
+              <a:tr h="448887">
+                <a:tc>
+                  <a:txBody>
+                    <a:bodyPr/>
+                    <a:lstStyle/>
+                    <a:p>
+                      <a:pPr algn="ctr"/>
+                      <a:r>
+                        <a:rPr sz="1100">
+                          <a:latin typeface="Malgun Gothic"/>
+                        </a:rPr>
+                        <a:t>법률구조</a:t>
+                      </a:r>
+                    </a:p>
+                  </a:txBody>
+                  <a:tcPr anchor="ctr"/>
+                </a:tc>
+                <a:tc>
+                  <a:txBody>
+                    <a:bodyPr/>
+                    <a:lstStyle/>
+                    <a:p>
+                      <a:pPr algn="l"/>
+                      <a:r>
+                        <a:rPr sz="1100">
+                          <a:latin typeface="Malgun Gothic"/>
+                        </a:rPr>
+                        <a:t>경제적 약자 대상 무료·저비용 법률 지원(공단). A3 분자</a:t>
+                      </a:r>
+                    </a:p>
+                  </a:txBody>
+                  <a:tcPr anchor="ctr"/>
+                </a:tc>
+              </a:tr>
+              <a:tr h="448887">
+                <a:tc>
+                  <a:txBody>
+                    <a:bodyPr/>
+                    <a:lstStyle/>
+                    <a:p>
+                      <a:pPr algn="ctr"/>
+                      <a:r>
+                        <a:rPr sz="1100">
+                          <a:latin typeface="Malgun Gothic"/>
+                        </a:rPr>
+                        <a:t>기초생활수급자</a:t>
+                      </a:r>
+                    </a:p>
+                  </a:txBody>
+                  <a:tcPr anchor="ctr"/>
+                </a:tc>
+                <a:tc>
+                  <a:txBody>
+                    <a:bodyPr/>
+                    <a:lstStyle/>
+                    <a:p>
+                      <a:pPr algn="l"/>
+                      <a:r>
+                        <a:rPr sz="1100">
+                          <a:latin typeface="Malgun Gothic"/>
+                        </a:rPr>
+                        <a:t>국민기초생활보장 수급자 = '저소득층' 대리지표(A3 분모)</a:t>
+                      </a:r>
+                    </a:p>
+                  </a:txBody>
+                  <a:tcPr anchor="ctr"/>
+                </a:tc>
+              </a:tr>
+              <a:tr h="448887">
+                <a:tc>
+                  <a:txBody>
+                    <a:bodyPr/>
+                    <a:lstStyle/>
+                    <a:p>
+                      <a:pPr algn="ctr"/>
+                      <a:r>
+                        <a:rPr sz="1100">
+                          <a:latin typeface="Malgun Gothic"/>
+                        </a:rPr>
+                        <a:t>1인당 GRDP</a:t>
+                      </a:r>
+                    </a:p>
+                  </a:txBody>
+                  <a:tcPr anchor="ctr"/>
+                </a:tc>
+                <a:tc>
+                  <a:txBody>
+                    <a:bodyPr/>
+                    <a:lstStyle/>
+                    <a:p>
+                      <a:pPr algn="l"/>
+                      <a:r>
+                        <a:rPr sz="1100">
+                          <a:latin typeface="Malgun Gothic"/>
+                        </a:rPr>
+                        <a:t>지역내총생산 ÷ 인구. 지역 소득수준(H3 변수)</a:t>
+                      </a:r>
+                    </a:p>
+                  </a:txBody>
+                  <a:tcPr anchor="ctr"/>
+                </a:tc>
+              </a:tr>
+              <a:tr h="448887">
+                <a:tc>
+                  <a:txBody>
+                    <a:bodyPr/>
+                    <a:lstStyle/>
+                    <a:p>
+                      <a:pPr algn="ctr"/>
+                      <a:r>
+                        <a:rPr sz="1100">
+                          <a:latin typeface="Malgun Gothic"/>
+                        </a:rPr>
+                        <a:t>엔트로피 가중치</a:t>
+                      </a:r>
+                    </a:p>
+                  </a:txBody>
+                  <a:tcPr anchor="ctr"/>
+                </a:tc>
+                <a:tc>
+                  <a:txBody>
+                    <a:bodyPr/>
+                    <a:lstStyle/>
+                    <a:p>
+                      <a:pPr algn="l"/>
+                      <a:r>
+                        <a:rPr sz="1100">
+                          <a:latin typeface="Malgun Gothic"/>
+                        </a:rPr>
+                        <a:t>지역 간 차이(정보량)가 큰 지표에 큰 가중치를 주는 객관적 가중법</a:t>
+                      </a:r>
+                    </a:p>
+                  </a:txBody>
+                  <a:tcPr anchor="ctr"/>
+                </a:tc>
+              </a:tr>
+              <a:tr h="448887">
+                <a:tc>
+                  <a:txBody>
+                    <a:bodyPr/>
+                    <a:lstStyle/>
+                    <a:p>
+                      <a:pPr algn="ctr"/>
+                      <a:r>
+                        <a:rPr sz="1100">
+                          <a:latin typeface="Malgun Gothic"/>
+                        </a:rPr>
+                        <a:t>HHI(허핀달지수)</a:t>
+                      </a:r>
+                    </a:p>
+                  </a:txBody>
+                  <a:tcPr anchor="ctr"/>
+                </a:tc>
+                <a:tc>
+                  <a:txBody>
+                    <a:bodyPr/>
+                    <a:lstStyle/>
+                    <a:p>
+                      <a:pPr algn="l"/>
+                      <a:r>
+                        <a:rPr sz="1100">
+                          <a:latin typeface="Malgun Gothic"/>
+                        </a:rPr>
+                        <a:t>점유율 제곱의 합(0~1). 클수록 특정 지역 집중 심화</a:t>
+                      </a:r>
+                    </a:p>
+                  </a:txBody>
+                  <a:tcPr anchor="ctr"/>
+                </a:tc>
+              </a:tr>
+              <a:tr h="448887">
+                <a:tc>
+                  <a:txBody>
+                    <a:bodyPr/>
+                    <a:lstStyle/>
+                    <a:p>
+                      <a:pPr algn="ctr"/>
+                      <a:r>
+                        <a:rPr sz="1100">
+                          <a:latin typeface="Malgun Gothic"/>
+                        </a:rPr>
+                        <a:t>변동계수(CV)</a:t>
+                      </a:r>
+                    </a:p>
+                  </a:txBody>
+                  <a:tcPr anchor="ctr"/>
+                </a:tc>
+                <a:tc>
+                  <a:txBody>
+                    <a:bodyPr/>
+                    <a:lstStyle/>
+                    <a:p>
+                      <a:pPr algn="l"/>
+                      <a:r>
+                        <a:rPr sz="1100">
+                          <a:latin typeface="Malgun Gothic"/>
+                        </a:rPr>
+                        <a:t>표준편차 ÷ 평균. 단위 무관한 상대적 격차 크기</a:t>
+                      </a:r>
+                    </a:p>
+                  </a:txBody>
+                  <a:tcPr anchor="ctr"/>
+                </a:tc>
+              </a:tr>
+              <a:tr h="448890">
+                <a:tc>
+                  <a:txBody>
+                    <a:bodyPr/>
+                    <a:lstStyle/>
+                    <a:p>
+                      <a:pPr algn="ctr"/>
+                      <a:r>
+                        <a:rPr sz="1100">
+                          <a:latin typeface="Malgun Gothic"/>
+                        </a:rPr>
+                        <a:t>K-means / Silhouette</a:t>
+                      </a:r>
+                    </a:p>
+                  </a:txBody>
+                  <a:tcPr anchor="ctr"/>
+                </a:tc>
+                <a:tc>
+                  <a:txBody>
+                    <a:bodyPr/>
+                    <a:lstStyle/>
+                    <a:p>
+                      <a:pPr algn="l"/>
+                      <a:r>
+                        <a:rPr sz="1100">
+                          <a:latin typeface="Malgun Gothic"/>
+                        </a:rPr>
+                        <a:t>거리 기반 군집화 / 군집 분리도(최적 K 결정)</a:t>
+                      </a:r>
+                    </a:p>
+                  </a:txBody>
+                  <a:tcPr anchor="ctr"/>
+                </a:tc>
+              </a:tr>
+            </a:tbl>
+          </a:graphicData>
+        </a:graphic>
+      </p:graphicFrame>
     </p:spTree>
   </p:cSld>
   <p:clrMapOvr>
@@ -7266,7 +8320,70 @@
 </p:sld>
 </file>
 
-<file path=ppt/slides/slide21.xml><?xml version="1.0" encoding="utf-8"?>
+<file path=ppt/slides/slide23.xml><?xml version="1.0" encoding="utf-8"?>
+<p:sld xmlns:a="http://schemas.openxmlformats.org/drawingml/2006/main" xmlns:p="http://schemas.openxmlformats.org/presentationml/2006/main" xmlns:r="http://schemas.openxmlformats.org/officeDocument/2006/relationships">
+  <p:cSld>
+    <p:spTree>
+      <p:nvGrpSpPr>
+        <p:cNvPr id="1" name=""/>
+        <p:cNvGrpSpPr/>
+        <p:nvPr/>
+      </p:nvGrpSpPr>
+      <p:grpSpPr/>
+      <p:sp>
+        <p:nvSpPr>
+          <p:cNvPr id="2" name="TextBox 1"/>
+          <p:cNvSpPr txBox="1"/>
+          <p:nvPr/>
+        </p:nvSpPr>
+        <p:spPr>
+          <a:xfrm>
+            <a:off x="731520" y="2377440"/>
+            <a:ext cx="10698480" cy="1828800"/>
+          </a:xfrm>
+          <a:prstGeom prst="rect">
+            <a:avLst/>
+          </a:prstGeom>
+          <a:noFill/>
+        </p:spPr>
+        <p:txBody>
+          <a:bodyPr wrap="square">
+            <a:spAutoFit/>
+          </a:bodyPr>
+          <a:lstStyle/>
+          <a:p>
+            <a:r>
+              <a:rPr sz="4000" b="1">
+                <a:solidFill>
+                  <a:srgbClr val="1F3A5F"/>
+                </a:solidFill>
+                <a:latin typeface="Malgun Gothic"/>
+              </a:rPr>
+              <a:t>감사합니다</a:t>
+            </a:r>
+          </a:p>
+          <a:p>
+            <a:r>
+              <a:rPr sz="2000">
+                <a:solidFill>
+                  <a:srgbClr val="C44E52"/>
+                </a:solidFill>
+                <a:latin typeface="Malgun Gothic"/>
+              </a:rPr>
+              <a:t>코드·노트북·인터랙티브 지도: github.com/Allenkeem/llai-project</a:t>
+            </a:r>
+          </a:p>
+        </p:txBody>
+      </p:sp>
+    </p:spTree>
+  </p:cSld>
+  <p:clrMapOvr>
+    <a:masterClrMapping/>
+  </p:clrMapOvr>
+</p:sld>
+</file>
+
+<file path=ppt/slides/slide3.xml><?xml version="1.0" encoding="utf-8"?>
 <p:sld xmlns:a="http://schemas.openxmlformats.org/drawingml/2006/main" xmlns:p="http://schemas.openxmlformats.org/presentationml/2006/main" xmlns:r="http://schemas.openxmlformats.org/officeDocument/2006/relationships">
   <p:cSld>
     <p:spTree>
@@ -7299,13 +8416,13 @@
           <a:lstStyle/>
           <a:p>
             <a:r>
-              <a:rPr sz="3000" b="1">
+              <a:rPr sz="2800" b="1">
                 <a:solidFill>
                   <a:srgbClr val="1F3A5F"/>
                 </a:solidFill>
                 <a:latin typeface="Malgun Gothic"/>
               </a:rPr>
-              <a:t>부록 B — 용어 정리</a:t>
+              <a:t>핵심 요약 — 한 눈에 보기</a:t>
             </a:r>
           </a:p>
         </p:txBody>
@@ -7318,7 +8435,7 @@
         </p:nvSpPr>
         <p:spPr>
           <a:xfrm>
-            <a:off x="548640" y="1234440"/>
+            <a:off x="548640" y="1188720"/>
             <a:ext cx="11064240" cy="38100"/>
           </a:xfrm>
           <a:prstGeom prst="rect">
@@ -7362,8 +8479,8 @@
           <p:nvPr/>
         </p:nvGraphicFramePr>
         <p:xfrm>
-          <a:off x="548640" y="1508760"/>
-          <a:ext cx="11064240" cy="4937760"/>
+          <a:off x="640080" y="1645920"/>
+          <a:ext cx="10881360" cy="4206240"/>
         </p:xfrm>
         <a:graphic>
           <a:graphicData uri="http://schemas.openxmlformats.org/drawingml/2006/table">
@@ -7372,10 +8489,10 @@
                 <a:tableStyleId>{5C22544A-7EE6-4342-B048-85BDC9FD1C3A}</a:tableStyleId>
               </a:tblPr>
               <a:tblGrid>
-                <a:gridCol w="5532120"/>
-                <a:gridCol w="5532120"/>
+                <a:gridCol w="1645920"/>
+                <a:gridCol w="9235440"/>
               </a:tblGrid>
-              <a:tr h="379827">
+              <a:tr h="701040">
                 <a:tc>
                   <a:txBody>
                     <a:bodyPr/>
@@ -7383,13 +8500,13 @@
                     <a:p>
                       <a:pPr algn="ctr"/>
                       <a:r>
-                        <a:rPr sz="1100" b="1">
+                        <a:rPr sz="1500" b="1">
                           <a:solidFill>
                             <a:srgbClr val="FFFFFF"/>
                           </a:solidFill>
                           <a:latin typeface="Malgun Gothic"/>
                         </a:rPr>
-                        <a:t>용어</a:t>
+                        <a:t>항목</a:t>
                       </a:r>
                     </a:p>
                   </a:txBody>
@@ -7404,15 +8521,15 @@
                     <a:bodyPr/>
                     <a:lstStyle/>
                     <a:p>
-                      <a:pPr algn="l"/>
-                      <a:r>
-                        <a:rPr sz="1100" b="1">
+                      <a:pPr algn="ctr"/>
+                      <a:r>
+                        <a:rPr sz="1500" b="1">
                           <a:solidFill>
                             <a:srgbClr val="FFFFFF"/>
                           </a:solidFill>
                           <a:latin typeface="Malgun Gothic"/>
                         </a:rPr>
-                        <a:t>뜻</a:t>
+                        <a:t>내용</a:t>
                       </a:r>
                     </a:p>
                   </a:txBody>
@@ -7423,7 +8540,7 @@
                   </a:tcPr>
                 </a:tc>
               </a:tr>
-              <a:tr h="379827">
+              <a:tr h="701040">
                 <a:tc>
                   <a:txBody>
                     <a:bodyPr/>
@@ -7431,33 +8548,33 @@
                     <a:p>
                       <a:pPr algn="ctr"/>
                       <a:r>
-                        <a:rPr sz="1100">
-                          <a:latin typeface="Malgun Gothic"/>
-                        </a:rPr>
-                        <a:t>본안사건</a:t>
-                      </a:r>
-                    </a:p>
-                  </a:txBody>
-                  <a:tcPr anchor="ctr"/>
-                </a:tc>
-                <a:tc>
-                  <a:txBody>
-                    <a:bodyPr/>
-                    <a:lstStyle/>
-                    <a:p>
-                      <a:pPr algn="l"/>
-                      <a:r>
-                        <a:rPr sz="1100">
-                          <a:latin typeface="Malgun Gothic"/>
-                        </a:rPr>
-                        <a:t>권리·의무를 본격 판단하는 소송(민사본안·형사공판·가사). 변호사 업무량 핵심</a:t>
+                        <a:rPr sz="1500">
+                          <a:latin typeface="Malgun Gothic"/>
+                        </a:rPr>
+                        <a:t>문제</a:t>
+                      </a:r>
+                    </a:p>
+                  </a:txBody>
+                  <a:tcPr anchor="ctr"/>
+                </a:tc>
+                <a:tc>
+                  <a:txBody>
+                    <a:bodyPr/>
+                    <a:lstStyle/>
+                    <a:p>
+                      <a:pPr algn="l"/>
+                      <a:r>
+                        <a:rPr sz="1500">
+                          <a:latin typeface="Malgun Gothic"/>
+                        </a:rPr>
+                        <a:t>변호사·법원·법률구조 자원의 지역별 접근성 불균형 정량화</a:t>
                       </a:r>
                     </a:p>
                   </a:txBody>
                   <a:tcPr anchor="ctr"/>
                 </a:tc>
               </a:tr>
-              <a:tr h="379827">
+              <a:tr h="701040">
                 <a:tc>
                   <a:txBody>
                     <a:bodyPr/>
@@ -7465,33 +8582,33 @@
                     <a:p>
                       <a:pPr algn="ctr"/>
                       <a:r>
-                        <a:rPr sz="1100">
-                          <a:latin typeface="Malgun Gothic"/>
-                        </a:rPr>
-                        <a:t>비송사건</a:t>
-                      </a:r>
-                    </a:p>
-                  </a:txBody>
-                  <a:tcPr anchor="ctr"/>
-                </a:tc>
-                <a:tc>
-                  <a:txBody>
-                    <a:bodyPr/>
-                    <a:lstStyle/>
-                    <a:p>
-                      <a:pPr algn="l"/>
-                      <a:r>
-                        <a:rPr sz="1100">
-                          <a:latin typeface="Malgun Gothic"/>
-                        </a:rPr>
-                        <a:t>등기·공탁 등 분쟁 판단이 아닌 절차 사건 → A2에서 제외</a:t>
+                        <a:rPr sz="1500">
+                          <a:latin typeface="Malgun Gothic"/>
+                        </a:rPr>
+                        <a:t>방법</a:t>
+                      </a:r>
+                    </a:p>
+                  </a:txBody>
+                  <a:tcPr anchor="ctr"/>
+                </a:tc>
+                <a:tc>
+                  <a:txBody>
+                    <a:bodyPr/>
+                    <a:lstStyle/>
+                    <a:p>
+                      <a:pPr algn="l"/>
+                      <a:r>
+                        <a:rPr sz="1500">
+                          <a:latin typeface="Malgun Gothic"/>
+                        </a:rPr>
+                        <a:t>3개 차원(A1 변호사·A2 사건부담·A3 취약계층) → 단일 지수 LLAI(0~100)</a:t>
                       </a:r>
                     </a:p>
                   </a:txBody>
                   <a:tcPr anchor="ctr"/>
                 </a:tc>
               </a:tr>
-              <a:tr h="379827">
+              <a:tr h="701040">
                 <a:tc>
                   <a:txBody>
                     <a:bodyPr/>
@@ -7499,33 +8616,33 @@
                     <a:p>
                       <a:pPr algn="ctr"/>
                       <a:r>
-                        <a:rPr sz="1100">
-                          <a:latin typeface="Malgun Gothic"/>
-                        </a:rPr>
-                        <a:t>개업변호사</a:t>
-                      </a:r>
-                    </a:p>
-                  </a:txBody>
-                  <a:tcPr anchor="ctr"/>
-                </a:tc>
-                <a:tc>
-                  <a:txBody>
-                    <a:bodyPr/>
-                    <a:lstStyle/>
-                    <a:p>
-                      <a:pPr algn="l"/>
-                      <a:r>
-                        <a:rPr sz="1100">
-                          <a:latin typeface="Malgun Gothic"/>
-                        </a:rPr>
-                        <a:t>실제 영업 중인 변호사(휴업·미개업 제외). A1 분자</a:t>
+                        <a:rPr sz="1500">
+                          <a:latin typeface="Malgun Gothic"/>
+                        </a:rPr>
+                        <a:t>데이터</a:t>
+                      </a:r>
+                    </a:p>
+                  </a:txBody>
+                  <a:tcPr anchor="ctr"/>
+                </a:tc>
+                <a:tc>
+                  <a:txBody>
+                    <a:bodyPr/>
+                    <a:lstStyle/>
+                    <a:p>
+                      <a:pPr algn="l"/>
+                      <a:r>
+                        <a:rPr sz="1500">
+                          <a:latin typeface="Malgun Gothic"/>
+                        </a:rPr>
+                        <a:t>변협·사법연감·공단·KOSIS / 13권역·10도단위 / 기준 2024</a:t>
                       </a:r>
                     </a:p>
                   </a:txBody>
                   <a:tcPr anchor="ctr"/>
                 </a:tc>
               </a:tr>
-              <a:tr h="379827">
+              <a:tr h="701040">
                 <a:tc>
                   <a:txBody>
                     <a:bodyPr/>
@@ -7533,33 +8650,33 @@
                     <a:p>
                       <a:pPr algn="ctr"/>
                       <a:r>
-                        <a:rPr sz="1100">
-                          <a:latin typeface="Malgun Gothic"/>
-                        </a:rPr>
-                        <a:t>법률구조</a:t>
-                      </a:r>
-                    </a:p>
-                  </a:txBody>
-                  <a:tcPr anchor="ctr"/>
-                </a:tc>
-                <a:tc>
-                  <a:txBody>
-                    <a:bodyPr/>
-                    <a:lstStyle/>
-                    <a:p>
-                      <a:pPr algn="l"/>
-                      <a:r>
-                        <a:rPr sz="1100">
-                          <a:latin typeface="Malgun Gothic"/>
-                        </a:rPr>
-                        <a:t>경제적 약자 대상 무료·저비용 법률 지원(법률구조공단). A3 분자</a:t>
+                        <a:rPr sz="1500">
+                          <a:latin typeface="Malgun Gothic"/>
+                        </a:rPr>
+                        <a:t>핵심 발견</a:t>
+                      </a:r>
+                    </a:p>
+                  </a:txBody>
+                  <a:tcPr anchor="ctr"/>
+                </a:tc>
+                <a:tc>
+                  <a:txBody>
+                    <a:bodyPr/>
+                    <a:lstStyle/>
+                    <a:p>
+                      <a:pPr algn="l"/>
+                      <a:r>
+                        <a:rPr sz="1500">
+                          <a:latin typeface="Malgun Gothic"/>
+                        </a:rPr>
+                        <a:t>① 서울 일극(91 vs 2~24) ② 변호사↑→부담↓(r=−0.85) ③ 수도권우위=서울단독 ④ 변호사 3.4배↑에도 서울집중 71%→76%</a:t>
                       </a:r>
                     </a:p>
                   </a:txBody>
                   <a:tcPr anchor="ctr"/>
                 </a:tc>
               </a:tr>
-              <a:tr h="379827">
+              <a:tr h="701040">
                 <a:tc>
                   <a:txBody>
                     <a:bodyPr/>
@@ -7567,264 +8684,26 @@
                     <a:p>
                       <a:pPr algn="ctr"/>
                       <a:r>
-                        <a:rPr sz="1100">
-                          <a:latin typeface="Malgun Gothic"/>
-                        </a:rPr>
-                        <a:t>기초생활수급자</a:t>
-                      </a:r>
-                    </a:p>
-                  </a:txBody>
-                  <a:tcPr anchor="ctr"/>
-                </a:tc>
-                <a:tc>
-                  <a:txBody>
-                    <a:bodyPr/>
-                    <a:lstStyle/>
-                    <a:p>
-                      <a:pPr algn="l"/>
-                      <a:r>
-                        <a:rPr sz="1100">
-                          <a:latin typeface="Malgun Gothic"/>
-                        </a:rPr>
-                        <a:t>국민기초생활보장 수급자 = '저소득층' 대리지표(A3 분모)</a:t>
-                      </a:r>
-                    </a:p>
-                  </a:txBody>
-                  <a:tcPr anchor="ctr"/>
-                </a:tc>
-              </a:tr>
-              <a:tr h="379827">
-                <a:tc>
-                  <a:txBody>
-                    <a:bodyPr/>
-                    <a:lstStyle/>
-                    <a:p>
-                      <a:pPr algn="ctr"/>
-                      <a:r>
-                        <a:rPr sz="1100">
-                          <a:latin typeface="Malgun Gothic"/>
-                        </a:rPr>
-                        <a:t>1인당 GRDP</a:t>
-                      </a:r>
-                    </a:p>
-                  </a:txBody>
-                  <a:tcPr anchor="ctr"/>
-                </a:tc>
-                <a:tc>
-                  <a:txBody>
-                    <a:bodyPr/>
-                    <a:lstStyle/>
-                    <a:p>
-                      <a:pPr algn="l"/>
-                      <a:r>
-                        <a:rPr sz="1100">
-                          <a:latin typeface="Malgun Gothic"/>
-                        </a:rPr>
-                        <a:t>지역내총생산 ÷ 인구. 지역 소득수준(H3 변수)</a:t>
-                      </a:r>
-                    </a:p>
-                  </a:txBody>
-                  <a:tcPr anchor="ctr"/>
-                </a:tc>
-              </a:tr>
-              <a:tr h="379827">
-                <a:tc>
-                  <a:txBody>
-                    <a:bodyPr/>
-                    <a:lstStyle/>
-                    <a:p>
-                      <a:pPr algn="ctr"/>
-                      <a:r>
-                        <a:rPr sz="1100">
-                          <a:latin typeface="Malgun Gothic"/>
-                        </a:rPr>
-                        <a:t>Min-Max 정규화</a:t>
-                      </a:r>
-                    </a:p>
-                  </a:txBody>
-                  <a:tcPr anchor="ctr"/>
-                </a:tc>
-                <a:tc>
-                  <a:txBody>
-                    <a:bodyPr/>
-                    <a:lstStyle/>
-                    <a:p>
-                      <a:pPr algn="l"/>
-                      <a:r>
-                        <a:rPr sz="1100">
-                          <a:latin typeface="Malgun Gothic"/>
-                        </a:rPr>
-                        <a:t>값을 전국 최소0~최대1로 변환해 단위 다른 지표를 합산 가능하게</a:t>
-                      </a:r>
-                    </a:p>
-                  </a:txBody>
-                  <a:tcPr anchor="ctr"/>
-                </a:tc>
-              </a:tr>
-              <a:tr h="379827">
-                <a:tc>
-                  <a:txBody>
-                    <a:bodyPr/>
-                    <a:lstStyle/>
-                    <a:p>
-                      <a:pPr algn="ctr"/>
-                      <a:r>
-                        <a:rPr sz="1100">
-                          <a:latin typeface="Malgun Gothic"/>
-                        </a:rPr>
-                        <a:t>엔트로피 가중치</a:t>
-                      </a:r>
-                    </a:p>
-                  </a:txBody>
-                  <a:tcPr anchor="ctr"/>
-                </a:tc>
-                <a:tc>
-                  <a:txBody>
-                    <a:bodyPr/>
-                    <a:lstStyle/>
-                    <a:p>
-                      <a:pPr algn="l"/>
-                      <a:r>
-                        <a:rPr sz="1100">
-                          <a:latin typeface="Malgun Gothic"/>
-                        </a:rPr>
-                        <a:t>지역 간 차이(정보량)가 큰 지표에 큰 가중치를 주는 객관적 가중법</a:t>
-                      </a:r>
-                    </a:p>
-                  </a:txBody>
-                  <a:tcPr anchor="ctr"/>
-                </a:tc>
-              </a:tr>
-              <a:tr h="379827">
-                <a:tc>
-                  <a:txBody>
-                    <a:bodyPr/>
-                    <a:lstStyle/>
-                    <a:p>
-                      <a:pPr algn="ctr"/>
-                      <a:r>
-                        <a:rPr sz="1100">
-                          <a:latin typeface="Malgun Gothic"/>
-                        </a:rPr>
-                        <a:t>PCA</a:t>
-                      </a:r>
-                    </a:p>
-                  </a:txBody>
-                  <a:tcPr anchor="ctr"/>
-                </a:tc>
-                <a:tc>
-                  <a:txBody>
-                    <a:bodyPr/>
-                    <a:lstStyle/>
-                    <a:p>
-                      <a:pPr algn="l"/>
-                      <a:r>
-                        <a:rPr sz="1100">
-                          <a:latin typeface="Malgun Gothic"/>
-                        </a:rPr>
-                        <a:t>여러 지표의 공통 변동 축(주성분)을 찾아 가중치로 활용</a:t>
-                      </a:r>
-                    </a:p>
-                  </a:txBody>
-                  <a:tcPr anchor="ctr"/>
-                </a:tc>
-              </a:tr>
-              <a:tr h="379827">
-                <a:tc>
-                  <a:txBody>
-                    <a:bodyPr/>
-                    <a:lstStyle/>
-                    <a:p>
-                      <a:pPr algn="ctr"/>
-                      <a:r>
-                        <a:rPr sz="1100">
-                          <a:latin typeface="Malgun Gothic"/>
-                        </a:rPr>
-                        <a:t>HHI(허핀달지수)</a:t>
-                      </a:r>
-                    </a:p>
-                  </a:txBody>
-                  <a:tcPr anchor="ctr"/>
-                </a:tc>
-                <a:tc>
-                  <a:txBody>
-                    <a:bodyPr/>
-                    <a:lstStyle/>
-                    <a:p>
-                      <a:pPr algn="l"/>
-                      <a:r>
-                        <a:rPr sz="1100">
-                          <a:latin typeface="Malgun Gothic"/>
-                        </a:rPr>
-                        <a:t>점유율 제곱의 합(0~1). 클수록 특정 지역 집중 심화</a:t>
-                      </a:r>
-                    </a:p>
-                  </a:txBody>
-                  <a:tcPr anchor="ctr"/>
-                </a:tc>
-              </a:tr>
-              <a:tr h="379827">
-                <a:tc>
-                  <a:txBody>
-                    <a:bodyPr/>
-                    <a:lstStyle/>
-                    <a:p>
-                      <a:pPr algn="ctr"/>
-                      <a:r>
-                        <a:rPr sz="1100">
-                          <a:latin typeface="Malgun Gothic"/>
-                        </a:rPr>
-                        <a:t>변동계수(CV)</a:t>
-                      </a:r>
-                    </a:p>
-                  </a:txBody>
-                  <a:tcPr anchor="ctr"/>
-                </a:tc>
-                <a:tc>
-                  <a:txBody>
-                    <a:bodyPr/>
-                    <a:lstStyle/>
-                    <a:p>
-                      <a:pPr algn="l"/>
-                      <a:r>
-                        <a:rPr sz="1100">
-                          <a:latin typeface="Malgun Gothic"/>
-                        </a:rPr>
-                        <a:t>표준편차 ÷ 평균. 단위 무관한 상대적 격차 크기</a:t>
-                      </a:r>
-                    </a:p>
-                  </a:txBody>
-                  <a:tcPr anchor="ctr"/>
-                </a:tc>
-              </a:tr>
-              <a:tr h="379836">
-                <a:tc>
-                  <a:txBody>
-                    <a:bodyPr/>
-                    <a:lstStyle/>
-                    <a:p>
-                      <a:pPr algn="ctr"/>
-                      <a:r>
-                        <a:rPr sz="1100">
-                          <a:latin typeface="Malgun Gothic"/>
-                        </a:rPr>
-                        <a:t>K-means / Silhouette</a:t>
-                      </a:r>
-                    </a:p>
-                  </a:txBody>
-                  <a:tcPr anchor="ctr"/>
-                </a:tc>
-                <a:tc>
-                  <a:txBody>
-                    <a:bodyPr/>
-                    <a:lstStyle/>
-                    <a:p>
-                      <a:pPr algn="l"/>
-                      <a:r>
-                        <a:rPr sz="1100">
-                          <a:latin typeface="Malgun Gothic"/>
-                        </a:rPr>
-                        <a:t>거리 기반 군집화 / 군집 분리도(최적 K 결정)</a:t>
+                        <a:rPr sz="1500">
+                          <a:latin typeface="Malgun Gothic"/>
+                        </a:rPr>
+                        <a:t>결론</a:t>
+                      </a:r>
+                    </a:p>
+                  </a:txBody>
+                  <a:tcPr anchor="ctr"/>
+                </a:tc>
+                <a:tc>
+                  <a:txBody>
+                    <a:bodyPr/>
+                    <a:lstStyle/>
+                    <a:p>
+                      <a:pPr algn="l"/>
+                      <a:r>
+                        <a:rPr sz="1500">
+                          <a:latin typeface="Malgun Gothic"/>
+                        </a:rPr>
+                        <a:t>인구 대비·사건부담이 접근성 좌우 / 양적 팽창만으론 격차 해소 안 됨</a:t>
                       </a:r>
                     </a:p>
                   </a:txBody>
@@ -7843,70 +8722,7 @@
 </p:sld>
 </file>
 
-<file path=ppt/slides/slide22.xml><?xml version="1.0" encoding="utf-8"?>
-<p:sld xmlns:a="http://schemas.openxmlformats.org/drawingml/2006/main" xmlns:p="http://schemas.openxmlformats.org/presentationml/2006/main" xmlns:r="http://schemas.openxmlformats.org/officeDocument/2006/relationships">
-  <p:cSld>
-    <p:spTree>
-      <p:nvGrpSpPr>
-        <p:cNvPr id="1" name=""/>
-        <p:cNvGrpSpPr/>
-        <p:nvPr/>
-      </p:nvGrpSpPr>
-      <p:grpSpPr/>
-      <p:sp>
-        <p:nvSpPr>
-          <p:cNvPr id="2" name="TextBox 1"/>
-          <p:cNvSpPr txBox="1"/>
-          <p:nvPr/>
-        </p:nvSpPr>
-        <p:spPr>
-          <a:xfrm>
-            <a:off x="731520" y="2377440"/>
-            <a:ext cx="10698480" cy="1828800"/>
-          </a:xfrm>
-          <a:prstGeom prst="rect">
-            <a:avLst/>
-          </a:prstGeom>
-          <a:noFill/>
-        </p:spPr>
-        <p:txBody>
-          <a:bodyPr wrap="square">
-            <a:spAutoFit/>
-          </a:bodyPr>
-          <a:lstStyle/>
-          <a:p>
-            <a:r>
-              <a:rPr sz="4000" b="1">
-                <a:solidFill>
-                  <a:srgbClr val="1F3A5F"/>
-                </a:solidFill>
-                <a:latin typeface="Malgun Gothic"/>
-              </a:rPr>
-              <a:t>감사합니다</a:t>
-            </a:r>
-          </a:p>
-          <a:p>
-            <a:r>
-              <a:rPr sz="2000">
-                <a:solidFill>
-                  <a:srgbClr val="C44E52"/>
-                </a:solidFill>
-                <a:latin typeface="Malgun Gothic"/>
-              </a:rPr>
-              <a:t>코드·노트북·인터랙티브 지도: github.com/Allenkeem/llai-project</a:t>
-            </a:r>
-          </a:p>
-        </p:txBody>
-      </p:sp>
-    </p:spTree>
-  </p:cSld>
-  <p:clrMapOvr>
-    <a:masterClrMapping/>
-  </p:clrMapOvr>
-</p:sld>
-</file>
-
-<file path=ppt/slides/slide23.xml><?xml version="1.0" encoding="utf-8"?>
+<file path=ppt/slides/slide4.xml><?xml version="1.0" encoding="utf-8"?>
 <p:sld xmlns:a="http://schemas.openxmlformats.org/drawingml/2006/main" xmlns:p="http://schemas.openxmlformats.org/presentationml/2006/main" xmlns:r="http://schemas.openxmlformats.org/officeDocument/2006/relationships">
   <p:cSld>
     <p:spTree>
@@ -7933,19 +8749,19 @@
           <a:noFill/>
         </p:spPr>
         <p:txBody>
-          <a:bodyPr wrap="none">
+          <a:bodyPr wrap="square">
             <a:spAutoFit/>
           </a:bodyPr>
           <a:lstStyle/>
           <a:p>
             <a:r>
-              <a:rPr sz="3000" b="1">
+              <a:rPr sz="2800" b="1">
                 <a:solidFill>
                   <a:srgbClr val="1F3A5F"/>
                 </a:solidFill>
                 <a:latin typeface="Malgun Gothic"/>
               </a:rPr>
-              <a:t>분석 기법 한눈에</a:t>
+              <a:t>1. 왜 이 문제인가</a:t>
             </a:r>
           </a:p>
         </p:txBody>
@@ -7958,7 +8774,7 @@
         </p:nvSpPr>
         <p:spPr>
           <a:xfrm>
-            <a:off x="548640" y="1234440"/>
+            <a:off x="548640" y="1188720"/>
             <a:ext cx="11064240" cy="38100"/>
           </a:xfrm>
           <a:prstGeom prst="rect">
@@ -7993,352 +8809,93 @@
           </a:p>
         </p:txBody>
       </p:sp>
-      <p:graphicFrame>
-        <p:nvGraphicFramePr>
-          <p:cNvPr id="4" name="Table 3"/>
-          <p:cNvGraphicFramePr>
-            <a:graphicFrameLocks noGrp="1"/>
-          </p:cNvGraphicFramePr>
+      <p:sp>
+        <p:nvSpPr>
+          <p:cNvPr id="4" name="TextBox 3"/>
+          <p:cNvSpPr txBox="1"/>
           <p:nvPr/>
-        </p:nvGraphicFramePr>
-        <p:xfrm>
-          <a:off x="640080" y="1463040"/>
-          <a:ext cx="10881360" cy="4754880"/>
-        </p:xfrm>
-        <a:graphic>
-          <a:graphicData uri="http://schemas.openxmlformats.org/drawingml/2006/table">
-            <a:tbl>
-              <a:tblPr firstRow="1" bandRow="1">
-                <a:tableStyleId>{5C22544A-7EE6-4342-B048-85BDC9FD1C3A}</a:tableStyleId>
-              </a:tblPr>
-              <a:tblGrid>
-                <a:gridCol w="2743200"/>
-                <a:gridCol w="8138160"/>
-              </a:tblGrid>
-              <a:tr h="528320">
-                <a:tc>
-                  <a:txBody>
-                    <a:bodyPr/>
-                    <a:lstStyle/>
-                    <a:p>
-                      <a:pPr algn="ctr"/>
-                      <a:r>
-                        <a:rPr sz="1300" b="1">
-                          <a:solidFill>
-                            <a:srgbClr val="FFFFFF"/>
-                          </a:solidFill>
-                          <a:latin typeface="Malgun Gothic"/>
-                        </a:rPr>
-                        <a:t>기법</a:t>
-                      </a:r>
-                    </a:p>
-                  </a:txBody>
-                  <a:tcPr anchor="ctr">
-                    <a:solidFill>
-                      <a:srgbClr val="1F3A5F"/>
-                    </a:solidFill>
-                  </a:tcPr>
-                </a:tc>
-                <a:tc>
-                  <a:txBody>
-                    <a:bodyPr/>
-                    <a:lstStyle/>
-                    <a:p>
-                      <a:pPr algn="l"/>
-                      <a:r>
-                        <a:rPr sz="1300" b="1">
-                          <a:solidFill>
-                            <a:srgbClr val="FFFFFF"/>
-                          </a:solidFill>
-                          <a:latin typeface="Malgun Gothic"/>
-                        </a:rPr>
-                        <a:t>무엇을 / 어떻게</a:t>
-                      </a:r>
-                    </a:p>
-                  </a:txBody>
-                  <a:tcPr anchor="ctr">
-                    <a:solidFill>
-                      <a:srgbClr val="1F3A5F"/>
-                    </a:solidFill>
-                  </a:tcPr>
-                </a:tc>
-              </a:tr>
-              <a:tr h="528320">
-                <a:tc>
-                  <a:txBody>
-                    <a:bodyPr/>
-                    <a:lstStyle/>
-                    <a:p>
-                      <a:pPr algn="ctr"/>
-                      <a:r>
-                        <a:rPr sz="1300">
-                          <a:latin typeface="Malgun Gothic"/>
-                        </a:rPr>
-                        <a:t>Min-Max 정규화</a:t>
-                      </a:r>
-                    </a:p>
-                  </a:txBody>
-                  <a:tcPr anchor="ctr"/>
-                </a:tc>
-                <a:tc>
-                  <a:txBody>
-                    <a:bodyPr/>
-                    <a:lstStyle/>
-                    <a:p>
-                      <a:pPr algn="l"/>
-                      <a:r>
-                        <a:rPr sz="1300">
-                          <a:latin typeface="Malgun Gothic"/>
-                        </a:rPr>
-                        <a:t>지표를 0~1로 통일 (A2는 1−값으로 방향 보정)</a:t>
-                      </a:r>
-                    </a:p>
-                  </a:txBody>
-                  <a:tcPr anchor="ctr"/>
-                </a:tc>
-              </a:tr>
-              <a:tr h="528320">
-                <a:tc>
-                  <a:txBody>
-                    <a:bodyPr/>
-                    <a:lstStyle/>
-                    <a:p>
-                      <a:pPr algn="ctr"/>
-                      <a:r>
-                        <a:rPr sz="1300">
-                          <a:latin typeface="Malgun Gothic"/>
-                        </a:rPr>
-                        <a:t>가중치 3종</a:t>
-                      </a:r>
-                    </a:p>
-                  </a:txBody>
-                  <a:tcPr anchor="ctr"/>
-                </a:tc>
-                <a:tc>
-                  <a:txBody>
-                    <a:bodyPr/>
-                    <a:lstStyle/>
-                    <a:p>
-                      <a:pPr algn="l"/>
-                      <a:r>
-                        <a:rPr sz="1300">
-                          <a:latin typeface="Malgun Gothic"/>
-                        </a:rPr>
-                        <a:t>균등 / 엔트로피(변별력 큰 지표↑) / PCA(공통 변동 축)</a:t>
-                      </a:r>
-                    </a:p>
-                  </a:txBody>
-                  <a:tcPr anchor="ctr"/>
-                </a:tc>
-              </a:tr>
-              <a:tr h="528320">
-                <a:tc>
-                  <a:txBody>
-                    <a:bodyPr/>
-                    <a:lstStyle/>
-                    <a:p>
-                      <a:pPr algn="ctr"/>
-                      <a:r>
-                        <a:rPr sz="1300">
-                          <a:latin typeface="Malgun Gothic"/>
-                        </a:rPr>
-                        <a:t>합성지표 LLAI</a:t>
-                      </a:r>
-                    </a:p>
-                  </a:txBody>
-                  <a:tcPr anchor="ctr"/>
-                </a:tc>
-                <a:tc>
-                  <a:txBody>
-                    <a:bodyPr/>
-                    <a:lstStyle/>
-                    <a:p>
-                      <a:pPr algn="l"/>
-                      <a:r>
-                        <a:rPr sz="1300">
-                          <a:latin typeface="Malgun Gothic"/>
-                        </a:rPr>
-                        <a:t>정규화 지표의 가중 평균 ×100 (0~100)</a:t>
-                      </a:r>
-                    </a:p>
-                  </a:txBody>
-                  <a:tcPr anchor="ctr"/>
-                </a:tc>
-              </a:tr>
-              <a:tr h="528320">
-                <a:tc>
-                  <a:txBody>
-                    <a:bodyPr/>
-                    <a:lstStyle/>
-                    <a:p>
-                      <a:pPr algn="ctr"/>
-                      <a:r>
-                        <a:rPr sz="1300">
-                          <a:latin typeface="Malgun Gothic"/>
-                        </a:rPr>
-                        <a:t>상관분석</a:t>
-                      </a:r>
-                    </a:p>
-                  </a:txBody>
-                  <a:tcPr anchor="ctr"/>
-                </a:tc>
-                <a:tc>
-                  <a:txBody>
-                    <a:bodyPr/>
-                    <a:lstStyle/>
-                    <a:p>
-                      <a:pPr algn="l"/>
-                      <a:r>
-                        <a:rPr sz="1300">
-                          <a:latin typeface="Malgun Gothic"/>
-                        </a:rPr>
-                        <a:t>Pearson r · Spearman ρ — H2(A1↔A2), H3(GRDP)</a:t>
-                      </a:r>
-                    </a:p>
-                  </a:txBody>
-                  <a:tcPr anchor="ctr"/>
-                </a:tc>
-              </a:tr>
-              <a:tr h="528320">
-                <a:tc>
-                  <a:txBody>
-                    <a:bodyPr/>
-                    <a:lstStyle/>
-                    <a:p>
-                      <a:pPr algn="ctr"/>
-                      <a:r>
-                        <a:rPr sz="1300">
-                          <a:latin typeface="Malgun Gothic"/>
-                        </a:rPr>
-                        <a:t>집단 비교</a:t>
-                      </a:r>
-                    </a:p>
-                  </a:txBody>
-                  <a:tcPr anchor="ctr"/>
-                </a:tc>
-                <a:tc>
-                  <a:txBody>
-                    <a:bodyPr/>
-                    <a:lstStyle/>
-                    <a:p>
-                      <a:pPr algn="l"/>
-                      <a:r>
-                        <a:rPr sz="1300">
-                          <a:latin typeface="Malgun Gothic"/>
-                        </a:rPr>
-                        <a:t>Mann-Whitney U(비모수) — 수도권 vs 비수도권, H1</a:t>
-                      </a:r>
-                    </a:p>
-                  </a:txBody>
-                  <a:tcPr anchor="ctr"/>
-                </a:tc>
-              </a:tr>
-              <a:tr h="528320">
-                <a:tc>
-                  <a:txBody>
-                    <a:bodyPr/>
-                    <a:lstStyle/>
-                    <a:p>
-                      <a:pPr algn="ctr"/>
-                      <a:r>
-                        <a:rPr sz="1300">
-                          <a:latin typeface="Malgun Gothic"/>
-                        </a:rPr>
-                        <a:t>군집분석</a:t>
-                      </a:r>
-                    </a:p>
-                  </a:txBody>
-                  <a:tcPr anchor="ctr"/>
-                </a:tc>
-                <a:tc>
-                  <a:txBody>
-                    <a:bodyPr/>
-                    <a:lstStyle/>
-                    <a:p>
-                      <a:pPr algn="l"/>
-                      <a:r>
-                        <a:rPr sz="1300">
-                          <a:latin typeface="Malgun Gothic"/>
-                        </a:rPr>
-                        <a:t>K-means + Elbow·Silhouette로 최적 K — 유형 그룹화</a:t>
-                      </a:r>
-                    </a:p>
-                  </a:txBody>
-                  <a:tcPr anchor="ctr"/>
-                </a:tc>
-              </a:tr>
-              <a:tr h="528320">
-                <a:tc>
-                  <a:txBody>
-                    <a:bodyPr/>
-                    <a:lstStyle/>
-                    <a:p>
-                      <a:pPr algn="ctr"/>
-                      <a:r>
-                        <a:rPr sz="1300">
-                          <a:latin typeface="Malgun Gothic"/>
-                        </a:rPr>
-                        <a:t>집중도</a:t>
-                      </a:r>
-                    </a:p>
-                  </a:txBody>
-                  <a:tcPr anchor="ctr"/>
-                </a:tc>
-                <a:tc>
-                  <a:txBody>
-                    <a:bodyPr/>
-                    <a:lstStyle/>
-                    <a:p>
-                      <a:pPr algn="l"/>
-                      <a:r>
-                        <a:rPr sz="1300">
-                          <a:latin typeface="Malgun Gothic"/>
-                        </a:rPr>
-                        <a:t>HHI · 변동계수 — 2009 vs 2026 격차 변화, H4</a:t>
-                      </a:r>
-                    </a:p>
-                  </a:txBody>
-                  <a:tcPr anchor="ctr"/>
-                </a:tc>
-              </a:tr>
-              <a:tr h="528320">
-                <a:tc>
-                  <a:txBody>
-                    <a:bodyPr/>
-                    <a:lstStyle/>
-                    <a:p>
-                      <a:pPr algn="ctr"/>
-                      <a:r>
-                        <a:rPr sz="1300">
-                          <a:latin typeface="Malgun Gothic"/>
-                        </a:rPr>
-                        <a:t>공간 시각화</a:t>
-                      </a:r>
-                    </a:p>
-                  </a:txBody>
-                  <a:tcPr anchor="ctr"/>
-                </a:tc>
-                <a:tc>
-                  <a:txBody>
-                    <a:bodyPr/>
-                    <a:lstStyle/>
-                    <a:p>
-                      <a:pPr algn="l"/>
-                      <a:r>
-                        <a:rPr sz="1300">
-                          <a:latin typeface="Malgun Gothic"/>
-                        </a:rPr>
-                        <a:t>geopandas dissolve + 코로플레스(folium·정적)</a:t>
-                      </a:r>
-                    </a:p>
-                  </a:txBody>
-                  <a:tcPr anchor="ctr"/>
-                </a:tc>
-              </a:tr>
-            </a:tbl>
-          </a:graphicData>
-        </a:graphic>
-      </p:graphicFrame>
+        </p:nvSpPr>
+        <p:spPr>
+          <a:xfrm>
+            <a:off x="640080" y="1554480"/>
+            <a:ext cx="10972800" cy="4937760"/>
+          </a:xfrm>
+          <a:prstGeom prst="rect">
+            <a:avLst/>
+          </a:prstGeom>
+          <a:noFill/>
+        </p:spPr>
+        <p:txBody>
+          <a:bodyPr wrap="square">
+            <a:spAutoFit/>
+          </a:bodyPr>
+          <a:lstStyle/>
+          <a:p>
+            <a:pPr>
+              <a:spcAft>
+                <a:spcPts val="800"/>
+              </a:spcAft>
+            </a:pPr>
+            <a:r>
+              <a:rPr sz="2000">
+                <a:solidFill>
+                  <a:srgbClr val="222222"/>
+                </a:solidFill>
+                <a:latin typeface="Malgun Gothic"/>
+              </a:rPr>
+              <a:t>• 로스쿨 도입(2009) 이후 변호사 4만 명 시대 — 자원은 어디에 있나?</a:t>
+            </a:r>
+          </a:p>
+          <a:p>
+            <a:pPr lvl="1">
+              <a:spcAft>
+                <a:spcPts val="800"/>
+              </a:spcAft>
+            </a:pPr>
+            <a:r>
+              <a:rPr sz="1700">
+                <a:solidFill>
+                  <a:srgbClr val="222222"/>
+                </a:solidFill>
+                <a:latin typeface="Malgun Gothic"/>
+              </a:rPr>
+              <a:t>– 서울·수도권 집중 vs 지방 부족, 취약계층 사각지대 우려</a:t>
+            </a:r>
+          </a:p>
+          <a:p>
+            <a:pPr>
+              <a:spcAft>
+                <a:spcPts val="800"/>
+              </a:spcAft>
+            </a:pPr>
+            <a:r>
+              <a:rPr sz="2000">
+                <a:solidFill>
+                  <a:srgbClr val="222222"/>
+                </a:solidFill>
+                <a:latin typeface="Malgun Gothic"/>
+              </a:rPr>
+              <a:t>• 법률 서비스 접근성의 지역 불균형 = 사법 정의와 직결된 사회 문제</a:t>
+            </a:r>
+          </a:p>
+          <a:p>
+            <a:pPr>
+              <a:spcAft>
+                <a:spcPts val="800"/>
+              </a:spcAft>
+            </a:pPr>
+            <a:r>
+              <a:rPr sz="2000">
+                <a:solidFill>
+                  <a:srgbClr val="222222"/>
+                </a:solidFill>
+                <a:latin typeface="Malgun Gothic"/>
+              </a:rPr>
+              <a:t>• 연구 질문: 어느 지역이, 얼마나 법적 보호에서 소외되는가?</a:t>
+            </a:r>
+          </a:p>
+        </p:txBody>
+      </p:sp>
     </p:spTree>
   </p:cSld>
   <p:clrMapOvr>
@@ -8347,7 +8904,7 @@
 </p:sld>
 </file>
 
-<file path=ppt/slides/slide3.xml><?xml version="1.0" encoding="utf-8"?>
+<file path=ppt/slides/slide5.xml><?xml version="1.0" encoding="utf-8"?>
 <p:sld xmlns:a="http://schemas.openxmlformats.org/drawingml/2006/main" xmlns:p="http://schemas.openxmlformats.org/presentationml/2006/main" xmlns:r="http://schemas.openxmlformats.org/officeDocument/2006/relationships">
   <p:cSld>
     <p:spTree>
@@ -8380,13 +8937,13 @@
           <a:lstStyle/>
           <a:p>
             <a:r>
-              <a:rPr sz="3000" b="1">
+              <a:rPr sz="2800" b="1">
                 <a:solidFill>
                   <a:srgbClr val="1F3A5F"/>
                 </a:solidFill>
                 <a:latin typeface="Malgun Gothic"/>
               </a:rPr>
-              <a:t>핵심 요약 — 한 눈에 보기</a:t>
+              <a:t>2. 접근 방법 — 종합 법률 접근성 지수(LLAI)</a:t>
             </a:r>
           </a:p>
         </p:txBody>
@@ -8399,7 +8956,7 @@
         </p:nvSpPr>
         <p:spPr>
           <a:xfrm>
-            <a:off x="548640" y="1234440"/>
+            <a:off x="548640" y="1188720"/>
             <a:ext cx="11064240" cy="38100"/>
           </a:xfrm>
           <a:prstGeom prst="rect">
@@ -8434,345 +8991,6 @@
           </a:p>
         </p:txBody>
       </p:sp>
-      <p:graphicFrame>
-        <p:nvGraphicFramePr>
-          <p:cNvPr id="4" name="Table 3"/>
-          <p:cNvGraphicFramePr>
-            <a:graphicFrameLocks noGrp="1"/>
-          </p:cNvGraphicFramePr>
-          <p:nvPr/>
-        </p:nvGraphicFramePr>
-        <p:xfrm>
-          <a:off x="640080" y="1645920"/>
-          <a:ext cx="10881360" cy="4206240"/>
-        </p:xfrm>
-        <a:graphic>
-          <a:graphicData uri="http://schemas.openxmlformats.org/drawingml/2006/table">
-            <a:tbl>
-              <a:tblPr firstRow="1" bandRow="1">
-                <a:tableStyleId>{5C22544A-7EE6-4342-B048-85BDC9FD1C3A}</a:tableStyleId>
-              </a:tblPr>
-              <a:tblGrid>
-                <a:gridCol w="5440680"/>
-                <a:gridCol w="5440680"/>
-              </a:tblGrid>
-              <a:tr h="701040">
-                <a:tc>
-                  <a:txBody>
-                    <a:bodyPr/>
-                    <a:lstStyle/>
-                    <a:p>
-                      <a:pPr algn="ctr"/>
-                      <a:r>
-                        <a:rPr sz="1500" b="1">
-                          <a:solidFill>
-                            <a:srgbClr val="FFFFFF"/>
-                          </a:solidFill>
-                          <a:latin typeface="Malgun Gothic"/>
-                        </a:rPr>
-                        <a:t>항목</a:t>
-                      </a:r>
-                    </a:p>
-                  </a:txBody>
-                  <a:tcPr anchor="ctr">
-                    <a:solidFill>
-                      <a:srgbClr val="1F3A5F"/>
-                    </a:solidFill>
-                  </a:tcPr>
-                </a:tc>
-                <a:tc>
-                  <a:txBody>
-                    <a:bodyPr/>
-                    <a:lstStyle/>
-                    <a:p>
-                      <a:pPr algn="ctr"/>
-                      <a:r>
-                        <a:rPr sz="1500" b="1">
-                          <a:solidFill>
-                            <a:srgbClr val="FFFFFF"/>
-                          </a:solidFill>
-                          <a:latin typeface="Malgun Gothic"/>
-                        </a:rPr>
-                        <a:t>내용</a:t>
-                      </a:r>
-                    </a:p>
-                  </a:txBody>
-                  <a:tcPr anchor="ctr">
-                    <a:solidFill>
-                      <a:srgbClr val="1F3A5F"/>
-                    </a:solidFill>
-                  </a:tcPr>
-                </a:tc>
-              </a:tr>
-              <a:tr h="701040">
-                <a:tc>
-                  <a:txBody>
-                    <a:bodyPr/>
-                    <a:lstStyle/>
-                    <a:p>
-                      <a:pPr algn="ctr"/>
-                      <a:r>
-                        <a:rPr sz="1500">
-                          <a:latin typeface="Malgun Gothic"/>
-                        </a:rPr>
-                        <a:t>문제</a:t>
-                      </a:r>
-                    </a:p>
-                  </a:txBody>
-                  <a:tcPr anchor="ctr"/>
-                </a:tc>
-                <a:tc>
-                  <a:txBody>
-                    <a:bodyPr/>
-                    <a:lstStyle/>
-                    <a:p>
-                      <a:pPr algn="ctr"/>
-                      <a:r>
-                        <a:rPr sz="1500">
-                          <a:latin typeface="Malgun Gothic"/>
-                        </a:rPr>
-                        <a:t>변호사·법원·법률구조 자원의 지역별 접근성 불균형 정량화</a:t>
-                      </a:r>
-                    </a:p>
-                  </a:txBody>
-                  <a:tcPr anchor="ctr"/>
-                </a:tc>
-              </a:tr>
-              <a:tr h="701040">
-                <a:tc>
-                  <a:txBody>
-                    <a:bodyPr/>
-                    <a:lstStyle/>
-                    <a:p>
-                      <a:pPr algn="ctr"/>
-                      <a:r>
-                        <a:rPr sz="1500">
-                          <a:latin typeface="Malgun Gothic"/>
-                        </a:rPr>
-                        <a:t>방법</a:t>
-                      </a:r>
-                    </a:p>
-                  </a:txBody>
-                  <a:tcPr anchor="ctr"/>
-                </a:tc>
-                <a:tc>
-                  <a:txBody>
-                    <a:bodyPr/>
-                    <a:lstStyle/>
-                    <a:p>
-                      <a:pPr algn="ctr"/>
-                      <a:r>
-                        <a:rPr sz="1500">
-                          <a:latin typeface="Malgun Gothic"/>
-                        </a:rPr>
-                        <a:t>3개 차원(A1 변호사·A2 사건부담·A3 취약계층) → 단일 지수 LLAI(0~100)</a:t>
-                      </a:r>
-                    </a:p>
-                  </a:txBody>
-                  <a:tcPr anchor="ctr"/>
-                </a:tc>
-              </a:tr>
-              <a:tr h="701040">
-                <a:tc>
-                  <a:txBody>
-                    <a:bodyPr/>
-                    <a:lstStyle/>
-                    <a:p>
-                      <a:pPr algn="ctr"/>
-                      <a:r>
-                        <a:rPr sz="1500">
-                          <a:latin typeface="Malgun Gothic"/>
-                        </a:rPr>
-                        <a:t>데이터</a:t>
-                      </a:r>
-                    </a:p>
-                  </a:txBody>
-                  <a:tcPr anchor="ctr"/>
-                </a:tc>
-                <a:tc>
-                  <a:txBody>
-                    <a:bodyPr/>
-                    <a:lstStyle/>
-                    <a:p>
-                      <a:pPr algn="ctr"/>
-                      <a:r>
-                        <a:rPr sz="1500">
-                          <a:latin typeface="Malgun Gothic"/>
-                        </a:rPr>
-                        <a:t>변협·사법연감·공단·KOSIS / 13권역·10도단위 / 기준 2024</a:t>
-                      </a:r>
-                    </a:p>
-                  </a:txBody>
-                  <a:tcPr anchor="ctr"/>
-                </a:tc>
-              </a:tr>
-              <a:tr h="701040">
-                <a:tc>
-                  <a:txBody>
-                    <a:bodyPr/>
-                    <a:lstStyle/>
-                    <a:p>
-                      <a:pPr algn="ctr"/>
-                      <a:r>
-                        <a:rPr sz="1500">
-                          <a:latin typeface="Malgun Gothic"/>
-                        </a:rPr>
-                        <a:t>핵심 발견</a:t>
-                      </a:r>
-                    </a:p>
-                  </a:txBody>
-                  <a:tcPr anchor="ctr"/>
-                </a:tc>
-                <a:tc>
-                  <a:txBody>
-                    <a:bodyPr/>
-                    <a:lstStyle/>
-                    <a:p>
-                      <a:pPr algn="ctr"/>
-                      <a:r>
-                        <a:rPr sz="1500">
-                          <a:latin typeface="Malgun Gothic"/>
-                        </a:rPr>
-                        <a:t>① 서울 일극(91 vs 2~24) ② 변호사↑→부담↓(r=−0.85) ③ 수도권우위=서울단독 ④ 변호사 3.4배↑에도 서울집중 71%→76%</a:t>
-                      </a:r>
-                    </a:p>
-                  </a:txBody>
-                  <a:tcPr anchor="ctr"/>
-                </a:tc>
-              </a:tr>
-              <a:tr h="701040">
-                <a:tc>
-                  <a:txBody>
-                    <a:bodyPr/>
-                    <a:lstStyle/>
-                    <a:p>
-                      <a:pPr algn="ctr"/>
-                      <a:r>
-                        <a:rPr sz="1500">
-                          <a:latin typeface="Malgun Gothic"/>
-                        </a:rPr>
-                        <a:t>결론</a:t>
-                      </a:r>
-                    </a:p>
-                  </a:txBody>
-                  <a:tcPr anchor="ctr"/>
-                </a:tc>
-                <a:tc>
-                  <a:txBody>
-                    <a:bodyPr/>
-                    <a:lstStyle/>
-                    <a:p>
-                      <a:pPr algn="ctr"/>
-                      <a:r>
-                        <a:rPr sz="1500">
-                          <a:latin typeface="Malgun Gothic"/>
-                        </a:rPr>
-                        <a:t>인구 대비·사건부담이 접근성 좌우 / 양적 팽창만으론 격차 해소 안 됨</a:t>
-                      </a:r>
-                    </a:p>
-                  </a:txBody>
-                  <a:tcPr anchor="ctr"/>
-                </a:tc>
-              </a:tr>
-            </a:tbl>
-          </a:graphicData>
-        </a:graphic>
-      </p:graphicFrame>
-    </p:spTree>
-  </p:cSld>
-  <p:clrMapOvr>
-    <a:masterClrMapping/>
-  </p:clrMapOvr>
-</p:sld>
-</file>
-
-<file path=ppt/slides/slide4.xml><?xml version="1.0" encoding="utf-8"?>
-<p:sld xmlns:a="http://schemas.openxmlformats.org/drawingml/2006/main" xmlns:p="http://schemas.openxmlformats.org/presentationml/2006/main" xmlns:r="http://schemas.openxmlformats.org/officeDocument/2006/relationships">
-  <p:cSld>
-    <p:spTree>
-      <p:nvGrpSpPr>
-        <p:cNvPr id="1" name=""/>
-        <p:cNvGrpSpPr/>
-        <p:nvPr/>
-      </p:nvGrpSpPr>
-      <p:grpSpPr/>
-      <p:sp>
-        <p:nvSpPr>
-          <p:cNvPr id="2" name="TextBox 1"/>
-          <p:cNvSpPr txBox="1"/>
-          <p:nvPr/>
-        </p:nvSpPr>
-        <p:spPr>
-          <a:xfrm>
-            <a:off x="502920" y="320040"/>
-            <a:ext cx="11155680" cy="914400"/>
-          </a:xfrm>
-          <a:prstGeom prst="rect">
-            <a:avLst/>
-          </a:prstGeom>
-          <a:noFill/>
-        </p:spPr>
-        <p:txBody>
-          <a:bodyPr wrap="square">
-            <a:spAutoFit/>
-          </a:bodyPr>
-          <a:lstStyle/>
-          <a:p>
-            <a:r>
-              <a:rPr sz="3000" b="1">
-                <a:solidFill>
-                  <a:srgbClr val="1F3A5F"/>
-                </a:solidFill>
-                <a:latin typeface="Malgun Gothic"/>
-              </a:rPr>
-              <a:t>1. 왜 이 문제인가</a:t>
-            </a:r>
-          </a:p>
-        </p:txBody>
-      </p:sp>
-      <p:sp>
-        <p:nvSpPr>
-          <p:cNvPr id="3" name="Rectangle 2"/>
-          <p:cNvSpPr/>
-          <p:nvPr/>
-        </p:nvSpPr>
-        <p:spPr>
-          <a:xfrm>
-            <a:off x="548640" y="1234440"/>
-            <a:ext cx="11064240" cy="38100"/>
-          </a:xfrm>
-          <a:prstGeom prst="rect">
-            <a:avLst/>
-          </a:prstGeom>
-          <a:solidFill>
-            <a:srgbClr val="C44E52"/>
-          </a:solidFill>
-          <a:ln>
-            <a:noFill/>
-          </a:ln>
-        </p:spPr>
-        <p:style>
-          <a:lnRef idx="1">
-            <a:schemeClr val="accent1"/>
-          </a:lnRef>
-          <a:fillRef idx="3">
-            <a:schemeClr val="accent1"/>
-          </a:fillRef>
-          <a:effectRef idx="2">
-            <a:schemeClr val="accent1"/>
-          </a:effectRef>
-          <a:fontRef idx="minor">
-            <a:schemeClr val="lt1"/>
-          </a:fontRef>
-        </p:style>
-        <p:txBody>
-          <a:bodyPr rtlCol="0" anchor="ctr"/>
-          <a:lstStyle/>
-          <a:p>
-            <a:pPr algn="ctr"/>
-          </a:p>
-        </p:txBody>
-      </p:sp>
       <p:sp>
         <p:nvSpPr>
           <p:cNvPr id="4" name="TextBox 3"/>
@@ -8797,7 +9015,7 @@
           <a:p>
             <a:pPr>
               <a:spcAft>
-                <a:spcPts val="900"/>
+                <a:spcPts val="800"/>
               </a:spcAft>
             </a:pPr>
             <a:r>
@@ -8807,13 +9025,13 @@
                 </a:solidFill>
                 <a:latin typeface="Malgun Gothic"/>
               </a:rPr>
-              <a:t>• 로스쿨 도입(2009) 이후 변호사 4만 명 시대 — 그런데 자원은 어디에 있나?</a:t>
+              <a:t>• 3개 차원을 하나의 지수로 통합 (0~100)</a:t>
             </a:r>
           </a:p>
           <a:p>
             <a:pPr lvl="1">
               <a:spcAft>
-                <a:spcPts val="900"/>
+                <a:spcPts val="800"/>
               </a:spcAft>
             </a:pPr>
             <a:r>
@@ -8823,13 +9041,45 @@
                 </a:solidFill>
                 <a:latin typeface="Malgun Gothic"/>
               </a:rPr>
-              <a:t>– 서울·수도권 집중 vs 지방 부족, 취약계층 사각지대 우려</a:t>
+              <a:t>– A1 변호사 접근성 — 인구 10만 명당 변호사 수 (↑ 좋음)</a:t>
+            </a:r>
+          </a:p>
+          <a:p>
+            <a:pPr lvl="1">
+              <a:spcAft>
+                <a:spcPts val="800"/>
+              </a:spcAft>
+            </a:pPr>
+            <a:r>
+              <a:rPr sz="1700">
+                <a:solidFill>
+                  <a:srgbClr val="222222"/>
+                </a:solidFill>
+                <a:latin typeface="Malgun Gothic"/>
+              </a:rPr>
+              <a:t>– A2 사건 부담 — 변호사 1인당 법원 본안사건 수 (↓ 좋음)</a:t>
+            </a:r>
+          </a:p>
+          <a:p>
+            <a:pPr lvl="1">
+              <a:spcAft>
+                <a:spcPts val="800"/>
+              </a:spcAft>
+            </a:pPr>
+            <a:r>
+              <a:rPr sz="1700">
+                <a:solidFill>
+                  <a:srgbClr val="222222"/>
+                </a:solidFill>
+                <a:latin typeface="Malgun Gothic"/>
+              </a:rPr>
+              <a:t>– A3 취약계층 접근성 — 법률구조 건수 / 저소득층 (↑ 좋음)</a:t>
             </a:r>
           </a:p>
           <a:p>
             <a:pPr>
               <a:spcAft>
-                <a:spcPts val="900"/>
+                <a:spcPts val="800"/>
               </a:spcAft>
             </a:pPr>
             <a:r>
@@ -8839,227 +9089,13 @@
                 </a:solidFill>
                 <a:latin typeface="Malgun Gothic"/>
               </a:rPr>
-              <a:t>• 법률 서비스 접근성의 지역 불균형 = 사법 정의와 직결된 사회 문제</a:t>
-            </a:r>
-          </a:p>
-          <a:p>
-            <a:pPr>
-              <a:spcAft>
-                <a:spcPts val="900"/>
-              </a:spcAft>
-            </a:pPr>
-            <a:r>
-              <a:rPr sz="2000">
-                <a:solidFill>
-                  <a:srgbClr val="222222"/>
-                </a:solidFill>
-                <a:latin typeface="Malgun Gothic"/>
-              </a:rPr>
-              <a:t>• 연구 질문: 어느 지역이, 얼마나 법적 보호에서 소외되는가?</a:t>
-            </a:r>
-          </a:p>
-        </p:txBody>
-      </p:sp>
-    </p:spTree>
-  </p:cSld>
-  <p:clrMapOvr>
-    <a:masterClrMapping/>
-  </p:clrMapOvr>
-</p:sld>
-</file>
-
-<file path=ppt/slides/slide5.xml><?xml version="1.0" encoding="utf-8"?>
-<p:sld xmlns:a="http://schemas.openxmlformats.org/drawingml/2006/main" xmlns:p="http://schemas.openxmlformats.org/presentationml/2006/main" xmlns:r="http://schemas.openxmlformats.org/officeDocument/2006/relationships">
-  <p:cSld>
-    <p:spTree>
-      <p:nvGrpSpPr>
-        <p:cNvPr id="1" name=""/>
-        <p:cNvGrpSpPr/>
-        <p:nvPr/>
-      </p:nvGrpSpPr>
-      <p:grpSpPr/>
-      <p:sp>
-        <p:nvSpPr>
-          <p:cNvPr id="2" name="TextBox 1"/>
-          <p:cNvSpPr txBox="1"/>
-          <p:nvPr/>
-        </p:nvSpPr>
-        <p:spPr>
-          <a:xfrm>
-            <a:off x="502920" y="320040"/>
-            <a:ext cx="11155680" cy="914400"/>
-          </a:xfrm>
-          <a:prstGeom prst="rect">
-            <a:avLst/>
-          </a:prstGeom>
-          <a:noFill/>
-        </p:spPr>
-        <p:txBody>
-          <a:bodyPr wrap="square">
-            <a:spAutoFit/>
-          </a:bodyPr>
-          <a:lstStyle/>
-          <a:p>
-            <a:r>
-              <a:rPr sz="3000" b="1">
-                <a:solidFill>
-                  <a:srgbClr val="1F3A5F"/>
-                </a:solidFill>
-                <a:latin typeface="Malgun Gothic"/>
-              </a:rPr>
-              <a:t>2. 접근 방법 — 종합 법률 접근성 지수(LLAI)</a:t>
-            </a:r>
-          </a:p>
-        </p:txBody>
-      </p:sp>
-      <p:sp>
-        <p:nvSpPr>
-          <p:cNvPr id="3" name="Rectangle 2"/>
-          <p:cNvSpPr/>
-          <p:nvPr/>
-        </p:nvSpPr>
-        <p:spPr>
-          <a:xfrm>
-            <a:off x="548640" y="1234440"/>
-            <a:ext cx="11064240" cy="38100"/>
-          </a:xfrm>
-          <a:prstGeom prst="rect">
-            <a:avLst/>
-          </a:prstGeom>
-          <a:solidFill>
-            <a:srgbClr val="C44E52"/>
-          </a:solidFill>
-          <a:ln>
-            <a:noFill/>
-          </a:ln>
-        </p:spPr>
-        <p:style>
-          <a:lnRef idx="1">
-            <a:schemeClr val="accent1"/>
-          </a:lnRef>
-          <a:fillRef idx="3">
-            <a:schemeClr val="accent1"/>
-          </a:fillRef>
-          <a:effectRef idx="2">
-            <a:schemeClr val="accent1"/>
-          </a:effectRef>
-          <a:fontRef idx="minor">
-            <a:schemeClr val="lt1"/>
-          </a:fontRef>
-        </p:style>
-        <p:txBody>
-          <a:bodyPr rtlCol="0" anchor="ctr"/>
-          <a:lstStyle/>
-          <a:p>
-            <a:pPr algn="ctr"/>
-          </a:p>
-        </p:txBody>
-      </p:sp>
-      <p:sp>
-        <p:nvSpPr>
-          <p:cNvPr id="4" name="TextBox 3"/>
-          <p:cNvSpPr txBox="1"/>
-          <p:nvPr/>
-        </p:nvSpPr>
-        <p:spPr>
-          <a:xfrm>
-            <a:off x="640080" y="1554480"/>
-            <a:ext cx="10972800" cy="4937760"/>
-          </a:xfrm>
-          <a:prstGeom prst="rect">
-            <a:avLst/>
-          </a:prstGeom>
-          <a:noFill/>
-        </p:spPr>
-        <p:txBody>
-          <a:bodyPr wrap="square">
-            <a:spAutoFit/>
-          </a:bodyPr>
-          <a:lstStyle/>
-          <a:p>
-            <a:pPr>
-              <a:spcAft>
-                <a:spcPts val="900"/>
-              </a:spcAft>
-            </a:pPr>
-            <a:r>
-              <a:rPr sz="2000">
-                <a:solidFill>
-                  <a:srgbClr val="222222"/>
-                </a:solidFill>
-                <a:latin typeface="Malgun Gothic"/>
-              </a:rPr>
-              <a:t>• 3개 차원을 하나의 지수로 통합 (0~100)</a:t>
+              <a:t>• LLAI = w₁·A1n + w₂·(1−A2n) + w₃·A3n</a:t>
             </a:r>
           </a:p>
           <a:p>
             <a:pPr lvl="1">
               <a:spcAft>
-                <a:spcPts val="900"/>
-              </a:spcAft>
-            </a:pPr>
-            <a:r>
-              <a:rPr sz="1700">
-                <a:solidFill>
-                  <a:srgbClr val="222222"/>
-                </a:solidFill>
-                <a:latin typeface="Malgun Gothic"/>
-              </a:rPr>
-              <a:t>– A1 변호사 접근성 — 인구 10만 명당 변호사 수 (↑ 좋음)</a:t>
-            </a:r>
-          </a:p>
-          <a:p>
-            <a:pPr lvl="1">
-              <a:spcAft>
-                <a:spcPts val="900"/>
-              </a:spcAft>
-            </a:pPr>
-            <a:r>
-              <a:rPr sz="1700">
-                <a:solidFill>
-                  <a:srgbClr val="222222"/>
-                </a:solidFill>
-                <a:latin typeface="Malgun Gothic"/>
-              </a:rPr>
-              <a:t>– A2 사건 부담 — 변호사 1인당 법원 본안사건 수 (↓ 좋음)</a:t>
-            </a:r>
-          </a:p>
-          <a:p>
-            <a:pPr lvl="1">
-              <a:spcAft>
-                <a:spcPts val="900"/>
-              </a:spcAft>
-            </a:pPr>
-            <a:r>
-              <a:rPr sz="1700">
-                <a:solidFill>
-                  <a:srgbClr val="222222"/>
-                </a:solidFill>
-                <a:latin typeface="Malgun Gothic"/>
-              </a:rPr>
-              <a:t>– A3 취약계층 접근성 — 법률구조 건수 / 저소득층 (↑ 좋음)</a:t>
-            </a:r>
-          </a:p>
-          <a:p>
-            <a:pPr>
-              <a:spcAft>
-                <a:spcPts val="900"/>
-              </a:spcAft>
-            </a:pPr>
-            <a:r>
-              <a:rPr sz="2000">
-                <a:solidFill>
-                  <a:srgbClr val="222222"/>
-                </a:solidFill>
-                <a:latin typeface="Malgun Gothic"/>
-              </a:rPr>
-              <a:t>• LLAI = w₁·A1n + w₂·(1−A2n) + w₃·A3n</a:t>
-            </a:r>
-          </a:p>
-          <a:p>
-            <a:pPr lvl="1">
-              <a:spcAft>
-                <a:spcPts val="900"/>
+                <a:spcPts val="800"/>
               </a:spcAft>
             </a:pPr>
             <a:r>
@@ -9115,7 +9151,7 @@
           <a:lstStyle/>
           <a:p>
             <a:r>
-              <a:rPr sz="3000" b="1">
+              <a:rPr sz="2800" b="1">
                 <a:solidFill>
                   <a:srgbClr val="1F3A5F"/>
                 </a:solidFill>
@@ -9134,7 +9170,7 @@
         </p:nvSpPr>
         <p:spPr>
           <a:xfrm>
-            <a:off x="548640" y="1234440"/>
+            <a:off x="548640" y="1188720"/>
             <a:ext cx="11064240" cy="38100"/>
           </a:xfrm>
           <a:prstGeom prst="rect">
@@ -9812,7 +9848,7 @@
           <a:p>
             <a:pPr>
               <a:spcAft>
-                <a:spcPts val="900"/>
+                <a:spcPts val="800"/>
               </a:spcAft>
             </a:pPr>
             <a:r>
@@ -9828,7 +9864,7 @@
           <a:p>
             <a:pPr>
               <a:spcAft>
-                <a:spcPts val="900"/>
+                <a:spcPts val="800"/>
               </a:spcAft>
             </a:pPr>
             <a:r>
@@ -9884,457 +9920,13 @@
           <a:lstStyle/>
           <a:p>
             <a:r>
-              <a:rPr sz="3000" b="1">
+              <a:rPr sz="2800" b="1">
                 <a:solidFill>
                   <a:srgbClr val="1F3A5F"/>
                 </a:solidFill>
                 <a:latin typeface="Malgun Gothic"/>
               </a:rPr>
               <a:t>4. 데이터 5종과 두 가지 난관</a:t>
-            </a:r>
-          </a:p>
-        </p:txBody>
-      </p:sp>
-      <p:sp>
-        <p:nvSpPr>
-          <p:cNvPr id="3" name="Rectangle 2"/>
-          <p:cNvSpPr/>
-          <p:nvPr/>
-        </p:nvSpPr>
-        <p:spPr>
-          <a:xfrm>
-            <a:off x="548640" y="1234440"/>
-            <a:ext cx="11064240" cy="38100"/>
-          </a:xfrm>
-          <a:prstGeom prst="rect">
-            <a:avLst/>
-          </a:prstGeom>
-          <a:solidFill>
-            <a:srgbClr val="C44E52"/>
-          </a:solidFill>
-          <a:ln>
-            <a:noFill/>
-          </a:ln>
-        </p:spPr>
-        <p:style>
-          <a:lnRef idx="1">
-            <a:schemeClr val="accent1"/>
-          </a:lnRef>
-          <a:fillRef idx="3">
-            <a:schemeClr val="accent1"/>
-          </a:fillRef>
-          <a:effectRef idx="2">
-            <a:schemeClr val="accent1"/>
-          </a:effectRef>
-          <a:fontRef idx="minor">
-            <a:schemeClr val="lt1"/>
-          </a:fontRef>
-        </p:style>
-        <p:txBody>
-          <a:bodyPr rtlCol="0" anchor="ctr"/>
-          <a:lstStyle/>
-          <a:p>
-            <a:pPr algn="ctr"/>
-          </a:p>
-        </p:txBody>
-      </p:sp>
-      <p:sp>
-        <p:nvSpPr>
-          <p:cNvPr id="4" name="TextBox 3"/>
-          <p:cNvSpPr txBox="1"/>
-          <p:nvPr/>
-        </p:nvSpPr>
-        <p:spPr>
-          <a:xfrm>
-            <a:off x="640080" y="1554480"/>
-            <a:ext cx="10972800" cy="4937760"/>
-          </a:xfrm>
-          <a:prstGeom prst="rect">
-            <a:avLst/>
-          </a:prstGeom>
-          <a:noFill/>
-        </p:spPr>
-        <p:txBody>
-          <a:bodyPr wrap="square">
-            <a:spAutoFit/>
-          </a:bodyPr>
-          <a:lstStyle/>
-          <a:p>
-            <a:pPr>
-              <a:spcAft>
-                <a:spcPts val="900"/>
-              </a:spcAft>
-            </a:pPr>
-            <a:r>
-              <a:rPr sz="2000">
-                <a:solidFill>
-                  <a:srgbClr val="222222"/>
-                </a:solidFill>
-                <a:latin typeface="Malgun Gothic"/>
-              </a:rPr>
-              <a:t>• 출처: 변협(스크랩)·사법연감·법률구조공단·KOSIS·시도경계</a:t>
-            </a:r>
-          </a:p>
-          <a:p>
-            <a:pPr>
-              <a:spcAft>
-                <a:spcPts val="900"/>
-              </a:spcAft>
-            </a:pPr>
-            <a:r>
-              <a:rPr sz="2000">
-                <a:solidFill>
-                  <a:srgbClr val="222222"/>
-                </a:solidFill>
-                <a:latin typeface="Malgun Gothic"/>
-              </a:rPr>
-              <a:t>• 난관 1 — 출처별 지역 단위 불일치 → region13 / region10 두 단위 병행</a:t>
-            </a:r>
-          </a:p>
-          <a:p>
-            <a:pPr>
-              <a:spcAft>
-                <a:spcPts val="900"/>
-              </a:spcAft>
-            </a:pPr>
-            <a:r>
-              <a:rPr sz="2000">
-                <a:solidFill>
-                  <a:srgbClr val="222222"/>
-                </a:solidFill>
-                <a:latin typeface="Malgun Gothic"/>
-              </a:rPr>
-              <a:t>• 난관 2 — 공단 PDF·변협 다운로드 불가 → KOSIS 우회 + 웹 스크래핑</a:t>
-            </a:r>
-          </a:p>
-          <a:p>
-            <a:pPr lvl="1">
-              <a:spcAft>
-                <a:spcPts val="900"/>
-              </a:spcAft>
-            </a:pPr>
-            <a:r>
-              <a:rPr sz="1700">
-                <a:solidFill>
-                  <a:srgbClr val="222222"/>
-                </a:solidFill>
-                <a:latin typeface="Malgun Gothic"/>
-              </a:rPr>
-              <a:t>– 신뢰성 검증: 법원관내 인구 합 = KOSIS 인구와 정확히 일치</a:t>
-            </a:r>
-          </a:p>
-          <a:p>
-            <a:pPr lvl="1">
-              <a:spcAft>
-                <a:spcPts val="900"/>
-              </a:spcAft>
-            </a:pPr>
-            <a:r>
-              <a:rPr sz="1700">
-                <a:solidFill>
-                  <a:srgbClr val="222222"/>
-                </a:solidFill>
-                <a:latin typeface="Malgun Gothic"/>
-              </a:rPr>
-              <a:t>– 본안사건 합 1,106,526 = 사법연감 전국 본안과 일치</a:t>
-            </a:r>
-          </a:p>
-        </p:txBody>
-      </p:sp>
-    </p:spTree>
-  </p:cSld>
-  <p:clrMapOvr>
-    <a:masterClrMapping/>
-  </p:clrMapOvr>
-</p:sld>
-</file>
-
-<file path=ppt/slides/slide8.xml><?xml version="1.0" encoding="utf-8"?>
-<p:sld xmlns:a="http://schemas.openxmlformats.org/drawingml/2006/main" xmlns:p="http://schemas.openxmlformats.org/presentationml/2006/main" xmlns:r="http://schemas.openxmlformats.org/officeDocument/2006/relationships">
-  <p:cSld>
-    <p:spTree>
-      <p:nvGrpSpPr>
-        <p:cNvPr id="1" name=""/>
-        <p:cNvGrpSpPr/>
-        <p:nvPr/>
-      </p:nvGrpSpPr>
-      <p:grpSpPr/>
-      <p:sp>
-        <p:nvSpPr>
-          <p:cNvPr id="2" name="TextBox 1"/>
-          <p:cNvSpPr txBox="1"/>
-          <p:nvPr/>
-        </p:nvSpPr>
-        <p:spPr>
-          <a:xfrm>
-            <a:off x="502920" y="320040"/>
-            <a:ext cx="11155680" cy="914400"/>
-          </a:xfrm>
-          <a:prstGeom prst="rect">
-            <a:avLst/>
-          </a:prstGeom>
-          <a:noFill/>
-        </p:spPr>
-        <p:txBody>
-          <a:bodyPr wrap="square">
-            <a:spAutoFit/>
-          </a:bodyPr>
-          <a:lstStyle/>
-          <a:p>
-            <a:r>
-              <a:rPr sz="3000" b="1">
-                <a:solidFill>
-                  <a:srgbClr val="1F3A5F"/>
-                </a:solidFill>
-                <a:latin typeface="Malgun Gothic"/>
-              </a:rPr>
-              <a:t>5. 데이터 수집 · raw data 정제 방법</a:t>
-            </a:r>
-          </a:p>
-        </p:txBody>
-      </p:sp>
-      <p:sp>
-        <p:nvSpPr>
-          <p:cNvPr id="3" name="Rectangle 2"/>
-          <p:cNvSpPr/>
-          <p:nvPr/>
-        </p:nvSpPr>
-        <p:spPr>
-          <a:xfrm>
-            <a:off x="548640" y="1234440"/>
-            <a:ext cx="11064240" cy="38100"/>
-          </a:xfrm>
-          <a:prstGeom prst="rect">
-            <a:avLst/>
-          </a:prstGeom>
-          <a:solidFill>
-            <a:srgbClr val="C44E52"/>
-          </a:solidFill>
-          <a:ln>
-            <a:noFill/>
-          </a:ln>
-        </p:spPr>
-        <p:style>
-          <a:lnRef idx="1">
-            <a:schemeClr val="accent1"/>
-          </a:lnRef>
-          <a:fillRef idx="3">
-            <a:schemeClr val="accent1"/>
-          </a:fillRef>
-          <a:effectRef idx="2">
-            <a:schemeClr val="accent1"/>
-          </a:effectRef>
-          <a:fontRef idx="minor">
-            <a:schemeClr val="lt1"/>
-          </a:fontRef>
-        </p:style>
-        <p:txBody>
-          <a:bodyPr rtlCol="0" anchor="ctr"/>
-          <a:lstStyle/>
-          <a:p>
-            <a:pPr algn="ctr"/>
-          </a:p>
-        </p:txBody>
-      </p:sp>
-      <p:sp>
-        <p:nvSpPr>
-          <p:cNvPr id="4" name="TextBox 3"/>
-          <p:cNvSpPr txBox="1"/>
-          <p:nvPr/>
-        </p:nvSpPr>
-        <p:spPr>
-          <a:xfrm>
-            <a:off x="640080" y="1554480"/>
-            <a:ext cx="10972800" cy="4937760"/>
-          </a:xfrm>
-          <a:prstGeom prst="rect">
-            <a:avLst/>
-          </a:prstGeom>
-          <a:noFill/>
-        </p:spPr>
-        <p:txBody>
-          <a:bodyPr wrap="square">
-            <a:spAutoFit/>
-          </a:bodyPr>
-          <a:lstStyle/>
-          <a:p>
-            <a:pPr>
-              <a:spcAft>
-                <a:spcPts val="900"/>
-              </a:spcAft>
-            </a:pPr>
-            <a:r>
-              <a:rPr sz="1800">
-                <a:solidFill>
-                  <a:srgbClr val="222222"/>
-                </a:solidFill>
-                <a:latin typeface="Malgun Gothic"/>
-              </a:rPr>
-              <a:t>• [수집] 출처별 방식이 달라 두 갈래</a:t>
-            </a:r>
-          </a:p>
-          <a:p>
-            <a:pPr lvl="1">
-              <a:spcAft>
-                <a:spcPts val="900"/>
-              </a:spcAft>
-            </a:pPr>
-            <a:r>
-              <a:rPr sz="1500">
-                <a:solidFill>
-                  <a:srgbClr val="222222"/>
-                </a:solidFill>
-                <a:latin typeface="Malgun Gothic"/>
-              </a:rPr>
-              <a:t>– 변협 회원현황: 웹 스크래핑(urllib + HTML 표 파싱) — 다운로드 미지원</a:t>
-            </a:r>
-          </a:p>
-          <a:p>
-            <a:pPr lvl="1">
-              <a:spcAft>
-                <a:spcPts val="900"/>
-              </a:spcAft>
-            </a:pPr>
-            <a:r>
-              <a:rPr sz="1500">
-                <a:solidFill>
-                  <a:srgbClr val="222222"/>
-                </a:solidFill>
-                <a:latin typeface="Malgun Gothic"/>
-              </a:rPr>
-              <a:t>– KOSIS·공단·사법연감: 엑셀/CSV 다운로드</a:t>
-            </a:r>
-          </a:p>
-          <a:p>
-            <a:pPr>
-              <a:spcAft>
-                <a:spcPts val="900"/>
-              </a:spcAft>
-            </a:pPr>
-            <a:r>
-              <a:rPr sz="1800">
-                <a:solidFill>
-                  <a:srgbClr val="222222"/>
-                </a:solidFill>
-                <a:latin typeface="Malgun Gothic"/>
-              </a:rPr>
-              <a:t>• [정제] raw → tidy 파이프라인 (src/prepare)</a:t>
-            </a:r>
-          </a:p>
-          <a:p>
-            <a:pPr lvl="1">
-              <a:spcAft>
-                <a:spcPts val="900"/>
-              </a:spcAft>
-            </a:pPr>
-            <a:r>
-              <a:rPr sz="1500">
-                <a:solidFill>
-                  <a:srgbClr val="222222"/>
-                </a:solidFill>
-                <a:latin typeface="Malgun Gothic"/>
-              </a:rPr>
-              <a:t>– 인코딩 자동판별, 가로형→세로형 변환·다중헤더 파싱</a:t>
-            </a:r>
-          </a:p>
-          <a:p>
-            <a:pPr lvl="1">
-              <a:spcAft>
-                <a:spcPts val="900"/>
-              </a:spcAft>
-            </a:pPr>
-            <a:r>
-              <a:rPr sz="1500">
-                <a:solidFill>
-                  <a:srgbClr val="222222"/>
-                </a:solidFill>
-                <a:latin typeface="Malgun Gothic"/>
-              </a:rPr>
-              <a:t>– 시도명 표준화(옛/신 명칭), 지역단위 매핑(14지방회·법원관내·도단위 → 권역)</a:t>
-            </a:r>
-          </a:p>
-          <a:p>
-            <a:pPr lvl="1">
-              <a:spcAft>
-                <a:spcPts val="900"/>
-              </a:spcAft>
-            </a:pPr>
-            <a:r>
-              <a:rPr sz="1500">
-                <a:solidFill>
-                  <a:srgbClr val="222222"/>
-                </a:solidFill>
-                <a:latin typeface="Malgun Gothic"/>
-              </a:rPr>
-              <a:t>– 공단 반기→연 합산, 사법연감 '본안사건' 추출(비송 제외)</a:t>
-            </a:r>
-          </a:p>
-          <a:p>
-            <a:pPr lvl="1">
-              <a:spcAft>
-                <a:spcPts val="900"/>
-              </a:spcAft>
-            </a:pPr>
-            <a:r>
-              <a:rPr sz="1500">
-                <a:solidFill>
-                  <a:srgbClr val="222222"/>
-                </a:solidFill>
-                <a:latin typeface="Malgun Gothic"/>
-              </a:rPr>
-              <a:t>– 결측·이상치 처리 → 권역×연도 패널 → 합계 교차검증</a:t>
-            </a:r>
-          </a:p>
-        </p:txBody>
-      </p:sp>
-    </p:spTree>
-  </p:cSld>
-  <p:clrMapOvr>
-    <a:masterClrMapping/>
-  </p:clrMapOvr>
-</p:sld>
-</file>
-
-<file path=ppt/slides/slide9.xml><?xml version="1.0" encoding="utf-8"?>
-<p:sld xmlns:a="http://schemas.openxmlformats.org/drawingml/2006/main" xmlns:p="http://schemas.openxmlformats.org/presentationml/2006/main" xmlns:r="http://schemas.openxmlformats.org/officeDocument/2006/relationships">
-  <p:cSld>
-    <p:spTree>
-      <p:nvGrpSpPr>
-        <p:cNvPr id="1" name=""/>
-        <p:cNvGrpSpPr/>
-        <p:nvPr/>
-      </p:nvGrpSpPr>
-      <p:grpSpPr/>
-      <p:sp>
-        <p:nvSpPr>
-          <p:cNvPr id="2" name="TextBox 1"/>
-          <p:cNvSpPr txBox="1"/>
-          <p:nvPr/>
-        </p:nvSpPr>
-        <p:spPr>
-          <a:xfrm>
-            <a:off x="502920" y="320040"/>
-            <a:ext cx="11155680" cy="914400"/>
-          </a:xfrm>
-          <a:prstGeom prst="rect">
-            <a:avLst/>
-          </a:prstGeom>
-          <a:noFill/>
-        </p:spPr>
-        <p:txBody>
-          <a:bodyPr wrap="square">
-            <a:spAutoFit/>
-          </a:bodyPr>
-          <a:lstStyle/>
-          <a:p>
-            <a:r>
-              <a:rPr sz="2800" b="1">
-                <a:solidFill>
-                  <a:srgbClr val="1F3A5F"/>
-                </a:solidFill>
-                <a:latin typeface="Malgun Gothic"/>
-              </a:rPr>
-              <a:t>데이터 규모와 성격 — 얼마나 '빅'데이터인가</a:t>
             </a:r>
           </a:p>
         </p:txBody>
@@ -10382,6 +9974,450 @@
           </a:p>
         </p:txBody>
       </p:sp>
+      <p:sp>
+        <p:nvSpPr>
+          <p:cNvPr id="4" name="TextBox 3"/>
+          <p:cNvSpPr txBox="1"/>
+          <p:nvPr/>
+        </p:nvSpPr>
+        <p:spPr>
+          <a:xfrm>
+            <a:off x="640080" y="1554480"/>
+            <a:ext cx="10972800" cy="4937760"/>
+          </a:xfrm>
+          <a:prstGeom prst="rect">
+            <a:avLst/>
+          </a:prstGeom>
+          <a:noFill/>
+        </p:spPr>
+        <p:txBody>
+          <a:bodyPr wrap="square">
+            <a:spAutoFit/>
+          </a:bodyPr>
+          <a:lstStyle/>
+          <a:p>
+            <a:pPr>
+              <a:spcAft>
+                <a:spcPts val="800"/>
+              </a:spcAft>
+            </a:pPr>
+            <a:r>
+              <a:rPr sz="2000">
+                <a:solidFill>
+                  <a:srgbClr val="222222"/>
+                </a:solidFill>
+                <a:latin typeface="Malgun Gothic"/>
+              </a:rPr>
+              <a:t>• 출처: 변협(스크랩)·사법연감·법률구조공단·KOSIS·시도경계</a:t>
+            </a:r>
+          </a:p>
+          <a:p>
+            <a:pPr>
+              <a:spcAft>
+                <a:spcPts val="800"/>
+              </a:spcAft>
+            </a:pPr>
+            <a:r>
+              <a:rPr sz="2000">
+                <a:solidFill>
+                  <a:srgbClr val="222222"/>
+                </a:solidFill>
+                <a:latin typeface="Malgun Gothic"/>
+              </a:rPr>
+              <a:t>• 난관 1 — 출처별 지역 단위 불일치 → region13 / region10 두 단위 병행</a:t>
+            </a:r>
+          </a:p>
+          <a:p>
+            <a:pPr>
+              <a:spcAft>
+                <a:spcPts val="800"/>
+              </a:spcAft>
+            </a:pPr>
+            <a:r>
+              <a:rPr sz="2000">
+                <a:solidFill>
+                  <a:srgbClr val="222222"/>
+                </a:solidFill>
+                <a:latin typeface="Malgun Gothic"/>
+              </a:rPr>
+              <a:t>• 난관 2 — 공단 PDF·변협 다운로드 불가 → KOSIS 우회 + 웹 스크래핑</a:t>
+            </a:r>
+          </a:p>
+          <a:p>
+            <a:pPr lvl="1">
+              <a:spcAft>
+                <a:spcPts val="800"/>
+              </a:spcAft>
+            </a:pPr>
+            <a:r>
+              <a:rPr sz="1700">
+                <a:solidFill>
+                  <a:srgbClr val="222222"/>
+                </a:solidFill>
+                <a:latin typeface="Malgun Gothic"/>
+              </a:rPr>
+              <a:t>– 신뢰성 검증: 법원관내 인구 합 = KOSIS 인구와 정확히 일치</a:t>
+            </a:r>
+          </a:p>
+          <a:p>
+            <a:pPr lvl="1">
+              <a:spcAft>
+                <a:spcPts val="800"/>
+              </a:spcAft>
+            </a:pPr>
+            <a:r>
+              <a:rPr sz="1700">
+                <a:solidFill>
+                  <a:srgbClr val="222222"/>
+                </a:solidFill>
+                <a:latin typeface="Malgun Gothic"/>
+              </a:rPr>
+              <a:t>– 본안사건 합 1,106,526 = 사법연감 전국 본안과 일치</a:t>
+            </a:r>
+          </a:p>
+        </p:txBody>
+      </p:sp>
+    </p:spTree>
+  </p:cSld>
+  <p:clrMapOvr>
+    <a:masterClrMapping/>
+  </p:clrMapOvr>
+</p:sld>
+</file>
+
+<file path=ppt/slides/slide8.xml><?xml version="1.0" encoding="utf-8"?>
+<p:sld xmlns:a="http://schemas.openxmlformats.org/drawingml/2006/main" xmlns:p="http://schemas.openxmlformats.org/presentationml/2006/main" xmlns:r="http://schemas.openxmlformats.org/officeDocument/2006/relationships">
+  <p:cSld>
+    <p:spTree>
+      <p:nvGrpSpPr>
+        <p:cNvPr id="1" name=""/>
+        <p:cNvGrpSpPr/>
+        <p:nvPr/>
+      </p:nvGrpSpPr>
+      <p:grpSpPr/>
+      <p:sp>
+        <p:nvSpPr>
+          <p:cNvPr id="2" name="TextBox 1"/>
+          <p:cNvSpPr txBox="1"/>
+          <p:nvPr/>
+        </p:nvSpPr>
+        <p:spPr>
+          <a:xfrm>
+            <a:off x="502920" y="320040"/>
+            <a:ext cx="11155680" cy="914400"/>
+          </a:xfrm>
+          <a:prstGeom prst="rect">
+            <a:avLst/>
+          </a:prstGeom>
+          <a:noFill/>
+        </p:spPr>
+        <p:txBody>
+          <a:bodyPr wrap="square">
+            <a:spAutoFit/>
+          </a:bodyPr>
+          <a:lstStyle/>
+          <a:p>
+            <a:r>
+              <a:rPr sz="2800" b="1">
+                <a:solidFill>
+                  <a:srgbClr val="1F3A5F"/>
+                </a:solidFill>
+                <a:latin typeface="Malgun Gothic"/>
+              </a:rPr>
+              <a:t>5. 데이터 수집 · raw data 정제 방법</a:t>
+            </a:r>
+          </a:p>
+        </p:txBody>
+      </p:sp>
+      <p:sp>
+        <p:nvSpPr>
+          <p:cNvPr id="3" name="Rectangle 2"/>
+          <p:cNvSpPr/>
+          <p:nvPr/>
+        </p:nvSpPr>
+        <p:spPr>
+          <a:xfrm>
+            <a:off x="548640" y="1188720"/>
+            <a:ext cx="11064240" cy="38100"/>
+          </a:xfrm>
+          <a:prstGeom prst="rect">
+            <a:avLst/>
+          </a:prstGeom>
+          <a:solidFill>
+            <a:srgbClr val="C44E52"/>
+          </a:solidFill>
+          <a:ln>
+            <a:noFill/>
+          </a:ln>
+        </p:spPr>
+        <p:style>
+          <a:lnRef idx="1">
+            <a:schemeClr val="accent1"/>
+          </a:lnRef>
+          <a:fillRef idx="3">
+            <a:schemeClr val="accent1"/>
+          </a:fillRef>
+          <a:effectRef idx="2">
+            <a:schemeClr val="accent1"/>
+          </a:effectRef>
+          <a:fontRef idx="minor">
+            <a:schemeClr val="lt1"/>
+          </a:fontRef>
+        </p:style>
+        <p:txBody>
+          <a:bodyPr rtlCol="0" anchor="ctr"/>
+          <a:lstStyle/>
+          <a:p>
+            <a:pPr algn="ctr"/>
+          </a:p>
+        </p:txBody>
+      </p:sp>
+      <p:sp>
+        <p:nvSpPr>
+          <p:cNvPr id="4" name="TextBox 3"/>
+          <p:cNvSpPr txBox="1"/>
+          <p:nvPr/>
+        </p:nvSpPr>
+        <p:spPr>
+          <a:xfrm>
+            <a:off x="640080" y="1554480"/>
+            <a:ext cx="10972800" cy="4937760"/>
+          </a:xfrm>
+          <a:prstGeom prst="rect">
+            <a:avLst/>
+          </a:prstGeom>
+          <a:noFill/>
+        </p:spPr>
+        <p:txBody>
+          <a:bodyPr wrap="square">
+            <a:spAutoFit/>
+          </a:bodyPr>
+          <a:lstStyle/>
+          <a:p>
+            <a:pPr>
+              <a:spcAft>
+                <a:spcPts val="800"/>
+              </a:spcAft>
+            </a:pPr>
+            <a:r>
+              <a:rPr sz="1800">
+                <a:solidFill>
+                  <a:srgbClr val="222222"/>
+                </a:solidFill>
+                <a:latin typeface="Malgun Gothic"/>
+              </a:rPr>
+              <a:t>• [수집] 출처별 방식이 달라 두 갈래</a:t>
+            </a:r>
+          </a:p>
+          <a:p>
+            <a:pPr lvl="1">
+              <a:spcAft>
+                <a:spcPts val="800"/>
+              </a:spcAft>
+            </a:pPr>
+            <a:r>
+              <a:rPr sz="1500">
+                <a:solidFill>
+                  <a:srgbClr val="222222"/>
+                </a:solidFill>
+                <a:latin typeface="Malgun Gothic"/>
+              </a:rPr>
+              <a:t>– 변협 회원현황: 웹 스크래핑(urllib + HTML 표 파싱) — 다운로드 미지원</a:t>
+            </a:r>
+          </a:p>
+          <a:p>
+            <a:pPr lvl="1">
+              <a:spcAft>
+                <a:spcPts val="800"/>
+              </a:spcAft>
+            </a:pPr>
+            <a:r>
+              <a:rPr sz="1500">
+                <a:solidFill>
+                  <a:srgbClr val="222222"/>
+                </a:solidFill>
+                <a:latin typeface="Malgun Gothic"/>
+              </a:rPr>
+              <a:t>– KOSIS·공단·사법연감: 엑셀/CSV 다운로드</a:t>
+            </a:r>
+          </a:p>
+          <a:p>
+            <a:pPr>
+              <a:spcAft>
+                <a:spcPts val="800"/>
+              </a:spcAft>
+            </a:pPr>
+            <a:r>
+              <a:rPr sz="1800">
+                <a:solidFill>
+                  <a:srgbClr val="222222"/>
+                </a:solidFill>
+                <a:latin typeface="Malgun Gothic"/>
+              </a:rPr>
+              <a:t>• [정제] raw → tidy 파이프라인 (src/prepare)</a:t>
+            </a:r>
+          </a:p>
+          <a:p>
+            <a:pPr lvl="1">
+              <a:spcAft>
+                <a:spcPts val="800"/>
+              </a:spcAft>
+            </a:pPr>
+            <a:r>
+              <a:rPr sz="1500">
+                <a:solidFill>
+                  <a:srgbClr val="222222"/>
+                </a:solidFill>
+                <a:latin typeface="Malgun Gothic"/>
+              </a:rPr>
+              <a:t>– 인코딩 자동판별, 가로형→세로형 변환·다중헤더 파싱</a:t>
+            </a:r>
+          </a:p>
+          <a:p>
+            <a:pPr lvl="1">
+              <a:spcAft>
+                <a:spcPts val="800"/>
+              </a:spcAft>
+            </a:pPr>
+            <a:r>
+              <a:rPr sz="1500">
+                <a:solidFill>
+                  <a:srgbClr val="222222"/>
+                </a:solidFill>
+                <a:latin typeface="Malgun Gothic"/>
+              </a:rPr>
+              <a:t>– 시도명 표준화(옛/신), 지역단위 매핑(14지방회·법원관내·도단위→권역)</a:t>
+            </a:r>
+          </a:p>
+          <a:p>
+            <a:pPr lvl="1">
+              <a:spcAft>
+                <a:spcPts val="800"/>
+              </a:spcAft>
+            </a:pPr>
+            <a:r>
+              <a:rPr sz="1500">
+                <a:solidFill>
+                  <a:srgbClr val="222222"/>
+                </a:solidFill>
+                <a:latin typeface="Malgun Gothic"/>
+              </a:rPr>
+              <a:t>– 공단 반기→연 합산, 사법연감 '본안사건' 추출(비송 제외)</a:t>
+            </a:r>
+          </a:p>
+          <a:p>
+            <a:pPr lvl="1">
+              <a:spcAft>
+                <a:spcPts val="800"/>
+              </a:spcAft>
+            </a:pPr>
+            <a:r>
+              <a:rPr sz="1500">
+                <a:solidFill>
+                  <a:srgbClr val="222222"/>
+                </a:solidFill>
+                <a:latin typeface="Malgun Gothic"/>
+              </a:rPr>
+              <a:t>– 결측·이상치 처리 → 권역×연도 패널 → 합계 교차검증</a:t>
+            </a:r>
+          </a:p>
+        </p:txBody>
+      </p:sp>
+    </p:spTree>
+  </p:cSld>
+  <p:clrMapOvr>
+    <a:masterClrMapping/>
+  </p:clrMapOvr>
+</p:sld>
+</file>
+
+<file path=ppt/slides/slide9.xml><?xml version="1.0" encoding="utf-8"?>
+<p:sld xmlns:a="http://schemas.openxmlformats.org/drawingml/2006/main" xmlns:p="http://schemas.openxmlformats.org/presentationml/2006/main" xmlns:r="http://schemas.openxmlformats.org/officeDocument/2006/relationships">
+  <p:cSld>
+    <p:spTree>
+      <p:nvGrpSpPr>
+        <p:cNvPr id="1" name=""/>
+        <p:cNvGrpSpPr/>
+        <p:nvPr/>
+      </p:nvGrpSpPr>
+      <p:grpSpPr/>
+      <p:sp>
+        <p:nvSpPr>
+          <p:cNvPr id="2" name="TextBox 1"/>
+          <p:cNvSpPr txBox="1"/>
+          <p:nvPr/>
+        </p:nvSpPr>
+        <p:spPr>
+          <a:xfrm>
+            <a:off x="502920" y="320040"/>
+            <a:ext cx="11155680" cy="914400"/>
+          </a:xfrm>
+          <a:prstGeom prst="rect">
+            <a:avLst/>
+          </a:prstGeom>
+          <a:noFill/>
+        </p:spPr>
+        <p:txBody>
+          <a:bodyPr wrap="square">
+            <a:spAutoFit/>
+          </a:bodyPr>
+          <a:lstStyle/>
+          <a:p>
+            <a:r>
+              <a:rPr sz="2800" b="1">
+                <a:solidFill>
+                  <a:srgbClr val="1F3A5F"/>
+                </a:solidFill>
+                <a:latin typeface="Malgun Gothic"/>
+              </a:rPr>
+              <a:t>데이터 규모와 성격 — 얼마나 '빅'데이터인가</a:t>
+            </a:r>
+          </a:p>
+        </p:txBody>
+      </p:sp>
+      <p:sp>
+        <p:nvSpPr>
+          <p:cNvPr id="3" name="Rectangle 2"/>
+          <p:cNvSpPr/>
+          <p:nvPr/>
+        </p:nvSpPr>
+        <p:spPr>
+          <a:xfrm>
+            <a:off x="548640" y="1188720"/>
+            <a:ext cx="11064240" cy="38100"/>
+          </a:xfrm>
+          <a:prstGeom prst="rect">
+            <a:avLst/>
+          </a:prstGeom>
+          <a:solidFill>
+            <a:srgbClr val="C44E52"/>
+          </a:solidFill>
+          <a:ln>
+            <a:noFill/>
+          </a:ln>
+        </p:spPr>
+        <p:style>
+          <a:lnRef idx="1">
+            <a:schemeClr val="accent1"/>
+          </a:lnRef>
+          <a:fillRef idx="3">
+            <a:schemeClr val="accent1"/>
+          </a:fillRef>
+          <a:effectRef idx="2">
+            <a:schemeClr val="accent1"/>
+          </a:effectRef>
+          <a:fontRef idx="minor">
+            <a:schemeClr val="lt1"/>
+          </a:fontRef>
+        </p:style>
+        <p:txBody>
+          <a:bodyPr rtlCol="0" anchor="ctr"/>
+          <a:lstStyle/>
+          <a:p>
+            <a:pPr algn="ctr"/>
+          </a:p>
+        </p:txBody>
+      </p:sp>
       <p:graphicFrame>
         <p:nvGraphicFramePr>
           <p:cNvPr id="4" name="Table 3"/>
@@ -10401,10 +10437,10 @@
                 <a:tableStyleId>{5C22544A-7EE6-4342-B048-85BDC9FD1C3A}</a:tableStyleId>
               </a:tblPr>
               <a:tblGrid>
-                <a:gridCol w="2766060"/>
-                <a:gridCol w="2766060"/>
-                <a:gridCol w="2766060"/>
-                <a:gridCol w="2766060"/>
+                <a:gridCol w="2377440"/>
+                <a:gridCol w="3657600"/>
+                <a:gridCol w="2743200"/>
+                <a:gridCol w="2286000"/>
               </a:tblGrid>
               <a:tr h="365760">
                 <a:tc>
@@ -10412,7 +10448,7 @@
                     <a:bodyPr/>
                     <a:lstStyle/>
                     <a:p>
-                      <a:pPr algn="l"/>
+                      <a:pPr algn="ctr"/>
                       <a:r>
                         <a:rPr sz="1200" b="1">
                           <a:solidFill>
@@ -10435,7 +10471,7 @@
                     <a:bodyPr/>
                     <a:lstStyle/>
                     <a:p>
-                      <a:pPr algn="ctr"/>
+                      <a:pPr algn="l"/>
                       <a:r>
                         <a:rPr sz="1200" b="1">
                           <a:solidFill>
@@ -10458,7 +10494,7 @@
                     <a:bodyPr/>
                     <a:lstStyle/>
                     <a:p>
-                      <a:pPr algn="ctr"/>
+                      <a:pPr algn="l"/>
                       <a:r>
                         <a:rPr sz="1200" b="1">
                           <a:solidFill>
@@ -10481,7 +10517,7 @@
                     <a:bodyPr/>
                     <a:lstStyle/>
                     <a:p>
-                      <a:pPr algn="ctr"/>
+                      <a:pPr algn="l"/>
                       <a:r>
                         <a:rPr sz="1200" b="1">
                           <a:solidFill>
@@ -10506,7 +10542,7 @@
                     <a:bodyPr/>
                     <a:lstStyle/>
                     <a:p>
-                      <a:pPr algn="l"/>
+                      <a:pPr algn="ctr"/>
                       <a:r>
                         <a:rPr sz="1200">
                           <a:latin typeface="Malgun Gothic"/>
@@ -10522,7 +10558,7 @@
                     <a:bodyPr/>
                     <a:lstStyle/>
                     <a:p>
-                      <a:pPr algn="ctr"/>
+                      <a:pPr algn="l"/>
                       <a:r>
                         <a:rPr sz="1200">
                           <a:latin typeface="Malgun Gothic"/>
@@ -10538,7 +10574,7 @@
                     <a:bodyPr/>
                     <a:lstStyle/>
                     <a:p>
-                      <a:pPr algn="ctr"/>
+                      <a:pPr algn="l"/>
                       <a:r>
                         <a:rPr sz="1200">
                           <a:latin typeface="Malgun Gothic"/>
@@ -10554,7 +10590,7 @@
                     <a:bodyPr/>
                     <a:lstStyle/>
                     <a:p>
-                      <a:pPr algn="ctr"/>
+                      <a:pPr algn="l"/>
                       <a:r>
                         <a:rPr sz="1200">
                           <a:latin typeface="Malgun Gothic"/>
@@ -10572,7 +10608,7 @@
                     <a:bodyPr/>
                     <a:lstStyle/>
                     <a:p>
-                      <a:pPr algn="l"/>
+                      <a:pPr algn="ctr"/>
                       <a:r>
                         <a:rPr sz="1200">
                           <a:latin typeface="Malgun Gothic"/>
@@ -10588,7 +10624,7 @@
                     <a:bodyPr/>
                     <a:lstStyle/>
                     <a:p>
-                      <a:pPr algn="ctr"/>
+                      <a:pPr algn="l"/>
                       <a:r>
                         <a:rPr sz="1200">
                           <a:latin typeface="Malgun Gothic"/>
@@ -10604,7 +10640,7 @@
                     <a:bodyPr/>
                     <a:lstStyle/>
                     <a:p>
-                      <a:pPr algn="ctr"/>
+                      <a:pPr algn="l"/>
                       <a:r>
                         <a:rPr sz="1200">
                           <a:latin typeface="Malgun Gothic"/>
@@ -10620,7 +10656,7 @@
                     <a:bodyPr/>
                     <a:lstStyle/>
                     <a:p>
-                      <a:pPr algn="ctr"/>
+                      <a:pPr algn="l"/>
                       <a:r>
                         <a:rPr sz="1200">
                           <a:latin typeface="Malgun Gothic"/>
@@ -10638,7 +10674,7 @@
                     <a:bodyPr/>
                     <a:lstStyle/>
                     <a:p>
-                      <a:pPr algn="l"/>
+                      <a:pPr algn="ctr"/>
                       <a:r>
                         <a:rPr sz="1200">
                           <a:latin typeface="Malgun Gothic"/>
@@ -10654,7 +10690,7 @@
                     <a:bodyPr/>
                     <a:lstStyle/>
                     <a:p>
-                      <a:pPr algn="ctr"/>
+                      <a:pPr algn="l"/>
                       <a:r>
                         <a:rPr sz="1200">
                           <a:latin typeface="Malgun Gothic"/>
@@ -10670,7 +10706,7 @@
                     <a:bodyPr/>
                     <a:lstStyle/>
                     <a:p>
-                      <a:pPr algn="ctr"/>
+                      <a:pPr algn="l"/>
                       <a:r>
                         <a:rPr sz="1200">
                           <a:latin typeface="Malgun Gothic"/>
@@ -10686,7 +10722,7 @@
                     <a:bodyPr/>
                     <a:lstStyle/>
                     <a:p>
-                      <a:pPr algn="ctr"/>
+                      <a:pPr algn="l"/>
                       <a:r>
                         <a:rPr sz="1200">
                           <a:latin typeface="Malgun Gothic"/>
@@ -10704,7 +10740,7 @@
                     <a:bodyPr/>
                     <a:lstStyle/>
                     <a:p>
-                      <a:pPr algn="l"/>
+                      <a:pPr algn="ctr"/>
                       <a:r>
                         <a:rPr sz="1200">
                           <a:latin typeface="Malgun Gothic"/>
@@ -10720,7 +10756,7 @@
                     <a:bodyPr/>
                     <a:lstStyle/>
                     <a:p>
-                      <a:pPr algn="ctr"/>
+                      <a:pPr algn="l"/>
                       <a:r>
                         <a:rPr sz="1200">
                           <a:latin typeface="Malgun Gothic"/>
@@ -10736,7 +10772,7 @@
                     <a:bodyPr/>
                     <a:lstStyle/>
                     <a:p>
-                      <a:pPr algn="ctr"/>
+                      <a:pPr algn="l"/>
                       <a:r>
                         <a:rPr sz="1200">
                           <a:latin typeface="Malgun Gothic"/>
@@ -10752,7 +10788,7 @@
                     <a:bodyPr/>
                     <a:lstStyle/>
                     <a:p>
-                      <a:pPr algn="ctr"/>
+                      <a:pPr algn="l"/>
                       <a:r>
                         <a:rPr sz="1200">
                           <a:latin typeface="Malgun Gothic"/>
@@ -10770,7 +10806,7 @@
                     <a:bodyPr/>
                     <a:lstStyle/>
                     <a:p>
-                      <a:pPr algn="l"/>
+                      <a:pPr algn="ctr"/>
                       <a:r>
                         <a:rPr sz="1200">
                           <a:latin typeface="Malgun Gothic"/>
@@ -10786,7 +10822,7 @@
                     <a:bodyPr/>
                     <a:lstStyle/>
                     <a:p>
-                      <a:pPr algn="ctr"/>
+                      <a:pPr algn="l"/>
                       <a:r>
                         <a:rPr sz="1200">
                           <a:latin typeface="Malgun Gothic"/>
@@ -10802,7 +10838,7 @@
                     <a:bodyPr/>
                     <a:lstStyle/>
                     <a:p>
-                      <a:pPr algn="ctr"/>
+                      <a:pPr algn="l"/>
                       <a:r>
                         <a:rPr sz="1200">
                           <a:latin typeface="Malgun Gothic"/>
@@ -10818,7 +10854,7 @@
                     <a:bodyPr/>
                     <a:lstStyle/>
                     <a:p>
-                      <a:pPr algn="ctr"/>
+                      <a:pPr algn="l"/>
                       <a:r>
                         <a:rPr sz="1200">
                           <a:latin typeface="Malgun Gothic"/>
@@ -10836,7 +10872,7 @@
                     <a:bodyPr/>
                     <a:lstStyle/>
                     <a:p>
-                      <a:pPr algn="l"/>
+                      <a:pPr algn="ctr"/>
                       <a:r>
                         <a:rPr sz="1200">
                           <a:latin typeface="Malgun Gothic"/>
@@ -10852,7 +10888,7 @@
                     <a:bodyPr/>
                     <a:lstStyle/>
                     <a:p>
-                      <a:pPr algn="ctr"/>
+                      <a:pPr algn="l"/>
                       <a:r>
                         <a:rPr sz="1200">
                           <a:latin typeface="Malgun Gothic"/>
@@ -10868,7 +10904,7 @@
                     <a:bodyPr/>
                     <a:lstStyle/>
                     <a:p>
-                      <a:pPr algn="ctr"/>
+                      <a:pPr algn="l"/>
                       <a:r>
                         <a:rPr sz="1200">
                           <a:latin typeface="Malgun Gothic"/>
@@ -10884,7 +10920,7 @@
                     <a:bodyPr/>
                     <a:lstStyle/>
                     <a:p>
-                      <a:pPr algn="ctr"/>
+                      <a:pPr algn="l"/>
                       <a:r>
                         <a:rPr sz="1200">
                           <a:latin typeface="Malgun Gothic"/>
@@ -10909,7 +10945,7 @@
         <p:spPr>
           <a:xfrm>
             <a:off x="640080" y="4160520"/>
-            <a:ext cx="10972800" cy="2377440"/>
+            <a:ext cx="10972800" cy="4937760"/>
           </a:xfrm>
           <a:prstGeom prst="rect">
             <a:avLst/>
@@ -10924,7 +10960,7 @@
           <a:p>
             <a:pPr>
               <a:spcAft>
-                <a:spcPts val="700"/>
+                <a:spcPts val="800"/>
               </a:spcAft>
             </a:pPr>
             <a:r>
@@ -10940,7 +10976,7 @@
           <a:p>
             <a:pPr>
               <a:spcAft>
-                <a:spcPts val="700"/>
+                <a:spcPts val="800"/>
               </a:spcAft>
             </a:pPr>
             <a:r>
@@ -10956,11 +10992,11 @@
           <a:p>
             <a:pPr lvl="1">
               <a:spcAft>
-                <a:spcPts val="700"/>
+                <a:spcPts val="800"/>
               </a:spcAft>
             </a:pPr>
             <a:r>
-              <a:rPr sz="1500">
+              <a:rPr sz="1400">
                 <a:solidFill>
                   <a:srgbClr val="222222"/>
                 </a:solidFill>
@@ -10972,7 +11008,7 @@
           <a:p>
             <a:pPr>
               <a:spcAft>
-                <a:spcPts val="700"/>
+                <a:spcPts val="800"/>
               </a:spcAft>
             </a:pPr>
             <a:r>
@@ -10982,7 +11018,7 @@
                 </a:solidFill>
                 <a:latin typeface="Malgun Gothic"/>
               </a:rPr>
-              <a:t>• 방법론: 데이터엔지니어링(ETL) · 합성지표 · 가설검정 · 군집(K-means) · 공간시각화</a:t>
+              <a:t>• 방법론: 데이터엔지니어링 · 합성지표 · 가설검정 · 군집 · 공간시각화</a:t>
             </a:r>
           </a:p>
         </p:txBody>

--- a/reports/발표자료.pptx
+++ b/reports/발표자료.pptx
@@ -3236,7 +3236,7 @@
                 </a:solidFill>
                 <a:latin typeface="Malgun Gothic"/>
               </a:rPr>
-              <a:t>6. LLAI는 어떻게 계산되나 — 예시</a:t>
+              <a:t>분석 기법 한눈에 (무엇·어떻게·왜)</a:t>
             </a:r>
           </a:p>
         </p:txBody>
@@ -3284,72 +3284,17 @@
           </a:p>
         </p:txBody>
       </p:sp>
-      <p:sp>
-        <p:nvSpPr>
-          <p:cNvPr id="4" name="TextBox 3"/>
-          <p:cNvSpPr txBox="1"/>
-          <p:nvPr/>
-        </p:nvSpPr>
-        <p:spPr>
-          <a:xfrm>
-            <a:off x="640080" y="1554480"/>
-            <a:ext cx="10972800" cy="4937760"/>
-          </a:xfrm>
-          <a:prstGeom prst="rect">
-            <a:avLst/>
-          </a:prstGeom>
-          <a:noFill/>
-        </p:spPr>
-        <p:txBody>
-          <a:bodyPr wrap="square">
-            <a:spAutoFit/>
-          </a:bodyPr>
-          <a:lstStyle/>
-          <a:p>
-            <a:pPr>
-              <a:spcAft>
-                <a:spcPts val="800"/>
-              </a:spcAft>
-            </a:pPr>
-            <a:r>
-              <a:rPr sz="1900">
-                <a:solidFill>
-                  <a:srgbClr val="222222"/>
-                </a:solidFill>
-                <a:latin typeface="Malgun Gothic"/>
-              </a:rPr>
-              <a:t>• 각 지표를 전국 최소=0·최대=1로 정규화(A2는 1−값) 후 가중 평균 ×100</a:t>
-            </a:r>
-          </a:p>
-          <a:p>
-            <a:pPr>
-              <a:spcAft>
-                <a:spcPts val="800"/>
-              </a:spcAft>
-            </a:pPr>
-            <a:r>
-              <a:rPr sz="1900">
-                <a:solidFill>
-                  <a:srgbClr val="222222"/>
-                </a:solidFill>
-                <a:latin typeface="Malgun Gothic"/>
-              </a:rPr>
-              <a:t>• LLAI = 0.69·A1n + 0.14·(1−A2n) + 0.17·A3n  (엔트로피 가중치)</a:t>
-            </a:r>
-          </a:p>
-        </p:txBody>
-      </p:sp>
       <p:graphicFrame>
         <p:nvGraphicFramePr>
-          <p:cNvPr id="5" name="Table 4"/>
+          <p:cNvPr id="4" name="Table 3"/>
           <p:cNvGraphicFramePr>
             <a:graphicFrameLocks noGrp="1"/>
           </p:cNvGraphicFramePr>
           <p:nvPr/>
         </p:nvGraphicFramePr>
         <p:xfrm>
-          <a:off x="1828800" y="3017520"/>
-          <a:ext cx="8229600" cy="1645920"/>
+          <a:off x="457200" y="1371600"/>
+          <a:ext cx="11247120" cy="4572000"/>
         </p:xfrm>
         <a:graphic>
           <a:graphicData uri="http://schemas.openxmlformats.org/drawingml/2006/table">
@@ -3358,13 +3303,11 @@
                 <a:tableStyleId>{5C22544A-7EE6-4342-B048-85BDC9FD1C3A}</a:tableStyleId>
               </a:tblPr>
               <a:tblGrid>
-                <a:gridCol w="1645920"/>
-                <a:gridCol w="1645920"/>
-                <a:gridCol w="1645920"/>
-                <a:gridCol w="1645920"/>
-                <a:gridCol w="1645920"/>
+                <a:gridCol w="1828800"/>
+                <a:gridCol w="4937760"/>
+                <a:gridCol w="4480560"/>
               </a:tblGrid>
-              <a:tr h="548640">
+              <a:tr h="508000">
                 <a:tc>
                   <a:txBody>
                     <a:bodyPr/>
@@ -3372,13 +3315,13 @@
                     <a:p>
                       <a:pPr algn="ctr"/>
                       <a:r>
-                        <a:rPr sz="1800" b="1">
+                        <a:rPr sz="1200" b="1">
                           <a:solidFill>
                             <a:srgbClr val="FFFFFF"/>
                           </a:solidFill>
                           <a:latin typeface="Malgun Gothic"/>
                         </a:rPr>
-                        <a:t>권역</a:t>
+                        <a:t>기법</a:t>
                       </a:r>
                     </a:p>
                   </a:txBody>
@@ -3395,13 +3338,13 @@
                     <a:p>
                       <a:pPr algn="l"/>
                       <a:r>
-                        <a:rPr sz="1800" b="1">
+                        <a:rPr sz="1200" b="1">
                           <a:solidFill>
                             <a:srgbClr val="FFFFFF"/>
                           </a:solidFill>
                           <a:latin typeface="Malgun Gothic"/>
                         </a:rPr>
-                        <a:t>A1n</a:t>
+                        <a:t>무엇을 / 어떻게</a:t>
                       </a:r>
                     </a:p>
                   </a:txBody>
@@ -3418,13 +3361,13 @@
                     <a:p>
                       <a:pPr algn="l"/>
                       <a:r>
-                        <a:rPr sz="1800" b="1">
+                        <a:rPr sz="1200" b="1">
                           <a:solidFill>
                             <a:srgbClr val="FFFFFF"/>
                           </a:solidFill>
                           <a:latin typeface="Malgun Gothic"/>
                         </a:rPr>
-                        <a:t>1−A2n</a:t>
+                        <a:t>왜</a:t>
                       </a:r>
                     </a:p>
                   </a:txBody>
@@ -3434,54 +3377,8 @@
                     </a:solidFill>
                   </a:tcPr>
                 </a:tc>
-                <a:tc>
-                  <a:txBody>
-                    <a:bodyPr/>
-                    <a:lstStyle/>
-                    <a:p>
-                      <a:pPr algn="l"/>
-                      <a:r>
-                        <a:rPr sz="1800" b="1">
-                          <a:solidFill>
-                            <a:srgbClr val="FFFFFF"/>
-                          </a:solidFill>
-                          <a:latin typeface="Malgun Gothic"/>
-                        </a:rPr>
-                        <a:t>A3n</a:t>
-                      </a:r>
-                    </a:p>
-                  </a:txBody>
-                  <a:tcPr anchor="ctr">
-                    <a:solidFill>
-                      <a:srgbClr val="1F3A5F"/>
-                    </a:solidFill>
-                  </a:tcPr>
-                </a:tc>
-                <a:tc>
-                  <a:txBody>
-                    <a:bodyPr/>
-                    <a:lstStyle/>
-                    <a:p>
-                      <a:pPr algn="l"/>
-                      <a:r>
-                        <a:rPr sz="1800" b="1">
-                          <a:solidFill>
-                            <a:srgbClr val="FFFFFF"/>
-                          </a:solidFill>
-                          <a:latin typeface="Malgun Gothic"/>
-                        </a:rPr>
-                        <a:t>LLAI</a:t>
-                      </a:r>
-                    </a:p>
-                  </a:txBody>
-                  <a:tcPr anchor="ctr">
-                    <a:solidFill>
-                      <a:srgbClr val="1F3A5F"/>
-                    </a:solidFill>
-                  </a:tcPr>
-                </a:tc>
               </a:tr>
-              <a:tr h="548640">
+              <a:tr h="508000">
                 <a:tc>
                   <a:txBody>
                     <a:bodyPr/>
@@ -3489,81 +3386,49 @@
                     <a:p>
                       <a:pPr algn="ctr"/>
                       <a:r>
-                        <a:rPr sz="1800">
-                          <a:latin typeface="Malgun Gothic"/>
-                        </a:rPr>
-                        <a:t>서울</a:t>
-                      </a:r>
-                    </a:p>
-                  </a:txBody>
-                  <a:tcPr anchor="ctr"/>
-                </a:tc>
-                <a:tc>
-                  <a:txBody>
-                    <a:bodyPr/>
-                    <a:lstStyle/>
-                    <a:p>
-                      <a:pPr algn="l"/>
-                      <a:r>
-                        <a:rPr sz="1800">
-                          <a:latin typeface="Malgun Gothic"/>
-                        </a:rPr>
-                        <a:t>1.00</a:t>
-                      </a:r>
-                    </a:p>
-                  </a:txBody>
-                  <a:tcPr anchor="ctr"/>
-                </a:tc>
-                <a:tc>
-                  <a:txBody>
-                    <a:bodyPr/>
-                    <a:lstStyle/>
-                    <a:p>
-                      <a:pPr algn="l"/>
-                      <a:r>
-                        <a:rPr sz="1800">
-                          <a:latin typeface="Malgun Gothic"/>
-                        </a:rPr>
-                        <a:t>1.00</a:t>
-                      </a:r>
-                    </a:p>
-                  </a:txBody>
-                  <a:tcPr anchor="ctr"/>
-                </a:tc>
-                <a:tc>
-                  <a:txBody>
-                    <a:bodyPr/>
-                    <a:lstStyle/>
-                    <a:p>
-                      <a:pPr algn="l"/>
-                      <a:r>
-                        <a:rPr sz="1800">
-                          <a:latin typeface="Malgun Gothic"/>
-                        </a:rPr>
-                        <a:t>0.48</a:t>
-                      </a:r>
-                    </a:p>
-                  </a:txBody>
-                  <a:tcPr anchor="ctr"/>
-                </a:tc>
-                <a:tc>
-                  <a:txBody>
-                    <a:bodyPr/>
-                    <a:lstStyle/>
-                    <a:p>
-                      <a:pPr algn="l"/>
-                      <a:r>
-                        <a:rPr sz="1800">
-                          <a:latin typeface="Malgun Gothic"/>
-                        </a:rPr>
-                        <a:t>91.1</a:t>
+                        <a:rPr sz="1200">
+                          <a:latin typeface="Malgun Gothic"/>
+                        </a:rPr>
+                        <a:t>정규화</a:t>
+                      </a:r>
+                    </a:p>
+                  </a:txBody>
+                  <a:tcPr anchor="ctr"/>
+                </a:tc>
+                <a:tc>
+                  <a:txBody>
+                    <a:bodyPr/>
+                    <a:lstStyle/>
+                    <a:p>
+                      <a:pPr algn="l"/>
+                      <a:r>
+                        <a:rPr sz="1200">
+                          <a:latin typeface="Malgun Gothic"/>
+                        </a:rPr>
+                        <a:t>지표를 0~1로 통일 (A2는 뒤집음)</a:t>
+                      </a:r>
+                    </a:p>
+                  </a:txBody>
+                  <a:tcPr anchor="ctr"/>
+                </a:tc>
+                <a:tc>
+                  <a:txBody>
+                    <a:bodyPr/>
+                    <a:lstStyle/>
+                    <a:p>
+                      <a:pPr algn="l"/>
+                      <a:r>
+                        <a:rPr sz="1200">
+                          <a:latin typeface="Malgun Gothic"/>
+                        </a:rPr>
+                        <a:t>단위 통일 · 0~100 직관 해석</a:t>
                       </a:r>
                     </a:p>
                   </a:txBody>
                   <a:tcPr anchor="ctr"/>
                 </a:tc>
               </a:tr>
-              <a:tr h="548640">
+              <a:tr h="508000">
                 <a:tc>
                   <a:txBody>
                     <a:bodyPr/>
@@ -3571,74 +3436,342 @@
                     <a:p>
                       <a:pPr algn="ctr"/>
                       <a:r>
-                        <a:rPr sz="1800">
-                          <a:latin typeface="Malgun Gothic"/>
-                        </a:rPr>
-                        <a:t>강원</a:t>
-                      </a:r>
-                    </a:p>
-                  </a:txBody>
-                  <a:tcPr anchor="ctr"/>
-                </a:tc>
-                <a:tc>
-                  <a:txBody>
-                    <a:bodyPr/>
-                    <a:lstStyle/>
-                    <a:p>
-                      <a:pPr algn="l"/>
-                      <a:r>
-                        <a:rPr sz="1800">
-                          <a:latin typeface="Malgun Gothic"/>
-                        </a:rPr>
-                        <a:t>0.00</a:t>
-                      </a:r>
-                    </a:p>
-                  </a:txBody>
-                  <a:tcPr anchor="ctr"/>
-                </a:tc>
-                <a:tc>
-                  <a:txBody>
-                    <a:bodyPr/>
-                    <a:lstStyle/>
-                    <a:p>
-                      <a:pPr algn="l"/>
-                      <a:r>
-                        <a:rPr sz="1800">
-                          <a:latin typeface="Malgun Gothic"/>
-                        </a:rPr>
-                        <a:t>0.00</a:t>
-                      </a:r>
-                    </a:p>
-                  </a:txBody>
-                  <a:tcPr anchor="ctr"/>
-                </a:tc>
-                <a:tc>
-                  <a:txBody>
-                    <a:bodyPr/>
-                    <a:lstStyle/>
-                    <a:p>
-                      <a:pPr algn="l"/>
-                      <a:r>
-                        <a:rPr sz="1800">
-                          <a:latin typeface="Malgun Gothic"/>
-                        </a:rPr>
-                        <a:t>0.09</a:t>
-                      </a:r>
-                    </a:p>
-                  </a:txBody>
-                  <a:tcPr anchor="ctr"/>
-                </a:tc>
-                <a:tc>
-                  <a:txBody>
-                    <a:bodyPr/>
-                    <a:lstStyle/>
-                    <a:p>
-                      <a:pPr algn="l"/>
-                      <a:r>
-                        <a:rPr sz="1800">
-                          <a:latin typeface="Malgun Gothic"/>
-                        </a:rPr>
-                        <a:t>1.6</a:t>
+                        <a:rPr sz="1200">
+                          <a:latin typeface="Malgun Gothic"/>
+                        </a:rPr>
+                        <a:t>가중치</a:t>
+                      </a:r>
+                    </a:p>
+                  </a:txBody>
+                  <a:tcPr anchor="ctr"/>
+                </a:tc>
+                <a:tc>
+                  <a:txBody>
+                    <a:bodyPr/>
+                    <a:lstStyle/>
+                    <a:p>
+                      <a:pPr algn="l"/>
+                      <a:r>
+                        <a:rPr sz="1200">
+                          <a:latin typeface="Malgun Gothic"/>
+                        </a:rPr>
+                        <a:t>세 지표 합칠 비중 정하기 (균등·엔트로피·PCA)</a:t>
+                      </a:r>
+                    </a:p>
+                  </a:txBody>
+                  <a:tcPr anchor="ctr"/>
+                </a:tc>
+                <a:tc>
+                  <a:txBody>
+                    <a:bodyPr/>
+                    <a:lstStyle/>
+                    <a:p>
+                      <a:pPr algn="l"/>
+                      <a:r>
+                        <a:rPr sz="1200">
+                          <a:latin typeface="Malgun Gothic"/>
+                        </a:rPr>
+                        <a:t>비중 자의성 → 강건성 확인</a:t>
+                      </a:r>
+                    </a:p>
+                  </a:txBody>
+                  <a:tcPr anchor="ctr"/>
+                </a:tc>
+              </a:tr>
+              <a:tr h="508000">
+                <a:tc>
+                  <a:txBody>
+                    <a:bodyPr/>
+                    <a:lstStyle/>
+                    <a:p>
+                      <a:pPr algn="ctr"/>
+                      <a:r>
+                        <a:rPr sz="1200">
+                          <a:latin typeface="Malgun Gothic"/>
+                        </a:rPr>
+                        <a:t>LLAI 합성</a:t>
+                      </a:r>
+                    </a:p>
+                  </a:txBody>
+                  <a:tcPr anchor="ctr"/>
+                </a:tc>
+                <a:tc>
+                  <a:txBody>
+                    <a:bodyPr/>
+                    <a:lstStyle/>
+                    <a:p>
+                      <a:pPr algn="l"/>
+                      <a:r>
+                        <a:rPr sz="1200">
+                          <a:latin typeface="Malgun Gothic"/>
+                        </a:rPr>
+                        <a:t>정규화 지표 가중평균 ×100</a:t>
+                      </a:r>
+                    </a:p>
+                  </a:txBody>
+                  <a:tcPr anchor="ctr"/>
+                </a:tc>
+                <a:tc>
+                  <a:txBody>
+                    <a:bodyPr/>
+                    <a:lstStyle/>
+                    <a:p>
+                      <a:pPr algn="l"/>
+                      <a:r>
+                        <a:rPr sz="1200">
+                          <a:latin typeface="Malgun Gothic"/>
+                        </a:rPr>
+                        <a:t>단순·투명한 점수</a:t>
+                      </a:r>
+                    </a:p>
+                  </a:txBody>
+                  <a:tcPr anchor="ctr"/>
+                </a:tc>
+              </a:tr>
+              <a:tr h="508000">
+                <a:tc>
+                  <a:txBody>
+                    <a:bodyPr/>
+                    <a:lstStyle/>
+                    <a:p>
+                      <a:pPr algn="ctr"/>
+                      <a:r>
+                        <a:rPr sz="1200">
+                          <a:latin typeface="Malgun Gothic"/>
+                        </a:rPr>
+                        <a:t>상관 보기</a:t>
+                      </a:r>
+                    </a:p>
+                  </a:txBody>
+                  <a:tcPr anchor="ctr"/>
+                </a:tc>
+                <a:tc>
+                  <a:txBody>
+                    <a:bodyPr/>
+                    <a:lstStyle/>
+                    <a:p>
+                      <a:pPr algn="l"/>
+                      <a:r>
+                        <a:rPr sz="1200">
+                          <a:latin typeface="Malgun Gothic"/>
+                        </a:rPr>
+                        <a:t>두 값이 같이 움직이나 (Pearson·Spearman)</a:t>
+                      </a:r>
+                    </a:p>
+                  </a:txBody>
+                  <a:tcPr anchor="ctr"/>
+                </a:tc>
+                <a:tc>
+                  <a:txBody>
+                    <a:bodyPr/>
+                    <a:lstStyle/>
+                    <a:p>
+                      <a:pPr algn="l"/>
+                      <a:r>
+                        <a:rPr sz="1200">
+                          <a:latin typeface="Malgun Gothic"/>
+                        </a:rPr>
+                        <a:t>이상치(서울) 대비 교차 확인</a:t>
+                      </a:r>
+                    </a:p>
+                  </a:txBody>
+                  <a:tcPr anchor="ctr"/>
+                </a:tc>
+              </a:tr>
+              <a:tr h="508000">
+                <a:tc>
+                  <a:txBody>
+                    <a:bodyPr/>
+                    <a:lstStyle/>
+                    <a:p>
+                      <a:pPr algn="ctr"/>
+                      <a:r>
+                        <a:rPr sz="1200">
+                          <a:latin typeface="Malgun Gothic"/>
+                        </a:rPr>
+                        <a:t>집단 비교</a:t>
+                      </a:r>
+                    </a:p>
+                  </a:txBody>
+                  <a:tcPr anchor="ctr"/>
+                </a:tc>
+                <a:tc>
+                  <a:txBody>
+                    <a:bodyPr/>
+                    <a:lstStyle/>
+                    <a:p>
+                      <a:pPr algn="l"/>
+                      <a:r>
+                        <a:rPr sz="1200">
+                          <a:latin typeface="Malgun Gothic"/>
+                        </a:rPr>
+                        <a:t>두 집단 차이 검정 (Mann-Whitney)</a:t>
+                      </a:r>
+                    </a:p>
+                  </a:txBody>
+                  <a:tcPr anchor="ctr"/>
+                </a:tc>
+                <a:tc>
+                  <a:txBody>
+                    <a:bodyPr/>
+                    <a:lstStyle/>
+                    <a:p>
+                      <a:pPr algn="l"/>
+                      <a:r>
+                        <a:rPr sz="1200">
+                          <a:latin typeface="Malgun Gothic"/>
+                        </a:rPr>
+                        <a:t>표본 작아 → 분포가정 없는 법</a:t>
+                      </a:r>
+                    </a:p>
+                  </a:txBody>
+                  <a:tcPr anchor="ctr"/>
+                </a:tc>
+              </a:tr>
+              <a:tr h="508000">
+                <a:tc>
+                  <a:txBody>
+                    <a:bodyPr/>
+                    <a:lstStyle/>
+                    <a:p>
+                      <a:pPr algn="ctr"/>
+                      <a:r>
+                        <a:rPr sz="1200">
+                          <a:latin typeface="Malgun Gothic"/>
+                        </a:rPr>
+                        <a:t>군집화</a:t>
+                      </a:r>
+                    </a:p>
+                  </a:txBody>
+                  <a:tcPr anchor="ctr"/>
+                </a:tc>
+                <a:tc>
+                  <a:txBody>
+                    <a:bodyPr/>
+                    <a:lstStyle/>
+                    <a:p>
+                      <a:pPr algn="l"/>
+                      <a:r>
+                        <a:rPr sz="1200">
+                          <a:latin typeface="Malgun Gothic"/>
+                        </a:rPr>
+                        <a:t>비슷한 권역끼리 묶기 (K-means)</a:t>
+                      </a:r>
+                    </a:p>
+                  </a:txBody>
+                  <a:tcPr anchor="ctr"/>
+                </a:tc>
+                <a:tc>
+                  <a:txBody>
+                    <a:bodyPr/>
+                    <a:lstStyle/>
+                    <a:p>
+                      <a:pPr algn="l"/>
+                      <a:r>
+                        <a:rPr sz="1200">
+                          <a:latin typeface="Malgun Gothic"/>
+                        </a:rPr>
+                        <a:t>유형 그룹화 · 묶음 수 객관 선정</a:t>
+                      </a:r>
+                    </a:p>
+                  </a:txBody>
+                  <a:tcPr anchor="ctr"/>
+                </a:tc>
+              </a:tr>
+              <a:tr h="508000">
+                <a:tc>
+                  <a:txBody>
+                    <a:bodyPr/>
+                    <a:lstStyle/>
+                    <a:p>
+                      <a:pPr algn="ctr"/>
+                      <a:r>
+                        <a:rPr sz="1200">
+                          <a:latin typeface="Malgun Gothic"/>
+                        </a:rPr>
+                        <a:t>쏠림 측정</a:t>
+                      </a:r>
+                    </a:p>
+                  </a:txBody>
+                  <a:tcPr anchor="ctr"/>
+                </a:tc>
+                <a:tc>
+                  <a:txBody>
+                    <a:bodyPr/>
+                    <a:lstStyle/>
+                    <a:p>
+                      <a:pPr algn="l"/>
+                      <a:r>
+                        <a:rPr sz="1200">
+                          <a:latin typeface="Malgun Gothic"/>
+                        </a:rPr>
+                        <a:t>한 곳 집중 정도 수치화 (HHI·변동계수)</a:t>
+                      </a:r>
+                    </a:p>
+                  </a:txBody>
+                  <a:tcPr anchor="ctr"/>
+                </a:tc>
+                <a:tc>
+                  <a:txBody>
+                    <a:bodyPr/>
+                    <a:lstStyle/>
+                    <a:p>
+                      <a:pPr algn="l"/>
+                      <a:r>
+                        <a:rPr sz="1200">
+                          <a:latin typeface="Malgun Gothic"/>
+                        </a:rPr>
+                        <a:t>집중·격차 변화 직접 측정</a:t>
+                      </a:r>
+                    </a:p>
+                  </a:txBody>
+                  <a:tcPr anchor="ctr"/>
+                </a:tc>
+              </a:tr>
+              <a:tr h="508000">
+                <a:tc>
+                  <a:txBody>
+                    <a:bodyPr/>
+                    <a:lstStyle/>
+                    <a:p>
+                      <a:pPr algn="ctr"/>
+                      <a:r>
+                        <a:rPr sz="1200">
+                          <a:latin typeface="Malgun Gothic"/>
+                        </a:rPr>
+                        <a:t>지도화</a:t>
+                      </a:r>
+                    </a:p>
+                  </a:txBody>
+                  <a:tcPr anchor="ctr"/>
+                </a:tc>
+                <a:tc>
+                  <a:txBody>
+                    <a:bodyPr/>
+                    <a:lstStyle/>
+                    <a:p>
+                      <a:pPr algn="l"/>
+                      <a:r>
+                        <a:rPr sz="1200">
+                          <a:latin typeface="Malgun Gothic"/>
+                        </a:rPr>
+                        <a:t>경계 합쳐 색칠 (코로플레스)</a:t>
+                      </a:r>
+                    </a:p>
+                  </a:txBody>
+                  <a:tcPr anchor="ctr"/>
+                </a:tc>
+                <a:tc>
+                  <a:txBody>
+                    <a:bodyPr/>
+                    <a:lstStyle/>
+                    <a:p>
+                      <a:pPr algn="l"/>
+                      <a:r>
+                        <a:rPr sz="1200">
+                          <a:latin typeface="Malgun Gothic"/>
+                        </a:rPr>
+                        <a:t>격차를 한눈에 전달</a:t>
                       </a:r>
                     </a:p>
                   </a:txBody>
@@ -3651,14 +3784,14 @@
       </p:graphicFrame>
       <p:sp>
         <p:nvSpPr>
-          <p:cNvPr id="6" name="TextBox 5"/>
+          <p:cNvPr id="5" name="TextBox 4"/>
           <p:cNvSpPr txBox="1"/>
           <p:nvPr/>
         </p:nvSpPr>
         <p:spPr>
           <a:xfrm>
-            <a:off x="640080" y="4937760"/>
-            <a:ext cx="10972800" cy="4937760"/>
+            <a:off x="640080" y="6126480"/>
+            <a:ext cx="10881360" cy="457200"/>
           </a:xfrm>
           <a:prstGeom prst="rect">
             <a:avLst/>
@@ -3671,35 +3804,14 @@
           </a:bodyPr>
           <a:lstStyle/>
           <a:p>
-            <a:pPr>
-              <a:spcAft>
-                <a:spcPts val="800"/>
-              </a:spcAft>
-            </a:pPr>
-            <a:r>
-              <a:rPr sz="1800">
-                <a:solidFill>
-                  <a:srgbClr val="222222"/>
-                </a:solidFill>
-                <a:latin typeface="Malgun Gothic"/>
-              </a:rPr>
-              <a:t>• 서울: 변호사·사건부담 두 축 모두 전국 최상(1.0) → 거의 만점</a:t>
-            </a:r>
-          </a:p>
-          <a:p>
-            <a:pPr>
-              <a:spcAft>
-                <a:spcPts val="800"/>
-              </a:spcAft>
-            </a:pPr>
-            <a:r>
-              <a:rPr sz="1800">
-                <a:solidFill>
-                  <a:srgbClr val="222222"/>
-                </a:solidFill>
-                <a:latin typeface="Malgun Gothic"/>
-              </a:rPr>
-              <a:t>• 강원: 두 축 모두 전국 최하(0) → 바닥. LLAI='전국 상대 위치'</a:t>
+            <a:r>
+              <a:rPr sz="1300" i="1">
+                <a:solidFill>
+                  <a:srgbClr val="555555"/>
+                </a:solidFill>
+                <a:latin typeface="Malgun Gothic"/>
+              </a:rPr>
+              <a:t>※ 괄호 안은 사용한 표준 통계·기계학습 도구 이름 — 몰라도 됨. 핵심은 '무엇을·왜'.</a:t>
             </a:r>
           </a:p>
         </p:txBody>
@@ -3751,7 +3863,7 @@
                 </a:solidFill>
                 <a:latin typeface="Malgun Gothic"/>
               </a:rPr>
-              <a:t>분석 기법 한눈에 (무엇·어떻게·왜)</a:t>
+              <a:t>7. 결과 ① — LLAI 순위 (region13, 2024)</a:t>
             </a:r>
           </a:p>
         </p:txBody>
@@ -3799,504 +3911,167 @@
           </a:p>
         </p:txBody>
       </p:sp>
-      <p:graphicFrame>
-        <p:nvGraphicFramePr>
-          <p:cNvPr id="4" name="Table 3"/>
-          <p:cNvGraphicFramePr>
-            <a:graphicFrameLocks noGrp="1"/>
-          </p:cNvGraphicFramePr>
+      <p:pic>
+        <p:nvPicPr>
+          <p:cNvPr id="4" name="Picture 3" descr="fig1_llai_ranking_region13.png"/>
+          <p:cNvPicPr>
+            <a:picLocks noChangeAspect="1"/>
+          </p:cNvPicPr>
           <p:nvPr/>
-        </p:nvGraphicFramePr>
-        <p:xfrm>
-          <a:off x="457200" y="1417320"/>
-          <a:ext cx="11247120" cy="4846320"/>
-        </p:xfrm>
-        <a:graphic>
-          <a:graphicData uri="http://schemas.openxmlformats.org/drawingml/2006/table">
-            <a:tbl>
-              <a:tblPr firstRow="1" bandRow="1">
-                <a:tableStyleId>{5C22544A-7EE6-4342-B048-85BDC9FD1C3A}</a:tableStyleId>
-              </a:tblPr>
-              <a:tblGrid>
-                <a:gridCol w="2194560"/>
-                <a:gridCol w="4572000"/>
-                <a:gridCol w="4480560"/>
-              </a:tblGrid>
-              <a:tr h="538480">
-                <a:tc>
-                  <a:txBody>
-                    <a:bodyPr/>
-                    <a:lstStyle/>
-                    <a:p>
-                      <a:pPr algn="ctr"/>
-                      <a:r>
-                        <a:rPr sz="1200" b="1">
-                          <a:solidFill>
-                            <a:srgbClr val="FFFFFF"/>
-                          </a:solidFill>
-                          <a:latin typeface="Malgun Gothic"/>
-                        </a:rPr>
-                        <a:t>기법</a:t>
-                      </a:r>
-                    </a:p>
-                  </a:txBody>
-                  <a:tcPr anchor="ctr">
-                    <a:solidFill>
-                      <a:srgbClr val="1F3A5F"/>
-                    </a:solidFill>
-                  </a:tcPr>
-                </a:tc>
-                <a:tc>
-                  <a:txBody>
-                    <a:bodyPr/>
-                    <a:lstStyle/>
-                    <a:p>
-                      <a:pPr algn="l"/>
-                      <a:r>
-                        <a:rPr sz="1200" b="1">
-                          <a:solidFill>
-                            <a:srgbClr val="FFFFFF"/>
-                          </a:solidFill>
-                          <a:latin typeface="Malgun Gothic"/>
-                        </a:rPr>
-                        <a:t>무엇 · 어떻게</a:t>
-                      </a:r>
-                    </a:p>
-                  </a:txBody>
-                  <a:tcPr anchor="ctr">
-                    <a:solidFill>
-                      <a:srgbClr val="1F3A5F"/>
-                    </a:solidFill>
-                  </a:tcPr>
-                </a:tc>
-                <a:tc>
-                  <a:txBody>
-                    <a:bodyPr/>
-                    <a:lstStyle/>
-                    <a:p>
-                      <a:pPr algn="l"/>
-                      <a:r>
-                        <a:rPr sz="1200" b="1">
-                          <a:solidFill>
-                            <a:srgbClr val="FFFFFF"/>
-                          </a:solidFill>
-                          <a:latin typeface="Malgun Gothic"/>
-                        </a:rPr>
-                        <a:t>왜</a:t>
-                      </a:r>
-                    </a:p>
-                  </a:txBody>
-                  <a:tcPr anchor="ctr">
-                    <a:solidFill>
-                      <a:srgbClr val="1F3A5F"/>
-                    </a:solidFill>
-                  </a:tcPr>
-                </a:tc>
-              </a:tr>
-              <a:tr h="538480">
-                <a:tc>
-                  <a:txBody>
-                    <a:bodyPr/>
-                    <a:lstStyle/>
-                    <a:p>
-                      <a:pPr algn="ctr"/>
-                      <a:r>
-                        <a:rPr sz="1200">
-                          <a:latin typeface="Malgun Gothic"/>
-                        </a:rPr>
-                        <a:t>Min-Max 정규화</a:t>
-                      </a:r>
-                    </a:p>
-                  </a:txBody>
-                  <a:tcPr anchor="ctr"/>
-                </a:tc>
-                <a:tc>
-                  <a:txBody>
-                    <a:bodyPr/>
-                    <a:lstStyle/>
-                    <a:p>
-                      <a:pPr algn="l"/>
-                      <a:r>
-                        <a:rPr sz="1200">
-                          <a:latin typeface="Malgun Gothic"/>
-                        </a:rPr>
-                        <a:t>지표를 0~1로 통일(A2 방향보정)</a:t>
-                      </a:r>
-                    </a:p>
-                  </a:txBody>
-                  <a:tcPr anchor="ctr"/>
-                </a:tc>
-                <a:tc>
-                  <a:txBody>
-                    <a:bodyPr/>
-                    <a:lstStyle/>
-                    <a:p>
-                      <a:pPr algn="l"/>
-                      <a:r>
-                        <a:rPr sz="1200">
-                          <a:latin typeface="Malgun Gothic"/>
-                        </a:rPr>
-                        <a:t>단위 통일 · 0~100 직관 해석</a:t>
-                      </a:r>
-                    </a:p>
-                  </a:txBody>
-                  <a:tcPr anchor="ctr"/>
-                </a:tc>
-              </a:tr>
-              <a:tr h="538480">
-                <a:tc>
-                  <a:txBody>
-                    <a:bodyPr/>
-                    <a:lstStyle/>
-                    <a:p>
-                      <a:pPr algn="ctr"/>
-                      <a:r>
-                        <a:rPr sz="1200">
-                          <a:latin typeface="Malgun Gothic"/>
-                        </a:rPr>
-                        <a:t>가중치 3종</a:t>
-                      </a:r>
-                    </a:p>
-                  </a:txBody>
-                  <a:tcPr anchor="ctr"/>
-                </a:tc>
-                <a:tc>
-                  <a:txBody>
-                    <a:bodyPr/>
-                    <a:lstStyle/>
-                    <a:p>
-                      <a:pPr algn="l"/>
-                      <a:r>
-                        <a:rPr sz="1200">
-                          <a:latin typeface="Malgun Gothic"/>
-                        </a:rPr>
-                        <a:t>균등 / 엔트로피 / PCA</a:t>
-                      </a:r>
-                    </a:p>
-                  </a:txBody>
-                  <a:tcPr anchor="ctr"/>
-                </a:tc>
-                <a:tc>
-                  <a:txBody>
-                    <a:bodyPr/>
-                    <a:lstStyle/>
-                    <a:p>
-                      <a:pPr algn="l"/>
-                      <a:r>
-                        <a:rPr sz="1200">
-                          <a:latin typeface="Malgun Gothic"/>
-                        </a:rPr>
-                        <a:t>가중치 자의성 → 강건성 확인</a:t>
-                      </a:r>
-                    </a:p>
-                  </a:txBody>
-                  <a:tcPr anchor="ctr"/>
-                </a:tc>
-              </a:tr>
-              <a:tr h="538480">
-                <a:tc>
-                  <a:txBody>
-                    <a:bodyPr/>
-                    <a:lstStyle/>
-                    <a:p>
-                      <a:pPr algn="ctr"/>
-                      <a:r>
-                        <a:rPr sz="1200">
-                          <a:latin typeface="Malgun Gothic"/>
-                        </a:rPr>
-                        <a:t>합성 LLAI</a:t>
-                      </a:r>
-                    </a:p>
-                  </a:txBody>
-                  <a:tcPr anchor="ctr"/>
-                </a:tc>
-                <a:tc>
-                  <a:txBody>
-                    <a:bodyPr/>
-                    <a:lstStyle/>
-                    <a:p>
-                      <a:pPr algn="l"/>
-                      <a:r>
-                        <a:rPr sz="1200">
-                          <a:latin typeface="Malgun Gothic"/>
-                        </a:rPr>
-                        <a:t>정규화 지표 가중평균 ×100</a:t>
-                      </a:r>
-                    </a:p>
-                  </a:txBody>
-                  <a:tcPr anchor="ctr"/>
-                </a:tc>
-                <a:tc>
-                  <a:txBody>
-                    <a:bodyPr/>
-                    <a:lstStyle/>
-                    <a:p>
-                      <a:pPr algn="l"/>
-                      <a:r>
-                        <a:rPr sz="1200">
-                          <a:latin typeface="Malgun Gothic"/>
-                        </a:rPr>
-                        <a:t>단순·투명한 해석</a:t>
-                      </a:r>
-                    </a:p>
-                  </a:txBody>
-                  <a:tcPr anchor="ctr"/>
-                </a:tc>
-              </a:tr>
-              <a:tr h="538480">
-                <a:tc>
-                  <a:txBody>
-                    <a:bodyPr/>
-                    <a:lstStyle/>
-                    <a:p>
-                      <a:pPr algn="ctr"/>
-                      <a:r>
-                        <a:rPr sz="1200">
-                          <a:latin typeface="Malgun Gothic"/>
-                        </a:rPr>
-                        <a:t>상관분석</a:t>
-                      </a:r>
-                    </a:p>
-                  </a:txBody>
-                  <a:tcPr anchor="ctr"/>
-                </a:tc>
-                <a:tc>
-                  <a:txBody>
-                    <a:bodyPr/>
-                    <a:lstStyle/>
-                    <a:p>
-                      <a:pPr algn="l"/>
-                      <a:r>
-                        <a:rPr sz="1200">
-                          <a:latin typeface="Malgun Gothic"/>
-                        </a:rPr>
-                        <a:t>Pearson r · Spearman ρ</a:t>
-                      </a:r>
-                    </a:p>
-                  </a:txBody>
-                  <a:tcPr anchor="ctr"/>
-                </a:tc>
-                <a:tc>
-                  <a:txBody>
-                    <a:bodyPr/>
-                    <a:lstStyle/>
-                    <a:p>
-                      <a:pPr algn="l"/>
-                      <a:r>
-                        <a:rPr sz="1200">
-                          <a:latin typeface="Malgun Gothic"/>
-                        </a:rPr>
-                        <a:t>이상치(서울) 교차 확인</a:t>
-                      </a:r>
-                    </a:p>
-                  </a:txBody>
-                  <a:tcPr anchor="ctr"/>
-                </a:tc>
-              </a:tr>
-              <a:tr h="538480">
-                <a:tc>
-                  <a:txBody>
-                    <a:bodyPr/>
-                    <a:lstStyle/>
-                    <a:p>
-                      <a:pPr algn="ctr"/>
-                      <a:r>
-                        <a:rPr sz="1200">
-                          <a:latin typeface="Malgun Gothic"/>
-                        </a:rPr>
-                        <a:t>집단 비교</a:t>
-                      </a:r>
-                    </a:p>
-                  </a:txBody>
-                  <a:tcPr anchor="ctr"/>
-                </a:tc>
-                <a:tc>
-                  <a:txBody>
-                    <a:bodyPr/>
-                    <a:lstStyle/>
-                    <a:p>
-                      <a:pPr algn="l"/>
-                      <a:r>
-                        <a:rPr sz="1200">
-                          <a:latin typeface="Malgun Gothic"/>
-                        </a:rPr>
-                        <a:t>Mann-Whitney U</a:t>
-                      </a:r>
-                    </a:p>
-                  </a:txBody>
-                  <a:tcPr anchor="ctr"/>
-                </a:tc>
-                <a:tc>
-                  <a:txBody>
-                    <a:bodyPr/>
-                    <a:lstStyle/>
-                    <a:p>
-                      <a:pPr algn="l"/>
-                      <a:r>
-                        <a:rPr sz="1200">
-                          <a:latin typeface="Malgun Gothic"/>
-                        </a:rPr>
-                        <a:t>표본 작아 정규성 불가 → 비모수</a:t>
-                      </a:r>
-                    </a:p>
-                  </a:txBody>
-                  <a:tcPr anchor="ctr"/>
-                </a:tc>
-              </a:tr>
-              <a:tr h="538480">
-                <a:tc>
-                  <a:txBody>
-                    <a:bodyPr/>
-                    <a:lstStyle/>
-                    <a:p>
-                      <a:pPr algn="ctr"/>
-                      <a:r>
-                        <a:rPr sz="1200">
-                          <a:latin typeface="Malgun Gothic"/>
-                        </a:rPr>
-                        <a:t>군집분석</a:t>
-                      </a:r>
-                    </a:p>
-                  </a:txBody>
-                  <a:tcPr anchor="ctr"/>
-                </a:tc>
-                <a:tc>
-                  <a:txBody>
-                    <a:bodyPr/>
-                    <a:lstStyle/>
-                    <a:p>
-                      <a:pPr algn="l"/>
-                      <a:r>
-                        <a:rPr sz="1200">
-                          <a:latin typeface="Malgun Gothic"/>
-                        </a:rPr>
-                        <a:t>K-means + Elbow·Silhouette</a:t>
-                      </a:r>
-                    </a:p>
-                  </a:txBody>
-                  <a:tcPr anchor="ctr"/>
-                </a:tc>
-                <a:tc>
-                  <a:txBody>
-                    <a:bodyPr/>
-                    <a:lstStyle/>
-                    <a:p>
-                      <a:pPr algn="l"/>
-                      <a:r>
-                        <a:rPr sz="1200">
-                          <a:latin typeface="Malgun Gothic"/>
-                        </a:rPr>
-                        <a:t>저차원·해석 쉬움, K 객관 선정</a:t>
-                      </a:r>
-                    </a:p>
-                  </a:txBody>
-                  <a:tcPr anchor="ctr"/>
-                </a:tc>
-              </a:tr>
-              <a:tr h="538480">
-                <a:tc>
-                  <a:txBody>
-                    <a:bodyPr/>
-                    <a:lstStyle/>
-                    <a:p>
-                      <a:pPr algn="ctr"/>
-                      <a:r>
-                        <a:rPr sz="1200">
-                          <a:latin typeface="Malgun Gothic"/>
-                        </a:rPr>
-                        <a:t>집중도(H4)</a:t>
-                      </a:r>
-                    </a:p>
-                  </a:txBody>
-                  <a:tcPr anchor="ctr"/>
-                </a:tc>
-                <a:tc>
-                  <a:txBody>
-                    <a:bodyPr/>
-                    <a:lstStyle/>
-                    <a:p>
-                      <a:pPr algn="l"/>
-                      <a:r>
-                        <a:rPr sz="1200">
-                          <a:latin typeface="Malgun Gothic"/>
-                        </a:rPr>
-                        <a:t>HHI · 변동계수</a:t>
-                      </a:r>
-                    </a:p>
-                  </a:txBody>
-                  <a:tcPr anchor="ctr"/>
-                </a:tc>
-                <a:tc>
-                  <a:txBody>
-                    <a:bodyPr/>
-                    <a:lstStyle/>
-                    <a:p>
-                      <a:pPr algn="l"/>
-                      <a:r>
-                        <a:rPr sz="1200">
-                          <a:latin typeface="Malgun Gothic"/>
-                        </a:rPr>
-                        <a:t>집중·격차 변화 직접 측정</a:t>
-                      </a:r>
-                    </a:p>
-                  </a:txBody>
-                  <a:tcPr anchor="ctr"/>
-                </a:tc>
-              </a:tr>
-              <a:tr h="538480">
-                <a:tc>
-                  <a:txBody>
-                    <a:bodyPr/>
-                    <a:lstStyle/>
-                    <a:p>
-                      <a:pPr algn="ctr"/>
-                      <a:r>
-                        <a:rPr sz="1200">
-                          <a:latin typeface="Malgun Gothic"/>
-                        </a:rPr>
-                        <a:t>공간 시각화</a:t>
-                      </a:r>
-                    </a:p>
-                  </a:txBody>
-                  <a:tcPr anchor="ctr"/>
-                </a:tc>
-                <a:tc>
-                  <a:txBody>
-                    <a:bodyPr/>
-                    <a:lstStyle/>
-                    <a:p>
-                      <a:pPr algn="l"/>
-                      <a:r>
-                        <a:rPr sz="1200">
-                          <a:latin typeface="Malgun Gothic"/>
-                        </a:rPr>
-                        <a:t>dissolve + 코로플레스</a:t>
-                      </a:r>
-                    </a:p>
-                  </a:txBody>
-                  <a:tcPr anchor="ctr"/>
-                </a:tc>
-                <a:tc>
-                  <a:txBody>
-                    <a:bodyPr/>
-                    <a:lstStyle/>
-                    <a:p>
-                      <a:pPr algn="l"/>
-                      <a:r>
-                        <a:rPr sz="1200">
-                          <a:latin typeface="Malgun Gothic"/>
-                        </a:rPr>
-                        <a:t>권역 단위 정합 · 직관 전달</a:t>
-                      </a:r>
-                    </a:p>
-                  </a:txBody>
-                  <a:tcPr anchor="ctr"/>
-                </a:tc>
-              </a:tr>
-            </a:tbl>
-          </a:graphicData>
-        </a:graphic>
-      </p:graphicFrame>
+        </p:nvPicPr>
+        <p:blipFill>
+          <a:blip r:embed="rId2"/>
+          <a:stretch>
+            <a:fillRect/>
+          </a:stretch>
+        </p:blipFill>
+        <p:spPr>
+          <a:xfrm>
+            <a:off x="365760" y="1554480"/>
+            <a:ext cx="6933804" cy="4297680"/>
+          </a:xfrm>
+          <a:prstGeom prst="rect">
+            <a:avLst/>
+          </a:prstGeom>
+        </p:spPr>
+      </p:pic>
+      <p:sp>
+        <p:nvSpPr>
+          <p:cNvPr id="5" name="TextBox 4"/>
+          <p:cNvSpPr txBox="1"/>
+          <p:nvPr/>
+        </p:nvSpPr>
+        <p:spPr>
+          <a:xfrm>
+            <a:off x="6949440" y="1828800"/>
+            <a:ext cx="4937760" cy="4937760"/>
+          </a:xfrm>
+          <a:prstGeom prst="rect">
+            <a:avLst/>
+          </a:prstGeom>
+          <a:noFill/>
+        </p:spPr>
+        <p:txBody>
+          <a:bodyPr wrap="square">
+            <a:spAutoFit/>
+          </a:bodyPr>
+          <a:lstStyle/>
+          <a:p>
+            <a:pPr>
+              <a:spcAft>
+                <a:spcPts val="800"/>
+              </a:spcAft>
+            </a:pPr>
+            <a:r>
+              <a:rPr sz="2000">
+                <a:solidFill>
+                  <a:srgbClr val="222222"/>
+                </a:solidFill>
+                <a:latin typeface="Malgun Gothic"/>
+              </a:rPr>
+              <a:t>• 서울 91 ≫ 압도</a:t>
+            </a:r>
+          </a:p>
+          <a:p>
+            <a:pPr>
+              <a:spcAft>
+                <a:spcPts val="800"/>
+              </a:spcAft>
+            </a:pPr>
+            <a:r>
+              <a:rPr sz="2000">
+                <a:solidFill>
+                  <a:srgbClr val="222222"/>
+                </a:solidFill>
+                <a:latin typeface="Malgun Gothic"/>
+              </a:rPr>
+              <a:t>• 울산·제주 2·3위</a:t>
+            </a:r>
+          </a:p>
+          <a:p>
+            <a:pPr lvl="1">
+              <a:spcAft>
+                <a:spcPts val="800"/>
+              </a:spcAft>
+            </a:pPr>
+            <a:r>
+              <a:rPr sz="1700">
+                <a:solidFill>
+                  <a:srgbClr val="222222"/>
+                </a:solidFill>
+                <a:latin typeface="Malgun Gothic"/>
+              </a:rPr>
+              <a:t>– (인구 적어 1인당 양호)</a:t>
+            </a:r>
+          </a:p>
+          <a:p>
+            <a:pPr>
+              <a:spcAft>
+                <a:spcPts val="800"/>
+              </a:spcAft>
+            </a:pPr>
+            <a:r>
+              <a:rPr sz="2000">
+                <a:solidFill>
+                  <a:srgbClr val="222222"/>
+                </a:solidFill>
+                <a:latin typeface="Malgun Gothic"/>
+              </a:rPr>
+              <a:t>• 인천은 하위권</a:t>
+            </a:r>
+          </a:p>
+          <a:p>
+            <a:pPr lvl="1">
+              <a:spcAft>
+                <a:spcPts val="800"/>
+              </a:spcAft>
+            </a:pPr>
+            <a:r>
+              <a:rPr sz="1700">
+                <a:solidFill>
+                  <a:srgbClr val="222222"/>
+                </a:solidFill>
+                <a:latin typeface="Malgun Gothic"/>
+              </a:rPr>
+              <a:t>– (사건부담 높음)</a:t>
+            </a:r>
+          </a:p>
+        </p:txBody>
+      </p:sp>
+      <p:sp>
+        <p:nvSpPr>
+          <p:cNvPr id="6" name="TextBox 5"/>
+          <p:cNvSpPr txBox="1"/>
+          <p:nvPr/>
+        </p:nvSpPr>
+        <p:spPr>
+          <a:xfrm>
+            <a:off x="640080" y="5989320"/>
+            <a:ext cx="10881360" cy="640080"/>
+          </a:xfrm>
+          <a:prstGeom prst="rect">
+            <a:avLst/>
+          </a:prstGeom>
+          <a:noFill/>
+        </p:spPr>
+        <p:txBody>
+          <a:bodyPr wrap="square">
+            <a:spAutoFit/>
+          </a:bodyPr>
+          <a:lstStyle/>
+          <a:p>
+            <a:r>
+              <a:rPr sz="1400" i="1">
+                <a:solidFill>
+                  <a:srgbClr val="555555"/>
+                </a:solidFill>
+                <a:latin typeface="Malgun Gothic"/>
+              </a:rPr>
+              <a:t>📊 읽는 법 — 막대 길이=LLAI 점수, 색=클러스터. 서울만 홀로 길고 파랑(별도 그룹), 나머지는 짧고 빨강.</a:t>
+            </a:r>
+          </a:p>
+        </p:txBody>
+      </p:sp>
     </p:spTree>
   </p:cSld>
   <p:clrMapOvr>
@@ -4344,7 +4119,7 @@
                 </a:solidFill>
                 <a:latin typeface="Malgun Gothic"/>
               </a:rPr>
-              <a:t>7. 결과 ① — LLAI 순위 (region13, 2024)</a:t>
+              <a:t>7. 결과 ② — 코로플레스 지도</a:t>
             </a:r>
           </a:p>
         </p:txBody>
@@ -4394,7 +4169,7 @@
       </p:sp>
       <p:pic>
         <p:nvPicPr>
-          <p:cNvPr id="4" name="Picture 3" descr="fig1_llai_ranking_region13.png"/>
+          <p:cNvPr id="4" name="Picture 3" descr="fig7_map_region13.png"/>
           <p:cNvPicPr>
             <a:picLocks noChangeAspect="1"/>
           </p:cNvPicPr>
@@ -4408,8 +4183,8 @@
         </p:blipFill>
         <p:spPr>
           <a:xfrm>
-            <a:off x="365760" y="1554480"/>
-            <a:ext cx="6933804" cy="4297680"/>
+            <a:off x="3657600" y="1371600"/>
+            <a:ext cx="5525669" cy="4572000"/>
           </a:xfrm>
           <a:prstGeom prst="rect">
             <a:avLst/>
@@ -4419,109 +4194,6 @@
       <p:sp>
         <p:nvSpPr>
           <p:cNvPr id="5" name="TextBox 4"/>
-          <p:cNvSpPr txBox="1"/>
-          <p:nvPr/>
-        </p:nvSpPr>
-        <p:spPr>
-          <a:xfrm>
-            <a:off x="6949440" y="1828800"/>
-            <a:ext cx="4937760" cy="4937760"/>
-          </a:xfrm>
-          <a:prstGeom prst="rect">
-            <a:avLst/>
-          </a:prstGeom>
-          <a:noFill/>
-        </p:spPr>
-        <p:txBody>
-          <a:bodyPr wrap="square">
-            <a:spAutoFit/>
-          </a:bodyPr>
-          <a:lstStyle/>
-          <a:p>
-            <a:pPr>
-              <a:spcAft>
-                <a:spcPts val="800"/>
-              </a:spcAft>
-            </a:pPr>
-            <a:r>
-              <a:rPr sz="2000">
-                <a:solidFill>
-                  <a:srgbClr val="222222"/>
-                </a:solidFill>
-                <a:latin typeface="Malgun Gothic"/>
-              </a:rPr>
-              <a:t>• 서울 91 ≫ 압도</a:t>
-            </a:r>
-          </a:p>
-          <a:p>
-            <a:pPr>
-              <a:spcAft>
-                <a:spcPts val="800"/>
-              </a:spcAft>
-            </a:pPr>
-            <a:r>
-              <a:rPr sz="2000">
-                <a:solidFill>
-                  <a:srgbClr val="222222"/>
-                </a:solidFill>
-                <a:latin typeface="Malgun Gothic"/>
-              </a:rPr>
-              <a:t>• 울산·제주 2·3위</a:t>
-            </a:r>
-          </a:p>
-          <a:p>
-            <a:pPr lvl="1">
-              <a:spcAft>
-                <a:spcPts val="800"/>
-              </a:spcAft>
-            </a:pPr>
-            <a:r>
-              <a:rPr sz="1700">
-                <a:solidFill>
-                  <a:srgbClr val="222222"/>
-                </a:solidFill>
-                <a:latin typeface="Malgun Gothic"/>
-              </a:rPr>
-              <a:t>– (인구 적어 1인당 양호)</a:t>
-            </a:r>
-          </a:p>
-          <a:p>
-            <a:pPr>
-              <a:spcAft>
-                <a:spcPts val="800"/>
-              </a:spcAft>
-            </a:pPr>
-            <a:r>
-              <a:rPr sz="2000">
-                <a:solidFill>
-                  <a:srgbClr val="222222"/>
-                </a:solidFill>
-                <a:latin typeface="Malgun Gothic"/>
-              </a:rPr>
-              <a:t>• 인천은 하위권</a:t>
-            </a:r>
-          </a:p>
-          <a:p>
-            <a:pPr lvl="1">
-              <a:spcAft>
-                <a:spcPts val="800"/>
-              </a:spcAft>
-            </a:pPr>
-            <a:r>
-              <a:rPr sz="1700">
-                <a:solidFill>
-                  <a:srgbClr val="222222"/>
-                </a:solidFill>
-                <a:latin typeface="Malgun Gothic"/>
-              </a:rPr>
-              <a:t>– (사건부담 높음)</a:t>
-            </a:r>
-          </a:p>
-        </p:txBody>
-      </p:sp>
-      <p:sp>
-        <p:nvSpPr>
-          <p:cNvPr id="6" name="TextBox 5"/>
           <p:cNvSpPr txBox="1"/>
           <p:nvPr/>
         </p:nvSpPr>
@@ -4548,7 +4220,7 @@
                 </a:solidFill>
                 <a:latin typeface="Malgun Gothic"/>
               </a:rPr>
-              <a:t>📊 읽는 법 — 막대 길이=LLAI, 색=클러스터. 서울만 홀로 길고 파랑(별도 그룹).</a:t>
+              <a:t>📊 읽는 법 — 파랑=고접근성, 빨강=저접근성. 서울만 파랑, 전국이 붉음 → 서울 일극 집중.</a:t>
             </a:r>
           </a:p>
         </p:txBody>
@@ -4600,7 +4272,7 @@
                 </a:solidFill>
                 <a:latin typeface="Malgun Gothic"/>
               </a:rPr>
-              <a:t>7. 결과 ② — 코로플레스 지도</a:t>
+              <a:t>8. 가설 H2 — 변호사 ↔ 사건 부담</a:t>
             </a:r>
           </a:p>
         </p:txBody>
@@ -4650,7 +4322,7 @@
       </p:sp>
       <p:pic>
         <p:nvPicPr>
-          <p:cNvPr id="4" name="Picture 3" descr="fig7_map_region13.png"/>
+          <p:cNvPr id="4" name="Picture 3" descr="fig2_scatter_a1_a2_region13.png"/>
           <p:cNvPicPr>
             <a:picLocks noChangeAspect="1"/>
           </p:cNvPicPr>
@@ -4664,8 +4336,8 @@
         </p:blipFill>
         <p:spPr>
           <a:xfrm>
-            <a:off x="3657600" y="1371600"/>
-            <a:ext cx="5525669" cy="4572000"/>
+            <a:off x="457200" y="1554480"/>
+            <a:ext cx="5346315" cy="4206240"/>
           </a:xfrm>
           <a:prstGeom prst="rect">
             <a:avLst/>
@@ -4675,6 +4347,109 @@
       <p:sp>
         <p:nvSpPr>
           <p:cNvPr id="5" name="TextBox 4"/>
+          <p:cNvSpPr txBox="1"/>
+          <p:nvPr/>
+        </p:nvSpPr>
+        <p:spPr>
+          <a:xfrm>
+            <a:off x="7040880" y="1737360"/>
+            <a:ext cx="4846320" cy="4937760"/>
+          </a:xfrm>
+          <a:prstGeom prst="rect">
+            <a:avLst/>
+          </a:prstGeom>
+          <a:noFill/>
+        </p:spPr>
+        <p:txBody>
+          <a:bodyPr wrap="square">
+            <a:spAutoFit/>
+          </a:bodyPr>
+          <a:lstStyle/>
+          <a:p>
+            <a:pPr>
+              <a:spcAft>
+                <a:spcPts val="800"/>
+              </a:spcAft>
+            </a:pPr>
+            <a:r>
+              <a:rPr sz="1900">
+                <a:solidFill>
+                  <a:srgbClr val="222222"/>
+                </a:solidFill>
+                <a:latin typeface="Malgun Gothic"/>
+              </a:rPr>
+              <a:t>• 변호사 많을수록 1인당 사건부담 ↓</a:t>
+            </a:r>
+          </a:p>
+          <a:p>
+            <a:pPr lvl="1">
+              <a:spcAft>
+                <a:spcPts val="800"/>
+              </a:spcAft>
+            </a:pPr>
+            <a:r>
+              <a:rPr sz="1600">
+                <a:solidFill>
+                  <a:srgbClr val="222222"/>
+                </a:solidFill>
+                <a:latin typeface="Malgun Gothic"/>
+              </a:rPr>
+              <a:t>– 상관계수 r = −0.85</a:t>
+            </a:r>
+          </a:p>
+          <a:p>
+            <a:pPr lvl="1">
+              <a:spcAft>
+                <a:spcPts val="800"/>
+              </a:spcAft>
+            </a:pPr>
+            <a:r>
+              <a:rPr sz="1600">
+                <a:solidFill>
+                  <a:srgbClr val="222222"/>
+                </a:solidFill>
+                <a:latin typeface="Malgun Gothic"/>
+              </a:rPr>
+              <a:t>– r이 음수(−) = 한쪽 늘면 다른 쪽 줆</a:t>
+            </a:r>
+          </a:p>
+          <a:p>
+            <a:pPr lvl="1">
+              <a:spcAft>
+                <a:spcPts val="800"/>
+              </a:spcAft>
+            </a:pPr>
+            <a:r>
+              <a:rPr sz="1600">
+                <a:solidFill>
+                  <a:srgbClr val="222222"/>
+                </a:solidFill>
+                <a:latin typeface="Malgun Gothic"/>
+              </a:rPr>
+              <a:t>– → '바람직한' 관계 (변호사 많으면 덜 바쁨)</a:t>
+            </a:r>
+          </a:p>
+          <a:p>
+            <a:pPr>
+              <a:spcAft>
+                <a:spcPts val="800"/>
+              </a:spcAft>
+            </a:pPr>
+            <a:r>
+              <a:rPr sz="1900">
+                <a:solidFill>
+                  <a:srgbClr val="222222"/>
+                </a:solidFill>
+                <a:latin typeface="Malgun Gothic"/>
+              </a:rPr>
+              <a:t>• 서울은 우하단 극단 이상치</a:t>
+            </a:r>
+          </a:p>
+        </p:txBody>
+      </p:sp>
+      <p:sp>
+        <p:nvSpPr>
+          <p:cNvPr id="6" name="TextBox 5"/>
           <p:cNvSpPr txBox="1"/>
           <p:nvPr/>
         </p:nvSpPr>
@@ -4701,7 +4476,7 @@
                 </a:solidFill>
                 <a:latin typeface="Malgun Gothic"/>
               </a:rPr>
-              <a:t>📊 읽는 법 — 파랑=고접근성, 빨강=저접근성. 서울만 파랑, 전국이 붉음 → 서울 일극 집중.</a:t>
+              <a:t>📊 읽는 법 — 오른쪽 아래로 갈수록 좋음. 서울은 맨 오른쪽 아래, 비수도권은 왼쪽 위에 뭉침.</a:t>
             </a:r>
           </a:p>
         </p:txBody>
@@ -4753,7 +4528,7 @@
                 </a:solidFill>
                 <a:latin typeface="Malgun Gothic"/>
               </a:rPr>
-              <a:t>8. 가설 H2 — 변호사 ↔ 사건 부담</a:t>
+              <a:t>9. 가설 H4 — 양적 팽창의 함정 ★</a:t>
             </a:r>
           </a:p>
         </p:txBody>
@@ -4803,7 +4578,7 @@
       </p:sp>
       <p:pic>
         <p:nvPicPr>
-          <p:cNvPr id="4" name="Picture 3" descr="fig2_scatter_a1_a2_region13.png"/>
+          <p:cNvPr id="4" name="Picture 3" descr="fig8_lawyer_trend.png"/>
           <p:cNvPicPr>
             <a:picLocks noChangeAspect="1"/>
           </p:cNvPicPr>
@@ -4818,7 +4593,7 @@
         <p:spPr>
           <a:xfrm>
             <a:off x="457200" y="1554480"/>
-            <a:ext cx="5346315" cy="4206240"/>
+            <a:ext cx="7072970" cy="4114800"/>
           </a:xfrm>
           <a:prstGeom prst="rect">
             <a:avLst/>
@@ -4833,8 +4608,8 @@
         </p:nvSpPr>
         <p:spPr>
           <a:xfrm>
-            <a:off x="7040880" y="1828800"/>
-            <a:ext cx="4846320" cy="4937760"/>
+            <a:off x="7680960" y="1737360"/>
+            <a:ext cx="4297680" cy="4937760"/>
           </a:xfrm>
           <a:prstGeom prst="rect">
             <a:avLst/>
@@ -4853,13 +4628,13 @@
               </a:spcAft>
             </a:pPr>
             <a:r>
-              <a:rPr sz="2000">
+              <a:rPr sz="1800">
                 <a:solidFill>
                   <a:srgbClr val="222222"/>
                 </a:solidFill>
                 <a:latin typeface="Malgun Gothic"/>
               </a:rPr>
-              <a:t>• 강한 음의 상관</a:t>
+              <a:t>• 변호사 3.4배↑</a:t>
             </a:r>
           </a:p>
           <a:p>
@@ -4869,13 +4644,13 @@
               </a:spcAft>
             </a:pPr>
             <a:r>
-              <a:rPr sz="1700">
+              <a:rPr sz="1500">
                 <a:solidFill>
                   <a:srgbClr val="222222"/>
                 </a:solidFill>
                 <a:latin typeface="Malgun Gothic"/>
               </a:rPr>
-              <a:t>– r = −0.84 ~ −0.88 (p&lt;0.01)</a:t>
+              <a:t>– 9,612 → 32,273명</a:t>
             </a:r>
           </a:p>
           <a:p>
@@ -4885,13 +4660,29 @@
               </a:spcAft>
             </a:pPr>
             <a:r>
-              <a:rPr sz="2000">
+              <a:rPr sz="1800">
                 <a:solidFill>
                   <a:srgbClr val="222222"/>
                 </a:solidFill>
                 <a:latin typeface="Malgun Gothic"/>
               </a:rPr>
-              <a:t>• 변호사 부족 → 1인당 부담 폭증</a:t>
+              <a:t>• 서울 비중 71%→76%↑</a:t>
+            </a:r>
+          </a:p>
+          <a:p>
+            <a:pPr lvl="1">
+              <a:spcAft>
+                <a:spcPts val="800"/>
+              </a:spcAft>
+            </a:pPr>
+            <a:r>
+              <a:rPr sz="1500">
+                <a:solidFill>
+                  <a:srgbClr val="222222"/>
+                </a:solidFill>
+                <a:latin typeface="Malgun Gothic"/>
+              </a:rPr>
+              <a:t>– 비수도권 全 권역 하락</a:t>
             </a:r>
           </a:p>
           <a:p>
@@ -4901,13 +4692,13 @@
               </a:spcAft>
             </a:pPr>
             <a:r>
-              <a:rPr sz="2000">
+              <a:rPr sz="1800">
                 <a:solidFill>
                   <a:srgbClr val="222222"/>
                 </a:solidFill>
                 <a:latin typeface="Malgun Gothic"/>
               </a:rPr>
-              <a:t>• 서울은 우하단 극단 이상치</a:t>
+              <a:t>• 쏠림(HHI) 0.53→0.60</a:t>
             </a:r>
           </a:p>
         </p:txBody>
@@ -4941,7 +4732,7 @@
                 </a:solidFill>
                 <a:latin typeface="Malgun Gothic"/>
               </a:rPr>
-              <a:t>📊 읽는 법 — 오른쪽 아래로 갈수록 좋음. 서울은 맨 오른쪽 아래, 비수도권은 왼쪽 위에 뭉침.</a:t>
+              <a:t>📊 읽는 법 — 권역별 점유율 2009(회색) vs 2026(빨강). 서울만 커지고 나머지는 줄거나 정체.</a:t>
             </a:r>
           </a:p>
         </p:txBody>
@@ -4993,7 +4784,7 @@
                 </a:solidFill>
                 <a:latin typeface="Malgun Gothic"/>
               </a:rPr>
-              <a:t>9. 가설 H4 — 양적 팽창의 함정 ★</a:t>
+              <a:t>10. 심화 — 서울을 빼고 보면</a:t>
             </a:r>
           </a:p>
         </p:txBody>
@@ -5043,7 +4834,7 @@
       </p:sp>
       <p:pic>
         <p:nvPicPr>
-          <p:cNvPr id="4" name="Picture 3" descr="fig8_lawyer_trend.png"/>
+          <p:cNvPr id="4" name="Picture 3" descr="fig7_map_region13_exseoul.png"/>
           <p:cNvPicPr>
             <a:picLocks noChangeAspect="1"/>
           </p:cNvPicPr>
@@ -5057,8 +4848,8 @@
         </p:blipFill>
         <p:spPr>
           <a:xfrm>
-            <a:off x="457200" y="1554480"/>
-            <a:ext cx="7072970" cy="4114800"/>
+            <a:off x="365760" y="1463040"/>
+            <a:ext cx="5304642" cy="4389120"/>
           </a:xfrm>
           <a:prstGeom prst="rect">
             <a:avLst/>
@@ -5073,8 +4864,8 @@
         </p:nvSpPr>
         <p:spPr>
           <a:xfrm>
-            <a:off x="7680960" y="1737360"/>
-            <a:ext cx="4297680" cy="4937760"/>
+            <a:off x="7040880" y="1828800"/>
+            <a:ext cx="4846320" cy="4937760"/>
           </a:xfrm>
           <a:prstGeom prst="rect">
             <a:avLst/>
@@ -5093,13 +4884,45 @@
               </a:spcAft>
             </a:pPr>
             <a:r>
-              <a:rPr sz="1800">
+              <a:rPr sz="2000">
                 <a:solidFill>
                   <a:srgbClr val="222222"/>
                 </a:solidFill>
                 <a:latin typeface="Malgun Gothic"/>
               </a:rPr>
-              <a:t>• 변호사 3.4배↑</a:t>
+              <a:t>• 부산·울산·제주 상위 부상</a:t>
+            </a:r>
+          </a:p>
+          <a:p>
+            <a:pPr>
+              <a:spcAft>
+                <a:spcPts val="800"/>
+              </a:spcAft>
+            </a:pPr>
+            <a:r>
+              <a:rPr sz="2000">
+                <a:solidFill>
+                  <a:srgbClr val="222222"/>
+                </a:solidFill>
+                <a:latin typeface="Malgun Gothic"/>
+              </a:rPr>
+              <a:t>• 경기·인천은 중하위</a:t>
+            </a:r>
+          </a:p>
+          <a:p>
+            <a:pPr>
+              <a:spcAft>
+                <a:spcPts val="800"/>
+              </a:spcAft>
+            </a:pPr>
+            <a:r>
+              <a:rPr sz="2000">
+                <a:solidFill>
+                  <a:srgbClr val="222222"/>
+                </a:solidFill>
+                <a:latin typeface="Malgun Gothic"/>
+              </a:rPr>
+              <a:t>• 핵심: '수도권 우위'는</a:t>
             </a:r>
           </a:p>
           <a:p>
@@ -5109,61 +4932,13 @@
               </a:spcAft>
             </a:pPr>
             <a:r>
-              <a:rPr sz="1500">
+              <a:rPr sz="1700">
                 <a:solidFill>
                   <a:srgbClr val="222222"/>
                 </a:solidFill>
                 <a:latin typeface="Malgun Gothic"/>
               </a:rPr>
-              <a:t>– 9,612 → 32,273명</a:t>
-            </a:r>
-          </a:p>
-          <a:p>
-            <a:pPr>
-              <a:spcAft>
-                <a:spcPts val="800"/>
-              </a:spcAft>
-            </a:pPr>
-            <a:r>
-              <a:rPr sz="1800">
-                <a:solidFill>
-                  <a:srgbClr val="222222"/>
-                </a:solidFill>
-                <a:latin typeface="Malgun Gothic"/>
-              </a:rPr>
-              <a:t>• 서울 비중 71%→76%↑</a:t>
-            </a:r>
-          </a:p>
-          <a:p>
-            <a:pPr lvl="1">
-              <a:spcAft>
-                <a:spcPts val="800"/>
-              </a:spcAft>
-            </a:pPr>
-            <a:r>
-              <a:rPr sz="1500">
-                <a:solidFill>
-                  <a:srgbClr val="222222"/>
-                </a:solidFill>
-                <a:latin typeface="Malgun Gothic"/>
-              </a:rPr>
-              <a:t>– 비수도권 全 권역 하락</a:t>
-            </a:r>
-          </a:p>
-          <a:p>
-            <a:pPr>
-              <a:spcAft>
-                <a:spcPts val="800"/>
-              </a:spcAft>
-            </a:pPr>
-            <a:r>
-              <a:rPr sz="1800">
-                <a:solidFill>
-                  <a:srgbClr val="222222"/>
-                </a:solidFill>
-                <a:latin typeface="Malgun Gothic"/>
-              </a:rPr>
-              <a:t>• HHI 0.53→0.60 심화</a:t>
+              <a:t>– 사실상 서울 단독 현상</a:t>
             </a:r>
           </a:p>
         </p:txBody>
@@ -5197,7 +4972,7 @@
                 </a:solidFill>
                 <a:latin typeface="Malgun Gothic"/>
               </a:rPr>
-              <a:t>📊 읽는 법 — 권역별 점유율 2009(회색) vs 2026(빨강). 서울만 커지고 나머지는 줄거나 정체.</a:t>
+              <a:t>📊 읽는 법 — 서울 제외·재정규화(서울 회색). 색 범위 재조정 → 지방 내부 격차가 보임.</a:t>
             </a:r>
           </a:p>
         </p:txBody>
@@ -5249,7 +5024,7 @@
                 </a:solidFill>
                 <a:latin typeface="Malgun Gothic"/>
               </a:rPr>
-              <a:t>10. 심화 — 서울을 빼고 보면</a:t>
+              <a:t>11. 가설 검정 종합</a:t>
             </a:r>
           </a:p>
         </p:txBody>
@@ -5297,40 +5072,16 @@
           </a:p>
         </p:txBody>
       </p:sp>
-      <p:pic>
-        <p:nvPicPr>
-          <p:cNvPr id="4" name="Picture 3" descr="fig7_map_region13_exseoul.png"/>
-          <p:cNvPicPr>
-            <a:picLocks noChangeAspect="1"/>
-          </p:cNvPicPr>
+      <p:sp>
+        <p:nvSpPr>
+          <p:cNvPr id="4" name="TextBox 3"/>
+          <p:cNvSpPr txBox="1"/>
           <p:nvPr/>
-        </p:nvPicPr>
-        <p:blipFill>
-          <a:blip r:embed="rId2"/>
-          <a:stretch>
-            <a:fillRect/>
-          </a:stretch>
-        </p:blipFill>
+        </p:nvSpPr>
         <p:spPr>
           <a:xfrm>
-            <a:off x="365760" y="1463040"/>
-            <a:ext cx="5304642" cy="4389120"/>
-          </a:xfrm>
-          <a:prstGeom prst="rect">
-            <a:avLst/>
-          </a:prstGeom>
-        </p:spPr>
-      </p:pic>
-      <p:sp>
-        <p:nvSpPr>
-          <p:cNvPr id="5" name="TextBox 4"/>
-          <p:cNvSpPr txBox="1"/>
-          <p:nvPr/>
-        </p:nvSpPr>
-        <p:spPr>
-          <a:xfrm>
-            <a:off x="7040880" y="1828800"/>
-            <a:ext cx="4846320" cy="4937760"/>
+            <a:off x="640080" y="1554480"/>
+            <a:ext cx="10972800" cy="4937760"/>
           </a:xfrm>
           <a:prstGeom prst="rect">
             <a:avLst/>
@@ -5355,7 +5106,7 @@
                 </a:solidFill>
                 <a:latin typeface="Malgun Gothic"/>
               </a:rPr>
-              <a:t>• 부산·울산·제주 상위 부상</a:t>
+              <a:t>• H2 ✅ 강하게 지지 — 변호사 많을수록 사건부담↓ (r=−0.85)</a:t>
             </a:r>
           </a:p>
           <a:p>
@@ -5371,7 +5122,7 @@
                 </a:solidFill>
                 <a:latin typeface="Malgun Gothic"/>
               </a:rPr>
-              <a:t>• 경기·인천은 중하위</a:t>
+              <a:t>• H4 ✅ 지지 — 변호사 3.4배↑에도 서울 집중 심화 + 법률구조 격차 확대</a:t>
             </a:r>
           </a:p>
           <a:p>
@@ -5387,7 +5138,23 @@
                 </a:solidFill>
                 <a:latin typeface="Malgun Gothic"/>
               </a:rPr>
-              <a:t>• 핵심: '수도권 우위'는</a:t>
+              <a:t>• H1 △ 방향만 일치 — 수도권 1인당 인구 적음, 단 표본 작아 비유의</a:t>
+            </a:r>
+          </a:p>
+          <a:p>
+            <a:pPr>
+              <a:spcAft>
+                <a:spcPts val="800"/>
+              </a:spcAft>
+            </a:pPr>
+            <a:r>
+              <a:rPr sz="2000">
+                <a:solidFill>
+                  <a:srgbClr val="222222"/>
+                </a:solidFill>
+                <a:latin typeface="Malgun Gothic"/>
+              </a:rPr>
+              <a:t>• H3 △ 약함 — 소득(GRDP)과 접근성 상관 약함</a:t>
             </a:r>
           </a:p>
           <a:p>
@@ -5403,41 +5170,7 @@
                 </a:solidFill>
                 <a:latin typeface="Malgun Gothic"/>
               </a:rPr>
-              <a:t>– 사실상 서울 단독 현상</a:t>
-            </a:r>
-          </a:p>
-        </p:txBody>
-      </p:sp>
-      <p:sp>
-        <p:nvSpPr>
-          <p:cNvPr id="6" name="TextBox 5"/>
-          <p:cNvSpPr txBox="1"/>
-          <p:nvPr/>
-        </p:nvSpPr>
-        <p:spPr>
-          <a:xfrm>
-            <a:off x="640080" y="5989320"/>
-            <a:ext cx="10881360" cy="640080"/>
-          </a:xfrm>
-          <a:prstGeom prst="rect">
-            <a:avLst/>
-          </a:prstGeom>
-          <a:noFill/>
-        </p:spPr>
-        <p:txBody>
-          <a:bodyPr wrap="square">
-            <a:spAutoFit/>
-          </a:bodyPr>
-          <a:lstStyle/>
-          <a:p>
-            <a:r>
-              <a:rPr sz="1400" i="1">
-                <a:solidFill>
-                  <a:srgbClr val="555555"/>
-                </a:solidFill>
-                <a:latin typeface="Malgun Gothic"/>
-              </a:rPr>
-              <a:t>📊 읽는 법 — 서울 제외·재정규화(서울 회색). 색 범위 재조정 → 지방 내부 격차가 보임.</a:t>
+              <a:t>– 표본 작음(권역 10~13개) → 통계 검정력 한계 명시</a:t>
             </a:r>
           </a:p>
         </p:txBody>
@@ -5489,7 +5222,7 @@
                 </a:solidFill>
                 <a:latin typeface="Malgun Gothic"/>
               </a:rPr>
-              <a:t>11. 가설 검정 종합</a:t>
+              <a:t>12. 결론 · 정책 시사점</a:t>
             </a:r>
           </a:p>
         </p:txBody>
@@ -5571,7 +5304,7 @@
                 </a:solidFill>
                 <a:latin typeface="Malgun Gothic"/>
               </a:rPr>
-              <a:t>• H2 ✅ 강하게 지지 — corr(A1,A2) = −0.84~−0.88 (p&lt;0.01)</a:t>
+              <a:t>• 변호사 자원의 서울 일극 집중이 격차의 핵심 동인</a:t>
             </a:r>
           </a:p>
           <a:p>
@@ -5587,7 +5320,7 @@
                 </a:solidFill>
                 <a:latin typeface="Malgun Gothic"/>
               </a:rPr>
-              <a:t>• H4 ✅ 지지 — 변호사 3.4배↑에도 서울 집중 심화 + 법률구조 격차 확대</a:t>
+              <a:t>• 인구 대비·사건부담이 접근성을 좌우 (인천=수도권인데 하위)</a:t>
             </a:r>
           </a:p>
           <a:p>
@@ -5603,7 +5336,7 @@
                 </a:solidFill>
                 <a:latin typeface="Malgun Gothic"/>
               </a:rPr>
-              <a:t>• H1 △ 방향만 일치 — 수도권 1인당 인구 4,039 &lt; 비수도권 5,250 (p=0.19)</a:t>
+              <a:t>• 양적 팽창만으로는 격차 해소 안 됨</a:t>
             </a:r>
           </a:p>
           <a:p>
@@ -5619,7 +5352,7 @@
                 </a:solidFill>
                 <a:latin typeface="Malgun Gothic"/>
               </a:rPr>
-              <a:t>• H3 △ 약함 — GRDP와 접근성 상관 비유의</a:t>
+              <a:t>• 정책 제언</a:t>
             </a:r>
           </a:p>
           <a:p>
@@ -5635,7 +5368,23 @@
                 </a:solidFill>
                 <a:latin typeface="Malgun Gothic"/>
               </a:rPr>
-              <a:t>– 표본 작음(권역 10~13개) → 검정력 한계 명시</a:t>
+              <a:t>– 지방 변호사 유치 인센티브 / 공단 자원 비수도권 우선 배치</a:t>
+            </a:r>
+          </a:p>
+          <a:p>
+            <a:pPr lvl="1">
+              <a:spcAft>
+                <a:spcPts val="800"/>
+              </a:spcAft>
+            </a:pPr>
+            <a:r>
+              <a:rPr sz="1700">
+                <a:solidFill>
+                  <a:srgbClr val="222222"/>
+                </a:solidFill>
+                <a:latin typeface="Malgun Gothic"/>
+              </a:rPr>
+              <a:t>– 사건부담 높은 권역 인력 보강 / 로스쿨 정원·배치 연계</a:t>
             </a:r>
           </a:p>
         </p:txBody>
@@ -5687,7 +5436,7 @@
                 </a:solidFill>
                 <a:latin typeface="Malgun Gothic"/>
               </a:rPr>
-              <a:t>12. 결론 · 정책 시사점</a:t>
+              <a:t>13. 한계와 향후 과제</a:t>
             </a:r>
           </a:p>
         </p:txBody>
@@ -5769,7 +5518,7 @@
                 </a:solidFill>
                 <a:latin typeface="Malgun Gothic"/>
               </a:rPr>
-              <a:t>• 변호사 자원의 서울 일극 집중이 격차의 핵심 동인</a:t>
+              <a:t>• 변호사 2시점(2009·현재) — 연속 시계열은 변호사백서 PDF 보강 필요</a:t>
             </a:r>
           </a:p>
           <a:p>
@@ -5785,7 +5534,7 @@
                 </a:solidFill>
                 <a:latin typeface="Malgun Gothic"/>
               </a:rPr>
-              <a:t>• 인구 대비·사건부담이 접근성을 좌우 (인천=수도권인데 하위)</a:t>
+              <a:t>• 표본이 작아 통계적 검정력 제한</a:t>
             </a:r>
           </a:p>
           <a:p>
@@ -5801,7 +5550,7 @@
                 </a:solidFill>
                 <a:latin typeface="Malgun Gothic"/>
               </a:rPr>
-              <a:t>• 양적 팽창만으로는 격차 해소 안 됨</a:t>
+              <a:t>• A3 공단 10도단위 → region13에선 인구비 근사배분</a:t>
             </a:r>
           </a:p>
           <a:p>
@@ -5817,39 +5566,7 @@
                 </a:solidFill>
                 <a:latin typeface="Malgun Gothic"/>
               </a:rPr>
-              <a:t>• 정책 제언</a:t>
-            </a:r>
-          </a:p>
-          <a:p>
-            <a:pPr lvl="1">
-              <a:spcAft>
-                <a:spcPts val="800"/>
-              </a:spcAft>
-            </a:pPr>
-            <a:r>
-              <a:rPr sz="1700">
-                <a:solidFill>
-                  <a:srgbClr val="222222"/>
-                </a:solidFill>
-                <a:latin typeface="Malgun Gothic"/>
-              </a:rPr>
-              <a:t>– 지방 변호사 유치 인센티브 / 공단 자원 비수도권 우선 배치</a:t>
-            </a:r>
-          </a:p>
-          <a:p>
-            <a:pPr lvl="1">
-              <a:spcAft>
-                <a:spcPts val="800"/>
-              </a:spcAft>
-            </a:pPr>
-            <a:r>
-              <a:rPr sz="1700">
-                <a:solidFill>
-                  <a:srgbClr val="222222"/>
-                </a:solidFill>
-                <a:latin typeface="Malgun Gothic"/>
-              </a:rPr>
-              <a:t>– 사건부담 높은 권역 인력 보강 / 로스쿨 정원·배치 연계</a:t>
+              <a:t>• 향후: 코로플레스 대시보드 고도화, 시계열 LLAI</a:t>
             </a:r>
           </a:p>
         </p:txBody>
@@ -5901,7 +5618,7 @@
                 </a:solidFill>
                 <a:latin typeface="Malgun Gothic"/>
               </a:rPr>
-              <a:t>13. 한계와 향후 과제</a:t>
+              <a:t>연구 범위 · 선행연구 차용 여부</a:t>
             </a:r>
           </a:p>
         </p:txBody>
@@ -5977,13 +5694,13 @@
               </a:spcAft>
             </a:pPr>
             <a:r>
-              <a:rPr sz="2000">
+              <a:rPr sz="1900">
                 <a:solidFill>
                   <a:srgbClr val="222222"/>
                 </a:solidFill>
                 <a:latin typeface="Malgun Gothic"/>
               </a:rPr>
-              <a:t>• 변호사 2시점(2009·현재) — 연속 시계열은 변호사백서 PDF 보강 필요</a:t>
+              <a:t>• 본 분석은 26-1 빅데이터컴퓨팅 기말 프로젝트로 직접 수행</a:t>
             </a:r>
           </a:p>
           <a:p>
@@ -5993,13 +5710,13 @@
               </a:spcAft>
             </a:pPr>
             <a:r>
-              <a:rPr sz="2000">
+              <a:rPr sz="1900">
                 <a:solidFill>
                   <a:srgbClr val="222222"/>
                 </a:solidFill>
                 <a:latin typeface="Malgun Gothic"/>
               </a:rPr>
-              <a:t>• 표본이 작아 통계적 검정력 제한</a:t>
+              <a:t>• 선행연구(타인) 차용: 없음 — 설계·수집·정제·분석·시각화 전부 자체 개발</a:t>
             </a:r>
           </a:p>
           <a:p>
@@ -6009,13 +5726,13 @@
               </a:spcAft>
             </a:pPr>
             <a:r>
-              <a:rPr sz="2000">
+              <a:rPr sz="1900">
                 <a:solidFill>
                   <a:srgbClr val="222222"/>
                 </a:solidFill>
                 <a:latin typeface="Malgun Gothic"/>
               </a:rPr>
-              <a:t>• A3 공단 10도단위 → region13에선 인구비 근사배분</a:t>
+              <a:t>• 본인 이전 연구 차용: 없음 — 방법론 골격은 본 과목 제안서에서 설계</a:t>
             </a:r>
           </a:p>
           <a:p>
@@ -6025,13 +5742,45 @@
               </a:spcAft>
             </a:pPr>
             <a:r>
-              <a:rPr sz="2000">
+              <a:rPr sz="1900">
                 <a:solidFill>
                   <a:srgbClr val="222222"/>
                 </a:solidFill>
                 <a:latin typeface="Malgun Gothic"/>
               </a:rPr>
-              <a:t>• 향후: 코로플레스 대시보드 고도화, 시계열 LLAI</a:t>
+              <a:t>• 외부 차용은 '공개 raw data·경계 파일'뿐, 모두 출처 명시</a:t>
+            </a:r>
+          </a:p>
+          <a:p>
+            <a:pPr lvl="1">
+              <a:spcAft>
+                <a:spcPts val="800"/>
+              </a:spcAft>
+            </a:pPr>
+            <a:r>
+              <a:rPr sz="1600">
+                <a:solidFill>
+                  <a:srgbClr val="222222"/>
+                </a:solidFill>
+                <a:latin typeface="Malgun Gothic"/>
+              </a:rPr>
+              <a:t>– KOSIS·사법연감·공단·변협 / GeoJSON / 2009 변호사분포(법률저널)</a:t>
+            </a:r>
+          </a:p>
+          <a:p>
+            <a:pPr>
+              <a:spcAft>
+                <a:spcPts val="800"/>
+              </a:spcAft>
+            </a:pPr>
+            <a:r>
+              <a:rPr sz="1900">
+                <a:solidFill>
+                  <a:srgbClr val="222222"/>
+                </a:solidFill>
+                <a:latin typeface="Malgun Gothic"/>
+              </a:rPr>
+              <a:t>• → 데이터는 차용, 수집·정제·지수개발·분석·해석은 100% 본 프로젝트</a:t>
             </a:r>
           </a:p>
         </p:txBody>
@@ -6083,7 +5832,7 @@
                 </a:solidFill>
                 <a:latin typeface="Malgun Gothic"/>
               </a:rPr>
-              <a:t>연구 범위 · 선행연구 차용 여부</a:t>
+              <a:t>핵심 요약 — 한 눈에 보기</a:t>
             </a:r>
           </a:p>
         </p:txBody>
@@ -6131,157 +5880,250 @@
           </a:p>
         </p:txBody>
       </p:sp>
-      <p:sp>
-        <p:nvSpPr>
-          <p:cNvPr id="4" name="TextBox 3"/>
-          <p:cNvSpPr txBox="1"/>
+      <p:graphicFrame>
+        <p:nvGraphicFramePr>
+          <p:cNvPr id="4" name="Table 3"/>
+          <p:cNvGraphicFramePr>
+            <a:graphicFrameLocks noGrp="1"/>
+          </p:cNvGraphicFramePr>
           <p:nvPr/>
-        </p:nvSpPr>
-        <p:spPr>
-          <a:xfrm>
-            <a:off x="640080" y="1554480"/>
-            <a:ext cx="10972800" cy="4937760"/>
-          </a:xfrm>
-          <a:prstGeom prst="rect">
-            <a:avLst/>
-          </a:prstGeom>
-          <a:noFill/>
-        </p:spPr>
-        <p:txBody>
-          <a:bodyPr wrap="square">
-            <a:spAutoFit/>
-          </a:bodyPr>
-          <a:lstStyle/>
-          <a:p>
-            <a:pPr>
-              <a:spcAft>
-                <a:spcPts val="800"/>
-              </a:spcAft>
-            </a:pPr>
-            <a:r>
-              <a:rPr sz="1900">
-                <a:solidFill>
-                  <a:srgbClr val="222222"/>
-                </a:solidFill>
-                <a:latin typeface="Malgun Gothic"/>
-              </a:rPr>
-              <a:t>• 본 분석은 26-1 빅데이터컴퓨팅 기말 프로젝트로 직접 수행</a:t>
-            </a:r>
-          </a:p>
-          <a:p>
-            <a:pPr>
-              <a:spcAft>
-                <a:spcPts val="800"/>
-              </a:spcAft>
-            </a:pPr>
-            <a:r>
-              <a:rPr sz="1900">
-                <a:solidFill>
-                  <a:srgbClr val="222222"/>
-                </a:solidFill>
-                <a:latin typeface="Malgun Gothic"/>
-              </a:rPr>
-              <a:t>• 선행연구(타인) 차용: 없음</a:t>
-            </a:r>
-          </a:p>
-          <a:p>
-            <a:pPr lvl="1">
-              <a:spcAft>
-                <a:spcPts val="800"/>
-              </a:spcAft>
-            </a:pPr>
-            <a:r>
-              <a:rPr sz="1600">
-                <a:solidFill>
-                  <a:srgbClr val="222222"/>
-                </a:solidFill>
-                <a:latin typeface="Malgun Gothic"/>
-              </a:rPr>
-              <a:t>– LLAI 설계·수집·정제·분석·시각화 코드 전부 자체 개발</a:t>
-            </a:r>
-          </a:p>
-          <a:p>
-            <a:pPr>
-              <a:spcAft>
-                <a:spcPts val="800"/>
-              </a:spcAft>
-            </a:pPr>
-            <a:r>
-              <a:rPr sz="1900">
-                <a:solidFill>
-                  <a:srgbClr val="222222"/>
-                </a:solidFill>
-                <a:latin typeface="Malgun Gothic"/>
-              </a:rPr>
-              <a:t>• 본인 이전 연구 차용: 없음</a:t>
-            </a:r>
-          </a:p>
-          <a:p>
-            <a:pPr lvl="1">
-              <a:spcAft>
-                <a:spcPts val="800"/>
-              </a:spcAft>
-            </a:pPr>
-            <a:r>
-              <a:rPr sz="1600">
-                <a:solidFill>
-                  <a:srgbClr val="222222"/>
-                </a:solidFill>
-                <a:latin typeface="Malgun Gothic"/>
-              </a:rPr>
-              <a:t>– 주제·방법론 골격은 본 과목 제안서에서 직접 설계 → 기말에 구현</a:t>
-            </a:r>
-          </a:p>
-          <a:p>
-            <a:pPr>
-              <a:spcAft>
-                <a:spcPts val="800"/>
-              </a:spcAft>
-            </a:pPr>
-            <a:r>
-              <a:rPr sz="1900">
-                <a:solidFill>
-                  <a:srgbClr val="222222"/>
-                </a:solidFill>
-                <a:latin typeface="Malgun Gothic"/>
-              </a:rPr>
-              <a:t>• 외부 차용은 '공개 raw data·경계 파일'뿐 (모두 출처 명시)</a:t>
-            </a:r>
-          </a:p>
-          <a:p>
-            <a:pPr lvl="1">
-              <a:spcAft>
-                <a:spcPts val="800"/>
-              </a:spcAft>
-            </a:pPr>
-            <a:r>
-              <a:rPr sz="1600">
-                <a:solidFill>
-                  <a:srgbClr val="222222"/>
-                </a:solidFill>
-                <a:latin typeface="Malgun Gothic"/>
-              </a:rPr>
-              <a:t>– KOSIS·사법연감·공단·변협 / GeoJSON / 2009 변호사분포(법률저널)</a:t>
-            </a:r>
-          </a:p>
-          <a:p>
-            <a:pPr>
-              <a:spcAft>
-                <a:spcPts val="800"/>
-              </a:spcAft>
-            </a:pPr>
-            <a:r>
-              <a:rPr sz="1900">
-                <a:solidFill>
-                  <a:srgbClr val="222222"/>
-                </a:solidFill>
-                <a:latin typeface="Malgun Gothic"/>
-              </a:rPr>
-              <a:t>• → 데이터는 차용, 수집·정제·지수개발·분석·해석은 100% 본 프로젝트</a:t>
-            </a:r>
-          </a:p>
-        </p:txBody>
-      </p:sp>
+        </p:nvGraphicFramePr>
+        <p:xfrm>
+          <a:off x="640080" y="1645920"/>
+          <a:ext cx="10881360" cy="4206240"/>
+        </p:xfrm>
+        <a:graphic>
+          <a:graphicData uri="http://schemas.openxmlformats.org/drawingml/2006/table">
+            <a:tbl>
+              <a:tblPr firstRow="1" bandRow="1">
+                <a:tableStyleId>{5C22544A-7EE6-4342-B048-85BDC9FD1C3A}</a:tableStyleId>
+              </a:tblPr>
+              <a:tblGrid>
+                <a:gridCol w="1645920"/>
+                <a:gridCol w="9235440"/>
+              </a:tblGrid>
+              <a:tr h="701040">
+                <a:tc>
+                  <a:txBody>
+                    <a:bodyPr/>
+                    <a:lstStyle/>
+                    <a:p>
+                      <a:pPr algn="ctr"/>
+                      <a:r>
+                        <a:rPr sz="1500" b="1">
+                          <a:solidFill>
+                            <a:srgbClr val="FFFFFF"/>
+                          </a:solidFill>
+                          <a:latin typeface="Malgun Gothic"/>
+                        </a:rPr>
+                        <a:t>항목</a:t>
+                      </a:r>
+                    </a:p>
+                  </a:txBody>
+                  <a:tcPr anchor="ctr">
+                    <a:solidFill>
+                      <a:srgbClr val="1F3A5F"/>
+                    </a:solidFill>
+                  </a:tcPr>
+                </a:tc>
+                <a:tc>
+                  <a:txBody>
+                    <a:bodyPr/>
+                    <a:lstStyle/>
+                    <a:p>
+                      <a:pPr algn="l"/>
+                      <a:r>
+                        <a:rPr sz="1500" b="1">
+                          <a:solidFill>
+                            <a:srgbClr val="FFFFFF"/>
+                          </a:solidFill>
+                          <a:latin typeface="Malgun Gothic"/>
+                        </a:rPr>
+                        <a:t>내용</a:t>
+                      </a:r>
+                    </a:p>
+                  </a:txBody>
+                  <a:tcPr anchor="ctr">
+                    <a:solidFill>
+                      <a:srgbClr val="1F3A5F"/>
+                    </a:solidFill>
+                  </a:tcPr>
+                </a:tc>
+              </a:tr>
+              <a:tr h="701040">
+                <a:tc>
+                  <a:txBody>
+                    <a:bodyPr/>
+                    <a:lstStyle/>
+                    <a:p>
+                      <a:pPr algn="ctr"/>
+                      <a:r>
+                        <a:rPr sz="1500">
+                          <a:latin typeface="Malgun Gothic"/>
+                        </a:rPr>
+                        <a:t>문제</a:t>
+                      </a:r>
+                    </a:p>
+                  </a:txBody>
+                  <a:tcPr anchor="ctr"/>
+                </a:tc>
+                <a:tc>
+                  <a:txBody>
+                    <a:bodyPr/>
+                    <a:lstStyle/>
+                    <a:p>
+                      <a:pPr algn="l"/>
+                      <a:r>
+                        <a:rPr sz="1500">
+                          <a:latin typeface="Malgun Gothic"/>
+                        </a:rPr>
+                        <a:t>변호사·법원·법률구조 자원의 지역별 접근성 불균형 정량화</a:t>
+                      </a:r>
+                    </a:p>
+                  </a:txBody>
+                  <a:tcPr anchor="ctr"/>
+                </a:tc>
+              </a:tr>
+              <a:tr h="701040">
+                <a:tc>
+                  <a:txBody>
+                    <a:bodyPr/>
+                    <a:lstStyle/>
+                    <a:p>
+                      <a:pPr algn="ctr"/>
+                      <a:r>
+                        <a:rPr sz="1500">
+                          <a:latin typeface="Malgun Gothic"/>
+                        </a:rPr>
+                        <a:t>방법</a:t>
+                      </a:r>
+                    </a:p>
+                  </a:txBody>
+                  <a:tcPr anchor="ctr"/>
+                </a:tc>
+                <a:tc>
+                  <a:txBody>
+                    <a:bodyPr/>
+                    <a:lstStyle/>
+                    <a:p>
+                      <a:pPr algn="l"/>
+                      <a:r>
+                        <a:rPr sz="1500">
+                          <a:latin typeface="Malgun Gothic"/>
+                        </a:rPr>
+                        <a:t>3개 차원(A1 변호사·A2 사건부담·A3 취약계층) → 단일 지수 LLAI(0~100)</a:t>
+                      </a:r>
+                    </a:p>
+                  </a:txBody>
+                  <a:tcPr anchor="ctr"/>
+                </a:tc>
+              </a:tr>
+              <a:tr h="701040">
+                <a:tc>
+                  <a:txBody>
+                    <a:bodyPr/>
+                    <a:lstStyle/>
+                    <a:p>
+                      <a:pPr algn="ctr"/>
+                      <a:r>
+                        <a:rPr sz="1500">
+                          <a:latin typeface="Malgun Gothic"/>
+                        </a:rPr>
+                        <a:t>데이터</a:t>
+                      </a:r>
+                    </a:p>
+                  </a:txBody>
+                  <a:tcPr anchor="ctr"/>
+                </a:tc>
+                <a:tc>
+                  <a:txBody>
+                    <a:bodyPr/>
+                    <a:lstStyle/>
+                    <a:p>
+                      <a:pPr algn="l"/>
+                      <a:r>
+                        <a:rPr sz="1500">
+                          <a:latin typeface="Malgun Gothic"/>
+                        </a:rPr>
+                        <a:t>변협·사법연감·공단·KOSIS / 13권역·10도단위 / 기준 2024</a:t>
+                      </a:r>
+                    </a:p>
+                  </a:txBody>
+                  <a:tcPr anchor="ctr"/>
+                </a:tc>
+              </a:tr>
+              <a:tr h="701040">
+                <a:tc>
+                  <a:txBody>
+                    <a:bodyPr/>
+                    <a:lstStyle/>
+                    <a:p>
+                      <a:pPr algn="ctr"/>
+                      <a:r>
+                        <a:rPr sz="1500">
+                          <a:latin typeface="Malgun Gothic"/>
+                        </a:rPr>
+                        <a:t>핵심 발견</a:t>
+                      </a:r>
+                    </a:p>
+                  </a:txBody>
+                  <a:tcPr anchor="ctr"/>
+                </a:tc>
+                <a:tc>
+                  <a:txBody>
+                    <a:bodyPr/>
+                    <a:lstStyle/>
+                    <a:p>
+                      <a:pPr algn="l"/>
+                      <a:r>
+                        <a:rPr sz="1500">
+                          <a:latin typeface="Malgun Gothic"/>
+                        </a:rPr>
+                        <a:t>① 서울 일극(91 vs 2~24) ② 변호사↑→부담↓(r=−0.85) ③ 수도권우위=서울단독 ④ 변호사 3.4배↑에도 서울집중 71%→76%</a:t>
+                      </a:r>
+                    </a:p>
+                  </a:txBody>
+                  <a:tcPr anchor="ctr"/>
+                </a:tc>
+              </a:tr>
+              <a:tr h="701040">
+                <a:tc>
+                  <a:txBody>
+                    <a:bodyPr/>
+                    <a:lstStyle/>
+                    <a:p>
+                      <a:pPr algn="ctr"/>
+                      <a:r>
+                        <a:rPr sz="1500">
+                          <a:latin typeface="Malgun Gothic"/>
+                        </a:rPr>
+                        <a:t>결론</a:t>
+                      </a:r>
+                    </a:p>
+                  </a:txBody>
+                  <a:tcPr anchor="ctr"/>
+                </a:tc>
+                <a:tc>
+                  <a:txBody>
+                    <a:bodyPr/>
+                    <a:lstStyle/>
+                    <a:p>
+                      <a:pPr algn="l"/>
+                      <a:r>
+                        <a:rPr sz="1500">
+                          <a:latin typeface="Malgun Gothic"/>
+                        </a:rPr>
+                        <a:t>인구 대비·사건부담이 접근성 좌우 / 양적 팽창만으론 격차 해소 안 됨</a:t>
+                      </a:r>
+                    </a:p>
+                  </a:txBody>
+                  <a:tcPr anchor="ctr"/>
+                </a:tc>
+              </a:tr>
+            </a:tbl>
+          </a:graphicData>
+        </a:graphic>
+      </p:graphicFrame>
     </p:spTree>
   </p:cSld>
   <p:clrMapOvr>
@@ -6386,8 +6228,8 @@
           <p:nvPr/>
         </p:nvGraphicFramePr>
         <p:xfrm>
-          <a:off x="2560320" y="1554480"/>
-          <a:ext cx="7040880" cy="4846320"/>
+          <a:off x="3017520" y="1554480"/>
+          <a:ext cx="6126480" cy="4846320"/>
         </p:xfrm>
         <a:graphic>
           <a:graphicData uri="http://schemas.openxmlformats.org/drawingml/2006/table">
@@ -6396,11 +6238,11 @@
                 <a:tableStyleId>{5C22544A-7EE6-4342-B048-85BDC9FD1C3A}</a:tableStyleId>
               </a:tblPr>
               <a:tblGrid>
-                <a:gridCol w="1408176"/>
-                <a:gridCol w="1408176"/>
-                <a:gridCol w="1408176"/>
-                <a:gridCol w="1408176"/>
-                <a:gridCol w="1408176"/>
+                <a:gridCol w="1225296"/>
+                <a:gridCol w="1225296"/>
+                <a:gridCol w="1225296"/>
+                <a:gridCol w="1225296"/>
+                <a:gridCol w="1225296"/>
               </a:tblGrid>
               <a:tr h="346165">
                 <a:tc>
@@ -6508,7 +6350,7 @@
                           </a:solidFill>
                           <a:latin typeface="Malgun Gothic"/>
                         </a:rPr>
-                        <a:t>LLAI(엔트로피)</a:t>
+                        <a:t>LLAI</a:t>
                       </a:r>
                     </a:p>
                   </a:txBody>
@@ -7920,7 +7762,7 @@
                 <a:gridCol w="2377440"/>
                 <a:gridCol w="8686800"/>
               </a:tblGrid>
-              <a:tr h="448887">
+              <a:tr h="493776">
                 <a:tc>
                   <a:txBody>
                     <a:bodyPr/>
@@ -7949,7 +7791,7 @@
                     <a:bodyPr/>
                     <a:lstStyle/>
                     <a:p>
-                      <a:pPr algn="ctr"/>
+                      <a:pPr algn="l"/>
                       <a:r>
                         <a:rPr sz="1100" b="1">
                           <a:solidFill>
@@ -7968,7 +7810,7 @@
                   </a:tcPr>
                 </a:tc>
               </a:tr>
-              <a:tr h="448887">
+              <a:tr h="493776">
                 <a:tc>
                   <a:txBody>
                     <a:bodyPr/>
@@ -8002,7 +7844,7 @@
                   <a:tcPr anchor="ctr"/>
                 </a:tc>
               </a:tr>
-              <a:tr h="448887">
+              <a:tr h="493776">
                 <a:tc>
                   <a:txBody>
                     <a:bodyPr/>
@@ -8036,7 +7878,7 @@
                   <a:tcPr anchor="ctr"/>
                 </a:tc>
               </a:tr>
-              <a:tr h="448887">
+              <a:tr h="493776">
                 <a:tc>
                   <a:txBody>
                     <a:bodyPr/>
@@ -8070,7 +7912,7 @@
                   <a:tcPr anchor="ctr"/>
                 </a:tc>
               </a:tr>
-              <a:tr h="448887">
+              <a:tr h="493776">
                 <a:tc>
                   <a:txBody>
                     <a:bodyPr/>
@@ -8104,7 +7946,7 @@
                   <a:tcPr anchor="ctr"/>
                 </a:tc>
               </a:tr>
-              <a:tr h="448887">
+              <a:tr h="493776">
                 <a:tc>
                   <a:txBody>
                     <a:bodyPr/>
@@ -8138,7 +7980,7 @@
                   <a:tcPr anchor="ctr"/>
                 </a:tc>
               </a:tr>
-              <a:tr h="448887">
+              <a:tr h="493776">
                 <a:tc>
                   <a:txBody>
                     <a:bodyPr/>
@@ -8149,7 +7991,7 @@
                         <a:rPr sz="1100">
                           <a:latin typeface="Malgun Gothic"/>
                         </a:rPr>
-                        <a:t>1인당 GRDP</a:t>
+                        <a:t>엔트로피 가중치</a:t>
                       </a:r>
                     </a:p>
                   </a:txBody>
@@ -8165,14 +8007,14 @@
                         <a:rPr sz="1100">
                           <a:latin typeface="Malgun Gothic"/>
                         </a:rPr>
-                        <a:t>지역내총생산 ÷ 인구. 지역 소득수준(H3 변수)</a:t>
+                        <a:t>지역 간 차이(정보량)가 큰 지표에 큰 가중치를 주는 객관적 가중법</a:t>
                       </a:r>
                     </a:p>
                   </a:txBody>
                   <a:tcPr anchor="ctr"/>
                 </a:tc>
               </a:tr>
-              <a:tr h="448887">
+              <a:tr h="493776">
                 <a:tc>
                   <a:txBody>
                     <a:bodyPr/>
@@ -8183,7 +8025,7 @@
                         <a:rPr sz="1100">
                           <a:latin typeface="Malgun Gothic"/>
                         </a:rPr>
-                        <a:t>엔트로피 가중치</a:t>
+                        <a:t>HHI(허핀달지수)</a:t>
                       </a:r>
                     </a:p>
                   </a:txBody>
@@ -8199,14 +8041,14 @@
                         <a:rPr sz="1100">
                           <a:latin typeface="Malgun Gothic"/>
                         </a:rPr>
-                        <a:t>지역 간 차이(정보량)가 큰 지표에 큰 가중치를 주는 객관적 가중법</a:t>
+                        <a:t>점유율 제곱의 합(0~1). 클수록 특정 지역 집중 심화 = '쏠림'</a:t>
                       </a:r>
                     </a:p>
                   </a:txBody>
                   <a:tcPr anchor="ctr"/>
                 </a:tc>
               </a:tr>
-              <a:tr h="448887">
+              <a:tr h="493776">
                 <a:tc>
                   <a:txBody>
                     <a:bodyPr/>
@@ -8217,7 +8059,7 @@
                         <a:rPr sz="1100">
                           <a:latin typeface="Malgun Gothic"/>
                         </a:rPr>
-                        <a:t>HHI(허핀달지수)</a:t>
+                        <a:t>변동계수(CV)</a:t>
                       </a:r>
                     </a:p>
                   </a:txBody>
@@ -8233,14 +8075,14 @@
                         <a:rPr sz="1100">
                           <a:latin typeface="Malgun Gothic"/>
                         </a:rPr>
-                        <a:t>점유율 제곱의 합(0~1). 클수록 특정 지역 집중 심화</a:t>
+                        <a:t>표준편차 ÷ 평균. 단위 무관한 상대적 격차 크기</a:t>
                       </a:r>
                     </a:p>
                   </a:txBody>
                   <a:tcPr anchor="ctr"/>
                 </a:tc>
               </a:tr>
-              <a:tr h="448887">
+              <a:tr h="493776">
                 <a:tc>
                   <a:txBody>
                     <a:bodyPr/>
@@ -8251,7 +8093,7 @@
                         <a:rPr sz="1100">
                           <a:latin typeface="Malgun Gothic"/>
                         </a:rPr>
-                        <a:t>변동계수(CV)</a:t>
+                        <a:t>K-means / Silhouette</a:t>
                       </a:r>
                     </a:p>
                   </a:txBody>
@@ -8267,41 +8109,7 @@
                         <a:rPr sz="1100">
                           <a:latin typeface="Malgun Gothic"/>
                         </a:rPr>
-                        <a:t>표준편차 ÷ 평균. 단위 무관한 상대적 격차 크기</a:t>
-                      </a:r>
-                    </a:p>
-                  </a:txBody>
-                  <a:tcPr anchor="ctr"/>
-                </a:tc>
-              </a:tr>
-              <a:tr h="448890">
-                <a:tc>
-                  <a:txBody>
-                    <a:bodyPr/>
-                    <a:lstStyle/>
-                    <a:p>
-                      <a:pPr algn="ctr"/>
-                      <a:r>
-                        <a:rPr sz="1100">
-                          <a:latin typeface="Malgun Gothic"/>
-                        </a:rPr>
-                        <a:t>K-means / Silhouette</a:t>
-                      </a:r>
-                    </a:p>
-                  </a:txBody>
-                  <a:tcPr anchor="ctr"/>
-                </a:tc>
-                <a:tc>
-                  <a:txBody>
-                    <a:bodyPr/>
-                    <a:lstStyle/>
-                    <a:p>
-                      <a:pPr algn="l"/>
-                      <a:r>
-                        <a:rPr sz="1100">
-                          <a:latin typeface="Malgun Gothic"/>
-                        </a:rPr>
-                        <a:t>거리 기반 군집화 / 군집 분리도(최적 K 결정)</a:t>
+                        <a:t>비슷한 것끼리 묶기 / 잘 묶였는지 점수(묶음 수 결정)</a:t>
                       </a:r>
                     </a:p>
                   </a:txBody>
@@ -8422,7 +8230,7 @@
                 </a:solidFill>
                 <a:latin typeface="Malgun Gothic"/>
               </a:rPr>
-              <a:t>핵심 요약 — 한 눈에 보기</a:t>
+              <a:t>1. 왜 이 문제인가</a:t>
             </a:r>
           </a:p>
         </p:txBody>
@@ -8470,250 +8278,93 @@
           </a:p>
         </p:txBody>
       </p:sp>
-      <p:graphicFrame>
-        <p:nvGraphicFramePr>
-          <p:cNvPr id="4" name="Table 3"/>
-          <p:cNvGraphicFramePr>
-            <a:graphicFrameLocks noGrp="1"/>
-          </p:cNvGraphicFramePr>
+      <p:sp>
+        <p:nvSpPr>
+          <p:cNvPr id="4" name="TextBox 3"/>
+          <p:cNvSpPr txBox="1"/>
           <p:nvPr/>
-        </p:nvGraphicFramePr>
-        <p:xfrm>
-          <a:off x="640080" y="1645920"/>
-          <a:ext cx="10881360" cy="4206240"/>
-        </p:xfrm>
-        <a:graphic>
-          <a:graphicData uri="http://schemas.openxmlformats.org/drawingml/2006/table">
-            <a:tbl>
-              <a:tblPr firstRow="1" bandRow="1">
-                <a:tableStyleId>{5C22544A-7EE6-4342-B048-85BDC9FD1C3A}</a:tableStyleId>
-              </a:tblPr>
-              <a:tblGrid>
-                <a:gridCol w="1645920"/>
-                <a:gridCol w="9235440"/>
-              </a:tblGrid>
-              <a:tr h="701040">
-                <a:tc>
-                  <a:txBody>
-                    <a:bodyPr/>
-                    <a:lstStyle/>
-                    <a:p>
-                      <a:pPr algn="ctr"/>
-                      <a:r>
-                        <a:rPr sz="1500" b="1">
-                          <a:solidFill>
-                            <a:srgbClr val="FFFFFF"/>
-                          </a:solidFill>
-                          <a:latin typeface="Malgun Gothic"/>
-                        </a:rPr>
-                        <a:t>항목</a:t>
-                      </a:r>
-                    </a:p>
-                  </a:txBody>
-                  <a:tcPr anchor="ctr">
-                    <a:solidFill>
-                      <a:srgbClr val="1F3A5F"/>
-                    </a:solidFill>
-                  </a:tcPr>
-                </a:tc>
-                <a:tc>
-                  <a:txBody>
-                    <a:bodyPr/>
-                    <a:lstStyle/>
-                    <a:p>
-                      <a:pPr algn="ctr"/>
-                      <a:r>
-                        <a:rPr sz="1500" b="1">
-                          <a:solidFill>
-                            <a:srgbClr val="FFFFFF"/>
-                          </a:solidFill>
-                          <a:latin typeface="Malgun Gothic"/>
-                        </a:rPr>
-                        <a:t>내용</a:t>
-                      </a:r>
-                    </a:p>
-                  </a:txBody>
-                  <a:tcPr anchor="ctr">
-                    <a:solidFill>
-                      <a:srgbClr val="1F3A5F"/>
-                    </a:solidFill>
-                  </a:tcPr>
-                </a:tc>
-              </a:tr>
-              <a:tr h="701040">
-                <a:tc>
-                  <a:txBody>
-                    <a:bodyPr/>
-                    <a:lstStyle/>
-                    <a:p>
-                      <a:pPr algn="ctr"/>
-                      <a:r>
-                        <a:rPr sz="1500">
-                          <a:latin typeface="Malgun Gothic"/>
-                        </a:rPr>
-                        <a:t>문제</a:t>
-                      </a:r>
-                    </a:p>
-                  </a:txBody>
-                  <a:tcPr anchor="ctr"/>
-                </a:tc>
-                <a:tc>
-                  <a:txBody>
-                    <a:bodyPr/>
-                    <a:lstStyle/>
-                    <a:p>
-                      <a:pPr algn="l"/>
-                      <a:r>
-                        <a:rPr sz="1500">
-                          <a:latin typeface="Malgun Gothic"/>
-                        </a:rPr>
-                        <a:t>변호사·법원·법률구조 자원의 지역별 접근성 불균형 정량화</a:t>
-                      </a:r>
-                    </a:p>
-                  </a:txBody>
-                  <a:tcPr anchor="ctr"/>
-                </a:tc>
-              </a:tr>
-              <a:tr h="701040">
-                <a:tc>
-                  <a:txBody>
-                    <a:bodyPr/>
-                    <a:lstStyle/>
-                    <a:p>
-                      <a:pPr algn="ctr"/>
-                      <a:r>
-                        <a:rPr sz="1500">
-                          <a:latin typeface="Malgun Gothic"/>
-                        </a:rPr>
-                        <a:t>방법</a:t>
-                      </a:r>
-                    </a:p>
-                  </a:txBody>
-                  <a:tcPr anchor="ctr"/>
-                </a:tc>
-                <a:tc>
-                  <a:txBody>
-                    <a:bodyPr/>
-                    <a:lstStyle/>
-                    <a:p>
-                      <a:pPr algn="l"/>
-                      <a:r>
-                        <a:rPr sz="1500">
-                          <a:latin typeface="Malgun Gothic"/>
-                        </a:rPr>
-                        <a:t>3개 차원(A1 변호사·A2 사건부담·A3 취약계층) → 단일 지수 LLAI(0~100)</a:t>
-                      </a:r>
-                    </a:p>
-                  </a:txBody>
-                  <a:tcPr anchor="ctr"/>
-                </a:tc>
-              </a:tr>
-              <a:tr h="701040">
-                <a:tc>
-                  <a:txBody>
-                    <a:bodyPr/>
-                    <a:lstStyle/>
-                    <a:p>
-                      <a:pPr algn="ctr"/>
-                      <a:r>
-                        <a:rPr sz="1500">
-                          <a:latin typeface="Malgun Gothic"/>
-                        </a:rPr>
-                        <a:t>데이터</a:t>
-                      </a:r>
-                    </a:p>
-                  </a:txBody>
-                  <a:tcPr anchor="ctr"/>
-                </a:tc>
-                <a:tc>
-                  <a:txBody>
-                    <a:bodyPr/>
-                    <a:lstStyle/>
-                    <a:p>
-                      <a:pPr algn="l"/>
-                      <a:r>
-                        <a:rPr sz="1500">
-                          <a:latin typeface="Malgun Gothic"/>
-                        </a:rPr>
-                        <a:t>변협·사법연감·공단·KOSIS / 13권역·10도단위 / 기준 2024</a:t>
-                      </a:r>
-                    </a:p>
-                  </a:txBody>
-                  <a:tcPr anchor="ctr"/>
-                </a:tc>
-              </a:tr>
-              <a:tr h="701040">
-                <a:tc>
-                  <a:txBody>
-                    <a:bodyPr/>
-                    <a:lstStyle/>
-                    <a:p>
-                      <a:pPr algn="ctr"/>
-                      <a:r>
-                        <a:rPr sz="1500">
-                          <a:latin typeface="Malgun Gothic"/>
-                        </a:rPr>
-                        <a:t>핵심 발견</a:t>
-                      </a:r>
-                    </a:p>
-                  </a:txBody>
-                  <a:tcPr anchor="ctr"/>
-                </a:tc>
-                <a:tc>
-                  <a:txBody>
-                    <a:bodyPr/>
-                    <a:lstStyle/>
-                    <a:p>
-                      <a:pPr algn="l"/>
-                      <a:r>
-                        <a:rPr sz="1500">
-                          <a:latin typeface="Malgun Gothic"/>
-                        </a:rPr>
-                        <a:t>① 서울 일극(91 vs 2~24) ② 변호사↑→부담↓(r=−0.85) ③ 수도권우위=서울단독 ④ 변호사 3.4배↑에도 서울집중 71%→76%</a:t>
-                      </a:r>
-                    </a:p>
-                  </a:txBody>
-                  <a:tcPr anchor="ctr"/>
-                </a:tc>
-              </a:tr>
-              <a:tr h="701040">
-                <a:tc>
-                  <a:txBody>
-                    <a:bodyPr/>
-                    <a:lstStyle/>
-                    <a:p>
-                      <a:pPr algn="ctr"/>
-                      <a:r>
-                        <a:rPr sz="1500">
-                          <a:latin typeface="Malgun Gothic"/>
-                        </a:rPr>
-                        <a:t>결론</a:t>
-                      </a:r>
-                    </a:p>
-                  </a:txBody>
-                  <a:tcPr anchor="ctr"/>
-                </a:tc>
-                <a:tc>
-                  <a:txBody>
-                    <a:bodyPr/>
-                    <a:lstStyle/>
-                    <a:p>
-                      <a:pPr algn="l"/>
-                      <a:r>
-                        <a:rPr sz="1500">
-                          <a:latin typeface="Malgun Gothic"/>
-                        </a:rPr>
-                        <a:t>인구 대비·사건부담이 접근성 좌우 / 양적 팽창만으론 격차 해소 안 됨</a:t>
-                      </a:r>
-                    </a:p>
-                  </a:txBody>
-                  <a:tcPr anchor="ctr"/>
-                </a:tc>
-              </a:tr>
-            </a:tbl>
-          </a:graphicData>
-        </a:graphic>
-      </p:graphicFrame>
+        </p:nvSpPr>
+        <p:spPr>
+          <a:xfrm>
+            <a:off x="640080" y="1554480"/>
+            <a:ext cx="10972800" cy="4937760"/>
+          </a:xfrm>
+          <a:prstGeom prst="rect">
+            <a:avLst/>
+          </a:prstGeom>
+          <a:noFill/>
+        </p:spPr>
+        <p:txBody>
+          <a:bodyPr wrap="square">
+            <a:spAutoFit/>
+          </a:bodyPr>
+          <a:lstStyle/>
+          <a:p>
+            <a:pPr>
+              <a:spcAft>
+                <a:spcPts val="800"/>
+              </a:spcAft>
+            </a:pPr>
+            <a:r>
+              <a:rPr sz="2000">
+                <a:solidFill>
+                  <a:srgbClr val="222222"/>
+                </a:solidFill>
+                <a:latin typeface="Malgun Gothic"/>
+              </a:rPr>
+              <a:t>• 로스쿨 도입(2009) 이후 변호사 4만 명 시대 — 자원은 어디에 있나?</a:t>
+            </a:r>
+          </a:p>
+          <a:p>
+            <a:pPr lvl="1">
+              <a:spcAft>
+                <a:spcPts val="800"/>
+              </a:spcAft>
+            </a:pPr>
+            <a:r>
+              <a:rPr sz="1700">
+                <a:solidFill>
+                  <a:srgbClr val="222222"/>
+                </a:solidFill>
+                <a:latin typeface="Malgun Gothic"/>
+              </a:rPr>
+              <a:t>– 서울·수도권 집중 vs 지방 부족, 취약계층 사각지대 우려</a:t>
+            </a:r>
+          </a:p>
+          <a:p>
+            <a:pPr>
+              <a:spcAft>
+                <a:spcPts val="800"/>
+              </a:spcAft>
+            </a:pPr>
+            <a:r>
+              <a:rPr sz="2000">
+                <a:solidFill>
+                  <a:srgbClr val="222222"/>
+                </a:solidFill>
+                <a:latin typeface="Malgun Gothic"/>
+              </a:rPr>
+              <a:t>• 법률 서비스 접근성의 지역 불균형 = 사법 정의와 직결된 사회 문제</a:t>
+            </a:r>
+          </a:p>
+          <a:p>
+            <a:pPr>
+              <a:spcAft>
+                <a:spcPts val="800"/>
+              </a:spcAft>
+            </a:pPr>
+            <a:r>
+              <a:rPr sz="2000">
+                <a:solidFill>
+                  <a:srgbClr val="222222"/>
+                </a:solidFill>
+                <a:latin typeface="Malgun Gothic"/>
+              </a:rPr>
+              <a:t>• 연구 질문: 어느 지역이, 얼마나 법적 보호에서 소외되는가?</a:t>
+            </a:r>
+          </a:p>
+        </p:txBody>
+      </p:sp>
     </p:spTree>
   </p:cSld>
   <p:clrMapOvr>
@@ -8761,7 +8412,7 @@
                 </a:solidFill>
                 <a:latin typeface="Malgun Gothic"/>
               </a:rPr>
-              <a:t>1. 왜 이 문제인가</a:t>
+              <a:t>2. 접근 방법 — 종합 법률 접근성 지수(LLAI)</a:t>
             </a:r>
           </a:p>
         </p:txBody>
@@ -8837,13 +8488,13 @@
               </a:spcAft>
             </a:pPr>
             <a:r>
-              <a:rPr sz="2000">
+              <a:rPr sz="1900">
                 <a:solidFill>
                   <a:srgbClr val="222222"/>
                 </a:solidFill>
                 <a:latin typeface="Malgun Gothic"/>
               </a:rPr>
-              <a:t>• 로스쿨 도입(2009) 이후 변호사 4만 명 시대 — 자원은 어디에 있나?</a:t>
+              <a:t>• 3개 차원을 하나의 지수로 통합 (0~100점)</a:t>
             </a:r>
           </a:p>
           <a:p>
@@ -8853,13 +8504,45 @@
               </a:spcAft>
             </a:pPr>
             <a:r>
-              <a:rPr sz="1700">
+              <a:rPr sz="1600">
                 <a:solidFill>
                   <a:srgbClr val="222222"/>
                 </a:solidFill>
                 <a:latin typeface="Malgun Gothic"/>
               </a:rPr>
-              <a:t>– 서울·수도권 집중 vs 지방 부족, 취약계층 사각지대 우려</a:t>
+              <a:t>– A1 변호사 접근성 — 인구 10만 명당 변호사 수 (↑ 좋음)</a:t>
+            </a:r>
+          </a:p>
+          <a:p>
+            <a:pPr lvl="1">
+              <a:spcAft>
+                <a:spcPts val="800"/>
+              </a:spcAft>
+            </a:pPr>
+            <a:r>
+              <a:rPr sz="1600">
+                <a:solidFill>
+                  <a:srgbClr val="222222"/>
+                </a:solidFill>
+                <a:latin typeface="Malgun Gothic"/>
+              </a:rPr>
+              <a:t>– A2 사건 부담 — 변호사 1인당 법원 본안사건 수 (↓ 좋음)</a:t>
+            </a:r>
+          </a:p>
+          <a:p>
+            <a:pPr lvl="1">
+              <a:spcAft>
+                <a:spcPts val="800"/>
+              </a:spcAft>
+            </a:pPr>
+            <a:r>
+              <a:rPr sz="1600">
+                <a:solidFill>
+                  <a:srgbClr val="222222"/>
+                </a:solidFill>
+                <a:latin typeface="Malgun Gothic"/>
+              </a:rPr>
+              <a:t>– A3 취약계층 접근성 — 법률구조 건수 / 저소득층 (↑ 좋음)</a:t>
             </a:r>
           </a:p>
           <a:p>
@@ -8869,29 +8552,61 @@
               </a:spcAft>
             </a:pPr>
             <a:r>
-              <a:rPr sz="2000">
+              <a:rPr sz="1900">
                 <a:solidFill>
                   <a:srgbClr val="222222"/>
                 </a:solidFill>
                 <a:latin typeface="Malgun Gothic"/>
               </a:rPr>
-              <a:t>• 법률 서비스 접근성의 지역 불균형 = 사법 정의와 직결된 사회 문제</a:t>
-            </a:r>
-          </a:p>
-          <a:p>
-            <a:pPr>
+              <a:t>• LLAI = w₁·A1n + w₂·(1−A2n) + w₃·A3n</a:t>
+            </a:r>
+          </a:p>
+          <a:p>
+            <a:pPr lvl="1">
               <a:spcAft>
                 <a:spcPts val="800"/>
               </a:spcAft>
             </a:pPr>
             <a:r>
-              <a:rPr sz="2000">
+              <a:rPr sz="1600">
                 <a:solidFill>
                   <a:srgbClr val="222222"/>
                 </a:solidFill>
                 <a:latin typeface="Malgun Gothic"/>
               </a:rPr>
-              <a:t>• 연구 질문: 어느 지역이, 얼마나 법적 보호에서 소외되는가?</a:t>
+              <a:t>– A1n·A2n·A3n = 각 지표를 0~1로 맞춘 값 (전국 최하=0, 최고=1)</a:t>
+            </a:r>
+          </a:p>
+          <a:p>
+            <a:pPr lvl="1">
+              <a:spcAft>
+                <a:spcPts val="800"/>
+              </a:spcAft>
+            </a:pPr>
+            <a:r>
+              <a:rPr sz="1600">
+                <a:solidFill>
+                  <a:srgbClr val="222222"/>
+                </a:solidFill>
+                <a:latin typeface="Malgun Gothic"/>
+              </a:rPr>
+              <a:t>– A2는 '적을수록 좋아서' 1에서 빼(1−A2n) 방향을 통일</a:t>
+            </a:r>
+          </a:p>
+          <a:p>
+            <a:pPr lvl="1">
+              <a:spcAft>
+                <a:spcPts val="800"/>
+              </a:spcAft>
+            </a:pPr>
+            <a:r>
+              <a:rPr sz="1600">
+                <a:solidFill>
+                  <a:srgbClr val="222222"/>
+                </a:solidFill>
+                <a:latin typeface="Malgun Gothic"/>
+              </a:rPr>
+              <a:t>– w = 가중치(중요도). 균등·엔트로피·PCA 3종으로 강건성 확인</a:t>
             </a:r>
           </a:p>
         </p:txBody>
@@ -8905,220 +8620,6 @@
 </file>
 
 <file path=ppt/slides/slide5.xml><?xml version="1.0" encoding="utf-8"?>
-<p:sld xmlns:a="http://schemas.openxmlformats.org/drawingml/2006/main" xmlns:p="http://schemas.openxmlformats.org/presentationml/2006/main" xmlns:r="http://schemas.openxmlformats.org/officeDocument/2006/relationships">
-  <p:cSld>
-    <p:spTree>
-      <p:nvGrpSpPr>
-        <p:cNvPr id="1" name=""/>
-        <p:cNvGrpSpPr/>
-        <p:nvPr/>
-      </p:nvGrpSpPr>
-      <p:grpSpPr/>
-      <p:sp>
-        <p:nvSpPr>
-          <p:cNvPr id="2" name="TextBox 1"/>
-          <p:cNvSpPr txBox="1"/>
-          <p:nvPr/>
-        </p:nvSpPr>
-        <p:spPr>
-          <a:xfrm>
-            <a:off x="502920" y="320040"/>
-            <a:ext cx="11155680" cy="914400"/>
-          </a:xfrm>
-          <a:prstGeom prst="rect">
-            <a:avLst/>
-          </a:prstGeom>
-          <a:noFill/>
-        </p:spPr>
-        <p:txBody>
-          <a:bodyPr wrap="square">
-            <a:spAutoFit/>
-          </a:bodyPr>
-          <a:lstStyle/>
-          <a:p>
-            <a:r>
-              <a:rPr sz="2800" b="1">
-                <a:solidFill>
-                  <a:srgbClr val="1F3A5F"/>
-                </a:solidFill>
-                <a:latin typeface="Malgun Gothic"/>
-              </a:rPr>
-              <a:t>2. 접근 방법 — 종합 법률 접근성 지수(LLAI)</a:t>
-            </a:r>
-          </a:p>
-        </p:txBody>
-      </p:sp>
-      <p:sp>
-        <p:nvSpPr>
-          <p:cNvPr id="3" name="Rectangle 2"/>
-          <p:cNvSpPr/>
-          <p:nvPr/>
-        </p:nvSpPr>
-        <p:spPr>
-          <a:xfrm>
-            <a:off x="548640" y="1188720"/>
-            <a:ext cx="11064240" cy="38100"/>
-          </a:xfrm>
-          <a:prstGeom prst="rect">
-            <a:avLst/>
-          </a:prstGeom>
-          <a:solidFill>
-            <a:srgbClr val="C44E52"/>
-          </a:solidFill>
-          <a:ln>
-            <a:noFill/>
-          </a:ln>
-        </p:spPr>
-        <p:style>
-          <a:lnRef idx="1">
-            <a:schemeClr val="accent1"/>
-          </a:lnRef>
-          <a:fillRef idx="3">
-            <a:schemeClr val="accent1"/>
-          </a:fillRef>
-          <a:effectRef idx="2">
-            <a:schemeClr val="accent1"/>
-          </a:effectRef>
-          <a:fontRef idx="minor">
-            <a:schemeClr val="lt1"/>
-          </a:fontRef>
-        </p:style>
-        <p:txBody>
-          <a:bodyPr rtlCol="0" anchor="ctr"/>
-          <a:lstStyle/>
-          <a:p>
-            <a:pPr algn="ctr"/>
-          </a:p>
-        </p:txBody>
-      </p:sp>
-      <p:sp>
-        <p:nvSpPr>
-          <p:cNvPr id="4" name="TextBox 3"/>
-          <p:cNvSpPr txBox="1"/>
-          <p:nvPr/>
-        </p:nvSpPr>
-        <p:spPr>
-          <a:xfrm>
-            <a:off x="640080" y="1554480"/>
-            <a:ext cx="10972800" cy="4937760"/>
-          </a:xfrm>
-          <a:prstGeom prst="rect">
-            <a:avLst/>
-          </a:prstGeom>
-          <a:noFill/>
-        </p:spPr>
-        <p:txBody>
-          <a:bodyPr wrap="square">
-            <a:spAutoFit/>
-          </a:bodyPr>
-          <a:lstStyle/>
-          <a:p>
-            <a:pPr>
-              <a:spcAft>
-                <a:spcPts val="800"/>
-              </a:spcAft>
-            </a:pPr>
-            <a:r>
-              <a:rPr sz="2000">
-                <a:solidFill>
-                  <a:srgbClr val="222222"/>
-                </a:solidFill>
-                <a:latin typeface="Malgun Gothic"/>
-              </a:rPr>
-              <a:t>• 3개 차원을 하나의 지수로 통합 (0~100)</a:t>
-            </a:r>
-          </a:p>
-          <a:p>
-            <a:pPr lvl="1">
-              <a:spcAft>
-                <a:spcPts val="800"/>
-              </a:spcAft>
-            </a:pPr>
-            <a:r>
-              <a:rPr sz="1700">
-                <a:solidFill>
-                  <a:srgbClr val="222222"/>
-                </a:solidFill>
-                <a:latin typeface="Malgun Gothic"/>
-              </a:rPr>
-              <a:t>– A1 변호사 접근성 — 인구 10만 명당 변호사 수 (↑ 좋음)</a:t>
-            </a:r>
-          </a:p>
-          <a:p>
-            <a:pPr lvl="1">
-              <a:spcAft>
-                <a:spcPts val="800"/>
-              </a:spcAft>
-            </a:pPr>
-            <a:r>
-              <a:rPr sz="1700">
-                <a:solidFill>
-                  <a:srgbClr val="222222"/>
-                </a:solidFill>
-                <a:latin typeface="Malgun Gothic"/>
-              </a:rPr>
-              <a:t>– A2 사건 부담 — 변호사 1인당 법원 본안사건 수 (↓ 좋음)</a:t>
-            </a:r>
-          </a:p>
-          <a:p>
-            <a:pPr lvl="1">
-              <a:spcAft>
-                <a:spcPts val="800"/>
-              </a:spcAft>
-            </a:pPr>
-            <a:r>
-              <a:rPr sz="1700">
-                <a:solidFill>
-                  <a:srgbClr val="222222"/>
-                </a:solidFill>
-                <a:latin typeface="Malgun Gothic"/>
-              </a:rPr>
-              <a:t>– A3 취약계층 접근성 — 법률구조 건수 / 저소득층 (↑ 좋음)</a:t>
-            </a:r>
-          </a:p>
-          <a:p>
-            <a:pPr>
-              <a:spcAft>
-                <a:spcPts val="800"/>
-              </a:spcAft>
-            </a:pPr>
-            <a:r>
-              <a:rPr sz="2000">
-                <a:solidFill>
-                  <a:srgbClr val="222222"/>
-                </a:solidFill>
-                <a:latin typeface="Malgun Gothic"/>
-              </a:rPr>
-              <a:t>• LLAI = w₁·A1n + w₂·(1−A2n) + w₃·A3n</a:t>
-            </a:r>
-          </a:p>
-          <a:p>
-            <a:pPr lvl="1">
-              <a:spcAft>
-                <a:spcPts val="800"/>
-              </a:spcAft>
-            </a:pPr>
-            <a:r>
-              <a:rPr sz="1700">
-                <a:solidFill>
-                  <a:srgbClr val="222222"/>
-                </a:solidFill>
-                <a:latin typeface="Malgun Gothic"/>
-              </a:rPr>
-              <a:t>– 가중치 3종(균등·엔트로피·PCA) 병기로 강건성 확인</a:t>
-            </a:r>
-          </a:p>
-        </p:txBody>
-      </p:sp>
-    </p:spTree>
-  </p:cSld>
-  <p:clrMapOvr>
-    <a:masterClrMapping/>
-  </p:clrMapOvr>
-</p:sld>
-</file>
-
-<file path=ppt/slides/slide6.xml><?xml version="1.0" encoding="utf-8"?>
 <p:sld xmlns:a="http://schemas.openxmlformats.org/drawingml/2006/main" xmlns:p="http://schemas.openxmlformats.org/presentationml/2006/main" xmlns:r="http://schemas.openxmlformats.org/officeDocument/2006/relationships">
   <p:cSld>
     <p:spTree>
@@ -9887,7 +9388,7 @@
 </p:sld>
 </file>
 
-<file path=ppt/slides/slide7.xml><?xml version="1.0" encoding="utf-8"?>
+<file path=ppt/slides/slide6.xml><?xml version="1.0" encoding="utf-8"?>
 <p:sld xmlns:a="http://schemas.openxmlformats.org/drawingml/2006/main" xmlns:p="http://schemas.openxmlformats.org/presentationml/2006/main" xmlns:r="http://schemas.openxmlformats.org/officeDocument/2006/relationships">
   <p:cSld>
     <p:spTree>
@@ -10085,7 +9586,7 @@
 </p:sld>
 </file>
 
-<file path=ppt/slides/slide8.xml><?xml version="1.0" encoding="utf-8"?>
+<file path=ppt/slides/slide7.xml><?xml version="1.0" encoding="utf-8"?>
 <p:sld xmlns:a="http://schemas.openxmlformats.org/drawingml/2006/main" xmlns:p="http://schemas.openxmlformats.org/presentationml/2006/main" xmlns:r="http://schemas.openxmlformats.org/officeDocument/2006/relationships">
   <p:cSld>
     <p:spTree>
@@ -10331,7 +9832,7 @@
 </p:sld>
 </file>
 
-<file path=ppt/slides/slide9.xml><?xml version="1.0" encoding="utf-8"?>
+<file path=ppt/slides/slide8.xml><?xml version="1.0" encoding="utf-8"?>
 <p:sld xmlns:a="http://schemas.openxmlformats.org/drawingml/2006/main" xmlns:p="http://schemas.openxmlformats.org/presentationml/2006/main" xmlns:r="http://schemas.openxmlformats.org/officeDocument/2006/relationships">
   <p:cSld>
     <p:spTree>
@@ -11005,6 +10506,124 @@
               <a:t>– 작업 무게중심 = 수집·정제(ETL) 파이프라인</a:t>
             </a:r>
           </a:p>
+        </p:txBody>
+      </p:sp>
+    </p:spTree>
+  </p:cSld>
+  <p:clrMapOvr>
+    <a:masterClrMapping/>
+  </p:clrMapOvr>
+</p:sld>
+</file>
+
+<file path=ppt/slides/slide9.xml><?xml version="1.0" encoding="utf-8"?>
+<p:sld xmlns:a="http://schemas.openxmlformats.org/drawingml/2006/main" xmlns:p="http://schemas.openxmlformats.org/presentationml/2006/main" xmlns:r="http://schemas.openxmlformats.org/officeDocument/2006/relationships">
+  <p:cSld>
+    <p:spTree>
+      <p:nvGrpSpPr>
+        <p:cNvPr id="1" name=""/>
+        <p:cNvGrpSpPr/>
+        <p:nvPr/>
+      </p:nvGrpSpPr>
+      <p:grpSpPr/>
+      <p:sp>
+        <p:nvSpPr>
+          <p:cNvPr id="2" name="TextBox 1"/>
+          <p:cNvSpPr txBox="1"/>
+          <p:nvPr/>
+        </p:nvSpPr>
+        <p:spPr>
+          <a:xfrm>
+            <a:off x="502920" y="320040"/>
+            <a:ext cx="11155680" cy="914400"/>
+          </a:xfrm>
+          <a:prstGeom prst="rect">
+            <a:avLst/>
+          </a:prstGeom>
+          <a:noFill/>
+        </p:spPr>
+        <p:txBody>
+          <a:bodyPr wrap="square">
+            <a:spAutoFit/>
+          </a:bodyPr>
+          <a:lstStyle/>
+          <a:p>
+            <a:r>
+              <a:rPr sz="2800" b="1">
+                <a:solidFill>
+                  <a:srgbClr val="1F3A5F"/>
+                </a:solidFill>
+                <a:latin typeface="Malgun Gothic"/>
+              </a:rPr>
+              <a:t>6. LLAI는 어떻게 계산되나 — 예시</a:t>
+            </a:r>
+          </a:p>
+        </p:txBody>
+      </p:sp>
+      <p:sp>
+        <p:nvSpPr>
+          <p:cNvPr id="3" name="Rectangle 2"/>
+          <p:cNvSpPr/>
+          <p:nvPr/>
+        </p:nvSpPr>
+        <p:spPr>
+          <a:xfrm>
+            <a:off x="548640" y="1188720"/>
+            <a:ext cx="11064240" cy="38100"/>
+          </a:xfrm>
+          <a:prstGeom prst="rect">
+            <a:avLst/>
+          </a:prstGeom>
+          <a:solidFill>
+            <a:srgbClr val="C44E52"/>
+          </a:solidFill>
+          <a:ln>
+            <a:noFill/>
+          </a:ln>
+        </p:spPr>
+        <p:style>
+          <a:lnRef idx="1">
+            <a:schemeClr val="accent1"/>
+          </a:lnRef>
+          <a:fillRef idx="3">
+            <a:schemeClr val="accent1"/>
+          </a:fillRef>
+          <a:effectRef idx="2">
+            <a:schemeClr val="accent1"/>
+          </a:effectRef>
+          <a:fontRef idx="minor">
+            <a:schemeClr val="lt1"/>
+          </a:fontRef>
+        </p:style>
+        <p:txBody>
+          <a:bodyPr rtlCol="0" anchor="ctr"/>
+          <a:lstStyle/>
+          <a:p>
+            <a:pPr algn="ctr"/>
+          </a:p>
+        </p:txBody>
+      </p:sp>
+      <p:sp>
+        <p:nvSpPr>
+          <p:cNvPr id="4" name="TextBox 3"/>
+          <p:cNvSpPr txBox="1"/>
+          <p:nvPr/>
+        </p:nvSpPr>
+        <p:spPr>
+          <a:xfrm>
+            <a:off x="640080" y="1554480"/>
+            <a:ext cx="10972800" cy="4937760"/>
+          </a:xfrm>
+          <a:prstGeom prst="rect">
+            <a:avLst/>
+          </a:prstGeom>
+          <a:noFill/>
+        </p:spPr>
+        <p:txBody>
+          <a:bodyPr wrap="square">
+            <a:spAutoFit/>
+          </a:bodyPr>
+          <a:lstStyle/>
           <a:p>
             <a:pPr>
               <a:spcAft>
@@ -11012,13 +10631,394 @@
               </a:spcAft>
             </a:pPr>
             <a:r>
-              <a:rPr sz="1700">
+              <a:rPr sz="1900">
                 <a:solidFill>
                   <a:srgbClr val="222222"/>
                 </a:solidFill>
                 <a:latin typeface="Malgun Gothic"/>
               </a:rPr>
-              <a:t>• 방법론: 데이터엔지니어링 · 합성지표 · 가설검정 · 군집 · 공간시각화</a:t>
+              <a:t>• 각 지표를 0~1로 맞추고(n), A2는 1에서 빼 방향 통일 → 가중평균 ×100</a:t>
+            </a:r>
+          </a:p>
+          <a:p>
+            <a:pPr>
+              <a:spcAft>
+                <a:spcPts val="800"/>
+              </a:spcAft>
+            </a:pPr>
+            <a:r>
+              <a:rPr sz="1900">
+                <a:solidFill>
+                  <a:srgbClr val="222222"/>
+                </a:solidFill>
+                <a:latin typeface="Malgun Gothic"/>
+              </a:rPr>
+              <a:t>• LLAI = 0.69·A1n + 0.14·(1−A2n) + 0.17·A3n  (가중치는 엔트로피 방식)</a:t>
+            </a:r>
+          </a:p>
+        </p:txBody>
+      </p:sp>
+      <p:graphicFrame>
+        <p:nvGraphicFramePr>
+          <p:cNvPr id="5" name="Table 4"/>
+          <p:cNvGraphicFramePr>
+            <a:graphicFrameLocks noGrp="1"/>
+          </p:cNvGraphicFramePr>
+          <p:nvPr/>
+        </p:nvGraphicFramePr>
+        <p:xfrm>
+          <a:off x="1828800" y="3063240"/>
+          <a:ext cx="8229600" cy="1554480"/>
+        </p:xfrm>
+        <a:graphic>
+          <a:graphicData uri="http://schemas.openxmlformats.org/drawingml/2006/table">
+            <a:tbl>
+              <a:tblPr firstRow="1" bandRow="1">
+                <a:tableStyleId>{5C22544A-7EE6-4342-B048-85BDC9FD1C3A}</a:tableStyleId>
+              </a:tblPr>
+              <a:tblGrid>
+                <a:gridCol w="1645920"/>
+                <a:gridCol w="1645920"/>
+                <a:gridCol w="1645920"/>
+                <a:gridCol w="1645920"/>
+                <a:gridCol w="1645920"/>
+              </a:tblGrid>
+              <a:tr h="518160">
+                <a:tc>
+                  <a:txBody>
+                    <a:bodyPr/>
+                    <a:lstStyle/>
+                    <a:p>
+                      <a:pPr algn="ctr"/>
+                      <a:r>
+                        <a:rPr sz="1800" b="1">
+                          <a:solidFill>
+                            <a:srgbClr val="FFFFFF"/>
+                          </a:solidFill>
+                          <a:latin typeface="Malgun Gothic"/>
+                        </a:rPr>
+                        <a:t>권역</a:t>
+                      </a:r>
+                    </a:p>
+                  </a:txBody>
+                  <a:tcPr anchor="ctr">
+                    <a:solidFill>
+                      <a:srgbClr val="1F3A5F"/>
+                    </a:solidFill>
+                  </a:tcPr>
+                </a:tc>
+                <a:tc>
+                  <a:txBody>
+                    <a:bodyPr/>
+                    <a:lstStyle/>
+                    <a:p>
+                      <a:pPr algn="l"/>
+                      <a:r>
+                        <a:rPr sz="1800" b="1">
+                          <a:solidFill>
+                            <a:srgbClr val="FFFFFF"/>
+                          </a:solidFill>
+                          <a:latin typeface="Malgun Gothic"/>
+                        </a:rPr>
+                        <a:t>A1n</a:t>
+                      </a:r>
+                    </a:p>
+                  </a:txBody>
+                  <a:tcPr anchor="ctr">
+                    <a:solidFill>
+                      <a:srgbClr val="1F3A5F"/>
+                    </a:solidFill>
+                  </a:tcPr>
+                </a:tc>
+                <a:tc>
+                  <a:txBody>
+                    <a:bodyPr/>
+                    <a:lstStyle/>
+                    <a:p>
+                      <a:pPr algn="l"/>
+                      <a:r>
+                        <a:rPr sz="1800" b="1">
+                          <a:solidFill>
+                            <a:srgbClr val="FFFFFF"/>
+                          </a:solidFill>
+                          <a:latin typeface="Malgun Gothic"/>
+                        </a:rPr>
+                        <a:t>1−A2n</a:t>
+                      </a:r>
+                    </a:p>
+                  </a:txBody>
+                  <a:tcPr anchor="ctr">
+                    <a:solidFill>
+                      <a:srgbClr val="1F3A5F"/>
+                    </a:solidFill>
+                  </a:tcPr>
+                </a:tc>
+                <a:tc>
+                  <a:txBody>
+                    <a:bodyPr/>
+                    <a:lstStyle/>
+                    <a:p>
+                      <a:pPr algn="l"/>
+                      <a:r>
+                        <a:rPr sz="1800" b="1">
+                          <a:solidFill>
+                            <a:srgbClr val="FFFFFF"/>
+                          </a:solidFill>
+                          <a:latin typeface="Malgun Gothic"/>
+                        </a:rPr>
+                        <a:t>A3n</a:t>
+                      </a:r>
+                    </a:p>
+                  </a:txBody>
+                  <a:tcPr anchor="ctr">
+                    <a:solidFill>
+                      <a:srgbClr val="1F3A5F"/>
+                    </a:solidFill>
+                  </a:tcPr>
+                </a:tc>
+                <a:tc>
+                  <a:txBody>
+                    <a:bodyPr/>
+                    <a:lstStyle/>
+                    <a:p>
+                      <a:pPr algn="l"/>
+                      <a:r>
+                        <a:rPr sz="1800" b="1">
+                          <a:solidFill>
+                            <a:srgbClr val="FFFFFF"/>
+                          </a:solidFill>
+                          <a:latin typeface="Malgun Gothic"/>
+                        </a:rPr>
+                        <a:t>LLAI</a:t>
+                      </a:r>
+                    </a:p>
+                  </a:txBody>
+                  <a:tcPr anchor="ctr">
+                    <a:solidFill>
+                      <a:srgbClr val="1F3A5F"/>
+                    </a:solidFill>
+                  </a:tcPr>
+                </a:tc>
+              </a:tr>
+              <a:tr h="518160">
+                <a:tc>
+                  <a:txBody>
+                    <a:bodyPr/>
+                    <a:lstStyle/>
+                    <a:p>
+                      <a:pPr algn="ctr"/>
+                      <a:r>
+                        <a:rPr sz="1800">
+                          <a:latin typeface="Malgun Gothic"/>
+                        </a:rPr>
+                        <a:t>서울</a:t>
+                      </a:r>
+                    </a:p>
+                  </a:txBody>
+                  <a:tcPr anchor="ctr"/>
+                </a:tc>
+                <a:tc>
+                  <a:txBody>
+                    <a:bodyPr/>
+                    <a:lstStyle/>
+                    <a:p>
+                      <a:pPr algn="l"/>
+                      <a:r>
+                        <a:rPr sz="1800">
+                          <a:latin typeface="Malgun Gothic"/>
+                        </a:rPr>
+                        <a:t>1.00</a:t>
+                      </a:r>
+                    </a:p>
+                  </a:txBody>
+                  <a:tcPr anchor="ctr"/>
+                </a:tc>
+                <a:tc>
+                  <a:txBody>
+                    <a:bodyPr/>
+                    <a:lstStyle/>
+                    <a:p>
+                      <a:pPr algn="l"/>
+                      <a:r>
+                        <a:rPr sz="1800">
+                          <a:latin typeface="Malgun Gothic"/>
+                        </a:rPr>
+                        <a:t>1.00</a:t>
+                      </a:r>
+                    </a:p>
+                  </a:txBody>
+                  <a:tcPr anchor="ctr"/>
+                </a:tc>
+                <a:tc>
+                  <a:txBody>
+                    <a:bodyPr/>
+                    <a:lstStyle/>
+                    <a:p>
+                      <a:pPr algn="l"/>
+                      <a:r>
+                        <a:rPr sz="1800">
+                          <a:latin typeface="Malgun Gothic"/>
+                        </a:rPr>
+                        <a:t>0.48</a:t>
+                      </a:r>
+                    </a:p>
+                  </a:txBody>
+                  <a:tcPr anchor="ctr"/>
+                </a:tc>
+                <a:tc>
+                  <a:txBody>
+                    <a:bodyPr/>
+                    <a:lstStyle/>
+                    <a:p>
+                      <a:pPr algn="l"/>
+                      <a:r>
+                        <a:rPr sz="1800">
+                          <a:latin typeface="Malgun Gothic"/>
+                        </a:rPr>
+                        <a:t>91.1</a:t>
+                      </a:r>
+                    </a:p>
+                  </a:txBody>
+                  <a:tcPr anchor="ctr"/>
+                </a:tc>
+              </a:tr>
+              <a:tr h="518160">
+                <a:tc>
+                  <a:txBody>
+                    <a:bodyPr/>
+                    <a:lstStyle/>
+                    <a:p>
+                      <a:pPr algn="ctr"/>
+                      <a:r>
+                        <a:rPr sz="1800">
+                          <a:latin typeface="Malgun Gothic"/>
+                        </a:rPr>
+                        <a:t>강원</a:t>
+                      </a:r>
+                    </a:p>
+                  </a:txBody>
+                  <a:tcPr anchor="ctr"/>
+                </a:tc>
+                <a:tc>
+                  <a:txBody>
+                    <a:bodyPr/>
+                    <a:lstStyle/>
+                    <a:p>
+                      <a:pPr algn="l"/>
+                      <a:r>
+                        <a:rPr sz="1800">
+                          <a:latin typeface="Malgun Gothic"/>
+                        </a:rPr>
+                        <a:t>0.00</a:t>
+                      </a:r>
+                    </a:p>
+                  </a:txBody>
+                  <a:tcPr anchor="ctr"/>
+                </a:tc>
+                <a:tc>
+                  <a:txBody>
+                    <a:bodyPr/>
+                    <a:lstStyle/>
+                    <a:p>
+                      <a:pPr algn="l"/>
+                      <a:r>
+                        <a:rPr sz="1800">
+                          <a:latin typeface="Malgun Gothic"/>
+                        </a:rPr>
+                        <a:t>0.00</a:t>
+                      </a:r>
+                    </a:p>
+                  </a:txBody>
+                  <a:tcPr anchor="ctr"/>
+                </a:tc>
+                <a:tc>
+                  <a:txBody>
+                    <a:bodyPr/>
+                    <a:lstStyle/>
+                    <a:p>
+                      <a:pPr algn="l"/>
+                      <a:r>
+                        <a:rPr sz="1800">
+                          <a:latin typeface="Malgun Gothic"/>
+                        </a:rPr>
+                        <a:t>0.09</a:t>
+                      </a:r>
+                    </a:p>
+                  </a:txBody>
+                  <a:tcPr anchor="ctr"/>
+                </a:tc>
+                <a:tc>
+                  <a:txBody>
+                    <a:bodyPr/>
+                    <a:lstStyle/>
+                    <a:p>
+                      <a:pPr algn="l"/>
+                      <a:r>
+                        <a:rPr sz="1800">
+                          <a:latin typeface="Malgun Gothic"/>
+                        </a:rPr>
+                        <a:t>1.6</a:t>
+                      </a:r>
+                    </a:p>
+                  </a:txBody>
+                  <a:tcPr anchor="ctr"/>
+                </a:tc>
+              </a:tr>
+            </a:tbl>
+          </a:graphicData>
+        </a:graphic>
+      </p:graphicFrame>
+      <p:sp>
+        <p:nvSpPr>
+          <p:cNvPr id="6" name="TextBox 5"/>
+          <p:cNvSpPr txBox="1"/>
+          <p:nvPr/>
+        </p:nvSpPr>
+        <p:spPr>
+          <a:xfrm>
+            <a:off x="640080" y="4892040"/>
+            <a:ext cx="10972800" cy="4937760"/>
+          </a:xfrm>
+          <a:prstGeom prst="rect">
+            <a:avLst/>
+          </a:prstGeom>
+          <a:noFill/>
+        </p:spPr>
+        <p:txBody>
+          <a:bodyPr wrap="square">
+            <a:spAutoFit/>
+          </a:bodyPr>
+          <a:lstStyle/>
+          <a:p>
+            <a:pPr lvl="1">
+              <a:spcAft>
+                <a:spcPts val="800"/>
+              </a:spcAft>
+            </a:pPr>
+            <a:r>
+              <a:rPr sz="1500">
+                <a:solidFill>
+                  <a:srgbClr val="222222"/>
+                </a:solidFill>
+                <a:latin typeface="Malgun Gothic"/>
+              </a:rPr>
+              <a:t>– 표의 1.00 = '전국에서 가장 좋음', 0.00 = '가장 나쁨' (n은 0~1 값)</a:t>
+            </a:r>
+          </a:p>
+          <a:p>
+            <a:pPr>
+              <a:spcAft>
+                <a:spcPts val="800"/>
+              </a:spcAft>
+            </a:pPr>
+            <a:r>
+              <a:rPr sz="1800">
+                <a:solidFill>
+                  <a:srgbClr val="222222"/>
+                </a:solidFill>
+                <a:latin typeface="Malgun Gothic"/>
+              </a:rPr>
+              <a:t>• 서울: 변호사·사건부담 두 축 모두 1.00 → 거의 만점 / 강원: 둘 다 0 → 바닥</a:t>
             </a:r>
           </a:p>
         </p:txBody>

--- a/reports/발표자료.pptx
+++ b/reports/발표자료.pptx
@@ -3303,9 +3303,9 @@
                 <a:tableStyleId>{5C22544A-7EE6-4342-B048-85BDC9FD1C3A}</a:tableStyleId>
               </a:tblPr>
               <a:tblGrid>
-                <a:gridCol w="1828800"/>
-                <a:gridCol w="4937760"/>
-                <a:gridCol w="4480560"/>
+                <a:gridCol w="2103120"/>
+                <a:gridCol w="4754880"/>
+                <a:gridCol w="4389120"/>
               </a:tblGrid>
               <a:tr h="508000">
                 <a:tc>
@@ -3389,7 +3389,7 @@
                         <a:rPr sz="1200">
                           <a:latin typeface="Malgun Gothic"/>
                         </a:rPr>
-                        <a:t>정규화</a:t>
+                        <a:t>점수 맞추기</a:t>
                       </a:r>
                     </a:p>
                   </a:txBody>
@@ -3439,7 +3439,7 @@
                         <a:rPr sz="1200">
                           <a:latin typeface="Malgun Gothic"/>
                         </a:rPr>
-                        <a:t>가중치</a:t>
+                        <a:t>중요도 정하기</a:t>
                       </a:r>
                     </a:p>
                   </a:txBody>
@@ -3455,7 +3455,7 @@
                         <a:rPr sz="1200">
                           <a:latin typeface="Malgun Gothic"/>
                         </a:rPr>
-                        <a:t>세 지표 합칠 비중 정하기 (균등·엔트로피·PCA)</a:t>
+                        <a:t>세 지표 합칠 비중 (3가지 방식)</a:t>
                       </a:r>
                     </a:p>
                   </a:txBody>
@@ -3471,7 +3471,7 @@
                         <a:rPr sz="1200">
                           <a:latin typeface="Malgun Gothic"/>
                         </a:rPr>
-                        <a:t>비중 자의성 → 강건성 확인</a:t>
+                        <a:t>사람 임의 X → 결과 흔들림 없나 확인</a:t>
                       </a:r>
                     </a:p>
                   </a:txBody>
@@ -3489,7 +3489,7 @@
                         <a:rPr sz="1200">
                           <a:latin typeface="Malgun Gothic"/>
                         </a:rPr>
-                        <a:t>LLAI 합성</a:t>
+                        <a:t>점수 합치기</a:t>
                       </a:r>
                     </a:p>
                   </a:txBody>
@@ -3521,7 +3521,7 @@
                         <a:rPr sz="1200">
                           <a:latin typeface="Malgun Gothic"/>
                         </a:rPr>
-                        <a:t>단순·투명한 점수</a:t>
+                        <a:t>단순·투명한 점수(LLAI)</a:t>
                       </a:r>
                     </a:p>
                   </a:txBody>
@@ -3539,7 +3539,7 @@
                         <a:rPr sz="1200">
                           <a:latin typeface="Malgun Gothic"/>
                         </a:rPr>
-                        <a:t>상관 보기</a:t>
+                        <a:t>관계 보기</a:t>
                       </a:r>
                     </a:p>
                   </a:txBody>
@@ -3555,7 +3555,7 @@
                         <a:rPr sz="1200">
                           <a:latin typeface="Malgun Gothic"/>
                         </a:rPr>
-                        <a:t>두 값이 같이 움직이나 (Pearson·Spearman)</a:t>
+                        <a:t>두 값이 같이 움직이나 (상관분석)</a:t>
                       </a:r>
                     </a:p>
                   </a:txBody>
@@ -3571,7 +3571,7 @@
                         <a:rPr sz="1200">
                           <a:latin typeface="Malgun Gothic"/>
                         </a:rPr>
-                        <a:t>이상치(서울) 대비 교차 확인</a:t>
+                        <a:t>이상치(서울) 대비 2방법 교차 확인</a:t>
                       </a:r>
                     </a:p>
                   </a:txBody>
@@ -3605,7 +3605,7 @@
                         <a:rPr sz="1200">
                           <a:latin typeface="Malgun Gothic"/>
                         </a:rPr>
-                        <a:t>두 집단 차이 검정 (Mann-Whitney)</a:t>
+                        <a:t>두 집단(수도권 vs 지방) 차이 검정</a:t>
                       </a:r>
                     </a:p>
                   </a:txBody>
@@ -3621,7 +3621,7 @@
                         <a:rPr sz="1200">
                           <a:latin typeface="Malgun Gothic"/>
                         </a:rPr>
-                        <a:t>표본 작아 → 분포가정 없는 법</a:t>
+                        <a:t>표본 작아 → 분포가정 없는 방법</a:t>
                       </a:r>
                     </a:p>
                   </a:txBody>
@@ -3639,7 +3639,7 @@
                         <a:rPr sz="1200">
                           <a:latin typeface="Malgun Gothic"/>
                         </a:rPr>
-                        <a:t>군집화</a:t>
+                        <a:t>비슷한 곳 묶기</a:t>
                       </a:r>
                     </a:p>
                   </a:txBody>
@@ -3655,7 +3655,7 @@
                         <a:rPr sz="1200">
                           <a:latin typeface="Malgun Gothic"/>
                         </a:rPr>
-                        <a:t>비슷한 권역끼리 묶기 (K-means)</a:t>
+                        <a:t>비슷한 권역끼리 그룹화 (군집분석)</a:t>
                       </a:r>
                     </a:p>
                   </a:txBody>
@@ -3671,7 +3671,7 @@
                         <a:rPr sz="1200">
                           <a:latin typeface="Malgun Gothic"/>
                         </a:rPr>
-                        <a:t>유형 그룹화 · 묶음 수 객관 선정</a:t>
+                        <a:t>유형 분류 · 묶음 수도 객관 선정</a:t>
                       </a:r>
                     </a:p>
                   </a:txBody>
@@ -3705,7 +3705,7 @@
                         <a:rPr sz="1200">
                           <a:latin typeface="Malgun Gothic"/>
                         </a:rPr>
-                        <a:t>한 곳 집중 정도 수치화 (HHI·변동계수)</a:t>
+                        <a:t>한 곳에 몰린 정도 수치화</a:t>
                       </a:r>
                     </a:p>
                   </a:txBody>
@@ -3739,7 +3739,7 @@
                         <a:rPr sz="1200">
                           <a:latin typeface="Malgun Gothic"/>
                         </a:rPr>
-                        <a:t>지도화</a:t>
+                        <a:t>지도로 보기</a:t>
                       </a:r>
                     </a:p>
                   </a:txBody>
@@ -3755,7 +3755,7 @@
                         <a:rPr sz="1200">
                           <a:latin typeface="Malgun Gothic"/>
                         </a:rPr>
-                        <a:t>경계 합쳐 색칠 (코로플레스)</a:t>
+                        <a:t>지역 경계 합쳐 색칠 (색지도)</a:t>
                       </a:r>
                     </a:p>
                   </a:txBody>
@@ -3811,7 +3811,7 @@
                 </a:solidFill>
                 <a:latin typeface="Malgun Gothic"/>
               </a:rPr>
-              <a:t>※ 괄호 안은 사용한 표준 통계·기계학습 도구 이름 — 몰라도 됨. 핵심은 '무엇을·왜'.</a:t>
+              <a:t>※ 모두 '데이터로 객관적으로 따지기' 위한 표준 통계·기계학습 방법. 이름은 부록 B에 풀어둠 — 지금 외울 필요 없음.</a:t>
             </a:r>
           </a:p>
         </p:txBody>
@@ -3863,7 +3863,7 @@
                 </a:solidFill>
                 <a:latin typeface="Malgun Gothic"/>
               </a:rPr>
-              <a:t>7. 결과 ① — LLAI 순위 (region13, 2024)</a:t>
+              <a:t>7. 결과 ① — 지역별 점수 순위 (2024)</a:t>
             </a:r>
           </a:p>
         </p:txBody>
@@ -3969,7 +3969,7 @@
                 </a:solidFill>
                 <a:latin typeface="Malgun Gothic"/>
               </a:rPr>
-              <a:t>• 서울 91 ≫ 압도</a:t>
+              <a:t>• 서울 91점 ≫ 압도</a:t>
             </a:r>
           </a:p>
           <a:p>
@@ -4033,7 +4033,7 @@
                 </a:solidFill>
                 <a:latin typeface="Malgun Gothic"/>
               </a:rPr>
-              <a:t>– (사건부담 높음)</a:t>
+              <a:t>– (사건이 많아 바쁨)</a:t>
             </a:r>
           </a:p>
         </p:txBody>
@@ -4067,7 +4067,7 @@
                 </a:solidFill>
                 <a:latin typeface="Malgun Gothic"/>
               </a:rPr>
-              <a:t>📊 읽는 법 — 막대 길이=LLAI 점수, 색=클러스터. 서울만 홀로 길고 파랑(별도 그룹), 나머지는 짧고 빨강.</a:t>
+              <a:t>📊 읽는 법 — 막대가 길수록 점수 높음. 서울만 홀로 길고 파랑(별도 그룹), 나머지는 짧고 빨강.</a:t>
             </a:r>
           </a:p>
         </p:txBody>
@@ -4119,7 +4119,7 @@
                 </a:solidFill>
                 <a:latin typeface="Malgun Gothic"/>
               </a:rPr>
-              <a:t>7. 결과 ② — 코로플레스 지도</a:t>
+              <a:t>7. 결과 ② — 지역별 색지도</a:t>
             </a:r>
           </a:p>
         </p:txBody>
@@ -4220,7 +4220,7 @@
                 </a:solidFill>
                 <a:latin typeface="Malgun Gothic"/>
               </a:rPr>
-              <a:t>📊 읽는 법 — 파랑=고접근성, 빨강=저접근성. 서울만 파랑, 전국이 붉음 → 서울 일극 집중.</a:t>
+              <a:t>📊 읽는 법 — 파랑=점수 높음(좋음), 빨강=낮음(나쁨). 서울만 파랑, 전국이 붉음 → 서울 일극 집중.</a:t>
             </a:r>
           </a:p>
         </p:txBody>
@@ -4272,7 +4272,7 @@
                 </a:solidFill>
                 <a:latin typeface="Malgun Gothic"/>
               </a:rPr>
-              <a:t>8. 가설 H2 — 변호사 ↔ 사건 부담</a:t>
+              <a:t>8. 가설 H2 — 변호사 많을수록 덜 바쁘다</a:t>
             </a:r>
           </a:p>
         </p:txBody>
@@ -4378,7 +4378,7 @@
                 </a:solidFill>
                 <a:latin typeface="Malgun Gothic"/>
               </a:rPr>
-              <a:t>• 변호사 많을수록 1인당 사건부담 ↓</a:t>
+              <a:t>• 변호사 많은 곳일수록 1인당 사건부담 ↓</a:t>
             </a:r>
           </a:p>
           <a:p>
@@ -4394,7 +4394,7 @@
                 </a:solidFill>
                 <a:latin typeface="Malgun Gothic"/>
               </a:rPr>
-              <a:t>– 상관계수 r = −0.85</a:t>
+              <a:t>– 두 값의 관계 = −0.85 (강한 반대 방향)</a:t>
             </a:r>
           </a:p>
           <a:p>
@@ -4410,7 +4410,7 @@
                 </a:solidFill>
                 <a:latin typeface="Malgun Gothic"/>
               </a:rPr>
-              <a:t>– r이 음수(−) = 한쪽 늘면 다른 쪽 줆</a:t>
+              <a:t>– '반대 방향' = 한쪽 늘면 다른 쪽 줆</a:t>
             </a:r>
           </a:p>
           <a:p>
@@ -4426,7 +4426,7 @@
                 </a:solidFill>
                 <a:latin typeface="Malgun Gothic"/>
               </a:rPr>
-              <a:t>– → '바람직한' 관계 (변호사 많으면 덜 바쁨)</a:t>
+              <a:t>– → 바람직한 관계 (변호사 많으면 덜 바쁨)</a:t>
             </a:r>
           </a:p>
           <a:p>
@@ -4442,7 +4442,7 @@
                 </a:solidFill>
                 <a:latin typeface="Malgun Gothic"/>
               </a:rPr>
-              <a:t>• 서울은 우하단 극단 이상치</a:t>
+              <a:t>• 서울은 우하단 극단 (많고 + 안 바쁨)</a:t>
             </a:r>
           </a:p>
         </p:txBody>
@@ -4476,7 +4476,7 @@
                 </a:solidFill>
                 <a:latin typeface="Malgun Gothic"/>
               </a:rPr>
-              <a:t>📊 읽는 법 — 오른쪽 아래로 갈수록 좋음. 서울은 맨 오른쪽 아래, 비수도권은 왼쪽 위에 뭉침.</a:t>
+              <a:t>📊 읽는 법 — 오른쪽 아래로 갈수록 좋음. 서울은 맨 오른쪽 아래, 지방은 왼쪽 위에 뭉침.</a:t>
             </a:r>
           </a:p>
         </p:txBody>
@@ -4528,7 +4528,7 @@
                 </a:solidFill>
                 <a:latin typeface="Malgun Gothic"/>
               </a:rPr>
-              <a:t>9. 가설 H4 — 양적 팽창의 함정 ★</a:t>
+              <a:t>9. 가설 H4 — 늘려도 격차는 안 준다 ★</a:t>
             </a:r>
           </a:p>
         </p:txBody>
@@ -4666,7 +4666,7 @@
                 </a:solidFill>
                 <a:latin typeface="Malgun Gothic"/>
               </a:rPr>
-              <a:t>• 서울 비중 71%→76%↑</a:t>
+              <a:t>• 그런데 서울 비중 71%→76%↑</a:t>
             </a:r>
           </a:p>
           <a:p>
@@ -4682,7 +4682,7 @@
                 </a:solidFill>
                 <a:latin typeface="Malgun Gothic"/>
               </a:rPr>
-              <a:t>– 비수도권 全 권역 하락</a:t>
+              <a:t>– 지방은 全 권역 비중 하락</a:t>
             </a:r>
           </a:p>
           <a:p>
@@ -4698,7 +4698,7 @@
                 </a:solidFill>
                 <a:latin typeface="Malgun Gothic"/>
               </a:rPr>
-              <a:t>• 쏠림(HHI) 0.53→0.60</a:t>
+              <a:t>• = 쏠림 더 심해짐</a:t>
             </a:r>
           </a:p>
         </p:txBody>
@@ -4890,7 +4890,7 @@
                 </a:solidFill>
                 <a:latin typeface="Malgun Gothic"/>
               </a:rPr>
-              <a:t>• 부산·울산·제주 상위 부상</a:t>
+              <a:t>• 부산·울산·제주 상위로 올라옴</a:t>
             </a:r>
           </a:p>
           <a:p>
@@ -4922,7 +4922,7 @@
                 </a:solidFill>
                 <a:latin typeface="Malgun Gothic"/>
               </a:rPr>
-              <a:t>• 핵심: '수도권 우위'는</a:t>
+              <a:t>• '수도권이 좋다'는 건</a:t>
             </a:r>
           </a:p>
           <a:p>
@@ -4938,7 +4938,7 @@
                 </a:solidFill>
                 <a:latin typeface="Malgun Gothic"/>
               </a:rPr>
-              <a:t>– 사실상 서울 단독 현상</a:t>
+              <a:t>– 사실 '서울만 좋다'였던 것</a:t>
             </a:r>
           </a:p>
         </p:txBody>
@@ -4972,7 +4972,7 @@
                 </a:solidFill>
                 <a:latin typeface="Malgun Gothic"/>
               </a:rPr>
-              <a:t>📊 읽는 법 — 서울 제외·재정규화(서울 회색). 색 범위 재조정 → 지방 내부 격차가 보임.</a:t>
+              <a:t>📊 읽는 법 — 서울 제외 후 다시 점수화(서울 회색). 색 범위가 넓어져 지방 내부 격차가 보임.</a:t>
             </a:r>
           </a:p>
         </p:txBody>
@@ -5106,7 +5106,7 @@
                 </a:solidFill>
                 <a:latin typeface="Malgun Gothic"/>
               </a:rPr>
-              <a:t>• H2 ✅ 강하게 지지 — 변호사 많을수록 사건부담↓ (r=−0.85)</a:t>
+              <a:t>• H2 ✅ 강하게 지지 — 변호사 많을수록 사건부담↓</a:t>
             </a:r>
           </a:p>
           <a:p>
@@ -5122,7 +5122,7 @@
                 </a:solidFill>
                 <a:latin typeface="Malgun Gothic"/>
               </a:rPr>
-              <a:t>• H4 ✅ 지지 — 변호사 3.4배↑에도 서울 집중 심화 + 법률구조 격차 확대</a:t>
+              <a:t>• H4 ✅ 지지 — 변호사 3.4배↑에도 서울 쏠림 심해짐</a:t>
             </a:r>
           </a:p>
           <a:p>
@@ -5138,7 +5138,7 @@
                 </a:solidFill>
                 <a:latin typeface="Malgun Gothic"/>
               </a:rPr>
-              <a:t>• H1 △ 방향만 일치 — 수도권 1인당 인구 적음, 단 표본 작아 비유의</a:t>
+              <a:t>• H1 △ 방향만 맞음 — 수도권이 유리하나 표본 작아 확정 못 함</a:t>
             </a:r>
           </a:p>
           <a:p>
@@ -5154,7 +5154,7 @@
                 </a:solidFill>
                 <a:latin typeface="Malgun Gothic"/>
               </a:rPr>
-              <a:t>• H3 △ 약함 — 소득(GRDP)과 접근성 상관 약함</a:t>
+              <a:t>• H3 △ 약함 — 소득과 접근성의 관계는 뚜렷하지 않음</a:t>
             </a:r>
           </a:p>
           <a:p>
@@ -5170,7 +5170,7 @@
                 </a:solidFill>
                 <a:latin typeface="Malgun Gothic"/>
               </a:rPr>
-              <a:t>– 표본 작음(권역 10~13개) → 통계 검정력 한계 명시</a:t>
+              <a:t>– 권역이 10~13개로 적어 통계적 확신에는 한계 (정직히 명시)</a:t>
             </a:r>
           </a:p>
         </p:txBody>
@@ -5304,7 +5304,7 @@
                 </a:solidFill>
                 <a:latin typeface="Malgun Gothic"/>
               </a:rPr>
-              <a:t>• 변호사 자원의 서울 일극 집중이 격차의 핵심 동인</a:t>
+              <a:t>• 변호사 자원의 서울 일극 집중이 격차의 핵심 원인</a:t>
             </a:r>
           </a:p>
           <a:p>
@@ -5320,7 +5320,7 @@
                 </a:solidFill>
                 <a:latin typeface="Malgun Gothic"/>
               </a:rPr>
-              <a:t>• 인구 대비·사건부담이 접근성을 좌우 (인천=수도권인데 하위)</a:t>
+              <a:t>• '수도권이냐'보다 인구 대비·사건부담이 접근성을 좌우 (인천=수도권인데 하위)</a:t>
             </a:r>
           </a:p>
           <a:p>
@@ -5336,7 +5336,7 @@
                 </a:solidFill>
                 <a:latin typeface="Malgun Gothic"/>
               </a:rPr>
-              <a:t>• 양적 팽창만으로는 격차 해소 안 됨</a:t>
+              <a:t>• 변호사를 늘리는 것만으로는 격차가 안 줄어듦</a:t>
             </a:r>
           </a:p>
           <a:p>
@@ -5368,7 +5368,7 @@
                 </a:solidFill>
                 <a:latin typeface="Malgun Gothic"/>
               </a:rPr>
-              <a:t>– 지방 변호사 유치 인센티브 / 공단 자원 비수도권 우선 배치</a:t>
+              <a:t>– 지방 변호사 유치 인센티브 / 법률구조 자원 비수도권 우선 배치</a:t>
             </a:r>
           </a:p>
           <a:p>
@@ -5384,7 +5384,7 @@
                 </a:solidFill>
                 <a:latin typeface="Malgun Gothic"/>
               </a:rPr>
-              <a:t>– 사건부담 높은 권역 인력 보강 / 로스쿨 정원·배치 연계</a:t>
+              <a:t>– 사건 많은 지역 법원 인력 보강 / 로스쿨 정원·배치 연계</a:t>
             </a:r>
           </a:p>
         </p:txBody>
@@ -5518,7 +5518,7 @@
                 </a:solidFill>
                 <a:latin typeface="Malgun Gothic"/>
               </a:rPr>
-              <a:t>• 변호사 2시점(2009·현재) — 연속 시계열은 변호사백서 PDF 보강 필요</a:t>
+              <a:t>• 변호사 데이터가 2시점(2009·현재) — 매년 시계열은 추가 수집 필요</a:t>
             </a:r>
           </a:p>
           <a:p>
@@ -5534,7 +5534,7 @@
                 </a:solidFill>
                 <a:latin typeface="Malgun Gothic"/>
               </a:rPr>
-              <a:t>• 표본이 작아 통계적 검정력 제한</a:t>
+              <a:t>• 권역이 적어 통계적 검정력 제한</a:t>
             </a:r>
           </a:p>
           <a:p>
@@ -5550,7 +5550,7 @@
                 </a:solidFill>
                 <a:latin typeface="Malgun Gothic"/>
               </a:rPr>
-              <a:t>• A3 공단 10도단위 → region13에선 인구비 근사배분</a:t>
+              <a:t>• 법률구조 데이터가 거친 단위(10도단위)라 일부 권역은 근사 처리</a:t>
             </a:r>
           </a:p>
           <a:p>
@@ -5566,7 +5566,7 @@
                 </a:solidFill>
                 <a:latin typeface="Malgun Gothic"/>
               </a:rPr>
-              <a:t>• 향후: 코로플레스 대시보드 고도화, 시계열 LLAI</a:t>
+              <a:t>• 향후: 인터랙티브 대시보드 고도화, 연도별 점수 추적</a:t>
             </a:r>
           </a:p>
         </p:txBody>
@@ -5748,7 +5748,7 @@
                 </a:solidFill>
                 <a:latin typeface="Malgun Gothic"/>
               </a:rPr>
-              <a:t>• 외부 차용은 '공개 raw data·경계 파일'뿐, 모두 출처 명시</a:t>
+              <a:t>• 외부 차용은 '공개 데이터·지도파일'뿐, 모두 출처 명시</a:t>
             </a:r>
           </a:p>
           <a:p>
@@ -5764,7 +5764,7 @@
                 </a:solidFill>
                 <a:latin typeface="Malgun Gothic"/>
               </a:rPr>
-              <a:t>– KOSIS·사법연감·공단·변협 / GeoJSON / 2009 변호사분포(법률저널)</a:t>
+              <a:t>– KOSIS·사법연감·공단·변협 / 지도(GeoJSON) / 2009 변호사분포(법률저널)</a:t>
             </a:r>
           </a:p>
           <a:p>
@@ -5832,7 +5832,7 @@
                 </a:solidFill>
                 <a:latin typeface="Malgun Gothic"/>
               </a:rPr>
-              <a:t>핵심 요약 — 한 눈에 보기</a:t>
+              <a:t>이 발표, 한 줄로 말하면</a:t>
             </a:r>
           </a:p>
         </p:txBody>
@@ -5880,250 +5880,147 @@
           </a:p>
         </p:txBody>
       </p:sp>
-      <p:graphicFrame>
-        <p:nvGraphicFramePr>
-          <p:cNvPr id="4" name="Table 3"/>
-          <p:cNvGraphicFramePr>
-            <a:graphicFrameLocks noGrp="1"/>
-          </p:cNvGraphicFramePr>
+      <p:sp>
+        <p:nvSpPr>
+          <p:cNvPr id="4" name="Rounded Rectangle 3"/>
+          <p:cNvSpPr/>
           <p:nvPr/>
-        </p:nvGraphicFramePr>
-        <p:xfrm>
-          <a:off x="640080" y="1645920"/>
-          <a:ext cx="10881360" cy="4206240"/>
-        </p:xfrm>
-        <a:graphic>
-          <a:graphicData uri="http://schemas.openxmlformats.org/drawingml/2006/table">
-            <a:tbl>
-              <a:tblPr firstRow="1" bandRow="1">
-                <a:tableStyleId>{5C22544A-7EE6-4342-B048-85BDC9FD1C3A}</a:tableStyleId>
-              </a:tblPr>
-              <a:tblGrid>
-                <a:gridCol w="1645920"/>
-                <a:gridCol w="9235440"/>
-              </a:tblGrid>
-              <a:tr h="701040">
-                <a:tc>
-                  <a:txBody>
-                    <a:bodyPr/>
-                    <a:lstStyle/>
-                    <a:p>
-                      <a:pPr algn="ctr"/>
-                      <a:r>
-                        <a:rPr sz="1500" b="1">
-                          <a:solidFill>
-                            <a:srgbClr val="FFFFFF"/>
-                          </a:solidFill>
-                          <a:latin typeface="Malgun Gothic"/>
-                        </a:rPr>
-                        <a:t>항목</a:t>
-                      </a:r>
-                    </a:p>
-                  </a:txBody>
-                  <a:tcPr anchor="ctr">
-                    <a:solidFill>
-                      <a:srgbClr val="1F3A5F"/>
-                    </a:solidFill>
-                  </a:tcPr>
-                </a:tc>
-                <a:tc>
-                  <a:txBody>
-                    <a:bodyPr/>
-                    <a:lstStyle/>
-                    <a:p>
-                      <a:pPr algn="l"/>
-                      <a:r>
-                        <a:rPr sz="1500" b="1">
-                          <a:solidFill>
-                            <a:srgbClr val="FFFFFF"/>
-                          </a:solidFill>
-                          <a:latin typeface="Malgun Gothic"/>
-                        </a:rPr>
-                        <a:t>내용</a:t>
-                      </a:r>
-                    </a:p>
-                  </a:txBody>
-                  <a:tcPr anchor="ctr">
-                    <a:solidFill>
-                      <a:srgbClr val="1F3A5F"/>
-                    </a:solidFill>
-                  </a:tcPr>
-                </a:tc>
-              </a:tr>
-              <a:tr h="701040">
-                <a:tc>
-                  <a:txBody>
-                    <a:bodyPr/>
-                    <a:lstStyle/>
-                    <a:p>
-                      <a:pPr algn="ctr"/>
-                      <a:r>
-                        <a:rPr sz="1500">
-                          <a:latin typeface="Malgun Gothic"/>
-                        </a:rPr>
-                        <a:t>문제</a:t>
-                      </a:r>
-                    </a:p>
-                  </a:txBody>
-                  <a:tcPr anchor="ctr"/>
-                </a:tc>
-                <a:tc>
-                  <a:txBody>
-                    <a:bodyPr/>
-                    <a:lstStyle/>
-                    <a:p>
-                      <a:pPr algn="l"/>
-                      <a:r>
-                        <a:rPr sz="1500">
-                          <a:latin typeface="Malgun Gothic"/>
-                        </a:rPr>
-                        <a:t>변호사·법원·법률구조 자원의 지역별 접근성 불균형 정량화</a:t>
-                      </a:r>
-                    </a:p>
-                  </a:txBody>
-                  <a:tcPr anchor="ctr"/>
-                </a:tc>
-              </a:tr>
-              <a:tr h="701040">
-                <a:tc>
-                  <a:txBody>
-                    <a:bodyPr/>
-                    <a:lstStyle/>
-                    <a:p>
-                      <a:pPr algn="ctr"/>
-                      <a:r>
-                        <a:rPr sz="1500">
-                          <a:latin typeface="Malgun Gothic"/>
-                        </a:rPr>
-                        <a:t>방법</a:t>
-                      </a:r>
-                    </a:p>
-                  </a:txBody>
-                  <a:tcPr anchor="ctr"/>
-                </a:tc>
-                <a:tc>
-                  <a:txBody>
-                    <a:bodyPr/>
-                    <a:lstStyle/>
-                    <a:p>
-                      <a:pPr algn="l"/>
-                      <a:r>
-                        <a:rPr sz="1500">
-                          <a:latin typeface="Malgun Gothic"/>
-                        </a:rPr>
-                        <a:t>3개 차원(A1 변호사·A2 사건부담·A3 취약계층) → 단일 지수 LLAI(0~100)</a:t>
-                      </a:r>
-                    </a:p>
-                  </a:txBody>
-                  <a:tcPr anchor="ctr"/>
-                </a:tc>
-              </a:tr>
-              <a:tr h="701040">
-                <a:tc>
-                  <a:txBody>
-                    <a:bodyPr/>
-                    <a:lstStyle/>
-                    <a:p>
-                      <a:pPr algn="ctr"/>
-                      <a:r>
-                        <a:rPr sz="1500">
-                          <a:latin typeface="Malgun Gothic"/>
-                        </a:rPr>
-                        <a:t>데이터</a:t>
-                      </a:r>
-                    </a:p>
-                  </a:txBody>
-                  <a:tcPr anchor="ctr"/>
-                </a:tc>
-                <a:tc>
-                  <a:txBody>
-                    <a:bodyPr/>
-                    <a:lstStyle/>
-                    <a:p>
-                      <a:pPr algn="l"/>
-                      <a:r>
-                        <a:rPr sz="1500">
-                          <a:latin typeface="Malgun Gothic"/>
-                        </a:rPr>
-                        <a:t>변협·사법연감·공단·KOSIS / 13권역·10도단위 / 기준 2024</a:t>
-                      </a:r>
-                    </a:p>
-                  </a:txBody>
-                  <a:tcPr anchor="ctr"/>
-                </a:tc>
-              </a:tr>
-              <a:tr h="701040">
-                <a:tc>
-                  <a:txBody>
-                    <a:bodyPr/>
-                    <a:lstStyle/>
-                    <a:p>
-                      <a:pPr algn="ctr"/>
-                      <a:r>
-                        <a:rPr sz="1500">
-                          <a:latin typeface="Malgun Gothic"/>
-                        </a:rPr>
-                        <a:t>핵심 발견</a:t>
-                      </a:r>
-                    </a:p>
-                  </a:txBody>
-                  <a:tcPr anchor="ctr"/>
-                </a:tc>
-                <a:tc>
-                  <a:txBody>
-                    <a:bodyPr/>
-                    <a:lstStyle/>
-                    <a:p>
-                      <a:pPr algn="l"/>
-                      <a:r>
-                        <a:rPr sz="1500">
-                          <a:latin typeface="Malgun Gothic"/>
-                        </a:rPr>
-                        <a:t>① 서울 일극(91 vs 2~24) ② 변호사↑→부담↓(r=−0.85) ③ 수도권우위=서울단독 ④ 변호사 3.4배↑에도 서울집중 71%→76%</a:t>
-                      </a:r>
-                    </a:p>
-                  </a:txBody>
-                  <a:tcPr anchor="ctr"/>
-                </a:tc>
-              </a:tr>
-              <a:tr h="701040">
-                <a:tc>
-                  <a:txBody>
-                    <a:bodyPr/>
-                    <a:lstStyle/>
-                    <a:p>
-                      <a:pPr algn="ctr"/>
-                      <a:r>
-                        <a:rPr sz="1500">
-                          <a:latin typeface="Malgun Gothic"/>
-                        </a:rPr>
-                        <a:t>결론</a:t>
-                      </a:r>
-                    </a:p>
-                  </a:txBody>
-                  <a:tcPr anchor="ctr"/>
-                </a:tc>
-                <a:tc>
-                  <a:txBody>
-                    <a:bodyPr/>
-                    <a:lstStyle/>
-                    <a:p>
-                      <a:pPr algn="l"/>
-                      <a:r>
-                        <a:rPr sz="1500">
-                          <a:latin typeface="Malgun Gothic"/>
-                        </a:rPr>
-                        <a:t>인구 대비·사건부담이 접근성 좌우 / 양적 팽창만으론 격차 해소 안 됨</a:t>
-                      </a:r>
-                    </a:p>
-                  </a:txBody>
-                  <a:tcPr anchor="ctr"/>
-                </a:tc>
-              </a:tr>
-            </a:tbl>
-          </a:graphicData>
-        </a:graphic>
-      </p:graphicFrame>
+        </p:nvSpPr>
+        <p:spPr>
+          <a:xfrm>
+            <a:off x="640080" y="1554480"/>
+            <a:ext cx="10881360" cy="868680"/>
+          </a:xfrm>
+          <a:prstGeom prst="roundRect">
+            <a:avLst/>
+          </a:prstGeom>
+          <a:solidFill>
+            <a:srgbClr val="EDF1F7"/>
+          </a:solidFill>
+          <a:ln>
+            <a:solidFill>
+              <a:srgbClr val="1F3A5F"/>
+            </a:solidFill>
+          </a:ln>
+        </p:spPr>
+        <p:style>
+          <a:lnRef idx="1">
+            <a:schemeClr val="accent1"/>
+          </a:lnRef>
+          <a:fillRef idx="3">
+            <a:schemeClr val="accent1"/>
+          </a:fillRef>
+          <a:effectRef idx="2">
+            <a:schemeClr val="accent1"/>
+          </a:effectRef>
+          <a:fontRef idx="minor">
+            <a:schemeClr val="lt1"/>
+          </a:fontRef>
+        </p:style>
+        <p:txBody>
+          <a:bodyPr rtlCol="0" anchor="ctr" wrap="square"/>
+          <a:lstStyle/>
+          <a:p>
+            <a:pPr algn="ctr"/>
+            <a:r>
+              <a:rPr sz="2200" b="1">
+                <a:solidFill>
+                  <a:srgbClr val="1F3A5F"/>
+                </a:solidFill>
+                <a:latin typeface="Malgun Gothic"/>
+              </a:rPr>
+              <a:t>변호사는 서울에 쏠려 있고, 아무리 늘려도 그 쏠림은 줄지 않는다</a:t>
+            </a:r>
+          </a:p>
+        </p:txBody>
+      </p:sp>
+      <p:sp>
+        <p:nvSpPr>
+          <p:cNvPr id="5" name="TextBox 4"/>
+          <p:cNvSpPr txBox="1"/>
+          <p:nvPr/>
+        </p:nvSpPr>
+        <p:spPr>
+          <a:xfrm>
+            <a:off x="640080" y="2743200"/>
+            <a:ext cx="10972800" cy="4937760"/>
+          </a:xfrm>
+          <a:prstGeom prst="rect">
+            <a:avLst/>
+          </a:prstGeom>
+          <a:noFill/>
+        </p:spPr>
+        <p:txBody>
+          <a:bodyPr wrap="square">
+            <a:spAutoFit/>
+          </a:bodyPr>
+          <a:lstStyle/>
+          <a:p>
+            <a:pPr>
+              <a:spcAft>
+                <a:spcPts val="800"/>
+              </a:spcAft>
+            </a:pPr>
+            <a:r>
+              <a:rPr sz="2200">
+                <a:solidFill>
+                  <a:srgbClr val="222222"/>
+                </a:solidFill>
+                <a:latin typeface="Malgun Gothic"/>
+              </a:rPr>
+              <a:t>• 무엇을 했나 — 법률 도움(변호사·법원·법률구조)이 지역마다 얼마나 다른지</a:t>
+            </a:r>
+          </a:p>
+          <a:p>
+            <a:pPr lvl="1">
+              <a:spcAft>
+                <a:spcPts val="800"/>
+              </a:spcAft>
+            </a:pPr>
+            <a:r>
+              <a:rPr sz="1900">
+                <a:solidFill>
+                  <a:srgbClr val="222222"/>
+                </a:solidFill>
+                <a:latin typeface="Malgun Gothic"/>
+              </a:rPr>
+              <a:t>– 하나의 점수(LLAI, 0~100점)로 환산해 비교</a:t>
+            </a:r>
+          </a:p>
+          <a:p>
+            <a:pPr>
+              <a:spcAft>
+                <a:spcPts val="800"/>
+              </a:spcAft>
+            </a:pPr>
+            <a:r>
+              <a:rPr sz="2200">
+                <a:solidFill>
+                  <a:srgbClr val="222222"/>
+                </a:solidFill>
+                <a:latin typeface="Malgun Gothic"/>
+              </a:rPr>
+              <a:t>• 무엇을 찾았나 — 서울만 점수가 압도적, 지방은 변호사가 적고 더 바쁨</a:t>
+            </a:r>
+          </a:p>
+          <a:p>
+            <a:pPr>
+              <a:spcAft>
+                <a:spcPts val="800"/>
+              </a:spcAft>
+            </a:pPr>
+            <a:r>
+              <a:rPr sz="2200">
+                <a:solidFill>
+                  <a:srgbClr val="222222"/>
+                </a:solidFill>
+                <a:latin typeface="Malgun Gothic"/>
+              </a:rPr>
+              <a:t>• 왜 문제인가 — 변호사가 3배 넘게 늘어도 서울 집중은 오히려 더 심해짐</a:t>
+            </a:r>
+          </a:p>
+        </p:txBody>
+      </p:sp>
     </p:spTree>
   </p:cSld>
   <p:clrMapOvr>
@@ -6228,8 +6125,8 @@
           <p:nvPr/>
         </p:nvGraphicFramePr>
         <p:xfrm>
-          <a:off x="3017520" y="1554480"/>
-          <a:ext cx="6126480" cy="4846320"/>
+          <a:off x="2743200" y="1554480"/>
+          <a:ext cx="6675120" cy="4846320"/>
         </p:xfrm>
         <a:graphic>
           <a:graphicData uri="http://schemas.openxmlformats.org/drawingml/2006/table">
@@ -6238,11 +6135,11 @@
                 <a:tableStyleId>{5C22544A-7EE6-4342-B048-85BDC9FD1C3A}</a:tableStyleId>
               </a:tblPr>
               <a:tblGrid>
-                <a:gridCol w="1225296"/>
-                <a:gridCol w="1225296"/>
-                <a:gridCol w="1225296"/>
-                <a:gridCol w="1225296"/>
-                <a:gridCol w="1225296"/>
+                <a:gridCol w="1335024"/>
+                <a:gridCol w="1335024"/>
+                <a:gridCol w="1335024"/>
+                <a:gridCol w="1335024"/>
+                <a:gridCol w="1335024"/>
               </a:tblGrid>
               <a:tr h="346165">
                 <a:tc>
@@ -6281,7 +6178,7 @@
                           </a:solidFill>
                           <a:latin typeface="Malgun Gothic"/>
                         </a:rPr>
-                        <a:t>A1</a:t>
+                        <a:t>A1 변호사</a:t>
                       </a:r>
                     </a:p>
                   </a:txBody>
@@ -6304,7 +6201,7 @@
                           </a:solidFill>
                           <a:latin typeface="Malgun Gothic"/>
                         </a:rPr>
-                        <a:t>A2</a:t>
+                        <a:t>A2 사건</a:t>
                       </a:r>
                     </a:p>
                   </a:txBody>
@@ -6327,7 +6224,7 @@
                           </a:solidFill>
                           <a:latin typeface="Malgun Gothic"/>
                         </a:rPr>
-                        <a:t>A3</a:t>
+                        <a:t>A3 구조</a:t>
                       </a:r>
                     </a:p>
                   </a:txBody>
@@ -7608,7 +7505,7 @@
                 </a:solidFill>
                 <a:latin typeface="Malgun Gothic"/>
               </a:rPr>
-              <a:t>• 왜 '본안사건'인가 — 전체의 60%가 등기·공탁(비송) → 실질 소송만</a:t>
+              <a:t>• 왜 '본안사건'인가 — 전체의 60%가 등기·공탁(단순 절차) → 실제 재판만</a:t>
             </a:r>
           </a:p>
           <a:p>
@@ -7624,7 +7521,7 @@
                 </a:solidFill>
                 <a:latin typeface="Malgun Gothic"/>
               </a:rPr>
-              <a:t>• 왜 가중치 3종 — 자의성 방지, 어떤 방식이든 서울 1위(강건성)</a:t>
+              <a:t>• 왜 중요도 3종 — 자의성 방지, 어떤 방식이든 서울 1위(강건성)</a:t>
             </a:r>
           </a:p>
           <a:p>
@@ -7640,7 +7537,7 @@
                 </a:solidFill>
                 <a:latin typeface="Malgun Gothic"/>
               </a:rPr>
-              <a:t>• 왜 정규화·방향보정 — 단위 통일(명·건·비율), '클수록 좋음' 일치</a:t>
+              <a:t>• 왜 0~1 환산 — 단위 통일(명·건·비율), '클수록 좋음' 일치</a:t>
             </a:r>
           </a:p>
         </p:txBody>
@@ -7799,7 +7696,7 @@
                           </a:solidFill>
                           <a:latin typeface="Malgun Gothic"/>
                         </a:rPr>
-                        <a:t>뜻</a:t>
+                        <a:t>쉽게 말하면</a:t>
                       </a:r>
                     </a:p>
                   </a:txBody>
@@ -7837,7 +7734,7 @@
                         <a:rPr sz="1100">
                           <a:latin typeface="Malgun Gothic"/>
                         </a:rPr>
-                        <a:t>권리·의무를 본격 판단하는 소송(민사본안·형사공판·가사). 변호사 업무량 핵심</a:t>
+                        <a:t>실제로 다투는 재판 사건(민사·형사·가사). 변호사가 실제 일하는 사건</a:t>
                       </a:r>
                     </a:p>
                   </a:txBody>
@@ -7871,7 +7768,7 @@
                         <a:rPr sz="1100">
                           <a:latin typeface="Malgun Gothic"/>
                         </a:rPr>
-                        <a:t>등기·공탁 등 분쟁 판단이 아닌 절차 사건 → A2에서 제외</a:t>
+                        <a:t>등기·공탁처럼 다툼 없는 단순 행정 절차 → 분석에서 제외</a:t>
                       </a:r>
                     </a:p>
                   </a:txBody>
@@ -7905,7 +7802,7 @@
                         <a:rPr sz="1100">
                           <a:latin typeface="Malgun Gothic"/>
                         </a:rPr>
-                        <a:t>실제 영업 중인 변호사(휴업·미개업 제외). A1 분자</a:t>
+                        <a:t>실제 영업 중인 변호사(쉬는 사람 제외)</a:t>
                       </a:r>
                     </a:p>
                   </a:txBody>
@@ -7939,7 +7836,7 @@
                         <a:rPr sz="1100">
                           <a:latin typeface="Malgun Gothic"/>
                         </a:rPr>
-                        <a:t>경제적 약자 대상 무료·저비용 법률 지원(공단). A3 분자</a:t>
+                        <a:t>돈 없는 사람에게 무료·저비용으로 법률 도와주는 제도(공단)</a:t>
                       </a:r>
                     </a:p>
                   </a:txBody>
@@ -7957,7 +7854,7 @@
                         <a:rPr sz="1100">
                           <a:latin typeface="Malgun Gothic"/>
                         </a:rPr>
-                        <a:t>기초생활수급자</a:t>
+                        <a:t>정규화</a:t>
                       </a:r>
                     </a:p>
                   </a:txBody>
@@ -7973,7 +7870,7 @@
                         <a:rPr sz="1100">
                           <a:latin typeface="Malgun Gothic"/>
                         </a:rPr>
-                        <a:t>국민기초생활보장 수급자 = '저소득층' 대리지표(A3 분모)</a:t>
+                        <a:t>단위 다른 값을 0~1로 맞춰 비교 가능하게 만들기</a:t>
                       </a:r>
                     </a:p>
                   </a:txBody>
@@ -8007,7 +7904,7 @@
                         <a:rPr sz="1100">
                           <a:latin typeface="Malgun Gothic"/>
                         </a:rPr>
-                        <a:t>지역 간 차이(정보량)가 큰 지표에 큰 가중치를 주는 객관적 가중법</a:t>
+                        <a:t>지역마다 차이가 큰(=중요한) 지표에 비중을 더 주는 방식</a:t>
                       </a:r>
                     </a:p>
                   </a:txBody>
@@ -8025,7 +7922,7 @@
                         <a:rPr sz="1100">
                           <a:latin typeface="Malgun Gothic"/>
                         </a:rPr>
-                        <a:t>HHI(허핀달지수)</a:t>
+                        <a:t>HHI / 변동계수</a:t>
                       </a:r>
                     </a:p>
                   </a:txBody>
@@ -8041,7 +7938,7 @@
                         <a:rPr sz="1100">
                           <a:latin typeface="Malgun Gothic"/>
                         </a:rPr>
-                        <a:t>점유율 제곱의 합(0~1). 클수록 특정 지역 집중 심화 = '쏠림'</a:t>
+                        <a:t>한 곳에 얼마나 쏠렸나 / 격차가 얼마나 큰가를 나타내는 수치</a:t>
                       </a:r>
                     </a:p>
                   </a:txBody>
@@ -8059,7 +7956,7 @@
                         <a:rPr sz="1100">
                           <a:latin typeface="Malgun Gothic"/>
                         </a:rPr>
-                        <a:t>변동계수(CV)</a:t>
+                        <a:t>군집분석(K-means)</a:t>
                       </a:r>
                     </a:p>
                   </a:txBody>
@@ -8075,7 +7972,7 @@
                         <a:rPr sz="1100">
                           <a:latin typeface="Malgun Gothic"/>
                         </a:rPr>
-                        <a:t>표준편차 ÷ 평균. 단위 무관한 상대적 격차 크기</a:t>
+                        <a:t>비슷한 지역끼리 자동으로 묶는 방법</a:t>
                       </a:r>
                     </a:p>
                   </a:txBody>
@@ -8093,7 +7990,7 @@
                         <a:rPr sz="1100">
                           <a:latin typeface="Malgun Gothic"/>
                         </a:rPr>
-                        <a:t>K-means / Silhouette</a:t>
+                        <a:t>코로플레스</a:t>
                       </a:r>
                     </a:p>
                   </a:txBody>
@@ -8109,7 +8006,7 @@
                         <a:rPr sz="1100">
                           <a:latin typeface="Malgun Gothic"/>
                         </a:rPr>
-                        <a:t>비슷한 것끼리 묶기 / 잘 묶였는지 점수(묶음 수 결정)</a:t>
+                        <a:t>지역별 값을 색 진하기로 보여주는 지도</a:t>
                       </a:r>
                     </a:p>
                   </a:txBody>
@@ -8412,7 +8309,7 @@
                 </a:solidFill>
                 <a:latin typeface="Malgun Gothic"/>
               </a:rPr>
-              <a:t>2. 접근 방법 — 종합 법률 접근성 지수(LLAI)</a:t>
+              <a:t>2. 어떻게 측정하나 — 법률 접근성 점수(LLAI)</a:t>
             </a:r>
           </a:p>
         </p:txBody>
@@ -8462,13 +8359,378 @@
       </p:sp>
       <p:sp>
         <p:nvSpPr>
-          <p:cNvPr id="4" name="TextBox 3"/>
+          <p:cNvPr id="4" name="Rounded Rectangle 3"/>
+          <p:cNvSpPr/>
+          <p:nvPr/>
+        </p:nvSpPr>
+        <p:spPr>
+          <a:xfrm>
+            <a:off x="640080" y="1417320"/>
+            <a:ext cx="10881360" cy="868680"/>
+          </a:xfrm>
+          <a:prstGeom prst="roundRect">
+            <a:avLst/>
+          </a:prstGeom>
+          <a:solidFill>
+            <a:srgbClr val="EDF1F7"/>
+          </a:solidFill>
+          <a:ln>
+            <a:solidFill>
+              <a:srgbClr val="1F3A5F"/>
+            </a:solidFill>
+          </a:ln>
+        </p:spPr>
+        <p:style>
+          <a:lnRef idx="1">
+            <a:schemeClr val="accent1"/>
+          </a:lnRef>
+          <a:fillRef idx="3">
+            <a:schemeClr val="accent1"/>
+          </a:fillRef>
+          <a:effectRef idx="2">
+            <a:schemeClr val="accent1"/>
+          </a:effectRef>
+          <a:fontRef idx="minor">
+            <a:schemeClr val="lt1"/>
+          </a:fontRef>
+        </p:style>
+        <p:txBody>
+          <a:bodyPr rtlCol="0" anchor="ctr" wrap="square"/>
+          <a:lstStyle/>
+          <a:p>
+            <a:pPr algn="ctr"/>
+            <a:r>
+              <a:rPr sz="1900" b="1">
+                <a:solidFill>
+                  <a:srgbClr val="1F3A5F"/>
+                </a:solidFill>
+                <a:latin typeface="Malgun Gothic"/>
+              </a:rPr>
+              <a:t>세 가지를 각각 0~100점으로 바꿔, 중요도만큼 섞어 하나의 점수로</a:t>
+            </a:r>
+          </a:p>
+        </p:txBody>
+      </p:sp>
+      <p:sp>
+        <p:nvSpPr>
+          <p:cNvPr id="5" name="Rounded Rectangle 4"/>
+          <p:cNvSpPr/>
+          <p:nvPr/>
+        </p:nvSpPr>
+        <p:spPr>
+          <a:xfrm>
+            <a:off x="822960" y="2743200"/>
+            <a:ext cx="2834640" cy="1371600"/>
+          </a:xfrm>
+          <a:prstGeom prst="roundRect">
+            <a:avLst/>
+          </a:prstGeom>
+          <a:solidFill>
+            <a:srgbClr val="1F3A5F"/>
+          </a:solidFill>
+          <a:ln>
+            <a:solidFill>
+              <a:srgbClr val="1F3A5F"/>
+            </a:solidFill>
+          </a:ln>
+        </p:spPr>
+        <p:style>
+          <a:lnRef idx="1">
+            <a:schemeClr val="accent1"/>
+          </a:lnRef>
+          <a:fillRef idx="3">
+            <a:schemeClr val="accent1"/>
+          </a:fillRef>
+          <a:effectRef idx="2">
+            <a:schemeClr val="accent1"/>
+          </a:effectRef>
+          <a:fontRef idx="minor">
+            <a:schemeClr val="lt1"/>
+          </a:fontRef>
+        </p:style>
+        <p:txBody>
+          <a:bodyPr rtlCol="0" anchor="ctr" wrap="square"/>
+          <a:lstStyle/>
+          <a:p>
+            <a:pPr algn="ctr"/>
+            <a:r>
+              <a:rPr sz="1400" b="1">
+                <a:solidFill>
+                  <a:srgbClr val="FFFFFF"/>
+                </a:solidFill>
+                <a:latin typeface="Malgun Gothic"/>
+              </a:rPr>
+              <a:t>① 변호사 충분한가</a:t>
+            </a:r>
+          </a:p>
+          <a:p>
+            <a:pPr algn="ctr"/>
+            <a:r>
+              <a:rPr sz="1400" b="1">
+                <a:solidFill>
+                  <a:srgbClr val="FFFFFF"/>
+                </a:solidFill>
+                <a:latin typeface="Malgun Gothic"/>
+              </a:rPr>
+              <a:t>(인구 대비 변호사 수)</a:t>
+            </a:r>
+          </a:p>
+        </p:txBody>
+      </p:sp>
+      <p:sp>
+        <p:nvSpPr>
+          <p:cNvPr id="6" name="Rounded Rectangle 5"/>
+          <p:cNvSpPr/>
+          <p:nvPr/>
+        </p:nvSpPr>
+        <p:spPr>
+          <a:xfrm>
+            <a:off x="3886200" y="2743200"/>
+            <a:ext cx="2834640" cy="1371600"/>
+          </a:xfrm>
+          <a:prstGeom prst="roundRect">
+            <a:avLst/>
+          </a:prstGeom>
+          <a:solidFill>
+            <a:srgbClr val="1F3A5F"/>
+          </a:solidFill>
+          <a:ln>
+            <a:solidFill>
+              <a:srgbClr val="1F3A5F"/>
+            </a:solidFill>
+          </a:ln>
+        </p:spPr>
+        <p:style>
+          <a:lnRef idx="1">
+            <a:schemeClr val="accent1"/>
+          </a:lnRef>
+          <a:fillRef idx="3">
+            <a:schemeClr val="accent1"/>
+          </a:fillRef>
+          <a:effectRef idx="2">
+            <a:schemeClr val="accent1"/>
+          </a:effectRef>
+          <a:fontRef idx="minor">
+            <a:schemeClr val="lt1"/>
+          </a:fontRef>
+        </p:style>
+        <p:txBody>
+          <a:bodyPr rtlCol="0" anchor="ctr" wrap="square"/>
+          <a:lstStyle/>
+          <a:p>
+            <a:pPr algn="ctr"/>
+            <a:r>
+              <a:rPr sz="1400" b="1">
+                <a:solidFill>
+                  <a:srgbClr val="FFFFFF"/>
+                </a:solidFill>
+                <a:latin typeface="Malgun Gothic"/>
+              </a:rPr>
+              <a:t>② 안 바쁜가</a:t>
+            </a:r>
+          </a:p>
+          <a:p>
+            <a:pPr algn="ctr"/>
+            <a:r>
+              <a:rPr sz="1400" b="1">
+                <a:solidFill>
+                  <a:srgbClr val="FFFFFF"/>
+                </a:solidFill>
+                <a:latin typeface="Malgun Gothic"/>
+              </a:rPr>
+              <a:t>(변호사 1인당 사건 수↓)</a:t>
+            </a:r>
+          </a:p>
+        </p:txBody>
+      </p:sp>
+      <p:sp>
+        <p:nvSpPr>
+          <p:cNvPr id="7" name="Rounded Rectangle 6"/>
+          <p:cNvSpPr/>
+          <p:nvPr/>
+        </p:nvSpPr>
+        <p:spPr>
+          <a:xfrm>
+            <a:off x="6949440" y="2743200"/>
+            <a:ext cx="2834640" cy="1371600"/>
+          </a:xfrm>
+          <a:prstGeom prst="roundRect">
+            <a:avLst/>
+          </a:prstGeom>
+          <a:solidFill>
+            <a:srgbClr val="1F3A5F"/>
+          </a:solidFill>
+          <a:ln>
+            <a:solidFill>
+              <a:srgbClr val="1F3A5F"/>
+            </a:solidFill>
+          </a:ln>
+        </p:spPr>
+        <p:style>
+          <a:lnRef idx="1">
+            <a:schemeClr val="accent1"/>
+          </a:lnRef>
+          <a:fillRef idx="3">
+            <a:schemeClr val="accent1"/>
+          </a:fillRef>
+          <a:effectRef idx="2">
+            <a:schemeClr val="accent1"/>
+          </a:effectRef>
+          <a:fontRef idx="minor">
+            <a:schemeClr val="lt1"/>
+          </a:fontRef>
+        </p:style>
+        <p:txBody>
+          <a:bodyPr rtlCol="0" anchor="ctr" wrap="square"/>
+          <a:lstStyle/>
+          <a:p>
+            <a:pPr algn="ctr"/>
+            <a:r>
+              <a:rPr sz="1400" b="1">
+                <a:solidFill>
+                  <a:srgbClr val="FFFFFF"/>
+                </a:solidFill>
+                <a:latin typeface="Malgun Gothic"/>
+              </a:rPr>
+              <a:t>③ 약자도 받나</a:t>
+            </a:r>
+          </a:p>
+          <a:p>
+            <a:pPr algn="ctr"/>
+            <a:r>
+              <a:rPr sz="1400" b="1">
+                <a:solidFill>
+                  <a:srgbClr val="FFFFFF"/>
+                </a:solidFill>
+                <a:latin typeface="Malgun Gothic"/>
+              </a:rPr>
+              <a:t>(법률구조 이용)</a:t>
+            </a:r>
+          </a:p>
+        </p:txBody>
+      </p:sp>
+      <p:sp>
+        <p:nvSpPr>
+          <p:cNvPr id="8" name="TextBox 7"/>
           <p:cNvSpPr txBox="1"/>
           <p:nvPr/>
         </p:nvSpPr>
         <p:spPr>
           <a:xfrm>
-            <a:off x="640080" y="1554480"/>
+            <a:off x="9372600" y="3108960"/>
+            <a:ext cx="548640" cy="548640"/>
+          </a:xfrm>
+          <a:prstGeom prst="rect">
+            <a:avLst/>
+          </a:prstGeom>
+          <a:noFill/>
+        </p:spPr>
+        <p:txBody>
+          <a:bodyPr wrap="none">
+            <a:spAutoFit/>
+          </a:bodyPr>
+          <a:lstStyle/>
+          <a:p>
+            <a:pPr algn="ctr"/>
+            <a:r>
+              <a:rPr sz="2200">
+                <a:solidFill>
+                  <a:srgbClr val="C44E52"/>
+                </a:solidFill>
+                <a:latin typeface="Malgun Gothic"/>
+              </a:rPr>
+              <a:t>▶</a:t>
+            </a:r>
+          </a:p>
+        </p:txBody>
+      </p:sp>
+      <p:sp>
+        <p:nvSpPr>
+          <p:cNvPr id="9" name="Rounded Rectangle 8"/>
+          <p:cNvSpPr/>
+          <p:nvPr/>
+        </p:nvSpPr>
+        <p:spPr>
+          <a:xfrm>
+            <a:off x="9966960" y="2651760"/>
+            <a:ext cx="1828800" cy="1554480"/>
+          </a:xfrm>
+          <a:prstGeom prst="roundRect">
+            <a:avLst/>
+          </a:prstGeom>
+          <a:solidFill>
+            <a:srgbClr val="C44E52"/>
+          </a:solidFill>
+          <a:ln>
+            <a:solidFill>
+              <a:srgbClr val="1F3A5F"/>
+            </a:solidFill>
+          </a:ln>
+        </p:spPr>
+        <p:style>
+          <a:lnRef idx="1">
+            <a:schemeClr val="accent1"/>
+          </a:lnRef>
+          <a:fillRef idx="3">
+            <a:schemeClr val="accent1"/>
+          </a:fillRef>
+          <a:effectRef idx="2">
+            <a:schemeClr val="accent1"/>
+          </a:effectRef>
+          <a:fontRef idx="minor">
+            <a:schemeClr val="lt1"/>
+          </a:fontRef>
+        </p:style>
+        <p:txBody>
+          <a:bodyPr rtlCol="0" anchor="ctr" wrap="square"/>
+          <a:lstStyle/>
+          <a:p>
+            <a:pPr algn="ctr"/>
+            <a:r>
+              <a:rPr sz="1400" b="1">
+                <a:solidFill>
+                  <a:srgbClr val="FFFFFF"/>
+                </a:solidFill>
+                <a:latin typeface="Malgun Gothic"/>
+              </a:rPr>
+              <a:t>법률 접근성 점수</a:t>
+            </a:r>
+          </a:p>
+          <a:p>
+            <a:pPr algn="ctr"/>
+            <a:r>
+              <a:rPr sz="1400" b="1">
+                <a:solidFill>
+                  <a:srgbClr val="FFFFFF"/>
+                </a:solidFill>
+                <a:latin typeface="Malgun Gothic"/>
+              </a:rPr>
+              <a:t>LLAI</a:t>
+            </a:r>
+          </a:p>
+          <a:p>
+            <a:pPr algn="ctr"/>
+            <a:r>
+              <a:rPr sz="1400" b="1">
+                <a:solidFill>
+                  <a:srgbClr val="FFFFFF"/>
+                </a:solidFill>
+                <a:latin typeface="Malgun Gothic"/>
+              </a:rPr>
+              <a:t>0~100점</a:t>
+            </a:r>
+          </a:p>
+        </p:txBody>
+      </p:sp>
+      <p:sp>
+        <p:nvSpPr>
+          <p:cNvPr id="10" name="TextBox 9"/>
+          <p:cNvSpPr txBox="1"/>
+          <p:nvPr/>
+        </p:nvSpPr>
+        <p:spPr>
+          <a:xfrm>
+            <a:off x="640080" y="4480560"/>
             <a:ext cx="10972800" cy="4937760"/>
           </a:xfrm>
           <a:prstGeom prst="rect">
@@ -8488,61 +8750,13 @@
               </a:spcAft>
             </a:pPr>
             <a:r>
-              <a:rPr sz="1900">
+              <a:rPr sz="1800">
                 <a:solidFill>
                   <a:srgbClr val="222222"/>
                 </a:solidFill>
                 <a:latin typeface="Malgun Gothic"/>
               </a:rPr>
-              <a:t>• 3개 차원을 하나의 지수로 통합 (0~100점)</a:t>
-            </a:r>
-          </a:p>
-          <a:p>
-            <a:pPr lvl="1">
-              <a:spcAft>
-                <a:spcPts val="800"/>
-              </a:spcAft>
-            </a:pPr>
-            <a:r>
-              <a:rPr sz="1600">
-                <a:solidFill>
-                  <a:srgbClr val="222222"/>
-                </a:solidFill>
-                <a:latin typeface="Malgun Gothic"/>
-              </a:rPr>
-              <a:t>– A1 변호사 접근성 — 인구 10만 명당 변호사 수 (↑ 좋음)</a:t>
-            </a:r>
-          </a:p>
-          <a:p>
-            <a:pPr lvl="1">
-              <a:spcAft>
-                <a:spcPts val="800"/>
-              </a:spcAft>
-            </a:pPr>
-            <a:r>
-              <a:rPr sz="1600">
-                <a:solidFill>
-                  <a:srgbClr val="222222"/>
-                </a:solidFill>
-                <a:latin typeface="Malgun Gothic"/>
-              </a:rPr>
-              <a:t>– A2 사건 부담 — 변호사 1인당 법원 본안사건 수 (↓ 좋음)</a:t>
-            </a:r>
-          </a:p>
-          <a:p>
-            <a:pPr lvl="1">
-              <a:spcAft>
-                <a:spcPts val="800"/>
-              </a:spcAft>
-            </a:pPr>
-            <a:r>
-              <a:rPr sz="1600">
-                <a:solidFill>
-                  <a:srgbClr val="222222"/>
-                </a:solidFill>
-                <a:latin typeface="Malgun Gothic"/>
-              </a:rPr>
-              <a:t>– A3 취약계층 접근성 — 법률구조 건수 / 저소득층 (↑ 좋음)</a:t>
+              <a:t>• 점수가 높을수록 그 지역의 법률 접근성이 좋다는 뜻</a:t>
             </a:r>
           </a:p>
           <a:p>
@@ -8552,61 +8766,47 @@
               </a:spcAft>
             </a:pPr>
             <a:r>
-              <a:rPr sz="1900">
+              <a:rPr sz="1800">
                 <a:solidFill>
                   <a:srgbClr val="222222"/>
                 </a:solidFill>
                 <a:latin typeface="Malgun Gothic"/>
               </a:rPr>
-              <a:t>• LLAI = w₁·A1n + w₂·(1−A2n) + w₃·A3n</a:t>
-            </a:r>
-          </a:p>
-          <a:p>
-            <a:pPr lvl="1">
-              <a:spcAft>
-                <a:spcPts val="800"/>
-              </a:spcAft>
-            </a:pPr>
-            <a:r>
-              <a:rPr sz="1600">
-                <a:solidFill>
-                  <a:srgbClr val="222222"/>
-                </a:solidFill>
-                <a:latin typeface="Malgun Gothic"/>
-              </a:rPr>
-              <a:t>– A1n·A2n·A3n = 각 지표를 0~1로 맞춘 값 (전국 최하=0, 최고=1)</a:t>
-            </a:r>
-          </a:p>
-          <a:p>
-            <a:pPr lvl="1">
-              <a:spcAft>
-                <a:spcPts val="800"/>
-              </a:spcAft>
-            </a:pPr>
-            <a:r>
-              <a:rPr sz="1600">
-                <a:solidFill>
-                  <a:srgbClr val="222222"/>
-                </a:solidFill>
-                <a:latin typeface="Malgun Gothic"/>
-              </a:rPr>
-              <a:t>– A2는 '적을수록 좋아서' 1에서 빼(1−A2n) 방향을 통일</a:t>
-            </a:r>
-          </a:p>
-          <a:p>
-            <a:pPr lvl="1">
-              <a:spcAft>
-                <a:spcPts val="800"/>
-              </a:spcAft>
-            </a:pPr>
-            <a:r>
-              <a:rPr sz="1600">
-                <a:solidFill>
-                  <a:srgbClr val="222222"/>
-                </a:solidFill>
-                <a:latin typeface="Malgun Gothic"/>
-              </a:rPr>
-              <a:t>– w = 가중치(중요도). 균등·엔트로피·PCA 3종으로 강건성 확인</a:t>
+              <a:t>• '중요도(가중치)'는 데이터가 객관적으로 정함 — 사람이 임의로 안 정함</a:t>
+            </a:r>
+          </a:p>
+        </p:txBody>
+      </p:sp>
+      <p:sp>
+        <p:nvSpPr>
+          <p:cNvPr id="11" name="TextBox 10"/>
+          <p:cNvSpPr txBox="1"/>
+          <p:nvPr/>
+        </p:nvSpPr>
+        <p:spPr>
+          <a:xfrm>
+            <a:off x="640080" y="5943600"/>
+            <a:ext cx="10881360" cy="457200"/>
+          </a:xfrm>
+          <a:prstGeom prst="rect">
+            <a:avLst/>
+          </a:prstGeom>
+          <a:noFill/>
+        </p:spPr>
+        <p:txBody>
+          <a:bodyPr wrap="square">
+            <a:spAutoFit/>
+          </a:bodyPr>
+          <a:lstStyle/>
+          <a:p>
+            <a:r>
+              <a:rPr sz="1300" i="1">
+                <a:solidFill>
+                  <a:srgbClr val="555555"/>
+                </a:solidFill>
+                <a:latin typeface="Malgun Gothic"/>
+              </a:rPr>
+              <a:t>※ 정확한 식: LLAI = w₁·A1ⁿ + w₂·(1−A2ⁿ) + w₃·A3ⁿ  (ⁿ = 0~1로 맞춘 값, A2는 적을수록 좋아 1에서 뺌)</a:t>
             </a:r>
           </a:p>
         </p:txBody>
@@ -8792,8 +8992,8 @@
         </p:nvSpPr>
         <p:spPr>
           <a:xfrm>
-            <a:off x="2267712" y="2880360"/>
-            <a:ext cx="320040" cy="548640"/>
+            <a:off x="2221992" y="2880360"/>
+            <a:ext cx="548640" cy="548640"/>
           </a:xfrm>
           <a:prstGeom prst="rect">
             <a:avLst/>
@@ -8905,8 +9105,8 @@
         </p:nvSpPr>
         <p:spPr>
           <a:xfrm>
-            <a:off x="4151376" y="2880360"/>
-            <a:ext cx="320040" cy="548640"/>
+            <a:off x="4105656" y="2880360"/>
+            <a:ext cx="548640" cy="548640"/>
           </a:xfrm>
           <a:prstGeom prst="rect">
             <a:avLst/>
@@ -9018,8 +9218,8 @@
         </p:nvSpPr>
         <p:spPr>
           <a:xfrm>
-            <a:off x="6035040" y="2880360"/>
-            <a:ext cx="320040" cy="548640"/>
+            <a:off x="5989320" y="2880360"/>
+            <a:ext cx="548640" cy="548640"/>
           </a:xfrm>
           <a:prstGeom prst="rect">
             <a:avLst/>
@@ -9131,8 +9331,8 @@
         </p:nvSpPr>
         <p:spPr>
           <a:xfrm>
-            <a:off x="7918704" y="2880360"/>
-            <a:ext cx="320040" cy="548640"/>
+            <a:off x="7872983" y="2880360"/>
+            <a:ext cx="548640" cy="548640"/>
           </a:xfrm>
           <a:prstGeom prst="rect">
             <a:avLst/>
@@ -9232,8 +9432,8 @@
         </p:nvSpPr>
         <p:spPr>
           <a:xfrm>
-            <a:off x="9802368" y="2880360"/>
-            <a:ext cx="320040" cy="548640"/>
+            <a:off x="9756648" y="2880360"/>
+            <a:ext cx="548640" cy="548640"/>
           </a:xfrm>
           <a:prstGeom prst="rect">
             <a:avLst/>
@@ -9375,7 +9575,7 @@
                 </a:solidFill>
                 <a:latin typeface="Malgun Gothic"/>
               </a:rPr>
-              <a:t>• LLAI 산출 후 → 클러스터링 · 가설검정(H1~H4) · 코로플레스 지도</a:t>
+              <a:t>• LLAI 산출 후 → 비슷한 권역 묶기 · 가설 4개 검정 · 지도 시각화</a:t>
             </a:r>
           </a:p>
         </p:txBody>
@@ -9525,7 +9725,7 @@
                 </a:solidFill>
                 <a:latin typeface="Malgun Gothic"/>
               </a:rPr>
-              <a:t>• 난관 1 — 출처별 지역 단위 불일치 → region13 / region10 두 단위 병행</a:t>
+              <a:t>• 난관 1 — 출처별 지역 구분이 제각각 → 13권역 / 10도단위 두 가지로 병행</a:t>
             </a:r>
           </a:p>
           <a:p>
@@ -9541,7 +9741,7 @@
                 </a:solidFill>
                 <a:latin typeface="Malgun Gothic"/>
               </a:rPr>
-              <a:t>• 난관 2 — 공단 PDF·변협 다운로드 불가 → KOSIS 우회 + 웹 스크래핑</a:t>
+              <a:t>• 난관 2 — 공단·변협은 다운로드 불가 → 웹 스크래핑 + KOSIS 우회</a:t>
             </a:r>
           </a:p>
           <a:p>
@@ -9557,7 +9757,7 @@
                 </a:solidFill>
                 <a:latin typeface="Malgun Gothic"/>
               </a:rPr>
-              <a:t>– 신뢰성 검증: 법원관내 인구 합 = KOSIS 인구와 정확히 일치</a:t>
+              <a:t>– 신뢰성 검증: 법원 관내 인구 합 = KOSIS 인구와 정확히 일치</a:t>
             </a:r>
           </a:p>
           <a:p>
@@ -9573,7 +9773,7 @@
                 </a:solidFill>
                 <a:latin typeface="Malgun Gothic"/>
               </a:rPr>
-              <a:t>– 본안사건 합 1,106,526 = 사법연감 전국 본안과 일치</a:t>
+              <a:t>– 법원 사건 합계도 공식 통계와 정확히 일치</a:t>
             </a:r>
           </a:p>
         </p:txBody>
@@ -9625,7 +9825,7 @@
                 </a:solidFill>
                 <a:latin typeface="Malgun Gothic"/>
               </a:rPr>
-              <a:t>5. 데이터 수집 · raw data 정제 방법</a:t>
+              <a:t>5. 데이터 수집 · 정제(raw → 깔끔한 표)</a:t>
             </a:r>
           </a:p>
         </p:txBody>
@@ -9723,7 +9923,7 @@
                 </a:solidFill>
                 <a:latin typeface="Malgun Gothic"/>
               </a:rPr>
-              <a:t>– 변협 회원현황: 웹 스크래핑(urllib + HTML 표 파싱) — 다운로드 미지원</a:t>
+              <a:t>– 변협 회원현황: 웹 스크래핑(화면에서 자동으로 표 긁어오기) — 다운로드 미지원</a:t>
             </a:r>
           </a:p>
           <a:p>
@@ -9755,7 +9955,7 @@
                 </a:solidFill>
                 <a:latin typeface="Malgun Gothic"/>
               </a:rPr>
-              <a:t>• [정제] raw → tidy 파이프라인 (src/prepare)</a:t>
+              <a:t>• [정제] 제각각인 원본을 분석용 표로 정리</a:t>
             </a:r>
           </a:p>
           <a:p>
@@ -9771,7 +9971,7 @@
                 </a:solidFill>
                 <a:latin typeface="Malgun Gothic"/>
               </a:rPr>
-              <a:t>– 인코딩 자동판별, 가로형→세로형 변환·다중헤더 파싱</a:t>
+              <a:t>– 글자 깨짐(인코딩) 처리, 가로로 긴 표 → 세로로 정리</a:t>
             </a:r>
           </a:p>
           <a:p>
@@ -9787,7 +9987,7 @@
                 </a:solidFill>
                 <a:latin typeface="Malgun Gothic"/>
               </a:rPr>
-              <a:t>– 시도명 표준화(옛/신), 지역단위 매핑(14지방회·법원관내·도단위→권역)</a:t>
+              <a:t>– 지역 이름 통일, 서로 다른 지역 구분을 하나의 기준(권역)으로 매핑</a:t>
             </a:r>
           </a:p>
           <a:p>
@@ -9803,7 +10003,7 @@
                 </a:solidFill>
                 <a:latin typeface="Malgun Gothic"/>
               </a:rPr>
-              <a:t>– 공단 반기→연 합산, 사법연감 '본안사건' 추출(비송 제외)</a:t>
+              <a:t>– 법원 사건은 '실제 재판 사건(본안)'만 사용 — 등기·공탁 등 단순 절차 제외</a:t>
             </a:r>
           </a:p>
           <a:p>
@@ -9819,7 +10019,7 @@
                 </a:solidFill>
                 <a:latin typeface="Malgun Gothic"/>
               </a:rPr>
-              <a:t>– 결측·이상치 처리 → 권역×연도 패널 → 합계 교차검증</a:t>
+              <a:t>– 빠진 값 처리 → 권역×연도 표 완성 → 합계로 교차검증</a:t>
             </a:r>
           </a:p>
         </p:txBody>
@@ -10080,7 +10280,7 @@
                         <a:rPr sz="1200">
                           <a:latin typeface="Malgun Gothic"/>
                         </a:rPr>
-                        <a:t>약 140만 셀</a:t>
+                        <a:t>약 140만 칸</a:t>
                       </a:r>
                     </a:p>
                   </a:txBody>
@@ -10196,7 +10396,7 @@
                         <a:rPr sz="1200">
                           <a:latin typeface="Malgun Gothic"/>
                         </a:rPr>
-                        <a:t>CSV 가로형(다중헤더)</a:t>
+                        <a:t>CSV(가로로 긴 표)</a:t>
                       </a:r>
                     </a:p>
                   </a:txBody>
@@ -10262,7 +10462,7 @@
                         <a:rPr sz="1200">
                           <a:latin typeface="Malgun Gothic"/>
                         </a:rPr>
-                        <a:t>엑셀(반기)</a:t>
+                        <a:t>엑셀(반기별)</a:t>
                       </a:r>
                     </a:p>
                   </a:txBody>
@@ -10344,7 +10544,7 @@
                         <a:rPr sz="1200">
                           <a:latin typeface="Malgun Gothic"/>
                         </a:rPr>
-                        <a:t>14행(스냅샷)</a:t>
+                        <a:t>14행(현재값)</a:t>
                       </a:r>
                     </a:p>
                   </a:txBody>
@@ -10394,7 +10594,7 @@
                         <a:rPr sz="1200">
                           <a:latin typeface="Malgun Gothic"/>
                         </a:rPr>
-                        <a:t>GeoJSON</a:t>
+                        <a:t>지도파일(GeoJSON)</a:t>
                       </a:r>
                     </a:p>
                   </a:txBody>
@@ -10410,7 +10610,7 @@
                         <a:rPr sz="1200">
                           <a:latin typeface="Malgun Gothic"/>
                         </a:rPr>
-                        <a:t>17폴리곤 · 7.5MB</a:t>
+                        <a:t>17개 · 7.5MB</a:t>
                       </a:r>
                     </a:p>
                   </a:txBody>
@@ -10471,7 +10671,7 @@
                 </a:solidFill>
                 <a:latin typeface="Malgun Gothic"/>
               </a:rPr>
-              <a:t>• 원천 ~155만 셀 → 정제 → 분석패널 234·180행 → LLAI 횡단면 13행</a:t>
+              <a:t>• 원천 ~155만 칸 → 정제 → 분석용 표 234·180행 → 최종 비교 13개 권역</a:t>
             </a:r>
           </a:p>
           <a:p>
@@ -10487,7 +10687,7 @@
                 </a:solidFill>
                 <a:latin typeface="Malgun Gothic"/>
               </a:rPr>
-              <a:t>• Volume(양)은 중간 — 핵심은 Variety(5출처·4형식)·Veracity(이종 지역단위 정합)</a:t>
+              <a:t>• 양(Volume)은 중간 — 핵심은 '종류 다양(5출처·4형식)'과 '서로 다른 기준 맞추기'</a:t>
             </a:r>
           </a:p>
           <a:p>
@@ -10503,7 +10703,7 @@
                 </a:solidFill>
                 <a:latin typeface="Malgun Gothic"/>
               </a:rPr>
-              <a:t>– 작업 무게중심 = 수집·정제(ETL) 파이프라인</a:t>
+              <a:t>– 작업의 무게중심 = 분석보다 '수집·정제(데이터 다듬기)'에 있음</a:t>
             </a:r>
           </a:p>
         </p:txBody>
@@ -10555,7 +10755,7 @@
                 </a:solidFill>
                 <a:latin typeface="Malgun Gothic"/>
               </a:rPr>
-              <a:t>6. LLAI는 어떻게 계산되나 — 예시</a:t>
+              <a:t>6. 점수는 어떻게 나오나 — 예시</a:t>
             </a:r>
           </a:p>
         </p:txBody>
@@ -10611,7 +10811,7 @@
         </p:nvSpPr>
         <p:spPr>
           <a:xfrm>
-            <a:off x="640080" y="1554480"/>
+            <a:off x="640080" y="1508760"/>
             <a:ext cx="10972800" cy="4937760"/>
           </a:xfrm>
           <a:prstGeom prst="rect">
@@ -10637,23 +10837,7 @@
                 </a:solidFill>
                 <a:latin typeface="Malgun Gothic"/>
               </a:rPr>
-              <a:t>• 각 지표를 0~1로 맞추고(n), A2는 1에서 빼 방향 통일 → 가중평균 ×100</a:t>
-            </a:r>
-          </a:p>
-          <a:p>
-            <a:pPr>
-              <a:spcAft>
-                <a:spcPts val="800"/>
-              </a:spcAft>
-            </a:pPr>
-            <a:r>
-              <a:rPr sz="1900">
-                <a:solidFill>
-                  <a:srgbClr val="222222"/>
-                </a:solidFill>
-                <a:latin typeface="Malgun Gothic"/>
-              </a:rPr>
-              <a:t>• LLAI = 0.69·A1n + 0.14·(1−A2n) + 0.17·A3n  (가중치는 엔트로피 방식)</a:t>
+              <a:t>• 각 지표를 0~1로 환산(1=전국 최고, 0=최저) 후 중요도만큼 섞어 ×100</a:t>
             </a:r>
           </a:p>
         </p:txBody>
@@ -10667,8 +10851,8 @@
           <p:nvPr/>
         </p:nvGraphicFramePr>
         <p:xfrm>
-          <a:off x="1828800" y="3063240"/>
-          <a:ext cx="8229600" cy="1554480"/>
+          <a:off x="1645920" y="2468880"/>
+          <a:ext cx="8778240" cy="1737360"/>
         </p:xfrm>
         <a:graphic>
           <a:graphicData uri="http://schemas.openxmlformats.org/drawingml/2006/table">
@@ -10677,13 +10861,13 @@
                 <a:tableStyleId>{5C22544A-7EE6-4342-B048-85BDC9FD1C3A}</a:tableStyleId>
               </a:tblPr>
               <a:tblGrid>
-                <a:gridCol w="1645920"/>
-                <a:gridCol w="1645920"/>
-                <a:gridCol w="1645920"/>
-                <a:gridCol w="1645920"/>
-                <a:gridCol w="1645920"/>
+                <a:gridCol w="1280160"/>
+                <a:gridCol w="2103120"/>
+                <a:gridCol w="2103120"/>
+                <a:gridCol w="1737360"/>
+                <a:gridCol w="1554480"/>
               </a:tblGrid>
-              <a:tr h="518160">
+              <a:tr h="579120">
                 <a:tc>
                   <a:txBody>
                     <a:bodyPr/>
@@ -10691,7 +10875,7 @@
                     <a:p>
                       <a:pPr algn="ctr"/>
                       <a:r>
-                        <a:rPr sz="1800" b="1">
+                        <a:rPr sz="1600" b="1">
                           <a:solidFill>
                             <a:srgbClr val="FFFFFF"/>
                           </a:solidFill>
@@ -10714,13 +10898,13 @@
                     <a:p>
                       <a:pPr algn="l"/>
                       <a:r>
-                        <a:rPr sz="1800" b="1">
+                        <a:rPr sz="1600" b="1">
                           <a:solidFill>
                             <a:srgbClr val="FFFFFF"/>
                           </a:solidFill>
                           <a:latin typeface="Malgun Gothic"/>
                         </a:rPr>
-                        <a:t>A1n</a:t>
+                        <a:t>변호사</a:t>
                       </a:r>
                     </a:p>
                   </a:txBody>
@@ -10737,13 +10921,13 @@
                     <a:p>
                       <a:pPr algn="l"/>
                       <a:r>
-                        <a:rPr sz="1800" b="1">
+                        <a:rPr sz="1600" b="1">
                           <a:solidFill>
                             <a:srgbClr val="FFFFFF"/>
                           </a:solidFill>
                           <a:latin typeface="Malgun Gothic"/>
                         </a:rPr>
-                        <a:t>1−A2n</a:t>
+                        <a:t>안 바쁨</a:t>
                       </a:r>
                     </a:p>
                   </a:txBody>
@@ -10760,13 +10944,13 @@
                     <a:p>
                       <a:pPr algn="l"/>
                       <a:r>
-                        <a:rPr sz="1800" b="1">
+                        <a:rPr sz="1600" b="1">
                           <a:solidFill>
                             <a:srgbClr val="FFFFFF"/>
                           </a:solidFill>
                           <a:latin typeface="Malgun Gothic"/>
                         </a:rPr>
-                        <a:t>A3n</a:t>
+                        <a:t>약자지원</a:t>
                       </a:r>
                     </a:p>
                   </a:txBody>
@@ -10783,13 +10967,13 @@
                     <a:p>
                       <a:pPr algn="l"/>
                       <a:r>
-                        <a:rPr sz="1800" b="1">
+                        <a:rPr sz="1600" b="1">
                           <a:solidFill>
                             <a:srgbClr val="FFFFFF"/>
                           </a:solidFill>
                           <a:latin typeface="Malgun Gothic"/>
                         </a:rPr>
-                        <a:t>LLAI</a:t>
+                        <a:t>→ LLAI</a:t>
                       </a:r>
                     </a:p>
                   </a:txBody>
@@ -10800,7 +10984,7 @@
                   </a:tcPr>
                 </a:tc>
               </a:tr>
-              <a:tr h="518160">
+              <a:tr h="579120">
                 <a:tc>
                   <a:txBody>
                     <a:bodyPr/>
@@ -10808,7 +10992,7 @@
                     <a:p>
                       <a:pPr algn="ctr"/>
                       <a:r>
-                        <a:rPr sz="1800">
+                        <a:rPr sz="1600">
                           <a:latin typeface="Malgun Gothic"/>
                         </a:rPr>
                         <a:t>서울</a:t>
@@ -10824,39 +11008,39 @@
                     <a:p>
                       <a:pPr algn="l"/>
                       <a:r>
-                        <a:rPr sz="1800">
-                          <a:latin typeface="Malgun Gothic"/>
-                        </a:rPr>
-                        <a:t>1.00</a:t>
-                      </a:r>
-                    </a:p>
-                  </a:txBody>
-                  <a:tcPr anchor="ctr"/>
-                </a:tc>
-                <a:tc>
-                  <a:txBody>
-                    <a:bodyPr/>
-                    <a:lstStyle/>
-                    <a:p>
-                      <a:pPr algn="l"/>
-                      <a:r>
-                        <a:rPr sz="1800">
-                          <a:latin typeface="Malgun Gothic"/>
-                        </a:rPr>
-                        <a:t>1.00</a:t>
-                      </a:r>
-                    </a:p>
-                  </a:txBody>
-                  <a:tcPr anchor="ctr"/>
-                </a:tc>
-                <a:tc>
-                  <a:txBody>
-                    <a:bodyPr/>
-                    <a:lstStyle/>
-                    <a:p>
-                      <a:pPr algn="l"/>
-                      <a:r>
-                        <a:rPr sz="1800">
+                        <a:rPr sz="1600">
+                          <a:latin typeface="Malgun Gothic"/>
+                        </a:rPr>
+                        <a:t>1.00 (최고)</a:t>
+                      </a:r>
+                    </a:p>
+                  </a:txBody>
+                  <a:tcPr anchor="ctr"/>
+                </a:tc>
+                <a:tc>
+                  <a:txBody>
+                    <a:bodyPr/>
+                    <a:lstStyle/>
+                    <a:p>
+                      <a:pPr algn="l"/>
+                      <a:r>
+                        <a:rPr sz="1600">
+                          <a:latin typeface="Malgun Gothic"/>
+                        </a:rPr>
+                        <a:t>1.00 (최고)</a:t>
+                      </a:r>
+                    </a:p>
+                  </a:txBody>
+                  <a:tcPr anchor="ctr"/>
+                </a:tc>
+                <a:tc>
+                  <a:txBody>
+                    <a:bodyPr/>
+                    <a:lstStyle/>
+                    <a:p>
+                      <a:pPr algn="l"/>
+                      <a:r>
+                        <a:rPr sz="1600">
                           <a:latin typeface="Malgun Gothic"/>
                         </a:rPr>
                         <a:t>0.48</a:t>
@@ -10872,17 +11056,17 @@
                     <a:p>
                       <a:pPr algn="l"/>
                       <a:r>
-                        <a:rPr sz="1800">
-                          <a:latin typeface="Malgun Gothic"/>
-                        </a:rPr>
-                        <a:t>91.1</a:t>
+                        <a:rPr sz="1600">
+                          <a:latin typeface="Malgun Gothic"/>
+                        </a:rPr>
+                        <a:t>91점</a:t>
                       </a:r>
                     </a:p>
                   </a:txBody>
                   <a:tcPr anchor="ctr"/>
                 </a:tc>
               </a:tr>
-              <a:tr h="518160">
+              <a:tr h="579120">
                 <a:tc>
                   <a:txBody>
                     <a:bodyPr/>
@@ -10890,7 +11074,7 @@
                     <a:p>
                       <a:pPr algn="ctr"/>
                       <a:r>
-                        <a:rPr sz="1800">
+                        <a:rPr sz="1600">
                           <a:latin typeface="Malgun Gothic"/>
                         </a:rPr>
                         <a:t>강원</a:t>
@@ -10906,39 +11090,39 @@
                     <a:p>
                       <a:pPr algn="l"/>
                       <a:r>
-                        <a:rPr sz="1800">
-                          <a:latin typeface="Malgun Gothic"/>
-                        </a:rPr>
-                        <a:t>0.00</a:t>
-                      </a:r>
-                    </a:p>
-                  </a:txBody>
-                  <a:tcPr anchor="ctr"/>
-                </a:tc>
-                <a:tc>
-                  <a:txBody>
-                    <a:bodyPr/>
-                    <a:lstStyle/>
-                    <a:p>
-                      <a:pPr algn="l"/>
-                      <a:r>
-                        <a:rPr sz="1800">
-                          <a:latin typeface="Malgun Gothic"/>
-                        </a:rPr>
-                        <a:t>0.00</a:t>
-                      </a:r>
-                    </a:p>
-                  </a:txBody>
-                  <a:tcPr anchor="ctr"/>
-                </a:tc>
-                <a:tc>
-                  <a:txBody>
-                    <a:bodyPr/>
-                    <a:lstStyle/>
-                    <a:p>
-                      <a:pPr algn="l"/>
-                      <a:r>
-                        <a:rPr sz="1800">
+                        <a:rPr sz="1600">
+                          <a:latin typeface="Malgun Gothic"/>
+                        </a:rPr>
+                        <a:t>0.00 (최저)</a:t>
+                      </a:r>
+                    </a:p>
+                  </a:txBody>
+                  <a:tcPr anchor="ctr"/>
+                </a:tc>
+                <a:tc>
+                  <a:txBody>
+                    <a:bodyPr/>
+                    <a:lstStyle/>
+                    <a:p>
+                      <a:pPr algn="l"/>
+                      <a:r>
+                        <a:rPr sz="1600">
+                          <a:latin typeface="Malgun Gothic"/>
+                        </a:rPr>
+                        <a:t>0.00 (최저)</a:t>
+                      </a:r>
+                    </a:p>
+                  </a:txBody>
+                  <a:tcPr anchor="ctr"/>
+                </a:tc>
+                <a:tc>
+                  <a:txBody>
+                    <a:bodyPr/>
+                    <a:lstStyle/>
+                    <a:p>
+                      <a:pPr algn="l"/>
+                      <a:r>
+                        <a:rPr sz="1600">
                           <a:latin typeface="Malgun Gothic"/>
                         </a:rPr>
                         <a:t>0.09</a:t>
@@ -10954,10 +11138,10 @@
                     <a:p>
                       <a:pPr algn="l"/>
                       <a:r>
-                        <a:rPr sz="1800">
-                          <a:latin typeface="Malgun Gothic"/>
-                        </a:rPr>
-                        <a:t>1.6</a:t>
+                        <a:rPr sz="1600">
+                          <a:latin typeface="Malgun Gothic"/>
+                        </a:rPr>
+                        <a:t>2점</a:t>
                       </a:r>
                     </a:p>
                   </a:txBody>
@@ -10976,7 +11160,7 @@
         </p:nvSpPr>
         <p:spPr>
           <a:xfrm>
-            <a:off x="640080" y="4892040"/>
+            <a:off x="640080" y="4480560"/>
             <a:ext cx="10972800" cy="4937760"/>
           </a:xfrm>
           <a:prstGeom prst="rect">
@@ -10990,6 +11174,38 @@
           </a:bodyPr>
           <a:lstStyle/>
           <a:p>
+            <a:pPr>
+              <a:spcAft>
+                <a:spcPts val="800"/>
+              </a:spcAft>
+            </a:pPr>
+            <a:r>
+              <a:rPr sz="1800">
+                <a:solidFill>
+                  <a:srgbClr val="222222"/>
+                </a:solidFill>
+                <a:latin typeface="Malgun Gothic"/>
+              </a:rPr>
+              <a:t>• 서울: 변호사 많고·덜 바쁨 두 축 모두 전국 1등 → 거의 만점(91)</a:t>
+            </a:r>
+          </a:p>
+          <a:p>
+            <a:pPr>
+              <a:spcAft>
+                <a:spcPts val="800"/>
+              </a:spcAft>
+            </a:pPr>
+            <a:r>
+              <a:rPr sz="1800">
+                <a:solidFill>
+                  <a:srgbClr val="222222"/>
+                </a:solidFill>
+                <a:latin typeface="Malgun Gothic"/>
+              </a:rPr>
+              <a:t>• 강원: 두 축 모두 전국 꼴찌 → 바닥(2점)</a:t>
+            </a:r>
+          </a:p>
+          <a:p>
             <a:pPr lvl="1">
               <a:spcAft>
                 <a:spcPts val="800"/>
@@ -11002,23 +11218,7 @@
                 </a:solidFill>
                 <a:latin typeface="Malgun Gothic"/>
               </a:rPr>
-              <a:t>– 표의 1.00 = '전국에서 가장 좋음', 0.00 = '가장 나쁨' (n은 0~1 값)</a:t>
-            </a:r>
-          </a:p>
-          <a:p>
-            <a:pPr>
-              <a:spcAft>
-                <a:spcPts val="800"/>
-              </a:spcAft>
-            </a:pPr>
-            <a:r>
-              <a:rPr sz="1800">
-                <a:solidFill>
-                  <a:srgbClr val="222222"/>
-                </a:solidFill>
-                <a:latin typeface="Malgun Gothic"/>
-              </a:rPr>
-              <a:t>• 서울: 변호사·사건부담 두 축 모두 1.00 → 거의 만점 / 강원: 둘 다 0 → 바닥</a:t>
+              <a:t>– 즉 LLAI는 '전국에서 상대적으로 어느 위치냐'를 0~100으로 보여줌</a:t>
             </a:r>
           </a:p>
         </p:txBody>

--- a/reports/발표자료.pptx
+++ b/reports/발표자료.pptx
@@ -28,6 +28,7 @@
     <p:sldId id="276" r:id="rId27"/>
     <p:sldId id="277" r:id="rId28"/>
     <p:sldId id="278" r:id="rId29"/>
+    <p:sldId id="279" r:id="rId30"/>
   </p:sldIdLst>
   <p:sldSz cx="12191695" cy="6858000" type="screen4x3"/>
   <p:notesSz cx="6858000" cy="9144000"/>
@@ -3303,9 +3304,9 @@
                 <a:tableStyleId>{5C22544A-7EE6-4342-B048-85BDC9FD1C3A}</a:tableStyleId>
               </a:tblPr>
               <a:tblGrid>
-                <a:gridCol w="2103120"/>
-                <a:gridCol w="4754880"/>
-                <a:gridCol w="4389120"/>
+                <a:gridCol w="3017520"/>
+                <a:gridCol w="4023360"/>
+                <a:gridCol w="4206240"/>
               </a:tblGrid>
               <a:tr h="508000">
                 <a:tc>
@@ -3389,7 +3390,7 @@
                         <a:rPr sz="1200">
                           <a:latin typeface="Malgun Gothic"/>
                         </a:rPr>
-                        <a:t>점수 맞추기</a:t>
+                        <a:t>Min-Max 정규화</a:t>
                       </a:r>
                     </a:p>
                   </a:txBody>
@@ -3405,7 +3406,7 @@
                         <a:rPr sz="1200">
                           <a:latin typeface="Malgun Gothic"/>
                         </a:rPr>
-                        <a:t>지표를 0~1로 통일 (A2는 뒤집음)</a:t>
+                        <a:t>지표를 0~1로 통일(A2 뒤집음)</a:t>
                       </a:r>
                     </a:p>
                   </a:txBody>
@@ -3439,7 +3440,7 @@
                         <a:rPr sz="1200">
                           <a:latin typeface="Malgun Gothic"/>
                         </a:rPr>
-                        <a:t>중요도 정하기</a:t>
+                        <a:t>가중치 산정 (엔트로피·PCA)</a:t>
                       </a:r>
                     </a:p>
                   </a:txBody>
@@ -3455,7 +3456,7 @@
                         <a:rPr sz="1200">
                           <a:latin typeface="Malgun Gothic"/>
                         </a:rPr>
-                        <a:t>세 지표 합칠 비중 (3가지 방식)</a:t>
+                        <a:t>세 지표 합칠 비중 정하기</a:t>
                       </a:r>
                     </a:p>
                   </a:txBody>
@@ -3471,7 +3472,7 @@
                         <a:rPr sz="1200">
                           <a:latin typeface="Malgun Gothic"/>
                         </a:rPr>
-                        <a:t>사람 임의 X → 결과 흔들림 없나 확인</a:t>
+                        <a:t>자의성 방지 → 강건성 확인</a:t>
                       </a:r>
                     </a:p>
                   </a:txBody>
@@ -3489,7 +3490,7 @@
                         <a:rPr sz="1200">
                           <a:latin typeface="Malgun Gothic"/>
                         </a:rPr>
-                        <a:t>점수 합치기</a:t>
+                        <a:t>LLAI 합성</a:t>
                       </a:r>
                     </a:p>
                   </a:txBody>
@@ -3521,7 +3522,7 @@
                         <a:rPr sz="1200">
                           <a:latin typeface="Malgun Gothic"/>
                         </a:rPr>
-                        <a:t>단순·투명한 점수(LLAI)</a:t>
+                        <a:t>단순·투명한 점수</a:t>
                       </a:r>
                     </a:p>
                   </a:txBody>
@@ -3539,7 +3540,7 @@
                         <a:rPr sz="1200">
                           <a:latin typeface="Malgun Gothic"/>
                         </a:rPr>
-                        <a:t>관계 보기</a:t>
+                        <a:t>상관분석 (Pearson·Spearman)</a:t>
                       </a:r>
                     </a:p>
                   </a:txBody>
@@ -3555,7 +3556,7 @@
                         <a:rPr sz="1200">
                           <a:latin typeface="Malgun Gothic"/>
                         </a:rPr>
-                        <a:t>두 값이 같이 움직이나 (상관분석)</a:t>
+                        <a:t>두 값이 같이 움직이나</a:t>
                       </a:r>
                     </a:p>
                   </a:txBody>
@@ -3571,7 +3572,7 @@
                         <a:rPr sz="1200">
                           <a:latin typeface="Malgun Gothic"/>
                         </a:rPr>
-                        <a:t>이상치(서울) 대비 2방법 교차 확인</a:t>
+                        <a:t>이상치(서울) 대비 교차 확인</a:t>
                       </a:r>
                     </a:p>
                   </a:txBody>
@@ -3589,7 +3590,7 @@
                         <a:rPr sz="1200">
                           <a:latin typeface="Malgun Gothic"/>
                         </a:rPr>
-                        <a:t>집단 비교</a:t>
+                        <a:t>집단 비교 (Mann-Whitney U)</a:t>
                       </a:r>
                     </a:p>
                   </a:txBody>
@@ -3605,7 +3606,7 @@
                         <a:rPr sz="1200">
                           <a:latin typeface="Malgun Gothic"/>
                         </a:rPr>
-                        <a:t>두 집단(수도권 vs 지방) 차이 검정</a:t>
+                        <a:t>두 집단 차이 검정</a:t>
                       </a:r>
                     </a:p>
                   </a:txBody>
@@ -3621,7 +3622,7 @@
                         <a:rPr sz="1200">
                           <a:latin typeface="Malgun Gothic"/>
                         </a:rPr>
-                        <a:t>표본 작아 → 분포가정 없는 방법</a:t>
+                        <a:t>표본 작아 → 비모수 검정</a:t>
                       </a:r>
                     </a:p>
                   </a:txBody>
@@ -3639,7 +3640,7 @@
                         <a:rPr sz="1200">
                           <a:latin typeface="Malgun Gothic"/>
                         </a:rPr>
-                        <a:t>비슷한 곳 묶기</a:t>
+                        <a:t>군집분석 (K-means)</a:t>
                       </a:r>
                     </a:p>
                   </a:txBody>
@@ -3655,7 +3656,7 @@
                         <a:rPr sz="1200">
                           <a:latin typeface="Malgun Gothic"/>
                         </a:rPr>
-                        <a:t>비슷한 권역끼리 그룹화 (군집분석)</a:t>
+                        <a:t>비슷한 권역끼리 묶기</a:t>
                       </a:r>
                     </a:p>
                   </a:txBody>
@@ -3671,7 +3672,7 @@
                         <a:rPr sz="1200">
                           <a:latin typeface="Malgun Gothic"/>
                         </a:rPr>
-                        <a:t>유형 분류 · 묶음 수도 객관 선정</a:t>
+                        <a:t>유형 분류 · 묶음 수 객관 선정</a:t>
                       </a:r>
                     </a:p>
                   </a:txBody>
@@ -3689,7 +3690,7 @@
                         <a:rPr sz="1200">
                           <a:latin typeface="Malgun Gothic"/>
                         </a:rPr>
-                        <a:t>쏠림 측정</a:t>
+                        <a:t>집중도 (HHI · 변동계수)</a:t>
                       </a:r>
                     </a:p>
                   </a:txBody>
@@ -3739,7 +3740,7 @@
                         <a:rPr sz="1200">
                           <a:latin typeface="Malgun Gothic"/>
                         </a:rPr>
-                        <a:t>지도로 보기</a:t>
+                        <a:t>코로플레스 지도</a:t>
                       </a:r>
                     </a:p>
                   </a:txBody>
@@ -3755,7 +3756,7 @@
                         <a:rPr sz="1200">
                           <a:latin typeface="Malgun Gothic"/>
                         </a:rPr>
-                        <a:t>지역 경계 합쳐 색칠 (색지도)</a:t>
+                        <a:t>지역 경계 합쳐 색칠</a:t>
                       </a:r>
                     </a:p>
                   </a:txBody>
@@ -3811,7 +3812,7 @@
                 </a:solidFill>
                 <a:latin typeface="Malgun Gothic"/>
               </a:rPr>
-              <a:t>※ 모두 '데이터로 객관적으로 따지기' 위한 표준 통계·기계학습 방법. 이름은 부록 B에 풀어둠 — 지금 외울 필요 없음.</a:t>
+              <a:t>※ 모두 표준 통계·기계학습 방법. 용어 풀이는 부록 B 참고.</a:t>
             </a:r>
           </a:p>
         </p:txBody>
@@ -4784,7 +4785,7 @@
                 </a:solidFill>
                 <a:latin typeface="Malgun Gothic"/>
               </a:rPr>
-              <a:t>10. 심화 — 서울을 빼고 보면</a:t>
+              <a:t>10. 심화 — 서울을 빼고 보면 (지도)</a:t>
             </a:r>
           </a:p>
         </p:txBody>
@@ -4877,6 +4878,22 @@
             <a:spAutoFit/>
           </a:bodyPr>
           <a:lstStyle/>
+          <a:p>
+            <a:pPr>
+              <a:spcAft>
+                <a:spcPts val="800"/>
+              </a:spcAft>
+            </a:pPr>
+            <a:r>
+              <a:rPr sz="2000">
+                <a:solidFill>
+                  <a:srgbClr val="222222"/>
+                </a:solidFill>
+                <a:latin typeface="Malgun Gothic"/>
+              </a:rPr>
+              <a:t>• 서울을 빼고 12권역만 다시 점수화</a:t>
+            </a:r>
+          </a:p>
           <a:p>
             <a:pPr>
               <a:spcAft>
@@ -5024,7 +5041,7 @@
                 </a:solidFill>
                 <a:latin typeface="Malgun Gothic"/>
               </a:rPr>
-              <a:t>11. 가설 검정 종합</a:t>
+              <a:t>10. 서울 제외 — 숨은 구조 (심화)</a:t>
             </a:r>
           </a:p>
         </p:txBody>
@@ -5072,16 +5089,40 @@
           </a:p>
         </p:txBody>
       </p:sp>
-      <p:sp>
-        <p:nvSpPr>
-          <p:cNvPr id="4" name="TextBox 3"/>
+      <p:pic>
+        <p:nvPicPr>
+          <p:cNvPr id="4" name="Picture 3" descr="fig1_llai_ranking_region13_exseoul.png"/>
+          <p:cNvPicPr>
+            <a:picLocks noChangeAspect="1"/>
+          </p:cNvPicPr>
+          <p:nvPr/>
+        </p:nvPicPr>
+        <p:blipFill>
+          <a:blip r:embed="rId2"/>
+          <a:stretch>
+            <a:fillRect/>
+          </a:stretch>
+        </p:blipFill>
+        <p:spPr>
+          <a:xfrm>
+            <a:off x="365760" y="1554480"/>
+            <a:ext cx="6933804" cy="4297680"/>
+          </a:xfrm>
+          <a:prstGeom prst="rect">
+            <a:avLst/>
+          </a:prstGeom>
+        </p:spPr>
+      </p:pic>
+      <p:sp>
+        <p:nvSpPr>
+          <p:cNvPr id="5" name="TextBox 4"/>
           <p:cNvSpPr txBox="1"/>
           <p:nvPr/>
         </p:nvSpPr>
         <p:spPr>
           <a:xfrm>
-            <a:off x="640080" y="1554480"/>
-            <a:ext cx="10972800" cy="4937760"/>
+            <a:off x="6858000" y="1600200"/>
+            <a:ext cx="5029200" cy="4937760"/>
           </a:xfrm>
           <a:prstGeom prst="rect">
             <a:avLst/>
@@ -5100,13 +5141,29 @@
               </a:spcAft>
             </a:pPr>
             <a:r>
-              <a:rPr sz="2000">
+              <a:rPr sz="1800">
                 <a:solidFill>
                   <a:srgbClr val="222222"/>
                 </a:solidFill>
                 <a:latin typeface="Malgun Gothic"/>
               </a:rPr>
-              <a:t>• H2 ✅ 강하게 지지 — 변호사 많을수록 사건부담↓</a:t>
+              <a:t>• 수도권 착시 — 오히려 역전</a:t>
+            </a:r>
+          </a:p>
+          <a:p>
+            <a:pPr lvl="1">
+              <a:spcAft>
+                <a:spcPts val="800"/>
+              </a:spcAft>
+            </a:pPr>
+            <a:r>
+              <a:rPr sz="1500">
+                <a:solidFill>
+                  <a:srgbClr val="222222"/>
+                </a:solidFill>
+                <a:latin typeface="Malgun Gothic"/>
+              </a:rPr>
+              <a:t>– 수도권(경기·인천) 평균 25.8 &lt; 비수도권 35.2</a:t>
             </a:r>
           </a:p>
           <a:p>
@@ -5116,13 +5173,29 @@
               </a:spcAft>
             </a:pPr>
             <a:r>
-              <a:rPr sz="2000">
+              <a:rPr sz="1800">
                 <a:solidFill>
                   <a:srgbClr val="222222"/>
                 </a:solidFill>
                 <a:latin typeface="Malgun Gothic"/>
               </a:rPr>
-              <a:t>• H4 ✅ 지지 — 변호사 3.4배↑에도 서울 쏠림 심해짐</a:t>
+              <a:t>• 비수도권 내부 격차 — 광역시 vs 도</a:t>
+            </a:r>
+          </a:p>
+          <a:p>
+            <a:pPr lvl="1">
+              <a:spcAft>
+                <a:spcPts val="800"/>
+              </a:spcAft>
+            </a:pPr>
+            <a:r>
+              <a:rPr sz="1500">
+                <a:solidFill>
+                  <a:srgbClr val="222222"/>
+                </a:solidFill>
+                <a:latin typeface="Malgun Gothic"/>
+              </a:rPr>
+              <a:t>– 부산·울산·인천 평균 52.7 ≫ 도 지역 26.3</a:t>
             </a:r>
           </a:p>
           <a:p>
@@ -5132,13 +5205,29 @@
               </a:spcAft>
             </a:pPr>
             <a:r>
-              <a:rPr sz="2000">
+              <a:rPr sz="1800">
                 <a:solidFill>
                   <a:srgbClr val="222222"/>
                 </a:solidFill>
                 <a:latin typeface="Malgun Gothic"/>
               </a:rPr>
-              <a:t>• H1 △ 방향만 맞음 — 수도권이 유리하나 표본 작아 확정 못 함</a:t>
+              <a:t>• 핵심 변별 요인 이동 — 변호사 수 → 취약계층 지원</a:t>
+            </a:r>
+          </a:p>
+          <a:p>
+            <a:pPr lvl="1">
+              <a:spcAft>
+                <a:spcPts val="800"/>
+              </a:spcAft>
+            </a:pPr>
+            <a:r>
+              <a:rPr sz="1500">
+                <a:solidFill>
+                  <a:srgbClr val="222222"/>
+                </a:solidFill>
+                <a:latin typeface="Malgun Gothic"/>
+              </a:rPr>
+              <a:t>– 가중치 A1 0.69→0.40, A3 0.17→0.39</a:t>
             </a:r>
           </a:p>
           <a:p>
@@ -5148,29 +5237,47 @@
               </a:spcAft>
             </a:pPr>
             <a:r>
-              <a:rPr sz="2000">
+              <a:rPr sz="1800">
                 <a:solidFill>
                   <a:srgbClr val="222222"/>
                 </a:solidFill>
                 <a:latin typeface="Malgun Gothic"/>
               </a:rPr>
-              <a:t>• H3 △ 약함 — 소득과 접근성의 관계는 뚜렷하지 않음</a:t>
-            </a:r>
-          </a:p>
-          <a:p>
-            <a:pPr lvl="1">
-              <a:spcAft>
-                <a:spcPts val="800"/>
-              </a:spcAft>
-            </a:pPr>
-            <a:r>
-              <a:rPr sz="1700">
-                <a:solidFill>
-                  <a:srgbClr val="222222"/>
-                </a:solidFill>
-                <a:latin typeface="Malgun Gothic"/>
-              </a:rPr>
-              <a:t>– 권역이 10~13개로 적어 통계적 확신에는 한계 (정직히 명시)</a:t>
+              <a:t>• 변호사↔부담 관계는 지방에서도 성립 (r=−0.80)</a:t>
+            </a:r>
+          </a:p>
+        </p:txBody>
+      </p:sp>
+      <p:sp>
+        <p:nvSpPr>
+          <p:cNvPr id="6" name="TextBox 5"/>
+          <p:cNvSpPr txBox="1"/>
+          <p:nvPr/>
+        </p:nvSpPr>
+        <p:spPr>
+          <a:xfrm>
+            <a:off x="640080" y="5989320"/>
+            <a:ext cx="10881360" cy="640080"/>
+          </a:xfrm>
+          <a:prstGeom prst="rect">
+            <a:avLst/>
+          </a:prstGeom>
+          <a:noFill/>
+        </p:spPr>
+        <p:txBody>
+          <a:bodyPr wrap="square">
+            <a:spAutoFit/>
+          </a:bodyPr>
+          <a:lstStyle/>
+          <a:p>
+            <a:r>
+              <a:rPr sz="1400" i="1">
+                <a:solidFill>
+                  <a:srgbClr val="555555"/>
+                </a:solidFill>
+                <a:latin typeface="Malgun Gothic"/>
+              </a:rPr>
+              <a:t>📊 읽는 법 — 서울 뺀 12권역 점수 순위. 부산·울산·제주 상위, 강원·충북 최하.</a:t>
             </a:r>
           </a:p>
         </p:txBody>
@@ -5222,7 +5329,7 @@
                 </a:solidFill>
                 <a:latin typeface="Malgun Gothic"/>
               </a:rPr>
-              <a:t>12. 결론 · 정책 시사점</a:t>
+              <a:t>11. 가설 검정 종합</a:t>
             </a:r>
           </a:p>
         </p:txBody>
@@ -5304,7 +5411,7 @@
                 </a:solidFill>
                 <a:latin typeface="Malgun Gothic"/>
               </a:rPr>
-              <a:t>• 변호사 자원의 서울 일극 집중이 격차의 핵심 원인</a:t>
+              <a:t>• H2 ✅ 강하게 지지 — 변호사 많을수록 사건부담↓ (서울 빼도 성립)</a:t>
             </a:r>
           </a:p>
           <a:p>
@@ -5320,7 +5427,7 @@
                 </a:solidFill>
                 <a:latin typeface="Malgun Gothic"/>
               </a:rPr>
-              <a:t>• '수도권이냐'보다 인구 대비·사건부담이 접근성을 좌우 (인천=수도권인데 하위)</a:t>
+              <a:t>• H4 ✅ 지지 — 변호사 3.4배↑에도 서울 쏠림 심해짐</a:t>
             </a:r>
           </a:p>
           <a:p>
@@ -5336,7 +5443,7 @@
                 </a:solidFill>
                 <a:latin typeface="Malgun Gothic"/>
               </a:rPr>
-              <a:t>• 변호사를 늘리는 것만으로는 격차가 안 줄어듦</a:t>
+              <a:t>• H1 △ 방향만 맞음 — 수도권이 유리하나 표본 작아 확정 못 함</a:t>
             </a:r>
           </a:p>
           <a:p>
@@ -5352,7 +5459,7 @@
                 </a:solidFill>
                 <a:latin typeface="Malgun Gothic"/>
               </a:rPr>
-              <a:t>• 정책 제언</a:t>
+              <a:t>• H3 △ 약함 — 소득과 접근성의 관계는 뚜렷하지 않음</a:t>
             </a:r>
           </a:p>
           <a:p>
@@ -5368,23 +5475,7 @@
                 </a:solidFill>
                 <a:latin typeface="Malgun Gothic"/>
               </a:rPr>
-              <a:t>– 지방 변호사 유치 인센티브 / 법률구조 자원 비수도권 우선 배치</a:t>
-            </a:r>
-          </a:p>
-          <a:p>
-            <a:pPr lvl="1">
-              <a:spcAft>
-                <a:spcPts val="800"/>
-              </a:spcAft>
-            </a:pPr>
-            <a:r>
-              <a:rPr sz="1700">
-                <a:solidFill>
-                  <a:srgbClr val="222222"/>
-                </a:solidFill>
-                <a:latin typeface="Malgun Gothic"/>
-              </a:rPr>
-              <a:t>– 사건 많은 지역 법원 인력 보강 / 로스쿨 정원·배치 연계</a:t>
+              <a:t>– 권역이 10~13개로 적어 통계적 확신에는 한계 (정직히 명시)</a:t>
             </a:r>
           </a:p>
         </p:txBody>
@@ -5436,7 +5527,7 @@
                 </a:solidFill>
                 <a:latin typeface="Malgun Gothic"/>
               </a:rPr>
-              <a:t>13. 한계와 향후 과제</a:t>
+              <a:t>12. 결론 · 정책 시사점</a:t>
             </a:r>
           </a:p>
         </p:txBody>
@@ -5518,7 +5609,7 @@
                 </a:solidFill>
                 <a:latin typeface="Malgun Gothic"/>
               </a:rPr>
-              <a:t>• 변호사 데이터가 2시점(2009·현재) — 매년 시계열은 추가 수집 필요</a:t>
+              <a:t>• 변호사 자원의 서울 일극 집중이 격차의 핵심 원인</a:t>
             </a:r>
           </a:p>
           <a:p>
@@ -5534,7 +5625,7 @@
                 </a:solidFill>
                 <a:latin typeface="Malgun Gothic"/>
               </a:rPr>
-              <a:t>• 권역이 적어 통계적 검정력 제한</a:t>
+              <a:t>• '수도권이냐'보다 인구 대비·사건부담이 접근성을 좌우 (인천=수도권인데 하위)</a:t>
             </a:r>
           </a:p>
           <a:p>
@@ -5550,7 +5641,7 @@
                 </a:solidFill>
                 <a:latin typeface="Malgun Gothic"/>
               </a:rPr>
-              <a:t>• 법률구조 데이터가 거친 단위(10도단위)라 일부 권역은 근사 처리</a:t>
+              <a:t>• 변호사를 늘리는 것만으로는 격차가 안 줄어듦</a:t>
             </a:r>
           </a:p>
           <a:p>
@@ -5566,7 +5657,23 @@
                 </a:solidFill>
                 <a:latin typeface="Malgun Gothic"/>
               </a:rPr>
-              <a:t>• 향후: 인터랙티브 대시보드 고도화, 연도별 점수 추적</a:t>
+              <a:t>• 지방끼리는 '취약계층 법률 지원'이 격차의 핵심 → 법률구조 자원 배분 중요</a:t>
+            </a:r>
+          </a:p>
+          <a:p>
+            <a:pPr>
+              <a:spcAft>
+                <a:spcPts val="800"/>
+              </a:spcAft>
+            </a:pPr>
+            <a:r>
+              <a:rPr sz="2000">
+                <a:solidFill>
+                  <a:srgbClr val="222222"/>
+                </a:solidFill>
+                <a:latin typeface="Malgun Gothic"/>
+              </a:rPr>
+              <a:t>• 정책: 지방 변호사 인센티브 · 공단 자원 비수도권 우선 · 사건 많은 권역 인력 보강</a:t>
             </a:r>
           </a:p>
         </p:txBody>
@@ -5618,7 +5725,7 @@
                 </a:solidFill>
                 <a:latin typeface="Malgun Gothic"/>
               </a:rPr>
-              <a:t>연구 범위 · 선행연구 차용 여부</a:t>
+              <a:t>13. 한계와 향후 과제</a:t>
             </a:r>
           </a:p>
         </p:txBody>
@@ -5694,13 +5801,13 @@
               </a:spcAft>
             </a:pPr>
             <a:r>
-              <a:rPr sz="1900">
+              <a:rPr sz="2000">
                 <a:solidFill>
                   <a:srgbClr val="222222"/>
                 </a:solidFill>
                 <a:latin typeface="Malgun Gothic"/>
               </a:rPr>
-              <a:t>• 본 분석은 26-1 빅데이터컴퓨팅 기말 프로젝트로 직접 수행</a:t>
+              <a:t>• 변호사 데이터가 2시점(2009·현재) — 매년 시계열은 추가 수집 필요</a:t>
             </a:r>
           </a:p>
           <a:p>
@@ -5710,13 +5817,13 @@
               </a:spcAft>
             </a:pPr>
             <a:r>
-              <a:rPr sz="1900">
+              <a:rPr sz="2000">
                 <a:solidFill>
                   <a:srgbClr val="222222"/>
                 </a:solidFill>
                 <a:latin typeface="Malgun Gothic"/>
               </a:rPr>
-              <a:t>• 선행연구(타인) 차용: 없음 — 설계·수집·정제·분석·시각화 전부 자체 개발</a:t>
+              <a:t>• 권역이 적어 통계적 검정력 제한</a:t>
             </a:r>
           </a:p>
           <a:p>
@@ -5726,13 +5833,13 @@
               </a:spcAft>
             </a:pPr>
             <a:r>
-              <a:rPr sz="1900">
+              <a:rPr sz="2000">
                 <a:solidFill>
                   <a:srgbClr val="222222"/>
                 </a:solidFill>
                 <a:latin typeface="Malgun Gothic"/>
               </a:rPr>
-              <a:t>• 본인 이전 연구 차용: 없음 — 방법론 골격은 본 과목 제안서에서 설계</a:t>
+              <a:t>• 법률구조 데이터가 거친 단위(10도단위)라 일부 권역은 근사 처리</a:t>
             </a:r>
           </a:p>
           <a:p>
@@ -5742,45 +5849,13 @@
               </a:spcAft>
             </a:pPr>
             <a:r>
-              <a:rPr sz="1900">
+              <a:rPr sz="2000">
                 <a:solidFill>
                   <a:srgbClr val="222222"/>
                 </a:solidFill>
                 <a:latin typeface="Malgun Gothic"/>
               </a:rPr>
-              <a:t>• 외부 차용은 '공개 데이터·지도파일'뿐, 모두 출처 명시</a:t>
-            </a:r>
-          </a:p>
-          <a:p>
-            <a:pPr lvl="1">
-              <a:spcAft>
-                <a:spcPts val="800"/>
-              </a:spcAft>
-            </a:pPr>
-            <a:r>
-              <a:rPr sz="1600">
-                <a:solidFill>
-                  <a:srgbClr val="222222"/>
-                </a:solidFill>
-                <a:latin typeface="Malgun Gothic"/>
-              </a:rPr>
-              <a:t>– KOSIS·사법연감·공단·변협 / 지도(GeoJSON) / 2009 변호사분포(법률저널)</a:t>
-            </a:r>
-          </a:p>
-          <a:p>
-            <a:pPr>
-              <a:spcAft>
-                <a:spcPts val="800"/>
-              </a:spcAft>
-            </a:pPr>
-            <a:r>
-              <a:rPr sz="1900">
-                <a:solidFill>
-                  <a:srgbClr val="222222"/>
-                </a:solidFill>
-                <a:latin typeface="Malgun Gothic"/>
-              </a:rPr>
-              <a:t>• → 데이터는 차용, 수집·정제·지수개발·분석·해석은 100% 본 프로젝트</a:t>
+              <a:t>• 향후: 인터랙티브 대시보드 고도화, 연도별 점수 추적</a:t>
             </a:r>
           </a:p>
         </p:txBody>
@@ -6030,6 +6105,220 @@
 </file>
 
 <file path=ppt/slides/slide20.xml><?xml version="1.0" encoding="utf-8"?>
+<p:sld xmlns:a="http://schemas.openxmlformats.org/drawingml/2006/main" xmlns:p="http://schemas.openxmlformats.org/presentationml/2006/main" xmlns:r="http://schemas.openxmlformats.org/officeDocument/2006/relationships">
+  <p:cSld>
+    <p:spTree>
+      <p:nvGrpSpPr>
+        <p:cNvPr id="1" name=""/>
+        <p:cNvGrpSpPr/>
+        <p:nvPr/>
+      </p:nvGrpSpPr>
+      <p:grpSpPr/>
+      <p:sp>
+        <p:nvSpPr>
+          <p:cNvPr id="2" name="TextBox 1"/>
+          <p:cNvSpPr txBox="1"/>
+          <p:nvPr/>
+        </p:nvSpPr>
+        <p:spPr>
+          <a:xfrm>
+            <a:off x="502920" y="320040"/>
+            <a:ext cx="11155680" cy="914400"/>
+          </a:xfrm>
+          <a:prstGeom prst="rect">
+            <a:avLst/>
+          </a:prstGeom>
+          <a:noFill/>
+        </p:spPr>
+        <p:txBody>
+          <a:bodyPr wrap="square">
+            <a:spAutoFit/>
+          </a:bodyPr>
+          <a:lstStyle/>
+          <a:p>
+            <a:r>
+              <a:rPr sz="2800" b="1">
+                <a:solidFill>
+                  <a:srgbClr val="1F3A5F"/>
+                </a:solidFill>
+                <a:latin typeface="Malgun Gothic"/>
+              </a:rPr>
+              <a:t>연구 범위 · 선행연구 차용 여부</a:t>
+            </a:r>
+          </a:p>
+        </p:txBody>
+      </p:sp>
+      <p:sp>
+        <p:nvSpPr>
+          <p:cNvPr id="3" name="Rectangle 2"/>
+          <p:cNvSpPr/>
+          <p:nvPr/>
+        </p:nvSpPr>
+        <p:spPr>
+          <a:xfrm>
+            <a:off x="548640" y="1188720"/>
+            <a:ext cx="11064240" cy="38100"/>
+          </a:xfrm>
+          <a:prstGeom prst="rect">
+            <a:avLst/>
+          </a:prstGeom>
+          <a:solidFill>
+            <a:srgbClr val="C44E52"/>
+          </a:solidFill>
+          <a:ln>
+            <a:noFill/>
+          </a:ln>
+        </p:spPr>
+        <p:style>
+          <a:lnRef idx="1">
+            <a:schemeClr val="accent1"/>
+          </a:lnRef>
+          <a:fillRef idx="3">
+            <a:schemeClr val="accent1"/>
+          </a:fillRef>
+          <a:effectRef idx="2">
+            <a:schemeClr val="accent1"/>
+          </a:effectRef>
+          <a:fontRef idx="minor">
+            <a:schemeClr val="lt1"/>
+          </a:fontRef>
+        </p:style>
+        <p:txBody>
+          <a:bodyPr rtlCol="0" anchor="ctr"/>
+          <a:lstStyle/>
+          <a:p>
+            <a:pPr algn="ctr"/>
+          </a:p>
+        </p:txBody>
+      </p:sp>
+      <p:sp>
+        <p:nvSpPr>
+          <p:cNvPr id="4" name="TextBox 3"/>
+          <p:cNvSpPr txBox="1"/>
+          <p:nvPr/>
+        </p:nvSpPr>
+        <p:spPr>
+          <a:xfrm>
+            <a:off x="640080" y="1554480"/>
+            <a:ext cx="10972800" cy="4937760"/>
+          </a:xfrm>
+          <a:prstGeom prst="rect">
+            <a:avLst/>
+          </a:prstGeom>
+          <a:noFill/>
+        </p:spPr>
+        <p:txBody>
+          <a:bodyPr wrap="square">
+            <a:spAutoFit/>
+          </a:bodyPr>
+          <a:lstStyle/>
+          <a:p>
+            <a:pPr>
+              <a:spcAft>
+                <a:spcPts val="800"/>
+              </a:spcAft>
+            </a:pPr>
+            <a:r>
+              <a:rPr sz="1900">
+                <a:solidFill>
+                  <a:srgbClr val="222222"/>
+                </a:solidFill>
+                <a:latin typeface="Malgun Gothic"/>
+              </a:rPr>
+              <a:t>• 본 분석은 26-1 빅데이터컴퓨팅 기말 프로젝트로 직접 수행</a:t>
+            </a:r>
+          </a:p>
+          <a:p>
+            <a:pPr>
+              <a:spcAft>
+                <a:spcPts val="800"/>
+              </a:spcAft>
+            </a:pPr>
+            <a:r>
+              <a:rPr sz="1900">
+                <a:solidFill>
+                  <a:srgbClr val="222222"/>
+                </a:solidFill>
+                <a:latin typeface="Malgun Gothic"/>
+              </a:rPr>
+              <a:t>• 선행연구(타인) 차용: 없음 — 설계·수집·정제·분석·시각화 전부 자체 개발</a:t>
+            </a:r>
+          </a:p>
+          <a:p>
+            <a:pPr>
+              <a:spcAft>
+                <a:spcPts val="800"/>
+              </a:spcAft>
+            </a:pPr>
+            <a:r>
+              <a:rPr sz="1900">
+                <a:solidFill>
+                  <a:srgbClr val="222222"/>
+                </a:solidFill>
+                <a:latin typeface="Malgun Gothic"/>
+              </a:rPr>
+              <a:t>• 본인 이전 연구 차용: 없음 — 방법론 골격은 본 과목 제안서에서 설계</a:t>
+            </a:r>
+          </a:p>
+          <a:p>
+            <a:pPr>
+              <a:spcAft>
+                <a:spcPts val="800"/>
+              </a:spcAft>
+            </a:pPr>
+            <a:r>
+              <a:rPr sz="1900">
+                <a:solidFill>
+                  <a:srgbClr val="222222"/>
+                </a:solidFill>
+                <a:latin typeface="Malgun Gothic"/>
+              </a:rPr>
+              <a:t>• 외부 차용은 '공개 데이터·지도파일'뿐, 모두 출처 명시</a:t>
+            </a:r>
+          </a:p>
+          <a:p>
+            <a:pPr lvl="1">
+              <a:spcAft>
+                <a:spcPts val="800"/>
+              </a:spcAft>
+            </a:pPr>
+            <a:r>
+              <a:rPr sz="1600">
+                <a:solidFill>
+                  <a:srgbClr val="222222"/>
+                </a:solidFill>
+                <a:latin typeface="Malgun Gothic"/>
+              </a:rPr>
+              <a:t>– KOSIS·사법연감·공단·변협 / 지도(GeoJSON) / 2009 변호사분포(법률저널)</a:t>
+            </a:r>
+          </a:p>
+          <a:p>
+            <a:pPr>
+              <a:spcAft>
+                <a:spcPts val="800"/>
+              </a:spcAft>
+            </a:pPr>
+            <a:r>
+              <a:rPr sz="1900">
+                <a:solidFill>
+                  <a:srgbClr val="222222"/>
+                </a:solidFill>
+                <a:latin typeface="Malgun Gothic"/>
+              </a:rPr>
+              <a:t>• → 데이터는 차용, 수집·정제·지수개발·분석·해석은 100% 본 프로젝트</a:t>
+            </a:r>
+          </a:p>
+        </p:txBody>
+      </p:sp>
+    </p:spTree>
+  </p:cSld>
+  <p:clrMapOvr>
+    <a:masterClrMapping/>
+  </p:clrMapOvr>
+</p:sld>
+</file>
+
+<file path=ppt/slides/slide21.xml><?xml version="1.0" encoding="utf-8"?>
 <p:sld xmlns:a="http://schemas.openxmlformats.org/drawingml/2006/main" xmlns:p="http://schemas.openxmlformats.org/presentationml/2006/main" xmlns:r="http://schemas.openxmlformats.org/officeDocument/2006/relationships">
   <p:cSld>
     <p:spTree>
@@ -7336,7 +7625,7 @@
 </p:sld>
 </file>
 
-<file path=ppt/slides/slide21.xml><?xml version="1.0" encoding="utf-8"?>
+<file path=ppt/slides/slide22.xml><?xml version="1.0" encoding="utf-8"?>
 <p:sld xmlns:a="http://schemas.openxmlformats.org/drawingml/2006/main" xmlns:p="http://schemas.openxmlformats.org/presentationml/2006/main" xmlns:r="http://schemas.openxmlformats.org/officeDocument/2006/relationships">
   <p:cSld>
     <p:spTree>
@@ -7521,7 +7810,7 @@
                 </a:solidFill>
                 <a:latin typeface="Malgun Gothic"/>
               </a:rPr>
-              <a:t>• 왜 중요도 3종 — 자의성 방지, 어떤 방식이든 서울 1위(강건성)</a:t>
+              <a:t>• 왜 가중치 3종 — 자의성 방지, 어떤 방식이든 서울 1위(강건성)</a:t>
             </a:r>
           </a:p>
           <a:p>
@@ -7550,7 +7839,7 @@
 </p:sld>
 </file>
 
-<file path=ppt/slides/slide22.xml><?xml version="1.0" encoding="utf-8"?>
+<file path=ppt/slides/slide23.xml><?xml version="1.0" encoding="utf-8"?>
 <p:sld xmlns:a="http://schemas.openxmlformats.org/drawingml/2006/main" xmlns:p="http://schemas.openxmlformats.org/presentationml/2006/main" xmlns:r="http://schemas.openxmlformats.org/officeDocument/2006/relationships">
   <p:cSld>
     <p:spTree>
@@ -8025,7 +8314,7 @@
 </p:sld>
 </file>
 
-<file path=ppt/slides/slide23.xml><?xml version="1.0" encoding="utf-8"?>
+<file path=ppt/slides/slide24.xml><?xml version="1.0" encoding="utf-8"?>
 <p:sld xmlns:a="http://schemas.openxmlformats.org/drawingml/2006/main" xmlns:p="http://schemas.openxmlformats.org/presentationml/2006/main" xmlns:r="http://schemas.openxmlformats.org/officeDocument/2006/relationships">
   <p:cSld>
     <p:spTree>

--- a/reports/발표자료.pptx
+++ b/reports/발표자료.pptx
@@ -21,6 +21,7 @@
     <p:sldId id="269" r:id="rId20"/>
     <p:sldId id="270" r:id="rId21"/>
     <p:sldId id="271" r:id="rId22"/>
+    <p:sldId id="280" r:id="rId31"/>
     <p:sldId id="272" r:id="rId23"/>
     <p:sldId id="273" r:id="rId24"/>
     <p:sldId id="274" r:id="rId25"/>
@@ -5405,13 +5406,13 @@
               </a:spcAft>
             </a:pPr>
             <a:r>
-              <a:rPr sz="2000">
+              <a:rPr sz="1900">
                 <a:solidFill>
                   <a:srgbClr val="222222"/>
                 </a:solidFill>
                 <a:latin typeface="Malgun Gothic"/>
               </a:rPr>
-              <a:t>• H2 ✅ 강하게 지지 — 변호사 많을수록 사건부담↓ (서울 빼도 성립)</a:t>
+              <a:t>• H2 ✅ 지지 — 변호사 적을수록 1인당 부담↑ (인구당 사건수 교차검증 +0.91로 순환성 보완)</a:t>
             </a:r>
           </a:p>
           <a:p>
@@ -5421,7 +5422,7 @@
               </a:spcAft>
             </a:pPr>
             <a:r>
-              <a:rPr sz="2000">
+              <a:rPr sz="1900">
                 <a:solidFill>
                   <a:srgbClr val="222222"/>
                 </a:solidFill>
@@ -5437,13 +5438,13 @@
               </a:spcAft>
             </a:pPr>
             <a:r>
-              <a:rPr sz="2000">
+              <a:rPr sz="1900">
                 <a:solidFill>
                   <a:srgbClr val="222222"/>
                 </a:solidFill>
                 <a:latin typeface="Malgun Gothic"/>
               </a:rPr>
-              <a:t>• H1 △ 방향만 맞음 — 수도권이 유리하나 표본 작아 확정 못 함</a:t>
+              <a:t>• H1 △ 방향만 맞음 — 수도권 유리하나 표본 작아 확정 못 함</a:t>
             </a:r>
           </a:p>
           <a:p>
@@ -5453,13 +5454,13 @@
               </a:spcAft>
             </a:pPr>
             <a:r>
-              <a:rPr sz="2000">
+              <a:rPr sz="1900">
                 <a:solidFill>
                   <a:srgbClr val="222222"/>
                 </a:solidFill>
                 <a:latin typeface="Malgun Gothic"/>
               </a:rPr>
-              <a:t>• H3 △ 약함 — 소득과 접근성의 관계는 뚜렷하지 않음</a:t>
+              <a:t>• H3 △ 약함 — 소득과 접근성 관계 뚜렷하지 않음</a:t>
             </a:r>
           </a:p>
           <a:p>
@@ -5469,13 +5470,13 @@
               </a:spcAft>
             </a:pPr>
             <a:r>
-              <a:rPr sz="1700">
+              <a:rPr sz="1600">
                 <a:solidFill>
                   <a:srgbClr val="222222"/>
                 </a:solidFill>
                 <a:latin typeface="Malgun Gothic"/>
               </a:rPr>
-              <a:t>– 권역이 10~13개로 적어 통계적 확신에는 한계 (정직히 명시)</a:t>
+              <a:t>– 권역 10~13개로 적어 통계적 확신엔 한계 (정직히 명시)</a:t>
             </a:r>
           </a:p>
         </p:txBody>
@@ -5801,13 +5802,29 @@
               </a:spcAft>
             </a:pPr>
             <a:r>
-              <a:rPr sz="2000">
+              <a:rPr sz="1900">
                 <a:solidFill>
                   <a:srgbClr val="222222"/>
                 </a:solidFill>
                 <a:latin typeface="Malgun Gothic"/>
               </a:rPr>
-              <a:t>• 변호사 데이터가 2시점(2009·현재) — 매년 시계열은 추가 수집 필요</a:t>
+              <a:t>• 검정력 한계 — 17개 시도라 표본이 작음 → H1·H3는 방향만(△)</a:t>
+            </a:r>
+          </a:p>
+          <a:p>
+            <a:pPr lvl="1">
+              <a:spcAft>
+                <a:spcPts val="800"/>
+              </a:spcAft>
+            </a:pPr>
+            <a:r>
+              <a:rPr sz="1600">
+                <a:solidFill>
+                  <a:srgbClr val="222222"/>
+                </a:solidFill>
+                <a:latin typeface="Malgun Gothic"/>
+              </a:rPr>
+              <a:t>– 핵심 기여는 '검정'보다 다출처 통합 파이프라인·지수·실질 임팩트 연결</a:t>
             </a:r>
           </a:p>
           <a:p>
@@ -5817,13 +5834,13 @@
               </a:spcAft>
             </a:pPr>
             <a:r>
-              <a:rPr sz="2000">
+              <a:rPr sz="1900">
                 <a:solidFill>
                   <a:srgbClr val="222222"/>
                 </a:solidFill>
                 <a:latin typeface="Malgun Gothic"/>
               </a:rPr>
-              <a:t>• 권역이 적어 통계적 검정력 제한</a:t>
+              <a:t>• 시점 — 변호사는 2009·현재 2시점 비교(추세선 아님), 법률구조는 시계열로 보강</a:t>
             </a:r>
           </a:p>
           <a:p>
@@ -5833,13 +5850,13 @@
               </a:spcAft>
             </a:pPr>
             <a:r>
-              <a:rPr sz="2000">
+              <a:rPr sz="1900">
                 <a:solidFill>
                   <a:srgbClr val="222222"/>
                 </a:solidFill>
                 <a:latin typeface="Malgun Gothic"/>
               </a:rPr>
-              <a:t>• 법률구조 데이터가 거친 단위(10도단위)라 일부 권역은 근사 처리</a:t>
+              <a:t>• '빅'데이터 — 양은 중간, 핵심은 다출처 수집·정제·통합(Variety·Veracity)</a:t>
             </a:r>
           </a:p>
           <a:p>
@@ -5849,13 +5866,13 @@
               </a:spcAft>
             </a:pPr>
             <a:r>
-              <a:rPr sz="2000">
+              <a:rPr sz="1900">
                 <a:solidFill>
                   <a:srgbClr val="222222"/>
                 </a:solidFill>
                 <a:latin typeface="Malgun Gothic"/>
               </a:rPr>
-              <a:t>• 향후: 인터랙티브 대시보드 고도화, 연도별 점수 추적</a:t>
+              <a:t>• 데이터 해상도 — A3 10도단위 근사, A2 단일연도 본안 기준</a:t>
             </a:r>
           </a:p>
         </p:txBody>
@@ -8365,6 +8382,292 @@
                 <a:latin typeface="Malgun Gothic"/>
               </a:rPr>
               <a:t>코드·노트북·인터랙티브 지도: github.com/Allenkeem/llai-project</a:t>
+            </a:r>
+          </a:p>
+        </p:txBody>
+      </p:sp>
+    </p:spTree>
+  </p:cSld>
+  <p:clrMapOvr>
+    <a:masterClrMapping/>
+  </p:clrMapOvr>
+</p:sld>
+</file>
+
+<file path=ppt/slides/slide25.xml><?xml version="1.0" encoding="utf-8"?>
+<p:sld xmlns:a="http://schemas.openxmlformats.org/drawingml/2006/main" xmlns:p="http://schemas.openxmlformats.org/presentationml/2006/main" xmlns:r="http://schemas.openxmlformats.org/officeDocument/2006/relationships">
+  <p:cSld>
+    <p:spTree>
+      <p:nvGrpSpPr>
+        <p:cNvPr id="1" name=""/>
+        <p:cNvGrpSpPr/>
+        <p:nvPr/>
+      </p:nvGrpSpPr>
+      <p:grpSpPr/>
+      <p:sp>
+        <p:nvSpPr>
+          <p:cNvPr id="2" name="TextBox 1"/>
+          <p:cNvSpPr txBox="1"/>
+          <p:nvPr/>
+        </p:nvSpPr>
+        <p:spPr>
+          <a:xfrm>
+            <a:off x="502920" y="320040"/>
+            <a:ext cx="11155680" cy="914400"/>
+          </a:xfrm>
+          <a:prstGeom prst="rect">
+            <a:avLst/>
+          </a:prstGeom>
+          <a:noFill/>
+        </p:spPr>
+        <p:txBody>
+          <a:bodyPr wrap="square">
+            <a:spAutoFit/>
+          </a:bodyPr>
+          <a:lstStyle/>
+          <a:p>
+            <a:r>
+              <a:rPr sz="2800" b="1">
+                <a:solidFill>
+                  <a:srgbClr val="1F3A5F"/>
+                </a:solidFill>
+                <a:latin typeface="Malgun Gothic"/>
+              </a:rPr>
+              <a:t>그래서 뭐? — 변호사 없이 받는 재판</a:t>
+            </a:r>
+          </a:p>
+        </p:txBody>
+      </p:sp>
+      <p:sp>
+        <p:nvSpPr>
+          <p:cNvPr id="3" name="Rectangle 2"/>
+          <p:cNvSpPr/>
+          <p:nvPr/>
+        </p:nvSpPr>
+        <p:spPr>
+          <a:xfrm>
+            <a:off x="548640" y="1188720"/>
+            <a:ext cx="11064240" cy="38100"/>
+          </a:xfrm>
+          <a:prstGeom prst="rect">
+            <a:avLst/>
+          </a:prstGeom>
+          <a:solidFill>
+            <a:srgbClr val="C44E52"/>
+          </a:solidFill>
+          <a:ln>
+            <a:noFill/>
+          </a:ln>
+        </p:spPr>
+        <p:style>
+          <a:lnRef idx="1">
+            <a:schemeClr val="accent1"/>
+          </a:lnRef>
+          <a:fillRef idx="3">
+            <a:schemeClr val="accent1"/>
+          </a:fillRef>
+          <a:effectRef idx="2">
+            <a:schemeClr val="accent1"/>
+          </a:effectRef>
+          <a:fontRef idx="minor">
+            <a:schemeClr val="lt1"/>
+          </a:fontRef>
+        </p:style>
+        <p:txBody>
+          <a:bodyPr rtlCol="0" anchor="ctr"/>
+          <a:lstStyle/>
+          <a:p>
+            <a:pPr algn="ctr"/>
+          </a:p>
+        </p:txBody>
+      </p:sp>
+      <p:sp>
+        <p:nvSpPr>
+          <p:cNvPr id="4" name="Rounded Rectangle 3"/>
+          <p:cNvSpPr/>
+          <p:nvPr/>
+        </p:nvSpPr>
+        <p:spPr>
+          <a:xfrm>
+            <a:off x="640080" y="1463040"/>
+            <a:ext cx="10881360" cy="868680"/>
+          </a:xfrm>
+          <a:prstGeom prst="roundRect">
+            <a:avLst/>
+          </a:prstGeom>
+          <a:solidFill>
+            <a:srgbClr val="EDF1F7"/>
+          </a:solidFill>
+          <a:ln>
+            <a:solidFill>
+              <a:srgbClr val="1F3A5F"/>
+            </a:solidFill>
+          </a:ln>
+        </p:spPr>
+        <p:style>
+          <a:lnRef idx="1">
+            <a:schemeClr val="accent1"/>
+          </a:lnRef>
+          <a:fillRef idx="3">
+            <a:schemeClr val="accent1"/>
+          </a:fillRef>
+          <a:effectRef idx="2">
+            <a:schemeClr val="accent1"/>
+          </a:effectRef>
+          <a:fontRef idx="minor">
+            <a:schemeClr val="lt1"/>
+          </a:fontRef>
+        </p:style>
+        <p:txBody>
+          <a:bodyPr rtlCol="0" anchor="ctr" wrap="square"/>
+          <a:lstStyle/>
+          <a:p>
+            <a:pPr algn="ctr"/>
+            <a:r>
+              <a:rPr sz="2000" b="1">
+                <a:solidFill>
+                  <a:srgbClr val="1F3A5F"/>
+                </a:solidFill>
+                <a:latin typeface="Malgun Gothic"/>
+              </a:rPr>
+              <a:t>낮은 점수(변호사 부족) = 실제로 '나홀로소송'(변호사 없이 재판) 비율이 높다</a:t>
+            </a:r>
+          </a:p>
+        </p:txBody>
+      </p:sp>
+      <p:sp>
+        <p:nvSpPr>
+          <p:cNvPr id="5" name="TextBox 4"/>
+          <p:cNvSpPr txBox="1"/>
+          <p:nvPr/>
+        </p:nvSpPr>
+        <p:spPr>
+          <a:xfrm>
+            <a:off x="640080" y="2651760"/>
+            <a:ext cx="10881360" cy="3108960"/>
+          </a:xfrm>
+          <a:prstGeom prst="rect">
+            <a:avLst/>
+          </a:prstGeom>
+          <a:noFill/>
+        </p:spPr>
+        <p:txBody>
+          <a:bodyPr wrap="square">
+            <a:spAutoFit/>
+          </a:bodyPr>
+          <a:lstStyle/>
+          <a:p>
+            <a:pPr>
+              <a:spcAft>
+                <a:spcPts val="1100"/>
+              </a:spcAft>
+            </a:pPr>
+            <a:r>
+              <a:rPr sz="2000">
+                <a:solidFill>
+                  <a:srgbClr val="222222"/>
+                </a:solidFill>
+                <a:latin typeface="Malgun Gothic"/>
+              </a:rPr>
+              <a:t>• 형사 1심의 약 45%가 변호사 없는 '나홀로소송' (민사 소액사건은 81.8%)</a:t>
+            </a:r>
+          </a:p>
+          <a:p>
+            <a:pPr>
+              <a:spcAft>
+                <a:spcPts val="1100"/>
+              </a:spcAft>
+            </a:pPr>
+            <a:r>
+              <a:rPr sz="2000">
+                <a:solidFill>
+                  <a:srgbClr val="222222"/>
+                </a:solidFill>
+                <a:latin typeface="Malgun Gothic"/>
+              </a:rPr>
+              <a:t>• 지역 격차 — 서울중앙 35%(전국 최저) vs 대구 51% · 수원 48% · 인천 48%(최고)</a:t>
+            </a:r>
+          </a:p>
+          <a:p>
+            <a:pPr>
+              <a:spcAft>
+                <a:spcPts val="1100"/>
+              </a:spcAft>
+            </a:pPr>
+            <a:r>
+              <a:rPr sz="2000">
+                <a:solidFill>
+                  <a:srgbClr val="222222"/>
+                </a:solidFill>
+                <a:latin typeface="Malgun Gothic"/>
+              </a:rPr>
+              <a:t>• 변호사 부족 지역일수록 혼자 재판 → 방어권·승소 가능성에서 직접 불이익</a:t>
+            </a:r>
+          </a:p>
+          <a:p>
+            <a:pPr>
+              <a:spcAft>
+                <a:spcPts val="1100"/>
+              </a:spcAft>
+            </a:pPr>
+            <a:r>
+              <a:rPr sz="2000">
+                <a:solidFill>
+                  <a:srgbClr val="222222"/>
+                </a:solidFill>
+                <a:latin typeface="Malgun Gothic"/>
+              </a:rPr>
+              <a:t>• 본 분석 하위권 인천(LLAI 5.0)도 나홀로소송 48% → 두 지표가 같은 방향</a:t>
+            </a:r>
+          </a:p>
+          <a:p>
+            <a:pPr>
+              <a:spcAft>
+                <a:spcPts val="1100"/>
+              </a:spcAft>
+            </a:pPr>
+            <a:r>
+              <a:rPr sz="2000">
+                <a:solidFill>
+                  <a:srgbClr val="222222"/>
+                </a:solidFill>
+                <a:latin typeface="Malgun Gothic"/>
+              </a:rPr>
+              <a:t>• → LLAI 격차는 '숫자'가 아니라 시민이 겪는 '재판의 질' 문제</a:t>
+            </a:r>
+          </a:p>
+        </p:txBody>
+      </p:sp>
+      <p:sp>
+        <p:nvSpPr>
+          <p:cNvPr id="6" name="TextBox 5"/>
+          <p:cNvSpPr txBox="1"/>
+          <p:nvPr/>
+        </p:nvSpPr>
+        <p:spPr>
+          <a:xfrm>
+            <a:off x="640080" y="6035040"/>
+            <a:ext cx="10881360" cy="457200"/>
+          </a:xfrm>
+          <a:prstGeom prst="rect">
+            <a:avLst/>
+          </a:prstGeom>
+          <a:noFill/>
+        </p:spPr>
+        <p:txBody>
+          <a:bodyPr wrap="none">
+            <a:spAutoFit/>
+          </a:bodyPr>
+          <a:lstStyle/>
+          <a:p>
+            <a:r>
+              <a:rPr sz="1200" i="1">
+                <a:solidFill>
+                  <a:srgbClr val="555555"/>
+                </a:solidFill>
+                <a:latin typeface="Malgun Gothic"/>
+              </a:rPr>
+              <a:t>※ 출처: 사법연감·박주민 의원실(리걸타임즈·뉴스1 보도). 외부 통계 인용으로 본 연구 분석과 구분.</a:t>
             </a:r>
           </a:p>
         </p:txBody>

--- a/reports/발표자료.pptx
+++ b/reports/발표자료.pptx
@@ -4063,13 +4063,13 @@
           <a:lstStyle/>
           <a:p>
             <a:r>
-              <a:rPr sz="1400" i="1">
+              <a:rPr sz="1300" i="1">
                 <a:solidFill>
                   <a:srgbClr val="555555"/>
                 </a:solidFill>
                 <a:latin typeface="Malgun Gothic"/>
               </a:rPr>
-              <a:t>📊 읽는 법 — 막대가 길수록 점수 높음. 서울만 홀로 길고 파랑(별도 그룹), 나머지는 짧고 빨강.</a:t>
+              <a:t>📊 읽는 법 — 막대가 길수록 점수 높음. 서울만 파랑(별도 그룹). ※ '1인당' 지표라 절대 변호사 수와 함께 봐야(제주 154명=전국 최소).</a:t>
             </a:r>
           </a:p>
         </p:txBody>
@@ -5330,7 +5330,7 @@
                 </a:solidFill>
                 <a:latin typeface="Malgun Gothic"/>
               </a:rPr>
-              <a:t>11. 가설 검정 종합</a:t>
+              <a:t>그래서 뭐? — 변호사 없이 받는 재판</a:t>
             </a:r>
           </a:p>
         </p:txBody>
@@ -5380,14 +5380,68 @@
       </p:sp>
       <p:sp>
         <p:nvSpPr>
-          <p:cNvPr id="4" name="TextBox 3"/>
+          <p:cNvPr id="4" name="Rounded Rectangle 3"/>
+          <p:cNvSpPr/>
+          <p:nvPr/>
+        </p:nvSpPr>
+        <p:spPr>
+          <a:xfrm>
+            <a:off x="640080" y="1463040"/>
+            <a:ext cx="10881360" cy="868680"/>
+          </a:xfrm>
+          <a:prstGeom prst="roundRect">
+            <a:avLst/>
+          </a:prstGeom>
+          <a:solidFill>
+            <a:srgbClr val="EDF1F7"/>
+          </a:solidFill>
+          <a:ln>
+            <a:solidFill>
+              <a:srgbClr val="1F3A5F"/>
+            </a:solidFill>
+          </a:ln>
+        </p:spPr>
+        <p:style>
+          <a:lnRef idx="1">
+            <a:schemeClr val="accent1"/>
+          </a:lnRef>
+          <a:fillRef idx="3">
+            <a:schemeClr val="accent1"/>
+          </a:fillRef>
+          <a:effectRef idx="2">
+            <a:schemeClr val="accent1"/>
+          </a:effectRef>
+          <a:fontRef idx="minor">
+            <a:schemeClr val="lt1"/>
+          </a:fontRef>
+        </p:style>
+        <p:txBody>
+          <a:bodyPr rtlCol="0" anchor="ctr" wrap="square"/>
+          <a:lstStyle/>
+          <a:p>
+            <a:pPr algn="ctr"/>
+            <a:r>
+              <a:rPr sz="2000" b="1">
+                <a:solidFill>
+                  <a:srgbClr val="1F3A5F"/>
+                </a:solidFill>
+                <a:latin typeface="Malgun Gothic"/>
+              </a:rPr>
+              <a:t>낮은 점수(변호사 부족) = 실제로 '나홀로소송'(변호사 없이 재판) 비율이 높다</a:t>
+            </a:r>
+          </a:p>
+        </p:txBody>
+      </p:sp>
+      <p:sp>
+        <p:nvSpPr>
+          <p:cNvPr id="5" name="TextBox 4"/>
           <p:cNvSpPr txBox="1"/>
           <p:nvPr/>
         </p:nvSpPr>
         <p:spPr>
           <a:xfrm>
-            <a:off x="640080" y="1554480"/>
-            <a:ext cx="10972800" cy="4937760"/>
+            <a:off x="640080" y="2651760"/>
+            <a:ext cx="10881360" cy="3108960"/>
           </a:xfrm>
           <a:prstGeom prst="rect">
             <a:avLst/>
@@ -5402,81 +5456,115 @@
           <a:p>
             <a:pPr>
               <a:spcAft>
-                <a:spcPts val="800"/>
+                <a:spcPts val="1100"/>
               </a:spcAft>
             </a:pPr>
             <a:r>
-              <a:rPr sz="1900">
+              <a:rPr sz="2000">
                 <a:solidFill>
                   <a:srgbClr val="222222"/>
                 </a:solidFill>
                 <a:latin typeface="Malgun Gothic"/>
               </a:rPr>
-              <a:t>• H2 ✅ 지지 — 변호사 적을수록 1인당 부담↑ (인구당 사건수 교차검증 +0.91로 순환성 보완)</a:t>
+              <a:t>• 형사 1심의 약 45%가 변호사 없는 '나홀로소송' (민사 소액사건은 81.8%)</a:t>
             </a:r>
           </a:p>
           <a:p>
             <a:pPr>
               <a:spcAft>
-                <a:spcPts val="800"/>
+                <a:spcPts val="1100"/>
               </a:spcAft>
             </a:pPr>
             <a:r>
-              <a:rPr sz="1900">
+              <a:rPr sz="2000">
                 <a:solidFill>
                   <a:srgbClr val="222222"/>
                 </a:solidFill>
                 <a:latin typeface="Malgun Gothic"/>
               </a:rPr>
-              <a:t>• H4 ✅ 지지 — 변호사 3.4배↑에도 서울 쏠림 심해짐</a:t>
+              <a:t>• 지역 격차 — 서울중앙 35%(전국 최저) vs 대구 51% · 수원 48% · 인천 48%(최고)</a:t>
             </a:r>
           </a:p>
           <a:p>
             <a:pPr>
               <a:spcAft>
-                <a:spcPts val="800"/>
+                <a:spcPts val="1100"/>
               </a:spcAft>
             </a:pPr>
             <a:r>
-              <a:rPr sz="1900">
+              <a:rPr sz="2000">
                 <a:solidFill>
                   <a:srgbClr val="222222"/>
                 </a:solidFill>
                 <a:latin typeface="Malgun Gothic"/>
               </a:rPr>
-              <a:t>• H1 △ 방향만 맞음 — 수도권 유리하나 표본 작아 확정 못 함</a:t>
+              <a:t>• 변호사 부족 지역일수록 혼자 재판 → 방어권·승소 가능성에서 직접 불이익</a:t>
             </a:r>
           </a:p>
           <a:p>
             <a:pPr>
               <a:spcAft>
-                <a:spcPts val="800"/>
+                <a:spcPts val="1100"/>
               </a:spcAft>
             </a:pPr>
             <a:r>
-              <a:rPr sz="1900">
+              <a:rPr sz="2000">
                 <a:solidFill>
                   <a:srgbClr val="222222"/>
                 </a:solidFill>
                 <a:latin typeface="Malgun Gothic"/>
               </a:rPr>
-              <a:t>• H3 △ 약함 — 소득과 접근성 관계 뚜렷하지 않음</a:t>
-            </a:r>
-          </a:p>
-          <a:p>
-            <a:pPr lvl="1">
+              <a:t>• 본 분석 하위권 인천(LLAI 5.0)도 나홀로소송 48% → 두 지표가 같은 방향</a:t>
+            </a:r>
+          </a:p>
+          <a:p>
+            <a:pPr>
               <a:spcAft>
-                <a:spcPts val="800"/>
+                <a:spcPts val="1100"/>
               </a:spcAft>
             </a:pPr>
             <a:r>
-              <a:rPr sz="1600">
+              <a:rPr sz="2000">
                 <a:solidFill>
                   <a:srgbClr val="222222"/>
                 </a:solidFill>
                 <a:latin typeface="Malgun Gothic"/>
               </a:rPr>
-              <a:t>– 권역 10~13개로 적어 통계적 확신엔 한계 (정직히 명시)</a:t>
+              <a:t>• → LLAI 격차는 '숫자'가 아니라 시민이 겪는 '재판의 질' 문제</a:t>
+            </a:r>
+          </a:p>
+        </p:txBody>
+      </p:sp>
+      <p:sp>
+        <p:nvSpPr>
+          <p:cNvPr id="6" name="TextBox 5"/>
+          <p:cNvSpPr txBox="1"/>
+          <p:nvPr/>
+        </p:nvSpPr>
+        <p:spPr>
+          <a:xfrm>
+            <a:off x="640080" y="6035040"/>
+            <a:ext cx="10881360" cy="457200"/>
+          </a:xfrm>
+          <a:prstGeom prst="rect">
+            <a:avLst/>
+          </a:prstGeom>
+          <a:noFill/>
+        </p:spPr>
+        <p:txBody>
+          <a:bodyPr wrap="none">
+            <a:spAutoFit/>
+          </a:bodyPr>
+          <a:lstStyle/>
+          <a:p>
+            <a:r>
+              <a:rPr sz="1200" i="1">
+                <a:solidFill>
+                  <a:srgbClr val="555555"/>
+                </a:solidFill>
+                <a:latin typeface="Malgun Gothic"/>
+              </a:rPr>
+              <a:t>※ 출처: 사법연감·박주민 의원실(리걸타임즈·뉴스1 보도). 외부 통계 인용으로 본 연구 분석과 구분.</a:t>
             </a:r>
           </a:p>
         </p:txBody>
@@ -5528,7 +5616,7 @@
                 </a:solidFill>
                 <a:latin typeface="Malgun Gothic"/>
               </a:rPr>
-              <a:t>12. 결론 · 정책 시사점</a:t>
+              <a:t>11. 가설 검정 종합</a:t>
             </a:r>
           </a:p>
         </p:txBody>
@@ -5604,13 +5692,13 @@
               </a:spcAft>
             </a:pPr>
             <a:r>
-              <a:rPr sz="2000">
+              <a:rPr sz="1900">
                 <a:solidFill>
                   <a:srgbClr val="222222"/>
                 </a:solidFill>
                 <a:latin typeface="Malgun Gothic"/>
               </a:rPr>
-              <a:t>• 변호사 자원의 서울 일극 집중이 격차의 핵심 원인</a:t>
+              <a:t>• H2 ✅ 지지 — 변호사 적을수록 1인당 부담↑ (인구당 사건수 교차검증 +0.91로 순환성 보완)</a:t>
             </a:r>
           </a:p>
           <a:p>
@@ -5620,13 +5708,13 @@
               </a:spcAft>
             </a:pPr>
             <a:r>
-              <a:rPr sz="2000">
+              <a:rPr sz="1900">
                 <a:solidFill>
                   <a:srgbClr val="222222"/>
                 </a:solidFill>
                 <a:latin typeface="Malgun Gothic"/>
               </a:rPr>
-              <a:t>• '수도권이냐'보다 인구 대비·사건부담이 접근성을 좌우 (인천=수도권인데 하위)</a:t>
+              <a:t>• H4 ✅ 지지 — 변호사 3.4배↑에도 서울 쏠림 심해짐</a:t>
             </a:r>
           </a:p>
           <a:p>
@@ -5636,13 +5724,13 @@
               </a:spcAft>
             </a:pPr>
             <a:r>
-              <a:rPr sz="2000">
+              <a:rPr sz="1900">
                 <a:solidFill>
                   <a:srgbClr val="222222"/>
                 </a:solidFill>
                 <a:latin typeface="Malgun Gothic"/>
               </a:rPr>
-              <a:t>• 변호사를 늘리는 것만으로는 격차가 안 줄어듦</a:t>
+              <a:t>• H1 △ 방향만 맞음 — 수도권 유리하나 표본 작아 확정 못 함</a:t>
             </a:r>
           </a:p>
           <a:p>
@@ -5652,29 +5740,29 @@
               </a:spcAft>
             </a:pPr>
             <a:r>
-              <a:rPr sz="2000">
+              <a:rPr sz="1900">
                 <a:solidFill>
                   <a:srgbClr val="222222"/>
                 </a:solidFill>
                 <a:latin typeface="Malgun Gothic"/>
               </a:rPr>
-              <a:t>• 지방끼리는 '취약계층 법률 지원'이 격차의 핵심 → 법률구조 자원 배분 중요</a:t>
-            </a:r>
-          </a:p>
-          <a:p>
-            <a:pPr>
+              <a:t>• H3 △ 약함 — 소득과 접근성 관계 뚜렷하지 않음</a:t>
+            </a:r>
+          </a:p>
+          <a:p>
+            <a:pPr lvl="1">
               <a:spcAft>
                 <a:spcPts val="800"/>
               </a:spcAft>
             </a:pPr>
             <a:r>
-              <a:rPr sz="2000">
+              <a:rPr sz="1600">
                 <a:solidFill>
                   <a:srgbClr val="222222"/>
                 </a:solidFill>
                 <a:latin typeface="Malgun Gothic"/>
               </a:rPr>
-              <a:t>• 정책: 지방 변호사 인센티브 · 공단 자원 비수도권 우선 · 사건 많은 권역 인력 보강</a:t>
+              <a:t>– 권역 10~13개로 적어 통계적 확신엔 한계 (정직히 명시)</a:t>
             </a:r>
           </a:p>
         </p:txBody>
@@ -5726,7 +5814,7 @@
                 </a:solidFill>
                 <a:latin typeface="Malgun Gothic"/>
               </a:rPr>
-              <a:t>13. 한계와 향후 과제</a:t>
+              <a:t>12. 결론 · 정책 시사점</a:t>
             </a:r>
           </a:p>
         </p:txBody>
@@ -5798,7 +5886,7 @@
           <a:p>
             <a:pPr>
               <a:spcAft>
-                <a:spcPts val="800"/>
+                <a:spcPts val="700"/>
               </a:spcAft>
             </a:pPr>
             <a:r>
@@ -5808,13 +5896,45 @@
                 </a:solidFill>
                 <a:latin typeface="Malgun Gothic"/>
               </a:rPr>
-              <a:t>• 검정력 한계 — 17개 시도라 표본이 작음 → H1·H3는 방향만(△)</a:t>
+              <a:t>• 서울 일극 집중이 격차와 '가장 강하게 연관' (상관 기반 — 인과 단정 X)</a:t>
+            </a:r>
+          </a:p>
+          <a:p>
+            <a:pPr>
+              <a:spcAft>
+                <a:spcPts val="700"/>
+              </a:spcAft>
+            </a:pPr>
+            <a:r>
+              <a:rPr sz="1900">
+                <a:solidFill>
+                  <a:srgbClr val="222222"/>
+                </a:solidFill>
+                <a:latin typeface="Malgun Gothic"/>
+              </a:rPr>
+              <a:t>• 실질 결과 — 변호사 부족 지역일수록 나홀로소송↑ (재판의 질 문제)</a:t>
+            </a:r>
+          </a:p>
+          <a:p>
+            <a:pPr>
+              <a:spcAft>
+                <a:spcPts val="700"/>
+              </a:spcAft>
+            </a:pPr>
+            <a:r>
+              <a:rPr sz="1900">
+                <a:solidFill>
+                  <a:srgbClr val="222222"/>
+                </a:solidFill>
+                <a:latin typeface="Malgun Gothic"/>
+              </a:rPr>
+              <a:t>• 양적 팽창의 한계(H4) — 변호사 3.4배↑에도 서울 쏠림 심해짐</a:t>
             </a:r>
           </a:p>
           <a:p>
             <a:pPr lvl="1">
               <a:spcAft>
-                <a:spcPts val="800"/>
+                <a:spcPts val="700"/>
               </a:spcAft>
             </a:pPr>
             <a:r>
@@ -5824,13 +5944,29 @@
                 </a:solidFill>
                 <a:latin typeface="Malgun Gothic"/>
               </a:rPr>
-              <a:t>– 핵심 기여는 '검정'보다 다출처 통합 파이프라인·지수·실질 임팩트 연결</a:t>
+              <a:t>– → 처방은 '총량 늘리기'가 아니라 '분포·공적 공급'</a:t>
+            </a:r>
+          </a:p>
+          <a:p>
+            <a:pPr lvl="1">
+              <a:spcAft>
+                <a:spcPts val="700"/>
+              </a:spcAft>
+            </a:pPr>
+            <a:r>
+              <a:rPr sz="1600">
+                <a:solidFill>
+                  <a:srgbClr val="222222"/>
+                </a:solidFill>
+                <a:latin typeface="Malgun Gothic"/>
+              </a:rPr>
+              <a:t>– 공공변호사·법률구조 인력 비수도권 배치 / 유인책은 '분포 유도'로</a:t>
             </a:r>
           </a:p>
           <a:p>
             <a:pPr>
               <a:spcAft>
-                <a:spcPts val="800"/>
+                <a:spcPts val="700"/>
               </a:spcAft>
             </a:pPr>
             <a:r>
@@ -5840,39 +5976,7 @@
                 </a:solidFill>
                 <a:latin typeface="Malgun Gothic"/>
               </a:rPr>
-              <a:t>• 시점 — 변호사는 2009·현재 2시점 비교(추세선 아님), 법률구조는 시계열로 보강</a:t>
-            </a:r>
-          </a:p>
-          <a:p>
-            <a:pPr>
-              <a:spcAft>
-                <a:spcPts val="800"/>
-              </a:spcAft>
-            </a:pPr>
-            <a:r>
-              <a:rPr sz="1900">
-                <a:solidFill>
-                  <a:srgbClr val="222222"/>
-                </a:solidFill>
-                <a:latin typeface="Malgun Gothic"/>
-              </a:rPr>
-              <a:t>• '빅'데이터 — 양은 중간, 핵심은 다출처 수집·정제·통합(Variety·Veracity)</a:t>
-            </a:r>
-          </a:p>
-          <a:p>
-            <a:pPr>
-              <a:spcAft>
-                <a:spcPts val="800"/>
-              </a:spcAft>
-            </a:pPr>
-            <a:r>
-              <a:rPr sz="1900">
-                <a:solidFill>
-                  <a:srgbClr val="222222"/>
-                </a:solidFill>
-                <a:latin typeface="Malgun Gothic"/>
-              </a:rPr>
-              <a:t>• 데이터 해상도 — A3 10도단위 근사, A2 단일연도 본안 기준</a:t>
+              <a:t>• 지방 내부에선 취약계층 지원(A3)이 핵심 변수</a:t>
             </a:r>
           </a:p>
         </p:txBody>
@@ -6160,7 +6264,7 @@
                 </a:solidFill>
                 <a:latin typeface="Malgun Gothic"/>
               </a:rPr>
-              <a:t>연구 범위 · 선행연구 차용 여부</a:t>
+              <a:t>13. 한계와 향후 과제</a:t>
             </a:r>
           </a:p>
         </p:txBody>
@@ -6232,97 +6336,97 @@
           <a:p>
             <a:pPr>
               <a:spcAft>
-                <a:spcPts val="800"/>
+                <a:spcPts val="700"/>
               </a:spcAft>
             </a:pPr>
             <a:r>
-              <a:rPr sz="1900">
+              <a:rPr sz="1800">
                 <a:solidFill>
                   <a:srgbClr val="222222"/>
                 </a:solidFill>
                 <a:latin typeface="Malgun Gothic"/>
               </a:rPr>
-              <a:t>• 본 분석은 26-1 빅데이터컴퓨팅 기말 프로젝트로 직접 수행</a:t>
+              <a:t>• 검정력 한계 — 17개 시도라 표본 작음 → H1·H3는 방향만(△)</a:t>
+            </a:r>
+          </a:p>
+          <a:p>
+            <a:pPr lvl="1">
+              <a:spcAft>
+                <a:spcPts val="700"/>
+              </a:spcAft>
+            </a:pPr>
+            <a:r>
+              <a:rPr sz="1500">
+                <a:solidFill>
+                  <a:srgbClr val="222222"/>
+                </a:solidFill>
+                <a:latin typeface="Malgun Gothic"/>
+              </a:rPr>
+              <a:t>– 핵심 기여는 '검정'보다 통합 파이프라인·지수·실질 임팩트 연결</a:t>
             </a:r>
           </a:p>
           <a:p>
             <a:pPr>
               <a:spcAft>
-                <a:spcPts val="800"/>
+                <a:spcPts val="700"/>
               </a:spcAft>
             </a:pPr>
             <a:r>
-              <a:rPr sz="1900">
+              <a:rPr sz="1800">
                 <a:solidFill>
                   <a:srgbClr val="222222"/>
                 </a:solidFill>
                 <a:latin typeface="Malgun Gothic"/>
               </a:rPr>
-              <a:t>• 선행연구(타인) 차용: 없음 — 설계·수집·정제·분석·시각화 전부 자체 개발</a:t>
+              <a:t>• 기준 시점 혼합 — 변호사 2026 현재·인구/사건 2024 (완전 일치 X)</a:t>
+            </a:r>
+          </a:p>
+          <a:p>
+            <a:pPr lvl="1">
+              <a:spcAft>
+                <a:spcPts val="700"/>
+              </a:spcAft>
+            </a:pPr>
+            <a:r>
+              <a:rPr sz="1500">
+                <a:solidFill>
+                  <a:srgbClr val="222222"/>
+                </a:solidFill>
+                <a:latin typeface="Malgun Gothic"/>
+              </a:rPr>
+              <a:t>– H4는 변호사 2시점 비교(추세선 아님) + 법률구조 시계열로 보강</a:t>
             </a:r>
           </a:p>
           <a:p>
             <a:pPr>
               <a:spcAft>
-                <a:spcPts val="800"/>
+                <a:spcPts val="700"/>
               </a:spcAft>
             </a:pPr>
             <a:r>
-              <a:rPr sz="1900">
+              <a:rPr sz="1800">
                 <a:solidFill>
                   <a:srgbClr val="222222"/>
                 </a:solidFill>
                 <a:latin typeface="Malgun Gothic"/>
               </a:rPr>
-              <a:t>• 본인 이전 연구 차용: 없음 — 방법론 골격은 본 과목 제안서에서 설계</a:t>
+              <a:t>• 타당성 — LLAI는 1인당 지표라 절대 규모(선택지)와 함께 봐야 (제주 154명)</a:t>
             </a:r>
           </a:p>
           <a:p>
             <a:pPr>
               <a:spcAft>
-                <a:spcPts val="800"/>
+                <a:spcPts val="700"/>
               </a:spcAft>
             </a:pPr>
             <a:r>
-              <a:rPr sz="1900">
+              <a:rPr sz="1800">
                 <a:solidFill>
                   <a:srgbClr val="222222"/>
                 </a:solidFill>
                 <a:latin typeface="Malgun Gothic"/>
               </a:rPr>
-              <a:t>• 외부 차용은 '공개 데이터·지도파일'뿐, 모두 출처 명시</a:t>
-            </a:r>
-          </a:p>
-          <a:p>
-            <a:pPr lvl="1">
-              <a:spcAft>
-                <a:spcPts val="800"/>
-              </a:spcAft>
-            </a:pPr>
-            <a:r>
-              <a:rPr sz="1600">
-                <a:solidFill>
-                  <a:srgbClr val="222222"/>
-                </a:solidFill>
-                <a:latin typeface="Malgun Gothic"/>
-              </a:rPr>
-              <a:t>– KOSIS·사법연감·공단·변협 / 지도(GeoJSON) / 2009 변호사분포(법률저널)</a:t>
-            </a:r>
-          </a:p>
-          <a:p>
-            <a:pPr>
-              <a:spcAft>
-                <a:spcPts val="800"/>
-              </a:spcAft>
-            </a:pPr>
-            <a:r>
-              <a:rPr sz="1900">
-                <a:solidFill>
-                  <a:srgbClr val="222222"/>
-                </a:solidFill>
-                <a:latin typeface="Malgun Gothic"/>
-              </a:rPr>
-              <a:t>• → 데이터는 차용, 수집·정제·지수개발·분석·해석은 100% 본 프로젝트</a:t>
+              <a:t>• '빅'데이터 — 양은 중간, 핵심은 다출처 수집·정제·통합(Variety·Veracity)</a:t>
             </a:r>
           </a:p>
         </p:txBody>
@@ -6336,6 +6440,220 @@
 </file>
 
 <file path=ppt/slides/slide21.xml><?xml version="1.0" encoding="utf-8"?>
+<p:sld xmlns:a="http://schemas.openxmlformats.org/drawingml/2006/main" xmlns:p="http://schemas.openxmlformats.org/presentationml/2006/main" xmlns:r="http://schemas.openxmlformats.org/officeDocument/2006/relationships">
+  <p:cSld>
+    <p:spTree>
+      <p:nvGrpSpPr>
+        <p:cNvPr id="1" name=""/>
+        <p:cNvGrpSpPr/>
+        <p:nvPr/>
+      </p:nvGrpSpPr>
+      <p:grpSpPr/>
+      <p:sp>
+        <p:nvSpPr>
+          <p:cNvPr id="2" name="TextBox 1"/>
+          <p:cNvSpPr txBox="1"/>
+          <p:nvPr/>
+        </p:nvSpPr>
+        <p:spPr>
+          <a:xfrm>
+            <a:off x="502920" y="320040"/>
+            <a:ext cx="11155680" cy="914400"/>
+          </a:xfrm>
+          <a:prstGeom prst="rect">
+            <a:avLst/>
+          </a:prstGeom>
+          <a:noFill/>
+        </p:spPr>
+        <p:txBody>
+          <a:bodyPr wrap="square">
+            <a:spAutoFit/>
+          </a:bodyPr>
+          <a:lstStyle/>
+          <a:p>
+            <a:r>
+              <a:rPr sz="2800" b="1">
+                <a:solidFill>
+                  <a:srgbClr val="1F3A5F"/>
+                </a:solidFill>
+                <a:latin typeface="Malgun Gothic"/>
+              </a:rPr>
+              <a:t>연구 범위 · 선행연구 차용 여부</a:t>
+            </a:r>
+          </a:p>
+        </p:txBody>
+      </p:sp>
+      <p:sp>
+        <p:nvSpPr>
+          <p:cNvPr id="3" name="Rectangle 2"/>
+          <p:cNvSpPr/>
+          <p:nvPr/>
+        </p:nvSpPr>
+        <p:spPr>
+          <a:xfrm>
+            <a:off x="548640" y="1188720"/>
+            <a:ext cx="11064240" cy="38100"/>
+          </a:xfrm>
+          <a:prstGeom prst="rect">
+            <a:avLst/>
+          </a:prstGeom>
+          <a:solidFill>
+            <a:srgbClr val="C44E52"/>
+          </a:solidFill>
+          <a:ln>
+            <a:noFill/>
+          </a:ln>
+        </p:spPr>
+        <p:style>
+          <a:lnRef idx="1">
+            <a:schemeClr val="accent1"/>
+          </a:lnRef>
+          <a:fillRef idx="3">
+            <a:schemeClr val="accent1"/>
+          </a:fillRef>
+          <a:effectRef idx="2">
+            <a:schemeClr val="accent1"/>
+          </a:effectRef>
+          <a:fontRef idx="minor">
+            <a:schemeClr val="lt1"/>
+          </a:fontRef>
+        </p:style>
+        <p:txBody>
+          <a:bodyPr rtlCol="0" anchor="ctr"/>
+          <a:lstStyle/>
+          <a:p>
+            <a:pPr algn="ctr"/>
+          </a:p>
+        </p:txBody>
+      </p:sp>
+      <p:sp>
+        <p:nvSpPr>
+          <p:cNvPr id="4" name="TextBox 3"/>
+          <p:cNvSpPr txBox="1"/>
+          <p:nvPr/>
+        </p:nvSpPr>
+        <p:spPr>
+          <a:xfrm>
+            <a:off x="640080" y="1554480"/>
+            <a:ext cx="10972800" cy="4937760"/>
+          </a:xfrm>
+          <a:prstGeom prst="rect">
+            <a:avLst/>
+          </a:prstGeom>
+          <a:noFill/>
+        </p:spPr>
+        <p:txBody>
+          <a:bodyPr wrap="square">
+            <a:spAutoFit/>
+          </a:bodyPr>
+          <a:lstStyle/>
+          <a:p>
+            <a:pPr>
+              <a:spcAft>
+                <a:spcPts val="700"/>
+              </a:spcAft>
+            </a:pPr>
+            <a:r>
+              <a:rPr sz="1900">
+                <a:solidFill>
+                  <a:srgbClr val="222222"/>
+                </a:solidFill>
+                <a:latin typeface="Malgun Gothic"/>
+              </a:rPr>
+              <a:t>• [학술 윤리] 타인 연구 복제·표절 없음 — 코드·지수·분석 전부 자체 개발</a:t>
+            </a:r>
+          </a:p>
+          <a:p>
+            <a:pPr>
+              <a:spcAft>
+                <a:spcPts val="700"/>
+              </a:spcAft>
+            </a:pPr>
+            <a:r>
+              <a:rPr sz="1900">
+                <a:solidFill>
+                  <a:srgbClr val="222222"/>
+                </a:solidFill>
+                <a:latin typeface="Malgun Gothic"/>
+              </a:rPr>
+              <a:t>• 단, '선행연구가 없다'는 뜻은 아님 — 기존 연구는 분명히 존재</a:t>
+            </a:r>
+          </a:p>
+          <a:p>
+            <a:pPr lvl="1">
+              <a:spcAft>
+                <a:spcPts val="700"/>
+              </a:spcAft>
+            </a:pPr>
+            <a:r>
+              <a:rPr sz="1600">
+                <a:solidFill>
+                  <a:srgbClr val="222222"/>
+                </a:solidFill>
+                <a:latin typeface="Malgun Gothic"/>
+              </a:rPr>
+              <a:t>– 사법정책연구원·법률구조공단 보고서, 변호사 정원-접근성 연구(서울대 등)</a:t>
+            </a:r>
+          </a:p>
+          <a:p>
+            <a:pPr>
+              <a:spcAft>
+                <a:spcPts val="700"/>
+              </a:spcAft>
+            </a:pPr>
+            <a:r>
+              <a:rPr sz="1900">
+                <a:solidFill>
+                  <a:srgbClr val="222222"/>
+                </a:solidFill>
+                <a:latin typeface="Malgun Gothic"/>
+              </a:rPr>
+              <a:t>• 본 지수의 표준 지표(10만명당 변호사 수)도 기존 연구 관행을 따름</a:t>
+            </a:r>
+          </a:p>
+          <a:p>
+            <a:pPr>
+              <a:spcAft>
+                <a:spcPts val="700"/>
+              </a:spcAft>
+            </a:pPr>
+            <a:r>
+              <a:rPr sz="1900">
+                <a:solidFill>
+                  <a:srgbClr val="222222"/>
+                </a:solidFill>
+                <a:latin typeface="Malgun Gothic"/>
+              </a:rPr>
+              <a:t>• 한계 — 기존 지수와의 정량 벤치마킹은 미수행 (향후 과제)</a:t>
+            </a:r>
+          </a:p>
+          <a:p>
+            <a:pPr>
+              <a:spcAft>
+                <a:spcPts val="700"/>
+              </a:spcAft>
+            </a:pPr>
+            <a:r>
+              <a:rPr sz="1900">
+                <a:solidFill>
+                  <a:srgbClr val="222222"/>
+                </a:solidFill>
+                <a:latin typeface="Malgun Gothic"/>
+              </a:rPr>
+              <a:t>• 외부 차용은 공개 데이터·지도파일뿐, 모두 출처 명시</a:t>
+            </a:r>
+          </a:p>
+        </p:txBody>
+      </p:sp>
+    </p:spTree>
+  </p:cSld>
+  <p:clrMapOvr>
+    <a:masterClrMapping/>
+  </p:clrMapOvr>
+</p:sld>
+</file>
+
+<file path=ppt/slides/slide22.xml><?xml version="1.0" encoding="utf-8"?>
 <p:sld xmlns:a="http://schemas.openxmlformats.org/drawingml/2006/main" xmlns:p="http://schemas.openxmlformats.org/presentationml/2006/main" xmlns:r="http://schemas.openxmlformats.org/officeDocument/2006/relationships">
   <p:cSld>
     <p:spTree>
@@ -7642,7 +7960,7 @@
 </p:sld>
 </file>
 
-<file path=ppt/slides/slide22.xml><?xml version="1.0" encoding="utf-8"?>
+<file path=ppt/slides/slide23.xml><?xml version="1.0" encoding="utf-8"?>
 <p:sld xmlns:a="http://schemas.openxmlformats.org/drawingml/2006/main" xmlns:p="http://schemas.openxmlformats.org/presentationml/2006/main" xmlns:r="http://schemas.openxmlformats.org/officeDocument/2006/relationships">
   <p:cSld>
     <p:spTree>
@@ -7856,7 +8174,7 @@
 </p:sld>
 </file>
 
-<file path=ppt/slides/slide23.xml><?xml version="1.0" encoding="utf-8"?>
+<file path=ppt/slides/slide24.xml><?xml version="1.0" encoding="utf-8"?>
 <p:sld xmlns:a="http://schemas.openxmlformats.org/drawingml/2006/main" xmlns:p="http://schemas.openxmlformats.org/presentationml/2006/main" xmlns:r="http://schemas.openxmlformats.org/officeDocument/2006/relationships">
   <p:cSld>
     <p:spTree>
@@ -8331,69 +8649,6 @@
 </p:sld>
 </file>
 
-<file path=ppt/slides/slide24.xml><?xml version="1.0" encoding="utf-8"?>
-<p:sld xmlns:a="http://schemas.openxmlformats.org/drawingml/2006/main" xmlns:p="http://schemas.openxmlformats.org/presentationml/2006/main" xmlns:r="http://schemas.openxmlformats.org/officeDocument/2006/relationships">
-  <p:cSld>
-    <p:spTree>
-      <p:nvGrpSpPr>
-        <p:cNvPr id="1" name=""/>
-        <p:cNvGrpSpPr/>
-        <p:nvPr/>
-      </p:nvGrpSpPr>
-      <p:grpSpPr/>
-      <p:sp>
-        <p:nvSpPr>
-          <p:cNvPr id="2" name="TextBox 1"/>
-          <p:cNvSpPr txBox="1"/>
-          <p:nvPr/>
-        </p:nvSpPr>
-        <p:spPr>
-          <a:xfrm>
-            <a:off x="731520" y="2377440"/>
-            <a:ext cx="10698480" cy="1828800"/>
-          </a:xfrm>
-          <a:prstGeom prst="rect">
-            <a:avLst/>
-          </a:prstGeom>
-          <a:noFill/>
-        </p:spPr>
-        <p:txBody>
-          <a:bodyPr wrap="square">
-            <a:spAutoFit/>
-          </a:bodyPr>
-          <a:lstStyle/>
-          <a:p>
-            <a:r>
-              <a:rPr sz="4000" b="1">
-                <a:solidFill>
-                  <a:srgbClr val="1F3A5F"/>
-                </a:solidFill>
-                <a:latin typeface="Malgun Gothic"/>
-              </a:rPr>
-              <a:t>감사합니다</a:t>
-            </a:r>
-          </a:p>
-          <a:p>
-            <a:r>
-              <a:rPr sz="2000">
-                <a:solidFill>
-                  <a:srgbClr val="C44E52"/>
-                </a:solidFill>
-                <a:latin typeface="Malgun Gothic"/>
-              </a:rPr>
-              <a:t>코드·노트북·인터랙티브 지도: github.com/Allenkeem/llai-project</a:t>
-            </a:r>
-          </a:p>
-        </p:txBody>
-      </p:sp>
-    </p:spTree>
-  </p:cSld>
-  <p:clrMapOvr>
-    <a:masterClrMapping/>
-  </p:clrMapOvr>
-</p:sld>
-</file>
-
 <file path=ppt/slides/slide25.xml><?xml version="1.0" encoding="utf-8"?>
 <p:sld xmlns:a="http://schemas.openxmlformats.org/drawingml/2006/main" xmlns:p="http://schemas.openxmlformats.org/presentationml/2006/main" xmlns:r="http://schemas.openxmlformats.org/officeDocument/2006/relationships">
   <p:cSld>
@@ -8412,8 +8667,8 @@
         </p:nvSpPr>
         <p:spPr>
           <a:xfrm>
-            <a:off x="502920" y="320040"/>
-            <a:ext cx="11155680" cy="914400"/>
+            <a:off x="731520" y="2377440"/>
+            <a:ext cx="10698480" cy="1828800"/>
           </a:xfrm>
           <a:prstGeom prst="rect">
             <a:avLst/>
@@ -8427,247 +8682,24 @@
           <a:lstStyle/>
           <a:p>
             <a:r>
-              <a:rPr sz="2800" b="1">
+              <a:rPr sz="4000" b="1">
                 <a:solidFill>
                   <a:srgbClr val="1F3A5F"/>
                 </a:solidFill>
                 <a:latin typeface="Malgun Gothic"/>
               </a:rPr>
-              <a:t>그래서 뭐? — 변호사 없이 받는 재판</a:t>
-            </a:r>
-          </a:p>
-        </p:txBody>
-      </p:sp>
-      <p:sp>
-        <p:nvSpPr>
-          <p:cNvPr id="3" name="Rectangle 2"/>
-          <p:cNvSpPr/>
-          <p:nvPr/>
-        </p:nvSpPr>
-        <p:spPr>
-          <a:xfrm>
-            <a:off x="548640" y="1188720"/>
-            <a:ext cx="11064240" cy="38100"/>
-          </a:xfrm>
-          <a:prstGeom prst="rect">
-            <a:avLst/>
-          </a:prstGeom>
-          <a:solidFill>
-            <a:srgbClr val="C44E52"/>
-          </a:solidFill>
-          <a:ln>
-            <a:noFill/>
-          </a:ln>
-        </p:spPr>
-        <p:style>
-          <a:lnRef idx="1">
-            <a:schemeClr val="accent1"/>
-          </a:lnRef>
-          <a:fillRef idx="3">
-            <a:schemeClr val="accent1"/>
-          </a:fillRef>
-          <a:effectRef idx="2">
-            <a:schemeClr val="accent1"/>
-          </a:effectRef>
-          <a:fontRef idx="minor">
-            <a:schemeClr val="lt1"/>
-          </a:fontRef>
-        </p:style>
-        <p:txBody>
-          <a:bodyPr rtlCol="0" anchor="ctr"/>
-          <a:lstStyle/>
-          <a:p>
-            <a:pPr algn="ctr"/>
-          </a:p>
-        </p:txBody>
-      </p:sp>
-      <p:sp>
-        <p:nvSpPr>
-          <p:cNvPr id="4" name="Rounded Rectangle 3"/>
-          <p:cNvSpPr/>
-          <p:nvPr/>
-        </p:nvSpPr>
-        <p:spPr>
-          <a:xfrm>
-            <a:off x="640080" y="1463040"/>
-            <a:ext cx="10881360" cy="868680"/>
-          </a:xfrm>
-          <a:prstGeom prst="roundRect">
-            <a:avLst/>
-          </a:prstGeom>
-          <a:solidFill>
-            <a:srgbClr val="EDF1F7"/>
-          </a:solidFill>
-          <a:ln>
-            <a:solidFill>
-              <a:srgbClr val="1F3A5F"/>
-            </a:solidFill>
-          </a:ln>
-        </p:spPr>
-        <p:style>
-          <a:lnRef idx="1">
-            <a:schemeClr val="accent1"/>
-          </a:lnRef>
-          <a:fillRef idx="3">
-            <a:schemeClr val="accent1"/>
-          </a:fillRef>
-          <a:effectRef idx="2">
-            <a:schemeClr val="accent1"/>
-          </a:effectRef>
-          <a:fontRef idx="minor">
-            <a:schemeClr val="lt1"/>
-          </a:fontRef>
-        </p:style>
-        <p:txBody>
-          <a:bodyPr rtlCol="0" anchor="ctr" wrap="square"/>
-          <a:lstStyle/>
-          <a:p>
-            <a:pPr algn="ctr"/>
-            <a:r>
-              <a:rPr sz="2000" b="1">
-                <a:solidFill>
-                  <a:srgbClr val="1F3A5F"/>
-                </a:solidFill>
-                <a:latin typeface="Malgun Gothic"/>
-              </a:rPr>
-              <a:t>낮은 점수(변호사 부족) = 실제로 '나홀로소송'(변호사 없이 재판) 비율이 높다</a:t>
-            </a:r>
-          </a:p>
-        </p:txBody>
-      </p:sp>
-      <p:sp>
-        <p:nvSpPr>
-          <p:cNvPr id="5" name="TextBox 4"/>
-          <p:cNvSpPr txBox="1"/>
-          <p:nvPr/>
-        </p:nvSpPr>
-        <p:spPr>
-          <a:xfrm>
-            <a:off x="640080" y="2651760"/>
-            <a:ext cx="10881360" cy="3108960"/>
-          </a:xfrm>
-          <a:prstGeom prst="rect">
-            <a:avLst/>
-          </a:prstGeom>
-          <a:noFill/>
-        </p:spPr>
-        <p:txBody>
-          <a:bodyPr wrap="square">
-            <a:spAutoFit/>
-          </a:bodyPr>
-          <a:lstStyle/>
-          <a:p>
-            <a:pPr>
-              <a:spcAft>
-                <a:spcPts val="1100"/>
-              </a:spcAft>
-            </a:pPr>
+              <a:t>감사합니다</a:t>
+            </a:r>
+          </a:p>
+          <a:p>
             <a:r>
               <a:rPr sz="2000">
                 <a:solidFill>
-                  <a:srgbClr val="222222"/>
-                </a:solidFill>
-                <a:latin typeface="Malgun Gothic"/>
-              </a:rPr>
-              <a:t>• 형사 1심의 약 45%가 변호사 없는 '나홀로소송' (민사 소액사건은 81.8%)</a:t>
-            </a:r>
-          </a:p>
-          <a:p>
-            <a:pPr>
-              <a:spcAft>
-                <a:spcPts val="1100"/>
-              </a:spcAft>
-            </a:pPr>
-            <a:r>
-              <a:rPr sz="2000">
-                <a:solidFill>
-                  <a:srgbClr val="222222"/>
-                </a:solidFill>
-                <a:latin typeface="Malgun Gothic"/>
-              </a:rPr>
-              <a:t>• 지역 격차 — 서울중앙 35%(전국 최저) vs 대구 51% · 수원 48% · 인천 48%(최고)</a:t>
-            </a:r>
-          </a:p>
-          <a:p>
-            <a:pPr>
-              <a:spcAft>
-                <a:spcPts val="1100"/>
-              </a:spcAft>
-            </a:pPr>
-            <a:r>
-              <a:rPr sz="2000">
-                <a:solidFill>
-                  <a:srgbClr val="222222"/>
-                </a:solidFill>
-                <a:latin typeface="Malgun Gothic"/>
-              </a:rPr>
-              <a:t>• 변호사 부족 지역일수록 혼자 재판 → 방어권·승소 가능성에서 직접 불이익</a:t>
-            </a:r>
-          </a:p>
-          <a:p>
-            <a:pPr>
-              <a:spcAft>
-                <a:spcPts val="1100"/>
-              </a:spcAft>
-            </a:pPr>
-            <a:r>
-              <a:rPr sz="2000">
-                <a:solidFill>
-                  <a:srgbClr val="222222"/>
-                </a:solidFill>
-                <a:latin typeface="Malgun Gothic"/>
-              </a:rPr>
-              <a:t>• 본 분석 하위권 인천(LLAI 5.0)도 나홀로소송 48% → 두 지표가 같은 방향</a:t>
-            </a:r>
-          </a:p>
-          <a:p>
-            <a:pPr>
-              <a:spcAft>
-                <a:spcPts val="1100"/>
-              </a:spcAft>
-            </a:pPr>
-            <a:r>
-              <a:rPr sz="2000">
-                <a:solidFill>
-                  <a:srgbClr val="222222"/>
-                </a:solidFill>
-                <a:latin typeface="Malgun Gothic"/>
-              </a:rPr>
-              <a:t>• → LLAI 격차는 '숫자'가 아니라 시민이 겪는 '재판의 질' 문제</a:t>
-            </a:r>
-          </a:p>
-        </p:txBody>
-      </p:sp>
-      <p:sp>
-        <p:nvSpPr>
-          <p:cNvPr id="6" name="TextBox 5"/>
-          <p:cNvSpPr txBox="1"/>
-          <p:nvPr/>
-        </p:nvSpPr>
-        <p:spPr>
-          <a:xfrm>
-            <a:off x="640080" y="6035040"/>
-            <a:ext cx="10881360" cy="457200"/>
-          </a:xfrm>
-          <a:prstGeom prst="rect">
-            <a:avLst/>
-          </a:prstGeom>
-          <a:noFill/>
-        </p:spPr>
-        <p:txBody>
-          <a:bodyPr wrap="none">
-            <a:spAutoFit/>
-          </a:bodyPr>
-          <a:lstStyle/>
-          <a:p>
-            <a:r>
-              <a:rPr sz="1200" i="1">
-                <a:solidFill>
-                  <a:srgbClr val="555555"/>
-                </a:solidFill>
-                <a:latin typeface="Malgun Gothic"/>
-              </a:rPr>
-              <a:t>※ 출처: 사법연감·박주민 의원실(리걸타임즈·뉴스1 보도). 외부 통계 인용으로 본 연구 분석과 구분.</a:t>
+                  <a:srgbClr val="C44E52"/>
+                </a:solidFill>
+                <a:latin typeface="Malgun Gothic"/>
+              </a:rPr>
+              <a:t>코드·노트북·인터랙티브 지도: github.com/Allenkeem/llai-project</a:t>
             </a:r>
           </a:p>
         </p:txBody>

--- a/reports/발표자료.pptx
+++ b/reports/발표자료.pptx
@@ -4786,7 +4786,7 @@
                 </a:solidFill>
                 <a:latin typeface="Malgun Gothic"/>
               </a:rPr>
-              <a:t>10. 심화 — 서울을 빼고 보면 (지도)</a:t>
+              <a:t>10. 서울 제외 ① — 누가 올라오나 (지도)</a:t>
             </a:r>
           </a:p>
         </p:txBody>
@@ -5042,7 +5042,7 @@
                 </a:solidFill>
                 <a:latin typeface="Malgun Gothic"/>
               </a:rPr>
-              <a:t>10. 서울 제외 — 숨은 구조 (심화)</a:t>
+              <a:t>10. 서울 제외 ② — 그래서 무엇이 보이나</a:t>
             </a:r>
           </a:p>
         </p:txBody>
@@ -5138,113 +5138,97 @@
           <a:p>
             <a:pPr>
               <a:spcAft>
-                <a:spcPts val="800"/>
+                <a:spcPts val="900"/>
               </a:spcAft>
             </a:pPr>
             <a:r>
-              <a:rPr sz="1800">
+              <a:rPr sz="1900">
                 <a:solidFill>
                   <a:srgbClr val="222222"/>
                 </a:solidFill>
                 <a:latin typeface="Malgun Gothic"/>
               </a:rPr>
-              <a:t>• 수도권 착시 — 오히려 역전</a:t>
+              <a:t>• ① 수도권 착시가 깨진다</a:t>
             </a:r>
           </a:p>
           <a:p>
             <a:pPr lvl="1">
               <a:spcAft>
-                <a:spcPts val="800"/>
+                <a:spcPts val="900"/>
               </a:spcAft>
             </a:pPr>
             <a:r>
-              <a:rPr sz="1500">
+              <a:rPr sz="1600">
                 <a:solidFill>
                   <a:srgbClr val="222222"/>
                 </a:solidFill>
                 <a:latin typeface="Malgun Gothic"/>
               </a:rPr>
-              <a:t>– 수도권(경기·인천) 평균 25.8 &lt; 비수도권 35.2</a:t>
+              <a:t>– 서울 빼면 수도권(경기·인천)이 오히려 평균 이하</a:t>
             </a:r>
           </a:p>
           <a:p>
             <a:pPr>
               <a:spcAft>
-                <a:spcPts val="800"/>
+                <a:spcPts val="900"/>
               </a:spcAft>
             </a:pPr>
             <a:r>
-              <a:rPr sz="1800">
+              <a:rPr sz="1900">
                 <a:solidFill>
                   <a:srgbClr val="222222"/>
                 </a:solidFill>
                 <a:latin typeface="Malgun Gothic"/>
               </a:rPr>
-              <a:t>• 비수도권 내부 격차 — 광역시 vs 도</a:t>
+              <a:t>• ② 비수도권 안에서도 광역시가 우위</a:t>
             </a:r>
           </a:p>
           <a:p>
             <a:pPr lvl="1">
               <a:spcAft>
-                <a:spcPts val="800"/>
+                <a:spcPts val="900"/>
               </a:spcAft>
             </a:pPr>
             <a:r>
-              <a:rPr sz="1500">
+              <a:rPr sz="1600">
                 <a:solidFill>
                   <a:srgbClr val="222222"/>
                 </a:solidFill>
                 <a:latin typeface="Malgun Gothic"/>
               </a:rPr>
-              <a:t>– 부산·울산·인천 평균 52.7 ≫ 도 지역 26.3</a:t>
+              <a:t>– 부산·울산 상위, 인구 분산 도(강원·충북) 최하</a:t>
             </a:r>
           </a:p>
           <a:p>
             <a:pPr>
               <a:spcAft>
-                <a:spcPts val="800"/>
+                <a:spcPts val="900"/>
               </a:spcAft>
             </a:pPr>
             <a:r>
-              <a:rPr sz="1800">
+              <a:rPr sz="1900">
                 <a:solidFill>
                   <a:srgbClr val="222222"/>
                 </a:solidFill>
                 <a:latin typeface="Malgun Gothic"/>
               </a:rPr>
-              <a:t>• 핵심 변별 요인 이동 — 변호사 수 → 취약계층 지원</a:t>
+              <a:t>• ③ 격차의 핵심이 바뀐다</a:t>
             </a:r>
           </a:p>
           <a:p>
             <a:pPr lvl="1">
               <a:spcAft>
-                <a:spcPts val="800"/>
+                <a:spcPts val="900"/>
               </a:spcAft>
             </a:pPr>
             <a:r>
-              <a:rPr sz="1500">
+              <a:rPr sz="1600">
                 <a:solidFill>
                   <a:srgbClr val="222222"/>
                 </a:solidFill>
                 <a:latin typeface="Malgun Gothic"/>
               </a:rPr>
-              <a:t>– 가중치 A1 0.69→0.40, A3 0.17→0.39</a:t>
-            </a:r>
-          </a:p>
-          <a:p>
-            <a:pPr>
-              <a:spcAft>
-                <a:spcPts val="800"/>
-              </a:spcAft>
-            </a:pPr>
-            <a:r>
-              <a:rPr sz="1800">
-                <a:solidFill>
-                  <a:srgbClr val="222222"/>
-                </a:solidFill>
-                <a:latin typeface="Malgun Gothic"/>
-              </a:rPr>
-              <a:t>• 변호사↔부담 관계는 지방에서도 성립 (r=−0.80)</a:t>
+              <a:t>– 지방끼리는 '변호사 수'보다 '취약계층 지원(A3)'이 더 중요</a:t>
             </a:r>
           </a:p>
         </p:txBody>
@@ -5419,15 +5403,83 @@
           <a:bodyPr rtlCol="0" anchor="ctr" wrap="square"/>
           <a:lstStyle/>
           <a:p>
-            <a:pPr algn="ctr"/>
-            <a:r>
-              <a:rPr sz="2000" b="1">
-                <a:solidFill>
-                  <a:srgbClr val="1F3A5F"/>
-                </a:solidFill>
-                <a:latin typeface="Malgun Gothic"/>
-              </a:rPr>
-              <a:t>낮은 점수(변호사 부족) = 실제로 '나홀로소송'(변호사 없이 재판) 비율이 높다</a:t>
+            <a:pPr algn="ctr">
+              <a:spcAft>
+                <a:spcPts val="900"/>
+              </a:spcAft>
+            </a:pPr>
+            <a:r>
+              <a:rPr sz="2000">
+                <a:solidFill>
+                  <a:srgbClr val="222222"/>
+                </a:solidFill>
+                <a:latin typeface="Malgun Gothic"/>
+              </a:rPr>
+              <a:t>• 형사 1심의 약 45%가 변호사 없는 '나홀로소송' (민사 소액은 81.8%)</a:t>
+            </a:r>
+          </a:p>
+          <a:p>
+            <a:pPr>
+              <a:spcAft>
+                <a:spcPts val="900"/>
+              </a:spcAft>
+            </a:pPr>
+            <a:r>
+              <a:rPr sz="2000">
+                <a:solidFill>
+                  <a:srgbClr val="222222"/>
+                </a:solidFill>
+                <a:latin typeface="Malgun Gothic"/>
+              </a:rPr>
+              <a:t>• 지역 격차 — 서울중앙 35%(최저) vs 대구 51%·수원 48%·인천 48%(최고)</a:t>
+            </a:r>
+          </a:p>
+          <a:p>
+            <a:pPr>
+              <a:spcAft>
+                <a:spcPts val="900"/>
+              </a:spcAft>
+            </a:pPr>
+            <a:r>
+              <a:rPr sz="2000">
+                <a:solidFill>
+                  <a:srgbClr val="222222"/>
+                </a:solidFill>
+                <a:latin typeface="Malgun Gothic"/>
+              </a:rPr>
+              <a:t>• 변호사 부족 지역일수록 혼자 재판 → 방어권·승소율에서 불이익</a:t>
+            </a:r>
+          </a:p>
+          <a:p>
+            <a:pPr>
+              <a:spcAft>
+                <a:spcPts val="900"/>
+              </a:spcAft>
+            </a:pPr>
+            <a:r>
+              <a:rPr sz="2000">
+                <a:solidFill>
+                  <a:srgbClr val="222222"/>
+                </a:solidFill>
+                <a:latin typeface="Malgun Gothic"/>
+              </a:rPr>
+              <a:t>• LLAI 격차는 '숫자'가 아니라 '재판의 질' 문제</a:t>
+            </a:r>
+          </a:p>
+          <a:p>
+            <a:pPr lvl="1">
+              <a:spcAft>
+                <a:spcPts val="900"/>
+              </a:spcAft>
+            </a:pPr>
+            <a:r>
+              <a:rPr sz="1700">
+                <a:solidFill>
+                  <a:srgbClr val="222222"/>
+                </a:solidFill>
+                <a:latin typeface="Malgun Gothic"/>
+              </a:rPr>
+              <a:t>– ※ 현재는 4개 법원 사례로 '방향' 제시 — 13권역 전수 상관은 향후 과제</a:t>
             </a:r>
           </a:p>
         </p:txBody>

--- a/reports/발표자료.pptx
+++ b/reports/발표자료.pptx
@@ -5138,97 +5138,65 @@
           <a:p>
             <a:pPr>
               <a:spcAft>
-                <a:spcPts val="900"/>
+                <a:spcPts val="800"/>
               </a:spcAft>
             </a:pPr>
             <a:r>
-              <a:rPr sz="1900">
-                <a:solidFill>
-                  <a:srgbClr val="222222"/>
-                </a:solidFill>
-                <a:latin typeface="Malgun Gothic"/>
-              </a:rPr>
-              <a:t>• ① 수도권 착시가 깨진다</a:t>
+              <a:rPr sz="2100" b="1">
+                <a:solidFill>
+                  <a:srgbClr val="C44E52"/>
+                </a:solidFill>
+                <a:latin typeface="Malgun Gothic"/>
+              </a:rPr>
+              <a:t>• 핵심: '수도권 우위'는 서울을 빼면 역전된다</a:t>
             </a:r>
           </a:p>
           <a:p>
             <a:pPr lvl="1">
               <a:spcAft>
-                <a:spcPts val="900"/>
+                <a:spcPts val="800"/>
               </a:spcAft>
             </a:pPr>
             <a:r>
-              <a:rPr sz="1600">
+              <a:rPr sz="1700" b="0">
                 <a:solidFill>
                   <a:srgbClr val="222222"/>
                 </a:solidFill>
                 <a:latin typeface="Malgun Gothic"/>
               </a:rPr>
-              <a:t>– 서울 빼면 수도권(경기·인천)이 오히려 평균 이하</a:t>
+              <a:t>– 경기·인천이 오히려 평균 이하</a:t>
+            </a:r>
+          </a:p>
+          <a:p>
+            <a:pPr lvl="1">
+              <a:spcAft>
+                <a:spcPts val="800"/>
+              </a:spcAft>
+            </a:pPr>
+            <a:r>
+              <a:rPr sz="1700" b="0">
+                <a:solidFill>
+                  <a:srgbClr val="222222"/>
+                </a:solidFill>
+                <a:latin typeface="Malgun Gothic"/>
+              </a:rPr>
+              <a:t>– 부산·울산 등 광역시가 지방 상위</a:t>
             </a:r>
           </a:p>
           <a:p>
             <a:pPr>
               <a:spcAft>
-                <a:spcPts val="900"/>
+                <a:spcPts val="800"/>
               </a:spcAft>
             </a:pPr>
             <a:r>
-              <a:rPr sz="1900">
+              <a:rPr sz="1900" b="0">
                 <a:solidFill>
                   <a:srgbClr val="222222"/>
                 </a:solidFill>
                 <a:latin typeface="Malgun Gothic"/>
               </a:rPr>
-              <a:t>• ② 비수도권 안에서도 광역시가 우위</a:t>
-            </a:r>
-          </a:p>
-          <a:p>
-            <a:pPr lvl="1">
-              <a:spcAft>
-                <a:spcPts val="900"/>
-              </a:spcAft>
-            </a:pPr>
-            <a:r>
-              <a:rPr sz="1600">
-                <a:solidFill>
-                  <a:srgbClr val="222222"/>
-                </a:solidFill>
-                <a:latin typeface="Malgun Gothic"/>
-              </a:rPr>
-              <a:t>– 부산·울산 상위, 인구 분산 도(강원·충북) 최하</a:t>
-            </a:r>
-          </a:p>
-          <a:p>
-            <a:pPr>
-              <a:spcAft>
-                <a:spcPts val="900"/>
-              </a:spcAft>
-            </a:pPr>
-            <a:r>
-              <a:rPr sz="1900">
-                <a:solidFill>
-                  <a:srgbClr val="222222"/>
-                </a:solidFill>
-                <a:latin typeface="Malgun Gothic"/>
-              </a:rPr>
-              <a:t>• ③ 격차의 핵심이 바뀐다</a:t>
-            </a:r>
-          </a:p>
-          <a:p>
-            <a:pPr lvl="1">
-              <a:spcAft>
-                <a:spcPts val="900"/>
-              </a:spcAft>
-            </a:pPr>
-            <a:r>
-              <a:rPr sz="1600">
-                <a:solidFill>
-                  <a:srgbClr val="222222"/>
-                </a:solidFill>
-                <a:latin typeface="Malgun Gothic"/>
-              </a:rPr>
-              <a:t>– 지방끼리는 '변호사 수'보다 '취약계층 지원(A3)'이 더 중요</a:t>
+              <a:t>• 변별 요인도 바뀐다: 변호사 수 → 취약계층 지원(A3)</a:t>
             </a:r>
           </a:p>
         </p:txBody>
@@ -5938,97 +5906,81 @@
           <a:p>
             <a:pPr>
               <a:spcAft>
-                <a:spcPts val="700"/>
+                <a:spcPts val="800"/>
               </a:spcAft>
             </a:pPr>
             <a:r>
-              <a:rPr sz="1900">
+              <a:rPr sz="2100" b="1">
+                <a:solidFill>
+                  <a:srgbClr val="C44E52"/>
+                </a:solidFill>
+                <a:latin typeface="Malgun Gothic"/>
+              </a:rPr>
+              <a:t>• [헤드라인] 변호사 3.4배 늘려도 서울 쏠림은 심해졌다 (H4)</a:t>
+            </a:r>
+          </a:p>
+          <a:p>
+            <a:pPr lvl="1">
+              <a:spcAft>
+                <a:spcPts val="800"/>
+              </a:spcAft>
+            </a:pPr>
+            <a:r>
+              <a:rPr sz="1600" b="0">
                 <a:solidFill>
                   <a:srgbClr val="222222"/>
                 </a:solidFill>
                 <a:latin typeface="Malgun Gothic"/>
               </a:rPr>
-              <a:t>• 서울 일극 집중이 격차와 '가장 강하게 연관' (상관 기반 — 인과 단정 X)</a:t>
+              <a:t>– 9,612→32,273명인데 서울 비중 71%→76% — 양적 팽창의 실패</a:t>
             </a:r>
           </a:p>
           <a:p>
             <a:pPr>
               <a:spcAft>
-                <a:spcPts val="700"/>
+                <a:spcPts val="800"/>
               </a:spcAft>
             </a:pPr>
             <a:r>
-              <a:rPr sz="1900">
+              <a:rPr sz="1900" b="0">
                 <a:solidFill>
                   <a:srgbClr val="222222"/>
                 </a:solidFill>
                 <a:latin typeface="Malgun Gothic"/>
               </a:rPr>
-              <a:t>• 실질 결과 — 변호사 부족 지역일수록 나홀로소송↑ (재판의 질 문제)</a:t>
+              <a:t>• 서울 일극 집중이 격차와 가장 강하게 연관 (인천=수도권인데 하위)</a:t>
             </a:r>
           </a:p>
           <a:p>
             <a:pPr>
               <a:spcAft>
-                <a:spcPts val="700"/>
+                <a:spcPts val="800"/>
               </a:spcAft>
             </a:pPr>
             <a:r>
-              <a:rPr sz="1900">
+              <a:rPr sz="1900" b="0">
                 <a:solidFill>
                   <a:srgbClr val="222222"/>
                 </a:solidFill>
                 <a:latin typeface="Malgun Gothic"/>
               </a:rPr>
-              <a:t>• 양적 팽창의 한계(H4) — 변호사 3.4배↑에도 서울 쏠림 심해짐</a:t>
-            </a:r>
-          </a:p>
-          <a:p>
-            <a:pPr lvl="1">
+              <a:t>• 실질 결과 — 변호사 부족 지역일수록 나홀로소송↑ (재판의 질 문제)</a:t>
+            </a:r>
+          </a:p>
+          <a:p>
+            <a:pPr>
               <a:spcAft>
-                <a:spcPts val="700"/>
+                <a:spcPts val="800"/>
               </a:spcAft>
             </a:pPr>
             <a:r>
-              <a:rPr sz="1600">
+              <a:rPr sz="1900" b="0">
                 <a:solidFill>
                   <a:srgbClr val="222222"/>
                 </a:solidFill>
                 <a:latin typeface="Malgun Gothic"/>
               </a:rPr>
-              <a:t>– → 처방은 '총량 늘리기'가 아니라 '분포·공적 공급'</a:t>
-            </a:r>
-          </a:p>
-          <a:p>
-            <a:pPr lvl="1">
-              <a:spcAft>
-                <a:spcPts val="700"/>
-              </a:spcAft>
-            </a:pPr>
-            <a:r>
-              <a:rPr sz="1600">
-                <a:solidFill>
-                  <a:srgbClr val="222222"/>
-                </a:solidFill>
-                <a:latin typeface="Malgun Gothic"/>
-              </a:rPr>
-              <a:t>– 공공변호사·법률구조 인력 비수도권 배치 / 유인책은 '분포 유도'로</a:t>
-            </a:r>
-          </a:p>
-          <a:p>
-            <a:pPr>
-              <a:spcAft>
-                <a:spcPts val="700"/>
-              </a:spcAft>
-            </a:pPr>
-            <a:r>
-              <a:rPr sz="1900">
-                <a:solidFill>
-                  <a:srgbClr val="222222"/>
-                </a:solidFill>
-                <a:latin typeface="Malgun Gothic"/>
-              </a:rPr>
-              <a:t>• 지방 내부에선 취약계층 지원(A3)이 핵심 변수</a:t>
+              <a:t>• 처방은 '총량'이 아니라 '분포·공적 공급' (공공변호사·법률구조 배치)</a:t>
             </a:r>
           </a:p>
         </p:txBody>

--- a/reports/발표자료.pptx
+++ b/reports/발표자료.pptx
@@ -4003,7 +4003,7 @@
                 </a:solidFill>
                 <a:latin typeface="Malgun Gothic"/>
               </a:rPr>
-              <a:t>– (인구 적어 1인당 양호)</a:t>
+              <a:t>– (1인당만 높음, 절대수는 적음)</a:t>
             </a:r>
           </a:p>
           <a:p>
@@ -4048,8 +4048,8 @@
         </p:nvSpPr>
         <p:spPr>
           <a:xfrm>
-            <a:off x="640080" y="5989320"/>
-            <a:ext cx="10881360" cy="640080"/>
+            <a:off x="548640" y="5623560"/>
+            <a:ext cx="11064240" cy="1097280"/>
           </a:xfrm>
           <a:prstGeom prst="rect">
             <a:avLst/>
@@ -4069,7 +4069,18 @@
                 </a:solidFill>
                 <a:latin typeface="Malgun Gothic"/>
               </a:rPr>
-              <a:t>📊 읽는 법 — 막대가 길수록 점수 높음. 서울만 파랑(별도 그룹). ※ '1인당' 지표라 절대 변호사 수와 함께 봐야(제주 154명=전국 최소).</a:t>
+              <a:t>📊 막대가 길수록 점수 높음 · 서울만 파랑(별도 그룹).</a:t>
+            </a:r>
+          </a:p>
+          <a:p>
+            <a:r>
+              <a:rPr sz="1400" b="1">
+                <a:solidFill>
+                  <a:srgbClr val="C44E52"/>
+                </a:solidFill>
+                <a:latin typeface="Malgun Gothic"/>
+              </a:rPr>
+              <a:t>⚠️ 이 점수는 '인구 1인당'이라 사람 적은 곳이 유리하게 잡힘 — 제주는 변호사 154명(전국 최소)인데도 3위. '구하기 쉬움'이 아니라 '1인당 비율'이 높은 것이니, 반드시 절대 변호사 수와 함께 봐야 함.</a:t>
             </a:r>
           </a:p>
         </p:txBody>

--- a/reports/발표자료.pptx
+++ b/reports/발표자료.pptx
@@ -3807,13 +3807,13 @@
           <a:lstStyle/>
           <a:p>
             <a:r>
-              <a:rPr sz="1300" i="1">
+              <a:rPr sz="1200" i="1">
                 <a:solidFill>
                   <a:srgbClr val="555555"/>
                 </a:solidFill>
                 <a:latin typeface="Malgun Gothic"/>
               </a:rPr>
-              <a:t>※ 모두 표준 통계·기계학습 방법. 용어 풀이는 부록 B 참고.</a:t>
+              <a:t>※ 본문 결과에 직접 등장: 정규화·엔트로피 가중·LLAI·상관(H2)·Mann-Whitney(H1)·K-means·HHI(H4). PCA·Spearman·Silhouette은 가중치/관계/군집수 교차검증용(보조). 용어 풀이는 부록 B.</a:t>
             </a:r>
           </a:p>
         </p:txBody>
@@ -8090,7 +8090,7 @@
               </a:spcAft>
             </a:pPr>
             <a:r>
-              <a:rPr sz="1800">
+              <a:rPr sz="1800" b="0">
                 <a:solidFill>
                   <a:srgbClr val="222222"/>
                 </a:solidFill>
@@ -8106,7 +8106,7 @@
               </a:spcAft>
             </a:pPr>
             <a:r>
-              <a:rPr sz="1500">
+              <a:rPr sz="1500" b="0">
                 <a:solidFill>
                   <a:srgbClr val="222222"/>
                 </a:solidFill>
@@ -8122,13 +8122,13 @@
               </a:spcAft>
             </a:pPr>
             <a:r>
-              <a:rPr sz="1500">
+              <a:rPr sz="1500" b="0">
                 <a:solidFill>
                   <a:srgbClr val="222222"/>
                 </a:solidFill>
                 <a:latin typeface="Malgun Gothic"/>
               </a:rPr>
-              <a:t>– 두 단위 결론 일치(서울 1위·강원 최하) → 단위 선택에 무관함 입증</a:t>
+              <a:t>– 두 단위 결론 일치(서울 1위·강원 최하) → 단위 선택에 무관함</a:t>
             </a:r>
           </a:p>
           <a:p>
@@ -8138,7 +8138,7 @@
               </a:spcAft>
             </a:pPr>
             <a:r>
-              <a:rPr sz="1800">
+              <a:rPr sz="1800" b="0">
                 <a:solidFill>
                   <a:srgbClr val="222222"/>
                 </a:solidFill>
@@ -8154,29 +8154,29 @@
               </a:spcAft>
             </a:pPr>
             <a:r>
-              <a:rPr sz="1800">
+              <a:rPr sz="1800" b="0">
                 <a:solidFill>
                   <a:srgbClr val="222222"/>
                 </a:solidFill>
                 <a:latin typeface="Malgun Gothic"/>
               </a:rPr>
-              <a:t>• 왜 가중치 3종 — 자의성 방지, 어떤 방식이든 서울 1위(강건성)</a:t>
-            </a:r>
-          </a:p>
-          <a:p>
-            <a:pPr>
+              <a:t>• 강건성은 한정 — '서울 1위·강원 최하'만 불변, 2~13위는 가중치에 민감</a:t>
+            </a:r>
+          </a:p>
+          <a:p>
+            <a:pPr lvl="1">
               <a:spcAft>
                 <a:spcPts val="800"/>
               </a:spcAft>
             </a:pPr>
             <a:r>
-              <a:rPr sz="1800">
-                <a:solidFill>
-                  <a:srgbClr val="222222"/>
-                </a:solidFill>
-                <a:latin typeface="Malgun Gothic"/>
-              </a:rPr>
-              <a:t>• 왜 0~1 환산 — 단위 통일(명·건·비율), '클수록 좋음' 일치</a:t>
+              <a:rPr sz="1500" b="0">
+                <a:solidFill>
+                  <a:srgbClr val="555555"/>
+                </a:solidFill>
+                <a:latin typeface="Malgun Gothic"/>
+              </a:rPr>
+              <a:t>– (PCA에선 부산이 비서울 1위 · 엔트로피 가중치는 표본 따라 변함)</a:t>
             </a:r>
           </a:p>
         </p:txBody>
@@ -11470,13 +11470,29 @@
               </a:spcAft>
             </a:pPr>
             <a:r>
-              <a:rPr sz="1900">
+              <a:rPr sz="1900" b="0">
                 <a:solidFill>
                   <a:srgbClr val="222222"/>
                 </a:solidFill>
                 <a:latin typeface="Malgun Gothic"/>
               </a:rPr>
-              <a:t>• 각 지표를 0~1로 환산(1=전국 최고, 0=최저) 후 중요도만큼 섞어 ×100</a:t>
+              <a:t>• 각 지표를 0~1로 환산(1=전국 최고, 0=최저) → 가중치만큼 섞어 ×100</a:t>
+            </a:r>
+          </a:p>
+          <a:p>
+            <a:pPr>
+              <a:spcAft>
+                <a:spcPts val="800"/>
+              </a:spcAft>
+            </a:pPr>
+            <a:r>
+              <a:rPr sz="1800" b="1">
+                <a:solidFill>
+                  <a:srgbClr val="222222"/>
+                </a:solidFill>
+                <a:latin typeface="Malgun Gothic"/>
+              </a:rPr>
+              <a:t>• 가중치 = 변호사 0.69 · 안 바쁨 0.14 · 약자지원 0.17 (엔트로피)</a:t>
             </a:r>
           </a:p>
         </p:txBody>
@@ -11819,13 +11835,13 @@
               </a:spcAft>
             </a:pPr>
             <a:r>
-              <a:rPr sz="1800">
-                <a:solidFill>
-                  <a:srgbClr val="222222"/>
-                </a:solidFill>
-                <a:latin typeface="Malgun Gothic"/>
-              </a:rPr>
-              <a:t>• 서울: 변호사 많고·덜 바쁨 두 축 모두 전국 1등 → 거의 만점(91)</a:t>
+              <a:rPr sz="1900" b="1">
+                <a:solidFill>
+                  <a:srgbClr val="C44E52"/>
+                </a:solidFill>
+                <a:latin typeface="Malgun Gothic"/>
+              </a:rPr>
+              <a:t>• 서울 = 0.69×1.00 + 0.14×1.00 + 0.17×0.48 = 0.91 → 91점</a:t>
             </a:r>
           </a:p>
           <a:p>
@@ -11835,13 +11851,13 @@
               </a:spcAft>
             </a:pPr>
             <a:r>
-              <a:rPr sz="1800">
+              <a:rPr sz="1800" b="0">
                 <a:solidFill>
                   <a:srgbClr val="222222"/>
                 </a:solidFill>
                 <a:latin typeface="Malgun Gothic"/>
               </a:rPr>
-              <a:t>• 강원: 두 축 모두 전국 꼴찌 → 바닥(2점)</a:t>
+              <a:t>• 강원 = 0.69×0 + 0.14×0 + 0.17×0.09 ≈ 0.02 → 2점</a:t>
             </a:r>
           </a:p>
           <a:p>
@@ -11851,13 +11867,13 @@
               </a:spcAft>
             </a:pPr>
             <a:r>
-              <a:rPr sz="1500">
-                <a:solidFill>
-                  <a:srgbClr val="222222"/>
-                </a:solidFill>
-                <a:latin typeface="Malgun Gothic"/>
-              </a:rPr>
-              <a:t>– 즉 LLAI는 '전국에서 상대적으로 어느 위치냐'를 0~100으로 보여줌</a:t>
+              <a:rPr sz="1600" b="0">
+                <a:solidFill>
+                  <a:srgbClr val="555555"/>
+                </a:solidFill>
+                <a:latin typeface="Malgun Gothic"/>
+              </a:rPr>
+              <a:t>– 즉 LLAI = '전국에서 상대적으로 어느 위치냐'를 0~100으로</a:t>
             </a:r>
           </a:p>
         </p:txBody>

--- a/reports/발표자료.pptx
+++ b/reports/발표자료.pptx
@@ -29,6 +29,7 @@
     <p:sldId id="276" r:id="rId27"/>
     <p:sldId id="277" r:id="rId28"/>
     <p:sldId id="278" r:id="rId29"/>
+    <p:sldId id="281" r:id="rId32"/>
     <p:sldId id="279" r:id="rId30"/>
   </p:sldIdLst>
   <p:sldSz cx="12191695" cy="6858000" type="screen4x3"/>
@@ -8715,6 +8716,574 @@
                 <a:latin typeface="Malgun Gothic"/>
               </a:rPr>
               <a:t>코드·노트북·인터랙티브 지도: github.com/Allenkeem/llai-project</a:t>
+            </a:r>
+          </a:p>
+        </p:txBody>
+      </p:sp>
+    </p:spTree>
+  </p:cSld>
+  <p:clrMapOvr>
+    <a:masterClrMapping/>
+  </p:clrMapOvr>
+</p:sld>
+</file>
+
+<file path=ppt/slides/slide26.xml><?xml version="1.0" encoding="utf-8"?>
+<p:sld xmlns:a="http://schemas.openxmlformats.org/drawingml/2006/main" xmlns:p="http://schemas.openxmlformats.org/presentationml/2006/main" xmlns:r="http://schemas.openxmlformats.org/officeDocument/2006/relationships">
+  <p:cSld>
+    <p:spTree>
+      <p:nvGrpSpPr>
+        <p:cNvPr id="1" name=""/>
+        <p:cNvGrpSpPr/>
+        <p:nvPr/>
+      </p:nvGrpSpPr>
+      <p:grpSpPr/>
+      <p:sp>
+        <p:nvSpPr>
+          <p:cNvPr id="2" name="TextBox 1"/>
+          <p:cNvSpPr txBox="1"/>
+          <p:nvPr/>
+        </p:nvSpPr>
+        <p:spPr>
+          <a:xfrm>
+            <a:off x="502920" y="320040"/>
+            <a:ext cx="11155680" cy="914400"/>
+          </a:xfrm>
+          <a:prstGeom prst="rect">
+            <a:avLst/>
+          </a:prstGeom>
+          <a:noFill/>
+        </p:spPr>
+        <p:txBody>
+          <a:bodyPr wrap="square">
+            <a:spAutoFit/>
+          </a:bodyPr>
+          <a:lstStyle/>
+          <a:p>
+            <a:r>
+              <a:rPr sz="2800" b="1">
+                <a:solidFill>
+                  <a:srgbClr val="1F3A5F"/>
+                </a:solidFill>
+                <a:latin typeface="Malgun Gothic"/>
+              </a:rPr>
+              <a:t>부록 C — 가중치(0.69)는 어떻게 정해지나</a:t>
+            </a:r>
+          </a:p>
+        </p:txBody>
+      </p:sp>
+      <p:sp>
+        <p:nvSpPr>
+          <p:cNvPr id="3" name="Rectangle 2"/>
+          <p:cNvSpPr/>
+          <p:nvPr/>
+        </p:nvSpPr>
+        <p:spPr>
+          <a:xfrm>
+            <a:off x="548640" y="1188720"/>
+            <a:ext cx="11064240" cy="38100"/>
+          </a:xfrm>
+          <a:prstGeom prst="rect">
+            <a:avLst/>
+          </a:prstGeom>
+          <a:solidFill>
+            <a:srgbClr val="C44E52"/>
+          </a:solidFill>
+          <a:ln>
+            <a:noFill/>
+          </a:ln>
+        </p:spPr>
+        <p:style>
+          <a:lnRef idx="1">
+            <a:schemeClr val="accent1"/>
+          </a:lnRef>
+          <a:fillRef idx="3">
+            <a:schemeClr val="accent1"/>
+          </a:fillRef>
+          <a:effectRef idx="2">
+            <a:schemeClr val="accent1"/>
+          </a:effectRef>
+          <a:fontRef idx="minor">
+            <a:schemeClr val="lt1"/>
+          </a:fontRef>
+        </p:style>
+        <p:txBody>
+          <a:bodyPr rtlCol="0" anchor="ctr"/>
+          <a:lstStyle/>
+          <a:p>
+            <a:pPr algn="ctr"/>
+          </a:p>
+        </p:txBody>
+      </p:sp>
+      <p:sp>
+        <p:nvSpPr>
+          <p:cNvPr id="4" name="Rounded Rectangle 3"/>
+          <p:cNvSpPr/>
+          <p:nvPr/>
+        </p:nvSpPr>
+        <p:spPr>
+          <a:xfrm>
+            <a:off x="640080" y="1417320"/>
+            <a:ext cx="10881360" cy="731520"/>
+          </a:xfrm>
+          <a:prstGeom prst="roundRect">
+            <a:avLst/>
+          </a:prstGeom>
+          <a:solidFill>
+            <a:srgbClr val="EDF1F7"/>
+          </a:solidFill>
+          <a:ln>
+            <a:solidFill>
+              <a:srgbClr val="1F3A5F"/>
+            </a:solidFill>
+          </a:ln>
+        </p:spPr>
+        <p:style>
+          <a:lnRef idx="1">
+            <a:schemeClr val="accent1"/>
+          </a:lnRef>
+          <a:fillRef idx="3">
+            <a:schemeClr val="accent1"/>
+          </a:fillRef>
+          <a:effectRef idx="2">
+            <a:schemeClr val="accent1"/>
+          </a:effectRef>
+          <a:fontRef idx="minor">
+            <a:schemeClr val="lt1"/>
+          </a:fontRef>
+        </p:style>
+        <p:txBody>
+          <a:bodyPr rtlCol="0" anchor="ctr" wrap="square"/>
+          <a:lstStyle/>
+          <a:p>
+            <a:pPr algn="ctr"/>
+            <a:r>
+              <a:rPr sz="1700" b="1">
+                <a:solidFill>
+                  <a:srgbClr val="1F3A5F"/>
+                </a:solidFill>
+                <a:latin typeface="Malgun Gothic"/>
+              </a:rPr>
+              <a:t>엔트로피 가중치 = 지역마다 '들쭉날쭉한' 지표일수록 큰 비중 (다 비슷하면 순위 못 매겨 → 비중 작게)</a:t>
+            </a:r>
+          </a:p>
+        </p:txBody>
+      </p:sp>
+      <p:graphicFrame>
+        <p:nvGraphicFramePr>
+          <p:cNvPr id="5" name="Table 4"/>
+          <p:cNvGraphicFramePr>
+            <a:graphicFrameLocks noGrp="1"/>
+          </p:cNvGraphicFramePr>
+          <p:nvPr/>
+        </p:nvGraphicFramePr>
+        <p:xfrm>
+          <a:off x="1188720" y="2377440"/>
+          <a:ext cx="9784080" cy="1828800"/>
+        </p:xfrm>
+        <a:graphic>
+          <a:graphicData uri="http://schemas.openxmlformats.org/drawingml/2006/table">
+            <a:tbl>
+              <a:tblPr firstRow="1" bandRow="1">
+                <a:tableStyleId>{5C22544A-7EE6-4342-B048-85BDC9FD1C3A}</a:tableStyleId>
+              </a:tblPr>
+              <a:tblGrid>
+                <a:gridCol w="2194560"/>
+                <a:gridCol w="4206240"/>
+                <a:gridCol w="1645920"/>
+                <a:gridCol w="1737360"/>
+              </a:tblGrid>
+              <a:tr h="457200">
+                <a:tc>
+                  <a:txBody>
+                    <a:bodyPr/>
+                    <a:lstStyle/>
+                    <a:p>
+                      <a:pPr algn="ctr"/>
+                      <a:r>
+                        <a:rPr sz="1300" b="1">
+                          <a:solidFill>
+                            <a:srgbClr val="FFFFFF"/>
+                          </a:solidFill>
+                          <a:latin typeface="Malgun Gothic"/>
+                        </a:rPr>
+                        <a:t>지표</a:t>
+                      </a:r>
+                    </a:p>
+                  </a:txBody>
+                  <a:tcPr anchor="ctr">
+                    <a:solidFill>
+                      <a:srgbClr val="1F3A5F"/>
+                    </a:solidFill>
+                  </a:tcPr>
+                </a:tc>
+                <a:tc>
+                  <a:txBody>
+                    <a:bodyPr/>
+                    <a:lstStyle/>
+                    <a:p>
+                      <a:pPr algn="l"/>
+                      <a:r>
+                        <a:rPr sz="1300" b="1">
+                          <a:solidFill>
+                            <a:srgbClr val="FFFFFF"/>
+                          </a:solidFill>
+                          <a:latin typeface="Malgun Gothic"/>
+                        </a:rPr>
+                        <a:t>지역 간 차이 (엔트로피↓=쏠림)</a:t>
+                      </a:r>
+                    </a:p>
+                  </a:txBody>
+                  <a:tcPr anchor="ctr">
+                    <a:solidFill>
+                      <a:srgbClr val="1F3A5F"/>
+                    </a:solidFill>
+                  </a:tcPr>
+                </a:tc>
+                <a:tc>
+                  <a:txBody>
+                    <a:bodyPr/>
+                    <a:lstStyle/>
+                    <a:p>
+                      <a:pPr algn="ctr"/>
+                      <a:r>
+                        <a:rPr sz="1300" b="1">
+                          <a:solidFill>
+                            <a:srgbClr val="FFFFFF"/>
+                          </a:solidFill>
+                          <a:latin typeface="Malgun Gothic"/>
+                        </a:rPr>
+                        <a:t>가중치</a:t>
+                      </a:r>
+                    </a:p>
+                  </a:txBody>
+                  <a:tcPr anchor="ctr">
+                    <a:solidFill>
+                      <a:srgbClr val="1F3A5F"/>
+                    </a:solidFill>
+                  </a:tcPr>
+                </a:tc>
+                <a:tc>
+                  <a:txBody>
+                    <a:bodyPr/>
+                    <a:lstStyle/>
+                    <a:p>
+                      <a:pPr algn="ctr"/>
+                      <a:r>
+                        <a:rPr sz="1300" b="1">
+                          <a:solidFill>
+                            <a:srgbClr val="FFFFFF"/>
+                          </a:solidFill>
+                          <a:latin typeface="Malgun Gothic"/>
+                        </a:rPr>
+                        <a:t>서울 제외 시</a:t>
+                      </a:r>
+                    </a:p>
+                  </a:txBody>
+                  <a:tcPr anchor="ctr">
+                    <a:solidFill>
+                      <a:srgbClr val="1F3A5F"/>
+                    </a:solidFill>
+                  </a:tcPr>
+                </a:tc>
+              </a:tr>
+              <a:tr h="457200">
+                <a:tc>
+                  <a:txBody>
+                    <a:bodyPr/>
+                    <a:lstStyle/>
+                    <a:p>
+                      <a:pPr algn="ctr"/>
+                      <a:r>
+                        <a:rPr sz="1300" b="1">
+                          <a:solidFill>
+                            <a:srgbClr val="C44E52"/>
+                          </a:solidFill>
+                          <a:latin typeface="Malgun Gothic"/>
+                        </a:rPr>
+                        <a:t>A1 변호사</a:t>
+                      </a:r>
+                    </a:p>
+                  </a:txBody>
+                  <a:tcPr anchor="ctr"/>
+                </a:tc>
+                <a:tc>
+                  <a:txBody>
+                    <a:bodyPr/>
+                    <a:lstStyle/>
+                    <a:p>
+                      <a:pPr algn="l"/>
+                      <a:r>
+                        <a:rPr sz="1300" b="1">
+                          <a:solidFill>
+                            <a:srgbClr val="C44E52"/>
+                          </a:solidFill>
+                          <a:latin typeface="Malgun Gothic"/>
+                        </a:rPr>
+                        <a:t>가장 쏠림 (엔트로피 0.43)</a:t>
+                      </a:r>
+                    </a:p>
+                  </a:txBody>
+                  <a:tcPr anchor="ctr"/>
+                </a:tc>
+                <a:tc>
+                  <a:txBody>
+                    <a:bodyPr/>
+                    <a:lstStyle/>
+                    <a:p>
+                      <a:pPr algn="ctr"/>
+                      <a:r>
+                        <a:rPr sz="1300" b="1">
+                          <a:solidFill>
+                            <a:srgbClr val="C44E52"/>
+                          </a:solidFill>
+                          <a:latin typeface="Malgun Gothic"/>
+                        </a:rPr>
+                        <a:t>0.69</a:t>
+                      </a:r>
+                    </a:p>
+                  </a:txBody>
+                  <a:tcPr anchor="ctr"/>
+                </a:tc>
+                <a:tc>
+                  <a:txBody>
+                    <a:bodyPr/>
+                    <a:lstStyle/>
+                    <a:p>
+                      <a:pPr algn="ctr"/>
+                      <a:r>
+                        <a:rPr sz="1300" b="1">
+                          <a:solidFill>
+                            <a:srgbClr val="C44E52"/>
+                          </a:solidFill>
+                          <a:latin typeface="Malgun Gothic"/>
+                        </a:rPr>
+                        <a:t>0.40</a:t>
+                      </a:r>
+                    </a:p>
+                  </a:txBody>
+                  <a:tcPr anchor="ctr"/>
+                </a:tc>
+              </a:tr>
+              <a:tr h="457200">
+                <a:tc>
+                  <a:txBody>
+                    <a:bodyPr/>
+                    <a:lstStyle/>
+                    <a:p>
+                      <a:pPr algn="ctr"/>
+                      <a:r>
+                        <a:rPr sz="1300">
+                          <a:latin typeface="Malgun Gothic"/>
+                        </a:rPr>
+                        <a:t>A2 사건부담</a:t>
+                      </a:r>
+                    </a:p>
+                  </a:txBody>
+                  <a:tcPr anchor="ctr"/>
+                </a:tc>
+                <a:tc>
+                  <a:txBody>
+                    <a:bodyPr/>
+                    <a:lstStyle/>
+                    <a:p>
+                      <a:pPr algn="l"/>
+                      <a:r>
+                        <a:rPr sz="1300">
+                          <a:latin typeface="Malgun Gothic"/>
+                        </a:rPr>
+                        <a:t>중간 (0.88)</a:t>
+                      </a:r>
+                    </a:p>
+                  </a:txBody>
+                  <a:tcPr anchor="ctr"/>
+                </a:tc>
+                <a:tc>
+                  <a:txBody>
+                    <a:bodyPr/>
+                    <a:lstStyle/>
+                    <a:p>
+                      <a:pPr algn="ctr"/>
+                      <a:r>
+                        <a:rPr sz="1300">
+                          <a:latin typeface="Malgun Gothic"/>
+                        </a:rPr>
+                        <a:t>0.14</a:t>
+                      </a:r>
+                    </a:p>
+                  </a:txBody>
+                  <a:tcPr anchor="ctr"/>
+                </a:tc>
+                <a:tc>
+                  <a:txBody>
+                    <a:bodyPr/>
+                    <a:lstStyle/>
+                    <a:p>
+                      <a:pPr algn="ctr"/>
+                      <a:r>
+                        <a:rPr sz="1300">
+                          <a:latin typeface="Malgun Gothic"/>
+                        </a:rPr>
+                        <a:t>0.21</a:t>
+                      </a:r>
+                    </a:p>
+                  </a:txBody>
+                  <a:tcPr anchor="ctr"/>
+                </a:tc>
+              </a:tr>
+              <a:tr h="457200">
+                <a:tc>
+                  <a:txBody>
+                    <a:bodyPr/>
+                    <a:lstStyle/>
+                    <a:p>
+                      <a:pPr algn="ctr"/>
+                      <a:r>
+                        <a:rPr sz="1300">
+                          <a:latin typeface="Malgun Gothic"/>
+                        </a:rPr>
+                        <a:t>A3 약자지원</a:t>
+                      </a:r>
+                    </a:p>
+                  </a:txBody>
+                  <a:tcPr anchor="ctr"/>
+                </a:tc>
+                <a:tc>
+                  <a:txBody>
+                    <a:bodyPr/>
+                    <a:lstStyle/>
+                    <a:p>
+                      <a:pPr algn="l"/>
+                      <a:r>
+                        <a:rPr sz="1300">
+                          <a:latin typeface="Malgun Gothic"/>
+                        </a:rPr>
+                        <a:t>거의 고름 (0.86)</a:t>
+                      </a:r>
+                    </a:p>
+                  </a:txBody>
+                  <a:tcPr anchor="ctr"/>
+                </a:tc>
+                <a:tc>
+                  <a:txBody>
+                    <a:bodyPr/>
+                    <a:lstStyle/>
+                    <a:p>
+                      <a:pPr algn="ctr"/>
+                      <a:r>
+                        <a:rPr sz="1300">
+                          <a:latin typeface="Malgun Gothic"/>
+                        </a:rPr>
+                        <a:t>0.17</a:t>
+                      </a:r>
+                    </a:p>
+                  </a:txBody>
+                  <a:tcPr anchor="ctr"/>
+                </a:tc>
+                <a:tc>
+                  <a:txBody>
+                    <a:bodyPr/>
+                    <a:lstStyle/>
+                    <a:p>
+                      <a:pPr algn="ctr"/>
+                      <a:r>
+                        <a:rPr sz="1300">
+                          <a:latin typeface="Malgun Gothic"/>
+                        </a:rPr>
+                        <a:t>0.39</a:t>
+                      </a:r>
+                    </a:p>
+                  </a:txBody>
+                  <a:tcPr anchor="ctr"/>
+                </a:tc>
+              </a:tr>
+            </a:tbl>
+          </a:graphicData>
+        </a:graphic>
+      </p:graphicFrame>
+      <p:sp>
+        <p:nvSpPr>
+          <p:cNvPr id="6" name="TextBox 5"/>
+          <p:cNvSpPr txBox="1"/>
+          <p:nvPr/>
+        </p:nvSpPr>
+        <p:spPr>
+          <a:xfrm>
+            <a:off x="640080" y="4480560"/>
+            <a:ext cx="10881360" cy="2103120"/>
+          </a:xfrm>
+          <a:prstGeom prst="rect">
+            <a:avLst/>
+          </a:prstGeom>
+          <a:noFill/>
+        </p:spPr>
+        <p:txBody>
+          <a:bodyPr wrap="square">
+            <a:spAutoFit/>
+          </a:bodyPr>
+          <a:lstStyle/>
+          <a:p>
+            <a:pPr>
+              <a:spcAft>
+                <a:spcPts val="800"/>
+              </a:spcAft>
+            </a:pPr>
+            <a:r>
+              <a:rPr sz="1600" b="1">
+                <a:solidFill>
+                  <a:srgbClr val="C44E52"/>
+                </a:solidFill>
+                <a:latin typeface="Malgun Gothic"/>
+              </a:rPr>
+              <a:t>• 변호사 0.69는 '제일 중요해서'가 아니라 '값이 가장 쏠려서' — 그 쏠림은 거의 서울(263명, 13권역 합의 절반) 탓</a:t>
+            </a:r>
+          </a:p>
+          <a:p>
+            <a:pPr>
+              <a:spcAft>
+                <a:spcPts val="800"/>
+              </a:spcAft>
+            </a:pPr>
+            <a:r>
+              <a:rPr sz="1600" b="1">
+                <a:solidFill>
+                  <a:srgbClr val="C44E52"/>
+                </a:solidFill>
+                <a:latin typeface="Malgun Gothic"/>
+              </a:rPr>
+              <a:t>• 서울을 빼면 변호사 가중치 0.69 → 0.40 반토막 (들쭉날쭉함이 사라지니까)</a:t>
+            </a:r>
+          </a:p>
+          <a:p>
+            <a:pPr>
+              <a:spcAft>
+                <a:spcPts val="800"/>
+              </a:spcAft>
+            </a:pPr>
+            <a:r>
+              <a:rPr sz="1600" b="0">
+                <a:solidFill>
+                  <a:srgbClr val="555555"/>
+                </a:solidFill>
+                <a:latin typeface="Malgun Gothic"/>
+              </a:rPr>
+              <a:t>• ⚠️ 순환적 구조 — 분석 대상(서울 쏠림)이 가중치를 정함: 서울 극단 → 변호사 비중↑ → 서울 1위</a:t>
+            </a:r>
+          </a:p>
+          <a:p>
+            <a:pPr>
+              <a:spcAft>
+                <a:spcPts val="800"/>
+              </a:spcAft>
+            </a:pPr>
+            <a:r>
+              <a:rPr sz="1600" b="0">
+                <a:solidFill>
+                  <a:srgbClr val="555555"/>
+                </a:solidFill>
+                <a:latin typeface="Malgun Gothic"/>
+              </a:rPr>
+              <a:t>• 그래서 '객관적'이 아니라 '데이터의 쏠림이 가중치를 정했다'가 정확 → 균등 가중치 결과도 함께 제시</a:t>
             </a:r>
           </a:p>
         </p:txBody>

--- a/reports/발표자료.pptx
+++ b/reports/발표자료.pptx
@@ -3218,8 +3218,8 @@
         </p:nvSpPr>
         <p:spPr>
           <a:xfrm>
-            <a:off x="502920" y="320040"/>
-            <a:ext cx="11155680" cy="914400"/>
+            <a:off x="502920" y="274320"/>
+            <a:ext cx="11155680" cy="822960"/>
           </a:xfrm>
           <a:prstGeom prst="rect">
             <a:avLst/>
@@ -3227,19 +3227,19 @@
           <a:noFill/>
         </p:spPr>
         <p:txBody>
-          <a:bodyPr wrap="square">
+          <a:bodyPr wrap="none">
             <a:spAutoFit/>
           </a:bodyPr>
           <a:lstStyle/>
           <a:p>
             <a:r>
-              <a:rPr sz="2800" b="1">
+              <a:rPr sz="2600" b="1">
                 <a:solidFill>
                   <a:srgbClr val="1F3A5F"/>
                 </a:solidFill>
                 <a:latin typeface="Malgun Gothic"/>
               </a:rPr>
-              <a:t>분석 기법 한눈에 (무엇·어떻게·왜)</a:t>
+              <a:t>분석 기법 — 무엇이 들어가 무엇이 나왔나 (방법 → 결과)</a:t>
             </a:r>
           </a:p>
         </p:txBody>
@@ -3252,7 +3252,7 @@
         </p:nvSpPr>
         <p:spPr>
           <a:xfrm>
-            <a:off x="548640" y="1188720"/>
+            <a:off x="548640" y="1078992"/>
             <a:ext cx="11064240" cy="38100"/>
           </a:xfrm>
           <a:prstGeom prst="rect">
@@ -3287,514 +3287,16 @@
           </a:p>
         </p:txBody>
       </p:sp>
-      <p:graphicFrame>
-        <p:nvGraphicFramePr>
-          <p:cNvPr id="4" name="Table 3"/>
-          <p:cNvGraphicFramePr>
-            <a:graphicFrameLocks noGrp="1"/>
-          </p:cNvGraphicFramePr>
-          <p:nvPr/>
-        </p:nvGraphicFramePr>
-        <p:xfrm>
-          <a:off x="457200" y="1371600"/>
-          <a:ext cx="11247120" cy="4572000"/>
-        </p:xfrm>
-        <a:graphic>
-          <a:graphicData uri="http://schemas.openxmlformats.org/drawingml/2006/table">
-            <a:tbl>
-              <a:tblPr firstRow="1" bandRow="1">
-                <a:tableStyleId>{5C22544A-7EE6-4342-B048-85BDC9FD1C3A}</a:tableStyleId>
-              </a:tblPr>
-              <a:tblGrid>
-                <a:gridCol w="3017520"/>
-                <a:gridCol w="4023360"/>
-                <a:gridCol w="4206240"/>
-              </a:tblGrid>
-              <a:tr h="508000">
-                <a:tc>
-                  <a:txBody>
-                    <a:bodyPr/>
-                    <a:lstStyle/>
-                    <a:p>
-                      <a:pPr algn="ctr"/>
-                      <a:r>
-                        <a:rPr sz="1200" b="1">
-                          <a:solidFill>
-                            <a:srgbClr val="FFFFFF"/>
-                          </a:solidFill>
-                          <a:latin typeface="Malgun Gothic"/>
-                        </a:rPr>
-                        <a:t>기법</a:t>
-                      </a:r>
-                    </a:p>
-                  </a:txBody>
-                  <a:tcPr anchor="ctr">
-                    <a:solidFill>
-                      <a:srgbClr val="1F3A5F"/>
-                    </a:solidFill>
-                  </a:tcPr>
-                </a:tc>
-                <a:tc>
-                  <a:txBody>
-                    <a:bodyPr/>
-                    <a:lstStyle/>
-                    <a:p>
-                      <a:pPr algn="l"/>
-                      <a:r>
-                        <a:rPr sz="1200" b="1">
-                          <a:solidFill>
-                            <a:srgbClr val="FFFFFF"/>
-                          </a:solidFill>
-                          <a:latin typeface="Malgun Gothic"/>
-                        </a:rPr>
-                        <a:t>무엇을 / 어떻게</a:t>
-                      </a:r>
-                    </a:p>
-                  </a:txBody>
-                  <a:tcPr anchor="ctr">
-                    <a:solidFill>
-                      <a:srgbClr val="1F3A5F"/>
-                    </a:solidFill>
-                  </a:tcPr>
-                </a:tc>
-                <a:tc>
-                  <a:txBody>
-                    <a:bodyPr/>
-                    <a:lstStyle/>
-                    <a:p>
-                      <a:pPr algn="l"/>
-                      <a:r>
-                        <a:rPr sz="1200" b="1">
-                          <a:solidFill>
-                            <a:srgbClr val="FFFFFF"/>
-                          </a:solidFill>
-                          <a:latin typeface="Malgun Gothic"/>
-                        </a:rPr>
-                        <a:t>왜</a:t>
-                      </a:r>
-                    </a:p>
-                  </a:txBody>
-                  <a:tcPr anchor="ctr">
-                    <a:solidFill>
-                      <a:srgbClr val="1F3A5F"/>
-                    </a:solidFill>
-                  </a:tcPr>
-                </a:tc>
-              </a:tr>
-              <a:tr h="508000">
-                <a:tc>
-                  <a:txBody>
-                    <a:bodyPr/>
-                    <a:lstStyle/>
-                    <a:p>
-                      <a:pPr algn="ctr"/>
-                      <a:r>
-                        <a:rPr sz="1200">
-                          <a:latin typeface="Malgun Gothic"/>
-                        </a:rPr>
-                        <a:t>Min-Max 정규화</a:t>
-                      </a:r>
-                    </a:p>
-                  </a:txBody>
-                  <a:tcPr anchor="ctr"/>
-                </a:tc>
-                <a:tc>
-                  <a:txBody>
-                    <a:bodyPr/>
-                    <a:lstStyle/>
-                    <a:p>
-                      <a:pPr algn="l"/>
-                      <a:r>
-                        <a:rPr sz="1200">
-                          <a:latin typeface="Malgun Gothic"/>
-                        </a:rPr>
-                        <a:t>지표를 0~1로 통일(A2 뒤집음)</a:t>
-                      </a:r>
-                    </a:p>
-                  </a:txBody>
-                  <a:tcPr anchor="ctr"/>
-                </a:tc>
-                <a:tc>
-                  <a:txBody>
-                    <a:bodyPr/>
-                    <a:lstStyle/>
-                    <a:p>
-                      <a:pPr algn="l"/>
-                      <a:r>
-                        <a:rPr sz="1200">
-                          <a:latin typeface="Malgun Gothic"/>
-                        </a:rPr>
-                        <a:t>단위 통일 · 0~100 직관 해석</a:t>
-                      </a:r>
-                    </a:p>
-                  </a:txBody>
-                  <a:tcPr anchor="ctr"/>
-                </a:tc>
-              </a:tr>
-              <a:tr h="508000">
-                <a:tc>
-                  <a:txBody>
-                    <a:bodyPr/>
-                    <a:lstStyle/>
-                    <a:p>
-                      <a:pPr algn="ctr"/>
-                      <a:r>
-                        <a:rPr sz="1200">
-                          <a:latin typeface="Malgun Gothic"/>
-                        </a:rPr>
-                        <a:t>가중치 산정 (엔트로피·PCA)</a:t>
-                      </a:r>
-                    </a:p>
-                  </a:txBody>
-                  <a:tcPr anchor="ctr"/>
-                </a:tc>
-                <a:tc>
-                  <a:txBody>
-                    <a:bodyPr/>
-                    <a:lstStyle/>
-                    <a:p>
-                      <a:pPr algn="l"/>
-                      <a:r>
-                        <a:rPr sz="1200">
-                          <a:latin typeface="Malgun Gothic"/>
-                        </a:rPr>
-                        <a:t>세 지표 합칠 비중 정하기</a:t>
-                      </a:r>
-                    </a:p>
-                  </a:txBody>
-                  <a:tcPr anchor="ctr"/>
-                </a:tc>
-                <a:tc>
-                  <a:txBody>
-                    <a:bodyPr/>
-                    <a:lstStyle/>
-                    <a:p>
-                      <a:pPr algn="l"/>
-                      <a:r>
-                        <a:rPr sz="1200">
-                          <a:latin typeface="Malgun Gothic"/>
-                        </a:rPr>
-                        <a:t>자의성 방지 → 강건성 확인</a:t>
-                      </a:r>
-                    </a:p>
-                  </a:txBody>
-                  <a:tcPr anchor="ctr"/>
-                </a:tc>
-              </a:tr>
-              <a:tr h="508000">
-                <a:tc>
-                  <a:txBody>
-                    <a:bodyPr/>
-                    <a:lstStyle/>
-                    <a:p>
-                      <a:pPr algn="ctr"/>
-                      <a:r>
-                        <a:rPr sz="1200">
-                          <a:latin typeface="Malgun Gothic"/>
-                        </a:rPr>
-                        <a:t>LLAI 합성</a:t>
-                      </a:r>
-                    </a:p>
-                  </a:txBody>
-                  <a:tcPr anchor="ctr"/>
-                </a:tc>
-                <a:tc>
-                  <a:txBody>
-                    <a:bodyPr/>
-                    <a:lstStyle/>
-                    <a:p>
-                      <a:pPr algn="l"/>
-                      <a:r>
-                        <a:rPr sz="1200">
-                          <a:latin typeface="Malgun Gothic"/>
-                        </a:rPr>
-                        <a:t>정규화 지표 가중평균 ×100</a:t>
-                      </a:r>
-                    </a:p>
-                  </a:txBody>
-                  <a:tcPr anchor="ctr"/>
-                </a:tc>
-                <a:tc>
-                  <a:txBody>
-                    <a:bodyPr/>
-                    <a:lstStyle/>
-                    <a:p>
-                      <a:pPr algn="l"/>
-                      <a:r>
-                        <a:rPr sz="1200">
-                          <a:latin typeface="Malgun Gothic"/>
-                        </a:rPr>
-                        <a:t>단순·투명한 점수</a:t>
-                      </a:r>
-                    </a:p>
-                  </a:txBody>
-                  <a:tcPr anchor="ctr"/>
-                </a:tc>
-              </a:tr>
-              <a:tr h="508000">
-                <a:tc>
-                  <a:txBody>
-                    <a:bodyPr/>
-                    <a:lstStyle/>
-                    <a:p>
-                      <a:pPr algn="ctr"/>
-                      <a:r>
-                        <a:rPr sz="1200">
-                          <a:latin typeface="Malgun Gothic"/>
-                        </a:rPr>
-                        <a:t>상관분석 (Pearson·Spearman)</a:t>
-                      </a:r>
-                    </a:p>
-                  </a:txBody>
-                  <a:tcPr anchor="ctr"/>
-                </a:tc>
-                <a:tc>
-                  <a:txBody>
-                    <a:bodyPr/>
-                    <a:lstStyle/>
-                    <a:p>
-                      <a:pPr algn="l"/>
-                      <a:r>
-                        <a:rPr sz="1200">
-                          <a:latin typeface="Malgun Gothic"/>
-                        </a:rPr>
-                        <a:t>두 값이 같이 움직이나</a:t>
-                      </a:r>
-                    </a:p>
-                  </a:txBody>
-                  <a:tcPr anchor="ctr"/>
-                </a:tc>
-                <a:tc>
-                  <a:txBody>
-                    <a:bodyPr/>
-                    <a:lstStyle/>
-                    <a:p>
-                      <a:pPr algn="l"/>
-                      <a:r>
-                        <a:rPr sz="1200">
-                          <a:latin typeface="Malgun Gothic"/>
-                        </a:rPr>
-                        <a:t>이상치(서울) 대비 교차 확인</a:t>
-                      </a:r>
-                    </a:p>
-                  </a:txBody>
-                  <a:tcPr anchor="ctr"/>
-                </a:tc>
-              </a:tr>
-              <a:tr h="508000">
-                <a:tc>
-                  <a:txBody>
-                    <a:bodyPr/>
-                    <a:lstStyle/>
-                    <a:p>
-                      <a:pPr algn="ctr"/>
-                      <a:r>
-                        <a:rPr sz="1200">
-                          <a:latin typeface="Malgun Gothic"/>
-                        </a:rPr>
-                        <a:t>집단 비교 (Mann-Whitney U)</a:t>
-                      </a:r>
-                    </a:p>
-                  </a:txBody>
-                  <a:tcPr anchor="ctr"/>
-                </a:tc>
-                <a:tc>
-                  <a:txBody>
-                    <a:bodyPr/>
-                    <a:lstStyle/>
-                    <a:p>
-                      <a:pPr algn="l"/>
-                      <a:r>
-                        <a:rPr sz="1200">
-                          <a:latin typeface="Malgun Gothic"/>
-                        </a:rPr>
-                        <a:t>두 집단 차이 검정</a:t>
-                      </a:r>
-                    </a:p>
-                  </a:txBody>
-                  <a:tcPr anchor="ctr"/>
-                </a:tc>
-                <a:tc>
-                  <a:txBody>
-                    <a:bodyPr/>
-                    <a:lstStyle/>
-                    <a:p>
-                      <a:pPr algn="l"/>
-                      <a:r>
-                        <a:rPr sz="1200">
-                          <a:latin typeface="Malgun Gothic"/>
-                        </a:rPr>
-                        <a:t>표본 작아 → 비모수 검정</a:t>
-                      </a:r>
-                    </a:p>
-                  </a:txBody>
-                  <a:tcPr anchor="ctr"/>
-                </a:tc>
-              </a:tr>
-              <a:tr h="508000">
-                <a:tc>
-                  <a:txBody>
-                    <a:bodyPr/>
-                    <a:lstStyle/>
-                    <a:p>
-                      <a:pPr algn="ctr"/>
-                      <a:r>
-                        <a:rPr sz="1200">
-                          <a:latin typeface="Malgun Gothic"/>
-                        </a:rPr>
-                        <a:t>군집분석 (K-means)</a:t>
-                      </a:r>
-                    </a:p>
-                  </a:txBody>
-                  <a:tcPr anchor="ctr"/>
-                </a:tc>
-                <a:tc>
-                  <a:txBody>
-                    <a:bodyPr/>
-                    <a:lstStyle/>
-                    <a:p>
-                      <a:pPr algn="l"/>
-                      <a:r>
-                        <a:rPr sz="1200">
-                          <a:latin typeface="Malgun Gothic"/>
-                        </a:rPr>
-                        <a:t>비슷한 권역끼리 묶기</a:t>
-                      </a:r>
-                    </a:p>
-                  </a:txBody>
-                  <a:tcPr anchor="ctr"/>
-                </a:tc>
-                <a:tc>
-                  <a:txBody>
-                    <a:bodyPr/>
-                    <a:lstStyle/>
-                    <a:p>
-                      <a:pPr algn="l"/>
-                      <a:r>
-                        <a:rPr sz="1200">
-                          <a:latin typeface="Malgun Gothic"/>
-                        </a:rPr>
-                        <a:t>유형 분류 · 묶음 수 객관 선정</a:t>
-                      </a:r>
-                    </a:p>
-                  </a:txBody>
-                  <a:tcPr anchor="ctr"/>
-                </a:tc>
-              </a:tr>
-              <a:tr h="508000">
-                <a:tc>
-                  <a:txBody>
-                    <a:bodyPr/>
-                    <a:lstStyle/>
-                    <a:p>
-                      <a:pPr algn="ctr"/>
-                      <a:r>
-                        <a:rPr sz="1200">
-                          <a:latin typeface="Malgun Gothic"/>
-                        </a:rPr>
-                        <a:t>집중도 (HHI · 변동계수)</a:t>
-                      </a:r>
-                    </a:p>
-                  </a:txBody>
-                  <a:tcPr anchor="ctr"/>
-                </a:tc>
-                <a:tc>
-                  <a:txBody>
-                    <a:bodyPr/>
-                    <a:lstStyle/>
-                    <a:p>
-                      <a:pPr algn="l"/>
-                      <a:r>
-                        <a:rPr sz="1200">
-                          <a:latin typeface="Malgun Gothic"/>
-                        </a:rPr>
-                        <a:t>한 곳에 몰린 정도 수치화</a:t>
-                      </a:r>
-                    </a:p>
-                  </a:txBody>
-                  <a:tcPr anchor="ctr"/>
-                </a:tc>
-                <a:tc>
-                  <a:txBody>
-                    <a:bodyPr/>
-                    <a:lstStyle/>
-                    <a:p>
-                      <a:pPr algn="l"/>
-                      <a:r>
-                        <a:rPr sz="1200">
-                          <a:latin typeface="Malgun Gothic"/>
-                        </a:rPr>
-                        <a:t>집중·격차 변화 직접 측정</a:t>
-                      </a:r>
-                    </a:p>
-                  </a:txBody>
-                  <a:tcPr anchor="ctr"/>
-                </a:tc>
-              </a:tr>
-              <a:tr h="508000">
-                <a:tc>
-                  <a:txBody>
-                    <a:bodyPr/>
-                    <a:lstStyle/>
-                    <a:p>
-                      <a:pPr algn="ctr"/>
-                      <a:r>
-                        <a:rPr sz="1200">
-                          <a:latin typeface="Malgun Gothic"/>
-                        </a:rPr>
-                        <a:t>코로플레스 지도</a:t>
-                      </a:r>
-                    </a:p>
-                  </a:txBody>
-                  <a:tcPr anchor="ctr"/>
-                </a:tc>
-                <a:tc>
-                  <a:txBody>
-                    <a:bodyPr/>
-                    <a:lstStyle/>
-                    <a:p>
-                      <a:pPr algn="l"/>
-                      <a:r>
-                        <a:rPr sz="1200">
-                          <a:latin typeface="Malgun Gothic"/>
-                        </a:rPr>
-                        <a:t>지역 경계 합쳐 색칠</a:t>
-                      </a:r>
-                    </a:p>
-                  </a:txBody>
-                  <a:tcPr anchor="ctr"/>
-                </a:tc>
-                <a:tc>
-                  <a:txBody>
-                    <a:bodyPr/>
-                    <a:lstStyle/>
-                    <a:p>
-                      <a:pPr algn="l"/>
-                      <a:r>
-                        <a:rPr sz="1200">
-                          <a:latin typeface="Malgun Gothic"/>
-                        </a:rPr>
-                        <a:t>격차를 한눈에 전달</a:t>
-                      </a:r>
-                    </a:p>
-                  </a:txBody>
-                  <a:tcPr anchor="ctr"/>
-                </a:tc>
-              </a:tr>
-            </a:tbl>
-          </a:graphicData>
-        </a:graphic>
-      </p:graphicFrame>
-      <p:sp>
-        <p:nvSpPr>
-          <p:cNvPr id="5" name="TextBox 4"/>
+      <p:sp>
+        <p:nvSpPr>
+          <p:cNvPr id="4" name="TextBox 3"/>
           <p:cNvSpPr txBox="1"/>
           <p:nvPr/>
         </p:nvSpPr>
         <p:spPr>
           <a:xfrm>
-            <a:off x="640080" y="6126480"/>
-            <a:ext cx="10881360" cy="457200"/>
+            <a:off x="548640" y="1143000"/>
+            <a:ext cx="10972800" cy="365760"/>
           </a:xfrm>
           <a:prstGeom prst="rect">
             <a:avLst/>
@@ -3807,6 +3309,7 @@
           </a:bodyPr>
           <a:lstStyle/>
           <a:p>
+            <a:pPr algn="l"/>
             <a:r>
               <a:rPr sz="1200" i="1">
                 <a:solidFill>
@@ -3814,7 +3317,661 @@
                 </a:solidFill>
                 <a:latin typeface="Malgun Gothic"/>
               </a:rPr>
-              <a:t>※ 본문 결과에 직접 등장: 정규화·엔트로피 가중·LLAI·상관(H2)·Mann-Whitney(H1)·K-means·HHI(H4). PCA·Spearman·Silhouette은 가중치/관계/군집수 교차검증용(보조). 용어 풀이는 부록 B.</a:t>
+              <a:t>회색 = 입력 · 보라 = LLAI 만드는 과정 · 청록 = 거기서 뽑은 결과(+슬라이드)</a:t>
+            </a:r>
+          </a:p>
+        </p:txBody>
+      </p:sp>
+      <p:sp>
+        <p:nvSpPr>
+          <p:cNvPr id="5" name="Rounded Rectangle 4"/>
+          <p:cNvSpPr/>
+          <p:nvPr/>
+        </p:nvSpPr>
+        <p:spPr>
+          <a:xfrm>
+            <a:off x="4448556" y="1508760"/>
+            <a:ext cx="3291840" cy="749808"/>
+          </a:xfrm>
+          <a:prstGeom prst="roundRect">
+            <a:avLst/>
+          </a:prstGeom>
+          <a:solidFill>
+            <a:srgbClr val="ECEAE3"/>
+          </a:solidFill>
+          <a:ln w="12700">
+            <a:solidFill>
+              <a:srgbClr val="88909A"/>
+            </a:solidFill>
+          </a:ln>
+        </p:spPr>
+        <p:style>
+          <a:lnRef idx="1">
+            <a:schemeClr val="accent1"/>
+          </a:lnRef>
+          <a:fillRef idx="3">
+            <a:schemeClr val="accent1"/>
+          </a:fillRef>
+          <a:effectRef idx="2">
+            <a:schemeClr val="accent1"/>
+          </a:effectRef>
+          <a:fontRef idx="minor">
+            <a:schemeClr val="lt1"/>
+          </a:fontRef>
+        </p:style>
+        <p:txBody>
+          <a:bodyPr rtlCol="0" anchor="ctr" wrap="square"/>
+          <a:lstStyle/>
+          <a:p>
+            <a:pPr algn="ctr"/>
+            <a:r>
+              <a:rPr sz="1500" b="1">
+                <a:solidFill>
+                  <a:srgbClr val="3A3730"/>
+                </a:solidFill>
+                <a:latin typeface="Malgun Gothic"/>
+              </a:rPr>
+              <a:t>3개 지표</a:t>
+            </a:r>
+          </a:p>
+          <a:p>
+            <a:pPr algn="ctr"/>
+            <a:r>
+              <a:rPr sz="1100">
+                <a:solidFill>
+                  <a:srgbClr val="555555"/>
+                </a:solidFill>
+                <a:latin typeface="Malgun Gothic"/>
+              </a:rPr>
+              <a:t>변호사 · 사건부담 · 취약계층</a:t>
+            </a:r>
+          </a:p>
+        </p:txBody>
+      </p:sp>
+      <p:cxnSp>
+        <p:nvCxnSpPr>
+          <p:cNvPr id="6" name="Connector 5"/>
+          <p:cNvCxnSpPr/>
+          <p:nvPr/>
+        </p:nvCxnSpPr>
+        <p:spPr>
+          <a:xfrm>
+            <a:off x="6094476" y="2258568"/>
+            <a:ext cx="0" cy="283464"/>
+          </a:xfrm>
+          <a:prstGeom prst="line">
+            <a:avLst/>
+          </a:prstGeom>
+          <a:ln w="19050">
+            <a:solidFill>
+              <a:srgbClr val="88909A"/>
+            </a:solidFill>
+          </a:ln>
+        </p:spPr>
+        <p:style>
+          <a:lnRef idx="2">
+            <a:schemeClr val="accent1"/>
+          </a:lnRef>
+          <a:fillRef idx="0">
+            <a:schemeClr val="accent1"/>
+          </a:fillRef>
+          <a:effectRef idx="1">
+            <a:schemeClr val="accent1"/>
+          </a:effectRef>
+          <a:fontRef idx="minor">
+            <a:schemeClr val="tx1"/>
+          </a:fontRef>
+        </p:style>
+      </p:cxnSp>
+      <p:sp>
+        <p:nvSpPr>
+          <p:cNvPr id="7" name="Rounded Rectangle 6"/>
+          <p:cNvSpPr/>
+          <p:nvPr/>
+        </p:nvSpPr>
+        <p:spPr>
+          <a:xfrm>
+            <a:off x="4448556" y="2542032"/>
+            <a:ext cx="3291840" cy="749808"/>
+          </a:xfrm>
+          <a:prstGeom prst="roundRect">
+            <a:avLst/>
+          </a:prstGeom>
+          <a:solidFill>
+            <a:srgbClr val="E2E0F6"/>
+          </a:solidFill>
+          <a:ln w="12700">
+            <a:solidFill>
+              <a:srgbClr val="88909A"/>
+            </a:solidFill>
+          </a:ln>
+        </p:spPr>
+        <p:style>
+          <a:lnRef idx="1">
+            <a:schemeClr val="accent1"/>
+          </a:lnRef>
+          <a:fillRef idx="3">
+            <a:schemeClr val="accent1"/>
+          </a:fillRef>
+          <a:effectRef idx="2">
+            <a:schemeClr val="accent1"/>
+          </a:effectRef>
+          <a:fontRef idx="minor">
+            <a:schemeClr val="lt1"/>
+          </a:fontRef>
+        </p:style>
+        <p:txBody>
+          <a:bodyPr rtlCol="0" anchor="ctr" wrap="square"/>
+          <a:lstStyle/>
+          <a:p>
+            <a:pPr algn="ctr"/>
+            <a:r>
+              <a:rPr sz="1500" b="1">
+                <a:solidFill>
+                  <a:srgbClr val="4B3F8F"/>
+                </a:solidFill>
+                <a:latin typeface="Malgun Gothic"/>
+              </a:rPr>
+              <a:t>정규화 + 가중치</a:t>
+            </a:r>
+          </a:p>
+          <a:p>
+            <a:pPr algn="ctr"/>
+            <a:r>
+              <a:rPr sz="1100">
+                <a:solidFill>
+                  <a:srgbClr val="555555"/>
+                </a:solidFill>
+                <a:latin typeface="Malgun Gothic"/>
+              </a:rPr>
+              <a:t>Min-Max · 엔트로피</a:t>
+            </a:r>
+          </a:p>
+        </p:txBody>
+      </p:sp>
+      <p:cxnSp>
+        <p:nvCxnSpPr>
+          <p:cNvPr id="8" name="Connector 7"/>
+          <p:cNvCxnSpPr/>
+          <p:nvPr/>
+        </p:nvCxnSpPr>
+        <p:spPr>
+          <a:xfrm>
+            <a:off x="6094476" y="3291840"/>
+            <a:ext cx="0" cy="283464"/>
+          </a:xfrm>
+          <a:prstGeom prst="line">
+            <a:avLst/>
+          </a:prstGeom>
+          <a:ln w="19050">
+            <a:solidFill>
+              <a:srgbClr val="88909A"/>
+            </a:solidFill>
+          </a:ln>
+        </p:spPr>
+        <p:style>
+          <a:lnRef idx="2">
+            <a:schemeClr val="accent1"/>
+          </a:lnRef>
+          <a:fillRef idx="0">
+            <a:schemeClr val="accent1"/>
+          </a:fillRef>
+          <a:effectRef idx="1">
+            <a:schemeClr val="accent1"/>
+          </a:effectRef>
+          <a:fontRef idx="minor">
+            <a:schemeClr val="tx1"/>
+          </a:fontRef>
+        </p:style>
+      </p:cxnSp>
+      <p:sp>
+        <p:nvSpPr>
+          <p:cNvPr id="9" name="Rounded Rectangle 8"/>
+          <p:cNvSpPr/>
+          <p:nvPr/>
+        </p:nvSpPr>
+        <p:spPr>
+          <a:xfrm>
+            <a:off x="4448556" y="3575304"/>
+            <a:ext cx="3291840" cy="749808"/>
+          </a:xfrm>
+          <a:prstGeom prst="roundRect">
+            <a:avLst/>
+          </a:prstGeom>
+          <a:solidFill>
+            <a:srgbClr val="E2E0F6"/>
+          </a:solidFill>
+          <a:ln w="12700">
+            <a:solidFill>
+              <a:srgbClr val="88909A"/>
+            </a:solidFill>
+          </a:ln>
+        </p:spPr>
+        <p:style>
+          <a:lnRef idx="1">
+            <a:schemeClr val="accent1"/>
+          </a:lnRef>
+          <a:fillRef idx="3">
+            <a:schemeClr val="accent1"/>
+          </a:fillRef>
+          <a:effectRef idx="2">
+            <a:schemeClr val="accent1"/>
+          </a:effectRef>
+          <a:fontRef idx="minor">
+            <a:schemeClr val="lt1"/>
+          </a:fontRef>
+        </p:style>
+        <p:txBody>
+          <a:bodyPr rtlCol="0" anchor="ctr" wrap="square"/>
+          <a:lstStyle/>
+          <a:p>
+            <a:pPr algn="ctr"/>
+            <a:r>
+              <a:rPr sz="1500" b="1">
+                <a:solidFill>
+                  <a:srgbClr val="4B3F8F"/>
+                </a:solidFill>
+                <a:latin typeface="Malgun Gothic"/>
+              </a:rPr>
+              <a:t>LLAI 점수</a:t>
+            </a:r>
+          </a:p>
+          <a:p>
+            <a:pPr algn="ctr"/>
+            <a:r>
+              <a:rPr sz="1100">
+                <a:solidFill>
+                  <a:srgbClr val="555555"/>
+                </a:solidFill>
+                <a:latin typeface="Malgun Gothic"/>
+              </a:rPr>
+              <a:t>가중평균 × 100</a:t>
+            </a:r>
+          </a:p>
+        </p:txBody>
+      </p:sp>
+      <p:cxnSp>
+        <p:nvCxnSpPr>
+          <p:cNvPr id="10" name="Connector 9"/>
+          <p:cNvCxnSpPr/>
+          <p:nvPr/>
+        </p:nvCxnSpPr>
+        <p:spPr>
+          <a:xfrm flipH="1">
+            <a:off x="2308860" y="4325112"/>
+            <a:ext cx="3785616" cy="475488"/>
+          </a:xfrm>
+          <a:prstGeom prst="line">
+            <a:avLst/>
+          </a:prstGeom>
+          <a:ln w="19050">
+            <a:solidFill>
+              <a:srgbClr val="88909A"/>
+            </a:solidFill>
+          </a:ln>
+        </p:spPr>
+        <p:style>
+          <a:lnRef idx="2">
+            <a:schemeClr val="accent1"/>
+          </a:lnRef>
+          <a:fillRef idx="0">
+            <a:schemeClr val="accent1"/>
+          </a:fillRef>
+          <a:effectRef idx="1">
+            <a:schemeClr val="accent1"/>
+          </a:effectRef>
+          <a:fontRef idx="minor">
+            <a:schemeClr val="tx1"/>
+          </a:fontRef>
+        </p:style>
+      </p:cxnSp>
+      <p:cxnSp>
+        <p:nvCxnSpPr>
+          <p:cNvPr id="11" name="Connector 10"/>
+          <p:cNvCxnSpPr/>
+          <p:nvPr/>
+        </p:nvCxnSpPr>
+        <p:spPr>
+          <a:xfrm>
+            <a:off x="6094476" y="4325112"/>
+            <a:ext cx="0" cy="475488"/>
+          </a:xfrm>
+          <a:prstGeom prst="line">
+            <a:avLst/>
+          </a:prstGeom>
+          <a:ln w="19050">
+            <a:solidFill>
+              <a:srgbClr val="88909A"/>
+            </a:solidFill>
+          </a:ln>
+        </p:spPr>
+        <p:style>
+          <a:lnRef idx="2">
+            <a:schemeClr val="accent1"/>
+          </a:lnRef>
+          <a:fillRef idx="0">
+            <a:schemeClr val="accent1"/>
+          </a:fillRef>
+          <a:effectRef idx="1">
+            <a:schemeClr val="accent1"/>
+          </a:effectRef>
+          <a:fontRef idx="minor">
+            <a:schemeClr val="tx1"/>
+          </a:fontRef>
+        </p:style>
+      </p:cxnSp>
+      <p:cxnSp>
+        <p:nvCxnSpPr>
+          <p:cNvPr id="12" name="Connector 11"/>
+          <p:cNvCxnSpPr/>
+          <p:nvPr/>
+        </p:nvCxnSpPr>
+        <p:spPr>
+          <a:xfrm>
+            <a:off x="6094476" y="4325112"/>
+            <a:ext cx="3785616" cy="475488"/>
+          </a:xfrm>
+          <a:prstGeom prst="line">
+            <a:avLst/>
+          </a:prstGeom>
+          <a:ln w="19050">
+            <a:solidFill>
+              <a:srgbClr val="88909A"/>
+            </a:solidFill>
+          </a:ln>
+        </p:spPr>
+        <p:style>
+          <a:lnRef idx="2">
+            <a:schemeClr val="accent1"/>
+          </a:lnRef>
+          <a:fillRef idx="0">
+            <a:schemeClr val="accent1"/>
+          </a:fillRef>
+          <a:effectRef idx="1">
+            <a:schemeClr val="accent1"/>
+          </a:effectRef>
+          <a:fontRef idx="minor">
+            <a:schemeClr val="tx1"/>
+          </a:fontRef>
+        </p:style>
+      </p:cxnSp>
+      <p:sp>
+        <p:nvSpPr>
+          <p:cNvPr id="13" name="Rounded Rectangle 12"/>
+          <p:cNvSpPr/>
+          <p:nvPr/>
+        </p:nvSpPr>
+        <p:spPr>
+          <a:xfrm>
+            <a:off x="502920" y="4800600"/>
+            <a:ext cx="3611880" cy="1463040"/>
+          </a:xfrm>
+          <a:prstGeom prst="roundRect">
+            <a:avLst/>
+          </a:prstGeom>
+          <a:solidFill>
+            <a:srgbClr val="DBEEE4"/>
+          </a:solidFill>
+          <a:ln w="12700">
+            <a:solidFill>
+              <a:srgbClr val="88909A"/>
+            </a:solidFill>
+          </a:ln>
+        </p:spPr>
+        <p:style>
+          <a:lnRef idx="1">
+            <a:schemeClr val="accent1"/>
+          </a:lnRef>
+          <a:fillRef idx="3">
+            <a:schemeClr val="accent1"/>
+          </a:fillRef>
+          <a:effectRef idx="2">
+            <a:schemeClr val="accent1"/>
+          </a:effectRef>
+          <a:fontRef idx="minor">
+            <a:schemeClr val="lt1"/>
+          </a:fontRef>
+        </p:style>
+        <p:txBody>
+          <a:bodyPr rtlCol="0" anchor="ctr" wrap="square"/>
+          <a:lstStyle/>
+          <a:p>
+            <a:pPr algn="ctr"/>
+            <a:r>
+              <a:rPr sz="1500" b="1">
+                <a:solidFill>
+                  <a:srgbClr val="2B6B52"/>
+                </a:solidFill>
+                <a:latin typeface="Malgun Gothic"/>
+              </a:rPr>
+              <a:t>K-means 군집</a:t>
+            </a:r>
+          </a:p>
+          <a:p>
+            <a:pPr algn="ctr"/>
+            <a:r>
+              <a:rPr sz="1100">
+                <a:solidFill>
+                  <a:srgbClr val="555555"/>
+                </a:solidFill>
+                <a:latin typeface="Malgun Gothic"/>
+              </a:rPr>
+              <a:t>→ 서울 별도그룹</a:t>
+            </a:r>
+          </a:p>
+          <a:p>
+            <a:pPr algn="ctr"/>
+            <a:r>
+              <a:rPr sz="1100">
+                <a:solidFill>
+                  <a:srgbClr val="555555"/>
+                </a:solidFill>
+                <a:latin typeface="Malgun Gothic"/>
+              </a:rPr>
+              <a:t>(클러스터 색) · 11번</a:t>
+            </a:r>
+          </a:p>
+        </p:txBody>
+      </p:sp>
+      <p:sp>
+        <p:nvSpPr>
+          <p:cNvPr id="14" name="Rounded Rectangle 13"/>
+          <p:cNvSpPr/>
+          <p:nvPr/>
+        </p:nvSpPr>
+        <p:spPr>
+          <a:xfrm>
+            <a:off x="4288536" y="4800600"/>
+            <a:ext cx="3611880" cy="1463040"/>
+          </a:xfrm>
+          <a:prstGeom prst="roundRect">
+            <a:avLst/>
+          </a:prstGeom>
+          <a:solidFill>
+            <a:srgbClr val="DBEEE4"/>
+          </a:solidFill>
+          <a:ln w="12700">
+            <a:solidFill>
+              <a:srgbClr val="88909A"/>
+            </a:solidFill>
+          </a:ln>
+        </p:spPr>
+        <p:style>
+          <a:lnRef idx="1">
+            <a:schemeClr val="accent1"/>
+          </a:lnRef>
+          <a:fillRef idx="3">
+            <a:schemeClr val="accent1"/>
+          </a:fillRef>
+          <a:effectRef idx="2">
+            <a:schemeClr val="accent1"/>
+          </a:effectRef>
+          <a:fontRef idx="minor">
+            <a:schemeClr val="lt1"/>
+          </a:fontRef>
+        </p:style>
+        <p:txBody>
+          <a:bodyPr rtlCol="0" anchor="ctr" wrap="square"/>
+          <a:lstStyle/>
+          <a:p>
+            <a:pPr algn="ctr"/>
+            <a:r>
+              <a:rPr sz="1500" b="1">
+                <a:solidFill>
+                  <a:srgbClr val="2B6B52"/>
+                </a:solidFill>
+                <a:latin typeface="Malgun Gothic"/>
+              </a:rPr>
+              <a:t>코로플레스 지도</a:t>
+            </a:r>
+          </a:p>
+          <a:p>
+            <a:pPr algn="ctr"/>
+            <a:r>
+              <a:rPr sz="1100">
+                <a:solidFill>
+                  <a:srgbClr val="555555"/>
+                </a:solidFill>
+                <a:latin typeface="Malgun Gothic"/>
+              </a:rPr>
+              <a:t>→ 전국 색지도</a:t>
+            </a:r>
+          </a:p>
+          <a:p>
+            <a:pPr algn="ctr"/>
+            <a:r>
+              <a:rPr sz="1100">
+                <a:solidFill>
+                  <a:srgbClr val="555555"/>
+                </a:solidFill>
+                <a:latin typeface="Malgun Gothic"/>
+              </a:rPr>
+              <a:t>(서울만 파랑) · 12번</a:t>
+            </a:r>
+          </a:p>
+        </p:txBody>
+      </p:sp>
+      <p:sp>
+        <p:nvSpPr>
+          <p:cNvPr id="15" name="Rounded Rectangle 14"/>
+          <p:cNvSpPr/>
+          <p:nvPr/>
+        </p:nvSpPr>
+        <p:spPr>
+          <a:xfrm>
+            <a:off x="8074152" y="4800600"/>
+            <a:ext cx="3611880" cy="1463040"/>
+          </a:xfrm>
+          <a:prstGeom prst="roundRect">
+            <a:avLst/>
+          </a:prstGeom>
+          <a:solidFill>
+            <a:srgbClr val="DBEEE4"/>
+          </a:solidFill>
+          <a:ln w="12700">
+            <a:solidFill>
+              <a:srgbClr val="88909A"/>
+            </a:solidFill>
+          </a:ln>
+        </p:spPr>
+        <p:style>
+          <a:lnRef idx="1">
+            <a:schemeClr val="accent1"/>
+          </a:lnRef>
+          <a:fillRef idx="3">
+            <a:schemeClr val="accent1"/>
+          </a:fillRef>
+          <a:effectRef idx="2">
+            <a:schemeClr val="accent1"/>
+          </a:effectRef>
+          <a:fontRef idx="minor">
+            <a:schemeClr val="lt1"/>
+          </a:fontRef>
+        </p:style>
+        <p:txBody>
+          <a:bodyPr rtlCol="0" anchor="ctr" wrap="square"/>
+          <a:lstStyle/>
+          <a:p>
+            <a:pPr algn="ctr"/>
+            <a:r>
+              <a:rPr sz="1500" b="1">
+                <a:solidFill>
+                  <a:srgbClr val="2B6B52"/>
+                </a:solidFill>
+                <a:latin typeface="Malgun Gothic"/>
+              </a:rPr>
+              <a:t>가설검정 (3종)</a:t>
+            </a:r>
+          </a:p>
+          <a:p>
+            <a:pPr algn="ctr"/>
+            <a:r>
+              <a:rPr sz="1100">
+                <a:solidFill>
+                  <a:srgbClr val="555555"/>
+                </a:solidFill>
+                <a:latin typeface="Malgun Gothic"/>
+              </a:rPr>
+              <a:t>Pearson → H2 변호사↔부담 r=−.85 · 13번</a:t>
+            </a:r>
+          </a:p>
+          <a:p>
+            <a:pPr algn="ctr"/>
+            <a:r>
+              <a:rPr sz="1100">
+                <a:solidFill>
+                  <a:srgbClr val="555555"/>
+                </a:solidFill>
+                <a:latin typeface="Malgun Gothic"/>
+              </a:rPr>
+              <a:t>HHI·변동계수 → H4 쏠림 .53→.60 · 14번</a:t>
+            </a:r>
+          </a:p>
+          <a:p>
+            <a:pPr algn="ctr"/>
+            <a:r>
+              <a:rPr sz="1100">
+                <a:solidFill>
+                  <a:srgbClr val="555555"/>
+                </a:solidFill>
+                <a:latin typeface="Malgun Gothic"/>
+              </a:rPr>
+              <a:t>Mann-Whitney → H1 수도권 차이 · 16·18번</a:t>
+            </a:r>
+          </a:p>
+        </p:txBody>
+      </p:sp>
+      <p:sp>
+        <p:nvSpPr>
+          <p:cNvPr id="16" name="TextBox 15"/>
+          <p:cNvSpPr txBox="1"/>
+          <p:nvPr/>
+        </p:nvSpPr>
+        <p:spPr>
+          <a:xfrm>
+            <a:off x="548640" y="6419088"/>
+            <a:ext cx="11064240" cy="365760"/>
+          </a:xfrm>
+          <a:prstGeom prst="rect">
+            <a:avLst/>
+          </a:prstGeom>
+          <a:noFill/>
+        </p:spPr>
+        <p:txBody>
+          <a:bodyPr wrap="square">
+            <a:spAutoFit/>
+          </a:bodyPr>
+          <a:lstStyle/>
+          <a:p>
+            <a:pPr algn="l"/>
+            <a:r>
+              <a:rPr sz="1200" i="1">
+                <a:solidFill>
+                  <a:srgbClr val="555555"/>
+                </a:solidFill>
+                <a:latin typeface="Malgun Gothic"/>
+              </a:rPr>
+              <a:t>※ PCA · Spearman · Silhouette은 결과로 등장하지 않는 교차검증 보조 — 메인 흐름에서 제외(부록 B).</a:t>
             </a:r>
           </a:p>
         </p:txBody>
@@ -8683,69 +8840,6 @@
         </p:nvSpPr>
         <p:spPr>
           <a:xfrm>
-            <a:off x="731520" y="2377440"/>
-            <a:ext cx="10698480" cy="1828800"/>
-          </a:xfrm>
-          <a:prstGeom prst="rect">
-            <a:avLst/>
-          </a:prstGeom>
-          <a:noFill/>
-        </p:spPr>
-        <p:txBody>
-          <a:bodyPr wrap="square">
-            <a:spAutoFit/>
-          </a:bodyPr>
-          <a:lstStyle/>
-          <a:p>
-            <a:r>
-              <a:rPr sz="4000" b="1">
-                <a:solidFill>
-                  <a:srgbClr val="1F3A5F"/>
-                </a:solidFill>
-                <a:latin typeface="Malgun Gothic"/>
-              </a:rPr>
-              <a:t>감사합니다</a:t>
-            </a:r>
-          </a:p>
-          <a:p>
-            <a:r>
-              <a:rPr sz="2000">
-                <a:solidFill>
-                  <a:srgbClr val="C44E52"/>
-                </a:solidFill>
-                <a:latin typeface="Malgun Gothic"/>
-              </a:rPr>
-              <a:t>코드·노트북·인터랙티브 지도: github.com/Allenkeem/llai-project</a:t>
-            </a:r>
-          </a:p>
-        </p:txBody>
-      </p:sp>
-    </p:spTree>
-  </p:cSld>
-  <p:clrMapOvr>
-    <a:masterClrMapping/>
-  </p:clrMapOvr>
-</p:sld>
-</file>
-
-<file path=ppt/slides/slide26.xml><?xml version="1.0" encoding="utf-8"?>
-<p:sld xmlns:a="http://schemas.openxmlformats.org/drawingml/2006/main" xmlns:p="http://schemas.openxmlformats.org/presentationml/2006/main" xmlns:r="http://schemas.openxmlformats.org/officeDocument/2006/relationships">
-  <p:cSld>
-    <p:spTree>
-      <p:nvGrpSpPr>
-        <p:cNvPr id="1" name=""/>
-        <p:cNvGrpSpPr/>
-        <p:nvPr/>
-      </p:nvGrpSpPr>
-      <p:grpSpPr/>
-      <p:sp>
-        <p:nvSpPr>
-          <p:cNvPr id="2" name="TextBox 1"/>
-          <p:cNvSpPr txBox="1"/>
-          <p:nvPr/>
-        </p:nvSpPr>
-        <p:spPr>
-          <a:xfrm>
             <a:off x="502920" y="320040"/>
             <a:ext cx="11155680" cy="914400"/>
           </a:xfrm>
@@ -9284,6 +9378,69 @@
                 <a:latin typeface="Malgun Gothic"/>
               </a:rPr>
               <a:t>• 그래서 '객관적'이 아니라 '데이터의 쏠림이 가중치를 정했다'가 정확 → 균등 가중치 결과도 함께 제시</a:t>
+            </a:r>
+          </a:p>
+        </p:txBody>
+      </p:sp>
+    </p:spTree>
+  </p:cSld>
+  <p:clrMapOvr>
+    <a:masterClrMapping/>
+  </p:clrMapOvr>
+</p:sld>
+</file>
+
+<file path=ppt/slides/slide26.xml><?xml version="1.0" encoding="utf-8"?>
+<p:sld xmlns:a="http://schemas.openxmlformats.org/drawingml/2006/main" xmlns:p="http://schemas.openxmlformats.org/presentationml/2006/main" xmlns:r="http://schemas.openxmlformats.org/officeDocument/2006/relationships">
+  <p:cSld>
+    <p:spTree>
+      <p:nvGrpSpPr>
+        <p:cNvPr id="1" name=""/>
+        <p:cNvGrpSpPr/>
+        <p:nvPr/>
+      </p:nvGrpSpPr>
+      <p:grpSpPr/>
+      <p:sp>
+        <p:nvSpPr>
+          <p:cNvPr id="2" name="TextBox 1"/>
+          <p:cNvSpPr txBox="1"/>
+          <p:nvPr/>
+        </p:nvSpPr>
+        <p:spPr>
+          <a:xfrm>
+            <a:off x="731520" y="2377440"/>
+            <a:ext cx="10698480" cy="1828800"/>
+          </a:xfrm>
+          <a:prstGeom prst="rect">
+            <a:avLst/>
+          </a:prstGeom>
+          <a:noFill/>
+        </p:spPr>
+        <p:txBody>
+          <a:bodyPr wrap="square">
+            <a:spAutoFit/>
+          </a:bodyPr>
+          <a:lstStyle/>
+          <a:p>
+            <a:r>
+              <a:rPr sz="4000" b="1">
+                <a:solidFill>
+                  <a:srgbClr val="1F3A5F"/>
+                </a:solidFill>
+                <a:latin typeface="Malgun Gothic"/>
+              </a:rPr>
+              <a:t>감사합니다</a:t>
+            </a:r>
+          </a:p>
+          <a:p>
+            <a:r>
+              <a:rPr sz="2000">
+                <a:solidFill>
+                  <a:srgbClr val="C44E52"/>
+                </a:solidFill>
+                <a:latin typeface="Malgun Gothic"/>
+              </a:rPr>
+              <a:t>코드·노트북·인터랙티브 지도: github.com/Allenkeem/llai-project</a:t>
             </a:r>
           </a:p>
         </p:txBody>

--- a/reports/발표자료.pptx
+++ b/reports/발표자료.pptx
@@ -23,6 +23,7 @@
     <p:sldId id="271" r:id="rId22"/>
     <p:sldId id="280" r:id="rId31"/>
     <p:sldId id="272" r:id="rId23"/>
+    <p:sldId id="282" r:id="rId33"/>
     <p:sldId id="273" r:id="rId24"/>
     <p:sldId id="274" r:id="rId25"/>
     <p:sldId id="275" r:id="rId26"/>
@@ -9441,6 +9442,296 @@
                 <a:latin typeface="Malgun Gothic"/>
               </a:rPr>
               <a:t>코드·노트북·인터랙티브 지도: github.com/Allenkeem/llai-project</a:t>
+            </a:r>
+          </a:p>
+        </p:txBody>
+      </p:sp>
+    </p:spTree>
+  </p:cSld>
+  <p:clrMapOvr>
+    <a:masterClrMapping/>
+  </p:clrMapOvr>
+</p:sld>
+</file>
+
+<file path=ppt/slides/slide27.xml><?xml version="1.0" encoding="utf-8"?>
+<p:sld xmlns:a="http://schemas.openxmlformats.org/drawingml/2006/main" xmlns:p="http://schemas.openxmlformats.org/presentationml/2006/main" xmlns:r="http://schemas.openxmlformats.org/officeDocument/2006/relationships">
+  <p:cSld>
+    <p:spTree>
+      <p:nvGrpSpPr>
+        <p:cNvPr id="1" name=""/>
+        <p:cNvGrpSpPr/>
+        <p:nvPr/>
+      </p:nvGrpSpPr>
+      <p:grpSpPr/>
+      <p:sp>
+        <p:nvSpPr>
+          <p:cNvPr id="2" name="TextBox 1"/>
+          <p:cNvSpPr txBox="1"/>
+          <p:nvPr/>
+        </p:nvSpPr>
+        <p:spPr>
+          <a:xfrm>
+            <a:off x="502920" y="320040"/>
+            <a:ext cx="11155680" cy="914400"/>
+          </a:xfrm>
+          <a:prstGeom prst="rect">
+            <a:avLst/>
+          </a:prstGeom>
+          <a:noFill/>
+        </p:spPr>
+        <p:txBody>
+          <a:bodyPr wrap="square">
+            <a:spAutoFit/>
+          </a:bodyPr>
+          <a:lstStyle/>
+          <a:p>
+            <a:r>
+              <a:rPr sz="2800" b="1">
+                <a:solidFill>
+                  <a:srgbClr val="1F3A5F"/>
+                </a:solidFill>
+                <a:latin typeface="Malgun Gothic"/>
+              </a:rPr>
+              <a:t>왜 하필 서울인가? — '수요 주도' 가설 (해석)</a:t>
+            </a:r>
+          </a:p>
+        </p:txBody>
+      </p:sp>
+      <p:sp>
+        <p:nvSpPr>
+          <p:cNvPr id="3" name="Rectangle 2"/>
+          <p:cNvSpPr/>
+          <p:nvPr/>
+        </p:nvSpPr>
+        <p:spPr>
+          <a:xfrm>
+            <a:off x="548640" y="1188720"/>
+            <a:ext cx="11064240" cy="38100"/>
+          </a:xfrm>
+          <a:prstGeom prst="rect">
+            <a:avLst/>
+          </a:prstGeom>
+          <a:solidFill>
+            <a:srgbClr val="C44E52"/>
+          </a:solidFill>
+          <a:ln>
+            <a:noFill/>
+          </a:ln>
+        </p:spPr>
+        <p:style>
+          <a:lnRef idx="1">
+            <a:schemeClr val="accent1"/>
+          </a:lnRef>
+          <a:fillRef idx="3">
+            <a:schemeClr val="accent1"/>
+          </a:fillRef>
+          <a:effectRef idx="2">
+            <a:schemeClr val="accent1"/>
+          </a:effectRef>
+          <a:fontRef idx="minor">
+            <a:schemeClr val="lt1"/>
+          </a:fontRef>
+        </p:style>
+        <p:txBody>
+          <a:bodyPr rtlCol="0" anchor="ctr"/>
+          <a:lstStyle/>
+          <a:p>
+            <a:pPr algn="ctr"/>
+          </a:p>
+        </p:txBody>
+      </p:sp>
+      <p:sp>
+        <p:nvSpPr>
+          <p:cNvPr id="4" name="Rounded Rectangle 3"/>
+          <p:cNvSpPr/>
+          <p:nvPr/>
+        </p:nvSpPr>
+        <p:spPr>
+          <a:xfrm>
+            <a:off x="640080" y="1417320"/>
+            <a:ext cx="10881360" cy="822960"/>
+          </a:xfrm>
+          <a:prstGeom prst="roundRect">
+            <a:avLst/>
+          </a:prstGeom>
+          <a:solidFill>
+            <a:srgbClr val="EDF1F7"/>
+          </a:solidFill>
+          <a:ln>
+            <a:solidFill>
+              <a:srgbClr val="1F3A5F"/>
+            </a:solidFill>
+          </a:ln>
+        </p:spPr>
+        <p:style>
+          <a:lnRef idx="1">
+            <a:schemeClr val="accent1"/>
+          </a:lnRef>
+          <a:fillRef idx="3">
+            <a:schemeClr val="accent1"/>
+          </a:fillRef>
+          <a:effectRef idx="2">
+            <a:schemeClr val="accent1"/>
+          </a:effectRef>
+          <a:fontRef idx="minor">
+            <a:schemeClr val="lt1"/>
+          </a:fontRef>
+        </p:style>
+        <p:txBody>
+          <a:bodyPr rtlCol="0" anchor="ctr" wrap="square"/>
+          <a:lstStyle/>
+          <a:p>
+            <a:pPr algn="ctr"/>
+            <a:r>
+              <a:rPr sz="1900" b="1">
+                <a:solidFill>
+                  <a:srgbClr val="1F3A5F"/>
+                </a:solidFill>
+                <a:latin typeface="Malgun Gothic"/>
+              </a:rPr>
+              <a:t>변호사를 3.4배 늘려도 안 흩어졌다(H4) → 변호사는 '공급'이 아니라 '수요(일·돈)'를 따라간다</a:t>
+            </a:r>
+          </a:p>
+        </p:txBody>
+      </p:sp>
+      <p:sp>
+        <p:nvSpPr>
+          <p:cNvPr id="5" name="TextBox 4"/>
+          <p:cNvSpPr txBox="1"/>
+          <p:nvPr/>
+        </p:nvSpPr>
+        <p:spPr>
+          <a:xfrm>
+            <a:off x="640080" y="2514600"/>
+            <a:ext cx="10881360" cy="2834640"/>
+          </a:xfrm>
+          <a:prstGeom prst="rect">
+            <a:avLst/>
+          </a:prstGeom>
+          <a:noFill/>
+        </p:spPr>
+        <p:txBody>
+          <a:bodyPr wrap="square">
+            <a:spAutoFit/>
+          </a:bodyPr>
+          <a:lstStyle/>
+          <a:p>
+            <a:pPr>
+              <a:spcAft>
+                <a:spcPts val="1000"/>
+              </a:spcAft>
+            </a:pPr>
+            <a:r>
+              <a:rPr sz="1900">
+                <a:solidFill>
+                  <a:srgbClr val="222222"/>
+                </a:solidFill>
+                <a:latin typeface="Malgun Gothic"/>
+              </a:rPr>
+              <a:t>• 공급 주도라면 — 변호사 3배↑면 빈 곳을 메우며 흩어졌어야. 그런데 서울 집중은 오히려 심화</a:t>
+            </a:r>
+          </a:p>
+          <a:p>
+            <a:pPr>
+              <a:spcAft>
+                <a:spcPts val="1000"/>
+              </a:spcAft>
+            </a:pPr>
+            <a:r>
+              <a:rPr sz="1900">
+                <a:solidFill>
+                  <a:srgbClr val="222222"/>
+                </a:solidFill>
+                <a:latin typeface="Malgun Gothic"/>
+              </a:rPr>
+              <a:t>• → demand-pull(수요 견인): 변호사는 일·고객·보수가 있는 곳으로 간다</a:t>
+            </a:r>
+          </a:p>
+          <a:p>
+            <a:pPr lvl="1">
+              <a:spcAft>
+                <a:spcPts val="1000"/>
+              </a:spcAft>
+            </a:pPr>
+            <a:r>
+              <a:rPr sz="1600">
+                <a:solidFill>
+                  <a:srgbClr val="222222"/>
+                </a:solidFill>
+                <a:latin typeface="Malgun Gothic"/>
+              </a:rPr>
+              <a:t>– 서울의 수요 집적(agglomeration) — 대형로펌·대기업 본사·고부가 자문·상급심(대법원·고법)·금융·정부</a:t>
+            </a:r>
+          </a:p>
+          <a:p>
+            <a:pPr>
+              <a:spcAft>
+                <a:spcPts val="1000"/>
+              </a:spcAft>
+            </a:pPr>
+            <a:r>
+              <a:rPr sz="1900">
+                <a:solidFill>
+                  <a:srgbClr val="222222"/>
+                </a:solidFill>
+                <a:latin typeface="Malgun Gothic"/>
+              </a:rPr>
+              <a:t>• 선행연구(사법정책연구원 등·21번)도 같은 방향 — 시장 유인 약한 곳은 공적 공급으로 메워야</a:t>
+            </a:r>
+          </a:p>
+        </p:txBody>
+      </p:sp>
+      <p:sp>
+        <p:nvSpPr>
+          <p:cNvPr id="6" name="Rounded Rectangle 5"/>
+          <p:cNvSpPr/>
+          <p:nvPr/>
+        </p:nvSpPr>
+        <p:spPr>
+          <a:xfrm>
+            <a:off x="640080" y="5257800"/>
+            <a:ext cx="10881360" cy="777240"/>
+          </a:xfrm>
+          <a:prstGeom prst="roundRect">
+            <a:avLst/>
+          </a:prstGeom>
+          <a:solidFill>
+            <a:srgbClr val="FBEEEC"/>
+          </a:solidFill>
+          <a:ln>
+            <a:solidFill>
+              <a:srgbClr val="C44E52"/>
+            </a:solidFill>
+          </a:ln>
+        </p:spPr>
+        <p:style>
+          <a:lnRef idx="1">
+            <a:schemeClr val="accent1"/>
+          </a:lnRef>
+          <a:fillRef idx="3">
+            <a:schemeClr val="accent1"/>
+          </a:fillRef>
+          <a:effectRef idx="2">
+            <a:schemeClr val="accent1"/>
+          </a:effectRef>
+          <a:fontRef idx="minor">
+            <a:schemeClr val="lt1"/>
+          </a:fontRef>
+        </p:style>
+        <p:txBody>
+          <a:bodyPr rtlCol="0" anchor="ctr" wrap="square"/>
+          <a:lstStyle/>
+          <a:p>
+            <a:pPr algn="ctr"/>
+            <a:r>
+              <a:rPr sz="1400" b="1">
+                <a:solidFill>
+                  <a:srgbClr val="C44E52"/>
+                </a:solidFill>
+                <a:latin typeface="Malgun Gothic"/>
+              </a:rPr>
+              <a:t>⚠️ 검증된 사실이 아니라 '가설' — 검증엔 지역별 법률수요(기업 수·사건 가액) 데이터 필요(향후 과제). 단 함의는 분명: 수요 주도면 '총량 증원'은 무력 → '분포·공적 공급'이 답.</a:t>
             </a:r>
           </a:p>
         </p:txBody>

--- a/reports/발표자료.pptx
+++ b/reports/발표자료.pptx
@@ -8,6 +8,7 @@
     <p:sldId id="256" r:id="rId7"/>
     <p:sldId id="257" r:id="rId8"/>
     <p:sldId id="258" r:id="rId9"/>
+    <p:sldId id="283" r:id="rId34"/>
     <p:sldId id="259" r:id="rId10"/>
     <p:sldId id="260" r:id="rId11"/>
     <p:sldId id="261" r:id="rId12"/>
@@ -6004,7 +6005,7 @@
                 </a:solidFill>
                 <a:latin typeface="Malgun Gothic"/>
               </a:rPr>
-              <a:t>12. 결론 · 정책 시사점</a:t>
+              <a:t>왜 하필 서울인가? — '수요 주도' 가설 (해석)</a:t>
             </a:r>
           </a:p>
         </p:txBody>
@@ -6054,14 +6055,68 @@
       </p:sp>
       <p:sp>
         <p:nvSpPr>
-          <p:cNvPr id="4" name="TextBox 3"/>
+          <p:cNvPr id="4" name="Rounded Rectangle 3"/>
+          <p:cNvSpPr/>
+          <p:nvPr/>
+        </p:nvSpPr>
+        <p:spPr>
+          <a:xfrm>
+            <a:off x="640080" y="1417320"/>
+            <a:ext cx="10881360" cy="822960"/>
+          </a:xfrm>
+          <a:prstGeom prst="roundRect">
+            <a:avLst/>
+          </a:prstGeom>
+          <a:solidFill>
+            <a:srgbClr val="EDF1F7"/>
+          </a:solidFill>
+          <a:ln>
+            <a:solidFill>
+              <a:srgbClr val="1F3A5F"/>
+            </a:solidFill>
+          </a:ln>
+        </p:spPr>
+        <p:style>
+          <a:lnRef idx="1">
+            <a:schemeClr val="accent1"/>
+          </a:lnRef>
+          <a:fillRef idx="3">
+            <a:schemeClr val="accent1"/>
+          </a:fillRef>
+          <a:effectRef idx="2">
+            <a:schemeClr val="accent1"/>
+          </a:effectRef>
+          <a:fontRef idx="minor">
+            <a:schemeClr val="lt1"/>
+          </a:fontRef>
+        </p:style>
+        <p:txBody>
+          <a:bodyPr rtlCol="0" anchor="ctr" wrap="square"/>
+          <a:lstStyle/>
+          <a:p>
+            <a:pPr algn="ctr"/>
+            <a:r>
+              <a:rPr sz="1900" b="1">
+                <a:solidFill>
+                  <a:srgbClr val="1F3A5F"/>
+                </a:solidFill>
+                <a:latin typeface="Malgun Gothic"/>
+              </a:rPr>
+              <a:t>변호사를 3.4배 늘려도 안 흩어졌다(H4) → 변호사는 '공급'이 아니라 '수요(일·돈)'를 따라간다</a:t>
+            </a:r>
+          </a:p>
+        </p:txBody>
+      </p:sp>
+      <p:sp>
+        <p:nvSpPr>
+          <p:cNvPr id="5" name="TextBox 4"/>
           <p:cNvSpPr txBox="1"/>
           <p:nvPr/>
         </p:nvSpPr>
         <p:spPr>
           <a:xfrm>
-            <a:off x="640080" y="1554480"/>
-            <a:ext cx="10972800" cy="4937760"/>
+            <a:off x="640080" y="2514600"/>
+            <a:ext cx="10881360" cy="2834640"/>
           </a:xfrm>
           <a:prstGeom prst="rect">
             <a:avLst/>
@@ -6076,81 +6131,119 @@
           <a:p>
             <a:pPr>
               <a:spcAft>
-                <a:spcPts val="800"/>
+                <a:spcPts val="1000"/>
               </a:spcAft>
             </a:pPr>
             <a:r>
-              <a:rPr sz="2100" b="1">
-                <a:solidFill>
-                  <a:srgbClr val="C44E52"/>
-                </a:solidFill>
-                <a:latin typeface="Malgun Gothic"/>
-              </a:rPr>
-              <a:t>• [헤드라인] 변호사 3.4배 늘려도 서울 쏠림은 심해졌다 (H4)</a:t>
+              <a:rPr sz="1900">
+                <a:solidFill>
+                  <a:srgbClr val="222222"/>
+                </a:solidFill>
+                <a:latin typeface="Malgun Gothic"/>
+              </a:rPr>
+              <a:t>• 공급 주도라면 — 변호사 3배↑면 빈 곳을 메우며 흩어졌어야. 그런데 서울 집중은 오히려 심화</a:t>
+            </a:r>
+          </a:p>
+          <a:p>
+            <a:pPr>
+              <a:spcAft>
+                <a:spcPts val="1000"/>
+              </a:spcAft>
+            </a:pPr>
+            <a:r>
+              <a:rPr sz="1900">
+                <a:solidFill>
+                  <a:srgbClr val="222222"/>
+                </a:solidFill>
+                <a:latin typeface="Malgun Gothic"/>
+              </a:rPr>
+              <a:t>• → demand-pull(수요 견인): 변호사는 일·고객·보수가 있는 곳으로 간다</a:t>
             </a:r>
           </a:p>
           <a:p>
             <a:pPr lvl="1">
               <a:spcAft>
-                <a:spcPts val="800"/>
+                <a:spcPts val="1000"/>
               </a:spcAft>
             </a:pPr>
             <a:r>
-              <a:rPr sz="1600" b="0">
+              <a:rPr sz="1600">
                 <a:solidFill>
                   <a:srgbClr val="222222"/>
                 </a:solidFill>
                 <a:latin typeface="Malgun Gothic"/>
               </a:rPr>
-              <a:t>– 9,612→32,273명인데 서울 비중 71%→76% — 양적 팽창의 실패</a:t>
+              <a:t>– 서울의 수요 집적(agglomeration) — 대형로펌·대기업 본사·고부가 자문·상급심(대법원·고법)·금융·정부</a:t>
             </a:r>
           </a:p>
           <a:p>
             <a:pPr>
               <a:spcAft>
-                <a:spcPts val="800"/>
+                <a:spcPts val="1000"/>
               </a:spcAft>
             </a:pPr>
             <a:r>
-              <a:rPr sz="1900" b="0">
+              <a:rPr sz="1900">
                 <a:solidFill>
                   <a:srgbClr val="222222"/>
                 </a:solidFill>
                 <a:latin typeface="Malgun Gothic"/>
               </a:rPr>
-              <a:t>• 서울 일극 집중이 격차와 가장 강하게 연관 (인천=수도권인데 하위)</a:t>
-            </a:r>
-          </a:p>
-          <a:p>
-            <a:pPr>
-              <a:spcAft>
-                <a:spcPts val="800"/>
-              </a:spcAft>
-            </a:pPr>
-            <a:r>
-              <a:rPr sz="1900" b="0">
-                <a:solidFill>
-                  <a:srgbClr val="222222"/>
-                </a:solidFill>
-                <a:latin typeface="Malgun Gothic"/>
-              </a:rPr>
-              <a:t>• 실질 결과 — 변호사 부족 지역일수록 나홀로소송↑ (재판의 질 문제)</a:t>
-            </a:r>
-          </a:p>
-          <a:p>
-            <a:pPr>
-              <a:spcAft>
-                <a:spcPts val="800"/>
-              </a:spcAft>
-            </a:pPr>
-            <a:r>
-              <a:rPr sz="1900" b="0">
-                <a:solidFill>
-                  <a:srgbClr val="222222"/>
-                </a:solidFill>
-                <a:latin typeface="Malgun Gothic"/>
-              </a:rPr>
-              <a:t>• 처방은 '총량'이 아니라 '분포·공적 공급' (공공변호사·법률구조 배치)</a:t>
+              <a:t>• 선행연구(사법정책연구원 등·21번)도 같은 방향 — 시장 유인 약한 곳은 공적 공급으로 메워야</a:t>
+            </a:r>
+          </a:p>
+        </p:txBody>
+      </p:sp>
+      <p:sp>
+        <p:nvSpPr>
+          <p:cNvPr id="6" name="Rounded Rectangle 5"/>
+          <p:cNvSpPr/>
+          <p:nvPr/>
+        </p:nvSpPr>
+        <p:spPr>
+          <a:xfrm>
+            <a:off x="640080" y="5257800"/>
+            <a:ext cx="10881360" cy="777240"/>
+          </a:xfrm>
+          <a:prstGeom prst="roundRect">
+            <a:avLst/>
+          </a:prstGeom>
+          <a:solidFill>
+            <a:srgbClr val="FBEEEC"/>
+          </a:solidFill>
+          <a:ln>
+            <a:solidFill>
+              <a:srgbClr val="C44E52"/>
+            </a:solidFill>
+          </a:ln>
+        </p:spPr>
+        <p:style>
+          <a:lnRef idx="1">
+            <a:schemeClr val="accent1"/>
+          </a:lnRef>
+          <a:fillRef idx="3">
+            <a:schemeClr val="accent1"/>
+          </a:fillRef>
+          <a:effectRef idx="2">
+            <a:schemeClr val="accent1"/>
+          </a:effectRef>
+          <a:fontRef idx="minor">
+            <a:schemeClr val="lt1"/>
+          </a:fontRef>
+        </p:style>
+        <p:txBody>
+          <a:bodyPr rtlCol="0" anchor="ctr" wrap="square"/>
+          <a:lstStyle/>
+          <a:p>
+            <a:pPr algn="ctr"/>
+            <a:r>
+              <a:rPr sz="1400" b="1">
+                <a:solidFill>
+                  <a:srgbClr val="C44E52"/>
+                </a:solidFill>
+                <a:latin typeface="Malgun Gothic"/>
+              </a:rPr>
+              <a:t>⚠️ 검증된 사실이 아니라 '가설' — 검증엔 지역별 법률수요(기업 수·사건 가액) 데이터 필요(향후 과제). 단 함의는 분명: 수요 주도면 '총량 증원'은 무력 → '분포·공적 공급'이 답.</a:t>
             </a:r>
           </a:p>
         </p:txBody>
@@ -6438,7 +6531,7 @@
                 </a:solidFill>
                 <a:latin typeface="Malgun Gothic"/>
               </a:rPr>
-              <a:t>13. 한계와 향후 과제</a:t>
+              <a:t>12. 결론 · 정책 시사점</a:t>
             </a:r>
           </a:p>
         </p:txBody>
@@ -6510,97 +6603,81 @@
           <a:p>
             <a:pPr>
               <a:spcAft>
-                <a:spcPts val="700"/>
+                <a:spcPts val="800"/>
               </a:spcAft>
             </a:pPr>
             <a:r>
-              <a:rPr sz="1800">
-                <a:solidFill>
-                  <a:srgbClr val="222222"/>
-                </a:solidFill>
-                <a:latin typeface="Malgun Gothic"/>
-              </a:rPr>
-              <a:t>• 검정력 한계 — 17개 시도라 표본 작음 → H1·H3는 방향만(△)</a:t>
+              <a:rPr sz="2100" b="1">
+                <a:solidFill>
+                  <a:srgbClr val="C44E52"/>
+                </a:solidFill>
+                <a:latin typeface="Malgun Gothic"/>
+              </a:rPr>
+              <a:t>• [헤드라인] 변호사 3.4배 늘려도 서울 쏠림은 심해졌다 (H4)</a:t>
             </a:r>
           </a:p>
           <a:p>
             <a:pPr lvl="1">
               <a:spcAft>
-                <a:spcPts val="700"/>
+                <a:spcPts val="800"/>
               </a:spcAft>
             </a:pPr>
             <a:r>
-              <a:rPr sz="1500">
+              <a:rPr sz="1600" b="0">
                 <a:solidFill>
                   <a:srgbClr val="222222"/>
                 </a:solidFill>
                 <a:latin typeface="Malgun Gothic"/>
               </a:rPr>
-              <a:t>– 핵심 기여는 '검정'보다 통합 파이프라인·지수·실질 임팩트 연결</a:t>
+              <a:t>– 9,612→32,273명인데 서울 비중 71%→76% — 양적 팽창의 실패</a:t>
             </a:r>
           </a:p>
           <a:p>
             <a:pPr>
               <a:spcAft>
-                <a:spcPts val="700"/>
+                <a:spcPts val="800"/>
               </a:spcAft>
             </a:pPr>
             <a:r>
-              <a:rPr sz="1800">
+              <a:rPr sz="1900" b="0">
                 <a:solidFill>
                   <a:srgbClr val="222222"/>
                 </a:solidFill>
                 <a:latin typeface="Malgun Gothic"/>
               </a:rPr>
-              <a:t>• 기준 시점 혼합 — 변호사 2026 현재·인구/사건 2024 (완전 일치 X)</a:t>
-            </a:r>
-          </a:p>
-          <a:p>
-            <a:pPr lvl="1">
+              <a:t>• 서울 일극 집중이 격차와 가장 강하게 연관 (인천=수도권인데 하위)</a:t>
+            </a:r>
+          </a:p>
+          <a:p>
+            <a:pPr>
               <a:spcAft>
-                <a:spcPts val="700"/>
+                <a:spcPts val="800"/>
               </a:spcAft>
             </a:pPr>
             <a:r>
-              <a:rPr sz="1500">
+              <a:rPr sz="1900" b="0">
                 <a:solidFill>
                   <a:srgbClr val="222222"/>
                 </a:solidFill>
                 <a:latin typeface="Malgun Gothic"/>
               </a:rPr>
-              <a:t>– H4는 변호사 2시점 비교(추세선 아님) + 법률구조 시계열로 보강</a:t>
+              <a:t>• 실질 결과 — 변호사 부족 지역일수록 나홀로소송↑ (재판의 질 문제)</a:t>
             </a:r>
           </a:p>
           <a:p>
             <a:pPr>
               <a:spcAft>
-                <a:spcPts val="700"/>
+                <a:spcPts val="800"/>
               </a:spcAft>
             </a:pPr>
             <a:r>
-              <a:rPr sz="1800">
+              <a:rPr sz="1900" b="0">
                 <a:solidFill>
                   <a:srgbClr val="222222"/>
                 </a:solidFill>
                 <a:latin typeface="Malgun Gothic"/>
               </a:rPr>
-              <a:t>• 타당성 — LLAI는 1인당 지표라 절대 규모(선택지)와 함께 봐야 (제주 154명)</a:t>
-            </a:r>
-          </a:p>
-          <a:p>
-            <a:pPr>
-              <a:spcAft>
-                <a:spcPts val="700"/>
-              </a:spcAft>
-            </a:pPr>
-            <a:r>
-              <a:rPr sz="1800">
-                <a:solidFill>
-                  <a:srgbClr val="222222"/>
-                </a:solidFill>
-                <a:latin typeface="Malgun Gothic"/>
-              </a:rPr>
-              <a:t>• '빅'데이터 — 양은 중간, 핵심은 다출처 수집·정제·통합(Variety·Veracity)</a:t>
+              <a:t>• 처방은 '총량'이 아니라 '분포·공적 공급' (공공변호사·법률구조 배치)</a:t>
             </a:r>
           </a:p>
         </p:txBody>
@@ -6652,7 +6729,7 @@
                 </a:solidFill>
                 <a:latin typeface="Malgun Gothic"/>
               </a:rPr>
-              <a:t>연구 범위 · 선행연구 차용 여부</a:t>
+              <a:t>13. 한계와 향후 과제</a:t>
             </a:r>
           </a:p>
         </p:txBody>
@@ -6728,13 +6805,29 @@
               </a:spcAft>
             </a:pPr>
             <a:r>
-              <a:rPr sz="1900">
+              <a:rPr sz="1800">
                 <a:solidFill>
                   <a:srgbClr val="222222"/>
                 </a:solidFill>
                 <a:latin typeface="Malgun Gothic"/>
               </a:rPr>
-              <a:t>• [학술 윤리] 타인 연구 복제·표절 없음 — 코드·지수·분석 전부 자체 개발</a:t>
+              <a:t>• 검정력 한계 — 17개 시도라 표본 작음 → H1·H3는 방향만(△)</a:t>
+            </a:r>
+          </a:p>
+          <a:p>
+            <a:pPr lvl="1">
+              <a:spcAft>
+                <a:spcPts val="700"/>
+              </a:spcAft>
+            </a:pPr>
+            <a:r>
+              <a:rPr sz="1500">
+                <a:solidFill>
+                  <a:srgbClr val="222222"/>
+                </a:solidFill>
+                <a:latin typeface="Malgun Gothic"/>
+              </a:rPr>
+              <a:t>– 핵심 기여는 '검정'보다 통합 파이프라인·지수·실질 임팩트 연결</a:t>
             </a:r>
           </a:p>
           <a:p>
@@ -6744,13 +6837,13 @@
               </a:spcAft>
             </a:pPr>
             <a:r>
-              <a:rPr sz="1900">
+              <a:rPr sz="1800">
                 <a:solidFill>
                   <a:srgbClr val="222222"/>
                 </a:solidFill>
                 <a:latin typeface="Malgun Gothic"/>
               </a:rPr>
-              <a:t>• 단, '선행연구가 없다'는 뜻은 아님 — 기존 연구는 분명히 존재</a:t>
+              <a:t>• 기준 시점 혼합 — 변호사 2026 현재·인구/사건 2024 (완전 일치 X)</a:t>
             </a:r>
           </a:p>
           <a:p>
@@ -6760,13 +6853,13 @@
               </a:spcAft>
             </a:pPr>
             <a:r>
-              <a:rPr sz="1600">
+              <a:rPr sz="1500">
                 <a:solidFill>
                   <a:srgbClr val="222222"/>
                 </a:solidFill>
                 <a:latin typeface="Malgun Gothic"/>
               </a:rPr>
-              <a:t>– 사법정책연구원·법률구조공단 보고서, 변호사 정원-접근성 연구(서울대 등)</a:t>
+              <a:t>– H4는 변호사 2시점 비교(추세선 아님) + 법률구조 시계열로 보강</a:t>
             </a:r>
           </a:p>
           <a:p>
@@ -6776,13 +6869,13 @@
               </a:spcAft>
             </a:pPr>
             <a:r>
-              <a:rPr sz="1900">
+              <a:rPr sz="1800">
                 <a:solidFill>
                   <a:srgbClr val="222222"/>
                 </a:solidFill>
                 <a:latin typeface="Malgun Gothic"/>
               </a:rPr>
-              <a:t>• 본 지수의 표준 지표(10만명당 변호사 수)도 기존 연구 관행을 따름</a:t>
+              <a:t>• 타당성 — LLAI는 1인당 지표라 절대 규모(선택지)와 함께 봐야 (제주 154명)</a:t>
             </a:r>
           </a:p>
           <a:p>
@@ -6792,29 +6885,13 @@
               </a:spcAft>
             </a:pPr>
             <a:r>
-              <a:rPr sz="1900">
+              <a:rPr sz="1800">
                 <a:solidFill>
                   <a:srgbClr val="222222"/>
                 </a:solidFill>
                 <a:latin typeface="Malgun Gothic"/>
               </a:rPr>
-              <a:t>• 한계 — 기존 지수와의 정량 벤치마킹은 미수행 (향후 과제)</a:t>
-            </a:r>
-          </a:p>
-          <a:p>
-            <a:pPr>
-              <a:spcAft>
-                <a:spcPts val="700"/>
-              </a:spcAft>
-            </a:pPr>
-            <a:r>
-              <a:rPr sz="1900">
-                <a:solidFill>
-                  <a:srgbClr val="222222"/>
-                </a:solidFill>
-                <a:latin typeface="Malgun Gothic"/>
-              </a:rPr>
-              <a:t>• 외부 차용은 공개 데이터·지도파일뿐, 모두 출처 명시</a:t>
+              <a:t>• '빅'데이터 — 양은 중간, 핵심은 다출처 수집·정제·통합(Variety·Veracity)</a:t>
             </a:r>
           </a:p>
         </p:txBody>
@@ -6828,6 +6905,220 @@
 </file>
 
 <file path=ppt/slides/slide22.xml><?xml version="1.0" encoding="utf-8"?>
+<p:sld xmlns:a="http://schemas.openxmlformats.org/drawingml/2006/main" xmlns:p="http://schemas.openxmlformats.org/presentationml/2006/main" xmlns:r="http://schemas.openxmlformats.org/officeDocument/2006/relationships">
+  <p:cSld>
+    <p:spTree>
+      <p:nvGrpSpPr>
+        <p:cNvPr id="1" name=""/>
+        <p:cNvGrpSpPr/>
+        <p:nvPr/>
+      </p:nvGrpSpPr>
+      <p:grpSpPr/>
+      <p:sp>
+        <p:nvSpPr>
+          <p:cNvPr id="2" name="TextBox 1"/>
+          <p:cNvSpPr txBox="1"/>
+          <p:nvPr/>
+        </p:nvSpPr>
+        <p:spPr>
+          <a:xfrm>
+            <a:off x="502920" y="320040"/>
+            <a:ext cx="11155680" cy="914400"/>
+          </a:xfrm>
+          <a:prstGeom prst="rect">
+            <a:avLst/>
+          </a:prstGeom>
+          <a:noFill/>
+        </p:spPr>
+        <p:txBody>
+          <a:bodyPr wrap="square">
+            <a:spAutoFit/>
+          </a:bodyPr>
+          <a:lstStyle/>
+          <a:p>
+            <a:r>
+              <a:rPr sz="2800" b="1">
+                <a:solidFill>
+                  <a:srgbClr val="1F3A5F"/>
+                </a:solidFill>
+                <a:latin typeface="Malgun Gothic"/>
+              </a:rPr>
+              <a:t>연구 범위 · 선행연구 차용 여부</a:t>
+            </a:r>
+          </a:p>
+        </p:txBody>
+      </p:sp>
+      <p:sp>
+        <p:nvSpPr>
+          <p:cNvPr id="3" name="Rectangle 2"/>
+          <p:cNvSpPr/>
+          <p:nvPr/>
+        </p:nvSpPr>
+        <p:spPr>
+          <a:xfrm>
+            <a:off x="548640" y="1188720"/>
+            <a:ext cx="11064240" cy="38100"/>
+          </a:xfrm>
+          <a:prstGeom prst="rect">
+            <a:avLst/>
+          </a:prstGeom>
+          <a:solidFill>
+            <a:srgbClr val="C44E52"/>
+          </a:solidFill>
+          <a:ln>
+            <a:noFill/>
+          </a:ln>
+        </p:spPr>
+        <p:style>
+          <a:lnRef idx="1">
+            <a:schemeClr val="accent1"/>
+          </a:lnRef>
+          <a:fillRef idx="3">
+            <a:schemeClr val="accent1"/>
+          </a:fillRef>
+          <a:effectRef idx="2">
+            <a:schemeClr val="accent1"/>
+          </a:effectRef>
+          <a:fontRef idx="minor">
+            <a:schemeClr val="lt1"/>
+          </a:fontRef>
+        </p:style>
+        <p:txBody>
+          <a:bodyPr rtlCol="0" anchor="ctr"/>
+          <a:lstStyle/>
+          <a:p>
+            <a:pPr algn="ctr"/>
+          </a:p>
+        </p:txBody>
+      </p:sp>
+      <p:sp>
+        <p:nvSpPr>
+          <p:cNvPr id="4" name="TextBox 3"/>
+          <p:cNvSpPr txBox="1"/>
+          <p:nvPr/>
+        </p:nvSpPr>
+        <p:spPr>
+          <a:xfrm>
+            <a:off x="640080" y="1554480"/>
+            <a:ext cx="10972800" cy="4937760"/>
+          </a:xfrm>
+          <a:prstGeom prst="rect">
+            <a:avLst/>
+          </a:prstGeom>
+          <a:noFill/>
+        </p:spPr>
+        <p:txBody>
+          <a:bodyPr wrap="square">
+            <a:spAutoFit/>
+          </a:bodyPr>
+          <a:lstStyle/>
+          <a:p>
+            <a:pPr>
+              <a:spcAft>
+                <a:spcPts val="700"/>
+              </a:spcAft>
+            </a:pPr>
+            <a:r>
+              <a:rPr sz="1900">
+                <a:solidFill>
+                  <a:srgbClr val="222222"/>
+                </a:solidFill>
+                <a:latin typeface="Malgun Gothic"/>
+              </a:rPr>
+              <a:t>• [학술 윤리] 타인 연구 복제·표절 없음 — 코드·지수·분석 전부 자체 개발</a:t>
+            </a:r>
+          </a:p>
+          <a:p>
+            <a:pPr>
+              <a:spcAft>
+                <a:spcPts val="700"/>
+              </a:spcAft>
+            </a:pPr>
+            <a:r>
+              <a:rPr sz="1900">
+                <a:solidFill>
+                  <a:srgbClr val="222222"/>
+                </a:solidFill>
+                <a:latin typeface="Malgun Gothic"/>
+              </a:rPr>
+              <a:t>• 단, '선행연구가 없다'는 뜻은 아님 — 기존 연구는 분명히 존재</a:t>
+            </a:r>
+          </a:p>
+          <a:p>
+            <a:pPr lvl="1">
+              <a:spcAft>
+                <a:spcPts val="700"/>
+              </a:spcAft>
+            </a:pPr>
+            <a:r>
+              <a:rPr sz="1600">
+                <a:solidFill>
+                  <a:srgbClr val="222222"/>
+                </a:solidFill>
+                <a:latin typeface="Malgun Gothic"/>
+              </a:rPr>
+              <a:t>– 사법정책연구원·법률구조공단 보고서, 변호사 정원-접근성 연구(서울대 등)</a:t>
+            </a:r>
+          </a:p>
+          <a:p>
+            <a:pPr>
+              <a:spcAft>
+                <a:spcPts val="700"/>
+              </a:spcAft>
+            </a:pPr>
+            <a:r>
+              <a:rPr sz="1900">
+                <a:solidFill>
+                  <a:srgbClr val="222222"/>
+                </a:solidFill>
+                <a:latin typeface="Malgun Gothic"/>
+              </a:rPr>
+              <a:t>• 본 지수의 표준 지표(10만명당 변호사 수)도 기존 연구 관행을 따름</a:t>
+            </a:r>
+          </a:p>
+          <a:p>
+            <a:pPr>
+              <a:spcAft>
+                <a:spcPts val="700"/>
+              </a:spcAft>
+            </a:pPr>
+            <a:r>
+              <a:rPr sz="1900">
+                <a:solidFill>
+                  <a:srgbClr val="222222"/>
+                </a:solidFill>
+                <a:latin typeface="Malgun Gothic"/>
+              </a:rPr>
+              <a:t>• 한계 — 기존 지수와의 정량 벤치마킹은 미수행 (향후 과제)</a:t>
+            </a:r>
+          </a:p>
+          <a:p>
+            <a:pPr>
+              <a:spcAft>
+                <a:spcPts val="700"/>
+              </a:spcAft>
+            </a:pPr>
+            <a:r>
+              <a:rPr sz="1900">
+                <a:solidFill>
+                  <a:srgbClr val="222222"/>
+                </a:solidFill>
+                <a:latin typeface="Malgun Gothic"/>
+              </a:rPr>
+              <a:t>• 외부 차용은 공개 데이터·지도파일뿐, 모두 출처 명시</a:t>
+            </a:r>
+          </a:p>
+        </p:txBody>
+      </p:sp>
+    </p:spTree>
+  </p:cSld>
+  <p:clrMapOvr>
+    <a:masterClrMapping/>
+  </p:clrMapOvr>
+</p:sld>
+</file>
+
+<file path=ppt/slides/slide23.xml><?xml version="1.0" encoding="utf-8"?>
 <p:sld xmlns:a="http://schemas.openxmlformats.org/drawingml/2006/main" xmlns:p="http://schemas.openxmlformats.org/presentationml/2006/main" xmlns:r="http://schemas.openxmlformats.org/officeDocument/2006/relationships">
   <p:cSld>
     <p:spTree>
@@ -8134,7 +8425,7 @@
 </p:sld>
 </file>
 
-<file path=ppt/slides/slide23.xml><?xml version="1.0" encoding="utf-8"?>
+<file path=ppt/slides/slide24.xml><?xml version="1.0" encoding="utf-8"?>
 <p:sld xmlns:a="http://schemas.openxmlformats.org/drawingml/2006/main" xmlns:p="http://schemas.openxmlformats.org/presentationml/2006/main" xmlns:r="http://schemas.openxmlformats.org/officeDocument/2006/relationships">
   <p:cSld>
     <p:spTree>
@@ -8348,7 +8639,7 @@
 </p:sld>
 </file>
 
-<file path=ppt/slides/slide24.xml><?xml version="1.0" encoding="utf-8"?>
+<file path=ppt/slides/slide25.xml><?xml version="1.0" encoding="utf-8"?>
 <p:sld xmlns:a="http://schemas.openxmlformats.org/drawingml/2006/main" xmlns:p="http://schemas.openxmlformats.org/presentationml/2006/main" xmlns:r="http://schemas.openxmlformats.org/officeDocument/2006/relationships">
   <p:cSld>
     <p:spTree>
@@ -8823,7 +9114,7 @@
 </p:sld>
 </file>
 
-<file path=ppt/slides/slide25.xml><?xml version="1.0" encoding="utf-8"?>
+<file path=ppt/slides/slide26.xml><?xml version="1.0" encoding="utf-8"?>
 <p:sld xmlns:a="http://schemas.openxmlformats.org/drawingml/2006/main" xmlns:p="http://schemas.openxmlformats.org/presentationml/2006/main" xmlns:r="http://schemas.openxmlformats.org/officeDocument/2006/relationships">
   <p:cSld>
     <p:spTree>
@@ -9391,69 +9682,6 @@
 </p:sld>
 </file>
 
-<file path=ppt/slides/slide26.xml><?xml version="1.0" encoding="utf-8"?>
-<p:sld xmlns:a="http://schemas.openxmlformats.org/drawingml/2006/main" xmlns:p="http://schemas.openxmlformats.org/presentationml/2006/main" xmlns:r="http://schemas.openxmlformats.org/officeDocument/2006/relationships">
-  <p:cSld>
-    <p:spTree>
-      <p:nvGrpSpPr>
-        <p:cNvPr id="1" name=""/>
-        <p:cNvGrpSpPr/>
-        <p:nvPr/>
-      </p:nvGrpSpPr>
-      <p:grpSpPr/>
-      <p:sp>
-        <p:nvSpPr>
-          <p:cNvPr id="2" name="TextBox 1"/>
-          <p:cNvSpPr txBox="1"/>
-          <p:nvPr/>
-        </p:nvSpPr>
-        <p:spPr>
-          <a:xfrm>
-            <a:off x="731520" y="2377440"/>
-            <a:ext cx="10698480" cy="1828800"/>
-          </a:xfrm>
-          <a:prstGeom prst="rect">
-            <a:avLst/>
-          </a:prstGeom>
-          <a:noFill/>
-        </p:spPr>
-        <p:txBody>
-          <a:bodyPr wrap="square">
-            <a:spAutoFit/>
-          </a:bodyPr>
-          <a:lstStyle/>
-          <a:p>
-            <a:r>
-              <a:rPr sz="4000" b="1">
-                <a:solidFill>
-                  <a:srgbClr val="1F3A5F"/>
-                </a:solidFill>
-                <a:latin typeface="Malgun Gothic"/>
-              </a:rPr>
-              <a:t>감사합니다</a:t>
-            </a:r>
-          </a:p>
-          <a:p>
-            <a:r>
-              <a:rPr sz="2000">
-                <a:solidFill>
-                  <a:srgbClr val="C44E52"/>
-                </a:solidFill>
-                <a:latin typeface="Malgun Gothic"/>
-              </a:rPr>
-              <a:t>코드·노트북·인터랙티브 지도: github.com/Allenkeem/llai-project</a:t>
-            </a:r>
-          </a:p>
-        </p:txBody>
-      </p:sp>
-    </p:spTree>
-  </p:cSld>
-  <p:clrMapOvr>
-    <a:masterClrMapping/>
-  </p:clrMapOvr>
-</p:sld>
-</file>
-
 <file path=ppt/slides/slide27.xml><?xml version="1.0" encoding="utf-8"?>
 <p:sld xmlns:a="http://schemas.openxmlformats.org/drawingml/2006/main" xmlns:p="http://schemas.openxmlformats.org/presentationml/2006/main" xmlns:r="http://schemas.openxmlformats.org/officeDocument/2006/relationships">
   <p:cSld>
@@ -9472,8 +9700,8 @@
         </p:nvSpPr>
         <p:spPr>
           <a:xfrm>
-            <a:off x="502920" y="320040"/>
-            <a:ext cx="11155680" cy="914400"/>
+            <a:off x="731520" y="2377440"/>
+            <a:ext cx="10698480" cy="1828800"/>
           </a:xfrm>
           <a:prstGeom prst="rect">
             <a:avLst/>
@@ -9487,13 +9715,76 @@
           <a:lstStyle/>
           <a:p>
             <a:r>
+              <a:rPr sz="4000" b="1">
+                <a:solidFill>
+                  <a:srgbClr val="1F3A5F"/>
+                </a:solidFill>
+                <a:latin typeface="Malgun Gothic"/>
+              </a:rPr>
+              <a:t>감사합니다</a:t>
+            </a:r>
+          </a:p>
+          <a:p>
+            <a:r>
+              <a:rPr sz="2000">
+                <a:solidFill>
+                  <a:srgbClr val="C44E52"/>
+                </a:solidFill>
+                <a:latin typeface="Malgun Gothic"/>
+              </a:rPr>
+              <a:t>코드·노트북·인터랙티브 지도: github.com/Allenkeem/llai-project</a:t>
+            </a:r>
+          </a:p>
+        </p:txBody>
+      </p:sp>
+    </p:spTree>
+  </p:cSld>
+  <p:clrMapOvr>
+    <a:masterClrMapping/>
+  </p:clrMapOvr>
+</p:sld>
+</file>
+
+<file path=ppt/slides/slide28.xml><?xml version="1.0" encoding="utf-8"?>
+<p:sld xmlns:a="http://schemas.openxmlformats.org/drawingml/2006/main" xmlns:p="http://schemas.openxmlformats.org/presentationml/2006/main" xmlns:r="http://schemas.openxmlformats.org/officeDocument/2006/relationships">
+  <p:cSld>
+    <p:spTree>
+      <p:nvGrpSpPr>
+        <p:cNvPr id="1" name=""/>
+        <p:cNvGrpSpPr/>
+        <p:nvPr/>
+      </p:nvGrpSpPr>
+      <p:grpSpPr/>
+      <p:sp>
+        <p:nvSpPr>
+          <p:cNvPr id="2" name="TextBox 1"/>
+          <p:cNvSpPr txBox="1"/>
+          <p:nvPr/>
+        </p:nvSpPr>
+        <p:spPr>
+          <a:xfrm>
+            <a:off x="502920" y="320040"/>
+            <a:ext cx="11155680" cy="914400"/>
+          </a:xfrm>
+          <a:prstGeom prst="rect">
+            <a:avLst/>
+          </a:prstGeom>
+          <a:noFill/>
+        </p:spPr>
+        <p:txBody>
+          <a:bodyPr wrap="none">
+            <a:spAutoFit/>
+          </a:bodyPr>
+          <a:lstStyle/>
+          <a:p>
+            <a:r>
               <a:rPr sz="2800" b="1">
                 <a:solidFill>
                   <a:srgbClr val="1F3A5F"/>
                 </a:solidFill>
                 <a:latin typeface="Malgun Gothic"/>
               </a:rPr>
-              <a:t>왜 하필 서울인가? — '수요 주도' 가설 (해석)</a:t>
+              <a:t>연구 가설 — H1~H4</a:t>
             </a:r>
           </a:p>
         </p:txBody>
@@ -9543,68 +9834,14 @@
       </p:sp>
       <p:sp>
         <p:nvSpPr>
-          <p:cNvPr id="4" name="Rounded Rectangle 3"/>
-          <p:cNvSpPr/>
-          <p:nvPr/>
-        </p:nvSpPr>
-        <p:spPr>
-          <a:xfrm>
-            <a:off x="640080" y="1417320"/>
-            <a:ext cx="10881360" cy="822960"/>
-          </a:xfrm>
-          <a:prstGeom prst="roundRect">
-            <a:avLst/>
-          </a:prstGeom>
-          <a:solidFill>
-            <a:srgbClr val="EDF1F7"/>
-          </a:solidFill>
-          <a:ln>
-            <a:solidFill>
-              <a:srgbClr val="1F3A5F"/>
-            </a:solidFill>
-          </a:ln>
-        </p:spPr>
-        <p:style>
-          <a:lnRef idx="1">
-            <a:schemeClr val="accent1"/>
-          </a:lnRef>
-          <a:fillRef idx="3">
-            <a:schemeClr val="accent1"/>
-          </a:fillRef>
-          <a:effectRef idx="2">
-            <a:schemeClr val="accent1"/>
-          </a:effectRef>
-          <a:fontRef idx="minor">
-            <a:schemeClr val="lt1"/>
-          </a:fontRef>
-        </p:style>
-        <p:txBody>
-          <a:bodyPr rtlCol="0" anchor="ctr" wrap="square"/>
-          <a:lstStyle/>
-          <a:p>
-            <a:pPr algn="ctr"/>
-            <a:r>
-              <a:rPr sz="1900" b="1">
-                <a:solidFill>
-                  <a:srgbClr val="1F3A5F"/>
-                </a:solidFill>
-                <a:latin typeface="Malgun Gothic"/>
-              </a:rPr>
-              <a:t>변호사를 3.4배 늘려도 안 흩어졌다(H4) → 변호사는 '공급'이 아니라 '수요(일·돈)'를 따라간다</a:t>
-            </a:r>
-          </a:p>
-        </p:txBody>
-      </p:sp>
-      <p:sp>
-        <p:nvSpPr>
-          <p:cNvPr id="5" name="TextBox 4"/>
+          <p:cNvPr id="4" name="TextBox 3"/>
           <p:cNvSpPr txBox="1"/>
           <p:nvPr/>
         </p:nvSpPr>
         <p:spPr>
           <a:xfrm>
-            <a:off x="640080" y="2514600"/>
-            <a:ext cx="10881360" cy="2834640"/>
+            <a:off x="548640" y="1280160"/>
+            <a:ext cx="10972800" cy="411480"/>
           </a:xfrm>
           <a:prstGeom prst="rect">
             <a:avLst/>
@@ -9612,126 +9849,387 @@
           <a:noFill/>
         </p:spPr>
         <p:txBody>
+          <a:bodyPr wrap="none">
+            <a:spAutoFit/>
+          </a:bodyPr>
+          <a:lstStyle/>
+          <a:p>
+            <a:r>
+              <a:rPr sz="1400" i="1">
+                <a:solidFill>
+                  <a:srgbClr val="555555"/>
+                </a:solidFill>
+                <a:latin typeface="Malgun Gothic"/>
+              </a:rPr>
+              <a:t>연구 질문을 검증 가능한 평서문 4개로 — 각 결과는 뒤(가설 검정)에서 다룸</a:t>
+            </a:r>
+          </a:p>
+        </p:txBody>
+      </p:sp>
+      <p:graphicFrame>
+        <p:nvGraphicFramePr>
+          <p:cNvPr id="5" name="Table 4"/>
+          <p:cNvGraphicFramePr>
+            <a:graphicFrameLocks noGrp="1"/>
+          </p:cNvGraphicFramePr>
+          <p:nvPr/>
+        </p:nvGraphicFramePr>
+        <p:xfrm>
+          <a:off x="640080" y="1965960"/>
+          <a:ext cx="10881360" cy="3566160"/>
+        </p:xfrm>
+        <a:graphic>
+          <a:graphicData uri="http://schemas.openxmlformats.org/drawingml/2006/table">
+            <a:tbl>
+              <a:tblPr firstRow="1" bandRow="1">
+                <a:tableStyleId>{5C22544A-7EE6-4342-B048-85BDC9FD1C3A}</a:tableStyleId>
+              </a:tblPr>
+              <a:tblGrid>
+                <a:gridCol w="1188720"/>
+                <a:gridCol w="7680960"/>
+                <a:gridCol w="2011680"/>
+              </a:tblGrid>
+              <a:tr h="713232">
+                <a:tc>
+                  <a:txBody>
+                    <a:bodyPr/>
+                    <a:lstStyle/>
+                    <a:p>
+                      <a:pPr algn="ctr"/>
+                      <a:r>
+                        <a:rPr sz="1700" b="1">
+                          <a:solidFill>
+                            <a:srgbClr val="FFFFFF"/>
+                          </a:solidFill>
+                          <a:latin typeface="Malgun Gothic"/>
+                        </a:rPr>
+                        <a:t>가설</a:t>
+                      </a:r>
+                    </a:p>
+                  </a:txBody>
+                  <a:tcPr anchor="ctr">
+                    <a:solidFill>
+                      <a:srgbClr val="1F3A5F"/>
+                    </a:solidFill>
+                  </a:tcPr>
+                </a:tc>
+                <a:tc>
+                  <a:txBody>
+                    <a:bodyPr/>
+                    <a:lstStyle/>
+                    <a:p>
+                      <a:pPr algn="l"/>
+                      <a:r>
+                        <a:rPr sz="1600" b="1">
+                          <a:solidFill>
+                            <a:srgbClr val="FFFFFF"/>
+                          </a:solidFill>
+                          <a:latin typeface="Malgun Gothic"/>
+                        </a:rPr>
+                        <a:t>내용 (검증 가능한 평서문)</a:t>
+                      </a:r>
+                    </a:p>
+                  </a:txBody>
+                  <a:tcPr anchor="ctr">
+                    <a:solidFill>
+                      <a:srgbClr val="1F3A5F"/>
+                    </a:solidFill>
+                  </a:tcPr>
+                </a:tc>
+                <a:tc>
+                  <a:txBody>
+                    <a:bodyPr/>
+                    <a:lstStyle/>
+                    <a:p>
+                      <a:pPr algn="ctr"/>
+                      <a:r>
+                        <a:rPr sz="1700" b="1">
+                          <a:solidFill>
+                            <a:srgbClr val="FFFFFF"/>
+                          </a:solidFill>
+                          <a:latin typeface="Malgun Gothic"/>
+                        </a:rPr>
+                        <a:t>결과</a:t>
+                      </a:r>
+                    </a:p>
+                  </a:txBody>
+                  <a:tcPr anchor="ctr">
+                    <a:solidFill>
+                      <a:srgbClr val="1F3A5F"/>
+                    </a:solidFill>
+                  </a:tcPr>
+                </a:tc>
+              </a:tr>
+              <a:tr h="713232">
+                <a:tc>
+                  <a:txBody>
+                    <a:bodyPr/>
+                    <a:lstStyle/>
+                    <a:p>
+                      <a:pPr algn="ctr"/>
+                      <a:r>
+                        <a:rPr sz="1700" b="1">
+                          <a:solidFill>
+                            <a:srgbClr val="1F3A5F"/>
+                          </a:solidFill>
+                          <a:latin typeface="Malgun Gothic"/>
+                        </a:rPr>
+                        <a:t>H1</a:t>
+                      </a:r>
+                    </a:p>
+                  </a:txBody>
+                  <a:tcPr anchor="ctr"/>
+                </a:tc>
+                <a:tc>
+                  <a:txBody>
+                    <a:bodyPr/>
+                    <a:lstStyle/>
+                    <a:p>
+                      <a:pPr algn="l"/>
+                      <a:r>
+                        <a:rPr sz="1600">
+                          <a:solidFill>
+                            <a:srgbClr val="222222"/>
+                          </a:solidFill>
+                          <a:latin typeface="Malgun Gothic"/>
+                        </a:rPr>
+                        <a:t>수도권(서울·경기·인천)이 비수도권보다 법률 접근성이 높다</a:t>
+                      </a:r>
+                    </a:p>
+                  </a:txBody>
+                  <a:tcPr anchor="ctr"/>
+                </a:tc>
+                <a:tc>
+                  <a:txBody>
+                    <a:bodyPr/>
+                    <a:lstStyle/>
+                    <a:p>
+                      <a:pPr algn="ctr"/>
+                      <a:r>
+                        <a:rPr sz="1700" b="1">
+                          <a:solidFill>
+                            <a:srgbClr val="555555"/>
+                          </a:solidFill>
+                          <a:latin typeface="Malgun Gothic"/>
+                        </a:rPr>
+                        <a:t>△ 부분</a:t>
+                      </a:r>
+                    </a:p>
+                  </a:txBody>
+                  <a:tcPr anchor="ctr"/>
+                </a:tc>
+              </a:tr>
+              <a:tr h="713232">
+                <a:tc>
+                  <a:txBody>
+                    <a:bodyPr/>
+                    <a:lstStyle/>
+                    <a:p>
+                      <a:pPr algn="ctr"/>
+                      <a:r>
+                        <a:rPr sz="1700" b="1">
+                          <a:solidFill>
+                            <a:srgbClr val="1F3A5F"/>
+                          </a:solidFill>
+                          <a:latin typeface="Malgun Gothic"/>
+                        </a:rPr>
+                        <a:t>H2</a:t>
+                      </a:r>
+                    </a:p>
+                  </a:txBody>
+                  <a:tcPr anchor="ctr"/>
+                </a:tc>
+                <a:tc>
+                  <a:txBody>
+                    <a:bodyPr/>
+                    <a:lstStyle/>
+                    <a:p>
+                      <a:pPr algn="l"/>
+                      <a:r>
+                        <a:rPr sz="1600">
+                          <a:solidFill>
+                            <a:srgbClr val="222222"/>
+                          </a:solidFill>
+                          <a:latin typeface="Malgun Gothic"/>
+                        </a:rPr>
+                        <a:t>변호사가 많은 지역일수록 1인당 사건부담이 낮다 (덜 바쁘다)</a:t>
+                      </a:r>
+                    </a:p>
+                  </a:txBody>
+                  <a:tcPr anchor="ctr"/>
+                </a:tc>
+                <a:tc>
+                  <a:txBody>
+                    <a:bodyPr/>
+                    <a:lstStyle/>
+                    <a:p>
+                      <a:pPr algn="ctr"/>
+                      <a:r>
+                        <a:rPr sz="1700" b="1">
+                          <a:solidFill>
+                            <a:srgbClr val="2E7D32"/>
+                          </a:solidFill>
+                          <a:latin typeface="Malgun Gothic"/>
+                        </a:rPr>
+                        <a:t>✅ 지지</a:t>
+                      </a:r>
+                    </a:p>
+                  </a:txBody>
+                  <a:tcPr anchor="ctr"/>
+                </a:tc>
+              </a:tr>
+              <a:tr h="713232">
+                <a:tc>
+                  <a:txBody>
+                    <a:bodyPr/>
+                    <a:lstStyle/>
+                    <a:p>
+                      <a:pPr algn="ctr"/>
+                      <a:r>
+                        <a:rPr sz="1700" b="1">
+                          <a:solidFill>
+                            <a:srgbClr val="1F3A5F"/>
+                          </a:solidFill>
+                          <a:latin typeface="Malgun Gothic"/>
+                        </a:rPr>
+                        <a:t>H3</a:t>
+                      </a:r>
+                    </a:p>
+                  </a:txBody>
+                  <a:tcPr anchor="ctr"/>
+                </a:tc>
+                <a:tc>
+                  <a:txBody>
+                    <a:bodyPr/>
+                    <a:lstStyle/>
+                    <a:p>
+                      <a:pPr algn="l"/>
+                      <a:r>
+                        <a:rPr sz="1600">
+                          <a:solidFill>
+                            <a:srgbClr val="222222"/>
+                          </a:solidFill>
+                          <a:latin typeface="Malgun Gothic"/>
+                        </a:rPr>
+                        <a:t>지역 소득(GRDP)이 높을수록 법률 접근성이 높다</a:t>
+                      </a:r>
+                    </a:p>
+                  </a:txBody>
+                  <a:tcPr anchor="ctr"/>
+                </a:tc>
+                <a:tc>
+                  <a:txBody>
+                    <a:bodyPr/>
+                    <a:lstStyle/>
+                    <a:p>
+                      <a:pPr algn="ctr"/>
+                      <a:r>
+                        <a:rPr sz="1700" b="1">
+                          <a:solidFill>
+                            <a:srgbClr val="555555"/>
+                          </a:solidFill>
+                          <a:latin typeface="Malgun Gothic"/>
+                        </a:rPr>
+                        <a:t>△ 약함</a:t>
+                      </a:r>
+                    </a:p>
+                  </a:txBody>
+                  <a:tcPr anchor="ctr"/>
+                </a:tc>
+              </a:tr>
+              <a:tr h="713232">
+                <a:tc>
+                  <a:txBody>
+                    <a:bodyPr/>
+                    <a:lstStyle/>
+                    <a:p>
+                      <a:pPr algn="ctr"/>
+                      <a:r>
+                        <a:rPr sz="1700" b="1">
+                          <a:solidFill>
+                            <a:srgbClr val="1F3A5F"/>
+                          </a:solidFill>
+                          <a:latin typeface="Malgun Gothic"/>
+                        </a:rPr>
+                        <a:t>H4</a:t>
+                      </a:r>
+                    </a:p>
+                  </a:txBody>
+                  <a:tcPr anchor="ctr"/>
+                </a:tc>
+                <a:tc>
+                  <a:txBody>
+                    <a:bodyPr/>
+                    <a:lstStyle/>
+                    <a:p>
+                      <a:pPr algn="l"/>
+                      <a:r>
+                        <a:rPr sz="1600">
+                          <a:solidFill>
+                            <a:srgbClr val="222222"/>
+                          </a:solidFill>
+                          <a:latin typeface="Malgun Gothic"/>
+                        </a:rPr>
+                        <a:t>변호사를 늘려도 지역 격차(서울 쏠림)는 줄지 않는다   ★</a:t>
+                      </a:r>
+                    </a:p>
+                  </a:txBody>
+                  <a:tcPr anchor="ctr"/>
+                </a:tc>
+                <a:tc>
+                  <a:txBody>
+                    <a:bodyPr/>
+                    <a:lstStyle/>
+                    <a:p>
+                      <a:pPr algn="ctr"/>
+                      <a:r>
+                        <a:rPr sz="1700" b="1">
+                          <a:solidFill>
+                            <a:srgbClr val="2E7D32"/>
+                          </a:solidFill>
+                          <a:latin typeface="Malgun Gothic"/>
+                        </a:rPr>
+                        <a:t>✅ 지지</a:t>
+                      </a:r>
+                    </a:p>
+                  </a:txBody>
+                  <a:tcPr anchor="ctr"/>
+                </a:tc>
+              </a:tr>
+            </a:tbl>
+          </a:graphicData>
+        </a:graphic>
+      </p:graphicFrame>
+      <p:sp>
+        <p:nvSpPr>
+          <p:cNvPr id="6" name="TextBox 5"/>
+          <p:cNvSpPr txBox="1"/>
+          <p:nvPr/>
+        </p:nvSpPr>
+        <p:spPr>
+          <a:xfrm>
+            <a:off x="640080" y="5715000"/>
+            <a:ext cx="10881360" cy="640080"/>
+          </a:xfrm>
+          <a:prstGeom prst="rect">
+            <a:avLst/>
+          </a:prstGeom>
+          <a:noFill/>
+        </p:spPr>
+        <p:txBody>
           <a:bodyPr wrap="square">
             <a:spAutoFit/>
           </a:bodyPr>
           <a:lstStyle/>
           <a:p>
-            <a:pPr>
-              <a:spcAft>
-                <a:spcPts val="1000"/>
-              </a:spcAft>
-            </a:pPr>
-            <a:r>
-              <a:rPr sz="1900">
-                <a:solidFill>
-                  <a:srgbClr val="222222"/>
-                </a:solidFill>
-                <a:latin typeface="Malgun Gothic"/>
-              </a:rPr>
-              <a:t>• 공급 주도라면 — 변호사 3배↑면 빈 곳을 메우며 흩어졌어야. 그런데 서울 집중은 오히려 심화</a:t>
-            </a:r>
-          </a:p>
-          <a:p>
-            <a:pPr>
-              <a:spcAft>
-                <a:spcPts val="1000"/>
-              </a:spcAft>
-            </a:pPr>
-            <a:r>
-              <a:rPr sz="1900">
-                <a:solidFill>
-                  <a:srgbClr val="222222"/>
-                </a:solidFill>
-                <a:latin typeface="Malgun Gothic"/>
-              </a:rPr>
-              <a:t>• → demand-pull(수요 견인): 변호사는 일·고객·보수가 있는 곳으로 간다</a:t>
-            </a:r>
-          </a:p>
-          <a:p>
-            <a:pPr lvl="1">
-              <a:spcAft>
-                <a:spcPts val="1000"/>
-              </a:spcAft>
-            </a:pPr>
-            <a:r>
-              <a:rPr sz="1600">
-                <a:solidFill>
-                  <a:srgbClr val="222222"/>
-                </a:solidFill>
-                <a:latin typeface="Malgun Gothic"/>
-              </a:rPr>
-              <a:t>– 서울의 수요 집적(agglomeration) — 대형로펌·대기업 본사·고부가 자문·상급심(대법원·고법)·금융·정부</a:t>
-            </a:r>
-          </a:p>
-          <a:p>
-            <a:pPr>
-              <a:spcAft>
-                <a:spcPts val="1000"/>
-              </a:spcAft>
-            </a:pPr>
-            <a:r>
-              <a:rPr sz="1900">
-                <a:solidFill>
-                  <a:srgbClr val="222222"/>
-                </a:solidFill>
-                <a:latin typeface="Malgun Gothic"/>
-              </a:rPr>
-              <a:t>• 선행연구(사법정책연구원 등·21번)도 같은 방향 — 시장 유인 약한 곳은 공적 공급으로 메워야</a:t>
-            </a:r>
-          </a:p>
-        </p:txBody>
-      </p:sp>
-      <p:sp>
-        <p:nvSpPr>
-          <p:cNvPr id="6" name="Rounded Rectangle 5"/>
-          <p:cNvSpPr/>
-          <p:nvPr/>
-        </p:nvSpPr>
-        <p:spPr>
-          <a:xfrm>
-            <a:off x="640080" y="5257800"/>
-            <a:ext cx="10881360" cy="777240"/>
-          </a:xfrm>
-          <a:prstGeom prst="roundRect">
-            <a:avLst/>
-          </a:prstGeom>
-          <a:solidFill>
-            <a:srgbClr val="FBEEEC"/>
-          </a:solidFill>
-          <a:ln>
-            <a:solidFill>
-              <a:srgbClr val="C44E52"/>
-            </a:solidFill>
-          </a:ln>
-        </p:spPr>
-        <p:style>
-          <a:lnRef idx="1">
-            <a:schemeClr val="accent1"/>
-          </a:lnRef>
-          <a:fillRef idx="3">
-            <a:schemeClr val="accent1"/>
-          </a:fillRef>
-          <a:effectRef idx="2">
-            <a:schemeClr val="accent1"/>
-          </a:effectRef>
-          <a:fontRef idx="minor">
-            <a:schemeClr val="lt1"/>
-          </a:fontRef>
-        </p:style>
-        <p:txBody>
-          <a:bodyPr rtlCol="0" anchor="ctr" wrap="square"/>
-          <a:lstStyle/>
-          <a:p>
-            <a:pPr algn="ctr"/>
-            <a:r>
-              <a:rPr sz="1400" b="1">
-                <a:solidFill>
-                  <a:srgbClr val="C44E52"/>
-                </a:solidFill>
-                <a:latin typeface="Malgun Gothic"/>
-              </a:rPr>
-              <a:t>⚠️ 검증된 사실이 아니라 '가설' — 검증엔 지역별 법률수요(기업 수·사건 가액) 데이터 필요(향후 과제). 단 함의는 분명: 수요 주도면 '총량 증원'은 무력 → '분포·공적 공급'이 답.</a:t>
+            <a:r>
+              <a:rPr sz="1400" i="1">
+                <a:solidFill>
+                  <a:srgbClr val="555555"/>
+                </a:solidFill>
+                <a:latin typeface="Malgun Gothic"/>
+              </a:rPr>
+              <a:t>★ H4가 핵심 발견. H1·H3는 결국 약한 결과지만, null(아니더라)도 정직하게 보고한다.</a:t>
             </a:r>
           </a:p>
         </p:txBody>

--- a/reports/발표자료.pptx
+++ b/reports/발표자료.pptx
@@ -22,8 +22,8 @@
     <p:sldId id="269" r:id="rId20"/>
     <p:sldId id="270" r:id="rId21"/>
     <p:sldId id="271" r:id="rId22"/>
+    <p:sldId id="272" r:id="rId23"/>
     <p:sldId id="280" r:id="rId31"/>
-    <p:sldId id="272" r:id="rId23"/>
     <p:sldId id="282" r:id="rId33"/>
     <p:sldId id="273" r:id="rId24"/>
     <p:sldId id="274" r:id="rId25"/>
@@ -3220,8 +3220,8 @@
         </p:nvSpPr>
         <p:spPr>
           <a:xfrm>
-            <a:off x="502920" y="274320"/>
-            <a:ext cx="11155680" cy="822960"/>
+            <a:off x="502920" y="320040"/>
+            <a:ext cx="11155680" cy="914400"/>
           </a:xfrm>
           <a:prstGeom prst="rect">
             <a:avLst/>
@@ -3229,19 +3229,19 @@
           <a:noFill/>
         </p:spPr>
         <p:txBody>
-          <a:bodyPr wrap="none">
+          <a:bodyPr wrap="square">
             <a:spAutoFit/>
           </a:bodyPr>
           <a:lstStyle/>
           <a:p>
             <a:r>
-              <a:rPr sz="2600" b="1">
+              <a:rPr sz="2800" b="1">
                 <a:solidFill>
                   <a:srgbClr val="1F3A5F"/>
                 </a:solidFill>
                 <a:latin typeface="Malgun Gothic"/>
               </a:rPr>
-              <a:t>분석 기법 — 무엇이 들어가 무엇이 나왔나 (방법 → 결과)</a:t>
+              <a:t>점수는 어떻게 나오나 — 예시</a:t>
             </a:r>
           </a:p>
         </p:txBody>
@@ -3254,7 +3254,7 @@
         </p:nvSpPr>
         <p:spPr>
           <a:xfrm>
-            <a:off x="548640" y="1078992"/>
+            <a:off x="548640" y="1188720"/>
             <a:ext cx="11064240" cy="38100"/>
           </a:xfrm>
           <a:prstGeom prst="rect">
@@ -3297,8 +3297,8 @@
         </p:nvSpPr>
         <p:spPr>
           <a:xfrm>
-            <a:off x="548640" y="1143000"/>
-            <a:ext cx="10972800" cy="365760"/>
+            <a:off x="640080" y="1508760"/>
+            <a:ext cx="10972800" cy="4937760"/>
           </a:xfrm>
           <a:prstGeom prst="rect">
             <a:avLst/>
@@ -3311,648 +3311,359 @@
           </a:bodyPr>
           <a:lstStyle/>
           <a:p>
-            <a:pPr algn="l"/>
-            <a:r>
-              <a:rPr sz="1200" i="1">
-                <a:solidFill>
-                  <a:srgbClr val="555555"/>
-                </a:solidFill>
-                <a:latin typeface="Malgun Gothic"/>
-              </a:rPr>
-              <a:t>회색 = 입력 · 보라 = LLAI 만드는 과정 · 청록 = 거기서 뽑은 결과(+슬라이드)</a:t>
-            </a:r>
-          </a:p>
-        </p:txBody>
-      </p:sp>
-      <p:sp>
-        <p:nvSpPr>
-          <p:cNvPr id="5" name="Rounded Rectangle 4"/>
-          <p:cNvSpPr/>
+            <a:pPr>
+              <a:spcAft>
+                <a:spcPts val="800"/>
+              </a:spcAft>
+            </a:pPr>
+            <a:r>
+              <a:rPr sz="1900" b="0">
+                <a:solidFill>
+                  <a:srgbClr val="222222"/>
+                </a:solidFill>
+                <a:latin typeface="Malgun Gothic"/>
+              </a:rPr>
+              <a:t>• 각 지표를 0~1로 환산(1=전국 최고, 0=최저) → 가중치만큼 섞어 ×100</a:t>
+            </a:r>
+          </a:p>
+          <a:p>
+            <a:pPr>
+              <a:spcAft>
+                <a:spcPts val="800"/>
+              </a:spcAft>
+            </a:pPr>
+            <a:r>
+              <a:rPr sz="1800" b="1">
+                <a:solidFill>
+                  <a:srgbClr val="222222"/>
+                </a:solidFill>
+                <a:latin typeface="Malgun Gothic"/>
+              </a:rPr>
+              <a:t>• 가중치 = 변호사 0.69 · 안 바쁨 0.14 · 약자지원 0.17 (엔트로피)</a:t>
+            </a:r>
+          </a:p>
+        </p:txBody>
+      </p:sp>
+      <p:graphicFrame>
+        <p:nvGraphicFramePr>
+          <p:cNvPr id="5" name="Table 4"/>
+          <p:cNvGraphicFramePr>
+            <a:graphicFrameLocks noGrp="1"/>
+          </p:cNvGraphicFramePr>
           <p:nvPr/>
-        </p:nvSpPr>
-        <p:spPr>
-          <a:xfrm>
-            <a:off x="4448556" y="1508760"/>
-            <a:ext cx="3291840" cy="749808"/>
-          </a:xfrm>
-          <a:prstGeom prst="roundRect">
-            <a:avLst/>
-          </a:prstGeom>
-          <a:solidFill>
-            <a:srgbClr val="ECEAE3"/>
-          </a:solidFill>
-          <a:ln w="12700">
-            <a:solidFill>
-              <a:srgbClr val="88909A"/>
-            </a:solidFill>
-          </a:ln>
-        </p:spPr>
-        <p:style>
-          <a:lnRef idx="1">
-            <a:schemeClr val="accent1"/>
-          </a:lnRef>
-          <a:fillRef idx="3">
-            <a:schemeClr val="accent1"/>
-          </a:fillRef>
-          <a:effectRef idx="2">
-            <a:schemeClr val="accent1"/>
-          </a:effectRef>
-          <a:fontRef idx="minor">
-            <a:schemeClr val="lt1"/>
-          </a:fontRef>
-        </p:style>
-        <p:txBody>
-          <a:bodyPr rtlCol="0" anchor="ctr" wrap="square"/>
-          <a:lstStyle/>
-          <a:p>
-            <a:pPr algn="ctr"/>
-            <a:r>
-              <a:rPr sz="1500" b="1">
-                <a:solidFill>
-                  <a:srgbClr val="3A3730"/>
-                </a:solidFill>
-                <a:latin typeface="Malgun Gothic"/>
-              </a:rPr>
-              <a:t>3개 지표</a:t>
-            </a:r>
-          </a:p>
-          <a:p>
-            <a:pPr algn="ctr"/>
-            <a:r>
-              <a:rPr sz="1100">
-                <a:solidFill>
-                  <a:srgbClr val="555555"/>
-                </a:solidFill>
-                <a:latin typeface="Malgun Gothic"/>
-              </a:rPr>
-              <a:t>변호사 · 사건부담 · 취약계층</a:t>
-            </a:r>
-          </a:p>
-        </p:txBody>
-      </p:sp>
-      <p:cxnSp>
-        <p:nvCxnSpPr>
-          <p:cNvPr id="6" name="Connector 5"/>
-          <p:cNvCxnSpPr/>
-          <p:nvPr/>
-        </p:nvCxnSpPr>
-        <p:spPr>
-          <a:xfrm>
-            <a:off x="6094476" y="2258568"/>
-            <a:ext cx="0" cy="283464"/>
-          </a:xfrm>
-          <a:prstGeom prst="line">
-            <a:avLst/>
-          </a:prstGeom>
-          <a:ln w="19050">
-            <a:solidFill>
-              <a:srgbClr val="88909A"/>
-            </a:solidFill>
-          </a:ln>
-        </p:spPr>
-        <p:style>
-          <a:lnRef idx="2">
-            <a:schemeClr val="accent1"/>
-          </a:lnRef>
-          <a:fillRef idx="0">
-            <a:schemeClr val="accent1"/>
-          </a:fillRef>
-          <a:effectRef idx="1">
-            <a:schemeClr val="accent1"/>
-          </a:effectRef>
-          <a:fontRef idx="minor">
-            <a:schemeClr val="tx1"/>
-          </a:fontRef>
-        </p:style>
-      </p:cxnSp>
-      <p:sp>
-        <p:nvSpPr>
-          <p:cNvPr id="7" name="Rounded Rectangle 6"/>
-          <p:cNvSpPr/>
-          <p:nvPr/>
-        </p:nvSpPr>
-        <p:spPr>
-          <a:xfrm>
-            <a:off x="4448556" y="2542032"/>
-            <a:ext cx="3291840" cy="749808"/>
-          </a:xfrm>
-          <a:prstGeom prst="roundRect">
-            <a:avLst/>
-          </a:prstGeom>
-          <a:solidFill>
-            <a:srgbClr val="E2E0F6"/>
-          </a:solidFill>
-          <a:ln w="12700">
-            <a:solidFill>
-              <a:srgbClr val="88909A"/>
-            </a:solidFill>
-          </a:ln>
-        </p:spPr>
-        <p:style>
-          <a:lnRef idx="1">
-            <a:schemeClr val="accent1"/>
-          </a:lnRef>
-          <a:fillRef idx="3">
-            <a:schemeClr val="accent1"/>
-          </a:fillRef>
-          <a:effectRef idx="2">
-            <a:schemeClr val="accent1"/>
-          </a:effectRef>
-          <a:fontRef idx="minor">
-            <a:schemeClr val="lt1"/>
-          </a:fontRef>
-        </p:style>
-        <p:txBody>
-          <a:bodyPr rtlCol="0" anchor="ctr" wrap="square"/>
-          <a:lstStyle/>
-          <a:p>
-            <a:pPr algn="ctr"/>
-            <a:r>
-              <a:rPr sz="1500" b="1">
-                <a:solidFill>
-                  <a:srgbClr val="4B3F8F"/>
-                </a:solidFill>
-                <a:latin typeface="Malgun Gothic"/>
-              </a:rPr>
-              <a:t>정규화 + 가중치</a:t>
-            </a:r>
-          </a:p>
-          <a:p>
-            <a:pPr algn="ctr"/>
-            <a:r>
-              <a:rPr sz="1100">
-                <a:solidFill>
-                  <a:srgbClr val="555555"/>
-                </a:solidFill>
-                <a:latin typeface="Malgun Gothic"/>
-              </a:rPr>
-              <a:t>Min-Max · 엔트로피</a:t>
-            </a:r>
-          </a:p>
-        </p:txBody>
-      </p:sp>
-      <p:cxnSp>
-        <p:nvCxnSpPr>
-          <p:cNvPr id="8" name="Connector 7"/>
-          <p:cNvCxnSpPr/>
-          <p:nvPr/>
-        </p:nvCxnSpPr>
-        <p:spPr>
-          <a:xfrm>
-            <a:off x="6094476" y="3291840"/>
-            <a:ext cx="0" cy="283464"/>
-          </a:xfrm>
-          <a:prstGeom prst="line">
-            <a:avLst/>
-          </a:prstGeom>
-          <a:ln w="19050">
-            <a:solidFill>
-              <a:srgbClr val="88909A"/>
-            </a:solidFill>
-          </a:ln>
-        </p:spPr>
-        <p:style>
-          <a:lnRef idx="2">
-            <a:schemeClr val="accent1"/>
-          </a:lnRef>
-          <a:fillRef idx="0">
-            <a:schemeClr val="accent1"/>
-          </a:fillRef>
-          <a:effectRef idx="1">
-            <a:schemeClr val="accent1"/>
-          </a:effectRef>
-          <a:fontRef idx="minor">
-            <a:schemeClr val="tx1"/>
-          </a:fontRef>
-        </p:style>
-      </p:cxnSp>
-      <p:sp>
-        <p:nvSpPr>
-          <p:cNvPr id="9" name="Rounded Rectangle 8"/>
-          <p:cNvSpPr/>
-          <p:nvPr/>
-        </p:nvSpPr>
-        <p:spPr>
-          <a:xfrm>
-            <a:off x="4448556" y="3575304"/>
-            <a:ext cx="3291840" cy="749808"/>
-          </a:xfrm>
-          <a:prstGeom prst="roundRect">
-            <a:avLst/>
-          </a:prstGeom>
-          <a:solidFill>
-            <a:srgbClr val="E2E0F6"/>
-          </a:solidFill>
-          <a:ln w="12700">
-            <a:solidFill>
-              <a:srgbClr val="88909A"/>
-            </a:solidFill>
-          </a:ln>
-        </p:spPr>
-        <p:style>
-          <a:lnRef idx="1">
-            <a:schemeClr val="accent1"/>
-          </a:lnRef>
-          <a:fillRef idx="3">
-            <a:schemeClr val="accent1"/>
-          </a:fillRef>
-          <a:effectRef idx="2">
-            <a:schemeClr val="accent1"/>
-          </a:effectRef>
-          <a:fontRef idx="minor">
-            <a:schemeClr val="lt1"/>
-          </a:fontRef>
-        </p:style>
-        <p:txBody>
-          <a:bodyPr rtlCol="0" anchor="ctr" wrap="square"/>
-          <a:lstStyle/>
-          <a:p>
-            <a:pPr algn="ctr"/>
-            <a:r>
-              <a:rPr sz="1500" b="1">
-                <a:solidFill>
-                  <a:srgbClr val="4B3F8F"/>
-                </a:solidFill>
-                <a:latin typeface="Malgun Gothic"/>
-              </a:rPr>
-              <a:t>LLAI 점수</a:t>
-            </a:r>
-          </a:p>
-          <a:p>
-            <a:pPr algn="ctr"/>
-            <a:r>
-              <a:rPr sz="1100">
-                <a:solidFill>
-                  <a:srgbClr val="555555"/>
-                </a:solidFill>
-                <a:latin typeface="Malgun Gothic"/>
-              </a:rPr>
-              <a:t>가중평균 × 100</a:t>
-            </a:r>
-          </a:p>
-        </p:txBody>
-      </p:sp>
-      <p:cxnSp>
-        <p:nvCxnSpPr>
-          <p:cNvPr id="10" name="Connector 9"/>
-          <p:cNvCxnSpPr/>
-          <p:nvPr/>
-        </p:nvCxnSpPr>
-        <p:spPr>
-          <a:xfrm flipH="1">
-            <a:off x="2308860" y="4325112"/>
-            <a:ext cx="3785616" cy="475488"/>
-          </a:xfrm>
-          <a:prstGeom prst="line">
-            <a:avLst/>
-          </a:prstGeom>
-          <a:ln w="19050">
-            <a:solidFill>
-              <a:srgbClr val="88909A"/>
-            </a:solidFill>
-          </a:ln>
-        </p:spPr>
-        <p:style>
-          <a:lnRef idx="2">
-            <a:schemeClr val="accent1"/>
-          </a:lnRef>
-          <a:fillRef idx="0">
-            <a:schemeClr val="accent1"/>
-          </a:fillRef>
-          <a:effectRef idx="1">
-            <a:schemeClr val="accent1"/>
-          </a:effectRef>
-          <a:fontRef idx="minor">
-            <a:schemeClr val="tx1"/>
-          </a:fontRef>
-        </p:style>
-      </p:cxnSp>
-      <p:cxnSp>
-        <p:nvCxnSpPr>
-          <p:cNvPr id="11" name="Connector 10"/>
-          <p:cNvCxnSpPr/>
-          <p:nvPr/>
-        </p:nvCxnSpPr>
-        <p:spPr>
-          <a:xfrm>
-            <a:off x="6094476" y="4325112"/>
-            <a:ext cx="0" cy="475488"/>
-          </a:xfrm>
-          <a:prstGeom prst="line">
-            <a:avLst/>
-          </a:prstGeom>
-          <a:ln w="19050">
-            <a:solidFill>
-              <a:srgbClr val="88909A"/>
-            </a:solidFill>
-          </a:ln>
-        </p:spPr>
-        <p:style>
-          <a:lnRef idx="2">
-            <a:schemeClr val="accent1"/>
-          </a:lnRef>
-          <a:fillRef idx="0">
-            <a:schemeClr val="accent1"/>
-          </a:fillRef>
-          <a:effectRef idx="1">
-            <a:schemeClr val="accent1"/>
-          </a:effectRef>
-          <a:fontRef idx="minor">
-            <a:schemeClr val="tx1"/>
-          </a:fontRef>
-        </p:style>
-      </p:cxnSp>
-      <p:cxnSp>
-        <p:nvCxnSpPr>
-          <p:cNvPr id="12" name="Connector 11"/>
-          <p:cNvCxnSpPr/>
-          <p:nvPr/>
-        </p:nvCxnSpPr>
-        <p:spPr>
-          <a:xfrm>
-            <a:off x="6094476" y="4325112"/>
-            <a:ext cx="3785616" cy="475488"/>
-          </a:xfrm>
-          <a:prstGeom prst="line">
-            <a:avLst/>
-          </a:prstGeom>
-          <a:ln w="19050">
-            <a:solidFill>
-              <a:srgbClr val="88909A"/>
-            </a:solidFill>
-          </a:ln>
-        </p:spPr>
-        <p:style>
-          <a:lnRef idx="2">
-            <a:schemeClr val="accent1"/>
-          </a:lnRef>
-          <a:fillRef idx="0">
-            <a:schemeClr val="accent1"/>
-          </a:fillRef>
-          <a:effectRef idx="1">
-            <a:schemeClr val="accent1"/>
-          </a:effectRef>
-          <a:fontRef idx="minor">
-            <a:schemeClr val="tx1"/>
-          </a:fontRef>
-        </p:style>
-      </p:cxnSp>
-      <p:sp>
-        <p:nvSpPr>
-          <p:cNvPr id="13" name="Rounded Rectangle 12"/>
-          <p:cNvSpPr/>
-          <p:nvPr/>
-        </p:nvSpPr>
-        <p:spPr>
-          <a:xfrm>
-            <a:off x="502920" y="4800600"/>
-            <a:ext cx="3611880" cy="1463040"/>
-          </a:xfrm>
-          <a:prstGeom prst="roundRect">
-            <a:avLst/>
-          </a:prstGeom>
-          <a:solidFill>
-            <a:srgbClr val="DBEEE4"/>
-          </a:solidFill>
-          <a:ln w="12700">
-            <a:solidFill>
-              <a:srgbClr val="88909A"/>
-            </a:solidFill>
-          </a:ln>
-        </p:spPr>
-        <p:style>
-          <a:lnRef idx="1">
-            <a:schemeClr val="accent1"/>
-          </a:lnRef>
-          <a:fillRef idx="3">
-            <a:schemeClr val="accent1"/>
-          </a:fillRef>
-          <a:effectRef idx="2">
-            <a:schemeClr val="accent1"/>
-          </a:effectRef>
-          <a:fontRef idx="minor">
-            <a:schemeClr val="lt1"/>
-          </a:fontRef>
-        </p:style>
-        <p:txBody>
-          <a:bodyPr rtlCol="0" anchor="ctr" wrap="square"/>
-          <a:lstStyle/>
-          <a:p>
-            <a:pPr algn="ctr"/>
-            <a:r>
-              <a:rPr sz="1500" b="1">
-                <a:solidFill>
-                  <a:srgbClr val="2B6B52"/>
-                </a:solidFill>
-                <a:latin typeface="Malgun Gothic"/>
-              </a:rPr>
-              <a:t>K-means 군집</a:t>
-            </a:r>
-          </a:p>
-          <a:p>
-            <a:pPr algn="ctr"/>
-            <a:r>
-              <a:rPr sz="1100">
-                <a:solidFill>
-                  <a:srgbClr val="555555"/>
-                </a:solidFill>
-                <a:latin typeface="Malgun Gothic"/>
-              </a:rPr>
-              <a:t>→ 서울 별도그룹</a:t>
-            </a:r>
-          </a:p>
-          <a:p>
-            <a:pPr algn="ctr"/>
-            <a:r>
-              <a:rPr sz="1100">
-                <a:solidFill>
-                  <a:srgbClr val="555555"/>
-                </a:solidFill>
-                <a:latin typeface="Malgun Gothic"/>
-              </a:rPr>
-              <a:t>(클러스터 색) · 11번</a:t>
-            </a:r>
-          </a:p>
-        </p:txBody>
-      </p:sp>
-      <p:sp>
-        <p:nvSpPr>
-          <p:cNvPr id="14" name="Rounded Rectangle 13"/>
-          <p:cNvSpPr/>
-          <p:nvPr/>
-        </p:nvSpPr>
-        <p:spPr>
-          <a:xfrm>
-            <a:off x="4288536" y="4800600"/>
-            <a:ext cx="3611880" cy="1463040"/>
-          </a:xfrm>
-          <a:prstGeom prst="roundRect">
-            <a:avLst/>
-          </a:prstGeom>
-          <a:solidFill>
-            <a:srgbClr val="DBEEE4"/>
-          </a:solidFill>
-          <a:ln w="12700">
-            <a:solidFill>
-              <a:srgbClr val="88909A"/>
-            </a:solidFill>
-          </a:ln>
-        </p:spPr>
-        <p:style>
-          <a:lnRef idx="1">
-            <a:schemeClr val="accent1"/>
-          </a:lnRef>
-          <a:fillRef idx="3">
-            <a:schemeClr val="accent1"/>
-          </a:fillRef>
-          <a:effectRef idx="2">
-            <a:schemeClr val="accent1"/>
-          </a:effectRef>
-          <a:fontRef idx="minor">
-            <a:schemeClr val="lt1"/>
-          </a:fontRef>
-        </p:style>
-        <p:txBody>
-          <a:bodyPr rtlCol="0" anchor="ctr" wrap="square"/>
-          <a:lstStyle/>
-          <a:p>
-            <a:pPr algn="ctr"/>
-            <a:r>
-              <a:rPr sz="1500" b="1">
-                <a:solidFill>
-                  <a:srgbClr val="2B6B52"/>
-                </a:solidFill>
-                <a:latin typeface="Malgun Gothic"/>
-              </a:rPr>
-              <a:t>코로플레스 지도</a:t>
-            </a:r>
-          </a:p>
-          <a:p>
-            <a:pPr algn="ctr"/>
-            <a:r>
-              <a:rPr sz="1100">
-                <a:solidFill>
-                  <a:srgbClr val="555555"/>
-                </a:solidFill>
-                <a:latin typeface="Malgun Gothic"/>
-              </a:rPr>
-              <a:t>→ 전국 색지도</a:t>
-            </a:r>
-          </a:p>
-          <a:p>
-            <a:pPr algn="ctr"/>
-            <a:r>
-              <a:rPr sz="1100">
-                <a:solidFill>
-                  <a:srgbClr val="555555"/>
-                </a:solidFill>
-                <a:latin typeface="Malgun Gothic"/>
-              </a:rPr>
-              <a:t>(서울만 파랑) · 12번</a:t>
-            </a:r>
-          </a:p>
-        </p:txBody>
-      </p:sp>
-      <p:sp>
-        <p:nvSpPr>
-          <p:cNvPr id="15" name="Rounded Rectangle 14"/>
-          <p:cNvSpPr/>
-          <p:nvPr/>
-        </p:nvSpPr>
-        <p:spPr>
-          <a:xfrm>
-            <a:off x="8074152" y="4800600"/>
-            <a:ext cx="3611880" cy="1463040"/>
-          </a:xfrm>
-          <a:prstGeom prst="roundRect">
-            <a:avLst/>
-          </a:prstGeom>
-          <a:solidFill>
-            <a:srgbClr val="DBEEE4"/>
-          </a:solidFill>
-          <a:ln w="12700">
-            <a:solidFill>
-              <a:srgbClr val="88909A"/>
-            </a:solidFill>
-          </a:ln>
-        </p:spPr>
-        <p:style>
-          <a:lnRef idx="1">
-            <a:schemeClr val="accent1"/>
-          </a:lnRef>
-          <a:fillRef idx="3">
-            <a:schemeClr val="accent1"/>
-          </a:fillRef>
-          <a:effectRef idx="2">
-            <a:schemeClr val="accent1"/>
-          </a:effectRef>
-          <a:fontRef idx="minor">
-            <a:schemeClr val="lt1"/>
-          </a:fontRef>
-        </p:style>
-        <p:txBody>
-          <a:bodyPr rtlCol="0" anchor="ctr" wrap="square"/>
-          <a:lstStyle/>
-          <a:p>
-            <a:pPr algn="ctr"/>
-            <a:r>
-              <a:rPr sz="1500" b="1">
-                <a:solidFill>
-                  <a:srgbClr val="2B6B52"/>
-                </a:solidFill>
-                <a:latin typeface="Malgun Gothic"/>
-              </a:rPr>
-              <a:t>가설검정 (3종)</a:t>
-            </a:r>
-          </a:p>
-          <a:p>
-            <a:pPr algn="ctr"/>
-            <a:r>
-              <a:rPr sz="1100">
-                <a:solidFill>
-                  <a:srgbClr val="555555"/>
-                </a:solidFill>
-                <a:latin typeface="Malgun Gothic"/>
-              </a:rPr>
-              <a:t>Pearson → H2 변호사↔부담 r=−.85 · 13번</a:t>
-            </a:r>
-          </a:p>
-          <a:p>
-            <a:pPr algn="ctr"/>
-            <a:r>
-              <a:rPr sz="1100">
-                <a:solidFill>
-                  <a:srgbClr val="555555"/>
-                </a:solidFill>
-                <a:latin typeface="Malgun Gothic"/>
-              </a:rPr>
-              <a:t>HHI·변동계수 → H4 쏠림 .53→.60 · 14번</a:t>
-            </a:r>
-          </a:p>
-          <a:p>
-            <a:pPr algn="ctr"/>
-            <a:r>
-              <a:rPr sz="1100">
-                <a:solidFill>
-                  <a:srgbClr val="555555"/>
-                </a:solidFill>
-                <a:latin typeface="Malgun Gothic"/>
-              </a:rPr>
-              <a:t>Mann-Whitney → H1 수도권 차이 · 16·18번</a:t>
-            </a:r>
-          </a:p>
-        </p:txBody>
-      </p:sp>
-      <p:sp>
-        <p:nvSpPr>
-          <p:cNvPr id="16" name="TextBox 15"/>
+        </p:nvGraphicFramePr>
+        <p:xfrm>
+          <a:off x="1645920" y="2468880"/>
+          <a:ext cx="8778240" cy="1737360"/>
+        </p:xfrm>
+        <a:graphic>
+          <a:graphicData uri="http://schemas.openxmlformats.org/drawingml/2006/table">
+            <a:tbl>
+              <a:tblPr firstRow="1" bandRow="1">
+                <a:tableStyleId>{5C22544A-7EE6-4342-B048-85BDC9FD1C3A}</a:tableStyleId>
+              </a:tblPr>
+              <a:tblGrid>
+                <a:gridCol w="1280160"/>
+                <a:gridCol w="2103120"/>
+                <a:gridCol w="2103120"/>
+                <a:gridCol w="1737360"/>
+                <a:gridCol w="1554480"/>
+              </a:tblGrid>
+              <a:tr h="579120">
+                <a:tc>
+                  <a:txBody>
+                    <a:bodyPr/>
+                    <a:lstStyle/>
+                    <a:p>
+                      <a:pPr algn="ctr"/>
+                      <a:r>
+                        <a:rPr sz="1600" b="1">
+                          <a:solidFill>
+                            <a:srgbClr val="FFFFFF"/>
+                          </a:solidFill>
+                          <a:latin typeface="Malgun Gothic"/>
+                        </a:rPr>
+                        <a:t>권역</a:t>
+                      </a:r>
+                    </a:p>
+                  </a:txBody>
+                  <a:tcPr anchor="ctr">
+                    <a:solidFill>
+                      <a:srgbClr val="1F3A5F"/>
+                    </a:solidFill>
+                  </a:tcPr>
+                </a:tc>
+                <a:tc>
+                  <a:txBody>
+                    <a:bodyPr/>
+                    <a:lstStyle/>
+                    <a:p>
+                      <a:pPr algn="l"/>
+                      <a:r>
+                        <a:rPr sz="1600" b="1">
+                          <a:solidFill>
+                            <a:srgbClr val="FFFFFF"/>
+                          </a:solidFill>
+                          <a:latin typeface="Malgun Gothic"/>
+                        </a:rPr>
+                        <a:t>변호사</a:t>
+                      </a:r>
+                    </a:p>
+                  </a:txBody>
+                  <a:tcPr anchor="ctr">
+                    <a:solidFill>
+                      <a:srgbClr val="1F3A5F"/>
+                    </a:solidFill>
+                  </a:tcPr>
+                </a:tc>
+                <a:tc>
+                  <a:txBody>
+                    <a:bodyPr/>
+                    <a:lstStyle/>
+                    <a:p>
+                      <a:pPr algn="l"/>
+                      <a:r>
+                        <a:rPr sz="1600" b="1">
+                          <a:solidFill>
+                            <a:srgbClr val="FFFFFF"/>
+                          </a:solidFill>
+                          <a:latin typeface="Malgun Gothic"/>
+                        </a:rPr>
+                        <a:t>안 바쁨</a:t>
+                      </a:r>
+                    </a:p>
+                  </a:txBody>
+                  <a:tcPr anchor="ctr">
+                    <a:solidFill>
+                      <a:srgbClr val="1F3A5F"/>
+                    </a:solidFill>
+                  </a:tcPr>
+                </a:tc>
+                <a:tc>
+                  <a:txBody>
+                    <a:bodyPr/>
+                    <a:lstStyle/>
+                    <a:p>
+                      <a:pPr algn="l"/>
+                      <a:r>
+                        <a:rPr sz="1600" b="1">
+                          <a:solidFill>
+                            <a:srgbClr val="FFFFFF"/>
+                          </a:solidFill>
+                          <a:latin typeface="Malgun Gothic"/>
+                        </a:rPr>
+                        <a:t>약자지원</a:t>
+                      </a:r>
+                    </a:p>
+                  </a:txBody>
+                  <a:tcPr anchor="ctr">
+                    <a:solidFill>
+                      <a:srgbClr val="1F3A5F"/>
+                    </a:solidFill>
+                  </a:tcPr>
+                </a:tc>
+                <a:tc>
+                  <a:txBody>
+                    <a:bodyPr/>
+                    <a:lstStyle/>
+                    <a:p>
+                      <a:pPr algn="l"/>
+                      <a:r>
+                        <a:rPr sz="1600" b="1">
+                          <a:solidFill>
+                            <a:srgbClr val="FFFFFF"/>
+                          </a:solidFill>
+                          <a:latin typeface="Malgun Gothic"/>
+                        </a:rPr>
+                        <a:t>→ LLAI</a:t>
+                      </a:r>
+                    </a:p>
+                  </a:txBody>
+                  <a:tcPr anchor="ctr">
+                    <a:solidFill>
+                      <a:srgbClr val="1F3A5F"/>
+                    </a:solidFill>
+                  </a:tcPr>
+                </a:tc>
+              </a:tr>
+              <a:tr h="579120">
+                <a:tc>
+                  <a:txBody>
+                    <a:bodyPr/>
+                    <a:lstStyle/>
+                    <a:p>
+                      <a:pPr algn="ctr"/>
+                      <a:r>
+                        <a:rPr sz="1600">
+                          <a:latin typeface="Malgun Gothic"/>
+                        </a:rPr>
+                        <a:t>서울</a:t>
+                      </a:r>
+                    </a:p>
+                  </a:txBody>
+                  <a:tcPr anchor="ctr"/>
+                </a:tc>
+                <a:tc>
+                  <a:txBody>
+                    <a:bodyPr/>
+                    <a:lstStyle/>
+                    <a:p>
+                      <a:pPr algn="l"/>
+                      <a:r>
+                        <a:rPr sz="1600">
+                          <a:latin typeface="Malgun Gothic"/>
+                        </a:rPr>
+                        <a:t>1.00 (최고)</a:t>
+                      </a:r>
+                    </a:p>
+                  </a:txBody>
+                  <a:tcPr anchor="ctr"/>
+                </a:tc>
+                <a:tc>
+                  <a:txBody>
+                    <a:bodyPr/>
+                    <a:lstStyle/>
+                    <a:p>
+                      <a:pPr algn="l"/>
+                      <a:r>
+                        <a:rPr sz="1600">
+                          <a:latin typeface="Malgun Gothic"/>
+                        </a:rPr>
+                        <a:t>1.00 (최고)</a:t>
+                      </a:r>
+                    </a:p>
+                  </a:txBody>
+                  <a:tcPr anchor="ctr"/>
+                </a:tc>
+                <a:tc>
+                  <a:txBody>
+                    <a:bodyPr/>
+                    <a:lstStyle/>
+                    <a:p>
+                      <a:pPr algn="l"/>
+                      <a:r>
+                        <a:rPr sz="1600">
+                          <a:latin typeface="Malgun Gothic"/>
+                        </a:rPr>
+                        <a:t>0.48</a:t>
+                      </a:r>
+                    </a:p>
+                  </a:txBody>
+                  <a:tcPr anchor="ctr"/>
+                </a:tc>
+                <a:tc>
+                  <a:txBody>
+                    <a:bodyPr/>
+                    <a:lstStyle/>
+                    <a:p>
+                      <a:pPr algn="l"/>
+                      <a:r>
+                        <a:rPr sz="1600">
+                          <a:latin typeface="Malgun Gothic"/>
+                        </a:rPr>
+                        <a:t>91점</a:t>
+                      </a:r>
+                    </a:p>
+                  </a:txBody>
+                  <a:tcPr anchor="ctr"/>
+                </a:tc>
+              </a:tr>
+              <a:tr h="579120">
+                <a:tc>
+                  <a:txBody>
+                    <a:bodyPr/>
+                    <a:lstStyle/>
+                    <a:p>
+                      <a:pPr algn="ctr"/>
+                      <a:r>
+                        <a:rPr sz="1600">
+                          <a:latin typeface="Malgun Gothic"/>
+                        </a:rPr>
+                        <a:t>강원</a:t>
+                      </a:r>
+                    </a:p>
+                  </a:txBody>
+                  <a:tcPr anchor="ctr"/>
+                </a:tc>
+                <a:tc>
+                  <a:txBody>
+                    <a:bodyPr/>
+                    <a:lstStyle/>
+                    <a:p>
+                      <a:pPr algn="l"/>
+                      <a:r>
+                        <a:rPr sz="1600">
+                          <a:latin typeface="Malgun Gothic"/>
+                        </a:rPr>
+                        <a:t>0.00 (최저)</a:t>
+                      </a:r>
+                    </a:p>
+                  </a:txBody>
+                  <a:tcPr anchor="ctr"/>
+                </a:tc>
+                <a:tc>
+                  <a:txBody>
+                    <a:bodyPr/>
+                    <a:lstStyle/>
+                    <a:p>
+                      <a:pPr algn="l"/>
+                      <a:r>
+                        <a:rPr sz="1600">
+                          <a:latin typeface="Malgun Gothic"/>
+                        </a:rPr>
+                        <a:t>0.00 (최저)</a:t>
+                      </a:r>
+                    </a:p>
+                  </a:txBody>
+                  <a:tcPr anchor="ctr"/>
+                </a:tc>
+                <a:tc>
+                  <a:txBody>
+                    <a:bodyPr/>
+                    <a:lstStyle/>
+                    <a:p>
+                      <a:pPr algn="l"/>
+                      <a:r>
+                        <a:rPr sz="1600">
+                          <a:latin typeface="Malgun Gothic"/>
+                        </a:rPr>
+                        <a:t>0.09</a:t>
+                      </a:r>
+                    </a:p>
+                  </a:txBody>
+                  <a:tcPr anchor="ctr"/>
+                </a:tc>
+                <a:tc>
+                  <a:txBody>
+                    <a:bodyPr/>
+                    <a:lstStyle/>
+                    <a:p>
+                      <a:pPr algn="l"/>
+                      <a:r>
+                        <a:rPr sz="1600">
+                          <a:latin typeface="Malgun Gothic"/>
+                        </a:rPr>
+                        <a:t>2점</a:t>
+                      </a:r>
+                    </a:p>
+                  </a:txBody>
+                  <a:tcPr anchor="ctr"/>
+                </a:tc>
+              </a:tr>
+            </a:tbl>
+          </a:graphicData>
+        </a:graphic>
+      </p:graphicFrame>
+      <p:sp>
+        <p:nvSpPr>
+          <p:cNvPr id="6" name="TextBox 5"/>
           <p:cNvSpPr txBox="1"/>
           <p:nvPr/>
         </p:nvSpPr>
         <p:spPr>
           <a:xfrm>
-            <a:off x="548640" y="6419088"/>
-            <a:ext cx="11064240" cy="365760"/>
+            <a:off x="640080" y="4480560"/>
+            <a:ext cx="10972800" cy="4937760"/>
           </a:xfrm>
           <a:prstGeom prst="rect">
             <a:avLst/>
@@ -3965,15 +3676,51 @@
           </a:bodyPr>
           <a:lstStyle/>
           <a:p>
-            <a:pPr algn="l"/>
-            <a:r>
-              <a:rPr sz="1200" i="1">
+            <a:pPr>
+              <a:spcAft>
+                <a:spcPts val="800"/>
+              </a:spcAft>
+            </a:pPr>
+            <a:r>
+              <a:rPr sz="1900" b="1">
+                <a:solidFill>
+                  <a:srgbClr val="C44E52"/>
+                </a:solidFill>
+                <a:latin typeface="Malgun Gothic"/>
+              </a:rPr>
+              <a:t>• 서울 = 0.69×1.00 + 0.14×1.00 + 0.17×0.48 = 0.91 → 91점</a:t>
+            </a:r>
+          </a:p>
+          <a:p>
+            <a:pPr>
+              <a:spcAft>
+                <a:spcPts val="800"/>
+              </a:spcAft>
+            </a:pPr>
+            <a:r>
+              <a:rPr sz="1800" b="0">
+                <a:solidFill>
+                  <a:srgbClr val="222222"/>
+                </a:solidFill>
+                <a:latin typeface="Malgun Gothic"/>
+              </a:rPr>
+              <a:t>• 강원 = 0.69×0 + 0.14×0 + 0.17×0.09 ≈ 0.02 → 2점</a:t>
+            </a:r>
+          </a:p>
+          <a:p>
+            <a:pPr lvl="1">
+              <a:spcAft>
+                <a:spcPts val="800"/>
+              </a:spcAft>
+            </a:pPr>
+            <a:r>
+              <a:rPr sz="1600" b="0">
                 <a:solidFill>
                   <a:srgbClr val="555555"/>
                 </a:solidFill>
                 <a:latin typeface="Malgun Gothic"/>
               </a:rPr>
-              <a:t>※ PCA · Spearman · Silhouette은 결과로 등장하지 않는 교차검증 보조 — 메인 흐름에서 제외(부록 B).</a:t>
+              <a:t>– 즉 LLAI = '전국에서 상대적으로 어느 위치냐'를 0~100으로</a:t>
             </a:r>
           </a:p>
         </p:txBody>
@@ -4004,8 +3751,8 @@
         </p:nvSpPr>
         <p:spPr>
           <a:xfrm>
-            <a:off x="502920" y="320040"/>
-            <a:ext cx="11155680" cy="914400"/>
+            <a:off x="502920" y="274320"/>
+            <a:ext cx="11155680" cy="822960"/>
           </a:xfrm>
           <a:prstGeom prst="rect">
             <a:avLst/>
@@ -4013,19 +3760,19 @@
           <a:noFill/>
         </p:spPr>
         <p:txBody>
-          <a:bodyPr wrap="square">
+          <a:bodyPr wrap="none">
             <a:spAutoFit/>
           </a:bodyPr>
           <a:lstStyle/>
           <a:p>
             <a:r>
-              <a:rPr sz="2800" b="1">
+              <a:rPr sz="2600" b="1">
                 <a:solidFill>
                   <a:srgbClr val="1F3A5F"/>
                 </a:solidFill>
                 <a:latin typeface="Malgun Gothic"/>
               </a:rPr>
-              <a:t>7. 결과 ① — 지역별 점수 순위 (2024)</a:t>
+              <a:t>분석 기법 — 무엇이 들어가 무엇이 나왔나 (방법 → 결과)</a:t>
             </a:r>
           </a:p>
         </p:txBody>
@@ -4038,7 +3785,7 @@
         </p:nvSpPr>
         <p:spPr>
           <a:xfrm>
-            <a:off x="548640" y="1188720"/>
+            <a:off x="548640" y="1078992"/>
             <a:ext cx="11064240" cy="38100"/>
           </a:xfrm>
           <a:prstGeom prst="rect">
@@ -4073,40 +3820,16 @@
           </a:p>
         </p:txBody>
       </p:sp>
-      <p:pic>
-        <p:nvPicPr>
-          <p:cNvPr id="4" name="Picture 3" descr="fig1_llai_ranking_region13.png"/>
-          <p:cNvPicPr>
-            <a:picLocks noChangeAspect="1"/>
-          </p:cNvPicPr>
-          <p:nvPr/>
-        </p:nvPicPr>
-        <p:blipFill>
-          <a:blip r:embed="rId2"/>
-          <a:stretch>
-            <a:fillRect/>
-          </a:stretch>
-        </p:blipFill>
-        <p:spPr>
-          <a:xfrm>
-            <a:off x="365760" y="1554480"/>
-            <a:ext cx="6933804" cy="4297680"/>
-          </a:xfrm>
-          <a:prstGeom prst="rect">
-            <a:avLst/>
-          </a:prstGeom>
-        </p:spPr>
-      </p:pic>
-      <p:sp>
-        <p:nvSpPr>
-          <p:cNvPr id="5" name="TextBox 4"/>
+      <p:sp>
+        <p:nvSpPr>
+          <p:cNvPr id="4" name="TextBox 3"/>
           <p:cNvSpPr txBox="1"/>
           <p:nvPr/>
         </p:nvSpPr>
         <p:spPr>
           <a:xfrm>
-            <a:off x="6949440" y="1828800"/>
-            <a:ext cx="4937760" cy="4937760"/>
+            <a:off x="548640" y="1143000"/>
+            <a:ext cx="10972800" cy="365760"/>
           </a:xfrm>
           <a:prstGeom prst="rect">
             <a:avLst/>
@@ -4119,97 +3842,648 @@
           </a:bodyPr>
           <a:lstStyle/>
           <a:p>
-            <a:pPr>
-              <a:spcAft>
-                <a:spcPts val="800"/>
-              </a:spcAft>
-            </a:pPr>
-            <a:r>
-              <a:rPr sz="2000">
-                <a:solidFill>
-                  <a:srgbClr val="222222"/>
-                </a:solidFill>
-                <a:latin typeface="Malgun Gothic"/>
-              </a:rPr>
-              <a:t>• 서울 91점 ≫ 압도</a:t>
-            </a:r>
-          </a:p>
-          <a:p>
-            <a:pPr>
-              <a:spcAft>
-                <a:spcPts val="800"/>
-              </a:spcAft>
-            </a:pPr>
-            <a:r>
-              <a:rPr sz="2000">
-                <a:solidFill>
-                  <a:srgbClr val="222222"/>
-                </a:solidFill>
-                <a:latin typeface="Malgun Gothic"/>
-              </a:rPr>
-              <a:t>• 울산·제주 2·3위</a:t>
-            </a:r>
-          </a:p>
-          <a:p>
-            <a:pPr lvl="1">
-              <a:spcAft>
-                <a:spcPts val="800"/>
-              </a:spcAft>
-            </a:pPr>
-            <a:r>
-              <a:rPr sz="1700">
-                <a:solidFill>
-                  <a:srgbClr val="222222"/>
-                </a:solidFill>
-                <a:latin typeface="Malgun Gothic"/>
-              </a:rPr>
-              <a:t>– (1인당만 높음, 절대수는 적음)</a:t>
-            </a:r>
-          </a:p>
-          <a:p>
-            <a:pPr>
-              <a:spcAft>
-                <a:spcPts val="800"/>
-              </a:spcAft>
-            </a:pPr>
-            <a:r>
-              <a:rPr sz="2000">
-                <a:solidFill>
-                  <a:srgbClr val="222222"/>
-                </a:solidFill>
-                <a:latin typeface="Malgun Gothic"/>
-              </a:rPr>
-              <a:t>• 인천은 하위권</a:t>
-            </a:r>
-          </a:p>
-          <a:p>
-            <a:pPr lvl="1">
-              <a:spcAft>
-                <a:spcPts val="800"/>
-              </a:spcAft>
-            </a:pPr>
-            <a:r>
-              <a:rPr sz="1700">
-                <a:solidFill>
-                  <a:srgbClr val="222222"/>
-                </a:solidFill>
-                <a:latin typeface="Malgun Gothic"/>
-              </a:rPr>
-              <a:t>– (사건이 많아 바쁨)</a:t>
-            </a:r>
-          </a:p>
-        </p:txBody>
-      </p:sp>
-      <p:sp>
-        <p:nvSpPr>
-          <p:cNvPr id="6" name="TextBox 5"/>
+            <a:pPr algn="l"/>
+            <a:r>
+              <a:rPr sz="1200" i="1">
+                <a:solidFill>
+                  <a:srgbClr val="555555"/>
+                </a:solidFill>
+                <a:latin typeface="Malgun Gothic"/>
+              </a:rPr>
+              <a:t>회색 = 입력 · 보라 = LLAI 만드는 과정 · 청록 = 거기서 뽑은 결과(+슬라이드)</a:t>
+            </a:r>
+          </a:p>
+        </p:txBody>
+      </p:sp>
+      <p:sp>
+        <p:nvSpPr>
+          <p:cNvPr id="5" name="Rounded Rectangle 4"/>
+          <p:cNvSpPr/>
+          <p:nvPr/>
+        </p:nvSpPr>
+        <p:spPr>
+          <a:xfrm>
+            <a:off x="4448556" y="1508760"/>
+            <a:ext cx="3291840" cy="749808"/>
+          </a:xfrm>
+          <a:prstGeom prst="roundRect">
+            <a:avLst/>
+          </a:prstGeom>
+          <a:solidFill>
+            <a:srgbClr val="ECEAE3"/>
+          </a:solidFill>
+          <a:ln w="12700">
+            <a:solidFill>
+              <a:srgbClr val="88909A"/>
+            </a:solidFill>
+          </a:ln>
+        </p:spPr>
+        <p:style>
+          <a:lnRef idx="1">
+            <a:schemeClr val="accent1"/>
+          </a:lnRef>
+          <a:fillRef idx="3">
+            <a:schemeClr val="accent1"/>
+          </a:fillRef>
+          <a:effectRef idx="2">
+            <a:schemeClr val="accent1"/>
+          </a:effectRef>
+          <a:fontRef idx="minor">
+            <a:schemeClr val="lt1"/>
+          </a:fontRef>
+        </p:style>
+        <p:txBody>
+          <a:bodyPr rtlCol="0" anchor="ctr" wrap="square"/>
+          <a:lstStyle/>
+          <a:p>
+            <a:pPr algn="ctr"/>
+            <a:r>
+              <a:rPr sz="1500" b="1">
+                <a:solidFill>
+                  <a:srgbClr val="3A3730"/>
+                </a:solidFill>
+                <a:latin typeface="Malgun Gothic"/>
+              </a:rPr>
+              <a:t>3개 지표</a:t>
+            </a:r>
+          </a:p>
+          <a:p>
+            <a:pPr algn="ctr"/>
+            <a:r>
+              <a:rPr sz="1100">
+                <a:solidFill>
+                  <a:srgbClr val="555555"/>
+                </a:solidFill>
+                <a:latin typeface="Malgun Gothic"/>
+              </a:rPr>
+              <a:t>변호사 · 사건부담 · 취약계층</a:t>
+            </a:r>
+          </a:p>
+        </p:txBody>
+      </p:sp>
+      <p:cxnSp>
+        <p:nvCxnSpPr>
+          <p:cNvPr id="6" name="Connector 5"/>
+          <p:cNvCxnSpPr/>
+          <p:nvPr/>
+        </p:nvCxnSpPr>
+        <p:spPr>
+          <a:xfrm>
+            <a:off x="6094476" y="2258568"/>
+            <a:ext cx="0" cy="283464"/>
+          </a:xfrm>
+          <a:prstGeom prst="line">
+            <a:avLst/>
+          </a:prstGeom>
+          <a:ln w="19050">
+            <a:solidFill>
+              <a:srgbClr val="88909A"/>
+            </a:solidFill>
+          </a:ln>
+        </p:spPr>
+        <p:style>
+          <a:lnRef idx="2">
+            <a:schemeClr val="accent1"/>
+          </a:lnRef>
+          <a:fillRef idx="0">
+            <a:schemeClr val="accent1"/>
+          </a:fillRef>
+          <a:effectRef idx="1">
+            <a:schemeClr val="accent1"/>
+          </a:effectRef>
+          <a:fontRef idx="minor">
+            <a:schemeClr val="tx1"/>
+          </a:fontRef>
+        </p:style>
+      </p:cxnSp>
+      <p:sp>
+        <p:nvSpPr>
+          <p:cNvPr id="7" name="Rounded Rectangle 6"/>
+          <p:cNvSpPr/>
+          <p:nvPr/>
+        </p:nvSpPr>
+        <p:spPr>
+          <a:xfrm>
+            <a:off x="4448556" y="2542032"/>
+            <a:ext cx="3291840" cy="749808"/>
+          </a:xfrm>
+          <a:prstGeom prst="roundRect">
+            <a:avLst/>
+          </a:prstGeom>
+          <a:solidFill>
+            <a:srgbClr val="E2E0F6"/>
+          </a:solidFill>
+          <a:ln w="12700">
+            <a:solidFill>
+              <a:srgbClr val="88909A"/>
+            </a:solidFill>
+          </a:ln>
+        </p:spPr>
+        <p:style>
+          <a:lnRef idx="1">
+            <a:schemeClr val="accent1"/>
+          </a:lnRef>
+          <a:fillRef idx="3">
+            <a:schemeClr val="accent1"/>
+          </a:fillRef>
+          <a:effectRef idx="2">
+            <a:schemeClr val="accent1"/>
+          </a:effectRef>
+          <a:fontRef idx="minor">
+            <a:schemeClr val="lt1"/>
+          </a:fontRef>
+        </p:style>
+        <p:txBody>
+          <a:bodyPr rtlCol="0" anchor="ctr" wrap="square"/>
+          <a:lstStyle/>
+          <a:p>
+            <a:pPr algn="ctr"/>
+            <a:r>
+              <a:rPr sz="1500" b="1">
+                <a:solidFill>
+                  <a:srgbClr val="4B3F8F"/>
+                </a:solidFill>
+                <a:latin typeface="Malgun Gothic"/>
+              </a:rPr>
+              <a:t>정규화 + 가중치</a:t>
+            </a:r>
+          </a:p>
+          <a:p>
+            <a:pPr algn="ctr"/>
+            <a:r>
+              <a:rPr sz="1100">
+                <a:solidFill>
+                  <a:srgbClr val="555555"/>
+                </a:solidFill>
+                <a:latin typeface="Malgun Gothic"/>
+              </a:rPr>
+              <a:t>Min-Max · 엔트로피</a:t>
+            </a:r>
+          </a:p>
+        </p:txBody>
+      </p:sp>
+      <p:cxnSp>
+        <p:nvCxnSpPr>
+          <p:cNvPr id="8" name="Connector 7"/>
+          <p:cNvCxnSpPr/>
+          <p:nvPr/>
+        </p:nvCxnSpPr>
+        <p:spPr>
+          <a:xfrm>
+            <a:off x="6094476" y="3291840"/>
+            <a:ext cx="0" cy="283464"/>
+          </a:xfrm>
+          <a:prstGeom prst="line">
+            <a:avLst/>
+          </a:prstGeom>
+          <a:ln w="19050">
+            <a:solidFill>
+              <a:srgbClr val="88909A"/>
+            </a:solidFill>
+          </a:ln>
+        </p:spPr>
+        <p:style>
+          <a:lnRef idx="2">
+            <a:schemeClr val="accent1"/>
+          </a:lnRef>
+          <a:fillRef idx="0">
+            <a:schemeClr val="accent1"/>
+          </a:fillRef>
+          <a:effectRef idx="1">
+            <a:schemeClr val="accent1"/>
+          </a:effectRef>
+          <a:fontRef idx="minor">
+            <a:schemeClr val="tx1"/>
+          </a:fontRef>
+        </p:style>
+      </p:cxnSp>
+      <p:sp>
+        <p:nvSpPr>
+          <p:cNvPr id="9" name="Rounded Rectangle 8"/>
+          <p:cNvSpPr/>
+          <p:nvPr/>
+        </p:nvSpPr>
+        <p:spPr>
+          <a:xfrm>
+            <a:off x="4448556" y="3575304"/>
+            <a:ext cx="3291840" cy="749808"/>
+          </a:xfrm>
+          <a:prstGeom prst="roundRect">
+            <a:avLst/>
+          </a:prstGeom>
+          <a:solidFill>
+            <a:srgbClr val="E2E0F6"/>
+          </a:solidFill>
+          <a:ln w="12700">
+            <a:solidFill>
+              <a:srgbClr val="88909A"/>
+            </a:solidFill>
+          </a:ln>
+        </p:spPr>
+        <p:style>
+          <a:lnRef idx="1">
+            <a:schemeClr val="accent1"/>
+          </a:lnRef>
+          <a:fillRef idx="3">
+            <a:schemeClr val="accent1"/>
+          </a:fillRef>
+          <a:effectRef idx="2">
+            <a:schemeClr val="accent1"/>
+          </a:effectRef>
+          <a:fontRef idx="minor">
+            <a:schemeClr val="lt1"/>
+          </a:fontRef>
+        </p:style>
+        <p:txBody>
+          <a:bodyPr rtlCol="0" anchor="ctr" wrap="square"/>
+          <a:lstStyle/>
+          <a:p>
+            <a:pPr algn="ctr"/>
+            <a:r>
+              <a:rPr sz="1500" b="1">
+                <a:solidFill>
+                  <a:srgbClr val="4B3F8F"/>
+                </a:solidFill>
+                <a:latin typeface="Malgun Gothic"/>
+              </a:rPr>
+              <a:t>LLAI 점수</a:t>
+            </a:r>
+          </a:p>
+          <a:p>
+            <a:pPr algn="ctr"/>
+            <a:r>
+              <a:rPr sz="1100">
+                <a:solidFill>
+                  <a:srgbClr val="555555"/>
+                </a:solidFill>
+                <a:latin typeface="Malgun Gothic"/>
+              </a:rPr>
+              <a:t>가중평균 × 100</a:t>
+            </a:r>
+          </a:p>
+        </p:txBody>
+      </p:sp>
+      <p:cxnSp>
+        <p:nvCxnSpPr>
+          <p:cNvPr id="10" name="Connector 9"/>
+          <p:cNvCxnSpPr/>
+          <p:nvPr/>
+        </p:nvCxnSpPr>
+        <p:spPr>
+          <a:xfrm flipH="1">
+            <a:off x="2308860" y="4325112"/>
+            <a:ext cx="3785616" cy="475488"/>
+          </a:xfrm>
+          <a:prstGeom prst="line">
+            <a:avLst/>
+          </a:prstGeom>
+          <a:ln w="19050">
+            <a:solidFill>
+              <a:srgbClr val="88909A"/>
+            </a:solidFill>
+          </a:ln>
+        </p:spPr>
+        <p:style>
+          <a:lnRef idx="2">
+            <a:schemeClr val="accent1"/>
+          </a:lnRef>
+          <a:fillRef idx="0">
+            <a:schemeClr val="accent1"/>
+          </a:fillRef>
+          <a:effectRef idx="1">
+            <a:schemeClr val="accent1"/>
+          </a:effectRef>
+          <a:fontRef idx="minor">
+            <a:schemeClr val="tx1"/>
+          </a:fontRef>
+        </p:style>
+      </p:cxnSp>
+      <p:cxnSp>
+        <p:nvCxnSpPr>
+          <p:cNvPr id="11" name="Connector 10"/>
+          <p:cNvCxnSpPr/>
+          <p:nvPr/>
+        </p:nvCxnSpPr>
+        <p:spPr>
+          <a:xfrm>
+            <a:off x="6094476" y="4325112"/>
+            <a:ext cx="0" cy="475488"/>
+          </a:xfrm>
+          <a:prstGeom prst="line">
+            <a:avLst/>
+          </a:prstGeom>
+          <a:ln w="19050">
+            <a:solidFill>
+              <a:srgbClr val="88909A"/>
+            </a:solidFill>
+          </a:ln>
+        </p:spPr>
+        <p:style>
+          <a:lnRef idx="2">
+            <a:schemeClr val="accent1"/>
+          </a:lnRef>
+          <a:fillRef idx="0">
+            <a:schemeClr val="accent1"/>
+          </a:fillRef>
+          <a:effectRef idx="1">
+            <a:schemeClr val="accent1"/>
+          </a:effectRef>
+          <a:fontRef idx="minor">
+            <a:schemeClr val="tx1"/>
+          </a:fontRef>
+        </p:style>
+      </p:cxnSp>
+      <p:cxnSp>
+        <p:nvCxnSpPr>
+          <p:cNvPr id="12" name="Connector 11"/>
+          <p:cNvCxnSpPr/>
+          <p:nvPr/>
+        </p:nvCxnSpPr>
+        <p:spPr>
+          <a:xfrm>
+            <a:off x="6094476" y="4325112"/>
+            <a:ext cx="3785616" cy="475488"/>
+          </a:xfrm>
+          <a:prstGeom prst="line">
+            <a:avLst/>
+          </a:prstGeom>
+          <a:ln w="19050">
+            <a:solidFill>
+              <a:srgbClr val="88909A"/>
+            </a:solidFill>
+          </a:ln>
+        </p:spPr>
+        <p:style>
+          <a:lnRef idx="2">
+            <a:schemeClr val="accent1"/>
+          </a:lnRef>
+          <a:fillRef idx="0">
+            <a:schemeClr val="accent1"/>
+          </a:fillRef>
+          <a:effectRef idx="1">
+            <a:schemeClr val="accent1"/>
+          </a:effectRef>
+          <a:fontRef idx="minor">
+            <a:schemeClr val="tx1"/>
+          </a:fontRef>
+        </p:style>
+      </p:cxnSp>
+      <p:sp>
+        <p:nvSpPr>
+          <p:cNvPr id="13" name="Rounded Rectangle 12"/>
+          <p:cNvSpPr/>
+          <p:nvPr/>
+        </p:nvSpPr>
+        <p:spPr>
+          <a:xfrm>
+            <a:off x="502920" y="4800600"/>
+            <a:ext cx="3611880" cy="1463040"/>
+          </a:xfrm>
+          <a:prstGeom prst="roundRect">
+            <a:avLst/>
+          </a:prstGeom>
+          <a:solidFill>
+            <a:srgbClr val="DBEEE4"/>
+          </a:solidFill>
+          <a:ln w="12700">
+            <a:solidFill>
+              <a:srgbClr val="88909A"/>
+            </a:solidFill>
+          </a:ln>
+        </p:spPr>
+        <p:style>
+          <a:lnRef idx="1">
+            <a:schemeClr val="accent1"/>
+          </a:lnRef>
+          <a:fillRef idx="3">
+            <a:schemeClr val="accent1"/>
+          </a:fillRef>
+          <a:effectRef idx="2">
+            <a:schemeClr val="accent1"/>
+          </a:effectRef>
+          <a:fontRef idx="minor">
+            <a:schemeClr val="lt1"/>
+          </a:fontRef>
+        </p:style>
+        <p:txBody>
+          <a:bodyPr rtlCol="0" anchor="ctr" wrap="square"/>
+          <a:lstStyle/>
+          <a:p>
+            <a:pPr algn="ctr"/>
+            <a:r>
+              <a:rPr sz="1500" b="1">
+                <a:solidFill>
+                  <a:srgbClr val="2B6B52"/>
+                </a:solidFill>
+                <a:latin typeface="Malgun Gothic"/>
+              </a:rPr>
+              <a:t>K-means 군집</a:t>
+            </a:r>
+          </a:p>
+          <a:p>
+            <a:pPr algn="ctr"/>
+            <a:r>
+              <a:rPr sz="1100">
+                <a:solidFill>
+                  <a:srgbClr val="555555"/>
+                </a:solidFill>
+                <a:latin typeface="Malgun Gothic"/>
+              </a:rPr>
+              <a:t>→ 서울 별도그룹</a:t>
+            </a:r>
+          </a:p>
+          <a:p>
+            <a:pPr algn="ctr"/>
+            <a:r>
+              <a:rPr sz="1100">
+                <a:solidFill>
+                  <a:srgbClr val="555555"/>
+                </a:solidFill>
+                <a:latin typeface="Malgun Gothic"/>
+              </a:rPr>
+              <a:t>(클러스터 색)</a:t>
+            </a:r>
+          </a:p>
+        </p:txBody>
+      </p:sp>
+      <p:sp>
+        <p:nvSpPr>
+          <p:cNvPr id="14" name="Rounded Rectangle 13"/>
+          <p:cNvSpPr/>
+          <p:nvPr/>
+        </p:nvSpPr>
+        <p:spPr>
+          <a:xfrm>
+            <a:off x="4288536" y="4800600"/>
+            <a:ext cx="3611880" cy="1463040"/>
+          </a:xfrm>
+          <a:prstGeom prst="roundRect">
+            <a:avLst/>
+          </a:prstGeom>
+          <a:solidFill>
+            <a:srgbClr val="DBEEE4"/>
+          </a:solidFill>
+          <a:ln w="12700">
+            <a:solidFill>
+              <a:srgbClr val="88909A"/>
+            </a:solidFill>
+          </a:ln>
+        </p:spPr>
+        <p:style>
+          <a:lnRef idx="1">
+            <a:schemeClr val="accent1"/>
+          </a:lnRef>
+          <a:fillRef idx="3">
+            <a:schemeClr val="accent1"/>
+          </a:fillRef>
+          <a:effectRef idx="2">
+            <a:schemeClr val="accent1"/>
+          </a:effectRef>
+          <a:fontRef idx="minor">
+            <a:schemeClr val="lt1"/>
+          </a:fontRef>
+        </p:style>
+        <p:txBody>
+          <a:bodyPr rtlCol="0" anchor="ctr" wrap="square"/>
+          <a:lstStyle/>
+          <a:p>
+            <a:pPr algn="ctr"/>
+            <a:r>
+              <a:rPr sz="1500" b="1">
+                <a:solidFill>
+                  <a:srgbClr val="2B6B52"/>
+                </a:solidFill>
+                <a:latin typeface="Malgun Gothic"/>
+              </a:rPr>
+              <a:t>코로플레스 지도</a:t>
+            </a:r>
+          </a:p>
+          <a:p>
+            <a:pPr algn="ctr"/>
+            <a:r>
+              <a:rPr sz="1100">
+                <a:solidFill>
+                  <a:srgbClr val="555555"/>
+                </a:solidFill>
+                <a:latin typeface="Malgun Gothic"/>
+              </a:rPr>
+              <a:t>→ 전국 색지도</a:t>
+            </a:r>
+          </a:p>
+          <a:p>
+            <a:pPr algn="ctr"/>
+            <a:r>
+              <a:rPr sz="1100">
+                <a:solidFill>
+                  <a:srgbClr val="555555"/>
+                </a:solidFill>
+                <a:latin typeface="Malgun Gothic"/>
+              </a:rPr>
+              <a:t>(서울만 파랑)</a:t>
+            </a:r>
+          </a:p>
+        </p:txBody>
+      </p:sp>
+      <p:sp>
+        <p:nvSpPr>
+          <p:cNvPr id="15" name="Rounded Rectangle 14"/>
+          <p:cNvSpPr/>
+          <p:nvPr/>
+        </p:nvSpPr>
+        <p:spPr>
+          <a:xfrm>
+            <a:off x="8074152" y="4800600"/>
+            <a:ext cx="3611880" cy="1463040"/>
+          </a:xfrm>
+          <a:prstGeom prst="roundRect">
+            <a:avLst/>
+          </a:prstGeom>
+          <a:solidFill>
+            <a:srgbClr val="DBEEE4"/>
+          </a:solidFill>
+          <a:ln w="12700">
+            <a:solidFill>
+              <a:srgbClr val="88909A"/>
+            </a:solidFill>
+          </a:ln>
+        </p:spPr>
+        <p:style>
+          <a:lnRef idx="1">
+            <a:schemeClr val="accent1"/>
+          </a:lnRef>
+          <a:fillRef idx="3">
+            <a:schemeClr val="accent1"/>
+          </a:fillRef>
+          <a:effectRef idx="2">
+            <a:schemeClr val="accent1"/>
+          </a:effectRef>
+          <a:fontRef idx="minor">
+            <a:schemeClr val="lt1"/>
+          </a:fontRef>
+        </p:style>
+        <p:txBody>
+          <a:bodyPr rtlCol="0" anchor="ctr" wrap="square"/>
+          <a:lstStyle/>
+          <a:p>
+            <a:pPr algn="ctr"/>
+            <a:r>
+              <a:rPr sz="1500" b="1">
+                <a:solidFill>
+                  <a:srgbClr val="2B6B52"/>
+                </a:solidFill>
+                <a:latin typeface="Malgun Gothic"/>
+              </a:rPr>
+              <a:t>가설검정 (3종)</a:t>
+            </a:r>
+          </a:p>
+          <a:p>
+            <a:pPr algn="ctr"/>
+            <a:r>
+              <a:rPr sz="1100">
+                <a:solidFill>
+                  <a:srgbClr val="555555"/>
+                </a:solidFill>
+                <a:latin typeface="Malgun Gothic"/>
+              </a:rPr>
+              <a:t>Pearson → H2 변호사↔부담 r=−.85</a:t>
+            </a:r>
+          </a:p>
+          <a:p>
+            <a:pPr algn="ctr"/>
+            <a:r>
+              <a:rPr sz="1100">
+                <a:solidFill>
+                  <a:srgbClr val="555555"/>
+                </a:solidFill>
+                <a:latin typeface="Malgun Gothic"/>
+              </a:rPr>
+              <a:t>HHI·변동계수 → H4 쏠림 .53→.60</a:t>
+            </a:r>
+          </a:p>
+          <a:p>
+            <a:pPr algn="ctr"/>
+            <a:r>
+              <a:rPr sz="1100">
+                <a:solidFill>
+                  <a:srgbClr val="555555"/>
+                </a:solidFill>
+                <a:latin typeface="Malgun Gothic"/>
+              </a:rPr>
+              <a:t>Mann-Whitney → H1 수도권 차이</a:t>
+            </a:r>
+          </a:p>
+        </p:txBody>
+      </p:sp>
+      <p:sp>
+        <p:nvSpPr>
+          <p:cNvPr id="16" name="TextBox 15"/>
           <p:cNvSpPr txBox="1"/>
           <p:nvPr/>
         </p:nvSpPr>
         <p:spPr>
           <a:xfrm>
-            <a:off x="548640" y="5623560"/>
-            <a:ext cx="11064240" cy="1097280"/>
+            <a:off x="548640" y="6419088"/>
+            <a:ext cx="11064240" cy="365760"/>
           </a:xfrm>
           <a:prstGeom prst="rect">
             <a:avLst/>
@@ -4222,25 +4496,15 @@
           </a:bodyPr>
           <a:lstStyle/>
           <a:p>
-            <a:r>
-              <a:rPr sz="1300" i="1">
+            <a:pPr algn="l"/>
+            <a:r>
+              <a:rPr sz="1200" i="1">
                 <a:solidFill>
                   <a:srgbClr val="555555"/>
                 </a:solidFill>
                 <a:latin typeface="Malgun Gothic"/>
               </a:rPr>
-              <a:t>📊 막대가 길수록 점수 높음 · 서울만 파랑(별도 그룹).</a:t>
-            </a:r>
-          </a:p>
-          <a:p>
-            <a:r>
-              <a:rPr sz="1400" b="1">
-                <a:solidFill>
-                  <a:srgbClr val="C44E52"/>
-                </a:solidFill>
-                <a:latin typeface="Malgun Gothic"/>
-              </a:rPr>
-              <a:t>⚠️ 이 점수는 '인구 1인당'이라 사람 적은 곳이 유리하게 잡힘 — 제주는 변호사 154명(전국 최소)인데도 3위. '구하기 쉬움'이 아니라 '1인당 비율'이 높은 것이니, 반드시 절대 변호사 수와 함께 봐야 함.</a:t>
+              <a:t>※ PCA · Spearman · Silhouette은 결과로 등장하지 않는 교차검증 보조 — 메인 흐름에서 제외(부록 B).</a:t>
             </a:r>
           </a:p>
         </p:txBody>
@@ -4292,7 +4556,7 @@
                 </a:solidFill>
                 <a:latin typeface="Malgun Gothic"/>
               </a:rPr>
-              <a:t>7. 결과 ② — 지역별 색지도</a:t>
+              <a:t>결과 ① — 지역별 점수 순위 (2024)</a:t>
             </a:r>
           </a:p>
         </p:txBody>
@@ -4342,7 +4606,7 @@
       </p:sp>
       <p:pic>
         <p:nvPicPr>
-          <p:cNvPr id="4" name="Picture 3" descr="fig7_map_region13.png"/>
+          <p:cNvPr id="4" name="Picture 3" descr="fig1_llai_ranking_region13.png"/>
           <p:cNvPicPr>
             <a:picLocks noChangeAspect="1"/>
           </p:cNvPicPr>
@@ -4356,8 +4620,8 @@
         </p:blipFill>
         <p:spPr>
           <a:xfrm>
-            <a:off x="3657600" y="1371600"/>
-            <a:ext cx="5525669" cy="4572000"/>
+            <a:off x="365760" y="1554480"/>
+            <a:ext cx="6933804" cy="4297680"/>
           </a:xfrm>
           <a:prstGeom prst="rect">
             <a:avLst/>
@@ -4372,8 +4636,8 @@
         </p:nvSpPr>
         <p:spPr>
           <a:xfrm>
-            <a:off x="640080" y="5989320"/>
-            <a:ext cx="10881360" cy="640080"/>
+            <a:off x="6949440" y="1828800"/>
+            <a:ext cx="4937760" cy="4937760"/>
           </a:xfrm>
           <a:prstGeom prst="rect">
             <a:avLst/>
@@ -4386,14 +4650,128 @@
           </a:bodyPr>
           <a:lstStyle/>
           <a:p>
-            <a:r>
-              <a:rPr sz="1400" i="1">
+            <a:pPr>
+              <a:spcAft>
+                <a:spcPts val="800"/>
+              </a:spcAft>
+            </a:pPr>
+            <a:r>
+              <a:rPr sz="2000">
+                <a:solidFill>
+                  <a:srgbClr val="222222"/>
+                </a:solidFill>
+                <a:latin typeface="Malgun Gothic"/>
+              </a:rPr>
+              <a:t>• 서울 91점 ≫ 압도</a:t>
+            </a:r>
+          </a:p>
+          <a:p>
+            <a:pPr>
+              <a:spcAft>
+                <a:spcPts val="800"/>
+              </a:spcAft>
+            </a:pPr>
+            <a:r>
+              <a:rPr sz="2000">
+                <a:solidFill>
+                  <a:srgbClr val="222222"/>
+                </a:solidFill>
+                <a:latin typeface="Malgun Gothic"/>
+              </a:rPr>
+              <a:t>• 울산·제주 2·3위</a:t>
+            </a:r>
+          </a:p>
+          <a:p>
+            <a:pPr lvl="1">
+              <a:spcAft>
+                <a:spcPts val="800"/>
+              </a:spcAft>
+            </a:pPr>
+            <a:r>
+              <a:rPr sz="1700">
+                <a:solidFill>
+                  <a:srgbClr val="222222"/>
+                </a:solidFill>
+                <a:latin typeface="Malgun Gothic"/>
+              </a:rPr>
+              <a:t>– (1인당만 높음, 절대수는 적음)</a:t>
+            </a:r>
+          </a:p>
+          <a:p>
+            <a:pPr>
+              <a:spcAft>
+                <a:spcPts val="800"/>
+              </a:spcAft>
+            </a:pPr>
+            <a:r>
+              <a:rPr sz="2000">
+                <a:solidFill>
+                  <a:srgbClr val="222222"/>
+                </a:solidFill>
+                <a:latin typeface="Malgun Gothic"/>
+              </a:rPr>
+              <a:t>• 인천은 하위권</a:t>
+            </a:r>
+          </a:p>
+          <a:p>
+            <a:pPr lvl="1">
+              <a:spcAft>
+                <a:spcPts val="800"/>
+              </a:spcAft>
+            </a:pPr>
+            <a:r>
+              <a:rPr sz="1700">
+                <a:solidFill>
+                  <a:srgbClr val="222222"/>
+                </a:solidFill>
+                <a:latin typeface="Malgun Gothic"/>
+              </a:rPr>
+              <a:t>– (사건이 많아 바쁨)</a:t>
+            </a:r>
+          </a:p>
+        </p:txBody>
+      </p:sp>
+      <p:sp>
+        <p:nvSpPr>
+          <p:cNvPr id="6" name="TextBox 5"/>
+          <p:cNvSpPr txBox="1"/>
+          <p:nvPr/>
+        </p:nvSpPr>
+        <p:spPr>
+          <a:xfrm>
+            <a:off x="548640" y="5623560"/>
+            <a:ext cx="11064240" cy="1097280"/>
+          </a:xfrm>
+          <a:prstGeom prst="rect">
+            <a:avLst/>
+          </a:prstGeom>
+          <a:noFill/>
+        </p:spPr>
+        <p:txBody>
+          <a:bodyPr wrap="square">
+            <a:spAutoFit/>
+          </a:bodyPr>
+          <a:lstStyle/>
+          <a:p>
+            <a:r>
+              <a:rPr sz="1300" i="1">
                 <a:solidFill>
                   <a:srgbClr val="555555"/>
                 </a:solidFill>
                 <a:latin typeface="Malgun Gothic"/>
               </a:rPr>
-              <a:t>📊 읽는 법 — 파랑=점수 높음(좋음), 빨강=낮음(나쁨). 서울만 파랑, 전국이 붉음 → 서울 일극 집중.</a:t>
+              <a:t>📊 막대가 길수록 점수 높음 · 서울만 파랑(별도 그룹).</a:t>
+            </a:r>
+          </a:p>
+          <a:p>
+            <a:r>
+              <a:rPr sz="1400" b="1">
+                <a:solidFill>
+                  <a:srgbClr val="C44E52"/>
+                </a:solidFill>
+                <a:latin typeface="Malgun Gothic"/>
+              </a:rPr>
+              <a:t>⚠️ 이 점수는 '인구 1인당'이라 사람 적은 곳이 유리하게 잡힘 — 제주는 변호사 154명(전국 최소)인데도 3위. '구하기 쉬움'이 아니라 '1인당 비율'이 높은 것이니, 반드시 절대 변호사 수와 함께 봐야 함.</a:t>
             </a:r>
           </a:p>
         </p:txBody>
@@ -4445,7 +4823,7 @@
                 </a:solidFill>
                 <a:latin typeface="Malgun Gothic"/>
               </a:rPr>
-              <a:t>8. 가설 H2 — 변호사 많을수록 덜 바쁘다</a:t>
+              <a:t>결과 ② — 지역별 색지도</a:t>
             </a:r>
           </a:p>
         </p:txBody>
@@ -4495,7 +4873,7 @@
       </p:sp>
       <p:pic>
         <p:nvPicPr>
-          <p:cNvPr id="4" name="Picture 3" descr="fig2_scatter_a1_a2_region13.png"/>
+          <p:cNvPr id="4" name="Picture 3" descr="fig7_map_region13.png"/>
           <p:cNvPicPr>
             <a:picLocks noChangeAspect="1"/>
           </p:cNvPicPr>
@@ -4509,8 +4887,8 @@
         </p:blipFill>
         <p:spPr>
           <a:xfrm>
-            <a:off x="457200" y="1554480"/>
-            <a:ext cx="5346315" cy="4206240"/>
+            <a:off x="3657600" y="1371600"/>
+            <a:ext cx="5525669" cy="4572000"/>
           </a:xfrm>
           <a:prstGeom prst="rect">
             <a:avLst/>
@@ -4525,8 +4903,8 @@
         </p:nvSpPr>
         <p:spPr>
           <a:xfrm>
-            <a:off x="7040880" y="1737360"/>
-            <a:ext cx="4846320" cy="4937760"/>
+            <a:off x="640080" y="5989320"/>
+            <a:ext cx="10881360" cy="640080"/>
           </a:xfrm>
           <a:prstGeom prst="rect">
             <a:avLst/>
@@ -4539,109 +4917,6 @@
           </a:bodyPr>
           <a:lstStyle/>
           <a:p>
-            <a:pPr>
-              <a:spcAft>
-                <a:spcPts val="800"/>
-              </a:spcAft>
-            </a:pPr>
-            <a:r>
-              <a:rPr sz="1900">
-                <a:solidFill>
-                  <a:srgbClr val="222222"/>
-                </a:solidFill>
-                <a:latin typeface="Malgun Gothic"/>
-              </a:rPr>
-              <a:t>• 변호사 많은 곳일수록 1인당 사건부담 ↓</a:t>
-            </a:r>
-          </a:p>
-          <a:p>
-            <a:pPr lvl="1">
-              <a:spcAft>
-                <a:spcPts val="800"/>
-              </a:spcAft>
-            </a:pPr>
-            <a:r>
-              <a:rPr sz="1600">
-                <a:solidFill>
-                  <a:srgbClr val="222222"/>
-                </a:solidFill>
-                <a:latin typeface="Malgun Gothic"/>
-              </a:rPr>
-              <a:t>– 두 값의 관계 = −0.85 (강한 반대 방향)</a:t>
-            </a:r>
-          </a:p>
-          <a:p>
-            <a:pPr lvl="1">
-              <a:spcAft>
-                <a:spcPts val="800"/>
-              </a:spcAft>
-            </a:pPr>
-            <a:r>
-              <a:rPr sz="1600">
-                <a:solidFill>
-                  <a:srgbClr val="222222"/>
-                </a:solidFill>
-                <a:latin typeface="Malgun Gothic"/>
-              </a:rPr>
-              <a:t>– '반대 방향' = 한쪽 늘면 다른 쪽 줆</a:t>
-            </a:r>
-          </a:p>
-          <a:p>
-            <a:pPr lvl="1">
-              <a:spcAft>
-                <a:spcPts val="800"/>
-              </a:spcAft>
-            </a:pPr>
-            <a:r>
-              <a:rPr sz="1600">
-                <a:solidFill>
-                  <a:srgbClr val="222222"/>
-                </a:solidFill>
-                <a:latin typeface="Malgun Gothic"/>
-              </a:rPr>
-              <a:t>– → 바람직한 관계 (변호사 많으면 덜 바쁨)</a:t>
-            </a:r>
-          </a:p>
-          <a:p>
-            <a:pPr>
-              <a:spcAft>
-                <a:spcPts val="800"/>
-              </a:spcAft>
-            </a:pPr>
-            <a:r>
-              <a:rPr sz="1900">
-                <a:solidFill>
-                  <a:srgbClr val="222222"/>
-                </a:solidFill>
-                <a:latin typeface="Malgun Gothic"/>
-              </a:rPr>
-              <a:t>• 서울은 우하단 극단 (많고 + 안 바쁨)</a:t>
-            </a:r>
-          </a:p>
-        </p:txBody>
-      </p:sp>
-      <p:sp>
-        <p:nvSpPr>
-          <p:cNvPr id="6" name="TextBox 5"/>
-          <p:cNvSpPr txBox="1"/>
-          <p:nvPr/>
-        </p:nvSpPr>
-        <p:spPr>
-          <a:xfrm>
-            <a:off x="640080" y="5989320"/>
-            <a:ext cx="10881360" cy="640080"/>
-          </a:xfrm>
-          <a:prstGeom prst="rect">
-            <a:avLst/>
-          </a:prstGeom>
-          <a:noFill/>
-        </p:spPr>
-        <p:txBody>
-          <a:bodyPr wrap="square">
-            <a:spAutoFit/>
-          </a:bodyPr>
-          <a:lstStyle/>
-          <a:p>
             <a:r>
               <a:rPr sz="1400" i="1">
                 <a:solidFill>
@@ -4649,7 +4924,7 @@
                 </a:solidFill>
                 <a:latin typeface="Malgun Gothic"/>
               </a:rPr>
-              <a:t>📊 읽는 법 — 오른쪽 아래로 갈수록 좋음. 서울은 맨 오른쪽 아래, 지방은 왼쪽 위에 뭉침.</a:t>
+              <a:t>📊 읽는 법 — 파랑=점수 높음(좋음), 빨강=낮음(나쁨). 서울만 파랑, 전국이 붉음 → 서울 일극 집중.</a:t>
             </a:r>
           </a:p>
         </p:txBody>
@@ -4701,7 +4976,7 @@
                 </a:solidFill>
                 <a:latin typeface="Malgun Gothic"/>
               </a:rPr>
-              <a:t>9. 가설 H4 — 늘려도 격차는 안 준다 ★</a:t>
+              <a:t>가설 H2 — 변호사 많을수록 덜 바쁘다</a:t>
             </a:r>
           </a:p>
         </p:txBody>
@@ -4751,7 +5026,7 @@
       </p:sp>
       <p:pic>
         <p:nvPicPr>
-          <p:cNvPr id="4" name="Picture 3" descr="fig8_lawyer_trend.png"/>
+          <p:cNvPr id="4" name="Picture 3" descr="fig2_scatter_a1_a2_region13.png"/>
           <p:cNvPicPr>
             <a:picLocks noChangeAspect="1"/>
           </p:cNvPicPr>
@@ -4766,7 +5041,7 @@
         <p:spPr>
           <a:xfrm>
             <a:off x="457200" y="1554480"/>
-            <a:ext cx="7072970" cy="4114800"/>
+            <a:ext cx="5346315" cy="4206240"/>
           </a:xfrm>
           <a:prstGeom prst="rect">
             <a:avLst/>
@@ -4781,8 +5056,8 @@
         </p:nvSpPr>
         <p:spPr>
           <a:xfrm>
-            <a:off x="7680960" y="1737360"/>
-            <a:ext cx="4297680" cy="4937760"/>
+            <a:off x="7040880" y="1737360"/>
+            <a:ext cx="4846320" cy="4937760"/>
           </a:xfrm>
           <a:prstGeom prst="rect">
             <a:avLst/>
@@ -4801,13 +5076,13 @@
               </a:spcAft>
             </a:pPr>
             <a:r>
-              <a:rPr sz="1800">
+              <a:rPr sz="1900">
                 <a:solidFill>
                   <a:srgbClr val="222222"/>
                 </a:solidFill>
                 <a:latin typeface="Malgun Gothic"/>
               </a:rPr>
-              <a:t>• 변호사 3.4배↑</a:t>
+              <a:t>• 변호사 많은 곳일수록 1인당 사건부담 ↓</a:t>
             </a:r>
           </a:p>
           <a:p>
@@ -4817,13 +5092,45 @@
               </a:spcAft>
             </a:pPr>
             <a:r>
-              <a:rPr sz="1500">
+              <a:rPr sz="1600">
                 <a:solidFill>
                   <a:srgbClr val="222222"/>
                 </a:solidFill>
                 <a:latin typeface="Malgun Gothic"/>
               </a:rPr>
-              <a:t>– 9,612 → 32,273명</a:t>
+              <a:t>– 두 값의 관계 = −0.85 (강한 반대 방향)</a:t>
+            </a:r>
+          </a:p>
+          <a:p>
+            <a:pPr lvl="1">
+              <a:spcAft>
+                <a:spcPts val="800"/>
+              </a:spcAft>
+            </a:pPr>
+            <a:r>
+              <a:rPr sz="1600">
+                <a:solidFill>
+                  <a:srgbClr val="222222"/>
+                </a:solidFill>
+                <a:latin typeface="Malgun Gothic"/>
+              </a:rPr>
+              <a:t>– '반대 방향' = 한쪽 늘면 다른 쪽 줆</a:t>
+            </a:r>
+          </a:p>
+          <a:p>
+            <a:pPr lvl="1">
+              <a:spcAft>
+                <a:spcPts val="800"/>
+              </a:spcAft>
+            </a:pPr>
+            <a:r>
+              <a:rPr sz="1600">
+                <a:solidFill>
+                  <a:srgbClr val="222222"/>
+                </a:solidFill>
+                <a:latin typeface="Malgun Gothic"/>
+              </a:rPr>
+              <a:t>– → 바람직한 관계 (변호사 많으면 덜 바쁨)</a:t>
             </a:r>
           </a:p>
           <a:p>
@@ -4833,45 +5140,13 @@
               </a:spcAft>
             </a:pPr>
             <a:r>
-              <a:rPr sz="1800">
+              <a:rPr sz="1900">
                 <a:solidFill>
                   <a:srgbClr val="222222"/>
                 </a:solidFill>
                 <a:latin typeface="Malgun Gothic"/>
               </a:rPr>
-              <a:t>• 그런데 서울 비중 71%→76%↑</a:t>
-            </a:r>
-          </a:p>
-          <a:p>
-            <a:pPr lvl="1">
-              <a:spcAft>
-                <a:spcPts val="800"/>
-              </a:spcAft>
-            </a:pPr>
-            <a:r>
-              <a:rPr sz="1500">
-                <a:solidFill>
-                  <a:srgbClr val="222222"/>
-                </a:solidFill>
-                <a:latin typeface="Malgun Gothic"/>
-              </a:rPr>
-              <a:t>– 지방은 全 권역 비중 하락</a:t>
-            </a:r>
-          </a:p>
-          <a:p>
-            <a:pPr>
-              <a:spcAft>
-                <a:spcPts val="800"/>
-              </a:spcAft>
-            </a:pPr>
-            <a:r>
-              <a:rPr sz="1800">
-                <a:solidFill>
-                  <a:srgbClr val="222222"/>
-                </a:solidFill>
-                <a:latin typeface="Malgun Gothic"/>
-              </a:rPr>
-              <a:t>• = 쏠림 더 심해짐</a:t>
+              <a:t>• 서울은 우하단 극단 (많고 + 안 바쁨)</a:t>
             </a:r>
           </a:p>
         </p:txBody>
@@ -4905,7 +5180,7 @@
                 </a:solidFill>
                 <a:latin typeface="Malgun Gothic"/>
               </a:rPr>
-              <a:t>📊 읽는 법 — 권역별 점유율 2009(회색) vs 2026(빨강). 서울만 커지고 나머지는 줄거나 정체.</a:t>
+              <a:t>📊 읽는 법 — 오른쪽 아래로 갈수록 좋음. 서울은 맨 오른쪽 아래, 지방은 왼쪽 위에 뭉침.</a:t>
             </a:r>
           </a:p>
         </p:txBody>
@@ -4957,7 +5232,7 @@
                 </a:solidFill>
                 <a:latin typeface="Malgun Gothic"/>
               </a:rPr>
-              <a:t>10. 서울 제외 ① — 누가 올라오나 (지도)</a:t>
+              <a:t>가설 H4 — 늘려도 격차는 안 준다 ★</a:t>
             </a:r>
           </a:p>
         </p:txBody>
@@ -5007,7 +5282,7 @@
       </p:sp>
       <p:pic>
         <p:nvPicPr>
-          <p:cNvPr id="4" name="Picture 3" descr="fig7_map_region13_exseoul.png"/>
+          <p:cNvPr id="4" name="Picture 3" descr="fig8_lawyer_trend.png"/>
           <p:cNvPicPr>
             <a:picLocks noChangeAspect="1"/>
           </p:cNvPicPr>
@@ -5021,8 +5296,8 @@
         </p:blipFill>
         <p:spPr>
           <a:xfrm>
-            <a:off x="365760" y="1463040"/>
-            <a:ext cx="5304642" cy="4389120"/>
+            <a:off x="457200" y="1554480"/>
+            <a:ext cx="7072970" cy="4114800"/>
           </a:xfrm>
           <a:prstGeom prst="rect">
             <a:avLst/>
@@ -5037,8 +5312,8 @@
         </p:nvSpPr>
         <p:spPr>
           <a:xfrm>
-            <a:off x="7040880" y="1828800"/>
-            <a:ext cx="4846320" cy="4937760"/>
+            <a:off x="7680960" y="1737360"/>
+            <a:ext cx="4297680" cy="4937760"/>
           </a:xfrm>
           <a:prstGeom prst="rect">
             <a:avLst/>
@@ -5057,13 +5332,29 @@
               </a:spcAft>
             </a:pPr>
             <a:r>
-              <a:rPr sz="2000">
+              <a:rPr sz="1800">
                 <a:solidFill>
                   <a:srgbClr val="222222"/>
                 </a:solidFill>
                 <a:latin typeface="Malgun Gothic"/>
               </a:rPr>
-              <a:t>• 서울을 빼고 12권역만 다시 점수화</a:t>
+              <a:t>• 변호사 3.4배↑</a:t>
+            </a:r>
+          </a:p>
+          <a:p>
+            <a:pPr lvl="1">
+              <a:spcAft>
+                <a:spcPts val="800"/>
+              </a:spcAft>
+            </a:pPr>
+            <a:r>
+              <a:rPr sz="1500">
+                <a:solidFill>
+                  <a:srgbClr val="222222"/>
+                </a:solidFill>
+                <a:latin typeface="Malgun Gothic"/>
+              </a:rPr>
+              <a:t>– 9,612 → 32,273명</a:t>
             </a:r>
           </a:p>
           <a:p>
@@ -5073,13 +5364,29 @@
               </a:spcAft>
             </a:pPr>
             <a:r>
-              <a:rPr sz="2000">
+              <a:rPr sz="1800">
                 <a:solidFill>
                   <a:srgbClr val="222222"/>
                 </a:solidFill>
                 <a:latin typeface="Malgun Gothic"/>
               </a:rPr>
-              <a:t>• 부산·울산·제주 상위로 올라옴</a:t>
+              <a:t>• 그런데 서울 비중 71%→76%↑</a:t>
+            </a:r>
+          </a:p>
+          <a:p>
+            <a:pPr lvl="1">
+              <a:spcAft>
+                <a:spcPts val="800"/>
+              </a:spcAft>
+            </a:pPr>
+            <a:r>
+              <a:rPr sz="1500">
+                <a:solidFill>
+                  <a:srgbClr val="222222"/>
+                </a:solidFill>
+                <a:latin typeface="Malgun Gothic"/>
+              </a:rPr>
+              <a:t>– 지방은 全 권역 비중 하락</a:t>
             </a:r>
           </a:p>
           <a:p>
@@ -5089,45 +5396,13 @@
               </a:spcAft>
             </a:pPr>
             <a:r>
-              <a:rPr sz="2000">
+              <a:rPr sz="1800">
                 <a:solidFill>
                   <a:srgbClr val="222222"/>
                 </a:solidFill>
                 <a:latin typeface="Malgun Gothic"/>
               </a:rPr>
-              <a:t>• 경기·인천은 중하위</a:t>
-            </a:r>
-          </a:p>
-          <a:p>
-            <a:pPr>
-              <a:spcAft>
-                <a:spcPts val="800"/>
-              </a:spcAft>
-            </a:pPr>
-            <a:r>
-              <a:rPr sz="2000">
-                <a:solidFill>
-                  <a:srgbClr val="222222"/>
-                </a:solidFill>
-                <a:latin typeface="Malgun Gothic"/>
-              </a:rPr>
-              <a:t>• '수도권이 좋다'는 건</a:t>
-            </a:r>
-          </a:p>
-          <a:p>
-            <a:pPr lvl="1">
-              <a:spcAft>
-                <a:spcPts val="800"/>
-              </a:spcAft>
-            </a:pPr>
-            <a:r>
-              <a:rPr sz="1700">
-                <a:solidFill>
-                  <a:srgbClr val="222222"/>
-                </a:solidFill>
-                <a:latin typeface="Malgun Gothic"/>
-              </a:rPr>
-              <a:t>– 사실 '서울만 좋다'였던 것</a:t>
+              <a:t>• = 쏠림 더 심해짐</a:t>
             </a:r>
           </a:p>
         </p:txBody>
@@ -5161,7 +5436,7 @@
                 </a:solidFill>
                 <a:latin typeface="Malgun Gothic"/>
               </a:rPr>
-              <a:t>📊 읽는 법 — 서울 제외 후 다시 점수화(서울 회색). 색 범위가 넓어져 지방 내부 격차가 보임.</a:t>
+              <a:t>📊 읽는 법 — 권역별 점유율 2009(회색) vs 2026(빨강). 서울만 커지고 나머지는 줄거나 정체.</a:t>
             </a:r>
           </a:p>
         </p:txBody>
@@ -5213,7 +5488,7 @@
                 </a:solidFill>
                 <a:latin typeface="Malgun Gothic"/>
               </a:rPr>
-              <a:t>10. 서울 제외 ② — 그래서 무엇이 보이나</a:t>
+              <a:t>서울 제외 ① — 누가 올라오나 (지도)</a:t>
             </a:r>
           </a:p>
         </p:txBody>
@@ -5263,7 +5538,7 @@
       </p:sp>
       <p:pic>
         <p:nvPicPr>
-          <p:cNvPr id="4" name="Picture 3" descr="fig1_llai_ranking_region13_exseoul.png"/>
+          <p:cNvPr id="4" name="Picture 3" descr="fig7_map_region13_exseoul.png"/>
           <p:cNvPicPr>
             <a:picLocks noChangeAspect="1"/>
           </p:cNvPicPr>
@@ -5277,8 +5552,8 @@
         </p:blipFill>
         <p:spPr>
           <a:xfrm>
-            <a:off x="365760" y="1554480"/>
-            <a:ext cx="6933804" cy="4297680"/>
+            <a:off x="365760" y="1463040"/>
+            <a:ext cx="5304642" cy="4389120"/>
           </a:xfrm>
           <a:prstGeom prst="rect">
             <a:avLst/>
@@ -5293,8 +5568,8 @@
         </p:nvSpPr>
         <p:spPr>
           <a:xfrm>
-            <a:off x="6858000" y="1600200"/>
-            <a:ext cx="5029200" cy="4937760"/>
+            <a:off x="7040880" y="1828800"/>
+            <a:ext cx="4846320" cy="4937760"/>
           </a:xfrm>
           <a:prstGeom prst="rect">
             <a:avLst/>
@@ -5313,13 +5588,61 @@
               </a:spcAft>
             </a:pPr>
             <a:r>
-              <a:rPr sz="2100" b="1">
-                <a:solidFill>
-                  <a:srgbClr val="C44E52"/>
-                </a:solidFill>
-                <a:latin typeface="Malgun Gothic"/>
-              </a:rPr>
-              <a:t>• 핵심: '수도권 우위'는 서울을 빼면 역전된다</a:t>
+              <a:rPr sz="2000">
+                <a:solidFill>
+                  <a:srgbClr val="222222"/>
+                </a:solidFill>
+                <a:latin typeface="Malgun Gothic"/>
+              </a:rPr>
+              <a:t>• 서울을 빼고 12권역만 다시 점수화</a:t>
+            </a:r>
+          </a:p>
+          <a:p>
+            <a:pPr>
+              <a:spcAft>
+                <a:spcPts val="800"/>
+              </a:spcAft>
+            </a:pPr>
+            <a:r>
+              <a:rPr sz="2000">
+                <a:solidFill>
+                  <a:srgbClr val="222222"/>
+                </a:solidFill>
+                <a:latin typeface="Malgun Gothic"/>
+              </a:rPr>
+              <a:t>• 부산·울산·제주 상위로 올라옴</a:t>
+            </a:r>
+          </a:p>
+          <a:p>
+            <a:pPr>
+              <a:spcAft>
+                <a:spcPts val="800"/>
+              </a:spcAft>
+            </a:pPr>
+            <a:r>
+              <a:rPr sz="2000">
+                <a:solidFill>
+                  <a:srgbClr val="222222"/>
+                </a:solidFill>
+                <a:latin typeface="Malgun Gothic"/>
+              </a:rPr>
+              <a:t>• 경기·인천은 중하위</a:t>
+            </a:r>
+          </a:p>
+          <a:p>
+            <a:pPr>
+              <a:spcAft>
+                <a:spcPts val="800"/>
+              </a:spcAft>
+            </a:pPr>
+            <a:r>
+              <a:rPr sz="2000">
+                <a:solidFill>
+                  <a:srgbClr val="222222"/>
+                </a:solidFill>
+                <a:latin typeface="Malgun Gothic"/>
+              </a:rPr>
+              <a:t>• '수도권이 좋다'는 건</a:t>
             </a:r>
           </a:p>
           <a:p>
@@ -5329,45 +5652,13 @@
               </a:spcAft>
             </a:pPr>
             <a:r>
-              <a:rPr sz="1700" b="0">
+              <a:rPr sz="1700">
                 <a:solidFill>
                   <a:srgbClr val="222222"/>
                 </a:solidFill>
                 <a:latin typeface="Malgun Gothic"/>
               </a:rPr>
-              <a:t>– 경기·인천이 오히려 평균 이하</a:t>
-            </a:r>
-          </a:p>
-          <a:p>
-            <a:pPr lvl="1">
-              <a:spcAft>
-                <a:spcPts val="800"/>
-              </a:spcAft>
-            </a:pPr>
-            <a:r>
-              <a:rPr sz="1700" b="0">
-                <a:solidFill>
-                  <a:srgbClr val="222222"/>
-                </a:solidFill>
-                <a:latin typeface="Malgun Gothic"/>
-              </a:rPr>
-              <a:t>– 부산·울산 등 광역시가 지방 상위</a:t>
-            </a:r>
-          </a:p>
-          <a:p>
-            <a:pPr>
-              <a:spcAft>
-                <a:spcPts val="800"/>
-              </a:spcAft>
-            </a:pPr>
-            <a:r>
-              <a:rPr sz="1900" b="0">
-                <a:solidFill>
-                  <a:srgbClr val="222222"/>
-                </a:solidFill>
-                <a:latin typeface="Malgun Gothic"/>
-              </a:rPr>
-              <a:t>• 변별 요인도 바뀐다: 변호사 수 → 취약계층 지원(A3)</a:t>
+              <a:t>– 사실 '서울만 좋다'였던 것</a:t>
             </a:r>
           </a:p>
         </p:txBody>
@@ -5401,7 +5692,7 @@
                 </a:solidFill>
                 <a:latin typeface="Malgun Gothic"/>
               </a:rPr>
-              <a:t>📊 읽는 법 — 서울 뺀 12권역 점수 순위. 부산·울산·제주 상위, 강원·충북 최하.</a:t>
+              <a:t>📊 읽는 법 — 서울 제외 후 다시 점수화(서울 회색). 색 범위가 넓어져 지방 내부 격차가 보임.</a:t>
             </a:r>
           </a:p>
         </p:txBody>
@@ -5453,7 +5744,7 @@
                 </a:solidFill>
                 <a:latin typeface="Malgun Gothic"/>
               </a:rPr>
-              <a:t>그래서 뭐? — 변호사 없이 받는 재판</a:t>
+              <a:t>서울 제외 ② — 그래서 무엇이 보이나</a:t>
             </a:r>
           </a:p>
         </p:txBody>
@@ -5501,128 +5792,30 @@
           </a:p>
         </p:txBody>
       </p:sp>
-      <p:sp>
-        <p:nvSpPr>
-          <p:cNvPr id="4" name="Rounded Rectangle 3"/>
-          <p:cNvSpPr/>
+      <p:pic>
+        <p:nvPicPr>
+          <p:cNvPr id="4" name="Picture 3" descr="fig1_llai_ranking_region13_exseoul.png"/>
+          <p:cNvPicPr>
+            <a:picLocks noChangeAspect="1"/>
+          </p:cNvPicPr>
           <p:nvPr/>
-        </p:nvSpPr>
-        <p:spPr>
-          <a:xfrm>
-            <a:off x="640080" y="1463040"/>
-            <a:ext cx="10881360" cy="868680"/>
-          </a:xfrm>
-          <a:prstGeom prst="roundRect">
+        </p:nvPicPr>
+        <p:blipFill>
+          <a:blip r:embed="rId2"/>
+          <a:stretch>
+            <a:fillRect/>
+          </a:stretch>
+        </p:blipFill>
+        <p:spPr>
+          <a:xfrm>
+            <a:off x="365760" y="1554480"/>
+            <a:ext cx="6933804" cy="4297680"/>
+          </a:xfrm>
+          <a:prstGeom prst="rect">
             <a:avLst/>
           </a:prstGeom>
-          <a:solidFill>
-            <a:srgbClr val="EDF1F7"/>
-          </a:solidFill>
-          <a:ln>
-            <a:solidFill>
-              <a:srgbClr val="1F3A5F"/>
-            </a:solidFill>
-          </a:ln>
-        </p:spPr>
-        <p:style>
-          <a:lnRef idx="1">
-            <a:schemeClr val="accent1"/>
-          </a:lnRef>
-          <a:fillRef idx="3">
-            <a:schemeClr val="accent1"/>
-          </a:fillRef>
-          <a:effectRef idx="2">
-            <a:schemeClr val="accent1"/>
-          </a:effectRef>
-          <a:fontRef idx="minor">
-            <a:schemeClr val="lt1"/>
-          </a:fontRef>
-        </p:style>
-        <p:txBody>
-          <a:bodyPr rtlCol="0" anchor="ctr" wrap="square"/>
-          <a:lstStyle/>
-          <a:p>
-            <a:pPr algn="ctr">
-              <a:spcAft>
-                <a:spcPts val="900"/>
-              </a:spcAft>
-            </a:pPr>
-            <a:r>
-              <a:rPr sz="2000">
-                <a:solidFill>
-                  <a:srgbClr val="222222"/>
-                </a:solidFill>
-                <a:latin typeface="Malgun Gothic"/>
-              </a:rPr>
-              <a:t>• 형사 1심의 약 45%가 변호사 없는 '나홀로소송' (민사 소액은 81.8%)</a:t>
-            </a:r>
-          </a:p>
-          <a:p>
-            <a:pPr>
-              <a:spcAft>
-                <a:spcPts val="900"/>
-              </a:spcAft>
-            </a:pPr>
-            <a:r>
-              <a:rPr sz="2000">
-                <a:solidFill>
-                  <a:srgbClr val="222222"/>
-                </a:solidFill>
-                <a:latin typeface="Malgun Gothic"/>
-              </a:rPr>
-              <a:t>• 지역 격차 — 서울중앙 35%(최저) vs 대구 51%·수원 48%·인천 48%(최고)</a:t>
-            </a:r>
-          </a:p>
-          <a:p>
-            <a:pPr>
-              <a:spcAft>
-                <a:spcPts val="900"/>
-              </a:spcAft>
-            </a:pPr>
-            <a:r>
-              <a:rPr sz="2000">
-                <a:solidFill>
-                  <a:srgbClr val="222222"/>
-                </a:solidFill>
-                <a:latin typeface="Malgun Gothic"/>
-              </a:rPr>
-              <a:t>• 변호사 부족 지역일수록 혼자 재판 → 방어권·승소율에서 불이익</a:t>
-            </a:r>
-          </a:p>
-          <a:p>
-            <a:pPr>
-              <a:spcAft>
-                <a:spcPts val="900"/>
-              </a:spcAft>
-            </a:pPr>
-            <a:r>
-              <a:rPr sz="2000">
-                <a:solidFill>
-                  <a:srgbClr val="222222"/>
-                </a:solidFill>
-                <a:latin typeface="Malgun Gothic"/>
-              </a:rPr>
-              <a:t>• LLAI 격차는 '숫자'가 아니라 '재판의 질' 문제</a:t>
-            </a:r>
-          </a:p>
-          <a:p>
-            <a:pPr lvl="1">
-              <a:spcAft>
-                <a:spcPts val="900"/>
-              </a:spcAft>
-            </a:pPr>
-            <a:r>
-              <a:rPr sz="1700">
-                <a:solidFill>
-                  <a:srgbClr val="222222"/>
-                </a:solidFill>
-                <a:latin typeface="Malgun Gothic"/>
-              </a:rPr>
-              <a:t>– ※ 현재는 4개 법원 사례로 '방향' 제시 — 13권역 전수 상관은 향후 과제</a:t>
-            </a:r>
-          </a:p>
-        </p:txBody>
-      </p:sp>
+        </p:spPr>
+      </p:pic>
       <p:sp>
         <p:nvSpPr>
           <p:cNvPr id="5" name="TextBox 4"/>
@@ -5631,8 +5824,8 @@
         </p:nvSpPr>
         <p:spPr>
           <a:xfrm>
-            <a:off x="640080" y="2651760"/>
-            <a:ext cx="10881360" cy="3108960"/>
+            <a:off x="6858000" y="1600200"/>
+            <a:ext cx="5029200" cy="4937760"/>
           </a:xfrm>
           <a:prstGeom prst="rect">
             <a:avLst/>
@@ -5647,81 +5840,65 @@
           <a:p>
             <a:pPr>
               <a:spcAft>
-                <a:spcPts val="1100"/>
+                <a:spcPts val="800"/>
               </a:spcAft>
             </a:pPr>
             <a:r>
-              <a:rPr sz="2000">
+              <a:rPr sz="2100" b="1">
+                <a:solidFill>
+                  <a:srgbClr val="C44E52"/>
+                </a:solidFill>
+                <a:latin typeface="Malgun Gothic"/>
+              </a:rPr>
+              <a:t>• 핵심: '수도권 우위'는 서울을 빼면 역전된다</a:t>
+            </a:r>
+          </a:p>
+          <a:p>
+            <a:pPr lvl="1">
+              <a:spcAft>
+                <a:spcPts val="800"/>
+              </a:spcAft>
+            </a:pPr>
+            <a:r>
+              <a:rPr sz="1700" b="0">
                 <a:solidFill>
                   <a:srgbClr val="222222"/>
                 </a:solidFill>
                 <a:latin typeface="Malgun Gothic"/>
               </a:rPr>
-              <a:t>• 형사 1심의 약 45%가 변호사 없는 '나홀로소송' (민사 소액사건은 81.8%)</a:t>
+              <a:t>– 경기·인천이 오히려 평균 이하</a:t>
+            </a:r>
+          </a:p>
+          <a:p>
+            <a:pPr lvl="1">
+              <a:spcAft>
+                <a:spcPts val="800"/>
+              </a:spcAft>
+            </a:pPr>
+            <a:r>
+              <a:rPr sz="1700" b="0">
+                <a:solidFill>
+                  <a:srgbClr val="222222"/>
+                </a:solidFill>
+                <a:latin typeface="Malgun Gothic"/>
+              </a:rPr>
+              <a:t>– 부산·울산 등 광역시가 지방 상위</a:t>
             </a:r>
           </a:p>
           <a:p>
             <a:pPr>
               <a:spcAft>
-                <a:spcPts val="1100"/>
+                <a:spcPts val="800"/>
               </a:spcAft>
             </a:pPr>
             <a:r>
-              <a:rPr sz="2000">
+              <a:rPr sz="1900" b="0">
                 <a:solidFill>
                   <a:srgbClr val="222222"/>
                 </a:solidFill>
                 <a:latin typeface="Malgun Gothic"/>
               </a:rPr>
-              <a:t>• 지역 격차 — 서울중앙 35%(전국 최저) vs 대구 51% · 수원 48% · 인천 48%(최고)</a:t>
-            </a:r>
-          </a:p>
-          <a:p>
-            <a:pPr>
-              <a:spcAft>
-                <a:spcPts val="1100"/>
-              </a:spcAft>
-            </a:pPr>
-            <a:r>
-              <a:rPr sz="2000">
-                <a:solidFill>
-                  <a:srgbClr val="222222"/>
-                </a:solidFill>
-                <a:latin typeface="Malgun Gothic"/>
-              </a:rPr>
-              <a:t>• 변호사 부족 지역일수록 혼자 재판 → 방어권·승소 가능성에서 직접 불이익</a:t>
-            </a:r>
-          </a:p>
-          <a:p>
-            <a:pPr>
-              <a:spcAft>
-                <a:spcPts val="1100"/>
-              </a:spcAft>
-            </a:pPr>
-            <a:r>
-              <a:rPr sz="2000">
-                <a:solidFill>
-                  <a:srgbClr val="222222"/>
-                </a:solidFill>
-                <a:latin typeface="Malgun Gothic"/>
-              </a:rPr>
-              <a:t>• 본 분석 하위권 인천(LLAI 5.0)도 나홀로소송 48% → 두 지표가 같은 방향</a:t>
-            </a:r>
-          </a:p>
-          <a:p>
-            <a:pPr>
-              <a:spcAft>
-                <a:spcPts val="1100"/>
-              </a:spcAft>
-            </a:pPr>
-            <a:r>
-              <a:rPr sz="2000">
-                <a:solidFill>
-                  <a:srgbClr val="222222"/>
-                </a:solidFill>
-                <a:latin typeface="Malgun Gothic"/>
-              </a:rPr>
-              <a:t>• → LLAI 격차는 '숫자'가 아니라 시민이 겪는 '재판의 질' 문제</a:t>
+              <a:t>• 변별 요인도 바뀐다: 변호사 수 → 취약계층 지원(A3)</a:t>
             </a:r>
           </a:p>
         </p:txBody>
@@ -5734,8 +5911,8 @@
         </p:nvSpPr>
         <p:spPr>
           <a:xfrm>
-            <a:off x="640080" y="6035040"/>
-            <a:ext cx="10881360" cy="457200"/>
+            <a:off x="640080" y="5989320"/>
+            <a:ext cx="10881360" cy="640080"/>
           </a:xfrm>
           <a:prstGeom prst="rect">
             <a:avLst/>
@@ -5743,19 +5920,19 @@
           <a:noFill/>
         </p:spPr>
         <p:txBody>
-          <a:bodyPr wrap="none">
+          <a:bodyPr wrap="square">
             <a:spAutoFit/>
           </a:bodyPr>
           <a:lstStyle/>
           <a:p>
             <a:r>
-              <a:rPr sz="1200" i="1">
+              <a:rPr sz="1400" i="1">
                 <a:solidFill>
                   <a:srgbClr val="555555"/>
                 </a:solidFill>
                 <a:latin typeface="Malgun Gothic"/>
               </a:rPr>
-              <a:t>※ 출처: 사법연감·박주민 의원실(리걸타임즈·뉴스1 보도). 외부 통계 인용으로 본 연구 분석과 구분.</a:t>
+              <a:t>📊 읽는 법 — 서울 뺀 12권역 점수 순위. 부산·울산·제주 상위, 강원·충북 최하.</a:t>
             </a:r>
           </a:p>
         </p:txBody>
@@ -5807,7 +5984,7 @@
                 </a:solidFill>
                 <a:latin typeface="Malgun Gothic"/>
               </a:rPr>
-              <a:t>11. 가설 검정 종합</a:t>
+              <a:t>그래서 뭐? — 변호사 없이 받는 재판</a:t>
             </a:r>
           </a:p>
         </p:txBody>
@@ -5857,14 +6034,136 @@
       </p:sp>
       <p:sp>
         <p:nvSpPr>
-          <p:cNvPr id="4" name="TextBox 3"/>
+          <p:cNvPr id="4" name="Rounded Rectangle 3"/>
+          <p:cNvSpPr/>
+          <p:nvPr/>
+        </p:nvSpPr>
+        <p:spPr>
+          <a:xfrm>
+            <a:off x="640080" y="1463040"/>
+            <a:ext cx="10881360" cy="868680"/>
+          </a:xfrm>
+          <a:prstGeom prst="roundRect">
+            <a:avLst/>
+          </a:prstGeom>
+          <a:solidFill>
+            <a:srgbClr val="EDF1F7"/>
+          </a:solidFill>
+          <a:ln>
+            <a:solidFill>
+              <a:srgbClr val="1F3A5F"/>
+            </a:solidFill>
+          </a:ln>
+        </p:spPr>
+        <p:style>
+          <a:lnRef idx="1">
+            <a:schemeClr val="accent1"/>
+          </a:lnRef>
+          <a:fillRef idx="3">
+            <a:schemeClr val="accent1"/>
+          </a:fillRef>
+          <a:effectRef idx="2">
+            <a:schemeClr val="accent1"/>
+          </a:effectRef>
+          <a:fontRef idx="minor">
+            <a:schemeClr val="lt1"/>
+          </a:fontRef>
+        </p:style>
+        <p:txBody>
+          <a:bodyPr rtlCol="0" anchor="ctr" wrap="square"/>
+          <a:lstStyle/>
+          <a:p>
+            <a:pPr algn="ctr">
+              <a:spcAft>
+                <a:spcPts val="900"/>
+              </a:spcAft>
+            </a:pPr>
+            <a:r>
+              <a:rPr sz="2000">
+                <a:solidFill>
+                  <a:srgbClr val="222222"/>
+                </a:solidFill>
+                <a:latin typeface="Malgun Gothic"/>
+              </a:rPr>
+              <a:t>• 형사 1심의 약 45%가 변호사 없는 '나홀로소송' (민사 소액은 81.8%)</a:t>
+            </a:r>
+          </a:p>
+          <a:p>
+            <a:pPr>
+              <a:spcAft>
+                <a:spcPts val="900"/>
+              </a:spcAft>
+            </a:pPr>
+            <a:r>
+              <a:rPr sz="2000">
+                <a:solidFill>
+                  <a:srgbClr val="222222"/>
+                </a:solidFill>
+                <a:latin typeface="Malgun Gothic"/>
+              </a:rPr>
+              <a:t>• 지역 격차 — 서울중앙 35%(최저) vs 대구 51%·수원 48%·인천 48%(최고)</a:t>
+            </a:r>
+          </a:p>
+          <a:p>
+            <a:pPr>
+              <a:spcAft>
+                <a:spcPts val="900"/>
+              </a:spcAft>
+            </a:pPr>
+            <a:r>
+              <a:rPr sz="2000">
+                <a:solidFill>
+                  <a:srgbClr val="222222"/>
+                </a:solidFill>
+                <a:latin typeface="Malgun Gothic"/>
+              </a:rPr>
+              <a:t>• 변호사 부족 지역일수록 혼자 재판 → 방어권·승소율에서 불이익</a:t>
+            </a:r>
+          </a:p>
+          <a:p>
+            <a:pPr>
+              <a:spcAft>
+                <a:spcPts val="900"/>
+              </a:spcAft>
+            </a:pPr>
+            <a:r>
+              <a:rPr sz="2000">
+                <a:solidFill>
+                  <a:srgbClr val="222222"/>
+                </a:solidFill>
+                <a:latin typeface="Malgun Gothic"/>
+              </a:rPr>
+              <a:t>• LLAI 격차는 '숫자'가 아니라 '재판의 질' 문제</a:t>
+            </a:r>
+          </a:p>
+          <a:p>
+            <a:pPr lvl="1">
+              <a:spcAft>
+                <a:spcPts val="900"/>
+              </a:spcAft>
+            </a:pPr>
+            <a:r>
+              <a:rPr sz="1700">
+                <a:solidFill>
+                  <a:srgbClr val="222222"/>
+                </a:solidFill>
+                <a:latin typeface="Malgun Gothic"/>
+              </a:rPr>
+              <a:t>– ※ 현재는 4개 법원 사례로 '방향' 제시 — 13권역 전수 상관은 향후 과제</a:t>
+            </a:r>
+          </a:p>
+        </p:txBody>
+      </p:sp>
+      <p:sp>
+        <p:nvSpPr>
+          <p:cNvPr id="5" name="TextBox 4"/>
           <p:cNvSpPr txBox="1"/>
           <p:nvPr/>
         </p:nvSpPr>
         <p:spPr>
           <a:xfrm>
-            <a:off x="640080" y="1554480"/>
-            <a:ext cx="10972800" cy="4937760"/>
+            <a:off x="640080" y="2651760"/>
+            <a:ext cx="10881360" cy="3108960"/>
           </a:xfrm>
           <a:prstGeom prst="rect">
             <a:avLst/>
@@ -5879,81 +6178,115 @@
           <a:p>
             <a:pPr>
               <a:spcAft>
-                <a:spcPts val="800"/>
+                <a:spcPts val="1100"/>
               </a:spcAft>
             </a:pPr>
             <a:r>
-              <a:rPr sz="1900">
+              <a:rPr sz="2000">
                 <a:solidFill>
                   <a:srgbClr val="222222"/>
                 </a:solidFill>
                 <a:latin typeface="Malgun Gothic"/>
               </a:rPr>
-              <a:t>• H2 ✅ 지지 — 변호사 적을수록 1인당 부담↑ (인구당 사건수 교차검증 +0.91로 순환성 보완)</a:t>
+              <a:t>• 형사 1심의 약 45%가 변호사 없는 '나홀로소송' (민사 소액사건은 81.8%)</a:t>
             </a:r>
           </a:p>
           <a:p>
             <a:pPr>
               <a:spcAft>
-                <a:spcPts val="800"/>
+                <a:spcPts val="1100"/>
               </a:spcAft>
             </a:pPr>
             <a:r>
-              <a:rPr sz="1900">
+              <a:rPr sz="2000">
                 <a:solidFill>
                   <a:srgbClr val="222222"/>
                 </a:solidFill>
                 <a:latin typeface="Malgun Gothic"/>
               </a:rPr>
-              <a:t>• H4 ✅ 지지 — 변호사 3.4배↑에도 서울 쏠림 심해짐</a:t>
+              <a:t>• 지역 격차 — 서울중앙 35%(전국 최저) vs 대구 51% · 수원 48% · 인천 48%(최고)</a:t>
             </a:r>
           </a:p>
           <a:p>
             <a:pPr>
               <a:spcAft>
-                <a:spcPts val="800"/>
+                <a:spcPts val="1100"/>
               </a:spcAft>
             </a:pPr>
             <a:r>
-              <a:rPr sz="1900">
+              <a:rPr sz="2000">
                 <a:solidFill>
                   <a:srgbClr val="222222"/>
                 </a:solidFill>
                 <a:latin typeface="Malgun Gothic"/>
               </a:rPr>
-              <a:t>• H1 △ 방향만 맞음 — 수도권 유리하나 표본 작아 확정 못 함</a:t>
+              <a:t>• 변호사 부족 지역일수록 혼자 재판 → 방어권·승소 가능성에서 직접 불이익</a:t>
             </a:r>
           </a:p>
           <a:p>
             <a:pPr>
               <a:spcAft>
-                <a:spcPts val="800"/>
+                <a:spcPts val="1100"/>
               </a:spcAft>
             </a:pPr>
             <a:r>
-              <a:rPr sz="1900">
+              <a:rPr sz="2000">
                 <a:solidFill>
                   <a:srgbClr val="222222"/>
                 </a:solidFill>
                 <a:latin typeface="Malgun Gothic"/>
               </a:rPr>
-              <a:t>• H3 △ 약함 — 소득과 접근성 관계 뚜렷하지 않음</a:t>
-            </a:r>
-          </a:p>
-          <a:p>
-            <a:pPr lvl="1">
+              <a:t>• 본 분석 하위권 인천(LLAI 5.0)도 나홀로소송 48% → 두 지표가 같은 방향</a:t>
+            </a:r>
+          </a:p>
+          <a:p>
+            <a:pPr>
               <a:spcAft>
-                <a:spcPts val="800"/>
+                <a:spcPts val="1100"/>
               </a:spcAft>
             </a:pPr>
             <a:r>
-              <a:rPr sz="1600">
+              <a:rPr sz="2000">
                 <a:solidFill>
                   <a:srgbClr val="222222"/>
                 </a:solidFill>
                 <a:latin typeface="Malgun Gothic"/>
               </a:rPr>
-              <a:t>– 권역 10~13개로 적어 통계적 확신엔 한계 (정직히 명시)</a:t>
+              <a:t>• → LLAI 격차는 '숫자'가 아니라 시민이 겪는 '재판의 질' 문제</a:t>
+            </a:r>
+          </a:p>
+        </p:txBody>
+      </p:sp>
+      <p:sp>
+        <p:nvSpPr>
+          <p:cNvPr id="6" name="TextBox 5"/>
+          <p:cNvSpPr txBox="1"/>
+          <p:nvPr/>
+        </p:nvSpPr>
+        <p:spPr>
+          <a:xfrm>
+            <a:off x="640080" y="6035040"/>
+            <a:ext cx="10881360" cy="457200"/>
+          </a:xfrm>
+          <a:prstGeom prst="rect">
+            <a:avLst/>
+          </a:prstGeom>
+          <a:noFill/>
+        </p:spPr>
+        <p:txBody>
+          <a:bodyPr wrap="none">
+            <a:spAutoFit/>
+          </a:bodyPr>
+          <a:lstStyle/>
+          <a:p>
+            <a:r>
+              <a:rPr sz="1200" i="1">
+                <a:solidFill>
+                  <a:srgbClr val="555555"/>
+                </a:solidFill>
+                <a:latin typeface="Malgun Gothic"/>
+              </a:rPr>
+              <a:t>※ 출처: 사법연감·박주민 의원실(리걸타임즈·뉴스1 보도). 외부 통계 인용으로 본 연구 분석과 구분.</a:t>
             </a:r>
           </a:p>
         </p:txBody>
@@ -6005,7 +6338,7 @@
                 </a:solidFill>
                 <a:latin typeface="Malgun Gothic"/>
               </a:rPr>
-              <a:t>왜 하필 서울인가? — '수요 주도' 가설 (해석)</a:t>
+              <a:t>가설 검정 종합</a:t>
             </a:r>
           </a:p>
         </p:txBody>
@@ -6055,68 +6388,14 @@
       </p:sp>
       <p:sp>
         <p:nvSpPr>
-          <p:cNvPr id="4" name="Rounded Rectangle 3"/>
-          <p:cNvSpPr/>
-          <p:nvPr/>
-        </p:nvSpPr>
-        <p:spPr>
-          <a:xfrm>
-            <a:off x="640080" y="1417320"/>
-            <a:ext cx="10881360" cy="822960"/>
-          </a:xfrm>
-          <a:prstGeom prst="roundRect">
-            <a:avLst/>
-          </a:prstGeom>
-          <a:solidFill>
-            <a:srgbClr val="EDF1F7"/>
-          </a:solidFill>
-          <a:ln>
-            <a:solidFill>
-              <a:srgbClr val="1F3A5F"/>
-            </a:solidFill>
-          </a:ln>
-        </p:spPr>
-        <p:style>
-          <a:lnRef idx="1">
-            <a:schemeClr val="accent1"/>
-          </a:lnRef>
-          <a:fillRef idx="3">
-            <a:schemeClr val="accent1"/>
-          </a:fillRef>
-          <a:effectRef idx="2">
-            <a:schemeClr val="accent1"/>
-          </a:effectRef>
-          <a:fontRef idx="minor">
-            <a:schemeClr val="lt1"/>
-          </a:fontRef>
-        </p:style>
-        <p:txBody>
-          <a:bodyPr rtlCol="0" anchor="ctr" wrap="square"/>
-          <a:lstStyle/>
-          <a:p>
-            <a:pPr algn="ctr"/>
-            <a:r>
-              <a:rPr sz="1900" b="1">
-                <a:solidFill>
-                  <a:srgbClr val="1F3A5F"/>
-                </a:solidFill>
-                <a:latin typeface="Malgun Gothic"/>
-              </a:rPr>
-              <a:t>변호사를 3.4배 늘려도 안 흩어졌다(H4) → 변호사는 '공급'이 아니라 '수요(일·돈)'를 따라간다</a:t>
-            </a:r>
-          </a:p>
-        </p:txBody>
-      </p:sp>
-      <p:sp>
-        <p:nvSpPr>
-          <p:cNvPr id="5" name="TextBox 4"/>
+          <p:cNvPr id="4" name="TextBox 3"/>
           <p:cNvSpPr txBox="1"/>
           <p:nvPr/>
         </p:nvSpPr>
         <p:spPr>
           <a:xfrm>
-            <a:off x="640080" y="2514600"/>
-            <a:ext cx="10881360" cy="2834640"/>
+            <a:off x="640080" y="1554480"/>
+            <a:ext cx="10972800" cy="4937760"/>
           </a:xfrm>
           <a:prstGeom prst="rect">
             <a:avLst/>
@@ -6131,7 +6410,7 @@
           <a:p>
             <a:pPr>
               <a:spcAft>
-                <a:spcPts val="1000"/>
+                <a:spcPts val="800"/>
               </a:spcAft>
             </a:pPr>
             <a:r>
@@ -6141,13 +6420,13 @@
                 </a:solidFill>
                 <a:latin typeface="Malgun Gothic"/>
               </a:rPr>
-              <a:t>• 공급 주도라면 — 변호사 3배↑면 빈 곳을 메우며 흩어졌어야. 그런데 서울 집중은 오히려 심화</a:t>
+              <a:t>• H2 ✅ 지지 — 변호사 적을수록 1인당 부담↑ (인구당 사건수 교차검증 +0.91로 순환성 보완)</a:t>
             </a:r>
           </a:p>
           <a:p>
             <a:pPr>
               <a:spcAft>
-                <a:spcPts val="1000"/>
+                <a:spcPts val="800"/>
               </a:spcAft>
             </a:pPr>
             <a:r>
@@ -6157,13 +6436,45 @@
                 </a:solidFill>
                 <a:latin typeface="Malgun Gothic"/>
               </a:rPr>
-              <a:t>• → demand-pull(수요 견인): 변호사는 일·고객·보수가 있는 곳으로 간다</a:t>
+              <a:t>• H4 ✅ 지지 — 변호사 3.4배↑에도 서울 쏠림 심해짐</a:t>
+            </a:r>
+          </a:p>
+          <a:p>
+            <a:pPr>
+              <a:spcAft>
+                <a:spcPts val="800"/>
+              </a:spcAft>
+            </a:pPr>
+            <a:r>
+              <a:rPr sz="1900">
+                <a:solidFill>
+                  <a:srgbClr val="222222"/>
+                </a:solidFill>
+                <a:latin typeface="Malgun Gothic"/>
+              </a:rPr>
+              <a:t>• H1 △ 방향만 맞음 — 수도권 유리하나 표본 작아 확정 못 함</a:t>
+            </a:r>
+          </a:p>
+          <a:p>
+            <a:pPr>
+              <a:spcAft>
+                <a:spcPts val="800"/>
+              </a:spcAft>
+            </a:pPr>
+            <a:r>
+              <a:rPr sz="1900">
+                <a:solidFill>
+                  <a:srgbClr val="222222"/>
+                </a:solidFill>
+                <a:latin typeface="Malgun Gothic"/>
+              </a:rPr>
+              <a:t>• H3 △ 약함 — 소득과 접근성 관계 뚜렷하지 않음</a:t>
             </a:r>
           </a:p>
           <a:p>
             <a:pPr lvl="1">
               <a:spcAft>
-                <a:spcPts val="1000"/>
+                <a:spcPts val="800"/>
               </a:spcAft>
             </a:pPr>
             <a:r>
@@ -6173,77 +6484,7 @@
                 </a:solidFill>
                 <a:latin typeface="Malgun Gothic"/>
               </a:rPr>
-              <a:t>– 서울의 수요 집적(agglomeration) — 대형로펌·대기업 본사·고부가 자문·상급심(대법원·고법)·금융·정부</a:t>
-            </a:r>
-          </a:p>
-          <a:p>
-            <a:pPr>
-              <a:spcAft>
-                <a:spcPts val="1000"/>
-              </a:spcAft>
-            </a:pPr>
-            <a:r>
-              <a:rPr sz="1900">
-                <a:solidFill>
-                  <a:srgbClr val="222222"/>
-                </a:solidFill>
-                <a:latin typeface="Malgun Gothic"/>
-              </a:rPr>
-              <a:t>• 선행연구(사법정책연구원 등·21번)도 같은 방향 — 시장 유인 약한 곳은 공적 공급으로 메워야</a:t>
-            </a:r>
-          </a:p>
-        </p:txBody>
-      </p:sp>
-      <p:sp>
-        <p:nvSpPr>
-          <p:cNvPr id="6" name="Rounded Rectangle 5"/>
-          <p:cNvSpPr/>
-          <p:nvPr/>
-        </p:nvSpPr>
-        <p:spPr>
-          <a:xfrm>
-            <a:off x="640080" y="5257800"/>
-            <a:ext cx="10881360" cy="777240"/>
-          </a:xfrm>
-          <a:prstGeom prst="roundRect">
-            <a:avLst/>
-          </a:prstGeom>
-          <a:solidFill>
-            <a:srgbClr val="FBEEEC"/>
-          </a:solidFill>
-          <a:ln>
-            <a:solidFill>
-              <a:srgbClr val="C44E52"/>
-            </a:solidFill>
-          </a:ln>
-        </p:spPr>
-        <p:style>
-          <a:lnRef idx="1">
-            <a:schemeClr val="accent1"/>
-          </a:lnRef>
-          <a:fillRef idx="3">
-            <a:schemeClr val="accent1"/>
-          </a:fillRef>
-          <a:effectRef idx="2">
-            <a:schemeClr val="accent1"/>
-          </a:effectRef>
-          <a:fontRef idx="minor">
-            <a:schemeClr val="lt1"/>
-          </a:fontRef>
-        </p:style>
-        <p:txBody>
-          <a:bodyPr rtlCol="0" anchor="ctr" wrap="square"/>
-          <a:lstStyle/>
-          <a:p>
-            <a:pPr algn="ctr"/>
-            <a:r>
-              <a:rPr sz="1400" b="1">
-                <a:solidFill>
-                  <a:srgbClr val="C44E52"/>
-                </a:solidFill>
-                <a:latin typeface="Malgun Gothic"/>
-              </a:rPr>
-              <a:t>⚠️ 검증된 사실이 아니라 '가설' — 검증엔 지역별 법률수요(기업 수·사건 가액) 데이터 필요(향후 과제). 단 함의는 분명: 수요 주도면 '총량 증원'은 무력 → '분포·공적 공급'이 답.</a:t>
+              <a:t>– 권역 10~13개로 적어 통계적 확신엔 한계 (정직히 명시)</a:t>
             </a:r>
           </a:p>
         </p:txBody>
@@ -6531,7 +6772,7 @@
                 </a:solidFill>
                 <a:latin typeface="Malgun Gothic"/>
               </a:rPr>
-              <a:t>12. 결론 · 정책 시사점</a:t>
+              <a:t>왜 하필 서울인가? — '수요 주도' 가설 (해석)</a:t>
             </a:r>
           </a:p>
         </p:txBody>
@@ -6581,14 +6822,68 @@
       </p:sp>
       <p:sp>
         <p:nvSpPr>
-          <p:cNvPr id="4" name="TextBox 3"/>
+          <p:cNvPr id="4" name="Rounded Rectangle 3"/>
+          <p:cNvSpPr/>
+          <p:nvPr/>
+        </p:nvSpPr>
+        <p:spPr>
+          <a:xfrm>
+            <a:off x="640080" y="1417320"/>
+            <a:ext cx="10881360" cy="822960"/>
+          </a:xfrm>
+          <a:prstGeom prst="roundRect">
+            <a:avLst/>
+          </a:prstGeom>
+          <a:solidFill>
+            <a:srgbClr val="EDF1F7"/>
+          </a:solidFill>
+          <a:ln>
+            <a:solidFill>
+              <a:srgbClr val="1F3A5F"/>
+            </a:solidFill>
+          </a:ln>
+        </p:spPr>
+        <p:style>
+          <a:lnRef idx="1">
+            <a:schemeClr val="accent1"/>
+          </a:lnRef>
+          <a:fillRef idx="3">
+            <a:schemeClr val="accent1"/>
+          </a:fillRef>
+          <a:effectRef idx="2">
+            <a:schemeClr val="accent1"/>
+          </a:effectRef>
+          <a:fontRef idx="minor">
+            <a:schemeClr val="lt1"/>
+          </a:fontRef>
+        </p:style>
+        <p:txBody>
+          <a:bodyPr rtlCol="0" anchor="ctr" wrap="square"/>
+          <a:lstStyle/>
+          <a:p>
+            <a:pPr algn="ctr"/>
+            <a:r>
+              <a:rPr sz="1900" b="1">
+                <a:solidFill>
+                  <a:srgbClr val="1F3A5F"/>
+                </a:solidFill>
+                <a:latin typeface="Malgun Gothic"/>
+              </a:rPr>
+              <a:t>변호사를 3.4배 늘려도 안 흩어졌다(H4) → 변호사는 '공급'이 아니라 '수요(일·돈)'를 따라간다</a:t>
+            </a:r>
+          </a:p>
+        </p:txBody>
+      </p:sp>
+      <p:sp>
+        <p:nvSpPr>
+          <p:cNvPr id="5" name="TextBox 4"/>
           <p:cNvSpPr txBox="1"/>
           <p:nvPr/>
         </p:nvSpPr>
         <p:spPr>
           <a:xfrm>
-            <a:off x="640080" y="1554480"/>
-            <a:ext cx="10972800" cy="4937760"/>
+            <a:off x="640080" y="2514600"/>
+            <a:ext cx="10881360" cy="2834640"/>
           </a:xfrm>
           <a:prstGeom prst="rect">
             <a:avLst/>
@@ -6603,81 +6898,119 @@
           <a:p>
             <a:pPr>
               <a:spcAft>
-                <a:spcPts val="800"/>
+                <a:spcPts val="1000"/>
               </a:spcAft>
             </a:pPr>
             <a:r>
-              <a:rPr sz="2100" b="1">
-                <a:solidFill>
-                  <a:srgbClr val="C44E52"/>
-                </a:solidFill>
-                <a:latin typeface="Malgun Gothic"/>
-              </a:rPr>
-              <a:t>• [헤드라인] 변호사 3.4배 늘려도 서울 쏠림은 심해졌다 (H4)</a:t>
+              <a:rPr sz="1900">
+                <a:solidFill>
+                  <a:srgbClr val="222222"/>
+                </a:solidFill>
+                <a:latin typeface="Malgun Gothic"/>
+              </a:rPr>
+              <a:t>• 공급 주도라면 — 변호사 3배↑면 빈 곳을 메우며 흩어졌어야. 그런데 서울 집중은 오히려 심화</a:t>
+            </a:r>
+          </a:p>
+          <a:p>
+            <a:pPr>
+              <a:spcAft>
+                <a:spcPts val="1000"/>
+              </a:spcAft>
+            </a:pPr>
+            <a:r>
+              <a:rPr sz="1900">
+                <a:solidFill>
+                  <a:srgbClr val="222222"/>
+                </a:solidFill>
+                <a:latin typeface="Malgun Gothic"/>
+              </a:rPr>
+              <a:t>• → demand-pull(수요 견인): 변호사는 일·고객·보수가 있는 곳으로 간다</a:t>
             </a:r>
           </a:p>
           <a:p>
             <a:pPr lvl="1">
               <a:spcAft>
-                <a:spcPts val="800"/>
+                <a:spcPts val="1000"/>
               </a:spcAft>
             </a:pPr>
             <a:r>
-              <a:rPr sz="1600" b="0">
+              <a:rPr sz="1600">
                 <a:solidFill>
                   <a:srgbClr val="222222"/>
                 </a:solidFill>
                 <a:latin typeface="Malgun Gothic"/>
               </a:rPr>
-              <a:t>– 9,612→32,273명인데 서울 비중 71%→76% — 양적 팽창의 실패</a:t>
+              <a:t>– 서울의 수요 집적(agglomeration) — 대형로펌·대기업 본사·고부가 자문·상급심(대법원·고법)·금융·정부</a:t>
             </a:r>
           </a:p>
           <a:p>
             <a:pPr>
               <a:spcAft>
-                <a:spcPts val="800"/>
+                <a:spcPts val="1000"/>
               </a:spcAft>
             </a:pPr>
             <a:r>
-              <a:rPr sz="1900" b="0">
+              <a:rPr sz="1900">
                 <a:solidFill>
                   <a:srgbClr val="222222"/>
                 </a:solidFill>
                 <a:latin typeface="Malgun Gothic"/>
               </a:rPr>
-              <a:t>• 서울 일극 집중이 격차와 가장 강하게 연관 (인천=수도권인데 하위)</a:t>
-            </a:r>
-          </a:p>
-          <a:p>
-            <a:pPr>
-              <a:spcAft>
-                <a:spcPts val="800"/>
-              </a:spcAft>
-            </a:pPr>
-            <a:r>
-              <a:rPr sz="1900" b="0">
-                <a:solidFill>
-                  <a:srgbClr val="222222"/>
-                </a:solidFill>
-                <a:latin typeface="Malgun Gothic"/>
-              </a:rPr>
-              <a:t>• 실질 결과 — 변호사 부족 지역일수록 나홀로소송↑ (재판의 질 문제)</a:t>
-            </a:r>
-          </a:p>
-          <a:p>
-            <a:pPr>
-              <a:spcAft>
-                <a:spcPts val="800"/>
-              </a:spcAft>
-            </a:pPr>
-            <a:r>
-              <a:rPr sz="1900" b="0">
-                <a:solidFill>
-                  <a:srgbClr val="222222"/>
-                </a:solidFill>
-                <a:latin typeface="Malgun Gothic"/>
-              </a:rPr>
-              <a:t>• 처방은 '총량'이 아니라 '분포·공적 공급' (공공변호사·법률구조 배치)</a:t>
+              <a:t>• 선행연구(사법정책연구원 등)도 같은 방향 — 시장 유인 약한 곳은 공적 공급으로 메워야</a:t>
+            </a:r>
+          </a:p>
+        </p:txBody>
+      </p:sp>
+      <p:sp>
+        <p:nvSpPr>
+          <p:cNvPr id="6" name="Rounded Rectangle 5"/>
+          <p:cNvSpPr/>
+          <p:nvPr/>
+        </p:nvSpPr>
+        <p:spPr>
+          <a:xfrm>
+            <a:off x="640080" y="5257800"/>
+            <a:ext cx="10881360" cy="777240"/>
+          </a:xfrm>
+          <a:prstGeom prst="roundRect">
+            <a:avLst/>
+          </a:prstGeom>
+          <a:solidFill>
+            <a:srgbClr val="FBEEEC"/>
+          </a:solidFill>
+          <a:ln>
+            <a:solidFill>
+              <a:srgbClr val="C44E52"/>
+            </a:solidFill>
+          </a:ln>
+        </p:spPr>
+        <p:style>
+          <a:lnRef idx="1">
+            <a:schemeClr val="accent1"/>
+          </a:lnRef>
+          <a:fillRef idx="3">
+            <a:schemeClr val="accent1"/>
+          </a:fillRef>
+          <a:effectRef idx="2">
+            <a:schemeClr val="accent1"/>
+          </a:effectRef>
+          <a:fontRef idx="minor">
+            <a:schemeClr val="lt1"/>
+          </a:fontRef>
+        </p:style>
+        <p:txBody>
+          <a:bodyPr rtlCol="0" anchor="ctr" wrap="square"/>
+          <a:lstStyle/>
+          <a:p>
+            <a:pPr algn="ctr"/>
+            <a:r>
+              <a:rPr sz="1400" b="1">
+                <a:solidFill>
+                  <a:srgbClr val="C44E52"/>
+                </a:solidFill>
+                <a:latin typeface="Malgun Gothic"/>
+              </a:rPr>
+              <a:t>⚠️ 검증된 사실이 아니라 '가설' — 검증엔 지역별 법률수요(기업 수·사건 가액) 데이터 필요(향후 과제). 단 함의는 분명: 수요 주도면 '총량 증원'은 무력 → '분포·공적 공급'이 답.</a:t>
             </a:r>
           </a:p>
         </p:txBody>
@@ -6729,7 +7062,7 @@
                 </a:solidFill>
                 <a:latin typeface="Malgun Gothic"/>
               </a:rPr>
-              <a:t>13. 한계와 향후 과제</a:t>
+              <a:t>결론 · 정책 시사점</a:t>
             </a:r>
           </a:p>
         </p:txBody>
@@ -6801,97 +7134,81 @@
           <a:p>
             <a:pPr>
               <a:spcAft>
-                <a:spcPts val="700"/>
+                <a:spcPts val="800"/>
               </a:spcAft>
             </a:pPr>
             <a:r>
-              <a:rPr sz="1800">
-                <a:solidFill>
-                  <a:srgbClr val="222222"/>
-                </a:solidFill>
-                <a:latin typeface="Malgun Gothic"/>
-              </a:rPr>
-              <a:t>• 검정력 한계 — 17개 시도라 표본 작음 → H1·H3는 방향만(△)</a:t>
+              <a:rPr sz="2100" b="1">
+                <a:solidFill>
+                  <a:srgbClr val="C44E52"/>
+                </a:solidFill>
+                <a:latin typeface="Malgun Gothic"/>
+              </a:rPr>
+              <a:t>• [헤드라인] 변호사 3.4배 늘려도 서울 쏠림은 심해졌다 (H4)</a:t>
             </a:r>
           </a:p>
           <a:p>
             <a:pPr lvl="1">
               <a:spcAft>
-                <a:spcPts val="700"/>
+                <a:spcPts val="800"/>
               </a:spcAft>
             </a:pPr>
             <a:r>
-              <a:rPr sz="1500">
+              <a:rPr sz="1600" b="0">
                 <a:solidFill>
                   <a:srgbClr val="222222"/>
                 </a:solidFill>
                 <a:latin typeface="Malgun Gothic"/>
               </a:rPr>
-              <a:t>– 핵심 기여는 '검정'보다 통합 파이프라인·지수·실질 임팩트 연결</a:t>
+              <a:t>– 9,612→32,273명인데 서울 비중 71%→76% — 양적 팽창의 실패</a:t>
             </a:r>
           </a:p>
           <a:p>
             <a:pPr>
               <a:spcAft>
-                <a:spcPts val="700"/>
+                <a:spcPts val="800"/>
               </a:spcAft>
             </a:pPr>
             <a:r>
-              <a:rPr sz="1800">
+              <a:rPr sz="1900" b="0">
                 <a:solidFill>
                   <a:srgbClr val="222222"/>
                 </a:solidFill>
                 <a:latin typeface="Malgun Gothic"/>
               </a:rPr>
-              <a:t>• 기준 시점 혼합 — 변호사 2026 현재·인구/사건 2024 (완전 일치 X)</a:t>
-            </a:r>
-          </a:p>
-          <a:p>
-            <a:pPr lvl="1">
+              <a:t>• 서울 일극 집중이 격차와 가장 강하게 연관 (인천=수도권인데 하위)</a:t>
+            </a:r>
+          </a:p>
+          <a:p>
+            <a:pPr>
               <a:spcAft>
-                <a:spcPts val="700"/>
+                <a:spcPts val="800"/>
               </a:spcAft>
             </a:pPr>
             <a:r>
-              <a:rPr sz="1500">
+              <a:rPr sz="1900" b="0">
                 <a:solidFill>
                   <a:srgbClr val="222222"/>
                 </a:solidFill>
                 <a:latin typeface="Malgun Gothic"/>
               </a:rPr>
-              <a:t>– H4는 변호사 2시점 비교(추세선 아님) + 법률구조 시계열로 보강</a:t>
+              <a:t>• 실질 결과 — 변호사 부족 지역일수록 나홀로소송↑ (재판의 질 문제)</a:t>
             </a:r>
           </a:p>
           <a:p>
             <a:pPr>
               <a:spcAft>
-                <a:spcPts val="700"/>
+                <a:spcPts val="800"/>
               </a:spcAft>
             </a:pPr>
             <a:r>
-              <a:rPr sz="1800">
+              <a:rPr sz="1900" b="0">
                 <a:solidFill>
                   <a:srgbClr val="222222"/>
                 </a:solidFill>
                 <a:latin typeface="Malgun Gothic"/>
               </a:rPr>
-              <a:t>• 타당성 — LLAI는 1인당 지표라 절대 규모(선택지)와 함께 봐야 (제주 154명)</a:t>
-            </a:r>
-          </a:p>
-          <a:p>
-            <a:pPr>
-              <a:spcAft>
-                <a:spcPts val="700"/>
-              </a:spcAft>
-            </a:pPr>
-            <a:r>
-              <a:rPr sz="1800">
-                <a:solidFill>
-                  <a:srgbClr val="222222"/>
-                </a:solidFill>
-                <a:latin typeface="Malgun Gothic"/>
-              </a:rPr>
-              <a:t>• '빅'데이터 — 양은 중간, 핵심은 다출처 수집·정제·통합(Variety·Veracity)</a:t>
+              <a:t>• 처방은 '총량'이 아니라 '분포·공적 공급' (공공변호사·법률구조 배치)</a:t>
             </a:r>
           </a:p>
         </p:txBody>
@@ -6943,7 +7260,7 @@
                 </a:solidFill>
                 <a:latin typeface="Malgun Gothic"/>
               </a:rPr>
-              <a:t>연구 범위 · 선행연구 차용 여부</a:t>
+              <a:t>한계와 향후 과제</a:t>
             </a:r>
           </a:p>
         </p:txBody>
@@ -7019,13 +7336,29 @@
               </a:spcAft>
             </a:pPr>
             <a:r>
-              <a:rPr sz="1900">
+              <a:rPr sz="1800">
                 <a:solidFill>
                   <a:srgbClr val="222222"/>
                 </a:solidFill>
                 <a:latin typeface="Malgun Gothic"/>
               </a:rPr>
-              <a:t>• [학술 윤리] 타인 연구 복제·표절 없음 — 코드·지수·분석 전부 자체 개발</a:t>
+              <a:t>• 검정력 한계 — 17개 시도라 표본 작음 → H1·H3는 방향만(△)</a:t>
+            </a:r>
+          </a:p>
+          <a:p>
+            <a:pPr lvl="1">
+              <a:spcAft>
+                <a:spcPts val="700"/>
+              </a:spcAft>
+            </a:pPr>
+            <a:r>
+              <a:rPr sz="1500">
+                <a:solidFill>
+                  <a:srgbClr val="222222"/>
+                </a:solidFill>
+                <a:latin typeface="Malgun Gothic"/>
+              </a:rPr>
+              <a:t>– 핵심 기여는 '검정'보다 통합 파이프라인·지수·실질 임팩트 연결</a:t>
             </a:r>
           </a:p>
           <a:p>
@@ -7035,13 +7368,13 @@
               </a:spcAft>
             </a:pPr>
             <a:r>
-              <a:rPr sz="1900">
+              <a:rPr sz="1800">
                 <a:solidFill>
                   <a:srgbClr val="222222"/>
                 </a:solidFill>
                 <a:latin typeface="Malgun Gothic"/>
               </a:rPr>
-              <a:t>• 단, '선행연구가 없다'는 뜻은 아님 — 기존 연구는 분명히 존재</a:t>
+              <a:t>• 기준 시점 혼합 — 변호사 2026 현재·인구/사건 2024 (완전 일치 X)</a:t>
             </a:r>
           </a:p>
           <a:p>
@@ -7051,13 +7384,13 @@
               </a:spcAft>
             </a:pPr>
             <a:r>
-              <a:rPr sz="1600">
+              <a:rPr sz="1500">
                 <a:solidFill>
                   <a:srgbClr val="222222"/>
                 </a:solidFill>
                 <a:latin typeface="Malgun Gothic"/>
               </a:rPr>
-              <a:t>– 사법정책연구원·법률구조공단 보고서, 변호사 정원-접근성 연구(서울대 등)</a:t>
+              <a:t>– H4는 변호사 2시점 비교(추세선 아님) + 법률구조 시계열로 보강</a:t>
             </a:r>
           </a:p>
           <a:p>
@@ -7067,13 +7400,13 @@
               </a:spcAft>
             </a:pPr>
             <a:r>
-              <a:rPr sz="1900">
+              <a:rPr sz="1800">
                 <a:solidFill>
                   <a:srgbClr val="222222"/>
                 </a:solidFill>
                 <a:latin typeface="Malgun Gothic"/>
               </a:rPr>
-              <a:t>• 본 지수의 표준 지표(10만명당 변호사 수)도 기존 연구 관행을 따름</a:t>
+              <a:t>• 타당성 — LLAI는 1인당 지표라 절대 규모(선택지)와 함께 봐야 (제주 154명)</a:t>
             </a:r>
           </a:p>
           <a:p>
@@ -7083,29 +7416,13 @@
               </a:spcAft>
             </a:pPr>
             <a:r>
-              <a:rPr sz="1900">
+              <a:rPr sz="1800">
                 <a:solidFill>
                   <a:srgbClr val="222222"/>
                 </a:solidFill>
                 <a:latin typeface="Malgun Gothic"/>
               </a:rPr>
-              <a:t>• 한계 — 기존 지수와의 정량 벤치마킹은 미수행 (향후 과제)</a:t>
-            </a:r>
-          </a:p>
-          <a:p>
-            <a:pPr>
-              <a:spcAft>
-                <a:spcPts val="700"/>
-              </a:spcAft>
-            </a:pPr>
-            <a:r>
-              <a:rPr sz="1900">
-                <a:solidFill>
-                  <a:srgbClr val="222222"/>
-                </a:solidFill>
-                <a:latin typeface="Malgun Gothic"/>
-              </a:rPr>
-              <a:t>• 외부 차용은 공개 데이터·지도파일뿐, 모두 출처 명시</a:t>
+              <a:t>• '빅'데이터 — 양은 중간, 핵심은 다출처 수집·정제·통합(Variety·Veracity)</a:t>
             </a:r>
           </a:p>
         </p:txBody>
@@ -7119,6 +7436,220 @@
 </file>
 
 <file path=ppt/slides/slide23.xml><?xml version="1.0" encoding="utf-8"?>
+<p:sld xmlns:a="http://schemas.openxmlformats.org/drawingml/2006/main" xmlns:p="http://schemas.openxmlformats.org/presentationml/2006/main" xmlns:r="http://schemas.openxmlformats.org/officeDocument/2006/relationships">
+  <p:cSld>
+    <p:spTree>
+      <p:nvGrpSpPr>
+        <p:cNvPr id="1" name=""/>
+        <p:cNvGrpSpPr/>
+        <p:nvPr/>
+      </p:nvGrpSpPr>
+      <p:grpSpPr/>
+      <p:sp>
+        <p:nvSpPr>
+          <p:cNvPr id="2" name="TextBox 1"/>
+          <p:cNvSpPr txBox="1"/>
+          <p:nvPr/>
+        </p:nvSpPr>
+        <p:spPr>
+          <a:xfrm>
+            <a:off x="502920" y="320040"/>
+            <a:ext cx="11155680" cy="914400"/>
+          </a:xfrm>
+          <a:prstGeom prst="rect">
+            <a:avLst/>
+          </a:prstGeom>
+          <a:noFill/>
+        </p:spPr>
+        <p:txBody>
+          <a:bodyPr wrap="square">
+            <a:spAutoFit/>
+          </a:bodyPr>
+          <a:lstStyle/>
+          <a:p>
+            <a:r>
+              <a:rPr sz="2800" b="1">
+                <a:solidFill>
+                  <a:srgbClr val="1F3A5F"/>
+                </a:solidFill>
+                <a:latin typeface="Malgun Gothic"/>
+              </a:rPr>
+              <a:t>연구 범위 · 선행연구 차용 여부</a:t>
+            </a:r>
+          </a:p>
+        </p:txBody>
+      </p:sp>
+      <p:sp>
+        <p:nvSpPr>
+          <p:cNvPr id="3" name="Rectangle 2"/>
+          <p:cNvSpPr/>
+          <p:nvPr/>
+        </p:nvSpPr>
+        <p:spPr>
+          <a:xfrm>
+            <a:off x="548640" y="1188720"/>
+            <a:ext cx="11064240" cy="38100"/>
+          </a:xfrm>
+          <a:prstGeom prst="rect">
+            <a:avLst/>
+          </a:prstGeom>
+          <a:solidFill>
+            <a:srgbClr val="C44E52"/>
+          </a:solidFill>
+          <a:ln>
+            <a:noFill/>
+          </a:ln>
+        </p:spPr>
+        <p:style>
+          <a:lnRef idx="1">
+            <a:schemeClr val="accent1"/>
+          </a:lnRef>
+          <a:fillRef idx="3">
+            <a:schemeClr val="accent1"/>
+          </a:fillRef>
+          <a:effectRef idx="2">
+            <a:schemeClr val="accent1"/>
+          </a:effectRef>
+          <a:fontRef idx="minor">
+            <a:schemeClr val="lt1"/>
+          </a:fontRef>
+        </p:style>
+        <p:txBody>
+          <a:bodyPr rtlCol="0" anchor="ctr"/>
+          <a:lstStyle/>
+          <a:p>
+            <a:pPr algn="ctr"/>
+          </a:p>
+        </p:txBody>
+      </p:sp>
+      <p:sp>
+        <p:nvSpPr>
+          <p:cNvPr id="4" name="TextBox 3"/>
+          <p:cNvSpPr txBox="1"/>
+          <p:nvPr/>
+        </p:nvSpPr>
+        <p:spPr>
+          <a:xfrm>
+            <a:off x="640080" y="1554480"/>
+            <a:ext cx="10972800" cy="4937760"/>
+          </a:xfrm>
+          <a:prstGeom prst="rect">
+            <a:avLst/>
+          </a:prstGeom>
+          <a:noFill/>
+        </p:spPr>
+        <p:txBody>
+          <a:bodyPr wrap="square">
+            <a:spAutoFit/>
+          </a:bodyPr>
+          <a:lstStyle/>
+          <a:p>
+            <a:pPr>
+              <a:spcAft>
+                <a:spcPts val="700"/>
+              </a:spcAft>
+            </a:pPr>
+            <a:r>
+              <a:rPr sz="1900">
+                <a:solidFill>
+                  <a:srgbClr val="222222"/>
+                </a:solidFill>
+                <a:latin typeface="Malgun Gothic"/>
+              </a:rPr>
+              <a:t>• [학술 윤리] 타인 연구 복제·표절 없음 — 코드·지수·분석 전부 자체 개발</a:t>
+            </a:r>
+          </a:p>
+          <a:p>
+            <a:pPr>
+              <a:spcAft>
+                <a:spcPts val="700"/>
+              </a:spcAft>
+            </a:pPr>
+            <a:r>
+              <a:rPr sz="1900">
+                <a:solidFill>
+                  <a:srgbClr val="222222"/>
+                </a:solidFill>
+                <a:latin typeface="Malgun Gothic"/>
+              </a:rPr>
+              <a:t>• 단, '선행연구가 없다'는 뜻은 아님 — 기존 연구는 분명히 존재</a:t>
+            </a:r>
+          </a:p>
+          <a:p>
+            <a:pPr lvl="1">
+              <a:spcAft>
+                <a:spcPts val="700"/>
+              </a:spcAft>
+            </a:pPr>
+            <a:r>
+              <a:rPr sz="1600">
+                <a:solidFill>
+                  <a:srgbClr val="222222"/>
+                </a:solidFill>
+                <a:latin typeface="Malgun Gothic"/>
+              </a:rPr>
+              <a:t>– 사법정책연구원·법률구조공단 보고서, 변호사 정원-접근성 연구(서울대 등)</a:t>
+            </a:r>
+          </a:p>
+          <a:p>
+            <a:pPr>
+              <a:spcAft>
+                <a:spcPts val="700"/>
+              </a:spcAft>
+            </a:pPr>
+            <a:r>
+              <a:rPr sz="1900">
+                <a:solidFill>
+                  <a:srgbClr val="222222"/>
+                </a:solidFill>
+                <a:latin typeface="Malgun Gothic"/>
+              </a:rPr>
+              <a:t>• 본 지수의 표준 지표(10만명당 변호사 수)도 기존 연구 관행을 따름</a:t>
+            </a:r>
+          </a:p>
+          <a:p>
+            <a:pPr>
+              <a:spcAft>
+                <a:spcPts val="700"/>
+              </a:spcAft>
+            </a:pPr>
+            <a:r>
+              <a:rPr sz="1900">
+                <a:solidFill>
+                  <a:srgbClr val="222222"/>
+                </a:solidFill>
+                <a:latin typeface="Malgun Gothic"/>
+              </a:rPr>
+              <a:t>• 한계 — 기존 지수와의 정량 벤치마킹은 미수행 (향후 과제)</a:t>
+            </a:r>
+          </a:p>
+          <a:p>
+            <a:pPr>
+              <a:spcAft>
+                <a:spcPts val="700"/>
+              </a:spcAft>
+            </a:pPr>
+            <a:r>
+              <a:rPr sz="1900">
+                <a:solidFill>
+                  <a:srgbClr val="222222"/>
+                </a:solidFill>
+                <a:latin typeface="Malgun Gothic"/>
+              </a:rPr>
+              <a:t>• 외부 차용은 공개 데이터·지도파일뿐, 모두 출처 명시</a:t>
+            </a:r>
+          </a:p>
+        </p:txBody>
+      </p:sp>
+    </p:spTree>
+  </p:cSld>
+  <p:clrMapOvr>
+    <a:masterClrMapping/>
+  </p:clrMapOvr>
+</p:sld>
+</file>
+
+<file path=ppt/slides/slide24.xml><?xml version="1.0" encoding="utf-8"?>
 <p:sld xmlns:a="http://schemas.openxmlformats.org/drawingml/2006/main" xmlns:p="http://schemas.openxmlformats.org/presentationml/2006/main" xmlns:r="http://schemas.openxmlformats.org/officeDocument/2006/relationships">
   <p:cSld>
     <p:spTree>
@@ -8425,7 +8956,7 @@
 </p:sld>
 </file>
 
-<file path=ppt/slides/slide24.xml><?xml version="1.0" encoding="utf-8"?>
+<file path=ppt/slides/slide25.xml><?xml version="1.0" encoding="utf-8"?>
 <p:sld xmlns:a="http://schemas.openxmlformats.org/drawingml/2006/main" xmlns:p="http://schemas.openxmlformats.org/presentationml/2006/main" xmlns:r="http://schemas.openxmlformats.org/officeDocument/2006/relationships">
   <p:cSld>
     <p:spTree>
@@ -8639,7 +9170,7 @@
 </p:sld>
 </file>
 
-<file path=ppt/slides/slide25.xml><?xml version="1.0" encoding="utf-8"?>
+<file path=ppt/slides/slide26.xml><?xml version="1.0" encoding="utf-8"?>
 <p:sld xmlns:a="http://schemas.openxmlformats.org/drawingml/2006/main" xmlns:p="http://schemas.openxmlformats.org/presentationml/2006/main" xmlns:r="http://schemas.openxmlformats.org/officeDocument/2006/relationships">
   <p:cSld>
     <p:spTree>
@@ -9114,7 +9645,7 @@
 </p:sld>
 </file>
 
-<file path=ppt/slides/slide26.xml><?xml version="1.0" encoding="utf-8"?>
+<file path=ppt/slides/slide27.xml><?xml version="1.0" encoding="utf-8"?>
 <p:sld xmlns:a="http://schemas.openxmlformats.org/drawingml/2006/main" xmlns:p="http://schemas.openxmlformats.org/presentationml/2006/main" xmlns:r="http://schemas.openxmlformats.org/officeDocument/2006/relationships">
   <p:cSld>
     <p:spTree>
@@ -9682,7 +10213,7 @@
 </p:sld>
 </file>
 
-<file path=ppt/slides/slide27.xml><?xml version="1.0" encoding="utf-8"?>
+<file path=ppt/slides/slide28.xml><?xml version="1.0" encoding="utf-8"?>
 <p:sld xmlns:a="http://schemas.openxmlformats.org/drawingml/2006/main" xmlns:p="http://schemas.openxmlformats.org/presentationml/2006/main" xmlns:r="http://schemas.openxmlformats.org/officeDocument/2006/relationships">
   <p:cSld>
     <p:spTree>
@@ -9745,7 +10276,189 @@
 </p:sld>
 </file>
 
-<file path=ppt/slides/slide28.xml><?xml version="1.0" encoding="utf-8"?>
+<file path=ppt/slides/slide3.xml><?xml version="1.0" encoding="utf-8"?>
+<p:sld xmlns:a="http://schemas.openxmlformats.org/drawingml/2006/main" xmlns:p="http://schemas.openxmlformats.org/presentationml/2006/main" xmlns:r="http://schemas.openxmlformats.org/officeDocument/2006/relationships">
+  <p:cSld>
+    <p:spTree>
+      <p:nvGrpSpPr>
+        <p:cNvPr id="1" name=""/>
+        <p:cNvGrpSpPr/>
+        <p:nvPr/>
+      </p:nvGrpSpPr>
+      <p:grpSpPr/>
+      <p:sp>
+        <p:nvSpPr>
+          <p:cNvPr id="2" name="TextBox 1"/>
+          <p:cNvSpPr txBox="1"/>
+          <p:nvPr/>
+        </p:nvSpPr>
+        <p:spPr>
+          <a:xfrm>
+            <a:off x="502920" y="320040"/>
+            <a:ext cx="11155680" cy="914400"/>
+          </a:xfrm>
+          <a:prstGeom prst="rect">
+            <a:avLst/>
+          </a:prstGeom>
+          <a:noFill/>
+        </p:spPr>
+        <p:txBody>
+          <a:bodyPr wrap="square">
+            <a:spAutoFit/>
+          </a:bodyPr>
+          <a:lstStyle/>
+          <a:p>
+            <a:r>
+              <a:rPr sz="2800" b="1">
+                <a:solidFill>
+                  <a:srgbClr val="1F3A5F"/>
+                </a:solidFill>
+                <a:latin typeface="Malgun Gothic"/>
+              </a:rPr>
+              <a:t>왜 이 문제인가</a:t>
+            </a:r>
+          </a:p>
+        </p:txBody>
+      </p:sp>
+      <p:sp>
+        <p:nvSpPr>
+          <p:cNvPr id="3" name="Rectangle 2"/>
+          <p:cNvSpPr/>
+          <p:nvPr/>
+        </p:nvSpPr>
+        <p:spPr>
+          <a:xfrm>
+            <a:off x="548640" y="1188720"/>
+            <a:ext cx="11064240" cy="38100"/>
+          </a:xfrm>
+          <a:prstGeom prst="rect">
+            <a:avLst/>
+          </a:prstGeom>
+          <a:solidFill>
+            <a:srgbClr val="C44E52"/>
+          </a:solidFill>
+          <a:ln>
+            <a:noFill/>
+          </a:ln>
+        </p:spPr>
+        <p:style>
+          <a:lnRef idx="1">
+            <a:schemeClr val="accent1"/>
+          </a:lnRef>
+          <a:fillRef idx="3">
+            <a:schemeClr val="accent1"/>
+          </a:fillRef>
+          <a:effectRef idx="2">
+            <a:schemeClr val="accent1"/>
+          </a:effectRef>
+          <a:fontRef idx="minor">
+            <a:schemeClr val="lt1"/>
+          </a:fontRef>
+        </p:style>
+        <p:txBody>
+          <a:bodyPr rtlCol="0" anchor="ctr"/>
+          <a:lstStyle/>
+          <a:p>
+            <a:pPr algn="ctr"/>
+          </a:p>
+        </p:txBody>
+      </p:sp>
+      <p:sp>
+        <p:nvSpPr>
+          <p:cNvPr id="4" name="TextBox 3"/>
+          <p:cNvSpPr txBox="1"/>
+          <p:nvPr/>
+        </p:nvSpPr>
+        <p:spPr>
+          <a:xfrm>
+            <a:off x="640080" y="1554480"/>
+            <a:ext cx="10972800" cy="4937760"/>
+          </a:xfrm>
+          <a:prstGeom prst="rect">
+            <a:avLst/>
+          </a:prstGeom>
+          <a:noFill/>
+        </p:spPr>
+        <p:txBody>
+          <a:bodyPr wrap="square">
+            <a:spAutoFit/>
+          </a:bodyPr>
+          <a:lstStyle/>
+          <a:p>
+            <a:pPr>
+              <a:spcAft>
+                <a:spcPts val="800"/>
+              </a:spcAft>
+            </a:pPr>
+            <a:r>
+              <a:rPr sz="2000">
+                <a:solidFill>
+                  <a:srgbClr val="222222"/>
+                </a:solidFill>
+                <a:latin typeface="Malgun Gothic"/>
+              </a:rPr>
+              <a:t>• 로스쿨 도입(2009) 이후 변호사 4만 명 시대 — 자원은 어디에 있나?</a:t>
+            </a:r>
+          </a:p>
+          <a:p>
+            <a:pPr lvl="1">
+              <a:spcAft>
+                <a:spcPts val="800"/>
+              </a:spcAft>
+            </a:pPr>
+            <a:r>
+              <a:rPr sz="1700">
+                <a:solidFill>
+                  <a:srgbClr val="222222"/>
+                </a:solidFill>
+                <a:latin typeface="Malgun Gothic"/>
+              </a:rPr>
+              <a:t>– 서울·수도권 집중 vs 지방 부족, 취약계층 사각지대 우려</a:t>
+            </a:r>
+          </a:p>
+          <a:p>
+            <a:pPr>
+              <a:spcAft>
+                <a:spcPts val="800"/>
+              </a:spcAft>
+            </a:pPr>
+            <a:r>
+              <a:rPr sz="2000">
+                <a:solidFill>
+                  <a:srgbClr val="222222"/>
+                </a:solidFill>
+                <a:latin typeface="Malgun Gothic"/>
+              </a:rPr>
+              <a:t>• 법률 서비스 접근성의 지역 불균형 = 사법 정의와 직결된 사회 문제</a:t>
+            </a:r>
+          </a:p>
+          <a:p>
+            <a:pPr>
+              <a:spcAft>
+                <a:spcPts val="800"/>
+              </a:spcAft>
+            </a:pPr>
+            <a:r>
+              <a:rPr sz="2000">
+                <a:solidFill>
+                  <a:srgbClr val="222222"/>
+                </a:solidFill>
+                <a:latin typeface="Malgun Gothic"/>
+              </a:rPr>
+              <a:t>• 연구 질문: 어느 지역이, 얼마나 법적 보호에서 소외되는가?</a:t>
+            </a:r>
+          </a:p>
+        </p:txBody>
+      </p:sp>
+    </p:spTree>
+  </p:cSld>
+  <p:clrMapOvr>
+    <a:masterClrMapping/>
+  </p:clrMapOvr>
+</p:sld>
+</file>
+
+<file path=ppt/slides/slide4.xml><?xml version="1.0" encoding="utf-8"?>
 <p:sld xmlns:a="http://schemas.openxmlformats.org/drawingml/2006/main" xmlns:p="http://schemas.openxmlformats.org/presentationml/2006/main" xmlns:r="http://schemas.openxmlformats.org/officeDocument/2006/relationships">
   <p:cSld>
     <p:spTree>
@@ -10242,7 +10955,7 @@
 </p:sld>
 </file>
 
-<file path=ppt/slides/slide3.xml><?xml version="1.0" encoding="utf-8"?>
+<file path=ppt/slides/slide5.xml><?xml version="1.0" encoding="utf-8"?>
 <p:sld xmlns:a="http://schemas.openxmlformats.org/drawingml/2006/main" xmlns:p="http://schemas.openxmlformats.org/presentationml/2006/main" xmlns:r="http://schemas.openxmlformats.org/officeDocument/2006/relationships">
   <p:cSld>
     <p:spTree>
@@ -10281,189 +10994,7 @@
                 </a:solidFill>
                 <a:latin typeface="Malgun Gothic"/>
               </a:rPr>
-              <a:t>1. 왜 이 문제인가</a:t>
-            </a:r>
-          </a:p>
-        </p:txBody>
-      </p:sp>
-      <p:sp>
-        <p:nvSpPr>
-          <p:cNvPr id="3" name="Rectangle 2"/>
-          <p:cNvSpPr/>
-          <p:nvPr/>
-        </p:nvSpPr>
-        <p:spPr>
-          <a:xfrm>
-            <a:off x="548640" y="1188720"/>
-            <a:ext cx="11064240" cy="38100"/>
-          </a:xfrm>
-          <a:prstGeom prst="rect">
-            <a:avLst/>
-          </a:prstGeom>
-          <a:solidFill>
-            <a:srgbClr val="C44E52"/>
-          </a:solidFill>
-          <a:ln>
-            <a:noFill/>
-          </a:ln>
-        </p:spPr>
-        <p:style>
-          <a:lnRef idx="1">
-            <a:schemeClr val="accent1"/>
-          </a:lnRef>
-          <a:fillRef idx="3">
-            <a:schemeClr val="accent1"/>
-          </a:fillRef>
-          <a:effectRef idx="2">
-            <a:schemeClr val="accent1"/>
-          </a:effectRef>
-          <a:fontRef idx="minor">
-            <a:schemeClr val="lt1"/>
-          </a:fontRef>
-        </p:style>
-        <p:txBody>
-          <a:bodyPr rtlCol="0" anchor="ctr"/>
-          <a:lstStyle/>
-          <a:p>
-            <a:pPr algn="ctr"/>
-          </a:p>
-        </p:txBody>
-      </p:sp>
-      <p:sp>
-        <p:nvSpPr>
-          <p:cNvPr id="4" name="TextBox 3"/>
-          <p:cNvSpPr txBox="1"/>
-          <p:nvPr/>
-        </p:nvSpPr>
-        <p:spPr>
-          <a:xfrm>
-            <a:off x="640080" y="1554480"/>
-            <a:ext cx="10972800" cy="4937760"/>
-          </a:xfrm>
-          <a:prstGeom prst="rect">
-            <a:avLst/>
-          </a:prstGeom>
-          <a:noFill/>
-        </p:spPr>
-        <p:txBody>
-          <a:bodyPr wrap="square">
-            <a:spAutoFit/>
-          </a:bodyPr>
-          <a:lstStyle/>
-          <a:p>
-            <a:pPr>
-              <a:spcAft>
-                <a:spcPts val="800"/>
-              </a:spcAft>
-            </a:pPr>
-            <a:r>
-              <a:rPr sz="2000">
-                <a:solidFill>
-                  <a:srgbClr val="222222"/>
-                </a:solidFill>
-                <a:latin typeface="Malgun Gothic"/>
-              </a:rPr>
-              <a:t>• 로스쿨 도입(2009) 이후 변호사 4만 명 시대 — 자원은 어디에 있나?</a:t>
-            </a:r>
-          </a:p>
-          <a:p>
-            <a:pPr lvl="1">
-              <a:spcAft>
-                <a:spcPts val="800"/>
-              </a:spcAft>
-            </a:pPr>
-            <a:r>
-              <a:rPr sz="1700">
-                <a:solidFill>
-                  <a:srgbClr val="222222"/>
-                </a:solidFill>
-                <a:latin typeface="Malgun Gothic"/>
-              </a:rPr>
-              <a:t>– 서울·수도권 집중 vs 지방 부족, 취약계층 사각지대 우려</a:t>
-            </a:r>
-          </a:p>
-          <a:p>
-            <a:pPr>
-              <a:spcAft>
-                <a:spcPts val="800"/>
-              </a:spcAft>
-            </a:pPr>
-            <a:r>
-              <a:rPr sz="2000">
-                <a:solidFill>
-                  <a:srgbClr val="222222"/>
-                </a:solidFill>
-                <a:latin typeface="Malgun Gothic"/>
-              </a:rPr>
-              <a:t>• 법률 서비스 접근성의 지역 불균형 = 사법 정의와 직결된 사회 문제</a:t>
-            </a:r>
-          </a:p>
-          <a:p>
-            <a:pPr>
-              <a:spcAft>
-                <a:spcPts val="800"/>
-              </a:spcAft>
-            </a:pPr>
-            <a:r>
-              <a:rPr sz="2000">
-                <a:solidFill>
-                  <a:srgbClr val="222222"/>
-                </a:solidFill>
-                <a:latin typeface="Malgun Gothic"/>
-              </a:rPr>
-              <a:t>• 연구 질문: 어느 지역이, 얼마나 법적 보호에서 소외되는가?</a:t>
-            </a:r>
-          </a:p>
-        </p:txBody>
-      </p:sp>
-    </p:spTree>
-  </p:cSld>
-  <p:clrMapOvr>
-    <a:masterClrMapping/>
-  </p:clrMapOvr>
-</p:sld>
-</file>
-
-<file path=ppt/slides/slide4.xml><?xml version="1.0" encoding="utf-8"?>
-<p:sld xmlns:a="http://schemas.openxmlformats.org/drawingml/2006/main" xmlns:p="http://schemas.openxmlformats.org/presentationml/2006/main" xmlns:r="http://schemas.openxmlformats.org/officeDocument/2006/relationships">
-  <p:cSld>
-    <p:spTree>
-      <p:nvGrpSpPr>
-        <p:cNvPr id="1" name=""/>
-        <p:cNvGrpSpPr/>
-        <p:nvPr/>
-      </p:nvGrpSpPr>
-      <p:grpSpPr/>
-      <p:sp>
-        <p:nvSpPr>
-          <p:cNvPr id="2" name="TextBox 1"/>
-          <p:cNvSpPr txBox="1"/>
-          <p:nvPr/>
-        </p:nvSpPr>
-        <p:spPr>
-          <a:xfrm>
-            <a:off x="502920" y="320040"/>
-            <a:ext cx="11155680" cy="914400"/>
-          </a:xfrm>
-          <a:prstGeom prst="rect">
-            <a:avLst/>
-          </a:prstGeom>
-          <a:noFill/>
-        </p:spPr>
-        <p:txBody>
-          <a:bodyPr wrap="square">
-            <a:spAutoFit/>
-          </a:bodyPr>
-          <a:lstStyle/>
-          <a:p>
-            <a:r>
-              <a:rPr sz="2800" b="1">
-                <a:solidFill>
-                  <a:srgbClr val="1F3A5F"/>
-                </a:solidFill>
-                <a:latin typeface="Malgun Gothic"/>
-              </a:rPr>
-              <a:t>2. 어떻게 측정하나 — 법률 접근성 점수(LLAI)</a:t>
+              <a:t>어떻게 측정하나 — 법률 접근성 점수(LLAI)</a:t>
             </a:r>
           </a:p>
         </p:txBody>
@@ -10961,775 +11492,6 @@
                 <a:latin typeface="Malgun Gothic"/>
               </a:rPr>
               <a:t>※ 정확한 식: LLAI = w₁·A1ⁿ + w₂·(1−A2ⁿ) + w₃·A3ⁿ  (ⁿ = 0~1로 맞춘 값, A2는 적을수록 좋아 1에서 뺌)</a:t>
-            </a:r>
-          </a:p>
-        </p:txBody>
-      </p:sp>
-    </p:spTree>
-  </p:cSld>
-  <p:clrMapOvr>
-    <a:masterClrMapping/>
-  </p:clrMapOvr>
-</p:sld>
-</file>
-
-<file path=ppt/slides/slide5.xml><?xml version="1.0" encoding="utf-8"?>
-<p:sld xmlns:a="http://schemas.openxmlformats.org/drawingml/2006/main" xmlns:p="http://schemas.openxmlformats.org/presentationml/2006/main" xmlns:r="http://schemas.openxmlformats.org/officeDocument/2006/relationships">
-  <p:cSld>
-    <p:spTree>
-      <p:nvGrpSpPr>
-        <p:cNvPr id="1" name=""/>
-        <p:cNvGrpSpPr/>
-        <p:nvPr/>
-      </p:nvGrpSpPr>
-      <p:grpSpPr/>
-      <p:sp>
-        <p:nvSpPr>
-          <p:cNvPr id="2" name="TextBox 1"/>
-          <p:cNvSpPr txBox="1"/>
-          <p:nvPr/>
-        </p:nvSpPr>
-        <p:spPr>
-          <a:xfrm>
-            <a:off x="502920" y="320040"/>
-            <a:ext cx="11155680" cy="914400"/>
-          </a:xfrm>
-          <a:prstGeom prst="rect">
-            <a:avLst/>
-          </a:prstGeom>
-          <a:noFill/>
-        </p:spPr>
-        <p:txBody>
-          <a:bodyPr wrap="square">
-            <a:spAutoFit/>
-          </a:bodyPr>
-          <a:lstStyle/>
-          <a:p>
-            <a:r>
-              <a:rPr sz="2800" b="1">
-                <a:solidFill>
-                  <a:srgbClr val="1F3A5F"/>
-                </a:solidFill>
-                <a:latin typeface="Malgun Gothic"/>
-              </a:rPr>
-              <a:t>3. 분석 파이프라인</a:t>
-            </a:r>
-          </a:p>
-        </p:txBody>
-      </p:sp>
-      <p:sp>
-        <p:nvSpPr>
-          <p:cNvPr id="3" name="Rectangle 2"/>
-          <p:cNvSpPr/>
-          <p:nvPr/>
-        </p:nvSpPr>
-        <p:spPr>
-          <a:xfrm>
-            <a:off x="548640" y="1188720"/>
-            <a:ext cx="11064240" cy="38100"/>
-          </a:xfrm>
-          <a:prstGeom prst="rect">
-            <a:avLst/>
-          </a:prstGeom>
-          <a:solidFill>
-            <a:srgbClr val="C44E52"/>
-          </a:solidFill>
-          <a:ln>
-            <a:noFill/>
-          </a:ln>
-        </p:spPr>
-        <p:style>
-          <a:lnRef idx="1">
-            <a:schemeClr val="accent1"/>
-          </a:lnRef>
-          <a:fillRef idx="3">
-            <a:schemeClr val="accent1"/>
-          </a:fillRef>
-          <a:effectRef idx="2">
-            <a:schemeClr val="accent1"/>
-          </a:effectRef>
-          <a:fontRef idx="minor">
-            <a:schemeClr val="lt1"/>
-          </a:fontRef>
-        </p:style>
-        <p:txBody>
-          <a:bodyPr rtlCol="0" anchor="ctr"/>
-          <a:lstStyle/>
-          <a:p>
-            <a:pPr algn="ctr"/>
-          </a:p>
-        </p:txBody>
-      </p:sp>
-      <p:sp>
-        <p:nvSpPr>
-          <p:cNvPr id="4" name="Rounded Rectangle 3"/>
-          <p:cNvSpPr/>
-          <p:nvPr/>
-        </p:nvSpPr>
-        <p:spPr>
-          <a:xfrm>
-            <a:off x="640080" y="2468880"/>
-            <a:ext cx="1627632" cy="1371600"/>
-          </a:xfrm>
-          <a:prstGeom prst="roundRect">
-            <a:avLst/>
-          </a:prstGeom>
-          <a:solidFill>
-            <a:srgbClr val="1F3A5F"/>
-          </a:solidFill>
-          <a:ln>
-            <a:solidFill>
-              <a:srgbClr val="1F3A5F"/>
-            </a:solidFill>
-          </a:ln>
-        </p:spPr>
-        <p:style>
-          <a:lnRef idx="1">
-            <a:schemeClr val="accent1"/>
-          </a:lnRef>
-          <a:fillRef idx="3">
-            <a:schemeClr val="accent1"/>
-          </a:fillRef>
-          <a:effectRef idx="2">
-            <a:schemeClr val="accent1"/>
-          </a:effectRef>
-          <a:fontRef idx="minor">
-            <a:schemeClr val="lt1"/>
-          </a:fontRef>
-        </p:style>
-        <p:txBody>
-          <a:bodyPr rtlCol="0" anchor="ctr" wrap="square"/>
-          <a:lstStyle/>
-          <a:p>
-            <a:pPr algn="ctr"/>
-            <a:r>
-              <a:rPr sz="1200" b="1">
-                <a:solidFill>
-                  <a:srgbClr val="FFFFFF"/>
-                </a:solidFill>
-                <a:latin typeface="Malgun Gothic"/>
-              </a:rPr>
-              <a:t>원천 데이터</a:t>
-            </a:r>
-          </a:p>
-          <a:p>
-            <a:pPr algn="ctr"/>
-            <a:r>
-              <a:rPr sz="1200" b="1">
-                <a:solidFill>
-                  <a:srgbClr val="FFFFFF"/>
-                </a:solidFill>
-                <a:latin typeface="Malgun Gothic"/>
-              </a:rPr>
-              <a:t>변협·사법연감</a:t>
-            </a:r>
-          </a:p>
-          <a:p>
-            <a:pPr algn="ctr"/>
-            <a:r>
-              <a:rPr sz="1200" b="1">
-                <a:solidFill>
-                  <a:srgbClr val="FFFFFF"/>
-                </a:solidFill>
-                <a:latin typeface="Malgun Gothic"/>
-              </a:rPr>
-              <a:t>공단·KOSIS</a:t>
-            </a:r>
-          </a:p>
-        </p:txBody>
-      </p:sp>
-      <p:sp>
-        <p:nvSpPr>
-          <p:cNvPr id="5" name="TextBox 4"/>
-          <p:cNvSpPr txBox="1"/>
-          <p:nvPr/>
-        </p:nvSpPr>
-        <p:spPr>
-          <a:xfrm>
-            <a:off x="2221992" y="2880360"/>
-            <a:ext cx="548640" cy="548640"/>
-          </a:xfrm>
-          <a:prstGeom prst="rect">
-            <a:avLst/>
-          </a:prstGeom>
-          <a:noFill/>
-        </p:spPr>
-        <p:txBody>
-          <a:bodyPr wrap="none">
-            <a:spAutoFit/>
-          </a:bodyPr>
-          <a:lstStyle/>
-          <a:p>
-            <a:pPr algn="ctr"/>
-            <a:r>
-              <a:rPr sz="1600">
-                <a:solidFill>
-                  <a:srgbClr val="C44E52"/>
-                </a:solidFill>
-                <a:latin typeface="Malgun Gothic"/>
-              </a:rPr>
-              <a:t>▶</a:t>
-            </a:r>
-          </a:p>
-        </p:txBody>
-      </p:sp>
-      <p:sp>
-        <p:nvSpPr>
-          <p:cNvPr id="6" name="Rounded Rectangle 5"/>
-          <p:cNvSpPr/>
-          <p:nvPr/>
-        </p:nvSpPr>
-        <p:spPr>
-          <a:xfrm>
-            <a:off x="2523744" y="2468880"/>
-            <a:ext cx="1627632" cy="1371600"/>
-          </a:xfrm>
-          <a:prstGeom prst="roundRect">
-            <a:avLst/>
-          </a:prstGeom>
-          <a:solidFill>
-            <a:srgbClr val="1F3A5F"/>
-          </a:solidFill>
-          <a:ln>
-            <a:solidFill>
-              <a:srgbClr val="1F3A5F"/>
-            </a:solidFill>
-          </a:ln>
-        </p:spPr>
-        <p:style>
-          <a:lnRef idx="1">
-            <a:schemeClr val="accent1"/>
-          </a:lnRef>
-          <a:fillRef idx="3">
-            <a:schemeClr val="accent1"/>
-          </a:fillRef>
-          <a:effectRef idx="2">
-            <a:schemeClr val="accent1"/>
-          </a:effectRef>
-          <a:fontRef idx="minor">
-            <a:schemeClr val="lt1"/>
-          </a:fontRef>
-        </p:style>
-        <p:txBody>
-          <a:bodyPr rtlCol="0" anchor="ctr" wrap="square"/>
-          <a:lstStyle/>
-          <a:p>
-            <a:pPr algn="ctr"/>
-            <a:r>
-              <a:rPr sz="1200" b="1">
-                <a:solidFill>
-                  <a:srgbClr val="FFFFFF"/>
-                </a:solidFill>
-                <a:latin typeface="Malgun Gothic"/>
-              </a:rPr>
-              <a:t>수집</a:t>
-            </a:r>
-          </a:p>
-          <a:p>
-            <a:pPr algn="ctr"/>
-            <a:r>
-              <a:rPr sz="1200" b="1">
-                <a:solidFill>
-                  <a:srgbClr val="FFFFFF"/>
-                </a:solidFill>
-                <a:latin typeface="Malgun Gothic"/>
-              </a:rPr>
-              <a:t>스크래핑</a:t>
-            </a:r>
-          </a:p>
-          <a:p>
-            <a:pPr algn="ctr"/>
-            <a:r>
-              <a:rPr sz="1200" b="1">
-                <a:solidFill>
-                  <a:srgbClr val="FFFFFF"/>
-                </a:solidFill>
-                <a:latin typeface="Malgun Gothic"/>
-              </a:rPr>
-              <a:t>다운로드</a:t>
-            </a:r>
-          </a:p>
-        </p:txBody>
-      </p:sp>
-      <p:sp>
-        <p:nvSpPr>
-          <p:cNvPr id="7" name="TextBox 6"/>
-          <p:cNvSpPr txBox="1"/>
-          <p:nvPr/>
-        </p:nvSpPr>
-        <p:spPr>
-          <a:xfrm>
-            <a:off x="4105656" y="2880360"/>
-            <a:ext cx="548640" cy="548640"/>
-          </a:xfrm>
-          <a:prstGeom prst="rect">
-            <a:avLst/>
-          </a:prstGeom>
-          <a:noFill/>
-        </p:spPr>
-        <p:txBody>
-          <a:bodyPr wrap="none">
-            <a:spAutoFit/>
-          </a:bodyPr>
-          <a:lstStyle/>
-          <a:p>
-            <a:pPr algn="ctr"/>
-            <a:r>
-              <a:rPr sz="1600">
-                <a:solidFill>
-                  <a:srgbClr val="C44E52"/>
-                </a:solidFill>
-                <a:latin typeface="Malgun Gothic"/>
-              </a:rPr>
-              <a:t>▶</a:t>
-            </a:r>
-          </a:p>
-        </p:txBody>
-      </p:sp>
-      <p:sp>
-        <p:nvSpPr>
-          <p:cNvPr id="8" name="Rounded Rectangle 7"/>
-          <p:cNvSpPr/>
-          <p:nvPr/>
-        </p:nvSpPr>
-        <p:spPr>
-          <a:xfrm>
-            <a:off x="4407408" y="2468880"/>
-            <a:ext cx="1627632" cy="1371600"/>
-          </a:xfrm>
-          <a:prstGeom prst="roundRect">
-            <a:avLst/>
-          </a:prstGeom>
-          <a:solidFill>
-            <a:srgbClr val="1F3A5F"/>
-          </a:solidFill>
-          <a:ln>
-            <a:solidFill>
-              <a:srgbClr val="1F3A5F"/>
-            </a:solidFill>
-          </a:ln>
-        </p:spPr>
-        <p:style>
-          <a:lnRef idx="1">
-            <a:schemeClr val="accent1"/>
-          </a:lnRef>
-          <a:fillRef idx="3">
-            <a:schemeClr val="accent1"/>
-          </a:fillRef>
-          <a:effectRef idx="2">
-            <a:schemeClr val="accent1"/>
-          </a:effectRef>
-          <a:fontRef idx="minor">
-            <a:schemeClr val="lt1"/>
-          </a:fontRef>
-        </p:style>
-        <p:txBody>
-          <a:bodyPr rtlCol="0" anchor="ctr" wrap="square"/>
-          <a:lstStyle/>
-          <a:p>
-            <a:pPr algn="ctr"/>
-            <a:r>
-              <a:rPr sz="1200" b="1">
-                <a:solidFill>
-                  <a:srgbClr val="FFFFFF"/>
-                </a:solidFill>
-                <a:latin typeface="Malgun Gothic"/>
-              </a:rPr>
-              <a:t>정제 tidy</a:t>
-            </a:r>
-          </a:p>
-          <a:p>
-            <a:pPr algn="ctr"/>
-            <a:r>
-              <a:rPr sz="1200" b="1">
-                <a:solidFill>
-                  <a:srgbClr val="FFFFFF"/>
-                </a:solidFill>
-                <a:latin typeface="Malgun Gothic"/>
-              </a:rPr>
-              <a:t>인코딩·가로→세로</a:t>
-            </a:r>
-          </a:p>
-          <a:p>
-            <a:pPr algn="ctr"/>
-            <a:r>
-              <a:rPr sz="1200" b="1">
-                <a:solidFill>
-                  <a:srgbClr val="FFFFFF"/>
-                </a:solidFill>
-                <a:latin typeface="Malgun Gothic"/>
-              </a:rPr>
-              <a:t>시도명 표준화</a:t>
-            </a:r>
-          </a:p>
-        </p:txBody>
-      </p:sp>
-      <p:sp>
-        <p:nvSpPr>
-          <p:cNvPr id="9" name="TextBox 8"/>
-          <p:cNvSpPr txBox="1"/>
-          <p:nvPr/>
-        </p:nvSpPr>
-        <p:spPr>
-          <a:xfrm>
-            <a:off x="5989320" y="2880360"/>
-            <a:ext cx="548640" cy="548640"/>
-          </a:xfrm>
-          <a:prstGeom prst="rect">
-            <a:avLst/>
-          </a:prstGeom>
-          <a:noFill/>
-        </p:spPr>
-        <p:txBody>
-          <a:bodyPr wrap="none">
-            <a:spAutoFit/>
-          </a:bodyPr>
-          <a:lstStyle/>
-          <a:p>
-            <a:pPr algn="ctr"/>
-            <a:r>
-              <a:rPr sz="1600">
-                <a:solidFill>
-                  <a:srgbClr val="C44E52"/>
-                </a:solidFill>
-                <a:latin typeface="Malgun Gothic"/>
-              </a:rPr>
-              <a:t>▶</a:t>
-            </a:r>
-          </a:p>
-        </p:txBody>
-      </p:sp>
-      <p:sp>
-        <p:nvSpPr>
-          <p:cNvPr id="10" name="Rounded Rectangle 9"/>
-          <p:cNvSpPr/>
-          <p:nvPr/>
-        </p:nvSpPr>
-        <p:spPr>
-          <a:xfrm>
-            <a:off x="6291072" y="2468880"/>
-            <a:ext cx="1627632" cy="1371600"/>
-          </a:xfrm>
-          <a:prstGeom prst="roundRect">
-            <a:avLst/>
-          </a:prstGeom>
-          <a:solidFill>
-            <a:srgbClr val="1F3A5F"/>
-          </a:solidFill>
-          <a:ln>
-            <a:solidFill>
-              <a:srgbClr val="1F3A5F"/>
-            </a:solidFill>
-          </a:ln>
-        </p:spPr>
-        <p:style>
-          <a:lnRef idx="1">
-            <a:schemeClr val="accent1"/>
-          </a:lnRef>
-          <a:fillRef idx="3">
-            <a:schemeClr val="accent1"/>
-          </a:fillRef>
-          <a:effectRef idx="2">
-            <a:schemeClr val="accent1"/>
-          </a:effectRef>
-          <a:fontRef idx="minor">
-            <a:schemeClr val="lt1"/>
-          </a:fontRef>
-        </p:style>
-        <p:txBody>
-          <a:bodyPr rtlCol="0" anchor="ctr" wrap="square"/>
-          <a:lstStyle/>
-          <a:p>
-            <a:pPr algn="ctr"/>
-            <a:r>
-              <a:rPr sz="1200" b="1">
-                <a:solidFill>
-                  <a:srgbClr val="FFFFFF"/>
-                </a:solidFill>
-                <a:latin typeface="Malgun Gothic"/>
-              </a:rPr>
-              <a:t>권역 매핑</a:t>
-            </a:r>
-          </a:p>
-          <a:p>
-            <a:pPr algn="ctr"/>
-            <a:r>
-              <a:rPr sz="1200" b="1">
-                <a:solidFill>
-                  <a:srgbClr val="FFFFFF"/>
-                </a:solidFill>
-                <a:latin typeface="Malgun Gothic"/>
-              </a:rPr>
-              <a:t>13권역</a:t>
-            </a:r>
-          </a:p>
-          <a:p>
-            <a:pPr algn="ctr"/>
-            <a:r>
-              <a:rPr sz="1200" b="1">
-                <a:solidFill>
-                  <a:srgbClr val="FFFFFF"/>
-                </a:solidFill>
-                <a:latin typeface="Malgun Gothic"/>
-              </a:rPr>
-              <a:t>10도단위</a:t>
-            </a:r>
-          </a:p>
-        </p:txBody>
-      </p:sp>
-      <p:sp>
-        <p:nvSpPr>
-          <p:cNvPr id="11" name="TextBox 10"/>
-          <p:cNvSpPr txBox="1"/>
-          <p:nvPr/>
-        </p:nvSpPr>
-        <p:spPr>
-          <a:xfrm>
-            <a:off x="7872983" y="2880360"/>
-            <a:ext cx="548640" cy="548640"/>
-          </a:xfrm>
-          <a:prstGeom prst="rect">
-            <a:avLst/>
-          </a:prstGeom>
-          <a:noFill/>
-        </p:spPr>
-        <p:txBody>
-          <a:bodyPr wrap="none">
-            <a:spAutoFit/>
-          </a:bodyPr>
-          <a:lstStyle/>
-          <a:p>
-            <a:pPr algn="ctr"/>
-            <a:r>
-              <a:rPr sz="1600">
-                <a:solidFill>
-                  <a:srgbClr val="C44E52"/>
-                </a:solidFill>
-                <a:latin typeface="Malgun Gothic"/>
-              </a:rPr>
-              <a:t>▶</a:t>
-            </a:r>
-          </a:p>
-        </p:txBody>
-      </p:sp>
-      <p:sp>
-        <p:nvSpPr>
-          <p:cNvPr id="12" name="Rounded Rectangle 11"/>
-          <p:cNvSpPr/>
-          <p:nvPr/>
-        </p:nvSpPr>
-        <p:spPr>
-          <a:xfrm>
-            <a:off x="8174736" y="2468880"/>
-            <a:ext cx="1627632" cy="1371600"/>
-          </a:xfrm>
-          <a:prstGeom prst="roundRect">
-            <a:avLst/>
-          </a:prstGeom>
-          <a:solidFill>
-            <a:srgbClr val="1F3A5F"/>
-          </a:solidFill>
-          <a:ln>
-            <a:solidFill>
-              <a:srgbClr val="1F3A5F"/>
-            </a:solidFill>
-          </a:ln>
-        </p:spPr>
-        <p:style>
-          <a:lnRef idx="1">
-            <a:schemeClr val="accent1"/>
-          </a:lnRef>
-          <a:fillRef idx="3">
-            <a:schemeClr val="accent1"/>
-          </a:fillRef>
-          <a:effectRef idx="2">
-            <a:schemeClr val="accent1"/>
-          </a:effectRef>
-          <a:fontRef idx="minor">
-            <a:schemeClr val="lt1"/>
-          </a:fontRef>
-        </p:style>
-        <p:txBody>
-          <a:bodyPr rtlCol="0" anchor="ctr" wrap="square"/>
-          <a:lstStyle/>
-          <a:p>
-            <a:pPr algn="ctr"/>
-            <a:r>
-              <a:rPr sz="1200" b="1">
-                <a:solidFill>
-                  <a:srgbClr val="FFFFFF"/>
-                </a:solidFill>
-                <a:latin typeface="Malgun Gothic"/>
-              </a:rPr>
-              <a:t>패널</a:t>
-            </a:r>
-          </a:p>
-          <a:p>
-            <a:pPr algn="ctr"/>
-            <a:r>
-              <a:rPr sz="1200" b="1">
-                <a:solidFill>
-                  <a:srgbClr val="FFFFFF"/>
-                </a:solidFill>
-                <a:latin typeface="Malgun Gothic"/>
-              </a:rPr>
-              <a:t>권역×연도</a:t>
-            </a:r>
-          </a:p>
-        </p:txBody>
-      </p:sp>
-      <p:sp>
-        <p:nvSpPr>
-          <p:cNvPr id="13" name="TextBox 12"/>
-          <p:cNvSpPr txBox="1"/>
-          <p:nvPr/>
-        </p:nvSpPr>
-        <p:spPr>
-          <a:xfrm>
-            <a:off x="9756648" y="2880360"/>
-            <a:ext cx="548640" cy="548640"/>
-          </a:xfrm>
-          <a:prstGeom prst="rect">
-            <a:avLst/>
-          </a:prstGeom>
-          <a:noFill/>
-        </p:spPr>
-        <p:txBody>
-          <a:bodyPr wrap="none">
-            <a:spAutoFit/>
-          </a:bodyPr>
-          <a:lstStyle/>
-          <a:p>
-            <a:pPr algn="ctr"/>
-            <a:r>
-              <a:rPr sz="1600">
-                <a:solidFill>
-                  <a:srgbClr val="C44E52"/>
-                </a:solidFill>
-                <a:latin typeface="Malgun Gothic"/>
-              </a:rPr>
-              <a:t>▶</a:t>
-            </a:r>
-          </a:p>
-        </p:txBody>
-      </p:sp>
-      <p:sp>
-        <p:nvSpPr>
-          <p:cNvPr id="14" name="Rounded Rectangle 13"/>
-          <p:cNvSpPr/>
-          <p:nvPr/>
-        </p:nvSpPr>
-        <p:spPr>
-          <a:xfrm>
-            <a:off x="10058400" y="2468880"/>
-            <a:ext cx="1627632" cy="1371600"/>
-          </a:xfrm>
-          <a:prstGeom prst="roundRect">
-            <a:avLst/>
-          </a:prstGeom>
-          <a:solidFill>
-            <a:srgbClr val="C44E52"/>
-          </a:solidFill>
-          <a:ln>
-            <a:solidFill>
-              <a:srgbClr val="1F3A5F"/>
-            </a:solidFill>
-          </a:ln>
-        </p:spPr>
-        <p:style>
-          <a:lnRef idx="1">
-            <a:schemeClr val="accent1"/>
-          </a:lnRef>
-          <a:fillRef idx="3">
-            <a:schemeClr val="accent1"/>
-          </a:fillRef>
-          <a:effectRef idx="2">
-            <a:schemeClr val="accent1"/>
-          </a:effectRef>
-          <a:fontRef idx="minor">
-            <a:schemeClr val="lt1"/>
-          </a:fontRef>
-        </p:style>
-        <p:txBody>
-          <a:bodyPr rtlCol="0" anchor="ctr" wrap="square"/>
-          <a:lstStyle/>
-          <a:p>
-            <a:pPr algn="ctr"/>
-            <a:r>
-              <a:rPr sz="1200" b="1">
-                <a:solidFill>
-                  <a:srgbClr val="FFFFFF"/>
-                </a:solidFill>
-                <a:latin typeface="Malgun Gothic"/>
-              </a:rPr>
-              <a:t>LLAI</a:t>
-            </a:r>
-          </a:p>
-          <a:p>
-            <a:pPr algn="ctr"/>
-            <a:r>
-              <a:rPr sz="1200" b="1">
-                <a:solidFill>
-                  <a:srgbClr val="FFFFFF"/>
-                </a:solidFill>
-                <a:latin typeface="Malgun Gothic"/>
-              </a:rPr>
-              <a:t>정규화·가중치</a:t>
-            </a:r>
-          </a:p>
-        </p:txBody>
-      </p:sp>
-      <p:sp>
-        <p:nvSpPr>
-          <p:cNvPr id="15" name="TextBox 14"/>
-          <p:cNvSpPr txBox="1"/>
-          <p:nvPr/>
-        </p:nvSpPr>
-        <p:spPr>
-          <a:xfrm>
-            <a:off x="640080" y="4297680"/>
-            <a:ext cx="10972800" cy="4937760"/>
-          </a:xfrm>
-          <a:prstGeom prst="rect">
-            <a:avLst/>
-          </a:prstGeom>
-          <a:noFill/>
-        </p:spPr>
-        <p:txBody>
-          <a:bodyPr wrap="square">
-            <a:spAutoFit/>
-          </a:bodyPr>
-          <a:lstStyle/>
-          <a:p>
-            <a:pPr>
-              <a:spcAft>
-                <a:spcPts val="800"/>
-              </a:spcAft>
-            </a:pPr>
-            <a:r>
-              <a:rPr sz="1800">
-                <a:solidFill>
-                  <a:srgbClr val="222222"/>
-                </a:solidFill>
-                <a:latin typeface="Malgun Gothic"/>
-              </a:rPr>
-              <a:t>• 각 단계는 src/ 모듈로 구현 — 재현 가능 (notebooks/01~04)</a:t>
-            </a:r>
-          </a:p>
-          <a:p>
-            <a:pPr>
-              <a:spcAft>
-                <a:spcPts val="800"/>
-              </a:spcAft>
-            </a:pPr>
-            <a:r>
-              <a:rPr sz="1800">
-                <a:solidFill>
-                  <a:srgbClr val="222222"/>
-                </a:solidFill>
-                <a:latin typeface="Malgun Gothic"/>
-              </a:rPr>
-              <a:t>• LLAI 산출 후 → 비슷한 권역 묶기 · 가설 4개 검정 · 지도 시각화</a:t>
             </a:r>
           </a:p>
         </p:txBody>
@@ -11781,7 +11543,7 @@
                 </a:solidFill>
                 <a:latin typeface="Malgun Gothic"/>
               </a:rPr>
-              <a:t>4. 데이터 5종과 두 가지 난관</a:t>
+              <a:t>분석 파이프라인</a:t>
             </a:r>
           </a:p>
         </p:txBody>
@@ -11831,13 +11593,632 @@
       </p:sp>
       <p:sp>
         <p:nvSpPr>
-          <p:cNvPr id="4" name="TextBox 3"/>
+          <p:cNvPr id="4" name="Rounded Rectangle 3"/>
+          <p:cNvSpPr/>
+          <p:nvPr/>
+        </p:nvSpPr>
+        <p:spPr>
+          <a:xfrm>
+            <a:off x="640080" y="2468880"/>
+            <a:ext cx="1627632" cy="1371600"/>
+          </a:xfrm>
+          <a:prstGeom prst="roundRect">
+            <a:avLst/>
+          </a:prstGeom>
+          <a:solidFill>
+            <a:srgbClr val="1F3A5F"/>
+          </a:solidFill>
+          <a:ln>
+            <a:solidFill>
+              <a:srgbClr val="1F3A5F"/>
+            </a:solidFill>
+          </a:ln>
+        </p:spPr>
+        <p:style>
+          <a:lnRef idx="1">
+            <a:schemeClr val="accent1"/>
+          </a:lnRef>
+          <a:fillRef idx="3">
+            <a:schemeClr val="accent1"/>
+          </a:fillRef>
+          <a:effectRef idx="2">
+            <a:schemeClr val="accent1"/>
+          </a:effectRef>
+          <a:fontRef idx="minor">
+            <a:schemeClr val="lt1"/>
+          </a:fontRef>
+        </p:style>
+        <p:txBody>
+          <a:bodyPr rtlCol="0" anchor="ctr" wrap="square"/>
+          <a:lstStyle/>
+          <a:p>
+            <a:pPr algn="ctr"/>
+            <a:r>
+              <a:rPr sz="1200" b="1">
+                <a:solidFill>
+                  <a:srgbClr val="FFFFFF"/>
+                </a:solidFill>
+                <a:latin typeface="Malgun Gothic"/>
+              </a:rPr>
+              <a:t>원천 데이터</a:t>
+            </a:r>
+          </a:p>
+          <a:p>
+            <a:pPr algn="ctr"/>
+            <a:r>
+              <a:rPr sz="1200" b="1">
+                <a:solidFill>
+                  <a:srgbClr val="FFFFFF"/>
+                </a:solidFill>
+                <a:latin typeface="Malgun Gothic"/>
+              </a:rPr>
+              <a:t>변협·사법연감</a:t>
+            </a:r>
+          </a:p>
+          <a:p>
+            <a:pPr algn="ctr"/>
+            <a:r>
+              <a:rPr sz="1200" b="1">
+                <a:solidFill>
+                  <a:srgbClr val="FFFFFF"/>
+                </a:solidFill>
+                <a:latin typeface="Malgun Gothic"/>
+              </a:rPr>
+              <a:t>공단·KOSIS</a:t>
+            </a:r>
+          </a:p>
+        </p:txBody>
+      </p:sp>
+      <p:sp>
+        <p:nvSpPr>
+          <p:cNvPr id="5" name="TextBox 4"/>
           <p:cNvSpPr txBox="1"/>
           <p:nvPr/>
         </p:nvSpPr>
         <p:spPr>
           <a:xfrm>
-            <a:off x="640080" y="1554480"/>
+            <a:off x="2221992" y="2880360"/>
+            <a:ext cx="548640" cy="548640"/>
+          </a:xfrm>
+          <a:prstGeom prst="rect">
+            <a:avLst/>
+          </a:prstGeom>
+          <a:noFill/>
+        </p:spPr>
+        <p:txBody>
+          <a:bodyPr wrap="none">
+            <a:spAutoFit/>
+          </a:bodyPr>
+          <a:lstStyle/>
+          <a:p>
+            <a:pPr algn="ctr"/>
+            <a:r>
+              <a:rPr sz="1600">
+                <a:solidFill>
+                  <a:srgbClr val="C44E52"/>
+                </a:solidFill>
+                <a:latin typeface="Malgun Gothic"/>
+              </a:rPr>
+              <a:t>▶</a:t>
+            </a:r>
+          </a:p>
+        </p:txBody>
+      </p:sp>
+      <p:sp>
+        <p:nvSpPr>
+          <p:cNvPr id="6" name="Rounded Rectangle 5"/>
+          <p:cNvSpPr/>
+          <p:nvPr/>
+        </p:nvSpPr>
+        <p:spPr>
+          <a:xfrm>
+            <a:off x="2523744" y="2468880"/>
+            <a:ext cx="1627632" cy="1371600"/>
+          </a:xfrm>
+          <a:prstGeom prst="roundRect">
+            <a:avLst/>
+          </a:prstGeom>
+          <a:solidFill>
+            <a:srgbClr val="1F3A5F"/>
+          </a:solidFill>
+          <a:ln>
+            <a:solidFill>
+              <a:srgbClr val="1F3A5F"/>
+            </a:solidFill>
+          </a:ln>
+        </p:spPr>
+        <p:style>
+          <a:lnRef idx="1">
+            <a:schemeClr val="accent1"/>
+          </a:lnRef>
+          <a:fillRef idx="3">
+            <a:schemeClr val="accent1"/>
+          </a:fillRef>
+          <a:effectRef idx="2">
+            <a:schemeClr val="accent1"/>
+          </a:effectRef>
+          <a:fontRef idx="minor">
+            <a:schemeClr val="lt1"/>
+          </a:fontRef>
+        </p:style>
+        <p:txBody>
+          <a:bodyPr rtlCol="0" anchor="ctr" wrap="square"/>
+          <a:lstStyle/>
+          <a:p>
+            <a:pPr algn="ctr"/>
+            <a:r>
+              <a:rPr sz="1200" b="1">
+                <a:solidFill>
+                  <a:srgbClr val="FFFFFF"/>
+                </a:solidFill>
+                <a:latin typeface="Malgun Gothic"/>
+              </a:rPr>
+              <a:t>수집</a:t>
+            </a:r>
+          </a:p>
+          <a:p>
+            <a:pPr algn="ctr"/>
+            <a:r>
+              <a:rPr sz="1200" b="1">
+                <a:solidFill>
+                  <a:srgbClr val="FFFFFF"/>
+                </a:solidFill>
+                <a:latin typeface="Malgun Gothic"/>
+              </a:rPr>
+              <a:t>스크래핑</a:t>
+            </a:r>
+          </a:p>
+          <a:p>
+            <a:pPr algn="ctr"/>
+            <a:r>
+              <a:rPr sz="1200" b="1">
+                <a:solidFill>
+                  <a:srgbClr val="FFFFFF"/>
+                </a:solidFill>
+                <a:latin typeface="Malgun Gothic"/>
+              </a:rPr>
+              <a:t>다운로드</a:t>
+            </a:r>
+          </a:p>
+        </p:txBody>
+      </p:sp>
+      <p:sp>
+        <p:nvSpPr>
+          <p:cNvPr id="7" name="TextBox 6"/>
+          <p:cNvSpPr txBox="1"/>
+          <p:nvPr/>
+        </p:nvSpPr>
+        <p:spPr>
+          <a:xfrm>
+            <a:off x="4105656" y="2880360"/>
+            <a:ext cx="548640" cy="548640"/>
+          </a:xfrm>
+          <a:prstGeom prst="rect">
+            <a:avLst/>
+          </a:prstGeom>
+          <a:noFill/>
+        </p:spPr>
+        <p:txBody>
+          <a:bodyPr wrap="none">
+            <a:spAutoFit/>
+          </a:bodyPr>
+          <a:lstStyle/>
+          <a:p>
+            <a:pPr algn="ctr"/>
+            <a:r>
+              <a:rPr sz="1600">
+                <a:solidFill>
+                  <a:srgbClr val="C44E52"/>
+                </a:solidFill>
+                <a:latin typeface="Malgun Gothic"/>
+              </a:rPr>
+              <a:t>▶</a:t>
+            </a:r>
+          </a:p>
+        </p:txBody>
+      </p:sp>
+      <p:sp>
+        <p:nvSpPr>
+          <p:cNvPr id="8" name="Rounded Rectangle 7"/>
+          <p:cNvSpPr/>
+          <p:nvPr/>
+        </p:nvSpPr>
+        <p:spPr>
+          <a:xfrm>
+            <a:off x="4407408" y="2468880"/>
+            <a:ext cx="1627632" cy="1371600"/>
+          </a:xfrm>
+          <a:prstGeom prst="roundRect">
+            <a:avLst/>
+          </a:prstGeom>
+          <a:solidFill>
+            <a:srgbClr val="1F3A5F"/>
+          </a:solidFill>
+          <a:ln>
+            <a:solidFill>
+              <a:srgbClr val="1F3A5F"/>
+            </a:solidFill>
+          </a:ln>
+        </p:spPr>
+        <p:style>
+          <a:lnRef idx="1">
+            <a:schemeClr val="accent1"/>
+          </a:lnRef>
+          <a:fillRef idx="3">
+            <a:schemeClr val="accent1"/>
+          </a:fillRef>
+          <a:effectRef idx="2">
+            <a:schemeClr val="accent1"/>
+          </a:effectRef>
+          <a:fontRef idx="minor">
+            <a:schemeClr val="lt1"/>
+          </a:fontRef>
+        </p:style>
+        <p:txBody>
+          <a:bodyPr rtlCol="0" anchor="ctr" wrap="square"/>
+          <a:lstStyle/>
+          <a:p>
+            <a:pPr algn="ctr"/>
+            <a:r>
+              <a:rPr sz="1200" b="1">
+                <a:solidFill>
+                  <a:srgbClr val="FFFFFF"/>
+                </a:solidFill>
+                <a:latin typeface="Malgun Gothic"/>
+              </a:rPr>
+              <a:t>정제 tidy</a:t>
+            </a:r>
+          </a:p>
+          <a:p>
+            <a:pPr algn="ctr"/>
+            <a:r>
+              <a:rPr sz="1200" b="1">
+                <a:solidFill>
+                  <a:srgbClr val="FFFFFF"/>
+                </a:solidFill>
+                <a:latin typeface="Malgun Gothic"/>
+              </a:rPr>
+              <a:t>인코딩·가로→세로</a:t>
+            </a:r>
+          </a:p>
+          <a:p>
+            <a:pPr algn="ctr"/>
+            <a:r>
+              <a:rPr sz="1200" b="1">
+                <a:solidFill>
+                  <a:srgbClr val="FFFFFF"/>
+                </a:solidFill>
+                <a:latin typeface="Malgun Gothic"/>
+              </a:rPr>
+              <a:t>시도명 표준화</a:t>
+            </a:r>
+          </a:p>
+        </p:txBody>
+      </p:sp>
+      <p:sp>
+        <p:nvSpPr>
+          <p:cNvPr id="9" name="TextBox 8"/>
+          <p:cNvSpPr txBox="1"/>
+          <p:nvPr/>
+        </p:nvSpPr>
+        <p:spPr>
+          <a:xfrm>
+            <a:off x="5989320" y="2880360"/>
+            <a:ext cx="548640" cy="548640"/>
+          </a:xfrm>
+          <a:prstGeom prst="rect">
+            <a:avLst/>
+          </a:prstGeom>
+          <a:noFill/>
+        </p:spPr>
+        <p:txBody>
+          <a:bodyPr wrap="none">
+            <a:spAutoFit/>
+          </a:bodyPr>
+          <a:lstStyle/>
+          <a:p>
+            <a:pPr algn="ctr"/>
+            <a:r>
+              <a:rPr sz="1600">
+                <a:solidFill>
+                  <a:srgbClr val="C44E52"/>
+                </a:solidFill>
+                <a:latin typeface="Malgun Gothic"/>
+              </a:rPr>
+              <a:t>▶</a:t>
+            </a:r>
+          </a:p>
+        </p:txBody>
+      </p:sp>
+      <p:sp>
+        <p:nvSpPr>
+          <p:cNvPr id="10" name="Rounded Rectangle 9"/>
+          <p:cNvSpPr/>
+          <p:nvPr/>
+        </p:nvSpPr>
+        <p:spPr>
+          <a:xfrm>
+            <a:off x="6291072" y="2468880"/>
+            <a:ext cx="1627632" cy="1371600"/>
+          </a:xfrm>
+          <a:prstGeom prst="roundRect">
+            <a:avLst/>
+          </a:prstGeom>
+          <a:solidFill>
+            <a:srgbClr val="1F3A5F"/>
+          </a:solidFill>
+          <a:ln>
+            <a:solidFill>
+              <a:srgbClr val="1F3A5F"/>
+            </a:solidFill>
+          </a:ln>
+        </p:spPr>
+        <p:style>
+          <a:lnRef idx="1">
+            <a:schemeClr val="accent1"/>
+          </a:lnRef>
+          <a:fillRef idx="3">
+            <a:schemeClr val="accent1"/>
+          </a:fillRef>
+          <a:effectRef idx="2">
+            <a:schemeClr val="accent1"/>
+          </a:effectRef>
+          <a:fontRef idx="minor">
+            <a:schemeClr val="lt1"/>
+          </a:fontRef>
+        </p:style>
+        <p:txBody>
+          <a:bodyPr rtlCol="0" anchor="ctr" wrap="square"/>
+          <a:lstStyle/>
+          <a:p>
+            <a:pPr algn="ctr"/>
+            <a:r>
+              <a:rPr sz="1200" b="1">
+                <a:solidFill>
+                  <a:srgbClr val="FFFFFF"/>
+                </a:solidFill>
+                <a:latin typeface="Malgun Gothic"/>
+              </a:rPr>
+              <a:t>권역 매핑</a:t>
+            </a:r>
+          </a:p>
+          <a:p>
+            <a:pPr algn="ctr"/>
+            <a:r>
+              <a:rPr sz="1200" b="1">
+                <a:solidFill>
+                  <a:srgbClr val="FFFFFF"/>
+                </a:solidFill>
+                <a:latin typeface="Malgun Gothic"/>
+              </a:rPr>
+              <a:t>13권역</a:t>
+            </a:r>
+          </a:p>
+          <a:p>
+            <a:pPr algn="ctr"/>
+            <a:r>
+              <a:rPr sz="1200" b="1">
+                <a:solidFill>
+                  <a:srgbClr val="FFFFFF"/>
+                </a:solidFill>
+                <a:latin typeface="Malgun Gothic"/>
+              </a:rPr>
+              <a:t>10도단위</a:t>
+            </a:r>
+          </a:p>
+        </p:txBody>
+      </p:sp>
+      <p:sp>
+        <p:nvSpPr>
+          <p:cNvPr id="11" name="TextBox 10"/>
+          <p:cNvSpPr txBox="1"/>
+          <p:nvPr/>
+        </p:nvSpPr>
+        <p:spPr>
+          <a:xfrm>
+            <a:off x="7872983" y="2880360"/>
+            <a:ext cx="548640" cy="548640"/>
+          </a:xfrm>
+          <a:prstGeom prst="rect">
+            <a:avLst/>
+          </a:prstGeom>
+          <a:noFill/>
+        </p:spPr>
+        <p:txBody>
+          <a:bodyPr wrap="none">
+            <a:spAutoFit/>
+          </a:bodyPr>
+          <a:lstStyle/>
+          <a:p>
+            <a:pPr algn="ctr"/>
+            <a:r>
+              <a:rPr sz="1600">
+                <a:solidFill>
+                  <a:srgbClr val="C44E52"/>
+                </a:solidFill>
+                <a:latin typeface="Malgun Gothic"/>
+              </a:rPr>
+              <a:t>▶</a:t>
+            </a:r>
+          </a:p>
+        </p:txBody>
+      </p:sp>
+      <p:sp>
+        <p:nvSpPr>
+          <p:cNvPr id="12" name="Rounded Rectangle 11"/>
+          <p:cNvSpPr/>
+          <p:nvPr/>
+        </p:nvSpPr>
+        <p:spPr>
+          <a:xfrm>
+            <a:off x="8174736" y="2468880"/>
+            <a:ext cx="1627632" cy="1371600"/>
+          </a:xfrm>
+          <a:prstGeom prst="roundRect">
+            <a:avLst/>
+          </a:prstGeom>
+          <a:solidFill>
+            <a:srgbClr val="1F3A5F"/>
+          </a:solidFill>
+          <a:ln>
+            <a:solidFill>
+              <a:srgbClr val="1F3A5F"/>
+            </a:solidFill>
+          </a:ln>
+        </p:spPr>
+        <p:style>
+          <a:lnRef idx="1">
+            <a:schemeClr val="accent1"/>
+          </a:lnRef>
+          <a:fillRef idx="3">
+            <a:schemeClr val="accent1"/>
+          </a:fillRef>
+          <a:effectRef idx="2">
+            <a:schemeClr val="accent1"/>
+          </a:effectRef>
+          <a:fontRef idx="minor">
+            <a:schemeClr val="lt1"/>
+          </a:fontRef>
+        </p:style>
+        <p:txBody>
+          <a:bodyPr rtlCol="0" anchor="ctr" wrap="square"/>
+          <a:lstStyle/>
+          <a:p>
+            <a:pPr algn="ctr"/>
+            <a:r>
+              <a:rPr sz="1200" b="1">
+                <a:solidFill>
+                  <a:srgbClr val="FFFFFF"/>
+                </a:solidFill>
+                <a:latin typeface="Malgun Gothic"/>
+              </a:rPr>
+              <a:t>패널</a:t>
+            </a:r>
+          </a:p>
+          <a:p>
+            <a:pPr algn="ctr"/>
+            <a:r>
+              <a:rPr sz="1200" b="1">
+                <a:solidFill>
+                  <a:srgbClr val="FFFFFF"/>
+                </a:solidFill>
+                <a:latin typeface="Malgun Gothic"/>
+              </a:rPr>
+              <a:t>권역×연도</a:t>
+            </a:r>
+          </a:p>
+        </p:txBody>
+      </p:sp>
+      <p:sp>
+        <p:nvSpPr>
+          <p:cNvPr id="13" name="TextBox 12"/>
+          <p:cNvSpPr txBox="1"/>
+          <p:nvPr/>
+        </p:nvSpPr>
+        <p:spPr>
+          <a:xfrm>
+            <a:off x="9756648" y="2880360"/>
+            <a:ext cx="548640" cy="548640"/>
+          </a:xfrm>
+          <a:prstGeom prst="rect">
+            <a:avLst/>
+          </a:prstGeom>
+          <a:noFill/>
+        </p:spPr>
+        <p:txBody>
+          <a:bodyPr wrap="none">
+            <a:spAutoFit/>
+          </a:bodyPr>
+          <a:lstStyle/>
+          <a:p>
+            <a:pPr algn="ctr"/>
+            <a:r>
+              <a:rPr sz="1600">
+                <a:solidFill>
+                  <a:srgbClr val="C44E52"/>
+                </a:solidFill>
+                <a:latin typeface="Malgun Gothic"/>
+              </a:rPr>
+              <a:t>▶</a:t>
+            </a:r>
+          </a:p>
+        </p:txBody>
+      </p:sp>
+      <p:sp>
+        <p:nvSpPr>
+          <p:cNvPr id="14" name="Rounded Rectangle 13"/>
+          <p:cNvSpPr/>
+          <p:nvPr/>
+        </p:nvSpPr>
+        <p:spPr>
+          <a:xfrm>
+            <a:off x="10058400" y="2468880"/>
+            <a:ext cx="1627632" cy="1371600"/>
+          </a:xfrm>
+          <a:prstGeom prst="roundRect">
+            <a:avLst/>
+          </a:prstGeom>
+          <a:solidFill>
+            <a:srgbClr val="C44E52"/>
+          </a:solidFill>
+          <a:ln>
+            <a:solidFill>
+              <a:srgbClr val="1F3A5F"/>
+            </a:solidFill>
+          </a:ln>
+        </p:spPr>
+        <p:style>
+          <a:lnRef idx="1">
+            <a:schemeClr val="accent1"/>
+          </a:lnRef>
+          <a:fillRef idx="3">
+            <a:schemeClr val="accent1"/>
+          </a:fillRef>
+          <a:effectRef idx="2">
+            <a:schemeClr val="accent1"/>
+          </a:effectRef>
+          <a:fontRef idx="minor">
+            <a:schemeClr val="lt1"/>
+          </a:fontRef>
+        </p:style>
+        <p:txBody>
+          <a:bodyPr rtlCol="0" anchor="ctr" wrap="square"/>
+          <a:lstStyle/>
+          <a:p>
+            <a:pPr algn="ctr"/>
+            <a:r>
+              <a:rPr sz="1200" b="1">
+                <a:solidFill>
+                  <a:srgbClr val="FFFFFF"/>
+                </a:solidFill>
+                <a:latin typeface="Malgun Gothic"/>
+              </a:rPr>
+              <a:t>LLAI</a:t>
+            </a:r>
+          </a:p>
+          <a:p>
+            <a:pPr algn="ctr"/>
+            <a:r>
+              <a:rPr sz="1200" b="1">
+                <a:solidFill>
+                  <a:srgbClr val="FFFFFF"/>
+                </a:solidFill>
+                <a:latin typeface="Malgun Gothic"/>
+              </a:rPr>
+              <a:t>정규화·가중치</a:t>
+            </a:r>
+          </a:p>
+        </p:txBody>
+      </p:sp>
+      <p:sp>
+        <p:nvSpPr>
+          <p:cNvPr id="15" name="TextBox 14"/>
+          <p:cNvSpPr txBox="1"/>
+          <p:nvPr/>
+        </p:nvSpPr>
+        <p:spPr>
+          <a:xfrm>
+            <a:off x="640080" y="4297680"/>
             <a:ext cx="10972800" cy="4937760"/>
           </a:xfrm>
           <a:prstGeom prst="rect">
@@ -11857,13 +12238,13 @@
               </a:spcAft>
             </a:pPr>
             <a:r>
-              <a:rPr sz="2000">
+              <a:rPr sz="1800">
                 <a:solidFill>
                   <a:srgbClr val="222222"/>
                 </a:solidFill>
                 <a:latin typeface="Malgun Gothic"/>
               </a:rPr>
-              <a:t>• 출처: 변협(스크랩)·사법연감·법률구조공단·KOSIS·시도경계</a:t>
+              <a:t>• 각 단계는 src/ 모듈로 구현 — 재현 가능 (notebooks/01~04)</a:t>
             </a:r>
           </a:p>
           <a:p>
@@ -11873,61 +12254,13 @@
               </a:spcAft>
             </a:pPr>
             <a:r>
-              <a:rPr sz="2000">
+              <a:rPr sz="1800">
                 <a:solidFill>
                   <a:srgbClr val="222222"/>
                 </a:solidFill>
                 <a:latin typeface="Malgun Gothic"/>
               </a:rPr>
-              <a:t>• 난관 1 — 출처별 지역 구분이 제각각 → 13권역 / 10도단위 두 가지로 병행</a:t>
-            </a:r>
-          </a:p>
-          <a:p>
-            <a:pPr>
-              <a:spcAft>
-                <a:spcPts val="800"/>
-              </a:spcAft>
-            </a:pPr>
-            <a:r>
-              <a:rPr sz="2000">
-                <a:solidFill>
-                  <a:srgbClr val="222222"/>
-                </a:solidFill>
-                <a:latin typeface="Malgun Gothic"/>
-              </a:rPr>
-              <a:t>• 난관 2 — 공단·변협은 다운로드 불가 → 웹 스크래핑 + KOSIS 우회</a:t>
-            </a:r>
-          </a:p>
-          <a:p>
-            <a:pPr lvl="1">
-              <a:spcAft>
-                <a:spcPts val="800"/>
-              </a:spcAft>
-            </a:pPr>
-            <a:r>
-              <a:rPr sz="1700">
-                <a:solidFill>
-                  <a:srgbClr val="222222"/>
-                </a:solidFill>
-                <a:latin typeface="Malgun Gothic"/>
-              </a:rPr>
-              <a:t>– 신뢰성 검증: 법원 관내 인구 합 = KOSIS 인구와 정확히 일치</a:t>
-            </a:r>
-          </a:p>
-          <a:p>
-            <a:pPr lvl="1">
-              <a:spcAft>
-                <a:spcPts val="800"/>
-              </a:spcAft>
-            </a:pPr>
-            <a:r>
-              <a:rPr sz="1700">
-                <a:solidFill>
-                  <a:srgbClr val="222222"/>
-                </a:solidFill>
-                <a:latin typeface="Malgun Gothic"/>
-              </a:rPr>
-              <a:t>– 법원 사건 합계도 공식 통계와 정확히 일치</a:t>
+              <a:t>• LLAI 산출 후 → 비슷한 권역 묶기 · 가설 4개 검정 · 지도 시각화</a:t>
             </a:r>
           </a:p>
         </p:txBody>
@@ -11979,7 +12312,7 @@
                 </a:solidFill>
                 <a:latin typeface="Malgun Gothic"/>
               </a:rPr>
-              <a:t>5. 데이터 수집 · 정제(raw → 깔끔한 표)</a:t>
+              <a:t>데이터 5종과 두 가지 난관</a:t>
             </a:r>
           </a:p>
         </p:txBody>
@@ -12055,13 +12388,45 @@
               </a:spcAft>
             </a:pPr>
             <a:r>
-              <a:rPr sz="1800">
+              <a:rPr sz="2000">
                 <a:solidFill>
                   <a:srgbClr val="222222"/>
                 </a:solidFill>
                 <a:latin typeface="Malgun Gothic"/>
               </a:rPr>
-              <a:t>• [수집] 출처별 방식이 달라 두 갈래</a:t>
+              <a:t>• 출처: 변협(스크랩)·사법연감·법률구조공단·KOSIS·시도경계</a:t>
+            </a:r>
+          </a:p>
+          <a:p>
+            <a:pPr>
+              <a:spcAft>
+                <a:spcPts val="800"/>
+              </a:spcAft>
+            </a:pPr>
+            <a:r>
+              <a:rPr sz="2000">
+                <a:solidFill>
+                  <a:srgbClr val="222222"/>
+                </a:solidFill>
+                <a:latin typeface="Malgun Gothic"/>
+              </a:rPr>
+              <a:t>• 난관 1 — 출처별 지역 구분이 제각각 → 13권역 / 10도단위 두 가지로 병행</a:t>
+            </a:r>
+          </a:p>
+          <a:p>
+            <a:pPr>
+              <a:spcAft>
+                <a:spcPts val="800"/>
+              </a:spcAft>
+            </a:pPr>
+            <a:r>
+              <a:rPr sz="2000">
+                <a:solidFill>
+                  <a:srgbClr val="222222"/>
+                </a:solidFill>
+                <a:latin typeface="Malgun Gothic"/>
+              </a:rPr>
+              <a:t>• 난관 2 — 공단·변협은 다운로드 불가 → 웹 스크래핑 + KOSIS 우회</a:t>
             </a:r>
           </a:p>
           <a:p>
@@ -12071,13 +12436,13 @@
               </a:spcAft>
             </a:pPr>
             <a:r>
-              <a:rPr sz="1500">
+              <a:rPr sz="1700">
                 <a:solidFill>
                   <a:srgbClr val="222222"/>
                 </a:solidFill>
                 <a:latin typeface="Malgun Gothic"/>
               </a:rPr>
-              <a:t>– 변협 회원현황: 웹 스크래핑(화면에서 자동으로 표 긁어오기) — 다운로드 미지원</a:t>
+              <a:t>– 신뢰성 검증: 법원 관내 인구 합 = KOSIS 인구와 정확히 일치</a:t>
             </a:r>
           </a:p>
           <a:p>
@@ -12087,93 +12452,13 @@
               </a:spcAft>
             </a:pPr>
             <a:r>
-              <a:rPr sz="1500">
+              <a:rPr sz="1700">
                 <a:solidFill>
                   <a:srgbClr val="222222"/>
                 </a:solidFill>
                 <a:latin typeface="Malgun Gothic"/>
               </a:rPr>
-              <a:t>– KOSIS·공단·사법연감: 엑셀/CSV 다운로드</a:t>
-            </a:r>
-          </a:p>
-          <a:p>
-            <a:pPr>
-              <a:spcAft>
-                <a:spcPts val="800"/>
-              </a:spcAft>
-            </a:pPr>
-            <a:r>
-              <a:rPr sz="1800">
-                <a:solidFill>
-                  <a:srgbClr val="222222"/>
-                </a:solidFill>
-                <a:latin typeface="Malgun Gothic"/>
-              </a:rPr>
-              <a:t>• [정제] 제각각인 원본을 분석용 표로 정리</a:t>
-            </a:r>
-          </a:p>
-          <a:p>
-            <a:pPr lvl="1">
-              <a:spcAft>
-                <a:spcPts val="800"/>
-              </a:spcAft>
-            </a:pPr>
-            <a:r>
-              <a:rPr sz="1500">
-                <a:solidFill>
-                  <a:srgbClr val="222222"/>
-                </a:solidFill>
-                <a:latin typeface="Malgun Gothic"/>
-              </a:rPr>
-              <a:t>– 글자 깨짐(인코딩) 처리, 가로로 긴 표 → 세로로 정리</a:t>
-            </a:r>
-          </a:p>
-          <a:p>
-            <a:pPr lvl="1">
-              <a:spcAft>
-                <a:spcPts val="800"/>
-              </a:spcAft>
-            </a:pPr>
-            <a:r>
-              <a:rPr sz="1500">
-                <a:solidFill>
-                  <a:srgbClr val="222222"/>
-                </a:solidFill>
-                <a:latin typeface="Malgun Gothic"/>
-              </a:rPr>
-              <a:t>– 지역 이름 통일, 서로 다른 지역 구분을 하나의 기준(권역)으로 매핑</a:t>
-            </a:r>
-          </a:p>
-          <a:p>
-            <a:pPr lvl="1">
-              <a:spcAft>
-                <a:spcPts val="800"/>
-              </a:spcAft>
-            </a:pPr>
-            <a:r>
-              <a:rPr sz="1500">
-                <a:solidFill>
-                  <a:srgbClr val="222222"/>
-                </a:solidFill>
-                <a:latin typeface="Malgun Gothic"/>
-              </a:rPr>
-              <a:t>– 법원 사건은 '실제 재판 사건(본안)'만 사용 — 등기·공탁 등 단순 절차 제외</a:t>
-            </a:r>
-          </a:p>
-          <a:p>
-            <a:pPr lvl="1">
-              <a:spcAft>
-                <a:spcPts val="800"/>
-              </a:spcAft>
-            </a:pPr>
-            <a:r>
-              <a:rPr sz="1500">
-                <a:solidFill>
-                  <a:srgbClr val="222222"/>
-                </a:solidFill>
-                <a:latin typeface="Malgun Gothic"/>
-              </a:rPr>
-              <a:t>– 빠진 값 처리 → 권역×연도 표 완성 → 합계로 교차검증</a:t>
+              <a:t>– 법원 사건 합계도 공식 통계와 정확히 일치</a:t>
             </a:r>
           </a:p>
         </p:txBody>
@@ -12187,6 +12472,252 @@
 </file>
 
 <file path=ppt/slides/slide8.xml><?xml version="1.0" encoding="utf-8"?>
+<p:sld xmlns:a="http://schemas.openxmlformats.org/drawingml/2006/main" xmlns:p="http://schemas.openxmlformats.org/presentationml/2006/main" xmlns:r="http://schemas.openxmlformats.org/officeDocument/2006/relationships">
+  <p:cSld>
+    <p:spTree>
+      <p:nvGrpSpPr>
+        <p:cNvPr id="1" name=""/>
+        <p:cNvGrpSpPr/>
+        <p:nvPr/>
+      </p:nvGrpSpPr>
+      <p:grpSpPr/>
+      <p:sp>
+        <p:nvSpPr>
+          <p:cNvPr id="2" name="TextBox 1"/>
+          <p:cNvSpPr txBox="1"/>
+          <p:nvPr/>
+        </p:nvSpPr>
+        <p:spPr>
+          <a:xfrm>
+            <a:off x="502920" y="320040"/>
+            <a:ext cx="11155680" cy="914400"/>
+          </a:xfrm>
+          <a:prstGeom prst="rect">
+            <a:avLst/>
+          </a:prstGeom>
+          <a:noFill/>
+        </p:spPr>
+        <p:txBody>
+          <a:bodyPr wrap="square">
+            <a:spAutoFit/>
+          </a:bodyPr>
+          <a:lstStyle/>
+          <a:p>
+            <a:r>
+              <a:rPr sz="2800" b="1">
+                <a:solidFill>
+                  <a:srgbClr val="1F3A5F"/>
+                </a:solidFill>
+                <a:latin typeface="Malgun Gothic"/>
+              </a:rPr>
+              <a:t>데이터 수집 · 정제(raw → 깔끔한 표)</a:t>
+            </a:r>
+          </a:p>
+        </p:txBody>
+      </p:sp>
+      <p:sp>
+        <p:nvSpPr>
+          <p:cNvPr id="3" name="Rectangle 2"/>
+          <p:cNvSpPr/>
+          <p:nvPr/>
+        </p:nvSpPr>
+        <p:spPr>
+          <a:xfrm>
+            <a:off x="548640" y="1188720"/>
+            <a:ext cx="11064240" cy="38100"/>
+          </a:xfrm>
+          <a:prstGeom prst="rect">
+            <a:avLst/>
+          </a:prstGeom>
+          <a:solidFill>
+            <a:srgbClr val="C44E52"/>
+          </a:solidFill>
+          <a:ln>
+            <a:noFill/>
+          </a:ln>
+        </p:spPr>
+        <p:style>
+          <a:lnRef idx="1">
+            <a:schemeClr val="accent1"/>
+          </a:lnRef>
+          <a:fillRef idx="3">
+            <a:schemeClr val="accent1"/>
+          </a:fillRef>
+          <a:effectRef idx="2">
+            <a:schemeClr val="accent1"/>
+          </a:effectRef>
+          <a:fontRef idx="minor">
+            <a:schemeClr val="lt1"/>
+          </a:fontRef>
+        </p:style>
+        <p:txBody>
+          <a:bodyPr rtlCol="0" anchor="ctr"/>
+          <a:lstStyle/>
+          <a:p>
+            <a:pPr algn="ctr"/>
+          </a:p>
+        </p:txBody>
+      </p:sp>
+      <p:sp>
+        <p:nvSpPr>
+          <p:cNvPr id="4" name="TextBox 3"/>
+          <p:cNvSpPr txBox="1"/>
+          <p:nvPr/>
+        </p:nvSpPr>
+        <p:spPr>
+          <a:xfrm>
+            <a:off x="640080" y="1554480"/>
+            <a:ext cx="10972800" cy="4937760"/>
+          </a:xfrm>
+          <a:prstGeom prst="rect">
+            <a:avLst/>
+          </a:prstGeom>
+          <a:noFill/>
+        </p:spPr>
+        <p:txBody>
+          <a:bodyPr wrap="square">
+            <a:spAutoFit/>
+          </a:bodyPr>
+          <a:lstStyle/>
+          <a:p>
+            <a:pPr>
+              <a:spcAft>
+                <a:spcPts val="800"/>
+              </a:spcAft>
+            </a:pPr>
+            <a:r>
+              <a:rPr sz="1800">
+                <a:solidFill>
+                  <a:srgbClr val="222222"/>
+                </a:solidFill>
+                <a:latin typeface="Malgun Gothic"/>
+              </a:rPr>
+              <a:t>• [수집] 출처별 방식이 달라 두 갈래</a:t>
+            </a:r>
+          </a:p>
+          <a:p>
+            <a:pPr lvl="1">
+              <a:spcAft>
+                <a:spcPts val="800"/>
+              </a:spcAft>
+            </a:pPr>
+            <a:r>
+              <a:rPr sz="1500">
+                <a:solidFill>
+                  <a:srgbClr val="222222"/>
+                </a:solidFill>
+                <a:latin typeface="Malgun Gothic"/>
+              </a:rPr>
+              <a:t>– 변협 회원현황: 웹 스크래핑(화면에서 자동으로 표 긁어오기) — 다운로드 미지원</a:t>
+            </a:r>
+          </a:p>
+          <a:p>
+            <a:pPr lvl="1">
+              <a:spcAft>
+                <a:spcPts val="800"/>
+              </a:spcAft>
+            </a:pPr>
+            <a:r>
+              <a:rPr sz="1500">
+                <a:solidFill>
+                  <a:srgbClr val="222222"/>
+                </a:solidFill>
+                <a:latin typeface="Malgun Gothic"/>
+              </a:rPr>
+              <a:t>– KOSIS·공단·사법연감: 엑셀/CSV 다운로드</a:t>
+            </a:r>
+          </a:p>
+          <a:p>
+            <a:pPr>
+              <a:spcAft>
+                <a:spcPts val="800"/>
+              </a:spcAft>
+            </a:pPr>
+            <a:r>
+              <a:rPr sz="1800">
+                <a:solidFill>
+                  <a:srgbClr val="222222"/>
+                </a:solidFill>
+                <a:latin typeface="Malgun Gothic"/>
+              </a:rPr>
+              <a:t>• [정제] 제각각인 원본을 분석용 표로 정리</a:t>
+            </a:r>
+          </a:p>
+          <a:p>
+            <a:pPr lvl="1">
+              <a:spcAft>
+                <a:spcPts val="800"/>
+              </a:spcAft>
+            </a:pPr>
+            <a:r>
+              <a:rPr sz="1500">
+                <a:solidFill>
+                  <a:srgbClr val="222222"/>
+                </a:solidFill>
+                <a:latin typeface="Malgun Gothic"/>
+              </a:rPr>
+              <a:t>– 글자 깨짐(인코딩) 처리, 가로로 긴 표 → 세로로 정리</a:t>
+            </a:r>
+          </a:p>
+          <a:p>
+            <a:pPr lvl="1">
+              <a:spcAft>
+                <a:spcPts val="800"/>
+              </a:spcAft>
+            </a:pPr>
+            <a:r>
+              <a:rPr sz="1500">
+                <a:solidFill>
+                  <a:srgbClr val="222222"/>
+                </a:solidFill>
+                <a:latin typeface="Malgun Gothic"/>
+              </a:rPr>
+              <a:t>– 지역 이름 통일, 서로 다른 지역 구분을 하나의 기준(권역)으로 매핑</a:t>
+            </a:r>
+          </a:p>
+          <a:p>
+            <a:pPr lvl="1">
+              <a:spcAft>
+                <a:spcPts val="800"/>
+              </a:spcAft>
+            </a:pPr>
+            <a:r>
+              <a:rPr sz="1500">
+                <a:solidFill>
+                  <a:srgbClr val="222222"/>
+                </a:solidFill>
+                <a:latin typeface="Malgun Gothic"/>
+              </a:rPr>
+              <a:t>– 법원 사건은 '실제 재판 사건(본안)'만 사용 — 등기·공탁 등 단순 절차 제외</a:t>
+            </a:r>
+          </a:p>
+          <a:p>
+            <a:pPr lvl="1">
+              <a:spcAft>
+                <a:spcPts val="800"/>
+              </a:spcAft>
+            </a:pPr>
+            <a:r>
+              <a:rPr sz="1500">
+                <a:solidFill>
+                  <a:srgbClr val="222222"/>
+                </a:solidFill>
+                <a:latin typeface="Malgun Gothic"/>
+              </a:rPr>
+              <a:t>– 빠진 값 처리 → 권역×연도 표 완성 → 합계로 교차검증</a:t>
+            </a:r>
+          </a:p>
+        </p:txBody>
+      </p:sp>
+    </p:spTree>
+  </p:cSld>
+  <p:clrMapOvr>
+    <a:masterClrMapping/>
+  </p:clrMapOvr>
+</p:sld>
+</file>
+
+<file path=ppt/slides/slide9.xml><?xml version="1.0" encoding="utf-8"?>
 <p:sld xmlns:a="http://schemas.openxmlformats.org/drawingml/2006/main" xmlns:p="http://schemas.openxmlformats.org/presentationml/2006/main" xmlns:r="http://schemas.openxmlformats.org/officeDocument/2006/relationships">
   <p:cSld>
     <p:spTree>
@@ -12858,537 +13389,6 @@
                 <a:latin typeface="Malgun Gothic"/>
               </a:rPr>
               <a:t>– 작업의 무게중심 = 분석보다 '수집·정제(데이터 다듬기)'에 있음</a:t>
-            </a:r>
-          </a:p>
-        </p:txBody>
-      </p:sp>
-    </p:spTree>
-  </p:cSld>
-  <p:clrMapOvr>
-    <a:masterClrMapping/>
-  </p:clrMapOvr>
-</p:sld>
-</file>
-
-<file path=ppt/slides/slide9.xml><?xml version="1.0" encoding="utf-8"?>
-<p:sld xmlns:a="http://schemas.openxmlformats.org/drawingml/2006/main" xmlns:p="http://schemas.openxmlformats.org/presentationml/2006/main" xmlns:r="http://schemas.openxmlformats.org/officeDocument/2006/relationships">
-  <p:cSld>
-    <p:spTree>
-      <p:nvGrpSpPr>
-        <p:cNvPr id="1" name=""/>
-        <p:cNvGrpSpPr/>
-        <p:nvPr/>
-      </p:nvGrpSpPr>
-      <p:grpSpPr/>
-      <p:sp>
-        <p:nvSpPr>
-          <p:cNvPr id="2" name="TextBox 1"/>
-          <p:cNvSpPr txBox="1"/>
-          <p:nvPr/>
-        </p:nvSpPr>
-        <p:spPr>
-          <a:xfrm>
-            <a:off x="502920" y="320040"/>
-            <a:ext cx="11155680" cy="914400"/>
-          </a:xfrm>
-          <a:prstGeom prst="rect">
-            <a:avLst/>
-          </a:prstGeom>
-          <a:noFill/>
-        </p:spPr>
-        <p:txBody>
-          <a:bodyPr wrap="square">
-            <a:spAutoFit/>
-          </a:bodyPr>
-          <a:lstStyle/>
-          <a:p>
-            <a:r>
-              <a:rPr sz="2800" b="1">
-                <a:solidFill>
-                  <a:srgbClr val="1F3A5F"/>
-                </a:solidFill>
-                <a:latin typeface="Malgun Gothic"/>
-              </a:rPr>
-              <a:t>6. 점수는 어떻게 나오나 — 예시</a:t>
-            </a:r>
-          </a:p>
-        </p:txBody>
-      </p:sp>
-      <p:sp>
-        <p:nvSpPr>
-          <p:cNvPr id="3" name="Rectangle 2"/>
-          <p:cNvSpPr/>
-          <p:nvPr/>
-        </p:nvSpPr>
-        <p:spPr>
-          <a:xfrm>
-            <a:off x="548640" y="1188720"/>
-            <a:ext cx="11064240" cy="38100"/>
-          </a:xfrm>
-          <a:prstGeom prst="rect">
-            <a:avLst/>
-          </a:prstGeom>
-          <a:solidFill>
-            <a:srgbClr val="C44E52"/>
-          </a:solidFill>
-          <a:ln>
-            <a:noFill/>
-          </a:ln>
-        </p:spPr>
-        <p:style>
-          <a:lnRef idx="1">
-            <a:schemeClr val="accent1"/>
-          </a:lnRef>
-          <a:fillRef idx="3">
-            <a:schemeClr val="accent1"/>
-          </a:fillRef>
-          <a:effectRef idx="2">
-            <a:schemeClr val="accent1"/>
-          </a:effectRef>
-          <a:fontRef idx="minor">
-            <a:schemeClr val="lt1"/>
-          </a:fontRef>
-        </p:style>
-        <p:txBody>
-          <a:bodyPr rtlCol="0" anchor="ctr"/>
-          <a:lstStyle/>
-          <a:p>
-            <a:pPr algn="ctr"/>
-          </a:p>
-        </p:txBody>
-      </p:sp>
-      <p:sp>
-        <p:nvSpPr>
-          <p:cNvPr id="4" name="TextBox 3"/>
-          <p:cNvSpPr txBox="1"/>
-          <p:nvPr/>
-        </p:nvSpPr>
-        <p:spPr>
-          <a:xfrm>
-            <a:off x="640080" y="1508760"/>
-            <a:ext cx="10972800" cy="4937760"/>
-          </a:xfrm>
-          <a:prstGeom prst="rect">
-            <a:avLst/>
-          </a:prstGeom>
-          <a:noFill/>
-        </p:spPr>
-        <p:txBody>
-          <a:bodyPr wrap="square">
-            <a:spAutoFit/>
-          </a:bodyPr>
-          <a:lstStyle/>
-          <a:p>
-            <a:pPr>
-              <a:spcAft>
-                <a:spcPts val="800"/>
-              </a:spcAft>
-            </a:pPr>
-            <a:r>
-              <a:rPr sz="1900" b="0">
-                <a:solidFill>
-                  <a:srgbClr val="222222"/>
-                </a:solidFill>
-                <a:latin typeface="Malgun Gothic"/>
-              </a:rPr>
-              <a:t>• 각 지표를 0~1로 환산(1=전국 최고, 0=최저) → 가중치만큼 섞어 ×100</a:t>
-            </a:r>
-          </a:p>
-          <a:p>
-            <a:pPr>
-              <a:spcAft>
-                <a:spcPts val="800"/>
-              </a:spcAft>
-            </a:pPr>
-            <a:r>
-              <a:rPr sz="1800" b="1">
-                <a:solidFill>
-                  <a:srgbClr val="222222"/>
-                </a:solidFill>
-                <a:latin typeface="Malgun Gothic"/>
-              </a:rPr>
-              <a:t>• 가중치 = 변호사 0.69 · 안 바쁨 0.14 · 약자지원 0.17 (엔트로피)</a:t>
-            </a:r>
-          </a:p>
-        </p:txBody>
-      </p:sp>
-      <p:graphicFrame>
-        <p:nvGraphicFramePr>
-          <p:cNvPr id="5" name="Table 4"/>
-          <p:cNvGraphicFramePr>
-            <a:graphicFrameLocks noGrp="1"/>
-          </p:cNvGraphicFramePr>
-          <p:nvPr/>
-        </p:nvGraphicFramePr>
-        <p:xfrm>
-          <a:off x="1645920" y="2468880"/>
-          <a:ext cx="8778240" cy="1737360"/>
-        </p:xfrm>
-        <a:graphic>
-          <a:graphicData uri="http://schemas.openxmlformats.org/drawingml/2006/table">
-            <a:tbl>
-              <a:tblPr firstRow="1" bandRow="1">
-                <a:tableStyleId>{5C22544A-7EE6-4342-B048-85BDC9FD1C3A}</a:tableStyleId>
-              </a:tblPr>
-              <a:tblGrid>
-                <a:gridCol w="1280160"/>
-                <a:gridCol w="2103120"/>
-                <a:gridCol w="2103120"/>
-                <a:gridCol w="1737360"/>
-                <a:gridCol w="1554480"/>
-              </a:tblGrid>
-              <a:tr h="579120">
-                <a:tc>
-                  <a:txBody>
-                    <a:bodyPr/>
-                    <a:lstStyle/>
-                    <a:p>
-                      <a:pPr algn="ctr"/>
-                      <a:r>
-                        <a:rPr sz="1600" b="1">
-                          <a:solidFill>
-                            <a:srgbClr val="FFFFFF"/>
-                          </a:solidFill>
-                          <a:latin typeface="Malgun Gothic"/>
-                        </a:rPr>
-                        <a:t>권역</a:t>
-                      </a:r>
-                    </a:p>
-                  </a:txBody>
-                  <a:tcPr anchor="ctr">
-                    <a:solidFill>
-                      <a:srgbClr val="1F3A5F"/>
-                    </a:solidFill>
-                  </a:tcPr>
-                </a:tc>
-                <a:tc>
-                  <a:txBody>
-                    <a:bodyPr/>
-                    <a:lstStyle/>
-                    <a:p>
-                      <a:pPr algn="l"/>
-                      <a:r>
-                        <a:rPr sz="1600" b="1">
-                          <a:solidFill>
-                            <a:srgbClr val="FFFFFF"/>
-                          </a:solidFill>
-                          <a:latin typeface="Malgun Gothic"/>
-                        </a:rPr>
-                        <a:t>변호사</a:t>
-                      </a:r>
-                    </a:p>
-                  </a:txBody>
-                  <a:tcPr anchor="ctr">
-                    <a:solidFill>
-                      <a:srgbClr val="1F3A5F"/>
-                    </a:solidFill>
-                  </a:tcPr>
-                </a:tc>
-                <a:tc>
-                  <a:txBody>
-                    <a:bodyPr/>
-                    <a:lstStyle/>
-                    <a:p>
-                      <a:pPr algn="l"/>
-                      <a:r>
-                        <a:rPr sz="1600" b="1">
-                          <a:solidFill>
-                            <a:srgbClr val="FFFFFF"/>
-                          </a:solidFill>
-                          <a:latin typeface="Malgun Gothic"/>
-                        </a:rPr>
-                        <a:t>안 바쁨</a:t>
-                      </a:r>
-                    </a:p>
-                  </a:txBody>
-                  <a:tcPr anchor="ctr">
-                    <a:solidFill>
-                      <a:srgbClr val="1F3A5F"/>
-                    </a:solidFill>
-                  </a:tcPr>
-                </a:tc>
-                <a:tc>
-                  <a:txBody>
-                    <a:bodyPr/>
-                    <a:lstStyle/>
-                    <a:p>
-                      <a:pPr algn="l"/>
-                      <a:r>
-                        <a:rPr sz="1600" b="1">
-                          <a:solidFill>
-                            <a:srgbClr val="FFFFFF"/>
-                          </a:solidFill>
-                          <a:latin typeface="Malgun Gothic"/>
-                        </a:rPr>
-                        <a:t>약자지원</a:t>
-                      </a:r>
-                    </a:p>
-                  </a:txBody>
-                  <a:tcPr anchor="ctr">
-                    <a:solidFill>
-                      <a:srgbClr val="1F3A5F"/>
-                    </a:solidFill>
-                  </a:tcPr>
-                </a:tc>
-                <a:tc>
-                  <a:txBody>
-                    <a:bodyPr/>
-                    <a:lstStyle/>
-                    <a:p>
-                      <a:pPr algn="l"/>
-                      <a:r>
-                        <a:rPr sz="1600" b="1">
-                          <a:solidFill>
-                            <a:srgbClr val="FFFFFF"/>
-                          </a:solidFill>
-                          <a:latin typeface="Malgun Gothic"/>
-                        </a:rPr>
-                        <a:t>→ LLAI</a:t>
-                      </a:r>
-                    </a:p>
-                  </a:txBody>
-                  <a:tcPr anchor="ctr">
-                    <a:solidFill>
-                      <a:srgbClr val="1F3A5F"/>
-                    </a:solidFill>
-                  </a:tcPr>
-                </a:tc>
-              </a:tr>
-              <a:tr h="579120">
-                <a:tc>
-                  <a:txBody>
-                    <a:bodyPr/>
-                    <a:lstStyle/>
-                    <a:p>
-                      <a:pPr algn="ctr"/>
-                      <a:r>
-                        <a:rPr sz="1600">
-                          <a:latin typeface="Malgun Gothic"/>
-                        </a:rPr>
-                        <a:t>서울</a:t>
-                      </a:r>
-                    </a:p>
-                  </a:txBody>
-                  <a:tcPr anchor="ctr"/>
-                </a:tc>
-                <a:tc>
-                  <a:txBody>
-                    <a:bodyPr/>
-                    <a:lstStyle/>
-                    <a:p>
-                      <a:pPr algn="l"/>
-                      <a:r>
-                        <a:rPr sz="1600">
-                          <a:latin typeface="Malgun Gothic"/>
-                        </a:rPr>
-                        <a:t>1.00 (최고)</a:t>
-                      </a:r>
-                    </a:p>
-                  </a:txBody>
-                  <a:tcPr anchor="ctr"/>
-                </a:tc>
-                <a:tc>
-                  <a:txBody>
-                    <a:bodyPr/>
-                    <a:lstStyle/>
-                    <a:p>
-                      <a:pPr algn="l"/>
-                      <a:r>
-                        <a:rPr sz="1600">
-                          <a:latin typeface="Malgun Gothic"/>
-                        </a:rPr>
-                        <a:t>1.00 (최고)</a:t>
-                      </a:r>
-                    </a:p>
-                  </a:txBody>
-                  <a:tcPr anchor="ctr"/>
-                </a:tc>
-                <a:tc>
-                  <a:txBody>
-                    <a:bodyPr/>
-                    <a:lstStyle/>
-                    <a:p>
-                      <a:pPr algn="l"/>
-                      <a:r>
-                        <a:rPr sz="1600">
-                          <a:latin typeface="Malgun Gothic"/>
-                        </a:rPr>
-                        <a:t>0.48</a:t>
-                      </a:r>
-                    </a:p>
-                  </a:txBody>
-                  <a:tcPr anchor="ctr"/>
-                </a:tc>
-                <a:tc>
-                  <a:txBody>
-                    <a:bodyPr/>
-                    <a:lstStyle/>
-                    <a:p>
-                      <a:pPr algn="l"/>
-                      <a:r>
-                        <a:rPr sz="1600">
-                          <a:latin typeface="Malgun Gothic"/>
-                        </a:rPr>
-                        <a:t>91점</a:t>
-                      </a:r>
-                    </a:p>
-                  </a:txBody>
-                  <a:tcPr anchor="ctr"/>
-                </a:tc>
-              </a:tr>
-              <a:tr h="579120">
-                <a:tc>
-                  <a:txBody>
-                    <a:bodyPr/>
-                    <a:lstStyle/>
-                    <a:p>
-                      <a:pPr algn="ctr"/>
-                      <a:r>
-                        <a:rPr sz="1600">
-                          <a:latin typeface="Malgun Gothic"/>
-                        </a:rPr>
-                        <a:t>강원</a:t>
-                      </a:r>
-                    </a:p>
-                  </a:txBody>
-                  <a:tcPr anchor="ctr"/>
-                </a:tc>
-                <a:tc>
-                  <a:txBody>
-                    <a:bodyPr/>
-                    <a:lstStyle/>
-                    <a:p>
-                      <a:pPr algn="l"/>
-                      <a:r>
-                        <a:rPr sz="1600">
-                          <a:latin typeface="Malgun Gothic"/>
-                        </a:rPr>
-                        <a:t>0.00 (최저)</a:t>
-                      </a:r>
-                    </a:p>
-                  </a:txBody>
-                  <a:tcPr anchor="ctr"/>
-                </a:tc>
-                <a:tc>
-                  <a:txBody>
-                    <a:bodyPr/>
-                    <a:lstStyle/>
-                    <a:p>
-                      <a:pPr algn="l"/>
-                      <a:r>
-                        <a:rPr sz="1600">
-                          <a:latin typeface="Malgun Gothic"/>
-                        </a:rPr>
-                        <a:t>0.00 (최저)</a:t>
-                      </a:r>
-                    </a:p>
-                  </a:txBody>
-                  <a:tcPr anchor="ctr"/>
-                </a:tc>
-                <a:tc>
-                  <a:txBody>
-                    <a:bodyPr/>
-                    <a:lstStyle/>
-                    <a:p>
-                      <a:pPr algn="l"/>
-                      <a:r>
-                        <a:rPr sz="1600">
-                          <a:latin typeface="Malgun Gothic"/>
-                        </a:rPr>
-                        <a:t>0.09</a:t>
-                      </a:r>
-                    </a:p>
-                  </a:txBody>
-                  <a:tcPr anchor="ctr"/>
-                </a:tc>
-                <a:tc>
-                  <a:txBody>
-                    <a:bodyPr/>
-                    <a:lstStyle/>
-                    <a:p>
-                      <a:pPr algn="l"/>
-                      <a:r>
-                        <a:rPr sz="1600">
-                          <a:latin typeface="Malgun Gothic"/>
-                        </a:rPr>
-                        <a:t>2점</a:t>
-                      </a:r>
-                    </a:p>
-                  </a:txBody>
-                  <a:tcPr anchor="ctr"/>
-                </a:tc>
-              </a:tr>
-            </a:tbl>
-          </a:graphicData>
-        </a:graphic>
-      </p:graphicFrame>
-      <p:sp>
-        <p:nvSpPr>
-          <p:cNvPr id="6" name="TextBox 5"/>
-          <p:cNvSpPr txBox="1"/>
-          <p:nvPr/>
-        </p:nvSpPr>
-        <p:spPr>
-          <a:xfrm>
-            <a:off x="640080" y="4480560"/>
-            <a:ext cx="10972800" cy="4937760"/>
-          </a:xfrm>
-          <a:prstGeom prst="rect">
-            <a:avLst/>
-          </a:prstGeom>
-          <a:noFill/>
-        </p:spPr>
-        <p:txBody>
-          <a:bodyPr wrap="square">
-            <a:spAutoFit/>
-          </a:bodyPr>
-          <a:lstStyle/>
-          <a:p>
-            <a:pPr>
-              <a:spcAft>
-                <a:spcPts val="800"/>
-              </a:spcAft>
-            </a:pPr>
-            <a:r>
-              <a:rPr sz="1900" b="1">
-                <a:solidFill>
-                  <a:srgbClr val="C44E52"/>
-                </a:solidFill>
-                <a:latin typeface="Malgun Gothic"/>
-              </a:rPr>
-              <a:t>• 서울 = 0.69×1.00 + 0.14×1.00 + 0.17×0.48 = 0.91 → 91점</a:t>
-            </a:r>
-          </a:p>
-          <a:p>
-            <a:pPr>
-              <a:spcAft>
-                <a:spcPts val="800"/>
-              </a:spcAft>
-            </a:pPr>
-            <a:r>
-              <a:rPr sz="1800" b="0">
-                <a:solidFill>
-                  <a:srgbClr val="222222"/>
-                </a:solidFill>
-                <a:latin typeface="Malgun Gothic"/>
-              </a:rPr>
-              <a:t>• 강원 = 0.69×0 + 0.14×0 + 0.17×0.09 ≈ 0.02 → 2점</a:t>
-            </a:r>
-          </a:p>
-          <a:p>
-            <a:pPr lvl="1">
-              <a:spcAft>
-                <a:spcPts val="800"/>
-              </a:spcAft>
-            </a:pPr>
-            <a:r>
-              <a:rPr sz="1600" b="0">
-                <a:solidFill>
-                  <a:srgbClr val="555555"/>
-                </a:solidFill>
-                <a:latin typeface="Malgun Gothic"/>
-              </a:rPr>
-              <a:t>– 즉 LLAI = '전국에서 상대적으로 어느 위치냐'를 0~100으로</a:t>
             </a:r>
           </a:p>
         </p:txBody>
